--- a/Arquitectura de Sistemas Computacionales/Clases/Clase 13 - Escalabilidad automatica/Presentacion.pptx
+++ b/Arquitectura de Sistemas Computacionales/Clases/Clase 13 - Escalabilidad automatica/Presentacion.pptx
@@ -17,6 +17,21 @@
     <p:sldId id="265" r:id="rId16"/>
     <p:sldId id="266" r:id="rId17"/>
     <p:sldId id="267" r:id="rId18"/>
+    <p:sldId id="268" r:id="rId19"/>
+    <p:sldId id="269" r:id="rId20"/>
+    <p:sldId id="270" r:id="rId21"/>
+    <p:sldId id="271" r:id="rId22"/>
+    <p:sldId id="272" r:id="rId23"/>
+    <p:sldId id="273" r:id="rId24"/>
+    <p:sldId id="274" r:id="rId25"/>
+    <p:sldId id="275" r:id="rId26"/>
+    <p:sldId id="276" r:id="rId27"/>
+    <p:sldId id="277" r:id="rId28"/>
+    <p:sldId id="278" r:id="rId29"/>
+    <p:sldId id="279" r:id="rId30"/>
+    <p:sldId id="280" r:id="rId31"/>
+    <p:sldId id="281" r:id="rId32"/>
+    <p:sldId id="282" r:id="rId33"/>
   </p:sldIdLst>
   <p:sldSz cx="12191695" cy="6858000" type="screen4x3"/>
   <p:notesSz cx="6858000" cy="9144000"/>
@@ -3575,7 +3590,7 @@
                 </a:solidFill>
                 <a:latin typeface="Calibri"/>
               </a:rPr>
-              <a:t>Manos a la obra (paso a paso)</a:t>
+              <a:t>Ausencia de estado: donde mas estudiantes fallan (2/2)</a:t>
             </a:r>
           </a:p>
         </p:txBody>
@@ -3608,22 +3623,13 @@
               </a:spcAft>
             </a:pPr>
             <a:r>
-              <a:rPr sz="1800" b="1" i="0">
-                <a:solidFill>
-                  <a:srgbClr val="333333"/>
-                </a:solidFill>
-                <a:latin typeface="Calibri"/>
-              </a:rPr>
-              <a:t>1.</a:t>
-            </a:r>
-            <a:r>
-              <a:rPr sz="1800" b="0" i="0">
-                <a:solidFill>
-                  <a:srgbClr val="333333"/>
-                </a:solidFill>
-                <a:latin typeface="Calibri"/>
-              </a:rPr>
-              <a:t> Paso 1: tome los 5 componentes de su C4Deployment de la Clase 7 y clasifique cada uno como escala horizontal, escala vertical o no escala, verificando que al menos uno quede en no escala con justificacion tecnica, porque una politica donde todo escala no es una politica; el resultado abre la seccion Escalabilidad del informe.</a:t>
+              <a:rPr sz="2000" b="0" i="0">
+                <a:solidFill>
+                  <a:srgbClr val="333333"/>
+                </a:solidFill>
+                <a:latin typeface="Calibri"/>
+              </a:rPr>
+              <a:t>–   La solucion parcial que casi todos proponen es la sesion pegajosa, que amarra al usuario a una instancia, y hay que decir por que es un parche: si esa instancia se cae la sesion se pierde igual, y el balanceo se vuelve desigual.</a:t>
             </a:r>
           </a:p>
           <a:p>
@@ -3633,31 +3639,13 @@
               </a:spcAft>
             </a:pPr>
             <a:r>
-              <a:rPr sz="1800" b="0" i="0">
-                <a:solidFill>
-                  <a:srgbClr val="333333"/>
-                </a:solidFill>
-                <a:latin typeface="Calibri"/>
-              </a:rPr>
-              <a:t>–   </a:t>
-            </a:r>
-            <a:r>
-              <a:rPr sz="1800" b="1" i="0">
-                <a:solidFill>
-                  <a:srgbClr val="333333"/>
-                </a:solidFill>
-                <a:latin typeface="Calibri"/>
-              </a:rPr>
-              <a:t>2.</a:t>
-            </a:r>
-            <a:r>
-              <a:rPr sz="1800" b="0" i="0">
-                <a:solidFill>
-                  <a:srgbClr val="333333"/>
-                </a:solidFill>
-                <a:latin typeface="Calibri"/>
-              </a:rPr>
-              <a:t> Paso 2: complete la tabla de politica de escalado con 6 columnas y 5 filas (componente, tipo de escala, disparador de subida, disparador de bajada, minimo y maximo, tiempo de enfriamiento), verificando que cada disparador tenga metrica, umbral numerico y ventana de tiempo, y que ningun maximo quede en infinito o sin definir.</a:t>
+              <a:rPr sz="2000" b="0" i="0">
+                <a:solidFill>
+                  <a:srgbClr val="333333"/>
+                </a:solidFill>
+                <a:latin typeface="Calibri"/>
+              </a:rPr>
+              <a:t>–   La solucion arquitectonica es sacar el estado del proceso: guardar la sesion en un almacen compartido o usar un token firmado que el cliente presenta en cada peticion.</a:t>
             </a:r>
           </a:p>
           <a:p>
@@ -3667,99 +3655,13 @@
               </a:spcAft>
             </a:pPr>
             <a:r>
-              <a:rPr sz="1800" b="0" i="0">
-                <a:solidFill>
-                  <a:srgbClr val="333333"/>
-                </a:solidFill>
-                <a:latin typeface="Calibri"/>
-              </a:rPr>
-              <a:t>–   </a:t>
-            </a:r>
-            <a:r>
-              <a:rPr sz="1800" b="1" i="0">
-                <a:solidFill>
-                  <a:srgbClr val="333333"/>
-                </a:solidFill>
-                <a:latin typeface="Calibri"/>
-              </a:rPr>
-              <a:t>3.</a:t>
-            </a:r>
-            <a:r>
-              <a:rPr sz="1800" b="0" i="0">
-                <a:solidFill>
-                  <a:srgbClr val="333333"/>
-                </a:solidFill>
-                <a:latin typeface="Calibri"/>
-              </a:rPr>
-              <a:t> Paso 3: escriba en la plataforma del curso el diagrama Mermaid de la maquina de decision del autoescalado con el nodo de observacion, los dos rombos de decision, las acciones de subida y bajada, el enfriamiento y el nodo de lo que no escala, verificando al renderizar que el ciclo se cierre sobre el nodo de observacion y que los umbrales del diagrama sean los mismos numeros de la tabla.</a:t>
-            </a:r>
-          </a:p>
-          <a:p>
-            <a:pPr>
-              <a:spcAft>
-                <a:spcPts val="800"/>
-              </a:spcAft>
-            </a:pPr>
-            <a:r>
-              <a:rPr sz="1800" b="0" i="0">
-                <a:solidFill>
-                  <a:srgbClr val="333333"/>
-                </a:solidFill>
-                <a:latin typeface="Calibri"/>
-              </a:rPr>
-              <a:t>–   </a:t>
-            </a:r>
-            <a:r>
-              <a:rPr sz="1800" b="1" i="0">
-                <a:solidFill>
-                  <a:srgbClr val="333333"/>
-                </a:solidFill>
-                <a:latin typeface="Calibri"/>
-              </a:rPr>
-              <a:t>4.</a:t>
-            </a:r>
-            <a:r>
-              <a:rPr sz="1800" b="0" i="0">
-                <a:solidFill>
-                  <a:srgbClr val="333333"/>
-                </a:solidFill>
-                <a:latin typeface="Calibri"/>
-              </a:rPr>
-              <a:t> Paso 4: escriba los 3 componentes que NO escalan con su justificacion tecnica y su plan alterno, y la tabla de impacto en costos que enlaza con la Clase 10, verificando que cada plan alterno sea ejecutable sin cloud de pago y que el impacto de costo use los mismos niveles bajo, medio o alto de la seccion de costos.</a:t>
-            </a:r>
-          </a:p>
-          <a:p>
-            <a:pPr>
-              <a:spcAft>
-                <a:spcPts val="800"/>
-              </a:spcAft>
-            </a:pPr>
-            <a:r>
-              <a:rPr sz="1800" b="0" i="0">
-                <a:solidFill>
-                  <a:srgbClr val="333333"/>
-                </a:solidFill>
-                <a:latin typeface="Calibri"/>
-              </a:rPr>
-              <a:t>–   </a:t>
-            </a:r>
-            <a:r>
-              <a:rPr sz="1800" b="1" i="0">
-                <a:solidFill>
-                  <a:srgbClr val="333333"/>
-                </a:solidFill>
-                <a:latin typeface="Calibri"/>
-              </a:rPr>
-              <a:t>5.</a:t>
-            </a:r>
-            <a:r>
-              <a:rPr sz="1800" b="0" i="0">
-                <a:solidFill>
-                  <a:srgbClr val="333333"/>
-                </a:solidFill>
-                <a:latin typeface="Calibri"/>
-              </a:rPr>
-              <a:t> Paso 5: integre la politica en la seccion Escalabilidad del informe, anote la marca de replicas en el diagrama de despliegue si aplica y suba las 5 preguntas a la plataforma del curso (modulo Talleres) antes del en la fecha que indique el docente, verificando que la politica no prometa nada que la arquitectura dibujada no pueda cumplir.</a:t>
+              <a:rPr sz="2000" b="0" i="0">
+                <a:solidFill>
+                  <a:srgbClr val="333333"/>
+                </a:solidFill>
+                <a:latin typeface="Calibri"/>
+              </a:rPr>
+              <a:t>–   Lo mismo aplica a los archivos subidos de CloudLite: si se escriben en el disco local del contenedor, la mitad de las descargas fallara porque el archivo esta en la otra instancia, y por eso van a almacenamiento de objetos, que fue la decision de la Clase 7.</a:t>
             </a:r>
           </a:p>
         </p:txBody>
@@ -3940,109 +3842,21 @@
                 </a:solidFill>
                 <a:latin typeface="Calibri"/>
               </a:rPr>
-              <a:t>Para continuar (PI)</a:t>
-            </a:r>
-          </a:p>
-        </p:txBody>
-      </p:sp>
-      <p:sp>
-        <p:nvSpPr>
-          <p:cNvPr id="5" name="Rounded Rectangle 4"/>
-          <p:cNvSpPr/>
-          <p:nvPr/>
-        </p:nvSpPr>
-        <p:spPr>
-          <a:xfrm>
-            <a:off x="457200" y="1261872"/>
-            <a:ext cx="11277295" cy="1051560"/>
-          </a:xfrm>
-          <a:prstGeom prst="roundRect">
-            <a:avLst>
-              <a:gd name="adj" fmla="val 12000"/>
-            </a:avLst>
-          </a:prstGeom>
-          <a:solidFill>
-            <a:srgbClr val="E8F4FA"/>
-          </a:solidFill>
-          <a:ln>
-            <a:noFill/>
-          </a:ln>
-        </p:spPr>
-        <p:style>
-          <a:lnRef idx="1">
-            <a:schemeClr val="accent1"/>
-          </a:lnRef>
-          <a:fillRef idx="3">
-            <a:schemeClr val="accent1"/>
-          </a:fillRef>
-          <a:effectRef idx="2">
-            <a:schemeClr val="accent1"/>
-          </a:effectRef>
-          <a:fontRef idx="minor">
-            <a:schemeClr val="lt1"/>
-          </a:fontRef>
-        </p:style>
-        <p:txBody>
-          <a:bodyPr rtlCol="0" anchor="ctr"/>
-          <a:lstStyle/>
-          <a:p>
-            <a:pPr algn="ctr"/>
-          </a:p>
-        </p:txBody>
-      </p:sp>
-      <p:sp>
-        <p:nvSpPr>
-          <p:cNvPr id="6" name="Rectangle 5"/>
-          <p:cNvSpPr/>
-          <p:nvPr/>
-        </p:nvSpPr>
-        <p:spPr>
-          <a:xfrm>
-            <a:off x="457200" y="1261872"/>
-            <a:ext cx="128016" cy="1051560"/>
-          </a:xfrm>
-          <a:prstGeom prst="rect">
-            <a:avLst/>
-          </a:prstGeom>
-          <a:solidFill>
-            <a:srgbClr val="269CCB"/>
-          </a:solidFill>
-          <a:ln>
-            <a:noFill/>
-          </a:ln>
-        </p:spPr>
-        <p:style>
-          <a:lnRef idx="1">
-            <a:schemeClr val="accent1"/>
-          </a:lnRef>
-          <a:fillRef idx="3">
-            <a:schemeClr val="accent1"/>
-          </a:fillRef>
-          <a:effectRef idx="2">
-            <a:schemeClr val="accent1"/>
-          </a:effectRef>
-          <a:fontRef idx="minor">
-            <a:schemeClr val="lt1"/>
-          </a:fontRef>
-        </p:style>
-        <p:txBody>
-          <a:bodyPr rtlCol="0" anchor="ctr"/>
-          <a:lstStyle/>
-          <a:p>
-            <a:pPr algn="ctr"/>
-          </a:p>
-        </p:txBody>
-      </p:sp>
-      <p:sp>
-        <p:nvSpPr>
-          <p:cNvPr id="7" name="TextBox 6"/>
+              <a:t>Las cinco piezas que el entregable debe nombrar (1/2)</a:t>
+            </a:r>
+          </a:p>
+        </p:txBody>
+      </p:sp>
+      <p:sp>
+        <p:nvSpPr>
+          <p:cNvPr id="5" name="TextBox 4"/>
           <p:cNvSpPr txBox="1"/>
           <p:nvPr/>
         </p:nvSpPr>
         <p:spPr>
           <a:xfrm>
-            <a:off x="777240" y="1399031"/>
-            <a:ext cx="10774375" cy="822959"/>
+            <a:off x="457200" y="1170432"/>
+            <a:ext cx="11277295" cy="5230368"/>
           </a:xfrm>
           <a:prstGeom prst="rect">
             <a:avLst/>
@@ -4055,313 +3869,122 @@
           </a:bodyPr>
           <a:lstStyle/>
           <a:p>
-            <a:r>
-              <a:rPr sz="1200" b="1" i="0">
-                <a:solidFill>
-                  <a:srgbClr val="269CCB"/>
-                </a:solidFill>
-                <a:latin typeface="Calibri"/>
-              </a:rPr>
-              <a:t>Info</a:t>
-            </a:r>
-          </a:p>
-          <a:p>
             <a:pPr>
-              <a:spcBef>
-                <a:spcPts val="400"/>
-              </a:spcBef>
+              <a:spcAft>
+                <a:spcPts val="800"/>
+              </a:spcAft>
             </a:pPr>
             <a:r>
-              <a:rPr sz="1400" b="0" i="0">
-                <a:solidFill>
-                  <a:srgbClr val="333333"/>
-                </a:solidFill>
-                <a:latin typeface="Calibri"/>
-              </a:rPr>
-              <a:t>Entregable: Sección Escalabilidad: triggers, límites, qué escala y qué no</a:t>
-            </a:r>
-          </a:p>
-        </p:txBody>
-      </p:sp>
-      <p:sp>
-        <p:nvSpPr>
-          <p:cNvPr id="8" name="Rounded Rectangle 7"/>
-          <p:cNvSpPr/>
-          <p:nvPr/>
-        </p:nvSpPr>
-        <p:spPr>
-          <a:xfrm>
-            <a:off x="457200" y="2478024"/>
-            <a:ext cx="11277295" cy="1051560"/>
-          </a:xfrm>
-          <a:prstGeom prst="roundRect">
-            <a:avLst>
-              <a:gd name="adj" fmla="val 12000"/>
-            </a:avLst>
-          </a:prstGeom>
-          <a:solidFill>
-            <a:srgbClr val="FFF8E1"/>
-          </a:solidFill>
-          <a:ln>
-            <a:noFill/>
-          </a:ln>
-        </p:spPr>
-        <p:style>
-          <a:lnRef idx="1">
-            <a:schemeClr val="accent1"/>
-          </a:lnRef>
-          <a:fillRef idx="3">
-            <a:schemeClr val="accent1"/>
-          </a:fillRef>
-          <a:effectRef idx="2">
-            <a:schemeClr val="accent1"/>
-          </a:effectRef>
-          <a:fontRef idx="minor">
-            <a:schemeClr val="lt1"/>
-          </a:fontRef>
-        </p:style>
-        <p:txBody>
-          <a:bodyPr rtlCol="0" anchor="ctr"/>
-          <a:lstStyle/>
-          <a:p>
-            <a:pPr algn="ctr"/>
-          </a:p>
-        </p:txBody>
-      </p:sp>
-      <p:sp>
-        <p:nvSpPr>
-          <p:cNvPr id="9" name="Rectangle 8"/>
-          <p:cNvSpPr/>
-          <p:nvPr/>
-        </p:nvSpPr>
-        <p:spPr>
-          <a:xfrm>
-            <a:off x="457200" y="2478024"/>
-            <a:ext cx="128016" cy="1051560"/>
-          </a:xfrm>
-          <a:prstGeom prst="rect">
-            <a:avLst/>
-          </a:prstGeom>
-          <a:solidFill>
-            <a:srgbClr val="FFD000"/>
-          </a:solidFill>
-          <a:ln>
-            <a:noFill/>
-          </a:ln>
-        </p:spPr>
-        <p:style>
-          <a:lnRef idx="1">
-            <a:schemeClr val="accent1"/>
-          </a:lnRef>
-          <a:fillRef idx="3">
-            <a:schemeClr val="accent1"/>
-          </a:fillRef>
-          <a:effectRef idx="2">
-            <a:schemeClr val="accent1"/>
-          </a:effectRef>
-          <a:fontRef idx="minor">
-            <a:schemeClr val="lt1"/>
-          </a:fontRef>
-        </p:style>
-        <p:txBody>
-          <a:bodyPr rtlCol="0" anchor="ctr"/>
-          <a:lstStyle/>
-          <a:p>
-            <a:pPr algn="ctr"/>
-          </a:p>
-        </p:txBody>
-      </p:sp>
-      <p:sp>
-        <p:nvSpPr>
-          <p:cNvPr id="10" name="TextBox 9"/>
-          <p:cNvSpPr txBox="1"/>
-          <p:nvPr/>
-        </p:nvSpPr>
-        <p:spPr>
-          <a:xfrm>
-            <a:off x="777240" y="2615184"/>
-            <a:ext cx="10774375" cy="822959"/>
-          </a:xfrm>
-          <a:prstGeom prst="rect">
-            <a:avLst/>
-          </a:prstGeom>
-          <a:noFill/>
-        </p:spPr>
-        <p:txBody>
-          <a:bodyPr wrap="square">
-            <a:spAutoFit/>
-          </a:bodyPr>
-          <a:lstStyle/>
-          <a:p>
-            <a:r>
-              <a:rPr sz="1200" b="1" i="0">
-                <a:solidFill>
-                  <a:srgbClr val="FFD000"/>
-                </a:solidFill>
-                <a:latin typeface="Calibri"/>
-              </a:rPr>
-              <a:t>Aclaración</a:t>
+              <a:rPr sz="2000" b="0" i="0">
+                <a:solidFill>
+                  <a:srgbClr val="333333"/>
+                </a:solidFill>
+                <a:latin typeface="Calibri"/>
+              </a:rPr>
+              <a:t>–   El autoescalado es la automatizacion del escalado horizontal y consta de cinco piezas que el entregable debe nombrar: una metrica que se observa, un umbral que dispara la accion</a:t>
             </a:r>
           </a:p>
           <a:p>
             <a:pPr>
-              <a:spcBef>
-                <a:spcPts val="400"/>
-              </a:spcBef>
+              <a:spcAft>
+                <a:spcPts val="800"/>
+              </a:spcAft>
             </a:pPr>
             <a:r>
-              <a:rPr sz="1400" b="0" i="0">
-                <a:solidFill>
-                  <a:srgbClr val="333333"/>
-                </a:solidFill>
-                <a:latin typeface="Calibri"/>
-              </a:rPr>
-              <a:t>Subir evidencias al paquete CloudLite (Drive/repo) y a la plataforma del curso en la fecha que indique el docente.</a:t>
-            </a:r>
-          </a:p>
-        </p:txBody>
-      </p:sp>
-      <p:sp>
-        <p:nvSpPr>
-          <p:cNvPr id="11" name="Rounded Rectangle 10"/>
-          <p:cNvSpPr/>
-          <p:nvPr/>
-        </p:nvSpPr>
-        <p:spPr>
-          <a:xfrm>
-            <a:off x="457200" y="3694176"/>
-            <a:ext cx="11277295" cy="1051560"/>
-          </a:xfrm>
-          <a:prstGeom prst="roundRect">
-            <a:avLst>
-              <a:gd name="adj" fmla="val 12000"/>
-            </a:avLst>
-          </a:prstGeom>
-          <a:solidFill>
-            <a:srgbClr val="FBE4E4"/>
-          </a:solidFill>
-          <a:ln>
-            <a:noFill/>
-          </a:ln>
-        </p:spPr>
-        <p:style>
-          <a:lnRef idx="1">
-            <a:schemeClr val="accent1"/>
-          </a:lnRef>
-          <a:fillRef idx="3">
-            <a:schemeClr val="accent1"/>
-          </a:fillRef>
-          <a:effectRef idx="2">
-            <a:schemeClr val="accent1"/>
-          </a:effectRef>
-          <a:fontRef idx="minor">
-            <a:schemeClr val="lt1"/>
-          </a:fontRef>
-        </p:style>
-        <p:txBody>
-          <a:bodyPr rtlCol="0" anchor="ctr"/>
-          <a:lstStyle/>
-          <a:p>
-            <a:pPr algn="ctr"/>
-          </a:p>
-        </p:txBody>
-      </p:sp>
-      <p:sp>
-        <p:nvSpPr>
-          <p:cNvPr id="12" name="Rectangle 11"/>
-          <p:cNvSpPr/>
-          <p:nvPr/>
-        </p:nvSpPr>
-        <p:spPr>
-          <a:xfrm>
-            <a:off x="457200" y="3694176"/>
-            <a:ext cx="128016" cy="1051560"/>
-          </a:xfrm>
-          <a:prstGeom prst="rect">
-            <a:avLst/>
-          </a:prstGeom>
-          <a:solidFill>
-            <a:srgbClr val="A02030"/>
-          </a:solidFill>
-          <a:ln>
-            <a:noFill/>
-          </a:ln>
-        </p:spPr>
-        <p:style>
-          <a:lnRef idx="1">
-            <a:schemeClr val="accent1"/>
-          </a:lnRef>
-          <a:fillRef idx="3">
-            <a:schemeClr val="accent1"/>
-          </a:fillRef>
-          <a:effectRef idx="2">
-            <a:schemeClr val="accent1"/>
-          </a:effectRef>
-          <a:fontRef idx="minor">
-            <a:schemeClr val="lt1"/>
-          </a:fontRef>
-        </p:style>
-        <p:txBody>
-          <a:bodyPr rtlCol="0" anchor="ctr"/>
-          <a:lstStyle/>
-          <a:p>
-            <a:pPr algn="ctr"/>
-          </a:p>
-        </p:txBody>
-      </p:sp>
-      <p:sp>
-        <p:nvSpPr>
-          <p:cNvPr id="13" name="TextBox 12"/>
-          <p:cNvSpPr txBox="1"/>
-          <p:nvPr/>
-        </p:nvSpPr>
-        <p:spPr>
-          <a:xfrm>
-            <a:off x="777240" y="3831336"/>
-            <a:ext cx="10774375" cy="822959"/>
-          </a:xfrm>
-          <a:prstGeom prst="rect">
-            <a:avLst/>
-          </a:prstGeom>
-          <a:noFill/>
-        </p:spPr>
-        <p:txBody>
-          <a:bodyPr wrap="square">
-            <a:spAutoFit/>
-          </a:bodyPr>
-          <a:lstStyle/>
-          <a:p>
-            <a:r>
-              <a:rPr sz="1200" b="1" i="0">
-                <a:solidFill>
-                  <a:srgbClr val="A02030"/>
-                </a:solidFill>
-                <a:latin typeface="Calibri"/>
-              </a:rPr>
-              <a:t>Atención</a:t>
+              <a:rPr sz="2000" b="0" i="0">
+                <a:solidFill>
+                  <a:srgbClr val="333333"/>
+                </a:solidFill>
+                <a:latin typeface="Calibri"/>
+              </a:rPr>
+              <a:t>–   Un periodo de evaluacion durante el cual el umbral debe sostenerse, un enfriamiento o cooldown que impide actuar de nuevo de inmediato, y un rango con minimo y maximo de instancias.</a:t>
             </a:r>
           </a:p>
           <a:p>
             <a:pPr>
-              <a:spcBef>
-                <a:spcPts val="400"/>
-              </a:spcBef>
+              <a:spcAft>
+                <a:spcPts val="800"/>
+              </a:spcAft>
             </a:pPr>
             <a:r>
-              <a:rPr sz="1400" b="0" i="0">
-                <a:solidFill>
-                  <a:srgbClr val="333333"/>
-                </a:solidFill>
-                <a:latin typeface="Calibri"/>
-              </a:rPr>
-              <a:t>Sin cloud de pago ni instalaciones obligatorias de hipervisores/Docker Desktop.</a:t>
-            </a:r>
-          </a:p>
-        </p:txBody>
-      </p:sp>
-      <p:sp>
-        <p:nvSpPr>
-          <p:cNvPr id="14" name="TextBox 13"/>
+              <a:rPr sz="2000" b="0" i="0">
+                <a:solidFill>
+                  <a:srgbClr val="333333"/>
+                </a:solidFill>
+                <a:latin typeface="Calibri"/>
+              </a:rPr>
+              <a:t>–   Una politica completa para CloudLite se lee asi: metrica CPU promedio del grupo de instancias de la API, umbral 70 por ciento sostenido durante 5 minutos, accion agregar una instancia, cooldown de 5 minutos, minimo 2 y maximo 6.</a:t>
+            </a:r>
+          </a:p>
+          <a:p>
+            <a:pPr>
+              <a:spcAft>
+                <a:spcPts val="800"/>
+              </a:spcAft>
+            </a:pPr>
+            <a:r>
+              <a:rPr sz="2000" b="0" i="0">
+                <a:solidFill>
+                  <a:srgbClr val="333333"/>
+                </a:solidFill>
+                <a:latin typeface="Calibri"/>
+              </a:rPr>
+              <a:t>–   Cada numero se justifica.</a:t>
+            </a:r>
+          </a:p>
+          <a:p>
+            <a:pPr>
+              <a:spcAft>
+                <a:spcPts val="800"/>
+              </a:spcAft>
+            </a:pPr>
+            <a:r>
+              <a:rPr sz="2000" b="0" i="0">
+                <a:solidFill>
+                  <a:srgbClr val="333333"/>
+                </a:solidFill>
+                <a:latin typeface="Calibri"/>
+              </a:rPr>
+              <a:t>–   El 70 por ciento deja holgura para el pico que llega mientras la instancia nueva arranca.</a:t>
+            </a:r>
+          </a:p>
+          <a:p>
+            <a:pPr>
+              <a:spcAft>
+                <a:spcPts val="800"/>
+              </a:spcAft>
+            </a:pPr>
+            <a:r>
+              <a:rPr sz="2000" b="0" i="0">
+                <a:solidFill>
+                  <a:srgbClr val="333333"/>
+                </a:solidFill>
+                <a:latin typeface="Calibri"/>
+              </a:rPr>
+              <a:t>–   Los 5 minutos evitan reaccionar a un ruido de 20 segundos.</a:t>
+            </a:r>
+          </a:p>
+          <a:p>
+            <a:pPr>
+              <a:spcAft>
+                <a:spcPts val="800"/>
+              </a:spcAft>
+            </a:pPr>
+            <a:r>
+              <a:rPr sz="2000" b="0" i="0">
+                <a:solidFill>
+                  <a:srgbClr val="333333"/>
+                </a:solidFill>
+                <a:latin typeface="Calibri"/>
+              </a:rPr>
+              <a:t>–   El minimo es 2 y no 1 porque con una sola instancia no hay tolerancia a fallas ni despliegue sin caida.</a:t>
+            </a:r>
+          </a:p>
+        </p:txBody>
+      </p:sp>
+      <p:sp>
+        <p:nvSpPr>
+          <p:cNvPr id="6" name="TextBox 5"/>
           <p:cNvSpPr txBox="1"/>
           <p:nvPr/>
         </p:nvSpPr>
@@ -4429,13 +4052,13 @@
         <p:spPr>
           <a:xfrm>
             <a:off x="0" y="0"/>
-            <a:ext cx="12191695" cy="164592"/>
+            <a:ext cx="12191695" cy="960120"/>
           </a:xfrm>
           <a:prstGeom prst="rect">
             <a:avLst/>
           </a:prstGeom>
           <a:solidFill>
-            <a:srgbClr val="269CCB"/>
+            <a:srgbClr val="095292"/>
           </a:solidFill>
           <a:ln>
             <a:noFill/>
@@ -4463,30 +4086,49 @@
           </a:p>
         </p:txBody>
       </p:sp>
-      <p:pic>
-        <p:nvPicPr>
-          <p:cNvPr id="3" name="Picture 2" descr="logo_uniajc_color.png"/>
-          <p:cNvPicPr>
-            <a:picLocks noChangeAspect="1"/>
-          </p:cNvPicPr>
-          <p:nvPr/>
-        </p:nvPicPr>
-        <p:blipFill>
-          <a:blip r:embed="rId2"/>
-          <a:stretch>
-            <a:fillRect/>
-          </a:stretch>
-        </p:blipFill>
-        <p:spPr>
-          <a:xfrm>
-            <a:off x="10271455" y="5998464"/>
-            <a:ext cx="1463040" cy="643233"/>
-          </a:xfrm>
-          <a:prstGeom prst="rect">
-            <a:avLst/>
-          </a:prstGeom>
-        </p:spPr>
-      </p:pic>
+      <p:sp>
+        <p:nvSpPr>
+          <p:cNvPr id="3" name="Rectangle 2"/>
+          <p:cNvSpPr/>
+          <p:nvPr/>
+        </p:nvSpPr>
+        <p:spPr>
+          <a:xfrm>
+            <a:off x="0" y="960120"/>
+            <a:ext cx="12191695" cy="41148"/>
+          </a:xfrm>
+          <a:prstGeom prst="rect">
+            <a:avLst/>
+          </a:prstGeom>
+          <a:solidFill>
+            <a:srgbClr val="FFD000"/>
+          </a:solidFill>
+          <a:ln>
+            <a:noFill/>
+          </a:ln>
+        </p:spPr>
+        <p:style>
+          <a:lnRef idx="1">
+            <a:schemeClr val="accent1"/>
+          </a:lnRef>
+          <a:fillRef idx="3">
+            <a:schemeClr val="accent1"/>
+          </a:fillRef>
+          <a:effectRef idx="2">
+            <a:schemeClr val="accent1"/>
+          </a:effectRef>
+          <a:fontRef idx="minor">
+            <a:schemeClr val="lt1"/>
+          </a:fontRef>
+        </p:style>
+        <p:txBody>
+          <a:bodyPr rtlCol="0" anchor="ctr"/>
+          <a:lstStyle/>
+          <a:p>
+            <a:pPr algn="ctr"/>
+          </a:p>
+        </p:txBody>
+      </p:sp>
       <p:sp>
         <p:nvSpPr>
           <p:cNvPr id="4" name="TextBox 3"/>
@@ -4495,41 +4137,8 @@
         </p:nvSpPr>
         <p:spPr>
           <a:xfrm>
-            <a:off x="457200" y="1737360"/>
-            <a:ext cx="11277295" cy="1097280"/>
-          </a:xfrm>
-          <a:prstGeom prst="rect">
-            <a:avLst/>
-          </a:prstGeom>
-          <a:noFill/>
-        </p:spPr>
-        <p:txBody>
-          <a:bodyPr wrap="square" anchor="ctr"/>
-          <a:lstStyle/>
-          <a:p>
-            <a:pPr algn="ctr"/>
-            <a:r>
-              <a:rPr sz="3400" b="1" i="0">
-                <a:solidFill>
-                  <a:srgbClr val="095292"/>
-                </a:solidFill>
-                <a:latin typeface="Calibri"/>
-              </a:rPr>
-              <a:t>Clase 13 · PI en movimiento</a:t>
-            </a:r>
-          </a:p>
-        </p:txBody>
-      </p:sp>
-      <p:sp>
-        <p:nvSpPr>
-          <p:cNvPr id="5" name="TextBox 4"/>
-          <p:cNvSpPr txBox="1"/>
-          <p:nvPr/>
-        </p:nvSpPr>
-        <p:spPr>
-          <a:xfrm>
-            <a:off x="457200" y="3017520"/>
-            <a:ext cx="11277295" cy="1645920"/>
+            <a:off x="457200" y="164592"/>
+            <a:ext cx="11277295" cy="502920"/>
           </a:xfrm>
           <a:prstGeom prst="rect">
             <a:avLst/>
@@ -4542,65 +4151,28 @@
           </a:bodyPr>
           <a:lstStyle/>
           <a:p>
-            <a:pPr algn="ctr">
-              <a:spcAft>
-                <a:spcPts val="600"/>
-              </a:spcAft>
-            </a:pPr>
-            <a:r>
-              <a:rPr sz="1600" b="0" i="0">
-                <a:solidFill>
-                  <a:srgbClr val="333333"/>
-                </a:solidFill>
-                <a:latin typeface="Calibri"/>
-              </a:rPr>
-              <a:t>Documentar política de autoescalado conceptual de CloudLite</a:t>
-            </a:r>
-          </a:p>
-          <a:p>
-            <a:pPr algn="ctr">
-              <a:spcAft>
-                <a:spcPts val="600"/>
-              </a:spcAft>
-            </a:pPr>
-            <a:r>
-              <a:rPr sz="1600" b="0" i="0">
-                <a:solidFill>
-                  <a:srgbClr val="333333"/>
-                </a:solidFill>
-                <a:latin typeface="Calibri"/>
-              </a:rPr>
-              <a:t>Evidencia: Sección Escalabilidad: triggers, límites, qué escala y qué no</a:t>
-            </a:r>
-          </a:p>
-          <a:p>
-            <a:pPr algn="ctr">
-              <a:spcAft>
-                <a:spcPts val="600"/>
-              </a:spcAft>
-            </a:pPr>
-            <a:r>
-              <a:rPr sz="1600" b="0" i="0">
-                <a:solidFill>
-                  <a:srgbClr val="333333"/>
-                </a:solidFill>
-                <a:latin typeface="Calibri"/>
-              </a:rPr>
-              <a:t>Siguiente paso = siguiente hito del PI CloudLite</a:t>
-            </a:r>
-          </a:p>
-        </p:txBody>
-      </p:sp>
-      <p:sp>
-        <p:nvSpPr>
-          <p:cNvPr id="6" name="TextBox 5"/>
+            <a:r>
+              <a:rPr sz="2600" b="1" i="0">
+                <a:solidFill>
+                  <a:srgbClr val="FFFFFF"/>
+                </a:solidFill>
+                <a:latin typeface="Calibri"/>
+              </a:rPr>
+              <a:t>Las cinco piezas que el entregable debe nombrar (2/2)</a:t>
+            </a:r>
+          </a:p>
+        </p:txBody>
+      </p:sp>
+      <p:sp>
+        <p:nvSpPr>
+          <p:cNvPr id="5" name="TextBox 4"/>
           <p:cNvSpPr txBox="1"/>
           <p:nvPr/>
         </p:nvSpPr>
         <p:spPr>
           <a:xfrm>
-            <a:off x="457200" y="4754880"/>
-            <a:ext cx="11277295" cy="640080"/>
+            <a:off x="457200" y="1170432"/>
+            <a:ext cx="11277295" cy="5230368"/>
           </a:xfrm>
           <a:prstGeom prst="rect">
             <a:avLst/>
@@ -4613,15 +4185,2170 @@
           </a:bodyPr>
           <a:lstStyle/>
           <a:p>
+            <a:pPr>
+              <a:spcAft>
+                <a:spcPts val="800"/>
+              </a:spcAft>
+            </a:pPr>
+            <a:r>
+              <a:rPr sz="2000" b="0" i="0">
+                <a:solidFill>
+                  <a:srgbClr val="333333"/>
+                </a:solidFill>
+                <a:latin typeface="Calibri"/>
+              </a:rPr>
+              <a:t>–   Y el maximo es la pieza mas olvidada y la mas importante: es el techo de costo decidido en la Clase 10</a:t>
+            </a:r>
+          </a:p>
+          <a:p>
+            <a:pPr>
+              <a:spcAft>
+                <a:spcPts val="800"/>
+              </a:spcAft>
+            </a:pPr>
+            <a:r>
+              <a:rPr sz="2000" b="0" i="0">
+                <a:solidFill>
+                  <a:srgbClr val="333333"/>
+                </a:solidFill>
+                <a:latin typeface="Calibri"/>
+              </a:rPr>
+              <a:t>–   Y sin el, un error de programacion o un ataque puede escalar la factura sin limite; hay casos documentados de facturas de miles de dolares generadas en horas por autoescalado sin tope.</a:t>
+            </a:r>
+          </a:p>
+          <a:p>
+            <a:pPr>
+              <a:spcAft>
+                <a:spcPts val="800"/>
+              </a:spcAft>
+            </a:pPr>
+            <a:r>
+              <a:rPr sz="2000" b="0" i="0">
+                <a:solidFill>
+                  <a:srgbClr val="333333"/>
+                </a:solidFill>
+                <a:latin typeface="Calibri"/>
+              </a:rPr>
+              <a:t>–   Falta una simetria que casi nadie escribe: la politica de reduccion.</a:t>
+            </a:r>
+          </a:p>
+          <a:p>
+            <a:pPr>
+              <a:spcAft>
+                <a:spcPts val="800"/>
+              </a:spcAft>
+            </a:pPr>
+            <a:r>
+              <a:rPr sz="2000" b="0" i="0">
+                <a:solidFill>
+                  <a:srgbClr val="333333"/>
+                </a:solidFill>
+                <a:latin typeface="Calibri"/>
+              </a:rPr>
+              <a:t>–   Si se escala hacia afuera al 70 por ciento no se puede escalar hacia adentro tambien al 70, porque el sistema oscilaria agregando y quitando instancias sin parar, fenomeno llamado flapping.</a:t>
+            </a:r>
+          </a:p>
+          <a:p>
+            <a:pPr>
+              <a:spcAft>
+                <a:spcPts val="800"/>
+              </a:spcAft>
+            </a:pPr>
+            <a:r>
+              <a:rPr sz="2000" b="0" i="0">
+                <a:solidFill>
+                  <a:srgbClr val="333333"/>
+                </a:solidFill>
+                <a:latin typeface="Calibri"/>
+              </a:rPr>
+              <a:t>–   La convencion es usar umbrales asimetricos, por ejemplo salir al 70 y entrar al 30, y hacer la reduccion mas lenta que la expansion, porque equivocarse agregando cuesta dinero y equivocarse quitando cuesta una caida.</a:t>
+            </a:r>
+          </a:p>
+        </p:txBody>
+      </p:sp>
+      <p:sp>
+        <p:nvSpPr>
+          <p:cNvPr id="6" name="TextBox 5"/>
+          <p:cNvSpPr txBox="1"/>
+          <p:nvPr/>
+        </p:nvSpPr>
+        <p:spPr>
+          <a:xfrm>
+            <a:off x="11185855" y="6473952"/>
+            <a:ext cx="640080" cy="274320"/>
+          </a:xfrm>
+          <a:prstGeom prst="rect">
+            <a:avLst/>
+          </a:prstGeom>
+          <a:noFill/>
+        </p:spPr>
+        <p:txBody>
+          <a:bodyPr wrap="square">
+            <a:spAutoFit/>
+          </a:bodyPr>
+          <a:lstStyle/>
+          <a:p>
+            <a:pPr algn="r"/>
+            <a:r>
+              <a:rPr sz="1100" b="0" i="0">
+                <a:solidFill>
+                  <a:srgbClr val="666666"/>
+                </a:solidFill>
+                <a:latin typeface="Calibri"/>
+              </a:rPr>
+              <a:t>12</a:t>
+            </a:r>
+          </a:p>
+        </p:txBody>
+      </p:sp>
+    </p:spTree>
+  </p:cSld>
+  <p:clrMapOvr>
+    <a:masterClrMapping/>
+  </p:clrMapOvr>
+</p:sld>
+</file>
+
+<file path=ppt/slides/slide13.xml><?xml version="1.0" encoding="utf-8"?>
+<p:sld xmlns:a="http://schemas.openxmlformats.org/drawingml/2006/main" xmlns:p="http://schemas.openxmlformats.org/presentationml/2006/main" xmlns:r="http://schemas.openxmlformats.org/officeDocument/2006/relationships">
+  <p:cSld>
+    <p:bg>
+      <p:bgPr>
+        <a:solidFill>
+          <a:srgbClr val="FFFFFF"/>
+        </a:solidFill>
+        <a:effectLst/>
+      </p:bgPr>
+    </p:bg>
+    <p:spTree>
+      <p:nvGrpSpPr>
+        <p:cNvPr id="1" name=""/>
+        <p:cNvGrpSpPr/>
+        <p:nvPr/>
+      </p:nvGrpSpPr>
+      <p:grpSpPr/>
+      <p:sp>
+        <p:nvSpPr>
+          <p:cNvPr id="2" name="Rectangle 1"/>
+          <p:cNvSpPr/>
+          <p:nvPr/>
+        </p:nvSpPr>
+        <p:spPr>
+          <a:xfrm>
+            <a:off x="0" y="0"/>
+            <a:ext cx="12191695" cy="960120"/>
+          </a:xfrm>
+          <a:prstGeom prst="rect">
+            <a:avLst/>
+          </a:prstGeom>
+          <a:solidFill>
+            <a:srgbClr val="095292"/>
+          </a:solidFill>
+          <a:ln>
+            <a:noFill/>
+          </a:ln>
+        </p:spPr>
+        <p:style>
+          <a:lnRef idx="1">
+            <a:schemeClr val="accent1"/>
+          </a:lnRef>
+          <a:fillRef idx="3">
+            <a:schemeClr val="accent1"/>
+          </a:fillRef>
+          <a:effectRef idx="2">
+            <a:schemeClr val="accent1"/>
+          </a:effectRef>
+          <a:fontRef idx="minor">
+            <a:schemeClr val="lt1"/>
+          </a:fontRef>
+        </p:style>
+        <p:txBody>
+          <a:bodyPr rtlCol="0" anchor="ctr"/>
+          <a:lstStyle/>
+          <a:p>
             <a:pPr algn="ctr"/>
-            <a:r>
-              <a:rPr sz="2000" b="1" i="0">
-                <a:solidFill>
-                  <a:srgbClr val="269CCB"/>
-                </a:solidFill>
-                <a:latin typeface="Calibri"/>
-              </a:rPr>
-              <a:t>Teoría al servicio del proyecto</a:t>
+          </a:p>
+        </p:txBody>
+      </p:sp>
+      <p:sp>
+        <p:nvSpPr>
+          <p:cNvPr id="3" name="Rectangle 2"/>
+          <p:cNvSpPr/>
+          <p:nvPr/>
+        </p:nvSpPr>
+        <p:spPr>
+          <a:xfrm>
+            <a:off x="0" y="960120"/>
+            <a:ext cx="12191695" cy="41148"/>
+          </a:xfrm>
+          <a:prstGeom prst="rect">
+            <a:avLst/>
+          </a:prstGeom>
+          <a:solidFill>
+            <a:srgbClr val="FFD000"/>
+          </a:solidFill>
+          <a:ln>
+            <a:noFill/>
+          </a:ln>
+        </p:spPr>
+        <p:style>
+          <a:lnRef idx="1">
+            <a:schemeClr val="accent1"/>
+          </a:lnRef>
+          <a:fillRef idx="3">
+            <a:schemeClr val="accent1"/>
+          </a:fillRef>
+          <a:effectRef idx="2">
+            <a:schemeClr val="accent1"/>
+          </a:effectRef>
+          <a:fontRef idx="minor">
+            <a:schemeClr val="lt1"/>
+          </a:fontRef>
+        </p:style>
+        <p:txBody>
+          <a:bodyPr rtlCol="0" anchor="ctr"/>
+          <a:lstStyle/>
+          <a:p>
+            <a:pPr algn="ctr"/>
+          </a:p>
+        </p:txBody>
+      </p:sp>
+      <p:sp>
+        <p:nvSpPr>
+          <p:cNvPr id="4" name="TextBox 3"/>
+          <p:cNvSpPr txBox="1"/>
+          <p:nvPr/>
+        </p:nvSpPr>
+        <p:spPr>
+          <a:xfrm>
+            <a:off x="457200" y="164592"/>
+            <a:ext cx="11277295" cy="502920"/>
+          </a:xfrm>
+          <a:prstGeom prst="rect">
+            <a:avLst/>
+          </a:prstGeom>
+          <a:noFill/>
+        </p:spPr>
+        <p:txBody>
+          <a:bodyPr wrap="square">
+            <a:spAutoFit/>
+          </a:bodyPr>
+          <a:lstStyle/>
+          <a:p>
+            <a:r>
+              <a:rPr sz="2600" b="1" i="0">
+                <a:solidFill>
+                  <a:srgbClr val="FFFFFF"/>
+                </a:solidFill>
+                <a:latin typeface="Calibri"/>
+              </a:rPr>
+              <a:t>El limite fisico: la instancia nueva no aparece al instante</a:t>
+            </a:r>
+          </a:p>
+        </p:txBody>
+      </p:sp>
+      <p:sp>
+        <p:nvSpPr>
+          <p:cNvPr id="5" name="TextBox 4"/>
+          <p:cNvSpPr txBox="1"/>
+          <p:nvPr/>
+        </p:nvSpPr>
+        <p:spPr>
+          <a:xfrm>
+            <a:off x="457200" y="1170432"/>
+            <a:ext cx="11277295" cy="5230368"/>
+          </a:xfrm>
+          <a:prstGeom prst="rect">
+            <a:avLst/>
+          </a:prstGeom>
+          <a:noFill/>
+        </p:spPr>
+        <p:txBody>
+          <a:bodyPr wrap="square">
+            <a:spAutoFit/>
+          </a:bodyPr>
+          <a:lstStyle/>
+          <a:p>
+            <a:pPr>
+              <a:spcAft>
+                <a:spcPts val="800"/>
+              </a:spcAft>
+            </a:pPr>
+            <a:r>
+              <a:rPr sz="1900" b="0" i="0">
+                <a:solidFill>
+                  <a:srgbClr val="333333"/>
+                </a:solidFill>
+                <a:latin typeface="Calibri"/>
+              </a:rPr>
+              <a:t>–   Hay un limite fisico del autoescalado que desarma la idea de que es magia: la instancia nueva no aparece al instante.</a:t>
+            </a:r>
+          </a:p>
+          <a:p>
+            <a:pPr>
+              <a:spcAft>
+                <a:spcPts val="800"/>
+              </a:spcAft>
+            </a:pPr>
+            <a:r>
+              <a:rPr sz="1900" b="0" i="0">
+                <a:solidFill>
+                  <a:srgbClr val="333333"/>
+                </a:solidFill>
+                <a:latin typeface="Calibri"/>
+              </a:rPr>
+              <a:t>–   Un contenedor liviano tarda del orden de 10 a 60 segundos entre que se decide crearlo y que recibe trafico util, contando descarga de imagen</a:t>
+            </a:r>
+          </a:p>
+          <a:p>
+            <a:pPr>
+              <a:spcAft>
+                <a:spcPts val="800"/>
+              </a:spcAft>
+            </a:pPr>
+            <a:r>
+              <a:rPr sz="1900" b="0" i="0">
+                <a:solidFill>
+                  <a:srgbClr val="333333"/>
+                </a:solidFill>
+                <a:latin typeface="Calibri"/>
+              </a:rPr>
+              <a:t>–   Arranque del proceso, conexion a la base de datos y aprobacion del chequeo de salud; una maquina virtual completa puede tardar de 2 a 5 minutos.</a:t>
+            </a:r>
+          </a:p>
+          <a:p>
+            <a:pPr>
+              <a:spcAft>
+                <a:spcPts val="800"/>
+              </a:spcAft>
+            </a:pPr>
+            <a:r>
+              <a:rPr sz="1900" b="0" i="0">
+                <a:solidFill>
+                  <a:srgbClr val="333333"/>
+                </a:solidFill>
+                <a:latin typeface="Calibri"/>
+              </a:rPr>
+              <a:t>–   Sume el periodo de evaluacion y el sistema reacciona entre 5 y 10 minutos despues de que empezo el problema, asi que un pico subito del tipo que la prueba de spike de la Clase 12 simula ocurre y termina antes de que llegue la ayuda.</a:t>
+            </a:r>
+          </a:p>
+          <a:p>
+            <a:pPr>
+              <a:spcAft>
+                <a:spcPts val="800"/>
+              </a:spcAft>
+            </a:pPr>
+            <a:r>
+              <a:rPr sz="1900" b="0" i="0">
+                <a:solidFill>
+                  <a:srgbClr val="333333"/>
+                </a:solidFill>
+                <a:latin typeface="Calibri"/>
+              </a:rPr>
+              <a:t>–   Las respuestas correctas son tres y ninguna es "poner mas autoescalado": mantener holgura permanente por encima de la demanda habitual</a:t>
+            </a:r>
+          </a:p>
+          <a:p>
+            <a:pPr>
+              <a:spcAft>
+                <a:spcPts val="800"/>
+              </a:spcAft>
+            </a:pPr>
+            <a:r>
+              <a:rPr sz="1900" b="0" i="0">
+                <a:solidFill>
+                  <a:srgbClr val="333333"/>
+                </a:solidFill>
+                <a:latin typeface="Calibri"/>
+              </a:rPr>
+              <a:t>–   Poner una cola delante para absorber la rafaga y procesarla al ritmo que el sistema aguante, o degradar con gracia devolviendo una version reducida de la respuesta.</a:t>
+            </a:r>
+          </a:p>
+          <a:p>
+            <a:pPr>
+              <a:spcAft>
+                <a:spcPts val="800"/>
+              </a:spcAft>
+            </a:pPr>
+            <a:r>
+              <a:rPr sz="1900" b="0" i="0">
+                <a:solidFill>
+                  <a:srgbClr val="333333"/>
+                </a:solidFill>
+                <a:latin typeface="Calibri"/>
+              </a:rPr>
+              <a:t>–   Aqui reaparece la Clase 3: una imagen slim arranca mas rapido que una de un gigabyte, asi que adelgazar la imagen no es solo ahorro de costo, es tiempo de reaccion.</a:t>
+            </a:r>
+          </a:p>
+        </p:txBody>
+      </p:sp>
+      <p:sp>
+        <p:nvSpPr>
+          <p:cNvPr id="6" name="TextBox 5"/>
+          <p:cNvSpPr txBox="1"/>
+          <p:nvPr/>
+        </p:nvSpPr>
+        <p:spPr>
+          <a:xfrm>
+            <a:off x="11185855" y="6473952"/>
+            <a:ext cx="640080" cy="274320"/>
+          </a:xfrm>
+          <a:prstGeom prst="rect">
+            <a:avLst/>
+          </a:prstGeom>
+          <a:noFill/>
+        </p:spPr>
+        <p:txBody>
+          <a:bodyPr wrap="square">
+            <a:spAutoFit/>
+          </a:bodyPr>
+          <a:lstStyle/>
+          <a:p>
+            <a:pPr algn="r"/>
+            <a:r>
+              <a:rPr sz="1100" b="0" i="0">
+                <a:solidFill>
+                  <a:srgbClr val="666666"/>
+                </a:solidFill>
+                <a:latin typeface="Calibri"/>
+              </a:rPr>
+              <a:t>13</a:t>
+            </a:r>
+          </a:p>
+        </p:txBody>
+      </p:sp>
+    </p:spTree>
+  </p:cSld>
+  <p:clrMapOvr>
+    <a:masterClrMapping/>
+  </p:clrMapOvr>
+</p:sld>
+</file>
+
+<file path=ppt/slides/slide14.xml><?xml version="1.0" encoding="utf-8"?>
+<p:sld xmlns:a="http://schemas.openxmlformats.org/drawingml/2006/main" xmlns:p="http://schemas.openxmlformats.org/presentationml/2006/main" xmlns:r="http://schemas.openxmlformats.org/officeDocument/2006/relationships">
+  <p:cSld>
+    <p:bg>
+      <p:bgPr>
+        <a:solidFill>
+          <a:srgbClr val="FFFFFF"/>
+        </a:solidFill>
+        <a:effectLst/>
+      </p:bgPr>
+    </p:bg>
+    <p:spTree>
+      <p:nvGrpSpPr>
+        <p:cNvPr id="1" name=""/>
+        <p:cNvGrpSpPr/>
+        <p:nvPr/>
+      </p:nvGrpSpPr>
+      <p:grpSpPr/>
+      <p:sp>
+        <p:nvSpPr>
+          <p:cNvPr id="2" name="Rectangle 1"/>
+          <p:cNvSpPr/>
+          <p:nvPr/>
+        </p:nvSpPr>
+        <p:spPr>
+          <a:xfrm>
+            <a:off x="0" y="0"/>
+            <a:ext cx="12191695" cy="960120"/>
+          </a:xfrm>
+          <a:prstGeom prst="rect">
+            <a:avLst/>
+          </a:prstGeom>
+          <a:solidFill>
+            <a:srgbClr val="095292"/>
+          </a:solidFill>
+          <a:ln>
+            <a:noFill/>
+          </a:ln>
+        </p:spPr>
+        <p:style>
+          <a:lnRef idx="1">
+            <a:schemeClr val="accent1"/>
+          </a:lnRef>
+          <a:fillRef idx="3">
+            <a:schemeClr val="accent1"/>
+          </a:fillRef>
+          <a:effectRef idx="2">
+            <a:schemeClr val="accent1"/>
+          </a:effectRef>
+          <a:fontRef idx="minor">
+            <a:schemeClr val="lt1"/>
+          </a:fontRef>
+        </p:style>
+        <p:txBody>
+          <a:bodyPr rtlCol="0" anchor="ctr"/>
+          <a:lstStyle/>
+          <a:p>
+            <a:pPr algn="ctr"/>
+          </a:p>
+        </p:txBody>
+      </p:sp>
+      <p:sp>
+        <p:nvSpPr>
+          <p:cNvPr id="3" name="Rectangle 2"/>
+          <p:cNvSpPr/>
+          <p:nvPr/>
+        </p:nvSpPr>
+        <p:spPr>
+          <a:xfrm>
+            <a:off x="0" y="960120"/>
+            <a:ext cx="12191695" cy="41148"/>
+          </a:xfrm>
+          <a:prstGeom prst="rect">
+            <a:avLst/>
+          </a:prstGeom>
+          <a:solidFill>
+            <a:srgbClr val="FFD000"/>
+          </a:solidFill>
+          <a:ln>
+            <a:noFill/>
+          </a:ln>
+        </p:spPr>
+        <p:style>
+          <a:lnRef idx="1">
+            <a:schemeClr val="accent1"/>
+          </a:lnRef>
+          <a:fillRef idx="3">
+            <a:schemeClr val="accent1"/>
+          </a:fillRef>
+          <a:effectRef idx="2">
+            <a:schemeClr val="accent1"/>
+          </a:effectRef>
+          <a:fontRef idx="minor">
+            <a:schemeClr val="lt1"/>
+          </a:fontRef>
+        </p:style>
+        <p:txBody>
+          <a:bodyPr rtlCol="0" anchor="ctr"/>
+          <a:lstStyle/>
+          <a:p>
+            <a:pPr algn="ctr"/>
+          </a:p>
+        </p:txBody>
+      </p:sp>
+      <p:sp>
+        <p:nvSpPr>
+          <p:cNvPr id="4" name="TextBox 3"/>
+          <p:cNvSpPr txBox="1"/>
+          <p:nvPr/>
+        </p:nvSpPr>
+        <p:spPr>
+          <a:xfrm>
+            <a:off x="457200" y="164592"/>
+            <a:ext cx="11277295" cy="502920"/>
+          </a:xfrm>
+          <a:prstGeom prst="rect">
+            <a:avLst/>
+          </a:prstGeom>
+          <a:noFill/>
+        </p:spPr>
+        <p:txBody>
+          <a:bodyPr wrap="square">
+            <a:spAutoFit/>
+          </a:bodyPr>
+          <a:lstStyle/>
+          <a:p>
+            <a:r>
+              <a:rPr sz="2600" b="1" i="0">
+                <a:solidFill>
+                  <a:srgbClr val="FFFFFF"/>
+                </a:solidFill>
+                <a:latin typeface="Calibri"/>
+              </a:rPr>
+              <a:t>Elegir la metrica: la decision mas fina del tema (1/2)</a:t>
+            </a:r>
+          </a:p>
+        </p:txBody>
+      </p:sp>
+      <p:sp>
+        <p:nvSpPr>
+          <p:cNvPr id="5" name="TextBox 4"/>
+          <p:cNvSpPr txBox="1"/>
+          <p:nvPr/>
+        </p:nvSpPr>
+        <p:spPr>
+          <a:xfrm>
+            <a:off x="457200" y="1170432"/>
+            <a:ext cx="11277295" cy="5230368"/>
+          </a:xfrm>
+          <a:prstGeom prst="rect">
+            <a:avLst/>
+          </a:prstGeom>
+          <a:noFill/>
+        </p:spPr>
+        <p:txBody>
+          <a:bodyPr wrap="square">
+            <a:spAutoFit/>
+          </a:bodyPr>
+          <a:lstStyle/>
+          <a:p>
+            <a:pPr>
+              <a:spcAft>
+                <a:spcPts val="800"/>
+              </a:spcAft>
+            </a:pPr>
+            <a:r>
+              <a:rPr sz="2000" b="0" i="0">
+                <a:solidFill>
+                  <a:srgbClr val="333333"/>
+                </a:solidFill>
+                <a:latin typeface="Calibri"/>
+              </a:rPr>
+              <a:t>–   Elegir bien la metrica es la decision mas fina del tema, y el ejemplo de CloudLite es contundente.</a:t>
+            </a:r>
+          </a:p>
+          <a:p>
+            <a:pPr>
+              <a:spcAft>
+                <a:spcPts val="800"/>
+              </a:spcAft>
+            </a:pPr>
+            <a:r>
+              <a:rPr sz="2000" b="0" i="0">
+                <a:solidFill>
+                  <a:srgbClr val="333333"/>
+                </a:solidFill>
+                <a:latin typeface="Calibri"/>
+              </a:rPr>
+              <a:t>–   La CPU es la metrica por defecto y es la equivocada para la mayoria de las APIs, porque una API que sobre todo espera respuestas de la base de datos esta limitada por entrada y salida</a:t>
+            </a:r>
+          </a:p>
+          <a:p>
+            <a:pPr>
+              <a:spcAft>
+                <a:spcPts val="800"/>
+              </a:spcAft>
+            </a:pPr>
+            <a:r>
+              <a:rPr sz="2000" b="0" i="0">
+                <a:solidFill>
+                  <a:srgbClr val="333333"/>
+                </a:solidFill>
+                <a:latin typeface="Calibri"/>
+              </a:rPr>
+              <a:t>–   No por procesador: cuando la latencia se dispara a 3 segundos porque el pool de conexiones esta agotado, la CPU puede seguir marcando un tranquilo 20 por ciento, el umbral del 70 nunca se cruza y el autoescalado no hace nada mientras los usuarios sufren.</a:t>
+            </a:r>
+          </a:p>
+          <a:p>
+            <a:pPr>
+              <a:spcAft>
+                <a:spcPts val="800"/>
+              </a:spcAft>
+            </a:pPr>
+            <a:r>
+              <a:rPr sz="2000" b="0" i="0">
+                <a:solidFill>
+                  <a:srgbClr val="333333"/>
+                </a:solidFill>
+                <a:latin typeface="Calibri"/>
+              </a:rPr>
+              <a:t>–   Metricas mejores para ese caso son las peticiones por segundo por instancia, que se deriva del calculo hecho en la Clase 12, la latencia p95 del propio servicio, o la longitud de la cola pendiente.</a:t>
+            </a:r>
+          </a:p>
+        </p:txBody>
+      </p:sp>
+      <p:sp>
+        <p:nvSpPr>
+          <p:cNvPr id="6" name="TextBox 5"/>
+          <p:cNvSpPr txBox="1"/>
+          <p:nvPr/>
+        </p:nvSpPr>
+        <p:spPr>
+          <a:xfrm>
+            <a:off x="11185855" y="6473952"/>
+            <a:ext cx="640080" cy="274320"/>
+          </a:xfrm>
+          <a:prstGeom prst="rect">
+            <a:avLst/>
+          </a:prstGeom>
+          <a:noFill/>
+        </p:spPr>
+        <p:txBody>
+          <a:bodyPr wrap="square">
+            <a:spAutoFit/>
+          </a:bodyPr>
+          <a:lstStyle/>
+          <a:p>
+            <a:pPr algn="r"/>
+            <a:r>
+              <a:rPr sz="1100" b="0" i="0">
+                <a:solidFill>
+                  <a:srgbClr val="666666"/>
+                </a:solidFill>
+                <a:latin typeface="Calibri"/>
+              </a:rPr>
+              <a:t>14</a:t>
+            </a:r>
+          </a:p>
+        </p:txBody>
+      </p:sp>
+    </p:spTree>
+  </p:cSld>
+  <p:clrMapOvr>
+    <a:masterClrMapping/>
+  </p:clrMapOvr>
+</p:sld>
+</file>
+
+<file path=ppt/slides/slide15.xml><?xml version="1.0" encoding="utf-8"?>
+<p:sld xmlns:a="http://schemas.openxmlformats.org/drawingml/2006/main" xmlns:p="http://schemas.openxmlformats.org/presentationml/2006/main" xmlns:r="http://schemas.openxmlformats.org/officeDocument/2006/relationships">
+  <p:cSld>
+    <p:bg>
+      <p:bgPr>
+        <a:solidFill>
+          <a:srgbClr val="FFFFFF"/>
+        </a:solidFill>
+        <a:effectLst/>
+      </p:bgPr>
+    </p:bg>
+    <p:spTree>
+      <p:nvGrpSpPr>
+        <p:cNvPr id="1" name=""/>
+        <p:cNvGrpSpPr/>
+        <p:nvPr/>
+      </p:nvGrpSpPr>
+      <p:grpSpPr/>
+      <p:sp>
+        <p:nvSpPr>
+          <p:cNvPr id="2" name="Rectangle 1"/>
+          <p:cNvSpPr/>
+          <p:nvPr/>
+        </p:nvSpPr>
+        <p:spPr>
+          <a:xfrm>
+            <a:off x="0" y="0"/>
+            <a:ext cx="12191695" cy="960120"/>
+          </a:xfrm>
+          <a:prstGeom prst="rect">
+            <a:avLst/>
+          </a:prstGeom>
+          <a:solidFill>
+            <a:srgbClr val="095292"/>
+          </a:solidFill>
+          <a:ln>
+            <a:noFill/>
+          </a:ln>
+        </p:spPr>
+        <p:style>
+          <a:lnRef idx="1">
+            <a:schemeClr val="accent1"/>
+          </a:lnRef>
+          <a:fillRef idx="3">
+            <a:schemeClr val="accent1"/>
+          </a:fillRef>
+          <a:effectRef idx="2">
+            <a:schemeClr val="accent1"/>
+          </a:effectRef>
+          <a:fontRef idx="minor">
+            <a:schemeClr val="lt1"/>
+          </a:fontRef>
+        </p:style>
+        <p:txBody>
+          <a:bodyPr rtlCol="0" anchor="ctr"/>
+          <a:lstStyle/>
+          <a:p>
+            <a:pPr algn="ctr"/>
+          </a:p>
+        </p:txBody>
+      </p:sp>
+      <p:sp>
+        <p:nvSpPr>
+          <p:cNvPr id="3" name="Rectangle 2"/>
+          <p:cNvSpPr/>
+          <p:nvPr/>
+        </p:nvSpPr>
+        <p:spPr>
+          <a:xfrm>
+            <a:off x="0" y="960120"/>
+            <a:ext cx="12191695" cy="41148"/>
+          </a:xfrm>
+          <a:prstGeom prst="rect">
+            <a:avLst/>
+          </a:prstGeom>
+          <a:solidFill>
+            <a:srgbClr val="FFD000"/>
+          </a:solidFill>
+          <a:ln>
+            <a:noFill/>
+          </a:ln>
+        </p:spPr>
+        <p:style>
+          <a:lnRef idx="1">
+            <a:schemeClr val="accent1"/>
+          </a:lnRef>
+          <a:fillRef idx="3">
+            <a:schemeClr val="accent1"/>
+          </a:fillRef>
+          <a:effectRef idx="2">
+            <a:schemeClr val="accent1"/>
+          </a:effectRef>
+          <a:fontRef idx="minor">
+            <a:schemeClr val="lt1"/>
+          </a:fontRef>
+        </p:style>
+        <p:txBody>
+          <a:bodyPr rtlCol="0" anchor="ctr"/>
+          <a:lstStyle/>
+          <a:p>
+            <a:pPr algn="ctr"/>
+          </a:p>
+        </p:txBody>
+      </p:sp>
+      <p:sp>
+        <p:nvSpPr>
+          <p:cNvPr id="4" name="TextBox 3"/>
+          <p:cNvSpPr txBox="1"/>
+          <p:nvPr/>
+        </p:nvSpPr>
+        <p:spPr>
+          <a:xfrm>
+            <a:off x="457200" y="164592"/>
+            <a:ext cx="11277295" cy="502920"/>
+          </a:xfrm>
+          <a:prstGeom prst="rect">
+            <a:avLst/>
+          </a:prstGeom>
+          <a:noFill/>
+        </p:spPr>
+        <p:txBody>
+          <a:bodyPr wrap="square">
+            <a:spAutoFit/>
+          </a:bodyPr>
+          <a:lstStyle/>
+          <a:p>
+            <a:r>
+              <a:rPr sz="2600" b="1" i="0">
+                <a:solidFill>
+                  <a:srgbClr val="FFFFFF"/>
+                </a:solidFill>
+                <a:latin typeface="Calibri"/>
+              </a:rPr>
+              <a:t>Elegir la metrica: la decision mas fina del tema (2/2)</a:t>
+            </a:r>
+          </a:p>
+        </p:txBody>
+      </p:sp>
+      <p:sp>
+        <p:nvSpPr>
+          <p:cNvPr id="5" name="TextBox 4"/>
+          <p:cNvSpPr txBox="1"/>
+          <p:nvPr/>
+        </p:nvSpPr>
+        <p:spPr>
+          <a:xfrm>
+            <a:off x="457200" y="1170432"/>
+            <a:ext cx="11277295" cy="5230368"/>
+          </a:xfrm>
+          <a:prstGeom prst="rect">
+            <a:avLst/>
+          </a:prstGeom>
+          <a:noFill/>
+        </p:spPr>
+        <p:txBody>
+          <a:bodyPr wrap="square">
+            <a:spAutoFit/>
+          </a:bodyPr>
+          <a:lstStyle/>
+          <a:p>
+            <a:pPr>
+              <a:spcAft>
+                <a:spcPts val="800"/>
+              </a:spcAft>
+            </a:pPr>
+            <a:r>
+              <a:rPr sz="2000" b="0" i="0">
+                <a:solidFill>
+                  <a:srgbClr val="333333"/>
+                </a:solidFill>
+                <a:latin typeface="Calibri"/>
+              </a:rPr>
+              <a:t>–   Para el componente de notificaciones de CloudLite la metrica natural es el numero de mensajes esperando en la cola, no la CPU del worker: si hay 500 mensajes acumulados hay que agregar workers, y da igual cuanta CPU usen.</a:t>
+            </a:r>
+          </a:p>
+          <a:p>
+            <a:pPr>
+              <a:spcAft>
+                <a:spcPts val="800"/>
+              </a:spcAft>
+            </a:pPr>
+            <a:r>
+              <a:rPr sz="2000" b="0" i="0">
+                <a:solidFill>
+                  <a:srgbClr val="333333"/>
+                </a:solidFill>
+                <a:latin typeface="Calibri"/>
+              </a:rPr>
+              <a:t>–   Regla de bolsillo: la metrica correcta es la que mide el recurso que se agota primero, es decir el cuello de botella identificado en la clase anterior.</a:t>
+            </a:r>
+          </a:p>
+          <a:p>
+            <a:pPr>
+              <a:spcAft>
+                <a:spcPts val="800"/>
+              </a:spcAft>
+            </a:pPr>
+            <a:r>
+              <a:rPr sz="2000" b="0" i="0">
+                <a:solidFill>
+                  <a:srgbClr val="333333"/>
+                </a:solidFill>
+                <a:latin typeface="Calibri"/>
+              </a:rPr>
+              <a:t>–   De ahi que el entregable de hoy no se pueda hacer bien si el de la Clase 12 quedo vacio.</a:t>
+            </a:r>
+          </a:p>
+        </p:txBody>
+      </p:sp>
+      <p:sp>
+        <p:nvSpPr>
+          <p:cNvPr id="6" name="TextBox 5"/>
+          <p:cNvSpPr txBox="1"/>
+          <p:nvPr/>
+        </p:nvSpPr>
+        <p:spPr>
+          <a:xfrm>
+            <a:off x="11185855" y="6473952"/>
+            <a:ext cx="640080" cy="274320"/>
+          </a:xfrm>
+          <a:prstGeom prst="rect">
+            <a:avLst/>
+          </a:prstGeom>
+          <a:noFill/>
+        </p:spPr>
+        <p:txBody>
+          <a:bodyPr wrap="square">
+            <a:spAutoFit/>
+          </a:bodyPr>
+          <a:lstStyle/>
+          <a:p>
+            <a:pPr algn="r"/>
+            <a:r>
+              <a:rPr sz="1100" b="0" i="0">
+                <a:solidFill>
+                  <a:srgbClr val="666666"/>
+                </a:solidFill>
+                <a:latin typeface="Calibri"/>
+              </a:rPr>
+              <a:t>15</a:t>
+            </a:r>
+          </a:p>
+        </p:txBody>
+      </p:sp>
+    </p:spTree>
+  </p:cSld>
+  <p:clrMapOvr>
+    <a:masterClrMapping/>
+  </p:clrMapOvr>
+</p:sld>
+</file>
+
+<file path=ppt/slides/slide16.xml><?xml version="1.0" encoding="utf-8"?>
+<p:sld xmlns:a="http://schemas.openxmlformats.org/drawingml/2006/main" xmlns:p="http://schemas.openxmlformats.org/presentationml/2006/main" xmlns:r="http://schemas.openxmlformats.org/officeDocument/2006/relationships">
+  <p:cSld>
+    <p:bg>
+      <p:bgPr>
+        <a:solidFill>
+          <a:srgbClr val="FFFFFF"/>
+        </a:solidFill>
+        <a:effectLst/>
+      </p:bgPr>
+    </p:bg>
+    <p:spTree>
+      <p:nvGrpSpPr>
+        <p:cNvPr id="1" name=""/>
+        <p:cNvGrpSpPr/>
+        <p:nvPr/>
+      </p:nvGrpSpPr>
+      <p:grpSpPr/>
+      <p:sp>
+        <p:nvSpPr>
+          <p:cNvPr id="2" name="Rectangle 1"/>
+          <p:cNvSpPr/>
+          <p:nvPr/>
+        </p:nvSpPr>
+        <p:spPr>
+          <a:xfrm>
+            <a:off x="0" y="0"/>
+            <a:ext cx="12191695" cy="960120"/>
+          </a:xfrm>
+          <a:prstGeom prst="rect">
+            <a:avLst/>
+          </a:prstGeom>
+          <a:solidFill>
+            <a:srgbClr val="095292"/>
+          </a:solidFill>
+          <a:ln>
+            <a:noFill/>
+          </a:ln>
+        </p:spPr>
+        <p:style>
+          <a:lnRef idx="1">
+            <a:schemeClr val="accent1"/>
+          </a:lnRef>
+          <a:fillRef idx="3">
+            <a:schemeClr val="accent1"/>
+          </a:fillRef>
+          <a:effectRef idx="2">
+            <a:schemeClr val="accent1"/>
+          </a:effectRef>
+          <a:fontRef idx="minor">
+            <a:schemeClr val="lt1"/>
+          </a:fontRef>
+        </p:style>
+        <p:txBody>
+          <a:bodyPr rtlCol="0" anchor="ctr"/>
+          <a:lstStyle/>
+          <a:p>
+            <a:pPr algn="ctr"/>
+          </a:p>
+        </p:txBody>
+      </p:sp>
+      <p:sp>
+        <p:nvSpPr>
+          <p:cNvPr id="3" name="Rectangle 2"/>
+          <p:cNvSpPr/>
+          <p:nvPr/>
+        </p:nvSpPr>
+        <p:spPr>
+          <a:xfrm>
+            <a:off x="0" y="960120"/>
+            <a:ext cx="12191695" cy="41148"/>
+          </a:xfrm>
+          <a:prstGeom prst="rect">
+            <a:avLst/>
+          </a:prstGeom>
+          <a:solidFill>
+            <a:srgbClr val="FFD000"/>
+          </a:solidFill>
+          <a:ln>
+            <a:noFill/>
+          </a:ln>
+        </p:spPr>
+        <p:style>
+          <a:lnRef idx="1">
+            <a:schemeClr val="accent1"/>
+          </a:lnRef>
+          <a:fillRef idx="3">
+            <a:schemeClr val="accent1"/>
+          </a:fillRef>
+          <a:effectRef idx="2">
+            <a:schemeClr val="accent1"/>
+          </a:effectRef>
+          <a:fontRef idx="minor">
+            <a:schemeClr val="lt1"/>
+          </a:fontRef>
+        </p:style>
+        <p:txBody>
+          <a:bodyPr rtlCol="0" anchor="ctr"/>
+          <a:lstStyle/>
+          <a:p>
+            <a:pPr algn="ctr"/>
+          </a:p>
+        </p:txBody>
+      </p:sp>
+      <p:sp>
+        <p:nvSpPr>
+          <p:cNvPr id="4" name="TextBox 3"/>
+          <p:cNvSpPr txBox="1"/>
+          <p:nvPr/>
+        </p:nvSpPr>
+        <p:spPr>
+          <a:xfrm>
+            <a:off x="457200" y="164592"/>
+            <a:ext cx="11277295" cy="502920"/>
+          </a:xfrm>
+          <a:prstGeom prst="rect">
+            <a:avLst/>
+          </a:prstGeom>
+          <a:noFill/>
+        </p:spPr>
+        <p:txBody>
+          <a:bodyPr wrap="square">
+            <a:spAutoFit/>
+          </a:bodyPr>
+          <a:lstStyle/>
+          <a:p>
+            <a:r>
+              <a:rPr sz="2600" b="1" i="0">
+                <a:solidFill>
+                  <a:srgbClr val="FFFFFF"/>
+                </a:solidFill>
+                <a:latin typeface="Calibri"/>
+              </a:rPr>
+              <a:t>Lo que NO escala: la mitad del entregable (1/2)</a:t>
+            </a:r>
+          </a:p>
+        </p:txBody>
+      </p:sp>
+      <p:sp>
+        <p:nvSpPr>
+          <p:cNvPr id="5" name="TextBox 4"/>
+          <p:cNvSpPr txBox="1"/>
+          <p:nvPr/>
+        </p:nvSpPr>
+        <p:spPr>
+          <a:xfrm>
+            <a:off x="457200" y="1170432"/>
+            <a:ext cx="11277295" cy="5230368"/>
+          </a:xfrm>
+          <a:prstGeom prst="rect">
+            <a:avLst/>
+          </a:prstGeom>
+          <a:noFill/>
+        </p:spPr>
+        <p:txBody>
+          <a:bodyPr wrap="square">
+            <a:spAutoFit/>
+          </a:bodyPr>
+          <a:lstStyle/>
+          <a:p>
+            <a:pPr>
+              <a:spcAft>
+                <a:spcPts val="800"/>
+              </a:spcAft>
+            </a:pPr>
+            <a:r>
+              <a:rPr sz="2000" b="0" i="0">
+                <a:solidFill>
+                  <a:srgbClr val="333333"/>
+                </a:solidFill>
+                <a:latin typeface="Calibri"/>
+              </a:rPr>
+              <a:t>–   Lo que NO escala es la mitad del entregable y separa una sustentacion seria de una lista de deseos.</a:t>
+            </a:r>
+          </a:p>
+          <a:p>
+            <a:pPr>
+              <a:spcAft>
+                <a:spcPts val="800"/>
+              </a:spcAft>
+            </a:pPr>
+            <a:r>
+              <a:rPr sz="2000" b="0" i="0">
+                <a:solidFill>
+                  <a:srgbClr val="333333"/>
+                </a:solidFill>
+                <a:latin typeface="Calibri"/>
+              </a:rPr>
+              <a:t>–   La capa de datos es el caso central: agregar instancias de API es casi gratis conceptualmente, pero una base de datos relacional que debe mantener consistencia tiene un unico escritor, y ese escritor no se multiplica sin cambiar el modelo.</a:t>
+            </a:r>
+          </a:p>
+          <a:p>
+            <a:pPr>
+              <a:spcAft>
+                <a:spcPts val="800"/>
+              </a:spcAft>
+            </a:pPr>
+            <a:r>
+              <a:rPr sz="2000" b="0" i="0">
+                <a:solidFill>
+                  <a:srgbClr val="333333"/>
+                </a:solidFill>
+                <a:latin typeface="Calibri"/>
+              </a:rPr>
+              <a:t>–   Se pueden agregar replicas de lectura, y ahi entra un concepto a definir: el retraso de replicacion, esos milisegundos o segundos en que la replica todavia no tiene el ultimo cambio</a:t>
+            </a:r>
+          </a:p>
+          <a:p>
+            <a:pPr>
+              <a:spcAft>
+                <a:spcPts val="800"/>
+              </a:spcAft>
+            </a:pPr>
+            <a:r>
+              <a:rPr sz="2000" b="0" i="0">
+                <a:solidFill>
+                  <a:srgbClr val="333333"/>
+                </a:solidFill>
+                <a:latin typeface="Calibri"/>
+              </a:rPr>
+              <a:t>–   Que produce el sintoma de que el usuario guarda un dato, la pagina lo relee de una replica y el dato no aparece.</a:t>
+            </a:r>
+          </a:p>
+          <a:p>
+            <a:pPr>
+              <a:spcAft>
+                <a:spcPts val="800"/>
+              </a:spcAft>
+            </a:pPr>
+            <a:r>
+              <a:rPr sz="2000" b="0" i="0">
+                <a:solidFill>
+                  <a:srgbClr val="333333"/>
+                </a:solidFill>
+                <a:latin typeface="Calibri"/>
+              </a:rPr>
+              <a:t>–   Las alternativas mas agresivas, particionar los datos por clave o cambiar a un modelo sin esquema fijo, son decisiones de arquitectura mayores y estan fuera del alcance de CloudLite v1</a:t>
+            </a:r>
+          </a:p>
+          <a:p>
+            <a:pPr>
+              <a:spcAft>
+                <a:spcPts val="800"/>
+              </a:spcAft>
+            </a:pPr>
+            <a:r>
+              <a:rPr sz="2000" b="0" i="0">
+                <a:solidFill>
+                  <a:srgbClr val="333333"/>
+                </a:solidFill>
+                <a:latin typeface="Calibri"/>
+              </a:rPr>
+              <a:t>–   Decirlo explicitamente en el informe es una respuesta correcta, no una debilidad.</a:t>
+            </a:r>
+          </a:p>
+        </p:txBody>
+      </p:sp>
+      <p:sp>
+        <p:nvSpPr>
+          <p:cNvPr id="6" name="TextBox 5"/>
+          <p:cNvSpPr txBox="1"/>
+          <p:nvPr/>
+        </p:nvSpPr>
+        <p:spPr>
+          <a:xfrm>
+            <a:off x="11185855" y="6473952"/>
+            <a:ext cx="640080" cy="274320"/>
+          </a:xfrm>
+          <a:prstGeom prst="rect">
+            <a:avLst/>
+          </a:prstGeom>
+          <a:noFill/>
+        </p:spPr>
+        <p:txBody>
+          <a:bodyPr wrap="square">
+            <a:spAutoFit/>
+          </a:bodyPr>
+          <a:lstStyle/>
+          <a:p>
+            <a:pPr algn="r"/>
+            <a:r>
+              <a:rPr sz="1100" b="0" i="0">
+                <a:solidFill>
+                  <a:srgbClr val="666666"/>
+                </a:solidFill>
+                <a:latin typeface="Calibri"/>
+              </a:rPr>
+              <a:t>16</a:t>
+            </a:r>
+          </a:p>
+        </p:txBody>
+      </p:sp>
+    </p:spTree>
+  </p:cSld>
+  <p:clrMapOvr>
+    <a:masterClrMapping/>
+  </p:clrMapOvr>
+</p:sld>
+</file>
+
+<file path=ppt/slides/slide17.xml><?xml version="1.0" encoding="utf-8"?>
+<p:sld xmlns:a="http://schemas.openxmlformats.org/drawingml/2006/main" xmlns:p="http://schemas.openxmlformats.org/presentationml/2006/main" xmlns:r="http://schemas.openxmlformats.org/officeDocument/2006/relationships">
+  <p:cSld>
+    <p:bg>
+      <p:bgPr>
+        <a:solidFill>
+          <a:srgbClr val="FFFFFF"/>
+        </a:solidFill>
+        <a:effectLst/>
+      </p:bgPr>
+    </p:bg>
+    <p:spTree>
+      <p:nvGrpSpPr>
+        <p:cNvPr id="1" name=""/>
+        <p:cNvGrpSpPr/>
+        <p:nvPr/>
+      </p:nvGrpSpPr>
+      <p:grpSpPr/>
+      <p:sp>
+        <p:nvSpPr>
+          <p:cNvPr id="2" name="Rectangle 1"/>
+          <p:cNvSpPr/>
+          <p:nvPr/>
+        </p:nvSpPr>
+        <p:spPr>
+          <a:xfrm>
+            <a:off x="0" y="0"/>
+            <a:ext cx="12191695" cy="960120"/>
+          </a:xfrm>
+          <a:prstGeom prst="rect">
+            <a:avLst/>
+          </a:prstGeom>
+          <a:solidFill>
+            <a:srgbClr val="095292"/>
+          </a:solidFill>
+          <a:ln>
+            <a:noFill/>
+          </a:ln>
+        </p:spPr>
+        <p:style>
+          <a:lnRef idx="1">
+            <a:schemeClr val="accent1"/>
+          </a:lnRef>
+          <a:fillRef idx="3">
+            <a:schemeClr val="accent1"/>
+          </a:fillRef>
+          <a:effectRef idx="2">
+            <a:schemeClr val="accent1"/>
+          </a:effectRef>
+          <a:fontRef idx="minor">
+            <a:schemeClr val="lt1"/>
+          </a:fontRef>
+        </p:style>
+        <p:txBody>
+          <a:bodyPr rtlCol="0" anchor="ctr"/>
+          <a:lstStyle/>
+          <a:p>
+            <a:pPr algn="ctr"/>
+          </a:p>
+        </p:txBody>
+      </p:sp>
+      <p:sp>
+        <p:nvSpPr>
+          <p:cNvPr id="3" name="Rectangle 2"/>
+          <p:cNvSpPr/>
+          <p:nvPr/>
+        </p:nvSpPr>
+        <p:spPr>
+          <a:xfrm>
+            <a:off x="0" y="960120"/>
+            <a:ext cx="12191695" cy="41148"/>
+          </a:xfrm>
+          <a:prstGeom prst="rect">
+            <a:avLst/>
+          </a:prstGeom>
+          <a:solidFill>
+            <a:srgbClr val="FFD000"/>
+          </a:solidFill>
+          <a:ln>
+            <a:noFill/>
+          </a:ln>
+        </p:spPr>
+        <p:style>
+          <a:lnRef idx="1">
+            <a:schemeClr val="accent1"/>
+          </a:lnRef>
+          <a:fillRef idx="3">
+            <a:schemeClr val="accent1"/>
+          </a:fillRef>
+          <a:effectRef idx="2">
+            <a:schemeClr val="accent1"/>
+          </a:effectRef>
+          <a:fontRef idx="minor">
+            <a:schemeClr val="lt1"/>
+          </a:fontRef>
+        </p:style>
+        <p:txBody>
+          <a:bodyPr rtlCol="0" anchor="ctr"/>
+          <a:lstStyle/>
+          <a:p>
+            <a:pPr algn="ctr"/>
+          </a:p>
+        </p:txBody>
+      </p:sp>
+      <p:sp>
+        <p:nvSpPr>
+          <p:cNvPr id="4" name="TextBox 3"/>
+          <p:cNvSpPr txBox="1"/>
+          <p:nvPr/>
+        </p:nvSpPr>
+        <p:spPr>
+          <a:xfrm>
+            <a:off x="457200" y="164592"/>
+            <a:ext cx="11277295" cy="502920"/>
+          </a:xfrm>
+          <a:prstGeom prst="rect">
+            <a:avLst/>
+          </a:prstGeom>
+          <a:noFill/>
+        </p:spPr>
+        <p:txBody>
+          <a:bodyPr wrap="square">
+            <a:spAutoFit/>
+          </a:bodyPr>
+          <a:lstStyle/>
+          <a:p>
+            <a:r>
+              <a:rPr sz="2600" b="1" i="0">
+                <a:solidFill>
+                  <a:srgbClr val="FFFFFF"/>
+                </a:solidFill>
+                <a:latin typeface="Calibri"/>
+              </a:rPr>
+              <a:t>Lo que NO escala: la mitad del entregable (2/2)</a:t>
+            </a:r>
+          </a:p>
+        </p:txBody>
+      </p:sp>
+      <p:sp>
+        <p:nvSpPr>
+          <p:cNvPr id="5" name="TextBox 4"/>
+          <p:cNvSpPr txBox="1"/>
+          <p:nvPr/>
+        </p:nvSpPr>
+        <p:spPr>
+          <a:xfrm>
+            <a:off x="457200" y="1170432"/>
+            <a:ext cx="11277295" cy="5230368"/>
+          </a:xfrm>
+          <a:prstGeom prst="rect">
+            <a:avLst/>
+          </a:prstGeom>
+          <a:noFill/>
+        </p:spPr>
+        <p:txBody>
+          <a:bodyPr wrap="square">
+            <a:spAutoFit/>
+          </a:bodyPr>
+          <a:lstStyle/>
+          <a:p>
+            <a:pPr>
+              <a:spcAft>
+                <a:spcPts val="800"/>
+              </a:spcAft>
+            </a:pPr>
+            <a:r>
+              <a:rPr sz="2000" b="0" i="0">
+                <a:solidFill>
+                  <a:srgbClr val="333333"/>
+                </a:solidFill>
+                <a:latin typeface="Calibri"/>
+              </a:rPr>
+              <a:t>–   Hay un detalle aritmetico que es la mejor leccion del dia: si cada instancia de la API abre un pool de 20 conexiones y el autoescalado sube a 6 instancias</a:t>
+            </a:r>
+          </a:p>
+          <a:p>
+            <a:pPr>
+              <a:spcAft>
+                <a:spcPts val="800"/>
+              </a:spcAft>
+            </a:pPr>
+            <a:r>
+              <a:rPr sz="2000" b="0" i="0">
+                <a:solidFill>
+                  <a:srgbClr val="333333"/>
+                </a:solidFill>
+                <a:latin typeface="Calibri"/>
+              </a:rPr>
+              <a:t>–   El sistema pide 120 conexiones, mientras que una base de datos gestionada pequena suele admitir del orden de 100; el resultado es que escalar la API tumba la base de datos.</a:t>
+            </a:r>
+          </a:p>
+          <a:p>
+            <a:pPr>
+              <a:spcAft>
+                <a:spcPts val="800"/>
+              </a:spcAft>
+            </a:pPr>
+            <a:r>
+              <a:rPr sz="2000" b="0" i="0">
+                <a:solidFill>
+                  <a:srgbClr val="333333"/>
+                </a:solidFill>
+                <a:latin typeface="Calibri"/>
+              </a:rPr>
+              <a:t>–   Multiplicar la capa sin verificar el limite del recurso compartido no mejora el sistema, lo rompe.</a:t>
+            </a:r>
+          </a:p>
+          <a:p>
+            <a:pPr>
+              <a:spcAft>
+                <a:spcPts val="800"/>
+              </a:spcAft>
+            </a:pPr>
+            <a:r>
+              <a:rPr sz="2000" b="0" i="0">
+                <a:solidFill>
+                  <a:srgbClr val="333333"/>
+                </a:solidFill>
+                <a:latin typeface="Calibri"/>
+              </a:rPr>
+              <a:t>–   Tambien conviene enumerar otras piezas que no escalan por replicacion: los limites de terceros, como un proveedor de correo que acepta 100 envios por minuto y rechaza el exceso</a:t>
+            </a:r>
+          </a:p>
+          <a:p>
+            <a:pPr>
+              <a:spcAft>
+                <a:spcPts val="800"/>
+              </a:spcAft>
+            </a:pPr>
+            <a:r>
+              <a:rPr sz="2000" b="0" i="0">
+                <a:solidFill>
+                  <a:srgbClr val="333333"/>
+                </a:solidFill>
+                <a:latin typeface="Calibri"/>
+              </a:rPr>
+              <a:t>–   De modo que diez workers no envian diez veces mas rapido sino que generan diez veces mas errores</a:t>
+            </a:r>
+          </a:p>
+          <a:p>
+            <a:pPr>
+              <a:spcAft>
+                <a:spcPts val="800"/>
+              </a:spcAft>
+            </a:pPr>
+            <a:r>
+              <a:rPr sz="2000" b="0" i="0">
+                <a:solidFill>
+                  <a:srgbClr val="333333"/>
+                </a:solidFill>
+                <a:latin typeface="Calibri"/>
+              </a:rPr>
+              <a:t>–   Los sistemas de archivos compartidos; y las tareas programadas de tipo singleton, que si corren en seis instancias hacen el mismo trabajo seis veces y pueden duplicar cobros o correos.</a:t>
+            </a:r>
+          </a:p>
+        </p:txBody>
+      </p:sp>
+      <p:sp>
+        <p:nvSpPr>
+          <p:cNvPr id="6" name="TextBox 5"/>
+          <p:cNvSpPr txBox="1"/>
+          <p:nvPr/>
+        </p:nvSpPr>
+        <p:spPr>
+          <a:xfrm>
+            <a:off x="11185855" y="6473952"/>
+            <a:ext cx="640080" cy="274320"/>
+          </a:xfrm>
+          <a:prstGeom prst="rect">
+            <a:avLst/>
+          </a:prstGeom>
+          <a:noFill/>
+        </p:spPr>
+        <p:txBody>
+          <a:bodyPr wrap="square">
+            <a:spAutoFit/>
+          </a:bodyPr>
+          <a:lstStyle/>
+          <a:p>
+            <a:pPr algn="r"/>
+            <a:r>
+              <a:rPr sz="1100" b="0" i="0">
+                <a:solidFill>
+                  <a:srgbClr val="666666"/>
+                </a:solidFill>
+                <a:latin typeface="Calibri"/>
+              </a:rPr>
+              <a:t>17</a:t>
+            </a:r>
+          </a:p>
+        </p:txBody>
+      </p:sp>
+    </p:spTree>
+  </p:cSld>
+  <p:clrMapOvr>
+    <a:masterClrMapping/>
+  </p:clrMapOvr>
+</p:sld>
+</file>
+
+<file path=ppt/slides/slide18.xml><?xml version="1.0" encoding="utf-8"?>
+<p:sld xmlns:a="http://schemas.openxmlformats.org/drawingml/2006/main" xmlns:p="http://schemas.openxmlformats.org/presentationml/2006/main" xmlns:r="http://schemas.openxmlformats.org/officeDocument/2006/relationships">
+  <p:cSld>
+    <p:bg>
+      <p:bgPr>
+        <a:solidFill>
+          <a:srgbClr val="FFFFFF"/>
+        </a:solidFill>
+        <a:effectLst/>
+      </p:bgPr>
+    </p:bg>
+    <p:spTree>
+      <p:nvGrpSpPr>
+        <p:cNvPr id="1" name=""/>
+        <p:cNvGrpSpPr/>
+        <p:nvPr/>
+      </p:nvGrpSpPr>
+      <p:grpSpPr/>
+      <p:sp>
+        <p:nvSpPr>
+          <p:cNvPr id="2" name="Rectangle 1"/>
+          <p:cNvSpPr/>
+          <p:nvPr/>
+        </p:nvSpPr>
+        <p:spPr>
+          <a:xfrm>
+            <a:off x="0" y="0"/>
+            <a:ext cx="12191695" cy="960120"/>
+          </a:xfrm>
+          <a:prstGeom prst="rect">
+            <a:avLst/>
+          </a:prstGeom>
+          <a:solidFill>
+            <a:srgbClr val="095292"/>
+          </a:solidFill>
+          <a:ln>
+            <a:noFill/>
+          </a:ln>
+        </p:spPr>
+        <p:style>
+          <a:lnRef idx="1">
+            <a:schemeClr val="accent1"/>
+          </a:lnRef>
+          <a:fillRef idx="3">
+            <a:schemeClr val="accent1"/>
+          </a:fillRef>
+          <a:effectRef idx="2">
+            <a:schemeClr val="accent1"/>
+          </a:effectRef>
+          <a:fontRef idx="minor">
+            <a:schemeClr val="lt1"/>
+          </a:fontRef>
+        </p:style>
+        <p:txBody>
+          <a:bodyPr rtlCol="0" anchor="ctr"/>
+          <a:lstStyle/>
+          <a:p>
+            <a:pPr algn="ctr"/>
+          </a:p>
+        </p:txBody>
+      </p:sp>
+      <p:sp>
+        <p:nvSpPr>
+          <p:cNvPr id="3" name="Rectangle 2"/>
+          <p:cNvSpPr/>
+          <p:nvPr/>
+        </p:nvSpPr>
+        <p:spPr>
+          <a:xfrm>
+            <a:off x="0" y="960120"/>
+            <a:ext cx="12191695" cy="41148"/>
+          </a:xfrm>
+          <a:prstGeom prst="rect">
+            <a:avLst/>
+          </a:prstGeom>
+          <a:solidFill>
+            <a:srgbClr val="FFD000"/>
+          </a:solidFill>
+          <a:ln>
+            <a:noFill/>
+          </a:ln>
+        </p:spPr>
+        <p:style>
+          <a:lnRef idx="1">
+            <a:schemeClr val="accent1"/>
+          </a:lnRef>
+          <a:fillRef idx="3">
+            <a:schemeClr val="accent1"/>
+          </a:fillRef>
+          <a:effectRef idx="2">
+            <a:schemeClr val="accent1"/>
+          </a:effectRef>
+          <a:fontRef idx="minor">
+            <a:schemeClr val="lt1"/>
+          </a:fontRef>
+        </p:style>
+        <p:txBody>
+          <a:bodyPr rtlCol="0" anchor="ctr"/>
+          <a:lstStyle/>
+          <a:p>
+            <a:pPr algn="ctr"/>
+          </a:p>
+        </p:txBody>
+      </p:sp>
+      <p:sp>
+        <p:nvSpPr>
+          <p:cNvPr id="4" name="TextBox 3"/>
+          <p:cNvSpPr txBox="1"/>
+          <p:nvPr/>
+        </p:nvSpPr>
+        <p:spPr>
+          <a:xfrm>
+            <a:off x="457200" y="164592"/>
+            <a:ext cx="11277295" cy="502920"/>
+          </a:xfrm>
+          <a:prstGeom prst="rect">
+            <a:avLst/>
+          </a:prstGeom>
+          <a:noFill/>
+        </p:spPr>
+        <p:txBody>
+          <a:bodyPr wrap="square">
+            <a:spAutoFit/>
+          </a:bodyPr>
+          <a:lstStyle/>
+          <a:p>
+            <a:r>
+              <a:rPr sz="2600" b="1" i="0">
+                <a:solidFill>
+                  <a:srgbClr val="FFFFFF"/>
+                </a:solidFill>
+                <a:latin typeface="Calibri"/>
+              </a:rPr>
+              <a:t>Preguntas frecuentes y cierre conceptual () (1/3)</a:t>
+            </a:r>
+          </a:p>
+        </p:txBody>
+      </p:sp>
+      <p:sp>
+        <p:nvSpPr>
+          <p:cNvPr id="5" name="TextBox 4"/>
+          <p:cNvSpPr txBox="1"/>
+          <p:nvPr/>
+        </p:nvSpPr>
+        <p:spPr>
+          <a:xfrm>
+            <a:off x="457200" y="1170432"/>
+            <a:ext cx="11277295" cy="5230368"/>
+          </a:xfrm>
+          <a:prstGeom prst="rect">
+            <a:avLst/>
+          </a:prstGeom>
+          <a:noFill/>
+        </p:spPr>
+        <p:txBody>
+          <a:bodyPr wrap="square">
+            <a:spAutoFit/>
+          </a:bodyPr>
+          <a:lstStyle/>
+          <a:p>
+            <a:pPr>
+              <a:spcAft>
+                <a:spcPts val="800"/>
+              </a:spcAft>
+            </a:pPr>
+            <a:r>
+              <a:rPr sz="2000" b="0" i="0">
+                <a:solidFill>
+                  <a:srgbClr val="333333"/>
+                </a:solidFill>
+                <a:latin typeface="Calibri"/>
+              </a:rPr>
+              <a:t>–   La primera es por que documentar limites si el autoescalado es automatico; la respuesta es que automatico significa que ejecuta la politica que alguien escribio, no que decide bien: sin maximo escala el costo</a:t>
+            </a:r>
+          </a:p>
+          <a:p>
+            <a:pPr>
+              <a:spcAft>
+                <a:spcPts val="800"/>
+              </a:spcAft>
+            </a:pPr>
+            <a:r>
+              <a:rPr sz="2000" b="0" i="0">
+                <a:solidFill>
+                  <a:srgbClr val="333333"/>
+                </a:solidFill>
+                <a:latin typeface="Calibri"/>
+              </a:rPr>
+              <a:t>–   Sin minimo pierde disponibilidad, con la metrica equivocada no reacciona y con umbrales simetricos oscila; el automatismo amplifica la calidad de la decision humana en ambos sentidos.</a:t>
+            </a:r>
+          </a:p>
+          <a:p>
+            <a:pPr>
+              <a:spcAft>
+                <a:spcPts val="800"/>
+              </a:spcAft>
+            </a:pPr>
+            <a:r>
+              <a:rPr sz="2000" b="0" i="0">
+                <a:solidFill>
+                  <a:srgbClr val="333333"/>
+                </a:solidFill>
+                <a:latin typeface="Calibri"/>
+              </a:rPr>
+              <a:t>–   La segunda es si no seria mejor serverless, que "escala infinito"; la respuesta reconoce la ventaja real, que escala por peticion y no cobra en reposo</a:t>
+            </a:r>
+          </a:p>
+          <a:p>
+            <a:pPr>
+              <a:spcAft>
+                <a:spcPts val="800"/>
+              </a:spcAft>
+            </a:pPr>
+            <a:r>
+              <a:rPr sz="2000" b="0" i="0">
+                <a:solidFill>
+                  <a:srgbClr val="333333"/>
+                </a:solidFill>
+                <a:latin typeface="Calibri"/>
+              </a:rPr>
+              <a:t>–   Y nombra los tres costos: el arranque en frio, esa demora extra de cientos de milisegundos a segundos cuando una funcion se invoca despues de estar inactiva; el agotamiento de conexiones</a:t>
+            </a:r>
+          </a:p>
+          <a:p>
+            <a:pPr>
+              <a:spcAft>
+                <a:spcPts val="800"/>
+              </a:spcAft>
+            </a:pPr>
+            <a:r>
+              <a:rPr sz="2000" b="0" i="0">
+                <a:solidFill>
+                  <a:srgbClr val="333333"/>
+                </a:solidFill>
+                <a:latin typeface="Calibri"/>
+              </a:rPr>
+              <a:t>–   Porque mil funciones concurrentes matan a la base de datos igual que mil contenedores; y el costo por invocacion, que a volumen alto puede superar el de instancias fijas.</a:t>
+            </a:r>
+          </a:p>
+          <a:p>
+            <a:pPr>
+              <a:spcAft>
+                <a:spcPts val="800"/>
+              </a:spcAft>
+            </a:pPr>
+            <a:r>
+              <a:rPr sz="2000" b="0" i="0">
+                <a:solidFill>
+                  <a:srgbClr val="333333"/>
+                </a:solidFill>
+                <a:latin typeface="Calibri"/>
+              </a:rPr>
+              <a:t>–   La tercera es cuantas instancias poner, y la respuesta sale de la aritmetica de la Clase 12 y no del gusto: si el pico estimado es de 5 RPS y una instancia sostiene con holgura unos 3 RPS dentro del objetivo de p95, se necesitan 2 con una de margen</a:t>
+            </a:r>
+          </a:p>
+        </p:txBody>
+      </p:sp>
+      <p:sp>
+        <p:nvSpPr>
+          <p:cNvPr id="6" name="TextBox 5"/>
+          <p:cNvSpPr txBox="1"/>
+          <p:nvPr/>
+        </p:nvSpPr>
+        <p:spPr>
+          <a:xfrm>
+            <a:off x="11185855" y="6473952"/>
+            <a:ext cx="640080" cy="274320"/>
+          </a:xfrm>
+          <a:prstGeom prst="rect">
+            <a:avLst/>
+          </a:prstGeom>
+          <a:noFill/>
+        </p:spPr>
+        <p:txBody>
+          <a:bodyPr wrap="square">
+            <a:spAutoFit/>
+          </a:bodyPr>
+          <a:lstStyle/>
+          <a:p>
+            <a:pPr algn="r"/>
+            <a:r>
+              <a:rPr sz="1100" b="0" i="0">
+                <a:solidFill>
+                  <a:srgbClr val="666666"/>
+                </a:solidFill>
+                <a:latin typeface="Calibri"/>
+              </a:rPr>
+              <a:t>18</a:t>
+            </a:r>
+          </a:p>
+        </p:txBody>
+      </p:sp>
+    </p:spTree>
+  </p:cSld>
+  <p:clrMapOvr>
+    <a:masterClrMapping/>
+  </p:clrMapOvr>
+</p:sld>
+</file>
+
+<file path=ppt/slides/slide19.xml><?xml version="1.0" encoding="utf-8"?>
+<p:sld xmlns:a="http://schemas.openxmlformats.org/drawingml/2006/main" xmlns:p="http://schemas.openxmlformats.org/presentationml/2006/main" xmlns:r="http://schemas.openxmlformats.org/officeDocument/2006/relationships">
+  <p:cSld>
+    <p:bg>
+      <p:bgPr>
+        <a:solidFill>
+          <a:srgbClr val="FFFFFF"/>
+        </a:solidFill>
+        <a:effectLst/>
+      </p:bgPr>
+    </p:bg>
+    <p:spTree>
+      <p:nvGrpSpPr>
+        <p:cNvPr id="1" name=""/>
+        <p:cNvGrpSpPr/>
+        <p:nvPr/>
+      </p:nvGrpSpPr>
+      <p:grpSpPr/>
+      <p:sp>
+        <p:nvSpPr>
+          <p:cNvPr id="2" name="Rectangle 1"/>
+          <p:cNvSpPr/>
+          <p:nvPr/>
+        </p:nvSpPr>
+        <p:spPr>
+          <a:xfrm>
+            <a:off x="0" y="0"/>
+            <a:ext cx="12191695" cy="960120"/>
+          </a:xfrm>
+          <a:prstGeom prst="rect">
+            <a:avLst/>
+          </a:prstGeom>
+          <a:solidFill>
+            <a:srgbClr val="095292"/>
+          </a:solidFill>
+          <a:ln>
+            <a:noFill/>
+          </a:ln>
+        </p:spPr>
+        <p:style>
+          <a:lnRef idx="1">
+            <a:schemeClr val="accent1"/>
+          </a:lnRef>
+          <a:fillRef idx="3">
+            <a:schemeClr val="accent1"/>
+          </a:fillRef>
+          <a:effectRef idx="2">
+            <a:schemeClr val="accent1"/>
+          </a:effectRef>
+          <a:fontRef idx="minor">
+            <a:schemeClr val="lt1"/>
+          </a:fontRef>
+        </p:style>
+        <p:txBody>
+          <a:bodyPr rtlCol="0" anchor="ctr"/>
+          <a:lstStyle/>
+          <a:p>
+            <a:pPr algn="ctr"/>
+          </a:p>
+        </p:txBody>
+      </p:sp>
+      <p:sp>
+        <p:nvSpPr>
+          <p:cNvPr id="3" name="Rectangle 2"/>
+          <p:cNvSpPr/>
+          <p:nvPr/>
+        </p:nvSpPr>
+        <p:spPr>
+          <a:xfrm>
+            <a:off x="0" y="960120"/>
+            <a:ext cx="12191695" cy="41148"/>
+          </a:xfrm>
+          <a:prstGeom prst="rect">
+            <a:avLst/>
+          </a:prstGeom>
+          <a:solidFill>
+            <a:srgbClr val="FFD000"/>
+          </a:solidFill>
+          <a:ln>
+            <a:noFill/>
+          </a:ln>
+        </p:spPr>
+        <p:style>
+          <a:lnRef idx="1">
+            <a:schemeClr val="accent1"/>
+          </a:lnRef>
+          <a:fillRef idx="3">
+            <a:schemeClr val="accent1"/>
+          </a:fillRef>
+          <a:effectRef idx="2">
+            <a:schemeClr val="accent1"/>
+          </a:effectRef>
+          <a:fontRef idx="minor">
+            <a:schemeClr val="lt1"/>
+          </a:fontRef>
+        </p:style>
+        <p:txBody>
+          <a:bodyPr rtlCol="0" anchor="ctr"/>
+          <a:lstStyle/>
+          <a:p>
+            <a:pPr algn="ctr"/>
+          </a:p>
+        </p:txBody>
+      </p:sp>
+      <p:sp>
+        <p:nvSpPr>
+          <p:cNvPr id="4" name="TextBox 3"/>
+          <p:cNvSpPr txBox="1"/>
+          <p:nvPr/>
+        </p:nvSpPr>
+        <p:spPr>
+          <a:xfrm>
+            <a:off x="457200" y="164592"/>
+            <a:ext cx="11277295" cy="502920"/>
+          </a:xfrm>
+          <a:prstGeom prst="rect">
+            <a:avLst/>
+          </a:prstGeom>
+          <a:noFill/>
+        </p:spPr>
+        <p:txBody>
+          <a:bodyPr wrap="square">
+            <a:spAutoFit/>
+          </a:bodyPr>
+          <a:lstStyle/>
+          <a:p>
+            <a:r>
+              <a:rPr sz="2600" b="1" i="0">
+                <a:solidFill>
+                  <a:srgbClr val="FFFFFF"/>
+                </a:solidFill>
+                <a:latin typeface="Calibri"/>
+              </a:rPr>
+              <a:t>Preguntas frecuentes y cierre conceptual () (2/3)</a:t>
+            </a:r>
+          </a:p>
+        </p:txBody>
+      </p:sp>
+      <p:sp>
+        <p:nvSpPr>
+          <p:cNvPr id="5" name="TextBox 4"/>
+          <p:cNvSpPr txBox="1"/>
+          <p:nvPr/>
+        </p:nvSpPr>
+        <p:spPr>
+          <a:xfrm>
+            <a:off x="457200" y="1170432"/>
+            <a:ext cx="11277295" cy="5230368"/>
+          </a:xfrm>
+          <a:prstGeom prst="rect">
+            <a:avLst/>
+          </a:prstGeom>
+          <a:noFill/>
+        </p:spPr>
+        <p:txBody>
+          <a:bodyPr wrap="square">
+            <a:spAutoFit/>
+          </a:bodyPr>
+          <a:lstStyle/>
+          <a:p>
+            <a:pPr>
+              <a:spcAft>
+                <a:spcPts val="800"/>
+              </a:spcAft>
+            </a:pPr>
+            <a:r>
+              <a:rPr sz="2000" b="0" i="0">
+                <a:solidFill>
+                  <a:srgbClr val="333333"/>
+                </a:solidFill>
+                <a:latin typeface="Calibri"/>
+              </a:rPr>
+              <a:t>–   Y el maximo se fija donde el costo mensual deja de ser defendible o donde choca con el limite de conexiones, el que llegue primero.</a:t>
+            </a:r>
+          </a:p>
+          <a:p>
+            <a:pPr>
+              <a:spcAft>
+                <a:spcPts val="800"/>
+              </a:spcAft>
+            </a:pPr>
+            <a:r>
+              <a:rPr sz="2000" b="0" i="0">
+                <a:solidFill>
+                  <a:srgbClr val="333333"/>
+                </a:solidFill>
+                <a:latin typeface="Calibri"/>
+              </a:rPr>
+              <a:t>–   Para verificar el diseno sin gastar un peso alcanza Killercoda con docker compose para levantar dos o tres replicas del stub detras de un balanceador y comprobar que la sesion no se rompe</a:t>
+            </a:r>
+          </a:p>
+          <a:p>
+            <a:pPr>
+              <a:spcAft>
+                <a:spcPts val="800"/>
+              </a:spcAft>
+            </a:pPr>
+            <a:r>
+              <a:rPr sz="2000" b="0" i="0">
+                <a:solidFill>
+                  <a:srgbClr val="333333"/>
+                </a:solidFill>
+                <a:latin typeface="Calibri"/>
+              </a:rPr>
+              <a:t>–   El entregable formal es una nota sobre el diagrama de despliegue y la seccion escrita con estrategia, trigger, limite y lo que no escala, que la Clase 14 evaluara y la Clase 15 exigira sustentar.</a:t>
+            </a:r>
+          </a:p>
+          <a:p>
+            <a:pPr>
+              <a:spcAft>
+                <a:spcPts val="800"/>
+              </a:spcAft>
+            </a:pPr>
+            <a:r>
+              <a:rPr sz="2000" b="0" i="0">
+                <a:solidFill>
+                  <a:srgbClr val="333333"/>
+                </a:solidFill>
+                <a:latin typeface="Calibri"/>
+              </a:rPr>
+              <a:t>–   Error tipico del docente que no domina el tema: presentar el autoescalado como solucion general a los problemas de rendimiento.</a:t>
+            </a:r>
+          </a:p>
+          <a:p>
+            <a:pPr>
+              <a:spcAft>
+                <a:spcPts val="800"/>
+              </a:spcAft>
+            </a:pPr>
+            <a:r>
+              <a:rPr sz="2000" b="0" i="0">
+                <a:solidFill>
+                  <a:srgbClr val="333333"/>
+                </a:solidFill>
+                <a:latin typeface="Calibri"/>
+              </a:rPr>
+              <a:t>–   Si no se identifico primero el cuello de botella, escalar la pieza equivocada no mejora nada y sube el costo</a:t>
+            </a:r>
+          </a:p>
+          <a:p>
+            <a:pPr>
+              <a:spcAft>
+                <a:spcPts val="800"/>
+              </a:spcAft>
+            </a:pPr>
+            <a:r>
+              <a:rPr sz="2000" b="0" i="0">
+                <a:solidFill>
+                  <a:srgbClr val="333333"/>
+                </a:solidFill>
+                <a:latin typeface="Calibri"/>
+              </a:rPr>
+              <a:t>–   El caso mas ilustrativo es la API limitada por la base de datos, donde agregar instancias empeora la situacion porque suma presion sobre el recurso ya saturado.</a:t>
+            </a:r>
+          </a:p>
+          <a:p>
+            <a:pPr>
+              <a:spcAft>
+                <a:spcPts val="800"/>
+              </a:spcAft>
+            </a:pPr>
+            <a:r>
+              <a:rPr sz="2000" b="0" i="0">
+                <a:solidFill>
+                  <a:srgbClr val="333333"/>
+                </a:solidFill>
+                <a:latin typeface="Calibri"/>
+              </a:rPr>
+              <a:t>–   La consecuencia pedagogica es que el estudiante sale creyendo que la escalabilidad se compra con configuracion, y en el Parcial 3 responde con la definicion de vertical y horizontal sin poder decidir cual aplica a un caso.</a:t>
+            </a:r>
+          </a:p>
+        </p:txBody>
+      </p:sp>
+      <p:sp>
+        <p:nvSpPr>
+          <p:cNvPr id="6" name="TextBox 5"/>
+          <p:cNvSpPr txBox="1"/>
+          <p:nvPr/>
+        </p:nvSpPr>
+        <p:spPr>
+          <a:xfrm>
+            <a:off x="11185855" y="6473952"/>
+            <a:ext cx="640080" cy="274320"/>
+          </a:xfrm>
+          <a:prstGeom prst="rect">
+            <a:avLst/>
+          </a:prstGeom>
+          <a:noFill/>
+        </p:spPr>
+        <p:txBody>
+          <a:bodyPr wrap="square">
+            <a:spAutoFit/>
+          </a:bodyPr>
+          <a:lstStyle/>
+          <a:p>
+            <a:pPr algn="r"/>
+            <a:r>
+              <a:rPr sz="1100" b="0" i="0">
+                <a:solidFill>
+                  <a:srgbClr val="666666"/>
+                </a:solidFill>
+                <a:latin typeface="Calibri"/>
+              </a:rPr>
+              <a:t>19</a:t>
             </a:r>
           </a:p>
         </p:txBody>
@@ -4981,6 +6708,4148 @@
 </p:sld>
 </file>
 
+<file path=ppt/slides/slide20.xml><?xml version="1.0" encoding="utf-8"?>
+<p:sld xmlns:a="http://schemas.openxmlformats.org/drawingml/2006/main" xmlns:p="http://schemas.openxmlformats.org/presentationml/2006/main" xmlns:r="http://schemas.openxmlformats.org/officeDocument/2006/relationships">
+  <p:cSld>
+    <p:bg>
+      <p:bgPr>
+        <a:solidFill>
+          <a:srgbClr val="FFFFFF"/>
+        </a:solidFill>
+        <a:effectLst/>
+      </p:bgPr>
+    </p:bg>
+    <p:spTree>
+      <p:nvGrpSpPr>
+        <p:cNvPr id="1" name=""/>
+        <p:cNvGrpSpPr/>
+        <p:nvPr/>
+      </p:nvGrpSpPr>
+      <p:grpSpPr/>
+      <p:sp>
+        <p:nvSpPr>
+          <p:cNvPr id="2" name="Rectangle 1"/>
+          <p:cNvSpPr/>
+          <p:nvPr/>
+        </p:nvSpPr>
+        <p:spPr>
+          <a:xfrm>
+            <a:off x="0" y="0"/>
+            <a:ext cx="12191695" cy="960120"/>
+          </a:xfrm>
+          <a:prstGeom prst="rect">
+            <a:avLst/>
+          </a:prstGeom>
+          <a:solidFill>
+            <a:srgbClr val="095292"/>
+          </a:solidFill>
+          <a:ln>
+            <a:noFill/>
+          </a:ln>
+        </p:spPr>
+        <p:style>
+          <a:lnRef idx="1">
+            <a:schemeClr val="accent1"/>
+          </a:lnRef>
+          <a:fillRef idx="3">
+            <a:schemeClr val="accent1"/>
+          </a:fillRef>
+          <a:effectRef idx="2">
+            <a:schemeClr val="accent1"/>
+          </a:effectRef>
+          <a:fontRef idx="minor">
+            <a:schemeClr val="lt1"/>
+          </a:fontRef>
+        </p:style>
+        <p:txBody>
+          <a:bodyPr rtlCol="0" anchor="ctr"/>
+          <a:lstStyle/>
+          <a:p>
+            <a:pPr algn="ctr"/>
+          </a:p>
+        </p:txBody>
+      </p:sp>
+      <p:sp>
+        <p:nvSpPr>
+          <p:cNvPr id="3" name="Rectangle 2"/>
+          <p:cNvSpPr/>
+          <p:nvPr/>
+        </p:nvSpPr>
+        <p:spPr>
+          <a:xfrm>
+            <a:off x="0" y="960120"/>
+            <a:ext cx="12191695" cy="41148"/>
+          </a:xfrm>
+          <a:prstGeom prst="rect">
+            <a:avLst/>
+          </a:prstGeom>
+          <a:solidFill>
+            <a:srgbClr val="FFD000"/>
+          </a:solidFill>
+          <a:ln>
+            <a:noFill/>
+          </a:ln>
+        </p:spPr>
+        <p:style>
+          <a:lnRef idx="1">
+            <a:schemeClr val="accent1"/>
+          </a:lnRef>
+          <a:fillRef idx="3">
+            <a:schemeClr val="accent1"/>
+          </a:fillRef>
+          <a:effectRef idx="2">
+            <a:schemeClr val="accent1"/>
+          </a:effectRef>
+          <a:fontRef idx="minor">
+            <a:schemeClr val="lt1"/>
+          </a:fontRef>
+        </p:style>
+        <p:txBody>
+          <a:bodyPr rtlCol="0" anchor="ctr"/>
+          <a:lstStyle/>
+          <a:p>
+            <a:pPr algn="ctr"/>
+          </a:p>
+        </p:txBody>
+      </p:sp>
+      <p:sp>
+        <p:nvSpPr>
+          <p:cNvPr id="4" name="TextBox 3"/>
+          <p:cNvSpPr txBox="1"/>
+          <p:nvPr/>
+        </p:nvSpPr>
+        <p:spPr>
+          <a:xfrm>
+            <a:off x="457200" y="164592"/>
+            <a:ext cx="11277295" cy="502920"/>
+          </a:xfrm>
+          <a:prstGeom prst="rect">
+            <a:avLst/>
+          </a:prstGeom>
+          <a:noFill/>
+        </p:spPr>
+        <p:txBody>
+          <a:bodyPr wrap="square">
+            <a:spAutoFit/>
+          </a:bodyPr>
+          <a:lstStyle/>
+          <a:p>
+            <a:r>
+              <a:rPr sz="2600" b="1" i="0">
+                <a:solidFill>
+                  <a:srgbClr val="FFFFFF"/>
+                </a:solidFill>
+                <a:latin typeface="Calibri"/>
+              </a:rPr>
+              <a:t>Preguntas frecuentes y cierre conceptual () (3/3)</a:t>
+            </a:r>
+          </a:p>
+        </p:txBody>
+      </p:sp>
+      <p:sp>
+        <p:nvSpPr>
+          <p:cNvPr id="5" name="TextBox 4"/>
+          <p:cNvSpPr txBox="1"/>
+          <p:nvPr/>
+        </p:nvSpPr>
+        <p:spPr>
+          <a:xfrm>
+            <a:off x="457200" y="1170432"/>
+            <a:ext cx="11277295" cy="5230368"/>
+          </a:xfrm>
+          <a:prstGeom prst="rect">
+            <a:avLst/>
+          </a:prstGeom>
+          <a:noFill/>
+        </p:spPr>
+        <p:txBody>
+          <a:bodyPr wrap="square">
+            <a:spAutoFit/>
+          </a:bodyPr>
+          <a:lstStyle/>
+          <a:p>
+            <a:pPr>
+              <a:spcAft>
+                <a:spcPts val="800"/>
+              </a:spcAft>
+            </a:pPr>
+            <a:r>
+              <a:rPr sz="2000" b="0" i="0">
+                <a:solidFill>
+                  <a:srgbClr val="333333"/>
+                </a:solidFill>
+                <a:latin typeface="Calibri"/>
+              </a:rPr>
+              <a:t>–   El segundo error es celebrar el escalado horizontal como si fuera gratis: presentarlo solo como "agregar instancias" sin exigir la revision del estado en memoria, ni el limite de conexiones, ni la capa de datos.</a:t>
+            </a:r>
+          </a:p>
+          <a:p>
+            <a:pPr>
+              <a:spcAft>
+                <a:spcPts val="800"/>
+              </a:spcAft>
+            </a:pPr>
+            <a:r>
+              <a:rPr sz="2000" b="0" i="0">
+                <a:solidFill>
+                  <a:srgbClr val="333333"/>
+                </a:solidFill>
+                <a:latin typeface="Calibri"/>
+              </a:rPr>
+              <a:t>–   Si eso se deja pasar, el entregable llega con la seccion de "que no escala" vacia o rellenada con una frase generica</a:t>
+            </a:r>
+          </a:p>
+          <a:p>
+            <a:pPr>
+              <a:spcAft>
+                <a:spcPts val="800"/>
+              </a:spcAft>
+            </a:pPr>
+            <a:r>
+              <a:rPr sz="2000" b="0" i="0">
+                <a:solidFill>
+                  <a:srgbClr val="333333"/>
+                </a:solidFill>
+                <a:latin typeface="Calibri"/>
+              </a:rPr>
+              <a:t>–   Y en la Clase 15 el estudiante afirma que su sistema soporta cualquier crecimiento mientras el diagrama muestra una unica base de datos con la sesion guardada en memoria</a:t>
+            </a:r>
+          </a:p>
+          <a:p>
+            <a:pPr>
+              <a:spcAft>
+                <a:spcPts val="800"/>
+              </a:spcAft>
+            </a:pPr>
+            <a:r>
+              <a:rPr sz="2000" b="0" i="0">
+                <a:solidFill>
+                  <a:srgbClr val="333333"/>
+                </a:solidFill>
+                <a:latin typeface="Calibri"/>
+              </a:rPr>
+              <a:t>–   Que es la contradiccion mas facil de detectar y la mas costosa de explicar en ese momento.</a:t>
+            </a:r>
+          </a:p>
+        </p:txBody>
+      </p:sp>
+      <p:sp>
+        <p:nvSpPr>
+          <p:cNvPr id="6" name="TextBox 5"/>
+          <p:cNvSpPr txBox="1"/>
+          <p:nvPr/>
+        </p:nvSpPr>
+        <p:spPr>
+          <a:xfrm>
+            <a:off x="11185855" y="6473952"/>
+            <a:ext cx="640080" cy="274320"/>
+          </a:xfrm>
+          <a:prstGeom prst="rect">
+            <a:avLst/>
+          </a:prstGeom>
+          <a:noFill/>
+        </p:spPr>
+        <p:txBody>
+          <a:bodyPr wrap="square">
+            <a:spAutoFit/>
+          </a:bodyPr>
+          <a:lstStyle/>
+          <a:p>
+            <a:pPr algn="r"/>
+            <a:r>
+              <a:rPr sz="1100" b="0" i="0">
+                <a:solidFill>
+                  <a:srgbClr val="666666"/>
+                </a:solidFill>
+                <a:latin typeface="Calibri"/>
+              </a:rPr>
+              <a:t>20</a:t>
+            </a:r>
+          </a:p>
+        </p:txBody>
+      </p:sp>
+    </p:spTree>
+  </p:cSld>
+  <p:clrMapOvr>
+    <a:masterClrMapping/>
+  </p:clrMapOvr>
+</p:sld>
+</file>
+
+<file path=ppt/slides/slide21.xml><?xml version="1.0" encoding="utf-8"?>
+<p:sld xmlns:a="http://schemas.openxmlformats.org/drawingml/2006/main" xmlns:p="http://schemas.openxmlformats.org/presentationml/2006/main" xmlns:r="http://schemas.openxmlformats.org/officeDocument/2006/relationships">
+  <p:cSld>
+    <p:bg>
+      <p:bgPr>
+        <a:solidFill>
+          <a:srgbClr val="FFFFFF"/>
+        </a:solidFill>
+        <a:effectLst/>
+      </p:bgPr>
+    </p:bg>
+    <p:spTree>
+      <p:nvGrpSpPr>
+        <p:cNvPr id="1" name=""/>
+        <p:cNvGrpSpPr/>
+        <p:nvPr/>
+      </p:nvGrpSpPr>
+      <p:grpSpPr/>
+      <p:sp>
+        <p:nvSpPr>
+          <p:cNvPr id="2" name="Rectangle 1"/>
+          <p:cNvSpPr/>
+          <p:nvPr/>
+        </p:nvSpPr>
+        <p:spPr>
+          <a:xfrm>
+            <a:off x="0" y="0"/>
+            <a:ext cx="12191695" cy="960120"/>
+          </a:xfrm>
+          <a:prstGeom prst="rect">
+            <a:avLst/>
+          </a:prstGeom>
+          <a:solidFill>
+            <a:srgbClr val="095292"/>
+          </a:solidFill>
+          <a:ln>
+            <a:noFill/>
+          </a:ln>
+        </p:spPr>
+        <p:style>
+          <a:lnRef idx="1">
+            <a:schemeClr val="accent1"/>
+          </a:lnRef>
+          <a:fillRef idx="3">
+            <a:schemeClr val="accent1"/>
+          </a:fillRef>
+          <a:effectRef idx="2">
+            <a:schemeClr val="accent1"/>
+          </a:effectRef>
+          <a:fontRef idx="minor">
+            <a:schemeClr val="lt1"/>
+          </a:fontRef>
+        </p:style>
+        <p:txBody>
+          <a:bodyPr rtlCol="0" anchor="ctr"/>
+          <a:lstStyle/>
+          <a:p>
+            <a:pPr algn="ctr"/>
+          </a:p>
+        </p:txBody>
+      </p:sp>
+      <p:sp>
+        <p:nvSpPr>
+          <p:cNvPr id="3" name="Rectangle 2"/>
+          <p:cNvSpPr/>
+          <p:nvPr/>
+        </p:nvSpPr>
+        <p:spPr>
+          <a:xfrm>
+            <a:off x="0" y="960120"/>
+            <a:ext cx="12191695" cy="41148"/>
+          </a:xfrm>
+          <a:prstGeom prst="rect">
+            <a:avLst/>
+          </a:prstGeom>
+          <a:solidFill>
+            <a:srgbClr val="FFD000"/>
+          </a:solidFill>
+          <a:ln>
+            <a:noFill/>
+          </a:ln>
+        </p:spPr>
+        <p:style>
+          <a:lnRef idx="1">
+            <a:schemeClr val="accent1"/>
+          </a:lnRef>
+          <a:fillRef idx="3">
+            <a:schemeClr val="accent1"/>
+          </a:fillRef>
+          <a:effectRef idx="2">
+            <a:schemeClr val="accent1"/>
+          </a:effectRef>
+          <a:fontRef idx="minor">
+            <a:schemeClr val="lt1"/>
+          </a:fontRef>
+        </p:style>
+        <p:txBody>
+          <a:bodyPr rtlCol="0" anchor="ctr"/>
+          <a:lstStyle/>
+          <a:p>
+            <a:pPr algn="ctr"/>
+          </a:p>
+        </p:txBody>
+      </p:sp>
+      <p:sp>
+        <p:nvSpPr>
+          <p:cNvPr id="4" name="TextBox 3"/>
+          <p:cNvSpPr txBox="1"/>
+          <p:nvPr/>
+        </p:nvSpPr>
+        <p:spPr>
+          <a:xfrm>
+            <a:off x="457200" y="164592"/>
+            <a:ext cx="11277295" cy="502920"/>
+          </a:xfrm>
+          <a:prstGeom prst="rect">
+            <a:avLst/>
+          </a:prstGeom>
+          <a:noFill/>
+        </p:spPr>
+        <p:txBody>
+          <a:bodyPr wrap="square">
+            <a:spAutoFit/>
+          </a:bodyPr>
+          <a:lstStyle/>
+          <a:p>
+            <a:r>
+              <a:rPr sz="2600" b="1" i="0">
+                <a:solidFill>
+                  <a:srgbClr val="FFFFFF"/>
+                </a:solidFill>
+                <a:latin typeface="Calibri"/>
+              </a:rPr>
+              <a:t>Politica de autoescalado (tabla, no prosa)</a:t>
+            </a:r>
+          </a:p>
+        </p:txBody>
+      </p:sp>
+      <p:sp>
+        <p:nvSpPr>
+          <p:cNvPr id="5" name="Rounded Rectangle 4"/>
+          <p:cNvSpPr/>
+          <p:nvPr/>
+        </p:nvSpPr>
+        <p:spPr>
+          <a:xfrm>
+            <a:off x="457200" y="1261872"/>
+            <a:ext cx="11277295" cy="4773168"/>
+          </a:xfrm>
+          <a:prstGeom prst="roundRect">
+            <a:avLst>
+              <a:gd name="adj" fmla="val 12000"/>
+            </a:avLst>
+          </a:prstGeom>
+          <a:solidFill>
+            <a:srgbClr val="1E2A38"/>
+          </a:solidFill>
+          <a:ln>
+            <a:noFill/>
+          </a:ln>
+        </p:spPr>
+        <p:style>
+          <a:lnRef idx="1">
+            <a:schemeClr val="accent1"/>
+          </a:lnRef>
+          <a:fillRef idx="3">
+            <a:schemeClr val="accent1"/>
+          </a:fillRef>
+          <a:effectRef idx="2">
+            <a:schemeClr val="accent1"/>
+          </a:effectRef>
+          <a:fontRef idx="minor">
+            <a:schemeClr val="lt1"/>
+          </a:fontRef>
+        </p:style>
+        <p:txBody>
+          <a:bodyPr rtlCol="0" anchor="ctr"/>
+          <a:lstStyle/>
+          <a:p>
+            <a:pPr algn="ctr"/>
+          </a:p>
+        </p:txBody>
+      </p:sp>
+      <p:sp>
+        <p:nvSpPr>
+          <p:cNvPr id="6" name="Rectangle 5"/>
+          <p:cNvSpPr/>
+          <p:nvPr/>
+        </p:nvSpPr>
+        <p:spPr>
+          <a:xfrm>
+            <a:off x="457200" y="1261872"/>
+            <a:ext cx="11277295" cy="320040"/>
+          </a:xfrm>
+          <a:prstGeom prst="rect">
+            <a:avLst/>
+          </a:prstGeom>
+          <a:solidFill>
+            <a:srgbClr val="095292"/>
+          </a:solidFill>
+          <a:ln>
+            <a:noFill/>
+          </a:ln>
+        </p:spPr>
+        <p:style>
+          <a:lnRef idx="1">
+            <a:schemeClr val="accent1"/>
+          </a:lnRef>
+          <a:fillRef idx="3">
+            <a:schemeClr val="accent1"/>
+          </a:fillRef>
+          <a:effectRef idx="2">
+            <a:schemeClr val="accent1"/>
+          </a:effectRef>
+          <a:fontRef idx="minor">
+            <a:schemeClr val="lt1"/>
+          </a:fontRef>
+        </p:style>
+        <p:txBody>
+          <a:bodyPr rtlCol="0" anchor="ctr"/>
+          <a:lstStyle/>
+          <a:p>
+            <a:pPr algn="ctr"/>
+          </a:p>
+        </p:txBody>
+      </p:sp>
+      <p:sp>
+        <p:nvSpPr>
+          <p:cNvPr id="7" name="TextBox 6"/>
+          <p:cNvSpPr txBox="1"/>
+          <p:nvPr/>
+        </p:nvSpPr>
+        <p:spPr>
+          <a:xfrm>
+            <a:off x="685800" y="1307592"/>
+            <a:ext cx="10820095" cy="256032"/>
+          </a:xfrm>
+          <a:prstGeom prst="rect">
+            <a:avLst/>
+          </a:prstGeom>
+          <a:noFill/>
+        </p:spPr>
+        <p:txBody>
+          <a:bodyPr wrap="square" anchor="ctr"/>
+          <a:lstStyle/>
+          <a:p>
+            <a:r>
+              <a:rPr sz="1000" b="1" i="0">
+                <a:solidFill>
+                  <a:srgbClr val="269CCB"/>
+                </a:solidFill>
+                <a:latin typeface="Calibri"/>
+              </a:rPr>
+              <a:t>● ● ●</a:t>
+            </a:r>
+          </a:p>
+        </p:txBody>
+      </p:sp>
+      <p:sp>
+        <p:nvSpPr>
+          <p:cNvPr id="8" name="TextBox 7"/>
+          <p:cNvSpPr txBox="1"/>
+          <p:nvPr/>
+        </p:nvSpPr>
+        <p:spPr>
+          <a:xfrm>
+            <a:off x="777240" y="1719072"/>
+            <a:ext cx="10637215" cy="4133087"/>
+          </a:xfrm>
+          <a:prstGeom prst="rect">
+            <a:avLst/>
+          </a:prstGeom>
+          <a:noFill/>
+        </p:spPr>
+        <p:txBody>
+          <a:bodyPr wrap="square">
+            <a:spAutoFit/>
+          </a:bodyPr>
+          <a:lstStyle/>
+          <a:p>
+            <a:pPr>
+              <a:spcAft>
+                <a:spcPts val="400"/>
+              </a:spcAft>
+            </a:pPr>
+            <a:r>
+              <a:rPr sz="1400" b="0" i="0">
+                <a:solidFill>
+                  <a:srgbClr val="FFFFFF"/>
+                </a:solidFill>
+                <a:latin typeface="Calibri"/>
+              </a:rPr>
+              <a:t>Componente   | Tipo        | Trigger up      | Min | Max | Cooldown</a:t>
+            </a:r>
+          </a:p>
+          <a:p>
+            <a:pPr>
+              <a:spcAft>
+                <a:spcPts val="400"/>
+              </a:spcAft>
+            </a:pPr>
+            <a:r>
+              <a:rPr sz="1400" b="0" i="0">
+                <a:solidFill>
+                  <a:srgbClr val="FFFFFF"/>
+                </a:solidFill>
+                <a:latin typeface="Calibri"/>
+              </a:rPr>
+              <a:t>-------------|-------------|-----------------|-----|-----|---------</a:t>
+            </a:r>
+          </a:p>
+          <a:p>
+            <a:pPr>
+              <a:spcAft>
+                <a:spcPts val="400"/>
+              </a:spcAft>
+            </a:pPr>
+            <a:r>
+              <a:rPr sz="1400" b="0" i="0">
+                <a:solidFill>
+                  <a:srgbClr val="FFFFFF"/>
+                </a:solidFill>
+                <a:latin typeface="Calibri"/>
+              </a:rPr>
+              <a:t>API          | Horizontal  | CPU &gt; 70% / 5m  |  2  |  6  | 5 min</a:t>
+            </a:r>
+          </a:p>
+          <a:p>
+            <a:pPr>
+              <a:spcAft>
+                <a:spcPts val="400"/>
+              </a:spcAft>
+            </a:pPr>
+            <a:r>
+              <a:rPr sz="1400" b="0" i="0">
+                <a:solidFill>
+                  <a:srgbClr val="FFFFFF"/>
+                </a:solidFill>
+                <a:latin typeface="Calibri"/>
+              </a:rPr>
+              <a:t>Worker cola  | Horizontal  | cola &gt; 100 msg  |  1  |  4  | 3 min</a:t>
+            </a:r>
+          </a:p>
+          <a:p>
+            <a:pPr>
+              <a:spcAft>
+                <a:spcPts val="400"/>
+              </a:spcAft>
+            </a:pPr>
+            <a:r>
+              <a:rPr sz="1400" b="0" i="0">
+                <a:solidFill>
+                  <a:srgbClr val="FFFFFF"/>
+                </a:solidFill>
+                <a:latin typeface="Calibri"/>
+              </a:rPr>
+              <a:t>BD primaria  | NO escala   | -               |  1  |  1  | -</a:t>
+            </a:r>
+          </a:p>
+        </p:txBody>
+      </p:sp>
+      <p:sp>
+        <p:nvSpPr>
+          <p:cNvPr id="9" name="TextBox 8"/>
+          <p:cNvSpPr txBox="1"/>
+          <p:nvPr/>
+        </p:nvSpPr>
+        <p:spPr>
+          <a:xfrm>
+            <a:off x="457200" y="6080760"/>
+            <a:ext cx="11277295" cy="320040"/>
+          </a:xfrm>
+          <a:prstGeom prst="rect">
+            <a:avLst/>
+          </a:prstGeom>
+          <a:noFill/>
+        </p:spPr>
+        <p:txBody>
+          <a:bodyPr wrap="square">
+            <a:spAutoFit/>
+          </a:bodyPr>
+          <a:lstStyle/>
+          <a:p>
+            <a:pPr algn="ctr"/>
+            <a:r>
+              <a:rPr sz="1200" b="0" i="1">
+                <a:solidFill>
+                  <a:srgbClr val="666666"/>
+                </a:solidFill>
+                <a:latin typeface="Calibri"/>
+              </a:rPr>
+              <a:t>El 'max' es lo que evita que la factura escale sola. La BD primaria casi nunca escala horizontal.</a:t>
+            </a:r>
+          </a:p>
+        </p:txBody>
+      </p:sp>
+      <p:sp>
+        <p:nvSpPr>
+          <p:cNvPr id="10" name="TextBox 9"/>
+          <p:cNvSpPr txBox="1"/>
+          <p:nvPr/>
+        </p:nvSpPr>
+        <p:spPr>
+          <a:xfrm>
+            <a:off x="11185855" y="6473952"/>
+            <a:ext cx="640080" cy="274320"/>
+          </a:xfrm>
+          <a:prstGeom prst="rect">
+            <a:avLst/>
+          </a:prstGeom>
+          <a:noFill/>
+        </p:spPr>
+        <p:txBody>
+          <a:bodyPr wrap="square">
+            <a:spAutoFit/>
+          </a:bodyPr>
+          <a:lstStyle/>
+          <a:p>
+            <a:pPr algn="r"/>
+            <a:r>
+              <a:rPr sz="1100" b="0" i="0">
+                <a:solidFill>
+                  <a:srgbClr val="666666"/>
+                </a:solidFill>
+                <a:latin typeface="Calibri"/>
+              </a:rPr>
+              <a:t>21</a:t>
+            </a:r>
+          </a:p>
+        </p:txBody>
+      </p:sp>
+    </p:spTree>
+  </p:cSld>
+  <p:clrMapOvr>
+    <a:masterClrMapping/>
+  </p:clrMapOvr>
+</p:sld>
+</file>
+
+<file path=ppt/slides/slide22.xml><?xml version="1.0" encoding="utf-8"?>
+<p:sld xmlns:a="http://schemas.openxmlformats.org/drawingml/2006/main" xmlns:p="http://schemas.openxmlformats.org/presentationml/2006/main" xmlns:r="http://schemas.openxmlformats.org/officeDocument/2006/relationships">
+  <p:cSld>
+    <p:bg>
+      <p:bgPr>
+        <a:solidFill>
+          <a:srgbClr val="FFFFFF"/>
+        </a:solidFill>
+        <a:effectLst/>
+      </p:bgPr>
+    </p:bg>
+    <p:spTree>
+      <p:nvGrpSpPr>
+        <p:cNvPr id="1" name=""/>
+        <p:cNvGrpSpPr/>
+        <p:nvPr/>
+      </p:nvGrpSpPr>
+      <p:grpSpPr/>
+      <p:sp>
+        <p:nvSpPr>
+          <p:cNvPr id="2" name="Rectangle 1"/>
+          <p:cNvSpPr/>
+          <p:nvPr/>
+        </p:nvSpPr>
+        <p:spPr>
+          <a:xfrm>
+            <a:off x="0" y="0"/>
+            <a:ext cx="12191695" cy="1170432"/>
+          </a:xfrm>
+          <a:prstGeom prst="rect">
+            <a:avLst/>
+          </a:prstGeom>
+          <a:solidFill>
+            <a:srgbClr val="095292"/>
+          </a:solidFill>
+          <a:ln>
+            <a:noFill/>
+          </a:ln>
+        </p:spPr>
+        <p:style>
+          <a:lnRef idx="1">
+            <a:schemeClr val="accent1"/>
+          </a:lnRef>
+          <a:fillRef idx="3">
+            <a:schemeClr val="accent1"/>
+          </a:fillRef>
+          <a:effectRef idx="2">
+            <a:schemeClr val="accent1"/>
+          </a:effectRef>
+          <a:fontRef idx="minor">
+            <a:schemeClr val="lt1"/>
+          </a:fontRef>
+        </p:style>
+        <p:txBody>
+          <a:bodyPr rtlCol="0" anchor="ctr"/>
+          <a:lstStyle/>
+          <a:p>
+            <a:pPr algn="ctr"/>
+          </a:p>
+        </p:txBody>
+      </p:sp>
+      <p:sp>
+        <p:nvSpPr>
+          <p:cNvPr id="3" name="Rectangle 2"/>
+          <p:cNvSpPr/>
+          <p:nvPr/>
+        </p:nvSpPr>
+        <p:spPr>
+          <a:xfrm>
+            <a:off x="0" y="1170432"/>
+            <a:ext cx="12191695" cy="41148"/>
+          </a:xfrm>
+          <a:prstGeom prst="rect">
+            <a:avLst/>
+          </a:prstGeom>
+          <a:solidFill>
+            <a:srgbClr val="FFD000"/>
+          </a:solidFill>
+          <a:ln>
+            <a:noFill/>
+          </a:ln>
+        </p:spPr>
+        <p:style>
+          <a:lnRef idx="1">
+            <a:schemeClr val="accent1"/>
+          </a:lnRef>
+          <a:fillRef idx="3">
+            <a:schemeClr val="accent1"/>
+          </a:fillRef>
+          <a:effectRef idx="2">
+            <a:schemeClr val="accent1"/>
+          </a:effectRef>
+          <a:fontRef idx="minor">
+            <a:schemeClr val="lt1"/>
+          </a:fontRef>
+        </p:style>
+        <p:txBody>
+          <a:bodyPr rtlCol="0" anchor="ctr"/>
+          <a:lstStyle/>
+          <a:p>
+            <a:pPr algn="ctr"/>
+          </a:p>
+        </p:txBody>
+      </p:sp>
+      <p:sp>
+        <p:nvSpPr>
+          <p:cNvPr id="4" name="TextBox 3"/>
+          <p:cNvSpPr txBox="1"/>
+          <p:nvPr/>
+        </p:nvSpPr>
+        <p:spPr>
+          <a:xfrm>
+            <a:off x="457200" y="164592"/>
+            <a:ext cx="11277295" cy="384048"/>
+          </a:xfrm>
+          <a:prstGeom prst="rect">
+            <a:avLst/>
+          </a:prstGeom>
+          <a:noFill/>
+        </p:spPr>
+        <p:txBody>
+          <a:bodyPr wrap="square">
+            <a:spAutoFit/>
+          </a:bodyPr>
+          <a:lstStyle/>
+          <a:p>
+            <a:r>
+              <a:rPr sz="2600" b="1" i="0">
+                <a:solidFill>
+                  <a:srgbClr val="FFFFFF"/>
+                </a:solidFill>
+                <a:latin typeface="Calibri"/>
+              </a:rPr>
+              <a:t>Herramientas de hoy</a:t>
+            </a:r>
+          </a:p>
+        </p:txBody>
+      </p:sp>
+      <p:sp>
+        <p:nvSpPr>
+          <p:cNvPr id="5" name="TextBox 4"/>
+          <p:cNvSpPr txBox="1"/>
+          <p:nvPr/>
+        </p:nvSpPr>
+        <p:spPr>
+          <a:xfrm>
+            <a:off x="457200" y="566928"/>
+            <a:ext cx="11277295" cy="411480"/>
+          </a:xfrm>
+          <a:prstGeom prst="rect">
+            <a:avLst/>
+          </a:prstGeom>
+          <a:noFill/>
+        </p:spPr>
+        <p:txBody>
+          <a:bodyPr wrap="square">
+            <a:spAutoFit/>
+          </a:bodyPr>
+          <a:lstStyle/>
+          <a:p>
+            <a:r>
+              <a:rPr sz="1400" b="0" i="0">
+                <a:solidFill>
+                  <a:srgbClr val="B8D8EE"/>
+                </a:solidFill>
+                <a:latin typeface="Calibri"/>
+              </a:rPr>
+              <a:t>Gratis · navegador o free tier · sin cuenta de pago</a:t>
+            </a:r>
+          </a:p>
+        </p:txBody>
+      </p:sp>
+      <p:sp>
+        <p:nvSpPr>
+          <p:cNvPr id="6" name="Rounded Rectangle 5"/>
+          <p:cNvSpPr/>
+          <p:nvPr/>
+        </p:nvSpPr>
+        <p:spPr>
+          <a:xfrm>
+            <a:off x="457200" y="1591056"/>
+            <a:ext cx="3624986" cy="2299716"/>
+          </a:xfrm>
+          <a:prstGeom prst="roundRect">
+            <a:avLst>
+              <a:gd name="adj" fmla="val 12000"/>
+            </a:avLst>
+          </a:prstGeom>
+          <a:solidFill>
+            <a:srgbClr val="F2F2F2"/>
+          </a:solidFill>
+          <a:ln>
+            <a:noFill/>
+          </a:ln>
+        </p:spPr>
+        <p:style>
+          <a:lnRef idx="1">
+            <a:schemeClr val="accent1"/>
+          </a:lnRef>
+          <a:fillRef idx="3">
+            <a:schemeClr val="accent1"/>
+          </a:fillRef>
+          <a:effectRef idx="2">
+            <a:schemeClr val="accent1"/>
+          </a:effectRef>
+          <a:fontRef idx="minor">
+            <a:schemeClr val="lt1"/>
+          </a:fontRef>
+        </p:style>
+        <p:txBody>
+          <a:bodyPr rtlCol="0" anchor="ctr"/>
+          <a:lstStyle/>
+          <a:p>
+            <a:pPr algn="ctr"/>
+          </a:p>
+        </p:txBody>
+      </p:sp>
+      <p:sp>
+        <p:nvSpPr>
+          <p:cNvPr id="7" name="Rectangle 6"/>
+          <p:cNvSpPr/>
+          <p:nvPr/>
+        </p:nvSpPr>
+        <p:spPr>
+          <a:xfrm>
+            <a:off x="457200" y="1591056"/>
+            <a:ext cx="3624986" cy="64008"/>
+          </a:xfrm>
+          <a:prstGeom prst="rect">
+            <a:avLst/>
+          </a:prstGeom>
+          <a:solidFill>
+            <a:srgbClr val="095292"/>
+          </a:solidFill>
+          <a:ln>
+            <a:noFill/>
+          </a:ln>
+        </p:spPr>
+        <p:style>
+          <a:lnRef idx="1">
+            <a:schemeClr val="accent1"/>
+          </a:lnRef>
+          <a:fillRef idx="3">
+            <a:schemeClr val="accent1"/>
+          </a:fillRef>
+          <a:effectRef idx="2">
+            <a:schemeClr val="accent1"/>
+          </a:effectRef>
+          <a:fontRef idx="minor">
+            <a:schemeClr val="lt1"/>
+          </a:fontRef>
+        </p:style>
+        <p:txBody>
+          <a:bodyPr rtlCol="0" anchor="ctr"/>
+          <a:lstStyle/>
+          <a:p>
+            <a:pPr algn="ctr"/>
+          </a:p>
+        </p:txBody>
+      </p:sp>
+      <p:sp>
+        <p:nvSpPr>
+          <p:cNvPr id="8" name="Rectangle 7"/>
+          <p:cNvSpPr/>
+          <p:nvPr/>
+        </p:nvSpPr>
+        <p:spPr>
+          <a:xfrm>
+            <a:off x="457200" y="1655064"/>
+            <a:ext cx="3624986" cy="27432"/>
+          </a:xfrm>
+          <a:prstGeom prst="rect">
+            <a:avLst/>
+          </a:prstGeom>
+          <a:solidFill>
+            <a:srgbClr val="FFD000"/>
+          </a:solidFill>
+          <a:ln>
+            <a:noFill/>
+          </a:ln>
+        </p:spPr>
+        <p:style>
+          <a:lnRef idx="1">
+            <a:schemeClr val="accent1"/>
+          </a:lnRef>
+          <a:fillRef idx="3">
+            <a:schemeClr val="accent1"/>
+          </a:fillRef>
+          <a:effectRef idx="2">
+            <a:schemeClr val="accent1"/>
+          </a:effectRef>
+          <a:fontRef idx="minor">
+            <a:schemeClr val="lt1"/>
+          </a:fontRef>
+        </p:style>
+        <p:txBody>
+          <a:bodyPr rtlCol="0" anchor="ctr"/>
+          <a:lstStyle/>
+          <a:p>
+            <a:pPr algn="ctr"/>
+          </a:p>
+        </p:txBody>
+      </p:sp>
+      <p:pic>
+        <p:nvPicPr>
+          <p:cNvPr id="9" name="Picture 8" descr="google_docs.png"/>
+          <p:cNvPicPr>
+            <a:picLocks noChangeAspect="1"/>
+          </p:cNvPicPr>
+          <p:nvPr/>
+        </p:nvPicPr>
+        <p:blipFill>
+          <a:blip r:embed="rId2"/>
+          <a:stretch>
+            <a:fillRect/>
+          </a:stretch>
+        </p:blipFill>
+        <p:spPr>
+          <a:xfrm>
+            <a:off x="1659331" y="1847087"/>
+            <a:ext cx="1220724" cy="1220724"/>
+          </a:xfrm>
+          <a:prstGeom prst="rect">
+            <a:avLst/>
+          </a:prstGeom>
+        </p:spPr>
+      </p:pic>
+      <p:sp>
+        <p:nvSpPr>
+          <p:cNvPr id="10" name="TextBox 9"/>
+          <p:cNvSpPr txBox="1"/>
+          <p:nvPr/>
+        </p:nvSpPr>
+        <p:spPr>
+          <a:xfrm>
+            <a:off x="530352" y="3159251"/>
+            <a:ext cx="3478682" cy="621792"/>
+          </a:xfrm>
+          <a:prstGeom prst="rect">
+            <a:avLst/>
+          </a:prstGeom>
+          <a:noFill/>
+        </p:spPr>
+        <p:txBody>
+          <a:bodyPr wrap="square" anchor="t"/>
+          <a:lstStyle/>
+          <a:p>
+            <a:pPr algn="ctr"/>
+            <a:r>
+              <a:rPr sz="1300" b="1" i="0">
+                <a:solidFill>
+                  <a:srgbClr val="095292"/>
+                </a:solidFill>
+                <a:latin typeface="Calibri"/>
+              </a:rPr>
+              <a:t>Google Docs</a:t>
+            </a:r>
+          </a:p>
+          <a:p>
+            <a:pPr algn="ctr">
+              <a:spcBef>
+                <a:spcPts val="200"/>
+              </a:spcBef>
+            </a:pPr>
+            <a:r>
+              <a:rPr sz="1000" b="0" i="0">
+                <a:solidFill>
+                  <a:srgbClr val="666666"/>
+                </a:solidFill>
+                <a:latin typeface="Calibri"/>
+              </a:rPr>
+              <a:t>Politica de escalado</a:t>
+            </a:r>
+          </a:p>
+        </p:txBody>
+      </p:sp>
+      <p:sp>
+        <p:nvSpPr>
+          <p:cNvPr id="11" name="Rounded Rectangle 10"/>
+          <p:cNvSpPr/>
+          <p:nvPr/>
+        </p:nvSpPr>
+        <p:spPr>
+          <a:xfrm>
+            <a:off x="4283354" y="1591056"/>
+            <a:ext cx="3624986" cy="2299716"/>
+          </a:xfrm>
+          <a:prstGeom prst="roundRect">
+            <a:avLst>
+              <a:gd name="adj" fmla="val 12000"/>
+            </a:avLst>
+          </a:prstGeom>
+          <a:solidFill>
+            <a:srgbClr val="F2F2F2"/>
+          </a:solidFill>
+          <a:ln>
+            <a:noFill/>
+          </a:ln>
+        </p:spPr>
+        <p:style>
+          <a:lnRef idx="1">
+            <a:schemeClr val="accent1"/>
+          </a:lnRef>
+          <a:fillRef idx="3">
+            <a:schemeClr val="accent1"/>
+          </a:fillRef>
+          <a:effectRef idx="2">
+            <a:schemeClr val="accent1"/>
+          </a:effectRef>
+          <a:fontRef idx="minor">
+            <a:schemeClr val="lt1"/>
+          </a:fontRef>
+        </p:style>
+        <p:txBody>
+          <a:bodyPr rtlCol="0" anchor="ctr"/>
+          <a:lstStyle/>
+          <a:p>
+            <a:pPr algn="ctr"/>
+          </a:p>
+        </p:txBody>
+      </p:sp>
+      <p:sp>
+        <p:nvSpPr>
+          <p:cNvPr id="12" name="Rectangle 11"/>
+          <p:cNvSpPr/>
+          <p:nvPr/>
+        </p:nvSpPr>
+        <p:spPr>
+          <a:xfrm>
+            <a:off x="4283354" y="1591056"/>
+            <a:ext cx="3624986" cy="64008"/>
+          </a:xfrm>
+          <a:prstGeom prst="rect">
+            <a:avLst/>
+          </a:prstGeom>
+          <a:solidFill>
+            <a:srgbClr val="095292"/>
+          </a:solidFill>
+          <a:ln>
+            <a:noFill/>
+          </a:ln>
+        </p:spPr>
+        <p:style>
+          <a:lnRef idx="1">
+            <a:schemeClr val="accent1"/>
+          </a:lnRef>
+          <a:fillRef idx="3">
+            <a:schemeClr val="accent1"/>
+          </a:fillRef>
+          <a:effectRef idx="2">
+            <a:schemeClr val="accent1"/>
+          </a:effectRef>
+          <a:fontRef idx="minor">
+            <a:schemeClr val="lt1"/>
+          </a:fontRef>
+        </p:style>
+        <p:txBody>
+          <a:bodyPr rtlCol="0" anchor="ctr"/>
+          <a:lstStyle/>
+          <a:p>
+            <a:pPr algn="ctr"/>
+          </a:p>
+        </p:txBody>
+      </p:sp>
+      <p:sp>
+        <p:nvSpPr>
+          <p:cNvPr id="13" name="Rectangle 12"/>
+          <p:cNvSpPr/>
+          <p:nvPr/>
+        </p:nvSpPr>
+        <p:spPr>
+          <a:xfrm>
+            <a:off x="4283354" y="1655064"/>
+            <a:ext cx="3624986" cy="27432"/>
+          </a:xfrm>
+          <a:prstGeom prst="rect">
+            <a:avLst/>
+          </a:prstGeom>
+          <a:solidFill>
+            <a:srgbClr val="FFD000"/>
+          </a:solidFill>
+          <a:ln>
+            <a:noFill/>
+          </a:ln>
+        </p:spPr>
+        <p:style>
+          <a:lnRef idx="1">
+            <a:schemeClr val="accent1"/>
+          </a:lnRef>
+          <a:fillRef idx="3">
+            <a:schemeClr val="accent1"/>
+          </a:fillRef>
+          <a:effectRef idx="2">
+            <a:schemeClr val="accent1"/>
+          </a:effectRef>
+          <a:fontRef idx="minor">
+            <a:schemeClr val="lt1"/>
+          </a:fontRef>
+        </p:style>
+        <p:txBody>
+          <a:bodyPr rtlCol="0" anchor="ctr"/>
+          <a:lstStyle/>
+          <a:p>
+            <a:pPr algn="ctr"/>
+          </a:p>
+        </p:txBody>
+      </p:sp>
+      <p:pic>
+        <p:nvPicPr>
+          <p:cNvPr id="14" name="Picture 13" descr="drawio.png"/>
+          <p:cNvPicPr>
+            <a:picLocks noChangeAspect="1"/>
+          </p:cNvPicPr>
+          <p:nvPr/>
+        </p:nvPicPr>
+        <p:blipFill>
+          <a:blip r:embed="rId3"/>
+          <a:stretch>
+            <a:fillRect/>
+          </a:stretch>
+        </p:blipFill>
+        <p:spPr>
+          <a:xfrm>
+            <a:off x="5485485" y="1847087"/>
+            <a:ext cx="1220724" cy="1220724"/>
+          </a:xfrm>
+          <a:prstGeom prst="rect">
+            <a:avLst/>
+          </a:prstGeom>
+        </p:spPr>
+      </p:pic>
+      <p:sp>
+        <p:nvSpPr>
+          <p:cNvPr id="15" name="TextBox 14"/>
+          <p:cNvSpPr txBox="1"/>
+          <p:nvPr/>
+        </p:nvSpPr>
+        <p:spPr>
+          <a:xfrm>
+            <a:off x="4356506" y="3159251"/>
+            <a:ext cx="3478682" cy="621792"/>
+          </a:xfrm>
+          <a:prstGeom prst="rect">
+            <a:avLst/>
+          </a:prstGeom>
+          <a:noFill/>
+        </p:spPr>
+        <p:txBody>
+          <a:bodyPr wrap="square" anchor="t"/>
+          <a:lstStyle/>
+          <a:p>
+            <a:pPr algn="ctr"/>
+            <a:r>
+              <a:rPr sz="1300" b="1" i="0">
+                <a:solidFill>
+                  <a:srgbClr val="095292"/>
+                </a:solidFill>
+                <a:latin typeface="Calibri"/>
+              </a:rPr>
+              <a:t>draw.io</a:t>
+            </a:r>
+          </a:p>
+          <a:p>
+            <a:pPr algn="ctr">
+              <a:spcBef>
+                <a:spcPts val="200"/>
+              </a:spcBef>
+            </a:pPr>
+            <a:r>
+              <a:rPr sz="1000" b="0" i="0">
+                <a:solidFill>
+                  <a:srgbClr val="666666"/>
+                </a:solidFill>
+                <a:latin typeface="Calibri"/>
+              </a:rPr>
+              <a:t>Nota en Deployment</a:t>
+            </a:r>
+          </a:p>
+        </p:txBody>
+      </p:sp>
+      <p:sp>
+        <p:nvSpPr>
+          <p:cNvPr id="16" name="Rounded Rectangle 15"/>
+          <p:cNvSpPr/>
+          <p:nvPr/>
+        </p:nvSpPr>
+        <p:spPr>
+          <a:xfrm>
+            <a:off x="8109508" y="1591056"/>
+            <a:ext cx="3624986" cy="2299716"/>
+          </a:xfrm>
+          <a:prstGeom prst="roundRect">
+            <a:avLst>
+              <a:gd name="adj" fmla="val 12000"/>
+            </a:avLst>
+          </a:prstGeom>
+          <a:solidFill>
+            <a:srgbClr val="F2F2F2"/>
+          </a:solidFill>
+          <a:ln>
+            <a:noFill/>
+          </a:ln>
+        </p:spPr>
+        <p:style>
+          <a:lnRef idx="1">
+            <a:schemeClr val="accent1"/>
+          </a:lnRef>
+          <a:fillRef idx="3">
+            <a:schemeClr val="accent1"/>
+          </a:fillRef>
+          <a:effectRef idx="2">
+            <a:schemeClr val="accent1"/>
+          </a:effectRef>
+          <a:fontRef idx="minor">
+            <a:schemeClr val="lt1"/>
+          </a:fontRef>
+        </p:style>
+        <p:txBody>
+          <a:bodyPr rtlCol="0" anchor="ctr"/>
+          <a:lstStyle/>
+          <a:p>
+            <a:pPr algn="ctr"/>
+          </a:p>
+        </p:txBody>
+      </p:sp>
+      <p:sp>
+        <p:nvSpPr>
+          <p:cNvPr id="17" name="Rectangle 16"/>
+          <p:cNvSpPr/>
+          <p:nvPr/>
+        </p:nvSpPr>
+        <p:spPr>
+          <a:xfrm>
+            <a:off x="8109508" y="1591056"/>
+            <a:ext cx="3624986" cy="64008"/>
+          </a:xfrm>
+          <a:prstGeom prst="rect">
+            <a:avLst/>
+          </a:prstGeom>
+          <a:solidFill>
+            <a:srgbClr val="095292"/>
+          </a:solidFill>
+          <a:ln>
+            <a:noFill/>
+          </a:ln>
+        </p:spPr>
+        <p:style>
+          <a:lnRef idx="1">
+            <a:schemeClr val="accent1"/>
+          </a:lnRef>
+          <a:fillRef idx="3">
+            <a:schemeClr val="accent1"/>
+          </a:fillRef>
+          <a:effectRef idx="2">
+            <a:schemeClr val="accent1"/>
+          </a:effectRef>
+          <a:fontRef idx="minor">
+            <a:schemeClr val="lt1"/>
+          </a:fontRef>
+        </p:style>
+        <p:txBody>
+          <a:bodyPr rtlCol="0" anchor="ctr"/>
+          <a:lstStyle/>
+          <a:p>
+            <a:pPr algn="ctr"/>
+          </a:p>
+        </p:txBody>
+      </p:sp>
+      <p:sp>
+        <p:nvSpPr>
+          <p:cNvPr id="18" name="Rectangle 17"/>
+          <p:cNvSpPr/>
+          <p:nvPr/>
+        </p:nvSpPr>
+        <p:spPr>
+          <a:xfrm>
+            <a:off x="8109508" y="1655064"/>
+            <a:ext cx="3624986" cy="27432"/>
+          </a:xfrm>
+          <a:prstGeom prst="rect">
+            <a:avLst/>
+          </a:prstGeom>
+          <a:solidFill>
+            <a:srgbClr val="FFD000"/>
+          </a:solidFill>
+          <a:ln>
+            <a:noFill/>
+          </a:ln>
+        </p:spPr>
+        <p:style>
+          <a:lnRef idx="1">
+            <a:schemeClr val="accent1"/>
+          </a:lnRef>
+          <a:fillRef idx="3">
+            <a:schemeClr val="accent1"/>
+          </a:fillRef>
+          <a:effectRef idx="2">
+            <a:schemeClr val="accent1"/>
+          </a:effectRef>
+          <a:fontRef idx="minor">
+            <a:schemeClr val="lt1"/>
+          </a:fontRef>
+        </p:style>
+        <p:txBody>
+          <a:bodyPr rtlCol="0" anchor="ctr"/>
+          <a:lstStyle/>
+          <a:p>
+            <a:pPr algn="ctr"/>
+          </a:p>
+        </p:txBody>
+      </p:sp>
+      <p:pic>
+        <p:nvPicPr>
+          <p:cNvPr id="19" name="Picture 18" descr="mermaid.png"/>
+          <p:cNvPicPr>
+            <a:picLocks noChangeAspect="1"/>
+          </p:cNvPicPr>
+          <p:nvPr/>
+        </p:nvPicPr>
+        <p:blipFill>
+          <a:blip r:embed="rId4"/>
+          <a:stretch>
+            <a:fillRect/>
+          </a:stretch>
+        </p:blipFill>
+        <p:spPr>
+          <a:xfrm>
+            <a:off x="9311640" y="1847087"/>
+            <a:ext cx="1220724" cy="1220724"/>
+          </a:xfrm>
+          <a:prstGeom prst="rect">
+            <a:avLst/>
+          </a:prstGeom>
+        </p:spPr>
+      </p:pic>
+      <p:sp>
+        <p:nvSpPr>
+          <p:cNvPr id="20" name="TextBox 19"/>
+          <p:cNvSpPr txBox="1"/>
+          <p:nvPr/>
+        </p:nvSpPr>
+        <p:spPr>
+          <a:xfrm>
+            <a:off x="8182660" y="3159251"/>
+            <a:ext cx="3478682" cy="621792"/>
+          </a:xfrm>
+          <a:prstGeom prst="rect">
+            <a:avLst/>
+          </a:prstGeom>
+          <a:noFill/>
+        </p:spPr>
+        <p:txBody>
+          <a:bodyPr wrap="square" anchor="t"/>
+          <a:lstStyle/>
+          <a:p>
+            <a:pPr algn="ctr"/>
+            <a:r>
+              <a:rPr sz="1300" b="1" i="0">
+                <a:solidFill>
+                  <a:srgbClr val="095292"/>
+                </a:solidFill>
+                <a:latin typeface="Calibri"/>
+              </a:rPr>
+              <a:t>Mermaid</a:t>
+            </a:r>
+          </a:p>
+          <a:p>
+            <a:pPr algn="ctr">
+              <a:spcBef>
+                <a:spcPts val="200"/>
+              </a:spcBef>
+            </a:pPr>
+            <a:r>
+              <a:rPr sz="1000" b="0" i="0">
+                <a:solidFill>
+                  <a:srgbClr val="666666"/>
+                </a:solidFill>
+                <a:latin typeface="Calibri"/>
+              </a:rPr>
+              <a:t>Codigo del diagrama</a:t>
+            </a:r>
+          </a:p>
+        </p:txBody>
+      </p:sp>
+      <p:sp>
+        <p:nvSpPr>
+          <p:cNvPr id="21" name="Rounded Rectangle 20"/>
+          <p:cNvSpPr/>
+          <p:nvPr/>
+        </p:nvSpPr>
+        <p:spPr>
+          <a:xfrm>
+            <a:off x="4283354" y="4055364"/>
+            <a:ext cx="3624986" cy="2299716"/>
+          </a:xfrm>
+          <a:prstGeom prst="roundRect">
+            <a:avLst>
+              <a:gd name="adj" fmla="val 12000"/>
+            </a:avLst>
+          </a:prstGeom>
+          <a:solidFill>
+            <a:srgbClr val="F2F2F2"/>
+          </a:solidFill>
+          <a:ln>
+            <a:noFill/>
+          </a:ln>
+        </p:spPr>
+        <p:style>
+          <a:lnRef idx="1">
+            <a:schemeClr val="accent1"/>
+          </a:lnRef>
+          <a:fillRef idx="3">
+            <a:schemeClr val="accent1"/>
+          </a:fillRef>
+          <a:effectRef idx="2">
+            <a:schemeClr val="accent1"/>
+          </a:effectRef>
+          <a:fontRef idx="minor">
+            <a:schemeClr val="lt1"/>
+          </a:fontRef>
+        </p:style>
+        <p:txBody>
+          <a:bodyPr rtlCol="0" anchor="ctr"/>
+          <a:lstStyle/>
+          <a:p>
+            <a:pPr algn="ctr"/>
+          </a:p>
+        </p:txBody>
+      </p:sp>
+      <p:sp>
+        <p:nvSpPr>
+          <p:cNvPr id="22" name="Rectangle 21"/>
+          <p:cNvSpPr/>
+          <p:nvPr/>
+        </p:nvSpPr>
+        <p:spPr>
+          <a:xfrm>
+            <a:off x="4283354" y="4055364"/>
+            <a:ext cx="3624986" cy="64008"/>
+          </a:xfrm>
+          <a:prstGeom prst="rect">
+            <a:avLst/>
+          </a:prstGeom>
+          <a:solidFill>
+            <a:srgbClr val="095292"/>
+          </a:solidFill>
+          <a:ln>
+            <a:noFill/>
+          </a:ln>
+        </p:spPr>
+        <p:style>
+          <a:lnRef idx="1">
+            <a:schemeClr val="accent1"/>
+          </a:lnRef>
+          <a:fillRef idx="3">
+            <a:schemeClr val="accent1"/>
+          </a:fillRef>
+          <a:effectRef idx="2">
+            <a:schemeClr val="accent1"/>
+          </a:effectRef>
+          <a:fontRef idx="minor">
+            <a:schemeClr val="lt1"/>
+          </a:fontRef>
+        </p:style>
+        <p:txBody>
+          <a:bodyPr rtlCol="0" anchor="ctr"/>
+          <a:lstStyle/>
+          <a:p>
+            <a:pPr algn="ctr"/>
+          </a:p>
+        </p:txBody>
+      </p:sp>
+      <p:sp>
+        <p:nvSpPr>
+          <p:cNvPr id="23" name="Rectangle 22"/>
+          <p:cNvSpPr/>
+          <p:nvPr/>
+        </p:nvSpPr>
+        <p:spPr>
+          <a:xfrm>
+            <a:off x="4283354" y="4119372"/>
+            <a:ext cx="3624986" cy="27432"/>
+          </a:xfrm>
+          <a:prstGeom prst="rect">
+            <a:avLst/>
+          </a:prstGeom>
+          <a:solidFill>
+            <a:srgbClr val="FFD000"/>
+          </a:solidFill>
+          <a:ln>
+            <a:noFill/>
+          </a:ln>
+        </p:spPr>
+        <p:style>
+          <a:lnRef idx="1">
+            <a:schemeClr val="accent1"/>
+          </a:lnRef>
+          <a:fillRef idx="3">
+            <a:schemeClr val="accent1"/>
+          </a:fillRef>
+          <a:effectRef idx="2">
+            <a:schemeClr val="accent1"/>
+          </a:effectRef>
+          <a:fontRef idx="minor">
+            <a:schemeClr val="lt1"/>
+          </a:fontRef>
+        </p:style>
+        <p:txBody>
+          <a:bodyPr rtlCol="0" anchor="ctr"/>
+          <a:lstStyle/>
+          <a:p>
+            <a:pPr algn="ctr"/>
+          </a:p>
+        </p:txBody>
+      </p:sp>
+      <p:pic>
+        <p:nvPicPr>
+          <p:cNvPr id="24" name="Picture 23" descr="examlab.png"/>
+          <p:cNvPicPr>
+            <a:picLocks noChangeAspect="1"/>
+          </p:cNvPicPr>
+          <p:nvPr/>
+        </p:nvPicPr>
+        <p:blipFill>
+          <a:blip r:embed="rId5"/>
+          <a:stretch>
+            <a:fillRect/>
+          </a:stretch>
+        </p:blipFill>
+        <p:spPr>
+          <a:xfrm>
+            <a:off x="5485485" y="4311396"/>
+            <a:ext cx="1220724" cy="1220724"/>
+          </a:xfrm>
+          <a:prstGeom prst="rect">
+            <a:avLst/>
+          </a:prstGeom>
+        </p:spPr>
+      </p:pic>
+      <p:sp>
+        <p:nvSpPr>
+          <p:cNvPr id="25" name="TextBox 24"/>
+          <p:cNvSpPr txBox="1"/>
+          <p:nvPr/>
+        </p:nvSpPr>
+        <p:spPr>
+          <a:xfrm>
+            <a:off x="4356506" y="5623560"/>
+            <a:ext cx="3478682" cy="621792"/>
+          </a:xfrm>
+          <a:prstGeom prst="rect">
+            <a:avLst/>
+          </a:prstGeom>
+          <a:noFill/>
+        </p:spPr>
+        <p:txBody>
+          <a:bodyPr wrap="square" anchor="t"/>
+          <a:lstStyle/>
+          <a:p>
+            <a:pPr algn="ctr"/>
+            <a:r>
+              <a:rPr sz="1300" b="1" i="0">
+                <a:solidFill>
+                  <a:srgbClr val="095292"/>
+                </a:solidFill>
+                <a:latin typeface="Calibri"/>
+              </a:rPr>
+              <a:t>la plataforma del curso</a:t>
+            </a:r>
+          </a:p>
+          <a:p>
+            <a:pPr algn="ctr">
+              <a:spcBef>
+                <a:spcPts val="200"/>
+              </a:spcBef>
+            </a:pPr>
+            <a:r>
+              <a:rPr sz="1000" b="0" i="0">
+                <a:solidFill>
+                  <a:srgbClr val="666666"/>
+                </a:solidFill>
+                <a:latin typeface="Calibri"/>
+              </a:rPr>
+              <a:t>Donde se entrega</a:t>
+            </a:r>
+          </a:p>
+        </p:txBody>
+      </p:sp>
+      <p:sp>
+        <p:nvSpPr>
+          <p:cNvPr id="26" name="TextBox 25"/>
+          <p:cNvSpPr txBox="1"/>
+          <p:nvPr/>
+        </p:nvSpPr>
+        <p:spPr>
+          <a:xfrm>
+            <a:off x="11185855" y="6473952"/>
+            <a:ext cx="640080" cy="274320"/>
+          </a:xfrm>
+          <a:prstGeom prst="rect">
+            <a:avLst/>
+          </a:prstGeom>
+          <a:noFill/>
+        </p:spPr>
+        <p:txBody>
+          <a:bodyPr wrap="square">
+            <a:spAutoFit/>
+          </a:bodyPr>
+          <a:lstStyle/>
+          <a:p>
+            <a:pPr algn="r"/>
+            <a:r>
+              <a:rPr sz="1100" b="0" i="0">
+                <a:solidFill>
+                  <a:srgbClr val="666666"/>
+                </a:solidFill>
+                <a:latin typeface="Calibri"/>
+              </a:rPr>
+              <a:t>22</a:t>
+            </a:r>
+          </a:p>
+        </p:txBody>
+      </p:sp>
+    </p:spTree>
+  </p:cSld>
+  <p:clrMapOvr>
+    <a:masterClrMapping/>
+  </p:clrMapOvr>
+</p:sld>
+</file>
+
+<file path=ppt/slides/slide23.xml><?xml version="1.0" encoding="utf-8"?>
+<p:sld xmlns:a="http://schemas.openxmlformats.org/drawingml/2006/main" xmlns:p="http://schemas.openxmlformats.org/presentationml/2006/main" xmlns:r="http://schemas.openxmlformats.org/officeDocument/2006/relationships">
+  <p:cSld>
+    <p:bg>
+      <p:bgPr>
+        <a:solidFill>
+          <a:srgbClr val="FFFFFF"/>
+        </a:solidFill>
+        <a:effectLst/>
+      </p:bgPr>
+    </p:bg>
+    <p:spTree>
+      <p:nvGrpSpPr>
+        <p:cNvPr id="1" name=""/>
+        <p:cNvGrpSpPr/>
+        <p:nvPr/>
+      </p:nvGrpSpPr>
+      <p:grpSpPr/>
+      <p:sp>
+        <p:nvSpPr>
+          <p:cNvPr id="2" name="Rectangle 1"/>
+          <p:cNvSpPr/>
+          <p:nvPr/>
+        </p:nvSpPr>
+        <p:spPr>
+          <a:xfrm>
+            <a:off x="0" y="0"/>
+            <a:ext cx="12191695" cy="1170432"/>
+          </a:xfrm>
+          <a:prstGeom prst="rect">
+            <a:avLst/>
+          </a:prstGeom>
+          <a:solidFill>
+            <a:srgbClr val="095292"/>
+          </a:solidFill>
+          <a:ln>
+            <a:noFill/>
+          </a:ln>
+        </p:spPr>
+        <p:style>
+          <a:lnRef idx="1">
+            <a:schemeClr val="accent1"/>
+          </a:lnRef>
+          <a:fillRef idx="3">
+            <a:schemeClr val="accent1"/>
+          </a:fillRef>
+          <a:effectRef idx="2">
+            <a:schemeClr val="accent1"/>
+          </a:effectRef>
+          <a:fontRef idx="minor">
+            <a:schemeClr val="lt1"/>
+          </a:fontRef>
+        </p:style>
+        <p:txBody>
+          <a:bodyPr rtlCol="0" anchor="ctr"/>
+          <a:lstStyle/>
+          <a:p>
+            <a:pPr algn="ctr"/>
+          </a:p>
+        </p:txBody>
+      </p:sp>
+      <p:sp>
+        <p:nvSpPr>
+          <p:cNvPr id="3" name="Rectangle 2"/>
+          <p:cNvSpPr/>
+          <p:nvPr/>
+        </p:nvSpPr>
+        <p:spPr>
+          <a:xfrm>
+            <a:off x="0" y="1170432"/>
+            <a:ext cx="12191695" cy="41148"/>
+          </a:xfrm>
+          <a:prstGeom prst="rect">
+            <a:avLst/>
+          </a:prstGeom>
+          <a:solidFill>
+            <a:srgbClr val="FFD000"/>
+          </a:solidFill>
+          <a:ln>
+            <a:noFill/>
+          </a:ln>
+        </p:spPr>
+        <p:style>
+          <a:lnRef idx="1">
+            <a:schemeClr val="accent1"/>
+          </a:lnRef>
+          <a:fillRef idx="3">
+            <a:schemeClr val="accent1"/>
+          </a:fillRef>
+          <a:effectRef idx="2">
+            <a:schemeClr val="accent1"/>
+          </a:effectRef>
+          <a:fontRef idx="minor">
+            <a:schemeClr val="lt1"/>
+          </a:fontRef>
+        </p:style>
+        <p:txBody>
+          <a:bodyPr rtlCol="0" anchor="ctr"/>
+          <a:lstStyle/>
+          <a:p>
+            <a:pPr algn="ctr"/>
+          </a:p>
+        </p:txBody>
+      </p:sp>
+      <p:sp>
+        <p:nvSpPr>
+          <p:cNvPr id="4" name="TextBox 3"/>
+          <p:cNvSpPr txBox="1"/>
+          <p:nvPr/>
+        </p:nvSpPr>
+        <p:spPr>
+          <a:xfrm>
+            <a:off x="457200" y="164592"/>
+            <a:ext cx="11277295" cy="384048"/>
+          </a:xfrm>
+          <a:prstGeom prst="rect">
+            <a:avLst/>
+          </a:prstGeom>
+          <a:noFill/>
+        </p:spPr>
+        <p:txBody>
+          <a:bodyPr wrap="square">
+            <a:spAutoFit/>
+          </a:bodyPr>
+          <a:lstStyle/>
+          <a:p>
+            <a:r>
+              <a:rPr sz="2600" b="1" i="0">
+                <a:solidFill>
+                  <a:srgbClr val="FFFFFF"/>
+                </a:solidFill>
+                <a:latin typeface="Calibri"/>
+              </a:rPr>
+              <a:t>Del boceto a la plataforma del curso (diagrama)</a:t>
+            </a:r>
+          </a:p>
+        </p:txBody>
+      </p:sp>
+      <p:sp>
+        <p:nvSpPr>
+          <p:cNvPr id="5" name="TextBox 4"/>
+          <p:cNvSpPr txBox="1"/>
+          <p:nvPr/>
+        </p:nvSpPr>
+        <p:spPr>
+          <a:xfrm>
+            <a:off x="457200" y="566928"/>
+            <a:ext cx="11277295" cy="411480"/>
+          </a:xfrm>
+          <a:prstGeom prst="rect">
+            <a:avLst/>
+          </a:prstGeom>
+          <a:noFill/>
+        </p:spPr>
+        <p:txBody>
+          <a:bodyPr wrap="square">
+            <a:spAutoFit/>
+          </a:bodyPr>
+          <a:lstStyle/>
+          <a:p>
+            <a:r>
+              <a:rPr sz="1400" b="0" i="0">
+                <a:solidFill>
+                  <a:srgbClr val="B8D8EE"/>
+                </a:solidFill>
+                <a:latin typeface="Calibri"/>
+              </a:rPr>
+              <a:t>El diagrama se entrega como código Mermaid dentro de la plataforma del curso, no como imagen</a:t>
+            </a:r>
+          </a:p>
+        </p:txBody>
+      </p:sp>
+      <p:sp>
+        <p:nvSpPr>
+          <p:cNvPr id="6" name="Rounded Rectangle 5"/>
+          <p:cNvSpPr/>
+          <p:nvPr/>
+        </p:nvSpPr>
+        <p:spPr>
+          <a:xfrm>
+            <a:off x="457200" y="1659636"/>
+            <a:ext cx="11277295" cy="1051560"/>
+          </a:xfrm>
+          <a:prstGeom prst="roundRect">
+            <a:avLst>
+              <a:gd name="adj" fmla="val 12000"/>
+            </a:avLst>
+          </a:prstGeom>
+          <a:solidFill>
+            <a:srgbClr val="F2F2F2"/>
+          </a:solidFill>
+          <a:ln>
+            <a:noFill/>
+          </a:ln>
+        </p:spPr>
+        <p:style>
+          <a:lnRef idx="1">
+            <a:schemeClr val="accent1"/>
+          </a:lnRef>
+          <a:fillRef idx="3">
+            <a:schemeClr val="accent1"/>
+          </a:fillRef>
+          <a:effectRef idx="2">
+            <a:schemeClr val="accent1"/>
+          </a:effectRef>
+          <a:fontRef idx="minor">
+            <a:schemeClr val="lt1"/>
+          </a:fontRef>
+        </p:style>
+        <p:txBody>
+          <a:bodyPr rtlCol="0" anchor="ctr"/>
+          <a:lstStyle/>
+          <a:p>
+            <a:pPr algn="ctr"/>
+          </a:p>
+        </p:txBody>
+      </p:sp>
+      <p:sp>
+        <p:nvSpPr>
+          <p:cNvPr id="7" name="Rounded Rectangle 6"/>
+          <p:cNvSpPr/>
+          <p:nvPr/>
+        </p:nvSpPr>
+        <p:spPr>
+          <a:xfrm>
+            <a:off x="594360" y="1965960"/>
+            <a:ext cx="438912" cy="438912"/>
+          </a:xfrm>
+          <a:prstGeom prst="roundRect">
+            <a:avLst>
+              <a:gd name="adj" fmla="val 12000"/>
+            </a:avLst>
+          </a:prstGeom>
+          <a:solidFill>
+            <a:srgbClr val="095292"/>
+          </a:solidFill>
+          <a:ln>
+            <a:noFill/>
+          </a:ln>
+        </p:spPr>
+        <p:style>
+          <a:lnRef idx="1">
+            <a:schemeClr val="accent1"/>
+          </a:lnRef>
+          <a:fillRef idx="3">
+            <a:schemeClr val="accent1"/>
+          </a:fillRef>
+          <a:effectRef idx="2">
+            <a:schemeClr val="accent1"/>
+          </a:effectRef>
+          <a:fontRef idx="minor">
+            <a:schemeClr val="lt1"/>
+          </a:fontRef>
+        </p:style>
+        <p:txBody>
+          <a:bodyPr rtlCol="0" anchor="ctr"/>
+          <a:lstStyle/>
+          <a:p>
+            <a:pPr algn="ctr"/>
+          </a:p>
+        </p:txBody>
+      </p:sp>
+      <p:sp>
+        <p:nvSpPr>
+          <p:cNvPr id="8" name="TextBox 7"/>
+          <p:cNvSpPr txBox="1"/>
+          <p:nvPr/>
+        </p:nvSpPr>
+        <p:spPr>
+          <a:xfrm>
+            <a:off x="594360" y="1965960"/>
+            <a:ext cx="438912" cy="438912"/>
+          </a:xfrm>
+          <a:prstGeom prst="rect">
+            <a:avLst/>
+          </a:prstGeom>
+          <a:noFill/>
+        </p:spPr>
+        <p:txBody>
+          <a:bodyPr wrap="square" anchor="ctr"/>
+          <a:lstStyle/>
+          <a:p>
+            <a:pPr algn="ctr"/>
+            <a:r>
+              <a:rPr sz="1600" b="1" i="0">
+                <a:solidFill>
+                  <a:srgbClr val="FFFFFF"/>
+                </a:solidFill>
+                <a:latin typeface="Calibri"/>
+              </a:rPr>
+              <a:t>1</a:t>
+            </a:r>
+          </a:p>
+        </p:txBody>
+      </p:sp>
+      <p:sp>
+        <p:nvSpPr>
+          <p:cNvPr id="9" name="TextBox 8"/>
+          <p:cNvSpPr txBox="1"/>
+          <p:nvPr/>
+        </p:nvSpPr>
+        <p:spPr>
+          <a:xfrm>
+            <a:off x="1188720" y="1751076"/>
+            <a:ext cx="10271455" cy="886968"/>
+          </a:xfrm>
+          <a:prstGeom prst="rect">
+            <a:avLst/>
+          </a:prstGeom>
+          <a:noFill/>
+        </p:spPr>
+        <p:txBody>
+          <a:bodyPr wrap="square" anchor="ctr"/>
+          <a:lstStyle/>
+          <a:p>
+            <a:r>
+              <a:rPr sz="1500" b="1" i="0">
+                <a:solidFill>
+                  <a:srgbClr val="095292"/>
+                </a:solidFill>
+                <a:latin typeface="Calibri"/>
+              </a:rPr>
+              <a:t>Disena visual</a:t>
+            </a:r>
+          </a:p>
+          <a:p>
+            <a:pPr>
+              <a:spcBef>
+                <a:spcPts val="200"/>
+              </a:spcBef>
+            </a:pPr>
+            <a:r>
+              <a:rPr sz="1300" b="0" i="0">
+                <a:solidFill>
+                  <a:srgbClr val="333333"/>
+                </a:solidFill>
+                <a:latin typeface="Calibri"/>
+              </a:rPr>
+              <a:t>Dibuja el diagrama como quieras en Excalidraw o draw.io: es mas rapido arrastrar cajas que escribir codigo, y ahi es donde piensas el modelo.</a:t>
+            </a:r>
+          </a:p>
+        </p:txBody>
+      </p:sp>
+      <p:sp>
+        <p:nvSpPr>
+          <p:cNvPr id="10" name="Rounded Rectangle 9"/>
+          <p:cNvSpPr/>
+          <p:nvPr/>
+        </p:nvSpPr>
+        <p:spPr>
+          <a:xfrm>
+            <a:off x="457200" y="2802636"/>
+            <a:ext cx="11277295" cy="1051560"/>
+          </a:xfrm>
+          <a:prstGeom prst="roundRect">
+            <a:avLst>
+              <a:gd name="adj" fmla="val 12000"/>
+            </a:avLst>
+          </a:prstGeom>
+          <a:solidFill>
+            <a:srgbClr val="E8F4FA"/>
+          </a:solidFill>
+          <a:ln>
+            <a:noFill/>
+          </a:ln>
+        </p:spPr>
+        <p:style>
+          <a:lnRef idx="1">
+            <a:schemeClr val="accent1"/>
+          </a:lnRef>
+          <a:fillRef idx="3">
+            <a:schemeClr val="accent1"/>
+          </a:fillRef>
+          <a:effectRef idx="2">
+            <a:schemeClr val="accent1"/>
+          </a:effectRef>
+          <a:fontRef idx="minor">
+            <a:schemeClr val="lt1"/>
+          </a:fontRef>
+        </p:style>
+        <p:txBody>
+          <a:bodyPr rtlCol="0" anchor="ctr"/>
+          <a:lstStyle/>
+          <a:p>
+            <a:pPr algn="ctr"/>
+          </a:p>
+        </p:txBody>
+      </p:sp>
+      <p:sp>
+        <p:nvSpPr>
+          <p:cNvPr id="11" name="Rounded Rectangle 10"/>
+          <p:cNvSpPr/>
+          <p:nvPr/>
+        </p:nvSpPr>
+        <p:spPr>
+          <a:xfrm>
+            <a:off x="594360" y="3108960"/>
+            <a:ext cx="438912" cy="438912"/>
+          </a:xfrm>
+          <a:prstGeom prst="roundRect">
+            <a:avLst>
+              <a:gd name="adj" fmla="val 12000"/>
+            </a:avLst>
+          </a:prstGeom>
+          <a:solidFill>
+            <a:srgbClr val="095292"/>
+          </a:solidFill>
+          <a:ln>
+            <a:noFill/>
+          </a:ln>
+        </p:spPr>
+        <p:style>
+          <a:lnRef idx="1">
+            <a:schemeClr val="accent1"/>
+          </a:lnRef>
+          <a:fillRef idx="3">
+            <a:schemeClr val="accent1"/>
+          </a:fillRef>
+          <a:effectRef idx="2">
+            <a:schemeClr val="accent1"/>
+          </a:effectRef>
+          <a:fontRef idx="minor">
+            <a:schemeClr val="lt1"/>
+          </a:fontRef>
+        </p:style>
+        <p:txBody>
+          <a:bodyPr rtlCol="0" anchor="ctr"/>
+          <a:lstStyle/>
+          <a:p>
+            <a:pPr algn="ctr"/>
+          </a:p>
+        </p:txBody>
+      </p:sp>
+      <p:sp>
+        <p:nvSpPr>
+          <p:cNvPr id="12" name="TextBox 11"/>
+          <p:cNvSpPr txBox="1"/>
+          <p:nvPr/>
+        </p:nvSpPr>
+        <p:spPr>
+          <a:xfrm>
+            <a:off x="594360" y="3108960"/>
+            <a:ext cx="438912" cy="438912"/>
+          </a:xfrm>
+          <a:prstGeom prst="rect">
+            <a:avLst/>
+          </a:prstGeom>
+          <a:noFill/>
+        </p:spPr>
+        <p:txBody>
+          <a:bodyPr wrap="square" anchor="ctr"/>
+          <a:lstStyle/>
+          <a:p>
+            <a:pPr algn="ctr"/>
+            <a:r>
+              <a:rPr sz="1600" b="1" i="0">
+                <a:solidFill>
+                  <a:srgbClr val="FFFFFF"/>
+                </a:solidFill>
+                <a:latin typeface="Calibri"/>
+              </a:rPr>
+              <a:t>2</a:t>
+            </a:r>
+          </a:p>
+        </p:txBody>
+      </p:sp>
+      <p:sp>
+        <p:nvSpPr>
+          <p:cNvPr id="13" name="TextBox 12"/>
+          <p:cNvSpPr txBox="1"/>
+          <p:nvPr/>
+        </p:nvSpPr>
+        <p:spPr>
+          <a:xfrm>
+            <a:off x="1188720" y="2894076"/>
+            <a:ext cx="10271455" cy="886968"/>
+          </a:xfrm>
+          <a:prstGeom prst="rect">
+            <a:avLst/>
+          </a:prstGeom>
+          <a:noFill/>
+        </p:spPr>
+        <p:txBody>
+          <a:bodyPr wrap="square" anchor="ctr"/>
+          <a:lstStyle/>
+          <a:p>
+            <a:r>
+              <a:rPr sz="1500" b="1" i="0">
+                <a:solidFill>
+                  <a:srgbClr val="095292"/>
+                </a:solidFill>
+                <a:latin typeface="Calibri"/>
+              </a:rPr>
+              <a:t>Traduce con IA</a:t>
+            </a:r>
+          </a:p>
+          <a:p>
+            <a:pPr>
+              <a:spcBef>
+                <a:spcPts val="200"/>
+              </a:spcBef>
+            </a:pPr>
+            <a:r>
+              <a:rPr sz="1300" b="0" i="0">
+                <a:solidFill>
+                  <a:srgbClr val="333333"/>
+                </a:solidFill>
+                <a:latin typeface="Calibri"/>
+              </a:rPr>
+              <a:t>Copia o describe tu boceto a una IA y pidele el codigo Mermaid: «convierte este diagrama a Mermaid usando flowchart». Revisa el resultado: la IA acierta la sintaxis, no tu modelo.</a:t>
+            </a:r>
+          </a:p>
+        </p:txBody>
+      </p:sp>
+      <p:sp>
+        <p:nvSpPr>
+          <p:cNvPr id="14" name="Rounded Rectangle 13"/>
+          <p:cNvSpPr/>
+          <p:nvPr/>
+        </p:nvSpPr>
+        <p:spPr>
+          <a:xfrm>
+            <a:off x="457200" y="3945636"/>
+            <a:ext cx="11277295" cy="1051560"/>
+          </a:xfrm>
+          <a:prstGeom prst="roundRect">
+            <a:avLst>
+              <a:gd name="adj" fmla="val 12000"/>
+            </a:avLst>
+          </a:prstGeom>
+          <a:solidFill>
+            <a:srgbClr val="F2F2F2"/>
+          </a:solidFill>
+          <a:ln>
+            <a:noFill/>
+          </a:ln>
+        </p:spPr>
+        <p:style>
+          <a:lnRef idx="1">
+            <a:schemeClr val="accent1"/>
+          </a:lnRef>
+          <a:fillRef idx="3">
+            <a:schemeClr val="accent1"/>
+          </a:fillRef>
+          <a:effectRef idx="2">
+            <a:schemeClr val="accent1"/>
+          </a:effectRef>
+          <a:fontRef idx="minor">
+            <a:schemeClr val="lt1"/>
+          </a:fontRef>
+        </p:style>
+        <p:txBody>
+          <a:bodyPr rtlCol="0" anchor="ctr"/>
+          <a:lstStyle/>
+          <a:p>
+            <a:pPr algn="ctr"/>
+          </a:p>
+        </p:txBody>
+      </p:sp>
+      <p:sp>
+        <p:nvSpPr>
+          <p:cNvPr id="15" name="Rounded Rectangle 14"/>
+          <p:cNvSpPr/>
+          <p:nvPr/>
+        </p:nvSpPr>
+        <p:spPr>
+          <a:xfrm>
+            <a:off x="594360" y="4251960"/>
+            <a:ext cx="438912" cy="438912"/>
+          </a:xfrm>
+          <a:prstGeom prst="roundRect">
+            <a:avLst>
+              <a:gd name="adj" fmla="val 12000"/>
+            </a:avLst>
+          </a:prstGeom>
+          <a:solidFill>
+            <a:srgbClr val="095292"/>
+          </a:solidFill>
+          <a:ln>
+            <a:noFill/>
+          </a:ln>
+        </p:spPr>
+        <p:style>
+          <a:lnRef idx="1">
+            <a:schemeClr val="accent1"/>
+          </a:lnRef>
+          <a:fillRef idx="3">
+            <a:schemeClr val="accent1"/>
+          </a:fillRef>
+          <a:effectRef idx="2">
+            <a:schemeClr val="accent1"/>
+          </a:effectRef>
+          <a:fontRef idx="minor">
+            <a:schemeClr val="lt1"/>
+          </a:fontRef>
+        </p:style>
+        <p:txBody>
+          <a:bodyPr rtlCol="0" anchor="ctr"/>
+          <a:lstStyle/>
+          <a:p>
+            <a:pPr algn="ctr"/>
+          </a:p>
+        </p:txBody>
+      </p:sp>
+      <p:sp>
+        <p:nvSpPr>
+          <p:cNvPr id="16" name="TextBox 15"/>
+          <p:cNvSpPr txBox="1"/>
+          <p:nvPr/>
+        </p:nvSpPr>
+        <p:spPr>
+          <a:xfrm>
+            <a:off x="594360" y="4251960"/>
+            <a:ext cx="438912" cy="438912"/>
+          </a:xfrm>
+          <a:prstGeom prst="rect">
+            <a:avLst/>
+          </a:prstGeom>
+          <a:noFill/>
+        </p:spPr>
+        <p:txBody>
+          <a:bodyPr wrap="square" anchor="ctr"/>
+          <a:lstStyle/>
+          <a:p>
+            <a:pPr algn="ctr"/>
+            <a:r>
+              <a:rPr sz="1600" b="1" i="0">
+                <a:solidFill>
+                  <a:srgbClr val="FFFFFF"/>
+                </a:solidFill>
+                <a:latin typeface="Calibri"/>
+              </a:rPr>
+              <a:t>3</a:t>
+            </a:r>
+          </a:p>
+        </p:txBody>
+      </p:sp>
+      <p:sp>
+        <p:nvSpPr>
+          <p:cNvPr id="17" name="TextBox 16"/>
+          <p:cNvSpPr txBox="1"/>
+          <p:nvPr/>
+        </p:nvSpPr>
+        <p:spPr>
+          <a:xfrm>
+            <a:off x="1188720" y="4037076"/>
+            <a:ext cx="10271455" cy="886968"/>
+          </a:xfrm>
+          <a:prstGeom prst="rect">
+            <a:avLst/>
+          </a:prstGeom>
+          <a:noFill/>
+        </p:spPr>
+        <p:txBody>
+          <a:bodyPr wrap="square" anchor="ctr"/>
+          <a:lstStyle/>
+          <a:p>
+            <a:r>
+              <a:rPr sz="1500" b="1" i="0">
+                <a:solidFill>
+                  <a:srgbClr val="095292"/>
+                </a:solidFill>
+                <a:latin typeface="Calibri"/>
+              </a:rPr>
+              <a:t>Pega y renderiza en la plataforma del curso</a:t>
+            </a:r>
+          </a:p>
+          <a:p>
+            <a:pPr>
+              <a:spcBef>
+                <a:spcPts val="200"/>
+              </a:spcBef>
+            </a:pPr>
+            <a:r>
+              <a:rPr sz="1300" b="0" i="0">
+                <a:solidFill>
+                  <a:srgbClr val="333333"/>
+                </a:solidFill>
+                <a:latin typeface="Calibri"/>
+              </a:rPr>
+              <a:t>Pega ese codigo en la caja de texto de la pregunta y mira como lo dibuja la plataforma. Si no renderiza, corrige ahi mismo: lo que se califica es el diagrama renderizado dentro de la plataforma del curso.</a:t>
+            </a:r>
+          </a:p>
+        </p:txBody>
+      </p:sp>
+      <p:sp>
+        <p:nvSpPr>
+          <p:cNvPr id="18" name="Rounded Rectangle 17"/>
+          <p:cNvSpPr/>
+          <p:nvPr/>
+        </p:nvSpPr>
+        <p:spPr>
+          <a:xfrm>
+            <a:off x="457200" y="5088636"/>
+            <a:ext cx="11277295" cy="1051560"/>
+          </a:xfrm>
+          <a:prstGeom prst="roundRect">
+            <a:avLst>
+              <a:gd name="adj" fmla="val 12000"/>
+            </a:avLst>
+          </a:prstGeom>
+          <a:solidFill>
+            <a:srgbClr val="E8F4FA"/>
+          </a:solidFill>
+          <a:ln>
+            <a:noFill/>
+          </a:ln>
+        </p:spPr>
+        <p:style>
+          <a:lnRef idx="1">
+            <a:schemeClr val="accent1"/>
+          </a:lnRef>
+          <a:fillRef idx="3">
+            <a:schemeClr val="accent1"/>
+          </a:fillRef>
+          <a:effectRef idx="2">
+            <a:schemeClr val="accent1"/>
+          </a:effectRef>
+          <a:fontRef idx="minor">
+            <a:schemeClr val="lt1"/>
+          </a:fontRef>
+        </p:style>
+        <p:txBody>
+          <a:bodyPr rtlCol="0" anchor="ctr"/>
+          <a:lstStyle/>
+          <a:p>
+            <a:pPr algn="ctr"/>
+          </a:p>
+        </p:txBody>
+      </p:sp>
+      <p:sp>
+        <p:nvSpPr>
+          <p:cNvPr id="19" name="Rounded Rectangle 18"/>
+          <p:cNvSpPr/>
+          <p:nvPr/>
+        </p:nvSpPr>
+        <p:spPr>
+          <a:xfrm>
+            <a:off x="594360" y="5394960"/>
+            <a:ext cx="438912" cy="438912"/>
+          </a:xfrm>
+          <a:prstGeom prst="roundRect">
+            <a:avLst>
+              <a:gd name="adj" fmla="val 12000"/>
+            </a:avLst>
+          </a:prstGeom>
+          <a:solidFill>
+            <a:srgbClr val="095292"/>
+          </a:solidFill>
+          <a:ln>
+            <a:noFill/>
+          </a:ln>
+        </p:spPr>
+        <p:style>
+          <a:lnRef idx="1">
+            <a:schemeClr val="accent1"/>
+          </a:lnRef>
+          <a:fillRef idx="3">
+            <a:schemeClr val="accent1"/>
+          </a:fillRef>
+          <a:effectRef idx="2">
+            <a:schemeClr val="accent1"/>
+          </a:effectRef>
+          <a:fontRef idx="minor">
+            <a:schemeClr val="lt1"/>
+          </a:fontRef>
+        </p:style>
+        <p:txBody>
+          <a:bodyPr rtlCol="0" anchor="ctr"/>
+          <a:lstStyle/>
+          <a:p>
+            <a:pPr algn="ctr"/>
+          </a:p>
+        </p:txBody>
+      </p:sp>
+      <p:sp>
+        <p:nvSpPr>
+          <p:cNvPr id="20" name="TextBox 19"/>
+          <p:cNvSpPr txBox="1"/>
+          <p:nvPr/>
+        </p:nvSpPr>
+        <p:spPr>
+          <a:xfrm>
+            <a:off x="594360" y="5394960"/>
+            <a:ext cx="438912" cy="438912"/>
+          </a:xfrm>
+          <a:prstGeom prst="rect">
+            <a:avLst/>
+          </a:prstGeom>
+          <a:noFill/>
+        </p:spPr>
+        <p:txBody>
+          <a:bodyPr wrap="square" anchor="ctr"/>
+          <a:lstStyle/>
+          <a:p>
+            <a:pPr algn="ctr"/>
+            <a:r>
+              <a:rPr sz="1600" b="1" i="0">
+                <a:solidFill>
+                  <a:srgbClr val="FFFFFF"/>
+                </a:solidFill>
+                <a:latin typeface="Calibri"/>
+              </a:rPr>
+              <a:t>4</a:t>
+            </a:r>
+          </a:p>
+        </p:txBody>
+      </p:sp>
+      <p:sp>
+        <p:nvSpPr>
+          <p:cNvPr id="21" name="TextBox 20"/>
+          <p:cNvSpPr txBox="1"/>
+          <p:nvPr/>
+        </p:nvSpPr>
+        <p:spPr>
+          <a:xfrm>
+            <a:off x="1188720" y="5180076"/>
+            <a:ext cx="10271455" cy="886968"/>
+          </a:xfrm>
+          <a:prstGeom prst="rect">
+            <a:avLst/>
+          </a:prstGeom>
+          <a:noFill/>
+        </p:spPr>
+        <p:txBody>
+          <a:bodyPr wrap="square" anchor="ctr"/>
+          <a:lstStyle/>
+          <a:p>
+            <a:r>
+              <a:rPr sz="1500" b="1" i="0">
+                <a:solidFill>
+                  <a:srgbClr val="095292"/>
+                </a:solidFill>
+                <a:latin typeface="Calibri"/>
+              </a:rPr>
+              <a:t>Guarda el PNG para tu PI</a:t>
+            </a:r>
+          </a:p>
+          <a:p>
+            <a:pPr>
+              <a:spcBef>
+                <a:spcPts val="200"/>
+              </a:spcBef>
+            </a:pPr>
+            <a:r>
+              <a:rPr sz="1300" b="0" i="0">
+                <a:solidFill>
+                  <a:srgbClr val="333333"/>
+                </a:solidFill>
+                <a:latin typeface="Calibri"/>
+              </a:rPr>
+              <a:t>Exporta tambien la imagen a la carpeta de tu Proyecto Integrador. Esa copia es para tu informe; no reemplaza la respuesta en la plataforma.</a:t>
+            </a:r>
+          </a:p>
+        </p:txBody>
+      </p:sp>
+      <p:sp>
+        <p:nvSpPr>
+          <p:cNvPr id="22" name="TextBox 21"/>
+          <p:cNvSpPr txBox="1"/>
+          <p:nvPr/>
+        </p:nvSpPr>
+        <p:spPr>
+          <a:xfrm>
+            <a:off x="11185855" y="6473952"/>
+            <a:ext cx="640080" cy="274320"/>
+          </a:xfrm>
+          <a:prstGeom prst="rect">
+            <a:avLst/>
+          </a:prstGeom>
+          <a:noFill/>
+        </p:spPr>
+        <p:txBody>
+          <a:bodyPr wrap="square">
+            <a:spAutoFit/>
+          </a:bodyPr>
+          <a:lstStyle/>
+          <a:p>
+            <a:pPr algn="r"/>
+            <a:r>
+              <a:rPr sz="1100" b="0" i="0">
+                <a:solidFill>
+                  <a:srgbClr val="666666"/>
+                </a:solidFill>
+                <a:latin typeface="Calibri"/>
+              </a:rPr>
+              <a:t>23</a:t>
+            </a:r>
+          </a:p>
+        </p:txBody>
+      </p:sp>
+    </p:spTree>
+  </p:cSld>
+  <p:clrMapOvr>
+    <a:masterClrMapping/>
+  </p:clrMapOvr>
+</p:sld>
+</file>
+
+<file path=ppt/slides/slide24.xml><?xml version="1.0" encoding="utf-8"?>
+<p:sld xmlns:a="http://schemas.openxmlformats.org/drawingml/2006/main" xmlns:p="http://schemas.openxmlformats.org/presentationml/2006/main" xmlns:r="http://schemas.openxmlformats.org/officeDocument/2006/relationships">
+  <p:cSld>
+    <p:bg>
+      <p:bgPr>
+        <a:solidFill>
+          <a:srgbClr val="FFFFFF"/>
+        </a:solidFill>
+        <a:effectLst/>
+      </p:bgPr>
+    </p:bg>
+    <p:spTree>
+      <p:nvGrpSpPr>
+        <p:cNvPr id="1" name=""/>
+        <p:cNvGrpSpPr/>
+        <p:nvPr/>
+      </p:nvGrpSpPr>
+      <p:grpSpPr/>
+      <p:sp>
+        <p:nvSpPr>
+          <p:cNvPr id="2" name="Rectangle 1"/>
+          <p:cNvSpPr/>
+          <p:nvPr/>
+        </p:nvSpPr>
+        <p:spPr>
+          <a:xfrm>
+            <a:off x="0" y="0"/>
+            <a:ext cx="12191695" cy="960120"/>
+          </a:xfrm>
+          <a:prstGeom prst="rect">
+            <a:avLst/>
+          </a:prstGeom>
+          <a:solidFill>
+            <a:srgbClr val="095292"/>
+          </a:solidFill>
+          <a:ln>
+            <a:noFill/>
+          </a:ln>
+        </p:spPr>
+        <p:style>
+          <a:lnRef idx="1">
+            <a:schemeClr val="accent1"/>
+          </a:lnRef>
+          <a:fillRef idx="3">
+            <a:schemeClr val="accent1"/>
+          </a:fillRef>
+          <a:effectRef idx="2">
+            <a:schemeClr val="accent1"/>
+          </a:effectRef>
+          <a:fontRef idx="minor">
+            <a:schemeClr val="lt1"/>
+          </a:fontRef>
+        </p:style>
+        <p:txBody>
+          <a:bodyPr rtlCol="0" anchor="ctr"/>
+          <a:lstStyle/>
+          <a:p>
+            <a:pPr algn="ctr"/>
+          </a:p>
+        </p:txBody>
+      </p:sp>
+      <p:sp>
+        <p:nvSpPr>
+          <p:cNvPr id="3" name="Rectangle 2"/>
+          <p:cNvSpPr/>
+          <p:nvPr/>
+        </p:nvSpPr>
+        <p:spPr>
+          <a:xfrm>
+            <a:off x="0" y="960120"/>
+            <a:ext cx="12191695" cy="41148"/>
+          </a:xfrm>
+          <a:prstGeom prst="rect">
+            <a:avLst/>
+          </a:prstGeom>
+          <a:solidFill>
+            <a:srgbClr val="FFD000"/>
+          </a:solidFill>
+          <a:ln>
+            <a:noFill/>
+          </a:ln>
+        </p:spPr>
+        <p:style>
+          <a:lnRef idx="1">
+            <a:schemeClr val="accent1"/>
+          </a:lnRef>
+          <a:fillRef idx="3">
+            <a:schemeClr val="accent1"/>
+          </a:fillRef>
+          <a:effectRef idx="2">
+            <a:schemeClr val="accent1"/>
+          </a:effectRef>
+          <a:fontRef idx="minor">
+            <a:schemeClr val="lt1"/>
+          </a:fontRef>
+        </p:style>
+        <p:txBody>
+          <a:bodyPr rtlCol="0" anchor="ctr"/>
+          <a:lstStyle/>
+          <a:p>
+            <a:pPr algn="ctr"/>
+          </a:p>
+        </p:txBody>
+      </p:sp>
+      <p:sp>
+        <p:nvSpPr>
+          <p:cNvPr id="4" name="TextBox 3"/>
+          <p:cNvSpPr txBox="1"/>
+          <p:nvPr/>
+        </p:nvSpPr>
+        <p:spPr>
+          <a:xfrm>
+            <a:off x="457200" y="164592"/>
+            <a:ext cx="11277295" cy="502920"/>
+          </a:xfrm>
+          <a:prstGeom prst="rect">
+            <a:avLst/>
+          </a:prstGeom>
+          <a:noFill/>
+        </p:spPr>
+        <p:txBody>
+          <a:bodyPr wrap="square">
+            <a:spAutoFit/>
+          </a:bodyPr>
+          <a:lstStyle/>
+          <a:p>
+            <a:r>
+              <a:rPr sz="2600" b="1" i="0">
+                <a:solidFill>
+                  <a:srgbClr val="FFFFFF"/>
+                </a:solidFill>
+                <a:latin typeface="Calibri"/>
+              </a:rPr>
+              <a:t>PI CloudLite — entregable de hoy</a:t>
+            </a:r>
+          </a:p>
+        </p:txBody>
+      </p:sp>
+      <p:sp>
+        <p:nvSpPr>
+          <p:cNvPr id="5" name="TextBox 4"/>
+          <p:cNvSpPr txBox="1"/>
+          <p:nvPr/>
+        </p:nvSpPr>
+        <p:spPr>
+          <a:xfrm>
+            <a:off x="457200" y="1170432"/>
+            <a:ext cx="11277295" cy="5230368"/>
+          </a:xfrm>
+          <a:prstGeom prst="rect">
+            <a:avLst/>
+          </a:prstGeom>
+          <a:noFill/>
+        </p:spPr>
+        <p:txBody>
+          <a:bodyPr wrap="square">
+            <a:spAutoFit/>
+          </a:bodyPr>
+          <a:lstStyle/>
+          <a:p>
+            <a:pPr>
+              <a:spcAft>
+                <a:spcPts val="800"/>
+              </a:spcAft>
+            </a:pPr>
+            <a:r>
+              <a:rPr sz="2000" b="0" i="0">
+                <a:solidFill>
+                  <a:srgbClr val="333333"/>
+                </a:solidFill>
+                <a:latin typeface="Calibri"/>
+              </a:rPr>
+              <a:t>–   </a:t>
+            </a:r>
+            <a:r>
+              <a:rPr sz="2000" b="1" i="0">
+                <a:solidFill>
+                  <a:srgbClr val="333333"/>
+                </a:solidFill>
+                <a:latin typeface="Calibri"/>
+              </a:rPr>
+              <a:t>Entregable:</a:t>
+            </a:r>
+            <a:r>
+              <a:rPr sz="2000" b="0" i="0">
+                <a:solidFill>
+                  <a:srgbClr val="333333"/>
+                </a:solidFill>
+                <a:latin typeface="Calibri"/>
+              </a:rPr>
+              <a:t> Sección Escalabilidad: triggers, límites, qué escala y qué no</a:t>
+            </a:r>
+          </a:p>
+          <a:p>
+            <a:pPr>
+              <a:spcAft>
+                <a:spcPts val="800"/>
+              </a:spcAft>
+            </a:pPr>
+            <a:r>
+              <a:rPr sz="2000" b="0" i="0">
+                <a:solidFill>
+                  <a:srgbClr val="333333"/>
+                </a:solidFill>
+                <a:latin typeface="Calibri"/>
+              </a:rPr>
+              <a:t>–   Herramienta: </a:t>
+            </a:r>
+            <a:r>
+              <a:rPr sz="2000" b="1" i="0">
+                <a:solidFill>
+                  <a:srgbClr val="333333"/>
+                </a:solidFill>
+                <a:latin typeface="Calibri"/>
+              </a:rPr>
+              <a:t>Google Docs · draw.io (opcional nota en Deployment)</a:t>
+            </a:r>
+          </a:p>
+          <a:p>
+            <a:pPr>
+              <a:spcAft>
+                <a:spcPts val="800"/>
+              </a:spcAft>
+            </a:pPr>
+            <a:r>
+              <a:rPr sz="2000" b="0" i="0">
+                <a:solidFill>
+                  <a:srgbClr val="333333"/>
+                </a:solidFill>
+                <a:latin typeface="Calibri"/>
+              </a:rPr>
+              <a:t>–   Todo lo que construyan hoy entra al </a:t>
+            </a:r>
+            <a:r>
+              <a:rPr sz="2000" b="1" i="0">
+                <a:solidFill>
+                  <a:srgbClr val="333333"/>
+                </a:solidFill>
+                <a:latin typeface="Calibri"/>
+              </a:rPr>
+              <a:t>informe/repo del PI</a:t>
+            </a:r>
+            <a:r>
+              <a:rPr sz="2000" b="0" i="0">
+                <a:solidFill>
+                  <a:srgbClr val="333333"/>
+                </a:solidFill>
+                <a:latin typeface="Calibri"/>
+              </a:rPr>
+              <a:t> (no es lab suelto).</a:t>
+            </a:r>
+          </a:p>
+          <a:p>
+            <a:pPr>
+              <a:spcAft>
+                <a:spcPts val="800"/>
+              </a:spcAft>
+            </a:pPr>
+            <a:r>
+              <a:rPr sz="2000" b="0" i="0">
+                <a:solidFill>
+                  <a:srgbClr val="333333"/>
+                </a:solidFill>
+                <a:latin typeface="Calibri"/>
+              </a:rPr>
+              <a:t>–   Individual por defecto · el docente puede autorizar equipos de 2–3; la entrega en la plataforma del curso siempre es individual.</a:t>
+            </a:r>
+          </a:p>
+        </p:txBody>
+      </p:sp>
+      <p:sp>
+        <p:nvSpPr>
+          <p:cNvPr id="6" name="TextBox 5"/>
+          <p:cNvSpPr txBox="1"/>
+          <p:nvPr/>
+        </p:nvSpPr>
+        <p:spPr>
+          <a:xfrm>
+            <a:off x="11185855" y="6473952"/>
+            <a:ext cx="640080" cy="274320"/>
+          </a:xfrm>
+          <a:prstGeom prst="rect">
+            <a:avLst/>
+          </a:prstGeom>
+          <a:noFill/>
+        </p:spPr>
+        <p:txBody>
+          <a:bodyPr wrap="square">
+            <a:spAutoFit/>
+          </a:bodyPr>
+          <a:lstStyle/>
+          <a:p>
+            <a:pPr algn="r"/>
+            <a:r>
+              <a:rPr sz="1100" b="0" i="0">
+                <a:solidFill>
+                  <a:srgbClr val="666666"/>
+                </a:solidFill>
+                <a:latin typeface="Calibri"/>
+              </a:rPr>
+              <a:t>24</a:t>
+            </a:r>
+          </a:p>
+        </p:txBody>
+      </p:sp>
+    </p:spTree>
+  </p:cSld>
+  <p:clrMapOvr>
+    <a:masterClrMapping/>
+  </p:clrMapOvr>
+</p:sld>
+</file>
+
+<file path=ppt/slides/slide25.xml><?xml version="1.0" encoding="utf-8"?>
+<p:sld xmlns:a="http://schemas.openxmlformats.org/drawingml/2006/main" xmlns:p="http://schemas.openxmlformats.org/presentationml/2006/main" xmlns:r="http://schemas.openxmlformats.org/officeDocument/2006/relationships">
+  <p:cSld>
+    <p:bg>
+      <p:bgPr>
+        <a:solidFill>
+          <a:srgbClr val="FFFFFF"/>
+        </a:solidFill>
+        <a:effectLst/>
+      </p:bgPr>
+    </p:bg>
+    <p:spTree>
+      <p:nvGrpSpPr>
+        <p:cNvPr id="1" name=""/>
+        <p:cNvGrpSpPr/>
+        <p:nvPr/>
+      </p:nvGrpSpPr>
+      <p:grpSpPr/>
+      <p:sp>
+        <p:nvSpPr>
+          <p:cNvPr id="2" name="Rectangle 1"/>
+          <p:cNvSpPr/>
+          <p:nvPr/>
+        </p:nvSpPr>
+        <p:spPr>
+          <a:xfrm>
+            <a:off x="0" y="0"/>
+            <a:ext cx="12191695" cy="960120"/>
+          </a:xfrm>
+          <a:prstGeom prst="rect">
+            <a:avLst/>
+          </a:prstGeom>
+          <a:solidFill>
+            <a:srgbClr val="095292"/>
+          </a:solidFill>
+          <a:ln>
+            <a:noFill/>
+          </a:ln>
+        </p:spPr>
+        <p:style>
+          <a:lnRef idx="1">
+            <a:schemeClr val="accent1"/>
+          </a:lnRef>
+          <a:fillRef idx="3">
+            <a:schemeClr val="accent1"/>
+          </a:fillRef>
+          <a:effectRef idx="2">
+            <a:schemeClr val="accent1"/>
+          </a:effectRef>
+          <a:fontRef idx="minor">
+            <a:schemeClr val="lt1"/>
+          </a:fontRef>
+        </p:style>
+        <p:txBody>
+          <a:bodyPr rtlCol="0" anchor="ctr"/>
+          <a:lstStyle/>
+          <a:p>
+            <a:pPr algn="ctr"/>
+          </a:p>
+        </p:txBody>
+      </p:sp>
+      <p:sp>
+        <p:nvSpPr>
+          <p:cNvPr id="3" name="Rectangle 2"/>
+          <p:cNvSpPr/>
+          <p:nvPr/>
+        </p:nvSpPr>
+        <p:spPr>
+          <a:xfrm>
+            <a:off x="0" y="960120"/>
+            <a:ext cx="12191695" cy="41148"/>
+          </a:xfrm>
+          <a:prstGeom prst="rect">
+            <a:avLst/>
+          </a:prstGeom>
+          <a:solidFill>
+            <a:srgbClr val="FFD000"/>
+          </a:solidFill>
+          <a:ln>
+            <a:noFill/>
+          </a:ln>
+        </p:spPr>
+        <p:style>
+          <a:lnRef idx="1">
+            <a:schemeClr val="accent1"/>
+          </a:lnRef>
+          <a:fillRef idx="3">
+            <a:schemeClr val="accent1"/>
+          </a:fillRef>
+          <a:effectRef idx="2">
+            <a:schemeClr val="accent1"/>
+          </a:effectRef>
+          <a:fontRef idx="minor">
+            <a:schemeClr val="lt1"/>
+          </a:fontRef>
+        </p:style>
+        <p:txBody>
+          <a:bodyPr rtlCol="0" anchor="ctr"/>
+          <a:lstStyle/>
+          <a:p>
+            <a:pPr algn="ctr"/>
+          </a:p>
+        </p:txBody>
+      </p:sp>
+      <p:sp>
+        <p:nvSpPr>
+          <p:cNvPr id="4" name="TextBox 3"/>
+          <p:cNvSpPr txBox="1"/>
+          <p:nvPr/>
+        </p:nvSpPr>
+        <p:spPr>
+          <a:xfrm>
+            <a:off x="457200" y="164592"/>
+            <a:ext cx="11277295" cy="502920"/>
+          </a:xfrm>
+          <a:prstGeom prst="rect">
+            <a:avLst/>
+          </a:prstGeom>
+          <a:noFill/>
+        </p:spPr>
+        <p:txBody>
+          <a:bodyPr wrap="square">
+            <a:spAutoFit/>
+          </a:bodyPr>
+          <a:lstStyle/>
+          <a:p>
+            <a:r>
+              <a:rPr sz="2600" b="1" i="0">
+                <a:solidFill>
+                  <a:srgbClr val="FFFFFF"/>
+                </a:solidFill>
+                <a:latin typeface="Calibri"/>
+              </a:rPr>
+              <a:t>Manos a la obra (paso a paso)</a:t>
+            </a:r>
+          </a:p>
+        </p:txBody>
+      </p:sp>
+      <p:sp>
+        <p:nvSpPr>
+          <p:cNvPr id="5" name="TextBox 4"/>
+          <p:cNvSpPr txBox="1"/>
+          <p:nvPr/>
+        </p:nvSpPr>
+        <p:spPr>
+          <a:xfrm>
+            <a:off x="457200" y="1170432"/>
+            <a:ext cx="11277295" cy="5230368"/>
+          </a:xfrm>
+          <a:prstGeom prst="rect">
+            <a:avLst/>
+          </a:prstGeom>
+          <a:noFill/>
+        </p:spPr>
+        <p:txBody>
+          <a:bodyPr wrap="square">
+            <a:spAutoFit/>
+          </a:bodyPr>
+          <a:lstStyle/>
+          <a:p>
+            <a:pPr>
+              <a:spcAft>
+                <a:spcPts val="800"/>
+              </a:spcAft>
+            </a:pPr>
+            <a:r>
+              <a:rPr sz="1800" b="1" i="0">
+                <a:solidFill>
+                  <a:srgbClr val="333333"/>
+                </a:solidFill>
+                <a:latin typeface="Calibri"/>
+              </a:rPr>
+              <a:t>1.</a:t>
+            </a:r>
+            <a:r>
+              <a:rPr sz="1800" b="0" i="0">
+                <a:solidFill>
+                  <a:srgbClr val="333333"/>
+                </a:solidFill>
+                <a:latin typeface="Calibri"/>
+              </a:rPr>
+              <a:t> Paso 1: tome los 5 componentes de su C4Deployment de la Clase 7 y clasifique cada uno como escala horizontal, escala vertical o no escala, verificando que al menos uno quede en no escala con justificacion tecnica, porque una politica donde todo escala no es una politica; el resultado abre la seccion Escalabilidad del informe.</a:t>
+            </a:r>
+          </a:p>
+          <a:p>
+            <a:pPr>
+              <a:spcAft>
+                <a:spcPts val="800"/>
+              </a:spcAft>
+            </a:pPr>
+            <a:r>
+              <a:rPr sz="1800" b="0" i="0">
+                <a:solidFill>
+                  <a:srgbClr val="333333"/>
+                </a:solidFill>
+                <a:latin typeface="Calibri"/>
+              </a:rPr>
+              <a:t>–   </a:t>
+            </a:r>
+            <a:r>
+              <a:rPr sz="1800" b="1" i="0">
+                <a:solidFill>
+                  <a:srgbClr val="333333"/>
+                </a:solidFill>
+                <a:latin typeface="Calibri"/>
+              </a:rPr>
+              <a:t>2.</a:t>
+            </a:r>
+            <a:r>
+              <a:rPr sz="1800" b="0" i="0">
+                <a:solidFill>
+                  <a:srgbClr val="333333"/>
+                </a:solidFill>
+                <a:latin typeface="Calibri"/>
+              </a:rPr>
+              <a:t> Paso 2: complete la tabla de politica de escalado con 6 columnas y 5 filas (componente, tipo de escala, disparador de subida, disparador de bajada, minimo y maximo, tiempo de enfriamiento), verificando que cada disparador tenga metrica, umbral numerico y ventana de tiempo, y que ningun maximo quede en infinito o sin definir.</a:t>
+            </a:r>
+          </a:p>
+          <a:p>
+            <a:pPr>
+              <a:spcAft>
+                <a:spcPts val="800"/>
+              </a:spcAft>
+            </a:pPr>
+            <a:r>
+              <a:rPr sz="1800" b="0" i="0">
+                <a:solidFill>
+                  <a:srgbClr val="333333"/>
+                </a:solidFill>
+                <a:latin typeface="Calibri"/>
+              </a:rPr>
+              <a:t>–   </a:t>
+            </a:r>
+            <a:r>
+              <a:rPr sz="1800" b="1" i="0">
+                <a:solidFill>
+                  <a:srgbClr val="333333"/>
+                </a:solidFill>
+                <a:latin typeface="Calibri"/>
+              </a:rPr>
+              <a:t>3.</a:t>
+            </a:r>
+            <a:r>
+              <a:rPr sz="1800" b="0" i="0">
+                <a:solidFill>
+                  <a:srgbClr val="333333"/>
+                </a:solidFill>
+                <a:latin typeface="Calibri"/>
+              </a:rPr>
+              <a:t> Paso 3: escriba en la plataforma del curso el diagrama Mermaid de la maquina de decision del autoescalado con el nodo de observacion, los dos rombos de decision, las acciones de subida y bajada, el enfriamiento y el nodo de lo que no escala, verificando al renderizar que el ciclo se cierre sobre el nodo de observacion y que los umbrales del diagrama sean los mismos numeros de la tabla.</a:t>
+            </a:r>
+          </a:p>
+          <a:p>
+            <a:pPr>
+              <a:spcAft>
+                <a:spcPts val="800"/>
+              </a:spcAft>
+            </a:pPr>
+            <a:r>
+              <a:rPr sz="1800" b="0" i="0">
+                <a:solidFill>
+                  <a:srgbClr val="333333"/>
+                </a:solidFill>
+                <a:latin typeface="Calibri"/>
+              </a:rPr>
+              <a:t>–   </a:t>
+            </a:r>
+            <a:r>
+              <a:rPr sz="1800" b="1" i="0">
+                <a:solidFill>
+                  <a:srgbClr val="333333"/>
+                </a:solidFill>
+                <a:latin typeface="Calibri"/>
+              </a:rPr>
+              <a:t>4.</a:t>
+            </a:r>
+            <a:r>
+              <a:rPr sz="1800" b="0" i="0">
+                <a:solidFill>
+                  <a:srgbClr val="333333"/>
+                </a:solidFill>
+                <a:latin typeface="Calibri"/>
+              </a:rPr>
+              <a:t> Paso 4: escriba los 3 componentes que NO escalan con su justificacion tecnica y su plan alterno, y la tabla de impacto en costos que enlaza con la Clase 10, verificando que cada plan alterno sea ejecutable sin cloud de pago y que el impacto de costo use los mismos niveles bajo, medio o alto de la seccion de costos.</a:t>
+            </a:r>
+          </a:p>
+          <a:p>
+            <a:pPr>
+              <a:spcAft>
+                <a:spcPts val="800"/>
+              </a:spcAft>
+            </a:pPr>
+            <a:r>
+              <a:rPr sz="1800" b="0" i="0">
+                <a:solidFill>
+                  <a:srgbClr val="333333"/>
+                </a:solidFill>
+                <a:latin typeface="Calibri"/>
+              </a:rPr>
+              <a:t>–   </a:t>
+            </a:r>
+            <a:r>
+              <a:rPr sz="1800" b="1" i="0">
+                <a:solidFill>
+                  <a:srgbClr val="333333"/>
+                </a:solidFill>
+                <a:latin typeface="Calibri"/>
+              </a:rPr>
+              <a:t>5.</a:t>
+            </a:r>
+            <a:r>
+              <a:rPr sz="1800" b="0" i="0">
+                <a:solidFill>
+                  <a:srgbClr val="333333"/>
+                </a:solidFill>
+                <a:latin typeface="Calibri"/>
+              </a:rPr>
+              <a:t> Paso 5: integre la politica en la seccion Escalabilidad del informe, anote la marca de replicas en el diagrama de despliegue si aplica y suba las 5 preguntas a la plataforma del curso (modulo Talleres) antes del en la fecha que indique el docente, verificando que la politica no prometa nada que la arquitectura dibujada no pueda cumplir.</a:t>
+            </a:r>
+          </a:p>
+        </p:txBody>
+      </p:sp>
+      <p:sp>
+        <p:nvSpPr>
+          <p:cNvPr id="6" name="TextBox 5"/>
+          <p:cNvSpPr txBox="1"/>
+          <p:nvPr/>
+        </p:nvSpPr>
+        <p:spPr>
+          <a:xfrm>
+            <a:off x="11185855" y="6473952"/>
+            <a:ext cx="640080" cy="274320"/>
+          </a:xfrm>
+          <a:prstGeom prst="rect">
+            <a:avLst/>
+          </a:prstGeom>
+          <a:noFill/>
+        </p:spPr>
+        <p:txBody>
+          <a:bodyPr wrap="square">
+            <a:spAutoFit/>
+          </a:bodyPr>
+          <a:lstStyle/>
+          <a:p>
+            <a:pPr algn="r"/>
+            <a:r>
+              <a:rPr sz="1100" b="0" i="0">
+                <a:solidFill>
+                  <a:srgbClr val="666666"/>
+                </a:solidFill>
+                <a:latin typeface="Calibri"/>
+              </a:rPr>
+              <a:t>25</a:t>
+            </a:r>
+          </a:p>
+        </p:txBody>
+      </p:sp>
+    </p:spTree>
+  </p:cSld>
+  <p:clrMapOvr>
+    <a:masterClrMapping/>
+  </p:clrMapOvr>
+</p:sld>
+</file>
+
+<file path=ppt/slides/slide26.xml><?xml version="1.0" encoding="utf-8"?>
+<p:sld xmlns:a="http://schemas.openxmlformats.org/drawingml/2006/main" xmlns:p="http://schemas.openxmlformats.org/presentationml/2006/main" xmlns:r="http://schemas.openxmlformats.org/officeDocument/2006/relationships">
+  <p:cSld>
+    <p:bg>
+      <p:bgPr>
+        <a:solidFill>
+          <a:srgbClr val="FFFFFF"/>
+        </a:solidFill>
+        <a:effectLst/>
+      </p:bgPr>
+    </p:bg>
+    <p:spTree>
+      <p:nvGrpSpPr>
+        <p:cNvPr id="1" name=""/>
+        <p:cNvGrpSpPr/>
+        <p:nvPr/>
+      </p:nvGrpSpPr>
+      <p:grpSpPr/>
+      <p:sp>
+        <p:nvSpPr>
+          <p:cNvPr id="2" name="Rectangle 1"/>
+          <p:cNvSpPr/>
+          <p:nvPr/>
+        </p:nvSpPr>
+        <p:spPr>
+          <a:xfrm>
+            <a:off x="0" y="0"/>
+            <a:ext cx="12191695" cy="960120"/>
+          </a:xfrm>
+          <a:prstGeom prst="rect">
+            <a:avLst/>
+          </a:prstGeom>
+          <a:solidFill>
+            <a:srgbClr val="095292"/>
+          </a:solidFill>
+          <a:ln>
+            <a:noFill/>
+          </a:ln>
+        </p:spPr>
+        <p:style>
+          <a:lnRef idx="1">
+            <a:schemeClr val="accent1"/>
+          </a:lnRef>
+          <a:fillRef idx="3">
+            <a:schemeClr val="accent1"/>
+          </a:fillRef>
+          <a:effectRef idx="2">
+            <a:schemeClr val="accent1"/>
+          </a:effectRef>
+          <a:fontRef idx="minor">
+            <a:schemeClr val="lt1"/>
+          </a:fontRef>
+        </p:style>
+        <p:txBody>
+          <a:bodyPr rtlCol="0" anchor="ctr"/>
+          <a:lstStyle/>
+          <a:p>
+            <a:pPr algn="ctr"/>
+          </a:p>
+        </p:txBody>
+      </p:sp>
+      <p:sp>
+        <p:nvSpPr>
+          <p:cNvPr id="3" name="Rectangle 2"/>
+          <p:cNvSpPr/>
+          <p:nvPr/>
+        </p:nvSpPr>
+        <p:spPr>
+          <a:xfrm>
+            <a:off x="0" y="960120"/>
+            <a:ext cx="12191695" cy="41148"/>
+          </a:xfrm>
+          <a:prstGeom prst="rect">
+            <a:avLst/>
+          </a:prstGeom>
+          <a:solidFill>
+            <a:srgbClr val="FFD000"/>
+          </a:solidFill>
+          <a:ln>
+            <a:noFill/>
+          </a:ln>
+        </p:spPr>
+        <p:style>
+          <a:lnRef idx="1">
+            <a:schemeClr val="accent1"/>
+          </a:lnRef>
+          <a:fillRef idx="3">
+            <a:schemeClr val="accent1"/>
+          </a:fillRef>
+          <a:effectRef idx="2">
+            <a:schemeClr val="accent1"/>
+          </a:effectRef>
+          <a:fontRef idx="minor">
+            <a:schemeClr val="lt1"/>
+          </a:fontRef>
+        </p:style>
+        <p:txBody>
+          <a:bodyPr rtlCol="0" anchor="ctr"/>
+          <a:lstStyle/>
+          <a:p>
+            <a:pPr algn="ctr"/>
+          </a:p>
+        </p:txBody>
+      </p:sp>
+      <p:sp>
+        <p:nvSpPr>
+          <p:cNvPr id="4" name="TextBox 3"/>
+          <p:cNvSpPr txBox="1"/>
+          <p:nvPr/>
+        </p:nvSpPr>
+        <p:spPr>
+          <a:xfrm>
+            <a:off x="457200" y="164592"/>
+            <a:ext cx="11277295" cy="502920"/>
+          </a:xfrm>
+          <a:prstGeom prst="rect">
+            <a:avLst/>
+          </a:prstGeom>
+          <a:noFill/>
+        </p:spPr>
+        <p:txBody>
+          <a:bodyPr wrap="square">
+            <a:spAutoFit/>
+          </a:bodyPr>
+          <a:lstStyle/>
+          <a:p>
+            <a:r>
+              <a:rPr sz="2600" b="1" i="0">
+                <a:solidFill>
+                  <a:srgbClr val="FFFFFF"/>
+                </a:solidFill>
+                <a:latin typeface="Calibri"/>
+              </a:rPr>
+              <a:t>Para continuar (PI)</a:t>
+            </a:r>
+          </a:p>
+        </p:txBody>
+      </p:sp>
+      <p:sp>
+        <p:nvSpPr>
+          <p:cNvPr id="5" name="Rounded Rectangle 4"/>
+          <p:cNvSpPr/>
+          <p:nvPr/>
+        </p:nvSpPr>
+        <p:spPr>
+          <a:xfrm>
+            <a:off x="457200" y="1261872"/>
+            <a:ext cx="11277295" cy="1051560"/>
+          </a:xfrm>
+          <a:prstGeom prst="roundRect">
+            <a:avLst>
+              <a:gd name="adj" fmla="val 12000"/>
+            </a:avLst>
+          </a:prstGeom>
+          <a:solidFill>
+            <a:srgbClr val="E8F4FA"/>
+          </a:solidFill>
+          <a:ln>
+            <a:noFill/>
+          </a:ln>
+        </p:spPr>
+        <p:style>
+          <a:lnRef idx="1">
+            <a:schemeClr val="accent1"/>
+          </a:lnRef>
+          <a:fillRef idx="3">
+            <a:schemeClr val="accent1"/>
+          </a:fillRef>
+          <a:effectRef idx="2">
+            <a:schemeClr val="accent1"/>
+          </a:effectRef>
+          <a:fontRef idx="minor">
+            <a:schemeClr val="lt1"/>
+          </a:fontRef>
+        </p:style>
+        <p:txBody>
+          <a:bodyPr rtlCol="0" anchor="ctr"/>
+          <a:lstStyle/>
+          <a:p>
+            <a:pPr algn="ctr"/>
+          </a:p>
+        </p:txBody>
+      </p:sp>
+      <p:sp>
+        <p:nvSpPr>
+          <p:cNvPr id="6" name="Rectangle 5"/>
+          <p:cNvSpPr/>
+          <p:nvPr/>
+        </p:nvSpPr>
+        <p:spPr>
+          <a:xfrm>
+            <a:off x="457200" y="1261872"/>
+            <a:ext cx="128016" cy="1051560"/>
+          </a:xfrm>
+          <a:prstGeom prst="rect">
+            <a:avLst/>
+          </a:prstGeom>
+          <a:solidFill>
+            <a:srgbClr val="269CCB"/>
+          </a:solidFill>
+          <a:ln>
+            <a:noFill/>
+          </a:ln>
+        </p:spPr>
+        <p:style>
+          <a:lnRef idx="1">
+            <a:schemeClr val="accent1"/>
+          </a:lnRef>
+          <a:fillRef idx="3">
+            <a:schemeClr val="accent1"/>
+          </a:fillRef>
+          <a:effectRef idx="2">
+            <a:schemeClr val="accent1"/>
+          </a:effectRef>
+          <a:fontRef idx="minor">
+            <a:schemeClr val="lt1"/>
+          </a:fontRef>
+        </p:style>
+        <p:txBody>
+          <a:bodyPr rtlCol="0" anchor="ctr"/>
+          <a:lstStyle/>
+          <a:p>
+            <a:pPr algn="ctr"/>
+          </a:p>
+        </p:txBody>
+      </p:sp>
+      <p:sp>
+        <p:nvSpPr>
+          <p:cNvPr id="7" name="TextBox 6"/>
+          <p:cNvSpPr txBox="1"/>
+          <p:nvPr/>
+        </p:nvSpPr>
+        <p:spPr>
+          <a:xfrm>
+            <a:off x="777240" y="1399031"/>
+            <a:ext cx="10774375" cy="822959"/>
+          </a:xfrm>
+          <a:prstGeom prst="rect">
+            <a:avLst/>
+          </a:prstGeom>
+          <a:noFill/>
+        </p:spPr>
+        <p:txBody>
+          <a:bodyPr wrap="square">
+            <a:spAutoFit/>
+          </a:bodyPr>
+          <a:lstStyle/>
+          <a:p>
+            <a:r>
+              <a:rPr sz="1200" b="1" i="0">
+                <a:solidFill>
+                  <a:srgbClr val="269CCB"/>
+                </a:solidFill>
+                <a:latin typeface="Calibri"/>
+              </a:rPr>
+              <a:t>Info</a:t>
+            </a:r>
+          </a:p>
+          <a:p>
+            <a:pPr>
+              <a:spcBef>
+                <a:spcPts val="400"/>
+              </a:spcBef>
+            </a:pPr>
+            <a:r>
+              <a:rPr sz="1400" b="0" i="0">
+                <a:solidFill>
+                  <a:srgbClr val="333333"/>
+                </a:solidFill>
+                <a:latin typeface="Calibri"/>
+              </a:rPr>
+              <a:t>Entregable: Sección Escalabilidad: triggers, límites, qué escala y qué no</a:t>
+            </a:r>
+          </a:p>
+        </p:txBody>
+      </p:sp>
+      <p:sp>
+        <p:nvSpPr>
+          <p:cNvPr id="8" name="Rounded Rectangle 7"/>
+          <p:cNvSpPr/>
+          <p:nvPr/>
+        </p:nvSpPr>
+        <p:spPr>
+          <a:xfrm>
+            <a:off x="457200" y="2478024"/>
+            <a:ext cx="11277295" cy="1051560"/>
+          </a:xfrm>
+          <a:prstGeom prst="roundRect">
+            <a:avLst>
+              <a:gd name="adj" fmla="val 12000"/>
+            </a:avLst>
+          </a:prstGeom>
+          <a:solidFill>
+            <a:srgbClr val="FFF8E1"/>
+          </a:solidFill>
+          <a:ln>
+            <a:noFill/>
+          </a:ln>
+        </p:spPr>
+        <p:style>
+          <a:lnRef idx="1">
+            <a:schemeClr val="accent1"/>
+          </a:lnRef>
+          <a:fillRef idx="3">
+            <a:schemeClr val="accent1"/>
+          </a:fillRef>
+          <a:effectRef idx="2">
+            <a:schemeClr val="accent1"/>
+          </a:effectRef>
+          <a:fontRef idx="minor">
+            <a:schemeClr val="lt1"/>
+          </a:fontRef>
+        </p:style>
+        <p:txBody>
+          <a:bodyPr rtlCol="0" anchor="ctr"/>
+          <a:lstStyle/>
+          <a:p>
+            <a:pPr algn="ctr"/>
+          </a:p>
+        </p:txBody>
+      </p:sp>
+      <p:sp>
+        <p:nvSpPr>
+          <p:cNvPr id="9" name="Rectangle 8"/>
+          <p:cNvSpPr/>
+          <p:nvPr/>
+        </p:nvSpPr>
+        <p:spPr>
+          <a:xfrm>
+            <a:off x="457200" y="2478024"/>
+            <a:ext cx="128016" cy="1051560"/>
+          </a:xfrm>
+          <a:prstGeom prst="rect">
+            <a:avLst/>
+          </a:prstGeom>
+          <a:solidFill>
+            <a:srgbClr val="FFD000"/>
+          </a:solidFill>
+          <a:ln>
+            <a:noFill/>
+          </a:ln>
+        </p:spPr>
+        <p:style>
+          <a:lnRef idx="1">
+            <a:schemeClr val="accent1"/>
+          </a:lnRef>
+          <a:fillRef idx="3">
+            <a:schemeClr val="accent1"/>
+          </a:fillRef>
+          <a:effectRef idx="2">
+            <a:schemeClr val="accent1"/>
+          </a:effectRef>
+          <a:fontRef idx="minor">
+            <a:schemeClr val="lt1"/>
+          </a:fontRef>
+        </p:style>
+        <p:txBody>
+          <a:bodyPr rtlCol="0" anchor="ctr"/>
+          <a:lstStyle/>
+          <a:p>
+            <a:pPr algn="ctr"/>
+          </a:p>
+        </p:txBody>
+      </p:sp>
+      <p:sp>
+        <p:nvSpPr>
+          <p:cNvPr id="10" name="TextBox 9"/>
+          <p:cNvSpPr txBox="1"/>
+          <p:nvPr/>
+        </p:nvSpPr>
+        <p:spPr>
+          <a:xfrm>
+            <a:off x="777240" y="2615184"/>
+            <a:ext cx="10774375" cy="822959"/>
+          </a:xfrm>
+          <a:prstGeom prst="rect">
+            <a:avLst/>
+          </a:prstGeom>
+          <a:noFill/>
+        </p:spPr>
+        <p:txBody>
+          <a:bodyPr wrap="square">
+            <a:spAutoFit/>
+          </a:bodyPr>
+          <a:lstStyle/>
+          <a:p>
+            <a:r>
+              <a:rPr sz="1200" b="1" i="0">
+                <a:solidFill>
+                  <a:srgbClr val="FFD000"/>
+                </a:solidFill>
+                <a:latin typeface="Calibri"/>
+              </a:rPr>
+              <a:t>Aclaración</a:t>
+            </a:r>
+          </a:p>
+          <a:p>
+            <a:pPr>
+              <a:spcBef>
+                <a:spcPts val="400"/>
+              </a:spcBef>
+            </a:pPr>
+            <a:r>
+              <a:rPr sz="1400" b="0" i="0">
+                <a:solidFill>
+                  <a:srgbClr val="333333"/>
+                </a:solidFill>
+                <a:latin typeface="Calibri"/>
+              </a:rPr>
+              <a:t>Subir evidencias al paquete CloudLite (Drive/repo) y a la plataforma del curso en la fecha que indique el docente.</a:t>
+            </a:r>
+          </a:p>
+        </p:txBody>
+      </p:sp>
+      <p:sp>
+        <p:nvSpPr>
+          <p:cNvPr id="11" name="Rounded Rectangle 10"/>
+          <p:cNvSpPr/>
+          <p:nvPr/>
+        </p:nvSpPr>
+        <p:spPr>
+          <a:xfrm>
+            <a:off x="457200" y="3694176"/>
+            <a:ext cx="11277295" cy="1051560"/>
+          </a:xfrm>
+          <a:prstGeom prst="roundRect">
+            <a:avLst>
+              <a:gd name="adj" fmla="val 12000"/>
+            </a:avLst>
+          </a:prstGeom>
+          <a:solidFill>
+            <a:srgbClr val="FBE4E4"/>
+          </a:solidFill>
+          <a:ln>
+            <a:noFill/>
+          </a:ln>
+        </p:spPr>
+        <p:style>
+          <a:lnRef idx="1">
+            <a:schemeClr val="accent1"/>
+          </a:lnRef>
+          <a:fillRef idx="3">
+            <a:schemeClr val="accent1"/>
+          </a:fillRef>
+          <a:effectRef idx="2">
+            <a:schemeClr val="accent1"/>
+          </a:effectRef>
+          <a:fontRef idx="minor">
+            <a:schemeClr val="lt1"/>
+          </a:fontRef>
+        </p:style>
+        <p:txBody>
+          <a:bodyPr rtlCol="0" anchor="ctr"/>
+          <a:lstStyle/>
+          <a:p>
+            <a:pPr algn="ctr"/>
+          </a:p>
+        </p:txBody>
+      </p:sp>
+      <p:sp>
+        <p:nvSpPr>
+          <p:cNvPr id="12" name="Rectangle 11"/>
+          <p:cNvSpPr/>
+          <p:nvPr/>
+        </p:nvSpPr>
+        <p:spPr>
+          <a:xfrm>
+            <a:off x="457200" y="3694176"/>
+            <a:ext cx="128016" cy="1051560"/>
+          </a:xfrm>
+          <a:prstGeom prst="rect">
+            <a:avLst/>
+          </a:prstGeom>
+          <a:solidFill>
+            <a:srgbClr val="A02030"/>
+          </a:solidFill>
+          <a:ln>
+            <a:noFill/>
+          </a:ln>
+        </p:spPr>
+        <p:style>
+          <a:lnRef idx="1">
+            <a:schemeClr val="accent1"/>
+          </a:lnRef>
+          <a:fillRef idx="3">
+            <a:schemeClr val="accent1"/>
+          </a:fillRef>
+          <a:effectRef idx="2">
+            <a:schemeClr val="accent1"/>
+          </a:effectRef>
+          <a:fontRef idx="minor">
+            <a:schemeClr val="lt1"/>
+          </a:fontRef>
+        </p:style>
+        <p:txBody>
+          <a:bodyPr rtlCol="0" anchor="ctr"/>
+          <a:lstStyle/>
+          <a:p>
+            <a:pPr algn="ctr"/>
+          </a:p>
+        </p:txBody>
+      </p:sp>
+      <p:sp>
+        <p:nvSpPr>
+          <p:cNvPr id="13" name="TextBox 12"/>
+          <p:cNvSpPr txBox="1"/>
+          <p:nvPr/>
+        </p:nvSpPr>
+        <p:spPr>
+          <a:xfrm>
+            <a:off x="777240" y="3831336"/>
+            <a:ext cx="10774375" cy="822959"/>
+          </a:xfrm>
+          <a:prstGeom prst="rect">
+            <a:avLst/>
+          </a:prstGeom>
+          <a:noFill/>
+        </p:spPr>
+        <p:txBody>
+          <a:bodyPr wrap="square">
+            <a:spAutoFit/>
+          </a:bodyPr>
+          <a:lstStyle/>
+          <a:p>
+            <a:r>
+              <a:rPr sz="1200" b="1" i="0">
+                <a:solidFill>
+                  <a:srgbClr val="A02030"/>
+                </a:solidFill>
+                <a:latin typeface="Calibri"/>
+              </a:rPr>
+              <a:t>Atención</a:t>
+            </a:r>
+          </a:p>
+          <a:p>
+            <a:pPr>
+              <a:spcBef>
+                <a:spcPts val="400"/>
+              </a:spcBef>
+            </a:pPr>
+            <a:r>
+              <a:rPr sz="1400" b="0" i="0">
+                <a:solidFill>
+                  <a:srgbClr val="333333"/>
+                </a:solidFill>
+                <a:latin typeface="Calibri"/>
+              </a:rPr>
+              <a:t>Sin cloud de pago ni instalaciones obligatorias de hipervisores/Docker Desktop.</a:t>
+            </a:r>
+          </a:p>
+        </p:txBody>
+      </p:sp>
+      <p:sp>
+        <p:nvSpPr>
+          <p:cNvPr id="14" name="TextBox 13"/>
+          <p:cNvSpPr txBox="1"/>
+          <p:nvPr/>
+        </p:nvSpPr>
+        <p:spPr>
+          <a:xfrm>
+            <a:off x="11185855" y="6473952"/>
+            <a:ext cx="640080" cy="274320"/>
+          </a:xfrm>
+          <a:prstGeom prst="rect">
+            <a:avLst/>
+          </a:prstGeom>
+          <a:noFill/>
+        </p:spPr>
+        <p:txBody>
+          <a:bodyPr wrap="square">
+            <a:spAutoFit/>
+          </a:bodyPr>
+          <a:lstStyle/>
+          <a:p>
+            <a:pPr algn="r"/>
+            <a:r>
+              <a:rPr sz="1100" b="0" i="0">
+                <a:solidFill>
+                  <a:srgbClr val="666666"/>
+                </a:solidFill>
+                <a:latin typeface="Calibri"/>
+              </a:rPr>
+              <a:t>26</a:t>
+            </a:r>
+          </a:p>
+        </p:txBody>
+      </p:sp>
+    </p:spTree>
+  </p:cSld>
+  <p:clrMapOvr>
+    <a:masterClrMapping/>
+  </p:clrMapOvr>
+</p:sld>
+</file>
+
+<file path=ppt/slides/slide27.xml><?xml version="1.0" encoding="utf-8"?>
+<p:sld xmlns:a="http://schemas.openxmlformats.org/drawingml/2006/main" xmlns:p="http://schemas.openxmlformats.org/presentationml/2006/main" xmlns:r="http://schemas.openxmlformats.org/officeDocument/2006/relationships">
+  <p:cSld>
+    <p:bg>
+      <p:bgPr>
+        <a:solidFill>
+          <a:srgbClr val="FFFFFF"/>
+        </a:solidFill>
+        <a:effectLst/>
+      </p:bgPr>
+    </p:bg>
+    <p:spTree>
+      <p:nvGrpSpPr>
+        <p:cNvPr id="1" name=""/>
+        <p:cNvGrpSpPr/>
+        <p:nvPr/>
+      </p:nvGrpSpPr>
+      <p:grpSpPr/>
+      <p:sp>
+        <p:nvSpPr>
+          <p:cNvPr id="2" name="Rectangle 1"/>
+          <p:cNvSpPr/>
+          <p:nvPr/>
+        </p:nvSpPr>
+        <p:spPr>
+          <a:xfrm>
+            <a:off x="0" y="0"/>
+            <a:ext cx="12191695" cy="164592"/>
+          </a:xfrm>
+          <a:prstGeom prst="rect">
+            <a:avLst/>
+          </a:prstGeom>
+          <a:solidFill>
+            <a:srgbClr val="269CCB"/>
+          </a:solidFill>
+          <a:ln>
+            <a:noFill/>
+          </a:ln>
+        </p:spPr>
+        <p:style>
+          <a:lnRef idx="1">
+            <a:schemeClr val="accent1"/>
+          </a:lnRef>
+          <a:fillRef idx="3">
+            <a:schemeClr val="accent1"/>
+          </a:fillRef>
+          <a:effectRef idx="2">
+            <a:schemeClr val="accent1"/>
+          </a:effectRef>
+          <a:fontRef idx="minor">
+            <a:schemeClr val="lt1"/>
+          </a:fontRef>
+        </p:style>
+        <p:txBody>
+          <a:bodyPr rtlCol="0" anchor="ctr"/>
+          <a:lstStyle/>
+          <a:p>
+            <a:pPr algn="ctr"/>
+          </a:p>
+        </p:txBody>
+      </p:sp>
+      <p:pic>
+        <p:nvPicPr>
+          <p:cNvPr id="3" name="Picture 2" descr="logo_uniajc_color.png"/>
+          <p:cNvPicPr>
+            <a:picLocks noChangeAspect="1"/>
+          </p:cNvPicPr>
+          <p:nvPr/>
+        </p:nvPicPr>
+        <p:blipFill>
+          <a:blip r:embed="rId2"/>
+          <a:stretch>
+            <a:fillRect/>
+          </a:stretch>
+        </p:blipFill>
+        <p:spPr>
+          <a:xfrm>
+            <a:off x="10271455" y="5998464"/>
+            <a:ext cx="1463040" cy="643233"/>
+          </a:xfrm>
+          <a:prstGeom prst="rect">
+            <a:avLst/>
+          </a:prstGeom>
+        </p:spPr>
+      </p:pic>
+      <p:sp>
+        <p:nvSpPr>
+          <p:cNvPr id="4" name="TextBox 3"/>
+          <p:cNvSpPr txBox="1"/>
+          <p:nvPr/>
+        </p:nvSpPr>
+        <p:spPr>
+          <a:xfrm>
+            <a:off x="457200" y="1737360"/>
+            <a:ext cx="11277295" cy="1097280"/>
+          </a:xfrm>
+          <a:prstGeom prst="rect">
+            <a:avLst/>
+          </a:prstGeom>
+          <a:noFill/>
+        </p:spPr>
+        <p:txBody>
+          <a:bodyPr wrap="square" anchor="ctr"/>
+          <a:lstStyle/>
+          <a:p>
+            <a:pPr algn="ctr"/>
+            <a:r>
+              <a:rPr sz="3400" b="1" i="0">
+                <a:solidFill>
+                  <a:srgbClr val="095292"/>
+                </a:solidFill>
+                <a:latin typeface="Calibri"/>
+              </a:rPr>
+              <a:t>Clase 13 · PI en movimiento</a:t>
+            </a:r>
+          </a:p>
+        </p:txBody>
+      </p:sp>
+      <p:sp>
+        <p:nvSpPr>
+          <p:cNvPr id="5" name="TextBox 4"/>
+          <p:cNvSpPr txBox="1"/>
+          <p:nvPr/>
+        </p:nvSpPr>
+        <p:spPr>
+          <a:xfrm>
+            <a:off x="457200" y="3017520"/>
+            <a:ext cx="11277295" cy="1645920"/>
+          </a:xfrm>
+          <a:prstGeom prst="rect">
+            <a:avLst/>
+          </a:prstGeom>
+          <a:noFill/>
+        </p:spPr>
+        <p:txBody>
+          <a:bodyPr wrap="square">
+            <a:spAutoFit/>
+          </a:bodyPr>
+          <a:lstStyle/>
+          <a:p>
+            <a:pPr algn="ctr">
+              <a:spcAft>
+                <a:spcPts val="600"/>
+              </a:spcAft>
+            </a:pPr>
+            <a:r>
+              <a:rPr sz="1600" b="0" i="0">
+                <a:solidFill>
+                  <a:srgbClr val="333333"/>
+                </a:solidFill>
+                <a:latin typeface="Calibri"/>
+              </a:rPr>
+              <a:t>Documentar política de autoescalado conceptual de CloudLite</a:t>
+            </a:r>
+          </a:p>
+          <a:p>
+            <a:pPr algn="ctr">
+              <a:spcAft>
+                <a:spcPts val="600"/>
+              </a:spcAft>
+            </a:pPr>
+            <a:r>
+              <a:rPr sz="1600" b="0" i="0">
+                <a:solidFill>
+                  <a:srgbClr val="333333"/>
+                </a:solidFill>
+                <a:latin typeface="Calibri"/>
+              </a:rPr>
+              <a:t>Evidencia: Sección Escalabilidad: triggers, límites, qué escala y qué no</a:t>
+            </a:r>
+          </a:p>
+          <a:p>
+            <a:pPr algn="ctr">
+              <a:spcAft>
+                <a:spcPts val="600"/>
+              </a:spcAft>
+            </a:pPr>
+            <a:r>
+              <a:rPr sz="1600" b="0" i="0">
+                <a:solidFill>
+                  <a:srgbClr val="333333"/>
+                </a:solidFill>
+                <a:latin typeface="Calibri"/>
+              </a:rPr>
+              <a:t>Siguiente paso = siguiente hito del PI CloudLite</a:t>
+            </a:r>
+          </a:p>
+        </p:txBody>
+      </p:sp>
+      <p:sp>
+        <p:nvSpPr>
+          <p:cNvPr id="6" name="TextBox 5"/>
+          <p:cNvSpPr txBox="1"/>
+          <p:nvPr/>
+        </p:nvSpPr>
+        <p:spPr>
+          <a:xfrm>
+            <a:off x="457200" y="4754880"/>
+            <a:ext cx="11277295" cy="640080"/>
+          </a:xfrm>
+          <a:prstGeom prst="rect">
+            <a:avLst/>
+          </a:prstGeom>
+          <a:noFill/>
+        </p:spPr>
+        <p:txBody>
+          <a:bodyPr wrap="square">
+            <a:spAutoFit/>
+          </a:bodyPr>
+          <a:lstStyle/>
+          <a:p>
+            <a:pPr algn="ctr"/>
+            <a:r>
+              <a:rPr sz="2000" b="1" i="0">
+                <a:solidFill>
+                  <a:srgbClr val="269CCB"/>
+                </a:solidFill>
+                <a:latin typeface="Calibri"/>
+              </a:rPr>
+              <a:t>Teoría al servicio del proyecto</a:t>
+            </a:r>
+          </a:p>
+        </p:txBody>
+      </p:sp>
+    </p:spTree>
+  </p:cSld>
+  <p:clrMapOvr>
+    <a:masterClrMapping/>
+  </p:clrMapOvr>
+</p:sld>
+</file>
+
 <file path=ppt/slides/slide3.xml><?xml version="1.0" encoding="utf-8"?>
 <p:sld xmlns:a="http://schemas.openxmlformats.org/drawingml/2006/main" xmlns:p="http://schemas.openxmlformats.org/presentationml/2006/main" xmlns:r="http://schemas.openxmlformats.org/officeDocument/2006/relationships">
   <p:cSld>
@@ -5854,141 +11723,21 @@
                 </a:solidFill>
                 <a:latin typeface="Calibri"/>
               </a:rPr>
-              <a:t>Politica de autoescalado (tabla, no prosa)</a:t>
-            </a:r>
-          </a:p>
-        </p:txBody>
-      </p:sp>
-      <p:sp>
-        <p:nvSpPr>
-          <p:cNvPr id="5" name="Rounded Rectangle 4"/>
-          <p:cNvSpPr/>
-          <p:nvPr/>
-        </p:nvSpPr>
-        <p:spPr>
-          <a:xfrm>
-            <a:off x="457200" y="1261872"/>
-            <a:ext cx="11277295" cy="4773168"/>
-          </a:xfrm>
-          <a:prstGeom prst="roundRect">
-            <a:avLst>
-              <a:gd name="adj" fmla="val 12000"/>
-            </a:avLst>
-          </a:prstGeom>
-          <a:solidFill>
-            <a:srgbClr val="1E2A38"/>
-          </a:solidFill>
-          <a:ln>
-            <a:noFill/>
-          </a:ln>
-        </p:spPr>
-        <p:style>
-          <a:lnRef idx="1">
-            <a:schemeClr val="accent1"/>
-          </a:lnRef>
-          <a:fillRef idx="3">
-            <a:schemeClr val="accent1"/>
-          </a:fillRef>
-          <a:effectRef idx="2">
-            <a:schemeClr val="accent1"/>
-          </a:effectRef>
-          <a:fontRef idx="minor">
-            <a:schemeClr val="lt1"/>
-          </a:fontRef>
-        </p:style>
-        <p:txBody>
-          <a:bodyPr rtlCol="0" anchor="ctr"/>
-          <a:lstStyle/>
-          <a:p>
-            <a:pPr algn="ctr"/>
-          </a:p>
-        </p:txBody>
-      </p:sp>
-      <p:sp>
-        <p:nvSpPr>
-          <p:cNvPr id="6" name="Rectangle 5"/>
-          <p:cNvSpPr/>
-          <p:nvPr/>
-        </p:nvSpPr>
-        <p:spPr>
-          <a:xfrm>
-            <a:off x="457200" y="1261872"/>
-            <a:ext cx="11277295" cy="320040"/>
-          </a:xfrm>
-          <a:prstGeom prst="rect">
-            <a:avLst/>
-          </a:prstGeom>
-          <a:solidFill>
-            <a:srgbClr val="095292"/>
-          </a:solidFill>
-          <a:ln>
-            <a:noFill/>
-          </a:ln>
-        </p:spPr>
-        <p:style>
-          <a:lnRef idx="1">
-            <a:schemeClr val="accent1"/>
-          </a:lnRef>
-          <a:fillRef idx="3">
-            <a:schemeClr val="accent1"/>
-          </a:fillRef>
-          <a:effectRef idx="2">
-            <a:schemeClr val="accent1"/>
-          </a:effectRef>
-          <a:fontRef idx="minor">
-            <a:schemeClr val="lt1"/>
-          </a:fontRef>
-        </p:style>
-        <p:txBody>
-          <a:bodyPr rtlCol="0" anchor="ctr"/>
-          <a:lstStyle/>
-          <a:p>
-            <a:pPr algn="ctr"/>
-          </a:p>
-        </p:txBody>
-      </p:sp>
-      <p:sp>
-        <p:nvSpPr>
-          <p:cNvPr id="7" name="TextBox 6"/>
+              <a:t>Clase autonoma: escalabilidad no es rendimiento</a:t>
+            </a:r>
+          </a:p>
+        </p:txBody>
+      </p:sp>
+      <p:sp>
+        <p:nvSpPr>
+          <p:cNvPr id="5" name="TextBox 4"/>
           <p:cNvSpPr txBox="1"/>
           <p:nvPr/>
         </p:nvSpPr>
         <p:spPr>
           <a:xfrm>
-            <a:off x="685800" y="1307592"/>
-            <a:ext cx="10820095" cy="256032"/>
-          </a:xfrm>
-          <a:prstGeom prst="rect">
-            <a:avLst/>
-          </a:prstGeom>
-          <a:noFill/>
-        </p:spPr>
-        <p:txBody>
-          <a:bodyPr wrap="square" anchor="ctr"/>
-          <a:lstStyle/>
-          <a:p>
-            <a:r>
-              <a:rPr sz="1000" b="1" i="0">
-                <a:solidFill>
-                  <a:srgbClr val="269CCB"/>
-                </a:solidFill>
-                <a:latin typeface="Calibri"/>
-              </a:rPr>
-              <a:t>● ● ●</a:t>
-            </a:r>
-          </a:p>
-        </p:txBody>
-      </p:sp>
-      <p:sp>
-        <p:nvSpPr>
-          <p:cNvPr id="8" name="TextBox 7"/>
-          <p:cNvSpPr txBox="1"/>
-          <p:nvPr/>
-        </p:nvSpPr>
-        <p:spPr>
-          <a:xfrm>
-            <a:off x="777240" y="1719072"/>
-            <a:ext cx="10637215" cy="4133087"/>
+            <a:off x="457200" y="1170432"/>
+            <a:ext cx="11277295" cy="5230368"/>
           </a:xfrm>
           <a:prstGeom prst="rect">
             <a:avLst/>
@@ -6003,123 +11752,104 @@
           <a:p>
             <a:pPr>
               <a:spcAft>
-                <a:spcPts val="400"/>
+                <a:spcPts val="800"/>
               </a:spcAft>
             </a:pPr>
             <a:r>
-              <a:rPr sz="1400" b="0" i="0">
-                <a:solidFill>
-                  <a:srgbClr val="FFFFFF"/>
-                </a:solidFill>
-                <a:latin typeface="Calibri"/>
-              </a:rPr>
-              <a:t>Componente   | Tipo        | Trigger up      | Min | Max | Cooldown</a:t>
+              <a:rPr sz="2000" b="0" i="0">
+                <a:solidFill>
+                  <a:srgbClr val="333333"/>
+                </a:solidFill>
+                <a:latin typeface="Calibri"/>
+              </a:rPr>
+              <a:t>–   Esta clase es autonoma por festivo: el estudiante trabaja solo y este fundamento se publica como material de lectura, asi que esta escrito para explicar el tema completo sin apoyo de un encuentro sincronico.</a:t>
             </a:r>
           </a:p>
           <a:p>
             <a:pPr>
               <a:spcAft>
-                <a:spcPts val="400"/>
+                <a:spcPts val="800"/>
               </a:spcAft>
             </a:pPr>
             <a:r>
-              <a:rPr sz="1400" b="0" i="0">
-                <a:solidFill>
-                  <a:srgbClr val="FFFFFF"/>
-                </a:solidFill>
-                <a:latin typeface="Calibri"/>
-              </a:rPr>
-              <a:t>-------------|-------------|-----------------|-----|-----|---------</a:t>
+              <a:rPr sz="2000" b="0" i="0">
+                <a:solidFill>
+                  <a:srgbClr val="333333"/>
+                </a:solidFill>
+                <a:latin typeface="Calibri"/>
+              </a:rPr>
+              <a:t>–   La escalabilidad es la capacidad de un sistema de sostener mas carga agregando recursos, y la primera precision importante es que no es lo mismo que rendimiento.</a:t>
             </a:r>
           </a:p>
           <a:p>
             <a:pPr>
               <a:spcAft>
-                <a:spcPts val="400"/>
+                <a:spcPts val="800"/>
               </a:spcAft>
             </a:pPr>
             <a:r>
-              <a:rPr sz="1400" b="0" i="0">
-                <a:solidFill>
-                  <a:srgbClr val="FFFFFF"/>
-                </a:solidFill>
-                <a:latin typeface="Calibri"/>
-              </a:rPr>
-              <a:t>API          | Horizontal  | CPU &gt; 70% / 5m  |  2  |  6  | 5 min</a:t>
+              <a:rPr sz="2000" b="0" i="0">
+                <a:solidFill>
+                  <a:srgbClr val="333333"/>
+                </a:solidFill>
+                <a:latin typeface="Calibri"/>
+              </a:rPr>
+              <a:t>–   El rendimiento, tema de la Clase 12, pregunta cuanto tarda una peticion con la carga actual.</a:t>
             </a:r>
           </a:p>
           <a:p>
             <a:pPr>
               <a:spcAft>
-                <a:spcPts val="400"/>
+                <a:spcPts val="800"/>
               </a:spcAft>
             </a:pPr>
             <a:r>
-              <a:rPr sz="1400" b="0" i="0">
-                <a:solidFill>
-                  <a:srgbClr val="FFFFFF"/>
-                </a:solidFill>
-                <a:latin typeface="Calibri"/>
-              </a:rPr>
-              <a:t>Worker cola  | Horizontal  | cola &gt; 100 msg  |  1  |  4  | 3 min</a:t>
+              <a:rPr sz="2000" b="0" i="0">
+                <a:solidFill>
+                  <a:srgbClr val="333333"/>
+                </a:solidFill>
+                <a:latin typeface="Calibri"/>
+              </a:rPr>
+              <a:t>–   La escalabilidad pregunta que pasa cuando la carga se multiplica: si al duplicar los recursos el sistema atiende cerca del doble de trabajo, escala bien; si atiende un 20 por ciento mas, escala mal, y ninguna cantidad de dinero lo va a arreglar.</a:t>
             </a:r>
           </a:p>
           <a:p>
             <a:pPr>
               <a:spcAft>
-                <a:spcPts val="400"/>
+                <a:spcPts val="800"/>
               </a:spcAft>
             </a:pPr>
             <a:r>
-              <a:rPr sz="1400" b="0" i="0">
-                <a:solidFill>
-                  <a:srgbClr val="FFFFFF"/>
-                </a:solidFill>
-                <a:latin typeface="Calibri"/>
-              </a:rPr>
-              <a:t>BD primaria  | NO escala   | -               |  1  |  1  | -</a:t>
-            </a:r>
-          </a:p>
-        </p:txBody>
-      </p:sp>
-      <p:sp>
-        <p:nvSpPr>
-          <p:cNvPr id="9" name="TextBox 8"/>
-          <p:cNvSpPr txBox="1"/>
-          <p:nvPr/>
-        </p:nvSpPr>
-        <p:spPr>
-          <a:xfrm>
-            <a:off x="457200" y="6080760"/>
-            <a:ext cx="11277295" cy="320040"/>
-          </a:xfrm>
-          <a:prstGeom prst="rect">
-            <a:avLst/>
-          </a:prstGeom>
-          <a:noFill/>
-        </p:spPr>
-        <p:txBody>
-          <a:bodyPr wrap="square">
-            <a:spAutoFit/>
-          </a:bodyPr>
-          <a:lstStyle/>
-          <a:p>
-            <a:pPr algn="ctr"/>
-            <a:r>
-              <a:rPr sz="1200" b="0" i="1">
-                <a:solidFill>
-                  <a:srgbClr val="666666"/>
-                </a:solidFill>
-                <a:latin typeface="Calibri"/>
-              </a:rPr>
-              <a:t>El 'max' es lo que evita que la factura escale sola. La BD primaria casi nunca escala horizontal.</a:t>
-            </a:r>
-          </a:p>
-        </p:txBody>
-      </p:sp>
-      <p:sp>
-        <p:nvSpPr>
-          <p:cNvPr id="10" name="TextBox 9"/>
+              <a:rPr sz="2000" b="0" i="0">
+                <a:solidFill>
+                  <a:srgbClr val="333333"/>
+                </a:solidFill>
+                <a:latin typeface="Calibri"/>
+              </a:rPr>
+              <a:t>–   Un sistema puede ser rapido y no escalar, y puede escalar y ser lento.</a:t>
+            </a:r>
+          </a:p>
+          <a:p>
+            <a:pPr>
+              <a:spcAft>
+                <a:spcPts val="800"/>
+              </a:spcAft>
+            </a:pPr>
+            <a:r>
+              <a:rPr sz="2000" b="0" i="0">
+                <a:solidFill>
+                  <a:srgbClr val="333333"/>
+                </a:solidFill>
+                <a:latin typeface="Calibri"/>
+              </a:rPr>
+              <a:t>–   Por eso el orden del temario no es casual: primero se mide y se identifica el cuello de botella, y solo despues se decide como agregar capacidad.</a:t>
+            </a:r>
+          </a:p>
+        </p:txBody>
+      </p:sp>
+      <p:sp>
+        <p:nvSpPr>
+          <p:cNvPr id="6" name="TextBox 5"/>
           <p:cNvSpPr txBox="1"/>
           <p:nvPr/>
         </p:nvSpPr>
@@ -6187,7 +11917,7 @@
         <p:spPr>
           <a:xfrm>
             <a:off x="0" y="0"/>
-            <a:ext cx="12191695" cy="1170432"/>
+            <a:ext cx="12191695" cy="960120"/>
           </a:xfrm>
           <a:prstGeom prst="rect">
             <a:avLst/>
@@ -6229,7 +11959,7 @@
         </p:nvSpPr>
         <p:spPr>
           <a:xfrm>
-            <a:off x="0" y="1170432"/>
+            <a:off x="0" y="960120"/>
             <a:ext cx="12191695" cy="41148"/>
           </a:xfrm>
           <a:prstGeom prst="rect">
@@ -6273,7 +12003,7 @@
         <p:spPr>
           <a:xfrm>
             <a:off x="457200" y="164592"/>
-            <a:ext cx="11277295" cy="384048"/>
+            <a:ext cx="11277295" cy="502920"/>
           </a:xfrm>
           <a:prstGeom prst="rect">
             <a:avLst/>
@@ -6293,7 +12023,7 @@
                 </a:solidFill>
                 <a:latin typeface="Calibri"/>
               </a:rPr>
-              <a:t>Herramientas de hoy</a:t>
+              <a:t>Escalar vertical y horizontalmente: las dos formas de agregar capacidad (1/2)</a:t>
             </a:r>
           </a:p>
         </p:txBody>
@@ -6306,8 +12036,8 @@
         </p:nvSpPr>
         <p:spPr>
           <a:xfrm>
-            <a:off x="457200" y="566928"/>
-            <a:ext cx="11277295" cy="411480"/>
+            <a:off x="457200" y="1170432"/>
+            <a:ext cx="11277295" cy="5230368"/>
           </a:xfrm>
           <a:prstGeom prst="rect">
             <a:avLst/>
@@ -6320,837 +12050,90 @@
           </a:bodyPr>
           <a:lstStyle/>
           <a:p>
-            <a:r>
-              <a:rPr sz="1400" b="0" i="0">
-                <a:solidFill>
-                  <a:srgbClr val="B8D8EE"/>
-                </a:solidFill>
-                <a:latin typeface="Calibri"/>
-              </a:rPr>
-              <a:t>Gratis · navegador o free tier · sin cuenta de pago</a:t>
-            </a:r>
-          </a:p>
-        </p:txBody>
-      </p:sp>
-      <p:sp>
-        <p:nvSpPr>
-          <p:cNvPr id="6" name="Rounded Rectangle 5"/>
-          <p:cNvSpPr/>
-          <p:nvPr/>
-        </p:nvSpPr>
-        <p:spPr>
-          <a:xfrm>
-            <a:off x="457200" y="1591056"/>
-            <a:ext cx="3624986" cy="2299716"/>
-          </a:xfrm>
-          <a:prstGeom prst="roundRect">
-            <a:avLst>
-              <a:gd name="adj" fmla="val 12000"/>
-            </a:avLst>
-          </a:prstGeom>
-          <a:solidFill>
-            <a:srgbClr val="F2F2F2"/>
-          </a:solidFill>
-          <a:ln>
-            <a:noFill/>
-          </a:ln>
-        </p:spPr>
-        <p:style>
-          <a:lnRef idx="1">
-            <a:schemeClr val="accent1"/>
-          </a:lnRef>
-          <a:fillRef idx="3">
-            <a:schemeClr val="accent1"/>
-          </a:fillRef>
-          <a:effectRef idx="2">
-            <a:schemeClr val="accent1"/>
-          </a:effectRef>
-          <a:fontRef idx="minor">
-            <a:schemeClr val="lt1"/>
-          </a:fontRef>
-        </p:style>
-        <p:txBody>
-          <a:bodyPr rtlCol="0" anchor="ctr"/>
-          <a:lstStyle/>
-          <a:p>
-            <a:pPr algn="ctr"/>
-          </a:p>
-        </p:txBody>
-      </p:sp>
-      <p:sp>
-        <p:nvSpPr>
-          <p:cNvPr id="7" name="Rectangle 6"/>
-          <p:cNvSpPr/>
-          <p:nvPr/>
-        </p:nvSpPr>
-        <p:spPr>
-          <a:xfrm>
-            <a:off x="457200" y="1591056"/>
-            <a:ext cx="3624986" cy="64008"/>
-          </a:xfrm>
-          <a:prstGeom prst="rect">
-            <a:avLst/>
-          </a:prstGeom>
-          <a:solidFill>
-            <a:srgbClr val="095292"/>
-          </a:solidFill>
-          <a:ln>
-            <a:noFill/>
-          </a:ln>
-        </p:spPr>
-        <p:style>
-          <a:lnRef idx="1">
-            <a:schemeClr val="accent1"/>
-          </a:lnRef>
-          <a:fillRef idx="3">
-            <a:schemeClr val="accent1"/>
-          </a:fillRef>
-          <a:effectRef idx="2">
-            <a:schemeClr val="accent1"/>
-          </a:effectRef>
-          <a:fontRef idx="minor">
-            <a:schemeClr val="lt1"/>
-          </a:fontRef>
-        </p:style>
-        <p:txBody>
-          <a:bodyPr rtlCol="0" anchor="ctr"/>
-          <a:lstStyle/>
-          <a:p>
-            <a:pPr algn="ctr"/>
-          </a:p>
-        </p:txBody>
-      </p:sp>
-      <p:sp>
-        <p:nvSpPr>
-          <p:cNvPr id="8" name="Rectangle 7"/>
-          <p:cNvSpPr/>
-          <p:nvPr/>
-        </p:nvSpPr>
-        <p:spPr>
-          <a:xfrm>
-            <a:off x="457200" y="1655064"/>
-            <a:ext cx="3624986" cy="27432"/>
-          </a:xfrm>
-          <a:prstGeom prst="rect">
-            <a:avLst/>
-          </a:prstGeom>
-          <a:solidFill>
-            <a:srgbClr val="FFD000"/>
-          </a:solidFill>
-          <a:ln>
-            <a:noFill/>
-          </a:ln>
-        </p:spPr>
-        <p:style>
-          <a:lnRef idx="1">
-            <a:schemeClr val="accent1"/>
-          </a:lnRef>
-          <a:fillRef idx="3">
-            <a:schemeClr val="accent1"/>
-          </a:fillRef>
-          <a:effectRef idx="2">
-            <a:schemeClr val="accent1"/>
-          </a:effectRef>
-          <a:fontRef idx="minor">
-            <a:schemeClr val="lt1"/>
-          </a:fontRef>
-        </p:style>
-        <p:txBody>
-          <a:bodyPr rtlCol="0" anchor="ctr"/>
-          <a:lstStyle/>
-          <a:p>
-            <a:pPr algn="ctr"/>
-          </a:p>
-        </p:txBody>
-      </p:sp>
-      <p:pic>
-        <p:nvPicPr>
-          <p:cNvPr id="9" name="Picture 8" descr="google_docs.png"/>
-          <p:cNvPicPr>
-            <a:picLocks noChangeAspect="1"/>
-          </p:cNvPicPr>
-          <p:nvPr/>
-        </p:nvPicPr>
-        <p:blipFill>
-          <a:blip r:embed="rId2"/>
-          <a:stretch>
-            <a:fillRect/>
-          </a:stretch>
-        </p:blipFill>
-        <p:spPr>
-          <a:xfrm>
-            <a:off x="1659331" y="1847087"/>
-            <a:ext cx="1220724" cy="1220724"/>
-          </a:xfrm>
-          <a:prstGeom prst="rect">
-            <a:avLst/>
-          </a:prstGeom>
-        </p:spPr>
-      </p:pic>
-      <p:sp>
-        <p:nvSpPr>
-          <p:cNvPr id="10" name="TextBox 9"/>
-          <p:cNvSpPr txBox="1"/>
-          <p:nvPr/>
-        </p:nvSpPr>
-        <p:spPr>
-          <a:xfrm>
-            <a:off x="530352" y="3159251"/>
-            <a:ext cx="3478682" cy="621792"/>
-          </a:xfrm>
-          <a:prstGeom prst="rect">
-            <a:avLst/>
-          </a:prstGeom>
-          <a:noFill/>
-        </p:spPr>
-        <p:txBody>
-          <a:bodyPr wrap="square" anchor="t"/>
-          <a:lstStyle/>
-          <a:p>
-            <a:pPr algn="ctr"/>
-            <a:r>
-              <a:rPr sz="1300" b="1" i="0">
-                <a:solidFill>
-                  <a:srgbClr val="095292"/>
-                </a:solidFill>
-                <a:latin typeface="Calibri"/>
-              </a:rPr>
-              <a:t>Google Docs</a:t>
-            </a:r>
-          </a:p>
-          <a:p>
-            <a:pPr algn="ctr">
-              <a:spcBef>
-                <a:spcPts val="200"/>
-              </a:spcBef>
+            <a:pPr>
+              <a:spcAft>
+                <a:spcPts val="800"/>
+              </a:spcAft>
             </a:pPr>
             <a:r>
-              <a:rPr sz="1000" b="0" i="0">
-                <a:solidFill>
-                  <a:srgbClr val="666666"/>
-                </a:solidFill>
-                <a:latin typeface="Calibri"/>
-              </a:rPr>
-              <a:t>Politica de escalado</a:t>
-            </a:r>
-          </a:p>
-        </p:txBody>
-      </p:sp>
-      <p:sp>
-        <p:nvSpPr>
-          <p:cNvPr id="11" name="Rounded Rectangle 10"/>
-          <p:cNvSpPr/>
-          <p:nvPr/>
-        </p:nvSpPr>
-        <p:spPr>
-          <a:xfrm>
-            <a:off x="4283354" y="1591056"/>
-            <a:ext cx="3624986" cy="2299716"/>
-          </a:xfrm>
-          <a:prstGeom prst="roundRect">
-            <a:avLst>
-              <a:gd name="adj" fmla="val 12000"/>
-            </a:avLst>
-          </a:prstGeom>
-          <a:solidFill>
-            <a:srgbClr val="F2F2F2"/>
-          </a:solidFill>
-          <a:ln>
-            <a:noFill/>
-          </a:ln>
-        </p:spPr>
-        <p:style>
-          <a:lnRef idx="1">
-            <a:schemeClr val="accent1"/>
-          </a:lnRef>
-          <a:fillRef idx="3">
-            <a:schemeClr val="accent1"/>
-          </a:fillRef>
-          <a:effectRef idx="2">
-            <a:schemeClr val="accent1"/>
-          </a:effectRef>
-          <a:fontRef idx="minor">
-            <a:schemeClr val="lt1"/>
-          </a:fontRef>
-        </p:style>
-        <p:txBody>
-          <a:bodyPr rtlCol="0" anchor="ctr"/>
-          <a:lstStyle/>
-          <a:p>
-            <a:pPr algn="ctr"/>
-          </a:p>
-        </p:txBody>
-      </p:sp>
-      <p:sp>
-        <p:nvSpPr>
-          <p:cNvPr id="12" name="Rectangle 11"/>
-          <p:cNvSpPr/>
-          <p:nvPr/>
-        </p:nvSpPr>
-        <p:spPr>
-          <a:xfrm>
-            <a:off x="4283354" y="1591056"/>
-            <a:ext cx="3624986" cy="64008"/>
-          </a:xfrm>
-          <a:prstGeom prst="rect">
-            <a:avLst/>
-          </a:prstGeom>
-          <a:solidFill>
-            <a:srgbClr val="095292"/>
-          </a:solidFill>
-          <a:ln>
-            <a:noFill/>
-          </a:ln>
-        </p:spPr>
-        <p:style>
-          <a:lnRef idx="1">
-            <a:schemeClr val="accent1"/>
-          </a:lnRef>
-          <a:fillRef idx="3">
-            <a:schemeClr val="accent1"/>
-          </a:fillRef>
-          <a:effectRef idx="2">
-            <a:schemeClr val="accent1"/>
-          </a:effectRef>
-          <a:fontRef idx="minor">
-            <a:schemeClr val="lt1"/>
-          </a:fontRef>
-        </p:style>
-        <p:txBody>
-          <a:bodyPr rtlCol="0" anchor="ctr"/>
-          <a:lstStyle/>
-          <a:p>
-            <a:pPr algn="ctr"/>
-          </a:p>
-        </p:txBody>
-      </p:sp>
-      <p:sp>
-        <p:nvSpPr>
-          <p:cNvPr id="13" name="Rectangle 12"/>
-          <p:cNvSpPr/>
-          <p:nvPr/>
-        </p:nvSpPr>
-        <p:spPr>
-          <a:xfrm>
-            <a:off x="4283354" y="1655064"/>
-            <a:ext cx="3624986" cy="27432"/>
-          </a:xfrm>
-          <a:prstGeom prst="rect">
-            <a:avLst/>
-          </a:prstGeom>
-          <a:solidFill>
-            <a:srgbClr val="FFD000"/>
-          </a:solidFill>
-          <a:ln>
-            <a:noFill/>
-          </a:ln>
-        </p:spPr>
-        <p:style>
-          <a:lnRef idx="1">
-            <a:schemeClr val="accent1"/>
-          </a:lnRef>
-          <a:fillRef idx="3">
-            <a:schemeClr val="accent1"/>
-          </a:fillRef>
-          <a:effectRef idx="2">
-            <a:schemeClr val="accent1"/>
-          </a:effectRef>
-          <a:fontRef idx="minor">
-            <a:schemeClr val="lt1"/>
-          </a:fontRef>
-        </p:style>
-        <p:txBody>
-          <a:bodyPr rtlCol="0" anchor="ctr"/>
-          <a:lstStyle/>
-          <a:p>
-            <a:pPr algn="ctr"/>
-          </a:p>
-        </p:txBody>
-      </p:sp>
-      <p:pic>
-        <p:nvPicPr>
-          <p:cNvPr id="14" name="Picture 13" descr="drawio.png"/>
-          <p:cNvPicPr>
-            <a:picLocks noChangeAspect="1"/>
-          </p:cNvPicPr>
-          <p:nvPr/>
-        </p:nvPicPr>
-        <p:blipFill>
-          <a:blip r:embed="rId3"/>
-          <a:stretch>
-            <a:fillRect/>
-          </a:stretch>
-        </p:blipFill>
-        <p:spPr>
-          <a:xfrm>
-            <a:off x="5485485" y="1847087"/>
-            <a:ext cx="1220724" cy="1220724"/>
-          </a:xfrm>
-          <a:prstGeom prst="rect">
-            <a:avLst/>
-          </a:prstGeom>
-        </p:spPr>
-      </p:pic>
-      <p:sp>
-        <p:nvSpPr>
-          <p:cNvPr id="15" name="TextBox 14"/>
-          <p:cNvSpPr txBox="1"/>
-          <p:nvPr/>
-        </p:nvSpPr>
-        <p:spPr>
-          <a:xfrm>
-            <a:off x="4356506" y="3159251"/>
-            <a:ext cx="3478682" cy="621792"/>
-          </a:xfrm>
-          <a:prstGeom prst="rect">
-            <a:avLst/>
-          </a:prstGeom>
-          <a:noFill/>
-        </p:spPr>
-        <p:txBody>
-          <a:bodyPr wrap="square" anchor="t"/>
-          <a:lstStyle/>
-          <a:p>
-            <a:pPr algn="ctr"/>
-            <a:r>
-              <a:rPr sz="1300" b="1" i="0">
-                <a:solidFill>
-                  <a:srgbClr val="095292"/>
-                </a:solidFill>
-                <a:latin typeface="Calibri"/>
-              </a:rPr>
-              <a:t>draw.io</a:t>
-            </a:r>
-          </a:p>
-          <a:p>
-            <a:pPr algn="ctr">
-              <a:spcBef>
-                <a:spcPts val="200"/>
-              </a:spcBef>
+              <a:rPr sz="2000" b="0" i="0">
+                <a:solidFill>
+                  <a:srgbClr val="333333"/>
+                </a:solidFill>
+                <a:latin typeface="Calibri"/>
+              </a:rPr>
+              <a:t>–   Hay dos formas de agregar capacidad y el estudiante debe poder definirlas sin dudar.</a:t>
+            </a:r>
+          </a:p>
+          <a:p>
+            <a:pPr>
+              <a:spcAft>
+                <a:spcPts val="800"/>
+              </a:spcAft>
             </a:pPr>
             <a:r>
-              <a:rPr sz="1000" b="0" i="0">
-                <a:solidFill>
-                  <a:srgbClr val="666666"/>
-                </a:solidFill>
-                <a:latin typeface="Calibri"/>
-              </a:rPr>
-              <a:t>Nota en Deployment</a:t>
-            </a:r>
-          </a:p>
-        </p:txBody>
-      </p:sp>
-      <p:sp>
-        <p:nvSpPr>
-          <p:cNvPr id="16" name="Rounded Rectangle 15"/>
-          <p:cNvSpPr/>
-          <p:nvPr/>
-        </p:nvSpPr>
-        <p:spPr>
-          <a:xfrm>
-            <a:off x="8109508" y="1591056"/>
-            <a:ext cx="3624986" cy="2299716"/>
-          </a:xfrm>
-          <a:prstGeom prst="roundRect">
-            <a:avLst>
-              <a:gd name="adj" fmla="val 12000"/>
-            </a:avLst>
-          </a:prstGeom>
-          <a:solidFill>
-            <a:srgbClr val="F2F2F2"/>
-          </a:solidFill>
-          <a:ln>
-            <a:noFill/>
-          </a:ln>
-        </p:spPr>
-        <p:style>
-          <a:lnRef idx="1">
-            <a:schemeClr val="accent1"/>
-          </a:lnRef>
-          <a:fillRef idx="3">
-            <a:schemeClr val="accent1"/>
-          </a:fillRef>
-          <a:effectRef idx="2">
-            <a:schemeClr val="accent1"/>
-          </a:effectRef>
-          <a:fontRef idx="minor">
-            <a:schemeClr val="lt1"/>
-          </a:fontRef>
-        </p:style>
-        <p:txBody>
-          <a:bodyPr rtlCol="0" anchor="ctr"/>
-          <a:lstStyle/>
-          <a:p>
-            <a:pPr algn="ctr"/>
-          </a:p>
-        </p:txBody>
-      </p:sp>
-      <p:sp>
-        <p:nvSpPr>
-          <p:cNvPr id="17" name="Rectangle 16"/>
-          <p:cNvSpPr/>
-          <p:nvPr/>
-        </p:nvSpPr>
-        <p:spPr>
-          <a:xfrm>
-            <a:off x="8109508" y="1591056"/>
-            <a:ext cx="3624986" cy="64008"/>
-          </a:xfrm>
-          <a:prstGeom prst="rect">
-            <a:avLst/>
-          </a:prstGeom>
-          <a:solidFill>
-            <a:srgbClr val="095292"/>
-          </a:solidFill>
-          <a:ln>
-            <a:noFill/>
-          </a:ln>
-        </p:spPr>
-        <p:style>
-          <a:lnRef idx="1">
-            <a:schemeClr val="accent1"/>
-          </a:lnRef>
-          <a:fillRef idx="3">
-            <a:schemeClr val="accent1"/>
-          </a:fillRef>
-          <a:effectRef idx="2">
-            <a:schemeClr val="accent1"/>
-          </a:effectRef>
-          <a:fontRef idx="minor">
-            <a:schemeClr val="lt1"/>
-          </a:fontRef>
-        </p:style>
-        <p:txBody>
-          <a:bodyPr rtlCol="0" anchor="ctr"/>
-          <a:lstStyle/>
-          <a:p>
-            <a:pPr algn="ctr"/>
-          </a:p>
-        </p:txBody>
-      </p:sp>
-      <p:sp>
-        <p:nvSpPr>
-          <p:cNvPr id="18" name="Rectangle 17"/>
-          <p:cNvSpPr/>
-          <p:nvPr/>
-        </p:nvSpPr>
-        <p:spPr>
-          <a:xfrm>
-            <a:off x="8109508" y="1655064"/>
-            <a:ext cx="3624986" cy="27432"/>
-          </a:xfrm>
-          <a:prstGeom prst="rect">
-            <a:avLst/>
-          </a:prstGeom>
-          <a:solidFill>
-            <a:srgbClr val="FFD000"/>
-          </a:solidFill>
-          <a:ln>
-            <a:noFill/>
-          </a:ln>
-        </p:spPr>
-        <p:style>
-          <a:lnRef idx="1">
-            <a:schemeClr val="accent1"/>
-          </a:lnRef>
-          <a:fillRef idx="3">
-            <a:schemeClr val="accent1"/>
-          </a:fillRef>
-          <a:effectRef idx="2">
-            <a:schemeClr val="accent1"/>
-          </a:effectRef>
-          <a:fontRef idx="minor">
-            <a:schemeClr val="lt1"/>
-          </a:fontRef>
-        </p:style>
-        <p:txBody>
-          <a:bodyPr rtlCol="0" anchor="ctr"/>
-          <a:lstStyle/>
-          <a:p>
-            <a:pPr algn="ctr"/>
-          </a:p>
-        </p:txBody>
-      </p:sp>
-      <p:pic>
-        <p:nvPicPr>
-          <p:cNvPr id="19" name="Picture 18" descr="mermaid.png"/>
-          <p:cNvPicPr>
-            <a:picLocks noChangeAspect="1"/>
-          </p:cNvPicPr>
-          <p:nvPr/>
-        </p:nvPicPr>
-        <p:blipFill>
-          <a:blip r:embed="rId4"/>
-          <a:stretch>
-            <a:fillRect/>
-          </a:stretch>
-        </p:blipFill>
-        <p:spPr>
-          <a:xfrm>
-            <a:off x="9311640" y="1847087"/>
-            <a:ext cx="1220724" cy="1220724"/>
-          </a:xfrm>
-          <a:prstGeom prst="rect">
-            <a:avLst/>
-          </a:prstGeom>
-        </p:spPr>
-      </p:pic>
-      <p:sp>
-        <p:nvSpPr>
-          <p:cNvPr id="20" name="TextBox 19"/>
-          <p:cNvSpPr txBox="1"/>
-          <p:nvPr/>
-        </p:nvSpPr>
-        <p:spPr>
-          <a:xfrm>
-            <a:off x="8182660" y="3159251"/>
-            <a:ext cx="3478682" cy="621792"/>
-          </a:xfrm>
-          <a:prstGeom prst="rect">
-            <a:avLst/>
-          </a:prstGeom>
-          <a:noFill/>
-        </p:spPr>
-        <p:txBody>
-          <a:bodyPr wrap="square" anchor="t"/>
-          <a:lstStyle/>
-          <a:p>
-            <a:pPr algn="ctr"/>
-            <a:r>
-              <a:rPr sz="1300" b="1" i="0">
-                <a:solidFill>
-                  <a:srgbClr val="095292"/>
-                </a:solidFill>
-                <a:latin typeface="Calibri"/>
-              </a:rPr>
-              <a:t>Mermaid</a:t>
-            </a:r>
-          </a:p>
-          <a:p>
-            <a:pPr algn="ctr">
-              <a:spcBef>
-                <a:spcPts val="200"/>
-              </a:spcBef>
+              <a:rPr sz="2000" b="0" i="0">
+                <a:solidFill>
+                  <a:srgbClr val="333333"/>
+                </a:solidFill>
+                <a:latin typeface="Calibri"/>
+              </a:rPr>
+              <a:t>–   Escalar verticalmente, o hacia arriba, es darle mas recursos a la MISMA maquina: mas CPU, mas memoria, disco mas rapido.</a:t>
+            </a:r>
+          </a:p>
+          <a:p>
+            <a:pPr>
+              <a:spcAft>
+                <a:spcPts val="800"/>
+              </a:spcAft>
             </a:pPr>
             <a:r>
-              <a:rPr sz="1000" b="0" i="0">
-                <a:solidFill>
-                  <a:srgbClr val="666666"/>
-                </a:solidFill>
-                <a:latin typeface="Calibri"/>
-              </a:rPr>
-              <a:t>Codigo del diagrama</a:t>
-            </a:r>
-          </a:p>
-        </p:txBody>
-      </p:sp>
-      <p:sp>
-        <p:nvSpPr>
-          <p:cNvPr id="21" name="Rounded Rectangle 20"/>
-          <p:cNvSpPr/>
-          <p:nvPr/>
-        </p:nvSpPr>
-        <p:spPr>
-          <a:xfrm>
-            <a:off x="4283354" y="4055364"/>
-            <a:ext cx="3624986" cy="2299716"/>
-          </a:xfrm>
-          <a:prstGeom prst="roundRect">
-            <a:avLst>
-              <a:gd name="adj" fmla="val 12000"/>
-            </a:avLst>
-          </a:prstGeom>
-          <a:solidFill>
-            <a:srgbClr val="F2F2F2"/>
-          </a:solidFill>
-          <a:ln>
-            <a:noFill/>
-          </a:ln>
-        </p:spPr>
-        <p:style>
-          <a:lnRef idx="1">
-            <a:schemeClr val="accent1"/>
-          </a:lnRef>
-          <a:fillRef idx="3">
-            <a:schemeClr val="accent1"/>
-          </a:fillRef>
-          <a:effectRef idx="2">
-            <a:schemeClr val="accent1"/>
-          </a:effectRef>
-          <a:fontRef idx="minor">
-            <a:schemeClr val="lt1"/>
-          </a:fontRef>
-        </p:style>
-        <p:txBody>
-          <a:bodyPr rtlCol="0" anchor="ctr"/>
-          <a:lstStyle/>
-          <a:p>
-            <a:pPr algn="ctr"/>
-          </a:p>
-        </p:txBody>
-      </p:sp>
-      <p:sp>
-        <p:nvSpPr>
-          <p:cNvPr id="22" name="Rectangle 21"/>
-          <p:cNvSpPr/>
-          <p:nvPr/>
-        </p:nvSpPr>
-        <p:spPr>
-          <a:xfrm>
-            <a:off x="4283354" y="4055364"/>
-            <a:ext cx="3624986" cy="64008"/>
-          </a:xfrm>
-          <a:prstGeom prst="rect">
-            <a:avLst/>
-          </a:prstGeom>
-          <a:solidFill>
-            <a:srgbClr val="095292"/>
-          </a:solidFill>
-          <a:ln>
-            <a:noFill/>
-          </a:ln>
-        </p:spPr>
-        <p:style>
-          <a:lnRef idx="1">
-            <a:schemeClr val="accent1"/>
-          </a:lnRef>
-          <a:fillRef idx="3">
-            <a:schemeClr val="accent1"/>
-          </a:fillRef>
-          <a:effectRef idx="2">
-            <a:schemeClr val="accent1"/>
-          </a:effectRef>
-          <a:fontRef idx="minor">
-            <a:schemeClr val="lt1"/>
-          </a:fontRef>
-        </p:style>
-        <p:txBody>
-          <a:bodyPr rtlCol="0" anchor="ctr"/>
-          <a:lstStyle/>
-          <a:p>
-            <a:pPr algn="ctr"/>
-          </a:p>
-        </p:txBody>
-      </p:sp>
-      <p:sp>
-        <p:nvSpPr>
-          <p:cNvPr id="23" name="Rectangle 22"/>
-          <p:cNvSpPr/>
-          <p:nvPr/>
-        </p:nvSpPr>
-        <p:spPr>
-          <a:xfrm>
-            <a:off x="4283354" y="4119372"/>
-            <a:ext cx="3624986" cy="27432"/>
-          </a:xfrm>
-          <a:prstGeom prst="rect">
-            <a:avLst/>
-          </a:prstGeom>
-          <a:solidFill>
-            <a:srgbClr val="FFD000"/>
-          </a:solidFill>
-          <a:ln>
-            <a:noFill/>
-          </a:ln>
-        </p:spPr>
-        <p:style>
-          <a:lnRef idx="1">
-            <a:schemeClr val="accent1"/>
-          </a:lnRef>
-          <a:fillRef idx="3">
-            <a:schemeClr val="accent1"/>
-          </a:fillRef>
-          <a:effectRef idx="2">
-            <a:schemeClr val="accent1"/>
-          </a:effectRef>
-          <a:fontRef idx="minor">
-            <a:schemeClr val="lt1"/>
-          </a:fontRef>
-        </p:style>
-        <p:txBody>
-          <a:bodyPr rtlCol="0" anchor="ctr"/>
-          <a:lstStyle/>
-          <a:p>
-            <a:pPr algn="ctr"/>
-          </a:p>
-        </p:txBody>
-      </p:sp>
-      <p:pic>
-        <p:nvPicPr>
-          <p:cNvPr id="24" name="Picture 23" descr="examlab.png"/>
-          <p:cNvPicPr>
-            <a:picLocks noChangeAspect="1"/>
-          </p:cNvPicPr>
-          <p:nvPr/>
-        </p:nvPicPr>
-        <p:blipFill>
-          <a:blip r:embed="rId5"/>
-          <a:stretch>
-            <a:fillRect/>
-          </a:stretch>
-        </p:blipFill>
-        <p:spPr>
-          <a:xfrm>
-            <a:off x="5485485" y="4311396"/>
-            <a:ext cx="1220724" cy="1220724"/>
-          </a:xfrm>
-          <a:prstGeom prst="rect">
-            <a:avLst/>
-          </a:prstGeom>
-        </p:spPr>
-      </p:pic>
-      <p:sp>
-        <p:nvSpPr>
-          <p:cNvPr id="25" name="TextBox 24"/>
-          <p:cNvSpPr txBox="1"/>
-          <p:nvPr/>
-        </p:nvSpPr>
-        <p:spPr>
-          <a:xfrm>
-            <a:off x="4356506" y="5623560"/>
-            <a:ext cx="3478682" cy="621792"/>
-          </a:xfrm>
-          <a:prstGeom prst="rect">
-            <a:avLst/>
-          </a:prstGeom>
-          <a:noFill/>
-        </p:spPr>
-        <p:txBody>
-          <a:bodyPr wrap="square" anchor="t"/>
-          <a:lstStyle/>
-          <a:p>
-            <a:pPr algn="ctr"/>
-            <a:r>
-              <a:rPr sz="1300" b="1" i="0">
-                <a:solidFill>
-                  <a:srgbClr val="095292"/>
-                </a:solidFill>
-                <a:latin typeface="Calibri"/>
-              </a:rPr>
-              <a:t>la plataforma del curso</a:t>
-            </a:r>
-          </a:p>
-          <a:p>
-            <a:pPr algn="ctr">
-              <a:spcBef>
-                <a:spcPts val="200"/>
-              </a:spcBef>
+              <a:rPr sz="2000" b="0" i="0">
+                <a:solidFill>
+                  <a:srgbClr val="333333"/>
+                </a:solidFill>
+                <a:latin typeface="Calibri"/>
+              </a:rPr>
+              <a:t>–   Es la opcion simple porque no exige cambiar el codigo, y tiene tres limites reales: existe un techo fisico</a:t>
+            </a:r>
+          </a:p>
+          <a:p>
+            <a:pPr>
+              <a:spcAft>
+                <a:spcPts val="800"/>
+              </a:spcAft>
             </a:pPr>
             <a:r>
-              <a:rPr sz="1000" b="0" i="0">
-                <a:solidFill>
-                  <a:srgbClr val="666666"/>
-                </a:solidFill>
-                <a:latin typeface="Calibri"/>
-              </a:rPr>
-              <a:t>Donde se entrega</a:t>
-            </a:r>
-          </a:p>
-        </p:txBody>
-      </p:sp>
-      <p:sp>
-        <p:nvSpPr>
-          <p:cNvPr id="26" name="TextBox 25"/>
+              <a:rPr sz="2000" b="0" i="0">
+                <a:solidFill>
+                  <a:srgbClr val="333333"/>
+                </a:solidFill>
+                <a:latin typeface="Calibri"/>
+              </a:rPr>
+              <a:t>–   Porque la instancia mas grande disponible se acaba en algun punto; el precio crece peor que linealmente, ya que las instancias grandes cuestan mas por unidad de capacidad</a:t>
+            </a:r>
+          </a:p>
+          <a:p>
+            <a:pPr>
+              <a:spcAft>
+                <a:spcPts val="800"/>
+              </a:spcAft>
+            </a:pPr>
+            <a:r>
+              <a:rPr sz="2000" b="0" i="0">
+                <a:solidFill>
+                  <a:srgbClr val="333333"/>
+                </a:solidFill>
+                <a:latin typeface="Calibri"/>
+              </a:rPr>
+              <a:t>–   Y el cambio suele requerir reiniciar el servicio, lo que implica una ventana de indisponibilidad del orden de 30 segundos a 2 minutos.</a:t>
+            </a:r>
+          </a:p>
+        </p:txBody>
+      </p:sp>
+      <p:sp>
+        <p:nvSpPr>
+          <p:cNvPr id="6" name="TextBox 5"/>
           <p:cNvSpPr txBox="1"/>
           <p:nvPr/>
         </p:nvSpPr>
@@ -7218,7 +12201,7 @@
         <p:spPr>
           <a:xfrm>
             <a:off x="0" y="0"/>
-            <a:ext cx="12191695" cy="1170432"/>
+            <a:ext cx="12191695" cy="960120"/>
           </a:xfrm>
           <a:prstGeom prst="rect">
             <a:avLst/>
@@ -7260,7 +12243,7 @@
         </p:nvSpPr>
         <p:spPr>
           <a:xfrm>
-            <a:off x="0" y="1170432"/>
+            <a:off x="0" y="960120"/>
             <a:ext cx="12191695" cy="41148"/>
           </a:xfrm>
           <a:prstGeom prst="rect">
@@ -7304,7 +12287,7 @@
         <p:spPr>
           <a:xfrm>
             <a:off x="457200" y="164592"/>
-            <a:ext cx="11277295" cy="384048"/>
+            <a:ext cx="11277295" cy="502920"/>
           </a:xfrm>
           <a:prstGeom prst="rect">
             <a:avLst/>
@@ -7324,7 +12307,7 @@
                 </a:solidFill>
                 <a:latin typeface="Calibri"/>
               </a:rPr>
-              <a:t>Del boceto a la plataforma del curso (diagrama)</a:t>
+              <a:t>Escalar vertical y horizontalmente: las dos formas de agregar capacidad (2/2)</a:t>
             </a:r>
           </a:p>
         </p:txBody>
@@ -7337,8 +12320,8 @@
         </p:nvSpPr>
         <p:spPr>
           <a:xfrm>
-            <a:off x="457200" y="566928"/>
-            <a:ext cx="11277295" cy="411480"/>
+            <a:off x="457200" y="1170432"/>
+            <a:ext cx="11277295" cy="5230368"/>
           </a:xfrm>
           <a:prstGeom prst="rect">
             <a:avLst/>
@@ -7351,705 +12334,74 @@
           </a:bodyPr>
           <a:lstStyle/>
           <a:p>
-            <a:r>
-              <a:rPr sz="1400" b="0" i="0">
-                <a:solidFill>
-                  <a:srgbClr val="B8D8EE"/>
-                </a:solidFill>
-                <a:latin typeface="Calibri"/>
-              </a:rPr>
-              <a:t>El diagrama se entrega como código Mermaid dentro de la plataforma del curso, no como imagen</a:t>
-            </a:r>
-          </a:p>
-        </p:txBody>
-      </p:sp>
-      <p:sp>
-        <p:nvSpPr>
-          <p:cNvPr id="6" name="Rounded Rectangle 5"/>
-          <p:cNvSpPr/>
-          <p:nvPr/>
-        </p:nvSpPr>
-        <p:spPr>
-          <a:xfrm>
-            <a:off x="457200" y="1659636"/>
-            <a:ext cx="11277295" cy="1051560"/>
-          </a:xfrm>
-          <a:prstGeom prst="roundRect">
-            <a:avLst>
-              <a:gd name="adj" fmla="val 12000"/>
-            </a:avLst>
-          </a:prstGeom>
-          <a:solidFill>
-            <a:srgbClr val="F2F2F2"/>
-          </a:solidFill>
-          <a:ln>
-            <a:noFill/>
-          </a:ln>
-        </p:spPr>
-        <p:style>
-          <a:lnRef idx="1">
-            <a:schemeClr val="accent1"/>
-          </a:lnRef>
-          <a:fillRef idx="3">
-            <a:schemeClr val="accent1"/>
-          </a:fillRef>
-          <a:effectRef idx="2">
-            <a:schemeClr val="accent1"/>
-          </a:effectRef>
-          <a:fontRef idx="minor">
-            <a:schemeClr val="lt1"/>
-          </a:fontRef>
-        </p:style>
-        <p:txBody>
-          <a:bodyPr rtlCol="0" anchor="ctr"/>
-          <a:lstStyle/>
-          <a:p>
-            <a:pPr algn="ctr"/>
-          </a:p>
-        </p:txBody>
-      </p:sp>
-      <p:sp>
-        <p:nvSpPr>
-          <p:cNvPr id="7" name="Rounded Rectangle 6"/>
-          <p:cNvSpPr/>
-          <p:nvPr/>
-        </p:nvSpPr>
-        <p:spPr>
-          <a:xfrm>
-            <a:off x="594360" y="1965960"/>
-            <a:ext cx="438912" cy="438912"/>
-          </a:xfrm>
-          <a:prstGeom prst="roundRect">
-            <a:avLst>
-              <a:gd name="adj" fmla="val 12000"/>
-            </a:avLst>
-          </a:prstGeom>
-          <a:solidFill>
-            <a:srgbClr val="095292"/>
-          </a:solidFill>
-          <a:ln>
-            <a:noFill/>
-          </a:ln>
-        </p:spPr>
-        <p:style>
-          <a:lnRef idx="1">
-            <a:schemeClr val="accent1"/>
-          </a:lnRef>
-          <a:fillRef idx="3">
-            <a:schemeClr val="accent1"/>
-          </a:fillRef>
-          <a:effectRef idx="2">
-            <a:schemeClr val="accent1"/>
-          </a:effectRef>
-          <a:fontRef idx="minor">
-            <a:schemeClr val="lt1"/>
-          </a:fontRef>
-        </p:style>
-        <p:txBody>
-          <a:bodyPr rtlCol="0" anchor="ctr"/>
-          <a:lstStyle/>
-          <a:p>
-            <a:pPr algn="ctr"/>
-          </a:p>
-        </p:txBody>
-      </p:sp>
-      <p:sp>
-        <p:nvSpPr>
-          <p:cNvPr id="8" name="TextBox 7"/>
-          <p:cNvSpPr txBox="1"/>
-          <p:nvPr/>
-        </p:nvSpPr>
-        <p:spPr>
-          <a:xfrm>
-            <a:off x="594360" y="1965960"/>
-            <a:ext cx="438912" cy="438912"/>
-          </a:xfrm>
-          <a:prstGeom prst="rect">
-            <a:avLst/>
-          </a:prstGeom>
-          <a:noFill/>
-        </p:spPr>
-        <p:txBody>
-          <a:bodyPr wrap="square" anchor="ctr"/>
-          <a:lstStyle/>
-          <a:p>
-            <a:pPr algn="ctr"/>
-            <a:r>
-              <a:rPr sz="1600" b="1" i="0">
-                <a:solidFill>
-                  <a:srgbClr val="FFFFFF"/>
-                </a:solidFill>
-                <a:latin typeface="Calibri"/>
-              </a:rPr>
-              <a:t>1</a:t>
-            </a:r>
-          </a:p>
-        </p:txBody>
-      </p:sp>
-      <p:sp>
-        <p:nvSpPr>
-          <p:cNvPr id="9" name="TextBox 8"/>
-          <p:cNvSpPr txBox="1"/>
-          <p:nvPr/>
-        </p:nvSpPr>
-        <p:spPr>
-          <a:xfrm>
-            <a:off x="1188720" y="1751076"/>
-            <a:ext cx="10271455" cy="886968"/>
-          </a:xfrm>
-          <a:prstGeom prst="rect">
-            <a:avLst/>
-          </a:prstGeom>
-          <a:noFill/>
-        </p:spPr>
-        <p:txBody>
-          <a:bodyPr wrap="square" anchor="ctr"/>
-          <a:lstStyle/>
-          <a:p>
-            <a:r>
-              <a:rPr sz="1500" b="1" i="0">
-                <a:solidFill>
-                  <a:srgbClr val="095292"/>
-                </a:solidFill>
-                <a:latin typeface="Calibri"/>
-              </a:rPr>
-              <a:t>Disena visual</a:t>
-            </a:r>
-          </a:p>
-          <a:p>
             <a:pPr>
-              <a:spcBef>
-                <a:spcPts val="200"/>
-              </a:spcBef>
+              <a:spcAft>
+                <a:spcPts val="800"/>
+              </a:spcAft>
             </a:pPr>
             <a:r>
-              <a:rPr sz="1300" b="0" i="0">
-                <a:solidFill>
-                  <a:srgbClr val="333333"/>
-                </a:solidFill>
-                <a:latin typeface="Calibri"/>
-              </a:rPr>
-              <a:t>Dibuja el diagrama como quieras en Excalidraw o draw.io: es mas rapido arrastrar cajas que escribir codigo, y ahi es donde piensas el modelo.</a:t>
-            </a:r>
-          </a:p>
-        </p:txBody>
-      </p:sp>
-      <p:sp>
-        <p:nvSpPr>
-          <p:cNvPr id="10" name="Rounded Rectangle 9"/>
-          <p:cNvSpPr/>
-          <p:nvPr/>
-        </p:nvSpPr>
-        <p:spPr>
-          <a:xfrm>
-            <a:off x="457200" y="2802636"/>
-            <a:ext cx="11277295" cy="1051560"/>
-          </a:xfrm>
-          <a:prstGeom prst="roundRect">
-            <a:avLst>
-              <a:gd name="adj" fmla="val 12000"/>
-            </a:avLst>
-          </a:prstGeom>
-          <a:solidFill>
-            <a:srgbClr val="E8F4FA"/>
-          </a:solidFill>
-          <a:ln>
-            <a:noFill/>
-          </a:ln>
-        </p:spPr>
-        <p:style>
-          <a:lnRef idx="1">
-            <a:schemeClr val="accent1"/>
-          </a:lnRef>
-          <a:fillRef idx="3">
-            <a:schemeClr val="accent1"/>
-          </a:fillRef>
-          <a:effectRef idx="2">
-            <a:schemeClr val="accent1"/>
-          </a:effectRef>
-          <a:fontRef idx="minor">
-            <a:schemeClr val="lt1"/>
-          </a:fontRef>
-        </p:style>
-        <p:txBody>
-          <a:bodyPr rtlCol="0" anchor="ctr"/>
-          <a:lstStyle/>
-          <a:p>
-            <a:pPr algn="ctr"/>
-          </a:p>
-        </p:txBody>
-      </p:sp>
-      <p:sp>
-        <p:nvSpPr>
-          <p:cNvPr id="11" name="Rounded Rectangle 10"/>
-          <p:cNvSpPr/>
-          <p:nvPr/>
-        </p:nvSpPr>
-        <p:spPr>
-          <a:xfrm>
-            <a:off x="594360" y="3108960"/>
-            <a:ext cx="438912" cy="438912"/>
-          </a:xfrm>
-          <a:prstGeom prst="roundRect">
-            <a:avLst>
-              <a:gd name="adj" fmla="val 12000"/>
-            </a:avLst>
-          </a:prstGeom>
-          <a:solidFill>
-            <a:srgbClr val="095292"/>
-          </a:solidFill>
-          <a:ln>
-            <a:noFill/>
-          </a:ln>
-        </p:spPr>
-        <p:style>
-          <a:lnRef idx="1">
-            <a:schemeClr val="accent1"/>
-          </a:lnRef>
-          <a:fillRef idx="3">
-            <a:schemeClr val="accent1"/>
-          </a:fillRef>
-          <a:effectRef idx="2">
-            <a:schemeClr val="accent1"/>
-          </a:effectRef>
-          <a:fontRef idx="minor">
-            <a:schemeClr val="lt1"/>
-          </a:fontRef>
-        </p:style>
-        <p:txBody>
-          <a:bodyPr rtlCol="0" anchor="ctr"/>
-          <a:lstStyle/>
-          <a:p>
-            <a:pPr algn="ctr"/>
-          </a:p>
-        </p:txBody>
-      </p:sp>
-      <p:sp>
-        <p:nvSpPr>
-          <p:cNvPr id="12" name="TextBox 11"/>
-          <p:cNvSpPr txBox="1"/>
-          <p:nvPr/>
-        </p:nvSpPr>
-        <p:spPr>
-          <a:xfrm>
-            <a:off x="594360" y="3108960"/>
-            <a:ext cx="438912" cy="438912"/>
-          </a:xfrm>
-          <a:prstGeom prst="rect">
-            <a:avLst/>
-          </a:prstGeom>
-          <a:noFill/>
-        </p:spPr>
-        <p:txBody>
-          <a:bodyPr wrap="square" anchor="ctr"/>
-          <a:lstStyle/>
-          <a:p>
-            <a:pPr algn="ctr"/>
-            <a:r>
-              <a:rPr sz="1600" b="1" i="0">
-                <a:solidFill>
-                  <a:srgbClr val="FFFFFF"/>
-                </a:solidFill>
-                <a:latin typeface="Calibri"/>
-              </a:rPr>
-              <a:t>2</a:t>
-            </a:r>
-          </a:p>
-        </p:txBody>
-      </p:sp>
-      <p:sp>
-        <p:nvSpPr>
-          <p:cNvPr id="13" name="TextBox 12"/>
-          <p:cNvSpPr txBox="1"/>
-          <p:nvPr/>
-        </p:nvSpPr>
-        <p:spPr>
-          <a:xfrm>
-            <a:off x="1188720" y="2894076"/>
-            <a:ext cx="10271455" cy="886968"/>
-          </a:xfrm>
-          <a:prstGeom prst="rect">
-            <a:avLst/>
-          </a:prstGeom>
-          <a:noFill/>
-        </p:spPr>
-        <p:txBody>
-          <a:bodyPr wrap="square" anchor="ctr"/>
-          <a:lstStyle/>
-          <a:p>
-            <a:r>
-              <a:rPr sz="1500" b="1" i="0">
-                <a:solidFill>
-                  <a:srgbClr val="095292"/>
-                </a:solidFill>
-                <a:latin typeface="Calibri"/>
-              </a:rPr>
-              <a:t>Traduce con IA</a:t>
+              <a:rPr sz="2000" b="0" i="0">
+                <a:solidFill>
+                  <a:srgbClr val="333333"/>
+                </a:solidFill>
+                <a:latin typeface="Calibri"/>
+              </a:rPr>
+              <a:t>–   Ademas una sola maquina grande sigue siendo un unico punto de falla.</a:t>
             </a:r>
           </a:p>
           <a:p>
             <a:pPr>
-              <a:spcBef>
-                <a:spcPts val="200"/>
-              </a:spcBef>
+              <a:spcAft>
+                <a:spcPts val="800"/>
+              </a:spcAft>
             </a:pPr>
             <a:r>
-              <a:rPr sz="1300" b="0" i="0">
-                <a:solidFill>
-                  <a:srgbClr val="333333"/>
-                </a:solidFill>
-                <a:latin typeface="Calibri"/>
-              </a:rPr>
-              <a:t>Copia o describe tu boceto a una IA y pidele el codigo Mermaid: «convierte este diagrama a Mermaid usando flowchart». Revisa el resultado: la IA acierta la sintaxis, no tu modelo.</a:t>
-            </a:r>
-          </a:p>
-        </p:txBody>
-      </p:sp>
-      <p:sp>
-        <p:nvSpPr>
-          <p:cNvPr id="14" name="Rounded Rectangle 13"/>
-          <p:cNvSpPr/>
-          <p:nvPr/>
-        </p:nvSpPr>
-        <p:spPr>
-          <a:xfrm>
-            <a:off x="457200" y="3945636"/>
-            <a:ext cx="11277295" cy="1051560"/>
-          </a:xfrm>
-          <a:prstGeom prst="roundRect">
-            <a:avLst>
-              <a:gd name="adj" fmla="val 12000"/>
-            </a:avLst>
-          </a:prstGeom>
-          <a:solidFill>
-            <a:srgbClr val="F2F2F2"/>
-          </a:solidFill>
-          <a:ln>
-            <a:noFill/>
-          </a:ln>
-        </p:spPr>
-        <p:style>
-          <a:lnRef idx="1">
-            <a:schemeClr val="accent1"/>
-          </a:lnRef>
-          <a:fillRef idx="3">
-            <a:schemeClr val="accent1"/>
-          </a:fillRef>
-          <a:effectRef idx="2">
-            <a:schemeClr val="accent1"/>
-          </a:effectRef>
-          <a:fontRef idx="minor">
-            <a:schemeClr val="lt1"/>
-          </a:fontRef>
-        </p:style>
-        <p:txBody>
-          <a:bodyPr rtlCol="0" anchor="ctr"/>
-          <a:lstStyle/>
-          <a:p>
-            <a:pPr algn="ctr"/>
-          </a:p>
-        </p:txBody>
-      </p:sp>
-      <p:sp>
-        <p:nvSpPr>
-          <p:cNvPr id="15" name="Rounded Rectangle 14"/>
-          <p:cNvSpPr/>
-          <p:nvPr/>
-        </p:nvSpPr>
-        <p:spPr>
-          <a:xfrm>
-            <a:off x="594360" y="4251960"/>
-            <a:ext cx="438912" cy="438912"/>
-          </a:xfrm>
-          <a:prstGeom prst="roundRect">
-            <a:avLst>
-              <a:gd name="adj" fmla="val 12000"/>
-            </a:avLst>
-          </a:prstGeom>
-          <a:solidFill>
-            <a:srgbClr val="095292"/>
-          </a:solidFill>
-          <a:ln>
-            <a:noFill/>
-          </a:ln>
-        </p:spPr>
-        <p:style>
-          <a:lnRef idx="1">
-            <a:schemeClr val="accent1"/>
-          </a:lnRef>
-          <a:fillRef idx="3">
-            <a:schemeClr val="accent1"/>
-          </a:fillRef>
-          <a:effectRef idx="2">
-            <a:schemeClr val="accent1"/>
-          </a:effectRef>
-          <a:fontRef idx="minor">
-            <a:schemeClr val="lt1"/>
-          </a:fontRef>
-        </p:style>
-        <p:txBody>
-          <a:bodyPr rtlCol="0" anchor="ctr"/>
-          <a:lstStyle/>
-          <a:p>
-            <a:pPr algn="ctr"/>
-          </a:p>
-        </p:txBody>
-      </p:sp>
-      <p:sp>
-        <p:nvSpPr>
-          <p:cNvPr id="16" name="TextBox 15"/>
-          <p:cNvSpPr txBox="1"/>
-          <p:nvPr/>
-        </p:nvSpPr>
-        <p:spPr>
-          <a:xfrm>
-            <a:off x="594360" y="4251960"/>
-            <a:ext cx="438912" cy="438912"/>
-          </a:xfrm>
-          <a:prstGeom prst="rect">
-            <a:avLst/>
-          </a:prstGeom>
-          <a:noFill/>
-        </p:spPr>
-        <p:txBody>
-          <a:bodyPr wrap="square" anchor="ctr"/>
-          <a:lstStyle/>
-          <a:p>
-            <a:pPr algn="ctr"/>
-            <a:r>
-              <a:rPr sz="1600" b="1" i="0">
-                <a:solidFill>
-                  <a:srgbClr val="FFFFFF"/>
-                </a:solidFill>
-                <a:latin typeface="Calibri"/>
-              </a:rPr>
-              <a:t>3</a:t>
-            </a:r>
-          </a:p>
-        </p:txBody>
-      </p:sp>
-      <p:sp>
-        <p:nvSpPr>
-          <p:cNvPr id="17" name="TextBox 16"/>
-          <p:cNvSpPr txBox="1"/>
-          <p:nvPr/>
-        </p:nvSpPr>
-        <p:spPr>
-          <a:xfrm>
-            <a:off x="1188720" y="4037076"/>
-            <a:ext cx="10271455" cy="886968"/>
-          </a:xfrm>
-          <a:prstGeom prst="rect">
-            <a:avLst/>
-          </a:prstGeom>
-          <a:noFill/>
-        </p:spPr>
-        <p:txBody>
-          <a:bodyPr wrap="square" anchor="ctr"/>
-          <a:lstStyle/>
-          <a:p>
-            <a:r>
-              <a:rPr sz="1500" b="1" i="0">
-                <a:solidFill>
-                  <a:srgbClr val="095292"/>
-                </a:solidFill>
-                <a:latin typeface="Calibri"/>
-              </a:rPr>
-              <a:t>Pega y renderiza en la plataforma del curso</a:t>
+              <a:rPr sz="2000" b="0" i="0">
+                <a:solidFill>
+                  <a:srgbClr val="333333"/>
+                </a:solidFill>
+                <a:latin typeface="Calibri"/>
+              </a:rPr>
+              <a:t>–   Escalar horizontalmente, o hacia afuera, es agregar MAS instancias iguales trabajando en paralelo, con el balanceador de carga de la Clase 7 repartiendo peticiones entre ellas.</a:t>
             </a:r>
           </a:p>
           <a:p>
             <a:pPr>
-              <a:spcBef>
-                <a:spcPts val="200"/>
-              </a:spcBef>
+              <a:spcAft>
+                <a:spcPts val="800"/>
+              </a:spcAft>
             </a:pPr>
             <a:r>
-              <a:rPr sz="1300" b="0" i="0">
-                <a:solidFill>
-                  <a:srgbClr val="333333"/>
-                </a:solidFill>
-                <a:latin typeface="Calibri"/>
-              </a:rPr>
-              <a:t>Pega ese codigo en la caja de texto de la pregunta y mira como lo dibuja la plataforma. Si no renderiza, corrige ahi mismo: lo que se califica es el diagrama renderizado dentro de la plataforma del curso.</a:t>
-            </a:r>
-          </a:p>
-        </p:txBody>
-      </p:sp>
-      <p:sp>
-        <p:nvSpPr>
-          <p:cNvPr id="18" name="Rounded Rectangle 17"/>
-          <p:cNvSpPr/>
-          <p:nvPr/>
-        </p:nvSpPr>
-        <p:spPr>
-          <a:xfrm>
-            <a:off x="457200" y="5088636"/>
-            <a:ext cx="11277295" cy="1051560"/>
-          </a:xfrm>
-          <a:prstGeom prst="roundRect">
-            <a:avLst>
-              <a:gd name="adj" fmla="val 12000"/>
-            </a:avLst>
-          </a:prstGeom>
-          <a:solidFill>
-            <a:srgbClr val="E8F4FA"/>
-          </a:solidFill>
-          <a:ln>
-            <a:noFill/>
-          </a:ln>
-        </p:spPr>
-        <p:style>
-          <a:lnRef idx="1">
-            <a:schemeClr val="accent1"/>
-          </a:lnRef>
-          <a:fillRef idx="3">
-            <a:schemeClr val="accent1"/>
-          </a:fillRef>
-          <a:effectRef idx="2">
-            <a:schemeClr val="accent1"/>
-          </a:effectRef>
-          <a:fontRef idx="minor">
-            <a:schemeClr val="lt1"/>
-          </a:fontRef>
-        </p:style>
-        <p:txBody>
-          <a:bodyPr rtlCol="0" anchor="ctr"/>
-          <a:lstStyle/>
-          <a:p>
-            <a:pPr algn="ctr"/>
-          </a:p>
-        </p:txBody>
-      </p:sp>
-      <p:sp>
-        <p:nvSpPr>
-          <p:cNvPr id="19" name="Rounded Rectangle 18"/>
-          <p:cNvSpPr/>
-          <p:nvPr/>
-        </p:nvSpPr>
-        <p:spPr>
-          <a:xfrm>
-            <a:off x="594360" y="5394960"/>
-            <a:ext cx="438912" cy="438912"/>
-          </a:xfrm>
-          <a:prstGeom prst="roundRect">
-            <a:avLst>
-              <a:gd name="adj" fmla="val 12000"/>
-            </a:avLst>
-          </a:prstGeom>
-          <a:solidFill>
-            <a:srgbClr val="095292"/>
-          </a:solidFill>
-          <a:ln>
-            <a:noFill/>
-          </a:ln>
-        </p:spPr>
-        <p:style>
-          <a:lnRef idx="1">
-            <a:schemeClr val="accent1"/>
-          </a:lnRef>
-          <a:fillRef idx="3">
-            <a:schemeClr val="accent1"/>
-          </a:fillRef>
-          <a:effectRef idx="2">
-            <a:schemeClr val="accent1"/>
-          </a:effectRef>
-          <a:fontRef idx="minor">
-            <a:schemeClr val="lt1"/>
-          </a:fontRef>
-        </p:style>
-        <p:txBody>
-          <a:bodyPr rtlCol="0" anchor="ctr"/>
-          <a:lstStyle/>
-          <a:p>
-            <a:pPr algn="ctr"/>
-          </a:p>
-        </p:txBody>
-      </p:sp>
-      <p:sp>
-        <p:nvSpPr>
-          <p:cNvPr id="20" name="TextBox 19"/>
-          <p:cNvSpPr txBox="1"/>
-          <p:nvPr/>
-        </p:nvSpPr>
-        <p:spPr>
-          <a:xfrm>
-            <a:off x="594360" y="5394960"/>
-            <a:ext cx="438912" cy="438912"/>
-          </a:xfrm>
-          <a:prstGeom prst="rect">
-            <a:avLst/>
-          </a:prstGeom>
-          <a:noFill/>
-        </p:spPr>
-        <p:txBody>
-          <a:bodyPr wrap="square" anchor="ctr"/>
-          <a:lstStyle/>
-          <a:p>
-            <a:pPr algn="ctr"/>
-            <a:r>
-              <a:rPr sz="1600" b="1" i="0">
-                <a:solidFill>
-                  <a:srgbClr val="FFFFFF"/>
-                </a:solidFill>
-                <a:latin typeface="Calibri"/>
-              </a:rPr>
-              <a:t>4</a:t>
-            </a:r>
-          </a:p>
-        </p:txBody>
-      </p:sp>
-      <p:sp>
-        <p:nvSpPr>
-          <p:cNvPr id="21" name="TextBox 20"/>
-          <p:cNvSpPr txBox="1"/>
-          <p:nvPr/>
-        </p:nvSpPr>
-        <p:spPr>
-          <a:xfrm>
-            <a:off x="1188720" y="5180076"/>
-            <a:ext cx="10271455" cy="886968"/>
-          </a:xfrm>
-          <a:prstGeom prst="rect">
-            <a:avLst/>
-          </a:prstGeom>
-          <a:noFill/>
-        </p:spPr>
-        <p:txBody>
-          <a:bodyPr wrap="square" anchor="ctr"/>
-          <a:lstStyle/>
-          <a:p>
-            <a:r>
-              <a:rPr sz="1500" b="1" i="0">
-                <a:solidFill>
-                  <a:srgbClr val="095292"/>
-                </a:solidFill>
-                <a:latin typeface="Calibri"/>
-              </a:rPr>
-              <a:t>Guarda el PNG para tu PI</a:t>
+              <a:rPr sz="2000" b="0" i="0">
+                <a:solidFill>
+                  <a:srgbClr val="333333"/>
+                </a:solidFill>
+                <a:latin typeface="Calibri"/>
+              </a:rPr>
+              <a:t>–   No tiene techo cercano, mejora la disponibilidad porque si una instancia muere las otras siguen atendiendo, y permite crecer en pasos pequenos y baratos.</a:t>
             </a:r>
           </a:p>
           <a:p>
             <a:pPr>
-              <a:spcBef>
-                <a:spcPts val="200"/>
-              </a:spcBef>
+              <a:spcAft>
+                <a:spcPts val="800"/>
+              </a:spcAft>
             </a:pPr>
             <a:r>
-              <a:rPr sz="1300" b="0" i="0">
-                <a:solidFill>
-                  <a:srgbClr val="333333"/>
-                </a:solidFill>
-                <a:latin typeface="Calibri"/>
-              </a:rPr>
-              <a:t>Exporta tambien la imagen a la carpeta de tu Proyecto Integrador. Esa copia es para tu informe; no reemplaza la respuesta en la plataforma.</a:t>
-            </a:r>
-          </a:p>
-        </p:txBody>
-      </p:sp>
-      <p:sp>
-        <p:nvSpPr>
-          <p:cNvPr id="22" name="TextBox 21"/>
+              <a:rPr sz="2000" b="0" i="0">
+                <a:solidFill>
+                  <a:srgbClr val="333333"/>
+                </a:solidFill>
+                <a:latin typeface="Calibri"/>
+              </a:rPr>
+              <a:t>–   Su precio es un requisito de diseno no negociable: la aplicacion tiene que poder correr en varias copias sin pisarse.</a:t>
+            </a:r>
+          </a:p>
+        </p:txBody>
+      </p:sp>
+      <p:sp>
+        <p:nvSpPr>
+          <p:cNvPr id="6" name="TextBox 5"/>
           <p:cNvSpPr txBox="1"/>
           <p:nvPr/>
         </p:nvSpPr>
@@ -8223,7 +12575,7 @@
                 </a:solidFill>
                 <a:latin typeface="Calibri"/>
               </a:rPr>
-              <a:t>PI CloudLite — entregable de hoy</a:t>
+              <a:t>Ausencia de estado: donde mas estudiantes fallan (1/2)</a:t>
             </a:r>
           </a:p>
         </p:txBody>
@@ -8262,25 +12614,7 @@
                 </a:solidFill>
                 <a:latin typeface="Calibri"/>
               </a:rPr>
-              <a:t>–   </a:t>
-            </a:r>
-            <a:r>
-              <a:rPr sz="2000" b="1" i="0">
-                <a:solidFill>
-                  <a:srgbClr val="333333"/>
-                </a:solidFill>
-                <a:latin typeface="Calibri"/>
-              </a:rPr>
-              <a:t>Entregable:</a:t>
-            </a:r>
-            <a:r>
-              <a:rPr sz="2000" b="0" i="0">
-                <a:solidFill>
-                  <a:srgbClr val="333333"/>
-                </a:solidFill>
-                <a:latin typeface="Calibri"/>
-              </a:rPr>
-              <a:t> Sección Escalabilidad: triggers, límites, qué escala y qué no</a:t>
+              <a:t>–   Ese requisito se llama ausencia de estado, o statelessness, y es donde mas estudiantes fallan.</a:t>
             </a:r>
           </a:p>
           <a:p>
@@ -8296,16 +12630,7 @@
                 </a:solidFill>
                 <a:latin typeface="Calibri"/>
               </a:rPr>
-              <a:t>–   Herramienta: </a:t>
-            </a:r>
-            <a:r>
-              <a:rPr sz="2000" b="1" i="0">
-                <a:solidFill>
-                  <a:srgbClr val="333333"/>
-                </a:solidFill>
-                <a:latin typeface="Calibri"/>
-              </a:rPr>
-              <a:t>Google Docs · draw.io (opcional nota en Deployment)</a:t>
+              <a:t>–   Un servicio sin estado no guarda en la memoria de su propio proceso ninguna informacion que necesite en la siguiente peticion; todo lo que deba persistir vive en un almacen compartido, sea la base de datos, una cache comun o el token que trae el cliente.</a:t>
             </a:r>
           </a:p>
           <a:p>
@@ -8321,25 +12646,7 @@
                 </a:solidFill>
                 <a:latin typeface="Calibri"/>
               </a:rPr>
-              <a:t>–   Todo lo que construyan hoy entra al </a:t>
-            </a:r>
-            <a:r>
-              <a:rPr sz="2000" b="1" i="0">
-                <a:solidFill>
-                  <a:srgbClr val="333333"/>
-                </a:solidFill>
-                <a:latin typeface="Calibri"/>
-              </a:rPr>
-              <a:t>informe/repo del PI</a:t>
-            </a:r>
-            <a:r>
-              <a:rPr sz="2000" b="0" i="0">
-                <a:solidFill>
-                  <a:srgbClr val="333333"/>
-                </a:solidFill>
-                <a:latin typeface="Calibri"/>
-              </a:rPr>
-              <a:t> (no es lab suelto).</a:t>
+              <a:t>–   El sintoma en CloudLite es facil de narrar: si la API guarda la sesion en un diccionario en memoria de la instancia que atendio el login</a:t>
             </a:r>
           </a:p>
           <a:p>
@@ -8355,7 +12662,7 @@
                 </a:solidFill>
                 <a:latin typeface="Calibri"/>
               </a:rPr>
-              <a:t>–   Individual por defecto · el docente puede autorizar equipos de 2–3; la entrega en la plataforma del curso siempre es individual.</a:t>
+              <a:t>–   Y el balanceador manda la siguiente peticion del mismo usuario a la segunda instancia, esa instancia no lo conoce y lo expulsa; el usuario percibe que la aplicacion lo saca al azar.</a:t>
             </a:r>
           </a:p>
         </p:txBody>

--- a/Arquitectura de Sistemas Computacionales/Clases/Clase 13 - Escalabilidad automatica/Presentacion.pptx
+++ b/Arquitectura de Sistemas Computacionales/Clases/Clase 13 - Escalabilidad automatica/Presentacion.pptx
@@ -32,6 +32,8 @@
     <p:sldId id="280" r:id="rId31"/>
     <p:sldId id="281" r:id="rId32"/>
     <p:sldId id="282" r:id="rId33"/>
+    <p:sldId id="283" r:id="rId34"/>
+    <p:sldId id="284" r:id="rId35"/>
   </p:sldIdLst>
   <p:sldSz cx="12191695" cy="6858000" type="screen4x3"/>
   <p:notesSz cx="6858000" cy="9144000"/>
@@ -3629,22 +3631,6 @@
                 </a:solidFill>
                 <a:latin typeface="Calibri"/>
               </a:rPr>
-              <a:t>–   La solucion parcial que casi todos proponen es la sesion pegajosa, que amarra al usuario a una instancia, y hay que decir por que es un parche: si esa instancia se cae la sesion se pierde igual, y el balanceo se vuelve desigual.</a:t>
-            </a:r>
-          </a:p>
-          <a:p>
-            <a:pPr>
-              <a:spcAft>
-                <a:spcPts val="800"/>
-              </a:spcAft>
-            </a:pPr>
-            <a:r>
-              <a:rPr sz="2000" b="0" i="0">
-                <a:solidFill>
-                  <a:srgbClr val="333333"/>
-                </a:solidFill>
-                <a:latin typeface="Calibri"/>
-              </a:rPr>
               <a:t>–   La solucion arquitectonica es sacar el estado del proceso: guardar la sesion en un almacen compartido o usar un token firmado que el cliente presenta en cada peticion.</a:t>
             </a:r>
           </a:p>
@@ -3929,22 +3915,6 @@
                 </a:solidFill>
                 <a:latin typeface="Calibri"/>
               </a:rPr>
-              <a:t>–   Cada numero se justifica.</a:t>
-            </a:r>
-          </a:p>
-          <a:p>
-            <a:pPr>
-              <a:spcAft>
-                <a:spcPts val="800"/>
-              </a:spcAft>
-            </a:pPr>
-            <a:r>
-              <a:rPr sz="2000" b="0" i="0">
-                <a:solidFill>
-                  <a:srgbClr val="333333"/>
-                </a:solidFill>
-                <a:latin typeface="Calibri"/>
-              </a:rPr>
               <a:t>–   El 70 por ciento deja holgura para el pico que llega mientras la instancia nueva arranca.</a:t>
             </a:r>
           </a:p>
@@ -4442,7 +4412,7 @@
                 </a:solidFill>
                 <a:latin typeface="Calibri"/>
               </a:rPr>
-              <a:t>El limite fisico: la instancia nueva no aparece al instante</a:t>
+              <a:t>El limite fisico: la instancia nueva no aparece al instante (1/2)</a:t>
             </a:r>
           </a:p>
         </p:txBody>
@@ -4475,7 +4445,7 @@
               </a:spcAft>
             </a:pPr>
             <a:r>
-              <a:rPr sz="1900" b="0" i="0">
+              <a:rPr sz="2000" b="0" i="0">
                 <a:solidFill>
                   <a:srgbClr val="333333"/>
                 </a:solidFill>
@@ -4491,7 +4461,7 @@
               </a:spcAft>
             </a:pPr>
             <a:r>
-              <a:rPr sz="1900" b="0" i="0">
+              <a:rPr sz="2000" b="0" i="0">
                 <a:solidFill>
                   <a:srgbClr val="333333"/>
                 </a:solidFill>
@@ -4507,7 +4477,7 @@
               </a:spcAft>
             </a:pPr>
             <a:r>
-              <a:rPr sz="1900" b="0" i="0">
+              <a:rPr sz="2000" b="0" i="0">
                 <a:solidFill>
                   <a:srgbClr val="333333"/>
                 </a:solidFill>
@@ -4523,61 +4493,13 @@
               </a:spcAft>
             </a:pPr>
             <a:r>
-              <a:rPr sz="1900" b="0" i="0">
+              <a:rPr sz="2000" b="0" i="0">
                 <a:solidFill>
                   <a:srgbClr val="333333"/>
                 </a:solidFill>
                 <a:latin typeface="Calibri"/>
               </a:rPr>
               <a:t>–   Sume el periodo de evaluacion y el sistema reacciona entre 5 y 10 minutos despues de que empezo el problema, asi que un pico subito del tipo que la prueba de spike de la Clase 12 simula ocurre y termina antes de que llegue la ayuda.</a:t>
-            </a:r>
-          </a:p>
-          <a:p>
-            <a:pPr>
-              <a:spcAft>
-                <a:spcPts val="800"/>
-              </a:spcAft>
-            </a:pPr>
-            <a:r>
-              <a:rPr sz="1900" b="0" i="0">
-                <a:solidFill>
-                  <a:srgbClr val="333333"/>
-                </a:solidFill>
-                <a:latin typeface="Calibri"/>
-              </a:rPr>
-              <a:t>–   Las respuestas correctas son tres y ninguna es "poner mas autoescalado": mantener holgura permanente por encima de la demanda habitual</a:t>
-            </a:r>
-          </a:p>
-          <a:p>
-            <a:pPr>
-              <a:spcAft>
-                <a:spcPts val="800"/>
-              </a:spcAft>
-            </a:pPr>
-            <a:r>
-              <a:rPr sz="1900" b="0" i="0">
-                <a:solidFill>
-                  <a:srgbClr val="333333"/>
-                </a:solidFill>
-                <a:latin typeface="Calibri"/>
-              </a:rPr>
-              <a:t>–   Poner una cola delante para absorber la rafaga y procesarla al ritmo que el sistema aguante, o degradar con gracia devolviendo una version reducida de la respuesta.</a:t>
-            </a:r>
-          </a:p>
-          <a:p>
-            <a:pPr>
-              <a:spcAft>
-                <a:spcPts val="800"/>
-              </a:spcAft>
-            </a:pPr>
-            <a:r>
-              <a:rPr sz="1900" b="0" i="0">
-                <a:solidFill>
-                  <a:srgbClr val="333333"/>
-                </a:solidFill>
-                <a:latin typeface="Calibri"/>
-              </a:rPr>
-              <a:t>–   Aqui reaparece la Clase 3: una imagen slim arranca mas rapido que una de un gigabyte, asi que adelgazar la imagen no es solo ahorro de costo, es tiempo de reaccion.</a:t>
             </a:r>
           </a:p>
         </p:txBody>
@@ -4758,7 +4680,7 @@
                 </a:solidFill>
                 <a:latin typeface="Calibri"/>
               </a:rPr>
-              <a:t>Elegir la metrica: la decision mas fina del tema (1/2)</a:t>
+              <a:t>El limite fisico: la instancia nueva no aparece al instante (2/2)</a:t>
             </a:r>
           </a:p>
         </p:txBody>
@@ -4797,7 +4719,7 @@
                 </a:solidFill>
                 <a:latin typeface="Calibri"/>
               </a:rPr>
-              <a:t>–   Elegir bien la metrica es la decision mas fina del tema, y el ejemplo de CloudLite es contundente.</a:t>
+              <a:t>–   Las respuestas correctas son tres y ninguna es "poner mas autoescalado": mantener holgura permanente por encima de la demanda habitual</a:t>
             </a:r>
           </a:p>
           <a:p>
@@ -4813,7 +4735,7 @@
                 </a:solidFill>
                 <a:latin typeface="Calibri"/>
               </a:rPr>
-              <a:t>–   La CPU es la metrica por defecto y es la equivocada para la mayoria de las APIs, porque una API que sobre todo espera respuestas de la base de datos esta limitada por entrada y salida</a:t>
+              <a:t>–   Poner una cola delante para absorber la rafaga y procesarla al ritmo que el sistema aguante, o degradar con gracia devolviendo una version reducida de la respuesta.</a:t>
             </a:r>
           </a:p>
           <a:p>
@@ -4829,23 +4751,7 @@
                 </a:solidFill>
                 <a:latin typeface="Calibri"/>
               </a:rPr>
-              <a:t>–   No por procesador: cuando la latencia se dispara a 3 segundos porque el pool de conexiones esta agotado, la CPU puede seguir marcando un tranquilo 20 por ciento, el umbral del 70 nunca se cruza y el autoescalado no hace nada mientras los usuarios sufren.</a:t>
-            </a:r>
-          </a:p>
-          <a:p>
-            <a:pPr>
-              <a:spcAft>
-                <a:spcPts val="800"/>
-              </a:spcAft>
-            </a:pPr>
-            <a:r>
-              <a:rPr sz="2000" b="0" i="0">
-                <a:solidFill>
-                  <a:srgbClr val="333333"/>
-                </a:solidFill>
-                <a:latin typeface="Calibri"/>
-              </a:rPr>
-              <a:t>–   Metricas mejores para ese caso son las peticiones por segundo por instancia, que se deriva del calculo hecho en la Clase 12, la latencia p95 del propio servicio, o la longitud de la cola pendiente.</a:t>
+              <a:t>–   Aqui reaparece la Clase 3: una imagen slim arranca mas rapido que una de un gigabyte, asi que adelgazar la imagen no es solo ahorro de costo, es tiempo de reaccion.</a:t>
             </a:r>
           </a:p>
         </p:txBody>
@@ -5026,7 +4932,7 @@
                 </a:solidFill>
                 <a:latin typeface="Calibri"/>
               </a:rPr>
-              <a:t>Elegir la metrica: la decision mas fina del tema (2/2)</a:t>
+              <a:t>Elegir la metrica: la decision mas fina del tema (1/2)</a:t>
             </a:r>
           </a:p>
         </p:txBody>
@@ -5065,7 +4971,7 @@
                 </a:solidFill>
                 <a:latin typeface="Calibri"/>
               </a:rPr>
-              <a:t>–   Para el componente de notificaciones de CloudLite la metrica natural es el numero de mensajes esperando en la cola, no la CPU del worker: si hay 500 mensajes acumulados hay que agregar workers, y da igual cuanta CPU usen.</a:t>
+              <a:t>–   Elegir bien la metrica es la decision mas fina del tema, y el ejemplo de CloudLite es contundente.</a:t>
             </a:r>
           </a:p>
           <a:p>
@@ -5081,7 +4987,7 @@
                 </a:solidFill>
                 <a:latin typeface="Calibri"/>
               </a:rPr>
-              <a:t>–   Regla de bolsillo: la metrica correcta es la que mide el recurso que se agota primero, es decir el cuello de botella identificado en la clase anterior.</a:t>
+              <a:t>–   La CPU es la metrica por defecto y es la equivocada para la mayoria de las APIs, porque una API que sobre todo espera respuestas de la base de datos esta limitada por entrada y salida</a:t>
             </a:r>
           </a:p>
           <a:p>
@@ -5097,7 +5003,7 @@
                 </a:solidFill>
                 <a:latin typeface="Calibri"/>
               </a:rPr>
-              <a:t>–   De ahi que el entregable de hoy no se pueda hacer bien si el de la Clase 12 quedo vacio.</a:t>
+              <a:t>–   No por procesador: cuando la latencia se dispara a 3 segundos porque el pool de conexiones esta agotado, la CPU puede seguir marcando un tranquilo 20 por ciento, el umbral del 70 nunca se cruza y el autoescalado no hace nada mientras los usuarios sufren.</a:t>
             </a:r>
           </a:p>
         </p:txBody>
@@ -5278,7 +5184,7 @@
                 </a:solidFill>
                 <a:latin typeface="Calibri"/>
               </a:rPr>
-              <a:t>Lo que NO escala: la mitad del entregable (1/2)</a:t>
+              <a:t>Elegir la metrica: la decision mas fina del tema (2/2)</a:t>
             </a:r>
           </a:p>
         </p:txBody>
@@ -5317,7 +5223,7 @@
                 </a:solidFill>
                 <a:latin typeface="Calibri"/>
               </a:rPr>
-              <a:t>–   Lo que NO escala es la mitad del entregable y separa una sustentacion seria de una lista de deseos.</a:t>
+              <a:t>–   Metricas mejores para ese caso son las peticiones por segundo por instancia, que se deriva del calculo hecho en la Clase 12, la latencia p95 del propio servicio, o la longitud de la cola pendiente.</a:t>
             </a:r>
           </a:p>
           <a:p>
@@ -5333,71 +5239,7 @@
                 </a:solidFill>
                 <a:latin typeface="Calibri"/>
               </a:rPr>
-              <a:t>–   La capa de datos es el caso central: agregar instancias de API es casi gratis conceptualmente, pero una base de datos relacional que debe mantener consistencia tiene un unico escritor, y ese escritor no se multiplica sin cambiar el modelo.</a:t>
-            </a:r>
-          </a:p>
-          <a:p>
-            <a:pPr>
-              <a:spcAft>
-                <a:spcPts val="800"/>
-              </a:spcAft>
-            </a:pPr>
-            <a:r>
-              <a:rPr sz="2000" b="0" i="0">
-                <a:solidFill>
-                  <a:srgbClr val="333333"/>
-                </a:solidFill>
-                <a:latin typeface="Calibri"/>
-              </a:rPr>
-              <a:t>–   Se pueden agregar replicas de lectura, y ahi entra un concepto a definir: el retraso de replicacion, esos milisegundos o segundos en que la replica todavia no tiene el ultimo cambio</a:t>
-            </a:r>
-          </a:p>
-          <a:p>
-            <a:pPr>
-              <a:spcAft>
-                <a:spcPts val="800"/>
-              </a:spcAft>
-            </a:pPr>
-            <a:r>
-              <a:rPr sz="2000" b="0" i="0">
-                <a:solidFill>
-                  <a:srgbClr val="333333"/>
-                </a:solidFill>
-                <a:latin typeface="Calibri"/>
-              </a:rPr>
-              <a:t>–   Que produce el sintoma de que el usuario guarda un dato, la pagina lo relee de una replica y el dato no aparece.</a:t>
-            </a:r>
-          </a:p>
-          <a:p>
-            <a:pPr>
-              <a:spcAft>
-                <a:spcPts val="800"/>
-              </a:spcAft>
-            </a:pPr>
-            <a:r>
-              <a:rPr sz="2000" b="0" i="0">
-                <a:solidFill>
-                  <a:srgbClr val="333333"/>
-                </a:solidFill>
-                <a:latin typeface="Calibri"/>
-              </a:rPr>
-              <a:t>–   Las alternativas mas agresivas, particionar los datos por clave o cambiar a un modelo sin esquema fijo, son decisiones de arquitectura mayores y estan fuera del alcance de CloudLite v1</a:t>
-            </a:r>
-          </a:p>
-          <a:p>
-            <a:pPr>
-              <a:spcAft>
-                <a:spcPts val="800"/>
-              </a:spcAft>
-            </a:pPr>
-            <a:r>
-              <a:rPr sz="2000" b="0" i="0">
-                <a:solidFill>
-                  <a:srgbClr val="333333"/>
-                </a:solidFill>
-                <a:latin typeface="Calibri"/>
-              </a:rPr>
-              <a:t>–   Decirlo explicitamente en el informe es una respuesta correcta, no una debilidad.</a:t>
+              <a:t>–   Para el componente de notificaciones de CloudLite la metrica natural es el numero de mensajes esperando en la cola, no la CPU del worker: si hay 500 mensajes acumulados hay que agregar workers, y da igual cuanta CPU usen.</a:t>
             </a:r>
           </a:p>
         </p:txBody>
@@ -5578,7 +5420,7 @@
                 </a:solidFill>
                 <a:latin typeface="Calibri"/>
               </a:rPr>
-              <a:t>Lo que NO escala: la mitad del entregable (2/2)</a:t>
+              <a:t>Lo que NO escala: la mitad del entregable (1/2)</a:t>
             </a:r>
           </a:p>
         </p:txBody>
@@ -5617,7 +5459,7 @@
                 </a:solidFill>
                 <a:latin typeface="Calibri"/>
               </a:rPr>
-              <a:t>–   Hay un detalle aritmetico que es la mejor leccion del dia: si cada instancia de la API abre un pool de 20 conexiones y el autoescalado sube a 6 instancias</a:t>
+              <a:t>–   La capa de datos es el caso central: agregar instancias de API es casi gratis conceptualmente, pero una base de datos relacional que debe mantener consistencia tiene un unico escritor, y ese escritor no se multiplica sin cambiar el modelo.</a:t>
             </a:r>
           </a:p>
           <a:p>
@@ -5633,7 +5475,7 @@
                 </a:solidFill>
                 <a:latin typeface="Calibri"/>
               </a:rPr>
-              <a:t>–   El sistema pide 120 conexiones, mientras que una base de datos gestionada pequena suele admitir del orden de 100; el resultado es que escalar la API tumba la base de datos.</a:t>
+              <a:t>–   Se pueden agregar replicas de lectura, y ahi entra un concepto a definir: el retraso de replicacion, esos milisegundos o segundos en que la replica todavia no tiene el ultimo cambio</a:t>
             </a:r>
           </a:p>
           <a:p>
@@ -5649,7 +5491,7 @@
                 </a:solidFill>
                 <a:latin typeface="Calibri"/>
               </a:rPr>
-              <a:t>–   Multiplicar la capa sin verificar el limite del recurso compartido no mejora el sistema, lo rompe.</a:t>
+              <a:t>–   Que produce el sintoma de que el usuario guarda un dato, la pagina lo relee de una replica y el dato no aparece.</a:t>
             </a:r>
           </a:p>
           <a:p>
@@ -5665,7 +5507,7 @@
                 </a:solidFill>
                 <a:latin typeface="Calibri"/>
               </a:rPr>
-              <a:t>–   Tambien conviene enumerar otras piezas que no escalan por replicacion: los limites de terceros, como un proveedor de correo que acepta 100 envios por minuto y rechaza el exceso</a:t>
+              <a:t>–   Las alternativas mas agresivas, particionar los datos por clave o cambiar a un modelo sin esquema fijo, son decisiones de arquitectura mayores y estan fuera del alcance de CloudLite v1</a:t>
             </a:r>
           </a:p>
           <a:p>
@@ -5681,23 +5523,7 @@
                 </a:solidFill>
                 <a:latin typeface="Calibri"/>
               </a:rPr>
-              <a:t>–   De modo que diez workers no envian diez veces mas rapido sino que generan diez veces mas errores</a:t>
-            </a:r>
-          </a:p>
-          <a:p>
-            <a:pPr>
-              <a:spcAft>
-                <a:spcPts val="800"/>
-              </a:spcAft>
-            </a:pPr>
-            <a:r>
-              <a:rPr sz="2000" b="0" i="0">
-                <a:solidFill>
-                  <a:srgbClr val="333333"/>
-                </a:solidFill>
-                <a:latin typeface="Calibri"/>
-              </a:rPr>
-              <a:t>–   Los sistemas de archivos compartidos; y las tareas programadas de tipo singleton, que si corren en seis instancias hacen el mismo trabajo seis veces y pueden duplicar cobros o correos.</a:t>
+              <a:t>–   Decirlo explicitamente en el informe es una respuesta correcta, no una debilidad.</a:t>
             </a:r>
           </a:p>
         </p:txBody>
@@ -5878,7 +5704,7 @@
                 </a:solidFill>
                 <a:latin typeface="Calibri"/>
               </a:rPr>
-              <a:t>Preguntas frecuentes y cierre conceptual () (1/3)</a:t>
+              <a:t>Lo que NO escala: la mitad del entregable (2/2)</a:t>
             </a:r>
           </a:p>
         </p:txBody>
@@ -5917,7 +5743,7 @@
                 </a:solidFill>
                 <a:latin typeface="Calibri"/>
               </a:rPr>
-              <a:t>–   La primera es por que documentar limites si el autoescalado es automatico; la respuesta es que automatico significa que ejecuta la politica que alguien escribio, no que decide bien: sin maximo escala el costo</a:t>
+              <a:t>–   Hay un detalle aritmetico que es la mejor leccion del dia: si cada instancia de la API abre un pool de 20 conexiones y el autoescalado sube a 6 instancias</a:t>
             </a:r>
           </a:p>
           <a:p>
@@ -5933,7 +5759,7 @@
                 </a:solidFill>
                 <a:latin typeface="Calibri"/>
               </a:rPr>
-              <a:t>–   Sin minimo pierde disponibilidad, con la metrica equivocada no reacciona y con umbrales simetricos oscila; el automatismo amplifica la calidad de la decision humana en ambos sentidos.</a:t>
+              <a:t>–   El sistema pide 120 conexiones, mientras que una base de datos gestionada pequena suele admitir del orden de 100; el resultado es que escalar la API tumba la base de datos.</a:t>
             </a:r>
           </a:p>
           <a:p>
@@ -5949,7 +5775,7 @@
                 </a:solidFill>
                 <a:latin typeface="Calibri"/>
               </a:rPr>
-              <a:t>–   La segunda es si no seria mejor serverless, que "escala infinito"; la respuesta reconoce la ventaja real, que escala por peticion y no cobra en reposo</a:t>
+              <a:t>–   Tambien conviene enumerar otras piezas que no escalan por replicacion: los limites de terceros, como un proveedor de correo que acepta 100 envios por minuto y rechaza el exceso</a:t>
             </a:r>
           </a:p>
           <a:p>
@@ -5965,7 +5791,7 @@
                 </a:solidFill>
                 <a:latin typeface="Calibri"/>
               </a:rPr>
-              <a:t>–   Y nombra los tres costos: el arranque en frio, esa demora extra de cientos de milisegundos a segundos cuando una funcion se invoca despues de estar inactiva; el agotamiento de conexiones</a:t>
+              <a:t>–   De modo que diez workers no envian diez veces mas rapido sino que generan diez veces mas errores</a:t>
             </a:r>
           </a:p>
           <a:p>
@@ -5981,23 +5807,7 @@
                 </a:solidFill>
                 <a:latin typeface="Calibri"/>
               </a:rPr>
-              <a:t>–   Porque mil funciones concurrentes matan a la base de datos igual que mil contenedores; y el costo por invocacion, que a volumen alto puede superar el de instancias fijas.</a:t>
-            </a:r>
-          </a:p>
-          <a:p>
-            <a:pPr>
-              <a:spcAft>
-                <a:spcPts val="800"/>
-              </a:spcAft>
-            </a:pPr>
-            <a:r>
-              <a:rPr sz="2000" b="0" i="0">
-                <a:solidFill>
-                  <a:srgbClr val="333333"/>
-                </a:solidFill>
-                <a:latin typeface="Calibri"/>
-              </a:rPr>
-              <a:t>–   La tercera es cuantas instancias poner, y la respuesta sale de la aritmetica de la Clase 12 y no del gusto: si el pico estimado es de 5 RPS y una instancia sostiene con holgura unos 3 RPS dentro del objetivo de p95, se necesitan 2 con una de margen</a:t>
+              <a:t>–   Los sistemas de archivos compartidos; y las tareas programadas de tipo singleton, que si corren en seis instancias hacen el mismo trabajo seis veces y pueden duplicar cobros o correos.</a:t>
             </a:r>
           </a:p>
         </p:txBody>
@@ -6178,7 +5988,7 @@
                 </a:solidFill>
                 <a:latin typeface="Calibri"/>
               </a:rPr>
-              <a:t>Preguntas frecuentes y cierre conceptual () (2/3)</a:t>
+              <a:t>Preguntas frecuentes y cierre conceptual () (1/4)</a:t>
             </a:r>
           </a:p>
         </p:txBody>
@@ -6217,7 +6027,7 @@
                 </a:solidFill>
                 <a:latin typeface="Calibri"/>
               </a:rPr>
-              <a:t>–   Y el maximo se fija donde el costo mensual deja de ser defendible o donde choca con el limite de conexiones, el que llegue primero.</a:t>
+              <a:t>–   La primera es por que documentar limites si el autoescalado es automatico; la respuesta es que automatico significa que ejecuta la politica que alguien escribio, no que decide bien: sin maximo escala el costo</a:t>
             </a:r>
           </a:p>
           <a:p>
@@ -6233,7 +6043,7 @@
                 </a:solidFill>
                 <a:latin typeface="Calibri"/>
               </a:rPr>
-              <a:t>–   Para verificar el diseno sin gastar un peso alcanza Killercoda con docker compose para levantar dos o tres replicas del stub detras de un balanceador y comprobar que la sesion no se rompe</a:t>
+              <a:t>–   Sin minimo pierde disponibilidad, con la metrica equivocada no reacciona y con umbrales simetricos oscila; el automatismo amplifica la calidad de la decision humana en ambos sentidos.</a:t>
             </a:r>
           </a:p>
           <a:p>
@@ -6249,7 +6059,7 @@
                 </a:solidFill>
                 <a:latin typeface="Calibri"/>
               </a:rPr>
-              <a:t>–   El entregable formal es una nota sobre el diagrama de despliegue y la seccion escrita con estrategia, trigger, limite y lo que no escala, que la Clase 14 evaluara y la Clase 15 exigira sustentar.</a:t>
+              <a:t>–   La segunda es si no seria mejor serverless, que "escala infinito"; la respuesta reconoce la ventaja real, que escala por peticion y no cobra en reposo</a:t>
             </a:r>
           </a:p>
           <a:p>
@@ -6265,55 +6075,7 @@
                 </a:solidFill>
                 <a:latin typeface="Calibri"/>
               </a:rPr>
-              <a:t>–   Error tipico del docente que no domina el tema: presentar el autoescalado como solucion general a los problemas de rendimiento.</a:t>
-            </a:r>
-          </a:p>
-          <a:p>
-            <a:pPr>
-              <a:spcAft>
-                <a:spcPts val="800"/>
-              </a:spcAft>
-            </a:pPr>
-            <a:r>
-              <a:rPr sz="2000" b="0" i="0">
-                <a:solidFill>
-                  <a:srgbClr val="333333"/>
-                </a:solidFill>
-                <a:latin typeface="Calibri"/>
-              </a:rPr>
-              <a:t>–   Si no se identifico primero el cuello de botella, escalar la pieza equivocada no mejora nada y sube el costo</a:t>
-            </a:r>
-          </a:p>
-          <a:p>
-            <a:pPr>
-              <a:spcAft>
-                <a:spcPts val="800"/>
-              </a:spcAft>
-            </a:pPr>
-            <a:r>
-              <a:rPr sz="2000" b="0" i="0">
-                <a:solidFill>
-                  <a:srgbClr val="333333"/>
-                </a:solidFill>
-                <a:latin typeface="Calibri"/>
-              </a:rPr>
-              <a:t>–   El caso mas ilustrativo es la API limitada por la base de datos, donde agregar instancias empeora la situacion porque suma presion sobre el recurso ya saturado.</a:t>
-            </a:r>
-          </a:p>
-          <a:p>
-            <a:pPr>
-              <a:spcAft>
-                <a:spcPts val="800"/>
-              </a:spcAft>
-            </a:pPr>
-            <a:r>
-              <a:rPr sz="2000" b="0" i="0">
-                <a:solidFill>
-                  <a:srgbClr val="333333"/>
-                </a:solidFill>
-                <a:latin typeface="Calibri"/>
-              </a:rPr>
-              <a:t>–   La consecuencia pedagogica es que el estudiante sale creyendo que la escalabilidad se compra con configuracion, y en el Parcial 3 responde con la definicion de vertical y horizontal sin poder decidir cual aplica a un caso.</a:t>
+              <a:t>–   Y nombra los tres costos: el arranque en frio, esa demora extra de cientos de milisegundos a segundos cuando una funcion se invoca despues de estar inactiva; el agotamiento de conexiones</a:t>
             </a:r>
           </a:p>
         </p:txBody>
@@ -6841,7 +6603,7 @@
                 </a:solidFill>
                 <a:latin typeface="Calibri"/>
               </a:rPr>
-              <a:t>Preguntas frecuentes y cierre conceptual () (3/3)</a:t>
+              <a:t>Preguntas frecuentes y cierre conceptual () (2/4)</a:t>
             </a:r>
           </a:p>
         </p:txBody>
@@ -6880,7 +6642,7 @@
                 </a:solidFill>
                 <a:latin typeface="Calibri"/>
               </a:rPr>
-              <a:t>–   El segundo error es celebrar el escalado horizontal como si fuera gratis: presentarlo solo como "agregar instancias" sin exigir la revision del estado en memoria, ni el limite de conexiones, ni la capa de datos.</a:t>
+              <a:t>–   Porque mil funciones concurrentes matan a la base de datos igual que mil contenedores; y el costo por invocacion, que a volumen alto puede superar el de instancias fijas.</a:t>
             </a:r>
           </a:p>
           <a:p>
@@ -6896,7 +6658,7 @@
                 </a:solidFill>
                 <a:latin typeface="Calibri"/>
               </a:rPr>
-              <a:t>–   Si eso se deja pasar, el entregable llega con la seccion de "que no escala" vacia o rellenada con una frase generica</a:t>
+              <a:t>–   La tercera es cuantas instancias poner, y la respuesta sale de la aritmetica de la Clase 12 y no del gusto: si el pico estimado es de 5 RPS y una instancia sostiene con holgura unos 3 RPS dentro del objetivo de p95, se necesitan 2 con una de margen</a:t>
             </a:r>
           </a:p>
           <a:p>
@@ -6912,7 +6674,7 @@
                 </a:solidFill>
                 <a:latin typeface="Calibri"/>
               </a:rPr>
-              <a:t>–   Y en la Clase 15 el estudiante afirma que su sistema soporta cualquier crecimiento mientras el diagrama muestra una unica base de datos con la sesion guardada en memoria</a:t>
+              <a:t>–   Y el maximo se fija donde el costo mensual deja de ser defendible o donde choca con el limite de conexiones, el que llegue primero.</a:t>
             </a:r>
           </a:p>
           <a:p>
@@ -6928,7 +6690,7 @@
                 </a:solidFill>
                 <a:latin typeface="Calibri"/>
               </a:rPr>
-              <a:t>–   Que es la contradiccion mas facil de detectar y la mas costosa de explicar en ese momento.</a:t>
+              <a:t>–   Para verificar el diseno sin gastar un peso alcanza Killercoda con docker compose para levantar dos o tres replicas del stub detras de un balanceador y comprobar que la sesion no se rompe</a:t>
             </a:r>
           </a:p>
         </p:txBody>
@@ -7109,141 +6871,21 @@
                 </a:solidFill>
                 <a:latin typeface="Calibri"/>
               </a:rPr>
-              <a:t>Politica de autoescalado (tabla, no prosa)</a:t>
-            </a:r>
-          </a:p>
-        </p:txBody>
-      </p:sp>
-      <p:sp>
-        <p:nvSpPr>
-          <p:cNvPr id="5" name="Rounded Rectangle 4"/>
-          <p:cNvSpPr/>
-          <p:nvPr/>
-        </p:nvSpPr>
-        <p:spPr>
-          <a:xfrm>
-            <a:off x="457200" y="1261872"/>
-            <a:ext cx="11277295" cy="4773168"/>
-          </a:xfrm>
-          <a:prstGeom prst="roundRect">
-            <a:avLst>
-              <a:gd name="adj" fmla="val 12000"/>
-            </a:avLst>
-          </a:prstGeom>
-          <a:solidFill>
-            <a:srgbClr val="1E2A38"/>
-          </a:solidFill>
-          <a:ln>
-            <a:noFill/>
-          </a:ln>
-        </p:spPr>
-        <p:style>
-          <a:lnRef idx="1">
-            <a:schemeClr val="accent1"/>
-          </a:lnRef>
-          <a:fillRef idx="3">
-            <a:schemeClr val="accent1"/>
-          </a:fillRef>
-          <a:effectRef idx="2">
-            <a:schemeClr val="accent1"/>
-          </a:effectRef>
-          <a:fontRef idx="minor">
-            <a:schemeClr val="lt1"/>
-          </a:fontRef>
-        </p:style>
-        <p:txBody>
-          <a:bodyPr rtlCol="0" anchor="ctr"/>
-          <a:lstStyle/>
-          <a:p>
-            <a:pPr algn="ctr"/>
-          </a:p>
-        </p:txBody>
-      </p:sp>
-      <p:sp>
-        <p:nvSpPr>
-          <p:cNvPr id="6" name="Rectangle 5"/>
-          <p:cNvSpPr/>
-          <p:nvPr/>
-        </p:nvSpPr>
-        <p:spPr>
-          <a:xfrm>
-            <a:off x="457200" y="1261872"/>
-            <a:ext cx="11277295" cy="320040"/>
-          </a:xfrm>
-          <a:prstGeom prst="rect">
-            <a:avLst/>
-          </a:prstGeom>
-          <a:solidFill>
-            <a:srgbClr val="095292"/>
-          </a:solidFill>
-          <a:ln>
-            <a:noFill/>
-          </a:ln>
-        </p:spPr>
-        <p:style>
-          <a:lnRef idx="1">
-            <a:schemeClr val="accent1"/>
-          </a:lnRef>
-          <a:fillRef idx="3">
-            <a:schemeClr val="accent1"/>
-          </a:fillRef>
-          <a:effectRef idx="2">
-            <a:schemeClr val="accent1"/>
-          </a:effectRef>
-          <a:fontRef idx="minor">
-            <a:schemeClr val="lt1"/>
-          </a:fontRef>
-        </p:style>
-        <p:txBody>
-          <a:bodyPr rtlCol="0" anchor="ctr"/>
-          <a:lstStyle/>
-          <a:p>
-            <a:pPr algn="ctr"/>
-          </a:p>
-        </p:txBody>
-      </p:sp>
-      <p:sp>
-        <p:nvSpPr>
-          <p:cNvPr id="7" name="TextBox 6"/>
+              <a:t>Preguntas frecuentes y cierre conceptual () (3/4)</a:t>
+            </a:r>
+          </a:p>
+        </p:txBody>
+      </p:sp>
+      <p:sp>
+        <p:nvSpPr>
+          <p:cNvPr id="5" name="TextBox 4"/>
           <p:cNvSpPr txBox="1"/>
           <p:nvPr/>
         </p:nvSpPr>
         <p:spPr>
           <a:xfrm>
-            <a:off x="685800" y="1307592"/>
-            <a:ext cx="10820095" cy="256032"/>
-          </a:xfrm>
-          <a:prstGeom prst="rect">
-            <a:avLst/>
-          </a:prstGeom>
-          <a:noFill/>
-        </p:spPr>
-        <p:txBody>
-          <a:bodyPr wrap="square" anchor="ctr"/>
-          <a:lstStyle/>
-          <a:p>
-            <a:r>
-              <a:rPr sz="1000" b="1" i="0">
-                <a:solidFill>
-                  <a:srgbClr val="269CCB"/>
-                </a:solidFill>
-                <a:latin typeface="Calibri"/>
-              </a:rPr>
-              <a:t>● ● ●</a:t>
-            </a:r>
-          </a:p>
-        </p:txBody>
-      </p:sp>
-      <p:sp>
-        <p:nvSpPr>
-          <p:cNvPr id="8" name="TextBox 7"/>
-          <p:cNvSpPr txBox="1"/>
-          <p:nvPr/>
-        </p:nvSpPr>
-        <p:spPr>
-          <a:xfrm>
-            <a:off x="777240" y="1719072"/>
-            <a:ext cx="10637215" cy="4133087"/>
+            <a:off x="457200" y="1170432"/>
+            <a:ext cx="11277295" cy="5230368"/>
           </a:xfrm>
           <a:prstGeom prst="rect">
             <a:avLst/>
@@ -7258,123 +6900,88 @@
           <a:p>
             <a:pPr>
               <a:spcAft>
-                <a:spcPts val="400"/>
+                <a:spcPts val="800"/>
               </a:spcAft>
             </a:pPr>
             <a:r>
-              <a:rPr sz="1400" b="0" i="0">
-                <a:solidFill>
-                  <a:srgbClr val="FFFFFF"/>
-                </a:solidFill>
-                <a:latin typeface="Calibri"/>
-              </a:rPr>
-              <a:t>Componente   | Tipo        | Trigger up      | Min | Max | Cooldown</a:t>
+              <a:rPr sz="2000" b="0" i="0">
+                <a:solidFill>
+                  <a:srgbClr val="333333"/>
+                </a:solidFill>
+                <a:latin typeface="Calibri"/>
+              </a:rPr>
+              <a:t>–   El entregable formal es una nota sobre el diagrama de despliegue y la seccion escrita con estrategia, trigger, limite y lo que no escala, que la Clase 14 evaluara y la Clase 15 exigira sustentar.</a:t>
             </a:r>
           </a:p>
           <a:p>
             <a:pPr>
               <a:spcAft>
-                <a:spcPts val="400"/>
+                <a:spcPts val="800"/>
               </a:spcAft>
             </a:pPr>
             <a:r>
-              <a:rPr sz="1400" b="0" i="0">
-                <a:solidFill>
-                  <a:srgbClr val="FFFFFF"/>
-                </a:solidFill>
-                <a:latin typeface="Calibri"/>
-              </a:rPr>
-              <a:t>-------------|-------------|-----------------|-----|-----|---------</a:t>
+              <a:rPr sz="2000" b="0" i="0">
+                <a:solidFill>
+                  <a:srgbClr val="333333"/>
+                </a:solidFill>
+                <a:latin typeface="Calibri"/>
+              </a:rPr>
+              <a:t>–   Error tipico del docente que no domina el tema: presentar el autoescalado como solucion general a los problemas de rendimiento.</a:t>
             </a:r>
           </a:p>
           <a:p>
             <a:pPr>
               <a:spcAft>
-                <a:spcPts val="400"/>
+                <a:spcPts val="800"/>
               </a:spcAft>
             </a:pPr>
             <a:r>
-              <a:rPr sz="1400" b="0" i="0">
-                <a:solidFill>
-                  <a:srgbClr val="FFFFFF"/>
-                </a:solidFill>
-                <a:latin typeface="Calibri"/>
-              </a:rPr>
-              <a:t>API          | Horizontal  | CPU &gt; 70% / 5m  |  2  |  6  | 5 min</a:t>
+              <a:rPr sz="2000" b="0" i="0">
+                <a:solidFill>
+                  <a:srgbClr val="333333"/>
+                </a:solidFill>
+                <a:latin typeface="Calibri"/>
+              </a:rPr>
+              <a:t>–   Si no se identifico primero el cuello de botella, escalar la pieza equivocada no mejora nada y sube el costo</a:t>
             </a:r>
           </a:p>
           <a:p>
             <a:pPr>
               <a:spcAft>
-                <a:spcPts val="400"/>
+                <a:spcPts val="800"/>
               </a:spcAft>
             </a:pPr>
             <a:r>
-              <a:rPr sz="1400" b="0" i="0">
-                <a:solidFill>
-                  <a:srgbClr val="FFFFFF"/>
-                </a:solidFill>
-                <a:latin typeface="Calibri"/>
-              </a:rPr>
-              <a:t>Worker cola  | Horizontal  | cola &gt; 100 msg  |  1  |  4  | 3 min</a:t>
+              <a:rPr sz="2000" b="0" i="0">
+                <a:solidFill>
+                  <a:srgbClr val="333333"/>
+                </a:solidFill>
+                <a:latin typeface="Calibri"/>
+              </a:rPr>
+              <a:t>–   El caso mas ilustrativo es la API limitada por la base de datos, donde agregar instancias empeora la situacion porque suma presion sobre el recurso ya saturado.</a:t>
             </a:r>
           </a:p>
           <a:p>
             <a:pPr>
               <a:spcAft>
-                <a:spcPts val="400"/>
+                <a:spcPts val="800"/>
               </a:spcAft>
             </a:pPr>
             <a:r>
-              <a:rPr sz="1400" b="0" i="0">
-                <a:solidFill>
-                  <a:srgbClr val="FFFFFF"/>
-                </a:solidFill>
-                <a:latin typeface="Calibri"/>
-              </a:rPr>
-              <a:t>BD primaria  | NO escala   | -               |  1  |  1  | -</a:t>
-            </a:r>
-          </a:p>
-        </p:txBody>
-      </p:sp>
-      <p:sp>
-        <p:nvSpPr>
-          <p:cNvPr id="9" name="TextBox 8"/>
-          <p:cNvSpPr txBox="1"/>
-          <p:nvPr/>
-        </p:nvSpPr>
-        <p:spPr>
-          <a:xfrm>
-            <a:off x="457200" y="6080760"/>
-            <a:ext cx="11277295" cy="320040"/>
-          </a:xfrm>
-          <a:prstGeom prst="rect">
-            <a:avLst/>
-          </a:prstGeom>
-          <a:noFill/>
-        </p:spPr>
-        <p:txBody>
-          <a:bodyPr wrap="square">
-            <a:spAutoFit/>
-          </a:bodyPr>
-          <a:lstStyle/>
-          <a:p>
-            <a:pPr algn="ctr"/>
-            <a:r>
-              <a:rPr sz="1200" b="0" i="1">
-                <a:solidFill>
-                  <a:srgbClr val="666666"/>
-                </a:solidFill>
-                <a:latin typeface="Calibri"/>
-              </a:rPr>
-              <a:t>El 'max' es lo que evita que la factura escale sola. La BD primaria casi nunca escala horizontal.</a:t>
-            </a:r>
-          </a:p>
-        </p:txBody>
-      </p:sp>
-      <p:sp>
-        <p:nvSpPr>
-          <p:cNvPr id="10" name="TextBox 9"/>
+              <a:rPr sz="2000" b="0" i="0">
+                <a:solidFill>
+                  <a:srgbClr val="333333"/>
+                </a:solidFill>
+                <a:latin typeface="Calibri"/>
+              </a:rPr>
+              <a:t>–   La consecuencia pedagogica es que el estudiante sale creyendo que la escalabilidad se compra con configuracion, y en el Parcial 3 responde con la definicion de vertical y horizontal sin poder decidir cual aplica a un caso.</a:t>
+            </a:r>
+          </a:p>
+        </p:txBody>
+      </p:sp>
+      <p:sp>
+        <p:nvSpPr>
+          <p:cNvPr id="6" name="TextBox 5"/>
           <p:cNvSpPr txBox="1"/>
           <p:nvPr/>
         </p:nvSpPr>
@@ -7442,7 +7049,7 @@
         <p:spPr>
           <a:xfrm>
             <a:off x="0" y="0"/>
-            <a:ext cx="12191695" cy="1170432"/>
+            <a:ext cx="12191695" cy="960120"/>
           </a:xfrm>
           <a:prstGeom prst="rect">
             <a:avLst/>
@@ -7484,7 +7091,7 @@
         </p:nvSpPr>
         <p:spPr>
           <a:xfrm>
-            <a:off x="0" y="1170432"/>
+            <a:off x="0" y="960120"/>
             <a:ext cx="12191695" cy="41148"/>
           </a:xfrm>
           <a:prstGeom prst="rect">
@@ -7528,7 +7135,7 @@
         <p:spPr>
           <a:xfrm>
             <a:off x="457200" y="164592"/>
-            <a:ext cx="11277295" cy="384048"/>
+            <a:ext cx="11277295" cy="502920"/>
           </a:xfrm>
           <a:prstGeom prst="rect">
             <a:avLst/>
@@ -7548,7 +7155,7 @@
                 </a:solidFill>
                 <a:latin typeface="Calibri"/>
               </a:rPr>
-              <a:t>Herramientas de hoy</a:t>
+              <a:t>Preguntas frecuentes y cierre conceptual () (4/4)</a:t>
             </a:r>
           </a:p>
         </p:txBody>
@@ -7561,8 +7168,8 @@
         </p:nvSpPr>
         <p:spPr>
           <a:xfrm>
-            <a:off x="457200" y="566928"/>
-            <a:ext cx="11277295" cy="411480"/>
+            <a:off x="457200" y="1170432"/>
+            <a:ext cx="11277295" cy="5230368"/>
           </a:xfrm>
           <a:prstGeom prst="rect">
             <a:avLst/>
@@ -7575,837 +7182,74 @@
           </a:bodyPr>
           <a:lstStyle/>
           <a:p>
-            <a:r>
-              <a:rPr sz="1400" b="0" i="0">
-                <a:solidFill>
-                  <a:srgbClr val="B8D8EE"/>
-                </a:solidFill>
-                <a:latin typeface="Calibri"/>
-              </a:rPr>
-              <a:t>Gratis · navegador o free tier · sin cuenta de pago</a:t>
-            </a:r>
-          </a:p>
-        </p:txBody>
-      </p:sp>
-      <p:sp>
-        <p:nvSpPr>
-          <p:cNvPr id="6" name="Rounded Rectangle 5"/>
-          <p:cNvSpPr/>
-          <p:nvPr/>
-        </p:nvSpPr>
-        <p:spPr>
-          <a:xfrm>
-            <a:off x="457200" y="1591056"/>
-            <a:ext cx="3624986" cy="2299716"/>
-          </a:xfrm>
-          <a:prstGeom prst="roundRect">
-            <a:avLst>
-              <a:gd name="adj" fmla="val 12000"/>
-            </a:avLst>
-          </a:prstGeom>
-          <a:solidFill>
-            <a:srgbClr val="F2F2F2"/>
-          </a:solidFill>
-          <a:ln>
-            <a:noFill/>
-          </a:ln>
-        </p:spPr>
-        <p:style>
-          <a:lnRef idx="1">
-            <a:schemeClr val="accent1"/>
-          </a:lnRef>
-          <a:fillRef idx="3">
-            <a:schemeClr val="accent1"/>
-          </a:fillRef>
-          <a:effectRef idx="2">
-            <a:schemeClr val="accent1"/>
-          </a:effectRef>
-          <a:fontRef idx="minor">
-            <a:schemeClr val="lt1"/>
-          </a:fontRef>
-        </p:style>
-        <p:txBody>
-          <a:bodyPr rtlCol="0" anchor="ctr"/>
-          <a:lstStyle/>
-          <a:p>
-            <a:pPr algn="ctr"/>
-          </a:p>
-        </p:txBody>
-      </p:sp>
-      <p:sp>
-        <p:nvSpPr>
-          <p:cNvPr id="7" name="Rectangle 6"/>
-          <p:cNvSpPr/>
-          <p:nvPr/>
-        </p:nvSpPr>
-        <p:spPr>
-          <a:xfrm>
-            <a:off x="457200" y="1591056"/>
-            <a:ext cx="3624986" cy="64008"/>
-          </a:xfrm>
-          <a:prstGeom prst="rect">
-            <a:avLst/>
-          </a:prstGeom>
-          <a:solidFill>
-            <a:srgbClr val="095292"/>
-          </a:solidFill>
-          <a:ln>
-            <a:noFill/>
-          </a:ln>
-        </p:spPr>
-        <p:style>
-          <a:lnRef idx="1">
-            <a:schemeClr val="accent1"/>
-          </a:lnRef>
-          <a:fillRef idx="3">
-            <a:schemeClr val="accent1"/>
-          </a:fillRef>
-          <a:effectRef idx="2">
-            <a:schemeClr val="accent1"/>
-          </a:effectRef>
-          <a:fontRef idx="minor">
-            <a:schemeClr val="lt1"/>
-          </a:fontRef>
-        </p:style>
-        <p:txBody>
-          <a:bodyPr rtlCol="0" anchor="ctr"/>
-          <a:lstStyle/>
-          <a:p>
-            <a:pPr algn="ctr"/>
-          </a:p>
-        </p:txBody>
-      </p:sp>
-      <p:sp>
-        <p:nvSpPr>
-          <p:cNvPr id="8" name="Rectangle 7"/>
-          <p:cNvSpPr/>
-          <p:nvPr/>
-        </p:nvSpPr>
-        <p:spPr>
-          <a:xfrm>
-            <a:off x="457200" y="1655064"/>
-            <a:ext cx="3624986" cy="27432"/>
-          </a:xfrm>
-          <a:prstGeom prst="rect">
-            <a:avLst/>
-          </a:prstGeom>
-          <a:solidFill>
-            <a:srgbClr val="FFD000"/>
-          </a:solidFill>
-          <a:ln>
-            <a:noFill/>
-          </a:ln>
-        </p:spPr>
-        <p:style>
-          <a:lnRef idx="1">
-            <a:schemeClr val="accent1"/>
-          </a:lnRef>
-          <a:fillRef idx="3">
-            <a:schemeClr val="accent1"/>
-          </a:fillRef>
-          <a:effectRef idx="2">
-            <a:schemeClr val="accent1"/>
-          </a:effectRef>
-          <a:fontRef idx="minor">
-            <a:schemeClr val="lt1"/>
-          </a:fontRef>
-        </p:style>
-        <p:txBody>
-          <a:bodyPr rtlCol="0" anchor="ctr"/>
-          <a:lstStyle/>
-          <a:p>
-            <a:pPr algn="ctr"/>
-          </a:p>
-        </p:txBody>
-      </p:sp>
-      <p:pic>
-        <p:nvPicPr>
-          <p:cNvPr id="9" name="Picture 8" descr="google_docs.png"/>
-          <p:cNvPicPr>
-            <a:picLocks noChangeAspect="1"/>
-          </p:cNvPicPr>
-          <p:nvPr/>
-        </p:nvPicPr>
-        <p:blipFill>
-          <a:blip r:embed="rId2"/>
-          <a:stretch>
-            <a:fillRect/>
-          </a:stretch>
-        </p:blipFill>
-        <p:spPr>
-          <a:xfrm>
-            <a:off x="1659331" y="1847087"/>
-            <a:ext cx="1220724" cy="1220724"/>
-          </a:xfrm>
-          <a:prstGeom prst="rect">
-            <a:avLst/>
-          </a:prstGeom>
-        </p:spPr>
-      </p:pic>
-      <p:sp>
-        <p:nvSpPr>
-          <p:cNvPr id="10" name="TextBox 9"/>
-          <p:cNvSpPr txBox="1"/>
-          <p:nvPr/>
-        </p:nvSpPr>
-        <p:spPr>
-          <a:xfrm>
-            <a:off x="530352" y="3159251"/>
-            <a:ext cx="3478682" cy="621792"/>
-          </a:xfrm>
-          <a:prstGeom prst="rect">
-            <a:avLst/>
-          </a:prstGeom>
-          <a:noFill/>
-        </p:spPr>
-        <p:txBody>
-          <a:bodyPr wrap="square" anchor="t"/>
-          <a:lstStyle/>
-          <a:p>
-            <a:pPr algn="ctr"/>
-            <a:r>
-              <a:rPr sz="1300" b="1" i="0">
-                <a:solidFill>
-                  <a:srgbClr val="095292"/>
-                </a:solidFill>
-                <a:latin typeface="Calibri"/>
-              </a:rPr>
-              <a:t>Google Docs</a:t>
-            </a:r>
-          </a:p>
-          <a:p>
-            <a:pPr algn="ctr">
-              <a:spcBef>
-                <a:spcPts val="200"/>
-              </a:spcBef>
+            <a:pPr>
+              <a:spcAft>
+                <a:spcPts val="800"/>
+              </a:spcAft>
             </a:pPr>
             <a:r>
-              <a:rPr sz="1000" b="0" i="0">
-                <a:solidFill>
-                  <a:srgbClr val="666666"/>
-                </a:solidFill>
-                <a:latin typeface="Calibri"/>
-              </a:rPr>
-              <a:t>Politica de escalado</a:t>
-            </a:r>
-          </a:p>
-        </p:txBody>
-      </p:sp>
-      <p:sp>
-        <p:nvSpPr>
-          <p:cNvPr id="11" name="Rounded Rectangle 10"/>
-          <p:cNvSpPr/>
-          <p:nvPr/>
-        </p:nvSpPr>
-        <p:spPr>
-          <a:xfrm>
-            <a:off x="4283354" y="1591056"/>
-            <a:ext cx="3624986" cy="2299716"/>
-          </a:xfrm>
-          <a:prstGeom prst="roundRect">
-            <a:avLst>
-              <a:gd name="adj" fmla="val 12000"/>
-            </a:avLst>
-          </a:prstGeom>
-          <a:solidFill>
-            <a:srgbClr val="F2F2F2"/>
-          </a:solidFill>
-          <a:ln>
-            <a:noFill/>
-          </a:ln>
-        </p:spPr>
-        <p:style>
-          <a:lnRef idx="1">
-            <a:schemeClr val="accent1"/>
-          </a:lnRef>
-          <a:fillRef idx="3">
-            <a:schemeClr val="accent1"/>
-          </a:fillRef>
-          <a:effectRef idx="2">
-            <a:schemeClr val="accent1"/>
-          </a:effectRef>
-          <a:fontRef idx="minor">
-            <a:schemeClr val="lt1"/>
-          </a:fontRef>
-        </p:style>
-        <p:txBody>
-          <a:bodyPr rtlCol="0" anchor="ctr"/>
-          <a:lstStyle/>
-          <a:p>
-            <a:pPr algn="ctr"/>
-          </a:p>
-        </p:txBody>
-      </p:sp>
-      <p:sp>
-        <p:nvSpPr>
-          <p:cNvPr id="12" name="Rectangle 11"/>
-          <p:cNvSpPr/>
-          <p:nvPr/>
-        </p:nvSpPr>
-        <p:spPr>
-          <a:xfrm>
-            <a:off x="4283354" y="1591056"/>
-            <a:ext cx="3624986" cy="64008"/>
-          </a:xfrm>
-          <a:prstGeom prst="rect">
-            <a:avLst/>
-          </a:prstGeom>
-          <a:solidFill>
-            <a:srgbClr val="095292"/>
-          </a:solidFill>
-          <a:ln>
-            <a:noFill/>
-          </a:ln>
-        </p:spPr>
-        <p:style>
-          <a:lnRef idx="1">
-            <a:schemeClr val="accent1"/>
-          </a:lnRef>
-          <a:fillRef idx="3">
-            <a:schemeClr val="accent1"/>
-          </a:fillRef>
-          <a:effectRef idx="2">
-            <a:schemeClr val="accent1"/>
-          </a:effectRef>
-          <a:fontRef idx="minor">
-            <a:schemeClr val="lt1"/>
-          </a:fontRef>
-        </p:style>
-        <p:txBody>
-          <a:bodyPr rtlCol="0" anchor="ctr"/>
-          <a:lstStyle/>
-          <a:p>
-            <a:pPr algn="ctr"/>
-          </a:p>
-        </p:txBody>
-      </p:sp>
-      <p:sp>
-        <p:nvSpPr>
-          <p:cNvPr id="13" name="Rectangle 12"/>
-          <p:cNvSpPr/>
-          <p:nvPr/>
-        </p:nvSpPr>
-        <p:spPr>
-          <a:xfrm>
-            <a:off x="4283354" y="1655064"/>
-            <a:ext cx="3624986" cy="27432"/>
-          </a:xfrm>
-          <a:prstGeom prst="rect">
-            <a:avLst/>
-          </a:prstGeom>
-          <a:solidFill>
-            <a:srgbClr val="FFD000"/>
-          </a:solidFill>
-          <a:ln>
-            <a:noFill/>
-          </a:ln>
-        </p:spPr>
-        <p:style>
-          <a:lnRef idx="1">
-            <a:schemeClr val="accent1"/>
-          </a:lnRef>
-          <a:fillRef idx="3">
-            <a:schemeClr val="accent1"/>
-          </a:fillRef>
-          <a:effectRef idx="2">
-            <a:schemeClr val="accent1"/>
-          </a:effectRef>
-          <a:fontRef idx="minor">
-            <a:schemeClr val="lt1"/>
-          </a:fontRef>
-        </p:style>
-        <p:txBody>
-          <a:bodyPr rtlCol="0" anchor="ctr"/>
-          <a:lstStyle/>
-          <a:p>
-            <a:pPr algn="ctr"/>
-          </a:p>
-        </p:txBody>
-      </p:sp>
-      <p:pic>
-        <p:nvPicPr>
-          <p:cNvPr id="14" name="Picture 13" descr="drawio.png"/>
-          <p:cNvPicPr>
-            <a:picLocks noChangeAspect="1"/>
-          </p:cNvPicPr>
-          <p:nvPr/>
-        </p:nvPicPr>
-        <p:blipFill>
-          <a:blip r:embed="rId3"/>
-          <a:stretch>
-            <a:fillRect/>
-          </a:stretch>
-        </p:blipFill>
-        <p:spPr>
-          <a:xfrm>
-            <a:off x="5485485" y="1847087"/>
-            <a:ext cx="1220724" cy="1220724"/>
-          </a:xfrm>
-          <a:prstGeom prst="rect">
-            <a:avLst/>
-          </a:prstGeom>
-        </p:spPr>
-      </p:pic>
-      <p:sp>
-        <p:nvSpPr>
-          <p:cNvPr id="15" name="TextBox 14"/>
-          <p:cNvSpPr txBox="1"/>
-          <p:nvPr/>
-        </p:nvSpPr>
-        <p:spPr>
-          <a:xfrm>
-            <a:off x="4356506" y="3159251"/>
-            <a:ext cx="3478682" cy="621792"/>
-          </a:xfrm>
-          <a:prstGeom prst="rect">
-            <a:avLst/>
-          </a:prstGeom>
-          <a:noFill/>
-        </p:spPr>
-        <p:txBody>
-          <a:bodyPr wrap="square" anchor="t"/>
-          <a:lstStyle/>
-          <a:p>
-            <a:pPr algn="ctr"/>
-            <a:r>
-              <a:rPr sz="1300" b="1" i="0">
-                <a:solidFill>
-                  <a:srgbClr val="095292"/>
-                </a:solidFill>
-                <a:latin typeface="Calibri"/>
-              </a:rPr>
-              <a:t>draw.io</a:t>
-            </a:r>
-          </a:p>
-          <a:p>
-            <a:pPr algn="ctr">
-              <a:spcBef>
-                <a:spcPts val="200"/>
-              </a:spcBef>
+              <a:rPr sz="2000" b="0" i="0">
+                <a:solidFill>
+                  <a:srgbClr val="333333"/>
+                </a:solidFill>
+                <a:latin typeface="Calibri"/>
+              </a:rPr>
+              <a:t>–   El segundo error es celebrar el escalado horizontal como si fuera gratis: presentarlo solo como "agregar instancias" sin exigir la revision del estado en memoria, ni el limite de conexiones, ni la capa de datos.</a:t>
+            </a:r>
+          </a:p>
+          <a:p>
+            <a:pPr>
+              <a:spcAft>
+                <a:spcPts val="800"/>
+              </a:spcAft>
             </a:pPr>
             <a:r>
-              <a:rPr sz="1000" b="0" i="0">
-                <a:solidFill>
-                  <a:srgbClr val="666666"/>
-                </a:solidFill>
-                <a:latin typeface="Calibri"/>
-              </a:rPr>
-              <a:t>Nota en Deployment</a:t>
-            </a:r>
-          </a:p>
-        </p:txBody>
-      </p:sp>
-      <p:sp>
-        <p:nvSpPr>
-          <p:cNvPr id="16" name="Rounded Rectangle 15"/>
-          <p:cNvSpPr/>
-          <p:nvPr/>
-        </p:nvSpPr>
-        <p:spPr>
-          <a:xfrm>
-            <a:off x="8109508" y="1591056"/>
-            <a:ext cx="3624986" cy="2299716"/>
-          </a:xfrm>
-          <a:prstGeom prst="roundRect">
-            <a:avLst>
-              <a:gd name="adj" fmla="val 12000"/>
-            </a:avLst>
-          </a:prstGeom>
-          <a:solidFill>
-            <a:srgbClr val="F2F2F2"/>
-          </a:solidFill>
-          <a:ln>
-            <a:noFill/>
-          </a:ln>
-        </p:spPr>
-        <p:style>
-          <a:lnRef idx="1">
-            <a:schemeClr val="accent1"/>
-          </a:lnRef>
-          <a:fillRef idx="3">
-            <a:schemeClr val="accent1"/>
-          </a:fillRef>
-          <a:effectRef idx="2">
-            <a:schemeClr val="accent1"/>
-          </a:effectRef>
-          <a:fontRef idx="minor">
-            <a:schemeClr val="lt1"/>
-          </a:fontRef>
-        </p:style>
-        <p:txBody>
-          <a:bodyPr rtlCol="0" anchor="ctr"/>
-          <a:lstStyle/>
-          <a:p>
-            <a:pPr algn="ctr"/>
-          </a:p>
-        </p:txBody>
-      </p:sp>
-      <p:sp>
-        <p:nvSpPr>
-          <p:cNvPr id="17" name="Rectangle 16"/>
-          <p:cNvSpPr/>
-          <p:nvPr/>
-        </p:nvSpPr>
-        <p:spPr>
-          <a:xfrm>
-            <a:off x="8109508" y="1591056"/>
-            <a:ext cx="3624986" cy="64008"/>
-          </a:xfrm>
-          <a:prstGeom prst="rect">
-            <a:avLst/>
-          </a:prstGeom>
-          <a:solidFill>
-            <a:srgbClr val="095292"/>
-          </a:solidFill>
-          <a:ln>
-            <a:noFill/>
-          </a:ln>
-        </p:spPr>
-        <p:style>
-          <a:lnRef idx="1">
-            <a:schemeClr val="accent1"/>
-          </a:lnRef>
-          <a:fillRef idx="3">
-            <a:schemeClr val="accent1"/>
-          </a:fillRef>
-          <a:effectRef idx="2">
-            <a:schemeClr val="accent1"/>
-          </a:effectRef>
-          <a:fontRef idx="minor">
-            <a:schemeClr val="lt1"/>
-          </a:fontRef>
-        </p:style>
-        <p:txBody>
-          <a:bodyPr rtlCol="0" anchor="ctr"/>
-          <a:lstStyle/>
-          <a:p>
-            <a:pPr algn="ctr"/>
-          </a:p>
-        </p:txBody>
-      </p:sp>
-      <p:sp>
-        <p:nvSpPr>
-          <p:cNvPr id="18" name="Rectangle 17"/>
-          <p:cNvSpPr/>
-          <p:nvPr/>
-        </p:nvSpPr>
-        <p:spPr>
-          <a:xfrm>
-            <a:off x="8109508" y="1655064"/>
-            <a:ext cx="3624986" cy="27432"/>
-          </a:xfrm>
-          <a:prstGeom prst="rect">
-            <a:avLst/>
-          </a:prstGeom>
-          <a:solidFill>
-            <a:srgbClr val="FFD000"/>
-          </a:solidFill>
-          <a:ln>
-            <a:noFill/>
-          </a:ln>
-        </p:spPr>
-        <p:style>
-          <a:lnRef idx="1">
-            <a:schemeClr val="accent1"/>
-          </a:lnRef>
-          <a:fillRef idx="3">
-            <a:schemeClr val="accent1"/>
-          </a:fillRef>
-          <a:effectRef idx="2">
-            <a:schemeClr val="accent1"/>
-          </a:effectRef>
-          <a:fontRef idx="minor">
-            <a:schemeClr val="lt1"/>
-          </a:fontRef>
-        </p:style>
-        <p:txBody>
-          <a:bodyPr rtlCol="0" anchor="ctr"/>
-          <a:lstStyle/>
-          <a:p>
-            <a:pPr algn="ctr"/>
-          </a:p>
-        </p:txBody>
-      </p:sp>
-      <p:pic>
-        <p:nvPicPr>
-          <p:cNvPr id="19" name="Picture 18" descr="mermaid.png"/>
-          <p:cNvPicPr>
-            <a:picLocks noChangeAspect="1"/>
-          </p:cNvPicPr>
-          <p:nvPr/>
-        </p:nvPicPr>
-        <p:blipFill>
-          <a:blip r:embed="rId4"/>
-          <a:stretch>
-            <a:fillRect/>
-          </a:stretch>
-        </p:blipFill>
-        <p:spPr>
-          <a:xfrm>
-            <a:off x="9311640" y="1847087"/>
-            <a:ext cx="1220724" cy="1220724"/>
-          </a:xfrm>
-          <a:prstGeom prst="rect">
-            <a:avLst/>
-          </a:prstGeom>
-        </p:spPr>
-      </p:pic>
-      <p:sp>
-        <p:nvSpPr>
-          <p:cNvPr id="20" name="TextBox 19"/>
-          <p:cNvSpPr txBox="1"/>
-          <p:nvPr/>
-        </p:nvSpPr>
-        <p:spPr>
-          <a:xfrm>
-            <a:off x="8182660" y="3159251"/>
-            <a:ext cx="3478682" cy="621792"/>
-          </a:xfrm>
-          <a:prstGeom prst="rect">
-            <a:avLst/>
-          </a:prstGeom>
-          <a:noFill/>
-        </p:spPr>
-        <p:txBody>
-          <a:bodyPr wrap="square" anchor="t"/>
-          <a:lstStyle/>
-          <a:p>
-            <a:pPr algn="ctr"/>
-            <a:r>
-              <a:rPr sz="1300" b="1" i="0">
-                <a:solidFill>
-                  <a:srgbClr val="095292"/>
-                </a:solidFill>
-                <a:latin typeface="Calibri"/>
-              </a:rPr>
-              <a:t>Mermaid</a:t>
-            </a:r>
-          </a:p>
-          <a:p>
-            <a:pPr algn="ctr">
-              <a:spcBef>
-                <a:spcPts val="200"/>
-              </a:spcBef>
+              <a:rPr sz="2000" b="0" i="0">
+                <a:solidFill>
+                  <a:srgbClr val="333333"/>
+                </a:solidFill>
+                <a:latin typeface="Calibri"/>
+              </a:rPr>
+              <a:t>–   Si eso se deja pasar, el entregable llega con la seccion de "que no escala" vacia o rellenada con una frase generica</a:t>
+            </a:r>
+          </a:p>
+          <a:p>
+            <a:pPr>
+              <a:spcAft>
+                <a:spcPts val="800"/>
+              </a:spcAft>
             </a:pPr>
             <a:r>
-              <a:rPr sz="1000" b="0" i="0">
-                <a:solidFill>
-                  <a:srgbClr val="666666"/>
-                </a:solidFill>
-                <a:latin typeface="Calibri"/>
-              </a:rPr>
-              <a:t>Codigo del diagrama</a:t>
-            </a:r>
-          </a:p>
-        </p:txBody>
-      </p:sp>
-      <p:sp>
-        <p:nvSpPr>
-          <p:cNvPr id="21" name="Rounded Rectangle 20"/>
-          <p:cNvSpPr/>
-          <p:nvPr/>
-        </p:nvSpPr>
-        <p:spPr>
-          <a:xfrm>
-            <a:off x="4283354" y="4055364"/>
-            <a:ext cx="3624986" cy="2299716"/>
-          </a:xfrm>
-          <a:prstGeom prst="roundRect">
-            <a:avLst>
-              <a:gd name="adj" fmla="val 12000"/>
-            </a:avLst>
-          </a:prstGeom>
-          <a:solidFill>
-            <a:srgbClr val="F2F2F2"/>
-          </a:solidFill>
-          <a:ln>
-            <a:noFill/>
-          </a:ln>
-        </p:spPr>
-        <p:style>
-          <a:lnRef idx="1">
-            <a:schemeClr val="accent1"/>
-          </a:lnRef>
-          <a:fillRef idx="3">
-            <a:schemeClr val="accent1"/>
-          </a:fillRef>
-          <a:effectRef idx="2">
-            <a:schemeClr val="accent1"/>
-          </a:effectRef>
-          <a:fontRef idx="minor">
-            <a:schemeClr val="lt1"/>
-          </a:fontRef>
-        </p:style>
-        <p:txBody>
-          <a:bodyPr rtlCol="0" anchor="ctr"/>
-          <a:lstStyle/>
-          <a:p>
-            <a:pPr algn="ctr"/>
-          </a:p>
-        </p:txBody>
-      </p:sp>
-      <p:sp>
-        <p:nvSpPr>
-          <p:cNvPr id="22" name="Rectangle 21"/>
-          <p:cNvSpPr/>
-          <p:nvPr/>
-        </p:nvSpPr>
-        <p:spPr>
-          <a:xfrm>
-            <a:off x="4283354" y="4055364"/>
-            <a:ext cx="3624986" cy="64008"/>
-          </a:xfrm>
-          <a:prstGeom prst="rect">
-            <a:avLst/>
-          </a:prstGeom>
-          <a:solidFill>
-            <a:srgbClr val="095292"/>
-          </a:solidFill>
-          <a:ln>
-            <a:noFill/>
-          </a:ln>
-        </p:spPr>
-        <p:style>
-          <a:lnRef idx="1">
-            <a:schemeClr val="accent1"/>
-          </a:lnRef>
-          <a:fillRef idx="3">
-            <a:schemeClr val="accent1"/>
-          </a:fillRef>
-          <a:effectRef idx="2">
-            <a:schemeClr val="accent1"/>
-          </a:effectRef>
-          <a:fontRef idx="minor">
-            <a:schemeClr val="lt1"/>
-          </a:fontRef>
-        </p:style>
-        <p:txBody>
-          <a:bodyPr rtlCol="0" anchor="ctr"/>
-          <a:lstStyle/>
-          <a:p>
-            <a:pPr algn="ctr"/>
-          </a:p>
-        </p:txBody>
-      </p:sp>
-      <p:sp>
-        <p:nvSpPr>
-          <p:cNvPr id="23" name="Rectangle 22"/>
-          <p:cNvSpPr/>
-          <p:nvPr/>
-        </p:nvSpPr>
-        <p:spPr>
-          <a:xfrm>
-            <a:off x="4283354" y="4119372"/>
-            <a:ext cx="3624986" cy="27432"/>
-          </a:xfrm>
-          <a:prstGeom prst="rect">
-            <a:avLst/>
-          </a:prstGeom>
-          <a:solidFill>
-            <a:srgbClr val="FFD000"/>
-          </a:solidFill>
-          <a:ln>
-            <a:noFill/>
-          </a:ln>
-        </p:spPr>
-        <p:style>
-          <a:lnRef idx="1">
-            <a:schemeClr val="accent1"/>
-          </a:lnRef>
-          <a:fillRef idx="3">
-            <a:schemeClr val="accent1"/>
-          </a:fillRef>
-          <a:effectRef idx="2">
-            <a:schemeClr val="accent1"/>
-          </a:effectRef>
-          <a:fontRef idx="minor">
-            <a:schemeClr val="lt1"/>
-          </a:fontRef>
-        </p:style>
-        <p:txBody>
-          <a:bodyPr rtlCol="0" anchor="ctr"/>
-          <a:lstStyle/>
-          <a:p>
-            <a:pPr algn="ctr"/>
-          </a:p>
-        </p:txBody>
-      </p:sp>
-      <p:pic>
-        <p:nvPicPr>
-          <p:cNvPr id="24" name="Picture 23" descr="examlab.png"/>
-          <p:cNvPicPr>
-            <a:picLocks noChangeAspect="1"/>
-          </p:cNvPicPr>
-          <p:nvPr/>
-        </p:nvPicPr>
-        <p:blipFill>
-          <a:blip r:embed="rId5"/>
-          <a:stretch>
-            <a:fillRect/>
-          </a:stretch>
-        </p:blipFill>
-        <p:spPr>
-          <a:xfrm>
-            <a:off x="5485485" y="4311396"/>
-            <a:ext cx="1220724" cy="1220724"/>
-          </a:xfrm>
-          <a:prstGeom prst="rect">
-            <a:avLst/>
-          </a:prstGeom>
-        </p:spPr>
-      </p:pic>
-      <p:sp>
-        <p:nvSpPr>
-          <p:cNvPr id="25" name="TextBox 24"/>
-          <p:cNvSpPr txBox="1"/>
-          <p:nvPr/>
-        </p:nvSpPr>
-        <p:spPr>
-          <a:xfrm>
-            <a:off x="4356506" y="5623560"/>
-            <a:ext cx="3478682" cy="621792"/>
-          </a:xfrm>
-          <a:prstGeom prst="rect">
-            <a:avLst/>
-          </a:prstGeom>
-          <a:noFill/>
-        </p:spPr>
-        <p:txBody>
-          <a:bodyPr wrap="square" anchor="t"/>
-          <a:lstStyle/>
-          <a:p>
-            <a:pPr algn="ctr"/>
-            <a:r>
-              <a:rPr sz="1300" b="1" i="0">
-                <a:solidFill>
-                  <a:srgbClr val="095292"/>
-                </a:solidFill>
-                <a:latin typeface="Calibri"/>
-              </a:rPr>
-              <a:t>la plataforma del curso</a:t>
-            </a:r>
-          </a:p>
-          <a:p>
-            <a:pPr algn="ctr">
-              <a:spcBef>
-                <a:spcPts val="200"/>
-              </a:spcBef>
+              <a:rPr sz="2000" b="0" i="0">
+                <a:solidFill>
+                  <a:srgbClr val="333333"/>
+                </a:solidFill>
+                <a:latin typeface="Calibri"/>
+              </a:rPr>
+              <a:t>–   Y en la Clase 15 el estudiante afirma que su sistema soporta cualquier crecimiento mientras el diagrama muestra una unica base de datos con la sesion guardada en memoria</a:t>
+            </a:r>
+          </a:p>
+          <a:p>
+            <a:pPr>
+              <a:spcAft>
+                <a:spcPts val="800"/>
+              </a:spcAft>
             </a:pPr>
             <a:r>
-              <a:rPr sz="1000" b="0" i="0">
-                <a:solidFill>
-                  <a:srgbClr val="666666"/>
-                </a:solidFill>
-                <a:latin typeface="Calibri"/>
-              </a:rPr>
-              <a:t>Donde se entrega</a:t>
-            </a:r>
-          </a:p>
-        </p:txBody>
-      </p:sp>
-      <p:sp>
-        <p:nvSpPr>
-          <p:cNvPr id="26" name="TextBox 25"/>
+              <a:rPr sz="2000" b="0" i="0">
+                <a:solidFill>
+                  <a:srgbClr val="333333"/>
+                </a:solidFill>
+                <a:latin typeface="Calibri"/>
+              </a:rPr>
+              <a:t>–   Que es la contradiccion mas facil de detectar y la mas costosa de explicar en ese momento.</a:t>
+            </a:r>
+          </a:p>
+        </p:txBody>
+      </p:sp>
+      <p:sp>
+        <p:nvSpPr>
+          <p:cNvPr id="6" name="TextBox 5"/>
           <p:cNvSpPr txBox="1"/>
           <p:nvPr/>
         </p:nvSpPr>
@@ -8473,7 +7317,7 @@
         <p:spPr>
           <a:xfrm>
             <a:off x="0" y="0"/>
-            <a:ext cx="12191695" cy="1170432"/>
+            <a:ext cx="12191695" cy="960120"/>
           </a:xfrm>
           <a:prstGeom prst="rect">
             <a:avLst/>
@@ -8515,7 +7359,7 @@
         </p:nvSpPr>
         <p:spPr>
           <a:xfrm>
-            <a:off x="0" y="1170432"/>
+            <a:off x="0" y="960120"/>
             <a:ext cx="12191695" cy="41148"/>
           </a:xfrm>
           <a:prstGeom prst="rect">
@@ -8559,7 +7403,7 @@
         <p:spPr>
           <a:xfrm>
             <a:off x="457200" y="164592"/>
-            <a:ext cx="11277295" cy="384048"/>
+            <a:ext cx="11277295" cy="502920"/>
           </a:xfrm>
           <a:prstGeom prst="rect">
             <a:avLst/>
@@ -8579,55 +7423,21 @@
                 </a:solidFill>
                 <a:latin typeface="Calibri"/>
               </a:rPr>
-              <a:t>Del boceto a la plataforma del curso (diagrama)</a:t>
-            </a:r>
-          </a:p>
-        </p:txBody>
-      </p:sp>
-      <p:sp>
-        <p:nvSpPr>
-          <p:cNvPr id="5" name="TextBox 4"/>
-          <p:cNvSpPr txBox="1"/>
-          <p:nvPr/>
-        </p:nvSpPr>
-        <p:spPr>
-          <a:xfrm>
-            <a:off x="457200" y="566928"/>
-            <a:ext cx="11277295" cy="411480"/>
-          </a:xfrm>
-          <a:prstGeom prst="rect">
-            <a:avLst/>
-          </a:prstGeom>
-          <a:noFill/>
-        </p:spPr>
-        <p:txBody>
-          <a:bodyPr wrap="square">
-            <a:spAutoFit/>
-          </a:bodyPr>
-          <a:lstStyle/>
-          <a:p>
-            <a:r>
-              <a:rPr sz="1400" b="0" i="0">
-                <a:solidFill>
-                  <a:srgbClr val="B8D8EE"/>
-                </a:solidFill>
-                <a:latin typeface="Calibri"/>
-              </a:rPr>
-              <a:t>El diagrama se entrega como código Mermaid dentro de la plataforma del curso, no como imagen</a:t>
-            </a:r>
-          </a:p>
-        </p:txBody>
-      </p:sp>
-      <p:sp>
-        <p:nvSpPr>
-          <p:cNvPr id="6" name="Rounded Rectangle 5"/>
+              <a:t>Politica de autoescalado (tabla, no prosa)</a:t>
+            </a:r>
+          </a:p>
+        </p:txBody>
+      </p:sp>
+      <p:sp>
+        <p:nvSpPr>
+          <p:cNvPr id="5" name="Rounded Rectangle 4"/>
           <p:cNvSpPr/>
           <p:nvPr/>
         </p:nvSpPr>
         <p:spPr>
           <a:xfrm>
-            <a:off x="457200" y="1659636"/>
-            <a:ext cx="11277295" cy="1051560"/>
+            <a:off x="457200" y="1261872"/>
+            <a:ext cx="11277295" cy="4773168"/>
           </a:xfrm>
           <a:prstGeom prst="roundRect">
             <a:avLst>
@@ -8635,7 +7445,7 @@
             </a:avLst>
           </a:prstGeom>
           <a:solidFill>
-            <a:srgbClr val="F2F2F2"/>
+            <a:srgbClr val="1E2A38"/>
           </a:solidFill>
           <a:ln>
             <a:noFill/>
@@ -8665,19 +7475,17 @@
       </p:sp>
       <p:sp>
         <p:nvSpPr>
-          <p:cNvPr id="7" name="Rounded Rectangle 6"/>
+          <p:cNvPr id="6" name="Rectangle 5"/>
           <p:cNvSpPr/>
           <p:nvPr/>
         </p:nvSpPr>
         <p:spPr>
           <a:xfrm>
-            <a:off x="594360" y="1965960"/>
-            <a:ext cx="438912" cy="438912"/>
-          </a:xfrm>
-          <a:prstGeom prst="roundRect">
-            <a:avLst>
-              <a:gd name="adj" fmla="val 12000"/>
-            </a:avLst>
+            <a:off x="457200" y="1261872"/>
+            <a:ext cx="11277295" cy="320040"/>
+          </a:xfrm>
+          <a:prstGeom prst="rect">
+            <a:avLst/>
           </a:prstGeom>
           <a:solidFill>
             <a:srgbClr val="095292"/>
@@ -8710,14 +7518,46 @@
       </p:sp>
       <p:sp>
         <p:nvSpPr>
+          <p:cNvPr id="7" name="TextBox 6"/>
+          <p:cNvSpPr txBox="1"/>
+          <p:nvPr/>
+        </p:nvSpPr>
+        <p:spPr>
+          <a:xfrm>
+            <a:off x="685800" y="1307592"/>
+            <a:ext cx="10820095" cy="256032"/>
+          </a:xfrm>
+          <a:prstGeom prst="rect">
+            <a:avLst/>
+          </a:prstGeom>
+          <a:noFill/>
+        </p:spPr>
+        <p:txBody>
+          <a:bodyPr wrap="square" anchor="ctr"/>
+          <a:lstStyle/>
+          <a:p>
+            <a:r>
+              <a:rPr sz="1000" b="1" i="0">
+                <a:solidFill>
+                  <a:srgbClr val="269CCB"/>
+                </a:solidFill>
+                <a:latin typeface="Calibri"/>
+              </a:rPr>
+              <a:t>● ● ●</a:t>
+            </a:r>
+          </a:p>
+        </p:txBody>
+      </p:sp>
+      <p:sp>
+        <p:nvSpPr>
           <p:cNvPr id="8" name="TextBox 7"/>
           <p:cNvSpPr txBox="1"/>
           <p:nvPr/>
         </p:nvSpPr>
         <p:spPr>
           <a:xfrm>
-            <a:off x="594360" y="1965960"/>
-            <a:ext cx="438912" cy="438912"/>
+            <a:off x="777240" y="1719072"/>
+            <a:ext cx="10637215" cy="4133087"/>
           </a:xfrm>
           <a:prstGeom prst="rect">
             <a:avLst/>
@@ -8725,18 +7565,88 @@
           <a:noFill/>
         </p:spPr>
         <p:txBody>
-          <a:bodyPr wrap="square" anchor="ctr"/>
-          <a:lstStyle/>
-          <a:p>
-            <a:pPr algn="ctr"/>
-            <a:r>
-              <a:rPr sz="1600" b="1" i="0">
+          <a:bodyPr wrap="square">
+            <a:spAutoFit/>
+          </a:bodyPr>
+          <a:lstStyle/>
+          <a:p>
+            <a:pPr>
+              <a:spcAft>
+                <a:spcPts val="400"/>
+              </a:spcAft>
+            </a:pPr>
+            <a:r>
+              <a:rPr sz="1400" b="0" i="0">
                 <a:solidFill>
                   <a:srgbClr val="FFFFFF"/>
                 </a:solidFill>
                 <a:latin typeface="Calibri"/>
               </a:rPr>
-              <a:t>1</a:t>
+              <a:t>Componente   | Tipo        | Trigger up      | Min | Max | Cooldown</a:t>
+            </a:r>
+          </a:p>
+          <a:p>
+            <a:pPr>
+              <a:spcAft>
+                <a:spcPts val="400"/>
+              </a:spcAft>
+            </a:pPr>
+            <a:r>
+              <a:rPr sz="1400" b="0" i="0">
+                <a:solidFill>
+                  <a:srgbClr val="FFFFFF"/>
+                </a:solidFill>
+                <a:latin typeface="Calibri"/>
+              </a:rPr>
+              <a:t>-------------|-------------|-----------------|-----|-----|---------</a:t>
+            </a:r>
+          </a:p>
+          <a:p>
+            <a:pPr>
+              <a:spcAft>
+                <a:spcPts val="400"/>
+              </a:spcAft>
+            </a:pPr>
+            <a:r>
+              <a:rPr sz="1400" b="0" i="0">
+                <a:solidFill>
+                  <a:srgbClr val="FFFFFF"/>
+                </a:solidFill>
+                <a:latin typeface="Calibri"/>
+              </a:rPr>
+              <a:t>API          | Horizontal  | CPU &gt; 70% / 5m  |  2  |  6  | 5 min</a:t>
+            </a:r>
+          </a:p>
+          <a:p>
+            <a:pPr>
+              <a:spcAft>
+                <a:spcPts val="400"/>
+              </a:spcAft>
+            </a:pPr>
+            <a:r>
+              <a:rPr sz="1400" b="0" i="0">
+                <a:solidFill>
+                  <a:srgbClr val="FFFFFF"/>
+                </a:solidFill>
+                <a:latin typeface="Calibri"/>
+              </a:rPr>
+              <a:t>Worker cola  | Horizontal  | cola &gt; 100 msg  |  1  |  4  | 3 min</a:t>
+            </a:r>
+          </a:p>
+          <a:p>
+            <a:pPr>
+              <a:spcAft>
+                <a:spcPts val="400"/>
+              </a:spcAft>
+            </a:pPr>
+            <a:r>
+              <a:rPr sz="1400" b="0" i="0">
+                <a:solidFill>
+                  <a:srgbClr val="FFFFFF"/>
+                </a:solidFill>
+                <a:latin typeface="Calibri"/>
+              </a:rPr>
+              <a:t>BD primaria  | NO escala   | -               |  1  |  1  | -</a:t>
             </a:r>
           </a:p>
         </p:txBody>
@@ -8749,8 +7659,8 @@
         </p:nvSpPr>
         <p:spPr>
           <a:xfrm>
-            <a:off x="1188720" y="1751076"/>
-            <a:ext cx="10271455" cy="886968"/>
+            <a:off x="457200" y="6080760"/>
+            <a:ext cx="11277295" cy="320040"/>
           </a:xfrm>
           <a:prstGeom prst="rect">
             <a:avLst/>
@@ -8758,553 +7668,27 @@
           <a:noFill/>
         </p:spPr>
         <p:txBody>
-          <a:bodyPr wrap="square" anchor="ctr"/>
-          <a:lstStyle/>
-          <a:p>
-            <a:r>
-              <a:rPr sz="1500" b="1" i="0">
-                <a:solidFill>
-                  <a:srgbClr val="095292"/>
-                </a:solidFill>
-                <a:latin typeface="Calibri"/>
-              </a:rPr>
-              <a:t>Disena visual</a:t>
-            </a:r>
-          </a:p>
-          <a:p>
-            <a:pPr>
-              <a:spcBef>
-                <a:spcPts val="200"/>
-              </a:spcBef>
-            </a:pPr>
-            <a:r>
-              <a:rPr sz="1300" b="0" i="0">
-                <a:solidFill>
-                  <a:srgbClr val="333333"/>
-                </a:solidFill>
-                <a:latin typeface="Calibri"/>
-              </a:rPr>
-              <a:t>Dibuja el diagrama como quieras en Excalidraw o draw.io: es mas rapido arrastrar cajas que escribir codigo, y ahi es donde piensas el modelo.</a:t>
-            </a:r>
-          </a:p>
-        </p:txBody>
-      </p:sp>
-      <p:sp>
-        <p:nvSpPr>
-          <p:cNvPr id="10" name="Rounded Rectangle 9"/>
-          <p:cNvSpPr/>
-          <p:nvPr/>
-        </p:nvSpPr>
-        <p:spPr>
-          <a:xfrm>
-            <a:off x="457200" y="2802636"/>
-            <a:ext cx="11277295" cy="1051560"/>
-          </a:xfrm>
-          <a:prstGeom prst="roundRect">
-            <a:avLst>
-              <a:gd name="adj" fmla="val 12000"/>
-            </a:avLst>
-          </a:prstGeom>
-          <a:solidFill>
-            <a:srgbClr val="E8F4FA"/>
-          </a:solidFill>
-          <a:ln>
-            <a:noFill/>
-          </a:ln>
-        </p:spPr>
-        <p:style>
-          <a:lnRef idx="1">
-            <a:schemeClr val="accent1"/>
-          </a:lnRef>
-          <a:fillRef idx="3">
-            <a:schemeClr val="accent1"/>
-          </a:fillRef>
-          <a:effectRef idx="2">
-            <a:schemeClr val="accent1"/>
-          </a:effectRef>
-          <a:fontRef idx="minor">
-            <a:schemeClr val="lt1"/>
-          </a:fontRef>
-        </p:style>
-        <p:txBody>
-          <a:bodyPr rtlCol="0" anchor="ctr"/>
+          <a:bodyPr wrap="square">
+            <a:spAutoFit/>
+          </a:bodyPr>
           <a:lstStyle/>
           <a:p>
             <a:pPr algn="ctr"/>
-          </a:p>
-        </p:txBody>
-      </p:sp>
-      <p:sp>
-        <p:nvSpPr>
-          <p:cNvPr id="11" name="Rounded Rectangle 10"/>
-          <p:cNvSpPr/>
-          <p:nvPr/>
-        </p:nvSpPr>
-        <p:spPr>
-          <a:xfrm>
-            <a:off x="594360" y="3108960"/>
-            <a:ext cx="438912" cy="438912"/>
-          </a:xfrm>
-          <a:prstGeom prst="roundRect">
-            <a:avLst>
-              <a:gd name="adj" fmla="val 12000"/>
-            </a:avLst>
-          </a:prstGeom>
-          <a:solidFill>
-            <a:srgbClr val="095292"/>
-          </a:solidFill>
-          <a:ln>
-            <a:noFill/>
-          </a:ln>
-        </p:spPr>
-        <p:style>
-          <a:lnRef idx="1">
-            <a:schemeClr val="accent1"/>
-          </a:lnRef>
-          <a:fillRef idx="3">
-            <a:schemeClr val="accent1"/>
-          </a:fillRef>
-          <a:effectRef idx="2">
-            <a:schemeClr val="accent1"/>
-          </a:effectRef>
-          <a:fontRef idx="minor">
-            <a:schemeClr val="lt1"/>
-          </a:fontRef>
-        </p:style>
-        <p:txBody>
-          <a:bodyPr rtlCol="0" anchor="ctr"/>
-          <a:lstStyle/>
-          <a:p>
-            <a:pPr algn="ctr"/>
-          </a:p>
-        </p:txBody>
-      </p:sp>
-      <p:sp>
-        <p:nvSpPr>
-          <p:cNvPr id="12" name="TextBox 11"/>
-          <p:cNvSpPr txBox="1"/>
-          <p:nvPr/>
-        </p:nvSpPr>
-        <p:spPr>
-          <a:xfrm>
-            <a:off x="594360" y="3108960"/>
-            <a:ext cx="438912" cy="438912"/>
-          </a:xfrm>
-          <a:prstGeom prst="rect">
-            <a:avLst/>
-          </a:prstGeom>
-          <a:noFill/>
-        </p:spPr>
-        <p:txBody>
-          <a:bodyPr wrap="square" anchor="ctr"/>
-          <a:lstStyle/>
-          <a:p>
-            <a:pPr algn="ctr"/>
-            <a:r>
-              <a:rPr sz="1600" b="1" i="0">
-                <a:solidFill>
-                  <a:srgbClr val="FFFFFF"/>
-                </a:solidFill>
-                <a:latin typeface="Calibri"/>
-              </a:rPr>
-              <a:t>2</a:t>
-            </a:r>
-          </a:p>
-        </p:txBody>
-      </p:sp>
-      <p:sp>
-        <p:nvSpPr>
-          <p:cNvPr id="13" name="TextBox 12"/>
-          <p:cNvSpPr txBox="1"/>
-          <p:nvPr/>
-        </p:nvSpPr>
-        <p:spPr>
-          <a:xfrm>
-            <a:off x="1188720" y="2894076"/>
-            <a:ext cx="10271455" cy="886968"/>
-          </a:xfrm>
-          <a:prstGeom prst="rect">
-            <a:avLst/>
-          </a:prstGeom>
-          <a:noFill/>
-        </p:spPr>
-        <p:txBody>
-          <a:bodyPr wrap="square" anchor="ctr"/>
-          <a:lstStyle/>
-          <a:p>
-            <a:r>
-              <a:rPr sz="1500" b="1" i="0">
-                <a:solidFill>
-                  <a:srgbClr val="095292"/>
-                </a:solidFill>
-                <a:latin typeface="Calibri"/>
-              </a:rPr>
-              <a:t>Traduce con IA</a:t>
-            </a:r>
-          </a:p>
-          <a:p>
-            <a:pPr>
-              <a:spcBef>
-                <a:spcPts val="200"/>
-              </a:spcBef>
-            </a:pPr>
-            <a:r>
-              <a:rPr sz="1300" b="0" i="0">
-                <a:solidFill>
-                  <a:srgbClr val="333333"/>
-                </a:solidFill>
-                <a:latin typeface="Calibri"/>
-              </a:rPr>
-              <a:t>Copia o describe tu boceto a una IA y pidele el codigo Mermaid: «convierte este diagrama a Mermaid usando flowchart». Revisa el resultado: la IA acierta la sintaxis, no tu modelo.</a:t>
-            </a:r>
-          </a:p>
-        </p:txBody>
-      </p:sp>
-      <p:sp>
-        <p:nvSpPr>
-          <p:cNvPr id="14" name="Rounded Rectangle 13"/>
-          <p:cNvSpPr/>
-          <p:nvPr/>
-        </p:nvSpPr>
-        <p:spPr>
-          <a:xfrm>
-            <a:off x="457200" y="3945636"/>
-            <a:ext cx="11277295" cy="1051560"/>
-          </a:xfrm>
-          <a:prstGeom prst="roundRect">
-            <a:avLst>
-              <a:gd name="adj" fmla="val 12000"/>
-            </a:avLst>
-          </a:prstGeom>
-          <a:solidFill>
-            <a:srgbClr val="F2F2F2"/>
-          </a:solidFill>
-          <a:ln>
-            <a:noFill/>
-          </a:ln>
-        </p:spPr>
-        <p:style>
-          <a:lnRef idx="1">
-            <a:schemeClr val="accent1"/>
-          </a:lnRef>
-          <a:fillRef idx="3">
-            <a:schemeClr val="accent1"/>
-          </a:fillRef>
-          <a:effectRef idx="2">
-            <a:schemeClr val="accent1"/>
-          </a:effectRef>
-          <a:fontRef idx="minor">
-            <a:schemeClr val="lt1"/>
-          </a:fontRef>
-        </p:style>
-        <p:txBody>
-          <a:bodyPr rtlCol="0" anchor="ctr"/>
-          <a:lstStyle/>
-          <a:p>
-            <a:pPr algn="ctr"/>
-          </a:p>
-        </p:txBody>
-      </p:sp>
-      <p:sp>
-        <p:nvSpPr>
-          <p:cNvPr id="15" name="Rounded Rectangle 14"/>
-          <p:cNvSpPr/>
-          <p:nvPr/>
-        </p:nvSpPr>
-        <p:spPr>
-          <a:xfrm>
-            <a:off x="594360" y="4251960"/>
-            <a:ext cx="438912" cy="438912"/>
-          </a:xfrm>
-          <a:prstGeom prst="roundRect">
-            <a:avLst>
-              <a:gd name="adj" fmla="val 12000"/>
-            </a:avLst>
-          </a:prstGeom>
-          <a:solidFill>
-            <a:srgbClr val="095292"/>
-          </a:solidFill>
-          <a:ln>
-            <a:noFill/>
-          </a:ln>
-        </p:spPr>
-        <p:style>
-          <a:lnRef idx="1">
-            <a:schemeClr val="accent1"/>
-          </a:lnRef>
-          <a:fillRef idx="3">
-            <a:schemeClr val="accent1"/>
-          </a:fillRef>
-          <a:effectRef idx="2">
-            <a:schemeClr val="accent1"/>
-          </a:effectRef>
-          <a:fontRef idx="minor">
-            <a:schemeClr val="lt1"/>
-          </a:fontRef>
-        </p:style>
-        <p:txBody>
-          <a:bodyPr rtlCol="0" anchor="ctr"/>
-          <a:lstStyle/>
-          <a:p>
-            <a:pPr algn="ctr"/>
-          </a:p>
-        </p:txBody>
-      </p:sp>
-      <p:sp>
-        <p:nvSpPr>
-          <p:cNvPr id="16" name="TextBox 15"/>
-          <p:cNvSpPr txBox="1"/>
-          <p:nvPr/>
-        </p:nvSpPr>
-        <p:spPr>
-          <a:xfrm>
-            <a:off x="594360" y="4251960"/>
-            <a:ext cx="438912" cy="438912"/>
-          </a:xfrm>
-          <a:prstGeom prst="rect">
-            <a:avLst/>
-          </a:prstGeom>
-          <a:noFill/>
-        </p:spPr>
-        <p:txBody>
-          <a:bodyPr wrap="square" anchor="ctr"/>
-          <a:lstStyle/>
-          <a:p>
-            <a:pPr algn="ctr"/>
-            <a:r>
-              <a:rPr sz="1600" b="1" i="0">
-                <a:solidFill>
-                  <a:srgbClr val="FFFFFF"/>
-                </a:solidFill>
-                <a:latin typeface="Calibri"/>
-              </a:rPr>
-              <a:t>3</a:t>
-            </a:r>
-          </a:p>
-        </p:txBody>
-      </p:sp>
-      <p:sp>
-        <p:nvSpPr>
-          <p:cNvPr id="17" name="TextBox 16"/>
-          <p:cNvSpPr txBox="1"/>
-          <p:nvPr/>
-        </p:nvSpPr>
-        <p:spPr>
-          <a:xfrm>
-            <a:off x="1188720" y="4037076"/>
-            <a:ext cx="10271455" cy="886968"/>
-          </a:xfrm>
-          <a:prstGeom prst="rect">
-            <a:avLst/>
-          </a:prstGeom>
-          <a:noFill/>
-        </p:spPr>
-        <p:txBody>
-          <a:bodyPr wrap="square" anchor="ctr"/>
-          <a:lstStyle/>
-          <a:p>
-            <a:r>
-              <a:rPr sz="1500" b="1" i="0">
-                <a:solidFill>
-                  <a:srgbClr val="095292"/>
-                </a:solidFill>
-                <a:latin typeface="Calibri"/>
-              </a:rPr>
-              <a:t>Pega y renderiza en la plataforma del curso</a:t>
-            </a:r>
-          </a:p>
-          <a:p>
-            <a:pPr>
-              <a:spcBef>
-                <a:spcPts val="200"/>
-              </a:spcBef>
-            </a:pPr>
-            <a:r>
-              <a:rPr sz="1300" b="0" i="0">
-                <a:solidFill>
-                  <a:srgbClr val="333333"/>
-                </a:solidFill>
-                <a:latin typeface="Calibri"/>
-              </a:rPr>
-              <a:t>Pega ese codigo en la caja de texto de la pregunta y mira como lo dibuja la plataforma. Si no renderiza, corrige ahi mismo: lo que se califica es el diagrama renderizado dentro de la plataforma del curso.</a:t>
-            </a:r>
-          </a:p>
-        </p:txBody>
-      </p:sp>
-      <p:sp>
-        <p:nvSpPr>
-          <p:cNvPr id="18" name="Rounded Rectangle 17"/>
-          <p:cNvSpPr/>
-          <p:nvPr/>
-        </p:nvSpPr>
-        <p:spPr>
-          <a:xfrm>
-            <a:off x="457200" y="5088636"/>
-            <a:ext cx="11277295" cy="1051560"/>
-          </a:xfrm>
-          <a:prstGeom prst="roundRect">
-            <a:avLst>
-              <a:gd name="adj" fmla="val 12000"/>
-            </a:avLst>
-          </a:prstGeom>
-          <a:solidFill>
-            <a:srgbClr val="E8F4FA"/>
-          </a:solidFill>
-          <a:ln>
-            <a:noFill/>
-          </a:ln>
-        </p:spPr>
-        <p:style>
-          <a:lnRef idx="1">
-            <a:schemeClr val="accent1"/>
-          </a:lnRef>
-          <a:fillRef idx="3">
-            <a:schemeClr val="accent1"/>
-          </a:fillRef>
-          <a:effectRef idx="2">
-            <a:schemeClr val="accent1"/>
-          </a:effectRef>
-          <a:fontRef idx="minor">
-            <a:schemeClr val="lt1"/>
-          </a:fontRef>
-        </p:style>
-        <p:txBody>
-          <a:bodyPr rtlCol="0" anchor="ctr"/>
-          <a:lstStyle/>
-          <a:p>
-            <a:pPr algn="ctr"/>
-          </a:p>
-        </p:txBody>
-      </p:sp>
-      <p:sp>
-        <p:nvSpPr>
-          <p:cNvPr id="19" name="Rounded Rectangle 18"/>
-          <p:cNvSpPr/>
-          <p:nvPr/>
-        </p:nvSpPr>
-        <p:spPr>
-          <a:xfrm>
-            <a:off x="594360" y="5394960"/>
-            <a:ext cx="438912" cy="438912"/>
-          </a:xfrm>
-          <a:prstGeom prst="roundRect">
-            <a:avLst>
-              <a:gd name="adj" fmla="val 12000"/>
-            </a:avLst>
-          </a:prstGeom>
-          <a:solidFill>
-            <a:srgbClr val="095292"/>
-          </a:solidFill>
-          <a:ln>
-            <a:noFill/>
-          </a:ln>
-        </p:spPr>
-        <p:style>
-          <a:lnRef idx="1">
-            <a:schemeClr val="accent1"/>
-          </a:lnRef>
-          <a:fillRef idx="3">
-            <a:schemeClr val="accent1"/>
-          </a:fillRef>
-          <a:effectRef idx="2">
-            <a:schemeClr val="accent1"/>
-          </a:effectRef>
-          <a:fontRef idx="minor">
-            <a:schemeClr val="lt1"/>
-          </a:fontRef>
-        </p:style>
-        <p:txBody>
-          <a:bodyPr rtlCol="0" anchor="ctr"/>
-          <a:lstStyle/>
-          <a:p>
-            <a:pPr algn="ctr"/>
-          </a:p>
-        </p:txBody>
-      </p:sp>
-      <p:sp>
-        <p:nvSpPr>
-          <p:cNvPr id="20" name="TextBox 19"/>
-          <p:cNvSpPr txBox="1"/>
-          <p:nvPr/>
-        </p:nvSpPr>
-        <p:spPr>
-          <a:xfrm>
-            <a:off x="594360" y="5394960"/>
-            <a:ext cx="438912" cy="438912"/>
-          </a:xfrm>
-          <a:prstGeom prst="rect">
-            <a:avLst/>
-          </a:prstGeom>
-          <a:noFill/>
-        </p:spPr>
-        <p:txBody>
-          <a:bodyPr wrap="square" anchor="ctr"/>
-          <a:lstStyle/>
-          <a:p>
-            <a:pPr algn="ctr"/>
-            <a:r>
-              <a:rPr sz="1600" b="1" i="0">
-                <a:solidFill>
-                  <a:srgbClr val="FFFFFF"/>
-                </a:solidFill>
-                <a:latin typeface="Calibri"/>
-              </a:rPr>
-              <a:t>4</a:t>
-            </a:r>
-          </a:p>
-        </p:txBody>
-      </p:sp>
-      <p:sp>
-        <p:nvSpPr>
-          <p:cNvPr id="21" name="TextBox 20"/>
-          <p:cNvSpPr txBox="1"/>
-          <p:nvPr/>
-        </p:nvSpPr>
-        <p:spPr>
-          <a:xfrm>
-            <a:off x="1188720" y="5180076"/>
-            <a:ext cx="10271455" cy="886968"/>
-          </a:xfrm>
-          <a:prstGeom prst="rect">
-            <a:avLst/>
-          </a:prstGeom>
-          <a:noFill/>
-        </p:spPr>
-        <p:txBody>
-          <a:bodyPr wrap="square" anchor="ctr"/>
-          <a:lstStyle/>
-          <a:p>
-            <a:r>
-              <a:rPr sz="1500" b="1" i="0">
-                <a:solidFill>
-                  <a:srgbClr val="095292"/>
-                </a:solidFill>
-                <a:latin typeface="Calibri"/>
-              </a:rPr>
-              <a:t>Guarda el PNG para tu PI</a:t>
-            </a:r>
-          </a:p>
-          <a:p>
-            <a:pPr>
-              <a:spcBef>
-                <a:spcPts val="200"/>
-              </a:spcBef>
-            </a:pPr>
-            <a:r>
-              <a:rPr sz="1300" b="0" i="0">
-                <a:solidFill>
-                  <a:srgbClr val="333333"/>
-                </a:solidFill>
-                <a:latin typeface="Calibri"/>
-              </a:rPr>
-              <a:t>Exporta tambien la imagen a la carpeta de tu Proyecto Integrador. Esa copia es para tu informe; no reemplaza la respuesta en la plataforma.</a:t>
-            </a:r>
-          </a:p>
-        </p:txBody>
-      </p:sp>
-      <p:sp>
-        <p:nvSpPr>
-          <p:cNvPr id="22" name="TextBox 21"/>
+            <a:r>
+              <a:rPr sz="1200" b="0" i="1">
+                <a:solidFill>
+                  <a:srgbClr val="666666"/>
+                </a:solidFill>
+                <a:latin typeface="Calibri"/>
+              </a:rPr>
+              <a:t>El 'max' es lo que evita que la factura escale sola. La BD primaria casi nunca escala horizontal.</a:t>
+            </a:r>
+          </a:p>
+        </p:txBody>
+      </p:sp>
+      <p:sp>
+        <p:nvSpPr>
+          <p:cNvPr id="10" name="TextBox 9"/>
           <p:cNvSpPr txBox="1"/>
           <p:nvPr/>
         </p:nvSpPr>
@@ -9372,7 +7756,7 @@
         <p:spPr>
           <a:xfrm>
             <a:off x="0" y="0"/>
-            <a:ext cx="12191695" cy="960120"/>
+            <a:ext cx="12191695" cy="1170432"/>
           </a:xfrm>
           <a:prstGeom prst="rect">
             <a:avLst/>
@@ -9414,7 +7798,7 @@
         </p:nvSpPr>
         <p:spPr>
           <a:xfrm>
-            <a:off x="0" y="960120"/>
+            <a:off x="0" y="1170432"/>
             <a:ext cx="12191695" cy="41148"/>
           </a:xfrm>
           <a:prstGeom prst="rect">
@@ -9458,7 +7842,7 @@
         <p:spPr>
           <a:xfrm>
             <a:off x="457200" y="164592"/>
-            <a:ext cx="11277295" cy="502920"/>
+            <a:ext cx="11277295" cy="384048"/>
           </a:xfrm>
           <a:prstGeom prst="rect">
             <a:avLst/>
@@ -9478,7 +7862,7 @@
                 </a:solidFill>
                 <a:latin typeface="Calibri"/>
               </a:rPr>
-              <a:t>PI CloudLite — entregable de hoy</a:t>
+              <a:t>Herramientas de hoy</a:t>
             </a:r>
           </a:p>
         </p:txBody>
@@ -9491,8 +7875,8 @@
         </p:nvSpPr>
         <p:spPr>
           <a:xfrm>
-            <a:off x="457200" y="1170432"/>
-            <a:ext cx="11277295" cy="5230368"/>
+            <a:off x="457200" y="566928"/>
+            <a:ext cx="11277295" cy="411480"/>
           </a:xfrm>
           <a:prstGeom prst="rect">
             <a:avLst/>
@@ -9505,119 +7889,837 @@
           </a:bodyPr>
           <a:lstStyle/>
           <a:p>
-            <a:pPr>
-              <a:spcAft>
-                <a:spcPts val="800"/>
-              </a:spcAft>
+            <a:r>
+              <a:rPr sz="1400" b="0" i="0">
+                <a:solidFill>
+                  <a:srgbClr val="B8D8EE"/>
+                </a:solidFill>
+                <a:latin typeface="Calibri"/>
+              </a:rPr>
+              <a:t>Gratis · navegador o free tier · sin cuenta de pago</a:t>
+            </a:r>
+          </a:p>
+        </p:txBody>
+      </p:sp>
+      <p:sp>
+        <p:nvSpPr>
+          <p:cNvPr id="6" name="Rounded Rectangle 5"/>
+          <p:cNvSpPr/>
+          <p:nvPr/>
+        </p:nvSpPr>
+        <p:spPr>
+          <a:xfrm>
+            <a:off x="457200" y="1591056"/>
+            <a:ext cx="3624986" cy="2299716"/>
+          </a:xfrm>
+          <a:prstGeom prst="roundRect">
+            <a:avLst>
+              <a:gd name="adj" fmla="val 12000"/>
+            </a:avLst>
+          </a:prstGeom>
+          <a:solidFill>
+            <a:srgbClr val="F2F2F2"/>
+          </a:solidFill>
+          <a:ln>
+            <a:noFill/>
+          </a:ln>
+        </p:spPr>
+        <p:style>
+          <a:lnRef idx="1">
+            <a:schemeClr val="accent1"/>
+          </a:lnRef>
+          <a:fillRef idx="3">
+            <a:schemeClr val="accent1"/>
+          </a:fillRef>
+          <a:effectRef idx="2">
+            <a:schemeClr val="accent1"/>
+          </a:effectRef>
+          <a:fontRef idx="minor">
+            <a:schemeClr val="lt1"/>
+          </a:fontRef>
+        </p:style>
+        <p:txBody>
+          <a:bodyPr rtlCol="0" anchor="ctr"/>
+          <a:lstStyle/>
+          <a:p>
+            <a:pPr algn="ctr"/>
+          </a:p>
+        </p:txBody>
+      </p:sp>
+      <p:sp>
+        <p:nvSpPr>
+          <p:cNvPr id="7" name="Rectangle 6"/>
+          <p:cNvSpPr/>
+          <p:nvPr/>
+        </p:nvSpPr>
+        <p:spPr>
+          <a:xfrm>
+            <a:off x="457200" y="1591056"/>
+            <a:ext cx="3624986" cy="64008"/>
+          </a:xfrm>
+          <a:prstGeom prst="rect">
+            <a:avLst/>
+          </a:prstGeom>
+          <a:solidFill>
+            <a:srgbClr val="095292"/>
+          </a:solidFill>
+          <a:ln>
+            <a:noFill/>
+          </a:ln>
+        </p:spPr>
+        <p:style>
+          <a:lnRef idx="1">
+            <a:schemeClr val="accent1"/>
+          </a:lnRef>
+          <a:fillRef idx="3">
+            <a:schemeClr val="accent1"/>
+          </a:fillRef>
+          <a:effectRef idx="2">
+            <a:schemeClr val="accent1"/>
+          </a:effectRef>
+          <a:fontRef idx="minor">
+            <a:schemeClr val="lt1"/>
+          </a:fontRef>
+        </p:style>
+        <p:txBody>
+          <a:bodyPr rtlCol="0" anchor="ctr"/>
+          <a:lstStyle/>
+          <a:p>
+            <a:pPr algn="ctr"/>
+          </a:p>
+        </p:txBody>
+      </p:sp>
+      <p:sp>
+        <p:nvSpPr>
+          <p:cNvPr id="8" name="Rectangle 7"/>
+          <p:cNvSpPr/>
+          <p:nvPr/>
+        </p:nvSpPr>
+        <p:spPr>
+          <a:xfrm>
+            <a:off x="457200" y="1655064"/>
+            <a:ext cx="3624986" cy="27432"/>
+          </a:xfrm>
+          <a:prstGeom prst="rect">
+            <a:avLst/>
+          </a:prstGeom>
+          <a:solidFill>
+            <a:srgbClr val="FFD000"/>
+          </a:solidFill>
+          <a:ln>
+            <a:noFill/>
+          </a:ln>
+        </p:spPr>
+        <p:style>
+          <a:lnRef idx="1">
+            <a:schemeClr val="accent1"/>
+          </a:lnRef>
+          <a:fillRef idx="3">
+            <a:schemeClr val="accent1"/>
+          </a:fillRef>
+          <a:effectRef idx="2">
+            <a:schemeClr val="accent1"/>
+          </a:effectRef>
+          <a:fontRef idx="minor">
+            <a:schemeClr val="lt1"/>
+          </a:fontRef>
+        </p:style>
+        <p:txBody>
+          <a:bodyPr rtlCol="0" anchor="ctr"/>
+          <a:lstStyle/>
+          <a:p>
+            <a:pPr algn="ctr"/>
+          </a:p>
+        </p:txBody>
+      </p:sp>
+      <p:pic>
+        <p:nvPicPr>
+          <p:cNvPr id="9" name="Picture 8" descr="google_docs.png"/>
+          <p:cNvPicPr>
+            <a:picLocks noChangeAspect="1"/>
+          </p:cNvPicPr>
+          <p:nvPr/>
+        </p:nvPicPr>
+        <p:blipFill>
+          <a:blip r:embed="rId2"/>
+          <a:stretch>
+            <a:fillRect/>
+          </a:stretch>
+        </p:blipFill>
+        <p:spPr>
+          <a:xfrm>
+            <a:off x="1659331" y="1847087"/>
+            <a:ext cx="1220724" cy="1220724"/>
+          </a:xfrm>
+          <a:prstGeom prst="rect">
+            <a:avLst/>
+          </a:prstGeom>
+        </p:spPr>
+      </p:pic>
+      <p:sp>
+        <p:nvSpPr>
+          <p:cNvPr id="10" name="TextBox 9"/>
+          <p:cNvSpPr txBox="1"/>
+          <p:nvPr/>
+        </p:nvSpPr>
+        <p:spPr>
+          <a:xfrm>
+            <a:off x="530352" y="3159251"/>
+            <a:ext cx="3478682" cy="621792"/>
+          </a:xfrm>
+          <a:prstGeom prst="rect">
+            <a:avLst/>
+          </a:prstGeom>
+          <a:noFill/>
+        </p:spPr>
+        <p:txBody>
+          <a:bodyPr wrap="square" anchor="t"/>
+          <a:lstStyle/>
+          <a:p>
+            <a:pPr algn="ctr"/>
+            <a:r>
+              <a:rPr sz="1300" b="1" i="0">
+                <a:solidFill>
+                  <a:srgbClr val="095292"/>
+                </a:solidFill>
+                <a:latin typeface="Calibri"/>
+              </a:rPr>
+              <a:t>Google Docs</a:t>
+            </a:r>
+          </a:p>
+          <a:p>
+            <a:pPr algn="ctr">
+              <a:spcBef>
+                <a:spcPts val="200"/>
+              </a:spcBef>
             </a:pPr>
             <a:r>
-              <a:rPr sz="2000" b="0" i="0">
-                <a:solidFill>
-                  <a:srgbClr val="333333"/>
-                </a:solidFill>
-                <a:latin typeface="Calibri"/>
-              </a:rPr>
-              <a:t>–   </a:t>
-            </a:r>
-            <a:r>
-              <a:rPr sz="2000" b="1" i="0">
-                <a:solidFill>
-                  <a:srgbClr val="333333"/>
-                </a:solidFill>
-                <a:latin typeface="Calibri"/>
-              </a:rPr>
-              <a:t>Entregable:</a:t>
-            </a:r>
-            <a:r>
-              <a:rPr sz="2000" b="0" i="0">
-                <a:solidFill>
-                  <a:srgbClr val="333333"/>
-                </a:solidFill>
-                <a:latin typeface="Calibri"/>
-              </a:rPr>
-              <a:t> Sección Escalabilidad: triggers, límites, qué escala y qué no</a:t>
-            </a:r>
-          </a:p>
-          <a:p>
-            <a:pPr>
-              <a:spcAft>
-                <a:spcPts val="800"/>
-              </a:spcAft>
+              <a:rPr sz="1000" b="0" i="0">
+                <a:solidFill>
+                  <a:srgbClr val="666666"/>
+                </a:solidFill>
+                <a:latin typeface="Calibri"/>
+              </a:rPr>
+              <a:t>Politica de escalado</a:t>
+            </a:r>
+          </a:p>
+        </p:txBody>
+      </p:sp>
+      <p:sp>
+        <p:nvSpPr>
+          <p:cNvPr id="11" name="Rounded Rectangle 10"/>
+          <p:cNvSpPr/>
+          <p:nvPr/>
+        </p:nvSpPr>
+        <p:spPr>
+          <a:xfrm>
+            <a:off x="4283354" y="1591056"/>
+            <a:ext cx="3624986" cy="2299716"/>
+          </a:xfrm>
+          <a:prstGeom prst="roundRect">
+            <a:avLst>
+              <a:gd name="adj" fmla="val 12000"/>
+            </a:avLst>
+          </a:prstGeom>
+          <a:solidFill>
+            <a:srgbClr val="F2F2F2"/>
+          </a:solidFill>
+          <a:ln>
+            <a:noFill/>
+          </a:ln>
+        </p:spPr>
+        <p:style>
+          <a:lnRef idx="1">
+            <a:schemeClr val="accent1"/>
+          </a:lnRef>
+          <a:fillRef idx="3">
+            <a:schemeClr val="accent1"/>
+          </a:fillRef>
+          <a:effectRef idx="2">
+            <a:schemeClr val="accent1"/>
+          </a:effectRef>
+          <a:fontRef idx="minor">
+            <a:schemeClr val="lt1"/>
+          </a:fontRef>
+        </p:style>
+        <p:txBody>
+          <a:bodyPr rtlCol="0" anchor="ctr"/>
+          <a:lstStyle/>
+          <a:p>
+            <a:pPr algn="ctr"/>
+          </a:p>
+        </p:txBody>
+      </p:sp>
+      <p:sp>
+        <p:nvSpPr>
+          <p:cNvPr id="12" name="Rectangle 11"/>
+          <p:cNvSpPr/>
+          <p:nvPr/>
+        </p:nvSpPr>
+        <p:spPr>
+          <a:xfrm>
+            <a:off x="4283354" y="1591056"/>
+            <a:ext cx="3624986" cy="64008"/>
+          </a:xfrm>
+          <a:prstGeom prst="rect">
+            <a:avLst/>
+          </a:prstGeom>
+          <a:solidFill>
+            <a:srgbClr val="095292"/>
+          </a:solidFill>
+          <a:ln>
+            <a:noFill/>
+          </a:ln>
+        </p:spPr>
+        <p:style>
+          <a:lnRef idx="1">
+            <a:schemeClr val="accent1"/>
+          </a:lnRef>
+          <a:fillRef idx="3">
+            <a:schemeClr val="accent1"/>
+          </a:fillRef>
+          <a:effectRef idx="2">
+            <a:schemeClr val="accent1"/>
+          </a:effectRef>
+          <a:fontRef idx="minor">
+            <a:schemeClr val="lt1"/>
+          </a:fontRef>
+        </p:style>
+        <p:txBody>
+          <a:bodyPr rtlCol="0" anchor="ctr"/>
+          <a:lstStyle/>
+          <a:p>
+            <a:pPr algn="ctr"/>
+          </a:p>
+        </p:txBody>
+      </p:sp>
+      <p:sp>
+        <p:nvSpPr>
+          <p:cNvPr id="13" name="Rectangle 12"/>
+          <p:cNvSpPr/>
+          <p:nvPr/>
+        </p:nvSpPr>
+        <p:spPr>
+          <a:xfrm>
+            <a:off x="4283354" y="1655064"/>
+            <a:ext cx="3624986" cy="27432"/>
+          </a:xfrm>
+          <a:prstGeom prst="rect">
+            <a:avLst/>
+          </a:prstGeom>
+          <a:solidFill>
+            <a:srgbClr val="FFD000"/>
+          </a:solidFill>
+          <a:ln>
+            <a:noFill/>
+          </a:ln>
+        </p:spPr>
+        <p:style>
+          <a:lnRef idx="1">
+            <a:schemeClr val="accent1"/>
+          </a:lnRef>
+          <a:fillRef idx="3">
+            <a:schemeClr val="accent1"/>
+          </a:fillRef>
+          <a:effectRef idx="2">
+            <a:schemeClr val="accent1"/>
+          </a:effectRef>
+          <a:fontRef idx="minor">
+            <a:schemeClr val="lt1"/>
+          </a:fontRef>
+        </p:style>
+        <p:txBody>
+          <a:bodyPr rtlCol="0" anchor="ctr"/>
+          <a:lstStyle/>
+          <a:p>
+            <a:pPr algn="ctr"/>
+          </a:p>
+        </p:txBody>
+      </p:sp>
+      <p:pic>
+        <p:nvPicPr>
+          <p:cNvPr id="14" name="Picture 13" descr="drawio.png"/>
+          <p:cNvPicPr>
+            <a:picLocks noChangeAspect="1"/>
+          </p:cNvPicPr>
+          <p:nvPr/>
+        </p:nvPicPr>
+        <p:blipFill>
+          <a:blip r:embed="rId3"/>
+          <a:stretch>
+            <a:fillRect/>
+          </a:stretch>
+        </p:blipFill>
+        <p:spPr>
+          <a:xfrm>
+            <a:off x="5485485" y="1847087"/>
+            <a:ext cx="1220724" cy="1220724"/>
+          </a:xfrm>
+          <a:prstGeom prst="rect">
+            <a:avLst/>
+          </a:prstGeom>
+        </p:spPr>
+      </p:pic>
+      <p:sp>
+        <p:nvSpPr>
+          <p:cNvPr id="15" name="TextBox 14"/>
+          <p:cNvSpPr txBox="1"/>
+          <p:nvPr/>
+        </p:nvSpPr>
+        <p:spPr>
+          <a:xfrm>
+            <a:off x="4356506" y="3159251"/>
+            <a:ext cx="3478682" cy="621792"/>
+          </a:xfrm>
+          <a:prstGeom prst="rect">
+            <a:avLst/>
+          </a:prstGeom>
+          <a:noFill/>
+        </p:spPr>
+        <p:txBody>
+          <a:bodyPr wrap="square" anchor="t"/>
+          <a:lstStyle/>
+          <a:p>
+            <a:pPr algn="ctr"/>
+            <a:r>
+              <a:rPr sz="1300" b="1" i="0">
+                <a:solidFill>
+                  <a:srgbClr val="095292"/>
+                </a:solidFill>
+                <a:latin typeface="Calibri"/>
+              </a:rPr>
+              <a:t>draw.io</a:t>
+            </a:r>
+          </a:p>
+          <a:p>
+            <a:pPr algn="ctr">
+              <a:spcBef>
+                <a:spcPts val="200"/>
+              </a:spcBef>
             </a:pPr>
             <a:r>
-              <a:rPr sz="2000" b="0" i="0">
-                <a:solidFill>
-                  <a:srgbClr val="333333"/>
-                </a:solidFill>
-                <a:latin typeface="Calibri"/>
-              </a:rPr>
-              <a:t>–   Herramienta: </a:t>
-            </a:r>
-            <a:r>
-              <a:rPr sz="2000" b="1" i="0">
-                <a:solidFill>
-                  <a:srgbClr val="333333"/>
-                </a:solidFill>
-                <a:latin typeface="Calibri"/>
-              </a:rPr>
-              <a:t>Google Docs · draw.io (opcional nota en Deployment)</a:t>
-            </a:r>
-          </a:p>
-          <a:p>
-            <a:pPr>
-              <a:spcAft>
-                <a:spcPts val="800"/>
-              </a:spcAft>
+              <a:rPr sz="1000" b="0" i="0">
+                <a:solidFill>
+                  <a:srgbClr val="666666"/>
+                </a:solidFill>
+                <a:latin typeface="Calibri"/>
+              </a:rPr>
+              <a:t>Nota en Deployment</a:t>
+            </a:r>
+          </a:p>
+        </p:txBody>
+      </p:sp>
+      <p:sp>
+        <p:nvSpPr>
+          <p:cNvPr id="16" name="Rounded Rectangle 15"/>
+          <p:cNvSpPr/>
+          <p:nvPr/>
+        </p:nvSpPr>
+        <p:spPr>
+          <a:xfrm>
+            <a:off x="8109508" y="1591056"/>
+            <a:ext cx="3624986" cy="2299716"/>
+          </a:xfrm>
+          <a:prstGeom prst="roundRect">
+            <a:avLst>
+              <a:gd name="adj" fmla="val 12000"/>
+            </a:avLst>
+          </a:prstGeom>
+          <a:solidFill>
+            <a:srgbClr val="F2F2F2"/>
+          </a:solidFill>
+          <a:ln>
+            <a:noFill/>
+          </a:ln>
+        </p:spPr>
+        <p:style>
+          <a:lnRef idx="1">
+            <a:schemeClr val="accent1"/>
+          </a:lnRef>
+          <a:fillRef idx="3">
+            <a:schemeClr val="accent1"/>
+          </a:fillRef>
+          <a:effectRef idx="2">
+            <a:schemeClr val="accent1"/>
+          </a:effectRef>
+          <a:fontRef idx="minor">
+            <a:schemeClr val="lt1"/>
+          </a:fontRef>
+        </p:style>
+        <p:txBody>
+          <a:bodyPr rtlCol="0" anchor="ctr"/>
+          <a:lstStyle/>
+          <a:p>
+            <a:pPr algn="ctr"/>
+          </a:p>
+        </p:txBody>
+      </p:sp>
+      <p:sp>
+        <p:nvSpPr>
+          <p:cNvPr id="17" name="Rectangle 16"/>
+          <p:cNvSpPr/>
+          <p:nvPr/>
+        </p:nvSpPr>
+        <p:spPr>
+          <a:xfrm>
+            <a:off x="8109508" y="1591056"/>
+            <a:ext cx="3624986" cy="64008"/>
+          </a:xfrm>
+          <a:prstGeom prst="rect">
+            <a:avLst/>
+          </a:prstGeom>
+          <a:solidFill>
+            <a:srgbClr val="095292"/>
+          </a:solidFill>
+          <a:ln>
+            <a:noFill/>
+          </a:ln>
+        </p:spPr>
+        <p:style>
+          <a:lnRef idx="1">
+            <a:schemeClr val="accent1"/>
+          </a:lnRef>
+          <a:fillRef idx="3">
+            <a:schemeClr val="accent1"/>
+          </a:fillRef>
+          <a:effectRef idx="2">
+            <a:schemeClr val="accent1"/>
+          </a:effectRef>
+          <a:fontRef idx="minor">
+            <a:schemeClr val="lt1"/>
+          </a:fontRef>
+        </p:style>
+        <p:txBody>
+          <a:bodyPr rtlCol="0" anchor="ctr"/>
+          <a:lstStyle/>
+          <a:p>
+            <a:pPr algn="ctr"/>
+          </a:p>
+        </p:txBody>
+      </p:sp>
+      <p:sp>
+        <p:nvSpPr>
+          <p:cNvPr id="18" name="Rectangle 17"/>
+          <p:cNvSpPr/>
+          <p:nvPr/>
+        </p:nvSpPr>
+        <p:spPr>
+          <a:xfrm>
+            <a:off x="8109508" y="1655064"/>
+            <a:ext cx="3624986" cy="27432"/>
+          </a:xfrm>
+          <a:prstGeom prst="rect">
+            <a:avLst/>
+          </a:prstGeom>
+          <a:solidFill>
+            <a:srgbClr val="FFD000"/>
+          </a:solidFill>
+          <a:ln>
+            <a:noFill/>
+          </a:ln>
+        </p:spPr>
+        <p:style>
+          <a:lnRef idx="1">
+            <a:schemeClr val="accent1"/>
+          </a:lnRef>
+          <a:fillRef idx="3">
+            <a:schemeClr val="accent1"/>
+          </a:fillRef>
+          <a:effectRef idx="2">
+            <a:schemeClr val="accent1"/>
+          </a:effectRef>
+          <a:fontRef idx="minor">
+            <a:schemeClr val="lt1"/>
+          </a:fontRef>
+        </p:style>
+        <p:txBody>
+          <a:bodyPr rtlCol="0" anchor="ctr"/>
+          <a:lstStyle/>
+          <a:p>
+            <a:pPr algn="ctr"/>
+          </a:p>
+        </p:txBody>
+      </p:sp>
+      <p:pic>
+        <p:nvPicPr>
+          <p:cNvPr id="19" name="Picture 18" descr="mermaid.png"/>
+          <p:cNvPicPr>
+            <a:picLocks noChangeAspect="1"/>
+          </p:cNvPicPr>
+          <p:nvPr/>
+        </p:nvPicPr>
+        <p:blipFill>
+          <a:blip r:embed="rId4"/>
+          <a:stretch>
+            <a:fillRect/>
+          </a:stretch>
+        </p:blipFill>
+        <p:spPr>
+          <a:xfrm>
+            <a:off x="9311640" y="1847087"/>
+            <a:ext cx="1220724" cy="1220724"/>
+          </a:xfrm>
+          <a:prstGeom prst="rect">
+            <a:avLst/>
+          </a:prstGeom>
+        </p:spPr>
+      </p:pic>
+      <p:sp>
+        <p:nvSpPr>
+          <p:cNvPr id="20" name="TextBox 19"/>
+          <p:cNvSpPr txBox="1"/>
+          <p:nvPr/>
+        </p:nvSpPr>
+        <p:spPr>
+          <a:xfrm>
+            <a:off x="8182660" y="3159251"/>
+            <a:ext cx="3478682" cy="621792"/>
+          </a:xfrm>
+          <a:prstGeom prst="rect">
+            <a:avLst/>
+          </a:prstGeom>
+          <a:noFill/>
+        </p:spPr>
+        <p:txBody>
+          <a:bodyPr wrap="square" anchor="t"/>
+          <a:lstStyle/>
+          <a:p>
+            <a:pPr algn="ctr"/>
+            <a:r>
+              <a:rPr sz="1300" b="1" i="0">
+                <a:solidFill>
+                  <a:srgbClr val="095292"/>
+                </a:solidFill>
+                <a:latin typeface="Calibri"/>
+              </a:rPr>
+              <a:t>Mermaid</a:t>
+            </a:r>
+          </a:p>
+          <a:p>
+            <a:pPr algn="ctr">
+              <a:spcBef>
+                <a:spcPts val="200"/>
+              </a:spcBef>
             </a:pPr>
             <a:r>
-              <a:rPr sz="2000" b="0" i="0">
-                <a:solidFill>
-                  <a:srgbClr val="333333"/>
-                </a:solidFill>
-                <a:latin typeface="Calibri"/>
-              </a:rPr>
-              <a:t>–   Todo lo que construyan hoy entra al </a:t>
-            </a:r>
-            <a:r>
-              <a:rPr sz="2000" b="1" i="0">
-                <a:solidFill>
-                  <a:srgbClr val="333333"/>
-                </a:solidFill>
-                <a:latin typeface="Calibri"/>
-              </a:rPr>
-              <a:t>informe/repo del PI</a:t>
-            </a:r>
-            <a:r>
-              <a:rPr sz="2000" b="0" i="0">
-                <a:solidFill>
-                  <a:srgbClr val="333333"/>
-                </a:solidFill>
-                <a:latin typeface="Calibri"/>
-              </a:rPr>
-              <a:t> (no es lab suelto).</a:t>
-            </a:r>
-          </a:p>
-          <a:p>
-            <a:pPr>
-              <a:spcAft>
-                <a:spcPts val="800"/>
-              </a:spcAft>
+              <a:rPr sz="1000" b="0" i="0">
+                <a:solidFill>
+                  <a:srgbClr val="666666"/>
+                </a:solidFill>
+                <a:latin typeface="Calibri"/>
+              </a:rPr>
+              <a:t>Codigo del diagrama</a:t>
+            </a:r>
+          </a:p>
+        </p:txBody>
+      </p:sp>
+      <p:sp>
+        <p:nvSpPr>
+          <p:cNvPr id="21" name="Rounded Rectangle 20"/>
+          <p:cNvSpPr/>
+          <p:nvPr/>
+        </p:nvSpPr>
+        <p:spPr>
+          <a:xfrm>
+            <a:off x="4283354" y="4055364"/>
+            <a:ext cx="3624986" cy="2299716"/>
+          </a:xfrm>
+          <a:prstGeom prst="roundRect">
+            <a:avLst>
+              <a:gd name="adj" fmla="val 12000"/>
+            </a:avLst>
+          </a:prstGeom>
+          <a:solidFill>
+            <a:srgbClr val="F2F2F2"/>
+          </a:solidFill>
+          <a:ln>
+            <a:noFill/>
+          </a:ln>
+        </p:spPr>
+        <p:style>
+          <a:lnRef idx="1">
+            <a:schemeClr val="accent1"/>
+          </a:lnRef>
+          <a:fillRef idx="3">
+            <a:schemeClr val="accent1"/>
+          </a:fillRef>
+          <a:effectRef idx="2">
+            <a:schemeClr val="accent1"/>
+          </a:effectRef>
+          <a:fontRef idx="minor">
+            <a:schemeClr val="lt1"/>
+          </a:fontRef>
+        </p:style>
+        <p:txBody>
+          <a:bodyPr rtlCol="0" anchor="ctr"/>
+          <a:lstStyle/>
+          <a:p>
+            <a:pPr algn="ctr"/>
+          </a:p>
+        </p:txBody>
+      </p:sp>
+      <p:sp>
+        <p:nvSpPr>
+          <p:cNvPr id="22" name="Rectangle 21"/>
+          <p:cNvSpPr/>
+          <p:nvPr/>
+        </p:nvSpPr>
+        <p:spPr>
+          <a:xfrm>
+            <a:off x="4283354" y="4055364"/>
+            <a:ext cx="3624986" cy="64008"/>
+          </a:xfrm>
+          <a:prstGeom prst="rect">
+            <a:avLst/>
+          </a:prstGeom>
+          <a:solidFill>
+            <a:srgbClr val="095292"/>
+          </a:solidFill>
+          <a:ln>
+            <a:noFill/>
+          </a:ln>
+        </p:spPr>
+        <p:style>
+          <a:lnRef idx="1">
+            <a:schemeClr val="accent1"/>
+          </a:lnRef>
+          <a:fillRef idx="3">
+            <a:schemeClr val="accent1"/>
+          </a:fillRef>
+          <a:effectRef idx="2">
+            <a:schemeClr val="accent1"/>
+          </a:effectRef>
+          <a:fontRef idx="minor">
+            <a:schemeClr val="lt1"/>
+          </a:fontRef>
+        </p:style>
+        <p:txBody>
+          <a:bodyPr rtlCol="0" anchor="ctr"/>
+          <a:lstStyle/>
+          <a:p>
+            <a:pPr algn="ctr"/>
+          </a:p>
+        </p:txBody>
+      </p:sp>
+      <p:sp>
+        <p:nvSpPr>
+          <p:cNvPr id="23" name="Rectangle 22"/>
+          <p:cNvSpPr/>
+          <p:nvPr/>
+        </p:nvSpPr>
+        <p:spPr>
+          <a:xfrm>
+            <a:off x="4283354" y="4119372"/>
+            <a:ext cx="3624986" cy="27432"/>
+          </a:xfrm>
+          <a:prstGeom prst="rect">
+            <a:avLst/>
+          </a:prstGeom>
+          <a:solidFill>
+            <a:srgbClr val="FFD000"/>
+          </a:solidFill>
+          <a:ln>
+            <a:noFill/>
+          </a:ln>
+        </p:spPr>
+        <p:style>
+          <a:lnRef idx="1">
+            <a:schemeClr val="accent1"/>
+          </a:lnRef>
+          <a:fillRef idx="3">
+            <a:schemeClr val="accent1"/>
+          </a:fillRef>
+          <a:effectRef idx="2">
+            <a:schemeClr val="accent1"/>
+          </a:effectRef>
+          <a:fontRef idx="minor">
+            <a:schemeClr val="lt1"/>
+          </a:fontRef>
+        </p:style>
+        <p:txBody>
+          <a:bodyPr rtlCol="0" anchor="ctr"/>
+          <a:lstStyle/>
+          <a:p>
+            <a:pPr algn="ctr"/>
+          </a:p>
+        </p:txBody>
+      </p:sp>
+      <p:pic>
+        <p:nvPicPr>
+          <p:cNvPr id="24" name="Picture 23" descr="examlab.png"/>
+          <p:cNvPicPr>
+            <a:picLocks noChangeAspect="1"/>
+          </p:cNvPicPr>
+          <p:nvPr/>
+        </p:nvPicPr>
+        <p:blipFill>
+          <a:blip r:embed="rId5"/>
+          <a:stretch>
+            <a:fillRect/>
+          </a:stretch>
+        </p:blipFill>
+        <p:spPr>
+          <a:xfrm>
+            <a:off x="5485485" y="4311396"/>
+            <a:ext cx="1220724" cy="1220724"/>
+          </a:xfrm>
+          <a:prstGeom prst="rect">
+            <a:avLst/>
+          </a:prstGeom>
+        </p:spPr>
+      </p:pic>
+      <p:sp>
+        <p:nvSpPr>
+          <p:cNvPr id="25" name="TextBox 24"/>
+          <p:cNvSpPr txBox="1"/>
+          <p:nvPr/>
+        </p:nvSpPr>
+        <p:spPr>
+          <a:xfrm>
+            <a:off x="4356506" y="5623560"/>
+            <a:ext cx="3478682" cy="621792"/>
+          </a:xfrm>
+          <a:prstGeom prst="rect">
+            <a:avLst/>
+          </a:prstGeom>
+          <a:noFill/>
+        </p:spPr>
+        <p:txBody>
+          <a:bodyPr wrap="square" anchor="t"/>
+          <a:lstStyle/>
+          <a:p>
+            <a:pPr algn="ctr"/>
+            <a:r>
+              <a:rPr sz="1300" b="1" i="0">
+                <a:solidFill>
+                  <a:srgbClr val="095292"/>
+                </a:solidFill>
+                <a:latin typeface="Calibri"/>
+              </a:rPr>
+              <a:t>la plataforma del curso</a:t>
+            </a:r>
+          </a:p>
+          <a:p>
+            <a:pPr algn="ctr">
+              <a:spcBef>
+                <a:spcPts val="200"/>
+              </a:spcBef>
             </a:pPr>
             <a:r>
-              <a:rPr sz="2000" b="0" i="0">
-                <a:solidFill>
-                  <a:srgbClr val="333333"/>
-                </a:solidFill>
-                <a:latin typeface="Calibri"/>
-              </a:rPr>
-              <a:t>–   Individual por defecto · el docente puede autorizar equipos de 2–3; la entrega en la plataforma del curso siempre es individual.</a:t>
-            </a:r>
-          </a:p>
-        </p:txBody>
-      </p:sp>
-      <p:sp>
-        <p:nvSpPr>
-          <p:cNvPr id="6" name="TextBox 5"/>
+              <a:rPr sz="1000" b="0" i="0">
+                <a:solidFill>
+                  <a:srgbClr val="666666"/>
+                </a:solidFill>
+                <a:latin typeface="Calibri"/>
+              </a:rPr>
+              <a:t>Donde se entrega</a:t>
+            </a:r>
+          </a:p>
+        </p:txBody>
+      </p:sp>
+      <p:sp>
+        <p:nvSpPr>
+          <p:cNvPr id="26" name="TextBox 25"/>
           <p:cNvSpPr txBox="1"/>
           <p:nvPr/>
         </p:nvSpPr>
@@ -9685,7 +8787,7 @@
         <p:spPr>
           <a:xfrm>
             <a:off x="0" y="0"/>
-            <a:ext cx="12191695" cy="960120"/>
+            <a:ext cx="12191695" cy="1170432"/>
           </a:xfrm>
           <a:prstGeom prst="rect">
             <a:avLst/>
@@ -9727,7 +8829,7 @@
         </p:nvSpPr>
         <p:spPr>
           <a:xfrm>
-            <a:off x="0" y="960120"/>
+            <a:off x="0" y="1170432"/>
             <a:ext cx="12191695" cy="41148"/>
           </a:xfrm>
           <a:prstGeom prst="rect">
@@ -9771,7 +8873,7 @@
         <p:spPr>
           <a:xfrm>
             <a:off x="457200" y="164592"/>
-            <a:ext cx="11277295" cy="502920"/>
+            <a:ext cx="11277295" cy="384048"/>
           </a:xfrm>
           <a:prstGeom prst="rect">
             <a:avLst/>
@@ -9791,7 +8893,7 @@
                 </a:solidFill>
                 <a:latin typeface="Calibri"/>
               </a:rPr>
-              <a:t>Manos a la obra (paso a paso)</a:t>
+              <a:t>Del boceto a la plataforma del curso (diagrama)</a:t>
             </a:r>
           </a:p>
         </p:txBody>
@@ -9804,8 +8906,8 @@
         </p:nvSpPr>
         <p:spPr>
           <a:xfrm>
-            <a:off x="457200" y="1170432"/>
-            <a:ext cx="11277295" cy="5230368"/>
+            <a:off x="457200" y="566928"/>
+            <a:ext cx="11277295" cy="411480"/>
           </a:xfrm>
           <a:prstGeom prst="rect">
             <a:avLst/>
@@ -9818,171 +8920,705 @@
           </a:bodyPr>
           <a:lstStyle/>
           <a:p>
+            <a:r>
+              <a:rPr sz="1400" b="0" i="0">
+                <a:solidFill>
+                  <a:srgbClr val="B8D8EE"/>
+                </a:solidFill>
+                <a:latin typeface="Calibri"/>
+              </a:rPr>
+              <a:t>El diagrama se entrega como código Mermaid dentro de la plataforma del curso, no como imagen</a:t>
+            </a:r>
+          </a:p>
+        </p:txBody>
+      </p:sp>
+      <p:sp>
+        <p:nvSpPr>
+          <p:cNvPr id="6" name="Rounded Rectangle 5"/>
+          <p:cNvSpPr/>
+          <p:nvPr/>
+        </p:nvSpPr>
+        <p:spPr>
+          <a:xfrm>
+            <a:off x="457200" y="1659636"/>
+            <a:ext cx="11277295" cy="1051560"/>
+          </a:xfrm>
+          <a:prstGeom prst="roundRect">
+            <a:avLst>
+              <a:gd name="adj" fmla="val 12000"/>
+            </a:avLst>
+          </a:prstGeom>
+          <a:solidFill>
+            <a:srgbClr val="F2F2F2"/>
+          </a:solidFill>
+          <a:ln>
+            <a:noFill/>
+          </a:ln>
+        </p:spPr>
+        <p:style>
+          <a:lnRef idx="1">
+            <a:schemeClr val="accent1"/>
+          </a:lnRef>
+          <a:fillRef idx="3">
+            <a:schemeClr val="accent1"/>
+          </a:fillRef>
+          <a:effectRef idx="2">
+            <a:schemeClr val="accent1"/>
+          </a:effectRef>
+          <a:fontRef idx="minor">
+            <a:schemeClr val="lt1"/>
+          </a:fontRef>
+        </p:style>
+        <p:txBody>
+          <a:bodyPr rtlCol="0" anchor="ctr"/>
+          <a:lstStyle/>
+          <a:p>
+            <a:pPr algn="ctr"/>
+          </a:p>
+        </p:txBody>
+      </p:sp>
+      <p:sp>
+        <p:nvSpPr>
+          <p:cNvPr id="7" name="Rounded Rectangle 6"/>
+          <p:cNvSpPr/>
+          <p:nvPr/>
+        </p:nvSpPr>
+        <p:spPr>
+          <a:xfrm>
+            <a:off x="594360" y="1965960"/>
+            <a:ext cx="438912" cy="438912"/>
+          </a:xfrm>
+          <a:prstGeom prst="roundRect">
+            <a:avLst>
+              <a:gd name="adj" fmla="val 12000"/>
+            </a:avLst>
+          </a:prstGeom>
+          <a:solidFill>
+            <a:srgbClr val="095292"/>
+          </a:solidFill>
+          <a:ln>
+            <a:noFill/>
+          </a:ln>
+        </p:spPr>
+        <p:style>
+          <a:lnRef idx="1">
+            <a:schemeClr val="accent1"/>
+          </a:lnRef>
+          <a:fillRef idx="3">
+            <a:schemeClr val="accent1"/>
+          </a:fillRef>
+          <a:effectRef idx="2">
+            <a:schemeClr val="accent1"/>
+          </a:effectRef>
+          <a:fontRef idx="minor">
+            <a:schemeClr val="lt1"/>
+          </a:fontRef>
+        </p:style>
+        <p:txBody>
+          <a:bodyPr rtlCol="0" anchor="ctr"/>
+          <a:lstStyle/>
+          <a:p>
+            <a:pPr algn="ctr"/>
+          </a:p>
+        </p:txBody>
+      </p:sp>
+      <p:sp>
+        <p:nvSpPr>
+          <p:cNvPr id="8" name="TextBox 7"/>
+          <p:cNvSpPr txBox="1"/>
+          <p:nvPr/>
+        </p:nvSpPr>
+        <p:spPr>
+          <a:xfrm>
+            <a:off x="594360" y="1965960"/>
+            <a:ext cx="438912" cy="438912"/>
+          </a:xfrm>
+          <a:prstGeom prst="rect">
+            <a:avLst/>
+          </a:prstGeom>
+          <a:noFill/>
+        </p:spPr>
+        <p:txBody>
+          <a:bodyPr wrap="square" anchor="ctr"/>
+          <a:lstStyle/>
+          <a:p>
+            <a:pPr algn="ctr"/>
+            <a:r>
+              <a:rPr sz="1600" b="1" i="0">
+                <a:solidFill>
+                  <a:srgbClr val="FFFFFF"/>
+                </a:solidFill>
+                <a:latin typeface="Calibri"/>
+              </a:rPr>
+              <a:t>1</a:t>
+            </a:r>
+          </a:p>
+        </p:txBody>
+      </p:sp>
+      <p:sp>
+        <p:nvSpPr>
+          <p:cNvPr id="9" name="TextBox 8"/>
+          <p:cNvSpPr txBox="1"/>
+          <p:nvPr/>
+        </p:nvSpPr>
+        <p:spPr>
+          <a:xfrm>
+            <a:off x="1188720" y="1751076"/>
+            <a:ext cx="10271455" cy="886968"/>
+          </a:xfrm>
+          <a:prstGeom prst="rect">
+            <a:avLst/>
+          </a:prstGeom>
+          <a:noFill/>
+        </p:spPr>
+        <p:txBody>
+          <a:bodyPr wrap="square" anchor="ctr"/>
+          <a:lstStyle/>
+          <a:p>
+            <a:r>
+              <a:rPr sz="1500" b="1" i="0">
+                <a:solidFill>
+                  <a:srgbClr val="095292"/>
+                </a:solidFill>
+                <a:latin typeface="Calibri"/>
+              </a:rPr>
+              <a:t>Disena visual</a:t>
+            </a:r>
+          </a:p>
+          <a:p>
             <a:pPr>
-              <a:spcAft>
-                <a:spcPts val="800"/>
-              </a:spcAft>
+              <a:spcBef>
+                <a:spcPts val="200"/>
+              </a:spcBef>
             </a:pPr>
             <a:r>
-              <a:rPr sz="1800" b="1" i="0">
+              <a:rPr sz="1300" b="0" i="0">
                 <a:solidFill>
                   <a:srgbClr val="333333"/>
                 </a:solidFill>
                 <a:latin typeface="Calibri"/>
               </a:rPr>
-              <a:t>1.</a:t>
-            </a:r>
-            <a:r>
-              <a:rPr sz="1800" b="0" i="0">
+              <a:t>Dibuja el diagrama como quieras en Excalidraw o draw.io: es mas rapido arrastrar cajas que escribir codigo, y ahi es donde piensas el modelo.</a:t>
+            </a:r>
+          </a:p>
+        </p:txBody>
+      </p:sp>
+      <p:sp>
+        <p:nvSpPr>
+          <p:cNvPr id="10" name="Rounded Rectangle 9"/>
+          <p:cNvSpPr/>
+          <p:nvPr/>
+        </p:nvSpPr>
+        <p:spPr>
+          <a:xfrm>
+            <a:off x="457200" y="2802636"/>
+            <a:ext cx="11277295" cy="1051560"/>
+          </a:xfrm>
+          <a:prstGeom prst="roundRect">
+            <a:avLst>
+              <a:gd name="adj" fmla="val 12000"/>
+            </a:avLst>
+          </a:prstGeom>
+          <a:solidFill>
+            <a:srgbClr val="E8F4FA"/>
+          </a:solidFill>
+          <a:ln>
+            <a:noFill/>
+          </a:ln>
+        </p:spPr>
+        <p:style>
+          <a:lnRef idx="1">
+            <a:schemeClr val="accent1"/>
+          </a:lnRef>
+          <a:fillRef idx="3">
+            <a:schemeClr val="accent1"/>
+          </a:fillRef>
+          <a:effectRef idx="2">
+            <a:schemeClr val="accent1"/>
+          </a:effectRef>
+          <a:fontRef idx="minor">
+            <a:schemeClr val="lt1"/>
+          </a:fontRef>
+        </p:style>
+        <p:txBody>
+          <a:bodyPr rtlCol="0" anchor="ctr"/>
+          <a:lstStyle/>
+          <a:p>
+            <a:pPr algn="ctr"/>
+          </a:p>
+        </p:txBody>
+      </p:sp>
+      <p:sp>
+        <p:nvSpPr>
+          <p:cNvPr id="11" name="Rounded Rectangle 10"/>
+          <p:cNvSpPr/>
+          <p:nvPr/>
+        </p:nvSpPr>
+        <p:spPr>
+          <a:xfrm>
+            <a:off x="594360" y="3108960"/>
+            <a:ext cx="438912" cy="438912"/>
+          </a:xfrm>
+          <a:prstGeom prst="roundRect">
+            <a:avLst>
+              <a:gd name="adj" fmla="val 12000"/>
+            </a:avLst>
+          </a:prstGeom>
+          <a:solidFill>
+            <a:srgbClr val="095292"/>
+          </a:solidFill>
+          <a:ln>
+            <a:noFill/>
+          </a:ln>
+        </p:spPr>
+        <p:style>
+          <a:lnRef idx="1">
+            <a:schemeClr val="accent1"/>
+          </a:lnRef>
+          <a:fillRef idx="3">
+            <a:schemeClr val="accent1"/>
+          </a:fillRef>
+          <a:effectRef idx="2">
+            <a:schemeClr val="accent1"/>
+          </a:effectRef>
+          <a:fontRef idx="minor">
+            <a:schemeClr val="lt1"/>
+          </a:fontRef>
+        </p:style>
+        <p:txBody>
+          <a:bodyPr rtlCol="0" anchor="ctr"/>
+          <a:lstStyle/>
+          <a:p>
+            <a:pPr algn="ctr"/>
+          </a:p>
+        </p:txBody>
+      </p:sp>
+      <p:sp>
+        <p:nvSpPr>
+          <p:cNvPr id="12" name="TextBox 11"/>
+          <p:cNvSpPr txBox="1"/>
+          <p:nvPr/>
+        </p:nvSpPr>
+        <p:spPr>
+          <a:xfrm>
+            <a:off x="594360" y="3108960"/>
+            <a:ext cx="438912" cy="438912"/>
+          </a:xfrm>
+          <a:prstGeom prst="rect">
+            <a:avLst/>
+          </a:prstGeom>
+          <a:noFill/>
+        </p:spPr>
+        <p:txBody>
+          <a:bodyPr wrap="square" anchor="ctr"/>
+          <a:lstStyle/>
+          <a:p>
+            <a:pPr algn="ctr"/>
+            <a:r>
+              <a:rPr sz="1600" b="1" i="0">
+                <a:solidFill>
+                  <a:srgbClr val="FFFFFF"/>
+                </a:solidFill>
+                <a:latin typeface="Calibri"/>
+              </a:rPr>
+              <a:t>2</a:t>
+            </a:r>
+          </a:p>
+        </p:txBody>
+      </p:sp>
+      <p:sp>
+        <p:nvSpPr>
+          <p:cNvPr id="13" name="TextBox 12"/>
+          <p:cNvSpPr txBox="1"/>
+          <p:nvPr/>
+        </p:nvSpPr>
+        <p:spPr>
+          <a:xfrm>
+            <a:off x="1188720" y="2894076"/>
+            <a:ext cx="10271455" cy="886968"/>
+          </a:xfrm>
+          <a:prstGeom prst="rect">
+            <a:avLst/>
+          </a:prstGeom>
+          <a:noFill/>
+        </p:spPr>
+        <p:txBody>
+          <a:bodyPr wrap="square" anchor="ctr"/>
+          <a:lstStyle/>
+          <a:p>
+            <a:r>
+              <a:rPr sz="1500" b="1" i="0">
+                <a:solidFill>
+                  <a:srgbClr val="095292"/>
+                </a:solidFill>
+                <a:latin typeface="Calibri"/>
+              </a:rPr>
+              <a:t>Traduce con IA</a:t>
+            </a:r>
+          </a:p>
+          <a:p>
+            <a:pPr>
+              <a:spcBef>
+                <a:spcPts val="200"/>
+              </a:spcBef>
+            </a:pPr>
+            <a:r>
+              <a:rPr sz="1300" b="0" i="0">
                 <a:solidFill>
                   <a:srgbClr val="333333"/>
                 </a:solidFill>
                 <a:latin typeface="Calibri"/>
               </a:rPr>
-              <a:t> Paso 1: tome los 5 componentes de su C4Deployment de la Clase 7 y clasifique cada uno como escala horizontal, escala vertical o no escala, verificando que al menos uno quede en no escala con justificacion tecnica, porque una politica donde todo escala no es una politica; el resultado abre la seccion Escalabilidad del informe.</a:t>
+              <a:t>Copia o describe tu boceto a una IA y pidele el codigo Mermaid: «convierte este diagrama a Mermaid usando flowchart». Revisa el resultado: la IA acierta la sintaxis, no tu modelo.</a:t>
+            </a:r>
+          </a:p>
+        </p:txBody>
+      </p:sp>
+      <p:sp>
+        <p:nvSpPr>
+          <p:cNvPr id="14" name="Rounded Rectangle 13"/>
+          <p:cNvSpPr/>
+          <p:nvPr/>
+        </p:nvSpPr>
+        <p:spPr>
+          <a:xfrm>
+            <a:off x="457200" y="3945636"/>
+            <a:ext cx="11277295" cy="1051560"/>
+          </a:xfrm>
+          <a:prstGeom prst="roundRect">
+            <a:avLst>
+              <a:gd name="adj" fmla="val 12000"/>
+            </a:avLst>
+          </a:prstGeom>
+          <a:solidFill>
+            <a:srgbClr val="F2F2F2"/>
+          </a:solidFill>
+          <a:ln>
+            <a:noFill/>
+          </a:ln>
+        </p:spPr>
+        <p:style>
+          <a:lnRef idx="1">
+            <a:schemeClr val="accent1"/>
+          </a:lnRef>
+          <a:fillRef idx="3">
+            <a:schemeClr val="accent1"/>
+          </a:fillRef>
+          <a:effectRef idx="2">
+            <a:schemeClr val="accent1"/>
+          </a:effectRef>
+          <a:fontRef idx="minor">
+            <a:schemeClr val="lt1"/>
+          </a:fontRef>
+        </p:style>
+        <p:txBody>
+          <a:bodyPr rtlCol="0" anchor="ctr"/>
+          <a:lstStyle/>
+          <a:p>
+            <a:pPr algn="ctr"/>
+          </a:p>
+        </p:txBody>
+      </p:sp>
+      <p:sp>
+        <p:nvSpPr>
+          <p:cNvPr id="15" name="Rounded Rectangle 14"/>
+          <p:cNvSpPr/>
+          <p:nvPr/>
+        </p:nvSpPr>
+        <p:spPr>
+          <a:xfrm>
+            <a:off x="594360" y="4251960"/>
+            <a:ext cx="438912" cy="438912"/>
+          </a:xfrm>
+          <a:prstGeom prst="roundRect">
+            <a:avLst>
+              <a:gd name="adj" fmla="val 12000"/>
+            </a:avLst>
+          </a:prstGeom>
+          <a:solidFill>
+            <a:srgbClr val="095292"/>
+          </a:solidFill>
+          <a:ln>
+            <a:noFill/>
+          </a:ln>
+        </p:spPr>
+        <p:style>
+          <a:lnRef idx="1">
+            <a:schemeClr val="accent1"/>
+          </a:lnRef>
+          <a:fillRef idx="3">
+            <a:schemeClr val="accent1"/>
+          </a:fillRef>
+          <a:effectRef idx="2">
+            <a:schemeClr val="accent1"/>
+          </a:effectRef>
+          <a:fontRef idx="minor">
+            <a:schemeClr val="lt1"/>
+          </a:fontRef>
+        </p:style>
+        <p:txBody>
+          <a:bodyPr rtlCol="0" anchor="ctr"/>
+          <a:lstStyle/>
+          <a:p>
+            <a:pPr algn="ctr"/>
+          </a:p>
+        </p:txBody>
+      </p:sp>
+      <p:sp>
+        <p:nvSpPr>
+          <p:cNvPr id="16" name="TextBox 15"/>
+          <p:cNvSpPr txBox="1"/>
+          <p:nvPr/>
+        </p:nvSpPr>
+        <p:spPr>
+          <a:xfrm>
+            <a:off x="594360" y="4251960"/>
+            <a:ext cx="438912" cy="438912"/>
+          </a:xfrm>
+          <a:prstGeom prst="rect">
+            <a:avLst/>
+          </a:prstGeom>
+          <a:noFill/>
+        </p:spPr>
+        <p:txBody>
+          <a:bodyPr wrap="square" anchor="ctr"/>
+          <a:lstStyle/>
+          <a:p>
+            <a:pPr algn="ctr"/>
+            <a:r>
+              <a:rPr sz="1600" b="1" i="0">
+                <a:solidFill>
+                  <a:srgbClr val="FFFFFF"/>
+                </a:solidFill>
+                <a:latin typeface="Calibri"/>
+              </a:rPr>
+              <a:t>3</a:t>
+            </a:r>
+          </a:p>
+        </p:txBody>
+      </p:sp>
+      <p:sp>
+        <p:nvSpPr>
+          <p:cNvPr id="17" name="TextBox 16"/>
+          <p:cNvSpPr txBox="1"/>
+          <p:nvPr/>
+        </p:nvSpPr>
+        <p:spPr>
+          <a:xfrm>
+            <a:off x="1188720" y="4037076"/>
+            <a:ext cx="10271455" cy="886968"/>
+          </a:xfrm>
+          <a:prstGeom prst="rect">
+            <a:avLst/>
+          </a:prstGeom>
+          <a:noFill/>
+        </p:spPr>
+        <p:txBody>
+          <a:bodyPr wrap="square" anchor="ctr"/>
+          <a:lstStyle/>
+          <a:p>
+            <a:r>
+              <a:rPr sz="1500" b="1" i="0">
+                <a:solidFill>
+                  <a:srgbClr val="095292"/>
+                </a:solidFill>
+                <a:latin typeface="Calibri"/>
+              </a:rPr>
+              <a:t>Pega y renderiza en la plataforma del curso</a:t>
             </a:r>
           </a:p>
           <a:p>
             <a:pPr>
-              <a:spcAft>
-                <a:spcPts val="800"/>
-              </a:spcAft>
+              <a:spcBef>
+                <a:spcPts val="200"/>
+              </a:spcBef>
             </a:pPr>
             <a:r>
-              <a:rPr sz="1800" b="0" i="0">
+              <a:rPr sz="1300" b="0" i="0">
                 <a:solidFill>
                   <a:srgbClr val="333333"/>
                 </a:solidFill>
                 <a:latin typeface="Calibri"/>
               </a:rPr>
-              <a:t>–   </a:t>
-            </a:r>
-            <a:r>
-              <a:rPr sz="1800" b="1" i="0">
+              <a:t>Pega ese codigo en la caja de texto de la pregunta y mira como lo dibuja la plataforma. Si no renderiza, corrige ahi mismo: lo que se califica es el diagrama renderizado dentro de la plataforma del curso.</a:t>
+            </a:r>
+          </a:p>
+        </p:txBody>
+      </p:sp>
+      <p:sp>
+        <p:nvSpPr>
+          <p:cNvPr id="18" name="Rounded Rectangle 17"/>
+          <p:cNvSpPr/>
+          <p:nvPr/>
+        </p:nvSpPr>
+        <p:spPr>
+          <a:xfrm>
+            <a:off x="457200" y="5088636"/>
+            <a:ext cx="11277295" cy="1051560"/>
+          </a:xfrm>
+          <a:prstGeom prst="roundRect">
+            <a:avLst>
+              <a:gd name="adj" fmla="val 12000"/>
+            </a:avLst>
+          </a:prstGeom>
+          <a:solidFill>
+            <a:srgbClr val="E8F4FA"/>
+          </a:solidFill>
+          <a:ln>
+            <a:noFill/>
+          </a:ln>
+        </p:spPr>
+        <p:style>
+          <a:lnRef idx="1">
+            <a:schemeClr val="accent1"/>
+          </a:lnRef>
+          <a:fillRef idx="3">
+            <a:schemeClr val="accent1"/>
+          </a:fillRef>
+          <a:effectRef idx="2">
+            <a:schemeClr val="accent1"/>
+          </a:effectRef>
+          <a:fontRef idx="minor">
+            <a:schemeClr val="lt1"/>
+          </a:fontRef>
+        </p:style>
+        <p:txBody>
+          <a:bodyPr rtlCol="0" anchor="ctr"/>
+          <a:lstStyle/>
+          <a:p>
+            <a:pPr algn="ctr"/>
+          </a:p>
+        </p:txBody>
+      </p:sp>
+      <p:sp>
+        <p:nvSpPr>
+          <p:cNvPr id="19" name="Rounded Rectangle 18"/>
+          <p:cNvSpPr/>
+          <p:nvPr/>
+        </p:nvSpPr>
+        <p:spPr>
+          <a:xfrm>
+            <a:off x="594360" y="5394960"/>
+            <a:ext cx="438912" cy="438912"/>
+          </a:xfrm>
+          <a:prstGeom prst="roundRect">
+            <a:avLst>
+              <a:gd name="adj" fmla="val 12000"/>
+            </a:avLst>
+          </a:prstGeom>
+          <a:solidFill>
+            <a:srgbClr val="095292"/>
+          </a:solidFill>
+          <a:ln>
+            <a:noFill/>
+          </a:ln>
+        </p:spPr>
+        <p:style>
+          <a:lnRef idx="1">
+            <a:schemeClr val="accent1"/>
+          </a:lnRef>
+          <a:fillRef idx="3">
+            <a:schemeClr val="accent1"/>
+          </a:fillRef>
+          <a:effectRef idx="2">
+            <a:schemeClr val="accent1"/>
+          </a:effectRef>
+          <a:fontRef idx="minor">
+            <a:schemeClr val="lt1"/>
+          </a:fontRef>
+        </p:style>
+        <p:txBody>
+          <a:bodyPr rtlCol="0" anchor="ctr"/>
+          <a:lstStyle/>
+          <a:p>
+            <a:pPr algn="ctr"/>
+          </a:p>
+        </p:txBody>
+      </p:sp>
+      <p:sp>
+        <p:nvSpPr>
+          <p:cNvPr id="20" name="TextBox 19"/>
+          <p:cNvSpPr txBox="1"/>
+          <p:nvPr/>
+        </p:nvSpPr>
+        <p:spPr>
+          <a:xfrm>
+            <a:off x="594360" y="5394960"/>
+            <a:ext cx="438912" cy="438912"/>
+          </a:xfrm>
+          <a:prstGeom prst="rect">
+            <a:avLst/>
+          </a:prstGeom>
+          <a:noFill/>
+        </p:spPr>
+        <p:txBody>
+          <a:bodyPr wrap="square" anchor="ctr"/>
+          <a:lstStyle/>
+          <a:p>
+            <a:pPr algn="ctr"/>
+            <a:r>
+              <a:rPr sz="1600" b="1" i="0">
+                <a:solidFill>
+                  <a:srgbClr val="FFFFFF"/>
+                </a:solidFill>
+                <a:latin typeface="Calibri"/>
+              </a:rPr>
+              <a:t>4</a:t>
+            </a:r>
+          </a:p>
+        </p:txBody>
+      </p:sp>
+      <p:sp>
+        <p:nvSpPr>
+          <p:cNvPr id="21" name="TextBox 20"/>
+          <p:cNvSpPr txBox="1"/>
+          <p:nvPr/>
+        </p:nvSpPr>
+        <p:spPr>
+          <a:xfrm>
+            <a:off x="1188720" y="5180076"/>
+            <a:ext cx="10271455" cy="886968"/>
+          </a:xfrm>
+          <a:prstGeom prst="rect">
+            <a:avLst/>
+          </a:prstGeom>
+          <a:noFill/>
+        </p:spPr>
+        <p:txBody>
+          <a:bodyPr wrap="square" anchor="ctr"/>
+          <a:lstStyle/>
+          <a:p>
+            <a:r>
+              <a:rPr sz="1500" b="1" i="0">
+                <a:solidFill>
+                  <a:srgbClr val="095292"/>
+                </a:solidFill>
+                <a:latin typeface="Calibri"/>
+              </a:rPr>
+              <a:t>Guarda el PNG para tu PI</a:t>
+            </a:r>
+          </a:p>
+          <a:p>
+            <a:pPr>
+              <a:spcBef>
+                <a:spcPts val="200"/>
+              </a:spcBef>
+            </a:pPr>
+            <a:r>
+              <a:rPr sz="1300" b="0" i="0">
                 <a:solidFill>
                   <a:srgbClr val="333333"/>
                 </a:solidFill>
                 <a:latin typeface="Calibri"/>
               </a:rPr>
-              <a:t>2.</a:t>
-            </a:r>
-            <a:r>
-              <a:rPr sz="1800" b="0" i="0">
-                <a:solidFill>
-                  <a:srgbClr val="333333"/>
-                </a:solidFill>
-                <a:latin typeface="Calibri"/>
-              </a:rPr>
-              <a:t> Paso 2: complete la tabla de politica de escalado con 6 columnas y 5 filas (componente, tipo de escala, disparador de subida, disparador de bajada, minimo y maximo, tiempo de enfriamiento), verificando que cada disparador tenga metrica, umbral numerico y ventana de tiempo, y que ningun maximo quede en infinito o sin definir.</a:t>
-            </a:r>
-          </a:p>
-          <a:p>
-            <a:pPr>
-              <a:spcAft>
-                <a:spcPts val="800"/>
-              </a:spcAft>
-            </a:pPr>
-            <a:r>
-              <a:rPr sz="1800" b="0" i="0">
-                <a:solidFill>
-                  <a:srgbClr val="333333"/>
-                </a:solidFill>
-                <a:latin typeface="Calibri"/>
-              </a:rPr>
-              <a:t>–   </a:t>
-            </a:r>
-            <a:r>
-              <a:rPr sz="1800" b="1" i="0">
-                <a:solidFill>
-                  <a:srgbClr val="333333"/>
-                </a:solidFill>
-                <a:latin typeface="Calibri"/>
-              </a:rPr>
-              <a:t>3.</a:t>
-            </a:r>
-            <a:r>
-              <a:rPr sz="1800" b="0" i="0">
-                <a:solidFill>
-                  <a:srgbClr val="333333"/>
-                </a:solidFill>
-                <a:latin typeface="Calibri"/>
-              </a:rPr>
-              <a:t> Paso 3: escriba en la plataforma del curso el diagrama Mermaid de la maquina de decision del autoescalado con el nodo de observacion, los dos rombos de decision, las acciones de subida y bajada, el enfriamiento y el nodo de lo que no escala, verificando al renderizar que el ciclo se cierre sobre el nodo de observacion y que los umbrales del diagrama sean los mismos numeros de la tabla.</a:t>
-            </a:r>
-          </a:p>
-          <a:p>
-            <a:pPr>
-              <a:spcAft>
-                <a:spcPts val="800"/>
-              </a:spcAft>
-            </a:pPr>
-            <a:r>
-              <a:rPr sz="1800" b="0" i="0">
-                <a:solidFill>
-                  <a:srgbClr val="333333"/>
-                </a:solidFill>
-                <a:latin typeface="Calibri"/>
-              </a:rPr>
-              <a:t>–   </a:t>
-            </a:r>
-            <a:r>
-              <a:rPr sz="1800" b="1" i="0">
-                <a:solidFill>
-                  <a:srgbClr val="333333"/>
-                </a:solidFill>
-                <a:latin typeface="Calibri"/>
-              </a:rPr>
-              <a:t>4.</a:t>
-            </a:r>
-            <a:r>
-              <a:rPr sz="1800" b="0" i="0">
-                <a:solidFill>
-                  <a:srgbClr val="333333"/>
-                </a:solidFill>
-                <a:latin typeface="Calibri"/>
-              </a:rPr>
-              <a:t> Paso 4: escriba los 3 componentes que NO escalan con su justificacion tecnica y su plan alterno, y la tabla de impacto en costos que enlaza con la Clase 10, verificando que cada plan alterno sea ejecutable sin cloud de pago y que el impacto de costo use los mismos niveles bajo, medio o alto de la seccion de costos.</a:t>
-            </a:r>
-          </a:p>
-          <a:p>
-            <a:pPr>
-              <a:spcAft>
-                <a:spcPts val="800"/>
-              </a:spcAft>
-            </a:pPr>
-            <a:r>
-              <a:rPr sz="1800" b="0" i="0">
-                <a:solidFill>
-                  <a:srgbClr val="333333"/>
-                </a:solidFill>
-                <a:latin typeface="Calibri"/>
-              </a:rPr>
-              <a:t>–   </a:t>
-            </a:r>
-            <a:r>
-              <a:rPr sz="1800" b="1" i="0">
-                <a:solidFill>
-                  <a:srgbClr val="333333"/>
-                </a:solidFill>
-                <a:latin typeface="Calibri"/>
-              </a:rPr>
-              <a:t>5.</a:t>
-            </a:r>
-            <a:r>
-              <a:rPr sz="1800" b="0" i="0">
-                <a:solidFill>
-                  <a:srgbClr val="333333"/>
-                </a:solidFill>
-                <a:latin typeface="Calibri"/>
-              </a:rPr>
-              <a:t> Paso 5: integre la politica en la seccion Escalabilidad del informe, anote la marca de replicas en el diagrama de despliegue si aplica y suba las 5 preguntas a la plataforma del curso (modulo Talleres) antes del en la fecha que indique el docente, verificando que la politica no prometa nada que la arquitectura dibujada no pueda cumplir.</a:t>
-            </a:r>
-          </a:p>
-        </p:txBody>
-      </p:sp>
-      <p:sp>
-        <p:nvSpPr>
-          <p:cNvPr id="6" name="TextBox 5"/>
+              <a:t>Exporta tambien la imagen a la carpeta de tu Proyecto Integrador. Esa copia es para tu informe; no reemplaza la respuesta en la plataforma.</a:t>
+            </a:r>
+          </a:p>
+        </p:txBody>
+      </p:sp>
+      <p:sp>
+        <p:nvSpPr>
+          <p:cNvPr id="22" name="TextBox 21"/>
           <p:cNvSpPr txBox="1"/>
           <p:nvPr/>
         </p:nvSpPr>
@@ -10156,109 +9792,21 @@
                 </a:solidFill>
                 <a:latin typeface="Calibri"/>
               </a:rPr>
-              <a:t>Para continuar (PI)</a:t>
-            </a:r>
-          </a:p>
-        </p:txBody>
-      </p:sp>
-      <p:sp>
-        <p:nvSpPr>
-          <p:cNvPr id="5" name="Rounded Rectangle 4"/>
-          <p:cNvSpPr/>
-          <p:nvPr/>
-        </p:nvSpPr>
-        <p:spPr>
-          <a:xfrm>
-            <a:off x="457200" y="1261872"/>
-            <a:ext cx="11277295" cy="1051560"/>
-          </a:xfrm>
-          <a:prstGeom prst="roundRect">
-            <a:avLst>
-              <a:gd name="adj" fmla="val 12000"/>
-            </a:avLst>
-          </a:prstGeom>
-          <a:solidFill>
-            <a:srgbClr val="E8F4FA"/>
-          </a:solidFill>
-          <a:ln>
-            <a:noFill/>
-          </a:ln>
-        </p:spPr>
-        <p:style>
-          <a:lnRef idx="1">
-            <a:schemeClr val="accent1"/>
-          </a:lnRef>
-          <a:fillRef idx="3">
-            <a:schemeClr val="accent1"/>
-          </a:fillRef>
-          <a:effectRef idx="2">
-            <a:schemeClr val="accent1"/>
-          </a:effectRef>
-          <a:fontRef idx="minor">
-            <a:schemeClr val="lt1"/>
-          </a:fontRef>
-        </p:style>
-        <p:txBody>
-          <a:bodyPr rtlCol="0" anchor="ctr"/>
-          <a:lstStyle/>
-          <a:p>
-            <a:pPr algn="ctr"/>
-          </a:p>
-        </p:txBody>
-      </p:sp>
-      <p:sp>
-        <p:nvSpPr>
-          <p:cNvPr id="6" name="Rectangle 5"/>
-          <p:cNvSpPr/>
-          <p:nvPr/>
-        </p:nvSpPr>
-        <p:spPr>
-          <a:xfrm>
-            <a:off x="457200" y="1261872"/>
-            <a:ext cx="128016" cy="1051560"/>
-          </a:xfrm>
-          <a:prstGeom prst="rect">
-            <a:avLst/>
-          </a:prstGeom>
-          <a:solidFill>
-            <a:srgbClr val="269CCB"/>
-          </a:solidFill>
-          <a:ln>
-            <a:noFill/>
-          </a:ln>
-        </p:spPr>
-        <p:style>
-          <a:lnRef idx="1">
-            <a:schemeClr val="accent1"/>
-          </a:lnRef>
-          <a:fillRef idx="3">
-            <a:schemeClr val="accent1"/>
-          </a:fillRef>
-          <a:effectRef idx="2">
-            <a:schemeClr val="accent1"/>
-          </a:effectRef>
-          <a:fontRef idx="minor">
-            <a:schemeClr val="lt1"/>
-          </a:fontRef>
-        </p:style>
-        <p:txBody>
-          <a:bodyPr rtlCol="0" anchor="ctr"/>
-          <a:lstStyle/>
-          <a:p>
-            <a:pPr algn="ctr"/>
-          </a:p>
-        </p:txBody>
-      </p:sp>
-      <p:sp>
-        <p:nvSpPr>
-          <p:cNvPr id="7" name="TextBox 6"/>
+              <a:t>PI CloudLite — entregable de hoy</a:t>
+            </a:r>
+          </a:p>
+        </p:txBody>
+      </p:sp>
+      <p:sp>
+        <p:nvSpPr>
+          <p:cNvPr id="5" name="TextBox 4"/>
           <p:cNvSpPr txBox="1"/>
           <p:nvPr/>
         </p:nvSpPr>
         <p:spPr>
           <a:xfrm>
-            <a:off x="777240" y="1399031"/>
-            <a:ext cx="10774375" cy="822959"/>
+            <a:off x="457200" y="1170432"/>
+            <a:ext cx="11277295" cy="5230368"/>
           </a:xfrm>
           <a:prstGeom prst="rect">
             <a:avLst/>
@@ -10271,313 +9819,119 @@
           </a:bodyPr>
           <a:lstStyle/>
           <a:p>
-            <a:r>
-              <a:rPr sz="1200" b="1" i="0">
-                <a:solidFill>
-                  <a:srgbClr val="269CCB"/>
-                </a:solidFill>
-                <a:latin typeface="Calibri"/>
-              </a:rPr>
-              <a:t>Info</a:t>
-            </a:r>
-          </a:p>
-          <a:p>
             <a:pPr>
-              <a:spcBef>
-                <a:spcPts val="400"/>
-              </a:spcBef>
+              <a:spcAft>
+                <a:spcPts val="800"/>
+              </a:spcAft>
             </a:pPr>
             <a:r>
-              <a:rPr sz="1400" b="0" i="0">
+              <a:rPr sz="2000" b="0" i="0">
                 <a:solidFill>
                   <a:srgbClr val="333333"/>
                 </a:solidFill>
                 <a:latin typeface="Calibri"/>
               </a:rPr>
-              <a:t>Entregable: Sección Escalabilidad: triggers, límites, qué escala y qué no</a:t>
-            </a:r>
-          </a:p>
-        </p:txBody>
-      </p:sp>
-      <p:sp>
-        <p:nvSpPr>
-          <p:cNvPr id="8" name="Rounded Rectangle 7"/>
-          <p:cNvSpPr/>
-          <p:nvPr/>
-        </p:nvSpPr>
-        <p:spPr>
-          <a:xfrm>
-            <a:off x="457200" y="2478024"/>
-            <a:ext cx="11277295" cy="1051560"/>
-          </a:xfrm>
-          <a:prstGeom prst="roundRect">
-            <a:avLst>
-              <a:gd name="adj" fmla="val 12000"/>
-            </a:avLst>
-          </a:prstGeom>
-          <a:solidFill>
-            <a:srgbClr val="FFF8E1"/>
-          </a:solidFill>
-          <a:ln>
-            <a:noFill/>
-          </a:ln>
-        </p:spPr>
-        <p:style>
-          <a:lnRef idx="1">
-            <a:schemeClr val="accent1"/>
-          </a:lnRef>
-          <a:fillRef idx="3">
-            <a:schemeClr val="accent1"/>
-          </a:fillRef>
-          <a:effectRef idx="2">
-            <a:schemeClr val="accent1"/>
-          </a:effectRef>
-          <a:fontRef idx="minor">
-            <a:schemeClr val="lt1"/>
-          </a:fontRef>
-        </p:style>
-        <p:txBody>
-          <a:bodyPr rtlCol="0" anchor="ctr"/>
-          <a:lstStyle/>
-          <a:p>
-            <a:pPr algn="ctr"/>
-          </a:p>
-        </p:txBody>
-      </p:sp>
-      <p:sp>
-        <p:nvSpPr>
-          <p:cNvPr id="9" name="Rectangle 8"/>
-          <p:cNvSpPr/>
-          <p:nvPr/>
-        </p:nvSpPr>
-        <p:spPr>
-          <a:xfrm>
-            <a:off x="457200" y="2478024"/>
-            <a:ext cx="128016" cy="1051560"/>
-          </a:xfrm>
-          <a:prstGeom prst="rect">
-            <a:avLst/>
-          </a:prstGeom>
-          <a:solidFill>
-            <a:srgbClr val="FFD000"/>
-          </a:solidFill>
-          <a:ln>
-            <a:noFill/>
-          </a:ln>
-        </p:spPr>
-        <p:style>
-          <a:lnRef idx="1">
-            <a:schemeClr val="accent1"/>
-          </a:lnRef>
-          <a:fillRef idx="3">
-            <a:schemeClr val="accent1"/>
-          </a:fillRef>
-          <a:effectRef idx="2">
-            <a:schemeClr val="accent1"/>
-          </a:effectRef>
-          <a:fontRef idx="minor">
-            <a:schemeClr val="lt1"/>
-          </a:fontRef>
-        </p:style>
-        <p:txBody>
-          <a:bodyPr rtlCol="0" anchor="ctr"/>
-          <a:lstStyle/>
-          <a:p>
-            <a:pPr algn="ctr"/>
-          </a:p>
-        </p:txBody>
-      </p:sp>
-      <p:sp>
-        <p:nvSpPr>
-          <p:cNvPr id="10" name="TextBox 9"/>
-          <p:cNvSpPr txBox="1"/>
-          <p:nvPr/>
-        </p:nvSpPr>
-        <p:spPr>
-          <a:xfrm>
-            <a:off x="777240" y="2615184"/>
-            <a:ext cx="10774375" cy="822959"/>
-          </a:xfrm>
-          <a:prstGeom prst="rect">
-            <a:avLst/>
-          </a:prstGeom>
-          <a:noFill/>
-        </p:spPr>
-        <p:txBody>
-          <a:bodyPr wrap="square">
-            <a:spAutoFit/>
-          </a:bodyPr>
-          <a:lstStyle/>
-          <a:p>
-            <a:r>
-              <a:rPr sz="1200" b="1" i="0">
-                <a:solidFill>
-                  <a:srgbClr val="FFD000"/>
-                </a:solidFill>
-                <a:latin typeface="Calibri"/>
-              </a:rPr>
-              <a:t>Aclaración</a:t>
+              <a:t>–   </a:t>
+            </a:r>
+            <a:r>
+              <a:rPr sz="2000" b="1" i="0">
+                <a:solidFill>
+                  <a:srgbClr val="333333"/>
+                </a:solidFill>
+                <a:latin typeface="Calibri"/>
+              </a:rPr>
+              <a:t>Entregable:</a:t>
+            </a:r>
+            <a:r>
+              <a:rPr sz="2000" b="0" i="0">
+                <a:solidFill>
+                  <a:srgbClr val="333333"/>
+                </a:solidFill>
+                <a:latin typeface="Calibri"/>
+              </a:rPr>
+              <a:t> Sección Escalabilidad: triggers, límites, qué escala y qué no</a:t>
             </a:r>
           </a:p>
           <a:p>
             <a:pPr>
-              <a:spcBef>
-                <a:spcPts val="400"/>
-              </a:spcBef>
+              <a:spcAft>
+                <a:spcPts val="800"/>
+              </a:spcAft>
             </a:pPr>
             <a:r>
-              <a:rPr sz="1400" b="0" i="0">
+              <a:rPr sz="2000" b="0" i="0">
                 <a:solidFill>
                   <a:srgbClr val="333333"/>
                 </a:solidFill>
                 <a:latin typeface="Calibri"/>
               </a:rPr>
-              <a:t>Subir evidencias al paquete CloudLite (Drive/repo) y a la plataforma del curso en la fecha que indique el docente.</a:t>
-            </a:r>
-          </a:p>
-        </p:txBody>
-      </p:sp>
-      <p:sp>
-        <p:nvSpPr>
-          <p:cNvPr id="11" name="Rounded Rectangle 10"/>
-          <p:cNvSpPr/>
-          <p:nvPr/>
-        </p:nvSpPr>
-        <p:spPr>
-          <a:xfrm>
-            <a:off x="457200" y="3694176"/>
-            <a:ext cx="11277295" cy="1051560"/>
-          </a:xfrm>
-          <a:prstGeom prst="roundRect">
-            <a:avLst>
-              <a:gd name="adj" fmla="val 12000"/>
-            </a:avLst>
-          </a:prstGeom>
-          <a:solidFill>
-            <a:srgbClr val="FBE4E4"/>
-          </a:solidFill>
-          <a:ln>
-            <a:noFill/>
-          </a:ln>
-        </p:spPr>
-        <p:style>
-          <a:lnRef idx="1">
-            <a:schemeClr val="accent1"/>
-          </a:lnRef>
-          <a:fillRef idx="3">
-            <a:schemeClr val="accent1"/>
-          </a:fillRef>
-          <a:effectRef idx="2">
-            <a:schemeClr val="accent1"/>
-          </a:effectRef>
-          <a:fontRef idx="minor">
-            <a:schemeClr val="lt1"/>
-          </a:fontRef>
-        </p:style>
-        <p:txBody>
-          <a:bodyPr rtlCol="0" anchor="ctr"/>
-          <a:lstStyle/>
-          <a:p>
-            <a:pPr algn="ctr"/>
-          </a:p>
-        </p:txBody>
-      </p:sp>
-      <p:sp>
-        <p:nvSpPr>
-          <p:cNvPr id="12" name="Rectangle 11"/>
-          <p:cNvSpPr/>
-          <p:nvPr/>
-        </p:nvSpPr>
-        <p:spPr>
-          <a:xfrm>
-            <a:off x="457200" y="3694176"/>
-            <a:ext cx="128016" cy="1051560"/>
-          </a:xfrm>
-          <a:prstGeom prst="rect">
-            <a:avLst/>
-          </a:prstGeom>
-          <a:solidFill>
-            <a:srgbClr val="A02030"/>
-          </a:solidFill>
-          <a:ln>
-            <a:noFill/>
-          </a:ln>
-        </p:spPr>
-        <p:style>
-          <a:lnRef idx="1">
-            <a:schemeClr val="accent1"/>
-          </a:lnRef>
-          <a:fillRef idx="3">
-            <a:schemeClr val="accent1"/>
-          </a:fillRef>
-          <a:effectRef idx="2">
-            <a:schemeClr val="accent1"/>
-          </a:effectRef>
-          <a:fontRef idx="minor">
-            <a:schemeClr val="lt1"/>
-          </a:fontRef>
-        </p:style>
-        <p:txBody>
-          <a:bodyPr rtlCol="0" anchor="ctr"/>
-          <a:lstStyle/>
-          <a:p>
-            <a:pPr algn="ctr"/>
-          </a:p>
-        </p:txBody>
-      </p:sp>
-      <p:sp>
-        <p:nvSpPr>
-          <p:cNvPr id="13" name="TextBox 12"/>
-          <p:cNvSpPr txBox="1"/>
-          <p:nvPr/>
-        </p:nvSpPr>
-        <p:spPr>
-          <a:xfrm>
-            <a:off x="777240" y="3831336"/>
-            <a:ext cx="10774375" cy="822959"/>
-          </a:xfrm>
-          <a:prstGeom prst="rect">
-            <a:avLst/>
-          </a:prstGeom>
-          <a:noFill/>
-        </p:spPr>
-        <p:txBody>
-          <a:bodyPr wrap="square">
-            <a:spAutoFit/>
-          </a:bodyPr>
-          <a:lstStyle/>
-          <a:p>
-            <a:r>
-              <a:rPr sz="1200" b="1" i="0">
-                <a:solidFill>
-                  <a:srgbClr val="A02030"/>
-                </a:solidFill>
-                <a:latin typeface="Calibri"/>
-              </a:rPr>
-              <a:t>Atención</a:t>
+              <a:t>–   Herramienta: </a:t>
+            </a:r>
+            <a:r>
+              <a:rPr sz="2000" b="1" i="0">
+                <a:solidFill>
+                  <a:srgbClr val="333333"/>
+                </a:solidFill>
+                <a:latin typeface="Calibri"/>
+              </a:rPr>
+              <a:t>Google Docs · draw.io (opcional nota en Deployment)</a:t>
             </a:r>
           </a:p>
           <a:p>
             <a:pPr>
-              <a:spcBef>
-                <a:spcPts val="400"/>
-              </a:spcBef>
+              <a:spcAft>
+                <a:spcPts val="800"/>
+              </a:spcAft>
             </a:pPr>
             <a:r>
-              <a:rPr sz="1400" b="0" i="0">
+              <a:rPr sz="2000" b="0" i="0">
                 <a:solidFill>
                   <a:srgbClr val="333333"/>
                 </a:solidFill>
                 <a:latin typeface="Calibri"/>
               </a:rPr>
-              <a:t>Sin cloud de pago ni instalaciones obligatorias de hipervisores/Docker Desktop.</a:t>
-            </a:r>
-          </a:p>
-        </p:txBody>
-      </p:sp>
-      <p:sp>
-        <p:nvSpPr>
-          <p:cNvPr id="14" name="TextBox 13"/>
+              <a:t>–   Todo lo que construyan hoy entra al </a:t>
+            </a:r>
+            <a:r>
+              <a:rPr sz="2000" b="1" i="0">
+                <a:solidFill>
+                  <a:srgbClr val="333333"/>
+                </a:solidFill>
+                <a:latin typeface="Calibri"/>
+              </a:rPr>
+              <a:t>informe/repo del PI</a:t>
+            </a:r>
+            <a:r>
+              <a:rPr sz="2000" b="0" i="0">
+                <a:solidFill>
+                  <a:srgbClr val="333333"/>
+                </a:solidFill>
+                <a:latin typeface="Calibri"/>
+              </a:rPr>
+              <a:t> (no es lab suelto).</a:t>
+            </a:r>
+          </a:p>
+          <a:p>
+            <a:pPr>
+              <a:spcAft>
+                <a:spcPts val="800"/>
+              </a:spcAft>
+            </a:pPr>
+            <a:r>
+              <a:rPr sz="2000" b="0" i="0">
+                <a:solidFill>
+                  <a:srgbClr val="333333"/>
+                </a:solidFill>
+                <a:latin typeface="Calibri"/>
+              </a:rPr>
+              <a:t>–   Individual por defecto · el docente puede autorizar equipos de 2–3; la entrega en la plataforma del curso siempre es individual.</a:t>
+            </a:r>
+          </a:p>
+        </p:txBody>
+      </p:sp>
+      <p:sp>
+        <p:nvSpPr>
+          <p:cNvPr id="6" name="TextBox 5"/>
           <p:cNvSpPr txBox="1"/>
           <p:nvPr/>
         </p:nvSpPr>
@@ -10645,6 +9999,966 @@
         <p:spPr>
           <a:xfrm>
             <a:off x="0" y="0"/>
+            <a:ext cx="12191695" cy="960120"/>
+          </a:xfrm>
+          <a:prstGeom prst="rect">
+            <a:avLst/>
+          </a:prstGeom>
+          <a:solidFill>
+            <a:srgbClr val="095292"/>
+          </a:solidFill>
+          <a:ln>
+            <a:noFill/>
+          </a:ln>
+        </p:spPr>
+        <p:style>
+          <a:lnRef idx="1">
+            <a:schemeClr val="accent1"/>
+          </a:lnRef>
+          <a:fillRef idx="3">
+            <a:schemeClr val="accent1"/>
+          </a:fillRef>
+          <a:effectRef idx="2">
+            <a:schemeClr val="accent1"/>
+          </a:effectRef>
+          <a:fontRef idx="minor">
+            <a:schemeClr val="lt1"/>
+          </a:fontRef>
+        </p:style>
+        <p:txBody>
+          <a:bodyPr rtlCol="0" anchor="ctr"/>
+          <a:lstStyle/>
+          <a:p>
+            <a:pPr algn="ctr"/>
+          </a:p>
+        </p:txBody>
+      </p:sp>
+      <p:sp>
+        <p:nvSpPr>
+          <p:cNvPr id="3" name="Rectangle 2"/>
+          <p:cNvSpPr/>
+          <p:nvPr/>
+        </p:nvSpPr>
+        <p:spPr>
+          <a:xfrm>
+            <a:off x="0" y="960120"/>
+            <a:ext cx="12191695" cy="41148"/>
+          </a:xfrm>
+          <a:prstGeom prst="rect">
+            <a:avLst/>
+          </a:prstGeom>
+          <a:solidFill>
+            <a:srgbClr val="FFD000"/>
+          </a:solidFill>
+          <a:ln>
+            <a:noFill/>
+          </a:ln>
+        </p:spPr>
+        <p:style>
+          <a:lnRef idx="1">
+            <a:schemeClr val="accent1"/>
+          </a:lnRef>
+          <a:fillRef idx="3">
+            <a:schemeClr val="accent1"/>
+          </a:fillRef>
+          <a:effectRef idx="2">
+            <a:schemeClr val="accent1"/>
+          </a:effectRef>
+          <a:fontRef idx="minor">
+            <a:schemeClr val="lt1"/>
+          </a:fontRef>
+        </p:style>
+        <p:txBody>
+          <a:bodyPr rtlCol="0" anchor="ctr"/>
+          <a:lstStyle/>
+          <a:p>
+            <a:pPr algn="ctr"/>
+          </a:p>
+        </p:txBody>
+      </p:sp>
+      <p:sp>
+        <p:nvSpPr>
+          <p:cNvPr id="4" name="TextBox 3"/>
+          <p:cNvSpPr txBox="1"/>
+          <p:nvPr/>
+        </p:nvSpPr>
+        <p:spPr>
+          <a:xfrm>
+            <a:off x="457200" y="164592"/>
+            <a:ext cx="11277295" cy="502920"/>
+          </a:xfrm>
+          <a:prstGeom prst="rect">
+            <a:avLst/>
+          </a:prstGeom>
+          <a:noFill/>
+        </p:spPr>
+        <p:txBody>
+          <a:bodyPr wrap="square">
+            <a:spAutoFit/>
+          </a:bodyPr>
+          <a:lstStyle/>
+          <a:p>
+            <a:r>
+              <a:rPr sz="2600" b="1" i="0">
+                <a:solidFill>
+                  <a:srgbClr val="FFFFFF"/>
+                </a:solidFill>
+                <a:latin typeface="Calibri"/>
+              </a:rPr>
+              <a:t>Manos a la obra (paso a paso)</a:t>
+            </a:r>
+          </a:p>
+        </p:txBody>
+      </p:sp>
+      <p:sp>
+        <p:nvSpPr>
+          <p:cNvPr id="5" name="TextBox 4"/>
+          <p:cNvSpPr txBox="1"/>
+          <p:nvPr/>
+        </p:nvSpPr>
+        <p:spPr>
+          <a:xfrm>
+            <a:off x="457200" y="1170432"/>
+            <a:ext cx="11277295" cy="5230368"/>
+          </a:xfrm>
+          <a:prstGeom prst="rect">
+            <a:avLst/>
+          </a:prstGeom>
+          <a:noFill/>
+        </p:spPr>
+        <p:txBody>
+          <a:bodyPr wrap="square">
+            <a:spAutoFit/>
+          </a:bodyPr>
+          <a:lstStyle/>
+          <a:p>
+            <a:pPr>
+              <a:spcAft>
+                <a:spcPts val="800"/>
+              </a:spcAft>
+            </a:pPr>
+            <a:r>
+              <a:rPr sz="1800" b="1" i="0">
+                <a:solidFill>
+                  <a:srgbClr val="333333"/>
+                </a:solidFill>
+                <a:latin typeface="Calibri"/>
+              </a:rPr>
+              <a:t>1.</a:t>
+            </a:r>
+            <a:r>
+              <a:rPr sz="1800" b="0" i="0">
+                <a:solidFill>
+                  <a:srgbClr val="333333"/>
+                </a:solidFill>
+                <a:latin typeface="Calibri"/>
+              </a:rPr>
+              <a:t> Paso 1: tome los 5 componentes de su C4Deployment de la Clase 7 y clasifique cada uno como escala horizontal, escala vertical o no escala, verificando que al menos uno quede en no escala con justificacion tecnica, porque una politica donde todo escala no es una politica; el resultado abre la seccion Escalabilidad del informe.</a:t>
+            </a:r>
+          </a:p>
+          <a:p>
+            <a:pPr>
+              <a:spcAft>
+                <a:spcPts val="800"/>
+              </a:spcAft>
+            </a:pPr>
+            <a:r>
+              <a:rPr sz="1800" b="0" i="0">
+                <a:solidFill>
+                  <a:srgbClr val="333333"/>
+                </a:solidFill>
+                <a:latin typeface="Calibri"/>
+              </a:rPr>
+              <a:t>–   </a:t>
+            </a:r>
+            <a:r>
+              <a:rPr sz="1800" b="1" i="0">
+                <a:solidFill>
+                  <a:srgbClr val="333333"/>
+                </a:solidFill>
+                <a:latin typeface="Calibri"/>
+              </a:rPr>
+              <a:t>2.</a:t>
+            </a:r>
+            <a:r>
+              <a:rPr sz="1800" b="0" i="0">
+                <a:solidFill>
+                  <a:srgbClr val="333333"/>
+                </a:solidFill>
+                <a:latin typeface="Calibri"/>
+              </a:rPr>
+              <a:t> Paso 2: complete la tabla de politica de escalado con 6 columnas y 5 filas (componente, tipo de escala, disparador de subida, disparador de bajada, minimo y maximo, tiempo de enfriamiento), verificando que cada disparador tenga metrica, umbral numerico y ventana de tiempo, y que ningun maximo quede en infinito o sin definir.</a:t>
+            </a:r>
+          </a:p>
+          <a:p>
+            <a:pPr>
+              <a:spcAft>
+                <a:spcPts val="800"/>
+              </a:spcAft>
+            </a:pPr>
+            <a:r>
+              <a:rPr sz="1800" b="0" i="0">
+                <a:solidFill>
+                  <a:srgbClr val="333333"/>
+                </a:solidFill>
+                <a:latin typeface="Calibri"/>
+              </a:rPr>
+              <a:t>–   </a:t>
+            </a:r>
+            <a:r>
+              <a:rPr sz="1800" b="1" i="0">
+                <a:solidFill>
+                  <a:srgbClr val="333333"/>
+                </a:solidFill>
+                <a:latin typeface="Calibri"/>
+              </a:rPr>
+              <a:t>3.</a:t>
+            </a:r>
+            <a:r>
+              <a:rPr sz="1800" b="0" i="0">
+                <a:solidFill>
+                  <a:srgbClr val="333333"/>
+                </a:solidFill>
+                <a:latin typeface="Calibri"/>
+              </a:rPr>
+              <a:t> Paso 3: escriba en la plataforma del curso el diagrama Mermaid de la maquina de decision del autoescalado con el nodo de observacion, los dos rombos de decision, las acciones de subida y bajada, el enfriamiento y el nodo de lo que no escala, verificando al renderizar que el ciclo se cierre sobre el nodo de observacion y que los umbrales del diagrama sean los mismos numeros de la tabla.</a:t>
+            </a:r>
+          </a:p>
+          <a:p>
+            <a:pPr>
+              <a:spcAft>
+                <a:spcPts val="800"/>
+              </a:spcAft>
+            </a:pPr>
+            <a:r>
+              <a:rPr sz="1800" b="0" i="0">
+                <a:solidFill>
+                  <a:srgbClr val="333333"/>
+                </a:solidFill>
+                <a:latin typeface="Calibri"/>
+              </a:rPr>
+              <a:t>–   </a:t>
+            </a:r>
+            <a:r>
+              <a:rPr sz="1800" b="1" i="0">
+                <a:solidFill>
+                  <a:srgbClr val="333333"/>
+                </a:solidFill>
+                <a:latin typeface="Calibri"/>
+              </a:rPr>
+              <a:t>4.</a:t>
+            </a:r>
+            <a:r>
+              <a:rPr sz="1800" b="0" i="0">
+                <a:solidFill>
+                  <a:srgbClr val="333333"/>
+                </a:solidFill>
+                <a:latin typeface="Calibri"/>
+              </a:rPr>
+              <a:t> Paso 4: escriba los 3 componentes que NO escalan con su justificacion tecnica y su plan alterno, y la tabla de impacto en costos que enlaza con la Clase 10, verificando que cada plan alterno sea ejecutable sin cloud de pago y que el impacto de costo use los mismos niveles bajo, medio o alto de la seccion de costos.</a:t>
+            </a:r>
+          </a:p>
+          <a:p>
+            <a:pPr>
+              <a:spcAft>
+                <a:spcPts val="800"/>
+              </a:spcAft>
+            </a:pPr>
+            <a:r>
+              <a:rPr sz="1800" b="0" i="0">
+                <a:solidFill>
+                  <a:srgbClr val="333333"/>
+                </a:solidFill>
+                <a:latin typeface="Calibri"/>
+              </a:rPr>
+              <a:t>–   </a:t>
+            </a:r>
+            <a:r>
+              <a:rPr sz="1800" b="1" i="0">
+                <a:solidFill>
+                  <a:srgbClr val="333333"/>
+                </a:solidFill>
+                <a:latin typeface="Calibri"/>
+              </a:rPr>
+              <a:t>5.</a:t>
+            </a:r>
+            <a:r>
+              <a:rPr sz="1800" b="0" i="0">
+                <a:solidFill>
+                  <a:srgbClr val="333333"/>
+                </a:solidFill>
+                <a:latin typeface="Calibri"/>
+              </a:rPr>
+              <a:t> Paso 5: integre la politica en la seccion Escalabilidad del informe, anote la marca de replicas en el diagrama de despliegue si aplica y suba las 5 preguntas a la plataforma del curso (modulo Talleres) antes del en la fecha que indique el docente, verificando que la politica no prometa nada que la arquitectura dibujada no pueda cumplir.</a:t>
+            </a:r>
+          </a:p>
+        </p:txBody>
+      </p:sp>
+      <p:sp>
+        <p:nvSpPr>
+          <p:cNvPr id="6" name="TextBox 5"/>
+          <p:cNvSpPr txBox="1"/>
+          <p:nvPr/>
+        </p:nvSpPr>
+        <p:spPr>
+          <a:xfrm>
+            <a:off x="11185855" y="6473952"/>
+            <a:ext cx="640080" cy="274320"/>
+          </a:xfrm>
+          <a:prstGeom prst="rect">
+            <a:avLst/>
+          </a:prstGeom>
+          <a:noFill/>
+        </p:spPr>
+        <p:txBody>
+          <a:bodyPr wrap="square">
+            <a:spAutoFit/>
+          </a:bodyPr>
+          <a:lstStyle/>
+          <a:p>
+            <a:pPr algn="r"/>
+            <a:r>
+              <a:rPr sz="1100" b="0" i="0">
+                <a:solidFill>
+                  <a:srgbClr val="666666"/>
+                </a:solidFill>
+                <a:latin typeface="Calibri"/>
+              </a:rPr>
+              <a:t>27</a:t>
+            </a:r>
+          </a:p>
+        </p:txBody>
+      </p:sp>
+    </p:spTree>
+  </p:cSld>
+  <p:clrMapOvr>
+    <a:masterClrMapping/>
+  </p:clrMapOvr>
+</p:sld>
+</file>
+
+<file path=ppt/slides/slide28.xml><?xml version="1.0" encoding="utf-8"?>
+<p:sld xmlns:a="http://schemas.openxmlformats.org/drawingml/2006/main" xmlns:p="http://schemas.openxmlformats.org/presentationml/2006/main" xmlns:r="http://schemas.openxmlformats.org/officeDocument/2006/relationships">
+  <p:cSld>
+    <p:bg>
+      <p:bgPr>
+        <a:solidFill>
+          <a:srgbClr val="FFFFFF"/>
+        </a:solidFill>
+        <a:effectLst/>
+      </p:bgPr>
+    </p:bg>
+    <p:spTree>
+      <p:nvGrpSpPr>
+        <p:cNvPr id="1" name=""/>
+        <p:cNvGrpSpPr/>
+        <p:nvPr/>
+      </p:nvGrpSpPr>
+      <p:grpSpPr/>
+      <p:sp>
+        <p:nvSpPr>
+          <p:cNvPr id="2" name="Rectangle 1"/>
+          <p:cNvSpPr/>
+          <p:nvPr/>
+        </p:nvSpPr>
+        <p:spPr>
+          <a:xfrm>
+            <a:off x="0" y="0"/>
+            <a:ext cx="12191695" cy="960120"/>
+          </a:xfrm>
+          <a:prstGeom prst="rect">
+            <a:avLst/>
+          </a:prstGeom>
+          <a:solidFill>
+            <a:srgbClr val="095292"/>
+          </a:solidFill>
+          <a:ln>
+            <a:noFill/>
+          </a:ln>
+        </p:spPr>
+        <p:style>
+          <a:lnRef idx="1">
+            <a:schemeClr val="accent1"/>
+          </a:lnRef>
+          <a:fillRef idx="3">
+            <a:schemeClr val="accent1"/>
+          </a:fillRef>
+          <a:effectRef idx="2">
+            <a:schemeClr val="accent1"/>
+          </a:effectRef>
+          <a:fontRef idx="minor">
+            <a:schemeClr val="lt1"/>
+          </a:fontRef>
+        </p:style>
+        <p:txBody>
+          <a:bodyPr rtlCol="0" anchor="ctr"/>
+          <a:lstStyle/>
+          <a:p>
+            <a:pPr algn="ctr"/>
+          </a:p>
+        </p:txBody>
+      </p:sp>
+      <p:sp>
+        <p:nvSpPr>
+          <p:cNvPr id="3" name="Rectangle 2"/>
+          <p:cNvSpPr/>
+          <p:nvPr/>
+        </p:nvSpPr>
+        <p:spPr>
+          <a:xfrm>
+            <a:off x="0" y="960120"/>
+            <a:ext cx="12191695" cy="41148"/>
+          </a:xfrm>
+          <a:prstGeom prst="rect">
+            <a:avLst/>
+          </a:prstGeom>
+          <a:solidFill>
+            <a:srgbClr val="FFD000"/>
+          </a:solidFill>
+          <a:ln>
+            <a:noFill/>
+          </a:ln>
+        </p:spPr>
+        <p:style>
+          <a:lnRef idx="1">
+            <a:schemeClr val="accent1"/>
+          </a:lnRef>
+          <a:fillRef idx="3">
+            <a:schemeClr val="accent1"/>
+          </a:fillRef>
+          <a:effectRef idx="2">
+            <a:schemeClr val="accent1"/>
+          </a:effectRef>
+          <a:fontRef idx="minor">
+            <a:schemeClr val="lt1"/>
+          </a:fontRef>
+        </p:style>
+        <p:txBody>
+          <a:bodyPr rtlCol="0" anchor="ctr"/>
+          <a:lstStyle/>
+          <a:p>
+            <a:pPr algn="ctr"/>
+          </a:p>
+        </p:txBody>
+      </p:sp>
+      <p:sp>
+        <p:nvSpPr>
+          <p:cNvPr id="4" name="TextBox 3"/>
+          <p:cNvSpPr txBox="1"/>
+          <p:nvPr/>
+        </p:nvSpPr>
+        <p:spPr>
+          <a:xfrm>
+            <a:off x="457200" y="164592"/>
+            <a:ext cx="11277295" cy="502920"/>
+          </a:xfrm>
+          <a:prstGeom prst="rect">
+            <a:avLst/>
+          </a:prstGeom>
+          <a:noFill/>
+        </p:spPr>
+        <p:txBody>
+          <a:bodyPr wrap="square">
+            <a:spAutoFit/>
+          </a:bodyPr>
+          <a:lstStyle/>
+          <a:p>
+            <a:r>
+              <a:rPr sz="2600" b="1" i="0">
+                <a:solidFill>
+                  <a:srgbClr val="FFFFFF"/>
+                </a:solidFill>
+                <a:latin typeface="Calibri"/>
+              </a:rPr>
+              <a:t>Para continuar (PI)</a:t>
+            </a:r>
+          </a:p>
+        </p:txBody>
+      </p:sp>
+      <p:sp>
+        <p:nvSpPr>
+          <p:cNvPr id="5" name="Rounded Rectangle 4"/>
+          <p:cNvSpPr/>
+          <p:nvPr/>
+        </p:nvSpPr>
+        <p:spPr>
+          <a:xfrm>
+            <a:off x="457200" y="1261872"/>
+            <a:ext cx="11277295" cy="1051560"/>
+          </a:xfrm>
+          <a:prstGeom prst="roundRect">
+            <a:avLst>
+              <a:gd name="adj" fmla="val 12000"/>
+            </a:avLst>
+          </a:prstGeom>
+          <a:solidFill>
+            <a:srgbClr val="E8F4FA"/>
+          </a:solidFill>
+          <a:ln>
+            <a:noFill/>
+          </a:ln>
+        </p:spPr>
+        <p:style>
+          <a:lnRef idx="1">
+            <a:schemeClr val="accent1"/>
+          </a:lnRef>
+          <a:fillRef idx="3">
+            <a:schemeClr val="accent1"/>
+          </a:fillRef>
+          <a:effectRef idx="2">
+            <a:schemeClr val="accent1"/>
+          </a:effectRef>
+          <a:fontRef idx="minor">
+            <a:schemeClr val="lt1"/>
+          </a:fontRef>
+        </p:style>
+        <p:txBody>
+          <a:bodyPr rtlCol="0" anchor="ctr"/>
+          <a:lstStyle/>
+          <a:p>
+            <a:pPr algn="ctr"/>
+          </a:p>
+        </p:txBody>
+      </p:sp>
+      <p:sp>
+        <p:nvSpPr>
+          <p:cNvPr id="6" name="Rectangle 5"/>
+          <p:cNvSpPr/>
+          <p:nvPr/>
+        </p:nvSpPr>
+        <p:spPr>
+          <a:xfrm>
+            <a:off x="457200" y="1261872"/>
+            <a:ext cx="128016" cy="1051560"/>
+          </a:xfrm>
+          <a:prstGeom prst="rect">
+            <a:avLst/>
+          </a:prstGeom>
+          <a:solidFill>
+            <a:srgbClr val="269CCB"/>
+          </a:solidFill>
+          <a:ln>
+            <a:noFill/>
+          </a:ln>
+        </p:spPr>
+        <p:style>
+          <a:lnRef idx="1">
+            <a:schemeClr val="accent1"/>
+          </a:lnRef>
+          <a:fillRef idx="3">
+            <a:schemeClr val="accent1"/>
+          </a:fillRef>
+          <a:effectRef idx="2">
+            <a:schemeClr val="accent1"/>
+          </a:effectRef>
+          <a:fontRef idx="minor">
+            <a:schemeClr val="lt1"/>
+          </a:fontRef>
+        </p:style>
+        <p:txBody>
+          <a:bodyPr rtlCol="0" anchor="ctr"/>
+          <a:lstStyle/>
+          <a:p>
+            <a:pPr algn="ctr"/>
+          </a:p>
+        </p:txBody>
+      </p:sp>
+      <p:sp>
+        <p:nvSpPr>
+          <p:cNvPr id="7" name="TextBox 6"/>
+          <p:cNvSpPr txBox="1"/>
+          <p:nvPr/>
+        </p:nvSpPr>
+        <p:spPr>
+          <a:xfrm>
+            <a:off x="777240" y="1399031"/>
+            <a:ext cx="10774375" cy="822959"/>
+          </a:xfrm>
+          <a:prstGeom prst="rect">
+            <a:avLst/>
+          </a:prstGeom>
+          <a:noFill/>
+        </p:spPr>
+        <p:txBody>
+          <a:bodyPr wrap="square">
+            <a:spAutoFit/>
+          </a:bodyPr>
+          <a:lstStyle/>
+          <a:p>
+            <a:r>
+              <a:rPr sz="1200" b="1" i="0">
+                <a:solidFill>
+                  <a:srgbClr val="269CCB"/>
+                </a:solidFill>
+                <a:latin typeface="Calibri"/>
+              </a:rPr>
+              <a:t>Info</a:t>
+            </a:r>
+          </a:p>
+          <a:p>
+            <a:pPr>
+              <a:spcBef>
+                <a:spcPts val="400"/>
+              </a:spcBef>
+            </a:pPr>
+            <a:r>
+              <a:rPr sz="1400" b="0" i="0">
+                <a:solidFill>
+                  <a:srgbClr val="333333"/>
+                </a:solidFill>
+                <a:latin typeface="Calibri"/>
+              </a:rPr>
+              <a:t>Entregable: Sección Escalabilidad: triggers, límites, qué escala y qué no</a:t>
+            </a:r>
+          </a:p>
+        </p:txBody>
+      </p:sp>
+      <p:sp>
+        <p:nvSpPr>
+          <p:cNvPr id="8" name="Rounded Rectangle 7"/>
+          <p:cNvSpPr/>
+          <p:nvPr/>
+        </p:nvSpPr>
+        <p:spPr>
+          <a:xfrm>
+            <a:off x="457200" y="2478024"/>
+            <a:ext cx="11277295" cy="1051560"/>
+          </a:xfrm>
+          <a:prstGeom prst="roundRect">
+            <a:avLst>
+              <a:gd name="adj" fmla="val 12000"/>
+            </a:avLst>
+          </a:prstGeom>
+          <a:solidFill>
+            <a:srgbClr val="FFF8E1"/>
+          </a:solidFill>
+          <a:ln>
+            <a:noFill/>
+          </a:ln>
+        </p:spPr>
+        <p:style>
+          <a:lnRef idx="1">
+            <a:schemeClr val="accent1"/>
+          </a:lnRef>
+          <a:fillRef idx="3">
+            <a:schemeClr val="accent1"/>
+          </a:fillRef>
+          <a:effectRef idx="2">
+            <a:schemeClr val="accent1"/>
+          </a:effectRef>
+          <a:fontRef idx="minor">
+            <a:schemeClr val="lt1"/>
+          </a:fontRef>
+        </p:style>
+        <p:txBody>
+          <a:bodyPr rtlCol="0" anchor="ctr"/>
+          <a:lstStyle/>
+          <a:p>
+            <a:pPr algn="ctr"/>
+          </a:p>
+        </p:txBody>
+      </p:sp>
+      <p:sp>
+        <p:nvSpPr>
+          <p:cNvPr id="9" name="Rectangle 8"/>
+          <p:cNvSpPr/>
+          <p:nvPr/>
+        </p:nvSpPr>
+        <p:spPr>
+          <a:xfrm>
+            <a:off x="457200" y="2478024"/>
+            <a:ext cx="128016" cy="1051560"/>
+          </a:xfrm>
+          <a:prstGeom prst="rect">
+            <a:avLst/>
+          </a:prstGeom>
+          <a:solidFill>
+            <a:srgbClr val="FFD000"/>
+          </a:solidFill>
+          <a:ln>
+            <a:noFill/>
+          </a:ln>
+        </p:spPr>
+        <p:style>
+          <a:lnRef idx="1">
+            <a:schemeClr val="accent1"/>
+          </a:lnRef>
+          <a:fillRef idx="3">
+            <a:schemeClr val="accent1"/>
+          </a:fillRef>
+          <a:effectRef idx="2">
+            <a:schemeClr val="accent1"/>
+          </a:effectRef>
+          <a:fontRef idx="minor">
+            <a:schemeClr val="lt1"/>
+          </a:fontRef>
+        </p:style>
+        <p:txBody>
+          <a:bodyPr rtlCol="0" anchor="ctr"/>
+          <a:lstStyle/>
+          <a:p>
+            <a:pPr algn="ctr"/>
+          </a:p>
+        </p:txBody>
+      </p:sp>
+      <p:sp>
+        <p:nvSpPr>
+          <p:cNvPr id="10" name="TextBox 9"/>
+          <p:cNvSpPr txBox="1"/>
+          <p:nvPr/>
+        </p:nvSpPr>
+        <p:spPr>
+          <a:xfrm>
+            <a:off x="777240" y="2615184"/>
+            <a:ext cx="10774375" cy="822959"/>
+          </a:xfrm>
+          <a:prstGeom prst="rect">
+            <a:avLst/>
+          </a:prstGeom>
+          <a:noFill/>
+        </p:spPr>
+        <p:txBody>
+          <a:bodyPr wrap="square">
+            <a:spAutoFit/>
+          </a:bodyPr>
+          <a:lstStyle/>
+          <a:p>
+            <a:r>
+              <a:rPr sz="1200" b="1" i="0">
+                <a:solidFill>
+                  <a:srgbClr val="FFD000"/>
+                </a:solidFill>
+                <a:latin typeface="Calibri"/>
+              </a:rPr>
+              <a:t>Aclaración</a:t>
+            </a:r>
+          </a:p>
+          <a:p>
+            <a:pPr>
+              <a:spcBef>
+                <a:spcPts val="400"/>
+              </a:spcBef>
+            </a:pPr>
+            <a:r>
+              <a:rPr sz="1400" b="0" i="0">
+                <a:solidFill>
+                  <a:srgbClr val="333333"/>
+                </a:solidFill>
+                <a:latin typeface="Calibri"/>
+              </a:rPr>
+              <a:t>Subir evidencias al paquete CloudLite (Drive/repo) y a la plataforma del curso en la fecha que indique el docente.</a:t>
+            </a:r>
+          </a:p>
+        </p:txBody>
+      </p:sp>
+      <p:sp>
+        <p:nvSpPr>
+          <p:cNvPr id="11" name="Rounded Rectangle 10"/>
+          <p:cNvSpPr/>
+          <p:nvPr/>
+        </p:nvSpPr>
+        <p:spPr>
+          <a:xfrm>
+            <a:off x="457200" y="3694176"/>
+            <a:ext cx="11277295" cy="1051560"/>
+          </a:xfrm>
+          <a:prstGeom prst="roundRect">
+            <a:avLst>
+              <a:gd name="adj" fmla="val 12000"/>
+            </a:avLst>
+          </a:prstGeom>
+          <a:solidFill>
+            <a:srgbClr val="FBE4E4"/>
+          </a:solidFill>
+          <a:ln>
+            <a:noFill/>
+          </a:ln>
+        </p:spPr>
+        <p:style>
+          <a:lnRef idx="1">
+            <a:schemeClr val="accent1"/>
+          </a:lnRef>
+          <a:fillRef idx="3">
+            <a:schemeClr val="accent1"/>
+          </a:fillRef>
+          <a:effectRef idx="2">
+            <a:schemeClr val="accent1"/>
+          </a:effectRef>
+          <a:fontRef idx="minor">
+            <a:schemeClr val="lt1"/>
+          </a:fontRef>
+        </p:style>
+        <p:txBody>
+          <a:bodyPr rtlCol="0" anchor="ctr"/>
+          <a:lstStyle/>
+          <a:p>
+            <a:pPr algn="ctr"/>
+          </a:p>
+        </p:txBody>
+      </p:sp>
+      <p:sp>
+        <p:nvSpPr>
+          <p:cNvPr id="12" name="Rectangle 11"/>
+          <p:cNvSpPr/>
+          <p:nvPr/>
+        </p:nvSpPr>
+        <p:spPr>
+          <a:xfrm>
+            <a:off x="457200" y="3694176"/>
+            <a:ext cx="128016" cy="1051560"/>
+          </a:xfrm>
+          <a:prstGeom prst="rect">
+            <a:avLst/>
+          </a:prstGeom>
+          <a:solidFill>
+            <a:srgbClr val="A02030"/>
+          </a:solidFill>
+          <a:ln>
+            <a:noFill/>
+          </a:ln>
+        </p:spPr>
+        <p:style>
+          <a:lnRef idx="1">
+            <a:schemeClr val="accent1"/>
+          </a:lnRef>
+          <a:fillRef idx="3">
+            <a:schemeClr val="accent1"/>
+          </a:fillRef>
+          <a:effectRef idx="2">
+            <a:schemeClr val="accent1"/>
+          </a:effectRef>
+          <a:fontRef idx="minor">
+            <a:schemeClr val="lt1"/>
+          </a:fontRef>
+        </p:style>
+        <p:txBody>
+          <a:bodyPr rtlCol="0" anchor="ctr"/>
+          <a:lstStyle/>
+          <a:p>
+            <a:pPr algn="ctr"/>
+          </a:p>
+        </p:txBody>
+      </p:sp>
+      <p:sp>
+        <p:nvSpPr>
+          <p:cNvPr id="13" name="TextBox 12"/>
+          <p:cNvSpPr txBox="1"/>
+          <p:nvPr/>
+        </p:nvSpPr>
+        <p:spPr>
+          <a:xfrm>
+            <a:off x="777240" y="3831336"/>
+            <a:ext cx="10774375" cy="822959"/>
+          </a:xfrm>
+          <a:prstGeom prst="rect">
+            <a:avLst/>
+          </a:prstGeom>
+          <a:noFill/>
+        </p:spPr>
+        <p:txBody>
+          <a:bodyPr wrap="square">
+            <a:spAutoFit/>
+          </a:bodyPr>
+          <a:lstStyle/>
+          <a:p>
+            <a:r>
+              <a:rPr sz="1200" b="1" i="0">
+                <a:solidFill>
+                  <a:srgbClr val="A02030"/>
+                </a:solidFill>
+                <a:latin typeface="Calibri"/>
+              </a:rPr>
+              <a:t>Atención</a:t>
+            </a:r>
+          </a:p>
+          <a:p>
+            <a:pPr>
+              <a:spcBef>
+                <a:spcPts val="400"/>
+              </a:spcBef>
+            </a:pPr>
+            <a:r>
+              <a:rPr sz="1400" b="0" i="0">
+                <a:solidFill>
+                  <a:srgbClr val="333333"/>
+                </a:solidFill>
+                <a:latin typeface="Calibri"/>
+              </a:rPr>
+              <a:t>Sin cloud de pago ni instalaciones obligatorias de hipervisores/Docker Desktop.</a:t>
+            </a:r>
+          </a:p>
+        </p:txBody>
+      </p:sp>
+      <p:sp>
+        <p:nvSpPr>
+          <p:cNvPr id="14" name="TextBox 13"/>
+          <p:cNvSpPr txBox="1"/>
+          <p:nvPr/>
+        </p:nvSpPr>
+        <p:spPr>
+          <a:xfrm>
+            <a:off x="11185855" y="6473952"/>
+            <a:ext cx="640080" cy="274320"/>
+          </a:xfrm>
+          <a:prstGeom prst="rect">
+            <a:avLst/>
+          </a:prstGeom>
+          <a:noFill/>
+        </p:spPr>
+        <p:txBody>
+          <a:bodyPr wrap="square">
+            <a:spAutoFit/>
+          </a:bodyPr>
+          <a:lstStyle/>
+          <a:p>
+            <a:pPr algn="r"/>
+            <a:r>
+              <a:rPr sz="1100" b="0" i="0">
+                <a:solidFill>
+                  <a:srgbClr val="666666"/>
+                </a:solidFill>
+                <a:latin typeface="Calibri"/>
+              </a:rPr>
+              <a:t>28</a:t>
+            </a:r>
+          </a:p>
+        </p:txBody>
+      </p:sp>
+    </p:spTree>
+  </p:cSld>
+  <p:clrMapOvr>
+    <a:masterClrMapping/>
+  </p:clrMapOvr>
+</p:sld>
+</file>
+
+<file path=ppt/slides/slide29.xml><?xml version="1.0" encoding="utf-8"?>
+<p:sld xmlns:a="http://schemas.openxmlformats.org/drawingml/2006/main" xmlns:p="http://schemas.openxmlformats.org/presentationml/2006/main" xmlns:r="http://schemas.openxmlformats.org/officeDocument/2006/relationships">
+  <p:cSld>
+    <p:bg>
+      <p:bgPr>
+        <a:solidFill>
+          <a:srgbClr val="FFFFFF"/>
+        </a:solidFill>
+        <a:effectLst/>
+      </p:bgPr>
+    </p:bg>
+    <p:spTree>
+      <p:nvGrpSpPr>
+        <p:cNvPr id="1" name=""/>
+        <p:cNvGrpSpPr/>
+        <p:nvPr/>
+      </p:nvGrpSpPr>
+      <p:grpSpPr/>
+      <p:sp>
+        <p:nvSpPr>
+          <p:cNvPr id="2" name="Rectangle 1"/>
+          <p:cNvSpPr/>
+          <p:nvPr/>
+        </p:nvSpPr>
+        <p:spPr>
+          <a:xfrm>
+            <a:off x="0" y="0"/>
             <a:ext cx="12191695" cy="164592"/>
           </a:xfrm>
           <a:prstGeom prst="rect">
@@ -11813,38 +12127,6 @@
               <a:t>–   La escalabilidad pregunta que pasa cuando la carga se multiplica: si al duplicar los recursos el sistema atiende cerca del doble de trabajo, escala bien; si atiende un 20 por ciento mas, escala mal, y ninguna cantidad de dinero lo va a arreglar.</a:t>
             </a:r>
           </a:p>
-          <a:p>
-            <a:pPr>
-              <a:spcAft>
-                <a:spcPts val="800"/>
-              </a:spcAft>
-            </a:pPr>
-            <a:r>
-              <a:rPr sz="2000" b="0" i="0">
-                <a:solidFill>
-                  <a:srgbClr val="333333"/>
-                </a:solidFill>
-                <a:latin typeface="Calibri"/>
-              </a:rPr>
-              <a:t>–   Un sistema puede ser rapido y no escalar, y puede escalar y ser lento.</a:t>
-            </a:r>
-          </a:p>
-          <a:p>
-            <a:pPr>
-              <a:spcAft>
-                <a:spcPts val="800"/>
-              </a:spcAft>
-            </a:pPr>
-            <a:r>
-              <a:rPr sz="2000" b="0" i="0">
-                <a:solidFill>
-                  <a:srgbClr val="333333"/>
-                </a:solidFill>
-                <a:latin typeface="Calibri"/>
-              </a:rPr>
-              <a:t>–   Por eso el orden del temario no es casual: primero se mide y se identifica el cuello de botella, y solo despues se decide como agregar capacidad.</a:t>
-            </a:r>
-          </a:p>
         </p:txBody>
       </p:sp>
       <p:sp>
@@ -12113,22 +12395,6 @@
               <a:t>–   Porque la instancia mas grande disponible se acaba en algun punto; el precio crece peor que linealmente, ya que las instancias grandes cuestan mas por unidad de capacidad</a:t>
             </a:r>
           </a:p>
-          <a:p>
-            <a:pPr>
-              <a:spcAft>
-                <a:spcPts val="800"/>
-              </a:spcAft>
-            </a:pPr>
-            <a:r>
-              <a:rPr sz="2000" b="0" i="0">
-                <a:solidFill>
-                  <a:srgbClr val="333333"/>
-                </a:solidFill>
-                <a:latin typeface="Calibri"/>
-              </a:rPr>
-              <a:t>–   Y el cambio suele requerir reiniciar el servicio, lo que implica una ventana de indisponibilidad del orden de 30 segundos a 2 minutos.</a:t>
-            </a:r>
-          </a:p>
         </p:txBody>
       </p:sp>
       <p:sp>
@@ -12346,7 +12612,7 @@
                 </a:solidFill>
                 <a:latin typeface="Calibri"/>
               </a:rPr>
-              <a:t>–   Ademas una sola maquina grande sigue siendo un unico punto de falla.</a:t>
+              <a:t>–   Y el cambio suele requerir reiniciar el servicio, lo que implica una ventana de indisponibilidad del orden de 30 segundos a 2 minutos.</a:t>
             </a:r>
           </a:p>
           <a:p>
@@ -12363,22 +12629,6 @@
                 <a:latin typeface="Calibri"/>
               </a:rPr>
               <a:t>–   Escalar horizontalmente, o hacia afuera, es agregar MAS instancias iguales trabajando en paralelo, con el balanceador de carga de la Clase 7 repartiendo peticiones entre ellas.</a:t>
-            </a:r>
-          </a:p>
-          <a:p>
-            <a:pPr>
-              <a:spcAft>
-                <a:spcPts val="800"/>
-              </a:spcAft>
-            </a:pPr>
-            <a:r>
-              <a:rPr sz="2000" b="0" i="0">
-                <a:solidFill>
-                  <a:srgbClr val="333333"/>
-                </a:solidFill>
-                <a:latin typeface="Calibri"/>
-              </a:rPr>
-              <a:t>–   No tiene techo cercano, mejora la disponibilidad porque si una instancia muere las otras siguen atendiendo, y permite crecer en pasos pequenos y baratos.</a:t>
             </a:r>
           </a:p>
           <a:p>
@@ -12630,7 +12880,7 @@
                 </a:solidFill>
                 <a:latin typeface="Calibri"/>
               </a:rPr>
-              <a:t>–   Un servicio sin estado no guarda en la memoria de su propio proceso ninguna informacion que necesite en la siguiente peticion; todo lo que deba persistir vive en un almacen compartido, sea la base de datos, una cache comun o el token que trae el cliente.</a:t>
+              <a:t>–   El sintoma en CloudLite es facil de narrar: si la API guarda la sesion en un diccionario en memoria de la instancia que atendio el login</a:t>
             </a:r>
           </a:p>
           <a:p>
@@ -12646,7 +12896,7 @@
                 </a:solidFill>
                 <a:latin typeface="Calibri"/>
               </a:rPr>
-              <a:t>–   El sintoma en CloudLite es facil de narrar: si la API guarda la sesion en un diccionario en memoria de la instancia que atendio el login</a:t>
+              <a:t>–   Y el balanceador manda la siguiente peticion del mismo usuario a la segunda instancia, esa instancia no lo conoce y lo expulsa; el usuario percibe que la aplicacion lo saca al azar.</a:t>
             </a:r>
           </a:p>
           <a:p>
@@ -12662,7 +12912,7 @@
                 </a:solidFill>
                 <a:latin typeface="Calibri"/>
               </a:rPr>
-              <a:t>–   Y el balanceador manda la siguiente peticion del mismo usuario a la segunda instancia, esa instancia no lo conoce y lo expulsa; el usuario percibe que la aplicacion lo saca al azar.</a:t>
+              <a:t>–   La solucion parcial que casi todos proponen es la sesion pegajosa, que amarra al usuario a una instancia, y hay que decir por que es un parche: si esa instancia se cae la sesion se pierde igual, y el balanceo se vuelve desigual.</a:t>
             </a:r>
           </a:p>
         </p:txBody>

--- a/Arquitectura de Sistemas Computacionales/Clases/Clase 13 - Escalabilidad automatica/Presentacion.pptx
+++ b/Arquitectura de Sistemas Computacionales/Clases/Clase 13 - Escalabilidad automatica/Presentacion.pptx
@@ -34,6 +34,7 @@
     <p:sldId id="282" r:id="rId33"/>
     <p:sldId id="283" r:id="rId34"/>
     <p:sldId id="284" r:id="rId35"/>
+    <p:sldId id="285" r:id="rId36"/>
   </p:sldIdLst>
   <p:sldSz cx="12191695" cy="6858000" type="screen4x3"/>
   <p:notesSz cx="6858000" cy="9144000"/>
@@ -7423,7 +7424,7 @@
                 </a:solidFill>
                 <a:latin typeface="Calibri"/>
               </a:rPr>
-              <a:t>Politica de autoescalado (tabla, no prosa)</a:t>
+              <a:t>La regla de autoescalado, escrita como configuracion</a:t>
             </a:r>
           </a:p>
         </p:txBody>
@@ -7437,7 +7438,7 @@
         <p:spPr>
           <a:xfrm>
             <a:off x="457200" y="1261872"/>
-            <a:ext cx="11277295" cy="4773168"/>
+            <a:ext cx="11277295" cy="5093208"/>
           </a:xfrm>
           <a:prstGeom prst="roundRect">
             <a:avLst>
@@ -7557,7 +7558,7 @@
         <p:spPr>
           <a:xfrm>
             <a:off x="777240" y="1719072"/>
-            <a:ext cx="10637215" cy="4133087"/>
+            <a:ext cx="10637215" cy="4453128"/>
           </a:xfrm>
           <a:prstGeom prst="rect">
             <a:avLst/>
@@ -7582,7 +7583,7 @@
                 </a:solidFill>
                 <a:latin typeface="Calibri"/>
               </a:rPr>
-              <a:t>Componente   | Tipo        | Trigger up      | Min | Max | Cooldown</a:t>
+              <a:t># Lo que un autoescalador necesita para no oscilar:</a:t>
             </a:r>
           </a:p>
           <a:p>
@@ -7598,7 +7599,7 @@
                 </a:solidFill>
                 <a:latin typeface="Calibri"/>
               </a:rPr>
-              <a:t>-------------|-------------|-----------------|-----|-----|---------</a:t>
+              <a:t>autoescalado:</a:t>
             </a:r>
           </a:p>
           <a:p>
@@ -7614,7 +7615,7 @@
                 </a:solidFill>
                 <a:latin typeface="Calibri"/>
               </a:rPr>
-              <a:t>API          | Horizontal  | CPU &gt; 70% / 5m  |  2  |  6  | 5 min</a:t>
+              <a:t>  servicio: cloudlite-api</a:t>
             </a:r>
           </a:p>
           <a:p>
@@ -7630,7 +7631,7 @@
                 </a:solidFill>
                 <a:latin typeface="Calibri"/>
               </a:rPr>
-              <a:t>Worker cola  | Horizontal  | cola &gt; 100 msg  |  1  |  4  | 3 min</a:t>
+              <a:t>  minimo: 2                  # 1 no da tolerancia a fallo</a:t>
             </a:r>
           </a:p>
           <a:p>
@@ -7646,7 +7647,135 @@
                 </a:solidFill>
                 <a:latin typeface="Calibri"/>
               </a:rPr>
-              <a:t>BD primaria  | NO escala   | -               |  1  |  1  | -</a:t>
+              <a:t>  maximo: 6                  # tope que el presupuesto aguanta</a:t>
+            </a:r>
+          </a:p>
+          <a:p>
+            <a:pPr>
+              <a:spcAft>
+                <a:spcPts val="400"/>
+              </a:spcAft>
+            </a:pPr>
+            <a:r>
+              <a:rPr sz="1400" b="0" i="0">
+                <a:solidFill>
+                  <a:srgbClr val="FFFFFF"/>
+                </a:solidFill>
+                <a:latin typeface="Calibri"/>
+              </a:rPr>
+              <a:t>  metrica: cpu_promedio</a:t>
+            </a:r>
+          </a:p>
+          <a:p>
+            <a:pPr>
+              <a:spcAft>
+                <a:spcPts val="400"/>
+              </a:spcAft>
+            </a:pPr>
+            <a:r>
+              <a:rPr sz="1400" b="0" i="0">
+                <a:solidFill>
+                  <a:srgbClr val="FFFFFF"/>
+                </a:solidFill>
+                <a:latin typeface="Calibri"/>
+              </a:rPr>
+              <a:t>  objetivo: 65               # por debajo del 70% de la Clase 12</a:t>
+            </a:r>
+          </a:p>
+          <a:p>
+            <a:pPr>
+              <a:spcAft>
+                <a:spcPts val="400"/>
+              </a:spcAft>
+            </a:pPr>
+            <a:r>
+              <a:rPr sz="1400" b="0" i="0">
+                <a:solidFill>
+                  <a:srgbClr val="FFFFFF"/>
+                </a:solidFill>
+                <a:latin typeface="Calibri"/>
+              </a:rPr>
+              <a:t>  subir_si:   '&gt; 65% durante 3 min'</a:t>
+            </a:r>
+          </a:p>
+          <a:p>
+            <a:pPr>
+              <a:spcAft>
+                <a:spcPts val="400"/>
+              </a:spcAft>
+            </a:pPr>
+            <a:r>
+              <a:rPr sz="1400" b="0" i="0">
+                <a:solidFill>
+                  <a:srgbClr val="FFFFFF"/>
+                </a:solidFill>
+                <a:latin typeface="Calibri"/>
+              </a:rPr>
+              <a:t>  bajar_si:   '&lt; 35% durante 10 min'   # bajar mas lento que subir</a:t>
+            </a:r>
+          </a:p>
+          <a:p>
+            <a:pPr>
+              <a:spcAft>
+                <a:spcPts val="400"/>
+              </a:spcAft>
+            </a:pPr>
+            <a:r>
+              <a:rPr sz="1400" b="0" i="0">
+                <a:solidFill>
+                  <a:srgbClr val="FFFFFF"/>
+                </a:solidFill>
+                <a:latin typeface="Calibri"/>
+              </a:rPr>
+              <a:t>  enfriamiento: 5 min        # sin esto entra en bandada de arranques</a:t>
+            </a:r>
+          </a:p>
+          <a:p>
+            <a:pPr>
+              <a:spcAft>
+                <a:spcPts val="400"/>
+              </a:spcAft>
+            </a:pPr>
+            <a:r>
+              <a:rPr sz="1400" b="0" i="0">
+                <a:solidFill>
+                  <a:srgbClr val="FFFFFF"/>
+                </a:solidFill>
+                <a:latin typeface="Calibri"/>
+              </a:rPr>
+              <a:t/>
+            </a:r>
+          </a:p>
+          <a:p>
+            <a:pPr>
+              <a:spcAft>
+                <a:spcPts val="400"/>
+              </a:spcAft>
+            </a:pPr>
+            <a:r>
+              <a:rPr sz="1400" b="0" i="0">
+                <a:solidFill>
+                  <a:srgbClr val="FFFFFF"/>
+                </a:solidFill>
+                <a:latin typeface="Calibri"/>
+              </a:rPr>
+              <a:t># Y el limite honesto: escalar la API no escala la BASE. Si el cuello</a:t>
+            </a:r>
+          </a:p>
+          <a:p>
+            <a:pPr>
+              <a:spcAft>
+                <a:spcPts val="400"/>
+              </a:spcAft>
+            </a:pPr>
+            <a:r>
+              <a:rPr sz="1400" b="0" i="0">
+                <a:solidFill>
+                  <a:srgbClr val="FFFFFF"/>
+                </a:solidFill>
+                <a:latin typeface="Calibri"/>
+              </a:rPr>
+              <a:t># de botella es PostgreSQL, seis instancias lo empeoran.</a:t>
             </a:r>
           </a:p>
         </p:txBody>
@@ -7654,41 +7783,6 @@
       <p:sp>
         <p:nvSpPr>
           <p:cNvPr id="9" name="TextBox 8"/>
-          <p:cNvSpPr txBox="1"/>
-          <p:nvPr/>
-        </p:nvSpPr>
-        <p:spPr>
-          <a:xfrm>
-            <a:off x="457200" y="6080760"/>
-            <a:ext cx="11277295" cy="320040"/>
-          </a:xfrm>
-          <a:prstGeom prst="rect">
-            <a:avLst/>
-          </a:prstGeom>
-          <a:noFill/>
-        </p:spPr>
-        <p:txBody>
-          <a:bodyPr wrap="square">
-            <a:spAutoFit/>
-          </a:bodyPr>
-          <a:lstStyle/>
-          <a:p>
-            <a:pPr algn="ctr"/>
-            <a:r>
-              <a:rPr sz="1200" b="0" i="1">
-                <a:solidFill>
-                  <a:srgbClr val="666666"/>
-                </a:solidFill>
-                <a:latin typeface="Calibri"/>
-              </a:rPr>
-              <a:t>El 'max' es lo que evita que la factura escale sola. La BD primaria casi nunca escala horizontal.</a:t>
-            </a:r>
-          </a:p>
-        </p:txBody>
-      </p:sp>
-      <p:sp>
-        <p:nvSpPr>
-          <p:cNvPr id="10" name="TextBox 9"/>
           <p:cNvSpPr txBox="1"/>
           <p:nvPr/>
         </p:nvSpPr>
@@ -7756,7 +7850,7 @@
         <p:spPr>
           <a:xfrm>
             <a:off x="0" y="0"/>
-            <a:ext cx="12191695" cy="1170432"/>
+            <a:ext cx="12191695" cy="960120"/>
           </a:xfrm>
           <a:prstGeom prst="rect">
             <a:avLst/>
@@ -7798,7 +7892,7 @@
         </p:nvSpPr>
         <p:spPr>
           <a:xfrm>
-            <a:off x="0" y="1170432"/>
+            <a:off x="0" y="960120"/>
             <a:ext cx="12191695" cy="41148"/>
           </a:xfrm>
           <a:prstGeom prst="rect">
@@ -7842,7 +7936,7 @@
         <p:spPr>
           <a:xfrm>
             <a:off x="457200" y="164592"/>
-            <a:ext cx="11277295" cy="384048"/>
+            <a:ext cx="11277295" cy="502920"/>
           </a:xfrm>
           <a:prstGeom prst="rect">
             <a:avLst/>
@@ -7862,55 +7956,21 @@
                 </a:solidFill>
                 <a:latin typeface="Calibri"/>
               </a:rPr>
-              <a:t>Herramientas de hoy</a:t>
-            </a:r>
-          </a:p>
-        </p:txBody>
-      </p:sp>
-      <p:sp>
-        <p:nvSpPr>
-          <p:cNvPr id="5" name="TextBox 4"/>
-          <p:cNvSpPr txBox="1"/>
-          <p:nvPr/>
-        </p:nvSpPr>
-        <p:spPr>
-          <a:xfrm>
-            <a:off x="457200" y="566928"/>
-            <a:ext cx="11277295" cy="411480"/>
-          </a:xfrm>
-          <a:prstGeom prst="rect">
-            <a:avLst/>
-          </a:prstGeom>
-          <a:noFill/>
-        </p:spPr>
-        <p:txBody>
-          <a:bodyPr wrap="square">
-            <a:spAutoFit/>
-          </a:bodyPr>
-          <a:lstStyle/>
-          <a:p>
-            <a:r>
-              <a:rPr sz="1400" b="0" i="0">
-                <a:solidFill>
-                  <a:srgbClr val="B8D8EE"/>
-                </a:solidFill>
-                <a:latin typeface="Calibri"/>
-              </a:rPr>
-              <a:t>Gratis · navegador o free tier · sin cuenta de pago</a:t>
-            </a:r>
-          </a:p>
-        </p:txBody>
-      </p:sp>
-      <p:sp>
-        <p:nvSpPr>
-          <p:cNvPr id="6" name="Rounded Rectangle 5"/>
+              <a:t>Politica de autoescalado (tabla, no prosa)</a:t>
+            </a:r>
+          </a:p>
+        </p:txBody>
+      </p:sp>
+      <p:sp>
+        <p:nvSpPr>
+          <p:cNvPr id="5" name="Rounded Rectangle 4"/>
           <p:cNvSpPr/>
           <p:nvPr/>
         </p:nvSpPr>
         <p:spPr>
           <a:xfrm>
-            <a:off x="457200" y="1591056"/>
-            <a:ext cx="3624986" cy="2299716"/>
+            <a:off x="457200" y="1261872"/>
+            <a:ext cx="11277295" cy="4773168"/>
           </a:xfrm>
           <a:prstGeom prst="roundRect">
             <a:avLst>
@@ -7918,7 +7978,7 @@
             </a:avLst>
           </a:prstGeom>
           <a:solidFill>
-            <a:srgbClr val="F2F2F2"/>
+            <a:srgbClr val="1E2A38"/>
           </a:solidFill>
           <a:ln>
             <a:noFill/>
@@ -7948,14 +8008,14 @@
       </p:sp>
       <p:sp>
         <p:nvSpPr>
-          <p:cNvPr id="7" name="Rectangle 6"/>
+          <p:cNvPr id="6" name="Rectangle 5"/>
           <p:cNvSpPr/>
           <p:nvPr/>
         </p:nvSpPr>
         <p:spPr>
           <a:xfrm>
-            <a:off x="457200" y="1591056"/>
-            <a:ext cx="3624986" cy="64008"/>
+            <a:off x="457200" y="1261872"/>
+            <a:ext cx="11277295" cy="320040"/>
           </a:xfrm>
           <a:prstGeom prst="rect">
             <a:avLst/>
@@ -7991,735 +8051,177 @@
       </p:sp>
       <p:sp>
         <p:nvSpPr>
-          <p:cNvPr id="8" name="Rectangle 7"/>
-          <p:cNvSpPr/>
-          <p:nvPr/>
-        </p:nvSpPr>
-        <p:spPr>
-          <a:xfrm>
-            <a:off x="457200" y="1655064"/>
-            <a:ext cx="3624986" cy="27432"/>
-          </a:xfrm>
-          <a:prstGeom prst="rect">
-            <a:avLst/>
-          </a:prstGeom>
-          <a:solidFill>
-            <a:srgbClr val="FFD000"/>
-          </a:solidFill>
-          <a:ln>
-            <a:noFill/>
-          </a:ln>
-        </p:spPr>
-        <p:style>
-          <a:lnRef idx="1">
-            <a:schemeClr val="accent1"/>
-          </a:lnRef>
-          <a:fillRef idx="3">
-            <a:schemeClr val="accent1"/>
-          </a:fillRef>
-          <a:effectRef idx="2">
-            <a:schemeClr val="accent1"/>
-          </a:effectRef>
-          <a:fontRef idx="minor">
-            <a:schemeClr val="lt1"/>
-          </a:fontRef>
-        </p:style>
-        <p:txBody>
-          <a:bodyPr rtlCol="0" anchor="ctr"/>
+          <p:cNvPr id="7" name="TextBox 6"/>
+          <p:cNvSpPr txBox="1"/>
+          <p:nvPr/>
+        </p:nvSpPr>
+        <p:spPr>
+          <a:xfrm>
+            <a:off x="685800" y="1307592"/>
+            <a:ext cx="10820095" cy="256032"/>
+          </a:xfrm>
+          <a:prstGeom prst="rect">
+            <a:avLst/>
+          </a:prstGeom>
+          <a:noFill/>
+        </p:spPr>
+        <p:txBody>
+          <a:bodyPr wrap="square" anchor="ctr"/>
+          <a:lstStyle/>
+          <a:p>
+            <a:r>
+              <a:rPr sz="1000" b="1" i="0">
+                <a:solidFill>
+                  <a:srgbClr val="269CCB"/>
+                </a:solidFill>
+                <a:latin typeface="Calibri"/>
+              </a:rPr>
+              <a:t>● ● ●</a:t>
+            </a:r>
+          </a:p>
+        </p:txBody>
+      </p:sp>
+      <p:sp>
+        <p:nvSpPr>
+          <p:cNvPr id="8" name="TextBox 7"/>
+          <p:cNvSpPr txBox="1"/>
+          <p:nvPr/>
+        </p:nvSpPr>
+        <p:spPr>
+          <a:xfrm>
+            <a:off x="777240" y="1719072"/>
+            <a:ext cx="10637215" cy="4133087"/>
+          </a:xfrm>
+          <a:prstGeom prst="rect">
+            <a:avLst/>
+          </a:prstGeom>
+          <a:noFill/>
+        </p:spPr>
+        <p:txBody>
+          <a:bodyPr wrap="square">
+            <a:spAutoFit/>
+          </a:bodyPr>
+          <a:lstStyle/>
+          <a:p>
+            <a:pPr>
+              <a:spcAft>
+                <a:spcPts val="400"/>
+              </a:spcAft>
+            </a:pPr>
+            <a:r>
+              <a:rPr sz="1400" b="0" i="0">
+                <a:solidFill>
+                  <a:srgbClr val="FFFFFF"/>
+                </a:solidFill>
+                <a:latin typeface="Calibri"/>
+              </a:rPr>
+              <a:t>Componente   | Tipo        | Trigger up      | Min | Max | Cooldown</a:t>
+            </a:r>
+          </a:p>
+          <a:p>
+            <a:pPr>
+              <a:spcAft>
+                <a:spcPts val="400"/>
+              </a:spcAft>
+            </a:pPr>
+            <a:r>
+              <a:rPr sz="1400" b="0" i="0">
+                <a:solidFill>
+                  <a:srgbClr val="FFFFFF"/>
+                </a:solidFill>
+                <a:latin typeface="Calibri"/>
+              </a:rPr>
+              <a:t>-------------|-------------|-----------------|-----|-----|---------</a:t>
+            </a:r>
+          </a:p>
+          <a:p>
+            <a:pPr>
+              <a:spcAft>
+                <a:spcPts val="400"/>
+              </a:spcAft>
+            </a:pPr>
+            <a:r>
+              <a:rPr sz="1400" b="0" i="0">
+                <a:solidFill>
+                  <a:srgbClr val="FFFFFF"/>
+                </a:solidFill>
+                <a:latin typeface="Calibri"/>
+              </a:rPr>
+              <a:t>API          | Horizontal  | CPU &gt; 70% / 5m  |  2  |  6  | 5 min</a:t>
+            </a:r>
+          </a:p>
+          <a:p>
+            <a:pPr>
+              <a:spcAft>
+                <a:spcPts val="400"/>
+              </a:spcAft>
+            </a:pPr>
+            <a:r>
+              <a:rPr sz="1400" b="0" i="0">
+                <a:solidFill>
+                  <a:srgbClr val="FFFFFF"/>
+                </a:solidFill>
+                <a:latin typeface="Calibri"/>
+              </a:rPr>
+              <a:t>Worker cola  | Horizontal  | cola &gt; 100 msg  |  1  |  4  | 3 min</a:t>
+            </a:r>
+          </a:p>
+          <a:p>
+            <a:pPr>
+              <a:spcAft>
+                <a:spcPts val="400"/>
+              </a:spcAft>
+            </a:pPr>
+            <a:r>
+              <a:rPr sz="1400" b="0" i="0">
+                <a:solidFill>
+                  <a:srgbClr val="FFFFFF"/>
+                </a:solidFill>
+                <a:latin typeface="Calibri"/>
+              </a:rPr>
+              <a:t>BD primaria  | NO escala   | -               |  1  |  1  | -</a:t>
+            </a:r>
+          </a:p>
+        </p:txBody>
+      </p:sp>
+      <p:sp>
+        <p:nvSpPr>
+          <p:cNvPr id="9" name="TextBox 8"/>
+          <p:cNvSpPr txBox="1"/>
+          <p:nvPr/>
+        </p:nvSpPr>
+        <p:spPr>
+          <a:xfrm>
+            <a:off x="457200" y="6080760"/>
+            <a:ext cx="11277295" cy="320040"/>
+          </a:xfrm>
+          <a:prstGeom prst="rect">
+            <a:avLst/>
+          </a:prstGeom>
+          <a:noFill/>
+        </p:spPr>
+        <p:txBody>
+          <a:bodyPr wrap="square">
+            <a:spAutoFit/>
+          </a:bodyPr>
           <a:lstStyle/>
           <a:p>
             <a:pPr algn="ctr"/>
-          </a:p>
-        </p:txBody>
-      </p:sp>
-      <p:pic>
-        <p:nvPicPr>
-          <p:cNvPr id="9" name="Picture 8" descr="google_docs.png"/>
-          <p:cNvPicPr>
-            <a:picLocks noChangeAspect="1"/>
-          </p:cNvPicPr>
-          <p:nvPr/>
-        </p:nvPicPr>
-        <p:blipFill>
-          <a:blip r:embed="rId2"/>
-          <a:stretch>
-            <a:fillRect/>
-          </a:stretch>
-        </p:blipFill>
-        <p:spPr>
-          <a:xfrm>
-            <a:off x="1659331" y="1847087"/>
-            <a:ext cx="1220724" cy="1220724"/>
-          </a:xfrm>
-          <a:prstGeom prst="rect">
-            <a:avLst/>
-          </a:prstGeom>
-        </p:spPr>
-      </p:pic>
+            <a:r>
+              <a:rPr sz="1200" b="0" i="1">
+                <a:solidFill>
+                  <a:srgbClr val="666666"/>
+                </a:solidFill>
+                <a:latin typeface="Calibri"/>
+              </a:rPr>
+              <a:t>El 'max' es lo que evita que la factura escale sola. La BD primaria casi nunca escala horizontal.</a:t>
+            </a:r>
+          </a:p>
+        </p:txBody>
+      </p:sp>
       <p:sp>
         <p:nvSpPr>
           <p:cNvPr id="10" name="TextBox 9"/>
-          <p:cNvSpPr txBox="1"/>
-          <p:nvPr/>
-        </p:nvSpPr>
-        <p:spPr>
-          <a:xfrm>
-            <a:off x="530352" y="3159251"/>
-            <a:ext cx="3478682" cy="621792"/>
-          </a:xfrm>
-          <a:prstGeom prst="rect">
-            <a:avLst/>
-          </a:prstGeom>
-          <a:noFill/>
-        </p:spPr>
-        <p:txBody>
-          <a:bodyPr wrap="square" anchor="t"/>
-          <a:lstStyle/>
-          <a:p>
-            <a:pPr algn="ctr"/>
-            <a:r>
-              <a:rPr sz="1300" b="1" i="0">
-                <a:solidFill>
-                  <a:srgbClr val="095292"/>
-                </a:solidFill>
-                <a:latin typeface="Calibri"/>
-              </a:rPr>
-              <a:t>Google Docs</a:t>
-            </a:r>
-          </a:p>
-          <a:p>
-            <a:pPr algn="ctr">
-              <a:spcBef>
-                <a:spcPts val="200"/>
-              </a:spcBef>
-            </a:pPr>
-            <a:r>
-              <a:rPr sz="1000" b="0" i="0">
-                <a:solidFill>
-                  <a:srgbClr val="666666"/>
-                </a:solidFill>
-                <a:latin typeface="Calibri"/>
-              </a:rPr>
-              <a:t>Politica de escalado</a:t>
-            </a:r>
-          </a:p>
-        </p:txBody>
-      </p:sp>
-      <p:sp>
-        <p:nvSpPr>
-          <p:cNvPr id="11" name="Rounded Rectangle 10"/>
-          <p:cNvSpPr/>
-          <p:nvPr/>
-        </p:nvSpPr>
-        <p:spPr>
-          <a:xfrm>
-            <a:off x="4283354" y="1591056"/>
-            <a:ext cx="3624986" cy="2299716"/>
-          </a:xfrm>
-          <a:prstGeom prst="roundRect">
-            <a:avLst>
-              <a:gd name="adj" fmla="val 12000"/>
-            </a:avLst>
-          </a:prstGeom>
-          <a:solidFill>
-            <a:srgbClr val="F2F2F2"/>
-          </a:solidFill>
-          <a:ln>
-            <a:noFill/>
-          </a:ln>
-        </p:spPr>
-        <p:style>
-          <a:lnRef idx="1">
-            <a:schemeClr val="accent1"/>
-          </a:lnRef>
-          <a:fillRef idx="3">
-            <a:schemeClr val="accent1"/>
-          </a:fillRef>
-          <a:effectRef idx="2">
-            <a:schemeClr val="accent1"/>
-          </a:effectRef>
-          <a:fontRef idx="minor">
-            <a:schemeClr val="lt1"/>
-          </a:fontRef>
-        </p:style>
-        <p:txBody>
-          <a:bodyPr rtlCol="0" anchor="ctr"/>
-          <a:lstStyle/>
-          <a:p>
-            <a:pPr algn="ctr"/>
-          </a:p>
-        </p:txBody>
-      </p:sp>
-      <p:sp>
-        <p:nvSpPr>
-          <p:cNvPr id="12" name="Rectangle 11"/>
-          <p:cNvSpPr/>
-          <p:nvPr/>
-        </p:nvSpPr>
-        <p:spPr>
-          <a:xfrm>
-            <a:off x="4283354" y="1591056"/>
-            <a:ext cx="3624986" cy="64008"/>
-          </a:xfrm>
-          <a:prstGeom prst="rect">
-            <a:avLst/>
-          </a:prstGeom>
-          <a:solidFill>
-            <a:srgbClr val="095292"/>
-          </a:solidFill>
-          <a:ln>
-            <a:noFill/>
-          </a:ln>
-        </p:spPr>
-        <p:style>
-          <a:lnRef idx="1">
-            <a:schemeClr val="accent1"/>
-          </a:lnRef>
-          <a:fillRef idx="3">
-            <a:schemeClr val="accent1"/>
-          </a:fillRef>
-          <a:effectRef idx="2">
-            <a:schemeClr val="accent1"/>
-          </a:effectRef>
-          <a:fontRef idx="minor">
-            <a:schemeClr val="lt1"/>
-          </a:fontRef>
-        </p:style>
-        <p:txBody>
-          <a:bodyPr rtlCol="0" anchor="ctr"/>
-          <a:lstStyle/>
-          <a:p>
-            <a:pPr algn="ctr"/>
-          </a:p>
-        </p:txBody>
-      </p:sp>
-      <p:sp>
-        <p:nvSpPr>
-          <p:cNvPr id="13" name="Rectangle 12"/>
-          <p:cNvSpPr/>
-          <p:nvPr/>
-        </p:nvSpPr>
-        <p:spPr>
-          <a:xfrm>
-            <a:off x="4283354" y="1655064"/>
-            <a:ext cx="3624986" cy="27432"/>
-          </a:xfrm>
-          <a:prstGeom prst="rect">
-            <a:avLst/>
-          </a:prstGeom>
-          <a:solidFill>
-            <a:srgbClr val="FFD000"/>
-          </a:solidFill>
-          <a:ln>
-            <a:noFill/>
-          </a:ln>
-        </p:spPr>
-        <p:style>
-          <a:lnRef idx="1">
-            <a:schemeClr val="accent1"/>
-          </a:lnRef>
-          <a:fillRef idx="3">
-            <a:schemeClr val="accent1"/>
-          </a:fillRef>
-          <a:effectRef idx="2">
-            <a:schemeClr val="accent1"/>
-          </a:effectRef>
-          <a:fontRef idx="minor">
-            <a:schemeClr val="lt1"/>
-          </a:fontRef>
-        </p:style>
-        <p:txBody>
-          <a:bodyPr rtlCol="0" anchor="ctr"/>
-          <a:lstStyle/>
-          <a:p>
-            <a:pPr algn="ctr"/>
-          </a:p>
-        </p:txBody>
-      </p:sp>
-      <p:pic>
-        <p:nvPicPr>
-          <p:cNvPr id="14" name="Picture 13" descr="drawio.png"/>
-          <p:cNvPicPr>
-            <a:picLocks noChangeAspect="1"/>
-          </p:cNvPicPr>
-          <p:nvPr/>
-        </p:nvPicPr>
-        <p:blipFill>
-          <a:blip r:embed="rId3"/>
-          <a:stretch>
-            <a:fillRect/>
-          </a:stretch>
-        </p:blipFill>
-        <p:spPr>
-          <a:xfrm>
-            <a:off x="5485485" y="1847087"/>
-            <a:ext cx="1220724" cy="1220724"/>
-          </a:xfrm>
-          <a:prstGeom prst="rect">
-            <a:avLst/>
-          </a:prstGeom>
-        </p:spPr>
-      </p:pic>
-      <p:sp>
-        <p:nvSpPr>
-          <p:cNvPr id="15" name="TextBox 14"/>
-          <p:cNvSpPr txBox="1"/>
-          <p:nvPr/>
-        </p:nvSpPr>
-        <p:spPr>
-          <a:xfrm>
-            <a:off x="4356506" y="3159251"/>
-            <a:ext cx="3478682" cy="621792"/>
-          </a:xfrm>
-          <a:prstGeom prst="rect">
-            <a:avLst/>
-          </a:prstGeom>
-          <a:noFill/>
-        </p:spPr>
-        <p:txBody>
-          <a:bodyPr wrap="square" anchor="t"/>
-          <a:lstStyle/>
-          <a:p>
-            <a:pPr algn="ctr"/>
-            <a:r>
-              <a:rPr sz="1300" b="1" i="0">
-                <a:solidFill>
-                  <a:srgbClr val="095292"/>
-                </a:solidFill>
-                <a:latin typeface="Calibri"/>
-              </a:rPr>
-              <a:t>draw.io</a:t>
-            </a:r>
-          </a:p>
-          <a:p>
-            <a:pPr algn="ctr">
-              <a:spcBef>
-                <a:spcPts val="200"/>
-              </a:spcBef>
-            </a:pPr>
-            <a:r>
-              <a:rPr sz="1000" b="0" i="0">
-                <a:solidFill>
-                  <a:srgbClr val="666666"/>
-                </a:solidFill>
-                <a:latin typeface="Calibri"/>
-              </a:rPr>
-              <a:t>Nota en Deployment</a:t>
-            </a:r>
-          </a:p>
-        </p:txBody>
-      </p:sp>
-      <p:sp>
-        <p:nvSpPr>
-          <p:cNvPr id="16" name="Rounded Rectangle 15"/>
-          <p:cNvSpPr/>
-          <p:nvPr/>
-        </p:nvSpPr>
-        <p:spPr>
-          <a:xfrm>
-            <a:off x="8109508" y="1591056"/>
-            <a:ext cx="3624986" cy="2299716"/>
-          </a:xfrm>
-          <a:prstGeom prst="roundRect">
-            <a:avLst>
-              <a:gd name="adj" fmla="val 12000"/>
-            </a:avLst>
-          </a:prstGeom>
-          <a:solidFill>
-            <a:srgbClr val="F2F2F2"/>
-          </a:solidFill>
-          <a:ln>
-            <a:noFill/>
-          </a:ln>
-        </p:spPr>
-        <p:style>
-          <a:lnRef idx="1">
-            <a:schemeClr val="accent1"/>
-          </a:lnRef>
-          <a:fillRef idx="3">
-            <a:schemeClr val="accent1"/>
-          </a:fillRef>
-          <a:effectRef idx="2">
-            <a:schemeClr val="accent1"/>
-          </a:effectRef>
-          <a:fontRef idx="minor">
-            <a:schemeClr val="lt1"/>
-          </a:fontRef>
-        </p:style>
-        <p:txBody>
-          <a:bodyPr rtlCol="0" anchor="ctr"/>
-          <a:lstStyle/>
-          <a:p>
-            <a:pPr algn="ctr"/>
-          </a:p>
-        </p:txBody>
-      </p:sp>
-      <p:sp>
-        <p:nvSpPr>
-          <p:cNvPr id="17" name="Rectangle 16"/>
-          <p:cNvSpPr/>
-          <p:nvPr/>
-        </p:nvSpPr>
-        <p:spPr>
-          <a:xfrm>
-            <a:off x="8109508" y="1591056"/>
-            <a:ext cx="3624986" cy="64008"/>
-          </a:xfrm>
-          <a:prstGeom prst="rect">
-            <a:avLst/>
-          </a:prstGeom>
-          <a:solidFill>
-            <a:srgbClr val="095292"/>
-          </a:solidFill>
-          <a:ln>
-            <a:noFill/>
-          </a:ln>
-        </p:spPr>
-        <p:style>
-          <a:lnRef idx="1">
-            <a:schemeClr val="accent1"/>
-          </a:lnRef>
-          <a:fillRef idx="3">
-            <a:schemeClr val="accent1"/>
-          </a:fillRef>
-          <a:effectRef idx="2">
-            <a:schemeClr val="accent1"/>
-          </a:effectRef>
-          <a:fontRef idx="minor">
-            <a:schemeClr val="lt1"/>
-          </a:fontRef>
-        </p:style>
-        <p:txBody>
-          <a:bodyPr rtlCol="0" anchor="ctr"/>
-          <a:lstStyle/>
-          <a:p>
-            <a:pPr algn="ctr"/>
-          </a:p>
-        </p:txBody>
-      </p:sp>
-      <p:sp>
-        <p:nvSpPr>
-          <p:cNvPr id="18" name="Rectangle 17"/>
-          <p:cNvSpPr/>
-          <p:nvPr/>
-        </p:nvSpPr>
-        <p:spPr>
-          <a:xfrm>
-            <a:off x="8109508" y="1655064"/>
-            <a:ext cx="3624986" cy="27432"/>
-          </a:xfrm>
-          <a:prstGeom prst="rect">
-            <a:avLst/>
-          </a:prstGeom>
-          <a:solidFill>
-            <a:srgbClr val="FFD000"/>
-          </a:solidFill>
-          <a:ln>
-            <a:noFill/>
-          </a:ln>
-        </p:spPr>
-        <p:style>
-          <a:lnRef idx="1">
-            <a:schemeClr val="accent1"/>
-          </a:lnRef>
-          <a:fillRef idx="3">
-            <a:schemeClr val="accent1"/>
-          </a:fillRef>
-          <a:effectRef idx="2">
-            <a:schemeClr val="accent1"/>
-          </a:effectRef>
-          <a:fontRef idx="minor">
-            <a:schemeClr val="lt1"/>
-          </a:fontRef>
-        </p:style>
-        <p:txBody>
-          <a:bodyPr rtlCol="0" anchor="ctr"/>
-          <a:lstStyle/>
-          <a:p>
-            <a:pPr algn="ctr"/>
-          </a:p>
-        </p:txBody>
-      </p:sp>
-      <p:pic>
-        <p:nvPicPr>
-          <p:cNvPr id="19" name="Picture 18" descr="mermaid.png"/>
-          <p:cNvPicPr>
-            <a:picLocks noChangeAspect="1"/>
-          </p:cNvPicPr>
-          <p:nvPr/>
-        </p:nvPicPr>
-        <p:blipFill>
-          <a:blip r:embed="rId4"/>
-          <a:stretch>
-            <a:fillRect/>
-          </a:stretch>
-        </p:blipFill>
-        <p:spPr>
-          <a:xfrm>
-            <a:off x="9311640" y="1847087"/>
-            <a:ext cx="1220724" cy="1220724"/>
-          </a:xfrm>
-          <a:prstGeom prst="rect">
-            <a:avLst/>
-          </a:prstGeom>
-        </p:spPr>
-      </p:pic>
-      <p:sp>
-        <p:nvSpPr>
-          <p:cNvPr id="20" name="TextBox 19"/>
-          <p:cNvSpPr txBox="1"/>
-          <p:nvPr/>
-        </p:nvSpPr>
-        <p:spPr>
-          <a:xfrm>
-            <a:off x="8182660" y="3159251"/>
-            <a:ext cx="3478682" cy="621792"/>
-          </a:xfrm>
-          <a:prstGeom prst="rect">
-            <a:avLst/>
-          </a:prstGeom>
-          <a:noFill/>
-        </p:spPr>
-        <p:txBody>
-          <a:bodyPr wrap="square" anchor="t"/>
-          <a:lstStyle/>
-          <a:p>
-            <a:pPr algn="ctr"/>
-            <a:r>
-              <a:rPr sz="1300" b="1" i="0">
-                <a:solidFill>
-                  <a:srgbClr val="095292"/>
-                </a:solidFill>
-                <a:latin typeface="Calibri"/>
-              </a:rPr>
-              <a:t>Mermaid</a:t>
-            </a:r>
-          </a:p>
-          <a:p>
-            <a:pPr algn="ctr">
-              <a:spcBef>
-                <a:spcPts val="200"/>
-              </a:spcBef>
-            </a:pPr>
-            <a:r>
-              <a:rPr sz="1000" b="0" i="0">
-                <a:solidFill>
-                  <a:srgbClr val="666666"/>
-                </a:solidFill>
-                <a:latin typeface="Calibri"/>
-              </a:rPr>
-              <a:t>Codigo del diagrama</a:t>
-            </a:r>
-          </a:p>
-        </p:txBody>
-      </p:sp>
-      <p:sp>
-        <p:nvSpPr>
-          <p:cNvPr id="21" name="Rounded Rectangle 20"/>
-          <p:cNvSpPr/>
-          <p:nvPr/>
-        </p:nvSpPr>
-        <p:spPr>
-          <a:xfrm>
-            <a:off x="4283354" y="4055364"/>
-            <a:ext cx="3624986" cy="2299716"/>
-          </a:xfrm>
-          <a:prstGeom prst="roundRect">
-            <a:avLst>
-              <a:gd name="adj" fmla="val 12000"/>
-            </a:avLst>
-          </a:prstGeom>
-          <a:solidFill>
-            <a:srgbClr val="F2F2F2"/>
-          </a:solidFill>
-          <a:ln>
-            <a:noFill/>
-          </a:ln>
-        </p:spPr>
-        <p:style>
-          <a:lnRef idx="1">
-            <a:schemeClr val="accent1"/>
-          </a:lnRef>
-          <a:fillRef idx="3">
-            <a:schemeClr val="accent1"/>
-          </a:fillRef>
-          <a:effectRef idx="2">
-            <a:schemeClr val="accent1"/>
-          </a:effectRef>
-          <a:fontRef idx="minor">
-            <a:schemeClr val="lt1"/>
-          </a:fontRef>
-        </p:style>
-        <p:txBody>
-          <a:bodyPr rtlCol="0" anchor="ctr"/>
-          <a:lstStyle/>
-          <a:p>
-            <a:pPr algn="ctr"/>
-          </a:p>
-        </p:txBody>
-      </p:sp>
-      <p:sp>
-        <p:nvSpPr>
-          <p:cNvPr id="22" name="Rectangle 21"/>
-          <p:cNvSpPr/>
-          <p:nvPr/>
-        </p:nvSpPr>
-        <p:spPr>
-          <a:xfrm>
-            <a:off x="4283354" y="4055364"/>
-            <a:ext cx="3624986" cy="64008"/>
-          </a:xfrm>
-          <a:prstGeom prst="rect">
-            <a:avLst/>
-          </a:prstGeom>
-          <a:solidFill>
-            <a:srgbClr val="095292"/>
-          </a:solidFill>
-          <a:ln>
-            <a:noFill/>
-          </a:ln>
-        </p:spPr>
-        <p:style>
-          <a:lnRef idx="1">
-            <a:schemeClr val="accent1"/>
-          </a:lnRef>
-          <a:fillRef idx="3">
-            <a:schemeClr val="accent1"/>
-          </a:fillRef>
-          <a:effectRef idx="2">
-            <a:schemeClr val="accent1"/>
-          </a:effectRef>
-          <a:fontRef idx="minor">
-            <a:schemeClr val="lt1"/>
-          </a:fontRef>
-        </p:style>
-        <p:txBody>
-          <a:bodyPr rtlCol="0" anchor="ctr"/>
-          <a:lstStyle/>
-          <a:p>
-            <a:pPr algn="ctr"/>
-          </a:p>
-        </p:txBody>
-      </p:sp>
-      <p:sp>
-        <p:nvSpPr>
-          <p:cNvPr id="23" name="Rectangle 22"/>
-          <p:cNvSpPr/>
-          <p:nvPr/>
-        </p:nvSpPr>
-        <p:spPr>
-          <a:xfrm>
-            <a:off x="4283354" y="4119372"/>
-            <a:ext cx="3624986" cy="27432"/>
-          </a:xfrm>
-          <a:prstGeom prst="rect">
-            <a:avLst/>
-          </a:prstGeom>
-          <a:solidFill>
-            <a:srgbClr val="FFD000"/>
-          </a:solidFill>
-          <a:ln>
-            <a:noFill/>
-          </a:ln>
-        </p:spPr>
-        <p:style>
-          <a:lnRef idx="1">
-            <a:schemeClr val="accent1"/>
-          </a:lnRef>
-          <a:fillRef idx="3">
-            <a:schemeClr val="accent1"/>
-          </a:fillRef>
-          <a:effectRef idx="2">
-            <a:schemeClr val="accent1"/>
-          </a:effectRef>
-          <a:fontRef idx="minor">
-            <a:schemeClr val="lt1"/>
-          </a:fontRef>
-        </p:style>
-        <p:txBody>
-          <a:bodyPr rtlCol="0" anchor="ctr"/>
-          <a:lstStyle/>
-          <a:p>
-            <a:pPr algn="ctr"/>
-          </a:p>
-        </p:txBody>
-      </p:sp>
-      <p:pic>
-        <p:nvPicPr>
-          <p:cNvPr id="24" name="Picture 23" descr="examlab.png"/>
-          <p:cNvPicPr>
-            <a:picLocks noChangeAspect="1"/>
-          </p:cNvPicPr>
-          <p:nvPr/>
-        </p:nvPicPr>
-        <p:blipFill>
-          <a:blip r:embed="rId5"/>
-          <a:stretch>
-            <a:fillRect/>
-          </a:stretch>
-        </p:blipFill>
-        <p:spPr>
-          <a:xfrm>
-            <a:off x="5485485" y="4311396"/>
-            <a:ext cx="1220724" cy="1220724"/>
-          </a:xfrm>
-          <a:prstGeom prst="rect">
-            <a:avLst/>
-          </a:prstGeom>
-        </p:spPr>
-      </p:pic>
-      <p:sp>
-        <p:nvSpPr>
-          <p:cNvPr id="25" name="TextBox 24"/>
-          <p:cNvSpPr txBox="1"/>
-          <p:nvPr/>
-        </p:nvSpPr>
-        <p:spPr>
-          <a:xfrm>
-            <a:off x="4356506" y="5623560"/>
-            <a:ext cx="3478682" cy="621792"/>
-          </a:xfrm>
-          <a:prstGeom prst="rect">
-            <a:avLst/>
-          </a:prstGeom>
-          <a:noFill/>
-        </p:spPr>
-        <p:txBody>
-          <a:bodyPr wrap="square" anchor="t"/>
-          <a:lstStyle/>
-          <a:p>
-            <a:pPr algn="ctr"/>
-            <a:r>
-              <a:rPr sz="1300" b="1" i="0">
-                <a:solidFill>
-                  <a:srgbClr val="095292"/>
-                </a:solidFill>
-                <a:latin typeface="Calibri"/>
-              </a:rPr>
-              <a:t>la plataforma del curso</a:t>
-            </a:r>
-          </a:p>
-          <a:p>
-            <a:pPr algn="ctr">
-              <a:spcBef>
-                <a:spcPts val="200"/>
-              </a:spcBef>
-            </a:pPr>
-            <a:r>
-              <a:rPr sz="1000" b="0" i="0">
-                <a:solidFill>
-                  <a:srgbClr val="666666"/>
-                </a:solidFill>
-                <a:latin typeface="Calibri"/>
-              </a:rPr>
-              <a:t>Donde se entrega</a:t>
-            </a:r>
-          </a:p>
-        </p:txBody>
-      </p:sp>
-      <p:sp>
-        <p:nvSpPr>
-          <p:cNvPr id="26" name="TextBox 25"/>
           <p:cNvSpPr txBox="1"/>
           <p:nvPr/>
         </p:nvSpPr>
@@ -8893,7 +8395,7 @@
                 </a:solidFill>
                 <a:latin typeface="Calibri"/>
               </a:rPr>
-              <a:t>Del boceto a la plataforma del curso (diagrama)</a:t>
+              <a:t>Herramientas de hoy</a:t>
             </a:r>
           </a:p>
         </p:txBody>
@@ -8927,7 +8429,7 @@
                 </a:solidFill>
                 <a:latin typeface="Calibri"/>
               </a:rPr>
-              <a:t>El diagrama se entrega como código Mermaid dentro de la plataforma del curso, no como imagen</a:t>
+              <a:t>Gratis · navegador o free tier · sin cuenta de pago</a:t>
             </a:r>
           </a:p>
         </p:txBody>
@@ -8940,8 +8442,8 @@
         </p:nvSpPr>
         <p:spPr>
           <a:xfrm>
-            <a:off x="457200" y="1659636"/>
-            <a:ext cx="11277295" cy="1051560"/>
+            <a:off x="457200" y="1591056"/>
+            <a:ext cx="3624986" cy="2299716"/>
           </a:xfrm>
           <a:prstGeom prst="roundRect">
             <a:avLst>
@@ -8979,19 +8481,17 @@
       </p:sp>
       <p:sp>
         <p:nvSpPr>
-          <p:cNvPr id="7" name="Rounded Rectangle 6"/>
+          <p:cNvPr id="7" name="Rectangle 6"/>
           <p:cNvSpPr/>
           <p:nvPr/>
         </p:nvSpPr>
         <p:spPr>
           <a:xfrm>
-            <a:off x="594360" y="1965960"/>
-            <a:ext cx="438912" cy="438912"/>
-          </a:xfrm>
-          <a:prstGeom prst="roundRect">
-            <a:avLst>
-              <a:gd name="adj" fmla="val 12000"/>
-            </a:avLst>
+            <a:off x="457200" y="1591056"/>
+            <a:ext cx="3624986" cy="64008"/>
+          </a:xfrm>
+          <a:prstGeom prst="rect">
+            <a:avLst/>
           </a:prstGeom>
           <a:solidFill>
             <a:srgbClr val="095292"/>
@@ -9024,103 +8524,20 @@
       </p:sp>
       <p:sp>
         <p:nvSpPr>
-          <p:cNvPr id="8" name="TextBox 7"/>
-          <p:cNvSpPr txBox="1"/>
-          <p:nvPr/>
-        </p:nvSpPr>
-        <p:spPr>
-          <a:xfrm>
-            <a:off x="594360" y="1965960"/>
-            <a:ext cx="438912" cy="438912"/>
-          </a:xfrm>
-          <a:prstGeom prst="rect">
-            <a:avLst/>
-          </a:prstGeom>
-          <a:noFill/>
-        </p:spPr>
-        <p:txBody>
-          <a:bodyPr wrap="square" anchor="ctr"/>
-          <a:lstStyle/>
-          <a:p>
-            <a:pPr algn="ctr"/>
-            <a:r>
-              <a:rPr sz="1600" b="1" i="0">
-                <a:solidFill>
-                  <a:srgbClr val="FFFFFF"/>
-                </a:solidFill>
-                <a:latin typeface="Calibri"/>
-              </a:rPr>
-              <a:t>1</a:t>
-            </a:r>
-          </a:p>
-        </p:txBody>
-      </p:sp>
-      <p:sp>
-        <p:nvSpPr>
-          <p:cNvPr id="9" name="TextBox 8"/>
-          <p:cNvSpPr txBox="1"/>
-          <p:nvPr/>
-        </p:nvSpPr>
-        <p:spPr>
-          <a:xfrm>
-            <a:off x="1188720" y="1751076"/>
-            <a:ext cx="10271455" cy="886968"/>
-          </a:xfrm>
-          <a:prstGeom prst="rect">
-            <a:avLst/>
-          </a:prstGeom>
-          <a:noFill/>
-        </p:spPr>
-        <p:txBody>
-          <a:bodyPr wrap="square" anchor="ctr"/>
-          <a:lstStyle/>
-          <a:p>
-            <a:r>
-              <a:rPr sz="1500" b="1" i="0">
-                <a:solidFill>
-                  <a:srgbClr val="095292"/>
-                </a:solidFill>
-                <a:latin typeface="Calibri"/>
-              </a:rPr>
-              <a:t>Disena visual</a:t>
-            </a:r>
-          </a:p>
-          <a:p>
-            <a:pPr>
-              <a:spcBef>
-                <a:spcPts val="200"/>
-              </a:spcBef>
-            </a:pPr>
-            <a:r>
-              <a:rPr sz="1300" b="0" i="0">
-                <a:solidFill>
-                  <a:srgbClr val="333333"/>
-                </a:solidFill>
-                <a:latin typeface="Calibri"/>
-              </a:rPr>
-              <a:t>Dibuja el diagrama como quieras en Excalidraw o draw.io: es mas rapido arrastrar cajas que escribir codigo, y ahi es donde piensas el modelo.</a:t>
-            </a:r>
-          </a:p>
-        </p:txBody>
-      </p:sp>
-      <p:sp>
-        <p:nvSpPr>
-          <p:cNvPr id="10" name="Rounded Rectangle 9"/>
+          <p:cNvPr id="8" name="Rectangle 7"/>
           <p:cNvSpPr/>
           <p:nvPr/>
         </p:nvSpPr>
         <p:spPr>
           <a:xfrm>
-            <a:off x="457200" y="2802636"/>
-            <a:ext cx="11277295" cy="1051560"/>
-          </a:xfrm>
-          <a:prstGeom prst="roundRect">
-            <a:avLst>
-              <a:gd name="adj" fmla="val 12000"/>
-            </a:avLst>
+            <a:off x="457200" y="1655064"/>
+            <a:ext cx="3624986" cy="27432"/>
+          </a:xfrm>
+          <a:prstGeom prst="rect">
+            <a:avLst/>
           </a:prstGeom>
           <a:solidFill>
-            <a:srgbClr val="E8F4FA"/>
+            <a:srgbClr val="FFD000"/>
           </a:solidFill>
           <a:ln>
             <a:noFill/>
@@ -9148,6 +8565,79 @@
           </a:p>
         </p:txBody>
       </p:sp>
+      <p:pic>
+        <p:nvPicPr>
+          <p:cNvPr id="9" name="Picture 8" descr="google_docs.png"/>
+          <p:cNvPicPr>
+            <a:picLocks noChangeAspect="1"/>
+          </p:cNvPicPr>
+          <p:nvPr/>
+        </p:nvPicPr>
+        <p:blipFill>
+          <a:blip r:embed="rId2"/>
+          <a:stretch>
+            <a:fillRect/>
+          </a:stretch>
+        </p:blipFill>
+        <p:spPr>
+          <a:xfrm>
+            <a:off x="1659331" y="1847087"/>
+            <a:ext cx="1220724" cy="1220724"/>
+          </a:xfrm>
+          <a:prstGeom prst="rect">
+            <a:avLst/>
+          </a:prstGeom>
+        </p:spPr>
+      </p:pic>
+      <p:sp>
+        <p:nvSpPr>
+          <p:cNvPr id="10" name="TextBox 9"/>
+          <p:cNvSpPr txBox="1"/>
+          <p:nvPr/>
+        </p:nvSpPr>
+        <p:spPr>
+          <a:xfrm>
+            <a:off x="530352" y="3159251"/>
+            <a:ext cx="3478682" cy="621792"/>
+          </a:xfrm>
+          <a:prstGeom prst="rect">
+            <a:avLst/>
+          </a:prstGeom>
+          <a:noFill/>
+        </p:spPr>
+        <p:txBody>
+          <a:bodyPr wrap="square" anchor="t"/>
+          <a:lstStyle/>
+          <a:p>
+            <a:pPr algn="ctr"/>
+            <a:r>
+              <a:rPr sz="1300" b="1" i="0">
+                <a:solidFill>
+                  <a:srgbClr val="095292"/>
+                </a:solidFill>
+                <a:latin typeface="Calibri"/>
+              </a:rPr>
+              <a:t>Google Docs</a:t>
+            </a:r>
+          </a:p>
+          <a:p>
+            <a:pPr algn="ctr">
+              <a:spcBef>
+                <a:spcPts val="200"/>
+              </a:spcBef>
+            </a:pPr>
+            <a:r>
+              <a:rPr sz="1000" b="0" i="0">
+                <a:solidFill>
+                  <a:srgbClr val="666666"/>
+                </a:solidFill>
+                <a:latin typeface="Calibri"/>
+              </a:rPr>
+              <a:t>Politica de escalado</a:t>
+            </a:r>
+          </a:p>
+        </p:txBody>
+      </p:sp>
       <p:sp>
         <p:nvSpPr>
           <p:cNvPr id="11" name="Rounded Rectangle 10"/>
@@ -9156,13 +8646,56 @@
         </p:nvSpPr>
         <p:spPr>
           <a:xfrm>
-            <a:off x="594360" y="3108960"/>
-            <a:ext cx="438912" cy="438912"/>
+            <a:off x="4283354" y="1591056"/>
+            <a:ext cx="3624986" cy="2299716"/>
           </a:xfrm>
           <a:prstGeom prst="roundRect">
             <a:avLst>
               <a:gd name="adj" fmla="val 12000"/>
             </a:avLst>
+          </a:prstGeom>
+          <a:solidFill>
+            <a:srgbClr val="F2F2F2"/>
+          </a:solidFill>
+          <a:ln>
+            <a:noFill/>
+          </a:ln>
+        </p:spPr>
+        <p:style>
+          <a:lnRef idx="1">
+            <a:schemeClr val="accent1"/>
+          </a:lnRef>
+          <a:fillRef idx="3">
+            <a:schemeClr val="accent1"/>
+          </a:fillRef>
+          <a:effectRef idx="2">
+            <a:schemeClr val="accent1"/>
+          </a:effectRef>
+          <a:fontRef idx="minor">
+            <a:schemeClr val="lt1"/>
+          </a:fontRef>
+        </p:style>
+        <p:txBody>
+          <a:bodyPr rtlCol="0" anchor="ctr"/>
+          <a:lstStyle/>
+          <a:p>
+            <a:pPr algn="ctr"/>
+          </a:p>
+        </p:txBody>
+      </p:sp>
+      <p:sp>
+        <p:nvSpPr>
+          <p:cNvPr id="12" name="Rectangle 11"/>
+          <p:cNvSpPr/>
+          <p:nvPr/>
+        </p:nvSpPr>
+        <p:spPr>
+          <a:xfrm>
+            <a:off x="4283354" y="1591056"/>
+            <a:ext cx="3624986" cy="64008"/>
+          </a:xfrm>
+          <a:prstGeom prst="rect">
+            <a:avLst/>
           </a:prstGeom>
           <a:solidFill>
             <a:srgbClr val="095292"/>
@@ -9195,14 +8728,81 @@
       </p:sp>
       <p:sp>
         <p:nvSpPr>
-          <p:cNvPr id="12" name="TextBox 11"/>
+          <p:cNvPr id="13" name="Rectangle 12"/>
+          <p:cNvSpPr/>
+          <p:nvPr/>
+        </p:nvSpPr>
+        <p:spPr>
+          <a:xfrm>
+            <a:off x="4283354" y="1655064"/>
+            <a:ext cx="3624986" cy="27432"/>
+          </a:xfrm>
+          <a:prstGeom prst="rect">
+            <a:avLst/>
+          </a:prstGeom>
+          <a:solidFill>
+            <a:srgbClr val="FFD000"/>
+          </a:solidFill>
+          <a:ln>
+            <a:noFill/>
+          </a:ln>
+        </p:spPr>
+        <p:style>
+          <a:lnRef idx="1">
+            <a:schemeClr val="accent1"/>
+          </a:lnRef>
+          <a:fillRef idx="3">
+            <a:schemeClr val="accent1"/>
+          </a:fillRef>
+          <a:effectRef idx="2">
+            <a:schemeClr val="accent1"/>
+          </a:effectRef>
+          <a:fontRef idx="minor">
+            <a:schemeClr val="lt1"/>
+          </a:fontRef>
+        </p:style>
+        <p:txBody>
+          <a:bodyPr rtlCol="0" anchor="ctr"/>
+          <a:lstStyle/>
+          <a:p>
+            <a:pPr algn="ctr"/>
+          </a:p>
+        </p:txBody>
+      </p:sp>
+      <p:pic>
+        <p:nvPicPr>
+          <p:cNvPr id="14" name="Picture 13" descr="drawio.png"/>
+          <p:cNvPicPr>
+            <a:picLocks noChangeAspect="1"/>
+          </p:cNvPicPr>
+          <p:nvPr/>
+        </p:nvPicPr>
+        <p:blipFill>
+          <a:blip r:embed="rId3"/>
+          <a:stretch>
+            <a:fillRect/>
+          </a:stretch>
+        </p:blipFill>
+        <p:spPr>
+          <a:xfrm>
+            <a:off x="5485485" y="1847087"/>
+            <a:ext cx="1220724" cy="1220724"/>
+          </a:xfrm>
+          <a:prstGeom prst="rect">
+            <a:avLst/>
+          </a:prstGeom>
+        </p:spPr>
+      </p:pic>
+      <p:sp>
+        <p:nvSpPr>
+          <p:cNvPr id="15" name="TextBox 14"/>
           <p:cNvSpPr txBox="1"/>
           <p:nvPr/>
         </p:nvSpPr>
         <p:spPr>
           <a:xfrm>
-            <a:off x="594360" y="3108960"/>
-            <a:ext cx="438912" cy="438912"/>
+            <a:off x="4356506" y="3159251"/>
+            <a:ext cx="3478682" cy="621792"/>
           </a:xfrm>
           <a:prstGeom prst="rect">
             <a:avLst/>
@@ -9210,80 +8810,48 @@
           <a:noFill/>
         </p:spPr>
         <p:txBody>
-          <a:bodyPr wrap="square" anchor="ctr"/>
+          <a:bodyPr wrap="square" anchor="t"/>
           <a:lstStyle/>
           <a:p>
             <a:pPr algn="ctr"/>
             <a:r>
-              <a:rPr sz="1600" b="1" i="0">
-                <a:solidFill>
-                  <a:srgbClr val="FFFFFF"/>
-                </a:solidFill>
-                <a:latin typeface="Calibri"/>
-              </a:rPr>
-              <a:t>2</a:t>
-            </a:r>
-          </a:p>
-        </p:txBody>
-      </p:sp>
-      <p:sp>
-        <p:nvSpPr>
-          <p:cNvPr id="13" name="TextBox 12"/>
-          <p:cNvSpPr txBox="1"/>
-          <p:nvPr/>
-        </p:nvSpPr>
-        <p:spPr>
-          <a:xfrm>
-            <a:off x="1188720" y="2894076"/>
-            <a:ext cx="10271455" cy="886968"/>
-          </a:xfrm>
-          <a:prstGeom prst="rect">
-            <a:avLst/>
-          </a:prstGeom>
-          <a:noFill/>
-        </p:spPr>
-        <p:txBody>
-          <a:bodyPr wrap="square" anchor="ctr"/>
-          <a:lstStyle/>
-          <a:p>
-            <a:r>
-              <a:rPr sz="1500" b="1" i="0">
+              <a:rPr sz="1300" b="1" i="0">
                 <a:solidFill>
                   <a:srgbClr val="095292"/>
                 </a:solidFill>
                 <a:latin typeface="Calibri"/>
               </a:rPr>
-              <a:t>Traduce con IA</a:t>
-            </a:r>
-          </a:p>
-          <a:p>
-            <a:pPr>
+              <a:t>draw.io</a:t>
+            </a:r>
+          </a:p>
+          <a:p>
+            <a:pPr algn="ctr">
               <a:spcBef>
                 <a:spcPts val="200"/>
               </a:spcBef>
             </a:pPr>
             <a:r>
-              <a:rPr sz="1300" b="0" i="0">
-                <a:solidFill>
-                  <a:srgbClr val="333333"/>
-                </a:solidFill>
-                <a:latin typeface="Calibri"/>
-              </a:rPr>
-              <a:t>Copia o describe tu boceto a una IA y pidele el codigo Mermaid: «convierte este diagrama a Mermaid usando flowchart». Revisa el resultado: la IA acierta la sintaxis, no tu modelo.</a:t>
-            </a:r>
-          </a:p>
-        </p:txBody>
-      </p:sp>
-      <p:sp>
-        <p:nvSpPr>
-          <p:cNvPr id="14" name="Rounded Rectangle 13"/>
+              <a:rPr sz="1000" b="0" i="0">
+                <a:solidFill>
+                  <a:srgbClr val="666666"/>
+                </a:solidFill>
+                <a:latin typeface="Calibri"/>
+              </a:rPr>
+              <a:t>Nota en Deployment</a:t>
+            </a:r>
+          </a:p>
+        </p:txBody>
+      </p:sp>
+      <p:sp>
+        <p:nvSpPr>
+          <p:cNvPr id="16" name="Rounded Rectangle 15"/>
           <p:cNvSpPr/>
           <p:nvPr/>
         </p:nvSpPr>
         <p:spPr>
           <a:xfrm>
-            <a:off x="457200" y="3945636"/>
-            <a:ext cx="11277295" cy="1051560"/>
+            <a:off x="8109508" y="1591056"/>
+            <a:ext cx="3624986" cy="2299716"/>
           </a:xfrm>
           <a:prstGeom prst="roundRect">
             <a:avLst>
@@ -9321,19 +8889,17 @@
       </p:sp>
       <p:sp>
         <p:nvSpPr>
-          <p:cNvPr id="15" name="Rounded Rectangle 14"/>
+          <p:cNvPr id="17" name="Rectangle 16"/>
           <p:cNvSpPr/>
           <p:nvPr/>
         </p:nvSpPr>
         <p:spPr>
           <a:xfrm>
-            <a:off x="594360" y="4251960"/>
-            <a:ext cx="438912" cy="438912"/>
-          </a:xfrm>
-          <a:prstGeom prst="roundRect">
-            <a:avLst>
-              <a:gd name="adj" fmla="val 12000"/>
-            </a:avLst>
+            <a:off x="8109508" y="1591056"/>
+            <a:ext cx="3624986" cy="64008"/>
+          </a:xfrm>
+          <a:prstGeom prst="rect">
+            <a:avLst/>
           </a:prstGeom>
           <a:solidFill>
             <a:srgbClr val="095292"/>
@@ -9366,103 +8932,20 @@
       </p:sp>
       <p:sp>
         <p:nvSpPr>
-          <p:cNvPr id="16" name="TextBox 15"/>
-          <p:cNvSpPr txBox="1"/>
-          <p:nvPr/>
-        </p:nvSpPr>
-        <p:spPr>
-          <a:xfrm>
-            <a:off x="594360" y="4251960"/>
-            <a:ext cx="438912" cy="438912"/>
-          </a:xfrm>
-          <a:prstGeom prst="rect">
-            <a:avLst/>
-          </a:prstGeom>
-          <a:noFill/>
-        </p:spPr>
-        <p:txBody>
-          <a:bodyPr wrap="square" anchor="ctr"/>
-          <a:lstStyle/>
-          <a:p>
-            <a:pPr algn="ctr"/>
-            <a:r>
-              <a:rPr sz="1600" b="1" i="0">
-                <a:solidFill>
-                  <a:srgbClr val="FFFFFF"/>
-                </a:solidFill>
-                <a:latin typeface="Calibri"/>
-              </a:rPr>
-              <a:t>3</a:t>
-            </a:r>
-          </a:p>
-        </p:txBody>
-      </p:sp>
-      <p:sp>
-        <p:nvSpPr>
-          <p:cNvPr id="17" name="TextBox 16"/>
-          <p:cNvSpPr txBox="1"/>
-          <p:nvPr/>
-        </p:nvSpPr>
-        <p:spPr>
-          <a:xfrm>
-            <a:off x="1188720" y="4037076"/>
-            <a:ext cx="10271455" cy="886968"/>
-          </a:xfrm>
-          <a:prstGeom prst="rect">
-            <a:avLst/>
-          </a:prstGeom>
-          <a:noFill/>
-        </p:spPr>
-        <p:txBody>
-          <a:bodyPr wrap="square" anchor="ctr"/>
-          <a:lstStyle/>
-          <a:p>
-            <a:r>
-              <a:rPr sz="1500" b="1" i="0">
-                <a:solidFill>
-                  <a:srgbClr val="095292"/>
-                </a:solidFill>
-                <a:latin typeface="Calibri"/>
-              </a:rPr>
-              <a:t>Pega y renderiza en la plataforma del curso</a:t>
-            </a:r>
-          </a:p>
-          <a:p>
-            <a:pPr>
-              <a:spcBef>
-                <a:spcPts val="200"/>
-              </a:spcBef>
-            </a:pPr>
-            <a:r>
-              <a:rPr sz="1300" b="0" i="0">
-                <a:solidFill>
-                  <a:srgbClr val="333333"/>
-                </a:solidFill>
-                <a:latin typeface="Calibri"/>
-              </a:rPr>
-              <a:t>Pega ese codigo en la caja de texto de la pregunta y mira como lo dibuja la plataforma. Si no renderiza, corrige ahi mismo: lo que se califica es el diagrama renderizado dentro de la plataforma del curso.</a:t>
-            </a:r>
-          </a:p>
-        </p:txBody>
-      </p:sp>
-      <p:sp>
-        <p:nvSpPr>
-          <p:cNvPr id="18" name="Rounded Rectangle 17"/>
+          <p:cNvPr id="18" name="Rectangle 17"/>
           <p:cNvSpPr/>
           <p:nvPr/>
         </p:nvSpPr>
         <p:spPr>
           <a:xfrm>
-            <a:off x="457200" y="5088636"/>
-            <a:ext cx="11277295" cy="1051560"/>
-          </a:xfrm>
-          <a:prstGeom prst="roundRect">
-            <a:avLst>
-              <a:gd name="adj" fmla="val 12000"/>
-            </a:avLst>
+            <a:off x="8109508" y="1655064"/>
+            <a:ext cx="3624986" cy="27432"/>
+          </a:xfrm>
+          <a:prstGeom prst="rect">
+            <a:avLst/>
           </a:prstGeom>
           <a:solidFill>
-            <a:srgbClr val="E8F4FA"/>
+            <a:srgbClr val="FFD000"/>
           </a:solidFill>
           <a:ln>
             <a:noFill/>
@@ -9490,21 +8973,137 @@
           </a:p>
         </p:txBody>
       </p:sp>
-      <p:sp>
-        <p:nvSpPr>
-          <p:cNvPr id="19" name="Rounded Rectangle 18"/>
+      <p:pic>
+        <p:nvPicPr>
+          <p:cNvPr id="19" name="Picture 18" descr="mermaid.png"/>
+          <p:cNvPicPr>
+            <a:picLocks noChangeAspect="1"/>
+          </p:cNvPicPr>
+          <p:nvPr/>
+        </p:nvPicPr>
+        <p:blipFill>
+          <a:blip r:embed="rId4"/>
+          <a:stretch>
+            <a:fillRect/>
+          </a:stretch>
+        </p:blipFill>
+        <p:spPr>
+          <a:xfrm>
+            <a:off x="9311640" y="1847087"/>
+            <a:ext cx="1220724" cy="1220724"/>
+          </a:xfrm>
+          <a:prstGeom prst="rect">
+            <a:avLst/>
+          </a:prstGeom>
+        </p:spPr>
+      </p:pic>
+      <p:sp>
+        <p:nvSpPr>
+          <p:cNvPr id="20" name="TextBox 19"/>
+          <p:cNvSpPr txBox="1"/>
+          <p:nvPr/>
+        </p:nvSpPr>
+        <p:spPr>
+          <a:xfrm>
+            <a:off x="8182660" y="3159251"/>
+            <a:ext cx="3478682" cy="621792"/>
+          </a:xfrm>
+          <a:prstGeom prst="rect">
+            <a:avLst/>
+          </a:prstGeom>
+          <a:noFill/>
+        </p:spPr>
+        <p:txBody>
+          <a:bodyPr wrap="square" anchor="t"/>
+          <a:lstStyle/>
+          <a:p>
+            <a:pPr algn="ctr"/>
+            <a:r>
+              <a:rPr sz="1300" b="1" i="0">
+                <a:solidFill>
+                  <a:srgbClr val="095292"/>
+                </a:solidFill>
+                <a:latin typeface="Calibri"/>
+              </a:rPr>
+              <a:t>Mermaid</a:t>
+            </a:r>
+          </a:p>
+          <a:p>
+            <a:pPr algn="ctr">
+              <a:spcBef>
+                <a:spcPts val="200"/>
+              </a:spcBef>
+            </a:pPr>
+            <a:r>
+              <a:rPr sz="1000" b="0" i="0">
+                <a:solidFill>
+                  <a:srgbClr val="666666"/>
+                </a:solidFill>
+                <a:latin typeface="Calibri"/>
+              </a:rPr>
+              <a:t>Codigo del diagrama</a:t>
+            </a:r>
+          </a:p>
+        </p:txBody>
+      </p:sp>
+      <p:sp>
+        <p:nvSpPr>
+          <p:cNvPr id="21" name="Rounded Rectangle 20"/>
           <p:cNvSpPr/>
           <p:nvPr/>
         </p:nvSpPr>
         <p:spPr>
           <a:xfrm>
-            <a:off x="594360" y="5394960"/>
-            <a:ext cx="438912" cy="438912"/>
+            <a:off x="4283354" y="4055364"/>
+            <a:ext cx="3624986" cy="2299716"/>
           </a:xfrm>
           <a:prstGeom prst="roundRect">
             <a:avLst>
               <a:gd name="adj" fmla="val 12000"/>
             </a:avLst>
+          </a:prstGeom>
+          <a:solidFill>
+            <a:srgbClr val="F2F2F2"/>
+          </a:solidFill>
+          <a:ln>
+            <a:noFill/>
+          </a:ln>
+        </p:spPr>
+        <p:style>
+          <a:lnRef idx="1">
+            <a:schemeClr val="accent1"/>
+          </a:lnRef>
+          <a:fillRef idx="3">
+            <a:schemeClr val="accent1"/>
+          </a:fillRef>
+          <a:effectRef idx="2">
+            <a:schemeClr val="accent1"/>
+          </a:effectRef>
+          <a:fontRef idx="minor">
+            <a:schemeClr val="lt1"/>
+          </a:fontRef>
+        </p:style>
+        <p:txBody>
+          <a:bodyPr rtlCol="0" anchor="ctr"/>
+          <a:lstStyle/>
+          <a:p>
+            <a:pPr algn="ctr"/>
+          </a:p>
+        </p:txBody>
+      </p:sp>
+      <p:sp>
+        <p:nvSpPr>
+          <p:cNvPr id="22" name="Rectangle 21"/>
+          <p:cNvSpPr/>
+          <p:nvPr/>
+        </p:nvSpPr>
+        <p:spPr>
+          <a:xfrm>
+            <a:off x="4283354" y="4055364"/>
+            <a:ext cx="3624986" cy="64008"/>
+          </a:xfrm>
+          <a:prstGeom prst="rect">
+            <a:avLst/>
           </a:prstGeom>
           <a:solidFill>
             <a:srgbClr val="095292"/>
@@ -9537,14 +9136,81 @@
       </p:sp>
       <p:sp>
         <p:nvSpPr>
-          <p:cNvPr id="20" name="TextBox 19"/>
+          <p:cNvPr id="23" name="Rectangle 22"/>
+          <p:cNvSpPr/>
+          <p:nvPr/>
+        </p:nvSpPr>
+        <p:spPr>
+          <a:xfrm>
+            <a:off x="4283354" y="4119372"/>
+            <a:ext cx="3624986" cy="27432"/>
+          </a:xfrm>
+          <a:prstGeom prst="rect">
+            <a:avLst/>
+          </a:prstGeom>
+          <a:solidFill>
+            <a:srgbClr val="FFD000"/>
+          </a:solidFill>
+          <a:ln>
+            <a:noFill/>
+          </a:ln>
+        </p:spPr>
+        <p:style>
+          <a:lnRef idx="1">
+            <a:schemeClr val="accent1"/>
+          </a:lnRef>
+          <a:fillRef idx="3">
+            <a:schemeClr val="accent1"/>
+          </a:fillRef>
+          <a:effectRef idx="2">
+            <a:schemeClr val="accent1"/>
+          </a:effectRef>
+          <a:fontRef idx="minor">
+            <a:schemeClr val="lt1"/>
+          </a:fontRef>
+        </p:style>
+        <p:txBody>
+          <a:bodyPr rtlCol="0" anchor="ctr"/>
+          <a:lstStyle/>
+          <a:p>
+            <a:pPr algn="ctr"/>
+          </a:p>
+        </p:txBody>
+      </p:sp>
+      <p:pic>
+        <p:nvPicPr>
+          <p:cNvPr id="24" name="Picture 23" descr="examlab.png"/>
+          <p:cNvPicPr>
+            <a:picLocks noChangeAspect="1"/>
+          </p:cNvPicPr>
+          <p:nvPr/>
+        </p:nvPicPr>
+        <p:blipFill>
+          <a:blip r:embed="rId5"/>
+          <a:stretch>
+            <a:fillRect/>
+          </a:stretch>
+        </p:blipFill>
+        <p:spPr>
+          <a:xfrm>
+            <a:off x="5485485" y="4311396"/>
+            <a:ext cx="1220724" cy="1220724"/>
+          </a:xfrm>
+          <a:prstGeom prst="rect">
+            <a:avLst/>
+          </a:prstGeom>
+        </p:spPr>
+      </p:pic>
+      <p:sp>
+        <p:nvSpPr>
+          <p:cNvPr id="25" name="TextBox 24"/>
           <p:cNvSpPr txBox="1"/>
           <p:nvPr/>
         </p:nvSpPr>
         <p:spPr>
           <a:xfrm>
-            <a:off x="594360" y="5394960"/>
-            <a:ext cx="438912" cy="438912"/>
+            <a:off x="4356506" y="5623560"/>
+            <a:ext cx="3478682" cy="621792"/>
           </a:xfrm>
           <a:prstGeom prst="rect">
             <a:avLst/>
@@ -9552,73 +9218,41 @@
           <a:noFill/>
         </p:spPr>
         <p:txBody>
-          <a:bodyPr wrap="square" anchor="ctr"/>
+          <a:bodyPr wrap="square" anchor="t"/>
           <a:lstStyle/>
           <a:p>
             <a:pPr algn="ctr"/>
             <a:r>
-              <a:rPr sz="1600" b="1" i="0">
-                <a:solidFill>
-                  <a:srgbClr val="FFFFFF"/>
-                </a:solidFill>
-                <a:latin typeface="Calibri"/>
-              </a:rPr>
-              <a:t>4</a:t>
-            </a:r>
-          </a:p>
-        </p:txBody>
-      </p:sp>
-      <p:sp>
-        <p:nvSpPr>
-          <p:cNvPr id="21" name="TextBox 20"/>
-          <p:cNvSpPr txBox="1"/>
-          <p:nvPr/>
-        </p:nvSpPr>
-        <p:spPr>
-          <a:xfrm>
-            <a:off x="1188720" y="5180076"/>
-            <a:ext cx="10271455" cy="886968"/>
-          </a:xfrm>
-          <a:prstGeom prst="rect">
-            <a:avLst/>
-          </a:prstGeom>
-          <a:noFill/>
-        </p:spPr>
-        <p:txBody>
-          <a:bodyPr wrap="square" anchor="ctr"/>
-          <a:lstStyle/>
-          <a:p>
-            <a:r>
-              <a:rPr sz="1500" b="1" i="0">
+              <a:rPr sz="1300" b="1" i="0">
                 <a:solidFill>
                   <a:srgbClr val="095292"/>
                 </a:solidFill>
                 <a:latin typeface="Calibri"/>
               </a:rPr>
-              <a:t>Guarda el PNG para tu PI</a:t>
-            </a:r>
-          </a:p>
-          <a:p>
-            <a:pPr>
+              <a:t>la plataforma del curso</a:t>
+            </a:r>
+          </a:p>
+          <a:p>
+            <a:pPr algn="ctr">
               <a:spcBef>
                 <a:spcPts val="200"/>
               </a:spcBef>
             </a:pPr>
             <a:r>
-              <a:rPr sz="1300" b="0" i="0">
-                <a:solidFill>
-                  <a:srgbClr val="333333"/>
-                </a:solidFill>
-                <a:latin typeface="Calibri"/>
-              </a:rPr>
-              <a:t>Exporta tambien la imagen a la carpeta de tu Proyecto Integrador. Esa copia es para tu informe; no reemplaza la respuesta en la plataforma.</a:t>
-            </a:r>
-          </a:p>
-        </p:txBody>
-      </p:sp>
-      <p:sp>
-        <p:nvSpPr>
-          <p:cNvPr id="22" name="TextBox 21"/>
+              <a:rPr sz="1000" b="0" i="0">
+                <a:solidFill>
+                  <a:srgbClr val="666666"/>
+                </a:solidFill>
+                <a:latin typeface="Calibri"/>
+              </a:rPr>
+              <a:t>Donde se entrega</a:t>
+            </a:r>
+          </a:p>
+        </p:txBody>
+      </p:sp>
+      <p:sp>
+        <p:nvSpPr>
+          <p:cNvPr id="26" name="TextBox 25"/>
           <p:cNvSpPr txBox="1"/>
           <p:nvPr/>
         </p:nvSpPr>
@@ -9686,7 +9320,7 @@
         <p:spPr>
           <a:xfrm>
             <a:off x="0" y="0"/>
-            <a:ext cx="12191695" cy="960120"/>
+            <a:ext cx="12191695" cy="1170432"/>
           </a:xfrm>
           <a:prstGeom prst="rect">
             <a:avLst/>
@@ -9728,7 +9362,7 @@
         </p:nvSpPr>
         <p:spPr>
           <a:xfrm>
-            <a:off x="0" y="960120"/>
+            <a:off x="0" y="1170432"/>
             <a:ext cx="12191695" cy="41148"/>
           </a:xfrm>
           <a:prstGeom prst="rect">
@@ -9772,7 +9406,7 @@
         <p:spPr>
           <a:xfrm>
             <a:off x="457200" y="164592"/>
-            <a:ext cx="11277295" cy="502920"/>
+            <a:ext cx="11277295" cy="384048"/>
           </a:xfrm>
           <a:prstGeom prst="rect">
             <a:avLst/>
@@ -9792,7 +9426,7 @@
                 </a:solidFill>
                 <a:latin typeface="Calibri"/>
               </a:rPr>
-              <a:t>PI CloudLite — entregable de hoy</a:t>
+              <a:t>Del boceto a la plataforma del curso (diagrama)</a:t>
             </a:r>
           </a:p>
         </p:txBody>
@@ -9805,8 +9439,8 @@
         </p:nvSpPr>
         <p:spPr>
           <a:xfrm>
-            <a:off x="457200" y="1170432"/>
-            <a:ext cx="11277295" cy="5230368"/>
+            <a:off x="457200" y="566928"/>
+            <a:ext cx="11277295" cy="411480"/>
           </a:xfrm>
           <a:prstGeom prst="rect">
             <a:avLst/>
@@ -9819,119 +9453,705 @@
           </a:bodyPr>
           <a:lstStyle/>
           <a:p>
+            <a:r>
+              <a:rPr sz="1400" b="0" i="0">
+                <a:solidFill>
+                  <a:srgbClr val="B8D8EE"/>
+                </a:solidFill>
+                <a:latin typeface="Calibri"/>
+              </a:rPr>
+              <a:t>El diagrama se entrega como código Mermaid dentro de la plataforma del curso, no como imagen</a:t>
+            </a:r>
+          </a:p>
+        </p:txBody>
+      </p:sp>
+      <p:sp>
+        <p:nvSpPr>
+          <p:cNvPr id="6" name="Rounded Rectangle 5"/>
+          <p:cNvSpPr/>
+          <p:nvPr/>
+        </p:nvSpPr>
+        <p:spPr>
+          <a:xfrm>
+            <a:off x="457200" y="1659636"/>
+            <a:ext cx="11277295" cy="1051560"/>
+          </a:xfrm>
+          <a:prstGeom prst="roundRect">
+            <a:avLst>
+              <a:gd name="adj" fmla="val 12000"/>
+            </a:avLst>
+          </a:prstGeom>
+          <a:solidFill>
+            <a:srgbClr val="F2F2F2"/>
+          </a:solidFill>
+          <a:ln>
+            <a:noFill/>
+          </a:ln>
+        </p:spPr>
+        <p:style>
+          <a:lnRef idx="1">
+            <a:schemeClr val="accent1"/>
+          </a:lnRef>
+          <a:fillRef idx="3">
+            <a:schemeClr val="accent1"/>
+          </a:fillRef>
+          <a:effectRef idx="2">
+            <a:schemeClr val="accent1"/>
+          </a:effectRef>
+          <a:fontRef idx="minor">
+            <a:schemeClr val="lt1"/>
+          </a:fontRef>
+        </p:style>
+        <p:txBody>
+          <a:bodyPr rtlCol="0" anchor="ctr"/>
+          <a:lstStyle/>
+          <a:p>
+            <a:pPr algn="ctr"/>
+          </a:p>
+        </p:txBody>
+      </p:sp>
+      <p:sp>
+        <p:nvSpPr>
+          <p:cNvPr id="7" name="Rounded Rectangle 6"/>
+          <p:cNvSpPr/>
+          <p:nvPr/>
+        </p:nvSpPr>
+        <p:spPr>
+          <a:xfrm>
+            <a:off x="594360" y="1965960"/>
+            <a:ext cx="438912" cy="438912"/>
+          </a:xfrm>
+          <a:prstGeom prst="roundRect">
+            <a:avLst>
+              <a:gd name="adj" fmla="val 12000"/>
+            </a:avLst>
+          </a:prstGeom>
+          <a:solidFill>
+            <a:srgbClr val="095292"/>
+          </a:solidFill>
+          <a:ln>
+            <a:noFill/>
+          </a:ln>
+        </p:spPr>
+        <p:style>
+          <a:lnRef idx="1">
+            <a:schemeClr val="accent1"/>
+          </a:lnRef>
+          <a:fillRef idx="3">
+            <a:schemeClr val="accent1"/>
+          </a:fillRef>
+          <a:effectRef idx="2">
+            <a:schemeClr val="accent1"/>
+          </a:effectRef>
+          <a:fontRef idx="minor">
+            <a:schemeClr val="lt1"/>
+          </a:fontRef>
+        </p:style>
+        <p:txBody>
+          <a:bodyPr rtlCol="0" anchor="ctr"/>
+          <a:lstStyle/>
+          <a:p>
+            <a:pPr algn="ctr"/>
+          </a:p>
+        </p:txBody>
+      </p:sp>
+      <p:sp>
+        <p:nvSpPr>
+          <p:cNvPr id="8" name="TextBox 7"/>
+          <p:cNvSpPr txBox="1"/>
+          <p:nvPr/>
+        </p:nvSpPr>
+        <p:spPr>
+          <a:xfrm>
+            <a:off x="594360" y="1965960"/>
+            <a:ext cx="438912" cy="438912"/>
+          </a:xfrm>
+          <a:prstGeom prst="rect">
+            <a:avLst/>
+          </a:prstGeom>
+          <a:noFill/>
+        </p:spPr>
+        <p:txBody>
+          <a:bodyPr wrap="square" anchor="ctr"/>
+          <a:lstStyle/>
+          <a:p>
+            <a:pPr algn="ctr"/>
+            <a:r>
+              <a:rPr sz="1600" b="1" i="0">
+                <a:solidFill>
+                  <a:srgbClr val="FFFFFF"/>
+                </a:solidFill>
+                <a:latin typeface="Calibri"/>
+              </a:rPr>
+              <a:t>1</a:t>
+            </a:r>
+          </a:p>
+        </p:txBody>
+      </p:sp>
+      <p:sp>
+        <p:nvSpPr>
+          <p:cNvPr id="9" name="TextBox 8"/>
+          <p:cNvSpPr txBox="1"/>
+          <p:nvPr/>
+        </p:nvSpPr>
+        <p:spPr>
+          <a:xfrm>
+            <a:off x="1188720" y="1751076"/>
+            <a:ext cx="10271455" cy="886968"/>
+          </a:xfrm>
+          <a:prstGeom prst="rect">
+            <a:avLst/>
+          </a:prstGeom>
+          <a:noFill/>
+        </p:spPr>
+        <p:txBody>
+          <a:bodyPr wrap="square" anchor="ctr"/>
+          <a:lstStyle/>
+          <a:p>
+            <a:r>
+              <a:rPr sz="1500" b="1" i="0">
+                <a:solidFill>
+                  <a:srgbClr val="095292"/>
+                </a:solidFill>
+                <a:latin typeface="Calibri"/>
+              </a:rPr>
+              <a:t>Disena visual</a:t>
+            </a:r>
+          </a:p>
+          <a:p>
             <a:pPr>
-              <a:spcAft>
-                <a:spcPts val="800"/>
-              </a:spcAft>
+              <a:spcBef>
+                <a:spcPts val="200"/>
+              </a:spcBef>
             </a:pPr>
             <a:r>
-              <a:rPr sz="2000" b="0" i="0">
+              <a:rPr sz="1300" b="0" i="0">
                 <a:solidFill>
                   <a:srgbClr val="333333"/>
                 </a:solidFill>
                 <a:latin typeface="Calibri"/>
               </a:rPr>
-              <a:t>–   </a:t>
-            </a:r>
-            <a:r>
-              <a:rPr sz="2000" b="1" i="0">
+              <a:t>Dibuja el diagrama como quieras en Excalidraw o draw.io: es mas rapido arrastrar cajas que escribir codigo, y ahi es donde piensas el modelo.</a:t>
+            </a:r>
+          </a:p>
+        </p:txBody>
+      </p:sp>
+      <p:sp>
+        <p:nvSpPr>
+          <p:cNvPr id="10" name="Rounded Rectangle 9"/>
+          <p:cNvSpPr/>
+          <p:nvPr/>
+        </p:nvSpPr>
+        <p:spPr>
+          <a:xfrm>
+            <a:off x="457200" y="2802636"/>
+            <a:ext cx="11277295" cy="1051560"/>
+          </a:xfrm>
+          <a:prstGeom prst="roundRect">
+            <a:avLst>
+              <a:gd name="adj" fmla="val 12000"/>
+            </a:avLst>
+          </a:prstGeom>
+          <a:solidFill>
+            <a:srgbClr val="E8F4FA"/>
+          </a:solidFill>
+          <a:ln>
+            <a:noFill/>
+          </a:ln>
+        </p:spPr>
+        <p:style>
+          <a:lnRef idx="1">
+            <a:schemeClr val="accent1"/>
+          </a:lnRef>
+          <a:fillRef idx="3">
+            <a:schemeClr val="accent1"/>
+          </a:fillRef>
+          <a:effectRef idx="2">
+            <a:schemeClr val="accent1"/>
+          </a:effectRef>
+          <a:fontRef idx="minor">
+            <a:schemeClr val="lt1"/>
+          </a:fontRef>
+        </p:style>
+        <p:txBody>
+          <a:bodyPr rtlCol="0" anchor="ctr"/>
+          <a:lstStyle/>
+          <a:p>
+            <a:pPr algn="ctr"/>
+          </a:p>
+        </p:txBody>
+      </p:sp>
+      <p:sp>
+        <p:nvSpPr>
+          <p:cNvPr id="11" name="Rounded Rectangle 10"/>
+          <p:cNvSpPr/>
+          <p:nvPr/>
+        </p:nvSpPr>
+        <p:spPr>
+          <a:xfrm>
+            <a:off x="594360" y="3108960"/>
+            <a:ext cx="438912" cy="438912"/>
+          </a:xfrm>
+          <a:prstGeom prst="roundRect">
+            <a:avLst>
+              <a:gd name="adj" fmla="val 12000"/>
+            </a:avLst>
+          </a:prstGeom>
+          <a:solidFill>
+            <a:srgbClr val="095292"/>
+          </a:solidFill>
+          <a:ln>
+            <a:noFill/>
+          </a:ln>
+        </p:spPr>
+        <p:style>
+          <a:lnRef idx="1">
+            <a:schemeClr val="accent1"/>
+          </a:lnRef>
+          <a:fillRef idx="3">
+            <a:schemeClr val="accent1"/>
+          </a:fillRef>
+          <a:effectRef idx="2">
+            <a:schemeClr val="accent1"/>
+          </a:effectRef>
+          <a:fontRef idx="minor">
+            <a:schemeClr val="lt1"/>
+          </a:fontRef>
+        </p:style>
+        <p:txBody>
+          <a:bodyPr rtlCol="0" anchor="ctr"/>
+          <a:lstStyle/>
+          <a:p>
+            <a:pPr algn="ctr"/>
+          </a:p>
+        </p:txBody>
+      </p:sp>
+      <p:sp>
+        <p:nvSpPr>
+          <p:cNvPr id="12" name="TextBox 11"/>
+          <p:cNvSpPr txBox="1"/>
+          <p:nvPr/>
+        </p:nvSpPr>
+        <p:spPr>
+          <a:xfrm>
+            <a:off x="594360" y="3108960"/>
+            <a:ext cx="438912" cy="438912"/>
+          </a:xfrm>
+          <a:prstGeom prst="rect">
+            <a:avLst/>
+          </a:prstGeom>
+          <a:noFill/>
+        </p:spPr>
+        <p:txBody>
+          <a:bodyPr wrap="square" anchor="ctr"/>
+          <a:lstStyle/>
+          <a:p>
+            <a:pPr algn="ctr"/>
+            <a:r>
+              <a:rPr sz="1600" b="1" i="0">
+                <a:solidFill>
+                  <a:srgbClr val="FFFFFF"/>
+                </a:solidFill>
+                <a:latin typeface="Calibri"/>
+              </a:rPr>
+              <a:t>2</a:t>
+            </a:r>
+          </a:p>
+        </p:txBody>
+      </p:sp>
+      <p:sp>
+        <p:nvSpPr>
+          <p:cNvPr id="13" name="TextBox 12"/>
+          <p:cNvSpPr txBox="1"/>
+          <p:nvPr/>
+        </p:nvSpPr>
+        <p:spPr>
+          <a:xfrm>
+            <a:off x="1188720" y="2894076"/>
+            <a:ext cx="10271455" cy="886968"/>
+          </a:xfrm>
+          <a:prstGeom prst="rect">
+            <a:avLst/>
+          </a:prstGeom>
+          <a:noFill/>
+        </p:spPr>
+        <p:txBody>
+          <a:bodyPr wrap="square" anchor="ctr"/>
+          <a:lstStyle/>
+          <a:p>
+            <a:r>
+              <a:rPr sz="1500" b="1" i="0">
+                <a:solidFill>
+                  <a:srgbClr val="095292"/>
+                </a:solidFill>
+                <a:latin typeface="Calibri"/>
+              </a:rPr>
+              <a:t>Traduce con IA</a:t>
+            </a:r>
+          </a:p>
+          <a:p>
+            <a:pPr>
+              <a:spcBef>
+                <a:spcPts val="200"/>
+              </a:spcBef>
+            </a:pPr>
+            <a:r>
+              <a:rPr sz="1300" b="0" i="0">
                 <a:solidFill>
                   <a:srgbClr val="333333"/>
                 </a:solidFill>
                 <a:latin typeface="Calibri"/>
               </a:rPr>
-              <a:t>Entregable:</a:t>
-            </a:r>
-            <a:r>
-              <a:rPr sz="2000" b="0" i="0">
+              <a:t>Copia o describe tu boceto a una IA y pidele el codigo Mermaid: «convierte este diagrama a Mermaid usando flowchart». Revisa el resultado: la IA acierta la sintaxis, no tu modelo.</a:t>
+            </a:r>
+          </a:p>
+        </p:txBody>
+      </p:sp>
+      <p:sp>
+        <p:nvSpPr>
+          <p:cNvPr id="14" name="Rounded Rectangle 13"/>
+          <p:cNvSpPr/>
+          <p:nvPr/>
+        </p:nvSpPr>
+        <p:spPr>
+          <a:xfrm>
+            <a:off x="457200" y="3945636"/>
+            <a:ext cx="11277295" cy="1051560"/>
+          </a:xfrm>
+          <a:prstGeom prst="roundRect">
+            <a:avLst>
+              <a:gd name="adj" fmla="val 12000"/>
+            </a:avLst>
+          </a:prstGeom>
+          <a:solidFill>
+            <a:srgbClr val="F2F2F2"/>
+          </a:solidFill>
+          <a:ln>
+            <a:noFill/>
+          </a:ln>
+        </p:spPr>
+        <p:style>
+          <a:lnRef idx="1">
+            <a:schemeClr val="accent1"/>
+          </a:lnRef>
+          <a:fillRef idx="3">
+            <a:schemeClr val="accent1"/>
+          </a:fillRef>
+          <a:effectRef idx="2">
+            <a:schemeClr val="accent1"/>
+          </a:effectRef>
+          <a:fontRef idx="minor">
+            <a:schemeClr val="lt1"/>
+          </a:fontRef>
+        </p:style>
+        <p:txBody>
+          <a:bodyPr rtlCol="0" anchor="ctr"/>
+          <a:lstStyle/>
+          <a:p>
+            <a:pPr algn="ctr"/>
+          </a:p>
+        </p:txBody>
+      </p:sp>
+      <p:sp>
+        <p:nvSpPr>
+          <p:cNvPr id="15" name="Rounded Rectangle 14"/>
+          <p:cNvSpPr/>
+          <p:nvPr/>
+        </p:nvSpPr>
+        <p:spPr>
+          <a:xfrm>
+            <a:off x="594360" y="4251960"/>
+            <a:ext cx="438912" cy="438912"/>
+          </a:xfrm>
+          <a:prstGeom prst="roundRect">
+            <a:avLst>
+              <a:gd name="adj" fmla="val 12000"/>
+            </a:avLst>
+          </a:prstGeom>
+          <a:solidFill>
+            <a:srgbClr val="095292"/>
+          </a:solidFill>
+          <a:ln>
+            <a:noFill/>
+          </a:ln>
+        </p:spPr>
+        <p:style>
+          <a:lnRef idx="1">
+            <a:schemeClr val="accent1"/>
+          </a:lnRef>
+          <a:fillRef idx="3">
+            <a:schemeClr val="accent1"/>
+          </a:fillRef>
+          <a:effectRef idx="2">
+            <a:schemeClr val="accent1"/>
+          </a:effectRef>
+          <a:fontRef idx="minor">
+            <a:schemeClr val="lt1"/>
+          </a:fontRef>
+        </p:style>
+        <p:txBody>
+          <a:bodyPr rtlCol="0" anchor="ctr"/>
+          <a:lstStyle/>
+          <a:p>
+            <a:pPr algn="ctr"/>
+          </a:p>
+        </p:txBody>
+      </p:sp>
+      <p:sp>
+        <p:nvSpPr>
+          <p:cNvPr id="16" name="TextBox 15"/>
+          <p:cNvSpPr txBox="1"/>
+          <p:nvPr/>
+        </p:nvSpPr>
+        <p:spPr>
+          <a:xfrm>
+            <a:off x="594360" y="4251960"/>
+            <a:ext cx="438912" cy="438912"/>
+          </a:xfrm>
+          <a:prstGeom prst="rect">
+            <a:avLst/>
+          </a:prstGeom>
+          <a:noFill/>
+        </p:spPr>
+        <p:txBody>
+          <a:bodyPr wrap="square" anchor="ctr"/>
+          <a:lstStyle/>
+          <a:p>
+            <a:pPr algn="ctr"/>
+            <a:r>
+              <a:rPr sz="1600" b="1" i="0">
+                <a:solidFill>
+                  <a:srgbClr val="FFFFFF"/>
+                </a:solidFill>
+                <a:latin typeface="Calibri"/>
+              </a:rPr>
+              <a:t>3</a:t>
+            </a:r>
+          </a:p>
+        </p:txBody>
+      </p:sp>
+      <p:sp>
+        <p:nvSpPr>
+          <p:cNvPr id="17" name="TextBox 16"/>
+          <p:cNvSpPr txBox="1"/>
+          <p:nvPr/>
+        </p:nvSpPr>
+        <p:spPr>
+          <a:xfrm>
+            <a:off x="1188720" y="4037076"/>
+            <a:ext cx="10271455" cy="886968"/>
+          </a:xfrm>
+          <a:prstGeom prst="rect">
+            <a:avLst/>
+          </a:prstGeom>
+          <a:noFill/>
+        </p:spPr>
+        <p:txBody>
+          <a:bodyPr wrap="square" anchor="ctr"/>
+          <a:lstStyle/>
+          <a:p>
+            <a:r>
+              <a:rPr sz="1500" b="1" i="0">
+                <a:solidFill>
+                  <a:srgbClr val="095292"/>
+                </a:solidFill>
+                <a:latin typeface="Calibri"/>
+              </a:rPr>
+              <a:t>Pega y renderiza en la plataforma del curso</a:t>
+            </a:r>
+          </a:p>
+          <a:p>
+            <a:pPr>
+              <a:spcBef>
+                <a:spcPts val="200"/>
+              </a:spcBef>
+            </a:pPr>
+            <a:r>
+              <a:rPr sz="1300" b="0" i="0">
                 <a:solidFill>
                   <a:srgbClr val="333333"/>
                 </a:solidFill>
                 <a:latin typeface="Calibri"/>
               </a:rPr>
-              <a:t> Sección Escalabilidad: triggers, límites, qué escala y qué no</a:t>
+              <a:t>Pega ese codigo en la caja de texto de la pregunta y mira como lo dibuja la plataforma. Si no renderiza, corrige ahi mismo: lo que se califica es el diagrama renderizado dentro de la plataforma del curso.</a:t>
+            </a:r>
+          </a:p>
+        </p:txBody>
+      </p:sp>
+      <p:sp>
+        <p:nvSpPr>
+          <p:cNvPr id="18" name="Rounded Rectangle 17"/>
+          <p:cNvSpPr/>
+          <p:nvPr/>
+        </p:nvSpPr>
+        <p:spPr>
+          <a:xfrm>
+            <a:off x="457200" y="5088636"/>
+            <a:ext cx="11277295" cy="1051560"/>
+          </a:xfrm>
+          <a:prstGeom prst="roundRect">
+            <a:avLst>
+              <a:gd name="adj" fmla="val 12000"/>
+            </a:avLst>
+          </a:prstGeom>
+          <a:solidFill>
+            <a:srgbClr val="E8F4FA"/>
+          </a:solidFill>
+          <a:ln>
+            <a:noFill/>
+          </a:ln>
+        </p:spPr>
+        <p:style>
+          <a:lnRef idx="1">
+            <a:schemeClr val="accent1"/>
+          </a:lnRef>
+          <a:fillRef idx="3">
+            <a:schemeClr val="accent1"/>
+          </a:fillRef>
+          <a:effectRef idx="2">
+            <a:schemeClr val="accent1"/>
+          </a:effectRef>
+          <a:fontRef idx="minor">
+            <a:schemeClr val="lt1"/>
+          </a:fontRef>
+        </p:style>
+        <p:txBody>
+          <a:bodyPr rtlCol="0" anchor="ctr"/>
+          <a:lstStyle/>
+          <a:p>
+            <a:pPr algn="ctr"/>
+          </a:p>
+        </p:txBody>
+      </p:sp>
+      <p:sp>
+        <p:nvSpPr>
+          <p:cNvPr id="19" name="Rounded Rectangle 18"/>
+          <p:cNvSpPr/>
+          <p:nvPr/>
+        </p:nvSpPr>
+        <p:spPr>
+          <a:xfrm>
+            <a:off x="594360" y="5394960"/>
+            <a:ext cx="438912" cy="438912"/>
+          </a:xfrm>
+          <a:prstGeom prst="roundRect">
+            <a:avLst>
+              <a:gd name="adj" fmla="val 12000"/>
+            </a:avLst>
+          </a:prstGeom>
+          <a:solidFill>
+            <a:srgbClr val="095292"/>
+          </a:solidFill>
+          <a:ln>
+            <a:noFill/>
+          </a:ln>
+        </p:spPr>
+        <p:style>
+          <a:lnRef idx="1">
+            <a:schemeClr val="accent1"/>
+          </a:lnRef>
+          <a:fillRef idx="3">
+            <a:schemeClr val="accent1"/>
+          </a:fillRef>
+          <a:effectRef idx="2">
+            <a:schemeClr val="accent1"/>
+          </a:effectRef>
+          <a:fontRef idx="minor">
+            <a:schemeClr val="lt1"/>
+          </a:fontRef>
+        </p:style>
+        <p:txBody>
+          <a:bodyPr rtlCol="0" anchor="ctr"/>
+          <a:lstStyle/>
+          <a:p>
+            <a:pPr algn="ctr"/>
+          </a:p>
+        </p:txBody>
+      </p:sp>
+      <p:sp>
+        <p:nvSpPr>
+          <p:cNvPr id="20" name="TextBox 19"/>
+          <p:cNvSpPr txBox="1"/>
+          <p:nvPr/>
+        </p:nvSpPr>
+        <p:spPr>
+          <a:xfrm>
+            <a:off x="594360" y="5394960"/>
+            <a:ext cx="438912" cy="438912"/>
+          </a:xfrm>
+          <a:prstGeom prst="rect">
+            <a:avLst/>
+          </a:prstGeom>
+          <a:noFill/>
+        </p:spPr>
+        <p:txBody>
+          <a:bodyPr wrap="square" anchor="ctr"/>
+          <a:lstStyle/>
+          <a:p>
+            <a:pPr algn="ctr"/>
+            <a:r>
+              <a:rPr sz="1600" b="1" i="0">
+                <a:solidFill>
+                  <a:srgbClr val="FFFFFF"/>
+                </a:solidFill>
+                <a:latin typeface="Calibri"/>
+              </a:rPr>
+              <a:t>4</a:t>
+            </a:r>
+          </a:p>
+        </p:txBody>
+      </p:sp>
+      <p:sp>
+        <p:nvSpPr>
+          <p:cNvPr id="21" name="TextBox 20"/>
+          <p:cNvSpPr txBox="1"/>
+          <p:nvPr/>
+        </p:nvSpPr>
+        <p:spPr>
+          <a:xfrm>
+            <a:off x="1188720" y="5180076"/>
+            <a:ext cx="10271455" cy="886968"/>
+          </a:xfrm>
+          <a:prstGeom prst="rect">
+            <a:avLst/>
+          </a:prstGeom>
+          <a:noFill/>
+        </p:spPr>
+        <p:txBody>
+          <a:bodyPr wrap="square" anchor="ctr"/>
+          <a:lstStyle/>
+          <a:p>
+            <a:r>
+              <a:rPr sz="1500" b="1" i="0">
+                <a:solidFill>
+                  <a:srgbClr val="095292"/>
+                </a:solidFill>
+                <a:latin typeface="Calibri"/>
+              </a:rPr>
+              <a:t>Guarda el PNG para tu PI</a:t>
             </a:r>
           </a:p>
           <a:p>
             <a:pPr>
-              <a:spcAft>
-                <a:spcPts val="800"/>
-              </a:spcAft>
+              <a:spcBef>
+                <a:spcPts val="200"/>
+              </a:spcBef>
             </a:pPr>
             <a:r>
-              <a:rPr sz="2000" b="0" i="0">
+              <a:rPr sz="1300" b="0" i="0">
                 <a:solidFill>
                   <a:srgbClr val="333333"/>
                 </a:solidFill>
                 <a:latin typeface="Calibri"/>
               </a:rPr>
-              <a:t>–   Herramienta: </a:t>
-            </a:r>
-            <a:r>
-              <a:rPr sz="2000" b="1" i="0">
-                <a:solidFill>
-                  <a:srgbClr val="333333"/>
-                </a:solidFill>
-                <a:latin typeface="Calibri"/>
-              </a:rPr>
-              <a:t>Google Docs · draw.io (opcional nota en Deployment)</a:t>
-            </a:r>
-          </a:p>
-          <a:p>
-            <a:pPr>
-              <a:spcAft>
-                <a:spcPts val="800"/>
-              </a:spcAft>
-            </a:pPr>
-            <a:r>
-              <a:rPr sz="2000" b="0" i="0">
-                <a:solidFill>
-                  <a:srgbClr val="333333"/>
-                </a:solidFill>
-                <a:latin typeface="Calibri"/>
-              </a:rPr>
-              <a:t>–   Todo lo que construyan hoy entra al </a:t>
-            </a:r>
-            <a:r>
-              <a:rPr sz="2000" b="1" i="0">
-                <a:solidFill>
-                  <a:srgbClr val="333333"/>
-                </a:solidFill>
-                <a:latin typeface="Calibri"/>
-              </a:rPr>
-              <a:t>informe/repo del PI</a:t>
-            </a:r>
-            <a:r>
-              <a:rPr sz="2000" b="0" i="0">
-                <a:solidFill>
-                  <a:srgbClr val="333333"/>
-                </a:solidFill>
-                <a:latin typeface="Calibri"/>
-              </a:rPr>
-              <a:t> (no es lab suelto).</a:t>
-            </a:r>
-          </a:p>
-          <a:p>
-            <a:pPr>
-              <a:spcAft>
-                <a:spcPts val="800"/>
-              </a:spcAft>
-            </a:pPr>
-            <a:r>
-              <a:rPr sz="2000" b="0" i="0">
-                <a:solidFill>
-                  <a:srgbClr val="333333"/>
-                </a:solidFill>
-                <a:latin typeface="Calibri"/>
-              </a:rPr>
-              <a:t>–   Individual por defecto · el docente puede autorizar equipos de 2–3; la entrega en la plataforma del curso siempre es individual.</a:t>
-            </a:r>
-          </a:p>
-        </p:txBody>
-      </p:sp>
-      <p:sp>
-        <p:nvSpPr>
-          <p:cNvPr id="6" name="TextBox 5"/>
+              <a:t>Exporta tambien la imagen a la carpeta de tu Proyecto Integrador. Esa copia es para tu informe; no reemplaza la respuesta en la plataforma.</a:t>
+            </a:r>
+          </a:p>
+        </p:txBody>
+      </p:sp>
+      <p:sp>
+        <p:nvSpPr>
+          <p:cNvPr id="22" name="TextBox 21"/>
           <p:cNvSpPr txBox="1"/>
           <p:nvPr/>
         </p:nvSpPr>
@@ -10105,7 +10325,7 @@
                 </a:solidFill>
                 <a:latin typeface="Calibri"/>
               </a:rPr>
-              <a:t>Manos a la obra (paso a paso)</a:t>
+              <a:t>PI CloudLite — entregable de hoy</a:t>
             </a:r>
           </a:p>
         </p:txBody>
@@ -10138,22 +10358,31 @@
               </a:spcAft>
             </a:pPr>
             <a:r>
-              <a:rPr sz="1800" b="1" i="0">
+              <a:rPr sz="2000" b="0" i="0">
                 <a:solidFill>
                   <a:srgbClr val="333333"/>
                 </a:solidFill>
                 <a:latin typeface="Calibri"/>
               </a:rPr>
-              <a:t>1.</a:t>
-            </a:r>
-            <a:r>
-              <a:rPr sz="1800" b="0" i="0">
+              <a:t>–   </a:t>
+            </a:r>
+            <a:r>
+              <a:rPr sz="2000" b="1" i="0">
                 <a:solidFill>
                   <a:srgbClr val="333333"/>
                 </a:solidFill>
                 <a:latin typeface="Calibri"/>
               </a:rPr>
-              <a:t> Paso 1: tome los 5 componentes de su C4Deployment de la Clase 7 y clasifique cada uno como escala horizontal, escala vertical o no escala, verificando que al menos uno quede en no escala con justificacion tecnica, porque una politica donde todo escala no es una politica; el resultado abre la seccion Escalabilidad del informe.</a:t>
+              <a:t>Entregable:</a:t>
+            </a:r>
+            <a:r>
+              <a:rPr sz="2000" b="0" i="0">
+                <a:solidFill>
+                  <a:srgbClr val="333333"/>
+                </a:solidFill>
+                <a:latin typeface="Calibri"/>
+              </a:rPr>
+              <a:t> Sección Escalabilidad: triggers, límites, qué escala y qué no</a:t>
             </a:r>
           </a:p>
           <a:p>
@@ -10163,31 +10392,22 @@
               </a:spcAft>
             </a:pPr>
             <a:r>
-              <a:rPr sz="1800" b="0" i="0">
+              <a:rPr sz="2000" b="0" i="0">
                 <a:solidFill>
                   <a:srgbClr val="333333"/>
                 </a:solidFill>
                 <a:latin typeface="Calibri"/>
               </a:rPr>
-              <a:t>–   </a:t>
-            </a:r>
-            <a:r>
-              <a:rPr sz="1800" b="1" i="0">
+              <a:t>–   Herramienta: </a:t>
+            </a:r>
+            <a:r>
+              <a:rPr sz="2000" b="1" i="0">
                 <a:solidFill>
                   <a:srgbClr val="333333"/>
                 </a:solidFill>
                 <a:latin typeface="Calibri"/>
               </a:rPr>
-              <a:t>2.</a:t>
-            </a:r>
-            <a:r>
-              <a:rPr sz="1800" b="0" i="0">
-                <a:solidFill>
-                  <a:srgbClr val="333333"/>
-                </a:solidFill>
-                <a:latin typeface="Calibri"/>
-              </a:rPr>
-              <a:t> Paso 2: complete la tabla de politica de escalado con 6 columnas y 5 filas (componente, tipo de escala, disparador de subida, disparador de bajada, minimo y maximo, tiempo de enfriamiento), verificando que cada disparador tenga metrica, umbral numerico y ventana de tiempo, y que ningun maximo quede en infinito o sin definir.</a:t>
+              <a:t>Google Docs · draw.io (opcional nota en Deployment)</a:t>
             </a:r>
           </a:p>
           <a:p>
@@ -10197,31 +10417,31 @@
               </a:spcAft>
             </a:pPr>
             <a:r>
-              <a:rPr sz="1800" b="0" i="0">
+              <a:rPr sz="2000" b="0" i="0">
                 <a:solidFill>
                   <a:srgbClr val="333333"/>
                 </a:solidFill>
                 <a:latin typeface="Calibri"/>
               </a:rPr>
-              <a:t>–   </a:t>
-            </a:r>
-            <a:r>
-              <a:rPr sz="1800" b="1" i="0">
+              <a:t>–   Todo lo que construyan hoy entra al </a:t>
+            </a:r>
+            <a:r>
+              <a:rPr sz="2000" b="1" i="0">
                 <a:solidFill>
                   <a:srgbClr val="333333"/>
                 </a:solidFill>
                 <a:latin typeface="Calibri"/>
               </a:rPr>
-              <a:t>3.</a:t>
-            </a:r>
-            <a:r>
-              <a:rPr sz="1800" b="0" i="0">
+              <a:t>informe/repo del PI</a:t>
+            </a:r>
+            <a:r>
+              <a:rPr sz="2000" b="0" i="0">
                 <a:solidFill>
                   <a:srgbClr val="333333"/>
                 </a:solidFill>
                 <a:latin typeface="Calibri"/>
               </a:rPr>
-              <a:t> Paso 3: escriba en la plataforma del curso el diagrama Mermaid de la maquina de decision del autoescalado con el nodo de observacion, los dos rombos de decision, las acciones de subida y bajada, el enfriamiento y el nodo de lo que no escala, verificando al renderizar que el ciclo se cierre sobre el nodo de observacion y que los umbrales del diagrama sean los mismos numeros de la tabla.</a:t>
+              <a:t> (no es lab suelto).</a:t>
             </a:r>
           </a:p>
           <a:p>
@@ -10231,65 +10451,13 @@
               </a:spcAft>
             </a:pPr>
             <a:r>
-              <a:rPr sz="1800" b="0" i="0">
+              <a:rPr sz="2000" b="0" i="0">
                 <a:solidFill>
                   <a:srgbClr val="333333"/>
                 </a:solidFill>
                 <a:latin typeface="Calibri"/>
               </a:rPr>
-              <a:t>–   </a:t>
-            </a:r>
-            <a:r>
-              <a:rPr sz="1800" b="1" i="0">
-                <a:solidFill>
-                  <a:srgbClr val="333333"/>
-                </a:solidFill>
-                <a:latin typeface="Calibri"/>
-              </a:rPr>
-              <a:t>4.</a:t>
-            </a:r>
-            <a:r>
-              <a:rPr sz="1800" b="0" i="0">
-                <a:solidFill>
-                  <a:srgbClr val="333333"/>
-                </a:solidFill>
-                <a:latin typeface="Calibri"/>
-              </a:rPr>
-              <a:t> Paso 4: escriba los 3 componentes que NO escalan con su justificacion tecnica y su plan alterno, y la tabla de impacto en costos que enlaza con la Clase 10, verificando que cada plan alterno sea ejecutable sin cloud de pago y que el impacto de costo use los mismos niveles bajo, medio o alto de la seccion de costos.</a:t>
-            </a:r>
-          </a:p>
-          <a:p>
-            <a:pPr>
-              <a:spcAft>
-                <a:spcPts val="800"/>
-              </a:spcAft>
-            </a:pPr>
-            <a:r>
-              <a:rPr sz="1800" b="0" i="0">
-                <a:solidFill>
-                  <a:srgbClr val="333333"/>
-                </a:solidFill>
-                <a:latin typeface="Calibri"/>
-              </a:rPr>
-              <a:t>–   </a:t>
-            </a:r>
-            <a:r>
-              <a:rPr sz="1800" b="1" i="0">
-                <a:solidFill>
-                  <a:srgbClr val="333333"/>
-                </a:solidFill>
-                <a:latin typeface="Calibri"/>
-              </a:rPr>
-              <a:t>5.</a:t>
-            </a:r>
-            <a:r>
-              <a:rPr sz="1800" b="0" i="0">
-                <a:solidFill>
-                  <a:srgbClr val="333333"/>
-                </a:solidFill>
-                <a:latin typeface="Calibri"/>
-              </a:rPr>
-              <a:t> Paso 5: integre la politica en la seccion Escalabilidad del informe, anote la marca de replicas en el diagrama de despliegue si aplica y suba las 5 preguntas a la plataforma del curso (modulo Talleres) antes del en la fecha que indique el docente, verificando que la politica no prometa nada que la arquitectura dibujada no pueda cumplir.</a:t>
+              <a:t>–   Individual por defecto · el docente puede autorizar equipos de 2–3; la entrega en la plataforma del curso siempre es individual.</a:t>
             </a:r>
           </a:p>
         </p:txBody>
@@ -10470,109 +10638,21 @@
                 </a:solidFill>
                 <a:latin typeface="Calibri"/>
               </a:rPr>
-              <a:t>Para continuar (PI)</a:t>
-            </a:r>
-          </a:p>
-        </p:txBody>
-      </p:sp>
-      <p:sp>
-        <p:nvSpPr>
-          <p:cNvPr id="5" name="Rounded Rectangle 4"/>
-          <p:cNvSpPr/>
-          <p:nvPr/>
-        </p:nvSpPr>
-        <p:spPr>
-          <a:xfrm>
-            <a:off x="457200" y="1261872"/>
-            <a:ext cx="11277295" cy="1051560"/>
-          </a:xfrm>
-          <a:prstGeom prst="roundRect">
-            <a:avLst>
-              <a:gd name="adj" fmla="val 12000"/>
-            </a:avLst>
-          </a:prstGeom>
-          <a:solidFill>
-            <a:srgbClr val="E8F4FA"/>
-          </a:solidFill>
-          <a:ln>
-            <a:noFill/>
-          </a:ln>
-        </p:spPr>
-        <p:style>
-          <a:lnRef idx="1">
-            <a:schemeClr val="accent1"/>
-          </a:lnRef>
-          <a:fillRef idx="3">
-            <a:schemeClr val="accent1"/>
-          </a:fillRef>
-          <a:effectRef idx="2">
-            <a:schemeClr val="accent1"/>
-          </a:effectRef>
-          <a:fontRef idx="minor">
-            <a:schemeClr val="lt1"/>
-          </a:fontRef>
-        </p:style>
-        <p:txBody>
-          <a:bodyPr rtlCol="0" anchor="ctr"/>
-          <a:lstStyle/>
-          <a:p>
-            <a:pPr algn="ctr"/>
-          </a:p>
-        </p:txBody>
-      </p:sp>
-      <p:sp>
-        <p:nvSpPr>
-          <p:cNvPr id="6" name="Rectangle 5"/>
-          <p:cNvSpPr/>
-          <p:nvPr/>
-        </p:nvSpPr>
-        <p:spPr>
-          <a:xfrm>
-            <a:off x="457200" y="1261872"/>
-            <a:ext cx="128016" cy="1051560"/>
-          </a:xfrm>
-          <a:prstGeom prst="rect">
-            <a:avLst/>
-          </a:prstGeom>
-          <a:solidFill>
-            <a:srgbClr val="269CCB"/>
-          </a:solidFill>
-          <a:ln>
-            <a:noFill/>
-          </a:ln>
-        </p:spPr>
-        <p:style>
-          <a:lnRef idx="1">
-            <a:schemeClr val="accent1"/>
-          </a:lnRef>
-          <a:fillRef idx="3">
-            <a:schemeClr val="accent1"/>
-          </a:fillRef>
-          <a:effectRef idx="2">
-            <a:schemeClr val="accent1"/>
-          </a:effectRef>
-          <a:fontRef idx="minor">
-            <a:schemeClr val="lt1"/>
-          </a:fontRef>
-        </p:style>
-        <p:txBody>
-          <a:bodyPr rtlCol="0" anchor="ctr"/>
-          <a:lstStyle/>
-          <a:p>
-            <a:pPr algn="ctr"/>
-          </a:p>
-        </p:txBody>
-      </p:sp>
-      <p:sp>
-        <p:nvSpPr>
-          <p:cNvPr id="7" name="TextBox 6"/>
+              <a:t>Manos a la obra (paso a paso)</a:t>
+            </a:r>
+          </a:p>
+        </p:txBody>
+      </p:sp>
+      <p:sp>
+        <p:nvSpPr>
+          <p:cNvPr id="5" name="TextBox 4"/>
           <p:cNvSpPr txBox="1"/>
           <p:nvPr/>
         </p:nvSpPr>
         <p:spPr>
           <a:xfrm>
-            <a:off x="777240" y="1399031"/>
-            <a:ext cx="10774375" cy="822959"/>
+            <a:off x="457200" y="1170432"/>
+            <a:ext cx="11277295" cy="5230368"/>
           </a:xfrm>
           <a:prstGeom prst="rect">
             <a:avLst/>
@@ -10585,313 +10665,171 @@
           </a:bodyPr>
           <a:lstStyle/>
           <a:p>
-            <a:r>
-              <a:rPr sz="1200" b="1" i="0">
-                <a:solidFill>
-                  <a:srgbClr val="269CCB"/>
-                </a:solidFill>
-                <a:latin typeface="Calibri"/>
-              </a:rPr>
-              <a:t>Info</a:t>
-            </a:r>
-          </a:p>
-          <a:p>
             <a:pPr>
-              <a:spcBef>
-                <a:spcPts val="400"/>
-              </a:spcBef>
+              <a:spcAft>
+                <a:spcPts val="800"/>
+              </a:spcAft>
             </a:pPr>
             <a:r>
-              <a:rPr sz="1400" b="0" i="0">
+              <a:rPr sz="1800" b="1" i="0">
                 <a:solidFill>
                   <a:srgbClr val="333333"/>
                 </a:solidFill>
                 <a:latin typeface="Calibri"/>
               </a:rPr>
-              <a:t>Entregable: Sección Escalabilidad: triggers, límites, qué escala y qué no</a:t>
-            </a:r>
-          </a:p>
-        </p:txBody>
-      </p:sp>
-      <p:sp>
-        <p:nvSpPr>
-          <p:cNvPr id="8" name="Rounded Rectangle 7"/>
-          <p:cNvSpPr/>
-          <p:nvPr/>
-        </p:nvSpPr>
-        <p:spPr>
-          <a:xfrm>
-            <a:off x="457200" y="2478024"/>
-            <a:ext cx="11277295" cy="1051560"/>
-          </a:xfrm>
-          <a:prstGeom prst="roundRect">
-            <a:avLst>
-              <a:gd name="adj" fmla="val 12000"/>
-            </a:avLst>
-          </a:prstGeom>
-          <a:solidFill>
-            <a:srgbClr val="FFF8E1"/>
-          </a:solidFill>
-          <a:ln>
-            <a:noFill/>
-          </a:ln>
-        </p:spPr>
-        <p:style>
-          <a:lnRef idx="1">
-            <a:schemeClr val="accent1"/>
-          </a:lnRef>
-          <a:fillRef idx="3">
-            <a:schemeClr val="accent1"/>
-          </a:fillRef>
-          <a:effectRef idx="2">
-            <a:schemeClr val="accent1"/>
-          </a:effectRef>
-          <a:fontRef idx="minor">
-            <a:schemeClr val="lt1"/>
-          </a:fontRef>
-        </p:style>
-        <p:txBody>
-          <a:bodyPr rtlCol="0" anchor="ctr"/>
-          <a:lstStyle/>
-          <a:p>
-            <a:pPr algn="ctr"/>
-          </a:p>
-        </p:txBody>
-      </p:sp>
-      <p:sp>
-        <p:nvSpPr>
-          <p:cNvPr id="9" name="Rectangle 8"/>
-          <p:cNvSpPr/>
-          <p:nvPr/>
-        </p:nvSpPr>
-        <p:spPr>
-          <a:xfrm>
-            <a:off x="457200" y="2478024"/>
-            <a:ext cx="128016" cy="1051560"/>
-          </a:xfrm>
-          <a:prstGeom prst="rect">
-            <a:avLst/>
-          </a:prstGeom>
-          <a:solidFill>
-            <a:srgbClr val="FFD000"/>
-          </a:solidFill>
-          <a:ln>
-            <a:noFill/>
-          </a:ln>
-        </p:spPr>
-        <p:style>
-          <a:lnRef idx="1">
-            <a:schemeClr val="accent1"/>
-          </a:lnRef>
-          <a:fillRef idx="3">
-            <a:schemeClr val="accent1"/>
-          </a:fillRef>
-          <a:effectRef idx="2">
-            <a:schemeClr val="accent1"/>
-          </a:effectRef>
-          <a:fontRef idx="minor">
-            <a:schemeClr val="lt1"/>
-          </a:fontRef>
-        </p:style>
-        <p:txBody>
-          <a:bodyPr rtlCol="0" anchor="ctr"/>
-          <a:lstStyle/>
-          <a:p>
-            <a:pPr algn="ctr"/>
-          </a:p>
-        </p:txBody>
-      </p:sp>
-      <p:sp>
-        <p:nvSpPr>
-          <p:cNvPr id="10" name="TextBox 9"/>
-          <p:cNvSpPr txBox="1"/>
-          <p:nvPr/>
-        </p:nvSpPr>
-        <p:spPr>
-          <a:xfrm>
-            <a:off x="777240" y="2615184"/>
-            <a:ext cx="10774375" cy="822959"/>
-          </a:xfrm>
-          <a:prstGeom prst="rect">
-            <a:avLst/>
-          </a:prstGeom>
-          <a:noFill/>
-        </p:spPr>
-        <p:txBody>
-          <a:bodyPr wrap="square">
-            <a:spAutoFit/>
-          </a:bodyPr>
-          <a:lstStyle/>
-          <a:p>
-            <a:r>
-              <a:rPr sz="1200" b="1" i="0">
-                <a:solidFill>
-                  <a:srgbClr val="FFD000"/>
-                </a:solidFill>
-                <a:latin typeface="Calibri"/>
-              </a:rPr>
-              <a:t>Aclaración</a:t>
+              <a:t>1.</a:t>
+            </a:r>
+            <a:r>
+              <a:rPr sz="1800" b="0" i="0">
+                <a:solidFill>
+                  <a:srgbClr val="333333"/>
+                </a:solidFill>
+                <a:latin typeface="Calibri"/>
+              </a:rPr>
+              <a:t> Paso 1: tome los 5 componentes de su C4Deployment de la Clase 7 y clasifique cada uno como escala horizontal, escala vertical o no escala, verificando que al menos uno quede en no escala con justificacion tecnica, porque una politica donde todo escala no es una politica; el resultado abre la seccion Escalabilidad del informe.</a:t>
             </a:r>
           </a:p>
           <a:p>
             <a:pPr>
-              <a:spcBef>
-                <a:spcPts val="400"/>
-              </a:spcBef>
+              <a:spcAft>
+                <a:spcPts val="800"/>
+              </a:spcAft>
             </a:pPr>
             <a:r>
-              <a:rPr sz="1400" b="0" i="0">
+              <a:rPr sz="1800" b="0" i="0">
                 <a:solidFill>
                   <a:srgbClr val="333333"/>
                 </a:solidFill>
                 <a:latin typeface="Calibri"/>
               </a:rPr>
-              <a:t>Subir evidencias al paquete CloudLite (Drive/repo) y a la plataforma del curso en la fecha que indique el docente.</a:t>
-            </a:r>
-          </a:p>
-        </p:txBody>
-      </p:sp>
-      <p:sp>
-        <p:nvSpPr>
-          <p:cNvPr id="11" name="Rounded Rectangle 10"/>
-          <p:cNvSpPr/>
-          <p:nvPr/>
-        </p:nvSpPr>
-        <p:spPr>
-          <a:xfrm>
-            <a:off x="457200" y="3694176"/>
-            <a:ext cx="11277295" cy="1051560"/>
-          </a:xfrm>
-          <a:prstGeom prst="roundRect">
-            <a:avLst>
-              <a:gd name="adj" fmla="val 12000"/>
-            </a:avLst>
-          </a:prstGeom>
-          <a:solidFill>
-            <a:srgbClr val="FBE4E4"/>
-          </a:solidFill>
-          <a:ln>
-            <a:noFill/>
-          </a:ln>
-        </p:spPr>
-        <p:style>
-          <a:lnRef idx="1">
-            <a:schemeClr val="accent1"/>
-          </a:lnRef>
-          <a:fillRef idx="3">
-            <a:schemeClr val="accent1"/>
-          </a:fillRef>
-          <a:effectRef idx="2">
-            <a:schemeClr val="accent1"/>
-          </a:effectRef>
-          <a:fontRef idx="minor">
-            <a:schemeClr val="lt1"/>
-          </a:fontRef>
-        </p:style>
-        <p:txBody>
-          <a:bodyPr rtlCol="0" anchor="ctr"/>
-          <a:lstStyle/>
-          <a:p>
-            <a:pPr algn="ctr"/>
-          </a:p>
-        </p:txBody>
-      </p:sp>
-      <p:sp>
-        <p:nvSpPr>
-          <p:cNvPr id="12" name="Rectangle 11"/>
-          <p:cNvSpPr/>
-          <p:nvPr/>
-        </p:nvSpPr>
-        <p:spPr>
-          <a:xfrm>
-            <a:off x="457200" y="3694176"/>
-            <a:ext cx="128016" cy="1051560"/>
-          </a:xfrm>
-          <a:prstGeom prst="rect">
-            <a:avLst/>
-          </a:prstGeom>
-          <a:solidFill>
-            <a:srgbClr val="A02030"/>
-          </a:solidFill>
-          <a:ln>
-            <a:noFill/>
-          </a:ln>
-        </p:spPr>
-        <p:style>
-          <a:lnRef idx="1">
-            <a:schemeClr val="accent1"/>
-          </a:lnRef>
-          <a:fillRef idx="3">
-            <a:schemeClr val="accent1"/>
-          </a:fillRef>
-          <a:effectRef idx="2">
-            <a:schemeClr val="accent1"/>
-          </a:effectRef>
-          <a:fontRef idx="minor">
-            <a:schemeClr val="lt1"/>
-          </a:fontRef>
-        </p:style>
-        <p:txBody>
-          <a:bodyPr rtlCol="0" anchor="ctr"/>
-          <a:lstStyle/>
-          <a:p>
-            <a:pPr algn="ctr"/>
-          </a:p>
-        </p:txBody>
-      </p:sp>
-      <p:sp>
-        <p:nvSpPr>
-          <p:cNvPr id="13" name="TextBox 12"/>
-          <p:cNvSpPr txBox="1"/>
-          <p:nvPr/>
-        </p:nvSpPr>
-        <p:spPr>
-          <a:xfrm>
-            <a:off x="777240" y="3831336"/>
-            <a:ext cx="10774375" cy="822959"/>
-          </a:xfrm>
-          <a:prstGeom prst="rect">
-            <a:avLst/>
-          </a:prstGeom>
-          <a:noFill/>
-        </p:spPr>
-        <p:txBody>
-          <a:bodyPr wrap="square">
-            <a:spAutoFit/>
-          </a:bodyPr>
-          <a:lstStyle/>
-          <a:p>
-            <a:r>
-              <a:rPr sz="1200" b="1" i="0">
-                <a:solidFill>
-                  <a:srgbClr val="A02030"/>
-                </a:solidFill>
-                <a:latin typeface="Calibri"/>
-              </a:rPr>
-              <a:t>Atención</a:t>
+              <a:t>–   </a:t>
+            </a:r>
+            <a:r>
+              <a:rPr sz="1800" b="1" i="0">
+                <a:solidFill>
+                  <a:srgbClr val="333333"/>
+                </a:solidFill>
+                <a:latin typeface="Calibri"/>
+              </a:rPr>
+              <a:t>2.</a:t>
+            </a:r>
+            <a:r>
+              <a:rPr sz="1800" b="0" i="0">
+                <a:solidFill>
+                  <a:srgbClr val="333333"/>
+                </a:solidFill>
+                <a:latin typeface="Calibri"/>
+              </a:rPr>
+              <a:t> Paso 2: complete la tabla de politica de escalado con 6 columnas y 5 filas (componente, tipo de escala, disparador de subida, disparador de bajada, minimo y maximo, tiempo de enfriamiento), verificando que cada disparador tenga metrica, umbral numerico y ventana de tiempo, y que ningun maximo quede en infinito o sin definir.</a:t>
             </a:r>
           </a:p>
           <a:p>
             <a:pPr>
-              <a:spcBef>
-                <a:spcPts val="400"/>
-              </a:spcBef>
+              <a:spcAft>
+                <a:spcPts val="800"/>
+              </a:spcAft>
             </a:pPr>
             <a:r>
-              <a:rPr sz="1400" b="0" i="0">
+              <a:rPr sz="1800" b="0" i="0">
                 <a:solidFill>
                   <a:srgbClr val="333333"/>
                 </a:solidFill>
                 <a:latin typeface="Calibri"/>
               </a:rPr>
-              <a:t>Sin cloud de pago ni instalaciones obligatorias de hipervisores/Docker Desktop.</a:t>
-            </a:r>
-          </a:p>
-        </p:txBody>
-      </p:sp>
-      <p:sp>
-        <p:nvSpPr>
-          <p:cNvPr id="14" name="TextBox 13"/>
+              <a:t>–   </a:t>
+            </a:r>
+            <a:r>
+              <a:rPr sz="1800" b="1" i="0">
+                <a:solidFill>
+                  <a:srgbClr val="333333"/>
+                </a:solidFill>
+                <a:latin typeface="Calibri"/>
+              </a:rPr>
+              <a:t>3.</a:t>
+            </a:r>
+            <a:r>
+              <a:rPr sz="1800" b="0" i="0">
+                <a:solidFill>
+                  <a:srgbClr val="333333"/>
+                </a:solidFill>
+                <a:latin typeface="Calibri"/>
+              </a:rPr>
+              <a:t> Paso 3: escriba en la plataforma del curso el diagrama Mermaid de la maquina de decision del autoescalado con el nodo de observacion, los dos rombos de decision, las acciones de subida y bajada, el enfriamiento y el nodo de lo que no escala, verificando al renderizar que el ciclo se cierre sobre el nodo de observacion y que los umbrales del diagrama sean los mismos numeros de la tabla.</a:t>
+            </a:r>
+          </a:p>
+          <a:p>
+            <a:pPr>
+              <a:spcAft>
+                <a:spcPts val="800"/>
+              </a:spcAft>
+            </a:pPr>
+            <a:r>
+              <a:rPr sz="1800" b="0" i="0">
+                <a:solidFill>
+                  <a:srgbClr val="333333"/>
+                </a:solidFill>
+                <a:latin typeface="Calibri"/>
+              </a:rPr>
+              <a:t>–   </a:t>
+            </a:r>
+            <a:r>
+              <a:rPr sz="1800" b="1" i="0">
+                <a:solidFill>
+                  <a:srgbClr val="333333"/>
+                </a:solidFill>
+                <a:latin typeface="Calibri"/>
+              </a:rPr>
+              <a:t>4.</a:t>
+            </a:r>
+            <a:r>
+              <a:rPr sz="1800" b="0" i="0">
+                <a:solidFill>
+                  <a:srgbClr val="333333"/>
+                </a:solidFill>
+                <a:latin typeface="Calibri"/>
+              </a:rPr>
+              <a:t> Paso 4: escriba los 3 componentes que NO escalan con su justificacion tecnica y su plan alterno, y la tabla de impacto en costos que enlaza con la Clase 10, verificando que cada plan alterno sea ejecutable sin cloud de pago y que el impacto de costo use los mismos niveles bajo, medio o alto de la seccion de costos.</a:t>
+            </a:r>
+          </a:p>
+          <a:p>
+            <a:pPr>
+              <a:spcAft>
+                <a:spcPts val="800"/>
+              </a:spcAft>
+            </a:pPr>
+            <a:r>
+              <a:rPr sz="1800" b="0" i="0">
+                <a:solidFill>
+                  <a:srgbClr val="333333"/>
+                </a:solidFill>
+                <a:latin typeface="Calibri"/>
+              </a:rPr>
+              <a:t>–   </a:t>
+            </a:r>
+            <a:r>
+              <a:rPr sz="1800" b="1" i="0">
+                <a:solidFill>
+                  <a:srgbClr val="333333"/>
+                </a:solidFill>
+                <a:latin typeface="Calibri"/>
+              </a:rPr>
+              <a:t>5.</a:t>
+            </a:r>
+            <a:r>
+              <a:rPr sz="1800" b="0" i="0">
+                <a:solidFill>
+                  <a:srgbClr val="333333"/>
+                </a:solidFill>
+                <a:latin typeface="Calibri"/>
+              </a:rPr>
+              <a:t> Paso 5: integre la politica en la seccion Escalabilidad del informe, anote la marca de replicas en el diagrama de despliegue si aplica y suba las 5 preguntas a la plataforma del curso (modulo Talleres) antes del en la fecha que indique el docente, verificando que la politica no prometa nada que la arquitectura dibujada no pueda cumplir.</a:t>
+            </a:r>
+          </a:p>
+        </p:txBody>
+      </p:sp>
+      <p:sp>
+        <p:nvSpPr>
+          <p:cNvPr id="6" name="TextBox 5"/>
           <p:cNvSpPr txBox="1"/>
           <p:nvPr/>
         </p:nvSpPr>
@@ -10959,7 +10897,172 @@
         <p:spPr>
           <a:xfrm>
             <a:off x="0" y="0"/>
-            <a:ext cx="12191695" cy="164592"/>
+            <a:ext cx="12191695" cy="960120"/>
+          </a:xfrm>
+          <a:prstGeom prst="rect">
+            <a:avLst/>
+          </a:prstGeom>
+          <a:solidFill>
+            <a:srgbClr val="095292"/>
+          </a:solidFill>
+          <a:ln>
+            <a:noFill/>
+          </a:ln>
+        </p:spPr>
+        <p:style>
+          <a:lnRef idx="1">
+            <a:schemeClr val="accent1"/>
+          </a:lnRef>
+          <a:fillRef idx="3">
+            <a:schemeClr val="accent1"/>
+          </a:fillRef>
+          <a:effectRef idx="2">
+            <a:schemeClr val="accent1"/>
+          </a:effectRef>
+          <a:fontRef idx="minor">
+            <a:schemeClr val="lt1"/>
+          </a:fontRef>
+        </p:style>
+        <p:txBody>
+          <a:bodyPr rtlCol="0" anchor="ctr"/>
+          <a:lstStyle/>
+          <a:p>
+            <a:pPr algn="ctr"/>
+          </a:p>
+        </p:txBody>
+      </p:sp>
+      <p:sp>
+        <p:nvSpPr>
+          <p:cNvPr id="3" name="Rectangle 2"/>
+          <p:cNvSpPr/>
+          <p:nvPr/>
+        </p:nvSpPr>
+        <p:spPr>
+          <a:xfrm>
+            <a:off x="0" y="960120"/>
+            <a:ext cx="12191695" cy="41148"/>
+          </a:xfrm>
+          <a:prstGeom prst="rect">
+            <a:avLst/>
+          </a:prstGeom>
+          <a:solidFill>
+            <a:srgbClr val="FFD000"/>
+          </a:solidFill>
+          <a:ln>
+            <a:noFill/>
+          </a:ln>
+        </p:spPr>
+        <p:style>
+          <a:lnRef idx="1">
+            <a:schemeClr val="accent1"/>
+          </a:lnRef>
+          <a:fillRef idx="3">
+            <a:schemeClr val="accent1"/>
+          </a:fillRef>
+          <a:effectRef idx="2">
+            <a:schemeClr val="accent1"/>
+          </a:effectRef>
+          <a:fontRef idx="minor">
+            <a:schemeClr val="lt1"/>
+          </a:fontRef>
+        </p:style>
+        <p:txBody>
+          <a:bodyPr rtlCol="0" anchor="ctr"/>
+          <a:lstStyle/>
+          <a:p>
+            <a:pPr algn="ctr"/>
+          </a:p>
+        </p:txBody>
+      </p:sp>
+      <p:sp>
+        <p:nvSpPr>
+          <p:cNvPr id="4" name="TextBox 3"/>
+          <p:cNvSpPr txBox="1"/>
+          <p:nvPr/>
+        </p:nvSpPr>
+        <p:spPr>
+          <a:xfrm>
+            <a:off x="457200" y="164592"/>
+            <a:ext cx="11277295" cy="502920"/>
+          </a:xfrm>
+          <a:prstGeom prst="rect">
+            <a:avLst/>
+          </a:prstGeom>
+          <a:noFill/>
+        </p:spPr>
+        <p:txBody>
+          <a:bodyPr wrap="square">
+            <a:spAutoFit/>
+          </a:bodyPr>
+          <a:lstStyle/>
+          <a:p>
+            <a:r>
+              <a:rPr sz="2600" b="1" i="0">
+                <a:solidFill>
+                  <a:srgbClr val="FFFFFF"/>
+                </a:solidFill>
+                <a:latin typeface="Calibri"/>
+              </a:rPr>
+              <a:t>Para continuar (PI)</a:t>
+            </a:r>
+          </a:p>
+        </p:txBody>
+      </p:sp>
+      <p:sp>
+        <p:nvSpPr>
+          <p:cNvPr id="5" name="Rounded Rectangle 4"/>
+          <p:cNvSpPr/>
+          <p:nvPr/>
+        </p:nvSpPr>
+        <p:spPr>
+          <a:xfrm>
+            <a:off x="457200" y="1261872"/>
+            <a:ext cx="11277295" cy="1051560"/>
+          </a:xfrm>
+          <a:prstGeom prst="roundRect">
+            <a:avLst>
+              <a:gd name="adj" fmla="val 12000"/>
+            </a:avLst>
+          </a:prstGeom>
+          <a:solidFill>
+            <a:srgbClr val="E8F4FA"/>
+          </a:solidFill>
+          <a:ln>
+            <a:noFill/>
+          </a:ln>
+        </p:spPr>
+        <p:style>
+          <a:lnRef idx="1">
+            <a:schemeClr val="accent1"/>
+          </a:lnRef>
+          <a:fillRef idx="3">
+            <a:schemeClr val="accent1"/>
+          </a:fillRef>
+          <a:effectRef idx="2">
+            <a:schemeClr val="accent1"/>
+          </a:effectRef>
+          <a:fontRef idx="minor">
+            <a:schemeClr val="lt1"/>
+          </a:fontRef>
+        </p:style>
+        <p:txBody>
+          <a:bodyPr rtlCol="0" anchor="ctr"/>
+          <a:lstStyle/>
+          <a:p>
+            <a:pPr algn="ctr"/>
+          </a:p>
+        </p:txBody>
+      </p:sp>
+      <p:sp>
+        <p:nvSpPr>
+          <p:cNvPr id="6" name="Rectangle 5"/>
+          <p:cNvSpPr/>
+          <p:nvPr/>
+        </p:nvSpPr>
+        <p:spPr>
+          <a:xfrm>
+            <a:off x="457200" y="1261872"/>
+            <a:ext cx="128016" cy="1051560"/>
           </a:xfrm>
           <a:prstGeom prst="rect">
             <a:avLst/>
@@ -10993,73 +11096,16 @@
           </a:p>
         </p:txBody>
       </p:sp>
-      <p:pic>
-        <p:nvPicPr>
-          <p:cNvPr id="3" name="Picture 2" descr="logo_uniajc_color.png"/>
-          <p:cNvPicPr>
-            <a:picLocks noChangeAspect="1"/>
-          </p:cNvPicPr>
-          <p:nvPr/>
-        </p:nvPicPr>
-        <p:blipFill>
-          <a:blip r:embed="rId2"/>
-          <a:stretch>
-            <a:fillRect/>
-          </a:stretch>
-        </p:blipFill>
-        <p:spPr>
-          <a:xfrm>
-            <a:off x="10271455" y="5998464"/>
-            <a:ext cx="1463040" cy="643233"/>
-          </a:xfrm>
-          <a:prstGeom prst="rect">
-            <a:avLst/>
-          </a:prstGeom>
-        </p:spPr>
-      </p:pic>
-      <p:sp>
-        <p:nvSpPr>
-          <p:cNvPr id="4" name="TextBox 3"/>
+      <p:sp>
+        <p:nvSpPr>
+          <p:cNvPr id="7" name="TextBox 6"/>
           <p:cNvSpPr txBox="1"/>
           <p:nvPr/>
         </p:nvSpPr>
         <p:spPr>
           <a:xfrm>
-            <a:off x="457200" y="1737360"/>
-            <a:ext cx="11277295" cy="1097280"/>
-          </a:xfrm>
-          <a:prstGeom prst="rect">
-            <a:avLst/>
-          </a:prstGeom>
-          <a:noFill/>
-        </p:spPr>
-        <p:txBody>
-          <a:bodyPr wrap="square" anchor="ctr"/>
-          <a:lstStyle/>
-          <a:p>
-            <a:pPr algn="ctr"/>
-            <a:r>
-              <a:rPr sz="3400" b="1" i="0">
-                <a:solidFill>
-                  <a:srgbClr val="095292"/>
-                </a:solidFill>
-                <a:latin typeface="Calibri"/>
-              </a:rPr>
-              <a:t>Clase 13 · PI en movimiento</a:t>
-            </a:r>
-          </a:p>
-        </p:txBody>
-      </p:sp>
-      <p:sp>
-        <p:nvSpPr>
-          <p:cNvPr id="5" name="TextBox 4"/>
-          <p:cNvSpPr txBox="1"/>
-          <p:nvPr/>
-        </p:nvSpPr>
-        <p:spPr>
-          <a:xfrm>
-            <a:off x="457200" y="3017520"/>
-            <a:ext cx="11277295" cy="1645920"/>
+            <a:off x="777240" y="1399031"/>
+            <a:ext cx="10774375" cy="822959"/>
           </a:xfrm>
           <a:prstGeom prst="rect">
             <a:avLst/>
@@ -11072,65 +11118,132 @@
           </a:bodyPr>
           <a:lstStyle/>
           <a:p>
-            <a:pPr algn="ctr">
-              <a:spcAft>
-                <a:spcPts val="600"/>
-              </a:spcAft>
+            <a:r>
+              <a:rPr sz="1200" b="1" i="0">
+                <a:solidFill>
+                  <a:srgbClr val="269CCB"/>
+                </a:solidFill>
+                <a:latin typeface="Calibri"/>
+              </a:rPr>
+              <a:t>Info</a:t>
+            </a:r>
+          </a:p>
+          <a:p>
+            <a:pPr>
+              <a:spcBef>
+                <a:spcPts val="400"/>
+              </a:spcBef>
             </a:pPr>
             <a:r>
-              <a:rPr sz="1600" b="0" i="0">
+              <a:rPr sz="1400" b="0" i="0">
                 <a:solidFill>
                   <a:srgbClr val="333333"/>
                 </a:solidFill>
                 <a:latin typeface="Calibri"/>
               </a:rPr>
-              <a:t>Documentar política de autoescalado conceptual de CloudLite</a:t>
-            </a:r>
-          </a:p>
-          <a:p>
-            <a:pPr algn="ctr">
-              <a:spcAft>
-                <a:spcPts val="600"/>
-              </a:spcAft>
-            </a:pPr>
-            <a:r>
-              <a:rPr sz="1600" b="0" i="0">
-                <a:solidFill>
-                  <a:srgbClr val="333333"/>
-                </a:solidFill>
-                <a:latin typeface="Calibri"/>
-              </a:rPr>
-              <a:t>Evidencia: Sección Escalabilidad: triggers, límites, qué escala y qué no</a:t>
-            </a:r>
-          </a:p>
-          <a:p>
-            <a:pPr algn="ctr">
-              <a:spcAft>
-                <a:spcPts val="600"/>
-              </a:spcAft>
-            </a:pPr>
-            <a:r>
-              <a:rPr sz="1600" b="0" i="0">
-                <a:solidFill>
-                  <a:srgbClr val="333333"/>
-                </a:solidFill>
-                <a:latin typeface="Calibri"/>
-              </a:rPr>
-              <a:t>Siguiente paso = siguiente hito del PI CloudLite</a:t>
-            </a:r>
-          </a:p>
-        </p:txBody>
-      </p:sp>
-      <p:sp>
-        <p:nvSpPr>
-          <p:cNvPr id="6" name="TextBox 5"/>
+              <a:t>Entregable: Sección Escalabilidad: triggers, límites, qué escala y qué no</a:t>
+            </a:r>
+          </a:p>
+        </p:txBody>
+      </p:sp>
+      <p:sp>
+        <p:nvSpPr>
+          <p:cNvPr id="8" name="Rounded Rectangle 7"/>
+          <p:cNvSpPr/>
+          <p:nvPr/>
+        </p:nvSpPr>
+        <p:spPr>
+          <a:xfrm>
+            <a:off x="457200" y="2478024"/>
+            <a:ext cx="11277295" cy="1051560"/>
+          </a:xfrm>
+          <a:prstGeom prst="roundRect">
+            <a:avLst>
+              <a:gd name="adj" fmla="val 12000"/>
+            </a:avLst>
+          </a:prstGeom>
+          <a:solidFill>
+            <a:srgbClr val="FFF8E1"/>
+          </a:solidFill>
+          <a:ln>
+            <a:noFill/>
+          </a:ln>
+        </p:spPr>
+        <p:style>
+          <a:lnRef idx="1">
+            <a:schemeClr val="accent1"/>
+          </a:lnRef>
+          <a:fillRef idx="3">
+            <a:schemeClr val="accent1"/>
+          </a:fillRef>
+          <a:effectRef idx="2">
+            <a:schemeClr val="accent1"/>
+          </a:effectRef>
+          <a:fontRef idx="minor">
+            <a:schemeClr val="lt1"/>
+          </a:fontRef>
+        </p:style>
+        <p:txBody>
+          <a:bodyPr rtlCol="0" anchor="ctr"/>
+          <a:lstStyle/>
+          <a:p>
+            <a:pPr algn="ctr"/>
+          </a:p>
+        </p:txBody>
+      </p:sp>
+      <p:sp>
+        <p:nvSpPr>
+          <p:cNvPr id="9" name="Rectangle 8"/>
+          <p:cNvSpPr/>
+          <p:nvPr/>
+        </p:nvSpPr>
+        <p:spPr>
+          <a:xfrm>
+            <a:off x="457200" y="2478024"/>
+            <a:ext cx="128016" cy="1051560"/>
+          </a:xfrm>
+          <a:prstGeom prst="rect">
+            <a:avLst/>
+          </a:prstGeom>
+          <a:solidFill>
+            <a:srgbClr val="FFD000"/>
+          </a:solidFill>
+          <a:ln>
+            <a:noFill/>
+          </a:ln>
+        </p:spPr>
+        <p:style>
+          <a:lnRef idx="1">
+            <a:schemeClr val="accent1"/>
+          </a:lnRef>
+          <a:fillRef idx="3">
+            <a:schemeClr val="accent1"/>
+          </a:fillRef>
+          <a:effectRef idx="2">
+            <a:schemeClr val="accent1"/>
+          </a:effectRef>
+          <a:fontRef idx="minor">
+            <a:schemeClr val="lt1"/>
+          </a:fontRef>
+        </p:style>
+        <p:txBody>
+          <a:bodyPr rtlCol="0" anchor="ctr"/>
+          <a:lstStyle/>
+          <a:p>
+            <a:pPr algn="ctr"/>
+          </a:p>
+        </p:txBody>
+      </p:sp>
+      <p:sp>
+        <p:nvSpPr>
+          <p:cNvPr id="10" name="TextBox 9"/>
           <p:cNvSpPr txBox="1"/>
           <p:nvPr/>
         </p:nvSpPr>
         <p:spPr>
           <a:xfrm>
-            <a:off x="457200" y="4754880"/>
-            <a:ext cx="11277295" cy="640080"/>
+            <a:off x="777240" y="2615184"/>
+            <a:ext cx="10774375" cy="822959"/>
           </a:xfrm>
           <a:prstGeom prst="rect">
             <a:avLst/>
@@ -11143,15 +11256,203 @@
           </a:bodyPr>
           <a:lstStyle/>
           <a:p>
+            <a:r>
+              <a:rPr sz="1200" b="1" i="0">
+                <a:solidFill>
+                  <a:srgbClr val="FFD000"/>
+                </a:solidFill>
+                <a:latin typeface="Calibri"/>
+              </a:rPr>
+              <a:t>Aclaración</a:t>
+            </a:r>
+          </a:p>
+          <a:p>
+            <a:pPr>
+              <a:spcBef>
+                <a:spcPts val="400"/>
+              </a:spcBef>
+            </a:pPr>
+            <a:r>
+              <a:rPr sz="1400" b="0" i="0">
+                <a:solidFill>
+                  <a:srgbClr val="333333"/>
+                </a:solidFill>
+                <a:latin typeface="Calibri"/>
+              </a:rPr>
+              <a:t>Subir evidencias al paquete CloudLite (Drive/repo) y a la plataforma del curso en la fecha que indique el docente.</a:t>
+            </a:r>
+          </a:p>
+        </p:txBody>
+      </p:sp>
+      <p:sp>
+        <p:nvSpPr>
+          <p:cNvPr id="11" name="Rounded Rectangle 10"/>
+          <p:cNvSpPr/>
+          <p:nvPr/>
+        </p:nvSpPr>
+        <p:spPr>
+          <a:xfrm>
+            <a:off x="457200" y="3694176"/>
+            <a:ext cx="11277295" cy="1051560"/>
+          </a:xfrm>
+          <a:prstGeom prst="roundRect">
+            <a:avLst>
+              <a:gd name="adj" fmla="val 12000"/>
+            </a:avLst>
+          </a:prstGeom>
+          <a:solidFill>
+            <a:srgbClr val="FBE4E4"/>
+          </a:solidFill>
+          <a:ln>
+            <a:noFill/>
+          </a:ln>
+        </p:spPr>
+        <p:style>
+          <a:lnRef idx="1">
+            <a:schemeClr val="accent1"/>
+          </a:lnRef>
+          <a:fillRef idx="3">
+            <a:schemeClr val="accent1"/>
+          </a:fillRef>
+          <a:effectRef idx="2">
+            <a:schemeClr val="accent1"/>
+          </a:effectRef>
+          <a:fontRef idx="minor">
+            <a:schemeClr val="lt1"/>
+          </a:fontRef>
+        </p:style>
+        <p:txBody>
+          <a:bodyPr rtlCol="0" anchor="ctr"/>
+          <a:lstStyle/>
+          <a:p>
             <a:pPr algn="ctr"/>
-            <a:r>
-              <a:rPr sz="2000" b="1" i="0">
-                <a:solidFill>
-                  <a:srgbClr val="269CCB"/>
-                </a:solidFill>
-                <a:latin typeface="Calibri"/>
-              </a:rPr>
-              <a:t>Teoría al servicio del proyecto</a:t>
+          </a:p>
+        </p:txBody>
+      </p:sp>
+      <p:sp>
+        <p:nvSpPr>
+          <p:cNvPr id="12" name="Rectangle 11"/>
+          <p:cNvSpPr/>
+          <p:nvPr/>
+        </p:nvSpPr>
+        <p:spPr>
+          <a:xfrm>
+            <a:off x="457200" y="3694176"/>
+            <a:ext cx="128016" cy="1051560"/>
+          </a:xfrm>
+          <a:prstGeom prst="rect">
+            <a:avLst/>
+          </a:prstGeom>
+          <a:solidFill>
+            <a:srgbClr val="A02030"/>
+          </a:solidFill>
+          <a:ln>
+            <a:noFill/>
+          </a:ln>
+        </p:spPr>
+        <p:style>
+          <a:lnRef idx="1">
+            <a:schemeClr val="accent1"/>
+          </a:lnRef>
+          <a:fillRef idx="3">
+            <a:schemeClr val="accent1"/>
+          </a:fillRef>
+          <a:effectRef idx="2">
+            <a:schemeClr val="accent1"/>
+          </a:effectRef>
+          <a:fontRef idx="minor">
+            <a:schemeClr val="lt1"/>
+          </a:fontRef>
+        </p:style>
+        <p:txBody>
+          <a:bodyPr rtlCol="0" anchor="ctr"/>
+          <a:lstStyle/>
+          <a:p>
+            <a:pPr algn="ctr"/>
+          </a:p>
+        </p:txBody>
+      </p:sp>
+      <p:sp>
+        <p:nvSpPr>
+          <p:cNvPr id="13" name="TextBox 12"/>
+          <p:cNvSpPr txBox="1"/>
+          <p:nvPr/>
+        </p:nvSpPr>
+        <p:spPr>
+          <a:xfrm>
+            <a:off x="777240" y="3831336"/>
+            <a:ext cx="10774375" cy="822959"/>
+          </a:xfrm>
+          <a:prstGeom prst="rect">
+            <a:avLst/>
+          </a:prstGeom>
+          <a:noFill/>
+        </p:spPr>
+        <p:txBody>
+          <a:bodyPr wrap="square">
+            <a:spAutoFit/>
+          </a:bodyPr>
+          <a:lstStyle/>
+          <a:p>
+            <a:r>
+              <a:rPr sz="1200" b="1" i="0">
+                <a:solidFill>
+                  <a:srgbClr val="A02030"/>
+                </a:solidFill>
+                <a:latin typeface="Calibri"/>
+              </a:rPr>
+              <a:t>Atención</a:t>
+            </a:r>
+          </a:p>
+          <a:p>
+            <a:pPr>
+              <a:spcBef>
+                <a:spcPts val="400"/>
+              </a:spcBef>
+            </a:pPr>
+            <a:r>
+              <a:rPr sz="1400" b="0" i="0">
+                <a:solidFill>
+                  <a:srgbClr val="333333"/>
+                </a:solidFill>
+                <a:latin typeface="Calibri"/>
+              </a:rPr>
+              <a:t>Sin cloud de pago ni instalaciones obligatorias de hipervisores/Docker Desktop.</a:t>
+            </a:r>
+          </a:p>
+        </p:txBody>
+      </p:sp>
+      <p:sp>
+        <p:nvSpPr>
+          <p:cNvPr id="14" name="TextBox 13"/>
+          <p:cNvSpPr txBox="1"/>
+          <p:nvPr/>
+        </p:nvSpPr>
+        <p:spPr>
+          <a:xfrm>
+            <a:off x="11185855" y="6473952"/>
+            <a:ext cx="640080" cy="274320"/>
+          </a:xfrm>
+          <a:prstGeom prst="rect">
+            <a:avLst/>
+          </a:prstGeom>
+          <a:noFill/>
+        </p:spPr>
+        <p:txBody>
+          <a:bodyPr wrap="square">
+            <a:spAutoFit/>
+          </a:bodyPr>
+          <a:lstStyle/>
+          <a:p>
+            <a:pPr algn="r"/>
+            <a:r>
+              <a:rPr sz="1100" b="0" i="0">
+                <a:solidFill>
+                  <a:srgbClr val="666666"/>
+                </a:solidFill>
+                <a:latin typeface="Calibri"/>
+              </a:rPr>
+              <a:t>29</a:t>
             </a:r>
           </a:p>
         </p:txBody>
@@ -11404,6 +11705,238 @@
                 <a:latin typeface="Calibri"/>
               </a:rPr>
               <a:t>3</a:t>
+            </a:r>
+          </a:p>
+        </p:txBody>
+      </p:sp>
+    </p:spTree>
+  </p:cSld>
+  <p:clrMapOvr>
+    <a:masterClrMapping/>
+  </p:clrMapOvr>
+</p:sld>
+</file>
+
+<file path=ppt/slides/slide30.xml><?xml version="1.0" encoding="utf-8"?>
+<p:sld xmlns:a="http://schemas.openxmlformats.org/drawingml/2006/main" xmlns:p="http://schemas.openxmlformats.org/presentationml/2006/main" xmlns:r="http://schemas.openxmlformats.org/officeDocument/2006/relationships">
+  <p:cSld>
+    <p:bg>
+      <p:bgPr>
+        <a:solidFill>
+          <a:srgbClr val="FFFFFF"/>
+        </a:solidFill>
+        <a:effectLst/>
+      </p:bgPr>
+    </p:bg>
+    <p:spTree>
+      <p:nvGrpSpPr>
+        <p:cNvPr id="1" name=""/>
+        <p:cNvGrpSpPr/>
+        <p:nvPr/>
+      </p:nvGrpSpPr>
+      <p:grpSpPr/>
+      <p:sp>
+        <p:nvSpPr>
+          <p:cNvPr id="2" name="Rectangle 1"/>
+          <p:cNvSpPr/>
+          <p:nvPr/>
+        </p:nvSpPr>
+        <p:spPr>
+          <a:xfrm>
+            <a:off x="0" y="0"/>
+            <a:ext cx="12191695" cy="164592"/>
+          </a:xfrm>
+          <a:prstGeom prst="rect">
+            <a:avLst/>
+          </a:prstGeom>
+          <a:solidFill>
+            <a:srgbClr val="269CCB"/>
+          </a:solidFill>
+          <a:ln>
+            <a:noFill/>
+          </a:ln>
+        </p:spPr>
+        <p:style>
+          <a:lnRef idx="1">
+            <a:schemeClr val="accent1"/>
+          </a:lnRef>
+          <a:fillRef idx="3">
+            <a:schemeClr val="accent1"/>
+          </a:fillRef>
+          <a:effectRef idx="2">
+            <a:schemeClr val="accent1"/>
+          </a:effectRef>
+          <a:fontRef idx="minor">
+            <a:schemeClr val="lt1"/>
+          </a:fontRef>
+        </p:style>
+        <p:txBody>
+          <a:bodyPr rtlCol="0" anchor="ctr"/>
+          <a:lstStyle/>
+          <a:p>
+            <a:pPr algn="ctr"/>
+          </a:p>
+        </p:txBody>
+      </p:sp>
+      <p:pic>
+        <p:nvPicPr>
+          <p:cNvPr id="3" name="Picture 2" descr="logo_uniajc_color.png"/>
+          <p:cNvPicPr>
+            <a:picLocks noChangeAspect="1"/>
+          </p:cNvPicPr>
+          <p:nvPr/>
+        </p:nvPicPr>
+        <p:blipFill>
+          <a:blip r:embed="rId2"/>
+          <a:stretch>
+            <a:fillRect/>
+          </a:stretch>
+        </p:blipFill>
+        <p:spPr>
+          <a:xfrm>
+            <a:off x="10271455" y="5998464"/>
+            <a:ext cx="1463040" cy="643233"/>
+          </a:xfrm>
+          <a:prstGeom prst="rect">
+            <a:avLst/>
+          </a:prstGeom>
+        </p:spPr>
+      </p:pic>
+      <p:sp>
+        <p:nvSpPr>
+          <p:cNvPr id="4" name="TextBox 3"/>
+          <p:cNvSpPr txBox="1"/>
+          <p:nvPr/>
+        </p:nvSpPr>
+        <p:spPr>
+          <a:xfrm>
+            <a:off x="457200" y="1737360"/>
+            <a:ext cx="11277295" cy="1097280"/>
+          </a:xfrm>
+          <a:prstGeom prst="rect">
+            <a:avLst/>
+          </a:prstGeom>
+          <a:noFill/>
+        </p:spPr>
+        <p:txBody>
+          <a:bodyPr wrap="square" anchor="ctr"/>
+          <a:lstStyle/>
+          <a:p>
+            <a:pPr algn="ctr"/>
+            <a:r>
+              <a:rPr sz="3400" b="1" i="0">
+                <a:solidFill>
+                  <a:srgbClr val="095292"/>
+                </a:solidFill>
+                <a:latin typeface="Calibri"/>
+              </a:rPr>
+              <a:t>Clase 13 · PI en movimiento</a:t>
+            </a:r>
+          </a:p>
+        </p:txBody>
+      </p:sp>
+      <p:sp>
+        <p:nvSpPr>
+          <p:cNvPr id="5" name="TextBox 4"/>
+          <p:cNvSpPr txBox="1"/>
+          <p:nvPr/>
+        </p:nvSpPr>
+        <p:spPr>
+          <a:xfrm>
+            <a:off x="457200" y="3017520"/>
+            <a:ext cx="11277295" cy="1645920"/>
+          </a:xfrm>
+          <a:prstGeom prst="rect">
+            <a:avLst/>
+          </a:prstGeom>
+          <a:noFill/>
+        </p:spPr>
+        <p:txBody>
+          <a:bodyPr wrap="square">
+            <a:spAutoFit/>
+          </a:bodyPr>
+          <a:lstStyle/>
+          <a:p>
+            <a:pPr algn="ctr">
+              <a:spcAft>
+                <a:spcPts val="600"/>
+              </a:spcAft>
+            </a:pPr>
+            <a:r>
+              <a:rPr sz="1600" b="0" i="0">
+                <a:solidFill>
+                  <a:srgbClr val="333333"/>
+                </a:solidFill>
+                <a:latin typeface="Calibri"/>
+              </a:rPr>
+              <a:t>Documentar política de autoescalado conceptual de CloudLite</a:t>
+            </a:r>
+          </a:p>
+          <a:p>
+            <a:pPr algn="ctr">
+              <a:spcAft>
+                <a:spcPts val="600"/>
+              </a:spcAft>
+            </a:pPr>
+            <a:r>
+              <a:rPr sz="1600" b="0" i="0">
+                <a:solidFill>
+                  <a:srgbClr val="333333"/>
+                </a:solidFill>
+                <a:latin typeface="Calibri"/>
+              </a:rPr>
+              <a:t>Evidencia: Sección Escalabilidad: triggers, límites, qué escala y qué no</a:t>
+            </a:r>
+          </a:p>
+          <a:p>
+            <a:pPr algn="ctr">
+              <a:spcAft>
+                <a:spcPts val="600"/>
+              </a:spcAft>
+            </a:pPr>
+            <a:r>
+              <a:rPr sz="1600" b="0" i="0">
+                <a:solidFill>
+                  <a:srgbClr val="333333"/>
+                </a:solidFill>
+                <a:latin typeface="Calibri"/>
+              </a:rPr>
+              <a:t>Siguiente paso = siguiente hito del PI CloudLite</a:t>
+            </a:r>
+          </a:p>
+        </p:txBody>
+      </p:sp>
+      <p:sp>
+        <p:nvSpPr>
+          <p:cNvPr id="6" name="TextBox 5"/>
+          <p:cNvSpPr txBox="1"/>
+          <p:nvPr/>
+        </p:nvSpPr>
+        <p:spPr>
+          <a:xfrm>
+            <a:off x="457200" y="4754880"/>
+            <a:ext cx="11277295" cy="640080"/>
+          </a:xfrm>
+          <a:prstGeom prst="rect">
+            <a:avLst/>
+          </a:prstGeom>
+          <a:noFill/>
+        </p:spPr>
+        <p:txBody>
+          <a:bodyPr wrap="square">
+            <a:spAutoFit/>
+          </a:bodyPr>
+          <a:lstStyle/>
+          <a:p>
+            <a:pPr algn="ctr"/>
+            <a:r>
+              <a:rPr sz="2000" b="1" i="0">
+                <a:solidFill>
+                  <a:srgbClr val="269CCB"/>
+                </a:solidFill>
+                <a:latin typeface="Calibri"/>
+              </a:rPr>
+              <a:t>Teoría al servicio del proyecto</a:t>
             </a:r>
           </a:p>
         </p:txBody>

--- a/Arquitectura de Sistemas Computacionales/Clases/Clase 13 - Escalabilidad automatica/Presentacion.pptx
+++ b/Arquitectura de Sistemas Computacionales/Clases/Clase 13 - Escalabilidad automatica/Presentacion.pptx
@@ -9460,7 +9460,7 @@
                 </a:solidFill>
                 <a:latin typeface="Calibri"/>
               </a:rPr>
-              <a:t>El diagrama se entrega como código Mermaid dentro de la plataforma del curso, no como imagen</a:t>
+              <a:t>El diagrama se entrega como código Mermaid en la plataforma del curso, no como imagen</a:t>
             </a:r>
           </a:p>
         </p:txBody>
@@ -10407,7 +10407,7 @@
                 </a:solidFill>
                 <a:latin typeface="Calibri"/>
               </a:rPr>
-              <a:t>Google Docs · draw.io (opcional nota en Deployment)</a:t>
+              <a:t>Navegador · editores de texto y de diagramas del curso</a:t>
             </a:r>
           </a:p>
           <a:p>
@@ -11279,7 +11279,7 @@
                 </a:solidFill>
                 <a:latin typeface="Calibri"/>
               </a:rPr>
-              <a:t>Subir evidencias al paquete CloudLite (Drive/repo) y a la plataforma del curso en la fecha que indique el docente.</a:t>
+              <a:t>Subir evidencias al paquete CloudLite (Drive/repo) y a la plataforma del curso (la plataforma del curso) en la fecha que indique el docente.</a:t>
             </a:r>
           </a:p>
         </p:txBody>

--- a/Arquitectura de Sistemas Computacionales/Clases/Clase 13 - Escalabilidad automatica/Presentacion.pptx
+++ b/Arquitectura de Sistemas Computacionales/Clases/Clase 13 - Escalabilidad automatica/Presentacion.pptx
@@ -11,30 +11,25 @@
     <p:sldId id="259" r:id="rId10"/>
     <p:sldId id="260" r:id="rId11"/>
     <p:sldId id="261" r:id="rId12"/>
-    <p:sldId id="262" r:id="rId13"/>
-    <p:sldId id="263" r:id="rId14"/>
-    <p:sldId id="264" r:id="rId15"/>
-    <p:sldId id="265" r:id="rId16"/>
-    <p:sldId id="266" r:id="rId17"/>
-    <p:sldId id="267" r:id="rId18"/>
-    <p:sldId id="268" r:id="rId19"/>
-    <p:sldId id="269" r:id="rId20"/>
-    <p:sldId id="270" r:id="rId21"/>
-    <p:sldId id="271" r:id="rId22"/>
-    <p:sldId id="272" r:id="rId23"/>
-    <p:sldId id="273" r:id="rId24"/>
-    <p:sldId id="274" r:id="rId25"/>
-    <p:sldId id="275" r:id="rId26"/>
-    <p:sldId id="276" r:id="rId27"/>
-    <p:sldId id="277" r:id="rId28"/>
-    <p:sldId id="278" r:id="rId29"/>
-    <p:sldId id="279" r:id="rId30"/>
-    <p:sldId id="280" r:id="rId31"/>
-    <p:sldId id="281" r:id="rId32"/>
-    <p:sldId id="282" r:id="rId33"/>
-    <p:sldId id="283" r:id="rId34"/>
-    <p:sldId id="284" r:id="rId35"/>
-    <p:sldId id="285" r:id="rId36"/>
+    <p:sldId id="262" r:id="rId14"/>
+    <p:sldId id="263" r:id="rId15"/>
+    <p:sldId id="264" r:id="rId16"/>
+    <p:sldId id="265" r:id="rId17"/>
+    <p:sldId id="266" r:id="rId18"/>
+    <p:sldId id="267" r:id="rId19"/>
+    <p:sldId id="268" r:id="rId20"/>
+    <p:sldId id="269" r:id="rId21"/>
+    <p:sldId id="270" r:id="rId22"/>
+    <p:sldId id="271" r:id="rId23"/>
+    <p:sldId id="272" r:id="rId24"/>
+    <p:sldId id="273" r:id="rId25"/>
+    <p:sldId id="274" r:id="rId26"/>
+    <p:sldId id="275" r:id="rId27"/>
+    <p:sldId id="276" r:id="rId28"/>
+    <p:sldId id="277" r:id="rId29"/>
+    <p:sldId id="278" r:id="rId30"/>
+    <p:sldId id="279" r:id="rId31"/>
+    <p:sldId id="280" r:id="rId32"/>
   </p:sldIdLst>
   <p:sldSz cx="12191695" cy="6858000" type="screen4x3"/>
   <p:notesSz cx="6858000" cy="9144000"/>
@@ -134,6 +129,870 @@
     </a:lvl9pPr>
   </p:defaultTextStyle>
 </p:presentation>
+</file>
+
+<file path=ppt/notesMasters/notesMaster1.xml><?xml version="1.0" encoding="utf-8"?>
+<p:notesMaster xmlns:a="http://schemas.openxmlformats.org/drawingml/2006/main" xmlns:p="http://schemas.openxmlformats.org/presentationml/2006/main" xmlns:r="http://schemas.openxmlformats.org/officeDocument/2006/relationships">
+  <p:cSld>
+    <p:bg>
+      <p:bgRef idx="1001">
+        <a:schemeClr val="bg1"/>
+      </p:bgRef>
+    </p:bg>
+    <p:spTree>
+      <p:nvGrpSpPr>
+        <p:cNvPr id="1" name=""/>
+        <p:cNvGrpSpPr/>
+        <p:nvPr/>
+      </p:nvGrpSpPr>
+      <p:grpSpPr>
+        <a:xfrm>
+          <a:off x="0" y="0"/>
+          <a:ext cx="0" cy="0"/>
+          <a:chOff x="0" y="0"/>
+          <a:chExt cx="0" cy="0"/>
+        </a:xfrm>
+      </p:grpSpPr>
+      <p:sp>
+        <p:nvSpPr>
+          <p:cNvPr id="2" name="Header Placeholder 1"/>
+          <p:cNvSpPr>
+            <a:spLocks noGrp="1"/>
+          </p:cNvSpPr>
+          <p:nvPr>
+            <p:ph type="hdr" sz="quarter"/>
+          </p:nvPr>
+        </p:nvSpPr>
+        <p:spPr>
+          <a:xfrm>
+            <a:off x="0" y="0"/>
+            <a:ext cx="2971800" cy="457200"/>
+          </a:xfrm>
+          <a:prstGeom prst="rect">
+            <a:avLst/>
+          </a:prstGeom>
+        </p:spPr>
+        <p:txBody>
+          <a:bodyPr vert="horz" lIns="91440" tIns="45720" rIns="91440" bIns="45720" rtlCol="0"/>
+          <a:lstStyle>
+            <a:lvl1pPr algn="l">
+              <a:defRPr sz="1200"/>
+            </a:lvl1pPr>
+          </a:lstStyle>
+          <a:p>
+            <a:endParaRPr lang="en-US"/>
+          </a:p>
+        </p:txBody>
+      </p:sp>
+      <p:sp>
+        <p:nvSpPr>
+          <p:cNvPr id="3" name="Date Placeholder 2"/>
+          <p:cNvSpPr>
+            <a:spLocks noGrp="1"/>
+          </p:cNvSpPr>
+          <p:nvPr>
+            <p:ph type="dt" idx="1"/>
+          </p:nvPr>
+        </p:nvSpPr>
+        <p:spPr>
+          <a:xfrm>
+            <a:off x="3884613" y="0"/>
+            <a:ext cx="2971800" cy="457200"/>
+          </a:xfrm>
+          <a:prstGeom prst="rect">
+            <a:avLst/>
+          </a:prstGeom>
+        </p:spPr>
+        <p:txBody>
+          <a:bodyPr vert="horz" lIns="91440" tIns="45720" rIns="91440" bIns="45720" rtlCol="0"/>
+          <a:lstStyle>
+            <a:lvl1pPr algn="r">
+              <a:defRPr sz="1200"/>
+            </a:lvl1pPr>
+          </a:lstStyle>
+          <a:p>
+            <a:fld id="{0F89C1C7-3DCD-1040-A9CF-14679D8B5DDD}" type="datetimeFigureOut">
+              <a:rPr lang="en-US" smtClean="0"/>
+              <a:t>10/17/16</a:t>
+            </a:fld>
+            <a:endParaRPr lang="en-US"/>
+          </a:p>
+        </p:txBody>
+      </p:sp>
+      <p:sp>
+        <p:nvSpPr>
+          <p:cNvPr id="4" name="Slide Image Placeholder 3"/>
+          <p:cNvSpPr>
+            <a:spLocks noGrp="1" noRot="1" noChangeAspect="1"/>
+          </p:cNvSpPr>
+          <p:nvPr>
+            <p:ph type="sldImg" idx="2"/>
+          </p:nvPr>
+        </p:nvSpPr>
+        <p:spPr>
+          <a:xfrm>
+            <a:off x="1143000" y="685800"/>
+            <a:ext cx="4572000" cy="3429000"/>
+          </a:xfrm>
+          <a:prstGeom prst="rect">
+            <a:avLst/>
+          </a:prstGeom>
+          <a:noFill/>
+          <a:ln w="12700">
+            <a:solidFill>
+              <a:prstClr val="black"/>
+            </a:solidFill>
+          </a:ln>
+        </p:spPr>
+        <p:txBody>
+          <a:bodyPr vert="horz" lIns="91440" tIns="45720" rIns="91440" bIns="45720" rtlCol="0" anchor="ctr"/>
+          <a:lstStyle/>
+          <a:p>
+            <a:endParaRPr lang="en-US"/>
+          </a:p>
+        </p:txBody>
+      </p:sp>
+      <p:sp>
+        <p:nvSpPr>
+          <p:cNvPr id="5" name="Notes Placeholder 4"/>
+          <p:cNvSpPr>
+            <a:spLocks noGrp="1"/>
+          </p:cNvSpPr>
+          <p:nvPr>
+            <p:ph type="body" sz="quarter" idx="3"/>
+          </p:nvPr>
+        </p:nvSpPr>
+        <p:spPr>
+          <a:xfrm>
+            <a:off x="685800" y="4343400"/>
+            <a:ext cx="5486400" cy="4114800"/>
+          </a:xfrm>
+          <a:prstGeom prst="rect">
+            <a:avLst/>
+          </a:prstGeom>
+        </p:spPr>
+        <p:txBody>
+          <a:bodyPr vert="horz" lIns="91440" tIns="45720" rIns="91440" bIns="45720" rtlCol="0"/>
+          <a:lstStyle/>
+          <a:p>
+            <a:pPr lvl="0"/>
+            <a:r>
+              <a:rPr lang="en-US" smtClean="0"/>
+              <a:t>Click to edit Master text styles</a:t>
+            </a:r>
+          </a:p>
+          <a:p>
+            <a:pPr lvl="1"/>
+            <a:r>
+              <a:rPr lang="en-US" smtClean="0"/>
+              <a:t>Second level</a:t>
+            </a:r>
+          </a:p>
+          <a:p>
+            <a:pPr lvl="2"/>
+            <a:r>
+              <a:rPr lang="en-US" smtClean="0"/>
+              <a:t>Third level</a:t>
+            </a:r>
+          </a:p>
+          <a:p>
+            <a:pPr lvl="3"/>
+            <a:r>
+              <a:rPr lang="en-US" smtClean="0"/>
+              <a:t>Fourth level</a:t>
+            </a:r>
+          </a:p>
+          <a:p>
+            <a:pPr lvl="4"/>
+            <a:r>
+              <a:rPr lang="en-US" smtClean="0"/>
+              <a:t>Fifth level</a:t>
+            </a:r>
+            <a:endParaRPr lang="en-US"/>
+          </a:p>
+        </p:txBody>
+      </p:sp>
+      <p:sp>
+        <p:nvSpPr>
+          <p:cNvPr id="6" name="Footer Placeholder 5"/>
+          <p:cNvSpPr>
+            <a:spLocks noGrp="1"/>
+          </p:cNvSpPr>
+          <p:nvPr>
+            <p:ph type="ftr" sz="quarter" idx="4"/>
+          </p:nvPr>
+        </p:nvSpPr>
+        <p:spPr>
+          <a:xfrm>
+            <a:off x="0" y="8685213"/>
+            <a:ext cx="2971800" cy="457200"/>
+          </a:xfrm>
+          <a:prstGeom prst="rect">
+            <a:avLst/>
+          </a:prstGeom>
+        </p:spPr>
+        <p:txBody>
+          <a:bodyPr vert="horz" lIns="91440" tIns="45720" rIns="91440" bIns="45720" rtlCol="0" anchor="b"/>
+          <a:lstStyle>
+            <a:lvl1pPr algn="l">
+              <a:defRPr sz="1200"/>
+            </a:lvl1pPr>
+          </a:lstStyle>
+          <a:p>
+            <a:endParaRPr lang="en-US"/>
+          </a:p>
+        </p:txBody>
+      </p:sp>
+      <p:sp>
+        <p:nvSpPr>
+          <p:cNvPr id="7" name="Slide Number Placeholder 6"/>
+          <p:cNvSpPr>
+            <a:spLocks noGrp="1"/>
+          </p:cNvSpPr>
+          <p:nvPr>
+            <p:ph type="sldNum" sz="quarter" idx="5"/>
+          </p:nvPr>
+        </p:nvSpPr>
+        <p:spPr>
+          <a:xfrm>
+            <a:off x="3884613" y="8685213"/>
+            <a:ext cx="2971800" cy="457200"/>
+          </a:xfrm>
+          <a:prstGeom prst="rect">
+            <a:avLst/>
+          </a:prstGeom>
+        </p:spPr>
+        <p:txBody>
+          <a:bodyPr vert="horz" lIns="91440" tIns="45720" rIns="91440" bIns="45720" rtlCol="0" anchor="b"/>
+          <a:lstStyle>
+            <a:lvl1pPr algn="r">
+              <a:defRPr sz="1200"/>
+            </a:lvl1pPr>
+          </a:lstStyle>
+          <a:p>
+            <a:fld id="{BB5E49A5-4136-284D-997B-48E1D791AD67}" type="slidenum">
+              <a:rPr lang="en-US" smtClean="0"/>
+              <a:t>‹#›</a:t>
+            </a:fld>
+            <a:endParaRPr lang="en-US"/>
+          </a:p>
+        </p:txBody>
+      </p:sp>
+    </p:spTree>
+    <p:extLst>
+      <p:ext uri="{BB962C8B-B14F-4D97-AF65-F5344CB8AC3E}">
+        <p14:creationId xmlns:p14="http://schemas.microsoft.com/office/powerpoint/2010/main" val="2623252185"/>
+      </p:ext>
+    </p:extLst>
+  </p:cSld>
+  <p:clrMap bg1="lt1" tx1="dk1" bg2="lt2" tx2="dk2" accent1="accent1" accent2="accent2" accent3="accent3" accent4="accent4" accent5="accent5" accent6="accent6" hlink="hlink" folHlink="folHlink"/>
+  <p:notesStyle>
+    <a:lvl1pPr marL="0" algn="l" defTabSz="457200" rtl="0" eaLnBrk="1" latinLnBrk="0" hangingPunct="1">
+      <a:defRPr sz="1200" kern="1200">
+        <a:solidFill>
+          <a:schemeClr val="tx1"/>
+        </a:solidFill>
+        <a:latin typeface="+mn-lt"/>
+        <a:ea typeface="+mn-ea"/>
+        <a:cs typeface="+mn-cs"/>
+      </a:defRPr>
+    </a:lvl1pPr>
+    <a:lvl2pPr marL="457200" algn="l" defTabSz="457200" rtl="0" eaLnBrk="1" latinLnBrk="0" hangingPunct="1">
+      <a:defRPr sz="1200" kern="1200">
+        <a:solidFill>
+          <a:schemeClr val="tx1"/>
+        </a:solidFill>
+        <a:latin typeface="+mn-lt"/>
+        <a:ea typeface="+mn-ea"/>
+        <a:cs typeface="+mn-cs"/>
+      </a:defRPr>
+    </a:lvl2pPr>
+    <a:lvl3pPr marL="914400" algn="l" defTabSz="457200" rtl="0" eaLnBrk="1" latinLnBrk="0" hangingPunct="1">
+      <a:defRPr sz="1200" kern="1200">
+        <a:solidFill>
+          <a:schemeClr val="tx1"/>
+        </a:solidFill>
+        <a:latin typeface="+mn-lt"/>
+        <a:ea typeface="+mn-ea"/>
+        <a:cs typeface="+mn-cs"/>
+      </a:defRPr>
+    </a:lvl3pPr>
+    <a:lvl4pPr marL="1371600" algn="l" defTabSz="457200" rtl="0" eaLnBrk="1" latinLnBrk="0" hangingPunct="1">
+      <a:defRPr sz="1200" kern="1200">
+        <a:solidFill>
+          <a:schemeClr val="tx1"/>
+        </a:solidFill>
+        <a:latin typeface="+mn-lt"/>
+        <a:ea typeface="+mn-ea"/>
+        <a:cs typeface="+mn-cs"/>
+      </a:defRPr>
+    </a:lvl4pPr>
+    <a:lvl5pPr marL="1828800" algn="l" defTabSz="457200" rtl="0" eaLnBrk="1" latinLnBrk="0" hangingPunct="1">
+      <a:defRPr sz="1200" kern="1200">
+        <a:solidFill>
+          <a:schemeClr val="tx1"/>
+        </a:solidFill>
+        <a:latin typeface="+mn-lt"/>
+        <a:ea typeface="+mn-ea"/>
+        <a:cs typeface="+mn-cs"/>
+      </a:defRPr>
+    </a:lvl5pPr>
+    <a:lvl6pPr marL="2286000" algn="l" defTabSz="457200" rtl="0" eaLnBrk="1" latinLnBrk="0" hangingPunct="1">
+      <a:defRPr sz="1200" kern="1200">
+        <a:solidFill>
+          <a:schemeClr val="tx1"/>
+        </a:solidFill>
+        <a:latin typeface="+mn-lt"/>
+        <a:ea typeface="+mn-ea"/>
+        <a:cs typeface="+mn-cs"/>
+      </a:defRPr>
+    </a:lvl6pPr>
+    <a:lvl7pPr marL="2743200" algn="l" defTabSz="457200" rtl="0" eaLnBrk="1" latinLnBrk="0" hangingPunct="1">
+      <a:defRPr sz="1200" kern="1200">
+        <a:solidFill>
+          <a:schemeClr val="tx1"/>
+        </a:solidFill>
+        <a:latin typeface="+mn-lt"/>
+        <a:ea typeface="+mn-ea"/>
+        <a:cs typeface="+mn-cs"/>
+      </a:defRPr>
+    </a:lvl7pPr>
+    <a:lvl8pPr marL="3200400" algn="l" defTabSz="457200" rtl="0" eaLnBrk="1" latinLnBrk="0" hangingPunct="1">
+      <a:defRPr sz="1200" kern="1200">
+        <a:solidFill>
+          <a:schemeClr val="tx1"/>
+        </a:solidFill>
+        <a:latin typeface="+mn-lt"/>
+        <a:ea typeface="+mn-ea"/>
+        <a:cs typeface="+mn-cs"/>
+      </a:defRPr>
+    </a:lvl8pPr>
+    <a:lvl9pPr marL="3657600" algn="l" defTabSz="457200" rtl="0" eaLnBrk="1" latinLnBrk="0" hangingPunct="1">
+      <a:defRPr sz="1200" kern="1200">
+        <a:solidFill>
+          <a:schemeClr val="tx1"/>
+        </a:solidFill>
+        <a:latin typeface="+mn-lt"/>
+        <a:ea typeface="+mn-ea"/>
+        <a:cs typeface="+mn-cs"/>
+      </a:defRPr>
+    </a:lvl9pPr>
+  </p:notesStyle>
+</p:notesMaster>
+</file>
+
+<file path=ppt/notesSlides/notesSlide1.xml><?xml version="1.0" encoding="utf-8"?>
+<p:notes xmlns:a="http://schemas.openxmlformats.org/drawingml/2006/main" xmlns:p="http://schemas.openxmlformats.org/presentationml/2006/main" xmlns:r="http://schemas.openxmlformats.org/officeDocument/2006/relationships">
+  <p:cSld>
+    <p:spTree>
+      <p:nvGrpSpPr>
+        <p:cNvPr id="1" name=""/>
+        <p:cNvGrpSpPr/>
+        <p:nvPr/>
+      </p:nvGrpSpPr>
+      <p:grpSpPr>
+        <a:xfrm>
+          <a:off x="0" y="0"/>
+          <a:ext cx="0" cy="0"/>
+          <a:chOff x="0" y="0"/>
+          <a:chExt cx="0" cy="0"/>
+        </a:xfrm>
+      </p:grpSpPr>
+      <p:sp>
+        <p:nvSpPr>
+          <p:cNvPr id="2" name="Slide Image Placeholder 1"/>
+          <p:cNvSpPr>
+            <a:spLocks noGrp="1"/>
+          </p:cNvSpPr>
+          <p:nvPr>
+            <p:ph type="sldImg" idx="2"/>
+          </p:nvPr>
+        </p:nvSpPr>
+        <p:spPr/>
+      </p:sp>
+      <p:sp>
+        <p:nvSpPr>
+          <p:cNvPr id="3" name="Notes Placeholder 2"/>
+          <p:cNvSpPr>
+            <a:spLocks noGrp="1"/>
+          </p:cNvSpPr>
+          <p:nvPr>
+            <p:ph type="body" idx="3" sz="quarter"/>
+          </p:nvPr>
+        </p:nvSpPr>
+        <p:spPr/>
+        <p:txBody>
+          <a:bodyPr/>
+          <a:lstStyle/>
+          <a:p>
+            <a:r>
+              <a:t>Un sistema puede ser rapido y no escalar, y puede escalar y ser lento.</a:t>
+            </a:r>
+          </a:p>
+          <a:p/>
+          <a:p>
+            <a:r>
+              <a:t>Por eso el orden del temario no es casual: primero se mide y se identifica el cuello de botella, y solo despues se decide como agregar capacidad.</a:t>
+            </a:r>
+          </a:p>
+        </p:txBody>
+      </p:sp>
+      <p:sp>
+        <p:nvSpPr>
+          <p:cNvPr id="4" name="Slide Number Placeholder 3"/>
+          <p:cNvSpPr>
+            <a:spLocks noGrp="1"/>
+          </p:cNvSpPr>
+          <p:nvPr>
+            <p:ph type="sldNum" idx="5" sz="quarter"/>
+          </p:nvPr>
+        </p:nvSpPr>
+        <p:spPr/>
+      </p:sp>
+    </p:spTree>
+  </p:cSld>
+  <p:clrMapOvr>
+    <a:masterClrMapping/>
+  </p:clrMapOvr>
+</p:notes>
+</file>
+
+<file path=ppt/notesSlides/notesSlide2.xml><?xml version="1.0" encoding="utf-8"?>
+<p:notes xmlns:a="http://schemas.openxmlformats.org/drawingml/2006/main" xmlns:p="http://schemas.openxmlformats.org/presentationml/2006/main" xmlns:r="http://schemas.openxmlformats.org/officeDocument/2006/relationships">
+  <p:cSld>
+    <p:spTree>
+      <p:nvGrpSpPr>
+        <p:cNvPr id="1" name=""/>
+        <p:cNvGrpSpPr/>
+        <p:nvPr/>
+      </p:nvGrpSpPr>
+      <p:grpSpPr>
+        <a:xfrm>
+          <a:off x="0" y="0"/>
+          <a:ext cx="0" cy="0"/>
+          <a:chOff x="0" y="0"/>
+          <a:chExt cx="0" cy="0"/>
+        </a:xfrm>
+      </p:grpSpPr>
+      <p:sp>
+        <p:nvSpPr>
+          <p:cNvPr id="2" name="Slide Image Placeholder 1"/>
+          <p:cNvSpPr>
+            <a:spLocks noGrp="1"/>
+          </p:cNvSpPr>
+          <p:nvPr>
+            <p:ph type="sldImg" idx="2"/>
+          </p:nvPr>
+        </p:nvSpPr>
+        <p:spPr/>
+      </p:sp>
+      <p:sp>
+        <p:nvSpPr>
+          <p:cNvPr id="3" name="Notes Placeholder 2"/>
+          <p:cNvSpPr>
+            <a:spLocks noGrp="1"/>
+          </p:cNvSpPr>
+          <p:nvPr>
+            <p:ph type="body" idx="3" sz="quarter"/>
+          </p:nvPr>
+        </p:nvSpPr>
+        <p:spPr/>
+        <p:txBody>
+          <a:bodyPr/>
+          <a:lstStyle/>
+          <a:p>
+            <a:r>
+              <a:t>Ademas una sola maquina grande sigue siendo un unico punto de falla.</a:t>
+            </a:r>
+          </a:p>
+          <a:p/>
+          <a:p>
+            <a:r>
+              <a:t>No tiene techo cercano, mejora la disponibilidad porque si una instancia muere las otras siguen atendiendo, y permite crecer en pasos pequenos y baratos.</a:t>
+            </a:r>
+          </a:p>
+        </p:txBody>
+      </p:sp>
+      <p:sp>
+        <p:nvSpPr>
+          <p:cNvPr id="4" name="Slide Number Placeholder 3"/>
+          <p:cNvSpPr>
+            <a:spLocks noGrp="1"/>
+          </p:cNvSpPr>
+          <p:nvPr>
+            <p:ph type="sldNum" idx="5" sz="quarter"/>
+          </p:nvPr>
+        </p:nvSpPr>
+        <p:spPr/>
+      </p:sp>
+    </p:spTree>
+  </p:cSld>
+  <p:clrMapOvr>
+    <a:masterClrMapping/>
+  </p:clrMapOvr>
+</p:notes>
+</file>
+
+<file path=ppt/notesSlides/notesSlide3.xml><?xml version="1.0" encoding="utf-8"?>
+<p:notes xmlns:a="http://schemas.openxmlformats.org/drawingml/2006/main" xmlns:p="http://schemas.openxmlformats.org/presentationml/2006/main" xmlns:r="http://schemas.openxmlformats.org/officeDocument/2006/relationships">
+  <p:cSld>
+    <p:spTree>
+      <p:nvGrpSpPr>
+        <p:cNvPr id="1" name=""/>
+        <p:cNvGrpSpPr/>
+        <p:nvPr/>
+      </p:nvGrpSpPr>
+      <p:grpSpPr>
+        <a:xfrm>
+          <a:off x="0" y="0"/>
+          <a:ext cx="0" cy="0"/>
+          <a:chOff x="0" y="0"/>
+          <a:chExt cx="0" cy="0"/>
+        </a:xfrm>
+      </p:grpSpPr>
+      <p:sp>
+        <p:nvSpPr>
+          <p:cNvPr id="2" name="Slide Image Placeholder 1"/>
+          <p:cNvSpPr>
+            <a:spLocks noGrp="1"/>
+          </p:cNvSpPr>
+          <p:nvPr>
+            <p:ph type="sldImg" idx="2"/>
+          </p:nvPr>
+        </p:nvSpPr>
+        <p:spPr/>
+      </p:sp>
+      <p:sp>
+        <p:nvSpPr>
+          <p:cNvPr id="3" name="Notes Placeholder 2"/>
+          <p:cNvSpPr>
+            <a:spLocks noGrp="1"/>
+          </p:cNvSpPr>
+          <p:nvPr>
+            <p:ph type="body" idx="3" sz="quarter"/>
+          </p:nvPr>
+        </p:nvSpPr>
+        <p:spPr/>
+        <p:txBody>
+          <a:bodyPr/>
+          <a:lstStyle/>
+          <a:p>
+            <a:r>
+              <a:t>Un servicio sin estado no guarda en la memoria de su propio proceso ninguna informacion que necesite en la siguiente peticion; todo lo que deba persistir vive en un almacen compartido, sea la base de datos, una cache comun o el token que trae el cliente.</a:t>
+            </a:r>
+          </a:p>
+        </p:txBody>
+      </p:sp>
+      <p:sp>
+        <p:nvSpPr>
+          <p:cNvPr id="4" name="Slide Number Placeholder 3"/>
+          <p:cNvSpPr>
+            <a:spLocks noGrp="1"/>
+          </p:cNvSpPr>
+          <p:nvPr>
+            <p:ph type="sldNum" idx="5" sz="quarter"/>
+          </p:nvPr>
+        </p:nvSpPr>
+        <p:spPr/>
+      </p:sp>
+    </p:spTree>
+  </p:cSld>
+  <p:clrMapOvr>
+    <a:masterClrMapping/>
+  </p:clrMapOvr>
+</p:notes>
+</file>
+
+<file path=ppt/notesSlides/notesSlide4.xml><?xml version="1.0" encoding="utf-8"?>
+<p:notes xmlns:a="http://schemas.openxmlformats.org/drawingml/2006/main" xmlns:p="http://schemas.openxmlformats.org/presentationml/2006/main" xmlns:r="http://schemas.openxmlformats.org/officeDocument/2006/relationships">
+  <p:cSld>
+    <p:spTree>
+      <p:nvGrpSpPr>
+        <p:cNvPr id="1" name=""/>
+        <p:cNvGrpSpPr/>
+        <p:nvPr/>
+      </p:nvGrpSpPr>
+      <p:grpSpPr>
+        <a:xfrm>
+          <a:off x="0" y="0"/>
+          <a:ext cx="0" cy="0"/>
+          <a:chOff x="0" y="0"/>
+          <a:chExt cx="0" cy="0"/>
+        </a:xfrm>
+      </p:grpSpPr>
+      <p:sp>
+        <p:nvSpPr>
+          <p:cNvPr id="2" name="Slide Image Placeholder 1"/>
+          <p:cNvSpPr>
+            <a:spLocks noGrp="1"/>
+          </p:cNvSpPr>
+          <p:nvPr>
+            <p:ph type="sldImg" idx="2"/>
+          </p:nvPr>
+        </p:nvSpPr>
+        <p:spPr/>
+      </p:sp>
+      <p:sp>
+        <p:nvSpPr>
+          <p:cNvPr id="3" name="Notes Placeholder 2"/>
+          <p:cNvSpPr>
+            <a:spLocks noGrp="1"/>
+          </p:cNvSpPr>
+          <p:nvPr>
+            <p:ph type="body" idx="3" sz="quarter"/>
+          </p:nvPr>
+        </p:nvSpPr>
+        <p:spPr/>
+        <p:txBody>
+          <a:bodyPr/>
+          <a:lstStyle/>
+          <a:p>
+            <a:r>
+              <a:t>Cada numero se justifica.</a:t>
+            </a:r>
+          </a:p>
+        </p:txBody>
+      </p:sp>
+      <p:sp>
+        <p:nvSpPr>
+          <p:cNvPr id="4" name="Slide Number Placeholder 3"/>
+          <p:cNvSpPr>
+            <a:spLocks noGrp="1"/>
+          </p:cNvSpPr>
+          <p:nvPr>
+            <p:ph type="sldNum" idx="5" sz="quarter"/>
+          </p:nvPr>
+        </p:nvSpPr>
+        <p:spPr/>
+      </p:sp>
+    </p:spTree>
+  </p:cSld>
+  <p:clrMapOvr>
+    <a:masterClrMapping/>
+  </p:clrMapOvr>
+</p:notes>
+</file>
+
+<file path=ppt/notesSlides/notesSlide5.xml><?xml version="1.0" encoding="utf-8"?>
+<p:notes xmlns:a="http://schemas.openxmlformats.org/drawingml/2006/main" xmlns:p="http://schemas.openxmlformats.org/presentationml/2006/main" xmlns:r="http://schemas.openxmlformats.org/officeDocument/2006/relationships">
+  <p:cSld>
+    <p:spTree>
+      <p:nvGrpSpPr>
+        <p:cNvPr id="1" name=""/>
+        <p:cNvGrpSpPr/>
+        <p:nvPr/>
+      </p:nvGrpSpPr>
+      <p:grpSpPr>
+        <a:xfrm>
+          <a:off x="0" y="0"/>
+          <a:ext cx="0" cy="0"/>
+          <a:chOff x="0" y="0"/>
+          <a:chExt cx="0" cy="0"/>
+        </a:xfrm>
+      </p:grpSpPr>
+      <p:sp>
+        <p:nvSpPr>
+          <p:cNvPr id="2" name="Slide Image Placeholder 1"/>
+          <p:cNvSpPr>
+            <a:spLocks noGrp="1"/>
+          </p:cNvSpPr>
+          <p:nvPr>
+            <p:ph type="sldImg" idx="2"/>
+          </p:nvPr>
+        </p:nvSpPr>
+        <p:spPr/>
+      </p:sp>
+      <p:sp>
+        <p:nvSpPr>
+          <p:cNvPr id="3" name="Notes Placeholder 2"/>
+          <p:cNvSpPr>
+            <a:spLocks noGrp="1"/>
+          </p:cNvSpPr>
+          <p:nvPr>
+            <p:ph type="body" idx="3" sz="quarter"/>
+          </p:nvPr>
+        </p:nvSpPr>
+        <p:spPr/>
+        <p:txBody>
+          <a:bodyPr/>
+          <a:lstStyle/>
+          <a:p>
+            <a:r>
+              <a:t>Regla de bolsillo: la metrica correcta es la que mide el recurso que se agota primero, es decir el cuello de botella identificado en la clase anterior.</a:t>
+            </a:r>
+          </a:p>
+          <a:p/>
+          <a:p>
+            <a:r>
+              <a:t>De ahi que el entregable de hoy no se pueda hacer bien si el de la Clase 12 quedo vacio.</a:t>
+            </a:r>
+          </a:p>
+        </p:txBody>
+      </p:sp>
+      <p:sp>
+        <p:nvSpPr>
+          <p:cNvPr id="4" name="Slide Number Placeholder 3"/>
+          <p:cNvSpPr>
+            <a:spLocks noGrp="1"/>
+          </p:cNvSpPr>
+          <p:nvPr>
+            <p:ph type="sldNum" idx="5" sz="quarter"/>
+          </p:nvPr>
+        </p:nvSpPr>
+        <p:spPr/>
+      </p:sp>
+    </p:spTree>
+  </p:cSld>
+  <p:clrMapOvr>
+    <a:masterClrMapping/>
+  </p:clrMapOvr>
+</p:notes>
+</file>
+
+<file path=ppt/notesSlides/notesSlide6.xml><?xml version="1.0" encoding="utf-8"?>
+<p:notes xmlns:a="http://schemas.openxmlformats.org/drawingml/2006/main" xmlns:p="http://schemas.openxmlformats.org/presentationml/2006/main" xmlns:r="http://schemas.openxmlformats.org/officeDocument/2006/relationships">
+  <p:cSld>
+    <p:spTree>
+      <p:nvGrpSpPr>
+        <p:cNvPr id="1" name=""/>
+        <p:cNvGrpSpPr/>
+        <p:nvPr/>
+      </p:nvGrpSpPr>
+      <p:grpSpPr>
+        <a:xfrm>
+          <a:off x="0" y="0"/>
+          <a:ext cx="0" cy="0"/>
+          <a:chOff x="0" y="0"/>
+          <a:chExt cx="0" cy="0"/>
+        </a:xfrm>
+      </p:grpSpPr>
+      <p:sp>
+        <p:nvSpPr>
+          <p:cNvPr id="2" name="Slide Image Placeholder 1"/>
+          <p:cNvSpPr>
+            <a:spLocks noGrp="1"/>
+          </p:cNvSpPr>
+          <p:nvPr>
+            <p:ph type="sldImg" idx="2"/>
+          </p:nvPr>
+        </p:nvSpPr>
+        <p:spPr/>
+      </p:sp>
+      <p:sp>
+        <p:nvSpPr>
+          <p:cNvPr id="3" name="Notes Placeholder 2"/>
+          <p:cNvSpPr>
+            <a:spLocks noGrp="1"/>
+          </p:cNvSpPr>
+          <p:nvPr>
+            <p:ph type="body" idx="3" sz="quarter"/>
+          </p:nvPr>
+        </p:nvSpPr>
+        <p:spPr/>
+        <p:txBody>
+          <a:bodyPr/>
+          <a:lstStyle/>
+          <a:p>
+            <a:r>
+              <a:t>Lo que NO escala es la mitad del entregable y separa una sustentacion seria de una lista de deseos.</a:t>
+            </a:r>
+          </a:p>
+          <a:p/>
+          <a:p>
+            <a:r>
+              <a:t>Multiplicar la capa sin verificar el limite del recurso compartido no mejora el sistema, lo rompe.</a:t>
+            </a:r>
+          </a:p>
+        </p:txBody>
+      </p:sp>
+      <p:sp>
+        <p:nvSpPr>
+          <p:cNvPr id="4" name="Slide Number Placeholder 3"/>
+          <p:cNvSpPr>
+            <a:spLocks noGrp="1"/>
+          </p:cNvSpPr>
+          <p:nvPr>
+            <p:ph type="sldNum" idx="5" sz="quarter"/>
+          </p:nvPr>
+        </p:nvSpPr>
+        <p:spPr/>
+      </p:sp>
+    </p:spTree>
+  </p:cSld>
+  <p:clrMapOvr>
+    <a:masterClrMapping/>
+  </p:clrMapOvr>
+</p:notes>
+</file>
+
+<file path=ppt/notesSlides/notesSlide7.xml><?xml version="1.0" encoding="utf-8"?>
+<p:notes xmlns:a="http://schemas.openxmlformats.org/drawingml/2006/main" xmlns:p="http://schemas.openxmlformats.org/presentationml/2006/main" xmlns:r="http://schemas.openxmlformats.org/officeDocument/2006/relationships">
+  <p:cSld>
+    <p:spTree>
+      <p:nvGrpSpPr>
+        <p:cNvPr id="1" name=""/>
+        <p:cNvGrpSpPr/>
+        <p:nvPr/>
+      </p:nvGrpSpPr>
+      <p:grpSpPr>
+        <a:xfrm>
+          <a:off x="0" y="0"/>
+          <a:ext cx="0" cy="0"/>
+          <a:chOff x="0" y="0"/>
+          <a:chExt cx="0" cy="0"/>
+        </a:xfrm>
+      </p:grpSpPr>
+      <p:sp>
+        <p:nvSpPr>
+          <p:cNvPr id="2" name="Slide Image Placeholder 1"/>
+          <p:cNvSpPr>
+            <a:spLocks noGrp="1"/>
+          </p:cNvSpPr>
+          <p:nvPr>
+            <p:ph type="sldImg" idx="2"/>
+          </p:nvPr>
+        </p:nvSpPr>
+        <p:spPr/>
+      </p:sp>
+      <p:sp>
+        <p:nvSpPr>
+          <p:cNvPr id="3" name="Notes Placeholder 2"/>
+          <p:cNvSpPr>
+            <a:spLocks noGrp="1"/>
+          </p:cNvSpPr>
+          <p:nvPr>
+            <p:ph type="body" idx="3" sz="quarter"/>
+          </p:nvPr>
+        </p:nvSpPr>
+        <p:spPr/>
+        <p:txBody>
+          <a:bodyPr/>
+          <a:lstStyle/>
+          <a:p>
+            <a:r>
+              <a:t>Tres preguntas aparecen sin falta en una clase autonoma como esta y conviene responderlas por escrito en el foro.</a:t>
+            </a:r>
+          </a:p>
+        </p:txBody>
+      </p:sp>
+      <p:sp>
+        <p:nvSpPr>
+          <p:cNvPr id="4" name="Slide Number Placeholder 3"/>
+          <p:cNvSpPr>
+            <a:spLocks noGrp="1"/>
+          </p:cNvSpPr>
+          <p:nvPr>
+            <p:ph type="sldNum" idx="5" sz="quarter"/>
+          </p:nvPr>
+        </p:nvSpPr>
+        <p:spPr/>
+      </p:sp>
+    </p:spTree>
+  </p:cSld>
+  <p:clrMapOvr>
+    <a:masterClrMapping/>
+  </p:clrMapOvr>
+</p:notes>
 </file>
 
 <file path=ppt/slideLayouts/slideLayout1.xml><?xml version="1.0" encoding="utf-8"?>
@@ -3347,13 +4206,22 @@
               </a:spcAft>
             </a:pPr>
             <a:r>
+              <a:rPr sz="1500" b="0" i="0">
+                <a:solidFill>
+                  <a:srgbClr val="333333"/>
+                </a:solidFill>
+                <a:latin typeface="Calibri"/>
+              </a:rPr>
+              <a:t>Bloque </a:t>
+            </a:r>
+            <a:r>
               <a:rPr sz="1500" b="1" i="0">
                 <a:solidFill>
                   <a:srgbClr val="333333"/>
                 </a:solidFill>
                 <a:latin typeface="Calibri"/>
               </a:rPr>
-              <a:t>Hoy avanzamos el PI en:</a:t>
+              <a:t>120 min</a:t>
             </a:r>
             <a:r>
               <a:rPr sz="1500" b="0" i="0">
@@ -3362,7 +4230,25 @@
                 </a:solidFill>
                 <a:latin typeface="Calibri"/>
               </a:rPr>
-              <a:t> Documentar política de autoescalado conceptual de CloudLite</a:t>
+              <a:t> · sesión </a:t>
+            </a:r>
+            <a:r>
+              <a:rPr sz="1500" b="1" i="0">
+                <a:solidFill>
+                  <a:srgbClr val="333333"/>
+                </a:solidFill>
+                <a:latin typeface="Calibri"/>
+              </a:rPr>
+              <a:t>virtual síncrona</a:t>
+            </a:r>
+            <a:r>
+              <a:rPr sz="1500" b="0" i="0">
+                <a:solidFill>
+                  <a:srgbClr val="333333"/>
+                </a:solidFill>
+                <a:latin typeface="Calibri"/>
+              </a:rPr>
+              <a:t> por Google Meet.</a:t>
             </a:r>
           </a:p>
           <a:p>
@@ -3378,41 +4264,7 @@
                 </a:solidFill>
                 <a:latin typeface="Calibri"/>
               </a:rPr>
-              <a:t>Bloque </a:t>
-            </a:r>
-            <a:r>
-              <a:rPr sz="1500" b="1" i="0">
-                <a:solidFill>
-                  <a:srgbClr val="333333"/>
-                </a:solidFill>
-                <a:latin typeface="Calibri"/>
-              </a:rPr>
-              <a:t>120 min</a:t>
-            </a:r>
-            <a:r>
-              <a:rPr sz="1500" b="0" i="0">
-                <a:solidFill>
-                  <a:srgbClr val="333333"/>
-                </a:solidFill>
-                <a:latin typeface="Calibri"/>
-              </a:rPr>
-              <a:t> · Teoría breve · Taller PI · cierre.</a:t>
-            </a:r>
-          </a:p>
-          <a:p>
-            <a:pPr>
-              <a:spcAft>
-                <a:spcPts val="800"/>
-              </a:spcAft>
-            </a:pPr>
-            <a:r>
-              <a:rPr sz="1500" b="0" i="0">
-                <a:solidFill>
-                  <a:srgbClr val="333333"/>
-                </a:solidFill>
-                <a:latin typeface="Calibri"/>
-              </a:rPr>
-              <a:t>Herramientas gratis + navegador · sin AWS/GCP/Oracle Cloud.</a:t>
+              <a:t>Conceptos del tema, ejemplos resueltos sobre CloudLite y cierre conceptual.</a:t>
             </a:r>
           </a:p>
         </p:txBody>
@@ -6314,7 +7166,7 @@
                 </a:solidFill>
                 <a:latin typeface="Calibri"/>
               </a:rPr>
-              <a:t> Encuadre: hoy avanzamos el PI en… + entregable concreto.</a:t>
+              <a:t> Encuadre del tema y objetivos de la clase.</a:t>
             </a:r>
           </a:p>
           <a:p>
@@ -6330,7 +7182,7 @@
                 </a:solidFill>
                 <a:latin typeface="Calibri"/>
               </a:rPr>
-              <a:t>10–40</a:t>
+              <a:t>10–70</a:t>
             </a:r>
             <a:r>
               <a:rPr sz="2000" b="0" i="0">
@@ -6339,7 +7191,7 @@
                 </a:solidFill>
                 <a:latin typeface="Calibri"/>
               </a:rPr>
-              <a:t> Teoría Core breve (solo lo necesario para el taller PI).</a:t>
+              <a:t> Conceptos del tema, uno por lámina, con ejemplos sobre CloudLite.</a:t>
             </a:r>
           </a:p>
           <a:p>
@@ -6364,7 +7216,7 @@
                 </a:solidFill>
                 <a:latin typeface="Calibri"/>
               </a:rPr>
-              <a:t>40–100</a:t>
+              <a:t>70–100</a:t>
             </a:r>
             <a:r>
               <a:rPr sz="2000" b="0" i="0">
@@ -6373,7 +7225,7 @@
                 </a:solidFill>
                 <a:latin typeface="Calibri"/>
               </a:rPr>
-              <a:t> Trabajo guiado del PI (demo en vivo + avance individual).</a:t>
+              <a:t> Ejemplos resueltos y demo del docente sobre el tema.</a:t>
             </a:r>
           </a:p>
           <a:p>
@@ -6398,7 +7250,7 @@
                 </a:solidFill>
                 <a:latin typeface="Calibri"/>
               </a:rPr>
-              <a:t> Revisión de evidencias del PI.</a:t>
+              <a:t> Práctica (opcional, guía en la carpeta de la clase).</a:t>
             </a:r>
           </a:p>
           <a:p>
@@ -6423,7 +7275,7 @@
                 </a:solidFill>
                 <a:latin typeface="Calibri"/>
               </a:rPr>
-              <a:t> Cierre: criterio de éxito + plazo en la fecha que indique el docente.</a:t>
+              <a:t> Preguntas y cierre conceptual.</a:t>
             </a:r>
           </a:p>
         </p:txBody>
@@ -8289,13 +9141,13 @@
         <p:spPr>
           <a:xfrm>
             <a:off x="0" y="0"/>
-            <a:ext cx="12191695" cy="1170432"/>
+            <a:ext cx="12191695" cy="164592"/>
           </a:xfrm>
           <a:prstGeom prst="rect">
             <a:avLst/>
           </a:prstGeom>
           <a:solidFill>
-            <a:srgbClr val="095292"/>
+            <a:srgbClr val="269CCB"/>
           </a:solidFill>
           <a:ln>
             <a:noFill/>
@@ -8323,251 +9175,9 @@
           </a:p>
         </p:txBody>
       </p:sp>
-      <p:sp>
-        <p:nvSpPr>
-          <p:cNvPr id="3" name="Rectangle 2"/>
-          <p:cNvSpPr/>
-          <p:nvPr/>
-        </p:nvSpPr>
-        <p:spPr>
-          <a:xfrm>
-            <a:off x="0" y="1170432"/>
-            <a:ext cx="12191695" cy="41148"/>
-          </a:xfrm>
-          <a:prstGeom prst="rect">
-            <a:avLst/>
-          </a:prstGeom>
-          <a:solidFill>
-            <a:srgbClr val="FFD000"/>
-          </a:solidFill>
-          <a:ln>
-            <a:noFill/>
-          </a:ln>
-        </p:spPr>
-        <p:style>
-          <a:lnRef idx="1">
-            <a:schemeClr val="accent1"/>
-          </a:lnRef>
-          <a:fillRef idx="3">
-            <a:schemeClr val="accent1"/>
-          </a:fillRef>
-          <a:effectRef idx="2">
-            <a:schemeClr val="accent1"/>
-          </a:effectRef>
-          <a:fontRef idx="minor">
-            <a:schemeClr val="lt1"/>
-          </a:fontRef>
-        </p:style>
-        <p:txBody>
-          <a:bodyPr rtlCol="0" anchor="ctr"/>
-          <a:lstStyle/>
-          <a:p>
-            <a:pPr algn="ctr"/>
-          </a:p>
-        </p:txBody>
-      </p:sp>
-      <p:sp>
-        <p:nvSpPr>
-          <p:cNvPr id="4" name="TextBox 3"/>
-          <p:cNvSpPr txBox="1"/>
-          <p:nvPr/>
-        </p:nvSpPr>
-        <p:spPr>
-          <a:xfrm>
-            <a:off x="457200" y="164592"/>
-            <a:ext cx="11277295" cy="384048"/>
-          </a:xfrm>
-          <a:prstGeom prst="rect">
-            <a:avLst/>
-          </a:prstGeom>
-          <a:noFill/>
-        </p:spPr>
-        <p:txBody>
-          <a:bodyPr wrap="square">
-            <a:spAutoFit/>
-          </a:bodyPr>
-          <a:lstStyle/>
-          <a:p>
-            <a:r>
-              <a:rPr sz="2600" b="1" i="0">
-                <a:solidFill>
-                  <a:srgbClr val="FFFFFF"/>
-                </a:solidFill>
-                <a:latin typeface="Calibri"/>
-              </a:rPr>
-              <a:t>Herramientas de hoy</a:t>
-            </a:r>
-          </a:p>
-        </p:txBody>
-      </p:sp>
-      <p:sp>
-        <p:nvSpPr>
-          <p:cNvPr id="5" name="TextBox 4"/>
-          <p:cNvSpPr txBox="1"/>
-          <p:nvPr/>
-        </p:nvSpPr>
-        <p:spPr>
-          <a:xfrm>
-            <a:off x="457200" y="566928"/>
-            <a:ext cx="11277295" cy="411480"/>
-          </a:xfrm>
-          <a:prstGeom prst="rect">
-            <a:avLst/>
-          </a:prstGeom>
-          <a:noFill/>
-        </p:spPr>
-        <p:txBody>
-          <a:bodyPr wrap="square">
-            <a:spAutoFit/>
-          </a:bodyPr>
-          <a:lstStyle/>
-          <a:p>
-            <a:r>
-              <a:rPr sz="1400" b="0" i="0">
-                <a:solidFill>
-                  <a:srgbClr val="B8D8EE"/>
-                </a:solidFill>
-                <a:latin typeface="Calibri"/>
-              </a:rPr>
-              <a:t>Gratis · navegador o free tier · sin cuenta de pago</a:t>
-            </a:r>
-          </a:p>
-        </p:txBody>
-      </p:sp>
-      <p:sp>
-        <p:nvSpPr>
-          <p:cNvPr id="6" name="Rounded Rectangle 5"/>
-          <p:cNvSpPr/>
-          <p:nvPr/>
-        </p:nvSpPr>
-        <p:spPr>
-          <a:xfrm>
-            <a:off x="457200" y="1591056"/>
-            <a:ext cx="3624986" cy="2299716"/>
-          </a:xfrm>
-          <a:prstGeom prst="roundRect">
-            <a:avLst>
-              <a:gd name="adj" fmla="val 12000"/>
-            </a:avLst>
-          </a:prstGeom>
-          <a:solidFill>
-            <a:srgbClr val="F2F2F2"/>
-          </a:solidFill>
-          <a:ln>
-            <a:noFill/>
-          </a:ln>
-        </p:spPr>
-        <p:style>
-          <a:lnRef idx="1">
-            <a:schemeClr val="accent1"/>
-          </a:lnRef>
-          <a:fillRef idx="3">
-            <a:schemeClr val="accent1"/>
-          </a:fillRef>
-          <a:effectRef idx="2">
-            <a:schemeClr val="accent1"/>
-          </a:effectRef>
-          <a:fontRef idx="minor">
-            <a:schemeClr val="lt1"/>
-          </a:fontRef>
-        </p:style>
-        <p:txBody>
-          <a:bodyPr rtlCol="0" anchor="ctr"/>
-          <a:lstStyle/>
-          <a:p>
-            <a:pPr algn="ctr"/>
-          </a:p>
-        </p:txBody>
-      </p:sp>
-      <p:sp>
-        <p:nvSpPr>
-          <p:cNvPr id="7" name="Rectangle 6"/>
-          <p:cNvSpPr/>
-          <p:nvPr/>
-        </p:nvSpPr>
-        <p:spPr>
-          <a:xfrm>
-            <a:off x="457200" y="1591056"/>
-            <a:ext cx="3624986" cy="64008"/>
-          </a:xfrm>
-          <a:prstGeom prst="rect">
-            <a:avLst/>
-          </a:prstGeom>
-          <a:solidFill>
-            <a:srgbClr val="095292"/>
-          </a:solidFill>
-          <a:ln>
-            <a:noFill/>
-          </a:ln>
-        </p:spPr>
-        <p:style>
-          <a:lnRef idx="1">
-            <a:schemeClr val="accent1"/>
-          </a:lnRef>
-          <a:fillRef idx="3">
-            <a:schemeClr val="accent1"/>
-          </a:fillRef>
-          <a:effectRef idx="2">
-            <a:schemeClr val="accent1"/>
-          </a:effectRef>
-          <a:fontRef idx="minor">
-            <a:schemeClr val="lt1"/>
-          </a:fontRef>
-        </p:style>
-        <p:txBody>
-          <a:bodyPr rtlCol="0" anchor="ctr"/>
-          <a:lstStyle/>
-          <a:p>
-            <a:pPr algn="ctr"/>
-          </a:p>
-        </p:txBody>
-      </p:sp>
-      <p:sp>
-        <p:nvSpPr>
-          <p:cNvPr id="8" name="Rectangle 7"/>
-          <p:cNvSpPr/>
-          <p:nvPr/>
-        </p:nvSpPr>
-        <p:spPr>
-          <a:xfrm>
-            <a:off x="457200" y="1655064"/>
-            <a:ext cx="3624986" cy="27432"/>
-          </a:xfrm>
-          <a:prstGeom prst="rect">
-            <a:avLst/>
-          </a:prstGeom>
-          <a:solidFill>
-            <a:srgbClr val="FFD000"/>
-          </a:solidFill>
-          <a:ln>
-            <a:noFill/>
-          </a:ln>
-        </p:spPr>
-        <p:style>
-          <a:lnRef idx="1">
-            <a:schemeClr val="accent1"/>
-          </a:lnRef>
-          <a:fillRef idx="3">
-            <a:schemeClr val="accent1"/>
-          </a:fillRef>
-          <a:effectRef idx="2">
-            <a:schemeClr val="accent1"/>
-          </a:effectRef>
-          <a:fontRef idx="minor">
-            <a:schemeClr val="lt1"/>
-          </a:fontRef>
-        </p:style>
-        <p:txBody>
-          <a:bodyPr rtlCol="0" anchor="ctr"/>
-          <a:lstStyle/>
-          <a:p>
-            <a:pPr algn="ctr"/>
-          </a:p>
-        </p:txBody>
-      </p:sp>
       <p:pic>
         <p:nvPicPr>
-          <p:cNvPr id="9" name="Picture 8" descr="google_docs.png"/>
+          <p:cNvPr id="3" name="Picture 2" descr="logo_uniajc_color.png"/>
           <p:cNvPicPr>
             <a:picLocks noChangeAspect="1"/>
           </p:cNvPicPr>
@@ -8581,8 +9191,8 @@
         </p:blipFill>
         <p:spPr>
           <a:xfrm>
-            <a:off x="1659331" y="1847087"/>
-            <a:ext cx="1220724" cy="1220724"/>
+            <a:off x="10271455" y="5998464"/>
+            <a:ext cx="1463040" cy="643233"/>
           </a:xfrm>
           <a:prstGeom prst="rect">
             <a:avLst/>
@@ -8591,14 +9201,14 @@
       </p:pic>
       <p:sp>
         <p:nvSpPr>
-          <p:cNvPr id="10" name="TextBox 9"/>
+          <p:cNvPr id="4" name="TextBox 3"/>
           <p:cNvSpPr txBox="1"/>
           <p:nvPr/>
         </p:nvSpPr>
         <p:spPr>
           <a:xfrm>
-            <a:off x="530352" y="3159251"/>
-            <a:ext cx="3478682" cy="621792"/>
+            <a:off x="457200" y="1737360"/>
+            <a:ext cx="11277295" cy="1097280"/>
           </a:xfrm>
           <a:prstGeom prst="rect">
             <a:avLst/>
@@ -8606,660 +9216,32 @@
           <a:noFill/>
         </p:spPr>
         <p:txBody>
-          <a:bodyPr wrap="square" anchor="t"/>
+          <a:bodyPr wrap="square" anchor="ctr"/>
           <a:lstStyle/>
           <a:p>
             <a:pPr algn="ctr"/>
             <a:r>
-              <a:rPr sz="1300" b="1" i="0">
+              <a:rPr sz="3400" b="1" i="0">
                 <a:solidFill>
                   <a:srgbClr val="095292"/>
                 </a:solidFill>
                 <a:latin typeface="Calibri"/>
               </a:rPr>
-              <a:t>Google Docs</a:t>
-            </a:r>
-          </a:p>
-          <a:p>
-            <a:pPr algn="ctr">
-              <a:spcBef>
-                <a:spcPts val="200"/>
-              </a:spcBef>
-            </a:pPr>
-            <a:r>
-              <a:rPr sz="1000" b="0" i="0">
-                <a:solidFill>
-                  <a:srgbClr val="666666"/>
-                </a:solidFill>
-                <a:latin typeface="Calibri"/>
-              </a:rPr>
-              <a:t>Politica de escalado</a:t>
-            </a:r>
-          </a:p>
-        </p:txBody>
-      </p:sp>
-      <p:sp>
-        <p:nvSpPr>
-          <p:cNvPr id="11" name="Rounded Rectangle 10"/>
-          <p:cNvSpPr/>
-          <p:nvPr/>
-        </p:nvSpPr>
-        <p:spPr>
-          <a:xfrm>
-            <a:off x="4283354" y="1591056"/>
-            <a:ext cx="3624986" cy="2299716"/>
-          </a:xfrm>
-          <a:prstGeom prst="roundRect">
-            <a:avLst>
-              <a:gd name="adj" fmla="val 12000"/>
-            </a:avLst>
-          </a:prstGeom>
-          <a:solidFill>
-            <a:srgbClr val="F2F2F2"/>
-          </a:solidFill>
-          <a:ln>
-            <a:noFill/>
-          </a:ln>
-        </p:spPr>
-        <p:style>
-          <a:lnRef idx="1">
-            <a:schemeClr val="accent1"/>
-          </a:lnRef>
-          <a:fillRef idx="3">
-            <a:schemeClr val="accent1"/>
-          </a:fillRef>
-          <a:effectRef idx="2">
-            <a:schemeClr val="accent1"/>
-          </a:effectRef>
-          <a:fontRef idx="minor">
-            <a:schemeClr val="lt1"/>
-          </a:fontRef>
-        </p:style>
-        <p:txBody>
-          <a:bodyPr rtlCol="0" anchor="ctr"/>
-          <a:lstStyle/>
-          <a:p>
-            <a:pPr algn="ctr"/>
-          </a:p>
-        </p:txBody>
-      </p:sp>
-      <p:sp>
-        <p:nvSpPr>
-          <p:cNvPr id="12" name="Rectangle 11"/>
-          <p:cNvSpPr/>
-          <p:nvPr/>
-        </p:nvSpPr>
-        <p:spPr>
-          <a:xfrm>
-            <a:off x="4283354" y="1591056"/>
-            <a:ext cx="3624986" cy="64008"/>
-          </a:xfrm>
-          <a:prstGeom prst="rect">
-            <a:avLst/>
-          </a:prstGeom>
-          <a:solidFill>
-            <a:srgbClr val="095292"/>
-          </a:solidFill>
-          <a:ln>
-            <a:noFill/>
-          </a:ln>
-        </p:spPr>
-        <p:style>
-          <a:lnRef idx="1">
-            <a:schemeClr val="accent1"/>
-          </a:lnRef>
-          <a:fillRef idx="3">
-            <a:schemeClr val="accent1"/>
-          </a:fillRef>
-          <a:effectRef idx="2">
-            <a:schemeClr val="accent1"/>
-          </a:effectRef>
-          <a:fontRef idx="minor">
-            <a:schemeClr val="lt1"/>
-          </a:fontRef>
-        </p:style>
-        <p:txBody>
-          <a:bodyPr rtlCol="0" anchor="ctr"/>
-          <a:lstStyle/>
-          <a:p>
-            <a:pPr algn="ctr"/>
-          </a:p>
-        </p:txBody>
-      </p:sp>
-      <p:sp>
-        <p:nvSpPr>
-          <p:cNvPr id="13" name="Rectangle 12"/>
-          <p:cNvSpPr/>
-          <p:nvPr/>
-        </p:nvSpPr>
-        <p:spPr>
-          <a:xfrm>
-            <a:off x="4283354" y="1655064"/>
-            <a:ext cx="3624986" cy="27432"/>
-          </a:xfrm>
-          <a:prstGeom prst="rect">
-            <a:avLst/>
-          </a:prstGeom>
-          <a:solidFill>
-            <a:srgbClr val="FFD000"/>
-          </a:solidFill>
-          <a:ln>
-            <a:noFill/>
-          </a:ln>
-        </p:spPr>
-        <p:style>
-          <a:lnRef idx="1">
-            <a:schemeClr val="accent1"/>
-          </a:lnRef>
-          <a:fillRef idx="3">
-            <a:schemeClr val="accent1"/>
-          </a:fillRef>
-          <a:effectRef idx="2">
-            <a:schemeClr val="accent1"/>
-          </a:effectRef>
-          <a:fontRef idx="minor">
-            <a:schemeClr val="lt1"/>
-          </a:fontRef>
-        </p:style>
-        <p:txBody>
-          <a:bodyPr rtlCol="0" anchor="ctr"/>
-          <a:lstStyle/>
-          <a:p>
-            <a:pPr algn="ctr"/>
-          </a:p>
-        </p:txBody>
-      </p:sp>
-      <p:pic>
-        <p:nvPicPr>
-          <p:cNvPr id="14" name="Picture 13" descr="drawio.png"/>
-          <p:cNvPicPr>
-            <a:picLocks noChangeAspect="1"/>
-          </p:cNvPicPr>
-          <p:nvPr/>
-        </p:nvPicPr>
-        <p:blipFill>
-          <a:blip r:embed="rId3"/>
-          <a:stretch>
-            <a:fillRect/>
-          </a:stretch>
-        </p:blipFill>
-        <p:spPr>
-          <a:xfrm>
-            <a:off x="5485485" y="1847087"/>
-            <a:ext cx="1220724" cy="1220724"/>
-          </a:xfrm>
-          <a:prstGeom prst="rect">
-            <a:avLst/>
-          </a:prstGeom>
-        </p:spPr>
-      </p:pic>
-      <p:sp>
-        <p:nvSpPr>
-          <p:cNvPr id="15" name="TextBox 14"/>
+              <a:t>Clase 13 · cierre conceptual</a:t>
+            </a:r>
+          </a:p>
+        </p:txBody>
+      </p:sp>
+      <p:sp>
+        <p:nvSpPr>
+          <p:cNvPr id="5" name="TextBox 4"/>
           <p:cNvSpPr txBox="1"/>
           <p:nvPr/>
         </p:nvSpPr>
         <p:spPr>
           <a:xfrm>
-            <a:off x="4356506" y="3159251"/>
-            <a:ext cx="3478682" cy="621792"/>
-          </a:xfrm>
-          <a:prstGeom prst="rect">
-            <a:avLst/>
-          </a:prstGeom>
-          <a:noFill/>
-        </p:spPr>
-        <p:txBody>
-          <a:bodyPr wrap="square" anchor="t"/>
-          <a:lstStyle/>
-          <a:p>
-            <a:pPr algn="ctr"/>
-            <a:r>
-              <a:rPr sz="1300" b="1" i="0">
-                <a:solidFill>
-                  <a:srgbClr val="095292"/>
-                </a:solidFill>
-                <a:latin typeface="Calibri"/>
-              </a:rPr>
-              <a:t>draw.io</a:t>
-            </a:r>
-          </a:p>
-          <a:p>
-            <a:pPr algn="ctr">
-              <a:spcBef>
-                <a:spcPts val="200"/>
-              </a:spcBef>
-            </a:pPr>
-            <a:r>
-              <a:rPr sz="1000" b="0" i="0">
-                <a:solidFill>
-                  <a:srgbClr val="666666"/>
-                </a:solidFill>
-                <a:latin typeface="Calibri"/>
-              </a:rPr>
-              <a:t>Nota en Deployment</a:t>
-            </a:r>
-          </a:p>
-        </p:txBody>
-      </p:sp>
-      <p:sp>
-        <p:nvSpPr>
-          <p:cNvPr id="16" name="Rounded Rectangle 15"/>
-          <p:cNvSpPr/>
-          <p:nvPr/>
-        </p:nvSpPr>
-        <p:spPr>
-          <a:xfrm>
-            <a:off x="8109508" y="1591056"/>
-            <a:ext cx="3624986" cy="2299716"/>
-          </a:xfrm>
-          <a:prstGeom prst="roundRect">
-            <a:avLst>
-              <a:gd name="adj" fmla="val 12000"/>
-            </a:avLst>
-          </a:prstGeom>
-          <a:solidFill>
-            <a:srgbClr val="F2F2F2"/>
-          </a:solidFill>
-          <a:ln>
-            <a:noFill/>
-          </a:ln>
-        </p:spPr>
-        <p:style>
-          <a:lnRef idx="1">
-            <a:schemeClr val="accent1"/>
-          </a:lnRef>
-          <a:fillRef idx="3">
-            <a:schemeClr val="accent1"/>
-          </a:fillRef>
-          <a:effectRef idx="2">
-            <a:schemeClr val="accent1"/>
-          </a:effectRef>
-          <a:fontRef idx="minor">
-            <a:schemeClr val="lt1"/>
-          </a:fontRef>
-        </p:style>
-        <p:txBody>
-          <a:bodyPr rtlCol="0" anchor="ctr"/>
-          <a:lstStyle/>
-          <a:p>
-            <a:pPr algn="ctr"/>
-          </a:p>
-        </p:txBody>
-      </p:sp>
-      <p:sp>
-        <p:nvSpPr>
-          <p:cNvPr id="17" name="Rectangle 16"/>
-          <p:cNvSpPr/>
-          <p:nvPr/>
-        </p:nvSpPr>
-        <p:spPr>
-          <a:xfrm>
-            <a:off x="8109508" y="1591056"/>
-            <a:ext cx="3624986" cy="64008"/>
-          </a:xfrm>
-          <a:prstGeom prst="rect">
-            <a:avLst/>
-          </a:prstGeom>
-          <a:solidFill>
-            <a:srgbClr val="095292"/>
-          </a:solidFill>
-          <a:ln>
-            <a:noFill/>
-          </a:ln>
-        </p:spPr>
-        <p:style>
-          <a:lnRef idx="1">
-            <a:schemeClr val="accent1"/>
-          </a:lnRef>
-          <a:fillRef idx="3">
-            <a:schemeClr val="accent1"/>
-          </a:fillRef>
-          <a:effectRef idx="2">
-            <a:schemeClr val="accent1"/>
-          </a:effectRef>
-          <a:fontRef idx="minor">
-            <a:schemeClr val="lt1"/>
-          </a:fontRef>
-        </p:style>
-        <p:txBody>
-          <a:bodyPr rtlCol="0" anchor="ctr"/>
-          <a:lstStyle/>
-          <a:p>
-            <a:pPr algn="ctr"/>
-          </a:p>
-        </p:txBody>
-      </p:sp>
-      <p:sp>
-        <p:nvSpPr>
-          <p:cNvPr id="18" name="Rectangle 17"/>
-          <p:cNvSpPr/>
-          <p:nvPr/>
-        </p:nvSpPr>
-        <p:spPr>
-          <a:xfrm>
-            <a:off x="8109508" y="1655064"/>
-            <a:ext cx="3624986" cy="27432"/>
-          </a:xfrm>
-          <a:prstGeom prst="rect">
-            <a:avLst/>
-          </a:prstGeom>
-          <a:solidFill>
-            <a:srgbClr val="FFD000"/>
-          </a:solidFill>
-          <a:ln>
-            <a:noFill/>
-          </a:ln>
-        </p:spPr>
-        <p:style>
-          <a:lnRef idx="1">
-            <a:schemeClr val="accent1"/>
-          </a:lnRef>
-          <a:fillRef idx="3">
-            <a:schemeClr val="accent1"/>
-          </a:fillRef>
-          <a:effectRef idx="2">
-            <a:schemeClr val="accent1"/>
-          </a:effectRef>
-          <a:fontRef idx="minor">
-            <a:schemeClr val="lt1"/>
-          </a:fontRef>
-        </p:style>
-        <p:txBody>
-          <a:bodyPr rtlCol="0" anchor="ctr"/>
-          <a:lstStyle/>
-          <a:p>
-            <a:pPr algn="ctr"/>
-          </a:p>
-        </p:txBody>
-      </p:sp>
-      <p:pic>
-        <p:nvPicPr>
-          <p:cNvPr id="19" name="Picture 18" descr="mermaid.png"/>
-          <p:cNvPicPr>
-            <a:picLocks noChangeAspect="1"/>
-          </p:cNvPicPr>
-          <p:nvPr/>
-        </p:nvPicPr>
-        <p:blipFill>
-          <a:blip r:embed="rId4"/>
-          <a:stretch>
-            <a:fillRect/>
-          </a:stretch>
-        </p:blipFill>
-        <p:spPr>
-          <a:xfrm>
-            <a:off x="9311640" y="1847087"/>
-            <a:ext cx="1220724" cy="1220724"/>
-          </a:xfrm>
-          <a:prstGeom prst="rect">
-            <a:avLst/>
-          </a:prstGeom>
-        </p:spPr>
-      </p:pic>
-      <p:sp>
-        <p:nvSpPr>
-          <p:cNvPr id="20" name="TextBox 19"/>
-          <p:cNvSpPr txBox="1"/>
-          <p:nvPr/>
-        </p:nvSpPr>
-        <p:spPr>
-          <a:xfrm>
-            <a:off x="8182660" y="3159251"/>
-            <a:ext cx="3478682" cy="621792"/>
-          </a:xfrm>
-          <a:prstGeom prst="rect">
-            <a:avLst/>
-          </a:prstGeom>
-          <a:noFill/>
-        </p:spPr>
-        <p:txBody>
-          <a:bodyPr wrap="square" anchor="t"/>
-          <a:lstStyle/>
-          <a:p>
-            <a:pPr algn="ctr"/>
-            <a:r>
-              <a:rPr sz="1300" b="1" i="0">
-                <a:solidFill>
-                  <a:srgbClr val="095292"/>
-                </a:solidFill>
-                <a:latin typeface="Calibri"/>
-              </a:rPr>
-              <a:t>Mermaid</a:t>
-            </a:r>
-          </a:p>
-          <a:p>
-            <a:pPr algn="ctr">
-              <a:spcBef>
-                <a:spcPts val="200"/>
-              </a:spcBef>
-            </a:pPr>
-            <a:r>
-              <a:rPr sz="1000" b="0" i="0">
-                <a:solidFill>
-                  <a:srgbClr val="666666"/>
-                </a:solidFill>
-                <a:latin typeface="Calibri"/>
-              </a:rPr>
-              <a:t>Codigo del diagrama</a:t>
-            </a:r>
-          </a:p>
-        </p:txBody>
-      </p:sp>
-      <p:sp>
-        <p:nvSpPr>
-          <p:cNvPr id="21" name="Rounded Rectangle 20"/>
-          <p:cNvSpPr/>
-          <p:nvPr/>
-        </p:nvSpPr>
-        <p:spPr>
-          <a:xfrm>
-            <a:off x="4283354" y="4055364"/>
-            <a:ext cx="3624986" cy="2299716"/>
-          </a:xfrm>
-          <a:prstGeom prst="roundRect">
-            <a:avLst>
-              <a:gd name="adj" fmla="val 12000"/>
-            </a:avLst>
-          </a:prstGeom>
-          <a:solidFill>
-            <a:srgbClr val="F2F2F2"/>
-          </a:solidFill>
-          <a:ln>
-            <a:noFill/>
-          </a:ln>
-        </p:spPr>
-        <p:style>
-          <a:lnRef idx="1">
-            <a:schemeClr val="accent1"/>
-          </a:lnRef>
-          <a:fillRef idx="3">
-            <a:schemeClr val="accent1"/>
-          </a:fillRef>
-          <a:effectRef idx="2">
-            <a:schemeClr val="accent1"/>
-          </a:effectRef>
-          <a:fontRef idx="minor">
-            <a:schemeClr val="lt1"/>
-          </a:fontRef>
-        </p:style>
-        <p:txBody>
-          <a:bodyPr rtlCol="0" anchor="ctr"/>
-          <a:lstStyle/>
-          <a:p>
-            <a:pPr algn="ctr"/>
-          </a:p>
-        </p:txBody>
-      </p:sp>
-      <p:sp>
-        <p:nvSpPr>
-          <p:cNvPr id="22" name="Rectangle 21"/>
-          <p:cNvSpPr/>
-          <p:nvPr/>
-        </p:nvSpPr>
-        <p:spPr>
-          <a:xfrm>
-            <a:off x="4283354" y="4055364"/>
-            <a:ext cx="3624986" cy="64008"/>
-          </a:xfrm>
-          <a:prstGeom prst="rect">
-            <a:avLst/>
-          </a:prstGeom>
-          <a:solidFill>
-            <a:srgbClr val="095292"/>
-          </a:solidFill>
-          <a:ln>
-            <a:noFill/>
-          </a:ln>
-        </p:spPr>
-        <p:style>
-          <a:lnRef idx="1">
-            <a:schemeClr val="accent1"/>
-          </a:lnRef>
-          <a:fillRef idx="3">
-            <a:schemeClr val="accent1"/>
-          </a:fillRef>
-          <a:effectRef idx="2">
-            <a:schemeClr val="accent1"/>
-          </a:effectRef>
-          <a:fontRef idx="minor">
-            <a:schemeClr val="lt1"/>
-          </a:fontRef>
-        </p:style>
-        <p:txBody>
-          <a:bodyPr rtlCol="0" anchor="ctr"/>
-          <a:lstStyle/>
-          <a:p>
-            <a:pPr algn="ctr"/>
-          </a:p>
-        </p:txBody>
-      </p:sp>
-      <p:sp>
-        <p:nvSpPr>
-          <p:cNvPr id="23" name="Rectangle 22"/>
-          <p:cNvSpPr/>
-          <p:nvPr/>
-        </p:nvSpPr>
-        <p:spPr>
-          <a:xfrm>
-            <a:off x="4283354" y="4119372"/>
-            <a:ext cx="3624986" cy="27432"/>
-          </a:xfrm>
-          <a:prstGeom prst="rect">
-            <a:avLst/>
-          </a:prstGeom>
-          <a:solidFill>
-            <a:srgbClr val="FFD000"/>
-          </a:solidFill>
-          <a:ln>
-            <a:noFill/>
-          </a:ln>
-        </p:spPr>
-        <p:style>
-          <a:lnRef idx="1">
-            <a:schemeClr val="accent1"/>
-          </a:lnRef>
-          <a:fillRef idx="3">
-            <a:schemeClr val="accent1"/>
-          </a:fillRef>
-          <a:effectRef idx="2">
-            <a:schemeClr val="accent1"/>
-          </a:effectRef>
-          <a:fontRef idx="minor">
-            <a:schemeClr val="lt1"/>
-          </a:fontRef>
-        </p:style>
-        <p:txBody>
-          <a:bodyPr rtlCol="0" anchor="ctr"/>
-          <a:lstStyle/>
-          <a:p>
-            <a:pPr algn="ctr"/>
-          </a:p>
-        </p:txBody>
-      </p:sp>
-      <p:pic>
-        <p:nvPicPr>
-          <p:cNvPr id="24" name="Picture 23" descr="examlab.png"/>
-          <p:cNvPicPr>
-            <a:picLocks noChangeAspect="1"/>
-          </p:cNvPicPr>
-          <p:nvPr/>
-        </p:nvPicPr>
-        <p:blipFill>
-          <a:blip r:embed="rId5"/>
-          <a:stretch>
-            <a:fillRect/>
-          </a:stretch>
-        </p:blipFill>
-        <p:spPr>
-          <a:xfrm>
-            <a:off x="5485485" y="4311396"/>
-            <a:ext cx="1220724" cy="1220724"/>
-          </a:xfrm>
-          <a:prstGeom prst="rect">
-            <a:avLst/>
-          </a:prstGeom>
-        </p:spPr>
-      </p:pic>
-      <p:sp>
-        <p:nvSpPr>
-          <p:cNvPr id="25" name="TextBox 24"/>
-          <p:cNvSpPr txBox="1"/>
-          <p:nvPr/>
-        </p:nvSpPr>
-        <p:spPr>
-          <a:xfrm>
-            <a:off x="4356506" y="5623560"/>
-            <a:ext cx="3478682" cy="621792"/>
-          </a:xfrm>
-          <a:prstGeom prst="rect">
-            <a:avLst/>
-          </a:prstGeom>
-          <a:noFill/>
-        </p:spPr>
-        <p:txBody>
-          <a:bodyPr wrap="square" anchor="t"/>
-          <a:lstStyle/>
-          <a:p>
-            <a:pPr algn="ctr"/>
-            <a:r>
-              <a:rPr sz="1300" b="1" i="0">
-                <a:solidFill>
-                  <a:srgbClr val="095292"/>
-                </a:solidFill>
-                <a:latin typeface="Calibri"/>
-              </a:rPr>
-              <a:t>la plataforma del curso</a:t>
-            </a:r>
-          </a:p>
-          <a:p>
-            <a:pPr algn="ctr">
-              <a:spcBef>
-                <a:spcPts val="200"/>
-              </a:spcBef>
-            </a:pPr>
-            <a:r>
-              <a:rPr sz="1000" b="0" i="0">
-                <a:solidFill>
-                  <a:srgbClr val="666666"/>
-                </a:solidFill>
-                <a:latin typeface="Calibri"/>
-              </a:rPr>
-              <a:t>Donde se entrega</a:t>
-            </a:r>
-          </a:p>
-        </p:txBody>
-      </p:sp>
-      <p:sp>
-        <p:nvSpPr>
-          <p:cNvPr id="26" name="TextBox 25"/>
-          <p:cNvSpPr txBox="1"/>
-          <p:nvPr/>
-        </p:nvSpPr>
-        <p:spPr>
-          <a:xfrm>
-            <a:off x="11185855" y="6473952"/>
-            <a:ext cx="640080" cy="274320"/>
+            <a:off x="457200" y="3017520"/>
+            <a:ext cx="11277295" cy="1645920"/>
           </a:xfrm>
           <a:prstGeom prst="rect">
             <a:avLst/>
@@ -9272,141 +9254,65 @@
           </a:bodyPr>
           <a:lstStyle/>
           <a:p>
-            <a:pPr algn="r"/>
-            <a:r>
-              <a:rPr sz="1100" b="0" i="0">
-                <a:solidFill>
-                  <a:srgbClr val="666666"/>
-                </a:solidFill>
-                <a:latin typeface="Calibri"/>
-              </a:rPr>
-              <a:t>25</a:t>
-            </a:r>
-          </a:p>
-        </p:txBody>
-      </p:sp>
-    </p:spTree>
-  </p:cSld>
-  <p:clrMapOvr>
-    <a:masterClrMapping/>
-  </p:clrMapOvr>
-</p:sld>
-</file>
-
-<file path=ppt/slides/slide26.xml><?xml version="1.0" encoding="utf-8"?>
-<p:sld xmlns:a="http://schemas.openxmlformats.org/drawingml/2006/main" xmlns:p="http://schemas.openxmlformats.org/presentationml/2006/main" xmlns:r="http://schemas.openxmlformats.org/officeDocument/2006/relationships">
-  <p:cSld>
-    <p:bg>
-      <p:bgPr>
-        <a:solidFill>
-          <a:srgbClr val="FFFFFF"/>
-        </a:solidFill>
-        <a:effectLst/>
-      </p:bgPr>
-    </p:bg>
-    <p:spTree>
-      <p:nvGrpSpPr>
-        <p:cNvPr id="1" name=""/>
-        <p:cNvGrpSpPr/>
-        <p:nvPr/>
-      </p:nvGrpSpPr>
-      <p:grpSpPr/>
-      <p:sp>
-        <p:nvSpPr>
-          <p:cNvPr id="2" name="Rectangle 1"/>
-          <p:cNvSpPr/>
-          <p:nvPr/>
-        </p:nvSpPr>
-        <p:spPr>
-          <a:xfrm>
-            <a:off x="0" y="0"/>
-            <a:ext cx="12191695" cy="1170432"/>
-          </a:xfrm>
-          <a:prstGeom prst="rect">
-            <a:avLst/>
-          </a:prstGeom>
-          <a:solidFill>
-            <a:srgbClr val="095292"/>
-          </a:solidFill>
-          <a:ln>
-            <a:noFill/>
-          </a:ln>
-        </p:spPr>
-        <p:style>
-          <a:lnRef idx="1">
-            <a:schemeClr val="accent1"/>
-          </a:lnRef>
-          <a:fillRef idx="3">
-            <a:schemeClr val="accent1"/>
-          </a:fillRef>
-          <a:effectRef idx="2">
-            <a:schemeClr val="accent1"/>
-          </a:effectRef>
-          <a:fontRef idx="minor">
-            <a:schemeClr val="lt1"/>
-          </a:fontRef>
-        </p:style>
-        <p:txBody>
-          <a:bodyPr rtlCol="0" anchor="ctr"/>
-          <a:lstStyle/>
-          <a:p>
-            <a:pPr algn="ctr"/>
-          </a:p>
-        </p:txBody>
-      </p:sp>
-      <p:sp>
-        <p:nvSpPr>
-          <p:cNvPr id="3" name="Rectangle 2"/>
-          <p:cNvSpPr/>
-          <p:nvPr/>
-        </p:nvSpPr>
-        <p:spPr>
-          <a:xfrm>
-            <a:off x="0" y="1170432"/>
-            <a:ext cx="12191695" cy="41148"/>
-          </a:xfrm>
-          <a:prstGeom prst="rect">
-            <a:avLst/>
-          </a:prstGeom>
-          <a:solidFill>
-            <a:srgbClr val="FFD000"/>
-          </a:solidFill>
-          <a:ln>
-            <a:noFill/>
-          </a:ln>
-        </p:spPr>
-        <p:style>
-          <a:lnRef idx="1">
-            <a:schemeClr val="accent1"/>
-          </a:lnRef>
-          <a:fillRef idx="3">
-            <a:schemeClr val="accent1"/>
-          </a:fillRef>
-          <a:effectRef idx="2">
-            <a:schemeClr val="accent1"/>
-          </a:effectRef>
-          <a:fontRef idx="minor">
-            <a:schemeClr val="lt1"/>
-          </a:fontRef>
-        </p:style>
-        <p:txBody>
-          <a:bodyPr rtlCol="0" anchor="ctr"/>
-          <a:lstStyle/>
-          <a:p>
-            <a:pPr algn="ctr"/>
-          </a:p>
-        </p:txBody>
-      </p:sp>
-      <p:sp>
-        <p:nvSpPr>
-          <p:cNvPr id="4" name="TextBox 3"/>
+            <a:pPr algn="ctr">
+              <a:spcAft>
+                <a:spcPts val="600"/>
+              </a:spcAft>
+            </a:pPr>
+            <a:r>
+              <a:rPr sz="1600" b="0" i="0">
+                <a:solidFill>
+                  <a:srgbClr val="333333"/>
+                </a:solidFill>
+                <a:latin typeface="Calibri"/>
+              </a:rPr>
+              <a:t>Distinguir escala vertical vs horizontal y cuándo aplicarlas.</a:t>
+            </a:r>
+          </a:p>
+          <a:p>
+            <a:pPr algn="ctr">
+              <a:spcAft>
+                <a:spcPts val="600"/>
+              </a:spcAft>
+            </a:pPr>
+            <a:r>
+              <a:rPr sz="1600" b="0" i="0">
+                <a:solidFill>
+                  <a:srgbClr val="333333"/>
+                </a:solidFill>
+                <a:latin typeface="Calibri"/>
+              </a:rPr>
+              <a:t>Definir triggers cualitativos (CPU, cola, RPS) sin cloud de pago.</a:t>
+            </a:r>
+          </a:p>
+          <a:p>
+            <a:pPr algn="ctr">
+              <a:spcAft>
+                <a:spcPts val="600"/>
+              </a:spcAft>
+            </a:pPr>
+            <a:r>
+              <a:rPr sz="1600" b="0" i="0">
+                <a:solidFill>
+                  <a:srgbClr val="333333"/>
+                </a:solidFill>
+                <a:latin typeface="Calibri"/>
+              </a:rPr>
+              <a:t>Actualizar el informe PI con la política de escala.</a:t>
+            </a:r>
+          </a:p>
+        </p:txBody>
+      </p:sp>
+      <p:sp>
+        <p:nvSpPr>
+          <p:cNvPr id="6" name="TextBox 5"/>
           <p:cNvSpPr txBox="1"/>
           <p:nvPr/>
         </p:nvSpPr>
         <p:spPr>
           <a:xfrm>
-            <a:off x="457200" y="164592"/>
-            <a:ext cx="11277295" cy="384048"/>
+            <a:off x="457200" y="4754880"/>
+            <a:ext cx="11277295" cy="640080"/>
           </a:xfrm>
           <a:prstGeom prst="rect">
             <a:avLst/>
@@ -9419,2040 +9325,15 @@
           </a:bodyPr>
           <a:lstStyle/>
           <a:p>
-            <a:r>
-              <a:rPr sz="2600" b="1" i="0">
-                <a:solidFill>
-                  <a:srgbClr val="FFFFFF"/>
-                </a:solidFill>
-                <a:latin typeface="Calibri"/>
-              </a:rPr>
-              <a:t>Del boceto a la plataforma del curso (diagrama)</a:t>
-            </a:r>
-          </a:p>
-        </p:txBody>
-      </p:sp>
-      <p:sp>
-        <p:nvSpPr>
-          <p:cNvPr id="5" name="TextBox 4"/>
-          <p:cNvSpPr txBox="1"/>
-          <p:nvPr/>
-        </p:nvSpPr>
-        <p:spPr>
-          <a:xfrm>
-            <a:off x="457200" y="566928"/>
-            <a:ext cx="11277295" cy="411480"/>
-          </a:xfrm>
-          <a:prstGeom prst="rect">
-            <a:avLst/>
-          </a:prstGeom>
-          <a:noFill/>
-        </p:spPr>
-        <p:txBody>
-          <a:bodyPr wrap="square">
-            <a:spAutoFit/>
-          </a:bodyPr>
-          <a:lstStyle/>
-          <a:p>
-            <a:r>
-              <a:rPr sz="1400" b="0" i="0">
-                <a:solidFill>
-                  <a:srgbClr val="B8D8EE"/>
-                </a:solidFill>
-                <a:latin typeface="Calibri"/>
-              </a:rPr>
-              <a:t>El diagrama se entrega como código Mermaid en la plataforma del curso, no como imagen</a:t>
-            </a:r>
-          </a:p>
-        </p:txBody>
-      </p:sp>
-      <p:sp>
-        <p:nvSpPr>
-          <p:cNvPr id="6" name="Rounded Rectangle 5"/>
-          <p:cNvSpPr/>
-          <p:nvPr/>
-        </p:nvSpPr>
-        <p:spPr>
-          <a:xfrm>
-            <a:off x="457200" y="1659636"/>
-            <a:ext cx="11277295" cy="1051560"/>
-          </a:xfrm>
-          <a:prstGeom prst="roundRect">
-            <a:avLst>
-              <a:gd name="adj" fmla="val 12000"/>
-            </a:avLst>
-          </a:prstGeom>
-          <a:solidFill>
-            <a:srgbClr val="F2F2F2"/>
-          </a:solidFill>
-          <a:ln>
-            <a:noFill/>
-          </a:ln>
-        </p:spPr>
-        <p:style>
-          <a:lnRef idx="1">
-            <a:schemeClr val="accent1"/>
-          </a:lnRef>
-          <a:fillRef idx="3">
-            <a:schemeClr val="accent1"/>
-          </a:fillRef>
-          <a:effectRef idx="2">
-            <a:schemeClr val="accent1"/>
-          </a:effectRef>
-          <a:fontRef idx="minor">
-            <a:schemeClr val="lt1"/>
-          </a:fontRef>
-        </p:style>
-        <p:txBody>
-          <a:bodyPr rtlCol="0" anchor="ctr"/>
-          <a:lstStyle/>
-          <a:p>
             <a:pPr algn="ctr"/>
-          </a:p>
-        </p:txBody>
-      </p:sp>
-      <p:sp>
-        <p:nvSpPr>
-          <p:cNvPr id="7" name="Rounded Rectangle 6"/>
-          <p:cNvSpPr/>
-          <p:nvPr/>
-        </p:nvSpPr>
-        <p:spPr>
-          <a:xfrm>
-            <a:off x="594360" y="1965960"/>
-            <a:ext cx="438912" cy="438912"/>
-          </a:xfrm>
-          <a:prstGeom prst="roundRect">
-            <a:avLst>
-              <a:gd name="adj" fmla="val 12000"/>
-            </a:avLst>
-          </a:prstGeom>
-          <a:solidFill>
-            <a:srgbClr val="095292"/>
-          </a:solidFill>
-          <a:ln>
-            <a:noFill/>
-          </a:ln>
-        </p:spPr>
-        <p:style>
-          <a:lnRef idx="1">
-            <a:schemeClr val="accent1"/>
-          </a:lnRef>
-          <a:fillRef idx="3">
-            <a:schemeClr val="accent1"/>
-          </a:fillRef>
-          <a:effectRef idx="2">
-            <a:schemeClr val="accent1"/>
-          </a:effectRef>
-          <a:fontRef idx="minor">
-            <a:schemeClr val="lt1"/>
-          </a:fontRef>
-        </p:style>
-        <p:txBody>
-          <a:bodyPr rtlCol="0" anchor="ctr"/>
-          <a:lstStyle/>
-          <a:p>
-            <a:pPr algn="ctr"/>
-          </a:p>
-        </p:txBody>
-      </p:sp>
-      <p:sp>
-        <p:nvSpPr>
-          <p:cNvPr id="8" name="TextBox 7"/>
-          <p:cNvSpPr txBox="1"/>
-          <p:nvPr/>
-        </p:nvSpPr>
-        <p:spPr>
-          <a:xfrm>
-            <a:off x="594360" y="1965960"/>
-            <a:ext cx="438912" cy="438912"/>
-          </a:xfrm>
-          <a:prstGeom prst="rect">
-            <a:avLst/>
-          </a:prstGeom>
-          <a:noFill/>
-        </p:spPr>
-        <p:txBody>
-          <a:bodyPr wrap="square" anchor="ctr"/>
-          <a:lstStyle/>
-          <a:p>
-            <a:pPr algn="ctr"/>
-            <a:r>
-              <a:rPr sz="1600" b="1" i="0">
-                <a:solidFill>
-                  <a:srgbClr val="FFFFFF"/>
-                </a:solidFill>
-                <a:latin typeface="Calibri"/>
-              </a:rPr>
-              <a:t>1</a:t>
-            </a:r>
-          </a:p>
-        </p:txBody>
-      </p:sp>
-      <p:sp>
-        <p:nvSpPr>
-          <p:cNvPr id="9" name="TextBox 8"/>
-          <p:cNvSpPr txBox="1"/>
-          <p:nvPr/>
-        </p:nvSpPr>
-        <p:spPr>
-          <a:xfrm>
-            <a:off x="1188720" y="1751076"/>
-            <a:ext cx="10271455" cy="886968"/>
-          </a:xfrm>
-          <a:prstGeom prst="rect">
-            <a:avLst/>
-          </a:prstGeom>
-          <a:noFill/>
-        </p:spPr>
-        <p:txBody>
-          <a:bodyPr wrap="square" anchor="ctr"/>
-          <a:lstStyle/>
-          <a:p>
-            <a:r>
-              <a:rPr sz="1500" b="1" i="0">
-                <a:solidFill>
-                  <a:srgbClr val="095292"/>
-                </a:solidFill>
-                <a:latin typeface="Calibri"/>
-              </a:rPr>
-              <a:t>Disena visual</a:t>
-            </a:r>
-          </a:p>
-          <a:p>
-            <a:pPr>
-              <a:spcBef>
-                <a:spcPts val="200"/>
-              </a:spcBef>
-            </a:pPr>
-            <a:r>
-              <a:rPr sz="1300" b="0" i="0">
-                <a:solidFill>
-                  <a:srgbClr val="333333"/>
-                </a:solidFill>
-                <a:latin typeface="Calibri"/>
-              </a:rPr>
-              <a:t>Dibuja el diagrama como quieras en Excalidraw o draw.io: es mas rapido arrastrar cajas que escribir codigo, y ahi es donde piensas el modelo.</a:t>
-            </a:r>
-          </a:p>
-        </p:txBody>
-      </p:sp>
-      <p:sp>
-        <p:nvSpPr>
-          <p:cNvPr id="10" name="Rounded Rectangle 9"/>
-          <p:cNvSpPr/>
-          <p:nvPr/>
-        </p:nvSpPr>
-        <p:spPr>
-          <a:xfrm>
-            <a:off x="457200" y="2802636"/>
-            <a:ext cx="11277295" cy="1051560"/>
-          </a:xfrm>
-          <a:prstGeom prst="roundRect">
-            <a:avLst>
-              <a:gd name="adj" fmla="val 12000"/>
-            </a:avLst>
-          </a:prstGeom>
-          <a:solidFill>
-            <a:srgbClr val="E8F4FA"/>
-          </a:solidFill>
-          <a:ln>
-            <a:noFill/>
-          </a:ln>
-        </p:spPr>
-        <p:style>
-          <a:lnRef idx="1">
-            <a:schemeClr val="accent1"/>
-          </a:lnRef>
-          <a:fillRef idx="3">
-            <a:schemeClr val="accent1"/>
-          </a:fillRef>
-          <a:effectRef idx="2">
-            <a:schemeClr val="accent1"/>
-          </a:effectRef>
-          <a:fontRef idx="minor">
-            <a:schemeClr val="lt1"/>
-          </a:fontRef>
-        </p:style>
-        <p:txBody>
-          <a:bodyPr rtlCol="0" anchor="ctr"/>
-          <a:lstStyle/>
-          <a:p>
-            <a:pPr algn="ctr"/>
-          </a:p>
-        </p:txBody>
-      </p:sp>
-      <p:sp>
-        <p:nvSpPr>
-          <p:cNvPr id="11" name="Rounded Rectangle 10"/>
-          <p:cNvSpPr/>
-          <p:nvPr/>
-        </p:nvSpPr>
-        <p:spPr>
-          <a:xfrm>
-            <a:off x="594360" y="3108960"/>
-            <a:ext cx="438912" cy="438912"/>
-          </a:xfrm>
-          <a:prstGeom prst="roundRect">
-            <a:avLst>
-              <a:gd name="adj" fmla="val 12000"/>
-            </a:avLst>
-          </a:prstGeom>
-          <a:solidFill>
-            <a:srgbClr val="095292"/>
-          </a:solidFill>
-          <a:ln>
-            <a:noFill/>
-          </a:ln>
-        </p:spPr>
-        <p:style>
-          <a:lnRef idx="1">
-            <a:schemeClr val="accent1"/>
-          </a:lnRef>
-          <a:fillRef idx="3">
-            <a:schemeClr val="accent1"/>
-          </a:fillRef>
-          <a:effectRef idx="2">
-            <a:schemeClr val="accent1"/>
-          </a:effectRef>
-          <a:fontRef idx="minor">
-            <a:schemeClr val="lt1"/>
-          </a:fontRef>
-        </p:style>
-        <p:txBody>
-          <a:bodyPr rtlCol="0" anchor="ctr"/>
-          <a:lstStyle/>
-          <a:p>
-            <a:pPr algn="ctr"/>
-          </a:p>
-        </p:txBody>
-      </p:sp>
-      <p:sp>
-        <p:nvSpPr>
-          <p:cNvPr id="12" name="TextBox 11"/>
-          <p:cNvSpPr txBox="1"/>
-          <p:nvPr/>
-        </p:nvSpPr>
-        <p:spPr>
-          <a:xfrm>
-            <a:off x="594360" y="3108960"/>
-            <a:ext cx="438912" cy="438912"/>
-          </a:xfrm>
-          <a:prstGeom prst="rect">
-            <a:avLst/>
-          </a:prstGeom>
-          <a:noFill/>
-        </p:spPr>
-        <p:txBody>
-          <a:bodyPr wrap="square" anchor="ctr"/>
-          <a:lstStyle/>
-          <a:p>
-            <a:pPr algn="ctr"/>
-            <a:r>
-              <a:rPr sz="1600" b="1" i="0">
-                <a:solidFill>
-                  <a:srgbClr val="FFFFFF"/>
-                </a:solidFill>
-                <a:latin typeface="Calibri"/>
-              </a:rPr>
-              <a:t>2</a:t>
-            </a:r>
-          </a:p>
-        </p:txBody>
-      </p:sp>
-      <p:sp>
-        <p:nvSpPr>
-          <p:cNvPr id="13" name="TextBox 12"/>
-          <p:cNvSpPr txBox="1"/>
-          <p:nvPr/>
-        </p:nvSpPr>
-        <p:spPr>
-          <a:xfrm>
-            <a:off x="1188720" y="2894076"/>
-            <a:ext cx="10271455" cy="886968"/>
-          </a:xfrm>
-          <a:prstGeom prst="rect">
-            <a:avLst/>
-          </a:prstGeom>
-          <a:noFill/>
-        </p:spPr>
-        <p:txBody>
-          <a:bodyPr wrap="square" anchor="ctr"/>
-          <a:lstStyle/>
-          <a:p>
-            <a:r>
-              <a:rPr sz="1500" b="1" i="0">
-                <a:solidFill>
-                  <a:srgbClr val="095292"/>
-                </a:solidFill>
-                <a:latin typeface="Calibri"/>
-              </a:rPr>
-              <a:t>Traduce con IA</a:t>
-            </a:r>
-          </a:p>
-          <a:p>
-            <a:pPr>
-              <a:spcBef>
-                <a:spcPts val="200"/>
-              </a:spcBef>
-            </a:pPr>
-            <a:r>
-              <a:rPr sz="1300" b="0" i="0">
-                <a:solidFill>
-                  <a:srgbClr val="333333"/>
-                </a:solidFill>
-                <a:latin typeface="Calibri"/>
-              </a:rPr>
-              <a:t>Copia o describe tu boceto a una IA y pidele el codigo Mermaid: «convierte este diagrama a Mermaid usando flowchart». Revisa el resultado: la IA acierta la sintaxis, no tu modelo.</a:t>
-            </a:r>
-          </a:p>
-        </p:txBody>
-      </p:sp>
-      <p:sp>
-        <p:nvSpPr>
-          <p:cNvPr id="14" name="Rounded Rectangle 13"/>
-          <p:cNvSpPr/>
-          <p:nvPr/>
-        </p:nvSpPr>
-        <p:spPr>
-          <a:xfrm>
-            <a:off x="457200" y="3945636"/>
-            <a:ext cx="11277295" cy="1051560"/>
-          </a:xfrm>
-          <a:prstGeom prst="roundRect">
-            <a:avLst>
-              <a:gd name="adj" fmla="val 12000"/>
-            </a:avLst>
-          </a:prstGeom>
-          <a:solidFill>
-            <a:srgbClr val="F2F2F2"/>
-          </a:solidFill>
-          <a:ln>
-            <a:noFill/>
-          </a:ln>
-        </p:spPr>
-        <p:style>
-          <a:lnRef idx="1">
-            <a:schemeClr val="accent1"/>
-          </a:lnRef>
-          <a:fillRef idx="3">
-            <a:schemeClr val="accent1"/>
-          </a:fillRef>
-          <a:effectRef idx="2">
-            <a:schemeClr val="accent1"/>
-          </a:effectRef>
-          <a:fontRef idx="minor">
-            <a:schemeClr val="lt1"/>
-          </a:fontRef>
-        </p:style>
-        <p:txBody>
-          <a:bodyPr rtlCol="0" anchor="ctr"/>
-          <a:lstStyle/>
-          <a:p>
-            <a:pPr algn="ctr"/>
-          </a:p>
-        </p:txBody>
-      </p:sp>
-      <p:sp>
-        <p:nvSpPr>
-          <p:cNvPr id="15" name="Rounded Rectangle 14"/>
-          <p:cNvSpPr/>
-          <p:nvPr/>
-        </p:nvSpPr>
-        <p:spPr>
-          <a:xfrm>
-            <a:off x="594360" y="4251960"/>
-            <a:ext cx="438912" cy="438912"/>
-          </a:xfrm>
-          <a:prstGeom prst="roundRect">
-            <a:avLst>
-              <a:gd name="adj" fmla="val 12000"/>
-            </a:avLst>
-          </a:prstGeom>
-          <a:solidFill>
-            <a:srgbClr val="095292"/>
-          </a:solidFill>
-          <a:ln>
-            <a:noFill/>
-          </a:ln>
-        </p:spPr>
-        <p:style>
-          <a:lnRef idx="1">
-            <a:schemeClr val="accent1"/>
-          </a:lnRef>
-          <a:fillRef idx="3">
-            <a:schemeClr val="accent1"/>
-          </a:fillRef>
-          <a:effectRef idx="2">
-            <a:schemeClr val="accent1"/>
-          </a:effectRef>
-          <a:fontRef idx="minor">
-            <a:schemeClr val="lt1"/>
-          </a:fontRef>
-        </p:style>
-        <p:txBody>
-          <a:bodyPr rtlCol="0" anchor="ctr"/>
-          <a:lstStyle/>
-          <a:p>
-            <a:pPr algn="ctr"/>
-          </a:p>
-        </p:txBody>
-      </p:sp>
-      <p:sp>
-        <p:nvSpPr>
-          <p:cNvPr id="16" name="TextBox 15"/>
-          <p:cNvSpPr txBox="1"/>
-          <p:nvPr/>
-        </p:nvSpPr>
-        <p:spPr>
-          <a:xfrm>
-            <a:off x="594360" y="4251960"/>
-            <a:ext cx="438912" cy="438912"/>
-          </a:xfrm>
-          <a:prstGeom prst="rect">
-            <a:avLst/>
-          </a:prstGeom>
-          <a:noFill/>
-        </p:spPr>
-        <p:txBody>
-          <a:bodyPr wrap="square" anchor="ctr"/>
-          <a:lstStyle/>
-          <a:p>
-            <a:pPr algn="ctr"/>
-            <a:r>
-              <a:rPr sz="1600" b="1" i="0">
-                <a:solidFill>
-                  <a:srgbClr val="FFFFFF"/>
-                </a:solidFill>
-                <a:latin typeface="Calibri"/>
-              </a:rPr>
-              <a:t>3</a:t>
-            </a:r>
-          </a:p>
-        </p:txBody>
-      </p:sp>
-      <p:sp>
-        <p:nvSpPr>
-          <p:cNvPr id="17" name="TextBox 16"/>
-          <p:cNvSpPr txBox="1"/>
-          <p:nvPr/>
-        </p:nvSpPr>
-        <p:spPr>
-          <a:xfrm>
-            <a:off x="1188720" y="4037076"/>
-            <a:ext cx="10271455" cy="886968"/>
-          </a:xfrm>
-          <a:prstGeom prst="rect">
-            <a:avLst/>
-          </a:prstGeom>
-          <a:noFill/>
-        </p:spPr>
-        <p:txBody>
-          <a:bodyPr wrap="square" anchor="ctr"/>
-          <a:lstStyle/>
-          <a:p>
-            <a:r>
-              <a:rPr sz="1500" b="1" i="0">
-                <a:solidFill>
-                  <a:srgbClr val="095292"/>
-                </a:solidFill>
-                <a:latin typeface="Calibri"/>
-              </a:rPr>
-              <a:t>Pega y renderiza en la plataforma del curso</a:t>
-            </a:r>
-          </a:p>
-          <a:p>
-            <a:pPr>
-              <a:spcBef>
-                <a:spcPts val="200"/>
-              </a:spcBef>
-            </a:pPr>
-            <a:r>
-              <a:rPr sz="1300" b="0" i="0">
-                <a:solidFill>
-                  <a:srgbClr val="333333"/>
-                </a:solidFill>
-                <a:latin typeface="Calibri"/>
-              </a:rPr>
-              <a:t>Pega ese codigo en la caja de texto de la pregunta y mira como lo dibuja la plataforma. Si no renderiza, corrige ahi mismo: lo que se califica es el diagrama renderizado dentro de la plataforma del curso.</a:t>
-            </a:r>
-          </a:p>
-        </p:txBody>
-      </p:sp>
-      <p:sp>
-        <p:nvSpPr>
-          <p:cNvPr id="18" name="Rounded Rectangle 17"/>
-          <p:cNvSpPr/>
-          <p:nvPr/>
-        </p:nvSpPr>
-        <p:spPr>
-          <a:xfrm>
-            <a:off x="457200" y="5088636"/>
-            <a:ext cx="11277295" cy="1051560"/>
-          </a:xfrm>
-          <a:prstGeom prst="roundRect">
-            <a:avLst>
-              <a:gd name="adj" fmla="val 12000"/>
-            </a:avLst>
-          </a:prstGeom>
-          <a:solidFill>
-            <a:srgbClr val="E8F4FA"/>
-          </a:solidFill>
-          <a:ln>
-            <a:noFill/>
-          </a:ln>
-        </p:spPr>
-        <p:style>
-          <a:lnRef idx="1">
-            <a:schemeClr val="accent1"/>
-          </a:lnRef>
-          <a:fillRef idx="3">
-            <a:schemeClr val="accent1"/>
-          </a:fillRef>
-          <a:effectRef idx="2">
-            <a:schemeClr val="accent1"/>
-          </a:effectRef>
-          <a:fontRef idx="minor">
-            <a:schemeClr val="lt1"/>
-          </a:fontRef>
-        </p:style>
-        <p:txBody>
-          <a:bodyPr rtlCol="0" anchor="ctr"/>
-          <a:lstStyle/>
-          <a:p>
-            <a:pPr algn="ctr"/>
-          </a:p>
-        </p:txBody>
-      </p:sp>
-      <p:sp>
-        <p:nvSpPr>
-          <p:cNvPr id="19" name="Rounded Rectangle 18"/>
-          <p:cNvSpPr/>
-          <p:nvPr/>
-        </p:nvSpPr>
-        <p:spPr>
-          <a:xfrm>
-            <a:off x="594360" y="5394960"/>
-            <a:ext cx="438912" cy="438912"/>
-          </a:xfrm>
-          <a:prstGeom prst="roundRect">
-            <a:avLst>
-              <a:gd name="adj" fmla="val 12000"/>
-            </a:avLst>
-          </a:prstGeom>
-          <a:solidFill>
-            <a:srgbClr val="095292"/>
-          </a:solidFill>
-          <a:ln>
-            <a:noFill/>
-          </a:ln>
-        </p:spPr>
-        <p:style>
-          <a:lnRef idx="1">
-            <a:schemeClr val="accent1"/>
-          </a:lnRef>
-          <a:fillRef idx="3">
-            <a:schemeClr val="accent1"/>
-          </a:fillRef>
-          <a:effectRef idx="2">
-            <a:schemeClr val="accent1"/>
-          </a:effectRef>
-          <a:fontRef idx="minor">
-            <a:schemeClr val="lt1"/>
-          </a:fontRef>
-        </p:style>
-        <p:txBody>
-          <a:bodyPr rtlCol="0" anchor="ctr"/>
-          <a:lstStyle/>
-          <a:p>
-            <a:pPr algn="ctr"/>
-          </a:p>
-        </p:txBody>
-      </p:sp>
-      <p:sp>
-        <p:nvSpPr>
-          <p:cNvPr id="20" name="TextBox 19"/>
-          <p:cNvSpPr txBox="1"/>
-          <p:nvPr/>
-        </p:nvSpPr>
-        <p:spPr>
-          <a:xfrm>
-            <a:off x="594360" y="5394960"/>
-            <a:ext cx="438912" cy="438912"/>
-          </a:xfrm>
-          <a:prstGeom prst="rect">
-            <a:avLst/>
-          </a:prstGeom>
-          <a:noFill/>
-        </p:spPr>
-        <p:txBody>
-          <a:bodyPr wrap="square" anchor="ctr"/>
-          <a:lstStyle/>
-          <a:p>
-            <a:pPr algn="ctr"/>
-            <a:r>
-              <a:rPr sz="1600" b="1" i="0">
-                <a:solidFill>
-                  <a:srgbClr val="FFFFFF"/>
-                </a:solidFill>
-                <a:latin typeface="Calibri"/>
-              </a:rPr>
-              <a:t>4</a:t>
-            </a:r>
-          </a:p>
-        </p:txBody>
-      </p:sp>
-      <p:sp>
-        <p:nvSpPr>
-          <p:cNvPr id="21" name="TextBox 20"/>
-          <p:cNvSpPr txBox="1"/>
-          <p:nvPr/>
-        </p:nvSpPr>
-        <p:spPr>
-          <a:xfrm>
-            <a:off x="1188720" y="5180076"/>
-            <a:ext cx="10271455" cy="886968"/>
-          </a:xfrm>
-          <a:prstGeom prst="rect">
-            <a:avLst/>
-          </a:prstGeom>
-          <a:noFill/>
-        </p:spPr>
-        <p:txBody>
-          <a:bodyPr wrap="square" anchor="ctr"/>
-          <a:lstStyle/>
-          <a:p>
-            <a:r>
-              <a:rPr sz="1500" b="1" i="0">
-                <a:solidFill>
-                  <a:srgbClr val="095292"/>
-                </a:solidFill>
-                <a:latin typeface="Calibri"/>
-              </a:rPr>
-              <a:t>Guarda el PNG para tu PI</a:t>
-            </a:r>
-          </a:p>
-          <a:p>
-            <a:pPr>
-              <a:spcBef>
-                <a:spcPts val="200"/>
-              </a:spcBef>
-            </a:pPr>
-            <a:r>
-              <a:rPr sz="1300" b="0" i="0">
-                <a:solidFill>
-                  <a:srgbClr val="333333"/>
-                </a:solidFill>
-                <a:latin typeface="Calibri"/>
-              </a:rPr>
-              <a:t>Exporta tambien la imagen a la carpeta de tu Proyecto Integrador. Esa copia es para tu informe; no reemplaza la respuesta en la plataforma.</a:t>
-            </a:r>
-          </a:p>
-        </p:txBody>
-      </p:sp>
-      <p:sp>
-        <p:nvSpPr>
-          <p:cNvPr id="22" name="TextBox 21"/>
-          <p:cNvSpPr txBox="1"/>
-          <p:nvPr/>
-        </p:nvSpPr>
-        <p:spPr>
-          <a:xfrm>
-            <a:off x="11185855" y="6473952"/>
-            <a:ext cx="640080" cy="274320"/>
-          </a:xfrm>
-          <a:prstGeom prst="rect">
-            <a:avLst/>
-          </a:prstGeom>
-          <a:noFill/>
-        </p:spPr>
-        <p:txBody>
-          <a:bodyPr wrap="square">
-            <a:spAutoFit/>
-          </a:bodyPr>
-          <a:lstStyle/>
-          <a:p>
-            <a:pPr algn="r"/>
-            <a:r>
-              <a:rPr sz="1100" b="0" i="0">
-                <a:solidFill>
-                  <a:srgbClr val="666666"/>
-                </a:solidFill>
-                <a:latin typeface="Calibri"/>
-              </a:rPr>
-              <a:t>26</a:t>
-            </a:r>
-          </a:p>
-        </p:txBody>
-      </p:sp>
-    </p:spTree>
-  </p:cSld>
-  <p:clrMapOvr>
-    <a:masterClrMapping/>
-  </p:clrMapOvr>
-</p:sld>
-</file>
-
-<file path=ppt/slides/slide27.xml><?xml version="1.0" encoding="utf-8"?>
-<p:sld xmlns:a="http://schemas.openxmlformats.org/drawingml/2006/main" xmlns:p="http://schemas.openxmlformats.org/presentationml/2006/main" xmlns:r="http://schemas.openxmlformats.org/officeDocument/2006/relationships">
-  <p:cSld>
-    <p:bg>
-      <p:bgPr>
-        <a:solidFill>
-          <a:srgbClr val="FFFFFF"/>
-        </a:solidFill>
-        <a:effectLst/>
-      </p:bgPr>
-    </p:bg>
-    <p:spTree>
-      <p:nvGrpSpPr>
-        <p:cNvPr id="1" name=""/>
-        <p:cNvGrpSpPr/>
-        <p:nvPr/>
-      </p:nvGrpSpPr>
-      <p:grpSpPr/>
-      <p:sp>
-        <p:nvSpPr>
-          <p:cNvPr id="2" name="Rectangle 1"/>
-          <p:cNvSpPr/>
-          <p:nvPr/>
-        </p:nvSpPr>
-        <p:spPr>
-          <a:xfrm>
-            <a:off x="0" y="0"/>
-            <a:ext cx="12191695" cy="960120"/>
-          </a:xfrm>
-          <a:prstGeom prst="rect">
-            <a:avLst/>
-          </a:prstGeom>
-          <a:solidFill>
-            <a:srgbClr val="095292"/>
-          </a:solidFill>
-          <a:ln>
-            <a:noFill/>
-          </a:ln>
-        </p:spPr>
-        <p:style>
-          <a:lnRef idx="1">
-            <a:schemeClr val="accent1"/>
-          </a:lnRef>
-          <a:fillRef idx="3">
-            <a:schemeClr val="accent1"/>
-          </a:fillRef>
-          <a:effectRef idx="2">
-            <a:schemeClr val="accent1"/>
-          </a:effectRef>
-          <a:fontRef idx="minor">
-            <a:schemeClr val="lt1"/>
-          </a:fontRef>
-        </p:style>
-        <p:txBody>
-          <a:bodyPr rtlCol="0" anchor="ctr"/>
-          <a:lstStyle/>
-          <a:p>
-            <a:pPr algn="ctr"/>
-          </a:p>
-        </p:txBody>
-      </p:sp>
-      <p:sp>
-        <p:nvSpPr>
-          <p:cNvPr id="3" name="Rectangle 2"/>
-          <p:cNvSpPr/>
-          <p:nvPr/>
-        </p:nvSpPr>
-        <p:spPr>
-          <a:xfrm>
-            <a:off x="0" y="960120"/>
-            <a:ext cx="12191695" cy="41148"/>
-          </a:xfrm>
-          <a:prstGeom prst="rect">
-            <a:avLst/>
-          </a:prstGeom>
-          <a:solidFill>
-            <a:srgbClr val="FFD000"/>
-          </a:solidFill>
-          <a:ln>
-            <a:noFill/>
-          </a:ln>
-        </p:spPr>
-        <p:style>
-          <a:lnRef idx="1">
-            <a:schemeClr val="accent1"/>
-          </a:lnRef>
-          <a:fillRef idx="3">
-            <a:schemeClr val="accent1"/>
-          </a:fillRef>
-          <a:effectRef idx="2">
-            <a:schemeClr val="accent1"/>
-          </a:effectRef>
-          <a:fontRef idx="minor">
-            <a:schemeClr val="lt1"/>
-          </a:fontRef>
-        </p:style>
-        <p:txBody>
-          <a:bodyPr rtlCol="0" anchor="ctr"/>
-          <a:lstStyle/>
-          <a:p>
-            <a:pPr algn="ctr"/>
-          </a:p>
-        </p:txBody>
-      </p:sp>
-      <p:sp>
-        <p:nvSpPr>
-          <p:cNvPr id="4" name="TextBox 3"/>
-          <p:cNvSpPr txBox="1"/>
-          <p:nvPr/>
-        </p:nvSpPr>
-        <p:spPr>
-          <a:xfrm>
-            <a:off x="457200" y="164592"/>
-            <a:ext cx="11277295" cy="502920"/>
-          </a:xfrm>
-          <a:prstGeom prst="rect">
-            <a:avLst/>
-          </a:prstGeom>
-          <a:noFill/>
-        </p:spPr>
-        <p:txBody>
-          <a:bodyPr wrap="square">
-            <a:spAutoFit/>
-          </a:bodyPr>
-          <a:lstStyle/>
-          <a:p>
-            <a:r>
-              <a:rPr sz="2600" b="1" i="0">
-                <a:solidFill>
-                  <a:srgbClr val="FFFFFF"/>
-                </a:solidFill>
-                <a:latin typeface="Calibri"/>
-              </a:rPr>
-              <a:t>PI CloudLite — entregable de hoy</a:t>
-            </a:r>
-          </a:p>
-        </p:txBody>
-      </p:sp>
-      <p:sp>
-        <p:nvSpPr>
-          <p:cNvPr id="5" name="TextBox 4"/>
-          <p:cNvSpPr txBox="1"/>
-          <p:nvPr/>
-        </p:nvSpPr>
-        <p:spPr>
-          <a:xfrm>
-            <a:off x="457200" y="1170432"/>
-            <a:ext cx="11277295" cy="5230368"/>
-          </a:xfrm>
-          <a:prstGeom prst="rect">
-            <a:avLst/>
-          </a:prstGeom>
-          <a:noFill/>
-        </p:spPr>
-        <p:txBody>
-          <a:bodyPr wrap="square">
-            <a:spAutoFit/>
-          </a:bodyPr>
-          <a:lstStyle/>
-          <a:p>
-            <a:pPr>
-              <a:spcAft>
-                <a:spcPts val="800"/>
-              </a:spcAft>
-            </a:pPr>
-            <a:r>
-              <a:rPr sz="2000" b="0" i="0">
-                <a:solidFill>
-                  <a:srgbClr val="333333"/>
-                </a:solidFill>
-                <a:latin typeface="Calibri"/>
-              </a:rPr>
-              <a:t>–   </a:t>
-            </a:r>
             <a:r>
               <a:rPr sz="2000" b="1" i="0">
                 <a:solidFill>
-                  <a:srgbClr val="333333"/>
-                </a:solidFill>
-                <a:latin typeface="Calibri"/>
-              </a:rPr>
-              <a:t>Entregable:</a:t>
-            </a:r>
-            <a:r>
-              <a:rPr sz="2000" b="0" i="0">
-                <a:solidFill>
-                  <a:srgbClr val="333333"/>
-                </a:solidFill>
-                <a:latin typeface="Calibri"/>
-              </a:rPr>
-              <a:t> Sección Escalabilidad: triggers, límites, qué escala y qué no</a:t>
-            </a:r>
-          </a:p>
-          <a:p>
-            <a:pPr>
-              <a:spcAft>
-                <a:spcPts val="800"/>
-              </a:spcAft>
-            </a:pPr>
-            <a:r>
-              <a:rPr sz="2000" b="0" i="0">
-                <a:solidFill>
-                  <a:srgbClr val="333333"/>
-                </a:solidFill>
-                <a:latin typeface="Calibri"/>
-              </a:rPr>
-              <a:t>–   Herramienta: </a:t>
-            </a:r>
-            <a:r>
-              <a:rPr sz="2000" b="1" i="0">
-                <a:solidFill>
-                  <a:srgbClr val="333333"/>
-                </a:solidFill>
-                <a:latin typeface="Calibri"/>
-              </a:rPr>
-              <a:t>Navegador · editores de texto y de diagramas del curso</a:t>
-            </a:r>
-          </a:p>
-          <a:p>
-            <a:pPr>
-              <a:spcAft>
-                <a:spcPts val="800"/>
-              </a:spcAft>
-            </a:pPr>
-            <a:r>
-              <a:rPr sz="2000" b="0" i="0">
-                <a:solidFill>
-                  <a:srgbClr val="333333"/>
-                </a:solidFill>
-                <a:latin typeface="Calibri"/>
-              </a:rPr>
-              <a:t>–   Todo lo que construyan hoy entra al </a:t>
-            </a:r>
-            <a:r>
-              <a:rPr sz="2000" b="1" i="0">
-                <a:solidFill>
-                  <a:srgbClr val="333333"/>
-                </a:solidFill>
-                <a:latin typeface="Calibri"/>
-              </a:rPr>
-              <a:t>informe/repo del PI</a:t>
-            </a:r>
-            <a:r>
-              <a:rPr sz="2000" b="0" i="0">
-                <a:solidFill>
-                  <a:srgbClr val="333333"/>
-                </a:solidFill>
-                <a:latin typeface="Calibri"/>
-              </a:rPr>
-              <a:t> (no es lab suelto).</a:t>
-            </a:r>
-          </a:p>
-          <a:p>
-            <a:pPr>
-              <a:spcAft>
-                <a:spcPts val="800"/>
-              </a:spcAft>
-            </a:pPr>
-            <a:r>
-              <a:rPr sz="2000" b="0" i="0">
-                <a:solidFill>
-                  <a:srgbClr val="333333"/>
-                </a:solidFill>
-                <a:latin typeface="Calibri"/>
-              </a:rPr>
-              <a:t>–   Individual por defecto · el docente puede autorizar equipos de 2–3; la entrega en la plataforma del curso siempre es individual.</a:t>
-            </a:r>
-          </a:p>
-        </p:txBody>
-      </p:sp>
-      <p:sp>
-        <p:nvSpPr>
-          <p:cNvPr id="6" name="TextBox 5"/>
-          <p:cNvSpPr txBox="1"/>
-          <p:nvPr/>
-        </p:nvSpPr>
-        <p:spPr>
-          <a:xfrm>
-            <a:off x="11185855" y="6473952"/>
-            <a:ext cx="640080" cy="274320"/>
-          </a:xfrm>
-          <a:prstGeom prst="rect">
-            <a:avLst/>
-          </a:prstGeom>
-          <a:noFill/>
-        </p:spPr>
-        <p:txBody>
-          <a:bodyPr wrap="square">
-            <a:spAutoFit/>
-          </a:bodyPr>
-          <a:lstStyle/>
-          <a:p>
-            <a:pPr algn="r"/>
-            <a:r>
-              <a:rPr sz="1100" b="0" i="0">
-                <a:solidFill>
-                  <a:srgbClr val="666666"/>
-                </a:solidFill>
-                <a:latin typeface="Calibri"/>
-              </a:rPr>
-              <a:t>27</a:t>
-            </a:r>
-          </a:p>
-        </p:txBody>
-      </p:sp>
-    </p:spTree>
-  </p:cSld>
-  <p:clrMapOvr>
-    <a:masterClrMapping/>
-  </p:clrMapOvr>
-</p:sld>
-</file>
-
-<file path=ppt/slides/slide28.xml><?xml version="1.0" encoding="utf-8"?>
-<p:sld xmlns:a="http://schemas.openxmlformats.org/drawingml/2006/main" xmlns:p="http://schemas.openxmlformats.org/presentationml/2006/main" xmlns:r="http://schemas.openxmlformats.org/officeDocument/2006/relationships">
-  <p:cSld>
-    <p:bg>
-      <p:bgPr>
-        <a:solidFill>
-          <a:srgbClr val="FFFFFF"/>
-        </a:solidFill>
-        <a:effectLst/>
-      </p:bgPr>
-    </p:bg>
-    <p:spTree>
-      <p:nvGrpSpPr>
-        <p:cNvPr id="1" name=""/>
-        <p:cNvGrpSpPr/>
-        <p:nvPr/>
-      </p:nvGrpSpPr>
-      <p:grpSpPr/>
-      <p:sp>
-        <p:nvSpPr>
-          <p:cNvPr id="2" name="Rectangle 1"/>
-          <p:cNvSpPr/>
-          <p:nvPr/>
-        </p:nvSpPr>
-        <p:spPr>
-          <a:xfrm>
-            <a:off x="0" y="0"/>
-            <a:ext cx="12191695" cy="960120"/>
-          </a:xfrm>
-          <a:prstGeom prst="rect">
-            <a:avLst/>
-          </a:prstGeom>
-          <a:solidFill>
-            <a:srgbClr val="095292"/>
-          </a:solidFill>
-          <a:ln>
-            <a:noFill/>
-          </a:ln>
-        </p:spPr>
-        <p:style>
-          <a:lnRef idx="1">
-            <a:schemeClr val="accent1"/>
-          </a:lnRef>
-          <a:fillRef idx="3">
-            <a:schemeClr val="accent1"/>
-          </a:fillRef>
-          <a:effectRef idx="2">
-            <a:schemeClr val="accent1"/>
-          </a:effectRef>
-          <a:fontRef idx="minor">
-            <a:schemeClr val="lt1"/>
-          </a:fontRef>
-        </p:style>
-        <p:txBody>
-          <a:bodyPr rtlCol="0" anchor="ctr"/>
-          <a:lstStyle/>
-          <a:p>
-            <a:pPr algn="ctr"/>
-          </a:p>
-        </p:txBody>
-      </p:sp>
-      <p:sp>
-        <p:nvSpPr>
-          <p:cNvPr id="3" name="Rectangle 2"/>
-          <p:cNvSpPr/>
-          <p:nvPr/>
-        </p:nvSpPr>
-        <p:spPr>
-          <a:xfrm>
-            <a:off x="0" y="960120"/>
-            <a:ext cx="12191695" cy="41148"/>
-          </a:xfrm>
-          <a:prstGeom prst="rect">
-            <a:avLst/>
-          </a:prstGeom>
-          <a:solidFill>
-            <a:srgbClr val="FFD000"/>
-          </a:solidFill>
-          <a:ln>
-            <a:noFill/>
-          </a:ln>
-        </p:spPr>
-        <p:style>
-          <a:lnRef idx="1">
-            <a:schemeClr val="accent1"/>
-          </a:lnRef>
-          <a:fillRef idx="3">
-            <a:schemeClr val="accent1"/>
-          </a:fillRef>
-          <a:effectRef idx="2">
-            <a:schemeClr val="accent1"/>
-          </a:effectRef>
-          <a:fontRef idx="minor">
-            <a:schemeClr val="lt1"/>
-          </a:fontRef>
-        </p:style>
-        <p:txBody>
-          <a:bodyPr rtlCol="0" anchor="ctr"/>
-          <a:lstStyle/>
-          <a:p>
-            <a:pPr algn="ctr"/>
-          </a:p>
-        </p:txBody>
-      </p:sp>
-      <p:sp>
-        <p:nvSpPr>
-          <p:cNvPr id="4" name="TextBox 3"/>
-          <p:cNvSpPr txBox="1"/>
-          <p:nvPr/>
-        </p:nvSpPr>
-        <p:spPr>
-          <a:xfrm>
-            <a:off x="457200" y="164592"/>
-            <a:ext cx="11277295" cy="502920"/>
-          </a:xfrm>
-          <a:prstGeom prst="rect">
-            <a:avLst/>
-          </a:prstGeom>
-          <a:noFill/>
-        </p:spPr>
-        <p:txBody>
-          <a:bodyPr wrap="square">
-            <a:spAutoFit/>
-          </a:bodyPr>
-          <a:lstStyle/>
-          <a:p>
-            <a:r>
-              <a:rPr sz="2600" b="1" i="0">
-                <a:solidFill>
-                  <a:srgbClr val="FFFFFF"/>
-                </a:solidFill>
-                <a:latin typeface="Calibri"/>
-              </a:rPr>
-              <a:t>Manos a la obra (paso a paso)</a:t>
-            </a:r>
-          </a:p>
-        </p:txBody>
-      </p:sp>
-      <p:sp>
-        <p:nvSpPr>
-          <p:cNvPr id="5" name="TextBox 4"/>
-          <p:cNvSpPr txBox="1"/>
-          <p:nvPr/>
-        </p:nvSpPr>
-        <p:spPr>
-          <a:xfrm>
-            <a:off x="457200" y="1170432"/>
-            <a:ext cx="11277295" cy="5230368"/>
-          </a:xfrm>
-          <a:prstGeom prst="rect">
-            <a:avLst/>
-          </a:prstGeom>
-          <a:noFill/>
-        </p:spPr>
-        <p:txBody>
-          <a:bodyPr wrap="square">
-            <a:spAutoFit/>
-          </a:bodyPr>
-          <a:lstStyle/>
-          <a:p>
-            <a:pPr>
-              <a:spcAft>
-                <a:spcPts val="800"/>
-              </a:spcAft>
-            </a:pPr>
-            <a:r>
-              <a:rPr sz="1800" b="1" i="0">
-                <a:solidFill>
-                  <a:srgbClr val="333333"/>
-                </a:solidFill>
-                <a:latin typeface="Calibri"/>
-              </a:rPr>
-              <a:t>1.</a:t>
-            </a:r>
-            <a:r>
-              <a:rPr sz="1800" b="0" i="0">
-                <a:solidFill>
-                  <a:srgbClr val="333333"/>
-                </a:solidFill>
-                <a:latin typeface="Calibri"/>
-              </a:rPr>
-              <a:t> Paso 1: tome los 5 componentes de su C4Deployment de la Clase 7 y clasifique cada uno como escala horizontal, escala vertical o no escala, verificando que al menos uno quede en no escala con justificacion tecnica, porque una politica donde todo escala no es una politica; el resultado abre la seccion Escalabilidad del informe.</a:t>
-            </a:r>
-          </a:p>
-          <a:p>
-            <a:pPr>
-              <a:spcAft>
-                <a:spcPts val="800"/>
-              </a:spcAft>
-            </a:pPr>
-            <a:r>
-              <a:rPr sz="1800" b="0" i="0">
-                <a:solidFill>
-                  <a:srgbClr val="333333"/>
-                </a:solidFill>
-                <a:latin typeface="Calibri"/>
-              </a:rPr>
-              <a:t>–   </a:t>
-            </a:r>
-            <a:r>
-              <a:rPr sz="1800" b="1" i="0">
-                <a:solidFill>
-                  <a:srgbClr val="333333"/>
-                </a:solidFill>
-                <a:latin typeface="Calibri"/>
-              </a:rPr>
-              <a:t>2.</a:t>
-            </a:r>
-            <a:r>
-              <a:rPr sz="1800" b="0" i="0">
-                <a:solidFill>
-                  <a:srgbClr val="333333"/>
-                </a:solidFill>
-                <a:latin typeface="Calibri"/>
-              </a:rPr>
-              <a:t> Paso 2: complete la tabla de politica de escalado con 6 columnas y 5 filas (componente, tipo de escala, disparador de subida, disparador de bajada, minimo y maximo, tiempo de enfriamiento), verificando que cada disparador tenga metrica, umbral numerico y ventana de tiempo, y que ningun maximo quede en infinito o sin definir.</a:t>
-            </a:r>
-          </a:p>
-          <a:p>
-            <a:pPr>
-              <a:spcAft>
-                <a:spcPts val="800"/>
-              </a:spcAft>
-            </a:pPr>
-            <a:r>
-              <a:rPr sz="1800" b="0" i="0">
-                <a:solidFill>
-                  <a:srgbClr val="333333"/>
-                </a:solidFill>
-                <a:latin typeface="Calibri"/>
-              </a:rPr>
-              <a:t>–   </a:t>
-            </a:r>
-            <a:r>
-              <a:rPr sz="1800" b="1" i="0">
-                <a:solidFill>
-                  <a:srgbClr val="333333"/>
-                </a:solidFill>
-                <a:latin typeface="Calibri"/>
-              </a:rPr>
-              <a:t>3.</a:t>
-            </a:r>
-            <a:r>
-              <a:rPr sz="1800" b="0" i="0">
-                <a:solidFill>
-                  <a:srgbClr val="333333"/>
-                </a:solidFill>
-                <a:latin typeface="Calibri"/>
-              </a:rPr>
-              <a:t> Paso 3: escriba en la plataforma del curso el diagrama Mermaid de la maquina de decision del autoescalado con el nodo de observacion, los dos rombos de decision, las acciones de subida y bajada, el enfriamiento y el nodo de lo que no escala, verificando al renderizar que el ciclo se cierre sobre el nodo de observacion y que los umbrales del diagrama sean los mismos numeros de la tabla.</a:t>
-            </a:r>
-          </a:p>
-          <a:p>
-            <a:pPr>
-              <a:spcAft>
-                <a:spcPts val="800"/>
-              </a:spcAft>
-            </a:pPr>
-            <a:r>
-              <a:rPr sz="1800" b="0" i="0">
-                <a:solidFill>
-                  <a:srgbClr val="333333"/>
-                </a:solidFill>
-                <a:latin typeface="Calibri"/>
-              </a:rPr>
-              <a:t>–   </a:t>
-            </a:r>
-            <a:r>
-              <a:rPr sz="1800" b="1" i="0">
-                <a:solidFill>
-                  <a:srgbClr val="333333"/>
-                </a:solidFill>
-                <a:latin typeface="Calibri"/>
-              </a:rPr>
-              <a:t>4.</a:t>
-            </a:r>
-            <a:r>
-              <a:rPr sz="1800" b="0" i="0">
-                <a:solidFill>
-                  <a:srgbClr val="333333"/>
-                </a:solidFill>
-                <a:latin typeface="Calibri"/>
-              </a:rPr>
-              <a:t> Paso 4: escriba los 3 componentes que NO escalan con su justificacion tecnica y su plan alterno, y la tabla de impacto en costos que enlaza con la Clase 10, verificando que cada plan alterno sea ejecutable sin cloud de pago y que el impacto de costo use los mismos niveles bajo, medio o alto de la seccion de costos.</a:t>
-            </a:r>
-          </a:p>
-          <a:p>
-            <a:pPr>
-              <a:spcAft>
-                <a:spcPts val="800"/>
-              </a:spcAft>
-            </a:pPr>
-            <a:r>
-              <a:rPr sz="1800" b="0" i="0">
-                <a:solidFill>
-                  <a:srgbClr val="333333"/>
-                </a:solidFill>
-                <a:latin typeface="Calibri"/>
-              </a:rPr>
-              <a:t>–   </a:t>
-            </a:r>
-            <a:r>
-              <a:rPr sz="1800" b="1" i="0">
-                <a:solidFill>
-                  <a:srgbClr val="333333"/>
-                </a:solidFill>
-                <a:latin typeface="Calibri"/>
-              </a:rPr>
-              <a:t>5.</a:t>
-            </a:r>
-            <a:r>
-              <a:rPr sz="1800" b="0" i="0">
-                <a:solidFill>
-                  <a:srgbClr val="333333"/>
-                </a:solidFill>
-                <a:latin typeface="Calibri"/>
-              </a:rPr>
-              <a:t> Paso 5: integre la politica en la seccion Escalabilidad del informe, anote la marca de replicas en el diagrama de despliegue si aplica y suba las 5 preguntas a la plataforma del curso (modulo Talleres) antes del en la fecha que indique el docente, verificando que la politica no prometa nada que la arquitectura dibujada no pueda cumplir.</a:t>
-            </a:r>
-          </a:p>
-        </p:txBody>
-      </p:sp>
-      <p:sp>
-        <p:nvSpPr>
-          <p:cNvPr id="6" name="TextBox 5"/>
-          <p:cNvSpPr txBox="1"/>
-          <p:nvPr/>
-        </p:nvSpPr>
-        <p:spPr>
-          <a:xfrm>
-            <a:off x="11185855" y="6473952"/>
-            <a:ext cx="640080" cy="274320"/>
-          </a:xfrm>
-          <a:prstGeom prst="rect">
-            <a:avLst/>
-          </a:prstGeom>
-          <a:noFill/>
-        </p:spPr>
-        <p:txBody>
-          <a:bodyPr wrap="square">
-            <a:spAutoFit/>
-          </a:bodyPr>
-          <a:lstStyle/>
-          <a:p>
-            <a:pPr algn="r"/>
-            <a:r>
-              <a:rPr sz="1100" b="0" i="0">
-                <a:solidFill>
-                  <a:srgbClr val="666666"/>
-                </a:solidFill>
-                <a:latin typeface="Calibri"/>
-              </a:rPr>
-              <a:t>28</a:t>
-            </a:r>
-          </a:p>
-        </p:txBody>
-      </p:sp>
-    </p:spTree>
-  </p:cSld>
-  <p:clrMapOvr>
-    <a:masterClrMapping/>
-  </p:clrMapOvr>
-</p:sld>
-</file>
-
-<file path=ppt/slides/slide29.xml><?xml version="1.0" encoding="utf-8"?>
-<p:sld xmlns:a="http://schemas.openxmlformats.org/drawingml/2006/main" xmlns:p="http://schemas.openxmlformats.org/presentationml/2006/main" xmlns:r="http://schemas.openxmlformats.org/officeDocument/2006/relationships">
-  <p:cSld>
-    <p:bg>
-      <p:bgPr>
-        <a:solidFill>
-          <a:srgbClr val="FFFFFF"/>
-        </a:solidFill>
-        <a:effectLst/>
-      </p:bgPr>
-    </p:bg>
-    <p:spTree>
-      <p:nvGrpSpPr>
-        <p:cNvPr id="1" name=""/>
-        <p:cNvGrpSpPr/>
-        <p:nvPr/>
-      </p:nvGrpSpPr>
-      <p:grpSpPr/>
-      <p:sp>
-        <p:nvSpPr>
-          <p:cNvPr id="2" name="Rectangle 1"/>
-          <p:cNvSpPr/>
-          <p:nvPr/>
-        </p:nvSpPr>
-        <p:spPr>
-          <a:xfrm>
-            <a:off x="0" y="0"/>
-            <a:ext cx="12191695" cy="960120"/>
-          </a:xfrm>
-          <a:prstGeom prst="rect">
-            <a:avLst/>
-          </a:prstGeom>
-          <a:solidFill>
-            <a:srgbClr val="095292"/>
-          </a:solidFill>
-          <a:ln>
-            <a:noFill/>
-          </a:ln>
-        </p:spPr>
-        <p:style>
-          <a:lnRef idx="1">
-            <a:schemeClr val="accent1"/>
-          </a:lnRef>
-          <a:fillRef idx="3">
-            <a:schemeClr val="accent1"/>
-          </a:fillRef>
-          <a:effectRef idx="2">
-            <a:schemeClr val="accent1"/>
-          </a:effectRef>
-          <a:fontRef idx="minor">
-            <a:schemeClr val="lt1"/>
-          </a:fontRef>
-        </p:style>
-        <p:txBody>
-          <a:bodyPr rtlCol="0" anchor="ctr"/>
-          <a:lstStyle/>
-          <a:p>
-            <a:pPr algn="ctr"/>
-          </a:p>
-        </p:txBody>
-      </p:sp>
-      <p:sp>
-        <p:nvSpPr>
-          <p:cNvPr id="3" name="Rectangle 2"/>
-          <p:cNvSpPr/>
-          <p:nvPr/>
-        </p:nvSpPr>
-        <p:spPr>
-          <a:xfrm>
-            <a:off x="0" y="960120"/>
-            <a:ext cx="12191695" cy="41148"/>
-          </a:xfrm>
-          <a:prstGeom prst="rect">
-            <a:avLst/>
-          </a:prstGeom>
-          <a:solidFill>
-            <a:srgbClr val="FFD000"/>
-          </a:solidFill>
-          <a:ln>
-            <a:noFill/>
-          </a:ln>
-        </p:spPr>
-        <p:style>
-          <a:lnRef idx="1">
-            <a:schemeClr val="accent1"/>
-          </a:lnRef>
-          <a:fillRef idx="3">
-            <a:schemeClr val="accent1"/>
-          </a:fillRef>
-          <a:effectRef idx="2">
-            <a:schemeClr val="accent1"/>
-          </a:effectRef>
-          <a:fontRef idx="minor">
-            <a:schemeClr val="lt1"/>
-          </a:fontRef>
-        </p:style>
-        <p:txBody>
-          <a:bodyPr rtlCol="0" anchor="ctr"/>
-          <a:lstStyle/>
-          <a:p>
-            <a:pPr algn="ctr"/>
-          </a:p>
-        </p:txBody>
-      </p:sp>
-      <p:sp>
-        <p:nvSpPr>
-          <p:cNvPr id="4" name="TextBox 3"/>
-          <p:cNvSpPr txBox="1"/>
-          <p:nvPr/>
-        </p:nvSpPr>
-        <p:spPr>
-          <a:xfrm>
-            <a:off x="457200" y="164592"/>
-            <a:ext cx="11277295" cy="502920"/>
-          </a:xfrm>
-          <a:prstGeom prst="rect">
-            <a:avLst/>
-          </a:prstGeom>
-          <a:noFill/>
-        </p:spPr>
-        <p:txBody>
-          <a:bodyPr wrap="square">
-            <a:spAutoFit/>
-          </a:bodyPr>
-          <a:lstStyle/>
-          <a:p>
-            <a:r>
-              <a:rPr sz="2600" b="1" i="0">
-                <a:solidFill>
-                  <a:srgbClr val="FFFFFF"/>
-                </a:solidFill>
-                <a:latin typeface="Calibri"/>
-              </a:rPr>
-              <a:t>Para continuar (PI)</a:t>
-            </a:r>
-          </a:p>
-        </p:txBody>
-      </p:sp>
-      <p:sp>
-        <p:nvSpPr>
-          <p:cNvPr id="5" name="Rounded Rectangle 4"/>
-          <p:cNvSpPr/>
-          <p:nvPr/>
-        </p:nvSpPr>
-        <p:spPr>
-          <a:xfrm>
-            <a:off x="457200" y="1261872"/>
-            <a:ext cx="11277295" cy="1051560"/>
-          </a:xfrm>
-          <a:prstGeom prst="roundRect">
-            <a:avLst>
-              <a:gd name="adj" fmla="val 12000"/>
-            </a:avLst>
-          </a:prstGeom>
-          <a:solidFill>
-            <a:srgbClr val="E8F4FA"/>
-          </a:solidFill>
-          <a:ln>
-            <a:noFill/>
-          </a:ln>
-        </p:spPr>
-        <p:style>
-          <a:lnRef idx="1">
-            <a:schemeClr val="accent1"/>
-          </a:lnRef>
-          <a:fillRef idx="3">
-            <a:schemeClr val="accent1"/>
-          </a:fillRef>
-          <a:effectRef idx="2">
-            <a:schemeClr val="accent1"/>
-          </a:effectRef>
-          <a:fontRef idx="minor">
-            <a:schemeClr val="lt1"/>
-          </a:fontRef>
-        </p:style>
-        <p:txBody>
-          <a:bodyPr rtlCol="0" anchor="ctr"/>
-          <a:lstStyle/>
-          <a:p>
-            <a:pPr algn="ctr"/>
-          </a:p>
-        </p:txBody>
-      </p:sp>
-      <p:sp>
-        <p:nvSpPr>
-          <p:cNvPr id="6" name="Rectangle 5"/>
-          <p:cNvSpPr/>
-          <p:nvPr/>
-        </p:nvSpPr>
-        <p:spPr>
-          <a:xfrm>
-            <a:off x="457200" y="1261872"/>
-            <a:ext cx="128016" cy="1051560"/>
-          </a:xfrm>
-          <a:prstGeom prst="rect">
-            <a:avLst/>
-          </a:prstGeom>
-          <a:solidFill>
-            <a:srgbClr val="269CCB"/>
-          </a:solidFill>
-          <a:ln>
-            <a:noFill/>
-          </a:ln>
-        </p:spPr>
-        <p:style>
-          <a:lnRef idx="1">
-            <a:schemeClr val="accent1"/>
-          </a:lnRef>
-          <a:fillRef idx="3">
-            <a:schemeClr val="accent1"/>
-          </a:fillRef>
-          <a:effectRef idx="2">
-            <a:schemeClr val="accent1"/>
-          </a:effectRef>
-          <a:fontRef idx="minor">
-            <a:schemeClr val="lt1"/>
-          </a:fontRef>
-        </p:style>
-        <p:txBody>
-          <a:bodyPr rtlCol="0" anchor="ctr"/>
-          <a:lstStyle/>
-          <a:p>
-            <a:pPr algn="ctr"/>
-          </a:p>
-        </p:txBody>
-      </p:sp>
-      <p:sp>
-        <p:nvSpPr>
-          <p:cNvPr id="7" name="TextBox 6"/>
-          <p:cNvSpPr txBox="1"/>
-          <p:nvPr/>
-        </p:nvSpPr>
-        <p:spPr>
-          <a:xfrm>
-            <a:off x="777240" y="1399031"/>
-            <a:ext cx="10774375" cy="822959"/>
-          </a:xfrm>
-          <a:prstGeom prst="rect">
-            <a:avLst/>
-          </a:prstGeom>
-          <a:noFill/>
-        </p:spPr>
-        <p:txBody>
-          <a:bodyPr wrap="square">
-            <a:spAutoFit/>
-          </a:bodyPr>
-          <a:lstStyle/>
-          <a:p>
-            <a:r>
-              <a:rPr sz="1200" b="1" i="0">
-                <a:solidFill>
                   <a:srgbClr val="269CCB"/>
                 </a:solidFill>
                 <a:latin typeface="Calibri"/>
               </a:rPr>
-              <a:t>Info</a:t>
-            </a:r>
-          </a:p>
-          <a:p>
-            <a:pPr>
-              <a:spcBef>
-                <a:spcPts val="400"/>
-              </a:spcBef>
-            </a:pPr>
-            <a:r>
-              <a:rPr sz="1400" b="0" i="0">
-                <a:solidFill>
-                  <a:srgbClr val="333333"/>
-                </a:solidFill>
-                <a:latin typeface="Calibri"/>
-              </a:rPr>
-              <a:t>Entregable: Sección Escalabilidad: triggers, límites, qué escala y qué no</a:t>
-            </a:r>
-          </a:p>
-        </p:txBody>
-      </p:sp>
-      <p:sp>
-        <p:nvSpPr>
-          <p:cNvPr id="8" name="Rounded Rectangle 7"/>
-          <p:cNvSpPr/>
-          <p:nvPr/>
-        </p:nvSpPr>
-        <p:spPr>
-          <a:xfrm>
-            <a:off x="457200" y="2478024"/>
-            <a:ext cx="11277295" cy="1051560"/>
-          </a:xfrm>
-          <a:prstGeom prst="roundRect">
-            <a:avLst>
-              <a:gd name="adj" fmla="val 12000"/>
-            </a:avLst>
-          </a:prstGeom>
-          <a:solidFill>
-            <a:srgbClr val="FFF8E1"/>
-          </a:solidFill>
-          <a:ln>
-            <a:noFill/>
-          </a:ln>
-        </p:spPr>
-        <p:style>
-          <a:lnRef idx="1">
-            <a:schemeClr val="accent1"/>
-          </a:lnRef>
-          <a:fillRef idx="3">
-            <a:schemeClr val="accent1"/>
-          </a:fillRef>
-          <a:effectRef idx="2">
-            <a:schemeClr val="accent1"/>
-          </a:effectRef>
-          <a:fontRef idx="minor">
-            <a:schemeClr val="lt1"/>
-          </a:fontRef>
-        </p:style>
-        <p:txBody>
-          <a:bodyPr rtlCol="0" anchor="ctr"/>
-          <a:lstStyle/>
-          <a:p>
-            <a:pPr algn="ctr"/>
-          </a:p>
-        </p:txBody>
-      </p:sp>
-      <p:sp>
-        <p:nvSpPr>
-          <p:cNvPr id="9" name="Rectangle 8"/>
-          <p:cNvSpPr/>
-          <p:nvPr/>
-        </p:nvSpPr>
-        <p:spPr>
-          <a:xfrm>
-            <a:off x="457200" y="2478024"/>
-            <a:ext cx="128016" cy="1051560"/>
-          </a:xfrm>
-          <a:prstGeom prst="rect">
-            <a:avLst/>
-          </a:prstGeom>
-          <a:solidFill>
-            <a:srgbClr val="FFD000"/>
-          </a:solidFill>
-          <a:ln>
-            <a:noFill/>
-          </a:ln>
-        </p:spPr>
-        <p:style>
-          <a:lnRef idx="1">
-            <a:schemeClr val="accent1"/>
-          </a:lnRef>
-          <a:fillRef idx="3">
-            <a:schemeClr val="accent1"/>
-          </a:fillRef>
-          <a:effectRef idx="2">
-            <a:schemeClr val="accent1"/>
-          </a:effectRef>
-          <a:fontRef idx="minor">
-            <a:schemeClr val="lt1"/>
-          </a:fontRef>
-        </p:style>
-        <p:txBody>
-          <a:bodyPr rtlCol="0" anchor="ctr"/>
-          <a:lstStyle/>
-          <a:p>
-            <a:pPr algn="ctr"/>
-          </a:p>
-        </p:txBody>
-      </p:sp>
-      <p:sp>
-        <p:nvSpPr>
-          <p:cNvPr id="10" name="TextBox 9"/>
-          <p:cNvSpPr txBox="1"/>
-          <p:nvPr/>
-        </p:nvSpPr>
-        <p:spPr>
-          <a:xfrm>
-            <a:off x="777240" y="2615184"/>
-            <a:ext cx="10774375" cy="822959"/>
-          </a:xfrm>
-          <a:prstGeom prst="rect">
-            <a:avLst/>
-          </a:prstGeom>
-          <a:noFill/>
-        </p:spPr>
-        <p:txBody>
-          <a:bodyPr wrap="square">
-            <a:spAutoFit/>
-          </a:bodyPr>
-          <a:lstStyle/>
-          <a:p>
-            <a:r>
-              <a:rPr sz="1200" b="1" i="0">
-                <a:solidFill>
-                  <a:srgbClr val="FFD000"/>
-                </a:solidFill>
-                <a:latin typeface="Calibri"/>
-              </a:rPr>
-              <a:t>Aclaración</a:t>
-            </a:r>
-          </a:p>
-          <a:p>
-            <a:pPr>
-              <a:spcBef>
-                <a:spcPts val="400"/>
-              </a:spcBef>
-            </a:pPr>
-            <a:r>
-              <a:rPr sz="1400" b="0" i="0">
-                <a:solidFill>
-                  <a:srgbClr val="333333"/>
-                </a:solidFill>
-                <a:latin typeface="Calibri"/>
-              </a:rPr>
-              <a:t>Subir evidencias al paquete CloudLite (Drive/repo) y a la plataforma del curso (la plataforma del curso) en la fecha que indique el docente.</a:t>
-            </a:r>
-          </a:p>
-        </p:txBody>
-      </p:sp>
-      <p:sp>
-        <p:nvSpPr>
-          <p:cNvPr id="11" name="Rounded Rectangle 10"/>
-          <p:cNvSpPr/>
-          <p:nvPr/>
-        </p:nvSpPr>
-        <p:spPr>
-          <a:xfrm>
-            <a:off x="457200" y="3694176"/>
-            <a:ext cx="11277295" cy="1051560"/>
-          </a:xfrm>
-          <a:prstGeom prst="roundRect">
-            <a:avLst>
-              <a:gd name="adj" fmla="val 12000"/>
-            </a:avLst>
-          </a:prstGeom>
-          <a:solidFill>
-            <a:srgbClr val="FBE4E4"/>
-          </a:solidFill>
-          <a:ln>
-            <a:noFill/>
-          </a:ln>
-        </p:spPr>
-        <p:style>
-          <a:lnRef idx="1">
-            <a:schemeClr val="accent1"/>
-          </a:lnRef>
-          <a:fillRef idx="3">
-            <a:schemeClr val="accent1"/>
-          </a:fillRef>
-          <a:effectRef idx="2">
-            <a:schemeClr val="accent1"/>
-          </a:effectRef>
-          <a:fontRef idx="minor">
-            <a:schemeClr val="lt1"/>
-          </a:fontRef>
-        </p:style>
-        <p:txBody>
-          <a:bodyPr rtlCol="0" anchor="ctr"/>
-          <a:lstStyle/>
-          <a:p>
-            <a:pPr algn="ctr"/>
-          </a:p>
-        </p:txBody>
-      </p:sp>
-      <p:sp>
-        <p:nvSpPr>
-          <p:cNvPr id="12" name="Rectangle 11"/>
-          <p:cNvSpPr/>
-          <p:nvPr/>
-        </p:nvSpPr>
-        <p:spPr>
-          <a:xfrm>
-            <a:off x="457200" y="3694176"/>
-            <a:ext cx="128016" cy="1051560"/>
-          </a:xfrm>
-          <a:prstGeom prst="rect">
-            <a:avLst/>
-          </a:prstGeom>
-          <a:solidFill>
-            <a:srgbClr val="A02030"/>
-          </a:solidFill>
-          <a:ln>
-            <a:noFill/>
-          </a:ln>
-        </p:spPr>
-        <p:style>
-          <a:lnRef idx="1">
-            <a:schemeClr val="accent1"/>
-          </a:lnRef>
-          <a:fillRef idx="3">
-            <a:schemeClr val="accent1"/>
-          </a:fillRef>
-          <a:effectRef idx="2">
-            <a:schemeClr val="accent1"/>
-          </a:effectRef>
-          <a:fontRef idx="minor">
-            <a:schemeClr val="lt1"/>
-          </a:fontRef>
-        </p:style>
-        <p:txBody>
-          <a:bodyPr rtlCol="0" anchor="ctr"/>
-          <a:lstStyle/>
-          <a:p>
-            <a:pPr algn="ctr"/>
-          </a:p>
-        </p:txBody>
-      </p:sp>
-      <p:sp>
-        <p:nvSpPr>
-          <p:cNvPr id="13" name="TextBox 12"/>
-          <p:cNvSpPr txBox="1"/>
-          <p:nvPr/>
-        </p:nvSpPr>
-        <p:spPr>
-          <a:xfrm>
-            <a:off x="777240" y="3831336"/>
-            <a:ext cx="10774375" cy="822959"/>
-          </a:xfrm>
-          <a:prstGeom prst="rect">
-            <a:avLst/>
-          </a:prstGeom>
-          <a:noFill/>
-        </p:spPr>
-        <p:txBody>
-          <a:bodyPr wrap="square">
-            <a:spAutoFit/>
-          </a:bodyPr>
-          <a:lstStyle/>
-          <a:p>
-            <a:r>
-              <a:rPr sz="1200" b="1" i="0">
-                <a:solidFill>
-                  <a:srgbClr val="A02030"/>
-                </a:solidFill>
-                <a:latin typeface="Calibri"/>
-              </a:rPr>
-              <a:t>Atención</a:t>
-            </a:r>
-          </a:p>
-          <a:p>
-            <a:pPr>
-              <a:spcBef>
-                <a:spcPts val="400"/>
-              </a:spcBef>
-            </a:pPr>
-            <a:r>
-              <a:rPr sz="1400" b="0" i="0">
-                <a:solidFill>
-                  <a:srgbClr val="333333"/>
-                </a:solidFill>
-                <a:latin typeface="Calibri"/>
-              </a:rPr>
-              <a:t>Sin cloud de pago ni instalaciones obligatorias de hipervisores/Docker Desktop.</a:t>
-            </a:r>
-          </a:p>
-        </p:txBody>
-      </p:sp>
-      <p:sp>
-        <p:nvSpPr>
-          <p:cNvPr id="14" name="TextBox 13"/>
-          <p:cNvSpPr txBox="1"/>
-          <p:nvPr/>
-        </p:nvSpPr>
-        <p:spPr>
-          <a:xfrm>
-            <a:off x="11185855" y="6473952"/>
-            <a:ext cx="640080" cy="274320"/>
-          </a:xfrm>
-          <a:prstGeom prst="rect">
-            <a:avLst/>
-          </a:prstGeom>
-          <a:noFill/>
-        </p:spPr>
-        <p:txBody>
-          <a:bodyPr wrap="square">
-            <a:spAutoFit/>
-          </a:bodyPr>
-          <a:lstStyle/>
-          <a:p>
-            <a:pPr algn="r"/>
-            <a:r>
-              <a:rPr sz="1100" b="0" i="0">
-                <a:solidFill>
-                  <a:srgbClr val="666666"/>
-                </a:solidFill>
-                <a:latin typeface="Calibri"/>
-              </a:rPr>
-              <a:t>29</a:t>
+              <a:t>Teoría al servicio del diseño</a:t>
             </a:r>
           </a:p>
         </p:txBody>
@@ -11705,238 +9586,6 @@
                 <a:latin typeface="Calibri"/>
               </a:rPr>
               <a:t>3</a:t>
-            </a:r>
-          </a:p>
-        </p:txBody>
-      </p:sp>
-    </p:spTree>
-  </p:cSld>
-  <p:clrMapOvr>
-    <a:masterClrMapping/>
-  </p:clrMapOvr>
-</p:sld>
-</file>
-
-<file path=ppt/slides/slide30.xml><?xml version="1.0" encoding="utf-8"?>
-<p:sld xmlns:a="http://schemas.openxmlformats.org/drawingml/2006/main" xmlns:p="http://schemas.openxmlformats.org/presentationml/2006/main" xmlns:r="http://schemas.openxmlformats.org/officeDocument/2006/relationships">
-  <p:cSld>
-    <p:bg>
-      <p:bgPr>
-        <a:solidFill>
-          <a:srgbClr val="FFFFFF"/>
-        </a:solidFill>
-        <a:effectLst/>
-      </p:bgPr>
-    </p:bg>
-    <p:spTree>
-      <p:nvGrpSpPr>
-        <p:cNvPr id="1" name=""/>
-        <p:cNvGrpSpPr/>
-        <p:nvPr/>
-      </p:nvGrpSpPr>
-      <p:grpSpPr/>
-      <p:sp>
-        <p:nvSpPr>
-          <p:cNvPr id="2" name="Rectangle 1"/>
-          <p:cNvSpPr/>
-          <p:nvPr/>
-        </p:nvSpPr>
-        <p:spPr>
-          <a:xfrm>
-            <a:off x="0" y="0"/>
-            <a:ext cx="12191695" cy="164592"/>
-          </a:xfrm>
-          <a:prstGeom prst="rect">
-            <a:avLst/>
-          </a:prstGeom>
-          <a:solidFill>
-            <a:srgbClr val="269CCB"/>
-          </a:solidFill>
-          <a:ln>
-            <a:noFill/>
-          </a:ln>
-        </p:spPr>
-        <p:style>
-          <a:lnRef idx="1">
-            <a:schemeClr val="accent1"/>
-          </a:lnRef>
-          <a:fillRef idx="3">
-            <a:schemeClr val="accent1"/>
-          </a:fillRef>
-          <a:effectRef idx="2">
-            <a:schemeClr val="accent1"/>
-          </a:effectRef>
-          <a:fontRef idx="minor">
-            <a:schemeClr val="lt1"/>
-          </a:fontRef>
-        </p:style>
-        <p:txBody>
-          <a:bodyPr rtlCol="0" anchor="ctr"/>
-          <a:lstStyle/>
-          <a:p>
-            <a:pPr algn="ctr"/>
-          </a:p>
-        </p:txBody>
-      </p:sp>
-      <p:pic>
-        <p:nvPicPr>
-          <p:cNvPr id="3" name="Picture 2" descr="logo_uniajc_color.png"/>
-          <p:cNvPicPr>
-            <a:picLocks noChangeAspect="1"/>
-          </p:cNvPicPr>
-          <p:nvPr/>
-        </p:nvPicPr>
-        <p:blipFill>
-          <a:blip r:embed="rId2"/>
-          <a:stretch>
-            <a:fillRect/>
-          </a:stretch>
-        </p:blipFill>
-        <p:spPr>
-          <a:xfrm>
-            <a:off x="10271455" y="5998464"/>
-            <a:ext cx="1463040" cy="643233"/>
-          </a:xfrm>
-          <a:prstGeom prst="rect">
-            <a:avLst/>
-          </a:prstGeom>
-        </p:spPr>
-      </p:pic>
-      <p:sp>
-        <p:nvSpPr>
-          <p:cNvPr id="4" name="TextBox 3"/>
-          <p:cNvSpPr txBox="1"/>
-          <p:nvPr/>
-        </p:nvSpPr>
-        <p:spPr>
-          <a:xfrm>
-            <a:off x="457200" y="1737360"/>
-            <a:ext cx="11277295" cy="1097280"/>
-          </a:xfrm>
-          <a:prstGeom prst="rect">
-            <a:avLst/>
-          </a:prstGeom>
-          <a:noFill/>
-        </p:spPr>
-        <p:txBody>
-          <a:bodyPr wrap="square" anchor="ctr"/>
-          <a:lstStyle/>
-          <a:p>
-            <a:pPr algn="ctr"/>
-            <a:r>
-              <a:rPr sz="3400" b="1" i="0">
-                <a:solidFill>
-                  <a:srgbClr val="095292"/>
-                </a:solidFill>
-                <a:latin typeface="Calibri"/>
-              </a:rPr>
-              <a:t>Clase 13 · PI en movimiento</a:t>
-            </a:r>
-          </a:p>
-        </p:txBody>
-      </p:sp>
-      <p:sp>
-        <p:nvSpPr>
-          <p:cNvPr id="5" name="TextBox 4"/>
-          <p:cNvSpPr txBox="1"/>
-          <p:nvPr/>
-        </p:nvSpPr>
-        <p:spPr>
-          <a:xfrm>
-            <a:off x="457200" y="3017520"/>
-            <a:ext cx="11277295" cy="1645920"/>
-          </a:xfrm>
-          <a:prstGeom prst="rect">
-            <a:avLst/>
-          </a:prstGeom>
-          <a:noFill/>
-        </p:spPr>
-        <p:txBody>
-          <a:bodyPr wrap="square">
-            <a:spAutoFit/>
-          </a:bodyPr>
-          <a:lstStyle/>
-          <a:p>
-            <a:pPr algn="ctr">
-              <a:spcAft>
-                <a:spcPts val="600"/>
-              </a:spcAft>
-            </a:pPr>
-            <a:r>
-              <a:rPr sz="1600" b="0" i="0">
-                <a:solidFill>
-                  <a:srgbClr val="333333"/>
-                </a:solidFill>
-                <a:latin typeface="Calibri"/>
-              </a:rPr>
-              <a:t>Documentar política de autoescalado conceptual de CloudLite</a:t>
-            </a:r>
-          </a:p>
-          <a:p>
-            <a:pPr algn="ctr">
-              <a:spcAft>
-                <a:spcPts val="600"/>
-              </a:spcAft>
-            </a:pPr>
-            <a:r>
-              <a:rPr sz="1600" b="0" i="0">
-                <a:solidFill>
-                  <a:srgbClr val="333333"/>
-                </a:solidFill>
-                <a:latin typeface="Calibri"/>
-              </a:rPr>
-              <a:t>Evidencia: Sección Escalabilidad: triggers, límites, qué escala y qué no</a:t>
-            </a:r>
-          </a:p>
-          <a:p>
-            <a:pPr algn="ctr">
-              <a:spcAft>
-                <a:spcPts val="600"/>
-              </a:spcAft>
-            </a:pPr>
-            <a:r>
-              <a:rPr sz="1600" b="0" i="0">
-                <a:solidFill>
-                  <a:srgbClr val="333333"/>
-                </a:solidFill>
-                <a:latin typeface="Calibri"/>
-              </a:rPr>
-              <a:t>Siguiente paso = siguiente hito del PI CloudLite</a:t>
-            </a:r>
-          </a:p>
-        </p:txBody>
-      </p:sp>
-      <p:sp>
-        <p:nvSpPr>
-          <p:cNvPr id="6" name="TextBox 5"/>
-          <p:cNvSpPr txBox="1"/>
-          <p:nvPr/>
-        </p:nvSpPr>
-        <p:spPr>
-          <a:xfrm>
-            <a:off x="457200" y="4754880"/>
-            <a:ext cx="11277295" cy="640080"/>
-          </a:xfrm>
-          <a:prstGeom prst="rect">
-            <a:avLst/>
-          </a:prstGeom>
-          <a:noFill/>
-        </p:spPr>
-        <p:txBody>
-          <a:bodyPr wrap="square">
-            <a:spAutoFit/>
-          </a:bodyPr>
-          <a:lstStyle/>
-          <a:p>
-            <a:pPr algn="ctr"/>
-            <a:r>
-              <a:rPr sz="2000" b="1" i="0">
-                <a:solidFill>
-                  <a:srgbClr val="269CCB"/>
-                </a:solidFill>
-                <a:latin typeface="Calibri"/>
-              </a:rPr>
-              <a:t>Teoría al servicio del proyecto</a:t>
             </a:r>
           </a:p>
         </p:txBody>
@@ -13811,4 +11460,324 @@
   </a:objectDefaults>
   <a:extraClrSchemeLst/>
 </a:theme>
+</file>
+
+<file path=ppt/theme/theme2.xml><?xml version="1.0" encoding="utf-8"?>
+<a:theme xmlns:a="http://schemas.openxmlformats.org/drawingml/2006/main" name="Office Theme">
+  <a:themeElements>
+    <a:clrScheme name="Office">
+      <a:dk1>
+        <a:sysClr val="windowText" lastClr="000000"/>
+      </a:dk1>
+      <a:lt1>
+        <a:sysClr val="window" lastClr="FFFFFF"/>
+      </a:lt1>
+      <a:dk2>
+        <a:srgbClr val="1F497D"/>
+      </a:dk2>
+      <a:lt2>
+        <a:srgbClr val="EEECE1"/>
+      </a:lt2>
+      <a:accent1>
+        <a:srgbClr val="4F81BD"/>
+      </a:accent1>
+      <a:accent2>
+        <a:srgbClr val="C0504D"/>
+      </a:accent2>
+      <a:accent3>
+        <a:srgbClr val="9BBB59"/>
+      </a:accent3>
+      <a:accent4>
+        <a:srgbClr val="8064A2"/>
+      </a:accent4>
+      <a:accent5>
+        <a:srgbClr val="4BACC6"/>
+      </a:accent5>
+      <a:accent6>
+        <a:srgbClr val="F79646"/>
+      </a:accent6>
+      <a:hlink>
+        <a:srgbClr val="0000FF"/>
+      </a:hlink>
+      <a:folHlink>
+        <a:srgbClr val="800080"/>
+      </a:folHlink>
+    </a:clrScheme>
+    <a:fontScheme name="Office">
+      <a:majorFont>
+        <a:latin typeface="Calibri"/>
+        <a:ea typeface=""/>
+        <a:cs typeface=""/>
+        <a:font script="Jpan" typeface="ＭＳ Ｐゴシック"/>
+        <a:font script="Hang" typeface="맑은 고딕"/>
+        <a:font script="Hans" typeface="宋体"/>
+        <a:font script="Hant" typeface="新細明體"/>
+        <a:font script="Arab" typeface="Times New Roman"/>
+        <a:font script="Hebr" typeface="Times New Roman"/>
+        <a:font script="Thai" typeface="Angsana New"/>
+        <a:font script="Ethi" typeface="Nyala"/>
+        <a:font script="Beng" typeface="Vrinda"/>
+        <a:font script="Gujr" typeface="Shruti"/>
+        <a:font script="Khmr" typeface="MoolBoran"/>
+        <a:font script="Knda" typeface="Tunga"/>
+        <a:font script="Guru" typeface="Raavi"/>
+        <a:font script="Cans" typeface="Euphemia"/>
+        <a:font script="Cher" typeface="Plantagenet Cherokee"/>
+        <a:font script="Yiii" typeface="Microsoft Yi Baiti"/>
+        <a:font script="Tibt" typeface="Microsoft Himalaya"/>
+        <a:font script="Thaa" typeface="MV Boli"/>
+        <a:font script="Deva" typeface="Mangal"/>
+        <a:font script="Telu" typeface="Gautami"/>
+        <a:font script="Taml" typeface="Latha"/>
+        <a:font script="Syrc" typeface="Estrangelo Edessa"/>
+        <a:font script="Orya" typeface="Kalinga"/>
+        <a:font script="Mlym" typeface="Kartika"/>
+        <a:font script="Laoo" typeface="DokChampa"/>
+        <a:font script="Sinh" typeface="Iskoola Pota"/>
+        <a:font script="Mong" typeface="Mongolian Baiti"/>
+        <a:font script="Viet" typeface="Times New Roman"/>
+        <a:font script="Uigh" typeface="Microsoft Uighur"/>
+        <a:font script="Geor" typeface="Sylfaen"/>
+      </a:majorFont>
+      <a:minorFont>
+        <a:latin typeface="Calibri"/>
+        <a:ea typeface=""/>
+        <a:cs typeface=""/>
+        <a:font script="Jpan" typeface="ＭＳ Ｐゴシック"/>
+        <a:font script="Hang" typeface="맑은 고딕"/>
+        <a:font script="Hans" typeface="宋体"/>
+        <a:font script="Hant" typeface="新細明體"/>
+        <a:font script="Arab" typeface="Arial"/>
+        <a:font script="Hebr" typeface="Arial"/>
+        <a:font script="Thai" typeface="Cordia New"/>
+        <a:font script="Ethi" typeface="Nyala"/>
+        <a:font script="Beng" typeface="Vrinda"/>
+        <a:font script="Gujr" typeface="Shruti"/>
+        <a:font script="Khmr" typeface="DaunPenh"/>
+        <a:font script="Knda" typeface="Tunga"/>
+        <a:font script="Guru" typeface="Raavi"/>
+        <a:font script="Cans" typeface="Euphemia"/>
+        <a:font script="Cher" typeface="Plantagenet Cherokee"/>
+        <a:font script="Yiii" typeface="Microsoft Yi Baiti"/>
+        <a:font script="Tibt" typeface="Microsoft Himalaya"/>
+        <a:font script="Thaa" typeface="MV Boli"/>
+        <a:font script="Deva" typeface="Mangal"/>
+        <a:font script="Telu" typeface="Gautami"/>
+        <a:font script="Taml" typeface="Latha"/>
+        <a:font script="Syrc" typeface="Estrangelo Edessa"/>
+        <a:font script="Orya" typeface="Kalinga"/>
+        <a:font script="Mlym" typeface="Kartika"/>
+        <a:font script="Laoo" typeface="DokChampa"/>
+        <a:font script="Sinh" typeface="Iskoola Pota"/>
+        <a:font script="Mong" typeface="Mongolian Baiti"/>
+        <a:font script="Viet" typeface="Arial"/>
+        <a:font script="Uigh" typeface="Microsoft Uighur"/>
+        <a:font script="Geor" typeface="Sylfaen"/>
+      </a:minorFont>
+    </a:fontScheme>
+    <a:fmtScheme name="Office">
+      <a:fillStyleLst>
+        <a:solidFill>
+          <a:schemeClr val="phClr"/>
+        </a:solidFill>
+        <a:gradFill rotWithShape="1">
+          <a:gsLst>
+            <a:gs pos="0">
+              <a:schemeClr val="phClr">
+                <a:tint val="50000"/>
+                <a:satMod val="300000"/>
+              </a:schemeClr>
+            </a:gs>
+            <a:gs pos="35000">
+              <a:schemeClr val="phClr">
+                <a:tint val="37000"/>
+                <a:satMod val="300000"/>
+              </a:schemeClr>
+            </a:gs>
+            <a:gs pos="100000">
+              <a:schemeClr val="phClr">
+                <a:tint val="15000"/>
+                <a:satMod val="350000"/>
+              </a:schemeClr>
+            </a:gs>
+          </a:gsLst>
+          <a:lin ang="16200000" scaled="1"/>
+        </a:gradFill>
+        <a:gradFill rotWithShape="1">
+          <a:gsLst>
+            <a:gs pos="0">
+              <a:schemeClr val="phClr">
+                <a:tint val="100000"/>
+                <a:shade val="100000"/>
+                <a:satMod val="130000"/>
+              </a:schemeClr>
+            </a:gs>
+            <a:gs pos="100000">
+              <a:schemeClr val="phClr">
+                <a:tint val="50000"/>
+                <a:shade val="100000"/>
+                <a:satMod val="350000"/>
+              </a:schemeClr>
+            </a:gs>
+          </a:gsLst>
+          <a:lin ang="16200000" scaled="0"/>
+        </a:gradFill>
+      </a:fillStyleLst>
+      <a:lnStyleLst>
+        <a:ln w="9525" cap="flat" cmpd="sng" algn="ctr">
+          <a:solidFill>
+            <a:schemeClr val="phClr">
+              <a:shade val="95000"/>
+              <a:satMod val="105000"/>
+            </a:schemeClr>
+          </a:solidFill>
+          <a:prstDash val="solid"/>
+        </a:ln>
+        <a:ln w="25400" cap="flat" cmpd="sng" algn="ctr">
+          <a:solidFill>
+            <a:schemeClr val="phClr"/>
+          </a:solidFill>
+          <a:prstDash val="solid"/>
+        </a:ln>
+        <a:ln w="38100" cap="flat" cmpd="sng" algn="ctr">
+          <a:solidFill>
+            <a:schemeClr val="phClr"/>
+          </a:solidFill>
+          <a:prstDash val="solid"/>
+        </a:ln>
+      </a:lnStyleLst>
+      <a:effectStyleLst>
+        <a:effectStyle>
+          <a:effectLst>
+            <a:outerShdw blurRad="40000" dist="20000" dir="5400000" rotWithShape="0">
+              <a:srgbClr val="000000">
+                <a:alpha val="38000"/>
+              </a:srgbClr>
+            </a:outerShdw>
+          </a:effectLst>
+        </a:effectStyle>
+        <a:effectStyle>
+          <a:effectLst>
+            <a:outerShdw blurRad="40000" dist="23000" dir="5400000" rotWithShape="0">
+              <a:srgbClr val="000000">
+                <a:alpha val="35000"/>
+              </a:srgbClr>
+            </a:outerShdw>
+          </a:effectLst>
+        </a:effectStyle>
+        <a:effectStyle>
+          <a:effectLst>
+            <a:outerShdw blurRad="40000" dist="23000" dir="5400000" rotWithShape="0">
+              <a:srgbClr val="000000">
+                <a:alpha val="35000"/>
+              </a:srgbClr>
+            </a:outerShdw>
+          </a:effectLst>
+          <a:scene3d>
+            <a:camera prst="orthographicFront">
+              <a:rot lat="0" lon="0" rev="0"/>
+            </a:camera>
+            <a:lightRig rig="threePt" dir="t">
+              <a:rot lat="0" lon="0" rev="1200000"/>
+            </a:lightRig>
+          </a:scene3d>
+          <a:sp3d>
+            <a:bevelT w="63500" h="25400"/>
+          </a:sp3d>
+        </a:effectStyle>
+      </a:effectStyleLst>
+      <a:bgFillStyleLst>
+        <a:solidFill>
+          <a:schemeClr val="phClr"/>
+        </a:solidFill>
+        <a:gradFill rotWithShape="1">
+          <a:gsLst>
+            <a:gs pos="0">
+              <a:schemeClr val="phClr">
+                <a:tint val="40000"/>
+                <a:satMod val="350000"/>
+              </a:schemeClr>
+            </a:gs>
+            <a:gs pos="40000">
+              <a:schemeClr val="phClr">
+                <a:tint val="45000"/>
+                <a:shade val="99000"/>
+                <a:satMod val="350000"/>
+              </a:schemeClr>
+            </a:gs>
+            <a:gs pos="100000">
+              <a:schemeClr val="phClr">
+                <a:shade val="20000"/>
+                <a:satMod val="255000"/>
+              </a:schemeClr>
+            </a:gs>
+          </a:gsLst>
+          <a:path path="circle">
+            <a:fillToRect l="50000" t="-80000" r="50000" b="180000"/>
+          </a:path>
+        </a:gradFill>
+        <a:gradFill rotWithShape="1">
+          <a:gsLst>
+            <a:gs pos="0">
+              <a:schemeClr val="phClr">
+                <a:tint val="80000"/>
+                <a:satMod val="300000"/>
+              </a:schemeClr>
+            </a:gs>
+            <a:gs pos="100000">
+              <a:schemeClr val="phClr">
+                <a:shade val="30000"/>
+                <a:satMod val="200000"/>
+              </a:schemeClr>
+            </a:gs>
+          </a:gsLst>
+          <a:path path="circle">
+            <a:fillToRect l="50000" t="50000" r="50000" b="50000"/>
+          </a:path>
+        </a:gradFill>
+      </a:bgFillStyleLst>
+    </a:fmtScheme>
+  </a:themeElements>
+  <a:objectDefaults>
+    <a:spDef>
+      <a:spPr/>
+      <a:bodyPr/>
+      <a:lstStyle/>
+      <a:style>
+        <a:lnRef idx="1">
+          <a:schemeClr val="accent1"/>
+        </a:lnRef>
+        <a:fillRef idx="3">
+          <a:schemeClr val="accent1"/>
+        </a:fillRef>
+        <a:effectRef idx="2">
+          <a:schemeClr val="accent1"/>
+        </a:effectRef>
+        <a:fontRef idx="minor">
+          <a:schemeClr val="lt1"/>
+        </a:fontRef>
+      </a:style>
+    </a:spDef>
+    <a:lnDef>
+      <a:spPr/>
+      <a:bodyPr/>
+      <a:lstStyle/>
+      <a:style>
+        <a:lnRef idx="2">
+          <a:schemeClr val="accent1"/>
+        </a:lnRef>
+        <a:fillRef idx="0">
+          <a:schemeClr val="accent1"/>
+        </a:fillRef>
+        <a:effectRef idx="1">
+          <a:schemeClr val="accent1"/>
+        </a:effectRef>
+        <a:fontRef idx="minor">
+          <a:schemeClr val="tx1"/>
+        </a:fontRef>
+      </a:style>
+    </a:lnDef>
+  </a:objectDefaults>
+  <a:extraClrSchemeLst/>
+</a:theme>
 </file>
--- a/Arquitectura de Sistemas Computacionales/Clases/Clase 13 - Escalabilidad automatica/Presentacion.pptx
+++ b/Arquitectura de Sistemas Computacionales/Clases/Clase 13 - Escalabilidad automatica/Presentacion.pptx
@@ -824,7 +824,7 @@
           <a:p/>
           <a:p>
             <a:r>
-              <a:t>De ahi que el entregable de hoy no se pueda hacer bien si el de la Clase 12 quedo vacio.</a:t>
+              <a:t>(Sobre la actividad, no se proyecta) De ahi que el entregable de hoy no se pueda hacer bien si el de la Clase 12 quedo vacio.</a:t>
             </a:r>
           </a:p>
         </p:txBody>
@@ -894,7 +894,7 @@
           <a:lstStyle/>
           <a:p>
             <a:r>
-              <a:t>Lo que NO escala es la mitad del entregable y separa una sustentacion seria de una lista de deseos.</a:t>
+              <a:t>Declarar lo que NO escala separa un diseno serio de una lista de deseos.</a:t>
             </a:r>
           </a:p>
           <a:p/>
@@ -971,6 +971,18 @@
           <a:p>
             <a:r>
               <a:t>Tres preguntas aparecen sin falta en una clase autonoma como esta y conviene responderlas por escrito en el foro.</a:t>
+            </a:r>
+          </a:p>
+          <a:p/>
+          <a:p>
+            <a:r>
+              <a:t>(Sobre la actividad, no se proyecta) Para verificar el diseno sin gastar un peso alcanza Killercoda con docker compose para levantar dos o tres replicas del stub detras de un balanceador y comprobar que la sesion no se rompe; el entregable formal es una nota sobre el diagrama de despliegue y la seccion escrita con estrategia, trigger, limite y lo que no escala, que la Clase 14 evaluara y la Clase 15 exigira sustentar.</a:t>
+            </a:r>
+          </a:p>
+          <a:p/>
+          <a:p>
+            <a:r>
+              <a:t>(Sobre la actividad, no se proyecta) Si eso se deja pasar, el entregable llega con la seccion de "que no escala" vacia o rellenada con una frase generica, y en la Clase 15 el estudiante afirma que su sistema soporta cualquier crecimiento mientras el diagrama muestra una unica base de datos con la sesion guardada en memoria, que es la contradiccion mas facil de detectar y la mas costosa de explicar en ese momento.</a:t>
             </a:r>
           </a:p>
         </p:txBody>
@@ -4681,7 +4693,7 @@
                 </a:solidFill>
                 <a:latin typeface="Calibri"/>
               </a:rPr>
-              <a:t>Las cinco piezas que el entregable debe nombrar (1/2)</a:t>
+              <a:t>Las cinco piezas del autoescalado (1/2)</a:t>
             </a:r>
           </a:p>
         </p:txBody>
@@ -4720,7 +4732,7 @@
                 </a:solidFill>
                 <a:latin typeface="Calibri"/>
               </a:rPr>
-              <a:t>–   El autoescalado es la automatizacion del escalado horizontal y consta de cinco piezas que el entregable debe nombrar: una metrica que se observa, un umbral que dispara la accion</a:t>
+              <a:t>–   El autoescalado es la automatizacion del escalado horizontal y consta de cinco piezas: una metrica que se observa, un umbral que dispara la accion</a:t>
             </a:r>
           </a:p>
           <a:p>
@@ -4981,7 +4993,7 @@
                 </a:solidFill>
                 <a:latin typeface="Calibri"/>
               </a:rPr>
-              <a:t>Las cinco piezas que el entregable debe nombrar (2/2)</a:t>
+              <a:t>Las cinco piezas del autoescalado (2/2)</a:t>
             </a:r>
           </a:p>
         </p:txBody>
@@ -6273,7 +6285,7 @@
                 </a:solidFill>
                 <a:latin typeface="Calibri"/>
               </a:rPr>
-              <a:t>Lo que NO escala: la mitad del entregable (1/2)</a:t>
+              <a:t>Lo que NO escala (1/2)</a:t>
             </a:r>
           </a:p>
         </p:txBody>
@@ -6557,7 +6569,7 @@
                 </a:solidFill>
                 <a:latin typeface="Calibri"/>
               </a:rPr>
-              <a:t>Lo que NO escala: la mitad del entregable (2/2)</a:t>
+              <a:t>Lo que NO escala (2/2)</a:t>
             </a:r>
           </a:p>
         </p:txBody>
@@ -6841,7 +6853,7 @@
                 </a:solidFill>
                 <a:latin typeface="Calibri"/>
               </a:rPr>
-              <a:t>Preguntas frecuentes y cierre conceptual () (1/4)</a:t>
+              <a:t>Preguntas frecuentes y cierre conceptual () (1/3)</a:t>
             </a:r>
           </a:p>
         </p:txBody>
@@ -7456,7 +7468,7 @@
                 </a:solidFill>
                 <a:latin typeface="Calibri"/>
               </a:rPr>
-              <a:t>Preguntas frecuentes y cierre conceptual () (2/4)</a:t>
+              <a:t>Preguntas frecuentes y cierre conceptual () (2/3)</a:t>
             </a:r>
           </a:p>
         </p:txBody>
@@ -7543,7 +7555,23 @@
                 </a:solidFill>
                 <a:latin typeface="Calibri"/>
               </a:rPr>
-              <a:t>–   Para verificar el diseno sin gastar un peso alcanza Killercoda con docker compose para levantar dos o tres replicas del stub detras de un balanceador y comprobar que la sesion no se rompe</a:t>
+              <a:t>–   Error tipico del docente que no domina el tema: presentar el autoescalado como solucion general a los problemas de rendimiento.</a:t>
+            </a:r>
+          </a:p>
+          <a:p>
+            <a:pPr>
+              <a:spcAft>
+                <a:spcPts val="800"/>
+              </a:spcAft>
+            </a:pPr>
+            <a:r>
+              <a:rPr sz="2000" b="0" i="0">
+                <a:solidFill>
+                  <a:srgbClr val="333333"/>
+                </a:solidFill>
+                <a:latin typeface="Calibri"/>
+              </a:rPr>
+              <a:t>–   Si no se identifico primero el cuello de botella, escalar la pieza equivocada no mejora nada y sube el costo</a:t>
             </a:r>
           </a:p>
         </p:txBody>
@@ -7724,7 +7752,7 @@
                 </a:solidFill>
                 <a:latin typeface="Calibri"/>
               </a:rPr>
-              <a:t>Preguntas frecuentes y cierre conceptual () (3/4)</a:t>
+              <a:t>Preguntas frecuentes y cierre conceptual () (3/3)</a:t>
             </a:r>
           </a:p>
         </p:txBody>
@@ -7763,7 +7791,7 @@
                 </a:solidFill>
                 <a:latin typeface="Calibri"/>
               </a:rPr>
-              <a:t>–   El entregable formal es una nota sobre el diagrama de despliegue y la seccion escrita con estrategia, trigger, limite y lo que no escala, que la Clase 14 evaluara y la Clase 15 exigira sustentar.</a:t>
+              <a:t>–   El caso mas ilustrativo es la API limitada por la base de datos, donde agregar instancias empeora la situacion porque suma presion sobre el recurso ya saturado.</a:t>
             </a:r>
           </a:p>
           <a:p>
@@ -7779,7 +7807,7 @@
                 </a:solidFill>
                 <a:latin typeface="Calibri"/>
               </a:rPr>
-              <a:t>–   Error tipico del docente que no domina el tema: presentar el autoescalado como solucion general a los problemas de rendimiento.</a:t>
+              <a:t>–   La consecuencia pedagogica es que el estudiante sale creyendo que la escalabilidad se compra con configuracion, y en el Parcial 3 responde con la definicion de vertical y horizontal sin poder decidir cual aplica a un caso.</a:t>
             </a:r>
           </a:p>
           <a:p>
@@ -7795,39 +7823,7 @@
                 </a:solidFill>
                 <a:latin typeface="Calibri"/>
               </a:rPr>
-              <a:t>–   Si no se identifico primero el cuello de botella, escalar la pieza equivocada no mejora nada y sube el costo</a:t>
-            </a:r>
-          </a:p>
-          <a:p>
-            <a:pPr>
-              <a:spcAft>
-                <a:spcPts val="800"/>
-              </a:spcAft>
-            </a:pPr>
-            <a:r>
-              <a:rPr sz="2000" b="0" i="0">
-                <a:solidFill>
-                  <a:srgbClr val="333333"/>
-                </a:solidFill>
-                <a:latin typeface="Calibri"/>
-              </a:rPr>
-              <a:t>–   El caso mas ilustrativo es la API limitada por la base de datos, donde agregar instancias empeora la situacion porque suma presion sobre el recurso ya saturado.</a:t>
-            </a:r>
-          </a:p>
-          <a:p>
-            <a:pPr>
-              <a:spcAft>
-                <a:spcPts val="800"/>
-              </a:spcAft>
-            </a:pPr>
-            <a:r>
-              <a:rPr sz="2000" b="0" i="0">
-                <a:solidFill>
-                  <a:srgbClr val="333333"/>
-                </a:solidFill>
-                <a:latin typeface="Calibri"/>
-              </a:rPr>
-              <a:t>–   La consecuencia pedagogica es que el estudiante sale creyendo que la escalabilidad se compra con configuracion, y en el Parcial 3 responde con la definicion de vertical y horizontal sin poder decidir cual aplica a un caso.</a:t>
+              <a:t>–   El segundo error es celebrar el escalado horizontal como si fuera gratis: presentarlo solo como "agregar instancias" sin exigir la revision del estado en memoria, ni el limite de conexiones, ni la capa de datos.</a:t>
             </a:r>
           </a:p>
         </p:txBody>
@@ -8008,21 +8004,141 @@
                 </a:solidFill>
                 <a:latin typeface="Calibri"/>
               </a:rPr>
-              <a:t>Preguntas frecuentes y cierre conceptual () (4/4)</a:t>
-            </a:r>
-          </a:p>
-        </p:txBody>
-      </p:sp>
-      <p:sp>
-        <p:nvSpPr>
-          <p:cNvPr id="5" name="TextBox 4"/>
+              <a:t>La regla de autoescalado, escrita como configuracion</a:t>
+            </a:r>
+          </a:p>
+        </p:txBody>
+      </p:sp>
+      <p:sp>
+        <p:nvSpPr>
+          <p:cNvPr id="5" name="Rounded Rectangle 4"/>
+          <p:cNvSpPr/>
+          <p:nvPr/>
+        </p:nvSpPr>
+        <p:spPr>
+          <a:xfrm>
+            <a:off x="457200" y="1261872"/>
+            <a:ext cx="11277295" cy="5093208"/>
+          </a:xfrm>
+          <a:prstGeom prst="roundRect">
+            <a:avLst>
+              <a:gd name="adj" fmla="val 12000"/>
+            </a:avLst>
+          </a:prstGeom>
+          <a:solidFill>
+            <a:srgbClr val="1E2A38"/>
+          </a:solidFill>
+          <a:ln>
+            <a:noFill/>
+          </a:ln>
+        </p:spPr>
+        <p:style>
+          <a:lnRef idx="1">
+            <a:schemeClr val="accent1"/>
+          </a:lnRef>
+          <a:fillRef idx="3">
+            <a:schemeClr val="accent1"/>
+          </a:fillRef>
+          <a:effectRef idx="2">
+            <a:schemeClr val="accent1"/>
+          </a:effectRef>
+          <a:fontRef idx="minor">
+            <a:schemeClr val="lt1"/>
+          </a:fontRef>
+        </p:style>
+        <p:txBody>
+          <a:bodyPr rtlCol="0" anchor="ctr"/>
+          <a:lstStyle/>
+          <a:p>
+            <a:pPr algn="ctr"/>
+          </a:p>
+        </p:txBody>
+      </p:sp>
+      <p:sp>
+        <p:nvSpPr>
+          <p:cNvPr id="6" name="Rectangle 5"/>
+          <p:cNvSpPr/>
+          <p:nvPr/>
+        </p:nvSpPr>
+        <p:spPr>
+          <a:xfrm>
+            <a:off x="457200" y="1261872"/>
+            <a:ext cx="11277295" cy="320040"/>
+          </a:xfrm>
+          <a:prstGeom prst="rect">
+            <a:avLst/>
+          </a:prstGeom>
+          <a:solidFill>
+            <a:srgbClr val="095292"/>
+          </a:solidFill>
+          <a:ln>
+            <a:noFill/>
+          </a:ln>
+        </p:spPr>
+        <p:style>
+          <a:lnRef idx="1">
+            <a:schemeClr val="accent1"/>
+          </a:lnRef>
+          <a:fillRef idx="3">
+            <a:schemeClr val="accent1"/>
+          </a:fillRef>
+          <a:effectRef idx="2">
+            <a:schemeClr val="accent1"/>
+          </a:effectRef>
+          <a:fontRef idx="minor">
+            <a:schemeClr val="lt1"/>
+          </a:fontRef>
+        </p:style>
+        <p:txBody>
+          <a:bodyPr rtlCol="0" anchor="ctr"/>
+          <a:lstStyle/>
+          <a:p>
+            <a:pPr algn="ctr"/>
+          </a:p>
+        </p:txBody>
+      </p:sp>
+      <p:sp>
+        <p:nvSpPr>
+          <p:cNvPr id="7" name="TextBox 6"/>
           <p:cNvSpPr txBox="1"/>
           <p:nvPr/>
         </p:nvSpPr>
         <p:spPr>
           <a:xfrm>
-            <a:off x="457200" y="1170432"/>
-            <a:ext cx="11277295" cy="5230368"/>
+            <a:off x="685800" y="1307592"/>
+            <a:ext cx="10820095" cy="256032"/>
+          </a:xfrm>
+          <a:prstGeom prst="rect">
+            <a:avLst/>
+          </a:prstGeom>
+          <a:noFill/>
+        </p:spPr>
+        <p:txBody>
+          <a:bodyPr wrap="square" anchor="ctr"/>
+          <a:lstStyle/>
+          <a:p>
+            <a:r>
+              <a:rPr sz="1000" b="1" i="0">
+                <a:solidFill>
+                  <a:srgbClr val="269CCB"/>
+                </a:solidFill>
+                <a:latin typeface="Calibri"/>
+              </a:rPr>
+              <a:t>● ● ●</a:t>
+            </a:r>
+          </a:p>
+        </p:txBody>
+      </p:sp>
+      <p:sp>
+        <p:nvSpPr>
+          <p:cNvPr id="8" name="TextBox 7"/>
+          <p:cNvSpPr txBox="1"/>
+          <p:nvPr/>
+        </p:nvSpPr>
+        <p:spPr>
+          <a:xfrm>
+            <a:off x="777240" y="1719072"/>
+            <a:ext cx="10637215" cy="4453128"/>
           </a:xfrm>
           <a:prstGeom prst="rect">
             <a:avLst/>
@@ -8037,72 +8153,216 @@
           <a:p>
             <a:pPr>
               <a:spcAft>
-                <a:spcPts val="800"/>
+                <a:spcPts val="400"/>
               </a:spcAft>
             </a:pPr>
             <a:r>
-              <a:rPr sz="2000" b="0" i="0">
-                <a:solidFill>
-                  <a:srgbClr val="333333"/>
-                </a:solidFill>
-                <a:latin typeface="Calibri"/>
-              </a:rPr>
-              <a:t>–   El segundo error es celebrar el escalado horizontal como si fuera gratis: presentarlo solo como "agregar instancias" sin exigir la revision del estado en memoria, ni el limite de conexiones, ni la capa de datos.</a:t>
+              <a:rPr sz="1400" b="0" i="0">
+                <a:solidFill>
+                  <a:srgbClr val="FFFFFF"/>
+                </a:solidFill>
+                <a:latin typeface="Calibri"/>
+              </a:rPr>
+              <a:t># Lo que un autoescalador necesita para no oscilar:</a:t>
             </a:r>
           </a:p>
           <a:p>
             <a:pPr>
               <a:spcAft>
-                <a:spcPts val="800"/>
+                <a:spcPts val="400"/>
               </a:spcAft>
             </a:pPr>
             <a:r>
-              <a:rPr sz="2000" b="0" i="0">
-                <a:solidFill>
-                  <a:srgbClr val="333333"/>
-                </a:solidFill>
-                <a:latin typeface="Calibri"/>
-              </a:rPr>
-              <a:t>–   Si eso se deja pasar, el entregable llega con la seccion de "que no escala" vacia o rellenada con una frase generica</a:t>
+              <a:rPr sz="1400" b="0" i="0">
+                <a:solidFill>
+                  <a:srgbClr val="FFFFFF"/>
+                </a:solidFill>
+                <a:latin typeface="Calibri"/>
+              </a:rPr>
+              <a:t>autoescalado:</a:t>
             </a:r>
           </a:p>
           <a:p>
             <a:pPr>
               <a:spcAft>
-                <a:spcPts val="800"/>
+                <a:spcPts val="400"/>
               </a:spcAft>
             </a:pPr>
             <a:r>
-              <a:rPr sz="2000" b="0" i="0">
-                <a:solidFill>
-                  <a:srgbClr val="333333"/>
-                </a:solidFill>
-                <a:latin typeface="Calibri"/>
-              </a:rPr>
-              <a:t>–   Y en la Clase 15 el estudiante afirma que su sistema soporta cualquier crecimiento mientras el diagrama muestra una unica base de datos con la sesion guardada en memoria</a:t>
+              <a:rPr sz="1400" b="0" i="0">
+                <a:solidFill>
+                  <a:srgbClr val="FFFFFF"/>
+                </a:solidFill>
+                <a:latin typeface="Calibri"/>
+              </a:rPr>
+              <a:t>  servicio: cloudlite-api</a:t>
             </a:r>
           </a:p>
           <a:p>
             <a:pPr>
               <a:spcAft>
-                <a:spcPts val="800"/>
+                <a:spcPts val="400"/>
               </a:spcAft>
             </a:pPr>
             <a:r>
-              <a:rPr sz="2000" b="0" i="0">
-                <a:solidFill>
-                  <a:srgbClr val="333333"/>
-                </a:solidFill>
-                <a:latin typeface="Calibri"/>
-              </a:rPr>
-              <a:t>–   Que es la contradiccion mas facil de detectar y la mas costosa de explicar en ese momento.</a:t>
-            </a:r>
-          </a:p>
-        </p:txBody>
-      </p:sp>
-      <p:sp>
-        <p:nvSpPr>
-          <p:cNvPr id="6" name="TextBox 5"/>
+              <a:rPr sz="1400" b="0" i="0">
+                <a:solidFill>
+                  <a:srgbClr val="FFFFFF"/>
+                </a:solidFill>
+                <a:latin typeface="Calibri"/>
+              </a:rPr>
+              <a:t>  minimo: 2                  # 1 no da tolerancia a fallo</a:t>
+            </a:r>
+          </a:p>
+          <a:p>
+            <a:pPr>
+              <a:spcAft>
+                <a:spcPts val="400"/>
+              </a:spcAft>
+            </a:pPr>
+            <a:r>
+              <a:rPr sz="1400" b="0" i="0">
+                <a:solidFill>
+                  <a:srgbClr val="FFFFFF"/>
+                </a:solidFill>
+                <a:latin typeface="Calibri"/>
+              </a:rPr>
+              <a:t>  maximo: 6                  # tope que el presupuesto aguanta</a:t>
+            </a:r>
+          </a:p>
+          <a:p>
+            <a:pPr>
+              <a:spcAft>
+                <a:spcPts val="400"/>
+              </a:spcAft>
+            </a:pPr>
+            <a:r>
+              <a:rPr sz="1400" b="0" i="0">
+                <a:solidFill>
+                  <a:srgbClr val="FFFFFF"/>
+                </a:solidFill>
+                <a:latin typeface="Calibri"/>
+              </a:rPr>
+              <a:t>  metrica: cpu_promedio</a:t>
+            </a:r>
+          </a:p>
+          <a:p>
+            <a:pPr>
+              <a:spcAft>
+                <a:spcPts val="400"/>
+              </a:spcAft>
+            </a:pPr>
+            <a:r>
+              <a:rPr sz="1400" b="0" i="0">
+                <a:solidFill>
+                  <a:srgbClr val="FFFFFF"/>
+                </a:solidFill>
+                <a:latin typeface="Calibri"/>
+              </a:rPr>
+              <a:t>  objetivo: 65               # por debajo del 70% de la Clase 12</a:t>
+            </a:r>
+          </a:p>
+          <a:p>
+            <a:pPr>
+              <a:spcAft>
+                <a:spcPts val="400"/>
+              </a:spcAft>
+            </a:pPr>
+            <a:r>
+              <a:rPr sz="1400" b="0" i="0">
+                <a:solidFill>
+                  <a:srgbClr val="FFFFFF"/>
+                </a:solidFill>
+                <a:latin typeface="Calibri"/>
+              </a:rPr>
+              <a:t>  subir_si:   '&gt; 65% durante 3 min'</a:t>
+            </a:r>
+          </a:p>
+          <a:p>
+            <a:pPr>
+              <a:spcAft>
+                <a:spcPts val="400"/>
+              </a:spcAft>
+            </a:pPr>
+            <a:r>
+              <a:rPr sz="1400" b="0" i="0">
+                <a:solidFill>
+                  <a:srgbClr val="FFFFFF"/>
+                </a:solidFill>
+                <a:latin typeface="Calibri"/>
+              </a:rPr>
+              <a:t>  bajar_si:   '&lt; 35% durante 10 min'   # bajar mas lento que subir</a:t>
+            </a:r>
+          </a:p>
+          <a:p>
+            <a:pPr>
+              <a:spcAft>
+                <a:spcPts val="400"/>
+              </a:spcAft>
+            </a:pPr>
+            <a:r>
+              <a:rPr sz="1400" b="0" i="0">
+                <a:solidFill>
+                  <a:srgbClr val="FFFFFF"/>
+                </a:solidFill>
+                <a:latin typeface="Calibri"/>
+              </a:rPr>
+              <a:t>  enfriamiento: 5 min        # sin esto entra en bandada de arranques</a:t>
+            </a:r>
+          </a:p>
+          <a:p>
+            <a:pPr>
+              <a:spcAft>
+                <a:spcPts val="400"/>
+              </a:spcAft>
+            </a:pPr>
+            <a:r>
+              <a:rPr sz="1400" b="0" i="0">
+                <a:solidFill>
+                  <a:srgbClr val="FFFFFF"/>
+                </a:solidFill>
+                <a:latin typeface="Calibri"/>
+              </a:rPr>
+              <a:t/>
+            </a:r>
+          </a:p>
+          <a:p>
+            <a:pPr>
+              <a:spcAft>
+                <a:spcPts val="400"/>
+              </a:spcAft>
+            </a:pPr>
+            <a:r>
+              <a:rPr sz="1400" b="0" i="0">
+                <a:solidFill>
+                  <a:srgbClr val="FFFFFF"/>
+                </a:solidFill>
+                <a:latin typeface="Calibri"/>
+              </a:rPr>
+              <a:t># Y el limite honesto: escalar la API no escala la BASE. Si el cuello</a:t>
+            </a:r>
+          </a:p>
+          <a:p>
+            <a:pPr>
+              <a:spcAft>
+                <a:spcPts val="400"/>
+              </a:spcAft>
+            </a:pPr>
+            <a:r>
+              <a:rPr sz="1400" b="0" i="0">
+                <a:solidFill>
+                  <a:srgbClr val="FFFFFF"/>
+                </a:solidFill>
+                <a:latin typeface="Calibri"/>
+              </a:rPr>
+              <a:t># de botella es PostgreSQL, seis instancias lo empeoran.</a:t>
+            </a:r>
+          </a:p>
+        </p:txBody>
+      </p:sp>
+      <p:sp>
+        <p:nvSpPr>
+          <p:cNvPr id="9" name="TextBox 8"/>
           <p:cNvSpPr txBox="1"/>
           <p:nvPr/>
         </p:nvSpPr>
@@ -8276,7 +8536,7 @@
                 </a:solidFill>
                 <a:latin typeface="Calibri"/>
               </a:rPr>
-              <a:t>La regla de autoescalado, escrita como configuracion</a:t>
+              <a:t>Politica de autoescalado (tabla, no prosa)</a:t>
             </a:r>
           </a:p>
         </p:txBody>
@@ -8290,7 +8550,7 @@
         <p:spPr>
           <a:xfrm>
             <a:off x="457200" y="1261872"/>
-            <a:ext cx="11277295" cy="5093208"/>
+            <a:ext cx="11277295" cy="4773168"/>
           </a:xfrm>
           <a:prstGeom prst="roundRect">
             <a:avLst>
@@ -8410,7 +8670,7 @@
         <p:spPr>
           <a:xfrm>
             <a:off x="777240" y="1719072"/>
-            <a:ext cx="10637215" cy="4453128"/>
+            <a:ext cx="10637215" cy="4133087"/>
           </a:xfrm>
           <a:prstGeom prst="rect">
             <a:avLst/>
@@ -8435,7 +8695,7 @@
                 </a:solidFill>
                 <a:latin typeface="Calibri"/>
               </a:rPr>
-              <a:t># Lo que un autoescalador necesita para no oscilar:</a:t>
+              <a:t>Componente   | Tipo        | Trigger up      | Min | Max | Cooldown</a:t>
             </a:r>
           </a:p>
           <a:p>
@@ -8451,7 +8711,7 @@
                 </a:solidFill>
                 <a:latin typeface="Calibri"/>
               </a:rPr>
-              <a:t>autoescalado:</a:t>
+              <a:t>-------------|-------------|-----------------|-----|-----|---------</a:t>
             </a:r>
           </a:p>
           <a:p>
@@ -8467,7 +8727,7 @@
                 </a:solidFill>
                 <a:latin typeface="Calibri"/>
               </a:rPr>
-              <a:t>  servicio: cloudlite-api</a:t>
+              <a:t>API          | Horizontal  | CPU &gt; 70% / 5m  |  2  |  6  | 5 min</a:t>
             </a:r>
           </a:p>
           <a:p>
@@ -8483,7 +8743,7 @@
                 </a:solidFill>
                 <a:latin typeface="Calibri"/>
               </a:rPr>
-              <a:t>  minimo: 2                  # 1 no da tolerancia a fallo</a:t>
+              <a:t>Worker cola  | Horizontal  | cola &gt; 100 msg  |  1  |  4  | 3 min</a:t>
             </a:r>
           </a:p>
           <a:p>
@@ -8499,135 +8759,7 @@
                 </a:solidFill>
                 <a:latin typeface="Calibri"/>
               </a:rPr>
-              <a:t>  maximo: 6                  # tope que el presupuesto aguanta</a:t>
-            </a:r>
-          </a:p>
-          <a:p>
-            <a:pPr>
-              <a:spcAft>
-                <a:spcPts val="400"/>
-              </a:spcAft>
-            </a:pPr>
-            <a:r>
-              <a:rPr sz="1400" b="0" i="0">
-                <a:solidFill>
-                  <a:srgbClr val="FFFFFF"/>
-                </a:solidFill>
-                <a:latin typeface="Calibri"/>
-              </a:rPr>
-              <a:t>  metrica: cpu_promedio</a:t>
-            </a:r>
-          </a:p>
-          <a:p>
-            <a:pPr>
-              <a:spcAft>
-                <a:spcPts val="400"/>
-              </a:spcAft>
-            </a:pPr>
-            <a:r>
-              <a:rPr sz="1400" b="0" i="0">
-                <a:solidFill>
-                  <a:srgbClr val="FFFFFF"/>
-                </a:solidFill>
-                <a:latin typeface="Calibri"/>
-              </a:rPr>
-              <a:t>  objetivo: 65               # por debajo del 70% de la Clase 12</a:t>
-            </a:r>
-          </a:p>
-          <a:p>
-            <a:pPr>
-              <a:spcAft>
-                <a:spcPts val="400"/>
-              </a:spcAft>
-            </a:pPr>
-            <a:r>
-              <a:rPr sz="1400" b="0" i="0">
-                <a:solidFill>
-                  <a:srgbClr val="FFFFFF"/>
-                </a:solidFill>
-                <a:latin typeface="Calibri"/>
-              </a:rPr>
-              <a:t>  subir_si:   '&gt; 65% durante 3 min'</a:t>
-            </a:r>
-          </a:p>
-          <a:p>
-            <a:pPr>
-              <a:spcAft>
-                <a:spcPts val="400"/>
-              </a:spcAft>
-            </a:pPr>
-            <a:r>
-              <a:rPr sz="1400" b="0" i="0">
-                <a:solidFill>
-                  <a:srgbClr val="FFFFFF"/>
-                </a:solidFill>
-                <a:latin typeface="Calibri"/>
-              </a:rPr>
-              <a:t>  bajar_si:   '&lt; 35% durante 10 min'   # bajar mas lento que subir</a:t>
-            </a:r>
-          </a:p>
-          <a:p>
-            <a:pPr>
-              <a:spcAft>
-                <a:spcPts val="400"/>
-              </a:spcAft>
-            </a:pPr>
-            <a:r>
-              <a:rPr sz="1400" b="0" i="0">
-                <a:solidFill>
-                  <a:srgbClr val="FFFFFF"/>
-                </a:solidFill>
-                <a:latin typeface="Calibri"/>
-              </a:rPr>
-              <a:t>  enfriamiento: 5 min        # sin esto entra en bandada de arranques</a:t>
-            </a:r>
-          </a:p>
-          <a:p>
-            <a:pPr>
-              <a:spcAft>
-                <a:spcPts val="400"/>
-              </a:spcAft>
-            </a:pPr>
-            <a:r>
-              <a:rPr sz="1400" b="0" i="0">
-                <a:solidFill>
-                  <a:srgbClr val="FFFFFF"/>
-                </a:solidFill>
-                <a:latin typeface="Calibri"/>
-              </a:rPr>
-              <a:t/>
-            </a:r>
-          </a:p>
-          <a:p>
-            <a:pPr>
-              <a:spcAft>
-                <a:spcPts val="400"/>
-              </a:spcAft>
-            </a:pPr>
-            <a:r>
-              <a:rPr sz="1400" b="0" i="0">
-                <a:solidFill>
-                  <a:srgbClr val="FFFFFF"/>
-                </a:solidFill>
-                <a:latin typeface="Calibri"/>
-              </a:rPr>
-              <a:t># Y el limite honesto: escalar la API no escala la BASE. Si el cuello</a:t>
-            </a:r>
-          </a:p>
-          <a:p>
-            <a:pPr>
-              <a:spcAft>
-                <a:spcPts val="400"/>
-              </a:spcAft>
-            </a:pPr>
-            <a:r>
-              <a:rPr sz="1400" b="0" i="0">
-                <a:solidFill>
-                  <a:srgbClr val="FFFFFF"/>
-                </a:solidFill>
-                <a:latin typeface="Calibri"/>
-              </a:rPr>
-              <a:t># de botella es PostgreSQL, seis instancias lo empeoran.</a:t>
+              <a:t>BD primaria  | NO escala   | -               |  1  |  1  | -</a:t>
             </a:r>
           </a:p>
         </p:txBody>
@@ -8635,6 +8767,41 @@
       <p:sp>
         <p:nvSpPr>
           <p:cNvPr id="9" name="TextBox 8"/>
+          <p:cNvSpPr txBox="1"/>
+          <p:nvPr/>
+        </p:nvSpPr>
+        <p:spPr>
+          <a:xfrm>
+            <a:off x="457200" y="6080760"/>
+            <a:ext cx="11277295" cy="320040"/>
+          </a:xfrm>
+          <a:prstGeom prst="rect">
+            <a:avLst/>
+          </a:prstGeom>
+          <a:noFill/>
+        </p:spPr>
+        <p:txBody>
+          <a:bodyPr wrap="square">
+            <a:spAutoFit/>
+          </a:bodyPr>
+          <a:lstStyle/>
+          <a:p>
+            <a:pPr algn="ctr"/>
+            <a:r>
+              <a:rPr sz="1200" b="0" i="1">
+                <a:solidFill>
+                  <a:srgbClr val="666666"/>
+                </a:solidFill>
+                <a:latin typeface="Calibri"/>
+              </a:rPr>
+              <a:t>El 'max' es lo que evita que la factura escale sola. La BD primaria casi nunca escala horizontal.</a:t>
+            </a:r>
+          </a:p>
+        </p:txBody>
+      </p:sp>
+      <p:sp>
+        <p:nvSpPr>
+          <p:cNvPr id="10" name="TextBox 9"/>
           <p:cNvSpPr txBox="1"/>
           <p:nvPr/>
         </p:nvSpPr>
@@ -8702,7 +8869,7 @@
         <p:spPr>
           <a:xfrm>
             <a:off x="0" y="0"/>
-            <a:ext cx="12191695" cy="960120"/>
+            <a:ext cx="12191695" cy="1170432"/>
           </a:xfrm>
           <a:prstGeom prst="rect">
             <a:avLst/>
@@ -8744,7 +8911,7 @@
         </p:nvSpPr>
         <p:spPr>
           <a:xfrm>
-            <a:off x="0" y="960120"/>
+            <a:off x="0" y="1170432"/>
             <a:ext cx="12191695" cy="41148"/>
           </a:xfrm>
           <a:prstGeom prst="rect">
@@ -8788,7 +8955,7 @@
         <p:spPr>
           <a:xfrm>
             <a:off x="457200" y="164592"/>
-            <a:ext cx="11277295" cy="502920"/>
+            <a:ext cx="11277295" cy="384048"/>
           </a:xfrm>
           <a:prstGeom prst="rect">
             <a:avLst/>
@@ -8808,21 +8975,55 @@
                 </a:solidFill>
                 <a:latin typeface="Calibri"/>
               </a:rPr>
-              <a:t>Politica de autoescalado (tabla, no prosa)</a:t>
-            </a:r>
-          </a:p>
-        </p:txBody>
-      </p:sp>
-      <p:sp>
-        <p:nvSpPr>
-          <p:cNvPr id="5" name="Rounded Rectangle 4"/>
+              <a:t>Del boceto al código Mermaid</a:t>
+            </a:r>
+          </a:p>
+        </p:txBody>
+      </p:sp>
+      <p:sp>
+        <p:nvSpPr>
+          <p:cNvPr id="5" name="TextBox 4"/>
+          <p:cNvSpPr txBox="1"/>
+          <p:nvPr/>
+        </p:nvSpPr>
+        <p:spPr>
+          <a:xfrm>
+            <a:off x="457200" y="566928"/>
+            <a:ext cx="11277295" cy="411480"/>
+          </a:xfrm>
+          <a:prstGeom prst="rect">
+            <a:avLst/>
+          </a:prstGeom>
+          <a:noFill/>
+        </p:spPr>
+        <p:txBody>
+          <a:bodyPr wrap="square">
+            <a:spAutoFit/>
+          </a:bodyPr>
+          <a:lstStyle/>
+          <a:p>
+            <a:r>
+              <a:rPr sz="1400" b="0" i="0">
+                <a:solidFill>
+                  <a:srgbClr val="B8D8EE"/>
+                </a:solidFill>
+                <a:latin typeface="Calibri"/>
+              </a:rPr>
+              <a:t>El diagrama se escribe como código: se versiona, se compara y se corrige</a:t>
+            </a:r>
+          </a:p>
+        </p:txBody>
+      </p:sp>
+      <p:sp>
+        <p:nvSpPr>
+          <p:cNvPr id="6" name="Rounded Rectangle 5"/>
           <p:cNvSpPr/>
           <p:nvPr/>
         </p:nvSpPr>
         <p:spPr>
           <a:xfrm>
-            <a:off x="457200" y="1261872"/>
-            <a:ext cx="11277295" cy="4773168"/>
+            <a:off x="457200" y="1659636"/>
+            <a:ext cx="11277295" cy="1051560"/>
           </a:xfrm>
           <a:prstGeom prst="roundRect">
             <a:avLst>
@@ -8830,7 +9031,7 @@
             </a:avLst>
           </a:prstGeom>
           <a:solidFill>
-            <a:srgbClr val="1E2A38"/>
+            <a:srgbClr val="F2F2F2"/>
           </a:solidFill>
           <a:ln>
             <a:noFill/>
@@ -8860,17 +9061,19 @@
       </p:sp>
       <p:sp>
         <p:nvSpPr>
-          <p:cNvPr id="6" name="Rectangle 5"/>
+          <p:cNvPr id="7" name="Rounded Rectangle 6"/>
           <p:cNvSpPr/>
           <p:nvPr/>
         </p:nvSpPr>
         <p:spPr>
           <a:xfrm>
-            <a:off x="457200" y="1261872"/>
-            <a:ext cx="11277295" cy="320040"/>
-          </a:xfrm>
-          <a:prstGeom prst="rect">
-            <a:avLst/>
+            <a:off x="594360" y="1965960"/>
+            <a:ext cx="438912" cy="438912"/>
+          </a:xfrm>
+          <a:prstGeom prst="roundRect">
+            <a:avLst>
+              <a:gd name="adj" fmla="val 12000"/>
+            </a:avLst>
           </a:prstGeom>
           <a:solidFill>
             <a:srgbClr val="095292"/>
@@ -8903,46 +9106,14 @@
       </p:sp>
       <p:sp>
         <p:nvSpPr>
-          <p:cNvPr id="7" name="TextBox 6"/>
-          <p:cNvSpPr txBox="1"/>
-          <p:nvPr/>
-        </p:nvSpPr>
-        <p:spPr>
-          <a:xfrm>
-            <a:off x="685800" y="1307592"/>
-            <a:ext cx="10820095" cy="256032"/>
-          </a:xfrm>
-          <a:prstGeom prst="rect">
-            <a:avLst/>
-          </a:prstGeom>
-          <a:noFill/>
-        </p:spPr>
-        <p:txBody>
-          <a:bodyPr wrap="square" anchor="ctr"/>
-          <a:lstStyle/>
-          <a:p>
-            <a:r>
-              <a:rPr sz="1000" b="1" i="0">
-                <a:solidFill>
-                  <a:srgbClr val="269CCB"/>
-                </a:solidFill>
-                <a:latin typeface="Calibri"/>
-              </a:rPr>
-              <a:t>● ● ●</a:t>
-            </a:r>
-          </a:p>
-        </p:txBody>
-      </p:sp>
-      <p:sp>
-        <p:nvSpPr>
           <p:cNvPr id="8" name="TextBox 7"/>
           <p:cNvSpPr txBox="1"/>
           <p:nvPr/>
         </p:nvSpPr>
         <p:spPr>
           <a:xfrm>
-            <a:off x="777240" y="1719072"/>
-            <a:ext cx="10637215" cy="4133087"/>
+            <a:off x="594360" y="1965960"/>
+            <a:ext cx="438912" cy="438912"/>
           </a:xfrm>
           <a:prstGeom prst="rect">
             <a:avLst/>
@@ -8950,88 +9121,18 @@
           <a:noFill/>
         </p:spPr>
         <p:txBody>
-          <a:bodyPr wrap="square">
-            <a:spAutoFit/>
-          </a:bodyPr>
-          <a:lstStyle/>
-          <a:p>
-            <a:pPr>
-              <a:spcAft>
-                <a:spcPts val="400"/>
-              </a:spcAft>
-            </a:pPr>
-            <a:r>
-              <a:rPr sz="1400" b="0" i="0">
+          <a:bodyPr wrap="square" anchor="ctr"/>
+          <a:lstStyle/>
+          <a:p>
+            <a:pPr algn="ctr"/>
+            <a:r>
+              <a:rPr sz="1600" b="1" i="0">
                 <a:solidFill>
                   <a:srgbClr val="FFFFFF"/>
                 </a:solidFill>
                 <a:latin typeface="Calibri"/>
               </a:rPr>
-              <a:t>Componente   | Tipo        | Trigger up      | Min | Max | Cooldown</a:t>
-            </a:r>
-          </a:p>
-          <a:p>
-            <a:pPr>
-              <a:spcAft>
-                <a:spcPts val="400"/>
-              </a:spcAft>
-            </a:pPr>
-            <a:r>
-              <a:rPr sz="1400" b="0" i="0">
-                <a:solidFill>
-                  <a:srgbClr val="FFFFFF"/>
-                </a:solidFill>
-                <a:latin typeface="Calibri"/>
-              </a:rPr>
-              <a:t>-------------|-------------|-----------------|-----|-----|---------</a:t>
-            </a:r>
-          </a:p>
-          <a:p>
-            <a:pPr>
-              <a:spcAft>
-                <a:spcPts val="400"/>
-              </a:spcAft>
-            </a:pPr>
-            <a:r>
-              <a:rPr sz="1400" b="0" i="0">
-                <a:solidFill>
-                  <a:srgbClr val="FFFFFF"/>
-                </a:solidFill>
-                <a:latin typeface="Calibri"/>
-              </a:rPr>
-              <a:t>API          | Horizontal  | CPU &gt; 70% / 5m  |  2  |  6  | 5 min</a:t>
-            </a:r>
-          </a:p>
-          <a:p>
-            <a:pPr>
-              <a:spcAft>
-                <a:spcPts val="400"/>
-              </a:spcAft>
-            </a:pPr>
-            <a:r>
-              <a:rPr sz="1400" b="0" i="0">
-                <a:solidFill>
-                  <a:srgbClr val="FFFFFF"/>
-                </a:solidFill>
-                <a:latin typeface="Calibri"/>
-              </a:rPr>
-              <a:t>Worker cola  | Horizontal  | cola &gt; 100 msg  |  1  |  4  | 3 min</a:t>
-            </a:r>
-          </a:p>
-          <a:p>
-            <a:pPr>
-              <a:spcAft>
-                <a:spcPts val="400"/>
-              </a:spcAft>
-            </a:pPr>
-            <a:r>
-              <a:rPr sz="1400" b="0" i="0">
-                <a:solidFill>
-                  <a:srgbClr val="FFFFFF"/>
-                </a:solidFill>
-                <a:latin typeface="Calibri"/>
-              </a:rPr>
-              <a:t>BD primaria  | NO escala   | -               |  1  |  1  | -</a:t>
+              <a:t>1</a:t>
             </a:r>
           </a:p>
         </p:txBody>
@@ -9044,8 +9145,8 @@
         </p:nvSpPr>
         <p:spPr>
           <a:xfrm>
-            <a:off x="457200" y="6080760"/>
-            <a:ext cx="11277295" cy="320040"/>
+            <a:off x="1188720" y="1751076"/>
+            <a:ext cx="10271455" cy="886968"/>
           </a:xfrm>
           <a:prstGeom prst="rect">
             <a:avLst/>
@@ -9053,27 +9154,553 @@
           <a:noFill/>
         </p:spPr>
         <p:txBody>
-          <a:bodyPr wrap="square">
-            <a:spAutoFit/>
-          </a:bodyPr>
+          <a:bodyPr wrap="square" anchor="ctr"/>
+          <a:lstStyle/>
+          <a:p>
+            <a:r>
+              <a:rPr sz="1500" b="1" i="0">
+                <a:solidFill>
+                  <a:srgbClr val="095292"/>
+                </a:solidFill>
+                <a:latin typeface="Calibri"/>
+              </a:rPr>
+              <a:t>Diseña visual</a:t>
+            </a:r>
+          </a:p>
+          <a:p>
+            <a:pPr>
+              <a:spcBef>
+                <a:spcPts val="200"/>
+              </a:spcBef>
+            </a:pPr>
+            <a:r>
+              <a:rPr sz="1300" b="0" i="0">
+                <a:solidFill>
+                  <a:srgbClr val="333333"/>
+                </a:solidFill>
+                <a:latin typeface="Calibri"/>
+              </a:rPr>
+              <a:t>Dibuja el diagrama como quieras en Excalidraw o draw.io: es más rápido arrastrar cajas que escribir código, y ahí es donde se piensa el modelo.</a:t>
+            </a:r>
+          </a:p>
+        </p:txBody>
+      </p:sp>
+      <p:sp>
+        <p:nvSpPr>
+          <p:cNvPr id="10" name="Rounded Rectangle 9"/>
+          <p:cNvSpPr/>
+          <p:nvPr/>
+        </p:nvSpPr>
+        <p:spPr>
+          <a:xfrm>
+            <a:off x="457200" y="2802636"/>
+            <a:ext cx="11277295" cy="1051560"/>
+          </a:xfrm>
+          <a:prstGeom prst="roundRect">
+            <a:avLst>
+              <a:gd name="adj" fmla="val 12000"/>
+            </a:avLst>
+          </a:prstGeom>
+          <a:solidFill>
+            <a:srgbClr val="E8F4FA"/>
+          </a:solidFill>
+          <a:ln>
+            <a:noFill/>
+          </a:ln>
+        </p:spPr>
+        <p:style>
+          <a:lnRef idx="1">
+            <a:schemeClr val="accent1"/>
+          </a:lnRef>
+          <a:fillRef idx="3">
+            <a:schemeClr val="accent1"/>
+          </a:fillRef>
+          <a:effectRef idx="2">
+            <a:schemeClr val="accent1"/>
+          </a:effectRef>
+          <a:fontRef idx="minor">
+            <a:schemeClr val="lt1"/>
+          </a:fontRef>
+        </p:style>
+        <p:txBody>
+          <a:bodyPr rtlCol="0" anchor="ctr"/>
           <a:lstStyle/>
           <a:p>
             <a:pPr algn="ctr"/>
-            <a:r>
-              <a:rPr sz="1200" b="0" i="1">
-                <a:solidFill>
-                  <a:srgbClr val="666666"/>
-                </a:solidFill>
-                <a:latin typeface="Calibri"/>
-              </a:rPr>
-              <a:t>El 'max' es lo que evita que la factura escale sola. La BD primaria casi nunca escala horizontal.</a:t>
-            </a:r>
-          </a:p>
-        </p:txBody>
-      </p:sp>
-      <p:sp>
-        <p:nvSpPr>
-          <p:cNvPr id="10" name="TextBox 9"/>
+          </a:p>
+        </p:txBody>
+      </p:sp>
+      <p:sp>
+        <p:nvSpPr>
+          <p:cNvPr id="11" name="Rounded Rectangle 10"/>
+          <p:cNvSpPr/>
+          <p:nvPr/>
+        </p:nvSpPr>
+        <p:spPr>
+          <a:xfrm>
+            <a:off x="594360" y="3108960"/>
+            <a:ext cx="438912" cy="438912"/>
+          </a:xfrm>
+          <a:prstGeom prst="roundRect">
+            <a:avLst>
+              <a:gd name="adj" fmla="val 12000"/>
+            </a:avLst>
+          </a:prstGeom>
+          <a:solidFill>
+            <a:srgbClr val="095292"/>
+          </a:solidFill>
+          <a:ln>
+            <a:noFill/>
+          </a:ln>
+        </p:spPr>
+        <p:style>
+          <a:lnRef idx="1">
+            <a:schemeClr val="accent1"/>
+          </a:lnRef>
+          <a:fillRef idx="3">
+            <a:schemeClr val="accent1"/>
+          </a:fillRef>
+          <a:effectRef idx="2">
+            <a:schemeClr val="accent1"/>
+          </a:effectRef>
+          <a:fontRef idx="minor">
+            <a:schemeClr val="lt1"/>
+          </a:fontRef>
+        </p:style>
+        <p:txBody>
+          <a:bodyPr rtlCol="0" anchor="ctr"/>
+          <a:lstStyle/>
+          <a:p>
+            <a:pPr algn="ctr"/>
+          </a:p>
+        </p:txBody>
+      </p:sp>
+      <p:sp>
+        <p:nvSpPr>
+          <p:cNvPr id="12" name="TextBox 11"/>
+          <p:cNvSpPr txBox="1"/>
+          <p:nvPr/>
+        </p:nvSpPr>
+        <p:spPr>
+          <a:xfrm>
+            <a:off x="594360" y="3108960"/>
+            <a:ext cx="438912" cy="438912"/>
+          </a:xfrm>
+          <a:prstGeom prst="rect">
+            <a:avLst/>
+          </a:prstGeom>
+          <a:noFill/>
+        </p:spPr>
+        <p:txBody>
+          <a:bodyPr wrap="square" anchor="ctr"/>
+          <a:lstStyle/>
+          <a:p>
+            <a:pPr algn="ctr"/>
+            <a:r>
+              <a:rPr sz="1600" b="1" i="0">
+                <a:solidFill>
+                  <a:srgbClr val="FFFFFF"/>
+                </a:solidFill>
+                <a:latin typeface="Calibri"/>
+              </a:rPr>
+              <a:t>2</a:t>
+            </a:r>
+          </a:p>
+        </p:txBody>
+      </p:sp>
+      <p:sp>
+        <p:nvSpPr>
+          <p:cNvPr id="13" name="TextBox 12"/>
+          <p:cNvSpPr txBox="1"/>
+          <p:nvPr/>
+        </p:nvSpPr>
+        <p:spPr>
+          <a:xfrm>
+            <a:off x="1188720" y="2894076"/>
+            <a:ext cx="10271455" cy="886968"/>
+          </a:xfrm>
+          <a:prstGeom prst="rect">
+            <a:avLst/>
+          </a:prstGeom>
+          <a:noFill/>
+        </p:spPr>
+        <p:txBody>
+          <a:bodyPr wrap="square" anchor="ctr"/>
+          <a:lstStyle/>
+          <a:p>
+            <a:r>
+              <a:rPr sz="1500" b="1" i="0">
+                <a:solidFill>
+                  <a:srgbClr val="095292"/>
+                </a:solidFill>
+                <a:latin typeface="Calibri"/>
+              </a:rPr>
+              <a:t>Traduce con IA</a:t>
+            </a:r>
+          </a:p>
+          <a:p>
+            <a:pPr>
+              <a:spcBef>
+                <a:spcPts val="200"/>
+              </a:spcBef>
+            </a:pPr>
+            <a:r>
+              <a:rPr sz="1300" b="0" i="0">
+                <a:solidFill>
+                  <a:srgbClr val="333333"/>
+                </a:solidFill>
+                <a:latin typeface="Calibri"/>
+              </a:rPr>
+              <a:t>Describe tu boceto a una IA y pídele el código Mermaid usando flowchart. Revisa el resultado: la IA acierta la sintaxis, no tu modelo.</a:t>
+            </a:r>
+          </a:p>
+        </p:txBody>
+      </p:sp>
+      <p:sp>
+        <p:nvSpPr>
+          <p:cNvPr id="14" name="Rounded Rectangle 13"/>
+          <p:cNvSpPr/>
+          <p:nvPr/>
+        </p:nvSpPr>
+        <p:spPr>
+          <a:xfrm>
+            <a:off x="457200" y="3945636"/>
+            <a:ext cx="11277295" cy="1051560"/>
+          </a:xfrm>
+          <a:prstGeom prst="roundRect">
+            <a:avLst>
+              <a:gd name="adj" fmla="val 12000"/>
+            </a:avLst>
+          </a:prstGeom>
+          <a:solidFill>
+            <a:srgbClr val="F2F2F2"/>
+          </a:solidFill>
+          <a:ln>
+            <a:noFill/>
+          </a:ln>
+        </p:spPr>
+        <p:style>
+          <a:lnRef idx="1">
+            <a:schemeClr val="accent1"/>
+          </a:lnRef>
+          <a:fillRef idx="3">
+            <a:schemeClr val="accent1"/>
+          </a:fillRef>
+          <a:effectRef idx="2">
+            <a:schemeClr val="accent1"/>
+          </a:effectRef>
+          <a:fontRef idx="minor">
+            <a:schemeClr val="lt1"/>
+          </a:fontRef>
+        </p:style>
+        <p:txBody>
+          <a:bodyPr rtlCol="0" anchor="ctr"/>
+          <a:lstStyle/>
+          <a:p>
+            <a:pPr algn="ctr"/>
+          </a:p>
+        </p:txBody>
+      </p:sp>
+      <p:sp>
+        <p:nvSpPr>
+          <p:cNvPr id="15" name="Rounded Rectangle 14"/>
+          <p:cNvSpPr/>
+          <p:nvPr/>
+        </p:nvSpPr>
+        <p:spPr>
+          <a:xfrm>
+            <a:off x="594360" y="4251960"/>
+            <a:ext cx="438912" cy="438912"/>
+          </a:xfrm>
+          <a:prstGeom prst="roundRect">
+            <a:avLst>
+              <a:gd name="adj" fmla="val 12000"/>
+            </a:avLst>
+          </a:prstGeom>
+          <a:solidFill>
+            <a:srgbClr val="095292"/>
+          </a:solidFill>
+          <a:ln>
+            <a:noFill/>
+          </a:ln>
+        </p:spPr>
+        <p:style>
+          <a:lnRef idx="1">
+            <a:schemeClr val="accent1"/>
+          </a:lnRef>
+          <a:fillRef idx="3">
+            <a:schemeClr val="accent1"/>
+          </a:fillRef>
+          <a:effectRef idx="2">
+            <a:schemeClr val="accent1"/>
+          </a:effectRef>
+          <a:fontRef idx="minor">
+            <a:schemeClr val="lt1"/>
+          </a:fontRef>
+        </p:style>
+        <p:txBody>
+          <a:bodyPr rtlCol="0" anchor="ctr"/>
+          <a:lstStyle/>
+          <a:p>
+            <a:pPr algn="ctr"/>
+          </a:p>
+        </p:txBody>
+      </p:sp>
+      <p:sp>
+        <p:nvSpPr>
+          <p:cNvPr id="16" name="TextBox 15"/>
+          <p:cNvSpPr txBox="1"/>
+          <p:nvPr/>
+        </p:nvSpPr>
+        <p:spPr>
+          <a:xfrm>
+            <a:off x="594360" y="4251960"/>
+            <a:ext cx="438912" cy="438912"/>
+          </a:xfrm>
+          <a:prstGeom prst="rect">
+            <a:avLst/>
+          </a:prstGeom>
+          <a:noFill/>
+        </p:spPr>
+        <p:txBody>
+          <a:bodyPr wrap="square" anchor="ctr"/>
+          <a:lstStyle/>
+          <a:p>
+            <a:pPr algn="ctr"/>
+            <a:r>
+              <a:rPr sz="1600" b="1" i="0">
+                <a:solidFill>
+                  <a:srgbClr val="FFFFFF"/>
+                </a:solidFill>
+                <a:latin typeface="Calibri"/>
+              </a:rPr>
+              <a:t>3</a:t>
+            </a:r>
+          </a:p>
+        </p:txBody>
+      </p:sp>
+      <p:sp>
+        <p:nvSpPr>
+          <p:cNvPr id="17" name="TextBox 16"/>
+          <p:cNvSpPr txBox="1"/>
+          <p:nvPr/>
+        </p:nvSpPr>
+        <p:spPr>
+          <a:xfrm>
+            <a:off x="1188720" y="4037076"/>
+            <a:ext cx="10271455" cy="886968"/>
+          </a:xfrm>
+          <a:prstGeom prst="rect">
+            <a:avLst/>
+          </a:prstGeom>
+          <a:noFill/>
+        </p:spPr>
+        <p:txBody>
+          <a:bodyPr wrap="square" anchor="ctr"/>
+          <a:lstStyle/>
+          <a:p>
+            <a:r>
+              <a:rPr sz="1500" b="1" i="0">
+                <a:solidFill>
+                  <a:srgbClr val="095292"/>
+                </a:solidFill>
+                <a:latin typeface="Calibri"/>
+              </a:rPr>
+              <a:t>Renderiza en un visor</a:t>
+            </a:r>
+          </a:p>
+          <a:p>
+            <a:pPr>
+              <a:spcBef>
+                <a:spcPts val="200"/>
+              </a:spcBef>
+            </a:pPr>
+            <a:r>
+              <a:rPr sz="1300" b="0" i="0">
+                <a:solidFill>
+                  <a:srgbClr val="333333"/>
+                </a:solidFill>
+                <a:latin typeface="Calibri"/>
+              </a:rPr>
+              <a:t>Pega el código en un visor Mermaid (mermaid.live o la vista previa de tu editor) y míralo dibujado. Si no renderiza, corrige ahí: un end faltante o un rótulo sin comillas.</a:t>
+            </a:r>
+          </a:p>
+        </p:txBody>
+      </p:sp>
+      <p:sp>
+        <p:nvSpPr>
+          <p:cNvPr id="18" name="Rounded Rectangle 17"/>
+          <p:cNvSpPr/>
+          <p:nvPr/>
+        </p:nvSpPr>
+        <p:spPr>
+          <a:xfrm>
+            <a:off x="457200" y="5088636"/>
+            <a:ext cx="11277295" cy="1051560"/>
+          </a:xfrm>
+          <a:prstGeom prst="roundRect">
+            <a:avLst>
+              <a:gd name="adj" fmla="val 12000"/>
+            </a:avLst>
+          </a:prstGeom>
+          <a:solidFill>
+            <a:srgbClr val="E8F4FA"/>
+          </a:solidFill>
+          <a:ln>
+            <a:noFill/>
+          </a:ln>
+        </p:spPr>
+        <p:style>
+          <a:lnRef idx="1">
+            <a:schemeClr val="accent1"/>
+          </a:lnRef>
+          <a:fillRef idx="3">
+            <a:schemeClr val="accent1"/>
+          </a:fillRef>
+          <a:effectRef idx="2">
+            <a:schemeClr val="accent1"/>
+          </a:effectRef>
+          <a:fontRef idx="minor">
+            <a:schemeClr val="lt1"/>
+          </a:fontRef>
+        </p:style>
+        <p:txBody>
+          <a:bodyPr rtlCol="0" anchor="ctr"/>
+          <a:lstStyle/>
+          <a:p>
+            <a:pPr algn="ctr"/>
+          </a:p>
+        </p:txBody>
+      </p:sp>
+      <p:sp>
+        <p:nvSpPr>
+          <p:cNvPr id="19" name="Rounded Rectangle 18"/>
+          <p:cNvSpPr/>
+          <p:nvPr/>
+        </p:nvSpPr>
+        <p:spPr>
+          <a:xfrm>
+            <a:off x="594360" y="5394960"/>
+            <a:ext cx="438912" cy="438912"/>
+          </a:xfrm>
+          <a:prstGeom prst="roundRect">
+            <a:avLst>
+              <a:gd name="adj" fmla="val 12000"/>
+            </a:avLst>
+          </a:prstGeom>
+          <a:solidFill>
+            <a:srgbClr val="095292"/>
+          </a:solidFill>
+          <a:ln>
+            <a:noFill/>
+          </a:ln>
+        </p:spPr>
+        <p:style>
+          <a:lnRef idx="1">
+            <a:schemeClr val="accent1"/>
+          </a:lnRef>
+          <a:fillRef idx="3">
+            <a:schemeClr val="accent1"/>
+          </a:fillRef>
+          <a:effectRef idx="2">
+            <a:schemeClr val="accent1"/>
+          </a:effectRef>
+          <a:fontRef idx="minor">
+            <a:schemeClr val="lt1"/>
+          </a:fontRef>
+        </p:style>
+        <p:txBody>
+          <a:bodyPr rtlCol="0" anchor="ctr"/>
+          <a:lstStyle/>
+          <a:p>
+            <a:pPr algn="ctr"/>
+          </a:p>
+        </p:txBody>
+      </p:sp>
+      <p:sp>
+        <p:nvSpPr>
+          <p:cNvPr id="20" name="TextBox 19"/>
+          <p:cNvSpPr txBox="1"/>
+          <p:nvPr/>
+        </p:nvSpPr>
+        <p:spPr>
+          <a:xfrm>
+            <a:off x="594360" y="5394960"/>
+            <a:ext cx="438912" cy="438912"/>
+          </a:xfrm>
+          <a:prstGeom prst="rect">
+            <a:avLst/>
+          </a:prstGeom>
+          <a:noFill/>
+        </p:spPr>
+        <p:txBody>
+          <a:bodyPr wrap="square" anchor="ctr"/>
+          <a:lstStyle/>
+          <a:p>
+            <a:pPr algn="ctr"/>
+            <a:r>
+              <a:rPr sz="1600" b="1" i="0">
+                <a:solidFill>
+                  <a:srgbClr val="FFFFFF"/>
+                </a:solidFill>
+                <a:latin typeface="Calibri"/>
+              </a:rPr>
+              <a:t>4</a:t>
+            </a:r>
+          </a:p>
+        </p:txBody>
+      </p:sp>
+      <p:sp>
+        <p:nvSpPr>
+          <p:cNvPr id="21" name="TextBox 20"/>
+          <p:cNvSpPr txBox="1"/>
+          <p:nvPr/>
+        </p:nvSpPr>
+        <p:spPr>
+          <a:xfrm>
+            <a:off x="1188720" y="5180076"/>
+            <a:ext cx="10271455" cy="886968"/>
+          </a:xfrm>
+          <a:prstGeom prst="rect">
+            <a:avLst/>
+          </a:prstGeom>
+          <a:noFill/>
+        </p:spPr>
+        <p:txBody>
+          <a:bodyPr wrap="square" anchor="ctr"/>
+          <a:lstStyle/>
+          <a:p>
+            <a:r>
+              <a:rPr sz="1500" b="1" i="0">
+                <a:solidFill>
+                  <a:srgbClr val="095292"/>
+                </a:solidFill>
+                <a:latin typeface="Calibri"/>
+              </a:rPr>
+              <a:t>Guarda código e imagen</a:t>
+            </a:r>
+          </a:p>
+          <a:p>
+            <a:pPr>
+              <a:spcBef>
+                <a:spcPts val="200"/>
+              </a:spcBef>
+            </a:pPr>
+            <a:r>
+              <a:rPr sz="1300" b="0" i="0">
+                <a:solidFill>
+                  <a:srgbClr val="333333"/>
+                </a:solidFill>
+                <a:latin typeface="Calibri"/>
+              </a:rPr>
+              <a:t>El código es la fuente del diagrama: guárdalo con tu proyecto junto con el PNG exportado.</a:t>
+            </a:r>
+          </a:p>
+        </p:txBody>
+      </p:sp>
+      <p:sp>
+        <p:nvSpPr>
+          <p:cNvPr id="22" name="TextBox 21"/>
           <p:cNvSpPr txBox="1"/>
           <p:nvPr/>
         </p:nvSpPr>

--- a/Arquitectura de Sistemas Computacionales/Clases/Clase 13 - Escalabilidad automatica/Presentacion.pptx
+++ b/Arquitectura de Sistemas Computacionales/Clases/Clase 13 - Escalabilidad automatica/Presentacion.pptx
@@ -10432,6 +10432,56 @@
               <a:t>–   Triggers: RPS, latencia p95, profundidad de cola, CPU.</a:t>
             </a:r>
           </a:p>
+          <a:p>
+            <a:pPr>
+              <a:spcAft>
+                <a:spcPts val="800"/>
+              </a:spcAft>
+            </a:pPr>
+            <a:r>
+              <a:rPr sz="2000" b="0" i="0">
+                <a:solidFill>
+                  <a:srgbClr val="333333"/>
+                </a:solidFill>
+                <a:latin typeface="Calibri"/>
+              </a:rPr>
+              <a:t>–   Escalar en horizontal exige una API </a:t>
+            </a:r>
+            <a:r>
+              <a:rPr sz="2000" b="1" i="0">
+                <a:solidFill>
+                  <a:srgbClr val="333333"/>
+                </a:solidFill>
+                <a:latin typeface="Calibri"/>
+              </a:rPr>
+              <a:t>sin estado</a:t>
+            </a:r>
+            <a:r>
+              <a:rPr sz="2000" b="0" i="0">
+                <a:solidFill>
+                  <a:srgbClr val="333333"/>
+                </a:solidFill>
+                <a:latin typeface="Calibri"/>
+              </a:rPr>
+              <a:t>: la sesión vive en un token o en un almacén compartido, no en la memoria de una instancia.</a:t>
+            </a:r>
+          </a:p>
+          <a:p>
+            <a:pPr>
+              <a:spcAft>
+                <a:spcPts val="800"/>
+              </a:spcAft>
+            </a:pPr>
+            <a:r>
+              <a:rPr sz="2000" b="0" i="0">
+                <a:solidFill>
+                  <a:srgbClr val="333333"/>
+                </a:solidFill>
+                <a:latin typeface="Calibri"/>
+              </a:rPr>
+              <a:t>–   Ejemplo CloudLite: la API escala de 2 a 6 réplicas; la base de datos no escala igual y suele ser el límite.</a:t>
+            </a:r>
+          </a:p>
         </p:txBody>
       </p:sp>
       <p:sp>
@@ -10649,7 +10699,7 @@
                 </a:solidFill>
                 <a:latin typeface="Calibri"/>
               </a:rPr>
-              <a:t>–   max replicas · min replicas · cooldown — anótenlos aunque sean hipotéticos.</a:t>
+              <a:t>–   max replicas · min replicas · cooldown — se definen aunque sean hipotéticos.</a:t>
             </a:r>
           </a:p>
           <a:p>
@@ -10666,6 +10716,108 @@
                 <a:latin typeface="Calibri"/>
               </a:rPr>
               <a:t>–   Escalar mal = costo (enlace con Clase 10).</a:t>
+            </a:r>
+          </a:p>
+          <a:p>
+            <a:pPr>
+              <a:spcAft>
+                <a:spcPts val="800"/>
+              </a:spcAft>
+            </a:pPr>
+            <a:r>
+              <a:rPr sz="2000" b="0" i="0">
+                <a:solidFill>
+                  <a:srgbClr val="333333"/>
+                </a:solidFill>
+                <a:latin typeface="Calibri"/>
+              </a:rPr>
+              <a:t>–   </a:t>
+            </a:r>
+            <a:r>
+              <a:rPr sz="2000" b="1" i="0">
+                <a:solidFill>
+                  <a:srgbClr val="333333"/>
+                </a:solidFill>
+                <a:latin typeface="Calibri"/>
+              </a:rPr>
+              <a:t>min</a:t>
+            </a:r>
+            <a:r>
+              <a:rPr sz="2000" b="0" i="0">
+                <a:solidFill>
+                  <a:srgbClr val="333333"/>
+                </a:solidFill>
+                <a:latin typeface="Calibri"/>
+              </a:rPr>
+              <a:t> = capacidad base siempre encendida, y su costo fijo · </a:t>
+            </a:r>
+            <a:r>
+              <a:rPr sz="2000" b="1" i="0">
+                <a:solidFill>
+                  <a:srgbClr val="333333"/>
+                </a:solidFill>
+                <a:latin typeface="Calibri"/>
+              </a:rPr>
+              <a:t>max</a:t>
+            </a:r>
+            <a:r>
+              <a:rPr sz="2000" b="0" i="0">
+                <a:solidFill>
+                  <a:srgbClr val="333333"/>
+                </a:solidFill>
+                <a:latin typeface="Calibri"/>
+              </a:rPr>
+              <a:t> = techo de gasto y de conexiones a la base.</a:t>
+            </a:r>
+          </a:p>
+          <a:p>
+            <a:pPr>
+              <a:spcAft>
+                <a:spcPts val="800"/>
+              </a:spcAft>
+            </a:pPr>
+            <a:r>
+              <a:rPr sz="2000" b="0" i="0">
+                <a:solidFill>
+                  <a:srgbClr val="333333"/>
+                </a:solidFill>
+                <a:latin typeface="Calibri"/>
+              </a:rPr>
+              <a:t>–   </a:t>
+            </a:r>
+            <a:r>
+              <a:rPr sz="2000" b="1" i="0">
+                <a:solidFill>
+                  <a:srgbClr val="333333"/>
+                </a:solidFill>
+                <a:latin typeface="Calibri"/>
+              </a:rPr>
+              <a:t>Cooldown</a:t>
+            </a:r>
+            <a:r>
+              <a:rPr sz="2000" b="0" i="0">
+                <a:solidFill>
+                  <a:srgbClr val="333333"/>
+                </a:solidFill>
+                <a:latin typeface="Calibri"/>
+              </a:rPr>
+              <a:t> = espera tras escalar (por ejemplo 5 minutos) para no subir y bajar en ciclos.</a:t>
+            </a:r>
+          </a:p>
+          <a:p>
+            <a:pPr>
+              <a:spcAft>
+                <a:spcPts val="800"/>
+              </a:spcAft>
+            </a:pPr>
+            <a:r>
+              <a:rPr sz="2000" b="0" i="0">
+                <a:solidFill>
+                  <a:srgbClr val="333333"/>
+                </a:solidFill>
+                <a:latin typeface="Calibri"/>
+              </a:rPr>
+              <a:t>–   Error común: max sin límite; un pico o un ataque se convierte en factura.</a:t>
             </a:r>
           </a:p>
         </p:txBody>

--- a/Arquitectura de Sistemas Computacionales/Clases/Clase 13 - Escalabilidad automatica/Presentacion.pptx
+++ b/Arquitectura de Sistemas Computacionales/Clases/Clase 13 - Escalabilidad automatica/Presentacion.pptx
@@ -4185,7 +4185,7 @@
                 </a:solidFill>
                 <a:latin typeface="Calibri"/>
               </a:rPr>
-              <a:t>Actividad autónoma · escenario de escala PI</a:t>
+              <a:t>Actividad autónoma · escenario de escala</a:t>
             </a:r>
           </a:p>
         </p:txBody>
@@ -4276,7 +4276,7 @@
                 </a:solidFill>
                 <a:latin typeface="Calibri"/>
               </a:rPr>
-              <a:t>Conceptos del tema, ejemplos resueltos sobre CloudLite y cierre conceptual.</a:t>
+              <a:t>Conceptos del tema, ejemplos resueltos sobre la app y cierre conceptual.</a:t>
             </a:r>
           </a:p>
         </p:txBody>
@@ -4512,7 +4512,7 @@
                 </a:solidFill>
                 <a:latin typeface="Calibri"/>
               </a:rPr>
-              <a:t>–   Lo mismo aplica a los archivos subidos de CloudLite: si se escriben en el disco local del contenedor, la mitad de las descargas fallara porque el archivo esta en la otra instancia, y por eso van a almacenamiento de objetos, que fue la decision de la Clase 7.</a:t>
+              <a:t>–   Lo mismo aplica a los archivos subidos de la app: si se escriben en el disco local del contenedor, la mitad de las descargas fallara porque el archivo esta en la otra instancia, y por eso van a almacenamiento de objetos, que fue la decision de la Clase 7.</a:t>
             </a:r>
           </a:p>
         </p:txBody>
@@ -4764,7 +4764,7 @@
                 </a:solidFill>
                 <a:latin typeface="Calibri"/>
               </a:rPr>
-              <a:t>–   Una politica completa para CloudLite se lee asi: metrica CPU promedio del grupo de instancias de la API, umbral 70 por ciento sostenido durante 5 minutos, accion agregar una instancia, cooldown de 5 minutos, minimo 2 y maximo 6.</a:t>
+              <a:t>–   Una politica completa para la app se lee asi: metrica CPU promedio del grupo de instancias de la API, umbral 70 por ciento sostenido durante 5 minutos, accion agregar una instancia, cooldown de 5 minutos, minimo 2 y maximo 6.</a:t>
             </a:r>
           </a:p>
           <a:p>
@@ -5836,7 +5836,7 @@
                 </a:solidFill>
                 <a:latin typeface="Calibri"/>
               </a:rPr>
-              <a:t>–   Elegir bien la metrica es la decision mas fina del tema, y el ejemplo de CloudLite es contundente.</a:t>
+              <a:t>–   Elegir bien la metrica es la decision mas fina del tema, y el ejemplo de la app es contundente.</a:t>
             </a:r>
           </a:p>
           <a:p>
@@ -6104,7 +6104,7 @@
                 </a:solidFill>
                 <a:latin typeface="Calibri"/>
               </a:rPr>
-              <a:t>–   Para el componente de notificaciones de CloudLite la metrica natural es el numero de mensajes esperando en la cola, no la CPU del worker: si hay 500 mensajes acumulados hay que agregar workers, y da igual cuanta CPU usen.</a:t>
+              <a:t>–   Para el componente de notificaciones de la app la metrica natural es el numero de mensajes esperando en la cola, no la CPU del worker: si hay 500 mensajes acumulados hay que agregar workers, y da igual cuanta CPU usen.</a:t>
             </a:r>
           </a:p>
         </p:txBody>
@@ -6372,7 +6372,7 @@
                 </a:solidFill>
                 <a:latin typeface="Calibri"/>
               </a:rPr>
-              <a:t>–   Las alternativas mas agresivas, particionar los datos por clave o cambiar a un modelo sin esquema fijo, son decisiones de arquitectura mayores y estan fuera del alcance de CloudLite v1</a:t>
+              <a:t>–   Las alternativas mas agresivas, particionar los datos por clave o cambiar a un modelo sin esquema fijo, son decisiones de arquitectura mayores y estan fuera del alcance de la app v1</a:t>
             </a:r>
           </a:p>
           <a:p>
@@ -7203,7 +7203,7 @@
                 </a:solidFill>
                 <a:latin typeface="Calibri"/>
               </a:rPr>
-              <a:t> Conceptos del tema, uno por lámina, con ejemplos sobre CloudLite.</a:t>
+              <a:t> Conceptos del tema, uno por lámina, con ejemplos sobre la app.</a:t>
             </a:r>
           </a:p>
           <a:p>
@@ -8195,7 +8195,7 @@
                 </a:solidFill>
                 <a:latin typeface="Calibri"/>
               </a:rPr>
-              <a:t>  servicio: cloudlite-api</a:t>
+              <a:t>  servicio: turnos-api</a:t>
             </a:r>
           </a:p>
           <a:p>
@@ -9925,7 +9925,7 @@
                 </a:solidFill>
                 <a:latin typeface="Calibri"/>
               </a:rPr>
-              <a:t>Actualizar el informe PI con la política de escala.</a:t>
+              <a:t>Actualizar el informe con la política de escala.</a:t>
             </a:r>
           </a:p>
         </p:txBody>
@@ -10177,7 +10177,7 @@
                 </a:solidFill>
                 <a:latin typeface="Calibri"/>
               </a:rPr>
-              <a:t>–   Actualizar el informe PI con la política de escala.</a:t>
+              <a:t>–   Actualizar el informe con la política de escala.</a:t>
             </a:r>
           </a:p>
         </p:txBody>
@@ -10358,7 +10358,7 @@
                 </a:solidFill>
                 <a:latin typeface="Calibri"/>
               </a:rPr>
-              <a:t>Escala para CloudLite</a:t>
+              <a:t>Escala para la app</a:t>
             </a:r>
           </a:p>
         </p:txBody>
@@ -10479,7 +10479,7 @@
                 </a:solidFill>
                 <a:latin typeface="Calibri"/>
               </a:rPr>
-              <a:t>–   Ejemplo CloudLite: la API escala de 2 a 6 réplicas; la base de datos no escala igual y suele ser el límite.</a:t>
+              <a:t>–   Ejemplo de la app: la API escala de 2 a 6 réplicas; la base de datos no escala igual y suele ser el límite.</a:t>
             </a:r>
           </a:p>
         </p:txBody>
@@ -11841,7 +11841,7 @@
                 </a:solidFill>
                 <a:latin typeface="Calibri"/>
               </a:rPr>
-              <a:t>–   El sintoma en CloudLite es facil de narrar: si la API guarda la sesion en un diccionario en memoria de la instancia que atendio el login</a:t>
+              <a:t>–   El sintoma en la app es facil de narrar: si la API guarda la sesion en un diccionario en memoria de la instancia que atendio el login</a:t>
             </a:r>
           </a:p>
           <a:p>

--- a/Arquitectura de Sistemas Computacionales/Clases/Clase 13 - Escalabilidad automatica/Presentacion.pptx
+++ b/Arquitectura de Sistemas Computacionales/Clases/Clase 13 - Escalabilidad automatica/Presentacion.pptx
@@ -25,11 +25,6 @@
     <p:sldId id="273" r:id="rId25"/>
     <p:sldId id="274" r:id="rId26"/>
     <p:sldId id="275" r:id="rId27"/>
-    <p:sldId id="276" r:id="rId28"/>
-    <p:sldId id="277" r:id="rId29"/>
-    <p:sldId id="278" r:id="rId30"/>
-    <p:sldId id="279" r:id="rId31"/>
-    <p:sldId id="280" r:id="rId32"/>
   </p:sldIdLst>
   <p:sldSz cx="12191695" cy="6858000" type="screen4x3"/>
   <p:notesSz cx="6858000" cy="9144000"/>
@@ -535,6 +530,18 @@
               <a:t>Por eso el orden del temario no es casual: primero se mide y se identifica el cuello de botella, y solo despues se decide como agregar capacidad.</a:t>
             </a:r>
           </a:p>
+          <a:p/>
+          <a:p>
+            <a:r>
+              <a:t>(No se proyecta) Esta clase es autonoma por festivo: el estudiante trabaja solo y este fundamento se publica como material de lectura, asi que esta escrito para explicar el tema completo sin apoyo de un encuentro sincronico.</a:t>
+            </a:r>
+          </a:p>
+          <a:p/>
+          <a:p>
+            <a:r>
+              <a:t>(No se proyecta) El rendimiento, tema de la Clase 12, pregunta cuanto tarda una peticion con la carga actual.</a:t>
+            </a:r>
+          </a:p>
         </p:txBody>
       </p:sp>
       <p:sp>
@@ -611,6 +618,18 @@
               <a:t>No tiene techo cercano, mejora la disponibilidad porque si una instancia muere las otras siguen atendiendo, y permite crecer en pasos pequenos y baratos.</a:t>
             </a:r>
           </a:p>
+          <a:p/>
+          <a:p>
+            <a:r>
+              <a:t>(No se proyecta) Hay dos formas de agregar capacidad y el estudiante debe poder definirlas sin dudar.</a:t>
+            </a:r>
+          </a:p>
+          <a:p/>
+          <a:p>
+            <a:r>
+              <a:t>(No se proyecta) Escalar horizontalmente, o hacia afuera, es agregar MAS instancias iguales trabajando en paralelo, con el balanceador de carga de la Clase 7 repartiendo peticiones entre ellas.</a:t>
+            </a:r>
+          </a:p>
         </p:txBody>
       </p:sp>
       <p:sp>
@@ -681,6 +700,18 @@
               <a:t>Un servicio sin estado no guarda en la memoria de su propio proceso ninguna informacion que necesite en la siguiente peticion; todo lo que deba persistir vive en un almacen compartido, sea la base de datos, una cache comun o el token que trae el cliente.</a:t>
             </a:r>
           </a:p>
+          <a:p/>
+          <a:p>
+            <a:r>
+              <a:t>(No se proyecta) La solucion parcial que casi todos proponen es la sesion pegajosa, que amarra al usuario a una instancia, y hay que decir por que es un parche: si esa instancia se cae la sesion se pierde igual, y el balanceo se vuelve desigual.</a:t>
+            </a:r>
+          </a:p>
+          <a:p/>
+          <a:p>
+            <a:r>
+              <a:t>(No se proyecta) Lo mismo aplica a los archivos subidos de CloudLite: si se escriben en el disco local del contenedor, la mitad de las descargas fallara porque el archivo esta en la otra instancia, y por eso van a almacenamiento de objetos, que fue la decision de la Clase 7.</a:t>
+            </a:r>
+          </a:p>
         </p:txBody>
       </p:sp>
       <p:sp>
@@ -751,6 +782,12 @@
               <a:t>Cada numero se justifica.</a:t>
             </a:r>
           </a:p>
+          <a:p/>
+          <a:p>
+            <a:r>
+              <a:t>(No se proyecta) Y el maximo es la pieza mas olvidada y la mas importante: es el techo de costo decidido en la Clase 10, y sin el, un error de programacion o un ataque puede escalar la factura sin limite; hay casos documentados de facturas de miles de dolares generadas en horas por autoescalado sin tope.</a:t>
+            </a:r>
+          </a:p>
         </p:txBody>
       </p:sp>
       <p:sp>
@@ -818,13 +855,13 @@
           <a:lstStyle/>
           <a:p>
             <a:r>
-              <a:t>Regla de bolsillo: la metrica correcta es la que mide el recurso que se agota primero, es decir el cuello de botella identificado en la clase anterior.</a:t>
+              <a:t>(No se proyecta) Sume el periodo de evaluacion y el sistema reacciona entre 5 y 10 minutos despues de que empezo el problema, asi que un pico subito del tipo que la prueba de spike de la Clase 12 simula ocurre y termina antes de que llegue la ayuda.</a:t>
             </a:r>
           </a:p>
           <a:p/>
           <a:p>
             <a:r>
-              <a:t>(Sobre la actividad, no se proyecta) De ahi que el entregable de hoy no se pueda hacer bien si el de la Clase 12 quedo vacio.</a:t>
+              <a:t>(No se proyecta) Aqui reaparece la Clase 3: una imagen slim arranca mas rapido que una de un gigabyte, asi que adelgazar la imagen no es solo ahorro de costo, es tiempo de reaccion.</a:t>
             </a:r>
           </a:p>
         </p:txBody>
@@ -894,13 +931,19 @@
           <a:lstStyle/>
           <a:p>
             <a:r>
-              <a:t>Declarar lo que NO escala separa un diseno serio de una lista de deseos.</a:t>
+              <a:t>(No se proyecta) Metricas mejores para ese caso son las peticiones por segundo por instancia, que se deriva del calculo hecho en la Clase 12, la latencia p95 del propio servicio, o la longitud de la cola pendiente.</a:t>
             </a:r>
           </a:p>
           <a:p/>
           <a:p>
             <a:r>
-              <a:t>Multiplicar la capa sin verificar el limite del recurso compartido no mejora el sistema, lo rompe.</a:t>
+              <a:t>(No se proyecta) Regla de bolsillo: la metrica correcta es la que mide el recurso que se agota primero, es decir el cuello de botella identificado en la clase anterior.</a:t>
+            </a:r>
+          </a:p>
+          <a:p/>
+          <a:p>
+            <a:r>
+              <a:t>(No se proyecta) De ahi que el entregable de hoy no se pueda hacer bien si el de la Clase 12 quedo vacio.</a:t>
             </a:r>
           </a:p>
         </p:txBody>
@@ -970,19 +1013,19 @@
           <a:lstStyle/>
           <a:p>
             <a:r>
-              <a:t>Tres preguntas aparecen sin falta en una clase autonoma como esta y conviene responderlas por escrito en el foro.</a:t>
+              <a:t>Declarar lo que NO escala separa un diseno serio de una lista de deseos.</a:t>
             </a:r>
           </a:p>
           <a:p/>
           <a:p>
             <a:r>
-              <a:t>(Sobre la actividad, no se proyecta) Para verificar el diseno sin gastar un peso alcanza Killercoda con docker compose para levantar dos o tres replicas del stub detras de un balanceador y comprobar que la sesion no se rompe; el entregable formal es una nota sobre el diagrama de despliegue y la seccion escrita con estrategia, trigger, limite y lo que no escala, que la Clase 14 evaluara y la Clase 15 exigira sustentar.</a:t>
+              <a:t>Multiplicar la capa sin verificar el limite del recurso compartido no mejora el sistema, lo rompe.</a:t>
             </a:r>
           </a:p>
           <a:p/>
           <a:p>
             <a:r>
-              <a:t>(Sobre la actividad, no se proyecta) Si eso se deja pasar, el entregable llega con la seccion de "que no escala" vacia o rellenada con una frase generica, y en la Clase 15 el estudiante afirma que su sistema soporta cualquier crecimiento mientras el diagrama muestra una unica base de datos con la sesion guardada en memoria, que es la contradiccion mas facil de detectar y la mas costosa de explicar en ese momento.</a:t>
+              <a:t>(No se proyecta) Tambien conviene enumerar otras piezas que no escalan por replicacion: los limites de terceros, como un proveedor de correo que acepta 100 envios por minuto y rechaza el exceso, de modo que diez workers no envian diez veces mas rapido sino que generan diez veces mas errores; los sistemas de archivos compartidos; y las tareas programadas de tipo singleton, que si corren en seis instancias hacen el mismo trabajo seis veces y pueden duplicar cobros o correos.</a:t>
             </a:r>
           </a:p>
         </p:txBody>
@@ -4457,7 +4500,7 @@
                 </a:solidFill>
                 <a:latin typeface="Calibri"/>
               </a:rPr>
-              <a:t>Ausencia de estado: donde mas estudiantes fallan (2/2)</a:t>
+              <a:t>Las cinco piezas del autoescalado (2/2)</a:t>
             </a:r>
           </a:p>
         </p:txBody>
@@ -4496,7 +4539,7 @@
                 </a:solidFill>
                 <a:latin typeface="Calibri"/>
               </a:rPr>
-              <a:t>–   La solucion arquitectonica es sacar el estado del proceso: guardar la sesion en un almacen compartido o usar un token firmado que el cliente presenta en cada peticion.</a:t>
+              <a:t>–   Los 5 minutos evitan reaccionar a un ruido de 20 segundos.</a:t>
             </a:r>
           </a:p>
           <a:p>
@@ -4512,7 +4555,55 @@
                 </a:solidFill>
                 <a:latin typeface="Calibri"/>
               </a:rPr>
-              <a:t>–   Lo mismo aplica a los archivos subidos de la app: si se escriben en el disco local del contenedor, la mitad de las descargas fallara porque el archivo esta en la otra instancia, y por eso van a almacenamiento de objetos, que fue la decision de la Clase 7.</a:t>
+              <a:t>–   El minimo es 2 y no 1 porque con una sola instancia no hay tolerancia a fallas ni despliegue sin caida.</a:t>
+            </a:r>
+          </a:p>
+          <a:p>
+            <a:pPr>
+              <a:spcAft>
+                <a:spcPts val="800"/>
+              </a:spcAft>
+            </a:pPr>
+            <a:r>
+              <a:rPr sz="2000" b="0" i="0">
+                <a:solidFill>
+                  <a:srgbClr val="333333"/>
+                </a:solidFill>
+                <a:latin typeface="Calibri"/>
+              </a:rPr>
+              <a:t>–   Falta una simetria que casi nadie escribe: la politica de reduccion.</a:t>
+            </a:r>
+          </a:p>
+          <a:p>
+            <a:pPr>
+              <a:spcAft>
+                <a:spcPts val="800"/>
+              </a:spcAft>
+            </a:pPr>
+            <a:r>
+              <a:rPr sz="2000" b="0" i="0">
+                <a:solidFill>
+                  <a:srgbClr val="333333"/>
+                </a:solidFill>
+                <a:latin typeface="Calibri"/>
+              </a:rPr>
+              <a:t>–   Si se escala hacia afuera al 70 por ciento no se puede escalar hacia adentro tambien al 70, porque el sistema oscilaria agregando y quitando instancias sin parar, fenomeno llamado flapping.</a:t>
+            </a:r>
+          </a:p>
+          <a:p>
+            <a:pPr>
+              <a:spcAft>
+                <a:spcPts val="800"/>
+              </a:spcAft>
+            </a:pPr>
+            <a:r>
+              <a:rPr sz="2000" b="0" i="0">
+                <a:solidFill>
+                  <a:srgbClr val="333333"/>
+                </a:solidFill>
+                <a:latin typeface="Calibri"/>
+              </a:rPr>
+              <a:t>–   La convencion es usar umbrales asimetricos, por ejemplo salir al 70 y entrar al 30, y hacer la reduccion mas lenta que la expansion, porque equivocarse agregando cuesta dinero y equivocarse quitando cuesta una caida.</a:t>
             </a:r>
           </a:p>
         </p:txBody>
@@ -4693,7 +4784,7 @@
                 </a:solidFill>
                 <a:latin typeface="Calibri"/>
               </a:rPr>
-              <a:t>Las cinco piezas del autoescalado (1/2)</a:t>
+              <a:t>El limite fisico: la instancia nueva no aparece al instante</a:t>
             </a:r>
           </a:p>
         </p:txBody>
@@ -4732,7 +4823,7 @@
                 </a:solidFill>
                 <a:latin typeface="Calibri"/>
               </a:rPr>
-              <a:t>–   El autoescalado es la automatizacion del escalado horizontal y consta de cinco piezas: una metrica que se observa, un umbral que dispara la accion</a:t>
+              <a:t>–   Hay un limite fisico del autoescalado que desarma la idea de que es magia: la instancia nueva no aparece al instante.</a:t>
             </a:r>
           </a:p>
           <a:p>
@@ -4748,7 +4839,7 @@
                 </a:solidFill>
                 <a:latin typeface="Calibri"/>
               </a:rPr>
-              <a:t>–   Un periodo de evaluacion durante el cual el umbral debe sostenerse, un enfriamiento o cooldown que impide actuar de nuevo de inmediato, y un rango con minimo y maximo de instancias.</a:t>
+              <a:t>–   Un contenedor liviano tarda del orden de 10 a 60 segundos entre que se decide crearlo y que recibe trafico util, contando descarga de imagen</a:t>
             </a:r>
           </a:p>
           <a:p>
@@ -4764,7 +4855,7 @@
                 </a:solidFill>
                 <a:latin typeface="Calibri"/>
               </a:rPr>
-              <a:t>–   Una politica completa para la app se lee asi: metrica CPU promedio del grupo de instancias de la API, umbral 70 por ciento sostenido durante 5 minutos, accion agregar una instancia, cooldown de 5 minutos, minimo 2 y maximo 6.</a:t>
+              <a:t>–   Arranque del proceso, conexion a la base de datos y aprobacion del chequeo de salud; una maquina virtual completa puede tardar de 2 a 5 minutos.</a:t>
             </a:r>
           </a:p>
           <a:p>
@@ -4780,7 +4871,7 @@
                 </a:solidFill>
                 <a:latin typeface="Calibri"/>
               </a:rPr>
-              <a:t>–   El 70 por ciento deja holgura para el pico que llega mientras la instancia nueva arranca.</a:t>
+              <a:t>–   Las respuestas correctas son tres y ninguna es "poner mas autoescalado": mantener holgura permanente por encima de la demanda habitual</a:t>
             </a:r>
           </a:p>
           <a:p>
@@ -4796,23 +4887,7 @@
                 </a:solidFill>
                 <a:latin typeface="Calibri"/>
               </a:rPr>
-              <a:t>–   Los 5 minutos evitan reaccionar a un ruido de 20 segundos.</a:t>
-            </a:r>
-          </a:p>
-          <a:p>
-            <a:pPr>
-              <a:spcAft>
-                <a:spcPts val="800"/>
-              </a:spcAft>
-            </a:pPr>
-            <a:r>
-              <a:rPr sz="2000" b="0" i="0">
-                <a:solidFill>
-                  <a:srgbClr val="333333"/>
-                </a:solidFill>
-                <a:latin typeface="Calibri"/>
-              </a:rPr>
-              <a:t>–   El minimo es 2 y no 1 porque con una sola instancia no hay tolerancia a fallas ni despliegue sin caida.</a:t>
+              <a:t>–   Poner una cola delante para absorber la rafaga y procesarla al ritmo que el sistema aguante, o degradar con gracia devolviendo una version reducida de la respuesta.</a:t>
             </a:r>
           </a:p>
         </p:txBody>
@@ -4993,7 +5068,7 @@
                 </a:solidFill>
                 <a:latin typeface="Calibri"/>
               </a:rPr>
-              <a:t>Las cinco piezas del autoescalado (2/2)</a:t>
+              <a:t>Elegir la metrica: la decision mas fina del tema</a:t>
             </a:r>
           </a:p>
         </p:txBody>
@@ -5032,7 +5107,7 @@
                 </a:solidFill>
                 <a:latin typeface="Calibri"/>
               </a:rPr>
-              <a:t>–   Y el maximo es la pieza mas olvidada y la mas importante: es el techo de costo decidido en la Clase 10</a:t>
+              <a:t>–   Elegir bien la metrica es la decision mas fina del tema, y el ejemplo de la app es contundente.</a:t>
             </a:r>
           </a:p>
           <a:p>
@@ -5048,7 +5123,7 @@
                 </a:solidFill>
                 <a:latin typeface="Calibri"/>
               </a:rPr>
-              <a:t>–   Y sin el, un error de programacion o un ataque puede escalar la factura sin limite; hay casos documentados de facturas de miles de dolares generadas en horas por autoescalado sin tope.</a:t>
+              <a:t>–   La CPU es la metrica por defecto y es la equivocada para la mayoria de las APIs, porque una API que sobre todo espera respuestas de la base de datos esta limitada por entrada y salida</a:t>
             </a:r>
           </a:p>
           <a:p>
@@ -5064,7 +5139,7 @@
                 </a:solidFill>
                 <a:latin typeface="Calibri"/>
               </a:rPr>
-              <a:t>–   Falta una simetria que casi nadie escribe: la politica de reduccion.</a:t>
+              <a:t>–   No por procesador: cuando la latencia se dispara a 3 segundos porque el pool de conexiones esta agotado, la CPU puede seguir marcando un tranquilo 20 por ciento, el umbral del 70 nunca se cruza y el autoescalado no hace nada mientras los usuarios sufren.</a:t>
             </a:r>
           </a:p>
           <a:p>
@@ -5080,23 +5155,7 @@
                 </a:solidFill>
                 <a:latin typeface="Calibri"/>
               </a:rPr>
-              <a:t>–   Si se escala hacia afuera al 70 por ciento no se puede escalar hacia adentro tambien al 70, porque el sistema oscilaria agregando y quitando instancias sin parar, fenomeno llamado flapping.</a:t>
-            </a:r>
-          </a:p>
-          <a:p>
-            <a:pPr>
-              <a:spcAft>
-                <a:spcPts val="800"/>
-              </a:spcAft>
-            </a:pPr>
-            <a:r>
-              <a:rPr sz="2000" b="0" i="0">
-                <a:solidFill>
-                  <a:srgbClr val="333333"/>
-                </a:solidFill>
-                <a:latin typeface="Calibri"/>
-              </a:rPr>
-              <a:t>–   La convencion es usar umbrales asimetricos, por ejemplo salir al 70 y entrar al 30, y hacer la reduccion mas lenta que la expansion, porque equivocarse agregando cuesta dinero y equivocarse quitando cuesta una caida.</a:t>
+              <a:t>–   Para el componente de notificaciones de la app la metrica natural es el numero de mensajes esperando en la cola, no la CPU del worker: si hay 500 mensajes acumulados hay que agregar workers, y da igual cuanta CPU usen.</a:t>
             </a:r>
           </a:p>
         </p:txBody>
@@ -5277,7 +5336,7 @@
                 </a:solidFill>
                 <a:latin typeface="Calibri"/>
               </a:rPr>
-              <a:t>El limite fisico: la instancia nueva no aparece al instante (1/2)</a:t>
+              <a:t>Lo que NO escala (1/2)</a:t>
             </a:r>
           </a:p>
         </p:txBody>
@@ -5316,7 +5375,7 @@
                 </a:solidFill>
                 <a:latin typeface="Calibri"/>
               </a:rPr>
-              <a:t>–   Hay un limite fisico del autoescalado que desarma la idea de que es magia: la instancia nueva no aparece al instante.</a:t>
+              <a:t>–   La capa de datos es el caso central: agregar instancias de API es casi gratis conceptualmente, pero una base de datos relacional que debe mantener consistencia tiene un unico escritor, y ese escritor no se multiplica sin cambiar el modelo.</a:t>
             </a:r>
           </a:p>
           <a:p>
@@ -5332,7 +5391,7 @@
                 </a:solidFill>
                 <a:latin typeface="Calibri"/>
               </a:rPr>
-              <a:t>–   Un contenedor liviano tarda del orden de 10 a 60 segundos entre que se decide crearlo y que recibe trafico util, contando descarga de imagen</a:t>
+              <a:t>–   Se pueden agregar replicas de lectura, y ahi entra un concepto a definir: el retraso de replicacion, esos milisegundos o segundos en que la replica todavia no tiene el ultimo cambio</a:t>
             </a:r>
           </a:p>
           <a:p>
@@ -5348,7 +5407,7 @@
                 </a:solidFill>
                 <a:latin typeface="Calibri"/>
               </a:rPr>
-              <a:t>–   Arranque del proceso, conexion a la base de datos y aprobacion del chequeo de salud; una maquina virtual completa puede tardar de 2 a 5 minutos.</a:t>
+              <a:t>–   Que produce el sintoma de que el usuario guarda un dato, la pagina lo relee de una replica y el dato no aparece.</a:t>
             </a:r>
           </a:p>
           <a:p>
@@ -5364,7 +5423,7 @@
                 </a:solidFill>
                 <a:latin typeface="Calibri"/>
               </a:rPr>
-              <a:t>–   Sume el periodo de evaluacion y el sistema reacciona entre 5 y 10 minutos despues de que empezo el problema, asi que un pico subito del tipo que la prueba de spike de la Clase 12 simula ocurre y termina antes de que llegue la ayuda.</a:t>
+              <a:t>–   Las alternativas mas agresivas, particionar los datos por clave o cambiar a un modelo sin esquema fijo, son decisiones de arquitectura mayores y estan fuera del alcance de la app v1</a:t>
             </a:r>
           </a:p>
         </p:txBody>
@@ -5545,7 +5604,7 @@
                 </a:solidFill>
                 <a:latin typeface="Calibri"/>
               </a:rPr>
-              <a:t>El limite fisico: la instancia nueva no aparece al instante (2/2)</a:t>
+              <a:t>Lo que NO escala (2/2)</a:t>
             </a:r>
           </a:p>
         </p:txBody>
@@ -5584,7 +5643,7 @@
                 </a:solidFill>
                 <a:latin typeface="Calibri"/>
               </a:rPr>
-              <a:t>–   Las respuestas correctas son tres y ninguna es "poner mas autoescalado": mantener holgura permanente por encima de la demanda habitual</a:t>
+              <a:t>–   Decirlo explicitamente en el informe es una respuesta correcta, no una debilidad.</a:t>
             </a:r>
           </a:p>
           <a:p>
@@ -5600,7 +5659,7 @@
                 </a:solidFill>
                 <a:latin typeface="Calibri"/>
               </a:rPr>
-              <a:t>–   Poner una cola delante para absorber la rafaga y procesarla al ritmo que el sistema aguante, o degradar con gracia devolviendo una version reducida de la respuesta.</a:t>
+              <a:t>–   Hay un detalle aritmetico que es la mejor leccion del dia: si cada instancia de la API abre un pool de 20 conexiones y el autoescalado sube a 6 instancias</a:t>
             </a:r>
           </a:p>
           <a:p>
@@ -5616,7 +5675,7 @@
                 </a:solidFill>
                 <a:latin typeface="Calibri"/>
               </a:rPr>
-              <a:t>–   Aqui reaparece la Clase 3: una imagen slim arranca mas rapido que una de un gigabyte, asi que adelgazar la imagen no es solo ahorro de costo, es tiempo de reaccion.</a:t>
+              <a:t>–   El sistema pide 120 conexiones, mientras que una base de datos gestionada pequena suele admitir del orden de 100; el resultado es que escalar la API tumba la base de datos.</a:t>
             </a:r>
           </a:p>
         </p:txBody>
@@ -5797,7 +5856,7 @@
                 </a:solidFill>
                 <a:latin typeface="Calibri"/>
               </a:rPr>
-              <a:t>Elegir la metrica: la decision mas fina del tema (1/2)</a:t>
+              <a:t>Preguntas frecuentes y cierre conceptual (1/2)</a:t>
             </a:r>
           </a:p>
         </p:txBody>
@@ -5836,7 +5895,7 @@
                 </a:solidFill>
                 <a:latin typeface="Calibri"/>
               </a:rPr>
-              <a:t>–   Elegir bien la metrica es la decision mas fina del tema, y el ejemplo de la app es contundente.</a:t>
+              <a:t>–   La primera es por que documentar limites si el autoescalado es automatico; la respuesta es que automatico significa que ejecuta la politica que alguien escribio, no que decide bien: sin maximo escala el costo</a:t>
             </a:r>
           </a:p>
           <a:p>
@@ -5852,7 +5911,7 @@
                 </a:solidFill>
                 <a:latin typeface="Calibri"/>
               </a:rPr>
-              <a:t>–   La CPU es la metrica por defecto y es la equivocada para la mayoria de las APIs, porque una API que sobre todo espera respuestas de la base de datos esta limitada por entrada y salida</a:t>
+              <a:t>–   Sin minimo pierde disponibilidad, con la metrica equivocada no reacciona y con umbrales simetricos oscila; el automatismo amplifica la calidad de la decision humana en ambos sentidos.</a:t>
             </a:r>
           </a:p>
           <a:p>
@@ -5868,7 +5927,7 @@
                 </a:solidFill>
                 <a:latin typeface="Calibri"/>
               </a:rPr>
-              <a:t>–   No por procesador: cuando la latencia se dispara a 3 segundos porque el pool de conexiones esta agotado, la CPU puede seguir marcando un tranquilo 20 por ciento, el umbral del 70 nunca se cruza y el autoescalado no hace nada mientras los usuarios sufren.</a:t>
+              <a:t>–   La segunda es si no seria mejor serverless, que "escala infinito"; la respuesta reconoce la ventaja real, que escala por peticion y no cobra en reposo</a:t>
             </a:r>
           </a:p>
         </p:txBody>
@@ -6049,7 +6108,7 @@
                 </a:solidFill>
                 <a:latin typeface="Calibri"/>
               </a:rPr>
-              <a:t>Elegir la metrica: la decision mas fina del tema (2/2)</a:t>
+              <a:t>Preguntas frecuentes y cierre conceptual (2/2)</a:t>
             </a:r>
           </a:p>
         </p:txBody>
@@ -6088,7 +6147,7 @@
                 </a:solidFill>
                 <a:latin typeface="Calibri"/>
               </a:rPr>
-              <a:t>–   Metricas mejores para ese caso son las peticiones por segundo por instancia, que se deriva del calculo hecho en la Clase 12, la latencia p95 del propio servicio, o la longitud de la cola pendiente.</a:t>
+              <a:t>–   Y nombra los tres costos: el arranque en frio, esa demora extra de cientos de milisegundos a segundos cuando una funcion se invoca despues de estar inactiva; el agotamiento de conexiones</a:t>
             </a:r>
           </a:p>
           <a:p>
@@ -6104,7 +6163,23 @@
                 </a:solidFill>
                 <a:latin typeface="Calibri"/>
               </a:rPr>
-              <a:t>–   Para el componente de notificaciones de la app la metrica natural es el numero de mensajes esperando en la cola, no la CPU del worker: si hay 500 mensajes acumulados hay que agregar workers, y da igual cuanta CPU usen.</a:t>
+              <a:t>–   Porque mil funciones concurrentes matan a la base de datos igual que mil contenedores; y el costo por invocacion, que a volumen alto puede superar el de instancias fijas.</a:t>
+            </a:r>
+          </a:p>
+          <a:p>
+            <a:pPr>
+              <a:spcAft>
+                <a:spcPts val="800"/>
+              </a:spcAft>
+            </a:pPr>
+            <a:r>
+              <a:rPr sz="2000" b="0" i="0">
+                <a:solidFill>
+                  <a:srgbClr val="333333"/>
+                </a:solidFill>
+                <a:latin typeface="Calibri"/>
+              </a:rPr>
+              <a:t>–   Una regla de bolsillo: serverless sirve para cargas intermitentes y cortas; para trafico sostenido, una instancia fija suele ser mas barata y predecible.</a:t>
             </a:r>
           </a:p>
         </p:txBody>
@@ -6285,21 +6360,141 @@
                 </a:solidFill>
                 <a:latin typeface="Calibri"/>
               </a:rPr>
-              <a:t>Lo que NO escala (1/2)</a:t>
-            </a:r>
-          </a:p>
-        </p:txBody>
-      </p:sp>
-      <p:sp>
-        <p:nvSpPr>
-          <p:cNvPr id="5" name="TextBox 4"/>
+              <a:t>La regla de autoescalado, escrita como configuracion</a:t>
+            </a:r>
+          </a:p>
+        </p:txBody>
+      </p:sp>
+      <p:sp>
+        <p:nvSpPr>
+          <p:cNvPr id="5" name="Rounded Rectangle 4"/>
+          <p:cNvSpPr/>
+          <p:nvPr/>
+        </p:nvSpPr>
+        <p:spPr>
+          <a:xfrm>
+            <a:off x="457200" y="1261872"/>
+            <a:ext cx="11277295" cy="5093208"/>
+          </a:xfrm>
+          <a:prstGeom prst="roundRect">
+            <a:avLst>
+              <a:gd name="adj" fmla="val 12000"/>
+            </a:avLst>
+          </a:prstGeom>
+          <a:solidFill>
+            <a:srgbClr val="1E2A38"/>
+          </a:solidFill>
+          <a:ln>
+            <a:noFill/>
+          </a:ln>
+        </p:spPr>
+        <p:style>
+          <a:lnRef idx="1">
+            <a:schemeClr val="accent1"/>
+          </a:lnRef>
+          <a:fillRef idx="3">
+            <a:schemeClr val="accent1"/>
+          </a:fillRef>
+          <a:effectRef idx="2">
+            <a:schemeClr val="accent1"/>
+          </a:effectRef>
+          <a:fontRef idx="minor">
+            <a:schemeClr val="lt1"/>
+          </a:fontRef>
+        </p:style>
+        <p:txBody>
+          <a:bodyPr rtlCol="0" anchor="ctr"/>
+          <a:lstStyle/>
+          <a:p>
+            <a:pPr algn="ctr"/>
+          </a:p>
+        </p:txBody>
+      </p:sp>
+      <p:sp>
+        <p:nvSpPr>
+          <p:cNvPr id="6" name="Rectangle 5"/>
+          <p:cNvSpPr/>
+          <p:nvPr/>
+        </p:nvSpPr>
+        <p:spPr>
+          <a:xfrm>
+            <a:off x="457200" y="1261872"/>
+            <a:ext cx="11277295" cy="320040"/>
+          </a:xfrm>
+          <a:prstGeom prst="rect">
+            <a:avLst/>
+          </a:prstGeom>
+          <a:solidFill>
+            <a:srgbClr val="095292"/>
+          </a:solidFill>
+          <a:ln>
+            <a:noFill/>
+          </a:ln>
+        </p:spPr>
+        <p:style>
+          <a:lnRef idx="1">
+            <a:schemeClr val="accent1"/>
+          </a:lnRef>
+          <a:fillRef idx="3">
+            <a:schemeClr val="accent1"/>
+          </a:fillRef>
+          <a:effectRef idx="2">
+            <a:schemeClr val="accent1"/>
+          </a:effectRef>
+          <a:fontRef idx="minor">
+            <a:schemeClr val="lt1"/>
+          </a:fontRef>
+        </p:style>
+        <p:txBody>
+          <a:bodyPr rtlCol="0" anchor="ctr"/>
+          <a:lstStyle/>
+          <a:p>
+            <a:pPr algn="ctr"/>
+          </a:p>
+        </p:txBody>
+      </p:sp>
+      <p:sp>
+        <p:nvSpPr>
+          <p:cNvPr id="7" name="TextBox 6"/>
           <p:cNvSpPr txBox="1"/>
           <p:nvPr/>
         </p:nvSpPr>
         <p:spPr>
           <a:xfrm>
-            <a:off x="457200" y="1170432"/>
-            <a:ext cx="11277295" cy="5230368"/>
+            <a:off x="685800" y="1307592"/>
+            <a:ext cx="10820095" cy="256032"/>
+          </a:xfrm>
+          <a:prstGeom prst="rect">
+            <a:avLst/>
+          </a:prstGeom>
+          <a:noFill/>
+        </p:spPr>
+        <p:txBody>
+          <a:bodyPr wrap="square" anchor="ctr"/>
+          <a:lstStyle/>
+          <a:p>
+            <a:r>
+              <a:rPr sz="1000" b="1" i="0">
+                <a:solidFill>
+                  <a:srgbClr val="269CCB"/>
+                </a:solidFill>
+                <a:latin typeface="Calibri"/>
+              </a:rPr>
+              <a:t>● ● ●</a:t>
+            </a:r>
+          </a:p>
+        </p:txBody>
+      </p:sp>
+      <p:sp>
+        <p:nvSpPr>
+          <p:cNvPr id="8" name="TextBox 7"/>
+          <p:cNvSpPr txBox="1"/>
+          <p:nvPr/>
+        </p:nvSpPr>
+        <p:spPr>
+          <a:xfrm>
+            <a:off x="777240" y="1719072"/>
+            <a:ext cx="10637215" cy="4453128"/>
           </a:xfrm>
           <a:prstGeom prst="rect">
             <a:avLst/>
@@ -6314,88 +6509,216 @@
           <a:p>
             <a:pPr>
               <a:spcAft>
-                <a:spcPts val="800"/>
+                <a:spcPts val="400"/>
               </a:spcAft>
             </a:pPr>
             <a:r>
-              <a:rPr sz="2000" b="0" i="0">
-                <a:solidFill>
-                  <a:srgbClr val="333333"/>
-                </a:solidFill>
-                <a:latin typeface="Calibri"/>
-              </a:rPr>
-              <a:t>–   La capa de datos es el caso central: agregar instancias de API es casi gratis conceptualmente, pero una base de datos relacional que debe mantener consistencia tiene un unico escritor, y ese escritor no se multiplica sin cambiar el modelo.</a:t>
+              <a:rPr sz="1400" b="0" i="0">
+                <a:solidFill>
+                  <a:srgbClr val="FFFFFF"/>
+                </a:solidFill>
+                <a:latin typeface="Calibri"/>
+              </a:rPr>
+              <a:t># Lo que un autoescalador necesita para no oscilar:</a:t>
             </a:r>
           </a:p>
           <a:p>
             <a:pPr>
               <a:spcAft>
-                <a:spcPts val="800"/>
+                <a:spcPts val="400"/>
               </a:spcAft>
             </a:pPr>
             <a:r>
-              <a:rPr sz="2000" b="0" i="0">
-                <a:solidFill>
-                  <a:srgbClr val="333333"/>
-                </a:solidFill>
-                <a:latin typeface="Calibri"/>
-              </a:rPr>
-              <a:t>–   Se pueden agregar replicas de lectura, y ahi entra un concepto a definir: el retraso de replicacion, esos milisegundos o segundos en que la replica todavia no tiene el ultimo cambio</a:t>
+              <a:rPr sz="1400" b="0" i="0">
+                <a:solidFill>
+                  <a:srgbClr val="FFFFFF"/>
+                </a:solidFill>
+                <a:latin typeface="Calibri"/>
+              </a:rPr>
+              <a:t>autoescalado:</a:t>
             </a:r>
           </a:p>
           <a:p>
             <a:pPr>
               <a:spcAft>
-                <a:spcPts val="800"/>
+                <a:spcPts val="400"/>
               </a:spcAft>
             </a:pPr>
             <a:r>
-              <a:rPr sz="2000" b="0" i="0">
-                <a:solidFill>
-                  <a:srgbClr val="333333"/>
-                </a:solidFill>
-                <a:latin typeface="Calibri"/>
-              </a:rPr>
-              <a:t>–   Que produce el sintoma de que el usuario guarda un dato, la pagina lo relee de una replica y el dato no aparece.</a:t>
+              <a:rPr sz="1400" b="0" i="0">
+                <a:solidFill>
+                  <a:srgbClr val="FFFFFF"/>
+                </a:solidFill>
+                <a:latin typeface="Calibri"/>
+              </a:rPr>
+              <a:t>  servicio: turnos-api</a:t>
             </a:r>
           </a:p>
           <a:p>
             <a:pPr>
               <a:spcAft>
-                <a:spcPts val="800"/>
+                <a:spcPts val="400"/>
               </a:spcAft>
             </a:pPr>
             <a:r>
-              <a:rPr sz="2000" b="0" i="0">
-                <a:solidFill>
-                  <a:srgbClr val="333333"/>
-                </a:solidFill>
-                <a:latin typeface="Calibri"/>
-              </a:rPr>
-              <a:t>–   Las alternativas mas agresivas, particionar los datos por clave o cambiar a un modelo sin esquema fijo, son decisiones de arquitectura mayores y estan fuera del alcance de la app v1</a:t>
+              <a:rPr sz="1400" b="0" i="0">
+                <a:solidFill>
+                  <a:srgbClr val="FFFFFF"/>
+                </a:solidFill>
+                <a:latin typeface="Calibri"/>
+              </a:rPr>
+              <a:t>  minimo: 2                  # 1 no da tolerancia a fallo</a:t>
             </a:r>
           </a:p>
           <a:p>
             <a:pPr>
               <a:spcAft>
-                <a:spcPts val="800"/>
+                <a:spcPts val="400"/>
               </a:spcAft>
             </a:pPr>
             <a:r>
-              <a:rPr sz="2000" b="0" i="0">
-                <a:solidFill>
-                  <a:srgbClr val="333333"/>
-                </a:solidFill>
-                <a:latin typeface="Calibri"/>
-              </a:rPr>
-              <a:t>–   Decirlo explicitamente en el informe es una respuesta correcta, no una debilidad.</a:t>
-            </a:r>
-          </a:p>
-        </p:txBody>
-      </p:sp>
-      <p:sp>
-        <p:nvSpPr>
-          <p:cNvPr id="6" name="TextBox 5"/>
+              <a:rPr sz="1400" b="0" i="0">
+                <a:solidFill>
+                  <a:srgbClr val="FFFFFF"/>
+                </a:solidFill>
+                <a:latin typeface="Calibri"/>
+              </a:rPr>
+              <a:t>  maximo: 6                  # tope que el presupuesto aguanta</a:t>
+            </a:r>
+          </a:p>
+          <a:p>
+            <a:pPr>
+              <a:spcAft>
+                <a:spcPts val="400"/>
+              </a:spcAft>
+            </a:pPr>
+            <a:r>
+              <a:rPr sz="1400" b="0" i="0">
+                <a:solidFill>
+                  <a:srgbClr val="FFFFFF"/>
+                </a:solidFill>
+                <a:latin typeface="Calibri"/>
+              </a:rPr>
+              <a:t>  metrica: cpu_promedio</a:t>
+            </a:r>
+          </a:p>
+          <a:p>
+            <a:pPr>
+              <a:spcAft>
+                <a:spcPts val="400"/>
+              </a:spcAft>
+            </a:pPr>
+            <a:r>
+              <a:rPr sz="1400" b="0" i="0">
+                <a:solidFill>
+                  <a:srgbClr val="FFFFFF"/>
+                </a:solidFill>
+                <a:latin typeface="Calibri"/>
+              </a:rPr>
+              <a:t>  objetivo: 65               # por debajo del 70% de la Clase 12</a:t>
+            </a:r>
+          </a:p>
+          <a:p>
+            <a:pPr>
+              <a:spcAft>
+                <a:spcPts val="400"/>
+              </a:spcAft>
+            </a:pPr>
+            <a:r>
+              <a:rPr sz="1400" b="0" i="0">
+                <a:solidFill>
+                  <a:srgbClr val="FFFFFF"/>
+                </a:solidFill>
+                <a:latin typeface="Calibri"/>
+              </a:rPr>
+              <a:t>  subir_si:   '&gt; 65% durante 3 min'</a:t>
+            </a:r>
+          </a:p>
+          <a:p>
+            <a:pPr>
+              <a:spcAft>
+                <a:spcPts val="400"/>
+              </a:spcAft>
+            </a:pPr>
+            <a:r>
+              <a:rPr sz="1400" b="0" i="0">
+                <a:solidFill>
+                  <a:srgbClr val="FFFFFF"/>
+                </a:solidFill>
+                <a:latin typeface="Calibri"/>
+              </a:rPr>
+              <a:t>  bajar_si:   '&lt; 35% durante 10 min'   # bajar mas lento que subir</a:t>
+            </a:r>
+          </a:p>
+          <a:p>
+            <a:pPr>
+              <a:spcAft>
+                <a:spcPts val="400"/>
+              </a:spcAft>
+            </a:pPr>
+            <a:r>
+              <a:rPr sz="1400" b="0" i="0">
+                <a:solidFill>
+                  <a:srgbClr val="FFFFFF"/>
+                </a:solidFill>
+                <a:latin typeface="Calibri"/>
+              </a:rPr>
+              <a:t>  enfriamiento: 5 min        # sin esto entra en bandada de arranques</a:t>
+            </a:r>
+          </a:p>
+          <a:p>
+            <a:pPr>
+              <a:spcAft>
+                <a:spcPts val="400"/>
+              </a:spcAft>
+            </a:pPr>
+            <a:r>
+              <a:rPr sz="1400" b="0" i="0">
+                <a:solidFill>
+                  <a:srgbClr val="FFFFFF"/>
+                </a:solidFill>
+                <a:latin typeface="Calibri"/>
+              </a:rPr>
+              <a:t/>
+            </a:r>
+          </a:p>
+          <a:p>
+            <a:pPr>
+              <a:spcAft>
+                <a:spcPts val="400"/>
+              </a:spcAft>
+            </a:pPr>
+            <a:r>
+              <a:rPr sz="1400" b="0" i="0">
+                <a:solidFill>
+                  <a:srgbClr val="FFFFFF"/>
+                </a:solidFill>
+                <a:latin typeface="Calibri"/>
+              </a:rPr>
+              <a:t># Y el limite honesto: escalar la API no escala la BASE. Si el cuello</a:t>
+            </a:r>
+          </a:p>
+          <a:p>
+            <a:pPr>
+              <a:spcAft>
+                <a:spcPts val="400"/>
+              </a:spcAft>
+            </a:pPr>
+            <a:r>
+              <a:rPr sz="1400" b="0" i="0">
+                <a:solidFill>
+                  <a:srgbClr val="FFFFFF"/>
+                </a:solidFill>
+                <a:latin typeface="Calibri"/>
+              </a:rPr>
+              <a:t># de botella es PostgreSQL, seis instancias lo empeoran.</a:t>
+            </a:r>
+          </a:p>
+        </p:txBody>
+      </p:sp>
+      <p:sp>
+        <p:nvSpPr>
+          <p:cNvPr id="9" name="TextBox 8"/>
           <p:cNvSpPr txBox="1"/>
           <p:nvPr/>
         </p:nvSpPr>
@@ -6569,21 +6892,141 @@
                 </a:solidFill>
                 <a:latin typeface="Calibri"/>
               </a:rPr>
-              <a:t>Lo que NO escala (2/2)</a:t>
-            </a:r>
-          </a:p>
-        </p:txBody>
-      </p:sp>
-      <p:sp>
-        <p:nvSpPr>
-          <p:cNvPr id="5" name="TextBox 4"/>
+              <a:t>Politica de autoescalado (tabla, no prosa)</a:t>
+            </a:r>
+          </a:p>
+        </p:txBody>
+      </p:sp>
+      <p:sp>
+        <p:nvSpPr>
+          <p:cNvPr id="5" name="Rounded Rectangle 4"/>
+          <p:cNvSpPr/>
+          <p:nvPr/>
+        </p:nvSpPr>
+        <p:spPr>
+          <a:xfrm>
+            <a:off x="457200" y="1261872"/>
+            <a:ext cx="11277295" cy="4773168"/>
+          </a:xfrm>
+          <a:prstGeom prst="roundRect">
+            <a:avLst>
+              <a:gd name="adj" fmla="val 12000"/>
+            </a:avLst>
+          </a:prstGeom>
+          <a:solidFill>
+            <a:srgbClr val="1E2A38"/>
+          </a:solidFill>
+          <a:ln>
+            <a:noFill/>
+          </a:ln>
+        </p:spPr>
+        <p:style>
+          <a:lnRef idx="1">
+            <a:schemeClr val="accent1"/>
+          </a:lnRef>
+          <a:fillRef idx="3">
+            <a:schemeClr val="accent1"/>
+          </a:fillRef>
+          <a:effectRef idx="2">
+            <a:schemeClr val="accent1"/>
+          </a:effectRef>
+          <a:fontRef idx="minor">
+            <a:schemeClr val="lt1"/>
+          </a:fontRef>
+        </p:style>
+        <p:txBody>
+          <a:bodyPr rtlCol="0" anchor="ctr"/>
+          <a:lstStyle/>
+          <a:p>
+            <a:pPr algn="ctr"/>
+          </a:p>
+        </p:txBody>
+      </p:sp>
+      <p:sp>
+        <p:nvSpPr>
+          <p:cNvPr id="6" name="Rectangle 5"/>
+          <p:cNvSpPr/>
+          <p:nvPr/>
+        </p:nvSpPr>
+        <p:spPr>
+          <a:xfrm>
+            <a:off x="457200" y="1261872"/>
+            <a:ext cx="11277295" cy="320040"/>
+          </a:xfrm>
+          <a:prstGeom prst="rect">
+            <a:avLst/>
+          </a:prstGeom>
+          <a:solidFill>
+            <a:srgbClr val="095292"/>
+          </a:solidFill>
+          <a:ln>
+            <a:noFill/>
+          </a:ln>
+        </p:spPr>
+        <p:style>
+          <a:lnRef idx="1">
+            <a:schemeClr val="accent1"/>
+          </a:lnRef>
+          <a:fillRef idx="3">
+            <a:schemeClr val="accent1"/>
+          </a:fillRef>
+          <a:effectRef idx="2">
+            <a:schemeClr val="accent1"/>
+          </a:effectRef>
+          <a:fontRef idx="minor">
+            <a:schemeClr val="lt1"/>
+          </a:fontRef>
+        </p:style>
+        <p:txBody>
+          <a:bodyPr rtlCol="0" anchor="ctr"/>
+          <a:lstStyle/>
+          <a:p>
+            <a:pPr algn="ctr"/>
+          </a:p>
+        </p:txBody>
+      </p:sp>
+      <p:sp>
+        <p:nvSpPr>
+          <p:cNvPr id="7" name="TextBox 6"/>
           <p:cNvSpPr txBox="1"/>
           <p:nvPr/>
         </p:nvSpPr>
         <p:spPr>
           <a:xfrm>
-            <a:off x="457200" y="1170432"/>
-            <a:ext cx="11277295" cy="5230368"/>
+            <a:off x="685800" y="1307592"/>
+            <a:ext cx="10820095" cy="256032"/>
+          </a:xfrm>
+          <a:prstGeom prst="rect">
+            <a:avLst/>
+          </a:prstGeom>
+          <a:noFill/>
+        </p:spPr>
+        <p:txBody>
+          <a:bodyPr wrap="square" anchor="ctr"/>
+          <a:lstStyle/>
+          <a:p>
+            <a:r>
+              <a:rPr sz="1000" b="1" i="0">
+                <a:solidFill>
+                  <a:srgbClr val="269CCB"/>
+                </a:solidFill>
+                <a:latin typeface="Calibri"/>
+              </a:rPr>
+              <a:t>● ● ●</a:t>
+            </a:r>
+          </a:p>
+        </p:txBody>
+      </p:sp>
+      <p:sp>
+        <p:nvSpPr>
+          <p:cNvPr id="8" name="TextBox 7"/>
+          <p:cNvSpPr txBox="1"/>
+          <p:nvPr/>
+        </p:nvSpPr>
+        <p:spPr>
+          <a:xfrm>
+            <a:off x="777240" y="1719072"/>
+            <a:ext cx="10637215" cy="4133087"/>
           </a:xfrm>
           <a:prstGeom prst="rect">
             <a:avLst/>
@@ -6598,88 +7041,123 @@
           <a:p>
             <a:pPr>
               <a:spcAft>
-                <a:spcPts val="800"/>
+                <a:spcPts val="400"/>
               </a:spcAft>
             </a:pPr>
             <a:r>
-              <a:rPr sz="2000" b="0" i="0">
-                <a:solidFill>
-                  <a:srgbClr val="333333"/>
-                </a:solidFill>
-                <a:latin typeface="Calibri"/>
-              </a:rPr>
-              <a:t>–   Hay un detalle aritmetico que es la mejor leccion del dia: si cada instancia de la API abre un pool de 20 conexiones y el autoescalado sube a 6 instancias</a:t>
+              <a:rPr sz="1400" b="0" i="0">
+                <a:solidFill>
+                  <a:srgbClr val="FFFFFF"/>
+                </a:solidFill>
+                <a:latin typeface="Calibri"/>
+              </a:rPr>
+              <a:t>Componente   | Tipo        | Trigger up      | Min | Max | Cooldown</a:t>
             </a:r>
           </a:p>
           <a:p>
             <a:pPr>
               <a:spcAft>
-                <a:spcPts val="800"/>
+                <a:spcPts val="400"/>
               </a:spcAft>
             </a:pPr>
             <a:r>
-              <a:rPr sz="2000" b="0" i="0">
-                <a:solidFill>
-                  <a:srgbClr val="333333"/>
-                </a:solidFill>
-                <a:latin typeface="Calibri"/>
-              </a:rPr>
-              <a:t>–   El sistema pide 120 conexiones, mientras que una base de datos gestionada pequena suele admitir del orden de 100; el resultado es que escalar la API tumba la base de datos.</a:t>
+              <a:rPr sz="1400" b="0" i="0">
+                <a:solidFill>
+                  <a:srgbClr val="FFFFFF"/>
+                </a:solidFill>
+                <a:latin typeface="Calibri"/>
+              </a:rPr>
+              <a:t>-------------|-------------|-----------------|-----|-----|---------</a:t>
             </a:r>
           </a:p>
           <a:p>
             <a:pPr>
               <a:spcAft>
-                <a:spcPts val="800"/>
+                <a:spcPts val="400"/>
               </a:spcAft>
             </a:pPr>
             <a:r>
-              <a:rPr sz="2000" b="0" i="0">
-                <a:solidFill>
-                  <a:srgbClr val="333333"/>
-                </a:solidFill>
-                <a:latin typeface="Calibri"/>
-              </a:rPr>
-              <a:t>–   Tambien conviene enumerar otras piezas que no escalan por replicacion: los limites de terceros, como un proveedor de correo que acepta 100 envios por minuto y rechaza el exceso</a:t>
+              <a:rPr sz="1400" b="0" i="0">
+                <a:solidFill>
+                  <a:srgbClr val="FFFFFF"/>
+                </a:solidFill>
+                <a:latin typeface="Calibri"/>
+              </a:rPr>
+              <a:t>API          | Horizontal  | CPU &gt; 70% / 5m  |  2  |  6  | 5 min</a:t>
             </a:r>
           </a:p>
           <a:p>
             <a:pPr>
               <a:spcAft>
-                <a:spcPts val="800"/>
+                <a:spcPts val="400"/>
               </a:spcAft>
             </a:pPr>
             <a:r>
-              <a:rPr sz="2000" b="0" i="0">
-                <a:solidFill>
-                  <a:srgbClr val="333333"/>
-                </a:solidFill>
-                <a:latin typeface="Calibri"/>
-              </a:rPr>
-              <a:t>–   De modo que diez workers no envian diez veces mas rapido sino que generan diez veces mas errores</a:t>
+              <a:rPr sz="1400" b="0" i="0">
+                <a:solidFill>
+                  <a:srgbClr val="FFFFFF"/>
+                </a:solidFill>
+                <a:latin typeface="Calibri"/>
+              </a:rPr>
+              <a:t>Worker cola  | Horizontal  | cola &gt; 100 msg  |  1  |  4  | 3 min</a:t>
             </a:r>
           </a:p>
           <a:p>
             <a:pPr>
               <a:spcAft>
-                <a:spcPts val="800"/>
+                <a:spcPts val="400"/>
               </a:spcAft>
             </a:pPr>
             <a:r>
-              <a:rPr sz="2000" b="0" i="0">
-                <a:solidFill>
-                  <a:srgbClr val="333333"/>
-                </a:solidFill>
-                <a:latin typeface="Calibri"/>
-              </a:rPr>
-              <a:t>–   Los sistemas de archivos compartidos; y las tareas programadas de tipo singleton, que si corren en seis instancias hacen el mismo trabajo seis veces y pueden duplicar cobros o correos.</a:t>
-            </a:r>
-          </a:p>
-        </p:txBody>
-      </p:sp>
-      <p:sp>
-        <p:nvSpPr>
-          <p:cNvPr id="6" name="TextBox 5"/>
+              <a:rPr sz="1400" b="0" i="0">
+                <a:solidFill>
+                  <a:srgbClr val="FFFFFF"/>
+                </a:solidFill>
+                <a:latin typeface="Calibri"/>
+              </a:rPr>
+              <a:t>BD primaria  | NO escala   | -               |  1  |  1  | -</a:t>
+            </a:r>
+          </a:p>
+        </p:txBody>
+      </p:sp>
+      <p:sp>
+        <p:nvSpPr>
+          <p:cNvPr id="9" name="TextBox 8"/>
+          <p:cNvSpPr txBox="1"/>
+          <p:nvPr/>
+        </p:nvSpPr>
+        <p:spPr>
+          <a:xfrm>
+            <a:off x="457200" y="6080760"/>
+            <a:ext cx="11277295" cy="320040"/>
+          </a:xfrm>
+          <a:prstGeom prst="rect">
+            <a:avLst/>
+          </a:prstGeom>
+          <a:noFill/>
+        </p:spPr>
+        <p:txBody>
+          <a:bodyPr wrap="square">
+            <a:spAutoFit/>
+          </a:bodyPr>
+          <a:lstStyle/>
+          <a:p>
+            <a:pPr algn="ctr"/>
+            <a:r>
+              <a:rPr sz="1200" b="0" i="1">
+                <a:solidFill>
+                  <a:srgbClr val="666666"/>
+                </a:solidFill>
+                <a:latin typeface="Calibri"/>
+              </a:rPr>
+              <a:t>El 'max' es lo que evita que la factura escale sola. La BD primaria casi nunca escala horizontal.</a:t>
+            </a:r>
+          </a:p>
+        </p:txBody>
+      </p:sp>
+      <p:sp>
+        <p:nvSpPr>
+          <p:cNvPr id="10" name="TextBox 9"/>
           <p:cNvSpPr txBox="1"/>
           <p:nvPr/>
         </p:nvSpPr>
@@ -6747,7 +7225,7 @@
         <p:spPr>
           <a:xfrm>
             <a:off x="0" y="0"/>
-            <a:ext cx="12191695" cy="960120"/>
+            <a:ext cx="12191695" cy="1170432"/>
           </a:xfrm>
           <a:prstGeom prst="rect">
             <a:avLst/>
@@ -6789,7 +7267,7 @@
         </p:nvSpPr>
         <p:spPr>
           <a:xfrm>
-            <a:off x="0" y="960120"/>
+            <a:off x="0" y="1170432"/>
             <a:ext cx="12191695" cy="41148"/>
           </a:xfrm>
           <a:prstGeom prst="rect">
@@ -6833,7 +7311,7 @@
         <p:spPr>
           <a:xfrm>
             <a:off x="457200" y="164592"/>
-            <a:ext cx="11277295" cy="502920"/>
+            <a:ext cx="11277295" cy="384048"/>
           </a:xfrm>
           <a:prstGeom prst="rect">
             <a:avLst/>
@@ -6853,7 +7331,7 @@
                 </a:solidFill>
                 <a:latin typeface="Calibri"/>
               </a:rPr>
-              <a:t>Preguntas frecuentes y cierre conceptual () (1/3)</a:t>
+              <a:t>Del boceto al código Mermaid</a:t>
             </a:r>
           </a:p>
         </p:txBody>
@@ -6866,8 +7344,8 @@
         </p:nvSpPr>
         <p:spPr>
           <a:xfrm>
-            <a:off x="457200" y="1170432"/>
-            <a:ext cx="11277295" cy="5230368"/>
+            <a:off x="457200" y="566928"/>
+            <a:ext cx="11277295" cy="411480"/>
           </a:xfrm>
           <a:prstGeom prst="rect">
             <a:avLst/>
@@ -6880,74 +7358,705 @@
           </a:bodyPr>
           <a:lstStyle/>
           <a:p>
+            <a:r>
+              <a:rPr sz="1400" b="0" i="0">
+                <a:solidFill>
+                  <a:srgbClr val="B8D8EE"/>
+                </a:solidFill>
+                <a:latin typeface="Calibri"/>
+              </a:rPr>
+              <a:t>El diagrama se escribe como código: se versiona, se compara y se corrige</a:t>
+            </a:r>
+          </a:p>
+        </p:txBody>
+      </p:sp>
+      <p:sp>
+        <p:nvSpPr>
+          <p:cNvPr id="6" name="Rounded Rectangle 5"/>
+          <p:cNvSpPr/>
+          <p:nvPr/>
+        </p:nvSpPr>
+        <p:spPr>
+          <a:xfrm>
+            <a:off x="457200" y="1659636"/>
+            <a:ext cx="11277295" cy="1051560"/>
+          </a:xfrm>
+          <a:prstGeom prst="roundRect">
+            <a:avLst>
+              <a:gd name="adj" fmla="val 12000"/>
+            </a:avLst>
+          </a:prstGeom>
+          <a:solidFill>
+            <a:srgbClr val="F2F2F2"/>
+          </a:solidFill>
+          <a:ln>
+            <a:noFill/>
+          </a:ln>
+        </p:spPr>
+        <p:style>
+          <a:lnRef idx="1">
+            <a:schemeClr val="accent1"/>
+          </a:lnRef>
+          <a:fillRef idx="3">
+            <a:schemeClr val="accent1"/>
+          </a:fillRef>
+          <a:effectRef idx="2">
+            <a:schemeClr val="accent1"/>
+          </a:effectRef>
+          <a:fontRef idx="minor">
+            <a:schemeClr val="lt1"/>
+          </a:fontRef>
+        </p:style>
+        <p:txBody>
+          <a:bodyPr rtlCol="0" anchor="ctr"/>
+          <a:lstStyle/>
+          <a:p>
+            <a:pPr algn="ctr"/>
+          </a:p>
+        </p:txBody>
+      </p:sp>
+      <p:sp>
+        <p:nvSpPr>
+          <p:cNvPr id="7" name="Rounded Rectangle 6"/>
+          <p:cNvSpPr/>
+          <p:nvPr/>
+        </p:nvSpPr>
+        <p:spPr>
+          <a:xfrm>
+            <a:off x="594360" y="1965960"/>
+            <a:ext cx="438912" cy="438912"/>
+          </a:xfrm>
+          <a:prstGeom prst="roundRect">
+            <a:avLst>
+              <a:gd name="adj" fmla="val 12000"/>
+            </a:avLst>
+          </a:prstGeom>
+          <a:solidFill>
+            <a:srgbClr val="095292"/>
+          </a:solidFill>
+          <a:ln>
+            <a:noFill/>
+          </a:ln>
+        </p:spPr>
+        <p:style>
+          <a:lnRef idx="1">
+            <a:schemeClr val="accent1"/>
+          </a:lnRef>
+          <a:fillRef idx="3">
+            <a:schemeClr val="accent1"/>
+          </a:fillRef>
+          <a:effectRef idx="2">
+            <a:schemeClr val="accent1"/>
+          </a:effectRef>
+          <a:fontRef idx="minor">
+            <a:schemeClr val="lt1"/>
+          </a:fontRef>
+        </p:style>
+        <p:txBody>
+          <a:bodyPr rtlCol="0" anchor="ctr"/>
+          <a:lstStyle/>
+          <a:p>
+            <a:pPr algn="ctr"/>
+          </a:p>
+        </p:txBody>
+      </p:sp>
+      <p:sp>
+        <p:nvSpPr>
+          <p:cNvPr id="8" name="TextBox 7"/>
+          <p:cNvSpPr txBox="1"/>
+          <p:nvPr/>
+        </p:nvSpPr>
+        <p:spPr>
+          <a:xfrm>
+            <a:off x="594360" y="1965960"/>
+            <a:ext cx="438912" cy="438912"/>
+          </a:xfrm>
+          <a:prstGeom prst="rect">
+            <a:avLst/>
+          </a:prstGeom>
+          <a:noFill/>
+        </p:spPr>
+        <p:txBody>
+          <a:bodyPr wrap="square" anchor="ctr"/>
+          <a:lstStyle/>
+          <a:p>
+            <a:pPr algn="ctr"/>
+            <a:r>
+              <a:rPr sz="1600" b="1" i="0">
+                <a:solidFill>
+                  <a:srgbClr val="FFFFFF"/>
+                </a:solidFill>
+                <a:latin typeface="Calibri"/>
+              </a:rPr>
+              <a:t>1</a:t>
+            </a:r>
+          </a:p>
+        </p:txBody>
+      </p:sp>
+      <p:sp>
+        <p:nvSpPr>
+          <p:cNvPr id="9" name="TextBox 8"/>
+          <p:cNvSpPr txBox="1"/>
+          <p:nvPr/>
+        </p:nvSpPr>
+        <p:spPr>
+          <a:xfrm>
+            <a:off x="1188720" y="1751076"/>
+            <a:ext cx="10271455" cy="886968"/>
+          </a:xfrm>
+          <a:prstGeom prst="rect">
+            <a:avLst/>
+          </a:prstGeom>
+          <a:noFill/>
+        </p:spPr>
+        <p:txBody>
+          <a:bodyPr wrap="square" anchor="ctr"/>
+          <a:lstStyle/>
+          <a:p>
+            <a:r>
+              <a:rPr sz="1500" b="1" i="0">
+                <a:solidFill>
+                  <a:srgbClr val="095292"/>
+                </a:solidFill>
+                <a:latin typeface="Calibri"/>
+              </a:rPr>
+              <a:t>Diseña visual</a:t>
+            </a:r>
+          </a:p>
+          <a:p>
             <a:pPr>
-              <a:spcAft>
-                <a:spcPts val="800"/>
-              </a:spcAft>
+              <a:spcBef>
+                <a:spcPts val="200"/>
+              </a:spcBef>
             </a:pPr>
             <a:r>
-              <a:rPr sz="2000" b="0" i="0">
+              <a:rPr sz="1300" b="0" i="0">
                 <a:solidFill>
                   <a:srgbClr val="333333"/>
                 </a:solidFill>
                 <a:latin typeface="Calibri"/>
               </a:rPr>
-              <a:t>–   La primera es por que documentar limites si el autoescalado es automatico; la respuesta es que automatico significa que ejecuta la politica que alguien escribio, no que decide bien: sin maximo escala el costo</a:t>
+              <a:t>Dibuja el diagrama como quieras en Excalidraw o draw.io: es más rápido arrastrar cajas que escribir código, y ahí es donde se piensa el modelo.</a:t>
+            </a:r>
+          </a:p>
+        </p:txBody>
+      </p:sp>
+      <p:sp>
+        <p:nvSpPr>
+          <p:cNvPr id="10" name="Rounded Rectangle 9"/>
+          <p:cNvSpPr/>
+          <p:nvPr/>
+        </p:nvSpPr>
+        <p:spPr>
+          <a:xfrm>
+            <a:off x="457200" y="2802636"/>
+            <a:ext cx="11277295" cy="1051560"/>
+          </a:xfrm>
+          <a:prstGeom prst="roundRect">
+            <a:avLst>
+              <a:gd name="adj" fmla="val 12000"/>
+            </a:avLst>
+          </a:prstGeom>
+          <a:solidFill>
+            <a:srgbClr val="E8F4FA"/>
+          </a:solidFill>
+          <a:ln>
+            <a:noFill/>
+          </a:ln>
+        </p:spPr>
+        <p:style>
+          <a:lnRef idx="1">
+            <a:schemeClr val="accent1"/>
+          </a:lnRef>
+          <a:fillRef idx="3">
+            <a:schemeClr val="accent1"/>
+          </a:fillRef>
+          <a:effectRef idx="2">
+            <a:schemeClr val="accent1"/>
+          </a:effectRef>
+          <a:fontRef idx="minor">
+            <a:schemeClr val="lt1"/>
+          </a:fontRef>
+        </p:style>
+        <p:txBody>
+          <a:bodyPr rtlCol="0" anchor="ctr"/>
+          <a:lstStyle/>
+          <a:p>
+            <a:pPr algn="ctr"/>
+          </a:p>
+        </p:txBody>
+      </p:sp>
+      <p:sp>
+        <p:nvSpPr>
+          <p:cNvPr id="11" name="Rounded Rectangle 10"/>
+          <p:cNvSpPr/>
+          <p:nvPr/>
+        </p:nvSpPr>
+        <p:spPr>
+          <a:xfrm>
+            <a:off x="594360" y="3108960"/>
+            <a:ext cx="438912" cy="438912"/>
+          </a:xfrm>
+          <a:prstGeom prst="roundRect">
+            <a:avLst>
+              <a:gd name="adj" fmla="val 12000"/>
+            </a:avLst>
+          </a:prstGeom>
+          <a:solidFill>
+            <a:srgbClr val="095292"/>
+          </a:solidFill>
+          <a:ln>
+            <a:noFill/>
+          </a:ln>
+        </p:spPr>
+        <p:style>
+          <a:lnRef idx="1">
+            <a:schemeClr val="accent1"/>
+          </a:lnRef>
+          <a:fillRef idx="3">
+            <a:schemeClr val="accent1"/>
+          </a:fillRef>
+          <a:effectRef idx="2">
+            <a:schemeClr val="accent1"/>
+          </a:effectRef>
+          <a:fontRef idx="minor">
+            <a:schemeClr val="lt1"/>
+          </a:fontRef>
+        </p:style>
+        <p:txBody>
+          <a:bodyPr rtlCol="0" anchor="ctr"/>
+          <a:lstStyle/>
+          <a:p>
+            <a:pPr algn="ctr"/>
+          </a:p>
+        </p:txBody>
+      </p:sp>
+      <p:sp>
+        <p:nvSpPr>
+          <p:cNvPr id="12" name="TextBox 11"/>
+          <p:cNvSpPr txBox="1"/>
+          <p:nvPr/>
+        </p:nvSpPr>
+        <p:spPr>
+          <a:xfrm>
+            <a:off x="594360" y="3108960"/>
+            <a:ext cx="438912" cy="438912"/>
+          </a:xfrm>
+          <a:prstGeom prst="rect">
+            <a:avLst/>
+          </a:prstGeom>
+          <a:noFill/>
+        </p:spPr>
+        <p:txBody>
+          <a:bodyPr wrap="square" anchor="ctr"/>
+          <a:lstStyle/>
+          <a:p>
+            <a:pPr algn="ctr"/>
+            <a:r>
+              <a:rPr sz="1600" b="1" i="0">
+                <a:solidFill>
+                  <a:srgbClr val="FFFFFF"/>
+                </a:solidFill>
+                <a:latin typeface="Calibri"/>
+              </a:rPr>
+              <a:t>2</a:t>
+            </a:r>
+          </a:p>
+        </p:txBody>
+      </p:sp>
+      <p:sp>
+        <p:nvSpPr>
+          <p:cNvPr id="13" name="TextBox 12"/>
+          <p:cNvSpPr txBox="1"/>
+          <p:nvPr/>
+        </p:nvSpPr>
+        <p:spPr>
+          <a:xfrm>
+            <a:off x="1188720" y="2894076"/>
+            <a:ext cx="10271455" cy="886968"/>
+          </a:xfrm>
+          <a:prstGeom prst="rect">
+            <a:avLst/>
+          </a:prstGeom>
+          <a:noFill/>
+        </p:spPr>
+        <p:txBody>
+          <a:bodyPr wrap="square" anchor="ctr"/>
+          <a:lstStyle/>
+          <a:p>
+            <a:r>
+              <a:rPr sz="1500" b="1" i="0">
+                <a:solidFill>
+                  <a:srgbClr val="095292"/>
+                </a:solidFill>
+                <a:latin typeface="Calibri"/>
+              </a:rPr>
+              <a:t>Traduce con IA</a:t>
             </a:r>
           </a:p>
           <a:p>
             <a:pPr>
-              <a:spcAft>
-                <a:spcPts val="800"/>
-              </a:spcAft>
+              <a:spcBef>
+                <a:spcPts val="200"/>
+              </a:spcBef>
             </a:pPr>
             <a:r>
-              <a:rPr sz="2000" b="0" i="0">
+              <a:rPr sz="1300" b="0" i="0">
                 <a:solidFill>
                   <a:srgbClr val="333333"/>
                 </a:solidFill>
                 <a:latin typeface="Calibri"/>
               </a:rPr>
-              <a:t>–   Sin minimo pierde disponibilidad, con la metrica equivocada no reacciona y con umbrales simetricos oscila; el automatismo amplifica la calidad de la decision humana en ambos sentidos.</a:t>
+              <a:t>Describe tu boceto a una IA y pídele el código Mermaid usando flowchart. Revisa el resultado: la IA acierta la sintaxis, no tu modelo.</a:t>
+            </a:r>
+          </a:p>
+        </p:txBody>
+      </p:sp>
+      <p:sp>
+        <p:nvSpPr>
+          <p:cNvPr id="14" name="Rounded Rectangle 13"/>
+          <p:cNvSpPr/>
+          <p:nvPr/>
+        </p:nvSpPr>
+        <p:spPr>
+          <a:xfrm>
+            <a:off x="457200" y="3945636"/>
+            <a:ext cx="11277295" cy="1051560"/>
+          </a:xfrm>
+          <a:prstGeom prst="roundRect">
+            <a:avLst>
+              <a:gd name="adj" fmla="val 12000"/>
+            </a:avLst>
+          </a:prstGeom>
+          <a:solidFill>
+            <a:srgbClr val="F2F2F2"/>
+          </a:solidFill>
+          <a:ln>
+            <a:noFill/>
+          </a:ln>
+        </p:spPr>
+        <p:style>
+          <a:lnRef idx="1">
+            <a:schemeClr val="accent1"/>
+          </a:lnRef>
+          <a:fillRef idx="3">
+            <a:schemeClr val="accent1"/>
+          </a:fillRef>
+          <a:effectRef idx="2">
+            <a:schemeClr val="accent1"/>
+          </a:effectRef>
+          <a:fontRef idx="minor">
+            <a:schemeClr val="lt1"/>
+          </a:fontRef>
+        </p:style>
+        <p:txBody>
+          <a:bodyPr rtlCol="0" anchor="ctr"/>
+          <a:lstStyle/>
+          <a:p>
+            <a:pPr algn="ctr"/>
+          </a:p>
+        </p:txBody>
+      </p:sp>
+      <p:sp>
+        <p:nvSpPr>
+          <p:cNvPr id="15" name="Rounded Rectangle 14"/>
+          <p:cNvSpPr/>
+          <p:nvPr/>
+        </p:nvSpPr>
+        <p:spPr>
+          <a:xfrm>
+            <a:off x="594360" y="4251960"/>
+            <a:ext cx="438912" cy="438912"/>
+          </a:xfrm>
+          <a:prstGeom prst="roundRect">
+            <a:avLst>
+              <a:gd name="adj" fmla="val 12000"/>
+            </a:avLst>
+          </a:prstGeom>
+          <a:solidFill>
+            <a:srgbClr val="095292"/>
+          </a:solidFill>
+          <a:ln>
+            <a:noFill/>
+          </a:ln>
+        </p:spPr>
+        <p:style>
+          <a:lnRef idx="1">
+            <a:schemeClr val="accent1"/>
+          </a:lnRef>
+          <a:fillRef idx="3">
+            <a:schemeClr val="accent1"/>
+          </a:fillRef>
+          <a:effectRef idx="2">
+            <a:schemeClr val="accent1"/>
+          </a:effectRef>
+          <a:fontRef idx="minor">
+            <a:schemeClr val="lt1"/>
+          </a:fontRef>
+        </p:style>
+        <p:txBody>
+          <a:bodyPr rtlCol="0" anchor="ctr"/>
+          <a:lstStyle/>
+          <a:p>
+            <a:pPr algn="ctr"/>
+          </a:p>
+        </p:txBody>
+      </p:sp>
+      <p:sp>
+        <p:nvSpPr>
+          <p:cNvPr id="16" name="TextBox 15"/>
+          <p:cNvSpPr txBox="1"/>
+          <p:nvPr/>
+        </p:nvSpPr>
+        <p:spPr>
+          <a:xfrm>
+            <a:off x="594360" y="4251960"/>
+            <a:ext cx="438912" cy="438912"/>
+          </a:xfrm>
+          <a:prstGeom prst="rect">
+            <a:avLst/>
+          </a:prstGeom>
+          <a:noFill/>
+        </p:spPr>
+        <p:txBody>
+          <a:bodyPr wrap="square" anchor="ctr"/>
+          <a:lstStyle/>
+          <a:p>
+            <a:pPr algn="ctr"/>
+            <a:r>
+              <a:rPr sz="1600" b="1" i="0">
+                <a:solidFill>
+                  <a:srgbClr val="FFFFFF"/>
+                </a:solidFill>
+                <a:latin typeface="Calibri"/>
+              </a:rPr>
+              <a:t>3</a:t>
+            </a:r>
+          </a:p>
+        </p:txBody>
+      </p:sp>
+      <p:sp>
+        <p:nvSpPr>
+          <p:cNvPr id="17" name="TextBox 16"/>
+          <p:cNvSpPr txBox="1"/>
+          <p:nvPr/>
+        </p:nvSpPr>
+        <p:spPr>
+          <a:xfrm>
+            <a:off x="1188720" y="4037076"/>
+            <a:ext cx="10271455" cy="886968"/>
+          </a:xfrm>
+          <a:prstGeom prst="rect">
+            <a:avLst/>
+          </a:prstGeom>
+          <a:noFill/>
+        </p:spPr>
+        <p:txBody>
+          <a:bodyPr wrap="square" anchor="ctr"/>
+          <a:lstStyle/>
+          <a:p>
+            <a:r>
+              <a:rPr sz="1500" b="1" i="0">
+                <a:solidFill>
+                  <a:srgbClr val="095292"/>
+                </a:solidFill>
+                <a:latin typeface="Calibri"/>
+              </a:rPr>
+              <a:t>Renderiza en un visor</a:t>
             </a:r>
           </a:p>
           <a:p>
             <a:pPr>
-              <a:spcAft>
-                <a:spcPts val="800"/>
-              </a:spcAft>
+              <a:spcBef>
+                <a:spcPts val="200"/>
+              </a:spcBef>
             </a:pPr>
             <a:r>
-              <a:rPr sz="2000" b="0" i="0">
+              <a:rPr sz="1300" b="0" i="0">
                 <a:solidFill>
                   <a:srgbClr val="333333"/>
                 </a:solidFill>
                 <a:latin typeface="Calibri"/>
               </a:rPr>
-              <a:t>–   La segunda es si no seria mejor serverless, que "escala infinito"; la respuesta reconoce la ventaja real, que escala por peticion y no cobra en reposo</a:t>
+              <a:t>Pega el código en un visor Mermaid (mermaid.live o la vista previa de tu editor) y míralo dibujado. Si no renderiza, corrige ahí: un end faltante o un rótulo sin comillas.</a:t>
+            </a:r>
+          </a:p>
+        </p:txBody>
+      </p:sp>
+      <p:sp>
+        <p:nvSpPr>
+          <p:cNvPr id="18" name="Rounded Rectangle 17"/>
+          <p:cNvSpPr/>
+          <p:nvPr/>
+        </p:nvSpPr>
+        <p:spPr>
+          <a:xfrm>
+            <a:off x="457200" y="5088636"/>
+            <a:ext cx="11277295" cy="1051560"/>
+          </a:xfrm>
+          <a:prstGeom prst="roundRect">
+            <a:avLst>
+              <a:gd name="adj" fmla="val 12000"/>
+            </a:avLst>
+          </a:prstGeom>
+          <a:solidFill>
+            <a:srgbClr val="E8F4FA"/>
+          </a:solidFill>
+          <a:ln>
+            <a:noFill/>
+          </a:ln>
+        </p:spPr>
+        <p:style>
+          <a:lnRef idx="1">
+            <a:schemeClr val="accent1"/>
+          </a:lnRef>
+          <a:fillRef idx="3">
+            <a:schemeClr val="accent1"/>
+          </a:fillRef>
+          <a:effectRef idx="2">
+            <a:schemeClr val="accent1"/>
+          </a:effectRef>
+          <a:fontRef idx="minor">
+            <a:schemeClr val="lt1"/>
+          </a:fontRef>
+        </p:style>
+        <p:txBody>
+          <a:bodyPr rtlCol="0" anchor="ctr"/>
+          <a:lstStyle/>
+          <a:p>
+            <a:pPr algn="ctr"/>
+          </a:p>
+        </p:txBody>
+      </p:sp>
+      <p:sp>
+        <p:nvSpPr>
+          <p:cNvPr id="19" name="Rounded Rectangle 18"/>
+          <p:cNvSpPr/>
+          <p:nvPr/>
+        </p:nvSpPr>
+        <p:spPr>
+          <a:xfrm>
+            <a:off x="594360" y="5394960"/>
+            <a:ext cx="438912" cy="438912"/>
+          </a:xfrm>
+          <a:prstGeom prst="roundRect">
+            <a:avLst>
+              <a:gd name="adj" fmla="val 12000"/>
+            </a:avLst>
+          </a:prstGeom>
+          <a:solidFill>
+            <a:srgbClr val="095292"/>
+          </a:solidFill>
+          <a:ln>
+            <a:noFill/>
+          </a:ln>
+        </p:spPr>
+        <p:style>
+          <a:lnRef idx="1">
+            <a:schemeClr val="accent1"/>
+          </a:lnRef>
+          <a:fillRef idx="3">
+            <a:schemeClr val="accent1"/>
+          </a:fillRef>
+          <a:effectRef idx="2">
+            <a:schemeClr val="accent1"/>
+          </a:effectRef>
+          <a:fontRef idx="minor">
+            <a:schemeClr val="lt1"/>
+          </a:fontRef>
+        </p:style>
+        <p:txBody>
+          <a:bodyPr rtlCol="0" anchor="ctr"/>
+          <a:lstStyle/>
+          <a:p>
+            <a:pPr algn="ctr"/>
+          </a:p>
+        </p:txBody>
+      </p:sp>
+      <p:sp>
+        <p:nvSpPr>
+          <p:cNvPr id="20" name="TextBox 19"/>
+          <p:cNvSpPr txBox="1"/>
+          <p:nvPr/>
+        </p:nvSpPr>
+        <p:spPr>
+          <a:xfrm>
+            <a:off x="594360" y="5394960"/>
+            <a:ext cx="438912" cy="438912"/>
+          </a:xfrm>
+          <a:prstGeom prst="rect">
+            <a:avLst/>
+          </a:prstGeom>
+          <a:noFill/>
+        </p:spPr>
+        <p:txBody>
+          <a:bodyPr wrap="square" anchor="ctr"/>
+          <a:lstStyle/>
+          <a:p>
+            <a:pPr algn="ctr"/>
+            <a:r>
+              <a:rPr sz="1600" b="1" i="0">
+                <a:solidFill>
+                  <a:srgbClr val="FFFFFF"/>
+                </a:solidFill>
+                <a:latin typeface="Calibri"/>
+              </a:rPr>
+              <a:t>4</a:t>
+            </a:r>
+          </a:p>
+        </p:txBody>
+      </p:sp>
+      <p:sp>
+        <p:nvSpPr>
+          <p:cNvPr id="21" name="TextBox 20"/>
+          <p:cNvSpPr txBox="1"/>
+          <p:nvPr/>
+        </p:nvSpPr>
+        <p:spPr>
+          <a:xfrm>
+            <a:off x="1188720" y="5180076"/>
+            <a:ext cx="10271455" cy="886968"/>
+          </a:xfrm>
+          <a:prstGeom prst="rect">
+            <a:avLst/>
+          </a:prstGeom>
+          <a:noFill/>
+        </p:spPr>
+        <p:txBody>
+          <a:bodyPr wrap="square" anchor="ctr"/>
+          <a:lstStyle/>
+          <a:p>
+            <a:r>
+              <a:rPr sz="1500" b="1" i="0">
+                <a:solidFill>
+                  <a:srgbClr val="095292"/>
+                </a:solidFill>
+                <a:latin typeface="Calibri"/>
+              </a:rPr>
+              <a:t>Guarda código e imagen</a:t>
             </a:r>
           </a:p>
           <a:p>
             <a:pPr>
-              <a:spcAft>
-                <a:spcPts val="800"/>
-              </a:spcAft>
+              <a:spcBef>
+                <a:spcPts val="200"/>
+              </a:spcBef>
             </a:pPr>
             <a:r>
-              <a:rPr sz="2000" b="0" i="0">
+              <a:rPr sz="1300" b="0" i="0">
                 <a:solidFill>
                   <a:srgbClr val="333333"/>
                 </a:solidFill>
                 <a:latin typeface="Calibri"/>
               </a:rPr>
-              <a:t>–   Y nombra los tres costos: el arranque en frio, esa demora extra de cientos de milisegundos a segundos cuando una funcion se invoca despues de estar inactiva; el agotamiento de conexiones</a:t>
-            </a:r>
-          </a:p>
-        </p:txBody>
-      </p:sp>
-      <p:sp>
-        <p:nvSpPr>
-          <p:cNvPr id="6" name="TextBox 5"/>
+              <a:t>El código es la fuente del diagrama: guárdalo con tu proyecto junto con el PNG exportado.</a:t>
+            </a:r>
+          </a:p>
+        </p:txBody>
+      </p:sp>
+      <p:sp>
+        <p:nvSpPr>
+          <p:cNvPr id="22" name="TextBox 21"/>
           <p:cNvSpPr txBox="1"/>
           <p:nvPr/>
         </p:nvSpPr>
@@ -7237,7 +8346,7 @@
                 </a:solidFill>
                 <a:latin typeface="Calibri"/>
               </a:rPr>
-              <a:t> Ejemplos resueltos y demo del docente sobre el tema.</a:t>
+              <a:t> Ejemplos resueltos y demostración sobre el tema.</a:t>
             </a:r>
           </a:p>
           <a:p>
@@ -7362,2412 +8471,6 @@
         <p:spPr>
           <a:xfrm>
             <a:off x="0" y="0"/>
-            <a:ext cx="12191695" cy="960120"/>
-          </a:xfrm>
-          <a:prstGeom prst="rect">
-            <a:avLst/>
-          </a:prstGeom>
-          <a:solidFill>
-            <a:srgbClr val="095292"/>
-          </a:solidFill>
-          <a:ln>
-            <a:noFill/>
-          </a:ln>
-        </p:spPr>
-        <p:style>
-          <a:lnRef idx="1">
-            <a:schemeClr val="accent1"/>
-          </a:lnRef>
-          <a:fillRef idx="3">
-            <a:schemeClr val="accent1"/>
-          </a:fillRef>
-          <a:effectRef idx="2">
-            <a:schemeClr val="accent1"/>
-          </a:effectRef>
-          <a:fontRef idx="minor">
-            <a:schemeClr val="lt1"/>
-          </a:fontRef>
-        </p:style>
-        <p:txBody>
-          <a:bodyPr rtlCol="0" anchor="ctr"/>
-          <a:lstStyle/>
-          <a:p>
-            <a:pPr algn="ctr"/>
-          </a:p>
-        </p:txBody>
-      </p:sp>
-      <p:sp>
-        <p:nvSpPr>
-          <p:cNvPr id="3" name="Rectangle 2"/>
-          <p:cNvSpPr/>
-          <p:nvPr/>
-        </p:nvSpPr>
-        <p:spPr>
-          <a:xfrm>
-            <a:off x="0" y="960120"/>
-            <a:ext cx="12191695" cy="41148"/>
-          </a:xfrm>
-          <a:prstGeom prst="rect">
-            <a:avLst/>
-          </a:prstGeom>
-          <a:solidFill>
-            <a:srgbClr val="FFD000"/>
-          </a:solidFill>
-          <a:ln>
-            <a:noFill/>
-          </a:ln>
-        </p:spPr>
-        <p:style>
-          <a:lnRef idx="1">
-            <a:schemeClr val="accent1"/>
-          </a:lnRef>
-          <a:fillRef idx="3">
-            <a:schemeClr val="accent1"/>
-          </a:fillRef>
-          <a:effectRef idx="2">
-            <a:schemeClr val="accent1"/>
-          </a:effectRef>
-          <a:fontRef idx="minor">
-            <a:schemeClr val="lt1"/>
-          </a:fontRef>
-        </p:style>
-        <p:txBody>
-          <a:bodyPr rtlCol="0" anchor="ctr"/>
-          <a:lstStyle/>
-          <a:p>
-            <a:pPr algn="ctr"/>
-          </a:p>
-        </p:txBody>
-      </p:sp>
-      <p:sp>
-        <p:nvSpPr>
-          <p:cNvPr id="4" name="TextBox 3"/>
-          <p:cNvSpPr txBox="1"/>
-          <p:nvPr/>
-        </p:nvSpPr>
-        <p:spPr>
-          <a:xfrm>
-            <a:off x="457200" y="164592"/>
-            <a:ext cx="11277295" cy="502920"/>
-          </a:xfrm>
-          <a:prstGeom prst="rect">
-            <a:avLst/>
-          </a:prstGeom>
-          <a:noFill/>
-        </p:spPr>
-        <p:txBody>
-          <a:bodyPr wrap="square">
-            <a:spAutoFit/>
-          </a:bodyPr>
-          <a:lstStyle/>
-          <a:p>
-            <a:r>
-              <a:rPr sz="2600" b="1" i="0">
-                <a:solidFill>
-                  <a:srgbClr val="FFFFFF"/>
-                </a:solidFill>
-                <a:latin typeface="Calibri"/>
-              </a:rPr>
-              <a:t>Preguntas frecuentes y cierre conceptual () (2/3)</a:t>
-            </a:r>
-          </a:p>
-        </p:txBody>
-      </p:sp>
-      <p:sp>
-        <p:nvSpPr>
-          <p:cNvPr id="5" name="TextBox 4"/>
-          <p:cNvSpPr txBox="1"/>
-          <p:nvPr/>
-        </p:nvSpPr>
-        <p:spPr>
-          <a:xfrm>
-            <a:off x="457200" y="1170432"/>
-            <a:ext cx="11277295" cy="5230368"/>
-          </a:xfrm>
-          <a:prstGeom prst="rect">
-            <a:avLst/>
-          </a:prstGeom>
-          <a:noFill/>
-        </p:spPr>
-        <p:txBody>
-          <a:bodyPr wrap="square">
-            <a:spAutoFit/>
-          </a:bodyPr>
-          <a:lstStyle/>
-          <a:p>
-            <a:pPr>
-              <a:spcAft>
-                <a:spcPts val="800"/>
-              </a:spcAft>
-            </a:pPr>
-            <a:r>
-              <a:rPr sz="2000" b="0" i="0">
-                <a:solidFill>
-                  <a:srgbClr val="333333"/>
-                </a:solidFill>
-                <a:latin typeface="Calibri"/>
-              </a:rPr>
-              <a:t>–   Porque mil funciones concurrentes matan a la base de datos igual que mil contenedores; y el costo por invocacion, que a volumen alto puede superar el de instancias fijas.</a:t>
-            </a:r>
-          </a:p>
-          <a:p>
-            <a:pPr>
-              <a:spcAft>
-                <a:spcPts val="800"/>
-              </a:spcAft>
-            </a:pPr>
-            <a:r>
-              <a:rPr sz="2000" b="0" i="0">
-                <a:solidFill>
-                  <a:srgbClr val="333333"/>
-                </a:solidFill>
-                <a:latin typeface="Calibri"/>
-              </a:rPr>
-              <a:t>–   La tercera es cuantas instancias poner, y la respuesta sale de la aritmetica de la Clase 12 y no del gusto: si el pico estimado es de 5 RPS y una instancia sostiene con holgura unos 3 RPS dentro del objetivo de p95, se necesitan 2 con una de margen</a:t>
-            </a:r>
-          </a:p>
-          <a:p>
-            <a:pPr>
-              <a:spcAft>
-                <a:spcPts val="800"/>
-              </a:spcAft>
-            </a:pPr>
-            <a:r>
-              <a:rPr sz="2000" b="0" i="0">
-                <a:solidFill>
-                  <a:srgbClr val="333333"/>
-                </a:solidFill>
-                <a:latin typeface="Calibri"/>
-              </a:rPr>
-              <a:t>–   Y el maximo se fija donde el costo mensual deja de ser defendible o donde choca con el limite de conexiones, el que llegue primero.</a:t>
-            </a:r>
-          </a:p>
-          <a:p>
-            <a:pPr>
-              <a:spcAft>
-                <a:spcPts val="800"/>
-              </a:spcAft>
-            </a:pPr>
-            <a:r>
-              <a:rPr sz="2000" b="0" i="0">
-                <a:solidFill>
-                  <a:srgbClr val="333333"/>
-                </a:solidFill>
-                <a:latin typeface="Calibri"/>
-              </a:rPr>
-              <a:t>–   Error tipico del docente que no domina el tema: presentar el autoescalado como solucion general a los problemas de rendimiento.</a:t>
-            </a:r>
-          </a:p>
-          <a:p>
-            <a:pPr>
-              <a:spcAft>
-                <a:spcPts val="800"/>
-              </a:spcAft>
-            </a:pPr>
-            <a:r>
-              <a:rPr sz="2000" b="0" i="0">
-                <a:solidFill>
-                  <a:srgbClr val="333333"/>
-                </a:solidFill>
-                <a:latin typeface="Calibri"/>
-              </a:rPr>
-              <a:t>–   Si no se identifico primero el cuello de botella, escalar la pieza equivocada no mejora nada y sube el costo</a:t>
-            </a:r>
-          </a:p>
-        </p:txBody>
-      </p:sp>
-      <p:sp>
-        <p:nvSpPr>
-          <p:cNvPr id="6" name="TextBox 5"/>
-          <p:cNvSpPr txBox="1"/>
-          <p:nvPr/>
-        </p:nvSpPr>
-        <p:spPr>
-          <a:xfrm>
-            <a:off x="11185855" y="6473952"/>
-            <a:ext cx="640080" cy="274320"/>
-          </a:xfrm>
-          <a:prstGeom prst="rect">
-            <a:avLst/>
-          </a:prstGeom>
-          <a:noFill/>
-        </p:spPr>
-        <p:txBody>
-          <a:bodyPr wrap="square">
-            <a:spAutoFit/>
-          </a:bodyPr>
-          <a:lstStyle/>
-          <a:p>
-            <a:pPr algn="r"/>
-            <a:r>
-              <a:rPr sz="1100" b="0" i="0">
-                <a:solidFill>
-                  <a:srgbClr val="666666"/>
-                </a:solidFill>
-                <a:latin typeface="Calibri"/>
-              </a:rPr>
-              <a:t>20</a:t>
-            </a:r>
-          </a:p>
-        </p:txBody>
-      </p:sp>
-    </p:spTree>
-  </p:cSld>
-  <p:clrMapOvr>
-    <a:masterClrMapping/>
-  </p:clrMapOvr>
-</p:sld>
-</file>
-
-<file path=ppt/slides/slide21.xml><?xml version="1.0" encoding="utf-8"?>
-<p:sld xmlns:a="http://schemas.openxmlformats.org/drawingml/2006/main" xmlns:p="http://schemas.openxmlformats.org/presentationml/2006/main" xmlns:r="http://schemas.openxmlformats.org/officeDocument/2006/relationships">
-  <p:cSld>
-    <p:bg>
-      <p:bgPr>
-        <a:solidFill>
-          <a:srgbClr val="FFFFFF"/>
-        </a:solidFill>
-        <a:effectLst/>
-      </p:bgPr>
-    </p:bg>
-    <p:spTree>
-      <p:nvGrpSpPr>
-        <p:cNvPr id="1" name=""/>
-        <p:cNvGrpSpPr/>
-        <p:nvPr/>
-      </p:nvGrpSpPr>
-      <p:grpSpPr/>
-      <p:sp>
-        <p:nvSpPr>
-          <p:cNvPr id="2" name="Rectangle 1"/>
-          <p:cNvSpPr/>
-          <p:nvPr/>
-        </p:nvSpPr>
-        <p:spPr>
-          <a:xfrm>
-            <a:off x="0" y="0"/>
-            <a:ext cx="12191695" cy="960120"/>
-          </a:xfrm>
-          <a:prstGeom prst="rect">
-            <a:avLst/>
-          </a:prstGeom>
-          <a:solidFill>
-            <a:srgbClr val="095292"/>
-          </a:solidFill>
-          <a:ln>
-            <a:noFill/>
-          </a:ln>
-        </p:spPr>
-        <p:style>
-          <a:lnRef idx="1">
-            <a:schemeClr val="accent1"/>
-          </a:lnRef>
-          <a:fillRef idx="3">
-            <a:schemeClr val="accent1"/>
-          </a:fillRef>
-          <a:effectRef idx="2">
-            <a:schemeClr val="accent1"/>
-          </a:effectRef>
-          <a:fontRef idx="minor">
-            <a:schemeClr val="lt1"/>
-          </a:fontRef>
-        </p:style>
-        <p:txBody>
-          <a:bodyPr rtlCol="0" anchor="ctr"/>
-          <a:lstStyle/>
-          <a:p>
-            <a:pPr algn="ctr"/>
-          </a:p>
-        </p:txBody>
-      </p:sp>
-      <p:sp>
-        <p:nvSpPr>
-          <p:cNvPr id="3" name="Rectangle 2"/>
-          <p:cNvSpPr/>
-          <p:nvPr/>
-        </p:nvSpPr>
-        <p:spPr>
-          <a:xfrm>
-            <a:off x="0" y="960120"/>
-            <a:ext cx="12191695" cy="41148"/>
-          </a:xfrm>
-          <a:prstGeom prst="rect">
-            <a:avLst/>
-          </a:prstGeom>
-          <a:solidFill>
-            <a:srgbClr val="FFD000"/>
-          </a:solidFill>
-          <a:ln>
-            <a:noFill/>
-          </a:ln>
-        </p:spPr>
-        <p:style>
-          <a:lnRef idx="1">
-            <a:schemeClr val="accent1"/>
-          </a:lnRef>
-          <a:fillRef idx="3">
-            <a:schemeClr val="accent1"/>
-          </a:fillRef>
-          <a:effectRef idx="2">
-            <a:schemeClr val="accent1"/>
-          </a:effectRef>
-          <a:fontRef idx="minor">
-            <a:schemeClr val="lt1"/>
-          </a:fontRef>
-        </p:style>
-        <p:txBody>
-          <a:bodyPr rtlCol="0" anchor="ctr"/>
-          <a:lstStyle/>
-          <a:p>
-            <a:pPr algn="ctr"/>
-          </a:p>
-        </p:txBody>
-      </p:sp>
-      <p:sp>
-        <p:nvSpPr>
-          <p:cNvPr id="4" name="TextBox 3"/>
-          <p:cNvSpPr txBox="1"/>
-          <p:nvPr/>
-        </p:nvSpPr>
-        <p:spPr>
-          <a:xfrm>
-            <a:off x="457200" y="164592"/>
-            <a:ext cx="11277295" cy="502920"/>
-          </a:xfrm>
-          <a:prstGeom prst="rect">
-            <a:avLst/>
-          </a:prstGeom>
-          <a:noFill/>
-        </p:spPr>
-        <p:txBody>
-          <a:bodyPr wrap="square">
-            <a:spAutoFit/>
-          </a:bodyPr>
-          <a:lstStyle/>
-          <a:p>
-            <a:r>
-              <a:rPr sz="2600" b="1" i="0">
-                <a:solidFill>
-                  <a:srgbClr val="FFFFFF"/>
-                </a:solidFill>
-                <a:latin typeface="Calibri"/>
-              </a:rPr>
-              <a:t>Preguntas frecuentes y cierre conceptual () (3/3)</a:t>
-            </a:r>
-          </a:p>
-        </p:txBody>
-      </p:sp>
-      <p:sp>
-        <p:nvSpPr>
-          <p:cNvPr id="5" name="TextBox 4"/>
-          <p:cNvSpPr txBox="1"/>
-          <p:nvPr/>
-        </p:nvSpPr>
-        <p:spPr>
-          <a:xfrm>
-            <a:off x="457200" y="1170432"/>
-            <a:ext cx="11277295" cy="5230368"/>
-          </a:xfrm>
-          <a:prstGeom prst="rect">
-            <a:avLst/>
-          </a:prstGeom>
-          <a:noFill/>
-        </p:spPr>
-        <p:txBody>
-          <a:bodyPr wrap="square">
-            <a:spAutoFit/>
-          </a:bodyPr>
-          <a:lstStyle/>
-          <a:p>
-            <a:pPr>
-              <a:spcAft>
-                <a:spcPts val="800"/>
-              </a:spcAft>
-            </a:pPr>
-            <a:r>
-              <a:rPr sz="2000" b="0" i="0">
-                <a:solidFill>
-                  <a:srgbClr val="333333"/>
-                </a:solidFill>
-                <a:latin typeface="Calibri"/>
-              </a:rPr>
-              <a:t>–   El caso mas ilustrativo es la API limitada por la base de datos, donde agregar instancias empeora la situacion porque suma presion sobre el recurso ya saturado.</a:t>
-            </a:r>
-          </a:p>
-          <a:p>
-            <a:pPr>
-              <a:spcAft>
-                <a:spcPts val="800"/>
-              </a:spcAft>
-            </a:pPr>
-            <a:r>
-              <a:rPr sz="2000" b="0" i="0">
-                <a:solidFill>
-                  <a:srgbClr val="333333"/>
-                </a:solidFill>
-                <a:latin typeface="Calibri"/>
-              </a:rPr>
-              <a:t>–   La consecuencia pedagogica es que el estudiante sale creyendo que la escalabilidad se compra con configuracion, y en el Parcial 3 responde con la definicion de vertical y horizontal sin poder decidir cual aplica a un caso.</a:t>
-            </a:r>
-          </a:p>
-          <a:p>
-            <a:pPr>
-              <a:spcAft>
-                <a:spcPts val="800"/>
-              </a:spcAft>
-            </a:pPr>
-            <a:r>
-              <a:rPr sz="2000" b="0" i="0">
-                <a:solidFill>
-                  <a:srgbClr val="333333"/>
-                </a:solidFill>
-                <a:latin typeface="Calibri"/>
-              </a:rPr>
-              <a:t>–   El segundo error es celebrar el escalado horizontal como si fuera gratis: presentarlo solo como "agregar instancias" sin exigir la revision del estado en memoria, ni el limite de conexiones, ni la capa de datos.</a:t>
-            </a:r>
-          </a:p>
-        </p:txBody>
-      </p:sp>
-      <p:sp>
-        <p:nvSpPr>
-          <p:cNvPr id="6" name="TextBox 5"/>
-          <p:cNvSpPr txBox="1"/>
-          <p:nvPr/>
-        </p:nvSpPr>
-        <p:spPr>
-          <a:xfrm>
-            <a:off x="11185855" y="6473952"/>
-            <a:ext cx="640080" cy="274320"/>
-          </a:xfrm>
-          <a:prstGeom prst="rect">
-            <a:avLst/>
-          </a:prstGeom>
-          <a:noFill/>
-        </p:spPr>
-        <p:txBody>
-          <a:bodyPr wrap="square">
-            <a:spAutoFit/>
-          </a:bodyPr>
-          <a:lstStyle/>
-          <a:p>
-            <a:pPr algn="r"/>
-            <a:r>
-              <a:rPr sz="1100" b="0" i="0">
-                <a:solidFill>
-                  <a:srgbClr val="666666"/>
-                </a:solidFill>
-                <a:latin typeface="Calibri"/>
-              </a:rPr>
-              <a:t>21</a:t>
-            </a:r>
-          </a:p>
-        </p:txBody>
-      </p:sp>
-    </p:spTree>
-  </p:cSld>
-  <p:clrMapOvr>
-    <a:masterClrMapping/>
-  </p:clrMapOvr>
-</p:sld>
-</file>
-
-<file path=ppt/slides/slide22.xml><?xml version="1.0" encoding="utf-8"?>
-<p:sld xmlns:a="http://schemas.openxmlformats.org/drawingml/2006/main" xmlns:p="http://schemas.openxmlformats.org/presentationml/2006/main" xmlns:r="http://schemas.openxmlformats.org/officeDocument/2006/relationships">
-  <p:cSld>
-    <p:bg>
-      <p:bgPr>
-        <a:solidFill>
-          <a:srgbClr val="FFFFFF"/>
-        </a:solidFill>
-        <a:effectLst/>
-      </p:bgPr>
-    </p:bg>
-    <p:spTree>
-      <p:nvGrpSpPr>
-        <p:cNvPr id="1" name=""/>
-        <p:cNvGrpSpPr/>
-        <p:nvPr/>
-      </p:nvGrpSpPr>
-      <p:grpSpPr/>
-      <p:sp>
-        <p:nvSpPr>
-          <p:cNvPr id="2" name="Rectangle 1"/>
-          <p:cNvSpPr/>
-          <p:nvPr/>
-        </p:nvSpPr>
-        <p:spPr>
-          <a:xfrm>
-            <a:off x="0" y="0"/>
-            <a:ext cx="12191695" cy="960120"/>
-          </a:xfrm>
-          <a:prstGeom prst="rect">
-            <a:avLst/>
-          </a:prstGeom>
-          <a:solidFill>
-            <a:srgbClr val="095292"/>
-          </a:solidFill>
-          <a:ln>
-            <a:noFill/>
-          </a:ln>
-        </p:spPr>
-        <p:style>
-          <a:lnRef idx="1">
-            <a:schemeClr val="accent1"/>
-          </a:lnRef>
-          <a:fillRef idx="3">
-            <a:schemeClr val="accent1"/>
-          </a:fillRef>
-          <a:effectRef idx="2">
-            <a:schemeClr val="accent1"/>
-          </a:effectRef>
-          <a:fontRef idx="minor">
-            <a:schemeClr val="lt1"/>
-          </a:fontRef>
-        </p:style>
-        <p:txBody>
-          <a:bodyPr rtlCol="0" anchor="ctr"/>
-          <a:lstStyle/>
-          <a:p>
-            <a:pPr algn="ctr"/>
-          </a:p>
-        </p:txBody>
-      </p:sp>
-      <p:sp>
-        <p:nvSpPr>
-          <p:cNvPr id="3" name="Rectangle 2"/>
-          <p:cNvSpPr/>
-          <p:nvPr/>
-        </p:nvSpPr>
-        <p:spPr>
-          <a:xfrm>
-            <a:off x="0" y="960120"/>
-            <a:ext cx="12191695" cy="41148"/>
-          </a:xfrm>
-          <a:prstGeom prst="rect">
-            <a:avLst/>
-          </a:prstGeom>
-          <a:solidFill>
-            <a:srgbClr val="FFD000"/>
-          </a:solidFill>
-          <a:ln>
-            <a:noFill/>
-          </a:ln>
-        </p:spPr>
-        <p:style>
-          <a:lnRef idx="1">
-            <a:schemeClr val="accent1"/>
-          </a:lnRef>
-          <a:fillRef idx="3">
-            <a:schemeClr val="accent1"/>
-          </a:fillRef>
-          <a:effectRef idx="2">
-            <a:schemeClr val="accent1"/>
-          </a:effectRef>
-          <a:fontRef idx="minor">
-            <a:schemeClr val="lt1"/>
-          </a:fontRef>
-        </p:style>
-        <p:txBody>
-          <a:bodyPr rtlCol="0" anchor="ctr"/>
-          <a:lstStyle/>
-          <a:p>
-            <a:pPr algn="ctr"/>
-          </a:p>
-        </p:txBody>
-      </p:sp>
-      <p:sp>
-        <p:nvSpPr>
-          <p:cNvPr id="4" name="TextBox 3"/>
-          <p:cNvSpPr txBox="1"/>
-          <p:nvPr/>
-        </p:nvSpPr>
-        <p:spPr>
-          <a:xfrm>
-            <a:off x="457200" y="164592"/>
-            <a:ext cx="11277295" cy="502920"/>
-          </a:xfrm>
-          <a:prstGeom prst="rect">
-            <a:avLst/>
-          </a:prstGeom>
-          <a:noFill/>
-        </p:spPr>
-        <p:txBody>
-          <a:bodyPr wrap="square">
-            <a:spAutoFit/>
-          </a:bodyPr>
-          <a:lstStyle/>
-          <a:p>
-            <a:r>
-              <a:rPr sz="2600" b="1" i="0">
-                <a:solidFill>
-                  <a:srgbClr val="FFFFFF"/>
-                </a:solidFill>
-                <a:latin typeface="Calibri"/>
-              </a:rPr>
-              <a:t>La regla de autoescalado, escrita como configuracion</a:t>
-            </a:r>
-          </a:p>
-        </p:txBody>
-      </p:sp>
-      <p:sp>
-        <p:nvSpPr>
-          <p:cNvPr id="5" name="Rounded Rectangle 4"/>
-          <p:cNvSpPr/>
-          <p:nvPr/>
-        </p:nvSpPr>
-        <p:spPr>
-          <a:xfrm>
-            <a:off x="457200" y="1261872"/>
-            <a:ext cx="11277295" cy="5093208"/>
-          </a:xfrm>
-          <a:prstGeom prst="roundRect">
-            <a:avLst>
-              <a:gd name="adj" fmla="val 12000"/>
-            </a:avLst>
-          </a:prstGeom>
-          <a:solidFill>
-            <a:srgbClr val="1E2A38"/>
-          </a:solidFill>
-          <a:ln>
-            <a:noFill/>
-          </a:ln>
-        </p:spPr>
-        <p:style>
-          <a:lnRef idx="1">
-            <a:schemeClr val="accent1"/>
-          </a:lnRef>
-          <a:fillRef idx="3">
-            <a:schemeClr val="accent1"/>
-          </a:fillRef>
-          <a:effectRef idx="2">
-            <a:schemeClr val="accent1"/>
-          </a:effectRef>
-          <a:fontRef idx="minor">
-            <a:schemeClr val="lt1"/>
-          </a:fontRef>
-        </p:style>
-        <p:txBody>
-          <a:bodyPr rtlCol="0" anchor="ctr"/>
-          <a:lstStyle/>
-          <a:p>
-            <a:pPr algn="ctr"/>
-          </a:p>
-        </p:txBody>
-      </p:sp>
-      <p:sp>
-        <p:nvSpPr>
-          <p:cNvPr id="6" name="Rectangle 5"/>
-          <p:cNvSpPr/>
-          <p:nvPr/>
-        </p:nvSpPr>
-        <p:spPr>
-          <a:xfrm>
-            <a:off x="457200" y="1261872"/>
-            <a:ext cx="11277295" cy="320040"/>
-          </a:xfrm>
-          <a:prstGeom prst="rect">
-            <a:avLst/>
-          </a:prstGeom>
-          <a:solidFill>
-            <a:srgbClr val="095292"/>
-          </a:solidFill>
-          <a:ln>
-            <a:noFill/>
-          </a:ln>
-        </p:spPr>
-        <p:style>
-          <a:lnRef idx="1">
-            <a:schemeClr val="accent1"/>
-          </a:lnRef>
-          <a:fillRef idx="3">
-            <a:schemeClr val="accent1"/>
-          </a:fillRef>
-          <a:effectRef idx="2">
-            <a:schemeClr val="accent1"/>
-          </a:effectRef>
-          <a:fontRef idx="minor">
-            <a:schemeClr val="lt1"/>
-          </a:fontRef>
-        </p:style>
-        <p:txBody>
-          <a:bodyPr rtlCol="0" anchor="ctr"/>
-          <a:lstStyle/>
-          <a:p>
-            <a:pPr algn="ctr"/>
-          </a:p>
-        </p:txBody>
-      </p:sp>
-      <p:sp>
-        <p:nvSpPr>
-          <p:cNvPr id="7" name="TextBox 6"/>
-          <p:cNvSpPr txBox="1"/>
-          <p:nvPr/>
-        </p:nvSpPr>
-        <p:spPr>
-          <a:xfrm>
-            <a:off x="685800" y="1307592"/>
-            <a:ext cx="10820095" cy="256032"/>
-          </a:xfrm>
-          <a:prstGeom prst="rect">
-            <a:avLst/>
-          </a:prstGeom>
-          <a:noFill/>
-        </p:spPr>
-        <p:txBody>
-          <a:bodyPr wrap="square" anchor="ctr"/>
-          <a:lstStyle/>
-          <a:p>
-            <a:r>
-              <a:rPr sz="1000" b="1" i="0">
-                <a:solidFill>
-                  <a:srgbClr val="269CCB"/>
-                </a:solidFill>
-                <a:latin typeface="Calibri"/>
-              </a:rPr>
-              <a:t>● ● ●</a:t>
-            </a:r>
-          </a:p>
-        </p:txBody>
-      </p:sp>
-      <p:sp>
-        <p:nvSpPr>
-          <p:cNvPr id="8" name="TextBox 7"/>
-          <p:cNvSpPr txBox="1"/>
-          <p:nvPr/>
-        </p:nvSpPr>
-        <p:spPr>
-          <a:xfrm>
-            <a:off x="777240" y="1719072"/>
-            <a:ext cx="10637215" cy="4453128"/>
-          </a:xfrm>
-          <a:prstGeom prst="rect">
-            <a:avLst/>
-          </a:prstGeom>
-          <a:noFill/>
-        </p:spPr>
-        <p:txBody>
-          <a:bodyPr wrap="square">
-            <a:spAutoFit/>
-          </a:bodyPr>
-          <a:lstStyle/>
-          <a:p>
-            <a:pPr>
-              <a:spcAft>
-                <a:spcPts val="400"/>
-              </a:spcAft>
-            </a:pPr>
-            <a:r>
-              <a:rPr sz="1400" b="0" i="0">
-                <a:solidFill>
-                  <a:srgbClr val="FFFFFF"/>
-                </a:solidFill>
-                <a:latin typeface="Calibri"/>
-              </a:rPr>
-              <a:t># Lo que un autoescalador necesita para no oscilar:</a:t>
-            </a:r>
-          </a:p>
-          <a:p>
-            <a:pPr>
-              <a:spcAft>
-                <a:spcPts val="400"/>
-              </a:spcAft>
-            </a:pPr>
-            <a:r>
-              <a:rPr sz="1400" b="0" i="0">
-                <a:solidFill>
-                  <a:srgbClr val="FFFFFF"/>
-                </a:solidFill>
-                <a:latin typeface="Calibri"/>
-              </a:rPr>
-              <a:t>autoescalado:</a:t>
-            </a:r>
-          </a:p>
-          <a:p>
-            <a:pPr>
-              <a:spcAft>
-                <a:spcPts val="400"/>
-              </a:spcAft>
-            </a:pPr>
-            <a:r>
-              <a:rPr sz="1400" b="0" i="0">
-                <a:solidFill>
-                  <a:srgbClr val="FFFFFF"/>
-                </a:solidFill>
-                <a:latin typeface="Calibri"/>
-              </a:rPr>
-              <a:t>  servicio: turnos-api</a:t>
-            </a:r>
-          </a:p>
-          <a:p>
-            <a:pPr>
-              <a:spcAft>
-                <a:spcPts val="400"/>
-              </a:spcAft>
-            </a:pPr>
-            <a:r>
-              <a:rPr sz="1400" b="0" i="0">
-                <a:solidFill>
-                  <a:srgbClr val="FFFFFF"/>
-                </a:solidFill>
-                <a:latin typeface="Calibri"/>
-              </a:rPr>
-              <a:t>  minimo: 2                  # 1 no da tolerancia a fallo</a:t>
-            </a:r>
-          </a:p>
-          <a:p>
-            <a:pPr>
-              <a:spcAft>
-                <a:spcPts val="400"/>
-              </a:spcAft>
-            </a:pPr>
-            <a:r>
-              <a:rPr sz="1400" b="0" i="0">
-                <a:solidFill>
-                  <a:srgbClr val="FFFFFF"/>
-                </a:solidFill>
-                <a:latin typeface="Calibri"/>
-              </a:rPr>
-              <a:t>  maximo: 6                  # tope que el presupuesto aguanta</a:t>
-            </a:r>
-          </a:p>
-          <a:p>
-            <a:pPr>
-              <a:spcAft>
-                <a:spcPts val="400"/>
-              </a:spcAft>
-            </a:pPr>
-            <a:r>
-              <a:rPr sz="1400" b="0" i="0">
-                <a:solidFill>
-                  <a:srgbClr val="FFFFFF"/>
-                </a:solidFill>
-                <a:latin typeface="Calibri"/>
-              </a:rPr>
-              <a:t>  metrica: cpu_promedio</a:t>
-            </a:r>
-          </a:p>
-          <a:p>
-            <a:pPr>
-              <a:spcAft>
-                <a:spcPts val="400"/>
-              </a:spcAft>
-            </a:pPr>
-            <a:r>
-              <a:rPr sz="1400" b="0" i="0">
-                <a:solidFill>
-                  <a:srgbClr val="FFFFFF"/>
-                </a:solidFill>
-                <a:latin typeface="Calibri"/>
-              </a:rPr>
-              <a:t>  objetivo: 65               # por debajo del 70% de la Clase 12</a:t>
-            </a:r>
-          </a:p>
-          <a:p>
-            <a:pPr>
-              <a:spcAft>
-                <a:spcPts val="400"/>
-              </a:spcAft>
-            </a:pPr>
-            <a:r>
-              <a:rPr sz="1400" b="0" i="0">
-                <a:solidFill>
-                  <a:srgbClr val="FFFFFF"/>
-                </a:solidFill>
-                <a:latin typeface="Calibri"/>
-              </a:rPr>
-              <a:t>  subir_si:   '&gt; 65% durante 3 min'</a:t>
-            </a:r>
-          </a:p>
-          <a:p>
-            <a:pPr>
-              <a:spcAft>
-                <a:spcPts val="400"/>
-              </a:spcAft>
-            </a:pPr>
-            <a:r>
-              <a:rPr sz="1400" b="0" i="0">
-                <a:solidFill>
-                  <a:srgbClr val="FFFFFF"/>
-                </a:solidFill>
-                <a:latin typeface="Calibri"/>
-              </a:rPr>
-              <a:t>  bajar_si:   '&lt; 35% durante 10 min'   # bajar mas lento que subir</a:t>
-            </a:r>
-          </a:p>
-          <a:p>
-            <a:pPr>
-              <a:spcAft>
-                <a:spcPts val="400"/>
-              </a:spcAft>
-            </a:pPr>
-            <a:r>
-              <a:rPr sz="1400" b="0" i="0">
-                <a:solidFill>
-                  <a:srgbClr val="FFFFFF"/>
-                </a:solidFill>
-                <a:latin typeface="Calibri"/>
-              </a:rPr>
-              <a:t>  enfriamiento: 5 min        # sin esto entra en bandada de arranques</a:t>
-            </a:r>
-          </a:p>
-          <a:p>
-            <a:pPr>
-              <a:spcAft>
-                <a:spcPts val="400"/>
-              </a:spcAft>
-            </a:pPr>
-            <a:r>
-              <a:rPr sz="1400" b="0" i="0">
-                <a:solidFill>
-                  <a:srgbClr val="FFFFFF"/>
-                </a:solidFill>
-                <a:latin typeface="Calibri"/>
-              </a:rPr>
-              <a:t/>
-            </a:r>
-          </a:p>
-          <a:p>
-            <a:pPr>
-              <a:spcAft>
-                <a:spcPts val="400"/>
-              </a:spcAft>
-            </a:pPr>
-            <a:r>
-              <a:rPr sz="1400" b="0" i="0">
-                <a:solidFill>
-                  <a:srgbClr val="FFFFFF"/>
-                </a:solidFill>
-                <a:latin typeface="Calibri"/>
-              </a:rPr>
-              <a:t># Y el limite honesto: escalar la API no escala la BASE. Si el cuello</a:t>
-            </a:r>
-          </a:p>
-          <a:p>
-            <a:pPr>
-              <a:spcAft>
-                <a:spcPts val="400"/>
-              </a:spcAft>
-            </a:pPr>
-            <a:r>
-              <a:rPr sz="1400" b="0" i="0">
-                <a:solidFill>
-                  <a:srgbClr val="FFFFFF"/>
-                </a:solidFill>
-                <a:latin typeface="Calibri"/>
-              </a:rPr>
-              <a:t># de botella es PostgreSQL, seis instancias lo empeoran.</a:t>
-            </a:r>
-          </a:p>
-        </p:txBody>
-      </p:sp>
-      <p:sp>
-        <p:nvSpPr>
-          <p:cNvPr id="9" name="TextBox 8"/>
-          <p:cNvSpPr txBox="1"/>
-          <p:nvPr/>
-        </p:nvSpPr>
-        <p:spPr>
-          <a:xfrm>
-            <a:off x="11185855" y="6473952"/>
-            <a:ext cx="640080" cy="274320"/>
-          </a:xfrm>
-          <a:prstGeom prst="rect">
-            <a:avLst/>
-          </a:prstGeom>
-          <a:noFill/>
-        </p:spPr>
-        <p:txBody>
-          <a:bodyPr wrap="square">
-            <a:spAutoFit/>
-          </a:bodyPr>
-          <a:lstStyle/>
-          <a:p>
-            <a:pPr algn="r"/>
-            <a:r>
-              <a:rPr sz="1100" b="0" i="0">
-                <a:solidFill>
-                  <a:srgbClr val="666666"/>
-                </a:solidFill>
-                <a:latin typeface="Calibri"/>
-              </a:rPr>
-              <a:t>22</a:t>
-            </a:r>
-          </a:p>
-        </p:txBody>
-      </p:sp>
-    </p:spTree>
-  </p:cSld>
-  <p:clrMapOvr>
-    <a:masterClrMapping/>
-  </p:clrMapOvr>
-</p:sld>
-</file>
-
-<file path=ppt/slides/slide23.xml><?xml version="1.0" encoding="utf-8"?>
-<p:sld xmlns:a="http://schemas.openxmlformats.org/drawingml/2006/main" xmlns:p="http://schemas.openxmlformats.org/presentationml/2006/main" xmlns:r="http://schemas.openxmlformats.org/officeDocument/2006/relationships">
-  <p:cSld>
-    <p:bg>
-      <p:bgPr>
-        <a:solidFill>
-          <a:srgbClr val="FFFFFF"/>
-        </a:solidFill>
-        <a:effectLst/>
-      </p:bgPr>
-    </p:bg>
-    <p:spTree>
-      <p:nvGrpSpPr>
-        <p:cNvPr id="1" name=""/>
-        <p:cNvGrpSpPr/>
-        <p:nvPr/>
-      </p:nvGrpSpPr>
-      <p:grpSpPr/>
-      <p:sp>
-        <p:nvSpPr>
-          <p:cNvPr id="2" name="Rectangle 1"/>
-          <p:cNvSpPr/>
-          <p:nvPr/>
-        </p:nvSpPr>
-        <p:spPr>
-          <a:xfrm>
-            <a:off x="0" y="0"/>
-            <a:ext cx="12191695" cy="960120"/>
-          </a:xfrm>
-          <a:prstGeom prst="rect">
-            <a:avLst/>
-          </a:prstGeom>
-          <a:solidFill>
-            <a:srgbClr val="095292"/>
-          </a:solidFill>
-          <a:ln>
-            <a:noFill/>
-          </a:ln>
-        </p:spPr>
-        <p:style>
-          <a:lnRef idx="1">
-            <a:schemeClr val="accent1"/>
-          </a:lnRef>
-          <a:fillRef idx="3">
-            <a:schemeClr val="accent1"/>
-          </a:fillRef>
-          <a:effectRef idx="2">
-            <a:schemeClr val="accent1"/>
-          </a:effectRef>
-          <a:fontRef idx="minor">
-            <a:schemeClr val="lt1"/>
-          </a:fontRef>
-        </p:style>
-        <p:txBody>
-          <a:bodyPr rtlCol="0" anchor="ctr"/>
-          <a:lstStyle/>
-          <a:p>
-            <a:pPr algn="ctr"/>
-          </a:p>
-        </p:txBody>
-      </p:sp>
-      <p:sp>
-        <p:nvSpPr>
-          <p:cNvPr id="3" name="Rectangle 2"/>
-          <p:cNvSpPr/>
-          <p:nvPr/>
-        </p:nvSpPr>
-        <p:spPr>
-          <a:xfrm>
-            <a:off x="0" y="960120"/>
-            <a:ext cx="12191695" cy="41148"/>
-          </a:xfrm>
-          <a:prstGeom prst="rect">
-            <a:avLst/>
-          </a:prstGeom>
-          <a:solidFill>
-            <a:srgbClr val="FFD000"/>
-          </a:solidFill>
-          <a:ln>
-            <a:noFill/>
-          </a:ln>
-        </p:spPr>
-        <p:style>
-          <a:lnRef idx="1">
-            <a:schemeClr val="accent1"/>
-          </a:lnRef>
-          <a:fillRef idx="3">
-            <a:schemeClr val="accent1"/>
-          </a:fillRef>
-          <a:effectRef idx="2">
-            <a:schemeClr val="accent1"/>
-          </a:effectRef>
-          <a:fontRef idx="minor">
-            <a:schemeClr val="lt1"/>
-          </a:fontRef>
-        </p:style>
-        <p:txBody>
-          <a:bodyPr rtlCol="0" anchor="ctr"/>
-          <a:lstStyle/>
-          <a:p>
-            <a:pPr algn="ctr"/>
-          </a:p>
-        </p:txBody>
-      </p:sp>
-      <p:sp>
-        <p:nvSpPr>
-          <p:cNvPr id="4" name="TextBox 3"/>
-          <p:cNvSpPr txBox="1"/>
-          <p:nvPr/>
-        </p:nvSpPr>
-        <p:spPr>
-          <a:xfrm>
-            <a:off x="457200" y="164592"/>
-            <a:ext cx="11277295" cy="502920"/>
-          </a:xfrm>
-          <a:prstGeom prst="rect">
-            <a:avLst/>
-          </a:prstGeom>
-          <a:noFill/>
-        </p:spPr>
-        <p:txBody>
-          <a:bodyPr wrap="square">
-            <a:spAutoFit/>
-          </a:bodyPr>
-          <a:lstStyle/>
-          <a:p>
-            <a:r>
-              <a:rPr sz="2600" b="1" i="0">
-                <a:solidFill>
-                  <a:srgbClr val="FFFFFF"/>
-                </a:solidFill>
-                <a:latin typeface="Calibri"/>
-              </a:rPr>
-              <a:t>Politica de autoescalado (tabla, no prosa)</a:t>
-            </a:r>
-          </a:p>
-        </p:txBody>
-      </p:sp>
-      <p:sp>
-        <p:nvSpPr>
-          <p:cNvPr id="5" name="Rounded Rectangle 4"/>
-          <p:cNvSpPr/>
-          <p:nvPr/>
-        </p:nvSpPr>
-        <p:spPr>
-          <a:xfrm>
-            <a:off x="457200" y="1261872"/>
-            <a:ext cx="11277295" cy="4773168"/>
-          </a:xfrm>
-          <a:prstGeom prst="roundRect">
-            <a:avLst>
-              <a:gd name="adj" fmla="val 12000"/>
-            </a:avLst>
-          </a:prstGeom>
-          <a:solidFill>
-            <a:srgbClr val="1E2A38"/>
-          </a:solidFill>
-          <a:ln>
-            <a:noFill/>
-          </a:ln>
-        </p:spPr>
-        <p:style>
-          <a:lnRef idx="1">
-            <a:schemeClr val="accent1"/>
-          </a:lnRef>
-          <a:fillRef idx="3">
-            <a:schemeClr val="accent1"/>
-          </a:fillRef>
-          <a:effectRef idx="2">
-            <a:schemeClr val="accent1"/>
-          </a:effectRef>
-          <a:fontRef idx="minor">
-            <a:schemeClr val="lt1"/>
-          </a:fontRef>
-        </p:style>
-        <p:txBody>
-          <a:bodyPr rtlCol="0" anchor="ctr"/>
-          <a:lstStyle/>
-          <a:p>
-            <a:pPr algn="ctr"/>
-          </a:p>
-        </p:txBody>
-      </p:sp>
-      <p:sp>
-        <p:nvSpPr>
-          <p:cNvPr id="6" name="Rectangle 5"/>
-          <p:cNvSpPr/>
-          <p:nvPr/>
-        </p:nvSpPr>
-        <p:spPr>
-          <a:xfrm>
-            <a:off x="457200" y="1261872"/>
-            <a:ext cx="11277295" cy="320040"/>
-          </a:xfrm>
-          <a:prstGeom prst="rect">
-            <a:avLst/>
-          </a:prstGeom>
-          <a:solidFill>
-            <a:srgbClr val="095292"/>
-          </a:solidFill>
-          <a:ln>
-            <a:noFill/>
-          </a:ln>
-        </p:spPr>
-        <p:style>
-          <a:lnRef idx="1">
-            <a:schemeClr val="accent1"/>
-          </a:lnRef>
-          <a:fillRef idx="3">
-            <a:schemeClr val="accent1"/>
-          </a:fillRef>
-          <a:effectRef idx="2">
-            <a:schemeClr val="accent1"/>
-          </a:effectRef>
-          <a:fontRef idx="minor">
-            <a:schemeClr val="lt1"/>
-          </a:fontRef>
-        </p:style>
-        <p:txBody>
-          <a:bodyPr rtlCol="0" anchor="ctr"/>
-          <a:lstStyle/>
-          <a:p>
-            <a:pPr algn="ctr"/>
-          </a:p>
-        </p:txBody>
-      </p:sp>
-      <p:sp>
-        <p:nvSpPr>
-          <p:cNvPr id="7" name="TextBox 6"/>
-          <p:cNvSpPr txBox="1"/>
-          <p:nvPr/>
-        </p:nvSpPr>
-        <p:spPr>
-          <a:xfrm>
-            <a:off x="685800" y="1307592"/>
-            <a:ext cx="10820095" cy="256032"/>
-          </a:xfrm>
-          <a:prstGeom prst="rect">
-            <a:avLst/>
-          </a:prstGeom>
-          <a:noFill/>
-        </p:spPr>
-        <p:txBody>
-          <a:bodyPr wrap="square" anchor="ctr"/>
-          <a:lstStyle/>
-          <a:p>
-            <a:r>
-              <a:rPr sz="1000" b="1" i="0">
-                <a:solidFill>
-                  <a:srgbClr val="269CCB"/>
-                </a:solidFill>
-                <a:latin typeface="Calibri"/>
-              </a:rPr>
-              <a:t>● ● ●</a:t>
-            </a:r>
-          </a:p>
-        </p:txBody>
-      </p:sp>
-      <p:sp>
-        <p:nvSpPr>
-          <p:cNvPr id="8" name="TextBox 7"/>
-          <p:cNvSpPr txBox="1"/>
-          <p:nvPr/>
-        </p:nvSpPr>
-        <p:spPr>
-          <a:xfrm>
-            <a:off x="777240" y="1719072"/>
-            <a:ext cx="10637215" cy="4133087"/>
-          </a:xfrm>
-          <a:prstGeom prst="rect">
-            <a:avLst/>
-          </a:prstGeom>
-          <a:noFill/>
-        </p:spPr>
-        <p:txBody>
-          <a:bodyPr wrap="square">
-            <a:spAutoFit/>
-          </a:bodyPr>
-          <a:lstStyle/>
-          <a:p>
-            <a:pPr>
-              <a:spcAft>
-                <a:spcPts val="400"/>
-              </a:spcAft>
-            </a:pPr>
-            <a:r>
-              <a:rPr sz="1400" b="0" i="0">
-                <a:solidFill>
-                  <a:srgbClr val="FFFFFF"/>
-                </a:solidFill>
-                <a:latin typeface="Calibri"/>
-              </a:rPr>
-              <a:t>Componente   | Tipo        | Trigger up      | Min | Max | Cooldown</a:t>
-            </a:r>
-          </a:p>
-          <a:p>
-            <a:pPr>
-              <a:spcAft>
-                <a:spcPts val="400"/>
-              </a:spcAft>
-            </a:pPr>
-            <a:r>
-              <a:rPr sz="1400" b="0" i="0">
-                <a:solidFill>
-                  <a:srgbClr val="FFFFFF"/>
-                </a:solidFill>
-                <a:latin typeface="Calibri"/>
-              </a:rPr>
-              <a:t>-------------|-------------|-----------------|-----|-----|---------</a:t>
-            </a:r>
-          </a:p>
-          <a:p>
-            <a:pPr>
-              <a:spcAft>
-                <a:spcPts val="400"/>
-              </a:spcAft>
-            </a:pPr>
-            <a:r>
-              <a:rPr sz="1400" b="0" i="0">
-                <a:solidFill>
-                  <a:srgbClr val="FFFFFF"/>
-                </a:solidFill>
-                <a:latin typeface="Calibri"/>
-              </a:rPr>
-              <a:t>API          | Horizontal  | CPU &gt; 70% / 5m  |  2  |  6  | 5 min</a:t>
-            </a:r>
-          </a:p>
-          <a:p>
-            <a:pPr>
-              <a:spcAft>
-                <a:spcPts val="400"/>
-              </a:spcAft>
-            </a:pPr>
-            <a:r>
-              <a:rPr sz="1400" b="0" i="0">
-                <a:solidFill>
-                  <a:srgbClr val="FFFFFF"/>
-                </a:solidFill>
-                <a:latin typeface="Calibri"/>
-              </a:rPr>
-              <a:t>Worker cola  | Horizontal  | cola &gt; 100 msg  |  1  |  4  | 3 min</a:t>
-            </a:r>
-          </a:p>
-          <a:p>
-            <a:pPr>
-              <a:spcAft>
-                <a:spcPts val="400"/>
-              </a:spcAft>
-            </a:pPr>
-            <a:r>
-              <a:rPr sz="1400" b="0" i="0">
-                <a:solidFill>
-                  <a:srgbClr val="FFFFFF"/>
-                </a:solidFill>
-                <a:latin typeface="Calibri"/>
-              </a:rPr>
-              <a:t>BD primaria  | NO escala   | -               |  1  |  1  | -</a:t>
-            </a:r>
-          </a:p>
-        </p:txBody>
-      </p:sp>
-      <p:sp>
-        <p:nvSpPr>
-          <p:cNvPr id="9" name="TextBox 8"/>
-          <p:cNvSpPr txBox="1"/>
-          <p:nvPr/>
-        </p:nvSpPr>
-        <p:spPr>
-          <a:xfrm>
-            <a:off x="457200" y="6080760"/>
-            <a:ext cx="11277295" cy="320040"/>
-          </a:xfrm>
-          <a:prstGeom prst="rect">
-            <a:avLst/>
-          </a:prstGeom>
-          <a:noFill/>
-        </p:spPr>
-        <p:txBody>
-          <a:bodyPr wrap="square">
-            <a:spAutoFit/>
-          </a:bodyPr>
-          <a:lstStyle/>
-          <a:p>
-            <a:pPr algn="ctr"/>
-            <a:r>
-              <a:rPr sz="1200" b="0" i="1">
-                <a:solidFill>
-                  <a:srgbClr val="666666"/>
-                </a:solidFill>
-                <a:latin typeface="Calibri"/>
-              </a:rPr>
-              <a:t>El 'max' es lo que evita que la factura escale sola. La BD primaria casi nunca escala horizontal.</a:t>
-            </a:r>
-          </a:p>
-        </p:txBody>
-      </p:sp>
-      <p:sp>
-        <p:nvSpPr>
-          <p:cNvPr id="10" name="TextBox 9"/>
-          <p:cNvSpPr txBox="1"/>
-          <p:nvPr/>
-        </p:nvSpPr>
-        <p:spPr>
-          <a:xfrm>
-            <a:off x="11185855" y="6473952"/>
-            <a:ext cx="640080" cy="274320"/>
-          </a:xfrm>
-          <a:prstGeom prst="rect">
-            <a:avLst/>
-          </a:prstGeom>
-          <a:noFill/>
-        </p:spPr>
-        <p:txBody>
-          <a:bodyPr wrap="square">
-            <a:spAutoFit/>
-          </a:bodyPr>
-          <a:lstStyle/>
-          <a:p>
-            <a:pPr algn="r"/>
-            <a:r>
-              <a:rPr sz="1100" b="0" i="0">
-                <a:solidFill>
-                  <a:srgbClr val="666666"/>
-                </a:solidFill>
-                <a:latin typeface="Calibri"/>
-              </a:rPr>
-              <a:t>23</a:t>
-            </a:r>
-          </a:p>
-        </p:txBody>
-      </p:sp>
-    </p:spTree>
-  </p:cSld>
-  <p:clrMapOvr>
-    <a:masterClrMapping/>
-  </p:clrMapOvr>
-</p:sld>
-</file>
-
-<file path=ppt/slides/slide24.xml><?xml version="1.0" encoding="utf-8"?>
-<p:sld xmlns:a="http://schemas.openxmlformats.org/drawingml/2006/main" xmlns:p="http://schemas.openxmlformats.org/presentationml/2006/main" xmlns:r="http://schemas.openxmlformats.org/officeDocument/2006/relationships">
-  <p:cSld>
-    <p:bg>
-      <p:bgPr>
-        <a:solidFill>
-          <a:srgbClr val="FFFFFF"/>
-        </a:solidFill>
-        <a:effectLst/>
-      </p:bgPr>
-    </p:bg>
-    <p:spTree>
-      <p:nvGrpSpPr>
-        <p:cNvPr id="1" name=""/>
-        <p:cNvGrpSpPr/>
-        <p:nvPr/>
-      </p:nvGrpSpPr>
-      <p:grpSpPr/>
-      <p:sp>
-        <p:nvSpPr>
-          <p:cNvPr id="2" name="Rectangle 1"/>
-          <p:cNvSpPr/>
-          <p:nvPr/>
-        </p:nvSpPr>
-        <p:spPr>
-          <a:xfrm>
-            <a:off x="0" y="0"/>
-            <a:ext cx="12191695" cy="1170432"/>
-          </a:xfrm>
-          <a:prstGeom prst="rect">
-            <a:avLst/>
-          </a:prstGeom>
-          <a:solidFill>
-            <a:srgbClr val="095292"/>
-          </a:solidFill>
-          <a:ln>
-            <a:noFill/>
-          </a:ln>
-        </p:spPr>
-        <p:style>
-          <a:lnRef idx="1">
-            <a:schemeClr val="accent1"/>
-          </a:lnRef>
-          <a:fillRef idx="3">
-            <a:schemeClr val="accent1"/>
-          </a:fillRef>
-          <a:effectRef idx="2">
-            <a:schemeClr val="accent1"/>
-          </a:effectRef>
-          <a:fontRef idx="minor">
-            <a:schemeClr val="lt1"/>
-          </a:fontRef>
-        </p:style>
-        <p:txBody>
-          <a:bodyPr rtlCol="0" anchor="ctr"/>
-          <a:lstStyle/>
-          <a:p>
-            <a:pPr algn="ctr"/>
-          </a:p>
-        </p:txBody>
-      </p:sp>
-      <p:sp>
-        <p:nvSpPr>
-          <p:cNvPr id="3" name="Rectangle 2"/>
-          <p:cNvSpPr/>
-          <p:nvPr/>
-        </p:nvSpPr>
-        <p:spPr>
-          <a:xfrm>
-            <a:off x="0" y="1170432"/>
-            <a:ext cx="12191695" cy="41148"/>
-          </a:xfrm>
-          <a:prstGeom prst="rect">
-            <a:avLst/>
-          </a:prstGeom>
-          <a:solidFill>
-            <a:srgbClr val="FFD000"/>
-          </a:solidFill>
-          <a:ln>
-            <a:noFill/>
-          </a:ln>
-        </p:spPr>
-        <p:style>
-          <a:lnRef idx="1">
-            <a:schemeClr val="accent1"/>
-          </a:lnRef>
-          <a:fillRef idx="3">
-            <a:schemeClr val="accent1"/>
-          </a:fillRef>
-          <a:effectRef idx="2">
-            <a:schemeClr val="accent1"/>
-          </a:effectRef>
-          <a:fontRef idx="minor">
-            <a:schemeClr val="lt1"/>
-          </a:fontRef>
-        </p:style>
-        <p:txBody>
-          <a:bodyPr rtlCol="0" anchor="ctr"/>
-          <a:lstStyle/>
-          <a:p>
-            <a:pPr algn="ctr"/>
-          </a:p>
-        </p:txBody>
-      </p:sp>
-      <p:sp>
-        <p:nvSpPr>
-          <p:cNvPr id="4" name="TextBox 3"/>
-          <p:cNvSpPr txBox="1"/>
-          <p:nvPr/>
-        </p:nvSpPr>
-        <p:spPr>
-          <a:xfrm>
-            <a:off x="457200" y="164592"/>
-            <a:ext cx="11277295" cy="384048"/>
-          </a:xfrm>
-          <a:prstGeom prst="rect">
-            <a:avLst/>
-          </a:prstGeom>
-          <a:noFill/>
-        </p:spPr>
-        <p:txBody>
-          <a:bodyPr wrap="square">
-            <a:spAutoFit/>
-          </a:bodyPr>
-          <a:lstStyle/>
-          <a:p>
-            <a:r>
-              <a:rPr sz="2600" b="1" i="0">
-                <a:solidFill>
-                  <a:srgbClr val="FFFFFF"/>
-                </a:solidFill>
-                <a:latin typeface="Calibri"/>
-              </a:rPr>
-              <a:t>Del boceto al código Mermaid</a:t>
-            </a:r>
-          </a:p>
-        </p:txBody>
-      </p:sp>
-      <p:sp>
-        <p:nvSpPr>
-          <p:cNvPr id="5" name="TextBox 4"/>
-          <p:cNvSpPr txBox="1"/>
-          <p:nvPr/>
-        </p:nvSpPr>
-        <p:spPr>
-          <a:xfrm>
-            <a:off x="457200" y="566928"/>
-            <a:ext cx="11277295" cy="411480"/>
-          </a:xfrm>
-          <a:prstGeom prst="rect">
-            <a:avLst/>
-          </a:prstGeom>
-          <a:noFill/>
-        </p:spPr>
-        <p:txBody>
-          <a:bodyPr wrap="square">
-            <a:spAutoFit/>
-          </a:bodyPr>
-          <a:lstStyle/>
-          <a:p>
-            <a:r>
-              <a:rPr sz="1400" b="0" i="0">
-                <a:solidFill>
-                  <a:srgbClr val="B8D8EE"/>
-                </a:solidFill>
-                <a:latin typeface="Calibri"/>
-              </a:rPr>
-              <a:t>El diagrama se escribe como código: se versiona, se compara y se corrige</a:t>
-            </a:r>
-          </a:p>
-        </p:txBody>
-      </p:sp>
-      <p:sp>
-        <p:nvSpPr>
-          <p:cNvPr id="6" name="Rounded Rectangle 5"/>
-          <p:cNvSpPr/>
-          <p:nvPr/>
-        </p:nvSpPr>
-        <p:spPr>
-          <a:xfrm>
-            <a:off x="457200" y="1659636"/>
-            <a:ext cx="11277295" cy="1051560"/>
-          </a:xfrm>
-          <a:prstGeom prst="roundRect">
-            <a:avLst>
-              <a:gd name="adj" fmla="val 12000"/>
-            </a:avLst>
-          </a:prstGeom>
-          <a:solidFill>
-            <a:srgbClr val="F2F2F2"/>
-          </a:solidFill>
-          <a:ln>
-            <a:noFill/>
-          </a:ln>
-        </p:spPr>
-        <p:style>
-          <a:lnRef idx="1">
-            <a:schemeClr val="accent1"/>
-          </a:lnRef>
-          <a:fillRef idx="3">
-            <a:schemeClr val="accent1"/>
-          </a:fillRef>
-          <a:effectRef idx="2">
-            <a:schemeClr val="accent1"/>
-          </a:effectRef>
-          <a:fontRef idx="minor">
-            <a:schemeClr val="lt1"/>
-          </a:fontRef>
-        </p:style>
-        <p:txBody>
-          <a:bodyPr rtlCol="0" anchor="ctr"/>
-          <a:lstStyle/>
-          <a:p>
-            <a:pPr algn="ctr"/>
-          </a:p>
-        </p:txBody>
-      </p:sp>
-      <p:sp>
-        <p:nvSpPr>
-          <p:cNvPr id="7" name="Rounded Rectangle 6"/>
-          <p:cNvSpPr/>
-          <p:nvPr/>
-        </p:nvSpPr>
-        <p:spPr>
-          <a:xfrm>
-            <a:off x="594360" y="1965960"/>
-            <a:ext cx="438912" cy="438912"/>
-          </a:xfrm>
-          <a:prstGeom prst="roundRect">
-            <a:avLst>
-              <a:gd name="adj" fmla="val 12000"/>
-            </a:avLst>
-          </a:prstGeom>
-          <a:solidFill>
-            <a:srgbClr val="095292"/>
-          </a:solidFill>
-          <a:ln>
-            <a:noFill/>
-          </a:ln>
-        </p:spPr>
-        <p:style>
-          <a:lnRef idx="1">
-            <a:schemeClr val="accent1"/>
-          </a:lnRef>
-          <a:fillRef idx="3">
-            <a:schemeClr val="accent1"/>
-          </a:fillRef>
-          <a:effectRef idx="2">
-            <a:schemeClr val="accent1"/>
-          </a:effectRef>
-          <a:fontRef idx="minor">
-            <a:schemeClr val="lt1"/>
-          </a:fontRef>
-        </p:style>
-        <p:txBody>
-          <a:bodyPr rtlCol="0" anchor="ctr"/>
-          <a:lstStyle/>
-          <a:p>
-            <a:pPr algn="ctr"/>
-          </a:p>
-        </p:txBody>
-      </p:sp>
-      <p:sp>
-        <p:nvSpPr>
-          <p:cNvPr id="8" name="TextBox 7"/>
-          <p:cNvSpPr txBox="1"/>
-          <p:nvPr/>
-        </p:nvSpPr>
-        <p:spPr>
-          <a:xfrm>
-            <a:off x="594360" y="1965960"/>
-            <a:ext cx="438912" cy="438912"/>
-          </a:xfrm>
-          <a:prstGeom prst="rect">
-            <a:avLst/>
-          </a:prstGeom>
-          <a:noFill/>
-        </p:spPr>
-        <p:txBody>
-          <a:bodyPr wrap="square" anchor="ctr"/>
-          <a:lstStyle/>
-          <a:p>
-            <a:pPr algn="ctr"/>
-            <a:r>
-              <a:rPr sz="1600" b="1" i="0">
-                <a:solidFill>
-                  <a:srgbClr val="FFFFFF"/>
-                </a:solidFill>
-                <a:latin typeface="Calibri"/>
-              </a:rPr>
-              <a:t>1</a:t>
-            </a:r>
-          </a:p>
-        </p:txBody>
-      </p:sp>
-      <p:sp>
-        <p:nvSpPr>
-          <p:cNvPr id="9" name="TextBox 8"/>
-          <p:cNvSpPr txBox="1"/>
-          <p:nvPr/>
-        </p:nvSpPr>
-        <p:spPr>
-          <a:xfrm>
-            <a:off x="1188720" y="1751076"/>
-            <a:ext cx="10271455" cy="886968"/>
-          </a:xfrm>
-          <a:prstGeom prst="rect">
-            <a:avLst/>
-          </a:prstGeom>
-          <a:noFill/>
-        </p:spPr>
-        <p:txBody>
-          <a:bodyPr wrap="square" anchor="ctr"/>
-          <a:lstStyle/>
-          <a:p>
-            <a:r>
-              <a:rPr sz="1500" b="1" i="0">
-                <a:solidFill>
-                  <a:srgbClr val="095292"/>
-                </a:solidFill>
-                <a:latin typeface="Calibri"/>
-              </a:rPr>
-              <a:t>Diseña visual</a:t>
-            </a:r>
-          </a:p>
-          <a:p>
-            <a:pPr>
-              <a:spcBef>
-                <a:spcPts val="200"/>
-              </a:spcBef>
-            </a:pPr>
-            <a:r>
-              <a:rPr sz="1300" b="0" i="0">
-                <a:solidFill>
-                  <a:srgbClr val="333333"/>
-                </a:solidFill>
-                <a:latin typeface="Calibri"/>
-              </a:rPr>
-              <a:t>Dibuja el diagrama como quieras en Excalidraw o draw.io: es más rápido arrastrar cajas que escribir código, y ahí es donde se piensa el modelo.</a:t>
-            </a:r>
-          </a:p>
-        </p:txBody>
-      </p:sp>
-      <p:sp>
-        <p:nvSpPr>
-          <p:cNvPr id="10" name="Rounded Rectangle 9"/>
-          <p:cNvSpPr/>
-          <p:nvPr/>
-        </p:nvSpPr>
-        <p:spPr>
-          <a:xfrm>
-            <a:off x="457200" y="2802636"/>
-            <a:ext cx="11277295" cy="1051560"/>
-          </a:xfrm>
-          <a:prstGeom prst="roundRect">
-            <a:avLst>
-              <a:gd name="adj" fmla="val 12000"/>
-            </a:avLst>
-          </a:prstGeom>
-          <a:solidFill>
-            <a:srgbClr val="E8F4FA"/>
-          </a:solidFill>
-          <a:ln>
-            <a:noFill/>
-          </a:ln>
-        </p:spPr>
-        <p:style>
-          <a:lnRef idx="1">
-            <a:schemeClr val="accent1"/>
-          </a:lnRef>
-          <a:fillRef idx="3">
-            <a:schemeClr val="accent1"/>
-          </a:fillRef>
-          <a:effectRef idx="2">
-            <a:schemeClr val="accent1"/>
-          </a:effectRef>
-          <a:fontRef idx="minor">
-            <a:schemeClr val="lt1"/>
-          </a:fontRef>
-        </p:style>
-        <p:txBody>
-          <a:bodyPr rtlCol="0" anchor="ctr"/>
-          <a:lstStyle/>
-          <a:p>
-            <a:pPr algn="ctr"/>
-          </a:p>
-        </p:txBody>
-      </p:sp>
-      <p:sp>
-        <p:nvSpPr>
-          <p:cNvPr id="11" name="Rounded Rectangle 10"/>
-          <p:cNvSpPr/>
-          <p:nvPr/>
-        </p:nvSpPr>
-        <p:spPr>
-          <a:xfrm>
-            <a:off x="594360" y="3108960"/>
-            <a:ext cx="438912" cy="438912"/>
-          </a:xfrm>
-          <a:prstGeom prst="roundRect">
-            <a:avLst>
-              <a:gd name="adj" fmla="val 12000"/>
-            </a:avLst>
-          </a:prstGeom>
-          <a:solidFill>
-            <a:srgbClr val="095292"/>
-          </a:solidFill>
-          <a:ln>
-            <a:noFill/>
-          </a:ln>
-        </p:spPr>
-        <p:style>
-          <a:lnRef idx="1">
-            <a:schemeClr val="accent1"/>
-          </a:lnRef>
-          <a:fillRef idx="3">
-            <a:schemeClr val="accent1"/>
-          </a:fillRef>
-          <a:effectRef idx="2">
-            <a:schemeClr val="accent1"/>
-          </a:effectRef>
-          <a:fontRef idx="minor">
-            <a:schemeClr val="lt1"/>
-          </a:fontRef>
-        </p:style>
-        <p:txBody>
-          <a:bodyPr rtlCol="0" anchor="ctr"/>
-          <a:lstStyle/>
-          <a:p>
-            <a:pPr algn="ctr"/>
-          </a:p>
-        </p:txBody>
-      </p:sp>
-      <p:sp>
-        <p:nvSpPr>
-          <p:cNvPr id="12" name="TextBox 11"/>
-          <p:cNvSpPr txBox="1"/>
-          <p:nvPr/>
-        </p:nvSpPr>
-        <p:spPr>
-          <a:xfrm>
-            <a:off x="594360" y="3108960"/>
-            <a:ext cx="438912" cy="438912"/>
-          </a:xfrm>
-          <a:prstGeom prst="rect">
-            <a:avLst/>
-          </a:prstGeom>
-          <a:noFill/>
-        </p:spPr>
-        <p:txBody>
-          <a:bodyPr wrap="square" anchor="ctr"/>
-          <a:lstStyle/>
-          <a:p>
-            <a:pPr algn="ctr"/>
-            <a:r>
-              <a:rPr sz="1600" b="1" i="0">
-                <a:solidFill>
-                  <a:srgbClr val="FFFFFF"/>
-                </a:solidFill>
-                <a:latin typeface="Calibri"/>
-              </a:rPr>
-              <a:t>2</a:t>
-            </a:r>
-          </a:p>
-        </p:txBody>
-      </p:sp>
-      <p:sp>
-        <p:nvSpPr>
-          <p:cNvPr id="13" name="TextBox 12"/>
-          <p:cNvSpPr txBox="1"/>
-          <p:nvPr/>
-        </p:nvSpPr>
-        <p:spPr>
-          <a:xfrm>
-            <a:off x="1188720" y="2894076"/>
-            <a:ext cx="10271455" cy="886968"/>
-          </a:xfrm>
-          <a:prstGeom prst="rect">
-            <a:avLst/>
-          </a:prstGeom>
-          <a:noFill/>
-        </p:spPr>
-        <p:txBody>
-          <a:bodyPr wrap="square" anchor="ctr"/>
-          <a:lstStyle/>
-          <a:p>
-            <a:r>
-              <a:rPr sz="1500" b="1" i="0">
-                <a:solidFill>
-                  <a:srgbClr val="095292"/>
-                </a:solidFill>
-                <a:latin typeface="Calibri"/>
-              </a:rPr>
-              <a:t>Traduce con IA</a:t>
-            </a:r>
-          </a:p>
-          <a:p>
-            <a:pPr>
-              <a:spcBef>
-                <a:spcPts val="200"/>
-              </a:spcBef>
-            </a:pPr>
-            <a:r>
-              <a:rPr sz="1300" b="0" i="0">
-                <a:solidFill>
-                  <a:srgbClr val="333333"/>
-                </a:solidFill>
-                <a:latin typeface="Calibri"/>
-              </a:rPr>
-              <a:t>Describe tu boceto a una IA y pídele el código Mermaid usando flowchart. Revisa el resultado: la IA acierta la sintaxis, no tu modelo.</a:t>
-            </a:r>
-          </a:p>
-        </p:txBody>
-      </p:sp>
-      <p:sp>
-        <p:nvSpPr>
-          <p:cNvPr id="14" name="Rounded Rectangle 13"/>
-          <p:cNvSpPr/>
-          <p:nvPr/>
-        </p:nvSpPr>
-        <p:spPr>
-          <a:xfrm>
-            <a:off x="457200" y="3945636"/>
-            <a:ext cx="11277295" cy="1051560"/>
-          </a:xfrm>
-          <a:prstGeom prst="roundRect">
-            <a:avLst>
-              <a:gd name="adj" fmla="val 12000"/>
-            </a:avLst>
-          </a:prstGeom>
-          <a:solidFill>
-            <a:srgbClr val="F2F2F2"/>
-          </a:solidFill>
-          <a:ln>
-            <a:noFill/>
-          </a:ln>
-        </p:spPr>
-        <p:style>
-          <a:lnRef idx="1">
-            <a:schemeClr val="accent1"/>
-          </a:lnRef>
-          <a:fillRef idx="3">
-            <a:schemeClr val="accent1"/>
-          </a:fillRef>
-          <a:effectRef idx="2">
-            <a:schemeClr val="accent1"/>
-          </a:effectRef>
-          <a:fontRef idx="minor">
-            <a:schemeClr val="lt1"/>
-          </a:fontRef>
-        </p:style>
-        <p:txBody>
-          <a:bodyPr rtlCol="0" anchor="ctr"/>
-          <a:lstStyle/>
-          <a:p>
-            <a:pPr algn="ctr"/>
-          </a:p>
-        </p:txBody>
-      </p:sp>
-      <p:sp>
-        <p:nvSpPr>
-          <p:cNvPr id="15" name="Rounded Rectangle 14"/>
-          <p:cNvSpPr/>
-          <p:nvPr/>
-        </p:nvSpPr>
-        <p:spPr>
-          <a:xfrm>
-            <a:off x="594360" y="4251960"/>
-            <a:ext cx="438912" cy="438912"/>
-          </a:xfrm>
-          <a:prstGeom prst="roundRect">
-            <a:avLst>
-              <a:gd name="adj" fmla="val 12000"/>
-            </a:avLst>
-          </a:prstGeom>
-          <a:solidFill>
-            <a:srgbClr val="095292"/>
-          </a:solidFill>
-          <a:ln>
-            <a:noFill/>
-          </a:ln>
-        </p:spPr>
-        <p:style>
-          <a:lnRef idx="1">
-            <a:schemeClr val="accent1"/>
-          </a:lnRef>
-          <a:fillRef idx="3">
-            <a:schemeClr val="accent1"/>
-          </a:fillRef>
-          <a:effectRef idx="2">
-            <a:schemeClr val="accent1"/>
-          </a:effectRef>
-          <a:fontRef idx="minor">
-            <a:schemeClr val="lt1"/>
-          </a:fontRef>
-        </p:style>
-        <p:txBody>
-          <a:bodyPr rtlCol="0" anchor="ctr"/>
-          <a:lstStyle/>
-          <a:p>
-            <a:pPr algn="ctr"/>
-          </a:p>
-        </p:txBody>
-      </p:sp>
-      <p:sp>
-        <p:nvSpPr>
-          <p:cNvPr id="16" name="TextBox 15"/>
-          <p:cNvSpPr txBox="1"/>
-          <p:nvPr/>
-        </p:nvSpPr>
-        <p:spPr>
-          <a:xfrm>
-            <a:off x="594360" y="4251960"/>
-            <a:ext cx="438912" cy="438912"/>
-          </a:xfrm>
-          <a:prstGeom prst="rect">
-            <a:avLst/>
-          </a:prstGeom>
-          <a:noFill/>
-        </p:spPr>
-        <p:txBody>
-          <a:bodyPr wrap="square" anchor="ctr"/>
-          <a:lstStyle/>
-          <a:p>
-            <a:pPr algn="ctr"/>
-            <a:r>
-              <a:rPr sz="1600" b="1" i="0">
-                <a:solidFill>
-                  <a:srgbClr val="FFFFFF"/>
-                </a:solidFill>
-                <a:latin typeface="Calibri"/>
-              </a:rPr>
-              <a:t>3</a:t>
-            </a:r>
-          </a:p>
-        </p:txBody>
-      </p:sp>
-      <p:sp>
-        <p:nvSpPr>
-          <p:cNvPr id="17" name="TextBox 16"/>
-          <p:cNvSpPr txBox="1"/>
-          <p:nvPr/>
-        </p:nvSpPr>
-        <p:spPr>
-          <a:xfrm>
-            <a:off x="1188720" y="4037076"/>
-            <a:ext cx="10271455" cy="886968"/>
-          </a:xfrm>
-          <a:prstGeom prst="rect">
-            <a:avLst/>
-          </a:prstGeom>
-          <a:noFill/>
-        </p:spPr>
-        <p:txBody>
-          <a:bodyPr wrap="square" anchor="ctr"/>
-          <a:lstStyle/>
-          <a:p>
-            <a:r>
-              <a:rPr sz="1500" b="1" i="0">
-                <a:solidFill>
-                  <a:srgbClr val="095292"/>
-                </a:solidFill>
-                <a:latin typeface="Calibri"/>
-              </a:rPr>
-              <a:t>Renderiza en un visor</a:t>
-            </a:r>
-          </a:p>
-          <a:p>
-            <a:pPr>
-              <a:spcBef>
-                <a:spcPts val="200"/>
-              </a:spcBef>
-            </a:pPr>
-            <a:r>
-              <a:rPr sz="1300" b="0" i="0">
-                <a:solidFill>
-                  <a:srgbClr val="333333"/>
-                </a:solidFill>
-                <a:latin typeface="Calibri"/>
-              </a:rPr>
-              <a:t>Pega el código en un visor Mermaid (mermaid.live o la vista previa de tu editor) y míralo dibujado. Si no renderiza, corrige ahí: un end faltante o un rótulo sin comillas.</a:t>
-            </a:r>
-          </a:p>
-        </p:txBody>
-      </p:sp>
-      <p:sp>
-        <p:nvSpPr>
-          <p:cNvPr id="18" name="Rounded Rectangle 17"/>
-          <p:cNvSpPr/>
-          <p:nvPr/>
-        </p:nvSpPr>
-        <p:spPr>
-          <a:xfrm>
-            <a:off x="457200" y="5088636"/>
-            <a:ext cx="11277295" cy="1051560"/>
-          </a:xfrm>
-          <a:prstGeom prst="roundRect">
-            <a:avLst>
-              <a:gd name="adj" fmla="val 12000"/>
-            </a:avLst>
-          </a:prstGeom>
-          <a:solidFill>
-            <a:srgbClr val="E8F4FA"/>
-          </a:solidFill>
-          <a:ln>
-            <a:noFill/>
-          </a:ln>
-        </p:spPr>
-        <p:style>
-          <a:lnRef idx="1">
-            <a:schemeClr val="accent1"/>
-          </a:lnRef>
-          <a:fillRef idx="3">
-            <a:schemeClr val="accent1"/>
-          </a:fillRef>
-          <a:effectRef idx="2">
-            <a:schemeClr val="accent1"/>
-          </a:effectRef>
-          <a:fontRef idx="minor">
-            <a:schemeClr val="lt1"/>
-          </a:fontRef>
-        </p:style>
-        <p:txBody>
-          <a:bodyPr rtlCol="0" anchor="ctr"/>
-          <a:lstStyle/>
-          <a:p>
-            <a:pPr algn="ctr"/>
-          </a:p>
-        </p:txBody>
-      </p:sp>
-      <p:sp>
-        <p:nvSpPr>
-          <p:cNvPr id="19" name="Rounded Rectangle 18"/>
-          <p:cNvSpPr/>
-          <p:nvPr/>
-        </p:nvSpPr>
-        <p:spPr>
-          <a:xfrm>
-            <a:off x="594360" y="5394960"/>
-            <a:ext cx="438912" cy="438912"/>
-          </a:xfrm>
-          <a:prstGeom prst="roundRect">
-            <a:avLst>
-              <a:gd name="adj" fmla="val 12000"/>
-            </a:avLst>
-          </a:prstGeom>
-          <a:solidFill>
-            <a:srgbClr val="095292"/>
-          </a:solidFill>
-          <a:ln>
-            <a:noFill/>
-          </a:ln>
-        </p:spPr>
-        <p:style>
-          <a:lnRef idx="1">
-            <a:schemeClr val="accent1"/>
-          </a:lnRef>
-          <a:fillRef idx="3">
-            <a:schemeClr val="accent1"/>
-          </a:fillRef>
-          <a:effectRef idx="2">
-            <a:schemeClr val="accent1"/>
-          </a:effectRef>
-          <a:fontRef idx="minor">
-            <a:schemeClr val="lt1"/>
-          </a:fontRef>
-        </p:style>
-        <p:txBody>
-          <a:bodyPr rtlCol="0" anchor="ctr"/>
-          <a:lstStyle/>
-          <a:p>
-            <a:pPr algn="ctr"/>
-          </a:p>
-        </p:txBody>
-      </p:sp>
-      <p:sp>
-        <p:nvSpPr>
-          <p:cNvPr id="20" name="TextBox 19"/>
-          <p:cNvSpPr txBox="1"/>
-          <p:nvPr/>
-        </p:nvSpPr>
-        <p:spPr>
-          <a:xfrm>
-            <a:off x="594360" y="5394960"/>
-            <a:ext cx="438912" cy="438912"/>
-          </a:xfrm>
-          <a:prstGeom prst="rect">
-            <a:avLst/>
-          </a:prstGeom>
-          <a:noFill/>
-        </p:spPr>
-        <p:txBody>
-          <a:bodyPr wrap="square" anchor="ctr"/>
-          <a:lstStyle/>
-          <a:p>
-            <a:pPr algn="ctr"/>
-            <a:r>
-              <a:rPr sz="1600" b="1" i="0">
-                <a:solidFill>
-                  <a:srgbClr val="FFFFFF"/>
-                </a:solidFill>
-                <a:latin typeface="Calibri"/>
-              </a:rPr>
-              <a:t>4</a:t>
-            </a:r>
-          </a:p>
-        </p:txBody>
-      </p:sp>
-      <p:sp>
-        <p:nvSpPr>
-          <p:cNvPr id="21" name="TextBox 20"/>
-          <p:cNvSpPr txBox="1"/>
-          <p:nvPr/>
-        </p:nvSpPr>
-        <p:spPr>
-          <a:xfrm>
-            <a:off x="1188720" y="5180076"/>
-            <a:ext cx="10271455" cy="886968"/>
-          </a:xfrm>
-          <a:prstGeom prst="rect">
-            <a:avLst/>
-          </a:prstGeom>
-          <a:noFill/>
-        </p:spPr>
-        <p:txBody>
-          <a:bodyPr wrap="square" anchor="ctr"/>
-          <a:lstStyle/>
-          <a:p>
-            <a:r>
-              <a:rPr sz="1500" b="1" i="0">
-                <a:solidFill>
-                  <a:srgbClr val="095292"/>
-                </a:solidFill>
-                <a:latin typeface="Calibri"/>
-              </a:rPr>
-              <a:t>Guarda código e imagen</a:t>
-            </a:r>
-          </a:p>
-          <a:p>
-            <a:pPr>
-              <a:spcBef>
-                <a:spcPts val="200"/>
-              </a:spcBef>
-            </a:pPr>
-            <a:r>
-              <a:rPr sz="1300" b="0" i="0">
-                <a:solidFill>
-                  <a:srgbClr val="333333"/>
-                </a:solidFill>
-                <a:latin typeface="Calibri"/>
-              </a:rPr>
-              <a:t>El código es la fuente del diagrama: guárdalo con tu proyecto junto con el PNG exportado.</a:t>
-            </a:r>
-          </a:p>
-        </p:txBody>
-      </p:sp>
-      <p:sp>
-        <p:nvSpPr>
-          <p:cNvPr id="22" name="TextBox 21"/>
-          <p:cNvSpPr txBox="1"/>
-          <p:nvPr/>
-        </p:nvSpPr>
-        <p:spPr>
-          <a:xfrm>
-            <a:off x="11185855" y="6473952"/>
-            <a:ext cx="640080" cy="274320"/>
-          </a:xfrm>
-          <a:prstGeom prst="rect">
-            <a:avLst/>
-          </a:prstGeom>
-          <a:noFill/>
-        </p:spPr>
-        <p:txBody>
-          <a:bodyPr wrap="square">
-            <a:spAutoFit/>
-          </a:bodyPr>
-          <a:lstStyle/>
-          <a:p>
-            <a:pPr algn="r"/>
-            <a:r>
-              <a:rPr sz="1100" b="0" i="0">
-                <a:solidFill>
-                  <a:srgbClr val="666666"/>
-                </a:solidFill>
-                <a:latin typeface="Calibri"/>
-              </a:rPr>
-              <a:t>24</a:t>
-            </a:r>
-          </a:p>
-        </p:txBody>
-      </p:sp>
-    </p:spTree>
-  </p:cSld>
-  <p:clrMapOvr>
-    <a:masterClrMapping/>
-  </p:clrMapOvr>
-</p:sld>
-</file>
-
-<file path=ppt/slides/slide25.xml><?xml version="1.0" encoding="utf-8"?>
-<p:sld xmlns:a="http://schemas.openxmlformats.org/drawingml/2006/main" xmlns:p="http://schemas.openxmlformats.org/presentationml/2006/main" xmlns:r="http://schemas.openxmlformats.org/officeDocument/2006/relationships">
-  <p:cSld>
-    <p:bg>
-      <p:bgPr>
-        <a:solidFill>
-          <a:srgbClr val="FFFFFF"/>
-        </a:solidFill>
-        <a:effectLst/>
-      </p:bgPr>
-    </p:bg>
-    <p:spTree>
-      <p:nvGrpSpPr>
-        <p:cNvPr id="1" name=""/>
-        <p:cNvGrpSpPr/>
-        <p:nvPr/>
-      </p:nvGrpSpPr>
-      <p:grpSpPr/>
-      <p:sp>
-        <p:nvSpPr>
-          <p:cNvPr id="2" name="Rectangle 1"/>
-          <p:cNvSpPr/>
-          <p:nvPr/>
-        </p:nvSpPr>
-        <p:spPr>
-          <a:xfrm>
-            <a:off x="0" y="0"/>
             <a:ext cx="12191695" cy="164592"/>
           </a:xfrm>
           <a:prstGeom prst="rect">
@@ -11037,39 +9740,7 @@
                 </a:solidFill>
                 <a:latin typeface="Calibri"/>
               </a:rPr>
-              <a:t>–   Esta clase es autonoma por festivo: el estudiante trabaja solo y este fundamento se publica como material de lectura, asi que esta escrito para explicar el tema completo sin apoyo de un encuentro sincronico.</a:t>
-            </a:r>
-          </a:p>
-          <a:p>
-            <a:pPr>
-              <a:spcAft>
-                <a:spcPts val="800"/>
-              </a:spcAft>
-            </a:pPr>
-            <a:r>
-              <a:rPr sz="2000" b="0" i="0">
-                <a:solidFill>
-                  <a:srgbClr val="333333"/>
-                </a:solidFill>
-                <a:latin typeface="Calibri"/>
-              </a:rPr>
               <a:t>–   La escalabilidad es la capacidad de un sistema de sostener mas carga agregando recursos, y la primera precision importante es que no es lo mismo que rendimiento.</a:t>
-            </a:r>
-          </a:p>
-          <a:p>
-            <a:pPr>
-              <a:spcAft>
-                <a:spcPts val="800"/>
-              </a:spcAft>
-            </a:pPr>
-            <a:r>
-              <a:rPr sz="2000" b="0" i="0">
-                <a:solidFill>
-                  <a:srgbClr val="333333"/>
-                </a:solidFill>
-                <a:latin typeface="Calibri"/>
-              </a:rPr>
-              <a:t>–   El rendimiento, tema de la Clase 12, pregunta cuanto tarda una peticion con la carga actual.</a:t>
             </a:r>
           </a:p>
           <a:p>
@@ -11266,7 +9937,7 @@
                 </a:solidFill>
                 <a:latin typeface="Calibri"/>
               </a:rPr>
-              <a:t>Escalar vertical y horizontalmente: las dos formas de agregar capacidad (1/2)</a:t>
+              <a:t>Escalar vertical y horizontalmente: las dos formas de agregar capacidad</a:t>
             </a:r>
           </a:p>
         </p:txBody>
@@ -11305,7 +9976,7 @@
                 </a:solidFill>
                 <a:latin typeface="Calibri"/>
               </a:rPr>
-              <a:t>–   Hay dos formas de agregar capacidad y el estudiante debe poder definirlas sin dudar.</a:t>
+              <a:t>–   Escalar verticalmente, o hacia arriba, es darle mas recursos a la MISMA maquina: mas CPU, mas memoria, disco mas rapido.</a:t>
             </a:r>
           </a:p>
           <a:p>
@@ -11321,7 +9992,7 @@
                 </a:solidFill>
                 <a:latin typeface="Calibri"/>
               </a:rPr>
-              <a:t>–   Escalar verticalmente, o hacia arriba, es darle mas recursos a la MISMA maquina: mas CPU, mas memoria, disco mas rapido.</a:t>
+              <a:t>–   Es la opcion simple porque no exige cambiar el codigo, y tiene tres limites reales: existe un techo fisico</a:t>
             </a:r>
           </a:p>
           <a:p>
@@ -11337,7 +10008,7 @@
                 </a:solidFill>
                 <a:latin typeface="Calibri"/>
               </a:rPr>
-              <a:t>–   Es la opcion simple porque no exige cambiar el codigo, y tiene tres limites reales: existe un techo fisico</a:t>
+              <a:t>–   Porque la instancia mas grande disponible se acaba en algun punto; el precio crece peor que linealmente, ya que las instancias grandes cuestan mas por unidad de capacidad</a:t>
             </a:r>
           </a:p>
           <a:p>
@@ -11353,7 +10024,23 @@
                 </a:solidFill>
                 <a:latin typeface="Calibri"/>
               </a:rPr>
-              <a:t>–   Porque la instancia mas grande disponible se acaba en algun punto; el precio crece peor que linealmente, ya que las instancias grandes cuestan mas por unidad de capacidad</a:t>
+              <a:t>–   Y el cambio suele requerir reiniciar el servicio, lo que implica una ventana de indisponibilidad del orden de 30 segundos a 2 minutos.</a:t>
+            </a:r>
+          </a:p>
+          <a:p>
+            <a:pPr>
+              <a:spcAft>
+                <a:spcPts val="800"/>
+              </a:spcAft>
+            </a:pPr>
+            <a:r>
+              <a:rPr sz="2000" b="0" i="0">
+                <a:solidFill>
+                  <a:srgbClr val="333333"/>
+                </a:solidFill>
+                <a:latin typeface="Calibri"/>
+              </a:rPr>
+              <a:t>–   Su precio es un requisito de diseno no negociable: la aplicacion tiene que poder correr en varias copias sin pisarse.</a:t>
             </a:r>
           </a:p>
         </p:txBody>
@@ -11534,7 +10221,7 @@
                 </a:solidFill>
                 <a:latin typeface="Calibri"/>
               </a:rPr>
-              <a:t>Escalar vertical y horizontalmente: las dos formas de agregar capacidad (2/2)</a:t>
+              <a:t>Ausencia de estado: donde mas estudiantes fallan</a:t>
             </a:r>
           </a:p>
         </p:txBody>
@@ -11573,7 +10260,7 @@
                 </a:solidFill>
                 <a:latin typeface="Calibri"/>
               </a:rPr>
-              <a:t>–   Y el cambio suele requerir reiniciar el servicio, lo que implica una ventana de indisponibilidad del orden de 30 segundos a 2 minutos.</a:t>
+              <a:t>–   Ese requisito se llama ausencia de estado, o statelessness, y es donde mas estudiantes fallan.</a:t>
             </a:r>
           </a:p>
           <a:p>
@@ -11589,7 +10276,7 @@
                 </a:solidFill>
                 <a:latin typeface="Calibri"/>
               </a:rPr>
-              <a:t>–   Escalar horizontalmente, o hacia afuera, es agregar MAS instancias iguales trabajando en paralelo, con el balanceador de carga de la Clase 7 repartiendo peticiones entre ellas.</a:t>
+              <a:t>–   El sintoma en la app es facil de narrar: si la API guarda la sesion en un diccionario en memoria de la instancia que atendio el login</a:t>
             </a:r>
           </a:p>
           <a:p>
@@ -11605,7 +10292,23 @@
                 </a:solidFill>
                 <a:latin typeface="Calibri"/>
               </a:rPr>
-              <a:t>–   Su precio es un requisito de diseno no negociable: la aplicacion tiene que poder correr en varias copias sin pisarse.</a:t>
+              <a:t>–   Y el balanceador manda la siguiente peticion del mismo usuario a la segunda instancia, esa instancia no lo conoce y lo expulsa; el usuario percibe que la aplicacion lo saca al azar.</a:t>
+            </a:r>
+          </a:p>
+          <a:p>
+            <a:pPr>
+              <a:spcAft>
+                <a:spcPts val="800"/>
+              </a:spcAft>
+            </a:pPr>
+            <a:r>
+              <a:rPr sz="2000" b="0" i="0">
+                <a:solidFill>
+                  <a:srgbClr val="333333"/>
+                </a:solidFill>
+                <a:latin typeface="Calibri"/>
+              </a:rPr>
+              <a:t>–   La solucion arquitectonica es sacar el estado del proceso: guardar la sesion en un almacen compartido o usar un token firmado que el cliente presenta en cada peticion.</a:t>
             </a:r>
           </a:p>
         </p:txBody>
@@ -11786,7 +10489,7 @@
                 </a:solidFill>
                 <a:latin typeface="Calibri"/>
               </a:rPr>
-              <a:t>Ausencia de estado: donde mas estudiantes fallan (1/2)</a:t>
+              <a:t>Las cinco piezas del autoescalado (1/2)</a:t>
             </a:r>
           </a:p>
         </p:txBody>
@@ -11825,7 +10528,7 @@
                 </a:solidFill>
                 <a:latin typeface="Calibri"/>
               </a:rPr>
-              <a:t>–   Ese requisito se llama ausencia de estado, o statelessness, y es donde mas estudiantes fallan.</a:t>
+              <a:t>–   El autoescalado es la automatizacion del escalado horizontal y consta de cinco piezas: una metrica que se observa, un umbral que dispara la accion</a:t>
             </a:r>
           </a:p>
           <a:p>
@@ -11841,7 +10544,7 @@
                 </a:solidFill>
                 <a:latin typeface="Calibri"/>
               </a:rPr>
-              <a:t>–   El sintoma en la app es facil de narrar: si la API guarda la sesion en un diccionario en memoria de la instancia que atendio el login</a:t>
+              <a:t>–   Un periodo de evaluacion durante el cual el umbral debe sostenerse, un enfriamiento o cooldown que impide actuar de nuevo de inmediato, y un rango con minimo y maximo de instancias.</a:t>
             </a:r>
           </a:p>
           <a:p>
@@ -11857,7 +10560,7 @@
                 </a:solidFill>
                 <a:latin typeface="Calibri"/>
               </a:rPr>
-              <a:t>–   Y el balanceador manda la siguiente peticion del mismo usuario a la segunda instancia, esa instancia no lo conoce y lo expulsa; el usuario percibe que la aplicacion lo saca al azar.</a:t>
+              <a:t>–   Una politica completa para la app se lee asi: metrica CPU promedio del grupo de instancias de la API, umbral 70 por ciento sostenido durante 5 minutos, accion agregar una instancia, cooldown de 5 minutos, minimo 2 y maximo 6.</a:t>
             </a:r>
           </a:p>
           <a:p>
@@ -11873,7 +10576,7 @@
                 </a:solidFill>
                 <a:latin typeface="Calibri"/>
               </a:rPr>
-              <a:t>–   La solucion parcial que casi todos proponen es la sesion pegajosa, que amarra al usuario a una instancia, y hay que decir por que es un parche: si esa instancia se cae la sesion se pierde igual, y el balanceo se vuelve desigual.</a:t>
+              <a:t>–   El 70 por ciento deja holgura para el pico que llega mientras la instancia nueva arranca.</a:t>
             </a:r>
           </a:p>
         </p:txBody>

--- a/Arquitectura de Sistemas Computacionales/Clases/Clase 13 - Escalabilidad automatica/Presentacion.pptx
+++ b/Arquitectura de Sistemas Computacionales/Clases/Clase 13 - Escalabilidad automatica/Presentacion.pptx
@@ -9,8 +9,8 @@
     <p:sldId id="257" r:id="rId8"/>
     <p:sldId id="258" r:id="rId9"/>
     <p:sldId id="259" r:id="rId10"/>
-    <p:sldId id="260" r:id="rId11"/>
-    <p:sldId id="261" r:id="rId12"/>
+    <p:sldId id="260" r:id="rId12"/>
+    <p:sldId id="261" r:id="rId13"/>
     <p:sldId id="262" r:id="rId14"/>
     <p:sldId id="263" r:id="rId15"/>
     <p:sldId id="264" r:id="rId16"/>
@@ -22,9 +22,6 @@
     <p:sldId id="270" r:id="rId22"/>
     <p:sldId id="271" r:id="rId23"/>
     <p:sldId id="272" r:id="rId24"/>
-    <p:sldId id="273" r:id="rId25"/>
-    <p:sldId id="274" r:id="rId26"/>
-    <p:sldId id="275" r:id="rId27"/>
   </p:sldIdLst>
   <p:sldSz cx="12191695" cy="6858000" type="screen4x3"/>
   <p:notesSz cx="6858000" cy="9144000"/>
@@ -521,6 +518,30 @@
           <a:lstStyle/>
           <a:p>
             <a:r>
+              <a:t>DESARROLLO (para explicarlo, no se proyecta):</a:t>
+            </a:r>
+          </a:p>
+          <a:p/>
+          <a:p>
+            <a:r>
+              <a:t>La escalabilidad es la capacidad de un sistema de sostener mas carga agregando recursos, y la primera precision importante es que no es lo mismo que rendimiento.</a:t>
+            </a:r>
+          </a:p>
+          <a:p/>
+          <a:p>
+            <a:r>
+              <a:t>La escalabilidad pregunta que pasa cuando la carga se multiplica: si al duplicar los recursos el sistema atiende cerca del doble de trabajo, escala bien; si atiende un 20 por ciento mas, escala mal, y ninguna cantidad de dinero lo va a arreglar.</a:t>
+            </a:r>
+          </a:p>
+          <a:p/>
+          <a:p>
+            <a:r>
+              <a:t>NOTAS:</a:t>
+            </a:r>
+          </a:p>
+          <a:p/>
+          <a:p>
+            <a:r>
               <a:t>Un sistema puede ser rapido y no escalar, y puede escalar y ser lento.</a:t>
             </a:r>
           </a:p>
@@ -609,6 +630,48 @@
           <a:lstStyle/>
           <a:p>
             <a:r>
+              <a:t>DESARROLLO (para explicarlo, no se proyecta):</a:t>
+            </a:r>
+          </a:p>
+          <a:p/>
+          <a:p>
+            <a:r>
+              <a:t>Escalar verticalmente, o hacia arriba, es darle mas recursos a la MISMA maquina: mas CPU, mas memoria, disco mas rapido.</a:t>
+            </a:r>
+          </a:p>
+          <a:p/>
+          <a:p>
+            <a:r>
+              <a:t>Es la opcion simple porque no exige cambiar el codigo, y tiene tres limites reales: existe un techo fisico</a:t>
+            </a:r>
+          </a:p>
+          <a:p/>
+          <a:p>
+            <a:r>
+              <a:t>Porque la instancia mas grande disponible se acaba en algun punto; el precio crece peor que linealmente, ya que las instancias grandes cuestan mas por unidad de capacidad</a:t>
+            </a:r>
+          </a:p>
+          <a:p/>
+          <a:p>
+            <a:r>
+              <a:t>Y el cambio suele requerir reiniciar el servicio, lo que implica una ventana de indisponibilidad del orden de 30 segundos a 2 minutos.</a:t>
+            </a:r>
+          </a:p>
+          <a:p/>
+          <a:p>
+            <a:r>
+              <a:t>Su precio es un requisito de diseno no negociable: la aplicacion tiene que poder correr en varias copias sin pisarse.</a:t>
+            </a:r>
+          </a:p>
+          <a:p/>
+          <a:p>
+            <a:r>
+              <a:t>NOTAS:</a:t>
+            </a:r>
+          </a:p>
+          <a:p/>
+          <a:p>
+            <a:r>
               <a:t>Ademas una sola maquina grande sigue siendo un unico punto de falla.</a:t>
             </a:r>
           </a:p>
@@ -697,6 +760,42 @@
           <a:lstStyle/>
           <a:p>
             <a:r>
+              <a:t>DESARROLLO (para explicarlo, no se proyecta):</a:t>
+            </a:r>
+          </a:p>
+          <a:p/>
+          <a:p>
+            <a:r>
+              <a:t>Ese requisito se llama ausencia de estado, o statelessness, y es donde mas estudiantes fallan.</a:t>
+            </a:r>
+          </a:p>
+          <a:p/>
+          <a:p>
+            <a:r>
+              <a:t>El sintoma en CloudLite es facil de narrar: si la API guarda la sesion en un diccionario en memoria de la instancia que atendio el login</a:t>
+            </a:r>
+          </a:p>
+          <a:p/>
+          <a:p>
+            <a:r>
+              <a:t>Y el balanceador manda la siguiente peticion del mismo usuario a la segunda instancia, esa instancia no lo conoce y lo expulsa; el usuario percibe que la aplicacion lo saca al azar.</a:t>
+            </a:r>
+          </a:p>
+          <a:p/>
+          <a:p>
+            <a:r>
+              <a:t>La solucion arquitectonica es sacar el estado del proceso: guardar la sesion en un almacen compartido o usar un token firmado que el cliente presenta en cada peticion.</a:t>
+            </a:r>
+          </a:p>
+          <a:p/>
+          <a:p>
+            <a:r>
+              <a:t>NOTAS:</a:t>
+            </a:r>
+          </a:p>
+          <a:p/>
+          <a:p>
+            <a:r>
               <a:t>Un servicio sin estado no guarda en la memoria de su propio proceso ninguna informacion que necesite en la siguiente peticion; todo lo que deba persistir vive en un almacen compartido, sea la base de datos, una cache comun o el token que trae el cliente.</a:t>
             </a:r>
           </a:p>
@@ -779,13 +878,37 @@
           <a:lstStyle/>
           <a:p>
             <a:r>
-              <a:t>Cada numero se justifica.</a:t>
+              <a:t>TEXTO COMPLETO DE LA LÁMINA (se proyecta resumido):</a:t>
             </a:r>
           </a:p>
           <a:p/>
           <a:p>
             <a:r>
-              <a:t>(No se proyecta) Y el maximo es la pieza mas olvidada y la mas importante: es el techo de costo decidido en la Clase 10, y sin el, un error de programacion o un ataque puede escalar la factura sin limite; hay casos documentados de facturas de miles de dolares generadas en horas por autoescalado sin tope.</a:t>
+              <a:t>Horizontal: más réplicas del API. Vertical: más CPU/RAM a un nodo.</a:t>
+            </a:r>
+          </a:p>
+          <a:p/>
+          <a:p>
+            <a:r>
+              <a:t>Datos: escala distinta (read replicas conceptuales / partición — solo si aplica).</a:t>
+            </a:r>
+          </a:p>
+          <a:p/>
+          <a:p>
+            <a:r>
+              <a:t>Triggers: RPS, latencia p95, profundidad de cola, CPU.</a:t>
+            </a:r>
+          </a:p>
+          <a:p/>
+          <a:p>
+            <a:r>
+              <a:t>Escalar en horizontal exige una API sin estado: la sesión vive en un token o en un almacén compartido, no en la memoria de una instancia.</a:t>
+            </a:r>
+          </a:p>
+          <a:p/>
+          <a:p>
+            <a:r>
+              <a:t>Ejemplo CloudLite: la API escala de 2 a 6 réplicas; la base de datos no escala igual y suele ser el límite.</a:t>
             </a:r>
           </a:p>
         </p:txBody>
@@ -855,13 +978,79 @@
           <a:lstStyle/>
           <a:p>
             <a:r>
-              <a:t>(No se proyecta) Sume el periodo de evaluacion y el sistema reacciona entre 5 y 10 minutos despues de que empezo el problema, asi que un pico subito del tipo que la prueba de spike de la Clase 12 simula ocurre y termina antes de que llegue la ayuda.</a:t>
+              <a:t>DESARROLLO (para explicarlo, no se proyecta):</a:t>
             </a:r>
           </a:p>
           <a:p/>
           <a:p>
             <a:r>
-              <a:t>(No se proyecta) Aqui reaparece la Clase 3: una imagen slim arranca mas rapido que una de un gigabyte, asi que adelgazar la imagen no es solo ahorro de costo, es tiempo de reaccion.</a:t>
+              <a:t>El autoescalado es la automatizacion del escalado horizontal y consta de cinco piezas: una metrica que se observa, un umbral que dispara la accion</a:t>
+            </a:r>
+          </a:p>
+          <a:p/>
+          <a:p>
+            <a:r>
+              <a:t>Un periodo de evaluacion durante el cual el umbral debe sostenerse, un enfriamiento o cooldown que impide actuar de nuevo de inmediato, y un rango con minimo y maximo de instancias.</a:t>
+            </a:r>
+          </a:p>
+          <a:p/>
+          <a:p>
+            <a:r>
+              <a:t>Una politica completa para CloudLite se lee asi: metrica CPU promedio del grupo de instancias de la API, umbral 70 por ciento sostenido durante 5 minutos, accion agregar una instancia, cooldown de 5 minutos, minimo 2 y maximo 6.</a:t>
+            </a:r>
+          </a:p>
+          <a:p/>
+          <a:p>
+            <a:r>
+              <a:t>El 70 por ciento deja holgura para el pico que llega mientras la instancia nueva arranca.</a:t>
+            </a:r>
+          </a:p>
+          <a:p/>
+          <a:p>
+            <a:r>
+              <a:t>Los 5 minutos evitan reaccionar a un ruido de 20 segundos.</a:t>
+            </a:r>
+          </a:p>
+          <a:p/>
+          <a:p>
+            <a:r>
+              <a:t>El minimo es 2 y no 1 porque con una sola instancia no hay tolerancia a fallas ni despliegue sin caida.</a:t>
+            </a:r>
+          </a:p>
+          <a:p/>
+          <a:p>
+            <a:r>
+              <a:t>Falta una simetria que casi nadie escribe: la politica de reduccion.</a:t>
+            </a:r>
+          </a:p>
+          <a:p/>
+          <a:p>
+            <a:r>
+              <a:t>Si se escala hacia afuera al 70 por ciento no se puede escalar hacia adentro tambien al 70, porque el sistema oscilaria agregando y quitando instancias sin parar, fenomeno llamado flapping.</a:t>
+            </a:r>
+          </a:p>
+          <a:p/>
+          <a:p>
+            <a:r>
+              <a:t>La convencion es usar umbrales asimetricos, por ejemplo salir al 70 y entrar al 30, y hacer la reduccion mas lenta que la expansion, porque equivocarse agregando cuesta dinero y equivocarse quitando cuesta una caida.</a:t>
+            </a:r>
+          </a:p>
+          <a:p/>
+          <a:p>
+            <a:r>
+              <a:t>NOTAS:</a:t>
+            </a:r>
+          </a:p>
+          <a:p/>
+          <a:p>
+            <a:r>
+              <a:t>Cada numero se justifica.</a:t>
+            </a:r>
+          </a:p>
+          <a:p/>
+          <a:p>
+            <a:r>
+              <a:t>(No se proyecta) Y el maximo es la pieza mas olvidada y la mas importante: es el techo de costo decidido en la Clase 10, y sin el, un error de programacion o un ataque puede escalar la factura sin limite; hay casos documentados de facturas de miles de dolares generadas en horas por autoescalado sin tope.</a:t>
             </a:r>
           </a:p>
         </p:txBody>
@@ -931,19 +1120,49 @@
           <a:lstStyle/>
           <a:p>
             <a:r>
-              <a:t>(No se proyecta) Metricas mejores para ese caso son las peticiones por segundo por instancia, que se deriva del calculo hecho en la Clase 12, la latencia p95 del propio servicio, o la longitud de la cola pendiente.</a:t>
+              <a:t>DESARROLLO (para explicarlo, no se proyecta):</a:t>
             </a:r>
           </a:p>
           <a:p/>
           <a:p>
             <a:r>
-              <a:t>(No se proyecta) Regla de bolsillo: la metrica correcta es la que mide el recurso que se agota primero, es decir el cuello de botella identificado en la clase anterior.</a:t>
+              <a:t>Hay un limite fisico del autoescalado que desarma la idea de que es magia: la instancia nueva no aparece al instante.</a:t>
             </a:r>
           </a:p>
           <a:p/>
           <a:p>
             <a:r>
-              <a:t>(No se proyecta) De ahi que el entregable de hoy no se pueda hacer bien si el de la Clase 12 quedo vacio.</a:t>
+              <a:t>Un contenedor liviano tarda del orden de 10 a 60 segundos entre que se decide crearlo y que recibe trafico util, contando descarga de imagen</a:t>
+            </a:r>
+          </a:p>
+          <a:p/>
+          <a:p>
+            <a:r>
+              <a:t>Arranque del proceso, conexion a la base de datos y aprobacion del chequeo de salud; una maquina virtual completa puede tardar de 2 a 5 minutos.</a:t>
+            </a:r>
+          </a:p>
+          <a:p/>
+          <a:p>
+            <a:r>
+              <a:t>Las respuestas correctas son tres y ninguna es "poner mas autoescalado": mantener holgura permanente por encima de la demanda habitual</a:t>
+            </a:r>
+          </a:p>
+          <a:p/>
+          <a:p>
+            <a:r>
+              <a:t>Poner una cola delante para absorber la rafaga y procesarla al ritmo que el sistema aguante, o degradar con gracia devolviendo una version reducida de la respuesta.</a:t>
+            </a:r>
+          </a:p>
+          <a:p/>
+          <a:p>
+            <a:r>
+              <a:t>(No se proyecta) Sume el periodo de evaluacion y el sistema reacciona entre 5 y 10 minutos despues de que empezo el problema, asi que un pico subito del tipo que la prueba de spike de la Clase 12 simula ocurre y termina antes de que llegue la ayuda.</a:t>
+            </a:r>
+          </a:p>
+          <a:p/>
+          <a:p>
+            <a:r>
+              <a:t>(No se proyecta) Aqui reaparece la Clase 3: una imagen slim arranca mas rapido que una de un gigabyte, asi que adelgazar la imagen no es solo ahorro de costo, es tiempo de reaccion.</a:t>
             </a:r>
           </a:p>
         </p:txBody>
@@ -1013,6 +1232,172 @@
           <a:lstStyle/>
           <a:p>
             <a:r>
+              <a:t>DESARROLLO (para explicarlo, no se proyecta):</a:t>
+            </a:r>
+          </a:p>
+          <a:p/>
+          <a:p>
+            <a:r>
+              <a:t>Elegir bien la metrica es la decision mas fina del tema, y el ejemplo de CloudLite es contundente.</a:t>
+            </a:r>
+          </a:p>
+          <a:p/>
+          <a:p>
+            <a:r>
+              <a:t>La CPU es la metrica por defecto y es la equivocada para la mayoria de las APIs, porque una API que sobre todo espera respuestas de la base de datos esta limitada por entrada y salida</a:t>
+            </a:r>
+          </a:p>
+          <a:p/>
+          <a:p>
+            <a:r>
+              <a:t>No por procesador: cuando la latencia se dispara a 3 segundos porque el pool de conexiones esta agotado, la CPU puede seguir marcando un tranquilo 20 por ciento, el umbral del 70 nunca se cruza y el autoescalado no hace nada mientras los usuarios sufren.</a:t>
+            </a:r>
+          </a:p>
+          <a:p/>
+          <a:p>
+            <a:r>
+              <a:t>Para el componente de notificaciones de CloudLite la metrica natural es el numero de mensajes esperando en la cola, no la CPU del worker: si hay 500 mensajes acumulados hay que agregar workers, y da igual cuanta CPU usen.</a:t>
+            </a:r>
+          </a:p>
+          <a:p/>
+          <a:p>
+            <a:r>
+              <a:t>(No se proyecta) Metricas mejores para ese caso son las peticiones por segundo por instancia, que se deriva del calculo hecho en la Clase 12, la latencia p95 del propio servicio, o la longitud de la cola pendiente.</a:t>
+            </a:r>
+          </a:p>
+          <a:p/>
+          <a:p>
+            <a:r>
+              <a:t>(No se proyecta) Regla de bolsillo: la metrica correcta es la que mide el recurso que se agota primero, es decir el cuello de botella identificado en la clase anterior.</a:t>
+            </a:r>
+          </a:p>
+          <a:p/>
+          <a:p>
+            <a:r>
+              <a:t>(No se proyecta) De ahi que el entregable de hoy no se pueda hacer bien si el de la Clase 12 quedo vacio.</a:t>
+            </a:r>
+          </a:p>
+        </p:txBody>
+      </p:sp>
+      <p:sp>
+        <p:nvSpPr>
+          <p:cNvPr id="4" name="Slide Number Placeholder 3"/>
+          <p:cNvSpPr>
+            <a:spLocks noGrp="1"/>
+          </p:cNvSpPr>
+          <p:nvPr>
+            <p:ph type="sldNum" idx="5" sz="quarter"/>
+          </p:nvPr>
+        </p:nvSpPr>
+        <p:spPr/>
+      </p:sp>
+    </p:spTree>
+  </p:cSld>
+  <p:clrMapOvr>
+    <a:masterClrMapping/>
+  </p:clrMapOvr>
+</p:notes>
+</file>
+
+<file path=ppt/notesSlides/notesSlide8.xml><?xml version="1.0" encoding="utf-8"?>
+<p:notes xmlns:a="http://schemas.openxmlformats.org/drawingml/2006/main" xmlns:p="http://schemas.openxmlformats.org/presentationml/2006/main" xmlns:r="http://schemas.openxmlformats.org/officeDocument/2006/relationships">
+  <p:cSld>
+    <p:spTree>
+      <p:nvGrpSpPr>
+        <p:cNvPr id="1" name=""/>
+        <p:cNvGrpSpPr/>
+        <p:nvPr/>
+      </p:nvGrpSpPr>
+      <p:grpSpPr>
+        <a:xfrm>
+          <a:off x="0" y="0"/>
+          <a:ext cx="0" cy="0"/>
+          <a:chOff x="0" y="0"/>
+          <a:chExt cx="0" cy="0"/>
+        </a:xfrm>
+      </p:grpSpPr>
+      <p:sp>
+        <p:nvSpPr>
+          <p:cNvPr id="2" name="Slide Image Placeholder 1"/>
+          <p:cNvSpPr>
+            <a:spLocks noGrp="1"/>
+          </p:cNvSpPr>
+          <p:nvPr>
+            <p:ph type="sldImg" idx="2"/>
+          </p:nvPr>
+        </p:nvSpPr>
+        <p:spPr/>
+      </p:sp>
+      <p:sp>
+        <p:nvSpPr>
+          <p:cNvPr id="3" name="Notes Placeholder 2"/>
+          <p:cNvSpPr>
+            <a:spLocks noGrp="1"/>
+          </p:cNvSpPr>
+          <p:nvPr>
+            <p:ph type="body" idx="3" sz="quarter"/>
+          </p:nvPr>
+        </p:nvSpPr>
+        <p:spPr/>
+        <p:txBody>
+          <a:bodyPr/>
+          <a:lstStyle/>
+          <a:p>
+            <a:r>
+              <a:t>DESARROLLO (para explicarlo, no se proyecta):</a:t>
+            </a:r>
+          </a:p>
+          <a:p/>
+          <a:p>
+            <a:r>
+              <a:t>La capa de datos es el caso central: agregar instancias de API es casi gratis conceptualmente, pero una base de datos relacional que debe mantener consistencia tiene un unico escritor, y ese escritor no se multiplica sin cambiar el modelo.</a:t>
+            </a:r>
+          </a:p>
+          <a:p/>
+          <a:p>
+            <a:r>
+              <a:t>Se pueden agregar replicas de lectura, y ahi entra un concepto a definir: el retraso de replicacion, esos milisegundos o segundos en que la replica todavia no tiene el ultimo cambio</a:t>
+            </a:r>
+          </a:p>
+          <a:p/>
+          <a:p>
+            <a:r>
+              <a:t>Que produce el sintoma de que el usuario guarda un dato, la pagina lo relee de una replica y el dato no aparece.</a:t>
+            </a:r>
+          </a:p>
+          <a:p/>
+          <a:p>
+            <a:r>
+              <a:t>Las alternativas mas agresivas, particionar los datos por clave o cambiar a un modelo sin esquema fijo, son decisiones de arquitectura mayores y estan fuera del alcance de CloudLite v1</a:t>
+            </a:r>
+          </a:p>
+          <a:p/>
+          <a:p>
+            <a:r>
+              <a:t>Decirlo explicitamente en el informe es una respuesta correcta, no una debilidad.</a:t>
+            </a:r>
+          </a:p>
+          <a:p/>
+          <a:p>
+            <a:r>
+              <a:t>Hay un detalle aritmetico que es la mejor leccion del dia: si cada instancia de la API abre un pool de 20 conexiones y el autoescalado sube a 6 instancias</a:t>
+            </a:r>
+          </a:p>
+          <a:p/>
+          <a:p>
+            <a:r>
+              <a:t>El sistema pide 120 conexiones, mientras que una base de datos gestionada pequena suele admitir del orden de 100; el resultado es que escalar la API tumba la base de datos.</a:t>
+            </a:r>
+          </a:p>
+          <a:p/>
+          <a:p>
+            <a:r>
+              <a:t>NOTAS:</a:t>
+            </a:r>
+          </a:p>
+          <a:p/>
+          <a:p>
+            <a:r>
               <a:t>Declarar lo que NO escala separa un diseno serio de una lista de deseos.</a:t>
             </a:r>
           </a:p>
@@ -1025,7 +1410,149 @@
           <a:p/>
           <a:p>
             <a:r>
+              <a:t>PREGUNTAS FRECUENTES Y CIERRE CONCEPTUAL ()</a:t>
+            </a:r>
+          </a:p>
+          <a:p/>
+          <a:p>
+            <a:r>
+              <a:t>La primera es por que documentar limites si el autoescalado es automatico; la respuesta es que automatico significa que ejecuta la politica que alguien escribio, no que decide bien: sin maximo escala el costo</a:t>
+            </a:r>
+          </a:p>
+          <a:p/>
+          <a:p>
+            <a:r>
+              <a:t>Sin minimo pierde disponibilidad, con la metrica equivocada no reacciona y con umbrales simetricos oscila; el automatismo amplifica la calidad de la decision humana en ambos sentidos.</a:t>
+            </a:r>
+          </a:p>
+          <a:p/>
+          <a:p>
+            <a:r>
+              <a:t>La segunda es si no seria mejor serverless, que "escala infinito"; la respuesta reconoce la ventaja real, que escala por peticion y no cobra en reposo</a:t>
+            </a:r>
+          </a:p>
+          <a:p/>
+          <a:p>
+            <a:r>
+              <a:t>Y nombra los tres costos: el arranque en frio, esa demora extra de cientos de milisegundos a segundos cuando una funcion se invoca despues de estar inactiva; el agotamiento de conexiones</a:t>
+            </a:r>
+          </a:p>
+          <a:p/>
+          <a:p>
+            <a:r>
+              <a:t>Porque mil funciones concurrentes matan a la base de datos igual que mil contenedores; y el costo por invocacion, que a volumen alto puede superar el de instancias fijas.</a:t>
+            </a:r>
+          </a:p>
+          <a:p/>
+          <a:p>
+            <a:r>
+              <a:t>Una regla de bolsillo: serverless sirve para cargas intermitentes y cortas; para trafico sostenido, una instancia fija suele ser mas barata y predecible.</a:t>
+            </a:r>
+          </a:p>
+          <a:p/>
+          <a:p>
+            <a:r>
               <a:t>(No se proyecta) Tambien conviene enumerar otras piezas que no escalan por replicacion: los limites de terceros, como un proveedor de correo que acepta 100 envios por minuto y rechaza el exceso, de modo que diez workers no envian diez veces mas rapido sino que generan diez veces mas errores; los sistemas de archivos compartidos; y las tareas programadas de tipo singleton, que si corren en seis instancias hacen el mismo trabajo seis veces y pueden duplicar cobros o correos.</a:t>
+            </a:r>
+          </a:p>
+        </p:txBody>
+      </p:sp>
+      <p:sp>
+        <p:nvSpPr>
+          <p:cNvPr id="4" name="Slide Number Placeholder 3"/>
+          <p:cNvSpPr>
+            <a:spLocks noGrp="1"/>
+          </p:cNvSpPr>
+          <p:nvPr>
+            <p:ph type="sldNum" idx="5" sz="quarter"/>
+          </p:nvPr>
+        </p:nvSpPr>
+        <p:spPr/>
+      </p:sp>
+    </p:spTree>
+  </p:cSld>
+  <p:clrMapOvr>
+    <a:masterClrMapping/>
+  </p:clrMapOvr>
+</p:notes>
+</file>
+
+<file path=ppt/notesSlides/notesSlide9.xml><?xml version="1.0" encoding="utf-8"?>
+<p:notes xmlns:a="http://schemas.openxmlformats.org/drawingml/2006/main" xmlns:p="http://schemas.openxmlformats.org/presentationml/2006/main" xmlns:r="http://schemas.openxmlformats.org/officeDocument/2006/relationships">
+  <p:cSld>
+    <p:spTree>
+      <p:nvGrpSpPr>
+        <p:cNvPr id="1" name=""/>
+        <p:cNvGrpSpPr/>
+        <p:nvPr/>
+      </p:nvGrpSpPr>
+      <p:grpSpPr>
+        <a:xfrm>
+          <a:off x="0" y="0"/>
+          <a:ext cx="0" cy="0"/>
+          <a:chOff x="0" y="0"/>
+          <a:chExt cx="0" cy="0"/>
+        </a:xfrm>
+      </p:grpSpPr>
+      <p:sp>
+        <p:nvSpPr>
+          <p:cNvPr id="2" name="Slide Image Placeholder 1"/>
+          <p:cNvSpPr>
+            <a:spLocks noGrp="1"/>
+          </p:cNvSpPr>
+          <p:nvPr>
+            <p:ph type="sldImg" idx="2"/>
+          </p:nvPr>
+        </p:nvSpPr>
+        <p:spPr/>
+      </p:sp>
+      <p:sp>
+        <p:nvSpPr>
+          <p:cNvPr id="3" name="Notes Placeholder 2"/>
+          <p:cNvSpPr>
+            <a:spLocks noGrp="1"/>
+          </p:cNvSpPr>
+          <p:nvPr>
+            <p:ph type="body" idx="3" sz="quarter"/>
+          </p:nvPr>
+        </p:nvSpPr>
+        <p:spPr/>
+        <p:txBody>
+          <a:bodyPr/>
+          <a:lstStyle/>
+          <a:p>
+            <a:r>
+              <a:t>TEXTO COMPLETO DE LA LÁMINA (se proyecta resumido):</a:t>
+            </a:r>
+          </a:p>
+          <a:p/>
+          <a:p>
+            <a:r>
+              <a:t>max replicas · min replicas · cooldown — se definen aunque sean hipotéticos.</a:t>
+            </a:r>
+          </a:p>
+          <a:p/>
+          <a:p>
+            <a:r>
+              <a:t>Escalar mal = costo (enlace con Clase 10).</a:t>
+            </a:r>
+          </a:p>
+          <a:p/>
+          <a:p>
+            <a:r>
+              <a:t>min = capacidad base siempre encendida, y su costo fijo · max = techo de gasto y de conexiones a la base.</a:t>
+            </a:r>
+          </a:p>
+          <a:p/>
+          <a:p>
+            <a:r>
+              <a:t>Cooldown = espera tras escalar (por ejemplo 5 minutos) para no subir y bajar en ciclos.</a:t>
+            </a:r>
+          </a:p>
+          <a:p/>
+          <a:p>
+            <a:r>
+              <a:t>Error común: max sin límite; un pico o un ataque se convierte en factura.</a:t>
             </a:r>
           </a:p>
         </p:txBody>
@@ -4500,21 +5027,271 @@
                 </a:solidFill>
                 <a:latin typeface="Calibri"/>
               </a:rPr>
-              <a:t>Las cinco piezas del autoescalado (2/2)</a:t>
-            </a:r>
-          </a:p>
-        </p:txBody>
-      </p:sp>
-      <p:sp>
-        <p:nvSpPr>
-          <p:cNvPr id="5" name="TextBox 4"/>
+              <a:t>La regla de autoescalado, escrita como configuracion</a:t>
+            </a:r>
+          </a:p>
+        </p:txBody>
+      </p:sp>
+      <p:sp>
+        <p:nvSpPr>
+          <p:cNvPr id="5" name="Rounded Rectangle 4"/>
+          <p:cNvSpPr/>
+          <p:nvPr/>
+        </p:nvSpPr>
+        <p:spPr>
+          <a:xfrm>
+            <a:off x="457200" y="1261872"/>
+            <a:ext cx="11277295" cy="4917043"/>
+          </a:xfrm>
+          <a:prstGeom prst="roundRect">
+            <a:avLst>
+              <a:gd name="adj" fmla="val 4000"/>
+            </a:avLst>
+          </a:prstGeom>
+          <a:solidFill>
+            <a:srgbClr val="1E1E1E"/>
+          </a:solidFill>
+          <a:ln>
+            <a:noFill/>
+          </a:ln>
+        </p:spPr>
+        <p:style>
+          <a:lnRef idx="1">
+            <a:schemeClr val="accent1"/>
+          </a:lnRef>
+          <a:fillRef idx="3">
+            <a:schemeClr val="accent1"/>
+          </a:fillRef>
+          <a:effectRef idx="2">
+            <a:schemeClr val="accent1"/>
+          </a:effectRef>
+          <a:fontRef idx="minor">
+            <a:schemeClr val="lt1"/>
+          </a:fontRef>
+        </p:style>
+        <p:txBody>
+          <a:bodyPr rtlCol="0" anchor="ctr"/>
+          <a:lstStyle/>
+          <a:p>
+            <a:pPr algn="ctr"/>
+          </a:p>
+        </p:txBody>
+      </p:sp>
+      <p:sp>
+        <p:nvSpPr>
+          <p:cNvPr id="6" name="Rectangle 5"/>
+          <p:cNvSpPr/>
+          <p:nvPr/>
+        </p:nvSpPr>
+        <p:spPr>
+          <a:xfrm>
+            <a:off x="457200" y="1261872"/>
+            <a:ext cx="11277295" cy="365760"/>
+          </a:xfrm>
+          <a:prstGeom prst="rect">
+            <a:avLst/>
+          </a:prstGeom>
+          <a:solidFill>
+            <a:srgbClr val="2D2D30"/>
+          </a:solidFill>
+          <a:ln>
+            <a:noFill/>
+          </a:ln>
+        </p:spPr>
+        <p:style>
+          <a:lnRef idx="1">
+            <a:schemeClr val="accent1"/>
+          </a:lnRef>
+          <a:fillRef idx="3">
+            <a:schemeClr val="accent1"/>
+          </a:fillRef>
+          <a:effectRef idx="2">
+            <a:schemeClr val="accent1"/>
+          </a:effectRef>
+          <a:fontRef idx="minor">
+            <a:schemeClr val="lt1"/>
+          </a:fontRef>
+        </p:style>
+        <p:txBody>
+          <a:bodyPr rtlCol="0" anchor="ctr"/>
+          <a:lstStyle/>
+          <a:p>
+            <a:pPr algn="ctr"/>
+          </a:p>
+        </p:txBody>
+      </p:sp>
+      <p:sp>
+        <p:nvSpPr>
+          <p:cNvPr id="7" name="Oval 6"/>
+          <p:cNvSpPr/>
+          <p:nvPr/>
+        </p:nvSpPr>
+        <p:spPr>
+          <a:xfrm>
+            <a:off x="658368" y="1380743"/>
+            <a:ext cx="128016" cy="128016"/>
+          </a:xfrm>
+          <a:prstGeom prst="ellipse">
+            <a:avLst/>
+          </a:prstGeom>
+          <a:solidFill>
+            <a:srgbClr val="FF5F56"/>
+          </a:solidFill>
+          <a:ln>
+            <a:noFill/>
+          </a:ln>
+        </p:spPr>
+        <p:style>
+          <a:lnRef idx="1">
+            <a:schemeClr val="accent1"/>
+          </a:lnRef>
+          <a:fillRef idx="3">
+            <a:schemeClr val="accent1"/>
+          </a:fillRef>
+          <a:effectRef idx="2">
+            <a:schemeClr val="accent1"/>
+          </a:effectRef>
+          <a:fontRef idx="minor">
+            <a:schemeClr val="lt1"/>
+          </a:fontRef>
+        </p:style>
+        <p:txBody>
+          <a:bodyPr rtlCol="0" anchor="ctr"/>
+          <a:lstStyle/>
+          <a:p>
+            <a:pPr algn="ctr"/>
+          </a:p>
+        </p:txBody>
+      </p:sp>
+      <p:sp>
+        <p:nvSpPr>
+          <p:cNvPr id="8" name="Oval 7"/>
+          <p:cNvSpPr/>
+          <p:nvPr/>
+        </p:nvSpPr>
+        <p:spPr>
+          <a:xfrm>
+            <a:off x="877824" y="1380743"/>
+            <a:ext cx="128016" cy="128016"/>
+          </a:xfrm>
+          <a:prstGeom prst="ellipse">
+            <a:avLst/>
+          </a:prstGeom>
+          <a:solidFill>
+            <a:srgbClr val="FFBD2E"/>
+          </a:solidFill>
+          <a:ln>
+            <a:noFill/>
+          </a:ln>
+        </p:spPr>
+        <p:style>
+          <a:lnRef idx="1">
+            <a:schemeClr val="accent1"/>
+          </a:lnRef>
+          <a:fillRef idx="3">
+            <a:schemeClr val="accent1"/>
+          </a:fillRef>
+          <a:effectRef idx="2">
+            <a:schemeClr val="accent1"/>
+          </a:effectRef>
+          <a:fontRef idx="minor">
+            <a:schemeClr val="lt1"/>
+          </a:fontRef>
+        </p:style>
+        <p:txBody>
+          <a:bodyPr rtlCol="0" anchor="ctr"/>
+          <a:lstStyle/>
+          <a:p>
+            <a:pPr algn="ctr"/>
+          </a:p>
+        </p:txBody>
+      </p:sp>
+      <p:sp>
+        <p:nvSpPr>
+          <p:cNvPr id="9" name="Oval 8"/>
+          <p:cNvSpPr/>
+          <p:nvPr/>
+        </p:nvSpPr>
+        <p:spPr>
+          <a:xfrm>
+            <a:off x="1097280" y="1380743"/>
+            <a:ext cx="128016" cy="128016"/>
+          </a:xfrm>
+          <a:prstGeom prst="ellipse">
+            <a:avLst/>
+          </a:prstGeom>
+          <a:solidFill>
+            <a:srgbClr val="27C93F"/>
+          </a:solidFill>
+          <a:ln>
+            <a:noFill/>
+          </a:ln>
+        </p:spPr>
+        <p:style>
+          <a:lnRef idx="1">
+            <a:schemeClr val="accent1"/>
+          </a:lnRef>
+          <a:fillRef idx="3">
+            <a:schemeClr val="accent1"/>
+          </a:fillRef>
+          <a:effectRef idx="2">
+            <a:schemeClr val="accent1"/>
+          </a:effectRef>
+          <a:fontRef idx="minor">
+            <a:schemeClr val="lt1"/>
+          </a:fontRef>
+        </p:style>
+        <p:txBody>
+          <a:bodyPr rtlCol="0" anchor="ctr"/>
+          <a:lstStyle/>
+          <a:p>
+            <a:pPr algn="ctr"/>
+          </a:p>
+        </p:txBody>
+      </p:sp>
+      <p:sp>
+        <p:nvSpPr>
+          <p:cNvPr id="10" name="TextBox 9"/>
           <p:cNvSpPr txBox="1"/>
           <p:nvPr/>
         </p:nvSpPr>
         <p:spPr>
           <a:xfrm>
-            <a:off x="457200" y="1170432"/>
-            <a:ext cx="11277295" cy="5230368"/>
+            <a:off x="1371600" y="1298448"/>
+            <a:ext cx="10180015" cy="292608"/>
+          </a:xfrm>
+          <a:prstGeom prst="rect">
+            <a:avLst/>
+          </a:prstGeom>
+          <a:noFill/>
+        </p:spPr>
+        <p:txBody>
+          <a:bodyPr wrap="square" anchor="ctr"/>
+          <a:lstStyle/>
+          <a:p>
+            <a:pPr algn="r"/>
+            <a:r>
+              <a:rPr sz="1100" b="1" i="0">
+                <a:solidFill>
+                  <a:srgbClr val="BBBBBB"/>
+                </a:solidFill>
+                <a:latin typeface="Calibri"/>
+              </a:rPr>
+              <a:t>YAML</a:t>
+            </a:r>
+          </a:p>
+        </p:txBody>
+      </p:sp>
+      <p:sp>
+        <p:nvSpPr>
+          <p:cNvPr id="11" name="TextBox 10"/>
+          <p:cNvSpPr txBox="1"/>
+          <p:nvPr/>
+        </p:nvSpPr>
+        <p:spPr>
+          <a:xfrm>
+            <a:off x="685800" y="1719072"/>
+            <a:ext cx="502920" cy="4322683"/>
           </a:xfrm>
           <a:prstGeom prst="rect">
             <a:avLst/>
@@ -4527,90 +5304,723 @@
           </a:bodyPr>
           <a:lstStyle/>
           <a:p>
+            <a:pPr algn="r">
+              <a:spcAft>
+                <a:spcPts val="428"/>
+              </a:spcAft>
+            </a:pPr>
+            <a:r>
+              <a:rPr sz="2000" i="0" b="0">
+                <a:solidFill>
+                  <a:srgbClr val="858585"/>
+                </a:solidFill>
+                <a:latin typeface="Consolas"/>
+              </a:rPr>
+              <a:t>1</a:t>
+            </a:r>
+          </a:p>
+          <a:p>
+            <a:pPr algn="r">
+              <a:spcAft>
+                <a:spcPts val="428"/>
+              </a:spcAft>
+            </a:pPr>
+            <a:r>
+              <a:rPr sz="2000" i="0" b="0">
+                <a:solidFill>
+                  <a:srgbClr val="858585"/>
+                </a:solidFill>
+                <a:latin typeface="Consolas"/>
+              </a:rPr>
+              <a:t>2</a:t>
+            </a:r>
+          </a:p>
+          <a:p>
+            <a:pPr algn="r">
+              <a:spcAft>
+                <a:spcPts val="428"/>
+              </a:spcAft>
+            </a:pPr>
+            <a:r>
+              <a:rPr sz="2000" i="0" b="0">
+                <a:solidFill>
+                  <a:srgbClr val="858585"/>
+                </a:solidFill>
+                <a:latin typeface="Consolas"/>
+              </a:rPr>
+              <a:t>3</a:t>
+            </a:r>
+          </a:p>
+          <a:p>
+            <a:pPr algn="r">
+              <a:spcAft>
+                <a:spcPts val="428"/>
+              </a:spcAft>
+            </a:pPr>
+            <a:r>
+              <a:rPr sz="2000" i="0" b="0">
+                <a:solidFill>
+                  <a:srgbClr val="858585"/>
+                </a:solidFill>
+                <a:latin typeface="Consolas"/>
+              </a:rPr>
+              <a:t>4</a:t>
+            </a:r>
+          </a:p>
+          <a:p>
+            <a:pPr algn="r">
+              <a:spcAft>
+                <a:spcPts val="428"/>
+              </a:spcAft>
+            </a:pPr>
+            <a:r>
+              <a:rPr sz="2000" i="0" b="0">
+                <a:solidFill>
+                  <a:srgbClr val="858585"/>
+                </a:solidFill>
+                <a:latin typeface="Consolas"/>
+              </a:rPr>
+              <a:t>5</a:t>
+            </a:r>
+          </a:p>
+          <a:p>
+            <a:pPr algn="r">
+              <a:spcAft>
+                <a:spcPts val="428"/>
+              </a:spcAft>
+            </a:pPr>
+            <a:r>
+              <a:rPr sz="2000" i="0" b="0">
+                <a:solidFill>
+                  <a:srgbClr val="858585"/>
+                </a:solidFill>
+                <a:latin typeface="Consolas"/>
+              </a:rPr>
+              <a:t>6</a:t>
+            </a:r>
+          </a:p>
+          <a:p>
+            <a:pPr algn="r">
+              <a:spcAft>
+                <a:spcPts val="428"/>
+              </a:spcAft>
+            </a:pPr>
+            <a:r>
+              <a:rPr sz="2000" i="0" b="0">
+                <a:solidFill>
+                  <a:srgbClr val="858585"/>
+                </a:solidFill>
+                <a:latin typeface="Consolas"/>
+              </a:rPr>
+              <a:t>7</a:t>
+            </a:r>
+          </a:p>
+          <a:p>
+            <a:pPr algn="r">
+              <a:spcAft>
+                <a:spcPts val="428"/>
+              </a:spcAft>
+            </a:pPr>
+            <a:r>
+              <a:rPr sz="2000" i="0" b="0">
+                <a:solidFill>
+                  <a:srgbClr val="858585"/>
+                </a:solidFill>
+                <a:latin typeface="Consolas"/>
+              </a:rPr>
+              <a:t>8</a:t>
+            </a:r>
+          </a:p>
+          <a:p>
+            <a:pPr algn="r">
+              <a:spcAft>
+                <a:spcPts val="428"/>
+              </a:spcAft>
+            </a:pPr>
+            <a:r>
+              <a:rPr sz="2000" i="0" b="0">
+                <a:solidFill>
+                  <a:srgbClr val="858585"/>
+                </a:solidFill>
+                <a:latin typeface="Consolas"/>
+              </a:rPr>
+              <a:t>9</a:t>
+            </a:r>
+          </a:p>
+          <a:p>
+            <a:pPr algn="r">
+              <a:spcAft>
+                <a:spcPts val="428"/>
+              </a:spcAft>
+            </a:pPr>
+            <a:r>
+              <a:rPr sz="2000" i="0" b="0">
+                <a:solidFill>
+                  <a:srgbClr val="858585"/>
+                </a:solidFill>
+                <a:latin typeface="Consolas"/>
+              </a:rPr>
+              <a:t>10</a:t>
+            </a:r>
+          </a:p>
+          <a:p>
+            <a:pPr algn="r">
+              <a:spcAft>
+                <a:spcPts val="428"/>
+              </a:spcAft>
+            </a:pPr>
+            <a:r>
+              <a:rPr sz="2000" i="0" b="0">
+                <a:solidFill>
+                  <a:srgbClr val="858585"/>
+                </a:solidFill>
+                <a:latin typeface="Consolas"/>
+              </a:rPr>
+              <a:t>11</a:t>
+            </a:r>
+          </a:p>
+          <a:p>
+            <a:pPr algn="r">
+              <a:spcAft>
+                <a:spcPts val="428"/>
+              </a:spcAft>
+            </a:pPr>
+            <a:r>
+              <a:rPr sz="2000" i="0" b="0">
+                <a:solidFill>
+                  <a:srgbClr val="858585"/>
+                </a:solidFill>
+                <a:latin typeface="Consolas"/>
+              </a:rPr>
+              <a:t>12</a:t>
+            </a:r>
+          </a:p>
+        </p:txBody>
+      </p:sp>
+      <p:sp>
+        <p:nvSpPr>
+          <p:cNvPr id="12" name="TextBox 11"/>
+          <p:cNvSpPr txBox="1"/>
+          <p:nvPr/>
+        </p:nvSpPr>
+        <p:spPr>
+          <a:xfrm>
+            <a:off x="1188720" y="1719072"/>
+            <a:ext cx="10271455" cy="4322683"/>
+          </a:xfrm>
+          <a:prstGeom prst="rect">
+            <a:avLst/>
+          </a:prstGeom>
+          <a:noFill/>
+        </p:spPr>
+        <p:txBody>
+          <a:bodyPr wrap="square">
+            <a:spAutoFit/>
+          </a:bodyPr>
+          <a:lstStyle/>
+          <a:p>
             <a:pPr>
               <a:spcAft>
-                <a:spcPts val="800"/>
+                <a:spcPts val="428"/>
               </a:spcAft>
             </a:pPr>
             <a:r>
-              <a:rPr sz="2000" b="0" i="0">
-                <a:solidFill>
-                  <a:srgbClr val="333333"/>
-                </a:solidFill>
-                <a:latin typeface="Calibri"/>
-              </a:rPr>
-              <a:t>–   Los 5 minutos evitan reaccionar a un ruido de 20 segundos.</a:t>
+              <a:rPr sz="2000" i="1" b="0">
+                <a:solidFill>
+                  <a:srgbClr val="6A9955"/>
+                </a:solidFill>
+                <a:latin typeface="Consolas"/>
+              </a:rPr>
+              <a:t># Lo que un autoescalador necesita para no oscilar:</a:t>
             </a:r>
           </a:p>
           <a:p>
             <a:pPr>
               <a:spcAft>
-                <a:spcPts val="800"/>
+                <a:spcPts val="428"/>
               </a:spcAft>
             </a:pPr>
             <a:r>
-              <a:rPr sz="2000" b="0" i="0">
-                <a:solidFill>
-                  <a:srgbClr val="333333"/>
-                </a:solidFill>
-                <a:latin typeface="Calibri"/>
-              </a:rPr>
-              <a:t>–   El minimo es 2 y no 1 porque con una sola instancia no hay tolerancia a fallas ni despliegue sin caida.</a:t>
+              <a:rPr sz="2000" i="0" b="0">
+                <a:solidFill>
+                  <a:srgbClr val="D4D4D4"/>
+                </a:solidFill>
+                <a:latin typeface="Consolas"/>
+              </a:rPr>
+              <a:t>autoescalado</a:t>
+            </a:r>
+            <a:r>
+              <a:rPr sz="2000" i="0" b="0">
+                <a:solidFill>
+                  <a:srgbClr val="D4D4D4"/>
+                </a:solidFill>
+                <a:latin typeface="Consolas"/>
+              </a:rPr>
+              <a:t>:</a:t>
             </a:r>
           </a:p>
           <a:p>
             <a:pPr>
               <a:spcAft>
-                <a:spcPts val="800"/>
+                <a:spcPts val="428"/>
               </a:spcAft>
             </a:pPr>
             <a:r>
-              <a:rPr sz="2000" b="0" i="0">
-                <a:solidFill>
-                  <a:srgbClr val="333333"/>
-                </a:solidFill>
-                <a:latin typeface="Calibri"/>
-              </a:rPr>
-              <a:t>–   Falta una simetria que casi nadie escribe: la politica de reduccion.</a:t>
+              <a:rPr sz="2000" i="0" b="0">
+                <a:solidFill>
+                  <a:srgbClr val="D4D4D4"/>
+                </a:solidFill>
+                <a:latin typeface="Consolas"/>
+              </a:rPr>
+              <a:t>  </a:t>
+            </a:r>
+            <a:r>
+              <a:rPr sz="2000" i="0" b="0">
+                <a:solidFill>
+                  <a:srgbClr val="D4D4D4"/>
+                </a:solidFill>
+                <a:latin typeface="Consolas"/>
+              </a:rPr>
+              <a:t>servicio</a:t>
+            </a:r>
+            <a:r>
+              <a:rPr sz="2000" i="0" b="0">
+                <a:solidFill>
+                  <a:srgbClr val="D4D4D4"/>
+                </a:solidFill>
+                <a:latin typeface="Consolas"/>
+              </a:rPr>
+              <a:t>: </a:t>
+            </a:r>
+            <a:r>
+              <a:rPr sz="2000" i="0" b="0">
+                <a:solidFill>
+                  <a:srgbClr val="D4D4D4"/>
+                </a:solidFill>
+                <a:latin typeface="Consolas"/>
+              </a:rPr>
+              <a:t>turnos</a:t>
+            </a:r>
+            <a:r>
+              <a:rPr sz="2000" i="0" b="0">
+                <a:solidFill>
+                  <a:srgbClr val="D4D4D4"/>
+                </a:solidFill>
+                <a:latin typeface="Consolas"/>
+              </a:rPr>
+              <a:t>-</a:t>
+            </a:r>
+            <a:r>
+              <a:rPr sz="2000" i="0" b="0">
+                <a:solidFill>
+                  <a:srgbClr val="D4D4D4"/>
+                </a:solidFill>
+                <a:latin typeface="Consolas"/>
+              </a:rPr>
+              <a:t>api</a:t>
             </a:r>
           </a:p>
           <a:p>
             <a:pPr>
               <a:spcAft>
-                <a:spcPts val="800"/>
+                <a:spcPts val="428"/>
               </a:spcAft>
             </a:pPr>
             <a:r>
-              <a:rPr sz="2000" b="0" i="0">
-                <a:solidFill>
-                  <a:srgbClr val="333333"/>
-                </a:solidFill>
-                <a:latin typeface="Calibri"/>
-              </a:rPr>
-              <a:t>–   Si se escala hacia afuera al 70 por ciento no se puede escalar hacia adentro tambien al 70, porque el sistema oscilaria agregando y quitando instancias sin parar, fenomeno llamado flapping.</a:t>
+              <a:rPr sz="2000" i="0" b="0">
+                <a:solidFill>
+                  <a:srgbClr val="D4D4D4"/>
+                </a:solidFill>
+                <a:latin typeface="Consolas"/>
+              </a:rPr>
+              <a:t>  </a:t>
+            </a:r>
+            <a:r>
+              <a:rPr sz="2000" i="0" b="0">
+                <a:solidFill>
+                  <a:srgbClr val="D4D4D4"/>
+                </a:solidFill>
+                <a:latin typeface="Consolas"/>
+              </a:rPr>
+              <a:t>minimo</a:t>
+            </a:r>
+            <a:r>
+              <a:rPr sz="2000" i="0" b="0">
+                <a:solidFill>
+                  <a:srgbClr val="D4D4D4"/>
+                </a:solidFill>
+                <a:latin typeface="Consolas"/>
+              </a:rPr>
+              <a:t>: </a:t>
+            </a:r>
+            <a:r>
+              <a:rPr sz="2000" i="0" b="0">
+                <a:solidFill>
+                  <a:srgbClr val="B5CEA8"/>
+                </a:solidFill>
+                <a:latin typeface="Consolas"/>
+              </a:rPr>
+              <a:t>2</a:t>
+            </a:r>
+            <a:r>
+              <a:rPr sz="2000" i="0" b="0">
+                <a:solidFill>
+                  <a:srgbClr val="D4D4D4"/>
+                </a:solidFill>
+                <a:latin typeface="Consolas"/>
+              </a:rPr>
+              <a:t>                       </a:t>
+            </a:r>
+            <a:r>
+              <a:rPr sz="2000" i="1" b="0">
+                <a:solidFill>
+                  <a:srgbClr val="6A9955"/>
+                </a:solidFill>
+                <a:latin typeface="Consolas"/>
+              </a:rPr>
+              <a:t># 1 no da tolerancia a fallo</a:t>
             </a:r>
           </a:p>
           <a:p>
             <a:pPr>
               <a:spcAft>
-                <a:spcPts val="800"/>
+                <a:spcPts val="428"/>
               </a:spcAft>
             </a:pPr>
             <a:r>
-              <a:rPr sz="2000" b="0" i="0">
-                <a:solidFill>
-                  <a:srgbClr val="333333"/>
-                </a:solidFill>
-                <a:latin typeface="Calibri"/>
-              </a:rPr>
-              <a:t>–   La convencion es usar umbrales asimetricos, por ejemplo salir al 70 y entrar al 30, y hacer la reduccion mas lenta que la expansion, porque equivocarse agregando cuesta dinero y equivocarse quitando cuesta una caida.</a:t>
-            </a:r>
-          </a:p>
-        </p:txBody>
-      </p:sp>
-      <p:sp>
-        <p:nvSpPr>
-          <p:cNvPr id="6" name="TextBox 5"/>
+              <a:rPr sz="2000" i="0" b="0">
+                <a:solidFill>
+                  <a:srgbClr val="D4D4D4"/>
+                </a:solidFill>
+                <a:latin typeface="Consolas"/>
+              </a:rPr>
+              <a:t>  </a:t>
+            </a:r>
+            <a:r>
+              <a:rPr sz="2000" i="0" b="0">
+                <a:solidFill>
+                  <a:srgbClr val="D4D4D4"/>
+                </a:solidFill>
+                <a:latin typeface="Consolas"/>
+              </a:rPr>
+              <a:t>maximo</a:t>
+            </a:r>
+            <a:r>
+              <a:rPr sz="2000" i="0" b="0">
+                <a:solidFill>
+                  <a:srgbClr val="D4D4D4"/>
+                </a:solidFill>
+                <a:latin typeface="Consolas"/>
+              </a:rPr>
+              <a:t>: </a:t>
+            </a:r>
+            <a:r>
+              <a:rPr sz="2000" i="0" b="0">
+                <a:solidFill>
+                  <a:srgbClr val="B5CEA8"/>
+                </a:solidFill>
+                <a:latin typeface="Consolas"/>
+              </a:rPr>
+              <a:t>6</a:t>
+            </a:r>
+            <a:r>
+              <a:rPr sz="2000" i="0" b="0">
+                <a:solidFill>
+                  <a:srgbClr val="D4D4D4"/>
+                </a:solidFill>
+                <a:latin typeface="Consolas"/>
+              </a:rPr>
+              <a:t>                       </a:t>
+            </a:r>
+            <a:r>
+              <a:rPr sz="2000" i="1" b="0">
+                <a:solidFill>
+                  <a:srgbClr val="6A9955"/>
+                </a:solidFill>
+                <a:latin typeface="Consolas"/>
+              </a:rPr>
+              <a:t># tope que el presupuesto aguanta</a:t>
+            </a:r>
+          </a:p>
+          <a:p>
+            <a:pPr>
+              <a:spcAft>
+                <a:spcPts val="428"/>
+              </a:spcAft>
+            </a:pPr>
+            <a:r>
+              <a:rPr sz="2000" i="0" b="0">
+                <a:solidFill>
+                  <a:srgbClr val="D4D4D4"/>
+                </a:solidFill>
+                <a:latin typeface="Consolas"/>
+              </a:rPr>
+              <a:t>  </a:t>
+            </a:r>
+            <a:r>
+              <a:rPr sz="2000" i="0" b="0">
+                <a:solidFill>
+                  <a:srgbClr val="D4D4D4"/>
+                </a:solidFill>
+                <a:latin typeface="Consolas"/>
+              </a:rPr>
+              <a:t>metrica</a:t>
+            </a:r>
+            <a:r>
+              <a:rPr sz="2000" i="0" b="0">
+                <a:solidFill>
+                  <a:srgbClr val="D4D4D4"/>
+                </a:solidFill>
+                <a:latin typeface="Consolas"/>
+              </a:rPr>
+              <a:t>: </a:t>
+            </a:r>
+            <a:r>
+              <a:rPr sz="2000" i="0" b="0">
+                <a:solidFill>
+                  <a:srgbClr val="D4D4D4"/>
+                </a:solidFill>
+                <a:latin typeface="Consolas"/>
+              </a:rPr>
+              <a:t>cpu_promedio</a:t>
+            </a:r>
+          </a:p>
+          <a:p>
+            <a:pPr>
+              <a:spcAft>
+                <a:spcPts val="428"/>
+              </a:spcAft>
+            </a:pPr>
+            <a:r>
+              <a:rPr sz="2000" i="0" b="0">
+                <a:solidFill>
+                  <a:srgbClr val="D4D4D4"/>
+                </a:solidFill>
+                <a:latin typeface="Consolas"/>
+              </a:rPr>
+              <a:t>  </a:t>
+            </a:r>
+            <a:r>
+              <a:rPr sz="2000" i="0" b="0">
+                <a:solidFill>
+                  <a:srgbClr val="D4D4D4"/>
+                </a:solidFill>
+                <a:latin typeface="Consolas"/>
+              </a:rPr>
+              <a:t>subir_si</a:t>
+            </a:r>
+            <a:r>
+              <a:rPr sz="2000" i="0" b="0">
+                <a:solidFill>
+                  <a:srgbClr val="D4D4D4"/>
+                </a:solidFill>
+                <a:latin typeface="Consolas"/>
+              </a:rPr>
+              <a:t>: </a:t>
+            </a:r>
+            <a:r>
+              <a:rPr sz="2000" i="0" b="0">
+                <a:solidFill>
+                  <a:srgbClr val="CE9178"/>
+                </a:solidFill>
+                <a:latin typeface="Consolas"/>
+              </a:rPr>
+              <a:t>'&gt; 70% durante 5 min'</a:t>
+            </a:r>
+          </a:p>
+          <a:p>
+            <a:pPr>
+              <a:spcAft>
+                <a:spcPts val="428"/>
+              </a:spcAft>
+            </a:pPr>
+            <a:r>
+              <a:rPr sz="2000" i="0" b="0">
+                <a:solidFill>
+                  <a:srgbClr val="D4D4D4"/>
+                </a:solidFill>
+                <a:latin typeface="Consolas"/>
+              </a:rPr>
+              <a:t>  </a:t>
+            </a:r>
+            <a:r>
+              <a:rPr sz="2000" i="0" b="0">
+                <a:solidFill>
+                  <a:srgbClr val="D4D4D4"/>
+                </a:solidFill>
+                <a:latin typeface="Consolas"/>
+              </a:rPr>
+              <a:t>bajar_si</a:t>
+            </a:r>
+            <a:r>
+              <a:rPr sz="2000" i="0" b="0">
+                <a:solidFill>
+                  <a:srgbClr val="D4D4D4"/>
+                </a:solidFill>
+                <a:latin typeface="Consolas"/>
+              </a:rPr>
+              <a:t>: </a:t>
+            </a:r>
+            <a:r>
+              <a:rPr sz="2000" i="0" b="0">
+                <a:solidFill>
+                  <a:srgbClr val="CE9178"/>
+                </a:solidFill>
+                <a:latin typeface="Consolas"/>
+              </a:rPr>
+              <a:t>'&lt; 30% durante 10 min'</a:t>
+            </a:r>
+            <a:r>
+              <a:rPr sz="2000" i="0" b="0">
+                <a:solidFill>
+                  <a:srgbClr val="D4D4D4"/>
+                </a:solidFill>
+                <a:latin typeface="Consolas"/>
+              </a:rPr>
+              <a:t>  </a:t>
+            </a:r>
+            <a:r>
+              <a:rPr sz="2000" i="1" b="0">
+                <a:solidFill>
+                  <a:srgbClr val="6A9955"/>
+                </a:solidFill>
+                <a:latin typeface="Consolas"/>
+              </a:rPr>
+              <a:t># bajar mas lento que subir</a:t>
+            </a:r>
+          </a:p>
+          <a:p>
+            <a:pPr>
+              <a:spcAft>
+                <a:spcPts val="428"/>
+              </a:spcAft>
+            </a:pPr>
+            <a:r>
+              <a:rPr sz="2000" i="0" b="0">
+                <a:solidFill>
+                  <a:srgbClr val="D4D4D4"/>
+                </a:solidFill>
+                <a:latin typeface="Consolas"/>
+              </a:rPr>
+              <a:t>  </a:t>
+            </a:r>
+            <a:r>
+              <a:rPr sz="2000" i="0" b="0">
+                <a:solidFill>
+                  <a:srgbClr val="D4D4D4"/>
+                </a:solidFill>
+                <a:latin typeface="Consolas"/>
+              </a:rPr>
+              <a:t>enfriamiento</a:t>
+            </a:r>
+            <a:r>
+              <a:rPr sz="2000" i="0" b="0">
+                <a:solidFill>
+                  <a:srgbClr val="D4D4D4"/>
+                </a:solidFill>
+                <a:latin typeface="Consolas"/>
+              </a:rPr>
+              <a:t>: </a:t>
+            </a:r>
+            <a:r>
+              <a:rPr sz="2000" i="0" b="0">
+                <a:solidFill>
+                  <a:srgbClr val="B5CEA8"/>
+                </a:solidFill>
+                <a:latin typeface="Consolas"/>
+              </a:rPr>
+              <a:t>5</a:t>
+            </a:r>
+            <a:r>
+              <a:rPr sz="2000" i="0" b="0">
+                <a:solidFill>
+                  <a:srgbClr val="D4D4D4"/>
+                </a:solidFill>
+                <a:latin typeface="Consolas"/>
+              </a:rPr>
+              <a:t> </a:t>
+            </a:r>
+            <a:r>
+              <a:rPr sz="2000" i="0" b="0">
+                <a:solidFill>
+                  <a:srgbClr val="D4D4D4"/>
+                </a:solidFill>
+                <a:latin typeface="Consolas"/>
+              </a:rPr>
+              <a:t>min</a:t>
+            </a:r>
+            <a:r>
+              <a:rPr sz="2000" i="0" b="0">
+                <a:solidFill>
+                  <a:srgbClr val="D4D4D4"/>
+                </a:solidFill>
+                <a:latin typeface="Consolas"/>
+              </a:rPr>
+              <a:t>             </a:t>
+            </a:r>
+            <a:r>
+              <a:rPr sz="2000" i="1" b="0">
+                <a:solidFill>
+                  <a:srgbClr val="6A9955"/>
+                </a:solidFill>
+                <a:latin typeface="Consolas"/>
+              </a:rPr>
+              <a:t># sin esto, arranques en cadena</a:t>
+            </a:r>
+          </a:p>
+          <a:p>
+            <a:pPr>
+              <a:spcAft>
+                <a:spcPts val="428"/>
+              </a:spcAft>
+            </a:pPr>
+            <a:r>
+              <a:rPr sz="2000" i="0" b="0">
+                <a:solidFill>
+                  <a:srgbClr val="D4D4D4"/>
+                </a:solidFill>
+                <a:latin typeface="Consolas"/>
+              </a:rPr>
+              <a:t/>
+            </a:r>
+          </a:p>
+          <a:p>
+            <a:pPr>
+              <a:spcAft>
+                <a:spcPts val="428"/>
+              </a:spcAft>
+            </a:pPr>
+            <a:r>
+              <a:rPr sz="2000" i="1" b="0">
+                <a:solidFill>
+                  <a:srgbClr val="6A9955"/>
+                </a:solidFill>
+                <a:latin typeface="Consolas"/>
+              </a:rPr>
+              <a:t># Y el limite honesto: escalar la API no escala la BASE. Si el cuello</a:t>
+            </a:r>
+          </a:p>
+          <a:p>
+            <a:pPr>
+              <a:spcAft>
+                <a:spcPts val="428"/>
+              </a:spcAft>
+            </a:pPr>
+            <a:r>
+              <a:rPr sz="2000" i="1" b="0">
+                <a:solidFill>
+                  <a:srgbClr val="6A9955"/>
+                </a:solidFill>
+                <a:latin typeface="Consolas"/>
+              </a:rPr>
+              <a:t># de botella es PostgreSQL, seis instancias lo empeoran.</a:t>
+            </a:r>
+          </a:p>
+        </p:txBody>
+      </p:sp>
+      <p:sp>
+        <p:nvSpPr>
+          <p:cNvPr id="13" name="TextBox 12"/>
           <p:cNvSpPr txBox="1"/>
           <p:nvPr/>
         </p:nvSpPr>
@@ -4784,21 +6194,271 @@
                 </a:solidFill>
                 <a:latin typeface="Calibri"/>
               </a:rPr>
-              <a:t>El limite fisico: la instancia nueva no aparece al instante</a:t>
-            </a:r>
-          </a:p>
-        </p:txBody>
-      </p:sp>
-      <p:sp>
-        <p:nvSpPr>
-          <p:cNvPr id="5" name="TextBox 4"/>
+              <a:t>La maquina de decision del autoescalado</a:t>
+            </a:r>
+          </a:p>
+        </p:txBody>
+      </p:sp>
+      <p:sp>
+        <p:nvSpPr>
+          <p:cNvPr id="5" name="Rounded Rectangle 4"/>
+          <p:cNvSpPr/>
+          <p:nvPr/>
+        </p:nvSpPr>
+        <p:spPr>
+          <a:xfrm>
+            <a:off x="457200" y="1261872"/>
+            <a:ext cx="11277295" cy="4220725"/>
+          </a:xfrm>
+          <a:prstGeom prst="roundRect">
+            <a:avLst>
+              <a:gd name="adj" fmla="val 4000"/>
+            </a:avLst>
+          </a:prstGeom>
+          <a:solidFill>
+            <a:srgbClr val="1E1E1E"/>
+          </a:solidFill>
+          <a:ln>
+            <a:noFill/>
+          </a:ln>
+        </p:spPr>
+        <p:style>
+          <a:lnRef idx="1">
+            <a:schemeClr val="accent1"/>
+          </a:lnRef>
+          <a:fillRef idx="3">
+            <a:schemeClr val="accent1"/>
+          </a:fillRef>
+          <a:effectRef idx="2">
+            <a:schemeClr val="accent1"/>
+          </a:effectRef>
+          <a:fontRef idx="minor">
+            <a:schemeClr val="lt1"/>
+          </a:fontRef>
+        </p:style>
+        <p:txBody>
+          <a:bodyPr rtlCol="0" anchor="ctr"/>
+          <a:lstStyle/>
+          <a:p>
+            <a:pPr algn="ctr"/>
+          </a:p>
+        </p:txBody>
+      </p:sp>
+      <p:sp>
+        <p:nvSpPr>
+          <p:cNvPr id="6" name="Rectangle 5"/>
+          <p:cNvSpPr/>
+          <p:nvPr/>
+        </p:nvSpPr>
+        <p:spPr>
+          <a:xfrm>
+            <a:off x="457200" y="1261872"/>
+            <a:ext cx="11277295" cy="365760"/>
+          </a:xfrm>
+          <a:prstGeom prst="rect">
+            <a:avLst/>
+          </a:prstGeom>
+          <a:solidFill>
+            <a:srgbClr val="2D2D30"/>
+          </a:solidFill>
+          <a:ln>
+            <a:noFill/>
+          </a:ln>
+        </p:spPr>
+        <p:style>
+          <a:lnRef idx="1">
+            <a:schemeClr val="accent1"/>
+          </a:lnRef>
+          <a:fillRef idx="3">
+            <a:schemeClr val="accent1"/>
+          </a:fillRef>
+          <a:effectRef idx="2">
+            <a:schemeClr val="accent1"/>
+          </a:effectRef>
+          <a:fontRef idx="minor">
+            <a:schemeClr val="lt1"/>
+          </a:fontRef>
+        </p:style>
+        <p:txBody>
+          <a:bodyPr rtlCol="0" anchor="ctr"/>
+          <a:lstStyle/>
+          <a:p>
+            <a:pPr algn="ctr"/>
+          </a:p>
+        </p:txBody>
+      </p:sp>
+      <p:sp>
+        <p:nvSpPr>
+          <p:cNvPr id="7" name="Oval 6"/>
+          <p:cNvSpPr/>
+          <p:nvPr/>
+        </p:nvSpPr>
+        <p:spPr>
+          <a:xfrm>
+            <a:off x="658368" y="1380743"/>
+            <a:ext cx="128016" cy="128016"/>
+          </a:xfrm>
+          <a:prstGeom prst="ellipse">
+            <a:avLst/>
+          </a:prstGeom>
+          <a:solidFill>
+            <a:srgbClr val="FF5F56"/>
+          </a:solidFill>
+          <a:ln>
+            <a:noFill/>
+          </a:ln>
+        </p:spPr>
+        <p:style>
+          <a:lnRef idx="1">
+            <a:schemeClr val="accent1"/>
+          </a:lnRef>
+          <a:fillRef idx="3">
+            <a:schemeClr val="accent1"/>
+          </a:fillRef>
+          <a:effectRef idx="2">
+            <a:schemeClr val="accent1"/>
+          </a:effectRef>
+          <a:fontRef idx="minor">
+            <a:schemeClr val="lt1"/>
+          </a:fontRef>
+        </p:style>
+        <p:txBody>
+          <a:bodyPr rtlCol="0" anchor="ctr"/>
+          <a:lstStyle/>
+          <a:p>
+            <a:pPr algn="ctr"/>
+          </a:p>
+        </p:txBody>
+      </p:sp>
+      <p:sp>
+        <p:nvSpPr>
+          <p:cNvPr id="8" name="Oval 7"/>
+          <p:cNvSpPr/>
+          <p:nvPr/>
+        </p:nvSpPr>
+        <p:spPr>
+          <a:xfrm>
+            <a:off x="877824" y="1380743"/>
+            <a:ext cx="128016" cy="128016"/>
+          </a:xfrm>
+          <a:prstGeom prst="ellipse">
+            <a:avLst/>
+          </a:prstGeom>
+          <a:solidFill>
+            <a:srgbClr val="FFBD2E"/>
+          </a:solidFill>
+          <a:ln>
+            <a:noFill/>
+          </a:ln>
+        </p:spPr>
+        <p:style>
+          <a:lnRef idx="1">
+            <a:schemeClr val="accent1"/>
+          </a:lnRef>
+          <a:fillRef idx="3">
+            <a:schemeClr val="accent1"/>
+          </a:fillRef>
+          <a:effectRef idx="2">
+            <a:schemeClr val="accent1"/>
+          </a:effectRef>
+          <a:fontRef idx="minor">
+            <a:schemeClr val="lt1"/>
+          </a:fontRef>
+        </p:style>
+        <p:txBody>
+          <a:bodyPr rtlCol="0" anchor="ctr"/>
+          <a:lstStyle/>
+          <a:p>
+            <a:pPr algn="ctr"/>
+          </a:p>
+        </p:txBody>
+      </p:sp>
+      <p:sp>
+        <p:nvSpPr>
+          <p:cNvPr id="9" name="Oval 8"/>
+          <p:cNvSpPr/>
+          <p:nvPr/>
+        </p:nvSpPr>
+        <p:spPr>
+          <a:xfrm>
+            <a:off x="1097280" y="1380743"/>
+            <a:ext cx="128016" cy="128016"/>
+          </a:xfrm>
+          <a:prstGeom prst="ellipse">
+            <a:avLst/>
+          </a:prstGeom>
+          <a:solidFill>
+            <a:srgbClr val="27C93F"/>
+          </a:solidFill>
+          <a:ln>
+            <a:noFill/>
+          </a:ln>
+        </p:spPr>
+        <p:style>
+          <a:lnRef idx="1">
+            <a:schemeClr val="accent1"/>
+          </a:lnRef>
+          <a:fillRef idx="3">
+            <a:schemeClr val="accent1"/>
+          </a:fillRef>
+          <a:effectRef idx="2">
+            <a:schemeClr val="accent1"/>
+          </a:effectRef>
+          <a:fontRef idx="minor">
+            <a:schemeClr val="lt1"/>
+          </a:fontRef>
+        </p:style>
+        <p:txBody>
+          <a:bodyPr rtlCol="0" anchor="ctr"/>
+          <a:lstStyle/>
+          <a:p>
+            <a:pPr algn="ctr"/>
+          </a:p>
+        </p:txBody>
+      </p:sp>
+      <p:sp>
+        <p:nvSpPr>
+          <p:cNvPr id="10" name="TextBox 9"/>
           <p:cNvSpPr txBox="1"/>
           <p:nvPr/>
         </p:nvSpPr>
         <p:spPr>
           <a:xfrm>
-            <a:off x="457200" y="1170432"/>
-            <a:ext cx="11277295" cy="5230368"/>
+            <a:off x="1371600" y="1298448"/>
+            <a:ext cx="10180015" cy="292608"/>
+          </a:xfrm>
+          <a:prstGeom prst="rect">
+            <a:avLst/>
+          </a:prstGeom>
+          <a:noFill/>
+        </p:spPr>
+        <p:txBody>
+          <a:bodyPr wrap="square" anchor="ctr"/>
+          <a:lstStyle/>
+          <a:p>
+            <a:pPr algn="r"/>
+            <a:r>
+              <a:rPr sz="1100" b="1" i="0">
+                <a:solidFill>
+                  <a:srgbClr val="BBBBBB"/>
+                </a:solidFill>
+                <a:latin typeface="Calibri"/>
+              </a:rPr>
+              <a:t>Mermaid</a:t>
+            </a:r>
+          </a:p>
+        </p:txBody>
+      </p:sp>
+      <p:sp>
+        <p:nvSpPr>
+          <p:cNvPr id="11" name="TextBox 10"/>
+          <p:cNvSpPr txBox="1"/>
+          <p:nvPr/>
+        </p:nvSpPr>
+        <p:spPr>
+          <a:xfrm>
+            <a:off x="685800" y="1719072"/>
+            <a:ext cx="502920" cy="3626365"/>
           </a:xfrm>
           <a:prstGeom prst="rect">
             <a:avLst/>
@@ -4811,90 +6471,875 @@
           </a:bodyPr>
           <a:lstStyle/>
           <a:p>
+            <a:pPr algn="r">
+              <a:spcAft>
+                <a:spcPts val="428"/>
+              </a:spcAft>
+            </a:pPr>
+            <a:r>
+              <a:rPr sz="2000" i="0" b="0">
+                <a:solidFill>
+                  <a:srgbClr val="858585"/>
+                </a:solidFill>
+                <a:latin typeface="Consolas"/>
+              </a:rPr>
+              <a:t>1</a:t>
+            </a:r>
+          </a:p>
+          <a:p>
+            <a:pPr algn="r">
+              <a:spcAft>
+                <a:spcPts val="428"/>
+              </a:spcAft>
+            </a:pPr>
+            <a:r>
+              <a:rPr sz="2000" i="0" b="0">
+                <a:solidFill>
+                  <a:srgbClr val="858585"/>
+                </a:solidFill>
+                <a:latin typeface="Consolas"/>
+              </a:rPr>
+              <a:t>2</a:t>
+            </a:r>
+          </a:p>
+          <a:p>
+            <a:pPr algn="r">
+              <a:spcAft>
+                <a:spcPts val="428"/>
+              </a:spcAft>
+            </a:pPr>
+            <a:r>
+              <a:rPr sz="2000" i="0" b="0">
+                <a:solidFill>
+                  <a:srgbClr val="858585"/>
+                </a:solidFill>
+                <a:latin typeface="Consolas"/>
+              </a:rPr>
+              <a:t>3</a:t>
+            </a:r>
+          </a:p>
+          <a:p>
+            <a:pPr algn="r">
+              <a:spcAft>
+                <a:spcPts val="428"/>
+              </a:spcAft>
+            </a:pPr>
+            <a:r>
+              <a:rPr sz="2000" i="0" b="0">
+                <a:solidFill>
+                  <a:srgbClr val="858585"/>
+                </a:solidFill>
+                <a:latin typeface="Consolas"/>
+              </a:rPr>
+              <a:t>4</a:t>
+            </a:r>
+          </a:p>
+          <a:p>
+            <a:pPr algn="r">
+              <a:spcAft>
+                <a:spcPts val="428"/>
+              </a:spcAft>
+            </a:pPr>
+            <a:r>
+              <a:rPr sz="2000" i="0" b="0">
+                <a:solidFill>
+                  <a:srgbClr val="858585"/>
+                </a:solidFill>
+                <a:latin typeface="Consolas"/>
+              </a:rPr>
+              <a:t>5</a:t>
+            </a:r>
+          </a:p>
+          <a:p>
+            <a:pPr algn="r">
+              <a:spcAft>
+                <a:spcPts val="428"/>
+              </a:spcAft>
+            </a:pPr>
+            <a:r>
+              <a:rPr sz="2000" i="0" b="0">
+                <a:solidFill>
+                  <a:srgbClr val="858585"/>
+                </a:solidFill>
+                <a:latin typeface="Consolas"/>
+              </a:rPr>
+              <a:t>6</a:t>
+            </a:r>
+          </a:p>
+          <a:p>
+            <a:pPr algn="r">
+              <a:spcAft>
+                <a:spcPts val="428"/>
+              </a:spcAft>
+            </a:pPr>
+            <a:r>
+              <a:rPr sz="2000" i="0" b="0">
+                <a:solidFill>
+                  <a:srgbClr val="858585"/>
+                </a:solidFill>
+                <a:latin typeface="Consolas"/>
+              </a:rPr>
+              <a:t>7</a:t>
+            </a:r>
+          </a:p>
+          <a:p>
+            <a:pPr algn="r">
+              <a:spcAft>
+                <a:spcPts val="428"/>
+              </a:spcAft>
+            </a:pPr>
+            <a:r>
+              <a:rPr sz="2000" i="0" b="0">
+                <a:solidFill>
+                  <a:srgbClr val="858585"/>
+                </a:solidFill>
+                <a:latin typeface="Consolas"/>
+              </a:rPr>
+              <a:t>8</a:t>
+            </a:r>
+          </a:p>
+          <a:p>
+            <a:pPr algn="r">
+              <a:spcAft>
+                <a:spcPts val="428"/>
+              </a:spcAft>
+            </a:pPr>
+            <a:r>
+              <a:rPr sz="2000" i="0" b="0">
+                <a:solidFill>
+                  <a:srgbClr val="858585"/>
+                </a:solidFill>
+                <a:latin typeface="Consolas"/>
+              </a:rPr>
+              <a:t>9</a:t>
+            </a:r>
+          </a:p>
+          <a:p>
+            <a:pPr algn="r">
+              <a:spcAft>
+                <a:spcPts val="428"/>
+              </a:spcAft>
+            </a:pPr>
+            <a:r>
+              <a:rPr sz="2000" i="0" b="0">
+                <a:solidFill>
+                  <a:srgbClr val="858585"/>
+                </a:solidFill>
+                <a:latin typeface="Consolas"/>
+              </a:rPr>
+              <a:t>10</a:t>
+            </a:r>
+          </a:p>
+        </p:txBody>
+      </p:sp>
+      <p:sp>
+        <p:nvSpPr>
+          <p:cNvPr id="12" name="TextBox 11"/>
+          <p:cNvSpPr txBox="1"/>
+          <p:nvPr/>
+        </p:nvSpPr>
+        <p:spPr>
+          <a:xfrm>
+            <a:off x="1188720" y="1719072"/>
+            <a:ext cx="10271455" cy="3626365"/>
+          </a:xfrm>
+          <a:prstGeom prst="rect">
+            <a:avLst/>
+          </a:prstGeom>
+          <a:noFill/>
+        </p:spPr>
+        <p:txBody>
+          <a:bodyPr wrap="square">
+            <a:spAutoFit/>
+          </a:bodyPr>
+          <a:lstStyle/>
+          <a:p>
             <a:pPr>
               <a:spcAft>
-                <a:spcPts val="800"/>
+                <a:spcPts val="428"/>
               </a:spcAft>
             </a:pPr>
             <a:r>
-              <a:rPr sz="2000" b="0" i="0">
-                <a:solidFill>
-                  <a:srgbClr val="333333"/>
-                </a:solidFill>
-                <a:latin typeface="Calibri"/>
-              </a:rPr>
-              <a:t>–   Hay un limite fisico del autoescalado que desarma la idea de que es magia: la instancia nueva no aparece al instante.</a:t>
+              <a:rPr sz="2000" i="0" b="0">
+                <a:solidFill>
+                  <a:srgbClr val="D4D4D4"/>
+                </a:solidFill>
+                <a:latin typeface="Consolas"/>
+              </a:rPr>
+              <a:t>flowchart</a:t>
+            </a:r>
+            <a:r>
+              <a:rPr sz="2000" i="0" b="0">
+                <a:solidFill>
+                  <a:srgbClr val="D4D4D4"/>
+                </a:solidFill>
+                <a:latin typeface="Consolas"/>
+              </a:rPr>
+              <a:t> </a:t>
+            </a:r>
+            <a:r>
+              <a:rPr sz="2000" i="0" b="0">
+                <a:solidFill>
+                  <a:srgbClr val="D4D4D4"/>
+                </a:solidFill>
+                <a:latin typeface="Consolas"/>
+              </a:rPr>
+              <a:t>TD</a:t>
             </a:r>
           </a:p>
           <a:p>
             <a:pPr>
               <a:spcAft>
-                <a:spcPts val="800"/>
+                <a:spcPts val="428"/>
               </a:spcAft>
             </a:pPr>
             <a:r>
-              <a:rPr sz="2000" b="0" i="0">
-                <a:solidFill>
-                  <a:srgbClr val="333333"/>
-                </a:solidFill>
-                <a:latin typeface="Calibri"/>
-              </a:rPr>
-              <a:t>–   Un contenedor liviano tarda del orden de 10 a 60 segundos entre que se decide crearlo y que recibe trafico util, contando descarga de imagen</a:t>
+              <a:rPr sz="2000" i="0" b="0">
+                <a:solidFill>
+                  <a:srgbClr val="D4D4D4"/>
+                </a:solidFill>
+                <a:latin typeface="Consolas"/>
+              </a:rPr>
+              <a:t>  </a:t>
+            </a:r>
+            <a:r>
+              <a:rPr sz="2000" i="0" b="0">
+                <a:solidFill>
+                  <a:srgbClr val="D4D4D4"/>
+                </a:solidFill>
+                <a:latin typeface="Consolas"/>
+              </a:rPr>
+              <a:t>obs</a:t>
+            </a:r>
+            <a:r>
+              <a:rPr sz="2000" i="0" b="0">
+                <a:solidFill>
+                  <a:srgbClr val="D4D4D4"/>
+                </a:solidFill>
+                <a:latin typeface="Consolas"/>
+              </a:rPr>
+              <a:t>[</a:t>
+            </a:r>
+            <a:r>
+              <a:rPr sz="2000" i="0" b="0">
+                <a:solidFill>
+                  <a:srgbClr val="CE9178"/>
+                </a:solidFill>
+                <a:latin typeface="Consolas"/>
+              </a:rPr>
+              <a:t>"Observar CPU cada 60 s"</a:t>
+            </a:r>
+            <a:r>
+              <a:rPr sz="2000" i="0" b="0">
+                <a:solidFill>
+                  <a:srgbClr val="D4D4D4"/>
+                </a:solidFill>
+                <a:latin typeface="Consolas"/>
+              </a:rPr>
+              <a:t>] --&gt; </a:t>
+            </a:r>
+            <a:r>
+              <a:rPr sz="2000" i="0" b="0">
+                <a:solidFill>
+                  <a:srgbClr val="D4D4D4"/>
+                </a:solidFill>
+                <a:latin typeface="Consolas"/>
+              </a:rPr>
+              <a:t>up</a:t>
+            </a:r>
+            <a:r>
+              <a:rPr sz="2000" i="0" b="0">
+                <a:solidFill>
+                  <a:srgbClr val="D4D4D4"/>
+                </a:solidFill>
+                <a:latin typeface="Consolas"/>
+              </a:rPr>
+              <a:t>{</a:t>
+            </a:r>
+            <a:r>
+              <a:rPr sz="2000" i="0" b="0">
+                <a:solidFill>
+                  <a:srgbClr val="CE9178"/>
+                </a:solidFill>
+                <a:latin typeface="Consolas"/>
+              </a:rPr>
+              <a:t>"CPU sobre 70 por ciento 5 min?"</a:t>
+            </a:r>
+            <a:r>
+              <a:rPr sz="2000" i="0" b="0">
+                <a:solidFill>
+                  <a:srgbClr val="D4D4D4"/>
+                </a:solidFill>
+                <a:latin typeface="Consolas"/>
+              </a:rPr>
+              <a:t>}</a:t>
             </a:r>
           </a:p>
           <a:p>
             <a:pPr>
               <a:spcAft>
-                <a:spcPts val="800"/>
+                <a:spcPts val="428"/>
               </a:spcAft>
             </a:pPr>
             <a:r>
-              <a:rPr sz="2000" b="0" i="0">
-                <a:solidFill>
-                  <a:srgbClr val="333333"/>
-                </a:solidFill>
-                <a:latin typeface="Calibri"/>
-              </a:rPr>
-              <a:t>–   Arranque del proceso, conexion a la base de datos y aprobacion del chequeo de salud; una maquina virtual completa puede tardar de 2 a 5 minutos.</a:t>
+              <a:rPr sz="2000" i="0" b="0">
+                <a:solidFill>
+                  <a:srgbClr val="D4D4D4"/>
+                </a:solidFill>
+                <a:latin typeface="Consolas"/>
+              </a:rPr>
+              <a:t>  </a:t>
+            </a:r>
+            <a:r>
+              <a:rPr sz="2000" i="0" b="0">
+                <a:solidFill>
+                  <a:srgbClr val="D4D4D4"/>
+                </a:solidFill>
+                <a:latin typeface="Consolas"/>
+              </a:rPr>
+              <a:t>up</a:t>
+            </a:r>
+            <a:r>
+              <a:rPr sz="2000" i="0" b="0">
+                <a:solidFill>
+                  <a:srgbClr val="D4D4D4"/>
+                </a:solidFill>
+                <a:latin typeface="Consolas"/>
+              </a:rPr>
+              <a:t> --&gt;|</a:t>
+            </a:r>
+            <a:r>
+              <a:rPr sz="2000" i="0" b="0">
+                <a:solidFill>
+                  <a:srgbClr val="CE9178"/>
+                </a:solidFill>
+                <a:latin typeface="Consolas"/>
+              </a:rPr>
+              <a:t>"Si"</a:t>
+            </a:r>
+            <a:r>
+              <a:rPr sz="2000" i="0" b="0">
+                <a:solidFill>
+                  <a:srgbClr val="D4D4D4"/>
+                </a:solidFill>
+                <a:latin typeface="Consolas"/>
+              </a:rPr>
+              <a:t>| </a:t>
+            </a:r>
+            <a:r>
+              <a:rPr sz="2000" i="0" b="0">
+                <a:solidFill>
+                  <a:srgbClr val="D4D4D4"/>
+                </a:solidFill>
+                <a:latin typeface="Consolas"/>
+              </a:rPr>
+              <a:t>out</a:t>
+            </a:r>
+            <a:r>
+              <a:rPr sz="2000" i="0" b="0">
+                <a:solidFill>
+                  <a:srgbClr val="D4D4D4"/>
+                </a:solidFill>
+                <a:latin typeface="Consolas"/>
+              </a:rPr>
+              <a:t>[</a:t>
+            </a:r>
+            <a:r>
+              <a:rPr sz="2000" i="0" b="0">
+                <a:solidFill>
+                  <a:srgbClr val="CE9178"/>
+                </a:solidFill>
+                <a:latin typeface="Consolas"/>
+              </a:rPr>
+              <a:t>"Scale out: +1, max 6"</a:t>
+            </a:r>
+            <a:r>
+              <a:rPr sz="2000" i="0" b="0">
+                <a:solidFill>
+                  <a:srgbClr val="D4D4D4"/>
+                </a:solidFill>
+                <a:latin typeface="Consolas"/>
+              </a:rPr>
+              <a:t>]</a:t>
             </a:r>
           </a:p>
           <a:p>
             <a:pPr>
               <a:spcAft>
-                <a:spcPts val="800"/>
+                <a:spcPts val="428"/>
               </a:spcAft>
             </a:pPr>
             <a:r>
-              <a:rPr sz="2000" b="0" i="0">
-                <a:solidFill>
-                  <a:srgbClr val="333333"/>
-                </a:solidFill>
-                <a:latin typeface="Calibri"/>
-              </a:rPr>
-              <a:t>–   Las respuestas correctas son tres y ninguna es "poner mas autoescalado": mantener holgura permanente por encima de la demanda habitual</a:t>
+              <a:rPr sz="2000" i="0" b="0">
+                <a:solidFill>
+                  <a:srgbClr val="D4D4D4"/>
+                </a:solidFill>
+                <a:latin typeface="Consolas"/>
+              </a:rPr>
+              <a:t>  </a:t>
+            </a:r>
+            <a:r>
+              <a:rPr sz="2000" i="0" b="0">
+                <a:solidFill>
+                  <a:srgbClr val="D4D4D4"/>
+                </a:solidFill>
+                <a:latin typeface="Consolas"/>
+              </a:rPr>
+              <a:t>up</a:t>
+            </a:r>
+            <a:r>
+              <a:rPr sz="2000" i="0" b="0">
+                <a:solidFill>
+                  <a:srgbClr val="D4D4D4"/>
+                </a:solidFill>
+                <a:latin typeface="Consolas"/>
+              </a:rPr>
+              <a:t> --&gt;|</a:t>
+            </a:r>
+            <a:r>
+              <a:rPr sz="2000" i="0" b="0">
+                <a:solidFill>
+                  <a:srgbClr val="CE9178"/>
+                </a:solidFill>
+                <a:latin typeface="Consolas"/>
+              </a:rPr>
+              <a:t>"No"</a:t>
+            </a:r>
+            <a:r>
+              <a:rPr sz="2000" i="0" b="0">
+                <a:solidFill>
+                  <a:srgbClr val="D4D4D4"/>
+                </a:solidFill>
+                <a:latin typeface="Consolas"/>
+              </a:rPr>
+              <a:t>| </a:t>
+            </a:r>
+            <a:r>
+              <a:rPr sz="2000" i="0" b="0">
+                <a:solidFill>
+                  <a:srgbClr val="D4D4D4"/>
+                </a:solidFill>
+                <a:latin typeface="Consolas"/>
+              </a:rPr>
+              <a:t>down</a:t>
+            </a:r>
+            <a:r>
+              <a:rPr sz="2000" i="0" b="0">
+                <a:solidFill>
+                  <a:srgbClr val="D4D4D4"/>
+                </a:solidFill>
+                <a:latin typeface="Consolas"/>
+              </a:rPr>
+              <a:t>{</a:t>
+            </a:r>
+            <a:r>
+              <a:rPr sz="2000" i="0" b="0">
+                <a:solidFill>
+                  <a:srgbClr val="CE9178"/>
+                </a:solidFill>
+                <a:latin typeface="Consolas"/>
+              </a:rPr>
+              <a:t>"CPU bajo 30 por ciento 10 min?"</a:t>
+            </a:r>
+            <a:r>
+              <a:rPr sz="2000" i="0" b="0">
+                <a:solidFill>
+                  <a:srgbClr val="D4D4D4"/>
+                </a:solidFill>
+                <a:latin typeface="Consolas"/>
+              </a:rPr>
+              <a:t>}</a:t>
             </a:r>
           </a:p>
           <a:p>
             <a:pPr>
               <a:spcAft>
-                <a:spcPts val="800"/>
+                <a:spcPts val="428"/>
               </a:spcAft>
             </a:pPr>
             <a:r>
-              <a:rPr sz="2000" b="0" i="0">
-                <a:solidFill>
-                  <a:srgbClr val="333333"/>
-                </a:solidFill>
-                <a:latin typeface="Calibri"/>
-              </a:rPr>
-              <a:t>–   Poner una cola delante para absorber la rafaga y procesarla al ritmo que el sistema aguante, o degradar con gracia devolviendo una version reducida de la respuesta.</a:t>
-            </a:r>
-          </a:p>
-        </p:txBody>
-      </p:sp>
-      <p:sp>
-        <p:nvSpPr>
-          <p:cNvPr id="6" name="TextBox 5"/>
+              <a:rPr sz="2000" i="0" b="0">
+                <a:solidFill>
+                  <a:srgbClr val="D4D4D4"/>
+                </a:solidFill>
+                <a:latin typeface="Consolas"/>
+              </a:rPr>
+              <a:t>  </a:t>
+            </a:r>
+            <a:r>
+              <a:rPr sz="2000" i="0" b="0">
+                <a:solidFill>
+                  <a:srgbClr val="D4D4D4"/>
+                </a:solidFill>
+                <a:latin typeface="Consolas"/>
+              </a:rPr>
+              <a:t>down</a:t>
+            </a:r>
+            <a:r>
+              <a:rPr sz="2000" i="0" b="0">
+                <a:solidFill>
+                  <a:srgbClr val="D4D4D4"/>
+                </a:solidFill>
+                <a:latin typeface="Consolas"/>
+              </a:rPr>
+              <a:t> --&gt;|</a:t>
+            </a:r>
+            <a:r>
+              <a:rPr sz="2000" i="0" b="0">
+                <a:solidFill>
+                  <a:srgbClr val="CE9178"/>
+                </a:solidFill>
+                <a:latin typeface="Consolas"/>
+              </a:rPr>
+              <a:t>"Si"</a:t>
+            </a:r>
+            <a:r>
+              <a:rPr sz="2000" i="0" b="0">
+                <a:solidFill>
+                  <a:srgbClr val="D4D4D4"/>
+                </a:solidFill>
+                <a:latin typeface="Consolas"/>
+              </a:rPr>
+              <a:t>| </a:t>
+            </a:r>
+            <a:r>
+              <a:rPr sz="2000" i="0" b="0">
+                <a:solidFill>
+                  <a:srgbClr val="D4D4D4"/>
+                </a:solidFill>
+                <a:latin typeface="Consolas"/>
+              </a:rPr>
+              <a:t>inn</a:t>
+            </a:r>
+            <a:r>
+              <a:rPr sz="2000" i="0" b="0">
+                <a:solidFill>
+                  <a:srgbClr val="D4D4D4"/>
+                </a:solidFill>
+                <a:latin typeface="Consolas"/>
+              </a:rPr>
+              <a:t>[</a:t>
+            </a:r>
+            <a:r>
+              <a:rPr sz="2000" i="0" b="0">
+                <a:solidFill>
+                  <a:srgbClr val="CE9178"/>
+                </a:solidFill>
+                <a:latin typeface="Consolas"/>
+              </a:rPr>
+              <a:t>"Scale in: -1, min 2"</a:t>
+            </a:r>
+            <a:r>
+              <a:rPr sz="2000" i="0" b="0">
+                <a:solidFill>
+                  <a:srgbClr val="D4D4D4"/>
+                </a:solidFill>
+                <a:latin typeface="Consolas"/>
+              </a:rPr>
+              <a:t>]</a:t>
+            </a:r>
+          </a:p>
+          <a:p>
+            <a:pPr>
+              <a:spcAft>
+                <a:spcPts val="428"/>
+              </a:spcAft>
+            </a:pPr>
+            <a:r>
+              <a:rPr sz="2000" i="0" b="0">
+                <a:solidFill>
+                  <a:srgbClr val="D4D4D4"/>
+                </a:solidFill>
+                <a:latin typeface="Consolas"/>
+              </a:rPr>
+              <a:t>  </a:t>
+            </a:r>
+            <a:r>
+              <a:rPr sz="2000" i="0" b="0">
+                <a:solidFill>
+                  <a:srgbClr val="D4D4D4"/>
+                </a:solidFill>
+                <a:latin typeface="Consolas"/>
+              </a:rPr>
+              <a:t>down</a:t>
+            </a:r>
+            <a:r>
+              <a:rPr sz="2000" i="0" b="0">
+                <a:solidFill>
+                  <a:srgbClr val="D4D4D4"/>
+                </a:solidFill>
+                <a:latin typeface="Consolas"/>
+              </a:rPr>
+              <a:t> --&gt;|</a:t>
+            </a:r>
+            <a:r>
+              <a:rPr sz="2000" i="0" b="0">
+                <a:solidFill>
+                  <a:srgbClr val="CE9178"/>
+                </a:solidFill>
+                <a:latin typeface="Consolas"/>
+              </a:rPr>
+              <a:t>"No"</a:t>
+            </a:r>
+            <a:r>
+              <a:rPr sz="2000" i="0" b="0">
+                <a:solidFill>
+                  <a:srgbClr val="D4D4D4"/>
+                </a:solidFill>
+                <a:latin typeface="Consolas"/>
+              </a:rPr>
+              <a:t>| </a:t>
+            </a:r>
+            <a:r>
+              <a:rPr sz="2000" i="0" b="0">
+                <a:solidFill>
+                  <a:srgbClr val="D4D4D4"/>
+                </a:solidFill>
+                <a:latin typeface="Consolas"/>
+              </a:rPr>
+              <a:t>obs</a:t>
+            </a:r>
+          </a:p>
+          <a:p>
+            <a:pPr>
+              <a:spcAft>
+                <a:spcPts val="428"/>
+              </a:spcAft>
+            </a:pPr>
+            <a:r>
+              <a:rPr sz="2000" i="0" b="0">
+                <a:solidFill>
+                  <a:srgbClr val="D4D4D4"/>
+                </a:solidFill>
+                <a:latin typeface="Consolas"/>
+              </a:rPr>
+              <a:t>  </a:t>
+            </a:r>
+            <a:r>
+              <a:rPr sz="2000" i="0" b="0">
+                <a:solidFill>
+                  <a:srgbClr val="D4D4D4"/>
+                </a:solidFill>
+                <a:latin typeface="Consolas"/>
+              </a:rPr>
+              <a:t>out</a:t>
+            </a:r>
+            <a:r>
+              <a:rPr sz="2000" i="0" b="0">
+                <a:solidFill>
+                  <a:srgbClr val="D4D4D4"/>
+                </a:solidFill>
+                <a:latin typeface="Consolas"/>
+              </a:rPr>
+              <a:t> --&gt; </a:t>
+            </a:r>
+            <a:r>
+              <a:rPr sz="2000" i="0" b="0">
+                <a:solidFill>
+                  <a:srgbClr val="D4D4D4"/>
+                </a:solidFill>
+                <a:latin typeface="Consolas"/>
+              </a:rPr>
+              <a:t>cool</a:t>
+            </a:r>
+            <a:r>
+              <a:rPr sz="2000" i="0" b="0">
+                <a:solidFill>
+                  <a:srgbClr val="D4D4D4"/>
+                </a:solidFill>
+                <a:latin typeface="Consolas"/>
+              </a:rPr>
+              <a:t>[</a:t>
+            </a:r>
+            <a:r>
+              <a:rPr sz="2000" i="0" b="0">
+                <a:solidFill>
+                  <a:srgbClr val="CE9178"/>
+                </a:solidFill>
+                <a:latin typeface="Consolas"/>
+              </a:rPr>
+              <a:t>"Enfriamiento 5 min"</a:t>
+            </a:r>
+            <a:r>
+              <a:rPr sz="2000" i="0" b="0">
+                <a:solidFill>
+                  <a:srgbClr val="D4D4D4"/>
+                </a:solidFill>
+                <a:latin typeface="Consolas"/>
+              </a:rPr>
+              <a:t>]</a:t>
+            </a:r>
+          </a:p>
+          <a:p>
+            <a:pPr>
+              <a:spcAft>
+                <a:spcPts val="428"/>
+              </a:spcAft>
+            </a:pPr>
+            <a:r>
+              <a:rPr sz="2000" i="0" b="0">
+                <a:solidFill>
+                  <a:srgbClr val="D4D4D4"/>
+                </a:solidFill>
+                <a:latin typeface="Consolas"/>
+              </a:rPr>
+              <a:t>  </a:t>
+            </a:r>
+            <a:r>
+              <a:rPr sz="2000" i="0" b="0">
+                <a:solidFill>
+                  <a:srgbClr val="D4D4D4"/>
+                </a:solidFill>
+                <a:latin typeface="Consolas"/>
+              </a:rPr>
+              <a:t>inn</a:t>
+            </a:r>
+            <a:r>
+              <a:rPr sz="2000" i="0" b="0">
+                <a:solidFill>
+                  <a:srgbClr val="D4D4D4"/>
+                </a:solidFill>
+                <a:latin typeface="Consolas"/>
+              </a:rPr>
+              <a:t> --&gt; </a:t>
+            </a:r>
+            <a:r>
+              <a:rPr sz="2000" i="0" b="0">
+                <a:solidFill>
+                  <a:srgbClr val="D4D4D4"/>
+                </a:solidFill>
+                <a:latin typeface="Consolas"/>
+              </a:rPr>
+              <a:t>cool</a:t>
+            </a:r>
+          </a:p>
+          <a:p>
+            <a:pPr>
+              <a:spcAft>
+                <a:spcPts val="428"/>
+              </a:spcAft>
+            </a:pPr>
+            <a:r>
+              <a:rPr sz="2000" i="0" b="0">
+                <a:solidFill>
+                  <a:srgbClr val="D4D4D4"/>
+                </a:solidFill>
+                <a:latin typeface="Consolas"/>
+              </a:rPr>
+              <a:t>  </a:t>
+            </a:r>
+            <a:r>
+              <a:rPr sz="2000" i="0" b="0">
+                <a:solidFill>
+                  <a:srgbClr val="D4D4D4"/>
+                </a:solidFill>
+                <a:latin typeface="Consolas"/>
+              </a:rPr>
+              <a:t>cool</a:t>
+            </a:r>
+            <a:r>
+              <a:rPr sz="2000" i="0" b="0">
+                <a:solidFill>
+                  <a:srgbClr val="D4D4D4"/>
+                </a:solidFill>
+                <a:latin typeface="Consolas"/>
+              </a:rPr>
+              <a:t> --&gt; </a:t>
+            </a:r>
+            <a:r>
+              <a:rPr sz="2000" i="0" b="0">
+                <a:solidFill>
+                  <a:srgbClr val="D4D4D4"/>
+                </a:solidFill>
+                <a:latin typeface="Consolas"/>
+              </a:rPr>
+              <a:t>obs</a:t>
+            </a:r>
+          </a:p>
+          <a:p>
+            <a:pPr>
+              <a:spcAft>
+                <a:spcPts val="428"/>
+              </a:spcAft>
+            </a:pPr>
+            <a:r>
+              <a:rPr sz="2000" i="0" b="0">
+                <a:solidFill>
+                  <a:srgbClr val="D4D4D4"/>
+                </a:solidFill>
+                <a:latin typeface="Consolas"/>
+              </a:rPr>
+              <a:t>  </a:t>
+            </a:r>
+            <a:r>
+              <a:rPr sz="2000" i="0" b="0">
+                <a:solidFill>
+                  <a:srgbClr val="D4D4D4"/>
+                </a:solidFill>
+                <a:latin typeface="Consolas"/>
+              </a:rPr>
+              <a:t>bd</a:t>
+            </a:r>
+            <a:r>
+              <a:rPr sz="2000" i="0" b="0">
+                <a:solidFill>
+                  <a:srgbClr val="D4D4D4"/>
+                </a:solidFill>
+                <a:latin typeface="Consolas"/>
+              </a:rPr>
+              <a:t>[</a:t>
+            </a:r>
+            <a:r>
+              <a:rPr sz="2000" i="0" b="0">
+                <a:solidFill>
+                  <a:srgbClr val="CE9178"/>
+                </a:solidFill>
+                <a:latin typeface="Consolas"/>
+              </a:rPr>
+              <a:t>"No escala: base primaria"</a:t>
+            </a:r>
+            <a:r>
+              <a:rPr sz="2000" i="0" b="0">
+                <a:solidFill>
+                  <a:srgbClr val="D4D4D4"/>
+                </a:solidFill>
+                <a:latin typeface="Consolas"/>
+              </a:rPr>
+              <a:t>] -.-&gt;|</a:t>
+            </a:r>
+            <a:r>
+              <a:rPr sz="2000" i="0" b="0">
+                <a:solidFill>
+                  <a:srgbClr val="CE9178"/>
+                </a:solidFill>
+                <a:latin typeface="Consolas"/>
+              </a:rPr>
+              <a:t>"limite del diseno"</a:t>
+            </a:r>
+            <a:r>
+              <a:rPr sz="2000" i="0" b="0">
+                <a:solidFill>
+                  <a:srgbClr val="D4D4D4"/>
+                </a:solidFill>
+                <a:latin typeface="Consolas"/>
+              </a:rPr>
+              <a:t>| </a:t>
+            </a:r>
+            <a:r>
+              <a:rPr sz="2000" i="0" b="0">
+                <a:solidFill>
+                  <a:srgbClr val="D4D4D4"/>
+                </a:solidFill>
+                <a:latin typeface="Consolas"/>
+              </a:rPr>
+              <a:t>obs</a:t>
+            </a:r>
+          </a:p>
+        </p:txBody>
+      </p:sp>
+      <p:sp>
+        <p:nvSpPr>
+          <p:cNvPr id="13" name="TextBox 12"/>
           <p:cNvSpPr txBox="1"/>
           <p:nvPr/>
         </p:nvSpPr>
@@ -5068,21 +7513,149 @@
                 </a:solidFill>
                 <a:latin typeface="Calibri"/>
               </a:rPr>
-              <a:t>Elegir la metrica: la decision mas fina del tema</a:t>
-            </a:r>
-          </a:p>
-        </p:txBody>
-      </p:sp>
-      <p:sp>
-        <p:nvSpPr>
-          <p:cNvPr id="5" name="TextBox 4"/>
+              <a:t>El limite fisico: la instancia nueva no aparece al instante</a:t>
+            </a:r>
+          </a:p>
+        </p:txBody>
+      </p:sp>
+      <p:sp>
+        <p:nvSpPr>
+          <p:cNvPr id="5" name="Rounded Rectangle 4"/>
+          <p:cNvSpPr/>
+          <p:nvPr/>
+        </p:nvSpPr>
+        <p:spPr>
+          <a:xfrm>
+            <a:off x="5803166" y="1188719"/>
+            <a:ext cx="5998464" cy="4828032"/>
+          </a:xfrm>
+          <a:prstGeom prst="roundRect">
+            <a:avLst>
+              <a:gd name="adj" fmla="val 4000"/>
+            </a:avLst>
+          </a:prstGeom>
+          <a:solidFill>
+            <a:srgbClr val="E8EEF4"/>
+          </a:solidFill>
+          <a:ln>
+            <a:noFill/>
+          </a:ln>
+        </p:spPr>
+        <p:style>
+          <a:lnRef idx="1">
+            <a:schemeClr val="accent1"/>
+          </a:lnRef>
+          <a:fillRef idx="3">
+            <a:schemeClr val="accent1"/>
+          </a:fillRef>
+          <a:effectRef idx="2">
+            <a:schemeClr val="accent1"/>
+          </a:effectRef>
+          <a:fontRef idx="minor">
+            <a:schemeClr val="lt1"/>
+          </a:fontRef>
+        </p:style>
+        <p:txBody>
+          <a:bodyPr rtlCol="0" anchor="ctr"/>
+          <a:lstStyle/>
+          <a:p>
+            <a:pPr algn="ctr"/>
+          </a:p>
+        </p:txBody>
+      </p:sp>
+      <p:pic>
+        <p:nvPicPr>
+          <p:cNvPr id="6" name="Picture 5" descr="arranque-no-instantaneo-paso1.png"/>
+          <p:cNvPicPr>
+            <a:picLocks noChangeAspect="1"/>
+          </p:cNvPicPr>
+          <p:nvPr/>
+        </p:nvPicPr>
+        <p:blipFill>
+          <a:blip r:embed="rId2"/>
+          <a:stretch>
+            <a:fillRect/>
+          </a:stretch>
+        </p:blipFill>
+        <p:spPr>
+          <a:xfrm>
+            <a:off x="5876318" y="1261872"/>
+            <a:ext cx="5852160" cy="4681728"/>
+          </a:xfrm>
+          <a:prstGeom prst="rect">
+            <a:avLst/>
+          </a:prstGeom>
+        </p:spPr>
+      </p:pic>
+      <p:pic>
+        <p:nvPicPr>
+          <p:cNvPr id="7" name="Picture 6" descr="arranque-no-instantaneo-paso2.png"/>
+          <p:cNvPicPr>
+            <a:picLocks noChangeAspect="1"/>
+          </p:cNvPicPr>
+          <p:nvPr/>
+        </p:nvPicPr>
+        <p:blipFill>
+          <a:blip r:embed="rId3"/>
+          <a:stretch>
+            <a:fillRect/>
+          </a:stretch>
+        </p:blipFill>
+        <p:spPr>
+          <a:xfrm>
+            <a:off x="5876318" y="1261872"/>
+            <a:ext cx="5852160" cy="4681728"/>
+          </a:xfrm>
+          <a:prstGeom prst="rect">
+            <a:avLst/>
+          </a:prstGeom>
+        </p:spPr>
+      </p:pic>
+      <p:sp>
+        <p:nvSpPr>
+          <p:cNvPr id="8" name="TextBox 7"/>
           <p:cNvSpPr txBox="1"/>
           <p:nvPr/>
         </p:nvSpPr>
         <p:spPr>
           <a:xfrm>
-            <a:off x="457200" y="1170432"/>
-            <a:ext cx="11277295" cy="5230368"/>
+            <a:off x="5870301" y="5961888"/>
+            <a:ext cx="5864193" cy="320040"/>
+          </a:xfrm>
+          <a:prstGeom prst="rect">
+            <a:avLst/>
+          </a:prstGeom>
+          <a:noFill/>
+        </p:spPr>
+        <p:txBody>
+          <a:bodyPr wrap="square">
+            <a:spAutoFit/>
+          </a:bodyPr>
+          <a:lstStyle/>
+          <a:p>
+            <a:pPr algn="ctr"/>
+            <a:r>
+              <a:rPr sz="1100" b="0" i="1">
+                <a:solidFill>
+                  <a:srgbClr val="666666"/>
+                </a:solidFill>
+                <a:latin typeface="Calibri"/>
+              </a:rPr>
+              <a:t>Clic para avanzar la animación</a:t>
+            </a:r>
+          </a:p>
+        </p:txBody>
+      </p:sp>
+      <p:sp>
+        <p:nvSpPr>
+          <p:cNvPr id="9" name="TextBox 8"/>
+          <p:cNvSpPr txBox="1"/>
+          <p:nvPr/>
+        </p:nvSpPr>
+        <p:spPr>
+          <a:xfrm>
+            <a:off x="457200" y="1353312"/>
+            <a:ext cx="5093061" cy="5047488"/>
           </a:xfrm>
           <a:prstGeom prst="rect">
             <a:avLst/>
@@ -5107,7 +7680,7 @@
                 </a:solidFill>
                 <a:latin typeface="Calibri"/>
               </a:rPr>
-              <a:t>–   Elegir bien la metrica es la decision mas fina del tema, y el ejemplo de la app es contundente.</a:t>
+              <a:t>–   La instancia nueva no aparece al instante: un contenedor liviano tarda de 10 a 60 s; una máquina virtual, de 2 a 5 min.</a:t>
             </a:r>
           </a:p>
           <a:p>
@@ -5123,7 +7696,7 @@
                 </a:solidFill>
                 <a:latin typeface="Calibri"/>
               </a:rPr>
-              <a:t>–   La CPU es la metrica por defecto y es la equivocada para la mayoria de las APIs, porque una API que sobre todo espera respuestas de la base de datos esta limitada por entrada y salida</a:t>
+              <a:t>–   Con el periodo de evaluación, el sistema reacciona minutos después de que empezó el problema.</a:t>
             </a:r>
           </a:p>
           <a:p>
@@ -5139,30 +7712,14 @@
                 </a:solidFill>
                 <a:latin typeface="Calibri"/>
               </a:rPr>
-              <a:t>–   No por procesador: cuando la latencia se dispara a 3 segundos porque el pool de conexiones esta agotado, la CPU puede seguir marcando un tranquilo 20 por ciento, el umbral del 70 nunca se cruza y el autoescalado no hace nada mientras los usuarios sufren.</a:t>
-            </a:r>
-          </a:p>
-          <a:p>
-            <a:pPr>
-              <a:spcAft>
-                <a:spcPts val="800"/>
-              </a:spcAft>
-            </a:pPr>
-            <a:r>
-              <a:rPr sz="2000" b="0" i="0">
-                <a:solidFill>
-                  <a:srgbClr val="333333"/>
-                </a:solidFill>
-                <a:latin typeface="Calibri"/>
-              </a:rPr>
-              <a:t>–   Para el componente de notificaciones de la app la metrica natural es el numero de mensajes esperando en la cola, no la CPU del worker: si hay 500 mensajes acumulados hay que agregar workers, y da igual cuanta CPU usen.</a:t>
-            </a:r>
-          </a:p>
-        </p:txBody>
-      </p:sp>
-      <p:sp>
-        <p:nvSpPr>
-          <p:cNvPr id="6" name="TextBox 5"/>
+              <a:t>–   Respuestas: holgura permanente, una cola delante o degradar con gracia.</a:t>
+            </a:r>
+          </a:p>
+        </p:txBody>
+      </p:sp>
+      <p:sp>
+        <p:nvSpPr>
+          <p:cNvPr id="10" name="TextBox 9"/>
           <p:cNvSpPr txBox="1"/>
           <p:nvPr/>
         </p:nvSpPr>
@@ -5200,6 +7757,89 @@
   <p:clrMapOvr>
     <a:masterClrMapping/>
   </p:clrMapOvr>
+  <p:timing>
+    <p:tnLst>
+      <p:par>
+        <p:cTn id="1" dur="indefinite" restart="never" nodeType="tmRoot">
+          <p:childTnLst>
+            <p:seq concurrent="1" nextAc="seek">
+              <p:cTn id="2" dur="indefinite" nodeType="mainSeq">
+                <p:childTnLst>
+                  <p:par>
+                    <p:cTn id="3" fill="hold">
+                      <p:stCondLst>
+                        <p:cond delay="indefinite"/>
+                      </p:stCondLst>
+                      <p:childTnLst>
+                        <p:par>
+                          <p:cTn id="4" fill="hold">
+                            <p:stCondLst>
+                              <p:cond delay="0"/>
+                            </p:stCondLst>
+                            <p:childTnLst>
+                              <p:par>
+                                <p:cTn id="5" presetID="10" presetClass="entr" presetSubtype="0" fill="hold" nodeType="clickEffect">
+                                  <p:stCondLst>
+                                    <p:cond delay="0"/>
+                                  </p:stCondLst>
+                                  <p:childTnLst>
+                                    <p:set>
+                                      <p:cBhvr>
+                                        <p:cTn id="6" dur="1" fill="hold">
+                                          <p:stCondLst>
+                                            <p:cond delay="0"/>
+                                          </p:stCondLst>
+                                        </p:cTn>
+                                        <p:tgtEl>
+                                          <p:spTgt spid="7"/>
+                                        </p:tgtEl>
+                                        <p:attrNameLst>
+                                          <p:attrName>style.visibility</p:attrName>
+                                        </p:attrNameLst>
+                                      </p:cBhvr>
+                                      <p:to>
+                                        <p:strVal val="visible"/>
+                                      </p:to>
+                                    </p:set>
+                                    <p:animEffect transition="in" filter="fade">
+                                      <p:cBhvr>
+                                        <p:cTn id="7" dur="450"/>
+                                        <p:tgtEl>
+                                          <p:spTgt spid="7"/>
+                                        </p:tgtEl>
+                                      </p:cBhvr>
+                                    </p:animEffect>
+                                  </p:childTnLst>
+                                </p:cTn>
+                              </p:par>
+                            </p:childTnLst>
+                          </p:cTn>
+                        </p:par>
+                      </p:childTnLst>
+                    </p:cTn>
+                  </p:par>
+                </p:childTnLst>
+              </p:cTn>
+              <p:prevCondLst>
+                <p:cond evt="onPrev" delay="0">
+                  <p:tgtEl>
+                    <p:sldTgt/>
+                  </p:tgtEl>
+                </p:cond>
+              </p:prevCondLst>
+              <p:nextCondLst>
+                <p:cond evt="onNext" delay="0">
+                  <p:tgtEl>
+                    <p:sldTgt/>
+                  </p:tgtEl>
+                </p:cond>
+              </p:nextCondLst>
+            </p:seq>
+          </p:childTnLst>
+        </p:cTn>
+      </p:par>
+    </p:tnLst>
+  </p:timing>
 </p:sld>
 </file>
 
@@ -5336,21 +7976,173 @@
                 </a:solidFill>
                 <a:latin typeface="Calibri"/>
               </a:rPr>
-              <a:t>Lo que NO escala (1/2)</a:t>
-            </a:r>
-          </a:p>
-        </p:txBody>
-      </p:sp>
-      <p:sp>
-        <p:nvSpPr>
-          <p:cNvPr id="5" name="TextBox 4"/>
+              <a:t>Elegir la metrica: la decision mas fina del tema</a:t>
+            </a:r>
+          </a:p>
+        </p:txBody>
+      </p:sp>
+      <p:sp>
+        <p:nvSpPr>
+          <p:cNvPr id="5" name="Rounded Rectangle 4"/>
+          <p:cNvSpPr/>
+          <p:nvPr/>
+        </p:nvSpPr>
+        <p:spPr>
+          <a:xfrm>
+            <a:off x="5803166" y="1188719"/>
+            <a:ext cx="5998464" cy="4828032"/>
+          </a:xfrm>
+          <a:prstGeom prst="roundRect">
+            <a:avLst>
+              <a:gd name="adj" fmla="val 4000"/>
+            </a:avLst>
+          </a:prstGeom>
+          <a:solidFill>
+            <a:srgbClr val="E8EEF4"/>
+          </a:solidFill>
+          <a:ln>
+            <a:noFill/>
+          </a:ln>
+        </p:spPr>
+        <p:style>
+          <a:lnRef idx="1">
+            <a:schemeClr val="accent1"/>
+          </a:lnRef>
+          <a:fillRef idx="3">
+            <a:schemeClr val="accent1"/>
+          </a:fillRef>
+          <a:effectRef idx="2">
+            <a:schemeClr val="accent1"/>
+          </a:effectRef>
+          <a:fontRef idx="minor">
+            <a:schemeClr val="lt1"/>
+          </a:fontRef>
+        </p:style>
+        <p:txBody>
+          <a:bodyPr rtlCol="0" anchor="ctr"/>
+          <a:lstStyle/>
+          <a:p>
+            <a:pPr algn="ctr"/>
+          </a:p>
+        </p:txBody>
+      </p:sp>
+      <p:pic>
+        <p:nvPicPr>
+          <p:cNvPr id="6" name="Picture 5" descr="metrica-correcta-paso1.png"/>
+          <p:cNvPicPr>
+            <a:picLocks noChangeAspect="1"/>
+          </p:cNvPicPr>
+          <p:nvPr/>
+        </p:nvPicPr>
+        <p:blipFill>
+          <a:blip r:embed="rId2"/>
+          <a:stretch>
+            <a:fillRect/>
+          </a:stretch>
+        </p:blipFill>
+        <p:spPr>
+          <a:xfrm>
+            <a:off x="5876318" y="1261872"/>
+            <a:ext cx="5852160" cy="4681728"/>
+          </a:xfrm>
+          <a:prstGeom prst="rect">
+            <a:avLst/>
+          </a:prstGeom>
+        </p:spPr>
+      </p:pic>
+      <p:pic>
+        <p:nvPicPr>
+          <p:cNvPr id="7" name="Picture 6" descr="metrica-correcta-paso2.png"/>
+          <p:cNvPicPr>
+            <a:picLocks noChangeAspect="1"/>
+          </p:cNvPicPr>
+          <p:nvPr/>
+        </p:nvPicPr>
+        <p:blipFill>
+          <a:blip r:embed="rId3"/>
+          <a:stretch>
+            <a:fillRect/>
+          </a:stretch>
+        </p:blipFill>
+        <p:spPr>
+          <a:xfrm>
+            <a:off x="5876318" y="1261872"/>
+            <a:ext cx="5852160" cy="4681728"/>
+          </a:xfrm>
+          <a:prstGeom prst="rect">
+            <a:avLst/>
+          </a:prstGeom>
+        </p:spPr>
+      </p:pic>
+      <p:pic>
+        <p:nvPicPr>
+          <p:cNvPr id="8" name="Picture 7" descr="metrica-correcta-paso3.png"/>
+          <p:cNvPicPr>
+            <a:picLocks noChangeAspect="1"/>
+          </p:cNvPicPr>
+          <p:nvPr/>
+        </p:nvPicPr>
+        <p:blipFill>
+          <a:blip r:embed="rId4"/>
+          <a:stretch>
+            <a:fillRect/>
+          </a:stretch>
+        </p:blipFill>
+        <p:spPr>
+          <a:xfrm>
+            <a:off x="5876318" y="1261872"/>
+            <a:ext cx="5852160" cy="4681728"/>
+          </a:xfrm>
+          <a:prstGeom prst="rect">
+            <a:avLst/>
+          </a:prstGeom>
+        </p:spPr>
+      </p:pic>
+      <p:sp>
+        <p:nvSpPr>
+          <p:cNvPr id="13" name="TextBox 12"/>
           <p:cNvSpPr txBox="1"/>
           <p:nvPr/>
         </p:nvSpPr>
         <p:spPr>
           <a:xfrm>
-            <a:off x="457200" y="1170432"/>
-            <a:ext cx="11277295" cy="5230368"/>
+            <a:off x="5870301" y="5961888"/>
+            <a:ext cx="5864193" cy="320040"/>
+          </a:xfrm>
+          <a:prstGeom prst="rect">
+            <a:avLst/>
+          </a:prstGeom>
+          <a:noFill/>
+        </p:spPr>
+        <p:txBody>
+          <a:bodyPr wrap="square">
+            <a:spAutoFit/>
+          </a:bodyPr>
+          <a:lstStyle/>
+          <a:p>
+            <a:pPr algn="ctr"/>
+            <a:r>
+              <a:rPr sz="1100" b="0" i="1">
+                <a:solidFill>
+                  <a:srgbClr val="666666"/>
+                </a:solidFill>
+                <a:latin typeface="Calibri"/>
+              </a:rPr>
+              <a:t>Clic para avanzar la animación</a:t>
+            </a:r>
+          </a:p>
+        </p:txBody>
+      </p:sp>
+      <p:sp>
+        <p:nvSpPr>
+          <p:cNvPr id="14" name="TextBox 13"/>
+          <p:cNvSpPr txBox="1"/>
+          <p:nvPr/>
+        </p:nvSpPr>
+        <p:spPr>
+          <a:xfrm>
+            <a:off x="457200" y="1353312"/>
+            <a:ext cx="5093061" cy="5047488"/>
           </a:xfrm>
           <a:prstGeom prst="rect">
             <a:avLst/>
@@ -5375,7 +8167,7 @@
                 </a:solidFill>
                 <a:latin typeface="Calibri"/>
               </a:rPr>
-              <a:t>–   La capa de datos es el caso central: agregar instancias de API es casi gratis conceptualmente, pero una base de datos relacional que debe mantener consistencia tiene un unico escritor, y ese escritor no se multiplica sin cambiar el modelo.</a:t>
+              <a:t>–   La CPU es la métrica por defecto y la equivocada para una API que espera a la base de datos.</a:t>
             </a:r>
           </a:p>
           <a:p>
@@ -5391,7 +8183,7 @@
                 </a:solidFill>
                 <a:latin typeface="Calibri"/>
               </a:rPr>
-              <a:t>–   Se pueden agregar replicas de lectura, y ahi entra un concepto a definir: el retraso de replicacion, esos milisegundos o segundos en que la replica todavia no tiene el ultimo cambio</a:t>
+              <a:t>–   Con el pool agotado, la latencia sube a 3 s y la CPU sigue en 20 %: el umbral nunca se cruza.</a:t>
             </a:r>
           </a:p>
           <a:p>
@@ -5407,7 +8199,7 @@
                 </a:solidFill>
                 <a:latin typeface="Calibri"/>
               </a:rPr>
-              <a:t>–   Que produce el sintoma de que el usuario guarda un dato, la pagina lo relee de una replica y el dato no aparece.</a:t>
+              <a:t>–   Para la API: latencia p95 o peticiones por segundo por instancia; para el worker: mensajes en la cola.</a:t>
             </a:r>
           </a:p>
           <a:p>
@@ -5423,14 +8215,14 @@
                 </a:solidFill>
                 <a:latin typeface="Calibri"/>
               </a:rPr>
-              <a:t>–   Las alternativas mas agresivas, particionar los datos por clave o cambiar a un modelo sin esquema fijo, son decisiones de arquitectura mayores y estan fuera del alcance de la app v1</a:t>
-            </a:r>
-          </a:p>
-        </p:txBody>
-      </p:sp>
-      <p:sp>
-        <p:nvSpPr>
-          <p:cNvPr id="6" name="TextBox 5"/>
+              <a:t>–   La métrica correcta mide el recurso que se agota primero.</a:t>
+            </a:r>
+          </a:p>
+        </p:txBody>
+      </p:sp>
+      <p:sp>
+        <p:nvSpPr>
+          <p:cNvPr id="15" name="TextBox 14"/>
           <p:cNvSpPr txBox="1"/>
           <p:nvPr/>
         </p:nvSpPr>
@@ -5468,6 +8260,142 @@
   <p:clrMapOvr>
     <a:masterClrMapping/>
   </p:clrMapOvr>
+  <p:timing>
+    <p:tnLst>
+      <p:par>
+        <p:cTn id="1" dur="indefinite" restart="never" nodeType="tmRoot">
+          <p:childTnLst>
+            <p:seq concurrent="1" nextAc="seek">
+              <p:cTn id="2" dur="indefinite" nodeType="mainSeq">
+                <p:childTnLst>
+                  <p:par>
+                    <p:cTn id="3" fill="hold">
+                      <p:stCondLst>
+                        <p:cond delay="indefinite"/>
+                      </p:stCondLst>
+                      <p:childTnLst>
+                        <p:par>
+                          <p:cTn id="4" fill="hold">
+                            <p:stCondLst>
+                              <p:cond delay="0"/>
+                            </p:stCondLst>
+                            <p:childTnLst>
+                              <p:par>
+                                <p:cTn id="5" presetID="10" presetClass="entr" presetSubtype="0" fill="hold" nodeType="clickEffect">
+                                  <p:stCondLst>
+                                    <p:cond delay="0"/>
+                                  </p:stCondLst>
+                                  <p:childTnLst>
+                                    <p:set>
+                                      <p:cBhvr>
+                                        <p:cTn id="6" dur="1" fill="hold">
+                                          <p:stCondLst>
+                                            <p:cond delay="0"/>
+                                          </p:stCondLst>
+                                        </p:cTn>
+                                        <p:tgtEl>
+                                          <p:spTgt spid="7"/>
+                                        </p:tgtEl>
+                                        <p:attrNameLst>
+                                          <p:attrName>style.visibility</p:attrName>
+                                        </p:attrNameLst>
+                                      </p:cBhvr>
+                                      <p:to>
+                                        <p:strVal val="visible"/>
+                                      </p:to>
+                                    </p:set>
+                                    <p:animEffect transition="in" filter="fade">
+                                      <p:cBhvr>
+                                        <p:cTn id="7" dur="450"/>
+                                        <p:tgtEl>
+                                          <p:spTgt spid="7"/>
+                                        </p:tgtEl>
+                                      </p:cBhvr>
+                                    </p:animEffect>
+                                  </p:childTnLst>
+                                </p:cTn>
+                              </p:par>
+                            </p:childTnLst>
+                          </p:cTn>
+                        </p:par>
+                      </p:childTnLst>
+                    </p:cTn>
+                  </p:par>
+                  <p:par>
+                    <p:cTn id="8" fill="hold">
+                      <p:stCondLst>
+                        <p:cond delay="indefinite"/>
+                      </p:stCondLst>
+                      <p:childTnLst>
+                        <p:par>
+                          <p:cTn id="9" fill="hold">
+                            <p:stCondLst>
+                              <p:cond delay="0"/>
+                            </p:stCondLst>
+                            <p:childTnLst>
+                              <p:par>
+                                <p:cTn id="10" presetID="10" presetClass="entr" presetSubtype="0" fill="hold" nodeType="clickEffect">
+                                  <p:stCondLst>
+                                    <p:cond delay="0"/>
+                                  </p:stCondLst>
+                                  <p:childTnLst>
+                                    <p:set>
+                                      <p:cBhvr>
+                                        <p:cTn id="11" dur="1" fill="hold">
+                                          <p:stCondLst>
+                                            <p:cond delay="0"/>
+                                          </p:stCondLst>
+                                        </p:cTn>
+                                        <p:tgtEl>
+                                          <p:spTgt spid="8"/>
+                                        </p:tgtEl>
+                                        <p:attrNameLst>
+                                          <p:attrName>style.visibility</p:attrName>
+                                        </p:attrNameLst>
+                                      </p:cBhvr>
+                                      <p:to>
+                                        <p:strVal val="visible"/>
+                                      </p:to>
+                                    </p:set>
+                                    <p:animEffect transition="in" filter="fade">
+                                      <p:cBhvr>
+                                        <p:cTn id="12" dur="450"/>
+                                        <p:tgtEl>
+                                          <p:spTgt spid="8"/>
+                                        </p:tgtEl>
+                                      </p:cBhvr>
+                                    </p:animEffect>
+                                  </p:childTnLst>
+                                </p:cTn>
+                              </p:par>
+                            </p:childTnLst>
+                          </p:cTn>
+                        </p:par>
+                      </p:childTnLst>
+                    </p:cTn>
+                  </p:par>
+                </p:childTnLst>
+              </p:cTn>
+              <p:prevCondLst>
+                <p:cond evt="onPrev" delay="0">
+                  <p:tgtEl>
+                    <p:sldTgt/>
+                  </p:tgtEl>
+                </p:cond>
+              </p:prevCondLst>
+              <p:nextCondLst>
+                <p:cond evt="onNext" delay="0">
+                  <p:tgtEl>
+                    <p:sldTgt/>
+                  </p:tgtEl>
+                </p:cond>
+              </p:nextCondLst>
+            </p:seq>
+          </p:childTnLst>
+        </p:cTn>
+      </p:par>
+    </p:tnLst>
+  </p:timing>
 </p:sld>
 </file>
 
@@ -5604,21 +8532,173 @@
                 </a:solidFill>
                 <a:latin typeface="Calibri"/>
               </a:rPr>
-              <a:t>Lo que NO escala (2/2)</a:t>
-            </a:r>
-          </a:p>
-        </p:txBody>
-      </p:sp>
-      <p:sp>
-        <p:nvSpPr>
-          <p:cNvPr id="5" name="TextBox 4"/>
+              <a:t>Lo que NO escala</a:t>
+            </a:r>
+          </a:p>
+        </p:txBody>
+      </p:sp>
+      <p:sp>
+        <p:nvSpPr>
+          <p:cNvPr id="5" name="Rounded Rectangle 4"/>
+          <p:cNvSpPr/>
+          <p:nvPr/>
+        </p:nvSpPr>
+        <p:spPr>
+          <a:xfrm>
+            <a:off x="5803166" y="1188719"/>
+            <a:ext cx="5998464" cy="4828032"/>
+          </a:xfrm>
+          <a:prstGeom prst="roundRect">
+            <a:avLst>
+              <a:gd name="adj" fmla="val 4000"/>
+            </a:avLst>
+          </a:prstGeom>
+          <a:solidFill>
+            <a:srgbClr val="E8EEF4"/>
+          </a:solidFill>
+          <a:ln>
+            <a:noFill/>
+          </a:ln>
+        </p:spPr>
+        <p:style>
+          <a:lnRef idx="1">
+            <a:schemeClr val="accent1"/>
+          </a:lnRef>
+          <a:fillRef idx="3">
+            <a:schemeClr val="accent1"/>
+          </a:fillRef>
+          <a:effectRef idx="2">
+            <a:schemeClr val="accent1"/>
+          </a:effectRef>
+          <a:fontRef idx="minor">
+            <a:schemeClr val="lt1"/>
+          </a:fontRef>
+        </p:style>
+        <p:txBody>
+          <a:bodyPr rtlCol="0" anchor="ctr"/>
+          <a:lstStyle/>
+          <a:p>
+            <a:pPr algn="ctr"/>
+          </a:p>
+        </p:txBody>
+      </p:sp>
+      <p:pic>
+        <p:nvPicPr>
+          <p:cNvPr id="6" name="Picture 5" descr="lo-que-no-escala-paso1.png"/>
+          <p:cNvPicPr>
+            <a:picLocks noChangeAspect="1"/>
+          </p:cNvPicPr>
+          <p:nvPr/>
+        </p:nvPicPr>
+        <p:blipFill>
+          <a:blip r:embed="rId2"/>
+          <a:stretch>
+            <a:fillRect/>
+          </a:stretch>
+        </p:blipFill>
+        <p:spPr>
+          <a:xfrm>
+            <a:off x="5876318" y="1261872"/>
+            <a:ext cx="5852160" cy="4681728"/>
+          </a:xfrm>
+          <a:prstGeom prst="rect">
+            <a:avLst/>
+          </a:prstGeom>
+        </p:spPr>
+      </p:pic>
+      <p:pic>
+        <p:nvPicPr>
+          <p:cNvPr id="7" name="Picture 6" descr="lo-que-no-escala-paso2.png"/>
+          <p:cNvPicPr>
+            <a:picLocks noChangeAspect="1"/>
+          </p:cNvPicPr>
+          <p:nvPr/>
+        </p:nvPicPr>
+        <p:blipFill>
+          <a:blip r:embed="rId3"/>
+          <a:stretch>
+            <a:fillRect/>
+          </a:stretch>
+        </p:blipFill>
+        <p:spPr>
+          <a:xfrm>
+            <a:off x="5876318" y="1261872"/>
+            <a:ext cx="5852160" cy="4681728"/>
+          </a:xfrm>
+          <a:prstGeom prst="rect">
+            <a:avLst/>
+          </a:prstGeom>
+        </p:spPr>
+      </p:pic>
+      <p:pic>
+        <p:nvPicPr>
+          <p:cNvPr id="8" name="Picture 7" descr="lo-que-no-escala-paso3.png"/>
+          <p:cNvPicPr>
+            <a:picLocks noChangeAspect="1"/>
+          </p:cNvPicPr>
+          <p:nvPr/>
+        </p:nvPicPr>
+        <p:blipFill>
+          <a:blip r:embed="rId4"/>
+          <a:stretch>
+            <a:fillRect/>
+          </a:stretch>
+        </p:blipFill>
+        <p:spPr>
+          <a:xfrm>
+            <a:off x="5876318" y="1261872"/>
+            <a:ext cx="5852160" cy="4681728"/>
+          </a:xfrm>
+          <a:prstGeom prst="rect">
+            <a:avLst/>
+          </a:prstGeom>
+        </p:spPr>
+      </p:pic>
+      <p:sp>
+        <p:nvSpPr>
+          <p:cNvPr id="13" name="TextBox 12"/>
           <p:cNvSpPr txBox="1"/>
           <p:nvPr/>
         </p:nvSpPr>
         <p:spPr>
           <a:xfrm>
-            <a:off x="457200" y="1170432"/>
-            <a:ext cx="11277295" cy="5230368"/>
+            <a:off x="5870301" y="5961888"/>
+            <a:ext cx="5864193" cy="320040"/>
+          </a:xfrm>
+          <a:prstGeom prst="rect">
+            <a:avLst/>
+          </a:prstGeom>
+          <a:noFill/>
+        </p:spPr>
+        <p:txBody>
+          <a:bodyPr wrap="square">
+            <a:spAutoFit/>
+          </a:bodyPr>
+          <a:lstStyle/>
+          <a:p>
+            <a:pPr algn="ctr"/>
+            <a:r>
+              <a:rPr sz="1100" b="0" i="1">
+                <a:solidFill>
+                  <a:srgbClr val="666666"/>
+                </a:solidFill>
+                <a:latin typeface="Calibri"/>
+              </a:rPr>
+              <a:t>Clic para avanzar la animación</a:t>
+            </a:r>
+          </a:p>
+        </p:txBody>
+      </p:sp>
+      <p:sp>
+        <p:nvSpPr>
+          <p:cNvPr id="14" name="TextBox 13"/>
+          <p:cNvSpPr txBox="1"/>
+          <p:nvPr/>
+        </p:nvSpPr>
+        <p:spPr>
+          <a:xfrm>
+            <a:off x="457200" y="1353312"/>
+            <a:ext cx="5093061" cy="5047488"/>
           </a:xfrm>
           <a:prstGeom prst="rect">
             <a:avLst/>
@@ -5643,7 +8723,7 @@
                 </a:solidFill>
                 <a:latin typeface="Calibri"/>
               </a:rPr>
-              <a:t>–   Decirlo explicitamente en el informe es una respuesta correcta, no una debilidad.</a:t>
+              <a:t>–   Una base relacional tiene un único escritor: más instancias de la API no la multiplican.</a:t>
             </a:r>
           </a:p>
           <a:p>
@@ -5659,7 +8739,7 @@
                 </a:solidFill>
                 <a:latin typeface="Calibri"/>
               </a:rPr>
-              <a:t>–   Hay un detalle aritmetico que es la mejor leccion del dia: si cada instancia de la API abre un pool de 20 conexiones y el autoescalado sube a 6 instancias</a:t>
+              <a:t>–   6 instancias con 20 conexiones piden 120; una base pequeña admite del orden de 100: escalar la API tumba la base.</a:t>
             </a:r>
           </a:p>
           <a:p>
@@ -5675,14 +8755,30 @@
                 </a:solidFill>
                 <a:latin typeface="Calibri"/>
               </a:rPr>
-              <a:t>–   El sistema pide 120 conexiones, mientras que una base de datos gestionada pequena suele admitir del orden de 100; el resultado es que escalar la API tumba la base de datos.</a:t>
-            </a:r>
-          </a:p>
-        </p:txBody>
-      </p:sp>
-      <p:sp>
-        <p:nvSpPr>
-          <p:cNvPr id="6" name="TextBox 5"/>
+              <a:t>–   Las réplicas de lectura ayudan, con retraso de replicación.</a:t>
+            </a:r>
+          </a:p>
+          <a:p>
+            <a:pPr>
+              <a:spcAft>
+                <a:spcPts val="800"/>
+              </a:spcAft>
+            </a:pPr>
+            <a:r>
+              <a:rPr sz="2000" b="0" i="0">
+                <a:solidFill>
+                  <a:srgbClr val="333333"/>
+                </a:solidFill>
+                <a:latin typeface="Calibri"/>
+              </a:rPr>
+              <a:t>–   Declarar lo que no escala es una respuesta correcta, no una debilidad.</a:t>
+            </a:r>
+          </a:p>
+        </p:txBody>
+      </p:sp>
+      <p:sp>
+        <p:nvSpPr>
+          <p:cNvPr id="15" name="TextBox 14"/>
           <p:cNvSpPr txBox="1"/>
           <p:nvPr/>
         </p:nvSpPr>
@@ -5720,6 +8816,142 @@
   <p:clrMapOvr>
     <a:masterClrMapping/>
   </p:clrMapOvr>
+  <p:timing>
+    <p:tnLst>
+      <p:par>
+        <p:cTn id="1" dur="indefinite" restart="never" nodeType="tmRoot">
+          <p:childTnLst>
+            <p:seq concurrent="1" nextAc="seek">
+              <p:cTn id="2" dur="indefinite" nodeType="mainSeq">
+                <p:childTnLst>
+                  <p:par>
+                    <p:cTn id="3" fill="hold">
+                      <p:stCondLst>
+                        <p:cond delay="indefinite"/>
+                      </p:stCondLst>
+                      <p:childTnLst>
+                        <p:par>
+                          <p:cTn id="4" fill="hold">
+                            <p:stCondLst>
+                              <p:cond delay="0"/>
+                            </p:stCondLst>
+                            <p:childTnLst>
+                              <p:par>
+                                <p:cTn id="5" presetID="10" presetClass="entr" presetSubtype="0" fill="hold" nodeType="clickEffect">
+                                  <p:stCondLst>
+                                    <p:cond delay="0"/>
+                                  </p:stCondLst>
+                                  <p:childTnLst>
+                                    <p:set>
+                                      <p:cBhvr>
+                                        <p:cTn id="6" dur="1" fill="hold">
+                                          <p:stCondLst>
+                                            <p:cond delay="0"/>
+                                          </p:stCondLst>
+                                        </p:cTn>
+                                        <p:tgtEl>
+                                          <p:spTgt spid="7"/>
+                                        </p:tgtEl>
+                                        <p:attrNameLst>
+                                          <p:attrName>style.visibility</p:attrName>
+                                        </p:attrNameLst>
+                                      </p:cBhvr>
+                                      <p:to>
+                                        <p:strVal val="visible"/>
+                                      </p:to>
+                                    </p:set>
+                                    <p:animEffect transition="in" filter="fade">
+                                      <p:cBhvr>
+                                        <p:cTn id="7" dur="450"/>
+                                        <p:tgtEl>
+                                          <p:spTgt spid="7"/>
+                                        </p:tgtEl>
+                                      </p:cBhvr>
+                                    </p:animEffect>
+                                  </p:childTnLst>
+                                </p:cTn>
+                              </p:par>
+                            </p:childTnLst>
+                          </p:cTn>
+                        </p:par>
+                      </p:childTnLst>
+                    </p:cTn>
+                  </p:par>
+                  <p:par>
+                    <p:cTn id="8" fill="hold">
+                      <p:stCondLst>
+                        <p:cond delay="indefinite"/>
+                      </p:stCondLst>
+                      <p:childTnLst>
+                        <p:par>
+                          <p:cTn id="9" fill="hold">
+                            <p:stCondLst>
+                              <p:cond delay="0"/>
+                            </p:stCondLst>
+                            <p:childTnLst>
+                              <p:par>
+                                <p:cTn id="10" presetID="10" presetClass="entr" presetSubtype="0" fill="hold" nodeType="clickEffect">
+                                  <p:stCondLst>
+                                    <p:cond delay="0"/>
+                                  </p:stCondLst>
+                                  <p:childTnLst>
+                                    <p:set>
+                                      <p:cBhvr>
+                                        <p:cTn id="11" dur="1" fill="hold">
+                                          <p:stCondLst>
+                                            <p:cond delay="0"/>
+                                          </p:stCondLst>
+                                        </p:cTn>
+                                        <p:tgtEl>
+                                          <p:spTgt spid="8"/>
+                                        </p:tgtEl>
+                                        <p:attrNameLst>
+                                          <p:attrName>style.visibility</p:attrName>
+                                        </p:attrNameLst>
+                                      </p:cBhvr>
+                                      <p:to>
+                                        <p:strVal val="visible"/>
+                                      </p:to>
+                                    </p:set>
+                                    <p:animEffect transition="in" filter="fade">
+                                      <p:cBhvr>
+                                        <p:cTn id="12" dur="450"/>
+                                        <p:tgtEl>
+                                          <p:spTgt spid="8"/>
+                                        </p:tgtEl>
+                                      </p:cBhvr>
+                                    </p:animEffect>
+                                  </p:childTnLst>
+                                </p:cTn>
+                              </p:par>
+                            </p:childTnLst>
+                          </p:cTn>
+                        </p:par>
+                      </p:childTnLst>
+                    </p:cTn>
+                  </p:par>
+                </p:childTnLst>
+              </p:cTn>
+              <p:prevCondLst>
+                <p:cond evt="onPrev" delay="0">
+                  <p:tgtEl>
+                    <p:sldTgt/>
+                  </p:tgtEl>
+                </p:cond>
+              </p:prevCondLst>
+              <p:nextCondLst>
+                <p:cond evt="onNext" delay="0">
+                  <p:tgtEl>
+                    <p:sldTgt/>
+                  </p:tgtEl>
+                </p:cond>
+              </p:nextCondLst>
+            </p:seq>
+          </p:childTnLst>
+        </p:cTn>
+      </p:par>
+    </p:tnLst>
+  </p:timing>
 </p:sld>
 </file>
 
@@ -5856,21 +9088,125 @@
                 </a:solidFill>
                 <a:latin typeface="Calibri"/>
               </a:rPr>
-              <a:t>Preguntas frecuentes y cierre conceptual (1/2)</a:t>
-            </a:r>
-          </a:p>
-        </p:txBody>
-      </p:sp>
-      <p:sp>
-        <p:nvSpPr>
-          <p:cNvPr id="5" name="TextBox 4"/>
+              <a:t>Límites y costos</a:t>
+            </a:r>
+          </a:p>
+        </p:txBody>
+      </p:sp>
+      <p:sp>
+        <p:nvSpPr>
+          <p:cNvPr id="5" name="Rounded Rectangle 4"/>
+          <p:cNvSpPr/>
+          <p:nvPr/>
+        </p:nvSpPr>
+        <p:spPr>
+          <a:xfrm>
+            <a:off x="5797149" y="1462487"/>
+            <a:ext cx="6010497" cy="4280496"/>
+          </a:xfrm>
+          <a:prstGeom prst="roundRect">
+            <a:avLst>
+              <a:gd name="adj" fmla="val 4000"/>
+            </a:avLst>
+          </a:prstGeom>
+          <a:solidFill>
+            <a:srgbClr val="E8EEF4"/>
+          </a:solidFill>
+          <a:ln>
+            <a:noFill/>
+          </a:ln>
+        </p:spPr>
+        <p:style>
+          <a:lnRef idx="1">
+            <a:schemeClr val="accent1"/>
+          </a:lnRef>
+          <a:fillRef idx="3">
+            <a:schemeClr val="accent1"/>
+          </a:fillRef>
+          <a:effectRef idx="2">
+            <a:schemeClr val="accent1"/>
+          </a:effectRef>
+          <a:fontRef idx="minor">
+            <a:schemeClr val="lt1"/>
+          </a:fontRef>
+        </p:style>
+        <p:txBody>
+          <a:bodyPr rtlCol="0" anchor="ctr"/>
+          <a:lstStyle/>
+          <a:p>
+            <a:pPr algn="ctr"/>
+          </a:p>
+        </p:txBody>
+      </p:sp>
+      <p:pic>
+        <p:nvPicPr>
+          <p:cNvPr id="6" name="Picture 5" descr="money-coins-limit.jpg"/>
+          <p:cNvPicPr>
+            <a:picLocks noChangeAspect="1"/>
+          </p:cNvPicPr>
+          <p:nvPr/>
+        </p:nvPicPr>
+        <p:blipFill>
+          <a:blip r:embed="rId2"/>
+          <a:stretch>
+            <a:fillRect/>
+          </a:stretch>
+        </p:blipFill>
+        <p:spPr>
+          <a:xfrm>
+            <a:off x="5870301" y="1535639"/>
+            <a:ext cx="5864193" cy="4134192"/>
+          </a:xfrm>
+          <a:prstGeom prst="rect">
+            <a:avLst/>
+          </a:prstGeom>
+        </p:spPr>
+      </p:pic>
+      <p:sp>
+        <p:nvSpPr>
+          <p:cNvPr id="7" name="TextBox 6"/>
           <p:cNvSpPr txBox="1"/>
           <p:nvPr/>
         </p:nvSpPr>
         <p:spPr>
           <a:xfrm>
-            <a:off x="457200" y="1170432"/>
-            <a:ext cx="11277295" cy="5230368"/>
+            <a:off x="5870301" y="5961888"/>
+            <a:ext cx="5864193" cy="320040"/>
+          </a:xfrm>
+          <a:prstGeom prst="rect">
+            <a:avLst/>
+          </a:prstGeom>
+          <a:noFill/>
+        </p:spPr>
+        <p:txBody>
+          <a:bodyPr wrap="square">
+            <a:spAutoFit/>
+          </a:bodyPr>
+          <a:lstStyle/>
+          <a:p>
+            <a:pPr algn="ctr"/>
+            <a:r>
+              <a:rPr sz="1100" b="0" i="1">
+                <a:solidFill>
+                  <a:srgbClr val="666666"/>
+                </a:solidFill>
+                <a:latin typeface="Calibri"/>
+              </a:rPr>
+              <a:t>Foto: Public Domain Pictures · Pexels</a:t>
+            </a:r>
+          </a:p>
+        </p:txBody>
+      </p:sp>
+      <p:sp>
+        <p:nvSpPr>
+          <p:cNvPr id="8" name="TextBox 7"/>
+          <p:cNvSpPr txBox="1"/>
+          <p:nvPr/>
+        </p:nvSpPr>
+        <p:spPr>
+          <a:xfrm>
+            <a:off x="457200" y="1353312"/>
+            <a:ext cx="5093061" cy="5047488"/>
           </a:xfrm>
           <a:prstGeom prst="rect">
             <a:avLst/>
@@ -5895,7 +9231,7 @@
                 </a:solidFill>
                 <a:latin typeface="Calibri"/>
               </a:rPr>
-              <a:t>–   La primera es por que documentar limites si el autoescalado es automatico; la respuesta es que automatico significa que ejecuta la politica que alguien escribio, no que decide bien: sin maximo escala el costo</a:t>
+              <a:t>–   max replicas · min replicas · cooldown — se definen aunque sean hipotéticos.</a:t>
             </a:r>
           </a:p>
           <a:p>
@@ -5911,7 +9247,7 @@
                 </a:solidFill>
                 <a:latin typeface="Calibri"/>
               </a:rPr>
-              <a:t>–   Sin minimo pierde disponibilidad, con la metrica equivocada no reacciona y con umbrales simetricos oscila; el automatismo amplifica la calidad de la decision humana en ambos sentidos.</a:t>
+              <a:t>–   Escalar mal = costo (enlace con Clase 10).</a:t>
             </a:r>
           </a:p>
           <a:p>
@@ -5927,14 +9263,84 @@
                 </a:solidFill>
                 <a:latin typeface="Calibri"/>
               </a:rPr>
-              <a:t>–   La segunda es si no seria mejor serverless, que "escala infinito"; la respuesta reconoce la ventaja real, que escala por peticion y no cobra en reposo</a:t>
-            </a:r>
-          </a:p>
-        </p:txBody>
-      </p:sp>
-      <p:sp>
-        <p:nvSpPr>
-          <p:cNvPr id="6" name="TextBox 5"/>
+              <a:t>–   </a:t>
+            </a:r>
+            <a:r>
+              <a:rPr sz="2000" b="1" i="0">
+                <a:solidFill>
+                  <a:srgbClr val="333333"/>
+                </a:solidFill>
+                <a:latin typeface="Calibri"/>
+              </a:rPr>
+              <a:t>min</a:t>
+            </a:r>
+            <a:r>
+              <a:rPr sz="2000" b="0" i="0">
+                <a:solidFill>
+                  <a:srgbClr val="333333"/>
+                </a:solidFill>
+                <a:latin typeface="Calibri"/>
+              </a:rPr>
+              <a:t> = capacidad base siempre encendida, y su costo fijo · </a:t>
+            </a:r>
+            <a:r>
+              <a:rPr sz="2000" b="1" i="0">
+                <a:solidFill>
+                  <a:srgbClr val="333333"/>
+                </a:solidFill>
+                <a:latin typeface="Calibri"/>
+              </a:rPr>
+              <a:t>max</a:t>
+            </a:r>
+            <a:r>
+              <a:rPr sz="2000" b="0" i="0">
+                <a:solidFill>
+                  <a:srgbClr val="333333"/>
+                </a:solidFill>
+                <a:latin typeface="Calibri"/>
+              </a:rPr>
+              <a:t> = techo de gasto y de conexiones a la base.</a:t>
+            </a:r>
+          </a:p>
+          <a:p>
+            <a:pPr>
+              <a:spcAft>
+                <a:spcPts val="800"/>
+              </a:spcAft>
+            </a:pPr>
+            <a:r>
+              <a:rPr sz="2000" b="0" i="0">
+                <a:solidFill>
+                  <a:srgbClr val="333333"/>
+                </a:solidFill>
+                <a:latin typeface="Calibri"/>
+              </a:rPr>
+              <a:t>–   </a:t>
+            </a:r>
+            <a:r>
+              <a:rPr sz="2000" b="1" i="0">
+                <a:solidFill>
+                  <a:srgbClr val="333333"/>
+                </a:solidFill>
+                <a:latin typeface="Calibri"/>
+              </a:rPr>
+              <a:t>Cooldown</a:t>
+            </a:r>
+            <a:r>
+              <a:rPr sz="2000" b="0" i="0">
+                <a:solidFill>
+                  <a:srgbClr val="333333"/>
+                </a:solidFill>
+                <a:latin typeface="Calibri"/>
+              </a:rPr>
+              <a:t> = espera tras escalar (por ejemplo 5 minutos) para no subir y bajar en ciclos.</a:t>
+            </a:r>
+          </a:p>
+        </p:txBody>
+      </p:sp>
+      <p:sp>
+        <p:nvSpPr>
+          <p:cNvPr id="9" name="TextBox 8"/>
           <p:cNvSpPr txBox="1"/>
           <p:nvPr/>
         </p:nvSpPr>
@@ -6002,7 +9408,7 @@
         <p:spPr>
           <a:xfrm>
             <a:off x="0" y="0"/>
-            <a:ext cx="12191695" cy="960120"/>
+            <a:ext cx="12191695" cy="1170432"/>
           </a:xfrm>
           <a:prstGeom prst="rect">
             <a:avLst/>
@@ -6044,7 +9450,7 @@
         </p:nvSpPr>
         <p:spPr>
           <a:xfrm>
-            <a:off x="0" y="960120"/>
+            <a:off x="0" y="1170432"/>
             <a:ext cx="12191695" cy="41148"/>
           </a:xfrm>
           <a:prstGeom prst="rect">
@@ -6088,7 +9494,7 @@
         <p:spPr>
           <a:xfrm>
             <a:off x="457200" y="164592"/>
-            <a:ext cx="11277295" cy="502920"/>
+            <a:ext cx="11277295" cy="384048"/>
           </a:xfrm>
           <a:prstGeom prst="rect">
             <a:avLst/>
@@ -6108,7 +9514,7 @@
                 </a:solidFill>
                 <a:latin typeface="Calibri"/>
               </a:rPr>
-              <a:t>Preguntas frecuentes y cierre conceptual (2/2)</a:t>
+              <a:t>Del boceto al código Mermaid</a:t>
             </a:r>
           </a:p>
         </p:txBody>
@@ -6121,8 +9527,8 @@
         </p:nvSpPr>
         <p:spPr>
           <a:xfrm>
-            <a:off x="457200" y="1170432"/>
-            <a:ext cx="11277295" cy="5230368"/>
+            <a:off x="457200" y="566928"/>
+            <a:ext cx="11277295" cy="411480"/>
           </a:xfrm>
           <a:prstGeom prst="rect">
             <a:avLst/>
@@ -6135,58 +9541,705 @@
           </a:bodyPr>
           <a:lstStyle/>
           <a:p>
+            <a:r>
+              <a:rPr sz="1400" b="0" i="0">
+                <a:solidFill>
+                  <a:srgbClr val="B8D8EE"/>
+                </a:solidFill>
+                <a:latin typeface="Calibri"/>
+              </a:rPr>
+              <a:t>El diagrama se escribe como código: se versiona, se compara y se corrige</a:t>
+            </a:r>
+          </a:p>
+        </p:txBody>
+      </p:sp>
+      <p:sp>
+        <p:nvSpPr>
+          <p:cNvPr id="6" name="Rounded Rectangle 5"/>
+          <p:cNvSpPr/>
+          <p:nvPr/>
+        </p:nvSpPr>
+        <p:spPr>
+          <a:xfrm>
+            <a:off x="457200" y="1659636"/>
+            <a:ext cx="11277295" cy="1051560"/>
+          </a:xfrm>
+          <a:prstGeom prst="roundRect">
+            <a:avLst>
+              <a:gd name="adj" fmla="val 12000"/>
+            </a:avLst>
+          </a:prstGeom>
+          <a:solidFill>
+            <a:srgbClr val="F2F2F2"/>
+          </a:solidFill>
+          <a:ln>
+            <a:noFill/>
+          </a:ln>
+        </p:spPr>
+        <p:style>
+          <a:lnRef idx="1">
+            <a:schemeClr val="accent1"/>
+          </a:lnRef>
+          <a:fillRef idx="3">
+            <a:schemeClr val="accent1"/>
+          </a:fillRef>
+          <a:effectRef idx="2">
+            <a:schemeClr val="accent1"/>
+          </a:effectRef>
+          <a:fontRef idx="minor">
+            <a:schemeClr val="lt1"/>
+          </a:fontRef>
+        </p:style>
+        <p:txBody>
+          <a:bodyPr rtlCol="0" anchor="ctr"/>
+          <a:lstStyle/>
+          <a:p>
+            <a:pPr algn="ctr"/>
+          </a:p>
+        </p:txBody>
+      </p:sp>
+      <p:sp>
+        <p:nvSpPr>
+          <p:cNvPr id="7" name="Rounded Rectangle 6"/>
+          <p:cNvSpPr/>
+          <p:nvPr/>
+        </p:nvSpPr>
+        <p:spPr>
+          <a:xfrm>
+            <a:off x="594360" y="1965960"/>
+            <a:ext cx="438912" cy="438912"/>
+          </a:xfrm>
+          <a:prstGeom prst="roundRect">
+            <a:avLst>
+              <a:gd name="adj" fmla="val 12000"/>
+            </a:avLst>
+          </a:prstGeom>
+          <a:solidFill>
+            <a:srgbClr val="095292"/>
+          </a:solidFill>
+          <a:ln>
+            <a:noFill/>
+          </a:ln>
+        </p:spPr>
+        <p:style>
+          <a:lnRef idx="1">
+            <a:schemeClr val="accent1"/>
+          </a:lnRef>
+          <a:fillRef idx="3">
+            <a:schemeClr val="accent1"/>
+          </a:fillRef>
+          <a:effectRef idx="2">
+            <a:schemeClr val="accent1"/>
+          </a:effectRef>
+          <a:fontRef idx="minor">
+            <a:schemeClr val="lt1"/>
+          </a:fontRef>
+        </p:style>
+        <p:txBody>
+          <a:bodyPr rtlCol="0" anchor="ctr"/>
+          <a:lstStyle/>
+          <a:p>
+            <a:pPr algn="ctr"/>
+          </a:p>
+        </p:txBody>
+      </p:sp>
+      <p:sp>
+        <p:nvSpPr>
+          <p:cNvPr id="8" name="TextBox 7"/>
+          <p:cNvSpPr txBox="1"/>
+          <p:nvPr/>
+        </p:nvSpPr>
+        <p:spPr>
+          <a:xfrm>
+            <a:off x="594360" y="1965960"/>
+            <a:ext cx="438912" cy="438912"/>
+          </a:xfrm>
+          <a:prstGeom prst="rect">
+            <a:avLst/>
+          </a:prstGeom>
+          <a:noFill/>
+        </p:spPr>
+        <p:txBody>
+          <a:bodyPr wrap="square" anchor="ctr"/>
+          <a:lstStyle/>
+          <a:p>
+            <a:pPr algn="ctr"/>
+            <a:r>
+              <a:rPr sz="1600" b="1" i="0">
+                <a:solidFill>
+                  <a:srgbClr val="FFFFFF"/>
+                </a:solidFill>
+                <a:latin typeface="Calibri"/>
+              </a:rPr>
+              <a:t>1</a:t>
+            </a:r>
+          </a:p>
+        </p:txBody>
+      </p:sp>
+      <p:sp>
+        <p:nvSpPr>
+          <p:cNvPr id="9" name="TextBox 8"/>
+          <p:cNvSpPr txBox="1"/>
+          <p:nvPr/>
+        </p:nvSpPr>
+        <p:spPr>
+          <a:xfrm>
+            <a:off x="1188720" y="1751076"/>
+            <a:ext cx="10271455" cy="886968"/>
+          </a:xfrm>
+          <a:prstGeom prst="rect">
+            <a:avLst/>
+          </a:prstGeom>
+          <a:noFill/>
+        </p:spPr>
+        <p:txBody>
+          <a:bodyPr wrap="square" anchor="ctr"/>
+          <a:lstStyle/>
+          <a:p>
+            <a:r>
+              <a:rPr sz="1500" b="1" i="0">
+                <a:solidFill>
+                  <a:srgbClr val="095292"/>
+                </a:solidFill>
+                <a:latin typeface="Calibri"/>
+              </a:rPr>
+              <a:t>Diseña visual</a:t>
+            </a:r>
+          </a:p>
+          <a:p>
             <a:pPr>
-              <a:spcAft>
-                <a:spcPts val="800"/>
-              </a:spcAft>
+              <a:spcBef>
+                <a:spcPts val="200"/>
+              </a:spcBef>
             </a:pPr>
             <a:r>
-              <a:rPr sz="2000" b="0" i="0">
+              <a:rPr sz="1300" b="0" i="0">
                 <a:solidFill>
                   <a:srgbClr val="333333"/>
                 </a:solidFill>
                 <a:latin typeface="Calibri"/>
               </a:rPr>
-              <a:t>–   Y nombra los tres costos: el arranque en frio, esa demora extra de cientos de milisegundos a segundos cuando una funcion se invoca despues de estar inactiva; el agotamiento de conexiones</a:t>
+              <a:t>Dibuja el diagrama como quieras en Excalidraw o draw.io: es más rápido arrastrar cajas que escribir código, y ahí es donde se piensa el modelo.</a:t>
+            </a:r>
+          </a:p>
+        </p:txBody>
+      </p:sp>
+      <p:sp>
+        <p:nvSpPr>
+          <p:cNvPr id="10" name="Rounded Rectangle 9"/>
+          <p:cNvSpPr/>
+          <p:nvPr/>
+        </p:nvSpPr>
+        <p:spPr>
+          <a:xfrm>
+            <a:off x="457200" y="2802636"/>
+            <a:ext cx="11277295" cy="1051560"/>
+          </a:xfrm>
+          <a:prstGeom prst="roundRect">
+            <a:avLst>
+              <a:gd name="adj" fmla="val 12000"/>
+            </a:avLst>
+          </a:prstGeom>
+          <a:solidFill>
+            <a:srgbClr val="E8F4FA"/>
+          </a:solidFill>
+          <a:ln>
+            <a:noFill/>
+          </a:ln>
+        </p:spPr>
+        <p:style>
+          <a:lnRef idx="1">
+            <a:schemeClr val="accent1"/>
+          </a:lnRef>
+          <a:fillRef idx="3">
+            <a:schemeClr val="accent1"/>
+          </a:fillRef>
+          <a:effectRef idx="2">
+            <a:schemeClr val="accent1"/>
+          </a:effectRef>
+          <a:fontRef idx="minor">
+            <a:schemeClr val="lt1"/>
+          </a:fontRef>
+        </p:style>
+        <p:txBody>
+          <a:bodyPr rtlCol="0" anchor="ctr"/>
+          <a:lstStyle/>
+          <a:p>
+            <a:pPr algn="ctr"/>
+          </a:p>
+        </p:txBody>
+      </p:sp>
+      <p:sp>
+        <p:nvSpPr>
+          <p:cNvPr id="11" name="Rounded Rectangle 10"/>
+          <p:cNvSpPr/>
+          <p:nvPr/>
+        </p:nvSpPr>
+        <p:spPr>
+          <a:xfrm>
+            <a:off x="594360" y="3108960"/>
+            <a:ext cx="438912" cy="438912"/>
+          </a:xfrm>
+          <a:prstGeom prst="roundRect">
+            <a:avLst>
+              <a:gd name="adj" fmla="val 12000"/>
+            </a:avLst>
+          </a:prstGeom>
+          <a:solidFill>
+            <a:srgbClr val="095292"/>
+          </a:solidFill>
+          <a:ln>
+            <a:noFill/>
+          </a:ln>
+        </p:spPr>
+        <p:style>
+          <a:lnRef idx="1">
+            <a:schemeClr val="accent1"/>
+          </a:lnRef>
+          <a:fillRef idx="3">
+            <a:schemeClr val="accent1"/>
+          </a:fillRef>
+          <a:effectRef idx="2">
+            <a:schemeClr val="accent1"/>
+          </a:effectRef>
+          <a:fontRef idx="minor">
+            <a:schemeClr val="lt1"/>
+          </a:fontRef>
+        </p:style>
+        <p:txBody>
+          <a:bodyPr rtlCol="0" anchor="ctr"/>
+          <a:lstStyle/>
+          <a:p>
+            <a:pPr algn="ctr"/>
+          </a:p>
+        </p:txBody>
+      </p:sp>
+      <p:sp>
+        <p:nvSpPr>
+          <p:cNvPr id="12" name="TextBox 11"/>
+          <p:cNvSpPr txBox="1"/>
+          <p:nvPr/>
+        </p:nvSpPr>
+        <p:spPr>
+          <a:xfrm>
+            <a:off x="594360" y="3108960"/>
+            <a:ext cx="438912" cy="438912"/>
+          </a:xfrm>
+          <a:prstGeom prst="rect">
+            <a:avLst/>
+          </a:prstGeom>
+          <a:noFill/>
+        </p:spPr>
+        <p:txBody>
+          <a:bodyPr wrap="square" anchor="ctr"/>
+          <a:lstStyle/>
+          <a:p>
+            <a:pPr algn="ctr"/>
+            <a:r>
+              <a:rPr sz="1600" b="1" i="0">
+                <a:solidFill>
+                  <a:srgbClr val="FFFFFF"/>
+                </a:solidFill>
+                <a:latin typeface="Calibri"/>
+              </a:rPr>
+              <a:t>2</a:t>
+            </a:r>
+          </a:p>
+        </p:txBody>
+      </p:sp>
+      <p:sp>
+        <p:nvSpPr>
+          <p:cNvPr id="13" name="TextBox 12"/>
+          <p:cNvSpPr txBox="1"/>
+          <p:nvPr/>
+        </p:nvSpPr>
+        <p:spPr>
+          <a:xfrm>
+            <a:off x="1188720" y="2894076"/>
+            <a:ext cx="10271455" cy="886968"/>
+          </a:xfrm>
+          <a:prstGeom prst="rect">
+            <a:avLst/>
+          </a:prstGeom>
+          <a:noFill/>
+        </p:spPr>
+        <p:txBody>
+          <a:bodyPr wrap="square" anchor="ctr"/>
+          <a:lstStyle/>
+          <a:p>
+            <a:r>
+              <a:rPr sz="1500" b="1" i="0">
+                <a:solidFill>
+                  <a:srgbClr val="095292"/>
+                </a:solidFill>
+                <a:latin typeface="Calibri"/>
+              </a:rPr>
+              <a:t>Traduce con IA</a:t>
             </a:r>
           </a:p>
           <a:p>
             <a:pPr>
-              <a:spcAft>
-                <a:spcPts val="800"/>
-              </a:spcAft>
+              <a:spcBef>
+                <a:spcPts val="200"/>
+              </a:spcBef>
             </a:pPr>
             <a:r>
-              <a:rPr sz="2000" b="0" i="0">
+              <a:rPr sz="1300" b="0" i="0">
                 <a:solidFill>
                   <a:srgbClr val="333333"/>
                 </a:solidFill>
                 <a:latin typeface="Calibri"/>
               </a:rPr>
-              <a:t>–   Porque mil funciones concurrentes matan a la base de datos igual que mil contenedores; y el costo por invocacion, que a volumen alto puede superar el de instancias fijas.</a:t>
+              <a:t>Describe tu boceto a una IA y pídele el código Mermaid usando flowchart. Revisa el resultado: la IA acierta la sintaxis, no tu modelo.</a:t>
+            </a:r>
+          </a:p>
+        </p:txBody>
+      </p:sp>
+      <p:sp>
+        <p:nvSpPr>
+          <p:cNvPr id="14" name="Rounded Rectangle 13"/>
+          <p:cNvSpPr/>
+          <p:nvPr/>
+        </p:nvSpPr>
+        <p:spPr>
+          <a:xfrm>
+            <a:off x="457200" y="3945636"/>
+            <a:ext cx="11277295" cy="1051560"/>
+          </a:xfrm>
+          <a:prstGeom prst="roundRect">
+            <a:avLst>
+              <a:gd name="adj" fmla="val 12000"/>
+            </a:avLst>
+          </a:prstGeom>
+          <a:solidFill>
+            <a:srgbClr val="F2F2F2"/>
+          </a:solidFill>
+          <a:ln>
+            <a:noFill/>
+          </a:ln>
+        </p:spPr>
+        <p:style>
+          <a:lnRef idx="1">
+            <a:schemeClr val="accent1"/>
+          </a:lnRef>
+          <a:fillRef idx="3">
+            <a:schemeClr val="accent1"/>
+          </a:fillRef>
+          <a:effectRef idx="2">
+            <a:schemeClr val="accent1"/>
+          </a:effectRef>
+          <a:fontRef idx="minor">
+            <a:schemeClr val="lt1"/>
+          </a:fontRef>
+        </p:style>
+        <p:txBody>
+          <a:bodyPr rtlCol="0" anchor="ctr"/>
+          <a:lstStyle/>
+          <a:p>
+            <a:pPr algn="ctr"/>
+          </a:p>
+        </p:txBody>
+      </p:sp>
+      <p:sp>
+        <p:nvSpPr>
+          <p:cNvPr id="15" name="Rounded Rectangle 14"/>
+          <p:cNvSpPr/>
+          <p:nvPr/>
+        </p:nvSpPr>
+        <p:spPr>
+          <a:xfrm>
+            <a:off x="594360" y="4251960"/>
+            <a:ext cx="438912" cy="438912"/>
+          </a:xfrm>
+          <a:prstGeom prst="roundRect">
+            <a:avLst>
+              <a:gd name="adj" fmla="val 12000"/>
+            </a:avLst>
+          </a:prstGeom>
+          <a:solidFill>
+            <a:srgbClr val="095292"/>
+          </a:solidFill>
+          <a:ln>
+            <a:noFill/>
+          </a:ln>
+        </p:spPr>
+        <p:style>
+          <a:lnRef idx="1">
+            <a:schemeClr val="accent1"/>
+          </a:lnRef>
+          <a:fillRef idx="3">
+            <a:schemeClr val="accent1"/>
+          </a:fillRef>
+          <a:effectRef idx="2">
+            <a:schemeClr val="accent1"/>
+          </a:effectRef>
+          <a:fontRef idx="minor">
+            <a:schemeClr val="lt1"/>
+          </a:fontRef>
+        </p:style>
+        <p:txBody>
+          <a:bodyPr rtlCol="0" anchor="ctr"/>
+          <a:lstStyle/>
+          <a:p>
+            <a:pPr algn="ctr"/>
+          </a:p>
+        </p:txBody>
+      </p:sp>
+      <p:sp>
+        <p:nvSpPr>
+          <p:cNvPr id="16" name="TextBox 15"/>
+          <p:cNvSpPr txBox="1"/>
+          <p:nvPr/>
+        </p:nvSpPr>
+        <p:spPr>
+          <a:xfrm>
+            <a:off x="594360" y="4251960"/>
+            <a:ext cx="438912" cy="438912"/>
+          </a:xfrm>
+          <a:prstGeom prst="rect">
+            <a:avLst/>
+          </a:prstGeom>
+          <a:noFill/>
+        </p:spPr>
+        <p:txBody>
+          <a:bodyPr wrap="square" anchor="ctr"/>
+          <a:lstStyle/>
+          <a:p>
+            <a:pPr algn="ctr"/>
+            <a:r>
+              <a:rPr sz="1600" b="1" i="0">
+                <a:solidFill>
+                  <a:srgbClr val="FFFFFF"/>
+                </a:solidFill>
+                <a:latin typeface="Calibri"/>
+              </a:rPr>
+              <a:t>3</a:t>
+            </a:r>
+          </a:p>
+        </p:txBody>
+      </p:sp>
+      <p:sp>
+        <p:nvSpPr>
+          <p:cNvPr id="17" name="TextBox 16"/>
+          <p:cNvSpPr txBox="1"/>
+          <p:nvPr/>
+        </p:nvSpPr>
+        <p:spPr>
+          <a:xfrm>
+            <a:off x="1188720" y="4037076"/>
+            <a:ext cx="10271455" cy="886968"/>
+          </a:xfrm>
+          <a:prstGeom prst="rect">
+            <a:avLst/>
+          </a:prstGeom>
+          <a:noFill/>
+        </p:spPr>
+        <p:txBody>
+          <a:bodyPr wrap="square" anchor="ctr"/>
+          <a:lstStyle/>
+          <a:p>
+            <a:r>
+              <a:rPr sz="1500" b="1" i="0">
+                <a:solidFill>
+                  <a:srgbClr val="095292"/>
+                </a:solidFill>
+                <a:latin typeface="Calibri"/>
+              </a:rPr>
+              <a:t>Renderiza en un visor</a:t>
             </a:r>
           </a:p>
           <a:p>
             <a:pPr>
-              <a:spcAft>
-                <a:spcPts val="800"/>
-              </a:spcAft>
+              <a:spcBef>
+                <a:spcPts val="200"/>
+              </a:spcBef>
             </a:pPr>
             <a:r>
-              <a:rPr sz="2000" b="0" i="0">
+              <a:rPr sz="1300" b="0" i="0">
                 <a:solidFill>
                   <a:srgbClr val="333333"/>
                 </a:solidFill>
                 <a:latin typeface="Calibri"/>
               </a:rPr>
-              <a:t>–   Una regla de bolsillo: serverless sirve para cargas intermitentes y cortas; para trafico sostenido, una instancia fija suele ser mas barata y predecible.</a:t>
-            </a:r>
-          </a:p>
-        </p:txBody>
-      </p:sp>
-      <p:sp>
-        <p:nvSpPr>
-          <p:cNvPr id="6" name="TextBox 5"/>
+              <a:t>Pega el código en un visor Mermaid (mermaid.live o la vista previa de tu editor) y míralo dibujado. Si no renderiza, corrige ahí: un end faltante o un rótulo sin comillas.</a:t>
+            </a:r>
+          </a:p>
+        </p:txBody>
+      </p:sp>
+      <p:sp>
+        <p:nvSpPr>
+          <p:cNvPr id="18" name="Rounded Rectangle 17"/>
+          <p:cNvSpPr/>
+          <p:nvPr/>
+        </p:nvSpPr>
+        <p:spPr>
+          <a:xfrm>
+            <a:off x="457200" y="5088636"/>
+            <a:ext cx="11277295" cy="1051560"/>
+          </a:xfrm>
+          <a:prstGeom prst="roundRect">
+            <a:avLst>
+              <a:gd name="adj" fmla="val 12000"/>
+            </a:avLst>
+          </a:prstGeom>
+          <a:solidFill>
+            <a:srgbClr val="E8F4FA"/>
+          </a:solidFill>
+          <a:ln>
+            <a:noFill/>
+          </a:ln>
+        </p:spPr>
+        <p:style>
+          <a:lnRef idx="1">
+            <a:schemeClr val="accent1"/>
+          </a:lnRef>
+          <a:fillRef idx="3">
+            <a:schemeClr val="accent1"/>
+          </a:fillRef>
+          <a:effectRef idx="2">
+            <a:schemeClr val="accent1"/>
+          </a:effectRef>
+          <a:fontRef idx="minor">
+            <a:schemeClr val="lt1"/>
+          </a:fontRef>
+        </p:style>
+        <p:txBody>
+          <a:bodyPr rtlCol="0" anchor="ctr"/>
+          <a:lstStyle/>
+          <a:p>
+            <a:pPr algn="ctr"/>
+          </a:p>
+        </p:txBody>
+      </p:sp>
+      <p:sp>
+        <p:nvSpPr>
+          <p:cNvPr id="19" name="Rounded Rectangle 18"/>
+          <p:cNvSpPr/>
+          <p:nvPr/>
+        </p:nvSpPr>
+        <p:spPr>
+          <a:xfrm>
+            <a:off x="594360" y="5394960"/>
+            <a:ext cx="438912" cy="438912"/>
+          </a:xfrm>
+          <a:prstGeom prst="roundRect">
+            <a:avLst>
+              <a:gd name="adj" fmla="val 12000"/>
+            </a:avLst>
+          </a:prstGeom>
+          <a:solidFill>
+            <a:srgbClr val="095292"/>
+          </a:solidFill>
+          <a:ln>
+            <a:noFill/>
+          </a:ln>
+        </p:spPr>
+        <p:style>
+          <a:lnRef idx="1">
+            <a:schemeClr val="accent1"/>
+          </a:lnRef>
+          <a:fillRef idx="3">
+            <a:schemeClr val="accent1"/>
+          </a:fillRef>
+          <a:effectRef idx="2">
+            <a:schemeClr val="accent1"/>
+          </a:effectRef>
+          <a:fontRef idx="minor">
+            <a:schemeClr val="lt1"/>
+          </a:fontRef>
+        </p:style>
+        <p:txBody>
+          <a:bodyPr rtlCol="0" anchor="ctr"/>
+          <a:lstStyle/>
+          <a:p>
+            <a:pPr algn="ctr"/>
+          </a:p>
+        </p:txBody>
+      </p:sp>
+      <p:sp>
+        <p:nvSpPr>
+          <p:cNvPr id="20" name="TextBox 19"/>
+          <p:cNvSpPr txBox="1"/>
+          <p:nvPr/>
+        </p:nvSpPr>
+        <p:spPr>
+          <a:xfrm>
+            <a:off x="594360" y="5394960"/>
+            <a:ext cx="438912" cy="438912"/>
+          </a:xfrm>
+          <a:prstGeom prst="rect">
+            <a:avLst/>
+          </a:prstGeom>
+          <a:noFill/>
+        </p:spPr>
+        <p:txBody>
+          <a:bodyPr wrap="square" anchor="ctr"/>
+          <a:lstStyle/>
+          <a:p>
+            <a:pPr algn="ctr"/>
+            <a:r>
+              <a:rPr sz="1600" b="1" i="0">
+                <a:solidFill>
+                  <a:srgbClr val="FFFFFF"/>
+                </a:solidFill>
+                <a:latin typeface="Calibri"/>
+              </a:rPr>
+              <a:t>4</a:t>
+            </a:r>
+          </a:p>
+        </p:txBody>
+      </p:sp>
+      <p:sp>
+        <p:nvSpPr>
+          <p:cNvPr id="21" name="TextBox 20"/>
+          <p:cNvSpPr txBox="1"/>
+          <p:nvPr/>
+        </p:nvSpPr>
+        <p:spPr>
+          <a:xfrm>
+            <a:off x="1188720" y="5180076"/>
+            <a:ext cx="10271455" cy="886968"/>
+          </a:xfrm>
+          <a:prstGeom prst="rect">
+            <a:avLst/>
+          </a:prstGeom>
+          <a:noFill/>
+        </p:spPr>
+        <p:txBody>
+          <a:bodyPr wrap="square" anchor="ctr"/>
+          <a:lstStyle/>
+          <a:p>
+            <a:r>
+              <a:rPr sz="1500" b="1" i="0">
+                <a:solidFill>
+                  <a:srgbClr val="095292"/>
+                </a:solidFill>
+                <a:latin typeface="Calibri"/>
+              </a:rPr>
+              <a:t>Guarda código e imagen</a:t>
+            </a:r>
+          </a:p>
+          <a:p>
+            <a:pPr>
+              <a:spcBef>
+                <a:spcPts val="200"/>
+              </a:spcBef>
+            </a:pPr>
+            <a:r>
+              <a:rPr sz="1300" b="0" i="0">
+                <a:solidFill>
+                  <a:srgbClr val="333333"/>
+                </a:solidFill>
+                <a:latin typeface="Calibri"/>
+              </a:rPr>
+              <a:t>El código es la fuente del diagrama: guárdalo con tu proyecto junto con el PNG exportado.</a:t>
+            </a:r>
+          </a:p>
+        </p:txBody>
+      </p:sp>
+      <p:sp>
+        <p:nvSpPr>
+          <p:cNvPr id="22" name="TextBox 21"/>
           <p:cNvSpPr txBox="1"/>
           <p:nvPr/>
         </p:nvSpPr>
@@ -6254,13 +10307,13 @@
         <p:spPr>
           <a:xfrm>
             <a:off x="0" y="0"/>
-            <a:ext cx="12191695" cy="960120"/>
+            <a:ext cx="12191695" cy="164592"/>
           </a:xfrm>
           <a:prstGeom prst="rect">
             <a:avLst/>
           </a:prstGeom>
           <a:solidFill>
-            <a:srgbClr val="095292"/>
+            <a:srgbClr val="269CCB"/>
           </a:solidFill>
           <a:ln>
             <a:noFill/>
@@ -6288,49 +10341,30 @@
           </a:p>
         </p:txBody>
       </p:sp>
-      <p:sp>
-        <p:nvSpPr>
-          <p:cNvPr id="3" name="Rectangle 2"/>
-          <p:cNvSpPr/>
-          <p:nvPr/>
-        </p:nvSpPr>
-        <p:spPr>
-          <a:xfrm>
-            <a:off x="0" y="960120"/>
-            <a:ext cx="12191695" cy="41148"/>
+      <p:pic>
+        <p:nvPicPr>
+          <p:cNvPr id="3" name="Picture 2" descr="logo_uniajc_color.png"/>
+          <p:cNvPicPr>
+            <a:picLocks noChangeAspect="1"/>
+          </p:cNvPicPr>
+          <p:nvPr/>
+        </p:nvPicPr>
+        <p:blipFill>
+          <a:blip r:embed="rId2"/>
+          <a:stretch>
+            <a:fillRect/>
+          </a:stretch>
+        </p:blipFill>
+        <p:spPr>
+          <a:xfrm>
+            <a:off x="10271455" y="5998464"/>
+            <a:ext cx="1463040" cy="643233"/>
           </a:xfrm>
           <a:prstGeom prst="rect">
             <a:avLst/>
           </a:prstGeom>
-          <a:solidFill>
-            <a:srgbClr val="FFD000"/>
-          </a:solidFill>
-          <a:ln>
-            <a:noFill/>
-          </a:ln>
-        </p:spPr>
-        <p:style>
-          <a:lnRef idx="1">
-            <a:schemeClr val="accent1"/>
-          </a:lnRef>
-          <a:fillRef idx="3">
-            <a:schemeClr val="accent1"/>
-          </a:fillRef>
-          <a:effectRef idx="2">
-            <a:schemeClr val="accent1"/>
-          </a:effectRef>
-          <a:fontRef idx="minor">
-            <a:schemeClr val="lt1"/>
-          </a:fontRef>
-        </p:style>
-        <p:txBody>
-          <a:bodyPr rtlCol="0" anchor="ctr"/>
-          <a:lstStyle/>
-          <a:p>
-            <a:pPr algn="ctr"/>
-          </a:p>
-        </p:txBody>
-      </p:sp>
+        </p:spPr>
+      </p:pic>
       <p:sp>
         <p:nvSpPr>
           <p:cNvPr id="4" name="TextBox 3"/>
@@ -6339,8 +10373,41 @@
         </p:nvSpPr>
         <p:spPr>
           <a:xfrm>
-            <a:off x="457200" y="164592"/>
-            <a:ext cx="11277295" cy="502920"/>
+            <a:off x="457200" y="1737360"/>
+            <a:ext cx="11277295" cy="1097280"/>
+          </a:xfrm>
+          <a:prstGeom prst="rect">
+            <a:avLst/>
+          </a:prstGeom>
+          <a:noFill/>
+        </p:spPr>
+        <p:txBody>
+          <a:bodyPr wrap="square" anchor="ctr"/>
+          <a:lstStyle/>
+          <a:p>
+            <a:pPr algn="ctr"/>
+            <a:r>
+              <a:rPr sz="3400" b="1" i="0">
+                <a:solidFill>
+                  <a:srgbClr val="095292"/>
+                </a:solidFill>
+                <a:latin typeface="Calibri"/>
+              </a:rPr>
+              <a:t>Clase 13 · cierre conceptual</a:t>
+            </a:r>
+          </a:p>
+        </p:txBody>
+      </p:sp>
+      <p:sp>
+        <p:nvSpPr>
+          <p:cNvPr id="5" name="TextBox 4"/>
+          <p:cNvSpPr txBox="1"/>
+          <p:nvPr/>
+        </p:nvSpPr>
+        <p:spPr>
+          <a:xfrm>
+            <a:off x="457200" y="3017520"/>
+            <a:ext cx="11277295" cy="1645920"/>
           </a:xfrm>
           <a:prstGeom prst="rect">
             <a:avLst/>
@@ -6353,148 +10420,65 @@
           </a:bodyPr>
           <a:lstStyle/>
           <a:p>
-            <a:r>
-              <a:rPr sz="2600" b="1" i="0">
-                <a:solidFill>
-                  <a:srgbClr val="FFFFFF"/>
+            <a:pPr algn="ctr">
+              <a:spcAft>
+                <a:spcPts val="600"/>
+              </a:spcAft>
+            </a:pPr>
+            <a:r>
+              <a:rPr sz="1600" b="0" i="0">
+                <a:solidFill>
+                  <a:srgbClr val="333333"/>
                 </a:solidFill>
                 <a:latin typeface="Calibri"/>
               </a:rPr>
-              <a:t>La regla de autoescalado, escrita como configuracion</a:t>
-            </a:r>
-          </a:p>
-        </p:txBody>
-      </p:sp>
-      <p:sp>
-        <p:nvSpPr>
-          <p:cNvPr id="5" name="Rounded Rectangle 4"/>
-          <p:cNvSpPr/>
-          <p:nvPr/>
-        </p:nvSpPr>
-        <p:spPr>
-          <a:xfrm>
-            <a:off x="457200" y="1261872"/>
-            <a:ext cx="11277295" cy="5093208"/>
-          </a:xfrm>
-          <a:prstGeom prst="roundRect">
-            <a:avLst>
-              <a:gd name="adj" fmla="val 12000"/>
-            </a:avLst>
-          </a:prstGeom>
-          <a:solidFill>
-            <a:srgbClr val="1E2A38"/>
-          </a:solidFill>
-          <a:ln>
-            <a:noFill/>
-          </a:ln>
-        </p:spPr>
-        <p:style>
-          <a:lnRef idx="1">
-            <a:schemeClr val="accent1"/>
-          </a:lnRef>
-          <a:fillRef idx="3">
-            <a:schemeClr val="accent1"/>
-          </a:fillRef>
-          <a:effectRef idx="2">
-            <a:schemeClr val="accent1"/>
-          </a:effectRef>
-          <a:fontRef idx="minor">
-            <a:schemeClr val="lt1"/>
-          </a:fontRef>
-        </p:style>
-        <p:txBody>
-          <a:bodyPr rtlCol="0" anchor="ctr"/>
-          <a:lstStyle/>
-          <a:p>
-            <a:pPr algn="ctr"/>
-          </a:p>
-        </p:txBody>
-      </p:sp>
-      <p:sp>
-        <p:nvSpPr>
-          <p:cNvPr id="6" name="Rectangle 5"/>
-          <p:cNvSpPr/>
-          <p:nvPr/>
-        </p:nvSpPr>
-        <p:spPr>
-          <a:xfrm>
-            <a:off x="457200" y="1261872"/>
-            <a:ext cx="11277295" cy="320040"/>
-          </a:xfrm>
-          <a:prstGeom prst="rect">
-            <a:avLst/>
-          </a:prstGeom>
-          <a:solidFill>
-            <a:srgbClr val="095292"/>
-          </a:solidFill>
-          <a:ln>
-            <a:noFill/>
-          </a:ln>
-        </p:spPr>
-        <p:style>
-          <a:lnRef idx="1">
-            <a:schemeClr val="accent1"/>
-          </a:lnRef>
-          <a:fillRef idx="3">
-            <a:schemeClr val="accent1"/>
-          </a:fillRef>
-          <a:effectRef idx="2">
-            <a:schemeClr val="accent1"/>
-          </a:effectRef>
-          <a:fontRef idx="minor">
-            <a:schemeClr val="lt1"/>
-          </a:fontRef>
-        </p:style>
-        <p:txBody>
-          <a:bodyPr rtlCol="0" anchor="ctr"/>
-          <a:lstStyle/>
-          <a:p>
-            <a:pPr algn="ctr"/>
-          </a:p>
-        </p:txBody>
-      </p:sp>
-      <p:sp>
-        <p:nvSpPr>
-          <p:cNvPr id="7" name="TextBox 6"/>
+              <a:t>Distinguir escala vertical vs horizontal y cuándo aplicarlas.</a:t>
+            </a:r>
+          </a:p>
+          <a:p>
+            <a:pPr algn="ctr">
+              <a:spcAft>
+                <a:spcPts val="600"/>
+              </a:spcAft>
+            </a:pPr>
+            <a:r>
+              <a:rPr sz="1600" b="0" i="0">
+                <a:solidFill>
+                  <a:srgbClr val="333333"/>
+                </a:solidFill>
+                <a:latin typeface="Calibri"/>
+              </a:rPr>
+              <a:t>Definir triggers cualitativos (CPU, cola, RPS) sin cloud de pago.</a:t>
+            </a:r>
+          </a:p>
+          <a:p>
+            <a:pPr algn="ctr">
+              <a:spcAft>
+                <a:spcPts val="600"/>
+              </a:spcAft>
+            </a:pPr>
+            <a:r>
+              <a:rPr sz="1600" b="0" i="0">
+                <a:solidFill>
+                  <a:srgbClr val="333333"/>
+                </a:solidFill>
+                <a:latin typeface="Calibri"/>
+              </a:rPr>
+              <a:t>Actualizar el informe con la política de escala.</a:t>
+            </a:r>
+          </a:p>
+        </p:txBody>
+      </p:sp>
+      <p:sp>
+        <p:nvSpPr>
+          <p:cNvPr id="6" name="TextBox 5"/>
           <p:cNvSpPr txBox="1"/>
           <p:nvPr/>
         </p:nvSpPr>
         <p:spPr>
           <a:xfrm>
-            <a:off x="685800" y="1307592"/>
-            <a:ext cx="10820095" cy="256032"/>
-          </a:xfrm>
-          <a:prstGeom prst="rect">
-            <a:avLst/>
-          </a:prstGeom>
-          <a:noFill/>
-        </p:spPr>
-        <p:txBody>
-          <a:bodyPr wrap="square" anchor="ctr"/>
-          <a:lstStyle/>
-          <a:p>
-            <a:r>
-              <a:rPr sz="1000" b="1" i="0">
-                <a:solidFill>
-                  <a:srgbClr val="269CCB"/>
-                </a:solidFill>
-                <a:latin typeface="Calibri"/>
-              </a:rPr>
-              <a:t>● ● ●</a:t>
-            </a:r>
-          </a:p>
-        </p:txBody>
-      </p:sp>
-      <p:sp>
-        <p:nvSpPr>
-          <p:cNvPr id="8" name="TextBox 7"/>
-          <p:cNvSpPr txBox="1"/>
-          <p:nvPr/>
-        </p:nvSpPr>
-        <p:spPr>
-          <a:xfrm>
-            <a:off x="777240" y="1719072"/>
-            <a:ext cx="10637215" cy="4453128"/>
+            <a:off x="457200" y="4754880"/>
+            <a:ext cx="11277295" cy="640080"/>
           </a:xfrm>
           <a:prstGeom prst="rect">
             <a:avLst/>
@@ -6507,1584 +10491,15 @@
           </a:bodyPr>
           <a:lstStyle/>
           <a:p>
-            <a:pPr>
-              <a:spcAft>
-                <a:spcPts val="400"/>
-              </a:spcAft>
-            </a:pPr>
-            <a:r>
-              <a:rPr sz="1400" b="0" i="0">
-                <a:solidFill>
-                  <a:srgbClr val="FFFFFF"/>
+            <a:pPr algn="ctr"/>
+            <a:r>
+              <a:rPr sz="2000" b="1" i="0">
+                <a:solidFill>
+                  <a:srgbClr val="269CCB"/>
                 </a:solidFill>
                 <a:latin typeface="Calibri"/>
               </a:rPr>
-              <a:t># Lo que un autoescalador necesita para no oscilar:</a:t>
-            </a:r>
-          </a:p>
-          <a:p>
-            <a:pPr>
-              <a:spcAft>
-                <a:spcPts val="400"/>
-              </a:spcAft>
-            </a:pPr>
-            <a:r>
-              <a:rPr sz="1400" b="0" i="0">
-                <a:solidFill>
-                  <a:srgbClr val="FFFFFF"/>
-                </a:solidFill>
-                <a:latin typeface="Calibri"/>
-              </a:rPr>
-              <a:t>autoescalado:</a:t>
-            </a:r>
-          </a:p>
-          <a:p>
-            <a:pPr>
-              <a:spcAft>
-                <a:spcPts val="400"/>
-              </a:spcAft>
-            </a:pPr>
-            <a:r>
-              <a:rPr sz="1400" b="0" i="0">
-                <a:solidFill>
-                  <a:srgbClr val="FFFFFF"/>
-                </a:solidFill>
-                <a:latin typeface="Calibri"/>
-              </a:rPr>
-              <a:t>  servicio: turnos-api</a:t>
-            </a:r>
-          </a:p>
-          <a:p>
-            <a:pPr>
-              <a:spcAft>
-                <a:spcPts val="400"/>
-              </a:spcAft>
-            </a:pPr>
-            <a:r>
-              <a:rPr sz="1400" b="0" i="0">
-                <a:solidFill>
-                  <a:srgbClr val="FFFFFF"/>
-                </a:solidFill>
-                <a:latin typeface="Calibri"/>
-              </a:rPr>
-              <a:t>  minimo: 2                  # 1 no da tolerancia a fallo</a:t>
-            </a:r>
-          </a:p>
-          <a:p>
-            <a:pPr>
-              <a:spcAft>
-                <a:spcPts val="400"/>
-              </a:spcAft>
-            </a:pPr>
-            <a:r>
-              <a:rPr sz="1400" b="0" i="0">
-                <a:solidFill>
-                  <a:srgbClr val="FFFFFF"/>
-                </a:solidFill>
-                <a:latin typeface="Calibri"/>
-              </a:rPr>
-              <a:t>  maximo: 6                  # tope que el presupuesto aguanta</a:t>
-            </a:r>
-          </a:p>
-          <a:p>
-            <a:pPr>
-              <a:spcAft>
-                <a:spcPts val="400"/>
-              </a:spcAft>
-            </a:pPr>
-            <a:r>
-              <a:rPr sz="1400" b="0" i="0">
-                <a:solidFill>
-                  <a:srgbClr val="FFFFFF"/>
-                </a:solidFill>
-                <a:latin typeface="Calibri"/>
-              </a:rPr>
-              <a:t>  metrica: cpu_promedio</a:t>
-            </a:r>
-          </a:p>
-          <a:p>
-            <a:pPr>
-              <a:spcAft>
-                <a:spcPts val="400"/>
-              </a:spcAft>
-            </a:pPr>
-            <a:r>
-              <a:rPr sz="1400" b="0" i="0">
-                <a:solidFill>
-                  <a:srgbClr val="FFFFFF"/>
-                </a:solidFill>
-                <a:latin typeface="Calibri"/>
-              </a:rPr>
-              <a:t>  objetivo: 65               # por debajo del 70% de la Clase 12</a:t>
-            </a:r>
-          </a:p>
-          <a:p>
-            <a:pPr>
-              <a:spcAft>
-                <a:spcPts val="400"/>
-              </a:spcAft>
-            </a:pPr>
-            <a:r>
-              <a:rPr sz="1400" b="0" i="0">
-                <a:solidFill>
-                  <a:srgbClr val="FFFFFF"/>
-                </a:solidFill>
-                <a:latin typeface="Calibri"/>
-              </a:rPr>
-              <a:t>  subir_si:   '&gt; 65% durante 3 min'</a:t>
-            </a:r>
-          </a:p>
-          <a:p>
-            <a:pPr>
-              <a:spcAft>
-                <a:spcPts val="400"/>
-              </a:spcAft>
-            </a:pPr>
-            <a:r>
-              <a:rPr sz="1400" b="0" i="0">
-                <a:solidFill>
-                  <a:srgbClr val="FFFFFF"/>
-                </a:solidFill>
-                <a:latin typeface="Calibri"/>
-              </a:rPr>
-              <a:t>  bajar_si:   '&lt; 35% durante 10 min'   # bajar mas lento que subir</a:t>
-            </a:r>
-          </a:p>
-          <a:p>
-            <a:pPr>
-              <a:spcAft>
-                <a:spcPts val="400"/>
-              </a:spcAft>
-            </a:pPr>
-            <a:r>
-              <a:rPr sz="1400" b="0" i="0">
-                <a:solidFill>
-                  <a:srgbClr val="FFFFFF"/>
-                </a:solidFill>
-                <a:latin typeface="Calibri"/>
-              </a:rPr>
-              <a:t>  enfriamiento: 5 min        # sin esto entra en bandada de arranques</a:t>
-            </a:r>
-          </a:p>
-          <a:p>
-            <a:pPr>
-              <a:spcAft>
-                <a:spcPts val="400"/>
-              </a:spcAft>
-            </a:pPr>
-            <a:r>
-              <a:rPr sz="1400" b="0" i="0">
-                <a:solidFill>
-                  <a:srgbClr val="FFFFFF"/>
-                </a:solidFill>
-                <a:latin typeface="Calibri"/>
-              </a:rPr>
-              <a:t/>
-            </a:r>
-          </a:p>
-          <a:p>
-            <a:pPr>
-              <a:spcAft>
-                <a:spcPts val="400"/>
-              </a:spcAft>
-            </a:pPr>
-            <a:r>
-              <a:rPr sz="1400" b="0" i="0">
-                <a:solidFill>
-                  <a:srgbClr val="FFFFFF"/>
-                </a:solidFill>
-                <a:latin typeface="Calibri"/>
-              </a:rPr>
-              <a:t># Y el limite honesto: escalar la API no escala la BASE. Si el cuello</a:t>
-            </a:r>
-          </a:p>
-          <a:p>
-            <a:pPr>
-              <a:spcAft>
-                <a:spcPts val="400"/>
-              </a:spcAft>
-            </a:pPr>
-            <a:r>
-              <a:rPr sz="1400" b="0" i="0">
-                <a:solidFill>
-                  <a:srgbClr val="FFFFFF"/>
-                </a:solidFill>
-                <a:latin typeface="Calibri"/>
-              </a:rPr>
-              <a:t># de botella es PostgreSQL, seis instancias lo empeoran.</a:t>
-            </a:r>
-          </a:p>
-        </p:txBody>
-      </p:sp>
-      <p:sp>
-        <p:nvSpPr>
-          <p:cNvPr id="9" name="TextBox 8"/>
-          <p:cNvSpPr txBox="1"/>
-          <p:nvPr/>
-        </p:nvSpPr>
-        <p:spPr>
-          <a:xfrm>
-            <a:off x="11185855" y="6473952"/>
-            <a:ext cx="640080" cy="274320"/>
-          </a:xfrm>
-          <a:prstGeom prst="rect">
-            <a:avLst/>
-          </a:prstGeom>
-          <a:noFill/>
-        </p:spPr>
-        <p:txBody>
-          <a:bodyPr wrap="square">
-            <a:spAutoFit/>
-          </a:bodyPr>
-          <a:lstStyle/>
-          <a:p>
-            <a:pPr algn="r"/>
-            <a:r>
-              <a:rPr sz="1100" b="0" i="0">
-                <a:solidFill>
-                  <a:srgbClr val="666666"/>
-                </a:solidFill>
-                <a:latin typeface="Calibri"/>
-              </a:rPr>
-              <a:t>17</a:t>
-            </a:r>
-          </a:p>
-        </p:txBody>
-      </p:sp>
-    </p:spTree>
-  </p:cSld>
-  <p:clrMapOvr>
-    <a:masterClrMapping/>
-  </p:clrMapOvr>
-</p:sld>
-</file>
-
-<file path=ppt/slides/slide18.xml><?xml version="1.0" encoding="utf-8"?>
-<p:sld xmlns:a="http://schemas.openxmlformats.org/drawingml/2006/main" xmlns:p="http://schemas.openxmlformats.org/presentationml/2006/main" xmlns:r="http://schemas.openxmlformats.org/officeDocument/2006/relationships">
-  <p:cSld>
-    <p:bg>
-      <p:bgPr>
-        <a:solidFill>
-          <a:srgbClr val="FFFFFF"/>
-        </a:solidFill>
-        <a:effectLst/>
-      </p:bgPr>
-    </p:bg>
-    <p:spTree>
-      <p:nvGrpSpPr>
-        <p:cNvPr id="1" name=""/>
-        <p:cNvGrpSpPr/>
-        <p:nvPr/>
-      </p:nvGrpSpPr>
-      <p:grpSpPr/>
-      <p:sp>
-        <p:nvSpPr>
-          <p:cNvPr id="2" name="Rectangle 1"/>
-          <p:cNvSpPr/>
-          <p:nvPr/>
-        </p:nvSpPr>
-        <p:spPr>
-          <a:xfrm>
-            <a:off x="0" y="0"/>
-            <a:ext cx="12191695" cy="960120"/>
-          </a:xfrm>
-          <a:prstGeom prst="rect">
-            <a:avLst/>
-          </a:prstGeom>
-          <a:solidFill>
-            <a:srgbClr val="095292"/>
-          </a:solidFill>
-          <a:ln>
-            <a:noFill/>
-          </a:ln>
-        </p:spPr>
-        <p:style>
-          <a:lnRef idx="1">
-            <a:schemeClr val="accent1"/>
-          </a:lnRef>
-          <a:fillRef idx="3">
-            <a:schemeClr val="accent1"/>
-          </a:fillRef>
-          <a:effectRef idx="2">
-            <a:schemeClr val="accent1"/>
-          </a:effectRef>
-          <a:fontRef idx="minor">
-            <a:schemeClr val="lt1"/>
-          </a:fontRef>
-        </p:style>
-        <p:txBody>
-          <a:bodyPr rtlCol="0" anchor="ctr"/>
-          <a:lstStyle/>
-          <a:p>
-            <a:pPr algn="ctr"/>
-          </a:p>
-        </p:txBody>
-      </p:sp>
-      <p:sp>
-        <p:nvSpPr>
-          <p:cNvPr id="3" name="Rectangle 2"/>
-          <p:cNvSpPr/>
-          <p:nvPr/>
-        </p:nvSpPr>
-        <p:spPr>
-          <a:xfrm>
-            <a:off x="0" y="960120"/>
-            <a:ext cx="12191695" cy="41148"/>
-          </a:xfrm>
-          <a:prstGeom prst="rect">
-            <a:avLst/>
-          </a:prstGeom>
-          <a:solidFill>
-            <a:srgbClr val="FFD000"/>
-          </a:solidFill>
-          <a:ln>
-            <a:noFill/>
-          </a:ln>
-        </p:spPr>
-        <p:style>
-          <a:lnRef idx="1">
-            <a:schemeClr val="accent1"/>
-          </a:lnRef>
-          <a:fillRef idx="3">
-            <a:schemeClr val="accent1"/>
-          </a:fillRef>
-          <a:effectRef idx="2">
-            <a:schemeClr val="accent1"/>
-          </a:effectRef>
-          <a:fontRef idx="minor">
-            <a:schemeClr val="lt1"/>
-          </a:fontRef>
-        </p:style>
-        <p:txBody>
-          <a:bodyPr rtlCol="0" anchor="ctr"/>
-          <a:lstStyle/>
-          <a:p>
-            <a:pPr algn="ctr"/>
-          </a:p>
-        </p:txBody>
-      </p:sp>
-      <p:sp>
-        <p:nvSpPr>
-          <p:cNvPr id="4" name="TextBox 3"/>
-          <p:cNvSpPr txBox="1"/>
-          <p:nvPr/>
-        </p:nvSpPr>
-        <p:spPr>
-          <a:xfrm>
-            <a:off x="457200" y="164592"/>
-            <a:ext cx="11277295" cy="502920"/>
-          </a:xfrm>
-          <a:prstGeom prst="rect">
-            <a:avLst/>
-          </a:prstGeom>
-          <a:noFill/>
-        </p:spPr>
-        <p:txBody>
-          <a:bodyPr wrap="square">
-            <a:spAutoFit/>
-          </a:bodyPr>
-          <a:lstStyle/>
-          <a:p>
-            <a:r>
-              <a:rPr sz="2600" b="1" i="0">
-                <a:solidFill>
-                  <a:srgbClr val="FFFFFF"/>
-                </a:solidFill>
-                <a:latin typeface="Calibri"/>
-              </a:rPr>
-              <a:t>Politica de autoescalado (tabla, no prosa)</a:t>
-            </a:r>
-          </a:p>
-        </p:txBody>
-      </p:sp>
-      <p:sp>
-        <p:nvSpPr>
-          <p:cNvPr id="5" name="Rounded Rectangle 4"/>
-          <p:cNvSpPr/>
-          <p:nvPr/>
-        </p:nvSpPr>
-        <p:spPr>
-          <a:xfrm>
-            <a:off x="457200" y="1261872"/>
-            <a:ext cx="11277295" cy="4773168"/>
-          </a:xfrm>
-          <a:prstGeom prst="roundRect">
-            <a:avLst>
-              <a:gd name="adj" fmla="val 12000"/>
-            </a:avLst>
-          </a:prstGeom>
-          <a:solidFill>
-            <a:srgbClr val="1E2A38"/>
-          </a:solidFill>
-          <a:ln>
-            <a:noFill/>
-          </a:ln>
-        </p:spPr>
-        <p:style>
-          <a:lnRef idx="1">
-            <a:schemeClr val="accent1"/>
-          </a:lnRef>
-          <a:fillRef idx="3">
-            <a:schemeClr val="accent1"/>
-          </a:fillRef>
-          <a:effectRef idx="2">
-            <a:schemeClr val="accent1"/>
-          </a:effectRef>
-          <a:fontRef idx="minor">
-            <a:schemeClr val="lt1"/>
-          </a:fontRef>
-        </p:style>
-        <p:txBody>
-          <a:bodyPr rtlCol="0" anchor="ctr"/>
-          <a:lstStyle/>
-          <a:p>
-            <a:pPr algn="ctr"/>
-          </a:p>
-        </p:txBody>
-      </p:sp>
-      <p:sp>
-        <p:nvSpPr>
-          <p:cNvPr id="6" name="Rectangle 5"/>
-          <p:cNvSpPr/>
-          <p:nvPr/>
-        </p:nvSpPr>
-        <p:spPr>
-          <a:xfrm>
-            <a:off x="457200" y="1261872"/>
-            <a:ext cx="11277295" cy="320040"/>
-          </a:xfrm>
-          <a:prstGeom prst="rect">
-            <a:avLst/>
-          </a:prstGeom>
-          <a:solidFill>
-            <a:srgbClr val="095292"/>
-          </a:solidFill>
-          <a:ln>
-            <a:noFill/>
-          </a:ln>
-        </p:spPr>
-        <p:style>
-          <a:lnRef idx="1">
-            <a:schemeClr val="accent1"/>
-          </a:lnRef>
-          <a:fillRef idx="3">
-            <a:schemeClr val="accent1"/>
-          </a:fillRef>
-          <a:effectRef idx="2">
-            <a:schemeClr val="accent1"/>
-          </a:effectRef>
-          <a:fontRef idx="minor">
-            <a:schemeClr val="lt1"/>
-          </a:fontRef>
-        </p:style>
-        <p:txBody>
-          <a:bodyPr rtlCol="0" anchor="ctr"/>
-          <a:lstStyle/>
-          <a:p>
-            <a:pPr algn="ctr"/>
-          </a:p>
-        </p:txBody>
-      </p:sp>
-      <p:sp>
-        <p:nvSpPr>
-          <p:cNvPr id="7" name="TextBox 6"/>
-          <p:cNvSpPr txBox="1"/>
-          <p:nvPr/>
-        </p:nvSpPr>
-        <p:spPr>
-          <a:xfrm>
-            <a:off x="685800" y="1307592"/>
-            <a:ext cx="10820095" cy="256032"/>
-          </a:xfrm>
-          <a:prstGeom prst="rect">
-            <a:avLst/>
-          </a:prstGeom>
-          <a:noFill/>
-        </p:spPr>
-        <p:txBody>
-          <a:bodyPr wrap="square" anchor="ctr"/>
-          <a:lstStyle/>
-          <a:p>
-            <a:r>
-              <a:rPr sz="1000" b="1" i="0">
-                <a:solidFill>
-                  <a:srgbClr val="269CCB"/>
-                </a:solidFill>
-                <a:latin typeface="Calibri"/>
-              </a:rPr>
-              <a:t>● ● ●</a:t>
-            </a:r>
-          </a:p>
-        </p:txBody>
-      </p:sp>
-      <p:sp>
-        <p:nvSpPr>
-          <p:cNvPr id="8" name="TextBox 7"/>
-          <p:cNvSpPr txBox="1"/>
-          <p:nvPr/>
-        </p:nvSpPr>
-        <p:spPr>
-          <a:xfrm>
-            <a:off x="777240" y="1719072"/>
-            <a:ext cx="10637215" cy="4133087"/>
-          </a:xfrm>
-          <a:prstGeom prst="rect">
-            <a:avLst/>
-          </a:prstGeom>
-          <a:noFill/>
-        </p:spPr>
-        <p:txBody>
-          <a:bodyPr wrap="square">
-            <a:spAutoFit/>
-          </a:bodyPr>
-          <a:lstStyle/>
-          <a:p>
-            <a:pPr>
-              <a:spcAft>
-                <a:spcPts val="400"/>
-              </a:spcAft>
-            </a:pPr>
-            <a:r>
-              <a:rPr sz="1400" b="0" i="0">
-                <a:solidFill>
-                  <a:srgbClr val="FFFFFF"/>
-                </a:solidFill>
-                <a:latin typeface="Calibri"/>
-              </a:rPr>
-              <a:t>Componente   | Tipo        | Trigger up      | Min | Max | Cooldown</a:t>
-            </a:r>
-          </a:p>
-          <a:p>
-            <a:pPr>
-              <a:spcAft>
-                <a:spcPts val="400"/>
-              </a:spcAft>
-            </a:pPr>
-            <a:r>
-              <a:rPr sz="1400" b="0" i="0">
-                <a:solidFill>
-                  <a:srgbClr val="FFFFFF"/>
-                </a:solidFill>
-                <a:latin typeface="Calibri"/>
-              </a:rPr>
-              <a:t>-------------|-------------|-----------------|-----|-----|---------</a:t>
-            </a:r>
-          </a:p>
-          <a:p>
-            <a:pPr>
-              <a:spcAft>
-                <a:spcPts val="400"/>
-              </a:spcAft>
-            </a:pPr>
-            <a:r>
-              <a:rPr sz="1400" b="0" i="0">
-                <a:solidFill>
-                  <a:srgbClr val="FFFFFF"/>
-                </a:solidFill>
-                <a:latin typeface="Calibri"/>
-              </a:rPr>
-              <a:t>API          | Horizontal  | CPU &gt; 70% / 5m  |  2  |  6  | 5 min</a:t>
-            </a:r>
-          </a:p>
-          <a:p>
-            <a:pPr>
-              <a:spcAft>
-                <a:spcPts val="400"/>
-              </a:spcAft>
-            </a:pPr>
-            <a:r>
-              <a:rPr sz="1400" b="0" i="0">
-                <a:solidFill>
-                  <a:srgbClr val="FFFFFF"/>
-                </a:solidFill>
-                <a:latin typeface="Calibri"/>
-              </a:rPr>
-              <a:t>Worker cola  | Horizontal  | cola &gt; 100 msg  |  1  |  4  | 3 min</a:t>
-            </a:r>
-          </a:p>
-          <a:p>
-            <a:pPr>
-              <a:spcAft>
-                <a:spcPts val="400"/>
-              </a:spcAft>
-            </a:pPr>
-            <a:r>
-              <a:rPr sz="1400" b="0" i="0">
-                <a:solidFill>
-                  <a:srgbClr val="FFFFFF"/>
-                </a:solidFill>
-                <a:latin typeface="Calibri"/>
-              </a:rPr>
-              <a:t>BD primaria  | NO escala   | -               |  1  |  1  | -</a:t>
-            </a:r>
-          </a:p>
-        </p:txBody>
-      </p:sp>
-      <p:sp>
-        <p:nvSpPr>
-          <p:cNvPr id="9" name="TextBox 8"/>
-          <p:cNvSpPr txBox="1"/>
-          <p:nvPr/>
-        </p:nvSpPr>
-        <p:spPr>
-          <a:xfrm>
-            <a:off x="457200" y="6080760"/>
-            <a:ext cx="11277295" cy="320040"/>
-          </a:xfrm>
-          <a:prstGeom prst="rect">
-            <a:avLst/>
-          </a:prstGeom>
-          <a:noFill/>
-        </p:spPr>
-        <p:txBody>
-          <a:bodyPr wrap="square">
-            <a:spAutoFit/>
-          </a:bodyPr>
-          <a:lstStyle/>
-          <a:p>
-            <a:pPr algn="ctr"/>
-            <a:r>
-              <a:rPr sz="1200" b="0" i="1">
-                <a:solidFill>
-                  <a:srgbClr val="666666"/>
-                </a:solidFill>
-                <a:latin typeface="Calibri"/>
-              </a:rPr>
-              <a:t>El 'max' es lo que evita que la factura escale sola. La BD primaria casi nunca escala horizontal.</a:t>
-            </a:r>
-          </a:p>
-        </p:txBody>
-      </p:sp>
-      <p:sp>
-        <p:nvSpPr>
-          <p:cNvPr id="10" name="TextBox 9"/>
-          <p:cNvSpPr txBox="1"/>
-          <p:nvPr/>
-        </p:nvSpPr>
-        <p:spPr>
-          <a:xfrm>
-            <a:off x="11185855" y="6473952"/>
-            <a:ext cx="640080" cy="274320"/>
-          </a:xfrm>
-          <a:prstGeom prst="rect">
-            <a:avLst/>
-          </a:prstGeom>
-          <a:noFill/>
-        </p:spPr>
-        <p:txBody>
-          <a:bodyPr wrap="square">
-            <a:spAutoFit/>
-          </a:bodyPr>
-          <a:lstStyle/>
-          <a:p>
-            <a:pPr algn="r"/>
-            <a:r>
-              <a:rPr sz="1100" b="0" i="0">
-                <a:solidFill>
-                  <a:srgbClr val="666666"/>
-                </a:solidFill>
-                <a:latin typeface="Calibri"/>
-              </a:rPr>
-              <a:t>18</a:t>
-            </a:r>
-          </a:p>
-        </p:txBody>
-      </p:sp>
-    </p:spTree>
-  </p:cSld>
-  <p:clrMapOvr>
-    <a:masterClrMapping/>
-  </p:clrMapOvr>
-</p:sld>
-</file>
-
-<file path=ppt/slides/slide19.xml><?xml version="1.0" encoding="utf-8"?>
-<p:sld xmlns:a="http://schemas.openxmlformats.org/drawingml/2006/main" xmlns:p="http://schemas.openxmlformats.org/presentationml/2006/main" xmlns:r="http://schemas.openxmlformats.org/officeDocument/2006/relationships">
-  <p:cSld>
-    <p:bg>
-      <p:bgPr>
-        <a:solidFill>
-          <a:srgbClr val="FFFFFF"/>
-        </a:solidFill>
-        <a:effectLst/>
-      </p:bgPr>
-    </p:bg>
-    <p:spTree>
-      <p:nvGrpSpPr>
-        <p:cNvPr id="1" name=""/>
-        <p:cNvGrpSpPr/>
-        <p:nvPr/>
-      </p:nvGrpSpPr>
-      <p:grpSpPr/>
-      <p:sp>
-        <p:nvSpPr>
-          <p:cNvPr id="2" name="Rectangle 1"/>
-          <p:cNvSpPr/>
-          <p:nvPr/>
-        </p:nvSpPr>
-        <p:spPr>
-          <a:xfrm>
-            <a:off x="0" y="0"/>
-            <a:ext cx="12191695" cy="1170432"/>
-          </a:xfrm>
-          <a:prstGeom prst="rect">
-            <a:avLst/>
-          </a:prstGeom>
-          <a:solidFill>
-            <a:srgbClr val="095292"/>
-          </a:solidFill>
-          <a:ln>
-            <a:noFill/>
-          </a:ln>
-        </p:spPr>
-        <p:style>
-          <a:lnRef idx="1">
-            <a:schemeClr val="accent1"/>
-          </a:lnRef>
-          <a:fillRef idx="3">
-            <a:schemeClr val="accent1"/>
-          </a:fillRef>
-          <a:effectRef idx="2">
-            <a:schemeClr val="accent1"/>
-          </a:effectRef>
-          <a:fontRef idx="minor">
-            <a:schemeClr val="lt1"/>
-          </a:fontRef>
-        </p:style>
-        <p:txBody>
-          <a:bodyPr rtlCol="0" anchor="ctr"/>
-          <a:lstStyle/>
-          <a:p>
-            <a:pPr algn="ctr"/>
-          </a:p>
-        </p:txBody>
-      </p:sp>
-      <p:sp>
-        <p:nvSpPr>
-          <p:cNvPr id="3" name="Rectangle 2"/>
-          <p:cNvSpPr/>
-          <p:nvPr/>
-        </p:nvSpPr>
-        <p:spPr>
-          <a:xfrm>
-            <a:off x="0" y="1170432"/>
-            <a:ext cx="12191695" cy="41148"/>
-          </a:xfrm>
-          <a:prstGeom prst="rect">
-            <a:avLst/>
-          </a:prstGeom>
-          <a:solidFill>
-            <a:srgbClr val="FFD000"/>
-          </a:solidFill>
-          <a:ln>
-            <a:noFill/>
-          </a:ln>
-        </p:spPr>
-        <p:style>
-          <a:lnRef idx="1">
-            <a:schemeClr val="accent1"/>
-          </a:lnRef>
-          <a:fillRef idx="3">
-            <a:schemeClr val="accent1"/>
-          </a:fillRef>
-          <a:effectRef idx="2">
-            <a:schemeClr val="accent1"/>
-          </a:effectRef>
-          <a:fontRef idx="minor">
-            <a:schemeClr val="lt1"/>
-          </a:fontRef>
-        </p:style>
-        <p:txBody>
-          <a:bodyPr rtlCol="0" anchor="ctr"/>
-          <a:lstStyle/>
-          <a:p>
-            <a:pPr algn="ctr"/>
-          </a:p>
-        </p:txBody>
-      </p:sp>
-      <p:sp>
-        <p:nvSpPr>
-          <p:cNvPr id="4" name="TextBox 3"/>
-          <p:cNvSpPr txBox="1"/>
-          <p:nvPr/>
-        </p:nvSpPr>
-        <p:spPr>
-          <a:xfrm>
-            <a:off x="457200" y="164592"/>
-            <a:ext cx="11277295" cy="384048"/>
-          </a:xfrm>
-          <a:prstGeom prst="rect">
-            <a:avLst/>
-          </a:prstGeom>
-          <a:noFill/>
-        </p:spPr>
-        <p:txBody>
-          <a:bodyPr wrap="square">
-            <a:spAutoFit/>
-          </a:bodyPr>
-          <a:lstStyle/>
-          <a:p>
-            <a:r>
-              <a:rPr sz="2600" b="1" i="0">
-                <a:solidFill>
-                  <a:srgbClr val="FFFFFF"/>
-                </a:solidFill>
-                <a:latin typeface="Calibri"/>
-              </a:rPr>
-              <a:t>Del boceto al código Mermaid</a:t>
-            </a:r>
-          </a:p>
-        </p:txBody>
-      </p:sp>
-      <p:sp>
-        <p:nvSpPr>
-          <p:cNvPr id="5" name="TextBox 4"/>
-          <p:cNvSpPr txBox="1"/>
-          <p:nvPr/>
-        </p:nvSpPr>
-        <p:spPr>
-          <a:xfrm>
-            <a:off x="457200" y="566928"/>
-            <a:ext cx="11277295" cy="411480"/>
-          </a:xfrm>
-          <a:prstGeom prst="rect">
-            <a:avLst/>
-          </a:prstGeom>
-          <a:noFill/>
-        </p:spPr>
-        <p:txBody>
-          <a:bodyPr wrap="square">
-            <a:spAutoFit/>
-          </a:bodyPr>
-          <a:lstStyle/>
-          <a:p>
-            <a:r>
-              <a:rPr sz="1400" b="0" i="0">
-                <a:solidFill>
-                  <a:srgbClr val="B8D8EE"/>
-                </a:solidFill>
-                <a:latin typeface="Calibri"/>
-              </a:rPr>
-              <a:t>El diagrama se escribe como código: se versiona, se compara y se corrige</a:t>
-            </a:r>
-          </a:p>
-        </p:txBody>
-      </p:sp>
-      <p:sp>
-        <p:nvSpPr>
-          <p:cNvPr id="6" name="Rounded Rectangle 5"/>
-          <p:cNvSpPr/>
-          <p:nvPr/>
-        </p:nvSpPr>
-        <p:spPr>
-          <a:xfrm>
-            <a:off x="457200" y="1659636"/>
-            <a:ext cx="11277295" cy="1051560"/>
-          </a:xfrm>
-          <a:prstGeom prst="roundRect">
-            <a:avLst>
-              <a:gd name="adj" fmla="val 12000"/>
-            </a:avLst>
-          </a:prstGeom>
-          <a:solidFill>
-            <a:srgbClr val="F2F2F2"/>
-          </a:solidFill>
-          <a:ln>
-            <a:noFill/>
-          </a:ln>
-        </p:spPr>
-        <p:style>
-          <a:lnRef idx="1">
-            <a:schemeClr val="accent1"/>
-          </a:lnRef>
-          <a:fillRef idx="3">
-            <a:schemeClr val="accent1"/>
-          </a:fillRef>
-          <a:effectRef idx="2">
-            <a:schemeClr val="accent1"/>
-          </a:effectRef>
-          <a:fontRef idx="minor">
-            <a:schemeClr val="lt1"/>
-          </a:fontRef>
-        </p:style>
-        <p:txBody>
-          <a:bodyPr rtlCol="0" anchor="ctr"/>
-          <a:lstStyle/>
-          <a:p>
-            <a:pPr algn="ctr"/>
-          </a:p>
-        </p:txBody>
-      </p:sp>
-      <p:sp>
-        <p:nvSpPr>
-          <p:cNvPr id="7" name="Rounded Rectangle 6"/>
-          <p:cNvSpPr/>
-          <p:nvPr/>
-        </p:nvSpPr>
-        <p:spPr>
-          <a:xfrm>
-            <a:off x="594360" y="1965960"/>
-            <a:ext cx="438912" cy="438912"/>
-          </a:xfrm>
-          <a:prstGeom prst="roundRect">
-            <a:avLst>
-              <a:gd name="adj" fmla="val 12000"/>
-            </a:avLst>
-          </a:prstGeom>
-          <a:solidFill>
-            <a:srgbClr val="095292"/>
-          </a:solidFill>
-          <a:ln>
-            <a:noFill/>
-          </a:ln>
-        </p:spPr>
-        <p:style>
-          <a:lnRef idx="1">
-            <a:schemeClr val="accent1"/>
-          </a:lnRef>
-          <a:fillRef idx="3">
-            <a:schemeClr val="accent1"/>
-          </a:fillRef>
-          <a:effectRef idx="2">
-            <a:schemeClr val="accent1"/>
-          </a:effectRef>
-          <a:fontRef idx="minor">
-            <a:schemeClr val="lt1"/>
-          </a:fontRef>
-        </p:style>
-        <p:txBody>
-          <a:bodyPr rtlCol="0" anchor="ctr"/>
-          <a:lstStyle/>
-          <a:p>
-            <a:pPr algn="ctr"/>
-          </a:p>
-        </p:txBody>
-      </p:sp>
-      <p:sp>
-        <p:nvSpPr>
-          <p:cNvPr id="8" name="TextBox 7"/>
-          <p:cNvSpPr txBox="1"/>
-          <p:nvPr/>
-        </p:nvSpPr>
-        <p:spPr>
-          <a:xfrm>
-            <a:off x="594360" y="1965960"/>
-            <a:ext cx="438912" cy="438912"/>
-          </a:xfrm>
-          <a:prstGeom prst="rect">
-            <a:avLst/>
-          </a:prstGeom>
-          <a:noFill/>
-        </p:spPr>
-        <p:txBody>
-          <a:bodyPr wrap="square" anchor="ctr"/>
-          <a:lstStyle/>
-          <a:p>
-            <a:pPr algn="ctr"/>
-            <a:r>
-              <a:rPr sz="1600" b="1" i="0">
-                <a:solidFill>
-                  <a:srgbClr val="FFFFFF"/>
-                </a:solidFill>
-                <a:latin typeface="Calibri"/>
-              </a:rPr>
-              <a:t>1</a:t>
-            </a:r>
-          </a:p>
-        </p:txBody>
-      </p:sp>
-      <p:sp>
-        <p:nvSpPr>
-          <p:cNvPr id="9" name="TextBox 8"/>
-          <p:cNvSpPr txBox="1"/>
-          <p:nvPr/>
-        </p:nvSpPr>
-        <p:spPr>
-          <a:xfrm>
-            <a:off x="1188720" y="1751076"/>
-            <a:ext cx="10271455" cy="886968"/>
-          </a:xfrm>
-          <a:prstGeom prst="rect">
-            <a:avLst/>
-          </a:prstGeom>
-          <a:noFill/>
-        </p:spPr>
-        <p:txBody>
-          <a:bodyPr wrap="square" anchor="ctr"/>
-          <a:lstStyle/>
-          <a:p>
-            <a:r>
-              <a:rPr sz="1500" b="1" i="0">
-                <a:solidFill>
-                  <a:srgbClr val="095292"/>
-                </a:solidFill>
-                <a:latin typeface="Calibri"/>
-              </a:rPr>
-              <a:t>Diseña visual</a:t>
-            </a:r>
-          </a:p>
-          <a:p>
-            <a:pPr>
-              <a:spcBef>
-                <a:spcPts val="200"/>
-              </a:spcBef>
-            </a:pPr>
-            <a:r>
-              <a:rPr sz="1300" b="0" i="0">
-                <a:solidFill>
-                  <a:srgbClr val="333333"/>
-                </a:solidFill>
-                <a:latin typeface="Calibri"/>
-              </a:rPr>
-              <a:t>Dibuja el diagrama como quieras en Excalidraw o draw.io: es más rápido arrastrar cajas que escribir código, y ahí es donde se piensa el modelo.</a:t>
-            </a:r>
-          </a:p>
-        </p:txBody>
-      </p:sp>
-      <p:sp>
-        <p:nvSpPr>
-          <p:cNvPr id="10" name="Rounded Rectangle 9"/>
-          <p:cNvSpPr/>
-          <p:nvPr/>
-        </p:nvSpPr>
-        <p:spPr>
-          <a:xfrm>
-            <a:off x="457200" y="2802636"/>
-            <a:ext cx="11277295" cy="1051560"/>
-          </a:xfrm>
-          <a:prstGeom prst="roundRect">
-            <a:avLst>
-              <a:gd name="adj" fmla="val 12000"/>
-            </a:avLst>
-          </a:prstGeom>
-          <a:solidFill>
-            <a:srgbClr val="E8F4FA"/>
-          </a:solidFill>
-          <a:ln>
-            <a:noFill/>
-          </a:ln>
-        </p:spPr>
-        <p:style>
-          <a:lnRef idx="1">
-            <a:schemeClr val="accent1"/>
-          </a:lnRef>
-          <a:fillRef idx="3">
-            <a:schemeClr val="accent1"/>
-          </a:fillRef>
-          <a:effectRef idx="2">
-            <a:schemeClr val="accent1"/>
-          </a:effectRef>
-          <a:fontRef idx="minor">
-            <a:schemeClr val="lt1"/>
-          </a:fontRef>
-        </p:style>
-        <p:txBody>
-          <a:bodyPr rtlCol="0" anchor="ctr"/>
-          <a:lstStyle/>
-          <a:p>
-            <a:pPr algn="ctr"/>
-          </a:p>
-        </p:txBody>
-      </p:sp>
-      <p:sp>
-        <p:nvSpPr>
-          <p:cNvPr id="11" name="Rounded Rectangle 10"/>
-          <p:cNvSpPr/>
-          <p:nvPr/>
-        </p:nvSpPr>
-        <p:spPr>
-          <a:xfrm>
-            <a:off x="594360" y="3108960"/>
-            <a:ext cx="438912" cy="438912"/>
-          </a:xfrm>
-          <a:prstGeom prst="roundRect">
-            <a:avLst>
-              <a:gd name="adj" fmla="val 12000"/>
-            </a:avLst>
-          </a:prstGeom>
-          <a:solidFill>
-            <a:srgbClr val="095292"/>
-          </a:solidFill>
-          <a:ln>
-            <a:noFill/>
-          </a:ln>
-        </p:spPr>
-        <p:style>
-          <a:lnRef idx="1">
-            <a:schemeClr val="accent1"/>
-          </a:lnRef>
-          <a:fillRef idx="3">
-            <a:schemeClr val="accent1"/>
-          </a:fillRef>
-          <a:effectRef idx="2">
-            <a:schemeClr val="accent1"/>
-          </a:effectRef>
-          <a:fontRef idx="minor">
-            <a:schemeClr val="lt1"/>
-          </a:fontRef>
-        </p:style>
-        <p:txBody>
-          <a:bodyPr rtlCol="0" anchor="ctr"/>
-          <a:lstStyle/>
-          <a:p>
-            <a:pPr algn="ctr"/>
-          </a:p>
-        </p:txBody>
-      </p:sp>
-      <p:sp>
-        <p:nvSpPr>
-          <p:cNvPr id="12" name="TextBox 11"/>
-          <p:cNvSpPr txBox="1"/>
-          <p:nvPr/>
-        </p:nvSpPr>
-        <p:spPr>
-          <a:xfrm>
-            <a:off x="594360" y="3108960"/>
-            <a:ext cx="438912" cy="438912"/>
-          </a:xfrm>
-          <a:prstGeom prst="rect">
-            <a:avLst/>
-          </a:prstGeom>
-          <a:noFill/>
-        </p:spPr>
-        <p:txBody>
-          <a:bodyPr wrap="square" anchor="ctr"/>
-          <a:lstStyle/>
-          <a:p>
-            <a:pPr algn="ctr"/>
-            <a:r>
-              <a:rPr sz="1600" b="1" i="0">
-                <a:solidFill>
-                  <a:srgbClr val="FFFFFF"/>
-                </a:solidFill>
-                <a:latin typeface="Calibri"/>
-              </a:rPr>
-              <a:t>2</a:t>
-            </a:r>
-          </a:p>
-        </p:txBody>
-      </p:sp>
-      <p:sp>
-        <p:nvSpPr>
-          <p:cNvPr id="13" name="TextBox 12"/>
-          <p:cNvSpPr txBox="1"/>
-          <p:nvPr/>
-        </p:nvSpPr>
-        <p:spPr>
-          <a:xfrm>
-            <a:off x="1188720" y="2894076"/>
-            <a:ext cx="10271455" cy="886968"/>
-          </a:xfrm>
-          <a:prstGeom prst="rect">
-            <a:avLst/>
-          </a:prstGeom>
-          <a:noFill/>
-        </p:spPr>
-        <p:txBody>
-          <a:bodyPr wrap="square" anchor="ctr"/>
-          <a:lstStyle/>
-          <a:p>
-            <a:r>
-              <a:rPr sz="1500" b="1" i="0">
-                <a:solidFill>
-                  <a:srgbClr val="095292"/>
-                </a:solidFill>
-                <a:latin typeface="Calibri"/>
-              </a:rPr>
-              <a:t>Traduce con IA</a:t>
-            </a:r>
-          </a:p>
-          <a:p>
-            <a:pPr>
-              <a:spcBef>
-                <a:spcPts val="200"/>
-              </a:spcBef>
-            </a:pPr>
-            <a:r>
-              <a:rPr sz="1300" b="0" i="0">
-                <a:solidFill>
-                  <a:srgbClr val="333333"/>
-                </a:solidFill>
-                <a:latin typeface="Calibri"/>
-              </a:rPr>
-              <a:t>Describe tu boceto a una IA y pídele el código Mermaid usando flowchart. Revisa el resultado: la IA acierta la sintaxis, no tu modelo.</a:t>
-            </a:r>
-          </a:p>
-        </p:txBody>
-      </p:sp>
-      <p:sp>
-        <p:nvSpPr>
-          <p:cNvPr id="14" name="Rounded Rectangle 13"/>
-          <p:cNvSpPr/>
-          <p:nvPr/>
-        </p:nvSpPr>
-        <p:spPr>
-          <a:xfrm>
-            <a:off x="457200" y="3945636"/>
-            <a:ext cx="11277295" cy="1051560"/>
-          </a:xfrm>
-          <a:prstGeom prst="roundRect">
-            <a:avLst>
-              <a:gd name="adj" fmla="val 12000"/>
-            </a:avLst>
-          </a:prstGeom>
-          <a:solidFill>
-            <a:srgbClr val="F2F2F2"/>
-          </a:solidFill>
-          <a:ln>
-            <a:noFill/>
-          </a:ln>
-        </p:spPr>
-        <p:style>
-          <a:lnRef idx="1">
-            <a:schemeClr val="accent1"/>
-          </a:lnRef>
-          <a:fillRef idx="3">
-            <a:schemeClr val="accent1"/>
-          </a:fillRef>
-          <a:effectRef idx="2">
-            <a:schemeClr val="accent1"/>
-          </a:effectRef>
-          <a:fontRef idx="minor">
-            <a:schemeClr val="lt1"/>
-          </a:fontRef>
-        </p:style>
-        <p:txBody>
-          <a:bodyPr rtlCol="0" anchor="ctr"/>
-          <a:lstStyle/>
-          <a:p>
-            <a:pPr algn="ctr"/>
-          </a:p>
-        </p:txBody>
-      </p:sp>
-      <p:sp>
-        <p:nvSpPr>
-          <p:cNvPr id="15" name="Rounded Rectangle 14"/>
-          <p:cNvSpPr/>
-          <p:nvPr/>
-        </p:nvSpPr>
-        <p:spPr>
-          <a:xfrm>
-            <a:off x="594360" y="4251960"/>
-            <a:ext cx="438912" cy="438912"/>
-          </a:xfrm>
-          <a:prstGeom prst="roundRect">
-            <a:avLst>
-              <a:gd name="adj" fmla="val 12000"/>
-            </a:avLst>
-          </a:prstGeom>
-          <a:solidFill>
-            <a:srgbClr val="095292"/>
-          </a:solidFill>
-          <a:ln>
-            <a:noFill/>
-          </a:ln>
-        </p:spPr>
-        <p:style>
-          <a:lnRef idx="1">
-            <a:schemeClr val="accent1"/>
-          </a:lnRef>
-          <a:fillRef idx="3">
-            <a:schemeClr val="accent1"/>
-          </a:fillRef>
-          <a:effectRef idx="2">
-            <a:schemeClr val="accent1"/>
-          </a:effectRef>
-          <a:fontRef idx="minor">
-            <a:schemeClr val="lt1"/>
-          </a:fontRef>
-        </p:style>
-        <p:txBody>
-          <a:bodyPr rtlCol="0" anchor="ctr"/>
-          <a:lstStyle/>
-          <a:p>
-            <a:pPr algn="ctr"/>
-          </a:p>
-        </p:txBody>
-      </p:sp>
-      <p:sp>
-        <p:nvSpPr>
-          <p:cNvPr id="16" name="TextBox 15"/>
-          <p:cNvSpPr txBox="1"/>
-          <p:nvPr/>
-        </p:nvSpPr>
-        <p:spPr>
-          <a:xfrm>
-            <a:off x="594360" y="4251960"/>
-            <a:ext cx="438912" cy="438912"/>
-          </a:xfrm>
-          <a:prstGeom prst="rect">
-            <a:avLst/>
-          </a:prstGeom>
-          <a:noFill/>
-        </p:spPr>
-        <p:txBody>
-          <a:bodyPr wrap="square" anchor="ctr"/>
-          <a:lstStyle/>
-          <a:p>
-            <a:pPr algn="ctr"/>
-            <a:r>
-              <a:rPr sz="1600" b="1" i="0">
-                <a:solidFill>
-                  <a:srgbClr val="FFFFFF"/>
-                </a:solidFill>
-                <a:latin typeface="Calibri"/>
-              </a:rPr>
-              <a:t>3</a:t>
-            </a:r>
-          </a:p>
-        </p:txBody>
-      </p:sp>
-      <p:sp>
-        <p:nvSpPr>
-          <p:cNvPr id="17" name="TextBox 16"/>
-          <p:cNvSpPr txBox="1"/>
-          <p:nvPr/>
-        </p:nvSpPr>
-        <p:spPr>
-          <a:xfrm>
-            <a:off x="1188720" y="4037076"/>
-            <a:ext cx="10271455" cy="886968"/>
-          </a:xfrm>
-          <a:prstGeom prst="rect">
-            <a:avLst/>
-          </a:prstGeom>
-          <a:noFill/>
-        </p:spPr>
-        <p:txBody>
-          <a:bodyPr wrap="square" anchor="ctr"/>
-          <a:lstStyle/>
-          <a:p>
-            <a:r>
-              <a:rPr sz="1500" b="1" i="0">
-                <a:solidFill>
-                  <a:srgbClr val="095292"/>
-                </a:solidFill>
-                <a:latin typeface="Calibri"/>
-              </a:rPr>
-              <a:t>Renderiza en un visor</a:t>
-            </a:r>
-          </a:p>
-          <a:p>
-            <a:pPr>
-              <a:spcBef>
-                <a:spcPts val="200"/>
-              </a:spcBef>
-            </a:pPr>
-            <a:r>
-              <a:rPr sz="1300" b="0" i="0">
-                <a:solidFill>
-                  <a:srgbClr val="333333"/>
-                </a:solidFill>
-                <a:latin typeface="Calibri"/>
-              </a:rPr>
-              <a:t>Pega el código en un visor Mermaid (mermaid.live o la vista previa de tu editor) y míralo dibujado. Si no renderiza, corrige ahí: un end faltante o un rótulo sin comillas.</a:t>
-            </a:r>
-          </a:p>
-        </p:txBody>
-      </p:sp>
-      <p:sp>
-        <p:nvSpPr>
-          <p:cNvPr id="18" name="Rounded Rectangle 17"/>
-          <p:cNvSpPr/>
-          <p:nvPr/>
-        </p:nvSpPr>
-        <p:spPr>
-          <a:xfrm>
-            <a:off x="457200" y="5088636"/>
-            <a:ext cx="11277295" cy="1051560"/>
-          </a:xfrm>
-          <a:prstGeom prst="roundRect">
-            <a:avLst>
-              <a:gd name="adj" fmla="val 12000"/>
-            </a:avLst>
-          </a:prstGeom>
-          <a:solidFill>
-            <a:srgbClr val="E8F4FA"/>
-          </a:solidFill>
-          <a:ln>
-            <a:noFill/>
-          </a:ln>
-        </p:spPr>
-        <p:style>
-          <a:lnRef idx="1">
-            <a:schemeClr val="accent1"/>
-          </a:lnRef>
-          <a:fillRef idx="3">
-            <a:schemeClr val="accent1"/>
-          </a:fillRef>
-          <a:effectRef idx="2">
-            <a:schemeClr val="accent1"/>
-          </a:effectRef>
-          <a:fontRef idx="minor">
-            <a:schemeClr val="lt1"/>
-          </a:fontRef>
-        </p:style>
-        <p:txBody>
-          <a:bodyPr rtlCol="0" anchor="ctr"/>
-          <a:lstStyle/>
-          <a:p>
-            <a:pPr algn="ctr"/>
-          </a:p>
-        </p:txBody>
-      </p:sp>
-      <p:sp>
-        <p:nvSpPr>
-          <p:cNvPr id="19" name="Rounded Rectangle 18"/>
-          <p:cNvSpPr/>
-          <p:nvPr/>
-        </p:nvSpPr>
-        <p:spPr>
-          <a:xfrm>
-            <a:off x="594360" y="5394960"/>
-            <a:ext cx="438912" cy="438912"/>
-          </a:xfrm>
-          <a:prstGeom prst="roundRect">
-            <a:avLst>
-              <a:gd name="adj" fmla="val 12000"/>
-            </a:avLst>
-          </a:prstGeom>
-          <a:solidFill>
-            <a:srgbClr val="095292"/>
-          </a:solidFill>
-          <a:ln>
-            <a:noFill/>
-          </a:ln>
-        </p:spPr>
-        <p:style>
-          <a:lnRef idx="1">
-            <a:schemeClr val="accent1"/>
-          </a:lnRef>
-          <a:fillRef idx="3">
-            <a:schemeClr val="accent1"/>
-          </a:fillRef>
-          <a:effectRef idx="2">
-            <a:schemeClr val="accent1"/>
-          </a:effectRef>
-          <a:fontRef idx="minor">
-            <a:schemeClr val="lt1"/>
-          </a:fontRef>
-        </p:style>
-        <p:txBody>
-          <a:bodyPr rtlCol="0" anchor="ctr"/>
-          <a:lstStyle/>
-          <a:p>
-            <a:pPr algn="ctr"/>
-          </a:p>
-        </p:txBody>
-      </p:sp>
-      <p:sp>
-        <p:nvSpPr>
-          <p:cNvPr id="20" name="TextBox 19"/>
-          <p:cNvSpPr txBox="1"/>
-          <p:nvPr/>
-        </p:nvSpPr>
-        <p:spPr>
-          <a:xfrm>
-            <a:off x="594360" y="5394960"/>
-            <a:ext cx="438912" cy="438912"/>
-          </a:xfrm>
-          <a:prstGeom prst="rect">
-            <a:avLst/>
-          </a:prstGeom>
-          <a:noFill/>
-        </p:spPr>
-        <p:txBody>
-          <a:bodyPr wrap="square" anchor="ctr"/>
-          <a:lstStyle/>
-          <a:p>
-            <a:pPr algn="ctr"/>
-            <a:r>
-              <a:rPr sz="1600" b="1" i="0">
-                <a:solidFill>
-                  <a:srgbClr val="FFFFFF"/>
-                </a:solidFill>
-                <a:latin typeface="Calibri"/>
-              </a:rPr>
-              <a:t>4</a:t>
-            </a:r>
-          </a:p>
-        </p:txBody>
-      </p:sp>
-      <p:sp>
-        <p:nvSpPr>
-          <p:cNvPr id="21" name="TextBox 20"/>
-          <p:cNvSpPr txBox="1"/>
-          <p:nvPr/>
-        </p:nvSpPr>
-        <p:spPr>
-          <a:xfrm>
-            <a:off x="1188720" y="5180076"/>
-            <a:ext cx="10271455" cy="886968"/>
-          </a:xfrm>
-          <a:prstGeom prst="rect">
-            <a:avLst/>
-          </a:prstGeom>
-          <a:noFill/>
-        </p:spPr>
-        <p:txBody>
-          <a:bodyPr wrap="square" anchor="ctr"/>
-          <a:lstStyle/>
-          <a:p>
-            <a:r>
-              <a:rPr sz="1500" b="1" i="0">
-                <a:solidFill>
-                  <a:srgbClr val="095292"/>
-                </a:solidFill>
-                <a:latin typeface="Calibri"/>
-              </a:rPr>
-              <a:t>Guarda código e imagen</a:t>
-            </a:r>
-          </a:p>
-          <a:p>
-            <a:pPr>
-              <a:spcBef>
-                <a:spcPts val="200"/>
-              </a:spcBef>
-            </a:pPr>
-            <a:r>
-              <a:rPr sz="1300" b="0" i="0">
-                <a:solidFill>
-                  <a:srgbClr val="333333"/>
-                </a:solidFill>
-                <a:latin typeface="Calibri"/>
-              </a:rPr>
-              <a:t>El código es la fuente del diagrama: guárdalo con tu proyecto junto con el PNG exportado.</a:t>
-            </a:r>
-          </a:p>
-        </p:txBody>
-      </p:sp>
-      <p:sp>
-        <p:nvSpPr>
-          <p:cNvPr id="22" name="TextBox 21"/>
-          <p:cNvSpPr txBox="1"/>
-          <p:nvPr/>
-        </p:nvSpPr>
-        <p:spPr>
-          <a:xfrm>
-            <a:off x="11185855" y="6473952"/>
-            <a:ext cx="640080" cy="274320"/>
-          </a:xfrm>
-          <a:prstGeom prst="rect">
-            <a:avLst/>
-          </a:prstGeom>
-          <a:noFill/>
-        </p:spPr>
-        <p:txBody>
-          <a:bodyPr wrap="square">
-            <a:spAutoFit/>
-          </a:bodyPr>
-          <a:lstStyle/>
-          <a:p>
-            <a:pPr algn="r"/>
-            <a:r>
-              <a:rPr sz="1100" b="0" i="0">
-                <a:solidFill>
-                  <a:srgbClr val="666666"/>
-                </a:solidFill>
-                <a:latin typeface="Calibri"/>
-              </a:rPr>
-              <a:t>19</a:t>
+              <a:t>Teoría al servicio del diseño</a:t>
             </a:r>
           </a:p>
         </p:txBody>
@@ -8444,238 +10859,6 @@
 </p:sld>
 </file>
 
-<file path=ppt/slides/slide20.xml><?xml version="1.0" encoding="utf-8"?>
-<p:sld xmlns:a="http://schemas.openxmlformats.org/drawingml/2006/main" xmlns:p="http://schemas.openxmlformats.org/presentationml/2006/main" xmlns:r="http://schemas.openxmlformats.org/officeDocument/2006/relationships">
-  <p:cSld>
-    <p:bg>
-      <p:bgPr>
-        <a:solidFill>
-          <a:srgbClr val="FFFFFF"/>
-        </a:solidFill>
-        <a:effectLst/>
-      </p:bgPr>
-    </p:bg>
-    <p:spTree>
-      <p:nvGrpSpPr>
-        <p:cNvPr id="1" name=""/>
-        <p:cNvGrpSpPr/>
-        <p:nvPr/>
-      </p:nvGrpSpPr>
-      <p:grpSpPr/>
-      <p:sp>
-        <p:nvSpPr>
-          <p:cNvPr id="2" name="Rectangle 1"/>
-          <p:cNvSpPr/>
-          <p:nvPr/>
-        </p:nvSpPr>
-        <p:spPr>
-          <a:xfrm>
-            <a:off x="0" y="0"/>
-            <a:ext cx="12191695" cy="164592"/>
-          </a:xfrm>
-          <a:prstGeom prst="rect">
-            <a:avLst/>
-          </a:prstGeom>
-          <a:solidFill>
-            <a:srgbClr val="269CCB"/>
-          </a:solidFill>
-          <a:ln>
-            <a:noFill/>
-          </a:ln>
-        </p:spPr>
-        <p:style>
-          <a:lnRef idx="1">
-            <a:schemeClr val="accent1"/>
-          </a:lnRef>
-          <a:fillRef idx="3">
-            <a:schemeClr val="accent1"/>
-          </a:fillRef>
-          <a:effectRef idx="2">
-            <a:schemeClr val="accent1"/>
-          </a:effectRef>
-          <a:fontRef idx="minor">
-            <a:schemeClr val="lt1"/>
-          </a:fontRef>
-        </p:style>
-        <p:txBody>
-          <a:bodyPr rtlCol="0" anchor="ctr"/>
-          <a:lstStyle/>
-          <a:p>
-            <a:pPr algn="ctr"/>
-          </a:p>
-        </p:txBody>
-      </p:sp>
-      <p:pic>
-        <p:nvPicPr>
-          <p:cNvPr id="3" name="Picture 2" descr="logo_uniajc_color.png"/>
-          <p:cNvPicPr>
-            <a:picLocks noChangeAspect="1"/>
-          </p:cNvPicPr>
-          <p:nvPr/>
-        </p:nvPicPr>
-        <p:blipFill>
-          <a:blip r:embed="rId2"/>
-          <a:stretch>
-            <a:fillRect/>
-          </a:stretch>
-        </p:blipFill>
-        <p:spPr>
-          <a:xfrm>
-            <a:off x="10271455" y="5998464"/>
-            <a:ext cx="1463040" cy="643233"/>
-          </a:xfrm>
-          <a:prstGeom prst="rect">
-            <a:avLst/>
-          </a:prstGeom>
-        </p:spPr>
-      </p:pic>
-      <p:sp>
-        <p:nvSpPr>
-          <p:cNvPr id="4" name="TextBox 3"/>
-          <p:cNvSpPr txBox="1"/>
-          <p:nvPr/>
-        </p:nvSpPr>
-        <p:spPr>
-          <a:xfrm>
-            <a:off x="457200" y="1737360"/>
-            <a:ext cx="11277295" cy="1097280"/>
-          </a:xfrm>
-          <a:prstGeom prst="rect">
-            <a:avLst/>
-          </a:prstGeom>
-          <a:noFill/>
-        </p:spPr>
-        <p:txBody>
-          <a:bodyPr wrap="square" anchor="ctr"/>
-          <a:lstStyle/>
-          <a:p>
-            <a:pPr algn="ctr"/>
-            <a:r>
-              <a:rPr sz="3400" b="1" i="0">
-                <a:solidFill>
-                  <a:srgbClr val="095292"/>
-                </a:solidFill>
-                <a:latin typeface="Calibri"/>
-              </a:rPr>
-              <a:t>Clase 13 · cierre conceptual</a:t>
-            </a:r>
-          </a:p>
-        </p:txBody>
-      </p:sp>
-      <p:sp>
-        <p:nvSpPr>
-          <p:cNvPr id="5" name="TextBox 4"/>
-          <p:cNvSpPr txBox="1"/>
-          <p:nvPr/>
-        </p:nvSpPr>
-        <p:spPr>
-          <a:xfrm>
-            <a:off x="457200" y="3017520"/>
-            <a:ext cx="11277295" cy="1645920"/>
-          </a:xfrm>
-          <a:prstGeom prst="rect">
-            <a:avLst/>
-          </a:prstGeom>
-          <a:noFill/>
-        </p:spPr>
-        <p:txBody>
-          <a:bodyPr wrap="square">
-            <a:spAutoFit/>
-          </a:bodyPr>
-          <a:lstStyle/>
-          <a:p>
-            <a:pPr algn="ctr">
-              <a:spcAft>
-                <a:spcPts val="600"/>
-              </a:spcAft>
-            </a:pPr>
-            <a:r>
-              <a:rPr sz="1600" b="0" i="0">
-                <a:solidFill>
-                  <a:srgbClr val="333333"/>
-                </a:solidFill>
-                <a:latin typeface="Calibri"/>
-              </a:rPr>
-              <a:t>Distinguir escala vertical vs horizontal y cuándo aplicarlas.</a:t>
-            </a:r>
-          </a:p>
-          <a:p>
-            <a:pPr algn="ctr">
-              <a:spcAft>
-                <a:spcPts val="600"/>
-              </a:spcAft>
-            </a:pPr>
-            <a:r>
-              <a:rPr sz="1600" b="0" i="0">
-                <a:solidFill>
-                  <a:srgbClr val="333333"/>
-                </a:solidFill>
-                <a:latin typeface="Calibri"/>
-              </a:rPr>
-              <a:t>Definir triggers cualitativos (CPU, cola, RPS) sin cloud de pago.</a:t>
-            </a:r>
-          </a:p>
-          <a:p>
-            <a:pPr algn="ctr">
-              <a:spcAft>
-                <a:spcPts val="600"/>
-              </a:spcAft>
-            </a:pPr>
-            <a:r>
-              <a:rPr sz="1600" b="0" i="0">
-                <a:solidFill>
-                  <a:srgbClr val="333333"/>
-                </a:solidFill>
-                <a:latin typeface="Calibri"/>
-              </a:rPr>
-              <a:t>Actualizar el informe con la política de escala.</a:t>
-            </a:r>
-          </a:p>
-        </p:txBody>
-      </p:sp>
-      <p:sp>
-        <p:nvSpPr>
-          <p:cNvPr id="6" name="TextBox 5"/>
-          <p:cNvSpPr txBox="1"/>
-          <p:nvPr/>
-        </p:nvSpPr>
-        <p:spPr>
-          <a:xfrm>
-            <a:off x="457200" y="4754880"/>
-            <a:ext cx="11277295" cy="640080"/>
-          </a:xfrm>
-          <a:prstGeom prst="rect">
-            <a:avLst/>
-          </a:prstGeom>
-          <a:noFill/>
-        </p:spPr>
-        <p:txBody>
-          <a:bodyPr wrap="square">
-            <a:spAutoFit/>
-          </a:bodyPr>
-          <a:lstStyle/>
-          <a:p>
-            <a:pPr algn="ctr"/>
-            <a:r>
-              <a:rPr sz="2000" b="1" i="0">
-                <a:solidFill>
-                  <a:srgbClr val="269CCB"/>
-                </a:solidFill>
-                <a:latin typeface="Calibri"/>
-              </a:rPr>
-              <a:t>Teoría al servicio del diseño</a:t>
-            </a:r>
-          </a:p>
-        </p:txBody>
-      </p:sp>
-    </p:spTree>
-  </p:cSld>
-  <p:clrMapOvr>
-    <a:masterClrMapping/>
-  </p:clrMapOvr>
-</p:sld>
-</file>
-
 <file path=ppt/slides/slide3.xml><?xml version="1.0" encoding="utf-8"?>
 <p:sld xmlns:a="http://schemas.openxmlformats.org/drawingml/2006/main" xmlns:p="http://schemas.openxmlformats.org/presentationml/2006/main" xmlns:r="http://schemas.openxmlformats.org/officeDocument/2006/relationships">
   <p:cSld>
@@ -8816,14 +10999,118 @@
       </p:sp>
       <p:sp>
         <p:nvSpPr>
-          <p:cNvPr id="5" name="TextBox 4"/>
+          <p:cNvPr id="5" name="Rounded Rectangle 4"/>
+          <p:cNvSpPr/>
+          <p:nvPr/>
+        </p:nvSpPr>
+        <p:spPr>
+          <a:xfrm>
+            <a:off x="5797149" y="1573813"/>
+            <a:ext cx="6010497" cy="4057845"/>
+          </a:xfrm>
+          <a:prstGeom prst="roundRect">
+            <a:avLst>
+              <a:gd name="adj" fmla="val 4000"/>
+            </a:avLst>
+          </a:prstGeom>
+          <a:solidFill>
+            <a:srgbClr val="E8EEF4"/>
+          </a:solidFill>
+          <a:ln>
+            <a:noFill/>
+          </a:ln>
+        </p:spPr>
+        <p:style>
+          <a:lnRef idx="1">
+            <a:schemeClr val="accent1"/>
+          </a:lnRef>
+          <a:fillRef idx="3">
+            <a:schemeClr val="accent1"/>
+          </a:fillRef>
+          <a:effectRef idx="2">
+            <a:schemeClr val="accent1"/>
+          </a:effectRef>
+          <a:fontRef idx="minor">
+            <a:schemeClr val="lt1"/>
+          </a:fontRef>
+        </p:style>
+        <p:txBody>
+          <a:bodyPr rtlCol="0" anchor="ctr"/>
+          <a:lstStyle/>
+          <a:p>
+            <a:pPr algn="ctr"/>
+          </a:p>
+        </p:txBody>
+      </p:sp>
+      <p:pic>
+        <p:nvPicPr>
+          <p:cNvPr id="6" name="Picture 5" descr="students-learning-laptops-classroom.jpg"/>
+          <p:cNvPicPr>
+            <a:picLocks noChangeAspect="1"/>
+          </p:cNvPicPr>
+          <p:nvPr/>
+        </p:nvPicPr>
+        <p:blipFill>
+          <a:blip r:embed="rId2"/>
+          <a:stretch>
+            <a:fillRect/>
+          </a:stretch>
+        </p:blipFill>
+        <p:spPr>
+          <a:xfrm>
+            <a:off x="5870301" y="1646965"/>
+            <a:ext cx="5864193" cy="3911541"/>
+          </a:xfrm>
+          <a:prstGeom prst="rect">
+            <a:avLst/>
+          </a:prstGeom>
+        </p:spPr>
+      </p:pic>
+      <p:sp>
+        <p:nvSpPr>
+          <p:cNvPr id="7" name="TextBox 6"/>
           <p:cNvSpPr txBox="1"/>
           <p:nvPr/>
         </p:nvSpPr>
         <p:spPr>
           <a:xfrm>
-            <a:off x="457200" y="1170432"/>
-            <a:ext cx="11277295" cy="5230368"/>
+            <a:off x="5870301" y="5961888"/>
+            <a:ext cx="5864193" cy="320040"/>
+          </a:xfrm>
+          <a:prstGeom prst="rect">
+            <a:avLst/>
+          </a:prstGeom>
+          <a:noFill/>
+        </p:spPr>
+        <p:txBody>
+          <a:bodyPr wrap="square">
+            <a:spAutoFit/>
+          </a:bodyPr>
+          <a:lstStyle/>
+          <a:p>
+            <a:pPr algn="ctr"/>
+            <a:r>
+              <a:rPr sz="1100" b="0" i="1">
+                <a:solidFill>
+                  <a:srgbClr val="666666"/>
+                </a:solidFill>
+                <a:latin typeface="Calibri"/>
+              </a:rPr>
+              <a:t>Foto: Mikhail Nilov · Pexels</a:t>
+            </a:r>
+          </a:p>
+        </p:txBody>
+      </p:sp>
+      <p:sp>
+        <p:nvSpPr>
+          <p:cNvPr id="8" name="TextBox 7"/>
+          <p:cNvSpPr txBox="1"/>
+          <p:nvPr/>
+        </p:nvSpPr>
+        <p:spPr>
+          <a:xfrm>
+            <a:off x="457200" y="1353312"/>
+            <a:ext cx="5093061" cy="5047488"/>
           </a:xfrm>
           <a:prstGeom prst="rect">
             <a:avLst/>
@@ -8887,7 +11174,7 @@
       </p:sp>
       <p:sp>
         <p:nvSpPr>
-          <p:cNvPr id="6" name="TextBox 5"/>
+          <p:cNvPr id="9" name="TextBox 8"/>
           <p:cNvSpPr txBox="1"/>
           <p:nvPr/>
         </p:nvSpPr>
@@ -9061,21 +11348,125 @@
                 </a:solidFill>
                 <a:latin typeface="Calibri"/>
               </a:rPr>
-              <a:t>Escala para la app</a:t>
-            </a:r>
-          </a:p>
-        </p:txBody>
-      </p:sp>
-      <p:sp>
-        <p:nvSpPr>
-          <p:cNvPr id="5" name="TextBox 4"/>
+              <a:t>Clase autonoma: escalabilidad no es rendimiento</a:t>
+            </a:r>
+          </a:p>
+        </p:txBody>
+      </p:sp>
+      <p:sp>
+        <p:nvSpPr>
+          <p:cNvPr id="5" name="Rounded Rectangle 4"/>
+          <p:cNvSpPr/>
+          <p:nvPr/>
+        </p:nvSpPr>
+        <p:spPr>
+          <a:xfrm>
+            <a:off x="5797149" y="1435229"/>
+            <a:ext cx="6010497" cy="4335013"/>
+          </a:xfrm>
+          <a:prstGeom prst="roundRect">
+            <a:avLst>
+              <a:gd name="adj" fmla="val 4000"/>
+            </a:avLst>
+          </a:prstGeom>
+          <a:solidFill>
+            <a:srgbClr val="E8EEF4"/>
+          </a:solidFill>
+          <a:ln>
+            <a:noFill/>
+          </a:ln>
+        </p:spPr>
+        <p:style>
+          <a:lnRef idx="1">
+            <a:schemeClr val="accent1"/>
+          </a:lnRef>
+          <a:fillRef idx="3">
+            <a:schemeClr val="accent1"/>
+          </a:fillRef>
+          <a:effectRef idx="2">
+            <a:schemeClr val="accent1"/>
+          </a:effectRef>
+          <a:fontRef idx="minor">
+            <a:schemeClr val="lt1"/>
+          </a:fontRef>
+        </p:style>
+        <p:txBody>
+          <a:bodyPr rtlCol="0" anchor="ctr"/>
+          <a:lstStyle/>
+          <a:p>
+            <a:pPr algn="ctr"/>
+          </a:p>
+        </p:txBody>
+      </p:sp>
+      <p:pic>
+        <p:nvPicPr>
+          <p:cNvPr id="6" name="Picture 5" descr="highway-traffic-night.jpg"/>
+          <p:cNvPicPr>
+            <a:picLocks noChangeAspect="1"/>
+          </p:cNvPicPr>
+          <p:nvPr/>
+        </p:nvPicPr>
+        <p:blipFill>
+          <a:blip r:embed="rId2"/>
+          <a:stretch>
+            <a:fillRect/>
+          </a:stretch>
+        </p:blipFill>
+        <p:spPr>
+          <a:xfrm>
+            <a:off x="5870301" y="1508381"/>
+            <a:ext cx="5864193" cy="4188709"/>
+          </a:xfrm>
+          <a:prstGeom prst="rect">
+            <a:avLst/>
+          </a:prstGeom>
+        </p:spPr>
+      </p:pic>
+      <p:sp>
+        <p:nvSpPr>
+          <p:cNvPr id="7" name="TextBox 6"/>
           <p:cNvSpPr txBox="1"/>
           <p:nvPr/>
         </p:nvSpPr>
         <p:spPr>
           <a:xfrm>
-            <a:off x="457200" y="1170432"/>
-            <a:ext cx="11277295" cy="5230368"/>
+            <a:off x="5870301" y="5961888"/>
+            <a:ext cx="5864193" cy="320040"/>
+          </a:xfrm>
+          <a:prstGeom prst="rect">
+            <a:avLst/>
+          </a:prstGeom>
+          <a:noFill/>
+        </p:spPr>
+        <p:txBody>
+          <a:bodyPr wrap="square">
+            <a:spAutoFit/>
+          </a:bodyPr>
+          <a:lstStyle/>
+          <a:p>
+            <a:pPr algn="ctr"/>
+            <a:r>
+              <a:rPr sz="1100" b="0" i="1">
+                <a:solidFill>
+                  <a:srgbClr val="666666"/>
+                </a:solidFill>
+                <a:latin typeface="Calibri"/>
+              </a:rPr>
+              <a:t>Foto: 蔡宗翰 · Pexels</a:t>
+            </a:r>
+          </a:p>
+        </p:txBody>
+      </p:sp>
+      <p:sp>
+        <p:nvSpPr>
+          <p:cNvPr id="8" name="TextBox 7"/>
+          <p:cNvSpPr txBox="1"/>
+          <p:nvPr/>
+        </p:nvSpPr>
+        <p:spPr>
+          <a:xfrm>
+            <a:off x="457200" y="1353312"/>
+            <a:ext cx="5093061" cy="5047488"/>
           </a:xfrm>
           <a:prstGeom prst="rect">
             <a:avLst/>
@@ -9100,7 +11491,7 @@
                 </a:solidFill>
                 <a:latin typeface="Calibri"/>
               </a:rPr>
-              <a:t>–   Horizontal: más réplicas del API. Vertical: más CPU/RAM a un nodo.</a:t>
+              <a:t>–   La escalabilidad es la capacidad de un sistema de sostener mas carga agregando recursos, y la primera precision importante es que no es lo mismo que…</a:t>
             </a:r>
           </a:p>
           <a:p>
@@ -9116,7 +11507,7 @@
                 </a:solidFill>
                 <a:latin typeface="Calibri"/>
               </a:rPr>
-              <a:t>–   Datos: escala distinta (read replicas conceptuales / partición — solo si aplica).</a:t>
+              <a:t>–   La escalabilidad pregunta que pasa cuando la carga se multiplica: si al duplicar los recursos el sistema atiende cerca del doble de trabajo, escala…</a:t>
             </a:r>
           </a:p>
           <a:p>
@@ -9132,64 +11523,14 @@
                 </a:solidFill>
                 <a:latin typeface="Calibri"/>
               </a:rPr>
-              <a:t>–   Triggers: RPS, latencia p95, profundidad de cola, CPU.</a:t>
-            </a:r>
-          </a:p>
-          <a:p>
-            <a:pPr>
-              <a:spcAft>
-                <a:spcPts val="800"/>
-              </a:spcAft>
-            </a:pPr>
-            <a:r>
-              <a:rPr sz="2000" b="0" i="0">
-                <a:solidFill>
-                  <a:srgbClr val="333333"/>
-                </a:solidFill>
-                <a:latin typeface="Calibri"/>
-              </a:rPr>
-              <a:t>–   Escalar en horizontal exige una API </a:t>
-            </a:r>
-            <a:r>
-              <a:rPr sz="2000" b="1" i="0">
-                <a:solidFill>
-                  <a:srgbClr val="333333"/>
-                </a:solidFill>
-                <a:latin typeface="Calibri"/>
-              </a:rPr>
-              <a:t>sin estado</a:t>
-            </a:r>
-            <a:r>
-              <a:rPr sz="2000" b="0" i="0">
-                <a:solidFill>
-                  <a:srgbClr val="333333"/>
-                </a:solidFill>
-                <a:latin typeface="Calibri"/>
-              </a:rPr>
-              <a:t>: la sesión vive en un token o en un almacén compartido, no en la memoria de una instancia.</a:t>
-            </a:r>
-          </a:p>
-          <a:p>
-            <a:pPr>
-              <a:spcAft>
-                <a:spcPts val="800"/>
-              </a:spcAft>
-            </a:pPr>
-            <a:r>
-              <a:rPr sz="2000" b="0" i="0">
-                <a:solidFill>
-                  <a:srgbClr val="333333"/>
-                </a:solidFill>
-                <a:latin typeface="Calibri"/>
-              </a:rPr>
-              <a:t>–   Ejemplo de la app: la API escala de 2 a 6 réplicas; la base de datos no escala igual y suele ser el límite.</a:t>
-            </a:r>
-          </a:p>
-        </p:txBody>
-      </p:sp>
-      <p:sp>
-        <p:nvSpPr>
-          <p:cNvPr id="6" name="TextBox 5"/>
+              <a:t>–   Si atiende un 20 por ciento mas, escala mal, y ninguna cantidad de dinero lo va a arreglar.</a:t>
+            </a:r>
+          </a:p>
+        </p:txBody>
+      </p:sp>
+      <p:sp>
+        <p:nvSpPr>
+          <p:cNvPr id="9" name="TextBox 8"/>
           <p:cNvSpPr txBox="1"/>
           <p:nvPr/>
         </p:nvSpPr>
@@ -9363,21 +11704,149 @@
                 </a:solidFill>
                 <a:latin typeface="Calibri"/>
               </a:rPr>
-              <a:t>Límites y costos</a:t>
-            </a:r>
-          </a:p>
-        </p:txBody>
-      </p:sp>
-      <p:sp>
-        <p:nvSpPr>
-          <p:cNvPr id="5" name="TextBox 4"/>
+              <a:t>Escalar vertical y horizontalmente: las dos formas de agregar capacidad</a:t>
+            </a:r>
+          </a:p>
+        </p:txBody>
+      </p:sp>
+      <p:sp>
+        <p:nvSpPr>
+          <p:cNvPr id="5" name="Rounded Rectangle 4"/>
+          <p:cNvSpPr/>
+          <p:nvPr/>
+        </p:nvSpPr>
+        <p:spPr>
+          <a:xfrm>
+            <a:off x="5803166" y="1188719"/>
+            <a:ext cx="5998464" cy="4828032"/>
+          </a:xfrm>
+          <a:prstGeom prst="roundRect">
+            <a:avLst>
+              <a:gd name="adj" fmla="val 4000"/>
+            </a:avLst>
+          </a:prstGeom>
+          <a:solidFill>
+            <a:srgbClr val="E8EEF4"/>
+          </a:solidFill>
+          <a:ln>
+            <a:noFill/>
+          </a:ln>
+        </p:spPr>
+        <p:style>
+          <a:lnRef idx="1">
+            <a:schemeClr val="accent1"/>
+          </a:lnRef>
+          <a:fillRef idx="3">
+            <a:schemeClr val="accent1"/>
+          </a:fillRef>
+          <a:effectRef idx="2">
+            <a:schemeClr val="accent1"/>
+          </a:effectRef>
+          <a:fontRef idx="minor">
+            <a:schemeClr val="lt1"/>
+          </a:fontRef>
+        </p:style>
+        <p:txBody>
+          <a:bodyPr rtlCol="0" anchor="ctr"/>
+          <a:lstStyle/>
+          <a:p>
+            <a:pPr algn="ctr"/>
+          </a:p>
+        </p:txBody>
+      </p:sp>
+      <p:pic>
+        <p:nvPicPr>
+          <p:cNvPr id="6" name="Picture 5" descr="vertical-horizontal-paso1.png"/>
+          <p:cNvPicPr>
+            <a:picLocks noChangeAspect="1"/>
+          </p:cNvPicPr>
+          <p:nvPr/>
+        </p:nvPicPr>
+        <p:blipFill>
+          <a:blip r:embed="rId2"/>
+          <a:stretch>
+            <a:fillRect/>
+          </a:stretch>
+        </p:blipFill>
+        <p:spPr>
+          <a:xfrm>
+            <a:off x="5876318" y="1261872"/>
+            <a:ext cx="5852160" cy="4681728"/>
+          </a:xfrm>
+          <a:prstGeom prst="rect">
+            <a:avLst/>
+          </a:prstGeom>
+        </p:spPr>
+      </p:pic>
+      <p:pic>
+        <p:nvPicPr>
+          <p:cNvPr id="7" name="Picture 6" descr="vertical-horizontal-paso2.png"/>
+          <p:cNvPicPr>
+            <a:picLocks noChangeAspect="1"/>
+          </p:cNvPicPr>
+          <p:nvPr/>
+        </p:nvPicPr>
+        <p:blipFill>
+          <a:blip r:embed="rId3"/>
+          <a:stretch>
+            <a:fillRect/>
+          </a:stretch>
+        </p:blipFill>
+        <p:spPr>
+          <a:xfrm>
+            <a:off x="5876318" y="1261872"/>
+            <a:ext cx="5852160" cy="4681728"/>
+          </a:xfrm>
+          <a:prstGeom prst="rect">
+            <a:avLst/>
+          </a:prstGeom>
+        </p:spPr>
+      </p:pic>
+      <p:sp>
+        <p:nvSpPr>
+          <p:cNvPr id="8" name="TextBox 7"/>
           <p:cNvSpPr txBox="1"/>
           <p:nvPr/>
         </p:nvSpPr>
         <p:spPr>
           <a:xfrm>
-            <a:off x="457200" y="1170432"/>
-            <a:ext cx="11277295" cy="5230368"/>
+            <a:off x="5870301" y="5961888"/>
+            <a:ext cx="5864193" cy="320040"/>
+          </a:xfrm>
+          <a:prstGeom prst="rect">
+            <a:avLst/>
+          </a:prstGeom>
+          <a:noFill/>
+        </p:spPr>
+        <p:txBody>
+          <a:bodyPr wrap="square">
+            <a:spAutoFit/>
+          </a:bodyPr>
+          <a:lstStyle/>
+          <a:p>
+            <a:pPr algn="ctr"/>
+            <a:r>
+              <a:rPr sz="1100" b="0" i="1">
+                <a:solidFill>
+                  <a:srgbClr val="666666"/>
+                </a:solidFill>
+                <a:latin typeface="Calibri"/>
+              </a:rPr>
+              <a:t>Clic para avanzar la animación</a:t>
+            </a:r>
+          </a:p>
+        </p:txBody>
+      </p:sp>
+      <p:sp>
+        <p:nvSpPr>
+          <p:cNvPr id="9" name="TextBox 8"/>
+          <p:cNvSpPr txBox="1"/>
+          <p:nvPr/>
+        </p:nvSpPr>
+        <p:spPr>
+          <a:xfrm>
+            <a:off x="457200" y="1353312"/>
+            <a:ext cx="5093061" cy="5047488"/>
           </a:xfrm>
           <a:prstGeom prst="rect">
             <a:avLst/>
@@ -9402,7 +11871,7 @@
                 </a:solidFill>
                 <a:latin typeface="Calibri"/>
               </a:rPr>
-              <a:t>–   max replicas · min replicas · cooldown — se definen aunque sean hipotéticos.</a:t>
+              <a:t>–   Escalar vertical es dar más recursos a la MISMA máquina: simple, pero con techo físico y reinicio de 30 s a 2 min.</a:t>
             </a:r>
           </a:p>
           <a:p>
@@ -9418,7 +11887,7 @@
                 </a:solidFill>
                 <a:latin typeface="Calibri"/>
               </a:rPr>
-              <a:t>–   Escalar mal = costo (enlace con Clase 10).</a:t>
+              <a:t>–   Escalar horizontal es agregar MÁS instancias iguales detrás del balanceador.</a:t>
             </a:r>
           </a:p>
           <a:p>
@@ -9434,43 +11903,7 @@
                 </a:solidFill>
                 <a:latin typeface="Calibri"/>
               </a:rPr>
-              <a:t>–   </a:t>
-            </a:r>
-            <a:r>
-              <a:rPr sz="2000" b="1" i="0">
-                <a:solidFill>
-                  <a:srgbClr val="333333"/>
-                </a:solidFill>
-                <a:latin typeface="Calibri"/>
-              </a:rPr>
-              <a:t>min</a:t>
-            </a:r>
-            <a:r>
-              <a:rPr sz="2000" b="0" i="0">
-                <a:solidFill>
-                  <a:srgbClr val="333333"/>
-                </a:solidFill>
-                <a:latin typeface="Calibri"/>
-              </a:rPr>
-              <a:t> = capacidad base siempre encendida, y su costo fijo · </a:t>
-            </a:r>
-            <a:r>
-              <a:rPr sz="2000" b="1" i="0">
-                <a:solidFill>
-                  <a:srgbClr val="333333"/>
-                </a:solidFill>
-                <a:latin typeface="Calibri"/>
-              </a:rPr>
-              <a:t>max</a:t>
-            </a:r>
-            <a:r>
-              <a:rPr sz="2000" b="0" i="0">
-                <a:solidFill>
-                  <a:srgbClr val="333333"/>
-                </a:solidFill>
-                <a:latin typeface="Calibri"/>
-              </a:rPr>
-              <a:t> = techo de gasto y de conexiones a la base.</a:t>
+              <a:t>–   Lo horizontal no tiene techo cercano y mejora la disponibilidad.</a:t>
             </a:r>
           </a:p>
           <a:p>
@@ -9486,48 +11919,14 @@
                 </a:solidFill>
                 <a:latin typeface="Calibri"/>
               </a:rPr>
-              <a:t>–   </a:t>
-            </a:r>
-            <a:r>
-              <a:rPr sz="2000" b="1" i="0">
-                <a:solidFill>
-                  <a:srgbClr val="333333"/>
-                </a:solidFill>
-                <a:latin typeface="Calibri"/>
-              </a:rPr>
-              <a:t>Cooldown</a:t>
-            </a:r>
-            <a:r>
-              <a:rPr sz="2000" b="0" i="0">
-                <a:solidFill>
-                  <a:srgbClr val="333333"/>
-                </a:solidFill>
-                <a:latin typeface="Calibri"/>
-              </a:rPr>
-              <a:t> = espera tras escalar (por ejemplo 5 minutos) para no subir y bajar en ciclos.</a:t>
-            </a:r>
-          </a:p>
-          <a:p>
-            <a:pPr>
-              <a:spcAft>
-                <a:spcPts val="800"/>
-              </a:spcAft>
-            </a:pPr>
-            <a:r>
-              <a:rPr sz="2000" b="0" i="0">
-                <a:solidFill>
-                  <a:srgbClr val="333333"/>
-                </a:solidFill>
-                <a:latin typeface="Calibri"/>
-              </a:rPr>
-              <a:t>–   Error común: max sin límite; un pico o un ataque se convierte en factura.</a:t>
-            </a:r>
-          </a:p>
-        </p:txBody>
-      </p:sp>
-      <p:sp>
-        <p:nvSpPr>
-          <p:cNvPr id="6" name="TextBox 5"/>
+              <a:t>–   Su precio: la aplicación tiene que poder correr en varias copias sin pisarse.</a:t>
+            </a:r>
+          </a:p>
+        </p:txBody>
+      </p:sp>
+      <p:sp>
+        <p:nvSpPr>
+          <p:cNvPr id="10" name="TextBox 9"/>
           <p:cNvSpPr txBox="1"/>
           <p:nvPr/>
         </p:nvSpPr>
@@ -9565,6 +11964,89 @@
   <p:clrMapOvr>
     <a:masterClrMapping/>
   </p:clrMapOvr>
+  <p:timing>
+    <p:tnLst>
+      <p:par>
+        <p:cTn id="1" dur="indefinite" restart="never" nodeType="tmRoot">
+          <p:childTnLst>
+            <p:seq concurrent="1" nextAc="seek">
+              <p:cTn id="2" dur="indefinite" nodeType="mainSeq">
+                <p:childTnLst>
+                  <p:par>
+                    <p:cTn id="3" fill="hold">
+                      <p:stCondLst>
+                        <p:cond delay="indefinite"/>
+                      </p:stCondLst>
+                      <p:childTnLst>
+                        <p:par>
+                          <p:cTn id="4" fill="hold">
+                            <p:stCondLst>
+                              <p:cond delay="0"/>
+                            </p:stCondLst>
+                            <p:childTnLst>
+                              <p:par>
+                                <p:cTn id="5" presetID="10" presetClass="entr" presetSubtype="0" fill="hold" nodeType="clickEffect">
+                                  <p:stCondLst>
+                                    <p:cond delay="0"/>
+                                  </p:stCondLst>
+                                  <p:childTnLst>
+                                    <p:set>
+                                      <p:cBhvr>
+                                        <p:cTn id="6" dur="1" fill="hold">
+                                          <p:stCondLst>
+                                            <p:cond delay="0"/>
+                                          </p:stCondLst>
+                                        </p:cTn>
+                                        <p:tgtEl>
+                                          <p:spTgt spid="7"/>
+                                        </p:tgtEl>
+                                        <p:attrNameLst>
+                                          <p:attrName>style.visibility</p:attrName>
+                                        </p:attrNameLst>
+                                      </p:cBhvr>
+                                      <p:to>
+                                        <p:strVal val="visible"/>
+                                      </p:to>
+                                    </p:set>
+                                    <p:animEffect transition="in" filter="fade">
+                                      <p:cBhvr>
+                                        <p:cTn id="7" dur="450"/>
+                                        <p:tgtEl>
+                                          <p:spTgt spid="7"/>
+                                        </p:tgtEl>
+                                      </p:cBhvr>
+                                    </p:animEffect>
+                                  </p:childTnLst>
+                                </p:cTn>
+                              </p:par>
+                            </p:childTnLst>
+                          </p:cTn>
+                        </p:par>
+                      </p:childTnLst>
+                    </p:cTn>
+                  </p:par>
+                </p:childTnLst>
+              </p:cTn>
+              <p:prevCondLst>
+                <p:cond evt="onPrev" delay="0">
+                  <p:tgtEl>
+                    <p:sldTgt/>
+                  </p:tgtEl>
+                </p:cond>
+              </p:prevCondLst>
+              <p:nextCondLst>
+                <p:cond evt="onNext" delay="0">
+                  <p:tgtEl>
+                    <p:sldTgt/>
+                  </p:tgtEl>
+                </p:cond>
+              </p:nextCondLst>
+            </p:seq>
+          </p:childTnLst>
+        </p:cTn>
+      </p:par>
+    </p:tnLst>
+  </p:timing>
 </p:sld>
 </file>
 
@@ -9701,21 +12183,173 @@
                 </a:solidFill>
                 <a:latin typeface="Calibri"/>
               </a:rPr>
-              <a:t>Clase autonoma: escalabilidad no es rendimiento</a:t>
-            </a:r>
-          </a:p>
-        </p:txBody>
-      </p:sp>
-      <p:sp>
-        <p:nvSpPr>
-          <p:cNvPr id="5" name="TextBox 4"/>
+              <a:t>Ausencia de estado: donde mas estudiantes fallan</a:t>
+            </a:r>
+          </a:p>
+        </p:txBody>
+      </p:sp>
+      <p:sp>
+        <p:nvSpPr>
+          <p:cNvPr id="5" name="Rounded Rectangle 4"/>
+          <p:cNvSpPr/>
+          <p:nvPr/>
+        </p:nvSpPr>
+        <p:spPr>
+          <a:xfrm>
+            <a:off x="5803166" y="1188719"/>
+            <a:ext cx="5998464" cy="4828032"/>
+          </a:xfrm>
+          <a:prstGeom prst="roundRect">
+            <a:avLst>
+              <a:gd name="adj" fmla="val 4000"/>
+            </a:avLst>
+          </a:prstGeom>
+          <a:solidFill>
+            <a:srgbClr val="E8EEF4"/>
+          </a:solidFill>
+          <a:ln>
+            <a:noFill/>
+          </a:ln>
+        </p:spPr>
+        <p:style>
+          <a:lnRef idx="1">
+            <a:schemeClr val="accent1"/>
+          </a:lnRef>
+          <a:fillRef idx="3">
+            <a:schemeClr val="accent1"/>
+          </a:fillRef>
+          <a:effectRef idx="2">
+            <a:schemeClr val="accent1"/>
+          </a:effectRef>
+          <a:fontRef idx="minor">
+            <a:schemeClr val="lt1"/>
+          </a:fontRef>
+        </p:style>
+        <p:txBody>
+          <a:bodyPr rtlCol="0" anchor="ctr"/>
+          <a:lstStyle/>
+          <a:p>
+            <a:pPr algn="ctr"/>
+          </a:p>
+        </p:txBody>
+      </p:sp>
+      <p:pic>
+        <p:nvPicPr>
+          <p:cNvPr id="6" name="Picture 5" descr="sesion-en-memoria-paso1.png"/>
+          <p:cNvPicPr>
+            <a:picLocks noChangeAspect="1"/>
+          </p:cNvPicPr>
+          <p:nvPr/>
+        </p:nvPicPr>
+        <p:blipFill>
+          <a:blip r:embed="rId2"/>
+          <a:stretch>
+            <a:fillRect/>
+          </a:stretch>
+        </p:blipFill>
+        <p:spPr>
+          <a:xfrm>
+            <a:off x="5876318" y="1261872"/>
+            <a:ext cx="5852160" cy="4681728"/>
+          </a:xfrm>
+          <a:prstGeom prst="rect">
+            <a:avLst/>
+          </a:prstGeom>
+        </p:spPr>
+      </p:pic>
+      <p:pic>
+        <p:nvPicPr>
+          <p:cNvPr id="7" name="Picture 6" descr="sesion-en-memoria-paso2.png"/>
+          <p:cNvPicPr>
+            <a:picLocks noChangeAspect="1"/>
+          </p:cNvPicPr>
+          <p:nvPr/>
+        </p:nvPicPr>
+        <p:blipFill>
+          <a:blip r:embed="rId3"/>
+          <a:stretch>
+            <a:fillRect/>
+          </a:stretch>
+        </p:blipFill>
+        <p:spPr>
+          <a:xfrm>
+            <a:off x="5876318" y="1261872"/>
+            <a:ext cx="5852160" cy="4681728"/>
+          </a:xfrm>
+          <a:prstGeom prst="rect">
+            <a:avLst/>
+          </a:prstGeom>
+        </p:spPr>
+      </p:pic>
+      <p:pic>
+        <p:nvPicPr>
+          <p:cNvPr id="8" name="Picture 7" descr="sesion-en-memoria-paso3.png"/>
+          <p:cNvPicPr>
+            <a:picLocks noChangeAspect="1"/>
+          </p:cNvPicPr>
+          <p:nvPr/>
+        </p:nvPicPr>
+        <p:blipFill>
+          <a:blip r:embed="rId4"/>
+          <a:stretch>
+            <a:fillRect/>
+          </a:stretch>
+        </p:blipFill>
+        <p:spPr>
+          <a:xfrm>
+            <a:off x="5876318" y="1261872"/>
+            <a:ext cx="5852160" cy="4681728"/>
+          </a:xfrm>
+          <a:prstGeom prst="rect">
+            <a:avLst/>
+          </a:prstGeom>
+        </p:spPr>
+      </p:pic>
+      <p:sp>
+        <p:nvSpPr>
+          <p:cNvPr id="13" name="TextBox 12"/>
           <p:cNvSpPr txBox="1"/>
           <p:nvPr/>
         </p:nvSpPr>
         <p:spPr>
           <a:xfrm>
-            <a:off x="457200" y="1170432"/>
-            <a:ext cx="11277295" cy="5230368"/>
+            <a:off x="5870301" y="5961888"/>
+            <a:ext cx="5864193" cy="320040"/>
+          </a:xfrm>
+          <a:prstGeom prst="rect">
+            <a:avLst/>
+          </a:prstGeom>
+          <a:noFill/>
+        </p:spPr>
+        <p:txBody>
+          <a:bodyPr wrap="square">
+            <a:spAutoFit/>
+          </a:bodyPr>
+          <a:lstStyle/>
+          <a:p>
+            <a:pPr algn="ctr"/>
+            <a:r>
+              <a:rPr sz="1100" b="0" i="1">
+                <a:solidFill>
+                  <a:srgbClr val="666666"/>
+                </a:solidFill>
+                <a:latin typeface="Calibri"/>
+              </a:rPr>
+              <a:t>Clic para avanzar la animación</a:t>
+            </a:r>
+          </a:p>
+        </p:txBody>
+      </p:sp>
+      <p:sp>
+        <p:nvSpPr>
+          <p:cNvPr id="14" name="TextBox 13"/>
+          <p:cNvSpPr txBox="1"/>
+          <p:nvPr/>
+        </p:nvSpPr>
+        <p:spPr>
+          <a:xfrm>
+            <a:off x="457200" y="1353312"/>
+            <a:ext cx="5093061" cy="5047488"/>
           </a:xfrm>
           <a:prstGeom prst="rect">
             <a:avLst/>
@@ -9740,7 +12374,7 @@
                 </a:solidFill>
                 <a:latin typeface="Calibri"/>
               </a:rPr>
-              <a:t>–   La escalabilidad es la capacidad de un sistema de sostener mas carga agregando recursos, y la primera precision importante es que no es lo mismo que rendimiento.</a:t>
+              <a:t>–   Un servicio sin estado no guarda en su propia memoria nada que necesite en la siguiente petición.</a:t>
             </a:r>
           </a:p>
           <a:p>
@@ -9756,14 +12390,46 @@
                 </a:solidFill>
                 <a:latin typeface="Calibri"/>
               </a:rPr>
-              <a:t>–   La escalabilidad pregunta que pasa cuando la carga se multiplica: si al duplicar los recursos el sistema atiende cerca del doble de trabajo, escala bien; si atiende un 20 por ciento mas, escala mal, y ninguna cantidad de dinero lo va a arreglar.</a:t>
-            </a:r>
-          </a:p>
-        </p:txBody>
-      </p:sp>
-      <p:sp>
-        <p:nvSpPr>
-          <p:cNvPr id="6" name="TextBox 5"/>
+              <a:t>–   Si la sesión vive en la instancia 1 y el balanceador manda la siguiente petición a la 2, el usuario es expulsado.</a:t>
+            </a:r>
+          </a:p>
+          <a:p>
+            <a:pPr>
+              <a:spcAft>
+                <a:spcPts val="800"/>
+              </a:spcAft>
+            </a:pPr>
+            <a:r>
+              <a:rPr sz="2000" b="0" i="0">
+                <a:solidFill>
+                  <a:srgbClr val="333333"/>
+                </a:solidFill>
+                <a:latin typeface="Calibri"/>
+              </a:rPr>
+              <a:t>–   La sesión pegajosa es un parche: si esa instancia cae, la sesión se pierde igual.</a:t>
+            </a:r>
+          </a:p>
+          <a:p>
+            <a:pPr>
+              <a:spcAft>
+                <a:spcPts val="800"/>
+              </a:spcAft>
+            </a:pPr>
+            <a:r>
+              <a:rPr sz="2000" b="0" i="0">
+                <a:solidFill>
+                  <a:srgbClr val="333333"/>
+                </a:solidFill>
+                <a:latin typeface="Calibri"/>
+              </a:rPr>
+              <a:t>–   La solución es sacar el estado del proceso: un almacén compartido o un token firmado.</a:t>
+            </a:r>
+          </a:p>
+        </p:txBody>
+      </p:sp>
+      <p:sp>
+        <p:nvSpPr>
+          <p:cNvPr id="15" name="TextBox 14"/>
           <p:cNvSpPr txBox="1"/>
           <p:nvPr/>
         </p:nvSpPr>
@@ -9801,6 +12467,142 @@
   <p:clrMapOvr>
     <a:masterClrMapping/>
   </p:clrMapOvr>
+  <p:timing>
+    <p:tnLst>
+      <p:par>
+        <p:cTn id="1" dur="indefinite" restart="never" nodeType="tmRoot">
+          <p:childTnLst>
+            <p:seq concurrent="1" nextAc="seek">
+              <p:cTn id="2" dur="indefinite" nodeType="mainSeq">
+                <p:childTnLst>
+                  <p:par>
+                    <p:cTn id="3" fill="hold">
+                      <p:stCondLst>
+                        <p:cond delay="indefinite"/>
+                      </p:stCondLst>
+                      <p:childTnLst>
+                        <p:par>
+                          <p:cTn id="4" fill="hold">
+                            <p:stCondLst>
+                              <p:cond delay="0"/>
+                            </p:stCondLst>
+                            <p:childTnLst>
+                              <p:par>
+                                <p:cTn id="5" presetID="10" presetClass="entr" presetSubtype="0" fill="hold" nodeType="clickEffect">
+                                  <p:stCondLst>
+                                    <p:cond delay="0"/>
+                                  </p:stCondLst>
+                                  <p:childTnLst>
+                                    <p:set>
+                                      <p:cBhvr>
+                                        <p:cTn id="6" dur="1" fill="hold">
+                                          <p:stCondLst>
+                                            <p:cond delay="0"/>
+                                          </p:stCondLst>
+                                        </p:cTn>
+                                        <p:tgtEl>
+                                          <p:spTgt spid="7"/>
+                                        </p:tgtEl>
+                                        <p:attrNameLst>
+                                          <p:attrName>style.visibility</p:attrName>
+                                        </p:attrNameLst>
+                                      </p:cBhvr>
+                                      <p:to>
+                                        <p:strVal val="visible"/>
+                                      </p:to>
+                                    </p:set>
+                                    <p:animEffect transition="in" filter="fade">
+                                      <p:cBhvr>
+                                        <p:cTn id="7" dur="450"/>
+                                        <p:tgtEl>
+                                          <p:spTgt spid="7"/>
+                                        </p:tgtEl>
+                                      </p:cBhvr>
+                                    </p:animEffect>
+                                  </p:childTnLst>
+                                </p:cTn>
+                              </p:par>
+                            </p:childTnLst>
+                          </p:cTn>
+                        </p:par>
+                      </p:childTnLst>
+                    </p:cTn>
+                  </p:par>
+                  <p:par>
+                    <p:cTn id="8" fill="hold">
+                      <p:stCondLst>
+                        <p:cond delay="indefinite"/>
+                      </p:stCondLst>
+                      <p:childTnLst>
+                        <p:par>
+                          <p:cTn id="9" fill="hold">
+                            <p:stCondLst>
+                              <p:cond delay="0"/>
+                            </p:stCondLst>
+                            <p:childTnLst>
+                              <p:par>
+                                <p:cTn id="10" presetID="10" presetClass="entr" presetSubtype="0" fill="hold" nodeType="clickEffect">
+                                  <p:stCondLst>
+                                    <p:cond delay="0"/>
+                                  </p:stCondLst>
+                                  <p:childTnLst>
+                                    <p:set>
+                                      <p:cBhvr>
+                                        <p:cTn id="11" dur="1" fill="hold">
+                                          <p:stCondLst>
+                                            <p:cond delay="0"/>
+                                          </p:stCondLst>
+                                        </p:cTn>
+                                        <p:tgtEl>
+                                          <p:spTgt spid="8"/>
+                                        </p:tgtEl>
+                                        <p:attrNameLst>
+                                          <p:attrName>style.visibility</p:attrName>
+                                        </p:attrNameLst>
+                                      </p:cBhvr>
+                                      <p:to>
+                                        <p:strVal val="visible"/>
+                                      </p:to>
+                                    </p:set>
+                                    <p:animEffect transition="in" filter="fade">
+                                      <p:cBhvr>
+                                        <p:cTn id="12" dur="450"/>
+                                        <p:tgtEl>
+                                          <p:spTgt spid="8"/>
+                                        </p:tgtEl>
+                                      </p:cBhvr>
+                                    </p:animEffect>
+                                  </p:childTnLst>
+                                </p:cTn>
+                              </p:par>
+                            </p:childTnLst>
+                          </p:cTn>
+                        </p:par>
+                      </p:childTnLst>
+                    </p:cTn>
+                  </p:par>
+                </p:childTnLst>
+              </p:cTn>
+              <p:prevCondLst>
+                <p:cond evt="onPrev" delay="0">
+                  <p:tgtEl>
+                    <p:sldTgt/>
+                  </p:tgtEl>
+                </p:cond>
+              </p:prevCondLst>
+              <p:nextCondLst>
+                <p:cond evt="onNext" delay="0">
+                  <p:tgtEl>
+                    <p:sldTgt/>
+                  </p:tgtEl>
+                </p:cond>
+              </p:nextCondLst>
+            </p:seq>
+          </p:childTnLst>
+        </p:cTn>
+      </p:par>
+    </p:tnLst>
+  </p:timing>
 </p:sld>
 </file>
 
@@ -9937,21 +12739,125 @@
                 </a:solidFill>
                 <a:latin typeface="Calibri"/>
               </a:rPr>
-              <a:t>Escalar vertical y horizontalmente: las dos formas de agregar capacidad</a:t>
-            </a:r>
-          </a:p>
-        </p:txBody>
-      </p:sp>
-      <p:sp>
-        <p:nvSpPr>
-          <p:cNvPr id="5" name="TextBox 4"/>
+              <a:t>Escala para la app</a:t>
+            </a:r>
+          </a:p>
+        </p:txBody>
+      </p:sp>
+      <p:sp>
+        <p:nvSpPr>
+          <p:cNvPr id="5" name="Rounded Rectangle 4"/>
+          <p:cNvSpPr/>
+          <p:nvPr/>
+        </p:nvSpPr>
+        <p:spPr>
+          <a:xfrm>
+            <a:off x="5797149" y="1573813"/>
+            <a:ext cx="6010497" cy="4057845"/>
+          </a:xfrm>
+          <a:prstGeom prst="roundRect">
+            <a:avLst>
+              <a:gd name="adj" fmla="val 4000"/>
+            </a:avLst>
+          </a:prstGeom>
+          <a:solidFill>
+            <a:srgbClr val="E8EEF4"/>
+          </a:solidFill>
+          <a:ln>
+            <a:noFill/>
+          </a:ln>
+        </p:spPr>
+        <p:style>
+          <a:lnRef idx="1">
+            <a:schemeClr val="accent1"/>
+          </a:lnRef>
+          <a:fillRef idx="3">
+            <a:schemeClr val="accent1"/>
+          </a:fillRef>
+          <a:effectRef idx="2">
+            <a:schemeClr val="accent1"/>
+          </a:effectRef>
+          <a:fontRef idx="minor">
+            <a:schemeClr val="lt1"/>
+          </a:fontRef>
+        </p:style>
+        <p:txBody>
+          <a:bodyPr rtlCol="0" anchor="ctr"/>
+          <a:lstStyle/>
+          <a:p>
+            <a:pPr algn="ctr"/>
+          </a:p>
+        </p:txBody>
+      </p:sp>
+      <p:pic>
+        <p:nvPicPr>
+          <p:cNvPr id="6" name="Picture 5" descr="growth-chart-scale.jpg"/>
+          <p:cNvPicPr>
+            <a:picLocks noChangeAspect="1"/>
+          </p:cNvPicPr>
+          <p:nvPr/>
+        </p:nvPicPr>
+        <p:blipFill>
+          <a:blip r:embed="rId2"/>
+          <a:stretch>
+            <a:fillRect/>
+          </a:stretch>
+        </p:blipFill>
+        <p:spPr>
+          <a:xfrm>
+            <a:off x="5870301" y="1646965"/>
+            <a:ext cx="5864193" cy="3911541"/>
+          </a:xfrm>
+          <a:prstGeom prst="rect">
+            <a:avLst/>
+          </a:prstGeom>
+        </p:spPr>
+      </p:pic>
+      <p:sp>
+        <p:nvSpPr>
+          <p:cNvPr id="7" name="TextBox 6"/>
           <p:cNvSpPr txBox="1"/>
           <p:nvPr/>
         </p:nvSpPr>
         <p:spPr>
           <a:xfrm>
-            <a:off x="457200" y="1170432"/>
-            <a:ext cx="11277295" cy="5230368"/>
+            <a:off x="5870301" y="5961888"/>
+            <a:ext cx="5864193" cy="320040"/>
+          </a:xfrm>
+          <a:prstGeom prst="rect">
+            <a:avLst/>
+          </a:prstGeom>
+          <a:noFill/>
+        </p:spPr>
+        <p:txBody>
+          <a:bodyPr wrap="square">
+            <a:spAutoFit/>
+          </a:bodyPr>
+          <a:lstStyle/>
+          <a:p>
+            <a:pPr algn="ctr"/>
+            <a:r>
+              <a:rPr sz="1100" b="0" i="1">
+                <a:solidFill>
+                  <a:srgbClr val="666666"/>
+                </a:solidFill>
+                <a:latin typeface="Calibri"/>
+              </a:rPr>
+              <a:t>Foto: Magda Ehlers · Pexels</a:t>
+            </a:r>
+          </a:p>
+        </p:txBody>
+      </p:sp>
+      <p:sp>
+        <p:nvSpPr>
+          <p:cNvPr id="8" name="TextBox 7"/>
+          <p:cNvSpPr txBox="1"/>
+          <p:nvPr/>
+        </p:nvSpPr>
+        <p:spPr>
+          <a:xfrm>
+            <a:off x="457200" y="1353312"/>
+            <a:ext cx="5093061" cy="5047488"/>
           </a:xfrm>
           <a:prstGeom prst="rect">
             <a:avLst/>
@@ -9976,7 +12882,7 @@
                 </a:solidFill>
                 <a:latin typeface="Calibri"/>
               </a:rPr>
-              <a:t>–   Escalar verticalmente, o hacia arriba, es darle mas recursos a la MISMA maquina: mas CPU, mas memoria, disco mas rapido.</a:t>
+              <a:t>–   Horizontal: más réplicas del API. Vertical: más CPU/RAM a un nodo.</a:t>
             </a:r>
           </a:p>
           <a:p>
@@ -9992,7 +12898,7 @@
                 </a:solidFill>
                 <a:latin typeface="Calibri"/>
               </a:rPr>
-              <a:t>–   Es la opcion simple porque no exige cambiar el codigo, y tiene tres limites reales: existe un techo fisico</a:t>
+              <a:t>–   Datos: escala distinta (read replicas conceptuales / partición — solo si aplica).</a:t>
             </a:r>
           </a:p>
           <a:p>
@@ -10008,7 +12914,7 @@
                 </a:solidFill>
                 <a:latin typeface="Calibri"/>
               </a:rPr>
-              <a:t>–   Porque la instancia mas grande disponible se acaba en algun punto; el precio crece peor que linealmente, ya que las instancias grandes cuestan mas por unidad de capacidad</a:t>
+              <a:t>–   Triggers: RPS, latencia p95, profundidad de cola, CPU.</a:t>
             </a:r>
           </a:p>
           <a:p>
@@ -10024,15 +12930,17 @@
                 </a:solidFill>
                 <a:latin typeface="Calibri"/>
               </a:rPr>
-              <a:t>–   Y el cambio suele requerir reiniciar el servicio, lo que implica una ventana de indisponibilidad del orden de 30 segundos a 2 minutos.</a:t>
-            </a:r>
-          </a:p>
-          <a:p>
-            <a:pPr>
-              <a:spcAft>
-                <a:spcPts val="800"/>
-              </a:spcAft>
-            </a:pPr>
+              <a:t>–   Escalar en horizontal exige una API </a:t>
+            </a:r>
+            <a:r>
+              <a:rPr sz="2000" b="1" i="0">
+                <a:solidFill>
+                  <a:srgbClr val="333333"/>
+                </a:solidFill>
+                <a:latin typeface="Calibri"/>
+              </a:rPr>
+              <a:t>sin estado</a:t>
+            </a:r>
             <a:r>
               <a:rPr sz="2000" b="0" i="0">
                 <a:solidFill>
@@ -10040,14 +12948,14 @@
                 </a:solidFill>
                 <a:latin typeface="Calibri"/>
               </a:rPr>
-              <a:t>–   Su precio es un requisito de diseno no negociable: la aplicacion tiene que poder correr en varias copias sin pisarse.</a:t>
-            </a:r>
-          </a:p>
-        </p:txBody>
-      </p:sp>
-      <p:sp>
-        <p:nvSpPr>
-          <p:cNvPr id="6" name="TextBox 5"/>
+              <a:t>: la sesión vive en un token o en un almacén compartido, no en la memoria de una instancia.</a:t>
+            </a:r>
+          </a:p>
+        </p:txBody>
+      </p:sp>
+      <p:sp>
+        <p:nvSpPr>
+          <p:cNvPr id="9" name="TextBox 8"/>
           <p:cNvSpPr txBox="1"/>
           <p:nvPr/>
         </p:nvSpPr>
@@ -10221,21 +13129,173 @@
                 </a:solidFill>
                 <a:latin typeface="Calibri"/>
               </a:rPr>
-              <a:t>Ausencia de estado: donde mas estudiantes fallan</a:t>
-            </a:r>
-          </a:p>
-        </p:txBody>
-      </p:sp>
-      <p:sp>
-        <p:nvSpPr>
-          <p:cNvPr id="5" name="TextBox 4"/>
+              <a:t>Las cinco piezas del autoescalado</a:t>
+            </a:r>
+          </a:p>
+        </p:txBody>
+      </p:sp>
+      <p:sp>
+        <p:nvSpPr>
+          <p:cNvPr id="5" name="Rounded Rectangle 4"/>
+          <p:cNvSpPr/>
+          <p:nvPr/>
+        </p:nvSpPr>
+        <p:spPr>
+          <a:xfrm>
+            <a:off x="5803166" y="1188719"/>
+            <a:ext cx="5998464" cy="4828032"/>
+          </a:xfrm>
+          <a:prstGeom prst="roundRect">
+            <a:avLst>
+              <a:gd name="adj" fmla="val 4000"/>
+            </a:avLst>
+          </a:prstGeom>
+          <a:solidFill>
+            <a:srgbClr val="E8EEF4"/>
+          </a:solidFill>
+          <a:ln>
+            <a:noFill/>
+          </a:ln>
+        </p:spPr>
+        <p:style>
+          <a:lnRef idx="1">
+            <a:schemeClr val="accent1"/>
+          </a:lnRef>
+          <a:fillRef idx="3">
+            <a:schemeClr val="accent1"/>
+          </a:fillRef>
+          <a:effectRef idx="2">
+            <a:schemeClr val="accent1"/>
+          </a:effectRef>
+          <a:fontRef idx="minor">
+            <a:schemeClr val="lt1"/>
+          </a:fontRef>
+        </p:style>
+        <p:txBody>
+          <a:bodyPr rtlCol="0" anchor="ctr"/>
+          <a:lstStyle/>
+          <a:p>
+            <a:pPr algn="ctr"/>
+          </a:p>
+        </p:txBody>
+      </p:sp>
+      <p:pic>
+        <p:nvPicPr>
+          <p:cNvPr id="6" name="Picture 5" descr="cinco-piezas-autoescalado-paso1.png"/>
+          <p:cNvPicPr>
+            <a:picLocks noChangeAspect="1"/>
+          </p:cNvPicPr>
+          <p:nvPr/>
+        </p:nvPicPr>
+        <p:blipFill>
+          <a:blip r:embed="rId2"/>
+          <a:stretch>
+            <a:fillRect/>
+          </a:stretch>
+        </p:blipFill>
+        <p:spPr>
+          <a:xfrm>
+            <a:off x="5876318" y="1261872"/>
+            <a:ext cx="5852160" cy="4681728"/>
+          </a:xfrm>
+          <a:prstGeom prst="rect">
+            <a:avLst/>
+          </a:prstGeom>
+        </p:spPr>
+      </p:pic>
+      <p:pic>
+        <p:nvPicPr>
+          <p:cNvPr id="7" name="Picture 6" descr="cinco-piezas-autoescalado-paso2.png"/>
+          <p:cNvPicPr>
+            <a:picLocks noChangeAspect="1"/>
+          </p:cNvPicPr>
+          <p:nvPr/>
+        </p:nvPicPr>
+        <p:blipFill>
+          <a:blip r:embed="rId3"/>
+          <a:stretch>
+            <a:fillRect/>
+          </a:stretch>
+        </p:blipFill>
+        <p:spPr>
+          <a:xfrm>
+            <a:off x="5876318" y="1261872"/>
+            <a:ext cx="5852160" cy="4681728"/>
+          </a:xfrm>
+          <a:prstGeom prst="rect">
+            <a:avLst/>
+          </a:prstGeom>
+        </p:spPr>
+      </p:pic>
+      <p:pic>
+        <p:nvPicPr>
+          <p:cNvPr id="8" name="Picture 7" descr="cinco-piezas-autoescalado-paso3.png"/>
+          <p:cNvPicPr>
+            <a:picLocks noChangeAspect="1"/>
+          </p:cNvPicPr>
+          <p:nvPr/>
+        </p:nvPicPr>
+        <p:blipFill>
+          <a:blip r:embed="rId4"/>
+          <a:stretch>
+            <a:fillRect/>
+          </a:stretch>
+        </p:blipFill>
+        <p:spPr>
+          <a:xfrm>
+            <a:off x="5876318" y="1261872"/>
+            <a:ext cx="5852160" cy="4681728"/>
+          </a:xfrm>
+          <a:prstGeom prst="rect">
+            <a:avLst/>
+          </a:prstGeom>
+        </p:spPr>
+      </p:pic>
+      <p:sp>
+        <p:nvSpPr>
+          <p:cNvPr id="13" name="TextBox 12"/>
           <p:cNvSpPr txBox="1"/>
           <p:nvPr/>
         </p:nvSpPr>
         <p:spPr>
           <a:xfrm>
-            <a:off x="457200" y="1170432"/>
-            <a:ext cx="11277295" cy="5230368"/>
+            <a:off x="5870301" y="5961888"/>
+            <a:ext cx="5864193" cy="320040"/>
+          </a:xfrm>
+          <a:prstGeom prst="rect">
+            <a:avLst/>
+          </a:prstGeom>
+          <a:noFill/>
+        </p:spPr>
+        <p:txBody>
+          <a:bodyPr wrap="square">
+            <a:spAutoFit/>
+          </a:bodyPr>
+          <a:lstStyle/>
+          <a:p>
+            <a:pPr algn="ctr"/>
+            <a:r>
+              <a:rPr sz="1100" b="0" i="1">
+                <a:solidFill>
+                  <a:srgbClr val="666666"/>
+                </a:solidFill>
+                <a:latin typeface="Calibri"/>
+              </a:rPr>
+              <a:t>Clic para avanzar la animación</a:t>
+            </a:r>
+          </a:p>
+        </p:txBody>
+      </p:sp>
+      <p:sp>
+        <p:nvSpPr>
+          <p:cNvPr id="14" name="TextBox 13"/>
+          <p:cNvSpPr txBox="1"/>
+          <p:nvPr/>
+        </p:nvSpPr>
+        <p:spPr>
+          <a:xfrm>
+            <a:off x="457200" y="1353312"/>
+            <a:ext cx="5093061" cy="5047488"/>
           </a:xfrm>
           <a:prstGeom prst="rect">
             <a:avLst/>
@@ -10260,7 +13320,7 @@
                 </a:solidFill>
                 <a:latin typeface="Calibri"/>
               </a:rPr>
-              <a:t>–   Ese requisito se llama ausencia de estado, o statelessness, y es donde mas estudiantes fallan.</a:t>
+              <a:t>–   Cinco piezas: métrica, umbral, periodo de evaluación, enfriamiento y rango mínimo-máximo.</a:t>
             </a:r>
           </a:p>
           <a:p>
@@ -10276,7 +13336,7 @@
                 </a:solidFill>
                 <a:latin typeface="Calibri"/>
               </a:rPr>
-              <a:t>–   El sintoma en la app es facil de narrar: si la API guarda la sesion en un diccionario en memoria de la instancia que atendio el login</a:t>
+              <a:t>–   Ejemplo: CPU de la API al 70 % sostenido 5 min, enfriamiento de 5 min, mínimo 2 y máximo 6.</a:t>
             </a:r>
           </a:p>
           <a:p>
@@ -10292,7 +13352,7 @@
                 </a:solidFill>
                 <a:latin typeface="Calibri"/>
               </a:rPr>
-              <a:t>–   Y el balanceador manda la siguiente peticion del mismo usuario a la segunda instancia, esa instancia no lo conoce y lo expulsa; el usuario percibe que la aplicacion lo saca al azar.</a:t>
+              <a:t>–   El mínimo es 2 para tolerar fallas; el máximo es el techo de costo.</a:t>
             </a:r>
           </a:p>
           <a:p>
@@ -10308,14 +13368,14 @@
                 </a:solidFill>
                 <a:latin typeface="Calibri"/>
               </a:rPr>
-              <a:t>–   La solucion arquitectonica es sacar el estado del proceso: guardar la sesion en un almacen compartido o usar un token firmado que el cliente presenta en cada peticion.</a:t>
-            </a:r>
-          </a:p>
-        </p:txBody>
-      </p:sp>
-      <p:sp>
-        <p:nvSpPr>
-          <p:cNvPr id="6" name="TextBox 5"/>
+              <a:t>–   Se reduce con otro umbral (30 %) y más despacio: si no, oscila.</a:t>
+            </a:r>
+          </a:p>
+        </p:txBody>
+      </p:sp>
+      <p:sp>
+        <p:nvSpPr>
+          <p:cNvPr id="15" name="TextBox 14"/>
           <p:cNvSpPr txBox="1"/>
           <p:nvPr/>
         </p:nvSpPr>
@@ -10353,6 +13413,142 @@
   <p:clrMapOvr>
     <a:masterClrMapping/>
   </p:clrMapOvr>
+  <p:timing>
+    <p:tnLst>
+      <p:par>
+        <p:cTn id="1" dur="indefinite" restart="never" nodeType="tmRoot">
+          <p:childTnLst>
+            <p:seq concurrent="1" nextAc="seek">
+              <p:cTn id="2" dur="indefinite" nodeType="mainSeq">
+                <p:childTnLst>
+                  <p:par>
+                    <p:cTn id="3" fill="hold">
+                      <p:stCondLst>
+                        <p:cond delay="indefinite"/>
+                      </p:stCondLst>
+                      <p:childTnLst>
+                        <p:par>
+                          <p:cTn id="4" fill="hold">
+                            <p:stCondLst>
+                              <p:cond delay="0"/>
+                            </p:stCondLst>
+                            <p:childTnLst>
+                              <p:par>
+                                <p:cTn id="5" presetID="10" presetClass="entr" presetSubtype="0" fill="hold" nodeType="clickEffect">
+                                  <p:stCondLst>
+                                    <p:cond delay="0"/>
+                                  </p:stCondLst>
+                                  <p:childTnLst>
+                                    <p:set>
+                                      <p:cBhvr>
+                                        <p:cTn id="6" dur="1" fill="hold">
+                                          <p:stCondLst>
+                                            <p:cond delay="0"/>
+                                          </p:stCondLst>
+                                        </p:cTn>
+                                        <p:tgtEl>
+                                          <p:spTgt spid="7"/>
+                                        </p:tgtEl>
+                                        <p:attrNameLst>
+                                          <p:attrName>style.visibility</p:attrName>
+                                        </p:attrNameLst>
+                                      </p:cBhvr>
+                                      <p:to>
+                                        <p:strVal val="visible"/>
+                                      </p:to>
+                                    </p:set>
+                                    <p:animEffect transition="in" filter="fade">
+                                      <p:cBhvr>
+                                        <p:cTn id="7" dur="450"/>
+                                        <p:tgtEl>
+                                          <p:spTgt spid="7"/>
+                                        </p:tgtEl>
+                                      </p:cBhvr>
+                                    </p:animEffect>
+                                  </p:childTnLst>
+                                </p:cTn>
+                              </p:par>
+                            </p:childTnLst>
+                          </p:cTn>
+                        </p:par>
+                      </p:childTnLst>
+                    </p:cTn>
+                  </p:par>
+                  <p:par>
+                    <p:cTn id="8" fill="hold">
+                      <p:stCondLst>
+                        <p:cond delay="indefinite"/>
+                      </p:stCondLst>
+                      <p:childTnLst>
+                        <p:par>
+                          <p:cTn id="9" fill="hold">
+                            <p:stCondLst>
+                              <p:cond delay="0"/>
+                            </p:stCondLst>
+                            <p:childTnLst>
+                              <p:par>
+                                <p:cTn id="10" presetID="10" presetClass="entr" presetSubtype="0" fill="hold" nodeType="clickEffect">
+                                  <p:stCondLst>
+                                    <p:cond delay="0"/>
+                                  </p:stCondLst>
+                                  <p:childTnLst>
+                                    <p:set>
+                                      <p:cBhvr>
+                                        <p:cTn id="11" dur="1" fill="hold">
+                                          <p:stCondLst>
+                                            <p:cond delay="0"/>
+                                          </p:stCondLst>
+                                        </p:cTn>
+                                        <p:tgtEl>
+                                          <p:spTgt spid="8"/>
+                                        </p:tgtEl>
+                                        <p:attrNameLst>
+                                          <p:attrName>style.visibility</p:attrName>
+                                        </p:attrNameLst>
+                                      </p:cBhvr>
+                                      <p:to>
+                                        <p:strVal val="visible"/>
+                                      </p:to>
+                                    </p:set>
+                                    <p:animEffect transition="in" filter="fade">
+                                      <p:cBhvr>
+                                        <p:cTn id="12" dur="450"/>
+                                        <p:tgtEl>
+                                          <p:spTgt spid="8"/>
+                                        </p:tgtEl>
+                                      </p:cBhvr>
+                                    </p:animEffect>
+                                  </p:childTnLst>
+                                </p:cTn>
+                              </p:par>
+                            </p:childTnLst>
+                          </p:cTn>
+                        </p:par>
+                      </p:childTnLst>
+                    </p:cTn>
+                  </p:par>
+                </p:childTnLst>
+              </p:cTn>
+              <p:prevCondLst>
+                <p:cond evt="onPrev" delay="0">
+                  <p:tgtEl>
+                    <p:sldTgt/>
+                  </p:tgtEl>
+                </p:cond>
+              </p:prevCondLst>
+              <p:nextCondLst>
+                <p:cond evt="onNext" delay="0">
+                  <p:tgtEl>
+                    <p:sldTgt/>
+                  </p:tgtEl>
+                </p:cond>
+              </p:nextCondLst>
+            </p:seq>
+          </p:childTnLst>
+        </p:cTn>
+      </p:par>
+    </p:tnLst>
+  </p:timing>
 </p:sld>
 </file>
 
@@ -10489,21 +13685,271 @@
                 </a:solidFill>
                 <a:latin typeface="Calibri"/>
               </a:rPr>
-              <a:t>Las cinco piezas del autoescalado (1/2)</a:t>
-            </a:r>
-          </a:p>
-        </p:txBody>
-      </p:sp>
-      <p:sp>
-        <p:nvSpPr>
-          <p:cNvPr id="5" name="TextBox 4"/>
+              <a:t>Politica de autoescalado (tabla, no prosa)</a:t>
+            </a:r>
+          </a:p>
+        </p:txBody>
+      </p:sp>
+      <p:sp>
+        <p:nvSpPr>
+          <p:cNvPr id="5" name="Rounded Rectangle 4"/>
+          <p:cNvSpPr/>
+          <p:nvPr/>
+        </p:nvSpPr>
+        <p:spPr>
+          <a:xfrm>
+            <a:off x="457200" y="1261872"/>
+            <a:ext cx="11277295" cy="2479932"/>
+          </a:xfrm>
+          <a:prstGeom prst="roundRect">
+            <a:avLst>
+              <a:gd name="adj" fmla="val 4000"/>
+            </a:avLst>
+          </a:prstGeom>
+          <a:solidFill>
+            <a:srgbClr val="1E1E1E"/>
+          </a:solidFill>
+          <a:ln>
+            <a:noFill/>
+          </a:ln>
+        </p:spPr>
+        <p:style>
+          <a:lnRef idx="1">
+            <a:schemeClr val="accent1"/>
+          </a:lnRef>
+          <a:fillRef idx="3">
+            <a:schemeClr val="accent1"/>
+          </a:fillRef>
+          <a:effectRef idx="2">
+            <a:schemeClr val="accent1"/>
+          </a:effectRef>
+          <a:fontRef idx="minor">
+            <a:schemeClr val="lt1"/>
+          </a:fontRef>
+        </p:style>
+        <p:txBody>
+          <a:bodyPr rtlCol="0" anchor="ctr"/>
+          <a:lstStyle/>
+          <a:p>
+            <a:pPr algn="ctr"/>
+          </a:p>
+        </p:txBody>
+      </p:sp>
+      <p:sp>
+        <p:nvSpPr>
+          <p:cNvPr id="6" name="Rectangle 5"/>
+          <p:cNvSpPr/>
+          <p:nvPr/>
+        </p:nvSpPr>
+        <p:spPr>
+          <a:xfrm>
+            <a:off x="457200" y="1261872"/>
+            <a:ext cx="11277295" cy="365760"/>
+          </a:xfrm>
+          <a:prstGeom prst="rect">
+            <a:avLst/>
+          </a:prstGeom>
+          <a:solidFill>
+            <a:srgbClr val="2D2D30"/>
+          </a:solidFill>
+          <a:ln>
+            <a:noFill/>
+          </a:ln>
+        </p:spPr>
+        <p:style>
+          <a:lnRef idx="1">
+            <a:schemeClr val="accent1"/>
+          </a:lnRef>
+          <a:fillRef idx="3">
+            <a:schemeClr val="accent1"/>
+          </a:fillRef>
+          <a:effectRef idx="2">
+            <a:schemeClr val="accent1"/>
+          </a:effectRef>
+          <a:fontRef idx="minor">
+            <a:schemeClr val="lt1"/>
+          </a:fontRef>
+        </p:style>
+        <p:txBody>
+          <a:bodyPr rtlCol="0" anchor="ctr"/>
+          <a:lstStyle/>
+          <a:p>
+            <a:pPr algn="ctr"/>
+          </a:p>
+        </p:txBody>
+      </p:sp>
+      <p:sp>
+        <p:nvSpPr>
+          <p:cNvPr id="7" name="Oval 6"/>
+          <p:cNvSpPr/>
+          <p:nvPr/>
+        </p:nvSpPr>
+        <p:spPr>
+          <a:xfrm>
+            <a:off x="658368" y="1380743"/>
+            <a:ext cx="128016" cy="128016"/>
+          </a:xfrm>
+          <a:prstGeom prst="ellipse">
+            <a:avLst/>
+          </a:prstGeom>
+          <a:solidFill>
+            <a:srgbClr val="FF5F56"/>
+          </a:solidFill>
+          <a:ln>
+            <a:noFill/>
+          </a:ln>
+        </p:spPr>
+        <p:style>
+          <a:lnRef idx="1">
+            <a:schemeClr val="accent1"/>
+          </a:lnRef>
+          <a:fillRef idx="3">
+            <a:schemeClr val="accent1"/>
+          </a:fillRef>
+          <a:effectRef idx="2">
+            <a:schemeClr val="accent1"/>
+          </a:effectRef>
+          <a:fontRef idx="minor">
+            <a:schemeClr val="lt1"/>
+          </a:fontRef>
+        </p:style>
+        <p:txBody>
+          <a:bodyPr rtlCol="0" anchor="ctr"/>
+          <a:lstStyle/>
+          <a:p>
+            <a:pPr algn="ctr"/>
+          </a:p>
+        </p:txBody>
+      </p:sp>
+      <p:sp>
+        <p:nvSpPr>
+          <p:cNvPr id="8" name="Oval 7"/>
+          <p:cNvSpPr/>
+          <p:nvPr/>
+        </p:nvSpPr>
+        <p:spPr>
+          <a:xfrm>
+            <a:off x="877824" y="1380743"/>
+            <a:ext cx="128016" cy="128016"/>
+          </a:xfrm>
+          <a:prstGeom prst="ellipse">
+            <a:avLst/>
+          </a:prstGeom>
+          <a:solidFill>
+            <a:srgbClr val="FFBD2E"/>
+          </a:solidFill>
+          <a:ln>
+            <a:noFill/>
+          </a:ln>
+        </p:spPr>
+        <p:style>
+          <a:lnRef idx="1">
+            <a:schemeClr val="accent1"/>
+          </a:lnRef>
+          <a:fillRef idx="3">
+            <a:schemeClr val="accent1"/>
+          </a:fillRef>
+          <a:effectRef idx="2">
+            <a:schemeClr val="accent1"/>
+          </a:effectRef>
+          <a:fontRef idx="minor">
+            <a:schemeClr val="lt1"/>
+          </a:fontRef>
+        </p:style>
+        <p:txBody>
+          <a:bodyPr rtlCol="0" anchor="ctr"/>
+          <a:lstStyle/>
+          <a:p>
+            <a:pPr algn="ctr"/>
+          </a:p>
+        </p:txBody>
+      </p:sp>
+      <p:sp>
+        <p:nvSpPr>
+          <p:cNvPr id="9" name="Oval 8"/>
+          <p:cNvSpPr/>
+          <p:nvPr/>
+        </p:nvSpPr>
+        <p:spPr>
+          <a:xfrm>
+            <a:off x="1097280" y="1380743"/>
+            <a:ext cx="128016" cy="128016"/>
+          </a:xfrm>
+          <a:prstGeom prst="ellipse">
+            <a:avLst/>
+          </a:prstGeom>
+          <a:solidFill>
+            <a:srgbClr val="27C93F"/>
+          </a:solidFill>
+          <a:ln>
+            <a:noFill/>
+          </a:ln>
+        </p:spPr>
+        <p:style>
+          <a:lnRef idx="1">
+            <a:schemeClr val="accent1"/>
+          </a:lnRef>
+          <a:fillRef idx="3">
+            <a:schemeClr val="accent1"/>
+          </a:fillRef>
+          <a:effectRef idx="2">
+            <a:schemeClr val="accent1"/>
+          </a:effectRef>
+          <a:fontRef idx="minor">
+            <a:schemeClr val="lt1"/>
+          </a:fontRef>
+        </p:style>
+        <p:txBody>
+          <a:bodyPr rtlCol="0" anchor="ctr"/>
+          <a:lstStyle/>
+          <a:p>
+            <a:pPr algn="ctr"/>
+          </a:p>
+        </p:txBody>
+      </p:sp>
+      <p:sp>
+        <p:nvSpPr>
+          <p:cNvPr id="10" name="TextBox 9"/>
           <p:cNvSpPr txBox="1"/>
           <p:nvPr/>
         </p:nvSpPr>
         <p:spPr>
           <a:xfrm>
-            <a:off x="457200" y="1170432"/>
-            <a:ext cx="11277295" cy="5230368"/>
+            <a:off x="1371600" y="1298448"/>
+            <a:ext cx="10180015" cy="292608"/>
+          </a:xfrm>
+          <a:prstGeom prst="rect">
+            <a:avLst/>
+          </a:prstGeom>
+          <a:noFill/>
+        </p:spPr>
+        <p:txBody>
+          <a:bodyPr wrap="square" anchor="ctr"/>
+          <a:lstStyle/>
+          <a:p>
+            <a:pPr algn="r"/>
+            <a:r>
+              <a:rPr sz="1100" b="1" i="0">
+                <a:solidFill>
+                  <a:srgbClr val="BBBBBB"/>
+                </a:solidFill>
+                <a:latin typeface="Calibri"/>
+              </a:rPr>
+              <a:t>Código</a:t>
+            </a:r>
+          </a:p>
+        </p:txBody>
+      </p:sp>
+      <p:sp>
+        <p:nvSpPr>
+          <p:cNvPr id="11" name="TextBox 10"/>
+          <p:cNvSpPr txBox="1"/>
+          <p:nvPr/>
+        </p:nvSpPr>
+        <p:spPr>
+          <a:xfrm>
+            <a:off x="685800" y="1719072"/>
+            <a:ext cx="502920" cy="1885572"/>
           </a:xfrm>
           <a:prstGeom prst="rect">
             <a:avLst/>
@@ -10516,74 +13962,750 @@
           </a:bodyPr>
           <a:lstStyle/>
           <a:p>
+            <a:pPr algn="r">
+              <a:spcAft>
+                <a:spcPts val="428"/>
+              </a:spcAft>
+            </a:pPr>
+            <a:r>
+              <a:rPr sz="2000" i="0" b="0">
+                <a:solidFill>
+                  <a:srgbClr val="858585"/>
+                </a:solidFill>
+                <a:latin typeface="Consolas"/>
+              </a:rPr>
+              <a:t>1</a:t>
+            </a:r>
+          </a:p>
+          <a:p>
+            <a:pPr algn="r">
+              <a:spcAft>
+                <a:spcPts val="428"/>
+              </a:spcAft>
+            </a:pPr>
+            <a:r>
+              <a:rPr sz="2000" i="0" b="0">
+                <a:solidFill>
+                  <a:srgbClr val="858585"/>
+                </a:solidFill>
+                <a:latin typeface="Consolas"/>
+              </a:rPr>
+              <a:t>2</a:t>
+            </a:r>
+          </a:p>
+          <a:p>
+            <a:pPr algn="r">
+              <a:spcAft>
+                <a:spcPts val="428"/>
+              </a:spcAft>
+            </a:pPr>
+            <a:r>
+              <a:rPr sz="2000" i="0" b="0">
+                <a:solidFill>
+                  <a:srgbClr val="858585"/>
+                </a:solidFill>
+                <a:latin typeface="Consolas"/>
+              </a:rPr>
+              <a:t>3</a:t>
+            </a:r>
+          </a:p>
+          <a:p>
+            <a:pPr algn="r">
+              <a:spcAft>
+                <a:spcPts val="428"/>
+              </a:spcAft>
+            </a:pPr>
+            <a:r>
+              <a:rPr sz="2000" i="0" b="0">
+                <a:solidFill>
+                  <a:srgbClr val="858585"/>
+                </a:solidFill>
+                <a:latin typeface="Consolas"/>
+              </a:rPr>
+              <a:t>4</a:t>
+            </a:r>
+          </a:p>
+          <a:p>
+            <a:pPr algn="r">
+              <a:spcAft>
+                <a:spcPts val="428"/>
+              </a:spcAft>
+            </a:pPr>
+            <a:r>
+              <a:rPr sz="2000" i="0" b="0">
+                <a:solidFill>
+                  <a:srgbClr val="858585"/>
+                </a:solidFill>
+                <a:latin typeface="Consolas"/>
+              </a:rPr>
+              <a:t>5</a:t>
+            </a:r>
+          </a:p>
+        </p:txBody>
+      </p:sp>
+      <p:sp>
+        <p:nvSpPr>
+          <p:cNvPr id="12" name="TextBox 11"/>
+          <p:cNvSpPr txBox="1"/>
+          <p:nvPr/>
+        </p:nvSpPr>
+        <p:spPr>
+          <a:xfrm>
+            <a:off x="1188720" y="1719072"/>
+            <a:ext cx="10271455" cy="1885572"/>
+          </a:xfrm>
+          <a:prstGeom prst="rect">
+            <a:avLst/>
+          </a:prstGeom>
+          <a:noFill/>
+        </p:spPr>
+        <p:txBody>
+          <a:bodyPr wrap="square">
+            <a:spAutoFit/>
+          </a:bodyPr>
+          <a:lstStyle/>
+          <a:p>
             <a:pPr>
               <a:spcAft>
-                <a:spcPts val="800"/>
+                <a:spcPts val="428"/>
               </a:spcAft>
             </a:pPr>
             <a:r>
-              <a:rPr sz="2000" b="0" i="0">
-                <a:solidFill>
-                  <a:srgbClr val="333333"/>
-                </a:solidFill>
-                <a:latin typeface="Calibri"/>
-              </a:rPr>
-              <a:t>–   El autoescalado es la automatizacion del escalado horizontal y consta de cinco piezas: una metrica que se observa, un umbral que dispara la accion</a:t>
+              <a:rPr sz="2000" i="0" b="0">
+                <a:solidFill>
+                  <a:srgbClr val="D4D4D4"/>
+                </a:solidFill>
+                <a:latin typeface="Consolas"/>
+              </a:rPr>
+              <a:t>Componente</a:t>
+            </a:r>
+            <a:r>
+              <a:rPr sz="2000" i="0" b="0">
+                <a:solidFill>
+                  <a:srgbClr val="D4D4D4"/>
+                </a:solidFill>
+                <a:latin typeface="Consolas"/>
+              </a:rPr>
+              <a:t>   | </a:t>
+            </a:r>
+            <a:r>
+              <a:rPr sz="2000" i="0" b="0">
+                <a:solidFill>
+                  <a:srgbClr val="D4D4D4"/>
+                </a:solidFill>
+                <a:latin typeface="Consolas"/>
+              </a:rPr>
+              <a:t>Tipo</a:t>
+            </a:r>
+            <a:r>
+              <a:rPr sz="2000" i="0" b="0">
+                <a:solidFill>
+                  <a:srgbClr val="D4D4D4"/>
+                </a:solidFill>
+                <a:latin typeface="Consolas"/>
+              </a:rPr>
+              <a:t>        | </a:t>
+            </a:r>
+            <a:r>
+              <a:rPr sz="2000" i="0" b="0">
+                <a:solidFill>
+                  <a:srgbClr val="D4D4D4"/>
+                </a:solidFill>
+                <a:latin typeface="Consolas"/>
+              </a:rPr>
+              <a:t>Trigger</a:t>
+            </a:r>
+            <a:r>
+              <a:rPr sz="2000" i="0" b="0">
+                <a:solidFill>
+                  <a:srgbClr val="D4D4D4"/>
+                </a:solidFill>
+                <a:latin typeface="Consolas"/>
+              </a:rPr>
+              <a:t> </a:t>
+            </a:r>
+            <a:r>
+              <a:rPr sz="2000" i="0" b="0">
+                <a:solidFill>
+                  <a:srgbClr val="D4D4D4"/>
+                </a:solidFill>
+                <a:latin typeface="Consolas"/>
+              </a:rPr>
+              <a:t>up</a:t>
+            </a:r>
+            <a:r>
+              <a:rPr sz="2000" i="0" b="0">
+                <a:solidFill>
+                  <a:srgbClr val="D4D4D4"/>
+                </a:solidFill>
+                <a:latin typeface="Consolas"/>
+              </a:rPr>
+              <a:t>      | </a:t>
+            </a:r>
+            <a:r>
+              <a:rPr sz="2000" i="0" b="0">
+                <a:solidFill>
+                  <a:srgbClr val="D4D4D4"/>
+                </a:solidFill>
+                <a:latin typeface="Consolas"/>
+              </a:rPr>
+              <a:t>Min</a:t>
+            </a:r>
+            <a:r>
+              <a:rPr sz="2000" i="0" b="0">
+                <a:solidFill>
+                  <a:srgbClr val="D4D4D4"/>
+                </a:solidFill>
+                <a:latin typeface="Consolas"/>
+              </a:rPr>
+              <a:t> | </a:t>
+            </a:r>
+            <a:r>
+              <a:rPr sz="2000" i="0" b="0">
+                <a:solidFill>
+                  <a:srgbClr val="D4D4D4"/>
+                </a:solidFill>
+                <a:latin typeface="Consolas"/>
+              </a:rPr>
+              <a:t>Max</a:t>
+            </a:r>
+            <a:r>
+              <a:rPr sz="2000" i="0" b="0">
+                <a:solidFill>
+                  <a:srgbClr val="D4D4D4"/>
+                </a:solidFill>
+                <a:latin typeface="Consolas"/>
+              </a:rPr>
+              <a:t> | </a:t>
+            </a:r>
+            <a:r>
+              <a:rPr sz="2000" i="0" b="0">
+                <a:solidFill>
+                  <a:srgbClr val="D4D4D4"/>
+                </a:solidFill>
+                <a:latin typeface="Consolas"/>
+              </a:rPr>
+              <a:t>Cooldown</a:t>
             </a:r>
           </a:p>
           <a:p>
             <a:pPr>
               <a:spcAft>
-                <a:spcPts val="800"/>
+                <a:spcPts val="428"/>
               </a:spcAft>
             </a:pPr>
             <a:r>
-              <a:rPr sz="2000" b="0" i="0">
-                <a:solidFill>
-                  <a:srgbClr val="333333"/>
-                </a:solidFill>
-                <a:latin typeface="Calibri"/>
-              </a:rPr>
-              <a:t>–   Un periodo de evaluacion durante el cual el umbral debe sostenerse, un enfriamiento o cooldown que impide actuar de nuevo de inmediato, y un rango con minimo y maximo de instancias.</a:t>
+              <a:rPr sz="2000" i="0" b="0">
+                <a:solidFill>
+                  <a:srgbClr val="D4D4D4"/>
+                </a:solidFill>
+                <a:latin typeface="Consolas"/>
+              </a:rPr>
+              <a:t>-----------</a:t>
+            </a:r>
+            <a:r>
+              <a:rPr sz="2000" i="0" b="0">
+                <a:solidFill>
+                  <a:srgbClr val="D4D4D4"/>
+                </a:solidFill>
+                <a:latin typeface="Consolas"/>
+              </a:rPr>
+              <a:t>--|-------------|-----------------|-----|-----|---------</a:t>
             </a:r>
           </a:p>
           <a:p>
             <a:pPr>
               <a:spcAft>
-                <a:spcPts val="800"/>
+                <a:spcPts val="428"/>
               </a:spcAft>
             </a:pPr>
             <a:r>
-              <a:rPr sz="2000" b="0" i="0">
-                <a:solidFill>
-                  <a:srgbClr val="333333"/>
-                </a:solidFill>
-                <a:latin typeface="Calibri"/>
-              </a:rPr>
-              <a:t>–   Una politica completa para la app se lee asi: metrica CPU promedio del grupo de instancias de la API, umbral 70 por ciento sostenido durante 5 minutos, accion agregar una instancia, cooldown de 5 minutos, minimo 2 y maximo 6.</a:t>
+              <a:rPr sz="2000" i="0" b="0">
+                <a:solidFill>
+                  <a:srgbClr val="D4D4D4"/>
+                </a:solidFill>
+                <a:latin typeface="Consolas"/>
+              </a:rPr>
+              <a:t>API</a:t>
+            </a:r>
+            <a:r>
+              <a:rPr sz="2000" i="0" b="0">
+                <a:solidFill>
+                  <a:srgbClr val="D4D4D4"/>
+                </a:solidFill>
+                <a:latin typeface="Consolas"/>
+              </a:rPr>
+              <a:t>          | </a:t>
+            </a:r>
+            <a:r>
+              <a:rPr sz="2000" i="0" b="0">
+                <a:solidFill>
+                  <a:srgbClr val="D4D4D4"/>
+                </a:solidFill>
+                <a:latin typeface="Consolas"/>
+              </a:rPr>
+              <a:t>Horizontal</a:t>
+            </a:r>
+            <a:r>
+              <a:rPr sz="2000" i="0" b="0">
+                <a:solidFill>
+                  <a:srgbClr val="D4D4D4"/>
+                </a:solidFill>
+                <a:latin typeface="Consolas"/>
+              </a:rPr>
+              <a:t>  | </a:t>
+            </a:r>
+            <a:r>
+              <a:rPr sz="2000" i="0" b="0">
+                <a:solidFill>
+                  <a:srgbClr val="D4D4D4"/>
+                </a:solidFill>
+                <a:latin typeface="Consolas"/>
+              </a:rPr>
+              <a:t>CPU</a:t>
+            </a:r>
+            <a:r>
+              <a:rPr sz="2000" i="0" b="0">
+                <a:solidFill>
+                  <a:srgbClr val="D4D4D4"/>
+                </a:solidFill>
+                <a:latin typeface="Consolas"/>
+              </a:rPr>
+              <a:t> &gt; </a:t>
+            </a:r>
+            <a:r>
+              <a:rPr sz="2000" i="0" b="0">
+                <a:solidFill>
+                  <a:srgbClr val="B5CEA8"/>
+                </a:solidFill>
+                <a:latin typeface="Consolas"/>
+              </a:rPr>
+              <a:t>70</a:t>
+            </a:r>
+            <a:r>
+              <a:rPr sz="2000" i="0" b="0">
+                <a:solidFill>
+                  <a:srgbClr val="D4D4D4"/>
+                </a:solidFill>
+                <a:latin typeface="Consolas"/>
+              </a:rPr>
+              <a:t>% / 5</a:t>
+            </a:r>
+            <a:r>
+              <a:rPr sz="2000" i="0" b="0">
+                <a:solidFill>
+                  <a:srgbClr val="D4D4D4"/>
+                </a:solidFill>
+                <a:latin typeface="Consolas"/>
+              </a:rPr>
+              <a:t>m</a:t>
+            </a:r>
+            <a:r>
+              <a:rPr sz="2000" i="0" b="0">
+                <a:solidFill>
+                  <a:srgbClr val="D4D4D4"/>
+                </a:solidFill>
+                <a:latin typeface="Consolas"/>
+              </a:rPr>
+              <a:t>  |  </a:t>
+            </a:r>
+            <a:r>
+              <a:rPr sz="2000" i="0" b="0">
+                <a:solidFill>
+                  <a:srgbClr val="B5CEA8"/>
+                </a:solidFill>
+                <a:latin typeface="Consolas"/>
+              </a:rPr>
+              <a:t>2</a:t>
+            </a:r>
+            <a:r>
+              <a:rPr sz="2000" i="0" b="0">
+                <a:solidFill>
+                  <a:srgbClr val="D4D4D4"/>
+                </a:solidFill>
+                <a:latin typeface="Consolas"/>
+              </a:rPr>
+              <a:t>  |  </a:t>
+            </a:r>
+            <a:r>
+              <a:rPr sz="2000" i="0" b="0">
+                <a:solidFill>
+                  <a:srgbClr val="B5CEA8"/>
+                </a:solidFill>
+                <a:latin typeface="Consolas"/>
+              </a:rPr>
+              <a:t>6</a:t>
+            </a:r>
+            <a:r>
+              <a:rPr sz="2000" i="0" b="0">
+                <a:solidFill>
+                  <a:srgbClr val="D4D4D4"/>
+                </a:solidFill>
+                <a:latin typeface="Consolas"/>
+              </a:rPr>
+              <a:t>  | </a:t>
+            </a:r>
+            <a:r>
+              <a:rPr sz="2000" i="0" b="0">
+                <a:solidFill>
+                  <a:srgbClr val="B5CEA8"/>
+                </a:solidFill>
+                <a:latin typeface="Consolas"/>
+              </a:rPr>
+              <a:t>5</a:t>
+            </a:r>
+            <a:r>
+              <a:rPr sz="2000" i="0" b="0">
+                <a:solidFill>
+                  <a:srgbClr val="D4D4D4"/>
+                </a:solidFill>
+                <a:latin typeface="Consolas"/>
+              </a:rPr>
+              <a:t> </a:t>
+            </a:r>
+            <a:r>
+              <a:rPr sz="2000" i="0" b="0">
+                <a:solidFill>
+                  <a:srgbClr val="D4D4D4"/>
+                </a:solidFill>
+                <a:latin typeface="Consolas"/>
+              </a:rPr>
+              <a:t>min</a:t>
             </a:r>
           </a:p>
           <a:p>
             <a:pPr>
               <a:spcAft>
-                <a:spcPts val="800"/>
+                <a:spcPts val="428"/>
               </a:spcAft>
             </a:pPr>
             <a:r>
-              <a:rPr sz="2000" b="0" i="0">
-                <a:solidFill>
-                  <a:srgbClr val="333333"/>
+              <a:rPr sz="2000" i="0" b="0">
+                <a:solidFill>
+                  <a:srgbClr val="D4D4D4"/>
+                </a:solidFill>
+                <a:latin typeface="Consolas"/>
+              </a:rPr>
+              <a:t>Worker</a:t>
+            </a:r>
+            <a:r>
+              <a:rPr sz="2000" i="0" b="0">
+                <a:solidFill>
+                  <a:srgbClr val="D4D4D4"/>
+                </a:solidFill>
+                <a:latin typeface="Consolas"/>
+              </a:rPr>
+              <a:t> </a:t>
+            </a:r>
+            <a:r>
+              <a:rPr sz="2000" i="0" b="0">
+                <a:solidFill>
+                  <a:srgbClr val="D4D4D4"/>
+                </a:solidFill>
+                <a:latin typeface="Consolas"/>
+              </a:rPr>
+              <a:t>cola</a:t>
+            </a:r>
+            <a:r>
+              <a:rPr sz="2000" i="0" b="0">
+                <a:solidFill>
+                  <a:srgbClr val="D4D4D4"/>
+                </a:solidFill>
+                <a:latin typeface="Consolas"/>
+              </a:rPr>
+              <a:t>  | </a:t>
+            </a:r>
+            <a:r>
+              <a:rPr sz="2000" i="0" b="0">
+                <a:solidFill>
+                  <a:srgbClr val="D4D4D4"/>
+                </a:solidFill>
+                <a:latin typeface="Consolas"/>
+              </a:rPr>
+              <a:t>Horizontal</a:t>
+            </a:r>
+            <a:r>
+              <a:rPr sz="2000" i="0" b="0">
+                <a:solidFill>
+                  <a:srgbClr val="D4D4D4"/>
+                </a:solidFill>
+                <a:latin typeface="Consolas"/>
+              </a:rPr>
+              <a:t>  | </a:t>
+            </a:r>
+            <a:r>
+              <a:rPr sz="2000" i="0" b="0">
+                <a:solidFill>
+                  <a:srgbClr val="D4D4D4"/>
+                </a:solidFill>
+                <a:latin typeface="Consolas"/>
+              </a:rPr>
+              <a:t>cola</a:t>
+            </a:r>
+            <a:r>
+              <a:rPr sz="2000" i="0" b="0">
+                <a:solidFill>
+                  <a:srgbClr val="D4D4D4"/>
+                </a:solidFill>
+                <a:latin typeface="Consolas"/>
+              </a:rPr>
+              <a:t> &gt; </a:t>
+            </a:r>
+            <a:r>
+              <a:rPr sz="2000" i="0" b="0">
+                <a:solidFill>
+                  <a:srgbClr val="B5CEA8"/>
+                </a:solidFill>
+                <a:latin typeface="Consolas"/>
+              </a:rPr>
+              <a:t>100</a:t>
+            </a:r>
+            <a:r>
+              <a:rPr sz="2000" i="0" b="0">
+                <a:solidFill>
+                  <a:srgbClr val="D4D4D4"/>
+                </a:solidFill>
+                <a:latin typeface="Consolas"/>
+              </a:rPr>
+              <a:t> </a:t>
+            </a:r>
+            <a:r>
+              <a:rPr sz="2000" i="0" b="0">
+                <a:solidFill>
+                  <a:srgbClr val="D4D4D4"/>
+                </a:solidFill>
+                <a:latin typeface="Consolas"/>
+              </a:rPr>
+              <a:t>msg</a:t>
+            </a:r>
+            <a:r>
+              <a:rPr sz="2000" i="0" b="0">
+                <a:solidFill>
+                  <a:srgbClr val="D4D4D4"/>
+                </a:solidFill>
+                <a:latin typeface="Consolas"/>
+              </a:rPr>
+              <a:t>  |  </a:t>
+            </a:r>
+            <a:r>
+              <a:rPr sz="2000" i="0" b="0">
+                <a:solidFill>
+                  <a:srgbClr val="B5CEA8"/>
+                </a:solidFill>
+                <a:latin typeface="Consolas"/>
+              </a:rPr>
+              <a:t>1</a:t>
+            </a:r>
+            <a:r>
+              <a:rPr sz="2000" i="0" b="0">
+                <a:solidFill>
+                  <a:srgbClr val="D4D4D4"/>
+                </a:solidFill>
+                <a:latin typeface="Consolas"/>
+              </a:rPr>
+              <a:t>  |  </a:t>
+            </a:r>
+            <a:r>
+              <a:rPr sz="2000" i="0" b="0">
+                <a:solidFill>
+                  <a:srgbClr val="B5CEA8"/>
+                </a:solidFill>
+                <a:latin typeface="Consolas"/>
+              </a:rPr>
+              <a:t>4</a:t>
+            </a:r>
+            <a:r>
+              <a:rPr sz="2000" i="0" b="0">
+                <a:solidFill>
+                  <a:srgbClr val="D4D4D4"/>
+                </a:solidFill>
+                <a:latin typeface="Consolas"/>
+              </a:rPr>
+              <a:t>  | </a:t>
+            </a:r>
+            <a:r>
+              <a:rPr sz="2000" i="0" b="0">
+                <a:solidFill>
+                  <a:srgbClr val="B5CEA8"/>
+                </a:solidFill>
+                <a:latin typeface="Consolas"/>
+              </a:rPr>
+              <a:t>3</a:t>
+            </a:r>
+            <a:r>
+              <a:rPr sz="2000" i="0" b="0">
+                <a:solidFill>
+                  <a:srgbClr val="D4D4D4"/>
+                </a:solidFill>
+                <a:latin typeface="Consolas"/>
+              </a:rPr>
+              <a:t> </a:t>
+            </a:r>
+            <a:r>
+              <a:rPr sz="2000" i="0" b="0">
+                <a:solidFill>
+                  <a:srgbClr val="D4D4D4"/>
+                </a:solidFill>
+                <a:latin typeface="Consolas"/>
+              </a:rPr>
+              <a:t>min</a:t>
+            </a:r>
+          </a:p>
+          <a:p>
+            <a:pPr>
+              <a:spcAft>
+                <a:spcPts val="428"/>
+              </a:spcAft>
+            </a:pPr>
+            <a:r>
+              <a:rPr sz="2000" i="0" b="0">
+                <a:solidFill>
+                  <a:srgbClr val="D4D4D4"/>
+                </a:solidFill>
+                <a:latin typeface="Consolas"/>
+              </a:rPr>
+              <a:t>BD</a:t>
+            </a:r>
+            <a:r>
+              <a:rPr sz="2000" i="0" b="0">
+                <a:solidFill>
+                  <a:srgbClr val="D4D4D4"/>
+                </a:solidFill>
+                <a:latin typeface="Consolas"/>
+              </a:rPr>
+              <a:t> </a:t>
+            </a:r>
+            <a:r>
+              <a:rPr sz="2000" i="0" b="0">
+                <a:solidFill>
+                  <a:srgbClr val="D4D4D4"/>
+                </a:solidFill>
+                <a:latin typeface="Consolas"/>
+              </a:rPr>
+              <a:t>primaria</a:t>
+            </a:r>
+            <a:r>
+              <a:rPr sz="2000" i="0" b="0">
+                <a:solidFill>
+                  <a:srgbClr val="D4D4D4"/>
+                </a:solidFill>
+                <a:latin typeface="Consolas"/>
+              </a:rPr>
+              <a:t>  | </a:t>
+            </a:r>
+            <a:r>
+              <a:rPr sz="2000" i="0" b="0">
+                <a:solidFill>
+                  <a:srgbClr val="D4D4D4"/>
+                </a:solidFill>
+                <a:latin typeface="Consolas"/>
+              </a:rPr>
+              <a:t>NO</a:t>
+            </a:r>
+            <a:r>
+              <a:rPr sz="2000" i="0" b="0">
+                <a:solidFill>
+                  <a:srgbClr val="D4D4D4"/>
+                </a:solidFill>
+                <a:latin typeface="Consolas"/>
+              </a:rPr>
+              <a:t> </a:t>
+            </a:r>
+            <a:r>
+              <a:rPr sz="2000" i="0" b="0">
+                <a:solidFill>
+                  <a:srgbClr val="D4D4D4"/>
+                </a:solidFill>
+                <a:latin typeface="Consolas"/>
+              </a:rPr>
+              <a:t>escala</a:t>
+            </a:r>
+            <a:r>
+              <a:rPr sz="2000" i="0" b="0">
+                <a:solidFill>
+                  <a:srgbClr val="D4D4D4"/>
+                </a:solidFill>
+                <a:latin typeface="Consolas"/>
+              </a:rPr>
+              <a:t>   | -               |  </a:t>
+            </a:r>
+            <a:r>
+              <a:rPr sz="2000" i="0" b="0">
+                <a:solidFill>
+                  <a:srgbClr val="B5CEA8"/>
+                </a:solidFill>
+                <a:latin typeface="Consolas"/>
+              </a:rPr>
+              <a:t>1</a:t>
+            </a:r>
+            <a:r>
+              <a:rPr sz="2000" i="0" b="0">
+                <a:solidFill>
+                  <a:srgbClr val="D4D4D4"/>
+                </a:solidFill>
+                <a:latin typeface="Consolas"/>
+              </a:rPr>
+              <a:t>  |  </a:t>
+            </a:r>
+            <a:r>
+              <a:rPr sz="2000" i="0" b="0">
+                <a:solidFill>
+                  <a:srgbClr val="B5CEA8"/>
+                </a:solidFill>
+                <a:latin typeface="Consolas"/>
+              </a:rPr>
+              <a:t>1</a:t>
+            </a:r>
+            <a:r>
+              <a:rPr sz="2000" i="0" b="0">
+                <a:solidFill>
+                  <a:srgbClr val="D4D4D4"/>
+                </a:solidFill>
+                <a:latin typeface="Consolas"/>
+              </a:rPr>
+              <a:t>  | -</a:t>
+            </a:r>
+          </a:p>
+        </p:txBody>
+      </p:sp>
+      <p:sp>
+        <p:nvSpPr>
+          <p:cNvPr id="13" name="TextBox 12"/>
+          <p:cNvSpPr txBox="1"/>
+          <p:nvPr/>
+        </p:nvSpPr>
+        <p:spPr>
+          <a:xfrm>
+            <a:off x="457200" y="6035040"/>
+            <a:ext cx="11277295" cy="365760"/>
+          </a:xfrm>
+          <a:prstGeom prst="rect">
+            <a:avLst/>
+          </a:prstGeom>
+          <a:noFill/>
+        </p:spPr>
+        <p:txBody>
+          <a:bodyPr wrap="square">
+            <a:spAutoFit/>
+          </a:bodyPr>
+          <a:lstStyle/>
+          <a:p>
+            <a:pPr algn="ctr"/>
+            <a:r>
+              <a:rPr sz="1300" b="0" i="1">
+                <a:solidFill>
+                  <a:srgbClr val="666666"/>
                 </a:solidFill>
                 <a:latin typeface="Calibri"/>
               </a:rPr>
-              <a:t>–   El 70 por ciento deja holgura para el pico que llega mientras la instancia nueva arranca.</a:t>
-            </a:r>
-          </a:p>
-        </p:txBody>
-      </p:sp>
-      <p:sp>
-        <p:nvSpPr>
-          <p:cNvPr id="6" name="TextBox 5"/>
+              <a:t>El 'max' es lo que evita que la factura escale sola. La BD primaria casi nunca escala horizontal.</a:t>
+            </a:r>
+          </a:p>
+        </p:txBody>
+      </p:sp>
+      <p:sp>
+        <p:nvSpPr>
+          <p:cNvPr id="14" name="TextBox 13"/>
           <p:cNvSpPr txBox="1"/>
           <p:nvPr/>
         </p:nvSpPr>

--- a/Arquitectura de Sistemas Computacionales/Clases/Clase 13 - Escalabilidad automatica/Presentacion.pptx
+++ b/Arquitectura de Sistemas Computacionales/Clases/Clase 13 - Escalabilidad automatica/Presentacion.pptx
@@ -878,37 +878,79 @@
           <a:lstStyle/>
           <a:p>
             <a:r>
-              <a:t>TEXTO COMPLETO DE LA LÁMINA (se proyecta resumido):</a:t>
+              <a:t>DESARROLLO (para explicarlo, no se proyecta):</a:t>
             </a:r>
           </a:p>
           <a:p/>
           <a:p>
             <a:r>
-              <a:t>Horizontal: más réplicas del API. Vertical: más CPU/RAM a un nodo.</a:t>
+              <a:t>El autoescalado es la automatizacion del escalado horizontal y consta de cinco piezas: una metrica que se observa, un umbral que dispara la accion</a:t>
             </a:r>
           </a:p>
           <a:p/>
           <a:p>
             <a:r>
-              <a:t>Datos: escala distinta (read replicas conceptuales / partición — solo si aplica).</a:t>
+              <a:t>Un periodo de evaluacion durante el cual el umbral debe sostenerse, un enfriamiento o cooldown que impide actuar de nuevo de inmediato, y un rango con minimo y maximo de instancias.</a:t>
             </a:r>
           </a:p>
           <a:p/>
           <a:p>
             <a:r>
-              <a:t>Triggers: RPS, latencia p95, profundidad de cola, CPU.</a:t>
+              <a:t>Una politica completa para CloudLite se lee asi: metrica CPU promedio del grupo de instancias de la API, umbral 70 por ciento sostenido durante 5 minutos, accion agregar una instancia, cooldown de 5 minutos, minimo 2 y maximo 6.</a:t>
             </a:r>
           </a:p>
           <a:p/>
           <a:p>
             <a:r>
-              <a:t>Escalar en horizontal exige una API sin estado: la sesión vive en un token o en un almacén compartido, no en la memoria de una instancia.</a:t>
+              <a:t>El 70 por ciento deja holgura para el pico que llega mientras la instancia nueva arranca.</a:t>
             </a:r>
           </a:p>
           <a:p/>
           <a:p>
             <a:r>
-              <a:t>Ejemplo CloudLite: la API escala de 2 a 6 réplicas; la base de datos no escala igual y suele ser el límite.</a:t>
+              <a:t>Los 5 minutos evitan reaccionar a un ruido de 20 segundos.</a:t>
+            </a:r>
+          </a:p>
+          <a:p/>
+          <a:p>
+            <a:r>
+              <a:t>El minimo es 2 y no 1 porque con una sola instancia no hay tolerancia a fallas ni despliegue sin caida.</a:t>
+            </a:r>
+          </a:p>
+          <a:p/>
+          <a:p>
+            <a:r>
+              <a:t>Falta una simetria que casi nadie escribe: la politica de reduccion.</a:t>
+            </a:r>
+          </a:p>
+          <a:p/>
+          <a:p>
+            <a:r>
+              <a:t>Si se escala hacia afuera al 70 por ciento no se puede escalar hacia adentro tambien al 70, porque el sistema oscilaria agregando y quitando instancias sin parar, fenomeno llamado flapping.</a:t>
+            </a:r>
+          </a:p>
+          <a:p/>
+          <a:p>
+            <a:r>
+              <a:t>La convencion es usar umbrales asimetricos, por ejemplo salir al 70 y entrar al 30, y hacer la reduccion mas lenta que la expansion, porque equivocarse agregando cuesta dinero y equivocarse quitando cuesta una caida.</a:t>
+            </a:r>
+          </a:p>
+          <a:p/>
+          <a:p>
+            <a:r>
+              <a:t>NOTAS:</a:t>
+            </a:r>
+          </a:p>
+          <a:p/>
+          <a:p>
+            <a:r>
+              <a:t>Cada numero se justifica.</a:t>
+            </a:r>
+          </a:p>
+          <a:p/>
+          <a:p>
+            <a:r>
+              <a:t>(No se proyecta) Y el maximo es la pieza mas olvidada y la mas importante: es el techo de costo decidido en la Clase 10, y sin el, un error de programacion o un ataque puede escalar la factura sin limite; hay casos documentados de facturas de miles de dolares generadas en horas por autoescalado sin tope.</a:t>
             </a:r>
           </a:p>
         </p:txBody>
@@ -984,73 +1026,43 @@
           <a:p/>
           <a:p>
             <a:r>
-              <a:t>El autoescalado es la automatizacion del escalado horizontal y consta de cinco piezas: una metrica que se observa, un umbral que dispara la accion</a:t>
+              <a:t>Hay un limite fisico del autoescalado que desarma la idea de que es magia: la instancia nueva no aparece al instante.</a:t>
             </a:r>
           </a:p>
           <a:p/>
           <a:p>
             <a:r>
-              <a:t>Un periodo de evaluacion durante el cual el umbral debe sostenerse, un enfriamiento o cooldown que impide actuar de nuevo de inmediato, y un rango con minimo y maximo de instancias.</a:t>
+              <a:t>Un contenedor liviano tarda del orden de 10 a 60 segundos entre que se decide crearlo y que recibe trafico util, contando descarga de imagen</a:t>
             </a:r>
           </a:p>
           <a:p/>
           <a:p>
             <a:r>
-              <a:t>Una politica completa para CloudLite se lee asi: metrica CPU promedio del grupo de instancias de la API, umbral 70 por ciento sostenido durante 5 minutos, accion agregar una instancia, cooldown de 5 minutos, minimo 2 y maximo 6.</a:t>
+              <a:t>Arranque del proceso, conexion a la base de datos y aprobacion del chequeo de salud; una maquina virtual completa puede tardar de 2 a 5 minutos.</a:t>
             </a:r>
           </a:p>
           <a:p/>
           <a:p>
             <a:r>
-              <a:t>El 70 por ciento deja holgura para el pico que llega mientras la instancia nueva arranca.</a:t>
+              <a:t>Las respuestas correctas son tres y ninguna es "poner mas autoescalado": mantener holgura permanente por encima de la demanda habitual</a:t>
             </a:r>
           </a:p>
           <a:p/>
           <a:p>
             <a:r>
-              <a:t>Los 5 minutos evitan reaccionar a un ruido de 20 segundos.</a:t>
+              <a:t>Poner una cola delante para absorber la rafaga y procesarla al ritmo que el sistema aguante, o degradar con gracia devolviendo una version reducida de la respuesta.</a:t>
             </a:r>
           </a:p>
           <a:p/>
           <a:p>
             <a:r>
-              <a:t>El minimo es 2 y no 1 porque con una sola instancia no hay tolerancia a fallas ni despliegue sin caida.</a:t>
+              <a:t>(No se proyecta) Sume el periodo de evaluacion y el sistema reacciona entre 5 y 10 minutos despues de que empezo el problema, asi que un pico subito del tipo que la prueba de spike de la Clase 12 simula ocurre y termina antes de que llegue la ayuda.</a:t>
             </a:r>
           </a:p>
           <a:p/>
           <a:p>
             <a:r>
-              <a:t>Falta una simetria que casi nadie escribe: la politica de reduccion.</a:t>
-            </a:r>
-          </a:p>
-          <a:p/>
-          <a:p>
-            <a:r>
-              <a:t>Si se escala hacia afuera al 70 por ciento no se puede escalar hacia adentro tambien al 70, porque el sistema oscilaria agregando y quitando instancias sin parar, fenomeno llamado flapping.</a:t>
-            </a:r>
-          </a:p>
-          <a:p/>
-          <a:p>
-            <a:r>
-              <a:t>La convencion es usar umbrales asimetricos, por ejemplo salir al 70 y entrar al 30, y hacer la reduccion mas lenta que la expansion, porque equivocarse agregando cuesta dinero y equivocarse quitando cuesta una caida.</a:t>
-            </a:r>
-          </a:p>
-          <a:p/>
-          <a:p>
-            <a:r>
-              <a:t>NOTAS:</a:t>
-            </a:r>
-          </a:p>
-          <a:p/>
-          <a:p>
-            <a:r>
-              <a:t>Cada numero se justifica.</a:t>
-            </a:r>
-          </a:p>
-          <a:p/>
-          <a:p>
-            <a:r>
-              <a:t>(No se proyecta) Y el maximo es la pieza mas olvidada y la mas importante: es el techo de costo decidido en la Clase 10, y sin el, un error de programacion o un ataque puede escalar la factura sin limite; hay casos documentados de facturas de miles de dolares generadas en horas por autoescalado sin tope.</a:t>
+              <a:t>(No se proyecta) Aqui reaparece la Clase 3: una imagen slim arranca mas rapido que una de un gigabyte, asi que adelgazar la imagen no es solo ahorro de costo, es tiempo de reaccion.</a:t>
             </a:r>
           </a:p>
         </p:txBody>
@@ -1126,43 +1138,43 @@
           <a:p/>
           <a:p>
             <a:r>
-              <a:t>Hay un limite fisico del autoescalado que desarma la idea de que es magia: la instancia nueva no aparece al instante.</a:t>
+              <a:t>Elegir bien la metrica es la decision mas fina del tema, y el ejemplo de CloudLite es contundente.</a:t>
             </a:r>
           </a:p>
           <a:p/>
           <a:p>
             <a:r>
-              <a:t>Un contenedor liviano tarda del orden de 10 a 60 segundos entre que se decide crearlo y que recibe trafico util, contando descarga de imagen</a:t>
+              <a:t>La CPU es la metrica por defecto y es la equivocada para la mayoria de las APIs, porque una API que sobre todo espera respuestas de la base de datos esta limitada por entrada y salida</a:t>
             </a:r>
           </a:p>
           <a:p/>
           <a:p>
             <a:r>
-              <a:t>Arranque del proceso, conexion a la base de datos y aprobacion del chequeo de salud; una maquina virtual completa puede tardar de 2 a 5 minutos.</a:t>
+              <a:t>No por procesador: cuando la latencia se dispara a 3 segundos porque el pool de conexiones esta agotado, la CPU puede seguir marcando un tranquilo 20 por ciento, el umbral del 70 nunca se cruza y el autoescalado no hace nada mientras los usuarios sufren.</a:t>
             </a:r>
           </a:p>
           <a:p/>
           <a:p>
             <a:r>
-              <a:t>Las respuestas correctas son tres y ninguna es "poner mas autoescalado": mantener holgura permanente por encima de la demanda habitual</a:t>
+              <a:t>Para el componente de notificaciones de CloudLite la metrica natural es el numero de mensajes esperando en la cola, no la CPU del worker: si hay 500 mensajes acumulados hay que agregar workers, y da igual cuanta CPU usen.</a:t>
             </a:r>
           </a:p>
           <a:p/>
           <a:p>
             <a:r>
-              <a:t>Poner una cola delante para absorber la rafaga y procesarla al ritmo que el sistema aguante, o degradar con gracia devolviendo una version reducida de la respuesta.</a:t>
+              <a:t>(No se proyecta) Metricas mejores para ese caso son las peticiones por segundo por instancia, que se deriva del calculo hecho en la Clase 12, la latencia p95 del propio servicio, o la longitud de la cola pendiente.</a:t>
             </a:r>
           </a:p>
           <a:p/>
           <a:p>
             <a:r>
-              <a:t>(No se proyecta) Sume el periodo de evaluacion y el sistema reacciona entre 5 y 10 minutos despues de que empezo el problema, asi que un pico subito del tipo que la prueba de spike de la Clase 12 simula ocurre y termina antes de que llegue la ayuda.</a:t>
+              <a:t>(No se proyecta) Regla de bolsillo: la metrica correcta es la que mide el recurso que se agota primero, es decir el cuello de botella identificado en la clase anterior.</a:t>
             </a:r>
           </a:p>
           <a:p/>
           <a:p>
             <a:r>
-              <a:t>(No se proyecta) Aqui reaparece la Clase 3: una imagen slim arranca mas rapido que una de un gigabyte, asi que adelgazar la imagen no es solo ahorro de costo, es tiempo de reaccion.</a:t>
+              <a:t>(No se proyecta) De ahi que el entregable de hoy no se pueda hacer bien si el de la Clase 12 quedo vacio.</a:t>
             </a:r>
           </a:p>
         </p:txBody>
@@ -1238,321 +1250,109 @@
           <a:p/>
           <a:p>
             <a:r>
-              <a:t>Elegir bien la metrica es la decision mas fina del tema, y el ejemplo de CloudLite es contundente.</a:t>
+              <a:t>La capa de datos es el caso central: agregar instancias de API es casi gratis conceptualmente, pero una base de datos relacional que debe mantener consistencia tiene un unico escritor, y ese escritor no se multiplica sin cambiar el modelo.</a:t>
             </a:r>
           </a:p>
           <a:p/>
           <a:p>
             <a:r>
-              <a:t>La CPU es la metrica por defecto y es la equivocada para la mayoria de las APIs, porque una API que sobre todo espera respuestas de la base de datos esta limitada por entrada y salida</a:t>
+              <a:t>Se pueden agregar replicas de lectura, y ahi entra un concepto a definir: el retraso de replicacion, esos milisegundos o segundos en que la replica todavia no tiene el ultimo cambio</a:t>
             </a:r>
           </a:p>
           <a:p/>
           <a:p>
             <a:r>
-              <a:t>No por procesador: cuando la latencia se dispara a 3 segundos porque el pool de conexiones esta agotado, la CPU puede seguir marcando un tranquilo 20 por ciento, el umbral del 70 nunca se cruza y el autoescalado no hace nada mientras los usuarios sufren.</a:t>
+              <a:t>Que produce el sintoma de que el usuario guarda un dato, la pagina lo relee de una replica y el dato no aparece.</a:t>
             </a:r>
           </a:p>
           <a:p/>
           <a:p>
             <a:r>
-              <a:t>Para el componente de notificaciones de CloudLite la metrica natural es el numero de mensajes esperando en la cola, no la CPU del worker: si hay 500 mensajes acumulados hay que agregar workers, y da igual cuanta CPU usen.</a:t>
+              <a:t>Las alternativas mas agresivas, particionar los datos por clave o cambiar a un modelo sin esquema fijo, son decisiones de arquitectura mayores y estan fuera del alcance de CloudLite v1</a:t>
             </a:r>
           </a:p>
           <a:p/>
           <a:p>
             <a:r>
-              <a:t>(No se proyecta) Metricas mejores para ese caso son las peticiones por segundo por instancia, que se deriva del calculo hecho en la Clase 12, la latencia p95 del propio servicio, o la longitud de la cola pendiente.</a:t>
+              <a:t>Decirlo explicitamente en el informe es una respuesta correcta, no una debilidad.</a:t>
             </a:r>
           </a:p>
           <a:p/>
           <a:p>
             <a:r>
-              <a:t>(No se proyecta) Regla de bolsillo: la metrica correcta es la que mide el recurso que se agota primero, es decir el cuello de botella identificado en la clase anterior.</a:t>
+              <a:t>Hay un detalle aritmetico que es la mejor leccion del dia: si cada instancia de la API abre un pool de 20 conexiones y el autoescalado sube a 6 instancias</a:t>
             </a:r>
           </a:p>
           <a:p/>
           <a:p>
             <a:r>
-              <a:t>(No se proyecta) De ahi que el entregable de hoy no se pueda hacer bien si el de la Clase 12 quedo vacio.</a:t>
-            </a:r>
-          </a:p>
-        </p:txBody>
-      </p:sp>
-      <p:sp>
-        <p:nvSpPr>
-          <p:cNvPr id="4" name="Slide Number Placeholder 3"/>
-          <p:cNvSpPr>
-            <a:spLocks noGrp="1"/>
-          </p:cNvSpPr>
-          <p:nvPr>
-            <p:ph type="sldNum" idx="5" sz="quarter"/>
-          </p:nvPr>
-        </p:nvSpPr>
-        <p:spPr/>
-      </p:sp>
-    </p:spTree>
-  </p:cSld>
-  <p:clrMapOvr>
-    <a:masterClrMapping/>
-  </p:clrMapOvr>
-</p:notes>
-</file>
-
-<file path=ppt/notesSlides/notesSlide8.xml><?xml version="1.0" encoding="utf-8"?>
-<p:notes xmlns:a="http://schemas.openxmlformats.org/drawingml/2006/main" xmlns:p="http://schemas.openxmlformats.org/presentationml/2006/main" xmlns:r="http://schemas.openxmlformats.org/officeDocument/2006/relationships">
-  <p:cSld>
-    <p:spTree>
-      <p:nvGrpSpPr>
-        <p:cNvPr id="1" name=""/>
-        <p:cNvGrpSpPr/>
-        <p:nvPr/>
-      </p:nvGrpSpPr>
-      <p:grpSpPr>
-        <a:xfrm>
-          <a:off x="0" y="0"/>
-          <a:ext cx="0" cy="0"/>
-          <a:chOff x="0" y="0"/>
-          <a:chExt cx="0" cy="0"/>
-        </a:xfrm>
-      </p:grpSpPr>
-      <p:sp>
-        <p:nvSpPr>
-          <p:cNvPr id="2" name="Slide Image Placeholder 1"/>
-          <p:cNvSpPr>
-            <a:spLocks noGrp="1"/>
-          </p:cNvSpPr>
-          <p:nvPr>
-            <p:ph type="sldImg" idx="2"/>
-          </p:nvPr>
-        </p:nvSpPr>
-        <p:spPr/>
-      </p:sp>
-      <p:sp>
-        <p:nvSpPr>
-          <p:cNvPr id="3" name="Notes Placeholder 2"/>
-          <p:cNvSpPr>
-            <a:spLocks noGrp="1"/>
-          </p:cNvSpPr>
-          <p:nvPr>
-            <p:ph type="body" idx="3" sz="quarter"/>
-          </p:nvPr>
-        </p:nvSpPr>
-        <p:spPr/>
-        <p:txBody>
-          <a:bodyPr/>
-          <a:lstStyle/>
-          <a:p>
-            <a:r>
-              <a:t>DESARROLLO (para explicarlo, no se proyecta):</a:t>
+              <a:t>El sistema pide 120 conexiones, mientras que una base de datos gestionada pequena suele admitir del orden de 100; el resultado es que escalar la API tumba la base de datos.</a:t>
             </a:r>
           </a:p>
           <a:p/>
           <a:p>
             <a:r>
-              <a:t>La capa de datos es el caso central: agregar instancias de API es casi gratis conceptualmente, pero una base de datos relacional que debe mantener consistencia tiene un unico escritor, y ese escritor no se multiplica sin cambiar el modelo.</a:t>
+              <a:t>NOTAS:</a:t>
             </a:r>
           </a:p>
           <a:p/>
           <a:p>
             <a:r>
-              <a:t>Se pueden agregar replicas de lectura, y ahi entra un concepto a definir: el retraso de replicacion, esos milisegundos o segundos en que la replica todavia no tiene el ultimo cambio</a:t>
+              <a:t>Declarar lo que NO escala separa un diseno serio de una lista de deseos.</a:t>
             </a:r>
           </a:p>
           <a:p/>
           <a:p>
             <a:r>
-              <a:t>Que produce el sintoma de que el usuario guarda un dato, la pagina lo relee de una replica y el dato no aparece.</a:t>
+              <a:t>Multiplicar la capa sin verificar el limite del recurso compartido no mejora el sistema, lo rompe.</a:t>
             </a:r>
           </a:p>
           <a:p/>
           <a:p>
             <a:r>
-              <a:t>Las alternativas mas agresivas, particionar los datos por clave o cambiar a un modelo sin esquema fijo, son decisiones de arquitectura mayores y estan fuera del alcance de CloudLite v1</a:t>
+              <a:t>PREGUNTAS FRECUENTES Y CIERRE CONCEPTUAL ()</a:t>
             </a:r>
           </a:p>
           <a:p/>
           <a:p>
             <a:r>
-              <a:t>Decirlo explicitamente en el informe es una respuesta correcta, no una debilidad.</a:t>
+              <a:t>La primera es por que documentar limites si el autoescalado es automatico; la respuesta es que automatico significa que ejecuta la politica que alguien escribio, no que decide bien: sin maximo escala el costo</a:t>
             </a:r>
           </a:p>
           <a:p/>
           <a:p>
             <a:r>
-              <a:t>Hay un detalle aritmetico que es la mejor leccion del dia: si cada instancia de la API abre un pool de 20 conexiones y el autoescalado sube a 6 instancias</a:t>
+              <a:t>Sin minimo pierde disponibilidad, con la metrica equivocada no reacciona y con umbrales simetricos oscila; el automatismo amplifica la calidad de la decision humana en ambos sentidos.</a:t>
             </a:r>
           </a:p>
           <a:p/>
           <a:p>
             <a:r>
-              <a:t>El sistema pide 120 conexiones, mientras que una base de datos gestionada pequena suele admitir del orden de 100; el resultado es que escalar la API tumba la base de datos.</a:t>
+              <a:t>La segunda es si no seria mejor serverless, que "escala infinito"; la respuesta reconoce la ventaja real, que escala por peticion y no cobra en reposo</a:t>
             </a:r>
           </a:p>
           <a:p/>
           <a:p>
             <a:r>
-              <a:t>NOTAS:</a:t>
+              <a:t>Y nombra los tres costos: el arranque en frio, esa demora extra de cientos de milisegundos a segundos cuando una funcion se invoca despues de estar inactiva; el agotamiento de conexiones</a:t>
             </a:r>
           </a:p>
           <a:p/>
           <a:p>
             <a:r>
-              <a:t>Declarar lo que NO escala separa un diseno serio de una lista de deseos.</a:t>
+              <a:t>Porque mil funciones concurrentes matan a la base de datos igual que mil contenedores; y el costo por invocacion, que a volumen alto puede superar el de instancias fijas.</a:t>
             </a:r>
           </a:p>
           <a:p/>
           <a:p>
             <a:r>
-              <a:t>Multiplicar la capa sin verificar el limite del recurso compartido no mejora el sistema, lo rompe.</a:t>
+              <a:t>Una regla de bolsillo: serverless sirve para cargas intermitentes y cortas; para trafico sostenido, una instancia fija suele ser mas barata y predecible.</a:t>
             </a:r>
           </a:p>
           <a:p/>
           <a:p>
             <a:r>
-              <a:t>PREGUNTAS FRECUENTES Y CIERRE CONCEPTUAL ()</a:t>
-            </a:r>
-          </a:p>
-          <a:p/>
-          <a:p>
-            <a:r>
-              <a:t>La primera es por que documentar limites si el autoescalado es automatico; la respuesta es que automatico significa que ejecuta la politica que alguien escribio, no que decide bien: sin maximo escala el costo</a:t>
-            </a:r>
-          </a:p>
-          <a:p/>
-          <a:p>
-            <a:r>
-              <a:t>Sin minimo pierde disponibilidad, con la metrica equivocada no reacciona y con umbrales simetricos oscila; el automatismo amplifica la calidad de la decision humana en ambos sentidos.</a:t>
-            </a:r>
-          </a:p>
-          <a:p/>
-          <a:p>
-            <a:r>
-              <a:t>La segunda es si no seria mejor serverless, que "escala infinito"; la respuesta reconoce la ventaja real, que escala por peticion y no cobra en reposo</a:t>
-            </a:r>
-          </a:p>
-          <a:p/>
-          <a:p>
-            <a:r>
-              <a:t>Y nombra los tres costos: el arranque en frio, esa demora extra de cientos de milisegundos a segundos cuando una funcion se invoca despues de estar inactiva; el agotamiento de conexiones</a:t>
-            </a:r>
-          </a:p>
-          <a:p/>
-          <a:p>
-            <a:r>
-              <a:t>Porque mil funciones concurrentes matan a la base de datos igual que mil contenedores; y el costo por invocacion, que a volumen alto puede superar el de instancias fijas.</a:t>
-            </a:r>
-          </a:p>
-          <a:p/>
-          <a:p>
-            <a:r>
-              <a:t>Una regla de bolsillo: serverless sirve para cargas intermitentes y cortas; para trafico sostenido, una instancia fija suele ser mas barata y predecible.</a:t>
-            </a:r>
-          </a:p>
-          <a:p/>
-          <a:p>
-            <a:r>
               <a:t>(No se proyecta) Tambien conviene enumerar otras piezas que no escalan por replicacion: los limites de terceros, como un proveedor de correo que acepta 100 envios por minuto y rechaza el exceso, de modo que diez workers no envian diez veces mas rapido sino que generan diez veces mas errores; los sistemas de archivos compartidos; y las tareas programadas de tipo singleton, que si corren en seis instancias hacen el mismo trabajo seis veces y pueden duplicar cobros o correos.</a:t>
-            </a:r>
-          </a:p>
-        </p:txBody>
-      </p:sp>
-      <p:sp>
-        <p:nvSpPr>
-          <p:cNvPr id="4" name="Slide Number Placeholder 3"/>
-          <p:cNvSpPr>
-            <a:spLocks noGrp="1"/>
-          </p:cNvSpPr>
-          <p:nvPr>
-            <p:ph type="sldNum" idx="5" sz="quarter"/>
-          </p:nvPr>
-        </p:nvSpPr>
-        <p:spPr/>
-      </p:sp>
-    </p:spTree>
-  </p:cSld>
-  <p:clrMapOvr>
-    <a:masterClrMapping/>
-  </p:clrMapOvr>
-</p:notes>
-</file>
-
-<file path=ppt/notesSlides/notesSlide9.xml><?xml version="1.0" encoding="utf-8"?>
-<p:notes xmlns:a="http://schemas.openxmlformats.org/drawingml/2006/main" xmlns:p="http://schemas.openxmlformats.org/presentationml/2006/main" xmlns:r="http://schemas.openxmlformats.org/officeDocument/2006/relationships">
-  <p:cSld>
-    <p:spTree>
-      <p:nvGrpSpPr>
-        <p:cNvPr id="1" name=""/>
-        <p:cNvGrpSpPr/>
-        <p:nvPr/>
-      </p:nvGrpSpPr>
-      <p:grpSpPr>
-        <a:xfrm>
-          <a:off x="0" y="0"/>
-          <a:ext cx="0" cy="0"/>
-          <a:chOff x="0" y="0"/>
-          <a:chExt cx="0" cy="0"/>
-        </a:xfrm>
-      </p:grpSpPr>
-      <p:sp>
-        <p:nvSpPr>
-          <p:cNvPr id="2" name="Slide Image Placeholder 1"/>
-          <p:cNvSpPr>
-            <a:spLocks noGrp="1"/>
-          </p:cNvSpPr>
-          <p:nvPr>
-            <p:ph type="sldImg" idx="2"/>
-          </p:nvPr>
-        </p:nvSpPr>
-        <p:spPr/>
-      </p:sp>
-      <p:sp>
-        <p:nvSpPr>
-          <p:cNvPr id="3" name="Notes Placeholder 2"/>
-          <p:cNvSpPr>
-            <a:spLocks noGrp="1"/>
-          </p:cNvSpPr>
-          <p:nvPr>
-            <p:ph type="body" idx="3" sz="quarter"/>
-          </p:nvPr>
-        </p:nvSpPr>
-        <p:spPr/>
-        <p:txBody>
-          <a:bodyPr/>
-          <a:lstStyle/>
-          <a:p>
-            <a:r>
-              <a:t>TEXTO COMPLETO DE LA LÁMINA (se proyecta resumido):</a:t>
-            </a:r>
-          </a:p>
-          <a:p/>
-          <a:p>
-            <a:r>
-              <a:t>max replicas · min replicas · cooldown — se definen aunque sean hipotéticos.</a:t>
-            </a:r>
-          </a:p>
-          <a:p/>
-          <a:p>
-            <a:r>
-              <a:t>Escalar mal = costo (enlace con Clase 10).</a:t>
-            </a:r>
-          </a:p>
-          <a:p/>
-          <a:p>
-            <a:r>
-              <a:t>min = capacidad base siempre encendida, y su costo fijo · max = techo de gasto y de conexiones a la base.</a:t>
-            </a:r>
-          </a:p>
-          <a:p/>
-          <a:p>
-            <a:r>
-              <a:t>Cooldown = espera tras escalar (por ejemplo 5 minutos) para no subir y bajar en ciclos.</a:t>
-            </a:r>
-          </a:p>
-          <a:p/>
-          <a:p>
-            <a:r>
-              <a:t>Error común: max sin límite; un pico o un ataque se convierte en factura.</a:t>
             </a:r>
           </a:p>
         </p:txBody>
@@ -9095,118 +8895,14 @@
       </p:sp>
       <p:sp>
         <p:nvSpPr>
-          <p:cNvPr id="5" name="Rounded Rectangle 4"/>
-          <p:cNvSpPr/>
-          <p:nvPr/>
-        </p:nvSpPr>
-        <p:spPr>
-          <a:xfrm>
-            <a:off x="5797149" y="1462487"/>
-            <a:ext cx="6010497" cy="4280496"/>
-          </a:xfrm>
-          <a:prstGeom prst="roundRect">
-            <a:avLst>
-              <a:gd name="adj" fmla="val 4000"/>
-            </a:avLst>
-          </a:prstGeom>
-          <a:solidFill>
-            <a:srgbClr val="E8EEF4"/>
-          </a:solidFill>
-          <a:ln>
-            <a:noFill/>
-          </a:ln>
-        </p:spPr>
-        <p:style>
-          <a:lnRef idx="1">
-            <a:schemeClr val="accent1"/>
-          </a:lnRef>
-          <a:fillRef idx="3">
-            <a:schemeClr val="accent1"/>
-          </a:fillRef>
-          <a:effectRef idx="2">
-            <a:schemeClr val="accent1"/>
-          </a:effectRef>
-          <a:fontRef idx="minor">
-            <a:schemeClr val="lt1"/>
-          </a:fontRef>
-        </p:style>
-        <p:txBody>
-          <a:bodyPr rtlCol="0" anchor="ctr"/>
-          <a:lstStyle/>
-          <a:p>
-            <a:pPr algn="ctr"/>
-          </a:p>
-        </p:txBody>
-      </p:sp>
-      <p:pic>
-        <p:nvPicPr>
-          <p:cNvPr id="6" name="Picture 5" descr="money-coins-limit.jpg"/>
-          <p:cNvPicPr>
-            <a:picLocks noChangeAspect="1"/>
-          </p:cNvPicPr>
-          <p:nvPr/>
-        </p:nvPicPr>
-        <p:blipFill>
-          <a:blip r:embed="rId2"/>
-          <a:stretch>
-            <a:fillRect/>
-          </a:stretch>
-        </p:blipFill>
-        <p:spPr>
-          <a:xfrm>
-            <a:off x="5870301" y="1535639"/>
-            <a:ext cx="5864193" cy="4134192"/>
-          </a:xfrm>
-          <a:prstGeom prst="rect">
-            <a:avLst/>
-          </a:prstGeom>
-        </p:spPr>
-      </p:pic>
-      <p:sp>
-        <p:nvSpPr>
-          <p:cNvPr id="7" name="TextBox 6"/>
+          <p:cNvPr id="5" name="TextBox 4"/>
           <p:cNvSpPr txBox="1"/>
           <p:nvPr/>
         </p:nvSpPr>
         <p:spPr>
           <a:xfrm>
-            <a:off x="5870301" y="5961888"/>
-            <a:ext cx="5864193" cy="320040"/>
-          </a:xfrm>
-          <a:prstGeom prst="rect">
-            <a:avLst/>
-          </a:prstGeom>
-          <a:noFill/>
-        </p:spPr>
-        <p:txBody>
-          <a:bodyPr wrap="square">
-            <a:spAutoFit/>
-          </a:bodyPr>
-          <a:lstStyle/>
-          <a:p>
-            <a:pPr algn="ctr"/>
-            <a:r>
-              <a:rPr sz="1100" b="0" i="1">
-                <a:solidFill>
-                  <a:srgbClr val="666666"/>
-                </a:solidFill>
-                <a:latin typeface="Calibri"/>
-              </a:rPr>
-              <a:t>Foto: Public Domain Pictures · Pexels</a:t>
-            </a:r>
-          </a:p>
-        </p:txBody>
-      </p:sp>
-      <p:sp>
-        <p:nvSpPr>
-          <p:cNvPr id="8" name="TextBox 7"/>
-          <p:cNvSpPr txBox="1"/>
-          <p:nvPr/>
-        </p:nvSpPr>
-        <p:spPr>
-          <a:xfrm>
-            <a:off x="457200" y="1353312"/>
-            <a:ext cx="5093061" cy="5047488"/>
+            <a:off x="457200" y="1170432"/>
+            <a:ext cx="11277295" cy="5230368"/>
           </a:xfrm>
           <a:prstGeom prst="rect">
             <a:avLst/>
@@ -9336,11 +9032,27 @@
               <a:t> = espera tras escalar (por ejemplo 5 minutos) para no subir y bajar en ciclos.</a:t>
             </a:r>
           </a:p>
-        </p:txBody>
-      </p:sp>
-      <p:sp>
-        <p:nvSpPr>
-          <p:cNvPr id="9" name="TextBox 8"/>
+          <a:p>
+            <a:pPr>
+              <a:spcAft>
+                <a:spcPts val="800"/>
+              </a:spcAft>
+            </a:pPr>
+            <a:r>
+              <a:rPr sz="2000" b="0" i="0">
+                <a:solidFill>
+                  <a:srgbClr val="333333"/>
+                </a:solidFill>
+                <a:latin typeface="Calibri"/>
+              </a:rPr>
+              <a:t>–   Error común: max sin límite; un pico o un ataque se convierte en factura.</a:t>
+            </a:r>
+          </a:p>
+        </p:txBody>
+      </p:sp>
+      <p:sp>
+        <p:nvSpPr>
+          <p:cNvPr id="6" name="TextBox 5"/>
           <p:cNvSpPr txBox="1"/>
           <p:nvPr/>
         </p:nvSpPr>
@@ -10999,118 +10711,14 @@
       </p:sp>
       <p:sp>
         <p:nvSpPr>
-          <p:cNvPr id="5" name="Rounded Rectangle 4"/>
-          <p:cNvSpPr/>
-          <p:nvPr/>
-        </p:nvSpPr>
-        <p:spPr>
-          <a:xfrm>
-            <a:off x="5797149" y="1573813"/>
-            <a:ext cx="6010497" cy="4057845"/>
-          </a:xfrm>
-          <a:prstGeom prst="roundRect">
-            <a:avLst>
-              <a:gd name="adj" fmla="val 4000"/>
-            </a:avLst>
-          </a:prstGeom>
-          <a:solidFill>
-            <a:srgbClr val="E8EEF4"/>
-          </a:solidFill>
-          <a:ln>
-            <a:noFill/>
-          </a:ln>
-        </p:spPr>
-        <p:style>
-          <a:lnRef idx="1">
-            <a:schemeClr val="accent1"/>
-          </a:lnRef>
-          <a:fillRef idx="3">
-            <a:schemeClr val="accent1"/>
-          </a:fillRef>
-          <a:effectRef idx="2">
-            <a:schemeClr val="accent1"/>
-          </a:effectRef>
-          <a:fontRef idx="minor">
-            <a:schemeClr val="lt1"/>
-          </a:fontRef>
-        </p:style>
-        <p:txBody>
-          <a:bodyPr rtlCol="0" anchor="ctr"/>
-          <a:lstStyle/>
-          <a:p>
-            <a:pPr algn="ctr"/>
-          </a:p>
-        </p:txBody>
-      </p:sp>
-      <p:pic>
-        <p:nvPicPr>
-          <p:cNvPr id="6" name="Picture 5" descr="students-learning-laptops-classroom.jpg"/>
-          <p:cNvPicPr>
-            <a:picLocks noChangeAspect="1"/>
-          </p:cNvPicPr>
-          <p:nvPr/>
-        </p:nvPicPr>
-        <p:blipFill>
-          <a:blip r:embed="rId2"/>
-          <a:stretch>
-            <a:fillRect/>
-          </a:stretch>
-        </p:blipFill>
-        <p:spPr>
-          <a:xfrm>
-            <a:off x="5870301" y="1646965"/>
-            <a:ext cx="5864193" cy="3911541"/>
-          </a:xfrm>
-          <a:prstGeom prst="rect">
-            <a:avLst/>
-          </a:prstGeom>
-        </p:spPr>
-      </p:pic>
-      <p:sp>
-        <p:nvSpPr>
-          <p:cNvPr id="7" name="TextBox 6"/>
+          <p:cNvPr id="5" name="TextBox 4"/>
           <p:cNvSpPr txBox="1"/>
           <p:nvPr/>
         </p:nvSpPr>
         <p:spPr>
           <a:xfrm>
-            <a:off x="5870301" y="5961888"/>
-            <a:ext cx="5864193" cy="320040"/>
-          </a:xfrm>
-          <a:prstGeom prst="rect">
-            <a:avLst/>
-          </a:prstGeom>
-          <a:noFill/>
-        </p:spPr>
-        <p:txBody>
-          <a:bodyPr wrap="square">
-            <a:spAutoFit/>
-          </a:bodyPr>
-          <a:lstStyle/>
-          <a:p>
-            <a:pPr algn="ctr"/>
-            <a:r>
-              <a:rPr sz="1100" b="0" i="1">
-                <a:solidFill>
-                  <a:srgbClr val="666666"/>
-                </a:solidFill>
-                <a:latin typeface="Calibri"/>
-              </a:rPr>
-              <a:t>Foto: Mikhail Nilov · Pexels</a:t>
-            </a:r>
-          </a:p>
-        </p:txBody>
-      </p:sp>
-      <p:sp>
-        <p:nvSpPr>
-          <p:cNvPr id="8" name="TextBox 7"/>
-          <p:cNvSpPr txBox="1"/>
-          <p:nvPr/>
-        </p:nvSpPr>
-        <p:spPr>
-          <a:xfrm>
-            <a:off x="457200" y="1353312"/>
-            <a:ext cx="5093061" cy="5047488"/>
+            <a:off x="457200" y="1170432"/>
+            <a:ext cx="11277295" cy="5230368"/>
           </a:xfrm>
           <a:prstGeom prst="rect">
             <a:avLst/>
@@ -11174,7 +10782,7 @@
       </p:sp>
       <p:sp>
         <p:nvSpPr>
-          <p:cNvPr id="9" name="TextBox 8"/>
+          <p:cNvPr id="6" name="TextBox 5"/>
           <p:cNvSpPr txBox="1"/>
           <p:nvPr/>
         </p:nvSpPr>
@@ -11355,118 +10963,14 @@
       </p:sp>
       <p:sp>
         <p:nvSpPr>
-          <p:cNvPr id="5" name="Rounded Rectangle 4"/>
-          <p:cNvSpPr/>
-          <p:nvPr/>
-        </p:nvSpPr>
-        <p:spPr>
-          <a:xfrm>
-            <a:off x="5797149" y="1435229"/>
-            <a:ext cx="6010497" cy="4335013"/>
-          </a:xfrm>
-          <a:prstGeom prst="roundRect">
-            <a:avLst>
-              <a:gd name="adj" fmla="val 4000"/>
-            </a:avLst>
-          </a:prstGeom>
-          <a:solidFill>
-            <a:srgbClr val="E8EEF4"/>
-          </a:solidFill>
-          <a:ln>
-            <a:noFill/>
-          </a:ln>
-        </p:spPr>
-        <p:style>
-          <a:lnRef idx="1">
-            <a:schemeClr val="accent1"/>
-          </a:lnRef>
-          <a:fillRef idx="3">
-            <a:schemeClr val="accent1"/>
-          </a:fillRef>
-          <a:effectRef idx="2">
-            <a:schemeClr val="accent1"/>
-          </a:effectRef>
-          <a:fontRef idx="minor">
-            <a:schemeClr val="lt1"/>
-          </a:fontRef>
-        </p:style>
-        <p:txBody>
-          <a:bodyPr rtlCol="0" anchor="ctr"/>
-          <a:lstStyle/>
-          <a:p>
-            <a:pPr algn="ctr"/>
-          </a:p>
-        </p:txBody>
-      </p:sp>
-      <p:pic>
-        <p:nvPicPr>
-          <p:cNvPr id="6" name="Picture 5" descr="highway-traffic-night.jpg"/>
-          <p:cNvPicPr>
-            <a:picLocks noChangeAspect="1"/>
-          </p:cNvPicPr>
-          <p:nvPr/>
-        </p:nvPicPr>
-        <p:blipFill>
-          <a:blip r:embed="rId2"/>
-          <a:stretch>
-            <a:fillRect/>
-          </a:stretch>
-        </p:blipFill>
-        <p:spPr>
-          <a:xfrm>
-            <a:off x="5870301" y="1508381"/>
-            <a:ext cx="5864193" cy="4188709"/>
-          </a:xfrm>
-          <a:prstGeom prst="rect">
-            <a:avLst/>
-          </a:prstGeom>
-        </p:spPr>
-      </p:pic>
-      <p:sp>
-        <p:nvSpPr>
-          <p:cNvPr id="7" name="TextBox 6"/>
+          <p:cNvPr id="5" name="TextBox 4"/>
           <p:cNvSpPr txBox="1"/>
           <p:nvPr/>
         </p:nvSpPr>
         <p:spPr>
           <a:xfrm>
-            <a:off x="5870301" y="5961888"/>
-            <a:ext cx="5864193" cy="320040"/>
-          </a:xfrm>
-          <a:prstGeom prst="rect">
-            <a:avLst/>
-          </a:prstGeom>
-          <a:noFill/>
-        </p:spPr>
-        <p:txBody>
-          <a:bodyPr wrap="square">
-            <a:spAutoFit/>
-          </a:bodyPr>
-          <a:lstStyle/>
-          <a:p>
-            <a:pPr algn="ctr"/>
-            <a:r>
-              <a:rPr sz="1100" b="0" i="1">
-                <a:solidFill>
-                  <a:srgbClr val="666666"/>
-                </a:solidFill>
-                <a:latin typeface="Calibri"/>
-              </a:rPr>
-              <a:t>Foto: 蔡宗翰 · Pexels</a:t>
-            </a:r>
-          </a:p>
-        </p:txBody>
-      </p:sp>
-      <p:sp>
-        <p:nvSpPr>
-          <p:cNvPr id="8" name="TextBox 7"/>
-          <p:cNvSpPr txBox="1"/>
-          <p:nvPr/>
-        </p:nvSpPr>
-        <p:spPr>
-          <a:xfrm>
-            <a:off x="457200" y="1353312"/>
-            <a:ext cx="5093061" cy="5047488"/>
+            <a:off x="457200" y="1170432"/>
+            <a:ext cx="11277295" cy="5230368"/>
           </a:xfrm>
           <a:prstGeom prst="rect">
             <a:avLst/>
@@ -11491,7 +10995,7 @@
                 </a:solidFill>
                 <a:latin typeface="Calibri"/>
               </a:rPr>
-              <a:t>–   La escalabilidad es la capacidad de un sistema de sostener mas carga agregando recursos, y la primera precision importante es que no es lo mismo que…</a:t>
+              <a:t>–   La escalabilidad es la capacidad de un sistema de sostener mas carga agregando recursos, y la primera precision importante es que no es lo mismo que rendimiento.</a:t>
             </a:r>
           </a:p>
           <a:p>
@@ -11507,7 +11011,7 @@
                 </a:solidFill>
                 <a:latin typeface="Calibri"/>
               </a:rPr>
-              <a:t>–   La escalabilidad pregunta que pasa cuando la carga se multiplica: si al duplicar los recursos el sistema atiende cerca del doble de trabajo, escala…</a:t>
+              <a:t>–   La escalabilidad pregunta que pasa cuando la carga se multiplica: si al duplicar los recursos el sistema atiende cerca del doble de trabajo, escala bien.</a:t>
             </a:r>
           </a:p>
           <a:p>
@@ -11530,7 +11034,7 @@
       </p:sp>
       <p:sp>
         <p:nvSpPr>
-          <p:cNvPr id="9" name="TextBox 8"/>
+          <p:cNvPr id="6" name="TextBox 5"/>
           <p:cNvSpPr txBox="1"/>
           <p:nvPr/>
         </p:nvSpPr>
@@ -12746,118 +12250,14 @@
       </p:sp>
       <p:sp>
         <p:nvSpPr>
-          <p:cNvPr id="5" name="Rounded Rectangle 4"/>
-          <p:cNvSpPr/>
-          <p:nvPr/>
-        </p:nvSpPr>
-        <p:spPr>
-          <a:xfrm>
-            <a:off x="5797149" y="1573813"/>
-            <a:ext cx="6010497" cy="4057845"/>
-          </a:xfrm>
-          <a:prstGeom prst="roundRect">
-            <a:avLst>
-              <a:gd name="adj" fmla="val 4000"/>
-            </a:avLst>
-          </a:prstGeom>
-          <a:solidFill>
-            <a:srgbClr val="E8EEF4"/>
-          </a:solidFill>
-          <a:ln>
-            <a:noFill/>
-          </a:ln>
-        </p:spPr>
-        <p:style>
-          <a:lnRef idx="1">
-            <a:schemeClr val="accent1"/>
-          </a:lnRef>
-          <a:fillRef idx="3">
-            <a:schemeClr val="accent1"/>
-          </a:fillRef>
-          <a:effectRef idx="2">
-            <a:schemeClr val="accent1"/>
-          </a:effectRef>
-          <a:fontRef idx="minor">
-            <a:schemeClr val="lt1"/>
-          </a:fontRef>
-        </p:style>
-        <p:txBody>
-          <a:bodyPr rtlCol="0" anchor="ctr"/>
-          <a:lstStyle/>
-          <a:p>
-            <a:pPr algn="ctr"/>
-          </a:p>
-        </p:txBody>
-      </p:sp>
-      <p:pic>
-        <p:nvPicPr>
-          <p:cNvPr id="6" name="Picture 5" descr="growth-chart-scale.jpg"/>
-          <p:cNvPicPr>
-            <a:picLocks noChangeAspect="1"/>
-          </p:cNvPicPr>
-          <p:nvPr/>
-        </p:nvPicPr>
-        <p:blipFill>
-          <a:blip r:embed="rId2"/>
-          <a:stretch>
-            <a:fillRect/>
-          </a:stretch>
-        </p:blipFill>
-        <p:spPr>
-          <a:xfrm>
-            <a:off x="5870301" y="1646965"/>
-            <a:ext cx="5864193" cy="3911541"/>
-          </a:xfrm>
-          <a:prstGeom prst="rect">
-            <a:avLst/>
-          </a:prstGeom>
-        </p:spPr>
-      </p:pic>
-      <p:sp>
-        <p:nvSpPr>
-          <p:cNvPr id="7" name="TextBox 6"/>
+          <p:cNvPr id="5" name="TextBox 4"/>
           <p:cNvSpPr txBox="1"/>
           <p:nvPr/>
         </p:nvSpPr>
         <p:spPr>
           <a:xfrm>
-            <a:off x="5870301" y="5961888"/>
-            <a:ext cx="5864193" cy="320040"/>
-          </a:xfrm>
-          <a:prstGeom prst="rect">
-            <a:avLst/>
-          </a:prstGeom>
-          <a:noFill/>
-        </p:spPr>
-        <p:txBody>
-          <a:bodyPr wrap="square">
-            <a:spAutoFit/>
-          </a:bodyPr>
-          <a:lstStyle/>
-          <a:p>
-            <a:pPr algn="ctr"/>
-            <a:r>
-              <a:rPr sz="1100" b="0" i="1">
-                <a:solidFill>
-                  <a:srgbClr val="666666"/>
-                </a:solidFill>
-                <a:latin typeface="Calibri"/>
-              </a:rPr>
-              <a:t>Foto: Magda Ehlers · Pexels</a:t>
-            </a:r>
-          </a:p>
-        </p:txBody>
-      </p:sp>
-      <p:sp>
-        <p:nvSpPr>
-          <p:cNvPr id="8" name="TextBox 7"/>
-          <p:cNvSpPr txBox="1"/>
-          <p:nvPr/>
-        </p:nvSpPr>
-        <p:spPr>
-          <a:xfrm>
-            <a:off x="457200" y="1353312"/>
-            <a:ext cx="5093061" cy="5047488"/>
+            <a:off x="457200" y="1170432"/>
+            <a:ext cx="11277295" cy="5230368"/>
           </a:xfrm>
           <a:prstGeom prst="rect">
             <a:avLst/>
@@ -12951,11 +12351,27 @@
               <a:t>: la sesión vive en un token o en un almacén compartido, no en la memoria de una instancia.</a:t>
             </a:r>
           </a:p>
-        </p:txBody>
-      </p:sp>
-      <p:sp>
-        <p:nvSpPr>
-          <p:cNvPr id="9" name="TextBox 8"/>
+          <a:p>
+            <a:pPr>
+              <a:spcAft>
+                <a:spcPts val="800"/>
+              </a:spcAft>
+            </a:pPr>
+            <a:r>
+              <a:rPr sz="2000" b="0" i="0">
+                <a:solidFill>
+                  <a:srgbClr val="333333"/>
+                </a:solidFill>
+                <a:latin typeface="Calibri"/>
+              </a:rPr>
+              <a:t>–   Ejemplo de la app: la API escala de 2 a 6 réplicas; la base de datos no escala igual y suele ser el límite.</a:t>
+            </a:r>
+          </a:p>
+        </p:txBody>
+      </p:sp>
+      <p:sp>
+        <p:nvSpPr>
+          <p:cNvPr id="6" name="TextBox 5"/>
           <p:cNvSpPr txBox="1"/>
           <p:nvPr/>
         </p:nvSpPr>

--- a/Arquitectura de Sistemas Computacionales/Clases/Clase 13 - Escalabilidad automatica/Presentacion.pptx
+++ b/Arquitectura de Sistemas Computacionales/Clases/Clase 13 - Escalabilidad automatica/Presentacion.pptx
@@ -518,6 +518,30 @@
           <a:lstStyle/>
           <a:p>
             <a:r>
+              <a:t>TEXTO COMPLETO DE LA LÁMINA (se proyecta resumido):</a:t>
+            </a:r>
+          </a:p>
+          <a:p/>
+          <a:p>
+            <a:r>
+              <a:t>La escalabilidad es la capacidad de un sistema de sostener mas carga agregando recursos, y la primera precision importante es que no es lo mismo que rendimiento.</a:t>
+            </a:r>
+          </a:p>
+          <a:p/>
+          <a:p>
+            <a:r>
+              <a:t>La escalabilidad pregunta que pasa cuando la carga se multiplica: si al duplicar los recursos el sistema atiende cerca del doble de trabajo, escala bien.</a:t>
+            </a:r>
+          </a:p>
+          <a:p/>
+          <a:p>
+            <a:r>
+              <a:t>Si atiende un 20 por ciento mas, escala mal, y ninguna cantidad de dinero lo va a arreglar.</a:t>
+            </a:r>
+          </a:p>
+          <a:p/>
+          <a:p>
+            <a:r>
               <a:t>DESARROLLO (para explicarlo, no se proyecta):</a:t>
             </a:r>
           </a:p>
@@ -878,79 +902,37 @@
           <a:lstStyle/>
           <a:p>
             <a:r>
-              <a:t>DESARROLLO (para explicarlo, no se proyecta):</a:t>
+              <a:t>TEXTO COMPLETO DE LA LÁMINA (se proyecta resumido):</a:t>
             </a:r>
           </a:p>
           <a:p/>
           <a:p>
             <a:r>
-              <a:t>El autoescalado es la automatizacion del escalado horizontal y consta de cinco piezas: una metrica que se observa, un umbral que dispara la accion</a:t>
+              <a:t>Horizontal: más réplicas del API. Vertical: más CPU/RAM a un nodo.</a:t>
             </a:r>
           </a:p>
           <a:p/>
           <a:p>
             <a:r>
-              <a:t>Un periodo de evaluacion durante el cual el umbral debe sostenerse, un enfriamiento o cooldown que impide actuar de nuevo de inmediato, y un rango con minimo y maximo de instancias.</a:t>
+              <a:t>Datos: escala distinta (read replicas conceptuales / partición — solo si aplica).</a:t>
             </a:r>
           </a:p>
           <a:p/>
           <a:p>
             <a:r>
-              <a:t>Una politica completa para CloudLite se lee asi: metrica CPU promedio del grupo de instancias de la API, umbral 70 por ciento sostenido durante 5 minutos, accion agregar una instancia, cooldown de 5 minutos, minimo 2 y maximo 6.</a:t>
+              <a:t>Triggers: RPS, latencia p95, profundidad de cola, CPU.</a:t>
             </a:r>
           </a:p>
           <a:p/>
           <a:p>
             <a:r>
-              <a:t>El 70 por ciento deja holgura para el pico que llega mientras la instancia nueva arranca.</a:t>
+              <a:t>Escalar en horizontal exige una API sin estado: la sesión vive en un token o en un almacén compartido, no en la memoria de una instancia.</a:t>
             </a:r>
           </a:p>
           <a:p/>
           <a:p>
             <a:r>
-              <a:t>Los 5 minutos evitan reaccionar a un ruido de 20 segundos.</a:t>
-            </a:r>
-          </a:p>
-          <a:p/>
-          <a:p>
-            <a:r>
-              <a:t>El minimo es 2 y no 1 porque con una sola instancia no hay tolerancia a fallas ni despliegue sin caida.</a:t>
-            </a:r>
-          </a:p>
-          <a:p/>
-          <a:p>
-            <a:r>
-              <a:t>Falta una simetria que casi nadie escribe: la politica de reduccion.</a:t>
-            </a:r>
-          </a:p>
-          <a:p/>
-          <a:p>
-            <a:r>
-              <a:t>Si se escala hacia afuera al 70 por ciento no se puede escalar hacia adentro tambien al 70, porque el sistema oscilaria agregando y quitando instancias sin parar, fenomeno llamado flapping.</a:t>
-            </a:r>
-          </a:p>
-          <a:p/>
-          <a:p>
-            <a:r>
-              <a:t>La convencion es usar umbrales asimetricos, por ejemplo salir al 70 y entrar al 30, y hacer la reduccion mas lenta que la expansion, porque equivocarse agregando cuesta dinero y equivocarse quitando cuesta una caida.</a:t>
-            </a:r>
-          </a:p>
-          <a:p/>
-          <a:p>
-            <a:r>
-              <a:t>NOTAS:</a:t>
-            </a:r>
-          </a:p>
-          <a:p/>
-          <a:p>
-            <a:r>
-              <a:t>Cada numero se justifica.</a:t>
-            </a:r>
-          </a:p>
-          <a:p/>
-          <a:p>
-            <a:r>
-              <a:t>(No se proyecta) Y el maximo es la pieza mas olvidada y la mas importante: es el techo de costo decidido en la Clase 10, y sin el, un error de programacion o un ataque puede escalar la factura sin limite; hay casos documentados de facturas de miles de dolares generadas en horas por autoescalado sin tope.</a:t>
+              <a:t>Ejemplo CloudLite: la API escala de 2 a 6 réplicas; la base de datos no escala igual y suele ser el límite.</a:t>
             </a:r>
           </a:p>
         </p:txBody>
@@ -1026,43 +1008,73 @@
           <a:p/>
           <a:p>
             <a:r>
-              <a:t>Hay un limite fisico del autoescalado que desarma la idea de que es magia: la instancia nueva no aparece al instante.</a:t>
+              <a:t>El autoescalado es la automatizacion del escalado horizontal y consta de cinco piezas: una metrica que se observa, un umbral que dispara la accion</a:t>
             </a:r>
           </a:p>
           <a:p/>
           <a:p>
             <a:r>
-              <a:t>Un contenedor liviano tarda del orden de 10 a 60 segundos entre que se decide crearlo y que recibe trafico util, contando descarga de imagen</a:t>
+              <a:t>Un periodo de evaluacion durante el cual el umbral debe sostenerse, un enfriamiento o cooldown que impide actuar de nuevo de inmediato, y un rango con minimo y maximo de instancias.</a:t>
             </a:r>
           </a:p>
           <a:p/>
           <a:p>
             <a:r>
-              <a:t>Arranque del proceso, conexion a la base de datos y aprobacion del chequeo de salud; una maquina virtual completa puede tardar de 2 a 5 minutos.</a:t>
+              <a:t>Una politica completa para CloudLite se lee asi: metrica CPU promedio del grupo de instancias de la API, umbral 70 por ciento sostenido durante 5 minutos, accion agregar una instancia, cooldown de 5 minutos, minimo 2 y maximo 6.</a:t>
             </a:r>
           </a:p>
           <a:p/>
           <a:p>
             <a:r>
-              <a:t>Las respuestas correctas son tres y ninguna es "poner mas autoescalado": mantener holgura permanente por encima de la demanda habitual</a:t>
+              <a:t>El 70 por ciento deja holgura para el pico que llega mientras la instancia nueva arranca.</a:t>
             </a:r>
           </a:p>
           <a:p/>
           <a:p>
             <a:r>
-              <a:t>Poner una cola delante para absorber la rafaga y procesarla al ritmo que el sistema aguante, o degradar con gracia devolviendo una version reducida de la respuesta.</a:t>
+              <a:t>Los 5 minutos evitan reaccionar a un ruido de 20 segundos.</a:t>
             </a:r>
           </a:p>
           <a:p/>
           <a:p>
             <a:r>
-              <a:t>(No se proyecta) Sume el periodo de evaluacion y el sistema reacciona entre 5 y 10 minutos despues de que empezo el problema, asi que un pico subito del tipo que la prueba de spike de la Clase 12 simula ocurre y termina antes de que llegue la ayuda.</a:t>
+              <a:t>El minimo es 2 y no 1 porque con una sola instancia no hay tolerancia a fallas ni despliegue sin caida.</a:t>
             </a:r>
           </a:p>
           <a:p/>
           <a:p>
             <a:r>
-              <a:t>(No se proyecta) Aqui reaparece la Clase 3: una imagen slim arranca mas rapido que una de un gigabyte, asi que adelgazar la imagen no es solo ahorro de costo, es tiempo de reaccion.</a:t>
+              <a:t>Falta una simetria que casi nadie escribe: la politica de reduccion.</a:t>
+            </a:r>
+          </a:p>
+          <a:p/>
+          <a:p>
+            <a:r>
+              <a:t>Si se escala hacia afuera al 70 por ciento no se puede escalar hacia adentro tambien al 70, porque el sistema oscilaria agregando y quitando instancias sin parar, fenomeno llamado flapping.</a:t>
+            </a:r>
+          </a:p>
+          <a:p/>
+          <a:p>
+            <a:r>
+              <a:t>La convencion es usar umbrales asimetricos, por ejemplo salir al 70 y entrar al 30, y hacer la reduccion mas lenta que la expansion, porque equivocarse agregando cuesta dinero y equivocarse quitando cuesta una caida.</a:t>
+            </a:r>
+          </a:p>
+          <a:p/>
+          <a:p>
+            <a:r>
+              <a:t>NOTAS:</a:t>
+            </a:r>
+          </a:p>
+          <a:p/>
+          <a:p>
+            <a:r>
+              <a:t>Cada numero se justifica.</a:t>
+            </a:r>
+          </a:p>
+          <a:p/>
+          <a:p>
+            <a:r>
+              <a:t>(No se proyecta) Y el maximo es la pieza mas olvidada y la mas importante: es el techo de costo decidido en la Clase 10, y sin el, un error de programacion o un ataque puede escalar la factura sin limite; hay casos documentados de facturas de miles de dolares generadas en horas por autoescalado sin tope.</a:t>
             </a:r>
           </a:p>
         </p:txBody>
@@ -1138,43 +1150,43 @@
           <a:p/>
           <a:p>
             <a:r>
-              <a:t>Elegir bien la metrica es la decision mas fina del tema, y el ejemplo de CloudLite es contundente.</a:t>
+              <a:t>Hay un limite fisico del autoescalado que desarma la idea de que es magia: la instancia nueva no aparece al instante.</a:t>
             </a:r>
           </a:p>
           <a:p/>
           <a:p>
             <a:r>
-              <a:t>La CPU es la metrica por defecto y es la equivocada para la mayoria de las APIs, porque una API que sobre todo espera respuestas de la base de datos esta limitada por entrada y salida</a:t>
+              <a:t>Un contenedor liviano tarda del orden de 10 a 60 segundos entre que se decide crearlo y que recibe trafico util, contando descarga de imagen</a:t>
             </a:r>
           </a:p>
           <a:p/>
           <a:p>
             <a:r>
-              <a:t>No por procesador: cuando la latencia se dispara a 3 segundos porque el pool de conexiones esta agotado, la CPU puede seguir marcando un tranquilo 20 por ciento, el umbral del 70 nunca se cruza y el autoescalado no hace nada mientras los usuarios sufren.</a:t>
+              <a:t>Arranque del proceso, conexion a la base de datos y aprobacion del chequeo de salud; una maquina virtual completa puede tardar de 2 a 5 minutos.</a:t>
             </a:r>
           </a:p>
           <a:p/>
           <a:p>
             <a:r>
-              <a:t>Para el componente de notificaciones de CloudLite la metrica natural es el numero de mensajes esperando en la cola, no la CPU del worker: si hay 500 mensajes acumulados hay que agregar workers, y da igual cuanta CPU usen.</a:t>
+              <a:t>Las respuestas correctas son tres y ninguna es "poner mas autoescalado": mantener holgura permanente por encima de la demanda habitual</a:t>
             </a:r>
           </a:p>
           <a:p/>
           <a:p>
             <a:r>
-              <a:t>(No se proyecta) Metricas mejores para ese caso son las peticiones por segundo por instancia, que se deriva del calculo hecho en la Clase 12, la latencia p95 del propio servicio, o la longitud de la cola pendiente.</a:t>
+              <a:t>Poner una cola delante para absorber la rafaga y procesarla al ritmo que el sistema aguante, o degradar con gracia devolviendo una version reducida de la respuesta.</a:t>
             </a:r>
           </a:p>
           <a:p/>
           <a:p>
             <a:r>
-              <a:t>(No se proyecta) Regla de bolsillo: la metrica correcta es la que mide el recurso que se agota primero, es decir el cuello de botella identificado en la clase anterior.</a:t>
+              <a:t>(No se proyecta) Sume el periodo de evaluacion y el sistema reacciona entre 5 y 10 minutos despues de que empezo el problema, asi que un pico subito del tipo que la prueba de spike de la Clase 12 simula ocurre y termina antes de que llegue la ayuda.</a:t>
             </a:r>
           </a:p>
           <a:p/>
           <a:p>
             <a:r>
-              <a:t>(No se proyecta) De ahi que el entregable de hoy no se pueda hacer bien si el de la Clase 12 quedo vacio.</a:t>
+              <a:t>(No se proyecta) Aqui reaparece la Clase 3: una imagen slim arranca mas rapido que una de un gigabyte, asi que adelgazar la imagen no es solo ahorro de costo, es tiempo de reaccion.</a:t>
             </a:r>
           </a:p>
         </p:txBody>
@@ -1250,6 +1262,118 @@
           <a:p/>
           <a:p>
             <a:r>
+              <a:t>Elegir bien la metrica es la decision mas fina del tema, y el ejemplo de CloudLite es contundente.</a:t>
+            </a:r>
+          </a:p>
+          <a:p/>
+          <a:p>
+            <a:r>
+              <a:t>La CPU es la metrica por defecto y es la equivocada para la mayoria de las APIs, porque una API que sobre todo espera respuestas de la base de datos esta limitada por entrada y salida</a:t>
+            </a:r>
+          </a:p>
+          <a:p/>
+          <a:p>
+            <a:r>
+              <a:t>No por procesador: cuando la latencia se dispara a 3 segundos porque el pool de conexiones esta agotado, la CPU puede seguir marcando un tranquilo 20 por ciento, el umbral del 70 nunca se cruza y el autoescalado no hace nada mientras los usuarios sufren.</a:t>
+            </a:r>
+          </a:p>
+          <a:p/>
+          <a:p>
+            <a:r>
+              <a:t>Para el componente de notificaciones de CloudLite la metrica natural es el numero de mensajes esperando en la cola, no la CPU del worker: si hay 500 mensajes acumulados hay que agregar workers, y da igual cuanta CPU usen.</a:t>
+            </a:r>
+          </a:p>
+          <a:p/>
+          <a:p>
+            <a:r>
+              <a:t>(No se proyecta) Metricas mejores para ese caso son las peticiones por segundo por instancia, que se deriva del calculo hecho en la Clase 12, la latencia p95 del propio servicio, o la longitud de la cola pendiente.</a:t>
+            </a:r>
+          </a:p>
+          <a:p/>
+          <a:p>
+            <a:r>
+              <a:t>(No se proyecta) Regla de bolsillo: la metrica correcta es la que mide el recurso que se agota primero, es decir el cuello de botella identificado en la clase anterior.</a:t>
+            </a:r>
+          </a:p>
+          <a:p/>
+          <a:p>
+            <a:r>
+              <a:t>(No se proyecta) De ahi que el entregable de hoy no se pueda hacer bien si el de la Clase 12 quedo vacio.</a:t>
+            </a:r>
+          </a:p>
+        </p:txBody>
+      </p:sp>
+      <p:sp>
+        <p:nvSpPr>
+          <p:cNvPr id="4" name="Slide Number Placeholder 3"/>
+          <p:cNvSpPr>
+            <a:spLocks noGrp="1"/>
+          </p:cNvSpPr>
+          <p:nvPr>
+            <p:ph type="sldNum" idx="5" sz="quarter"/>
+          </p:nvPr>
+        </p:nvSpPr>
+        <p:spPr/>
+      </p:sp>
+    </p:spTree>
+  </p:cSld>
+  <p:clrMapOvr>
+    <a:masterClrMapping/>
+  </p:clrMapOvr>
+</p:notes>
+</file>
+
+<file path=ppt/notesSlides/notesSlide8.xml><?xml version="1.0" encoding="utf-8"?>
+<p:notes xmlns:a="http://schemas.openxmlformats.org/drawingml/2006/main" xmlns:p="http://schemas.openxmlformats.org/presentationml/2006/main" xmlns:r="http://schemas.openxmlformats.org/officeDocument/2006/relationships">
+  <p:cSld>
+    <p:spTree>
+      <p:nvGrpSpPr>
+        <p:cNvPr id="1" name=""/>
+        <p:cNvGrpSpPr/>
+        <p:nvPr/>
+      </p:nvGrpSpPr>
+      <p:grpSpPr>
+        <a:xfrm>
+          <a:off x="0" y="0"/>
+          <a:ext cx="0" cy="0"/>
+          <a:chOff x="0" y="0"/>
+          <a:chExt cx="0" cy="0"/>
+        </a:xfrm>
+      </p:grpSpPr>
+      <p:sp>
+        <p:nvSpPr>
+          <p:cNvPr id="2" name="Slide Image Placeholder 1"/>
+          <p:cNvSpPr>
+            <a:spLocks noGrp="1"/>
+          </p:cNvSpPr>
+          <p:nvPr>
+            <p:ph type="sldImg" idx="2"/>
+          </p:nvPr>
+        </p:nvSpPr>
+        <p:spPr/>
+      </p:sp>
+      <p:sp>
+        <p:nvSpPr>
+          <p:cNvPr id="3" name="Notes Placeholder 2"/>
+          <p:cNvSpPr>
+            <a:spLocks noGrp="1"/>
+          </p:cNvSpPr>
+          <p:nvPr>
+            <p:ph type="body" idx="3" sz="quarter"/>
+          </p:nvPr>
+        </p:nvSpPr>
+        <p:spPr/>
+        <p:txBody>
+          <a:bodyPr/>
+          <a:lstStyle/>
+          <a:p>
+            <a:r>
+              <a:t>DESARROLLO (para explicarlo, no se proyecta):</a:t>
+            </a:r>
+          </a:p>
+          <a:p/>
+          <a:p>
+            <a:r>
               <a:t>La capa de datos es el caso central: agregar instancias de API es casi gratis conceptualmente, pero una base de datos relacional que debe mantener consistencia tiene un unico escritor, y ese escritor no se multiplica sin cambiar el modelo.</a:t>
             </a:r>
           </a:p>
@@ -1353,6 +1477,106 @@
           <a:p>
             <a:r>
               <a:t>(No se proyecta) Tambien conviene enumerar otras piezas que no escalan por replicacion: los limites de terceros, como un proveedor de correo que acepta 100 envios por minuto y rechaza el exceso, de modo que diez workers no envian diez veces mas rapido sino que generan diez veces mas errores; los sistemas de archivos compartidos; y las tareas programadas de tipo singleton, que si corren en seis instancias hacen el mismo trabajo seis veces y pueden duplicar cobros o correos.</a:t>
+            </a:r>
+          </a:p>
+        </p:txBody>
+      </p:sp>
+      <p:sp>
+        <p:nvSpPr>
+          <p:cNvPr id="4" name="Slide Number Placeholder 3"/>
+          <p:cNvSpPr>
+            <a:spLocks noGrp="1"/>
+          </p:cNvSpPr>
+          <p:nvPr>
+            <p:ph type="sldNum" idx="5" sz="quarter"/>
+          </p:nvPr>
+        </p:nvSpPr>
+        <p:spPr/>
+      </p:sp>
+    </p:spTree>
+  </p:cSld>
+  <p:clrMapOvr>
+    <a:masterClrMapping/>
+  </p:clrMapOvr>
+</p:notes>
+</file>
+
+<file path=ppt/notesSlides/notesSlide9.xml><?xml version="1.0" encoding="utf-8"?>
+<p:notes xmlns:a="http://schemas.openxmlformats.org/drawingml/2006/main" xmlns:p="http://schemas.openxmlformats.org/presentationml/2006/main" xmlns:r="http://schemas.openxmlformats.org/officeDocument/2006/relationships">
+  <p:cSld>
+    <p:spTree>
+      <p:nvGrpSpPr>
+        <p:cNvPr id="1" name=""/>
+        <p:cNvGrpSpPr/>
+        <p:nvPr/>
+      </p:nvGrpSpPr>
+      <p:grpSpPr>
+        <a:xfrm>
+          <a:off x="0" y="0"/>
+          <a:ext cx="0" cy="0"/>
+          <a:chOff x="0" y="0"/>
+          <a:chExt cx="0" cy="0"/>
+        </a:xfrm>
+      </p:grpSpPr>
+      <p:sp>
+        <p:nvSpPr>
+          <p:cNvPr id="2" name="Slide Image Placeholder 1"/>
+          <p:cNvSpPr>
+            <a:spLocks noGrp="1"/>
+          </p:cNvSpPr>
+          <p:nvPr>
+            <p:ph type="sldImg" idx="2"/>
+          </p:nvPr>
+        </p:nvSpPr>
+        <p:spPr/>
+      </p:sp>
+      <p:sp>
+        <p:nvSpPr>
+          <p:cNvPr id="3" name="Notes Placeholder 2"/>
+          <p:cNvSpPr>
+            <a:spLocks noGrp="1"/>
+          </p:cNvSpPr>
+          <p:nvPr>
+            <p:ph type="body" idx="3" sz="quarter"/>
+          </p:nvPr>
+        </p:nvSpPr>
+        <p:spPr/>
+        <p:txBody>
+          <a:bodyPr/>
+          <a:lstStyle/>
+          <a:p>
+            <a:r>
+              <a:t>TEXTO COMPLETO DE LA LÁMINA (se proyecta resumido):</a:t>
+            </a:r>
+          </a:p>
+          <a:p/>
+          <a:p>
+            <a:r>
+              <a:t>max replicas · min replicas · cooldown — se definen aunque sean hipotéticos.</a:t>
+            </a:r>
+          </a:p>
+          <a:p/>
+          <a:p>
+            <a:r>
+              <a:t>Escalar mal = costo (enlace con Clase 10).</a:t>
+            </a:r>
+          </a:p>
+          <a:p/>
+          <a:p>
+            <a:r>
+              <a:t>min = capacidad base siempre encendida, y su costo fijo · max = techo de gasto y de conexiones a la base.</a:t>
+            </a:r>
+          </a:p>
+          <a:p/>
+          <a:p>
+            <a:r>
+              <a:t>Cooldown = espera tras escalar (por ejemplo 5 minutos) para no subir y bajar en ciclos.</a:t>
+            </a:r>
+          </a:p>
+          <a:p/>
+          <a:p>
+            <a:r>
+              <a:t>Error común: max sin límite; un pico o un ataque se convierte en factura.</a:t>
             </a:r>
           </a:p>
         </p:txBody>
@@ -8895,14 +9119,83 @@
       </p:sp>
       <p:sp>
         <p:nvSpPr>
-          <p:cNvPr id="5" name="TextBox 4"/>
+          <p:cNvPr id="5" name="Rounded Rectangle 4"/>
+          <p:cNvSpPr/>
+          <p:nvPr/>
+        </p:nvSpPr>
+        <p:spPr>
+          <a:xfrm>
+            <a:off x="5797149" y="1343926"/>
+            <a:ext cx="6010497" cy="4837658"/>
+          </a:xfrm>
+          <a:prstGeom prst="roundRect">
+            <a:avLst>
+              <a:gd name="adj" fmla="val 4000"/>
+            </a:avLst>
+          </a:prstGeom>
+          <a:solidFill>
+            <a:srgbClr val="E8EEF4"/>
+          </a:solidFill>
+          <a:ln>
+            <a:noFill/>
+          </a:ln>
+        </p:spPr>
+        <p:style>
+          <a:lnRef idx="1">
+            <a:schemeClr val="accent1"/>
+          </a:lnRef>
+          <a:fillRef idx="3">
+            <a:schemeClr val="accent1"/>
+          </a:fillRef>
+          <a:effectRef idx="2">
+            <a:schemeClr val="accent1"/>
+          </a:effectRef>
+          <a:fontRef idx="minor">
+            <a:schemeClr val="lt1"/>
+          </a:fontRef>
+        </p:style>
+        <p:txBody>
+          <a:bodyPr rtlCol="0" anchor="ctr"/>
+          <a:lstStyle/>
+          <a:p>
+            <a:pPr algn="ctr"/>
+          </a:p>
+        </p:txBody>
+      </p:sp>
+      <p:pic>
+        <p:nvPicPr>
+          <p:cNvPr id="6" name="Picture 5" descr="ilus-limites-paso1.png"/>
+          <p:cNvPicPr>
+            <a:picLocks noChangeAspect="1"/>
+          </p:cNvPicPr>
+          <p:nvPr/>
+        </p:nvPicPr>
+        <p:blipFill>
+          <a:blip r:embed="rId2"/>
+          <a:stretch>
+            <a:fillRect/>
+          </a:stretch>
+        </p:blipFill>
+        <p:spPr>
+          <a:xfrm>
+            <a:off x="5870301" y="1417078"/>
+            <a:ext cx="5864193" cy="4691354"/>
+          </a:xfrm>
+          <a:prstGeom prst="rect">
+            <a:avLst/>
+          </a:prstGeom>
+        </p:spPr>
+      </p:pic>
+      <p:sp>
+        <p:nvSpPr>
+          <p:cNvPr id="7" name="TextBox 6"/>
           <p:cNvSpPr txBox="1"/>
           <p:nvPr/>
         </p:nvSpPr>
         <p:spPr>
           <a:xfrm>
-            <a:off x="457200" y="1170432"/>
-            <a:ext cx="11277295" cy="5230368"/>
+            <a:off x="457200" y="1353312"/>
+            <a:ext cx="5093061" cy="5047488"/>
           </a:xfrm>
           <a:prstGeom prst="rect">
             <a:avLst/>
@@ -9032,27 +9325,11 @@
               <a:t> = espera tras escalar (por ejemplo 5 minutos) para no subir y bajar en ciclos.</a:t>
             </a:r>
           </a:p>
-          <a:p>
-            <a:pPr>
-              <a:spcAft>
-                <a:spcPts val="800"/>
-              </a:spcAft>
-            </a:pPr>
-            <a:r>
-              <a:rPr sz="2000" b="0" i="0">
-                <a:solidFill>
-                  <a:srgbClr val="333333"/>
-                </a:solidFill>
-                <a:latin typeface="Calibri"/>
-              </a:rPr>
-              <a:t>–   Error común: max sin límite; un pico o un ataque se convierte en factura.</a:t>
-            </a:r>
-          </a:p>
-        </p:txBody>
-      </p:sp>
-      <p:sp>
-        <p:nvSpPr>
-          <p:cNvPr id="6" name="TextBox 5"/>
+        </p:txBody>
+      </p:sp>
+      <p:sp>
+        <p:nvSpPr>
+          <p:cNvPr id="8" name="TextBox 7"/>
           <p:cNvSpPr txBox="1"/>
           <p:nvPr/>
         </p:nvSpPr>
@@ -10963,14 +11240,83 @@
       </p:sp>
       <p:sp>
         <p:nvSpPr>
-          <p:cNvPr id="5" name="TextBox 4"/>
+          <p:cNvPr id="5" name="Rounded Rectangle 4"/>
+          <p:cNvSpPr/>
+          <p:nvPr/>
+        </p:nvSpPr>
+        <p:spPr>
+          <a:xfrm>
+            <a:off x="5797149" y="1343926"/>
+            <a:ext cx="6010497" cy="4837658"/>
+          </a:xfrm>
+          <a:prstGeom prst="roundRect">
+            <a:avLst>
+              <a:gd name="adj" fmla="val 4000"/>
+            </a:avLst>
+          </a:prstGeom>
+          <a:solidFill>
+            <a:srgbClr val="E8EEF4"/>
+          </a:solidFill>
+          <a:ln>
+            <a:noFill/>
+          </a:ln>
+        </p:spPr>
+        <p:style>
+          <a:lnRef idx="1">
+            <a:schemeClr val="accent1"/>
+          </a:lnRef>
+          <a:fillRef idx="3">
+            <a:schemeClr val="accent1"/>
+          </a:fillRef>
+          <a:effectRef idx="2">
+            <a:schemeClr val="accent1"/>
+          </a:effectRef>
+          <a:fontRef idx="minor">
+            <a:schemeClr val="lt1"/>
+          </a:fontRef>
+        </p:style>
+        <p:txBody>
+          <a:bodyPr rtlCol="0" anchor="ctr"/>
+          <a:lstStyle/>
+          <a:p>
+            <a:pPr algn="ctr"/>
+          </a:p>
+        </p:txBody>
+      </p:sp>
+      <p:pic>
+        <p:nvPicPr>
+          <p:cNvPr id="6" name="Picture 5" descr="ilus-escala-vs-rendimiento-paso1.png"/>
+          <p:cNvPicPr>
+            <a:picLocks noChangeAspect="1"/>
+          </p:cNvPicPr>
+          <p:nvPr/>
+        </p:nvPicPr>
+        <p:blipFill>
+          <a:blip r:embed="rId2"/>
+          <a:stretch>
+            <a:fillRect/>
+          </a:stretch>
+        </p:blipFill>
+        <p:spPr>
+          <a:xfrm>
+            <a:off x="5870301" y="1417078"/>
+            <a:ext cx="5864193" cy="4691354"/>
+          </a:xfrm>
+          <a:prstGeom prst="rect">
+            <a:avLst/>
+          </a:prstGeom>
+        </p:spPr>
+      </p:pic>
+      <p:sp>
+        <p:nvSpPr>
+          <p:cNvPr id="7" name="TextBox 6"/>
           <p:cNvSpPr txBox="1"/>
           <p:nvPr/>
         </p:nvSpPr>
         <p:spPr>
           <a:xfrm>
-            <a:off x="457200" y="1170432"/>
-            <a:ext cx="11277295" cy="5230368"/>
+            <a:off x="457200" y="1353312"/>
+            <a:ext cx="5093061" cy="5047488"/>
           </a:xfrm>
           <a:prstGeom prst="rect">
             <a:avLst/>
@@ -10995,7 +11341,7 @@
                 </a:solidFill>
                 <a:latin typeface="Calibri"/>
               </a:rPr>
-              <a:t>–   La escalabilidad es la capacidad de un sistema de sostener mas carga agregando recursos, y la primera precision importante es que no es lo mismo que rendimiento.</a:t>
+              <a:t>–   La escalabilidad es la capacidad de un sistema de sostener mas carga agregando recursos, y la primera precision importante es que no es lo mismo que…</a:t>
             </a:r>
           </a:p>
           <a:p>
@@ -11011,7 +11357,7 @@
                 </a:solidFill>
                 <a:latin typeface="Calibri"/>
               </a:rPr>
-              <a:t>–   La escalabilidad pregunta que pasa cuando la carga se multiplica: si al duplicar los recursos el sistema atiende cerca del doble de trabajo, escala bien.</a:t>
+              <a:t>–   La escalabilidad pregunta que pasa cuando la carga se multiplica: si al duplicar los recursos el sistema atiende cerca del doble de trabajo, escala…</a:t>
             </a:r>
           </a:p>
           <a:p>
@@ -11034,7 +11380,7 @@
       </p:sp>
       <p:sp>
         <p:nvSpPr>
-          <p:cNvPr id="6" name="TextBox 5"/>
+          <p:cNvPr id="8" name="TextBox 7"/>
           <p:cNvSpPr txBox="1"/>
           <p:nvPr/>
         </p:nvSpPr>
@@ -12250,14 +12596,83 @@
       </p:sp>
       <p:sp>
         <p:nvSpPr>
-          <p:cNvPr id="5" name="TextBox 4"/>
+          <p:cNvPr id="5" name="Rounded Rectangle 4"/>
+          <p:cNvSpPr/>
+          <p:nvPr/>
+        </p:nvSpPr>
+        <p:spPr>
+          <a:xfrm>
+            <a:off x="5797149" y="1343926"/>
+            <a:ext cx="6010497" cy="4837658"/>
+          </a:xfrm>
+          <a:prstGeom prst="roundRect">
+            <a:avLst>
+              <a:gd name="adj" fmla="val 4000"/>
+            </a:avLst>
+          </a:prstGeom>
+          <a:solidFill>
+            <a:srgbClr val="E8EEF4"/>
+          </a:solidFill>
+          <a:ln>
+            <a:noFill/>
+          </a:ln>
+        </p:spPr>
+        <p:style>
+          <a:lnRef idx="1">
+            <a:schemeClr val="accent1"/>
+          </a:lnRef>
+          <a:fillRef idx="3">
+            <a:schemeClr val="accent1"/>
+          </a:fillRef>
+          <a:effectRef idx="2">
+            <a:schemeClr val="accent1"/>
+          </a:effectRef>
+          <a:fontRef idx="minor">
+            <a:schemeClr val="lt1"/>
+          </a:fontRef>
+        </p:style>
+        <p:txBody>
+          <a:bodyPr rtlCol="0" anchor="ctr"/>
+          <a:lstStyle/>
+          <a:p>
+            <a:pPr algn="ctr"/>
+          </a:p>
+        </p:txBody>
+      </p:sp>
+      <p:pic>
+        <p:nvPicPr>
+          <p:cNvPr id="6" name="Picture 5" descr="ilus-escala-app-paso1.png"/>
+          <p:cNvPicPr>
+            <a:picLocks noChangeAspect="1"/>
+          </p:cNvPicPr>
+          <p:nvPr/>
+        </p:nvPicPr>
+        <p:blipFill>
+          <a:blip r:embed="rId2"/>
+          <a:stretch>
+            <a:fillRect/>
+          </a:stretch>
+        </p:blipFill>
+        <p:spPr>
+          <a:xfrm>
+            <a:off x="5870301" y="1417078"/>
+            <a:ext cx="5864193" cy="4691354"/>
+          </a:xfrm>
+          <a:prstGeom prst="rect">
+            <a:avLst/>
+          </a:prstGeom>
+        </p:spPr>
+      </p:pic>
+      <p:sp>
+        <p:nvSpPr>
+          <p:cNvPr id="7" name="TextBox 6"/>
           <p:cNvSpPr txBox="1"/>
           <p:nvPr/>
         </p:nvSpPr>
         <p:spPr>
           <a:xfrm>
-            <a:off x="457200" y="1170432"/>
-            <a:ext cx="11277295" cy="5230368"/>
+            <a:off x="457200" y="1353312"/>
+            <a:ext cx="5093061" cy="5047488"/>
           </a:xfrm>
           <a:prstGeom prst="rect">
             <a:avLst/>
@@ -12351,27 +12766,11 @@
               <a:t>: la sesión vive en un token o en un almacén compartido, no en la memoria de una instancia.</a:t>
             </a:r>
           </a:p>
-          <a:p>
-            <a:pPr>
-              <a:spcAft>
-                <a:spcPts val="800"/>
-              </a:spcAft>
-            </a:pPr>
-            <a:r>
-              <a:rPr sz="2000" b="0" i="0">
-                <a:solidFill>
-                  <a:srgbClr val="333333"/>
-                </a:solidFill>
-                <a:latin typeface="Calibri"/>
-              </a:rPr>
-              <a:t>–   Ejemplo de la app: la API escala de 2 a 6 réplicas; la base de datos no escala igual y suele ser el límite.</a:t>
-            </a:r>
-          </a:p>
-        </p:txBody>
-      </p:sp>
-      <p:sp>
-        <p:nvSpPr>
-          <p:cNvPr id="6" name="TextBox 5"/>
+        </p:txBody>
+      </p:sp>
+      <p:sp>
+        <p:nvSpPr>
+          <p:cNvPr id="8" name="TextBox 7"/>
           <p:cNvSpPr txBox="1"/>
           <p:nvPr/>
         </p:nvSpPr>

--- a/Arquitectura de Sistemas Computacionales/Clases/Clase 13 - Escalabilidad automatica/Presentacion.pptx
+++ b/Arquitectura de Sistemas Computacionales/Clases/Clase 13 - Escalabilidad automatica/Presentacion.pptx
@@ -5065,7 +5065,7 @@
         <p:spPr>
           <a:xfrm>
             <a:off x="457200" y="1261872"/>
-            <a:ext cx="11277295" cy="4917043"/>
+            <a:ext cx="11277295" cy="4731007"/>
           </a:xfrm>
           <a:prstGeom prst="roundRect">
             <a:avLst>
@@ -5315,7 +5315,7 @@
         <p:spPr>
           <a:xfrm>
             <a:off x="685800" y="1719072"/>
-            <a:ext cx="502920" cy="4322683"/>
+            <a:ext cx="502920" cy="4136647"/>
           </a:xfrm>
           <a:prstGeom prst="rect">
             <a:avLst/>
@@ -5330,11 +5330,11 @@
           <a:p>
             <a:pPr algn="r">
               <a:spcAft>
-                <a:spcPts val="428"/>
+                <a:spcPts val="407"/>
               </a:spcAft>
             </a:pPr>
             <a:r>
-              <a:rPr sz="2000" i="0" b="0">
+              <a:rPr sz="1900" i="0" b="0">
                 <a:solidFill>
                   <a:srgbClr val="858585"/>
                 </a:solidFill>
@@ -5346,11 +5346,11 @@
           <a:p>
             <a:pPr algn="r">
               <a:spcAft>
-                <a:spcPts val="428"/>
+                <a:spcPts val="407"/>
               </a:spcAft>
             </a:pPr>
             <a:r>
-              <a:rPr sz="2000" i="0" b="0">
+              <a:rPr sz="1900" i="0" b="0">
                 <a:solidFill>
                   <a:srgbClr val="858585"/>
                 </a:solidFill>
@@ -5362,11 +5362,11 @@
           <a:p>
             <a:pPr algn="r">
               <a:spcAft>
-                <a:spcPts val="428"/>
+                <a:spcPts val="407"/>
               </a:spcAft>
             </a:pPr>
             <a:r>
-              <a:rPr sz="2000" i="0" b="0">
+              <a:rPr sz="1900" i="0" b="0">
                 <a:solidFill>
                   <a:srgbClr val="858585"/>
                 </a:solidFill>
@@ -5378,11 +5378,11 @@
           <a:p>
             <a:pPr algn="r">
               <a:spcAft>
-                <a:spcPts val="428"/>
+                <a:spcPts val="407"/>
               </a:spcAft>
             </a:pPr>
             <a:r>
-              <a:rPr sz="2000" i="0" b="0">
+              <a:rPr sz="1900" i="0" b="0">
                 <a:solidFill>
                   <a:srgbClr val="858585"/>
                 </a:solidFill>
@@ -5394,11 +5394,11 @@
           <a:p>
             <a:pPr algn="r">
               <a:spcAft>
-                <a:spcPts val="428"/>
+                <a:spcPts val="407"/>
               </a:spcAft>
             </a:pPr>
             <a:r>
-              <a:rPr sz="2000" i="0" b="0">
+              <a:rPr sz="1900" i="0" b="0">
                 <a:solidFill>
                   <a:srgbClr val="858585"/>
                 </a:solidFill>
@@ -5410,11 +5410,11 @@
           <a:p>
             <a:pPr algn="r">
               <a:spcAft>
-                <a:spcPts val="428"/>
+                <a:spcPts val="407"/>
               </a:spcAft>
             </a:pPr>
             <a:r>
-              <a:rPr sz="2000" i="0" b="0">
+              <a:rPr sz="1900" i="0" b="0">
                 <a:solidFill>
                   <a:srgbClr val="858585"/>
                 </a:solidFill>
@@ -5426,11 +5426,11 @@
           <a:p>
             <a:pPr algn="r">
               <a:spcAft>
-                <a:spcPts val="428"/>
+                <a:spcPts val="407"/>
               </a:spcAft>
             </a:pPr>
             <a:r>
-              <a:rPr sz="2000" i="0" b="0">
+              <a:rPr sz="1900" i="0" b="0">
                 <a:solidFill>
                   <a:srgbClr val="858585"/>
                 </a:solidFill>
@@ -5442,11 +5442,11 @@
           <a:p>
             <a:pPr algn="r">
               <a:spcAft>
-                <a:spcPts val="428"/>
+                <a:spcPts val="407"/>
               </a:spcAft>
             </a:pPr>
             <a:r>
-              <a:rPr sz="2000" i="0" b="0">
+              <a:rPr sz="1900" i="0" b="0">
                 <a:solidFill>
                   <a:srgbClr val="858585"/>
                 </a:solidFill>
@@ -5458,11 +5458,11 @@
           <a:p>
             <a:pPr algn="r">
               <a:spcAft>
-                <a:spcPts val="428"/>
+                <a:spcPts val="407"/>
               </a:spcAft>
             </a:pPr>
             <a:r>
-              <a:rPr sz="2000" i="0" b="0">
+              <a:rPr sz="1900" i="0" b="0">
                 <a:solidFill>
                   <a:srgbClr val="858585"/>
                 </a:solidFill>
@@ -5474,11 +5474,11 @@
           <a:p>
             <a:pPr algn="r">
               <a:spcAft>
-                <a:spcPts val="428"/>
+                <a:spcPts val="407"/>
               </a:spcAft>
             </a:pPr>
             <a:r>
-              <a:rPr sz="2000" i="0" b="0">
+              <a:rPr sz="1900" i="0" b="0">
                 <a:solidFill>
                   <a:srgbClr val="858585"/>
                 </a:solidFill>
@@ -5490,11 +5490,11 @@
           <a:p>
             <a:pPr algn="r">
               <a:spcAft>
-                <a:spcPts val="428"/>
+                <a:spcPts val="407"/>
               </a:spcAft>
             </a:pPr>
             <a:r>
-              <a:rPr sz="2000" i="0" b="0">
+              <a:rPr sz="1900" i="0" b="0">
                 <a:solidFill>
                   <a:srgbClr val="858585"/>
                 </a:solidFill>
@@ -5506,11 +5506,11 @@
           <a:p>
             <a:pPr algn="r">
               <a:spcAft>
-                <a:spcPts val="428"/>
+                <a:spcPts val="407"/>
               </a:spcAft>
             </a:pPr>
             <a:r>
-              <a:rPr sz="2000" i="0" b="0">
+              <a:rPr sz="1900" i="0" b="0">
                 <a:solidFill>
                   <a:srgbClr val="858585"/>
                 </a:solidFill>
@@ -5530,7 +5530,7 @@
         <p:spPr>
           <a:xfrm>
             <a:off x="1188720" y="1719072"/>
-            <a:ext cx="10271455" cy="4322683"/>
+            <a:ext cx="10271455" cy="4136647"/>
           </a:xfrm>
           <a:prstGeom prst="rect">
             <a:avLst/>
@@ -5545,11 +5545,11 @@
           <a:p>
             <a:pPr>
               <a:spcAft>
-                <a:spcPts val="428"/>
+                <a:spcPts val="407"/>
               </a:spcAft>
             </a:pPr>
             <a:r>
-              <a:rPr sz="2000" i="1" b="0">
+              <a:rPr sz="1900" i="1" b="0">
                 <a:solidFill>
                   <a:srgbClr val="6A9955"/>
                 </a:solidFill>
@@ -5561,11 +5561,11 @@
           <a:p>
             <a:pPr>
               <a:spcAft>
-                <a:spcPts val="428"/>
+                <a:spcPts val="407"/>
               </a:spcAft>
             </a:pPr>
             <a:r>
-              <a:rPr sz="2000" i="0" b="0">
+              <a:rPr sz="1900" i="0" b="0">
                 <a:solidFill>
                   <a:srgbClr val="D4D4D4"/>
                 </a:solidFill>
@@ -5574,7 +5574,7 @@
               <a:t>autoescalado</a:t>
             </a:r>
             <a:r>
-              <a:rPr sz="2000" i="0" b="0">
+              <a:rPr sz="1900" i="0" b="0">
                 <a:solidFill>
                   <a:srgbClr val="D4D4D4"/>
                 </a:solidFill>
@@ -5586,11 +5586,11 @@
           <a:p>
             <a:pPr>
               <a:spcAft>
-                <a:spcPts val="428"/>
+                <a:spcPts val="407"/>
               </a:spcAft>
             </a:pPr>
             <a:r>
-              <a:rPr sz="2000" i="0" b="0">
+              <a:rPr sz="1900" i="0" b="0">
                 <a:solidFill>
                   <a:srgbClr val="D4D4D4"/>
                 </a:solidFill>
@@ -5599,7 +5599,7 @@
               <a:t>  </a:t>
             </a:r>
             <a:r>
-              <a:rPr sz="2000" i="0" b="0">
+              <a:rPr sz="1900" i="0" b="0">
                 <a:solidFill>
                   <a:srgbClr val="D4D4D4"/>
                 </a:solidFill>
@@ -5608,7 +5608,7 @@
               <a:t>servicio</a:t>
             </a:r>
             <a:r>
-              <a:rPr sz="2000" i="0" b="0">
+              <a:rPr sz="1900" i="0" b="0">
                 <a:solidFill>
                   <a:srgbClr val="D4D4D4"/>
                 </a:solidFill>
@@ -5617,7 +5617,7 @@
               <a:t>: </a:t>
             </a:r>
             <a:r>
-              <a:rPr sz="2000" i="0" b="0">
+              <a:rPr sz="1900" i="0" b="0">
                 <a:solidFill>
                   <a:srgbClr val="D4D4D4"/>
                 </a:solidFill>
@@ -5626,7 +5626,7 @@
               <a:t>turnos</a:t>
             </a:r>
             <a:r>
-              <a:rPr sz="2000" i="0" b="0">
+              <a:rPr sz="1900" i="0" b="0">
                 <a:solidFill>
                   <a:srgbClr val="D4D4D4"/>
                 </a:solidFill>
@@ -5635,7 +5635,7 @@
               <a:t>-</a:t>
             </a:r>
             <a:r>
-              <a:rPr sz="2000" i="0" b="0">
+              <a:rPr sz="1900" i="0" b="0">
                 <a:solidFill>
                   <a:srgbClr val="D4D4D4"/>
                 </a:solidFill>
@@ -5647,11 +5647,11 @@
           <a:p>
             <a:pPr>
               <a:spcAft>
-                <a:spcPts val="428"/>
+                <a:spcPts val="407"/>
               </a:spcAft>
             </a:pPr>
             <a:r>
-              <a:rPr sz="2000" i="0" b="0">
+              <a:rPr sz="1900" i="0" b="0">
                 <a:solidFill>
                   <a:srgbClr val="D4D4D4"/>
                 </a:solidFill>
@@ -5660,7 +5660,7 @@
               <a:t>  </a:t>
             </a:r>
             <a:r>
-              <a:rPr sz="2000" i="0" b="0">
+              <a:rPr sz="1900" i="0" b="0">
                 <a:solidFill>
                   <a:srgbClr val="D4D4D4"/>
                 </a:solidFill>
@@ -5669,7 +5669,7 @@
               <a:t>minimo</a:t>
             </a:r>
             <a:r>
-              <a:rPr sz="2000" i="0" b="0">
+              <a:rPr sz="1900" i="0" b="0">
                 <a:solidFill>
                   <a:srgbClr val="D4D4D4"/>
                 </a:solidFill>
@@ -5678,7 +5678,7 @@
               <a:t>: </a:t>
             </a:r>
             <a:r>
-              <a:rPr sz="2000" i="0" b="0">
+              <a:rPr sz="1900" i="0" b="0">
                 <a:solidFill>
                   <a:srgbClr val="B5CEA8"/>
                 </a:solidFill>
@@ -5687,7 +5687,7 @@
               <a:t>2</a:t>
             </a:r>
             <a:r>
-              <a:rPr sz="2000" i="0" b="0">
+              <a:rPr sz="1900" i="0" b="0">
                 <a:solidFill>
                   <a:srgbClr val="D4D4D4"/>
                 </a:solidFill>
@@ -5696,7 +5696,7 @@
               <a:t>                       </a:t>
             </a:r>
             <a:r>
-              <a:rPr sz="2000" i="1" b="0">
+              <a:rPr sz="1900" i="1" b="0">
                 <a:solidFill>
                   <a:srgbClr val="6A9955"/>
                 </a:solidFill>
@@ -5708,11 +5708,11 @@
           <a:p>
             <a:pPr>
               <a:spcAft>
-                <a:spcPts val="428"/>
+                <a:spcPts val="407"/>
               </a:spcAft>
             </a:pPr>
             <a:r>
-              <a:rPr sz="2000" i="0" b="0">
+              <a:rPr sz="1900" i="0" b="0">
                 <a:solidFill>
                   <a:srgbClr val="D4D4D4"/>
                 </a:solidFill>
@@ -5721,7 +5721,7 @@
               <a:t>  </a:t>
             </a:r>
             <a:r>
-              <a:rPr sz="2000" i="0" b="0">
+              <a:rPr sz="1900" i="0" b="0">
                 <a:solidFill>
                   <a:srgbClr val="D4D4D4"/>
                 </a:solidFill>
@@ -5730,7 +5730,7 @@
               <a:t>maximo</a:t>
             </a:r>
             <a:r>
-              <a:rPr sz="2000" i="0" b="0">
+              <a:rPr sz="1900" i="0" b="0">
                 <a:solidFill>
                   <a:srgbClr val="D4D4D4"/>
                 </a:solidFill>
@@ -5739,7 +5739,7 @@
               <a:t>: </a:t>
             </a:r>
             <a:r>
-              <a:rPr sz="2000" i="0" b="0">
+              <a:rPr sz="1900" i="0" b="0">
                 <a:solidFill>
                   <a:srgbClr val="B5CEA8"/>
                 </a:solidFill>
@@ -5748,7 +5748,7 @@
               <a:t>6</a:t>
             </a:r>
             <a:r>
-              <a:rPr sz="2000" i="0" b="0">
+              <a:rPr sz="1900" i="0" b="0">
                 <a:solidFill>
                   <a:srgbClr val="D4D4D4"/>
                 </a:solidFill>
@@ -5757,7 +5757,7 @@
               <a:t>                       </a:t>
             </a:r>
             <a:r>
-              <a:rPr sz="2000" i="1" b="0">
+              <a:rPr sz="1900" i="1" b="0">
                 <a:solidFill>
                   <a:srgbClr val="6A9955"/>
                 </a:solidFill>
@@ -5769,11 +5769,11 @@
           <a:p>
             <a:pPr>
               <a:spcAft>
-                <a:spcPts val="428"/>
+                <a:spcPts val="407"/>
               </a:spcAft>
             </a:pPr>
             <a:r>
-              <a:rPr sz="2000" i="0" b="0">
+              <a:rPr sz="1900" i="0" b="0">
                 <a:solidFill>
                   <a:srgbClr val="D4D4D4"/>
                 </a:solidFill>
@@ -5782,7 +5782,7 @@
               <a:t>  </a:t>
             </a:r>
             <a:r>
-              <a:rPr sz="2000" i="0" b="0">
+              <a:rPr sz="1900" i="0" b="0">
                 <a:solidFill>
                   <a:srgbClr val="D4D4D4"/>
                 </a:solidFill>
@@ -5791,7 +5791,7 @@
               <a:t>metrica</a:t>
             </a:r>
             <a:r>
-              <a:rPr sz="2000" i="0" b="0">
+              <a:rPr sz="1900" i="0" b="0">
                 <a:solidFill>
                   <a:srgbClr val="D4D4D4"/>
                 </a:solidFill>
@@ -5800,7 +5800,7 @@
               <a:t>: </a:t>
             </a:r>
             <a:r>
-              <a:rPr sz="2000" i="0" b="0">
+              <a:rPr sz="1900" i="0" b="0">
                 <a:solidFill>
                   <a:srgbClr val="D4D4D4"/>
                 </a:solidFill>
@@ -5812,11 +5812,11 @@
           <a:p>
             <a:pPr>
               <a:spcAft>
-                <a:spcPts val="428"/>
+                <a:spcPts val="407"/>
               </a:spcAft>
             </a:pPr>
             <a:r>
-              <a:rPr sz="2000" i="0" b="0">
+              <a:rPr sz="1900" i="0" b="0">
                 <a:solidFill>
                   <a:srgbClr val="D4D4D4"/>
                 </a:solidFill>
@@ -5825,7 +5825,7 @@
               <a:t>  </a:t>
             </a:r>
             <a:r>
-              <a:rPr sz="2000" i="0" b="0">
+              <a:rPr sz="1900" i="0" b="0">
                 <a:solidFill>
                   <a:srgbClr val="D4D4D4"/>
                 </a:solidFill>
@@ -5834,7 +5834,7 @@
               <a:t>subir_si</a:t>
             </a:r>
             <a:r>
-              <a:rPr sz="2000" i="0" b="0">
+              <a:rPr sz="1900" i="0" b="0">
                 <a:solidFill>
                   <a:srgbClr val="D4D4D4"/>
                 </a:solidFill>
@@ -5843,7 +5843,7 @@
               <a:t>: </a:t>
             </a:r>
             <a:r>
-              <a:rPr sz="2000" i="0" b="0">
+              <a:rPr sz="1900" i="0" b="0">
                 <a:solidFill>
                   <a:srgbClr val="CE9178"/>
                 </a:solidFill>
@@ -5855,11 +5855,11 @@
           <a:p>
             <a:pPr>
               <a:spcAft>
-                <a:spcPts val="428"/>
+                <a:spcPts val="407"/>
               </a:spcAft>
             </a:pPr>
             <a:r>
-              <a:rPr sz="2000" i="0" b="0">
+              <a:rPr sz="1900" i="0" b="0">
                 <a:solidFill>
                   <a:srgbClr val="D4D4D4"/>
                 </a:solidFill>
@@ -5868,7 +5868,7 @@
               <a:t>  </a:t>
             </a:r>
             <a:r>
-              <a:rPr sz="2000" i="0" b="0">
+              <a:rPr sz="1900" i="0" b="0">
                 <a:solidFill>
                   <a:srgbClr val="D4D4D4"/>
                 </a:solidFill>
@@ -5877,7 +5877,7 @@
               <a:t>bajar_si</a:t>
             </a:r>
             <a:r>
-              <a:rPr sz="2000" i="0" b="0">
+              <a:rPr sz="1900" i="0" b="0">
                 <a:solidFill>
                   <a:srgbClr val="D4D4D4"/>
                 </a:solidFill>
@@ -5886,7 +5886,7 @@
               <a:t>: </a:t>
             </a:r>
             <a:r>
-              <a:rPr sz="2000" i="0" b="0">
+              <a:rPr sz="1900" i="0" b="0">
                 <a:solidFill>
                   <a:srgbClr val="CE9178"/>
                 </a:solidFill>
@@ -5895,7 +5895,7 @@
               <a:t>'&lt; 30% durante 10 min'</a:t>
             </a:r>
             <a:r>
-              <a:rPr sz="2000" i="0" b="0">
+              <a:rPr sz="1900" i="0" b="0">
                 <a:solidFill>
                   <a:srgbClr val="D4D4D4"/>
                 </a:solidFill>
@@ -5904,7 +5904,7 @@
               <a:t>  </a:t>
             </a:r>
             <a:r>
-              <a:rPr sz="2000" i="1" b="0">
+              <a:rPr sz="1900" i="1" b="0">
                 <a:solidFill>
                   <a:srgbClr val="6A9955"/>
                 </a:solidFill>
@@ -5916,11 +5916,11 @@
           <a:p>
             <a:pPr>
               <a:spcAft>
-                <a:spcPts val="428"/>
+                <a:spcPts val="407"/>
               </a:spcAft>
             </a:pPr>
             <a:r>
-              <a:rPr sz="2000" i="0" b="0">
+              <a:rPr sz="1900" i="0" b="0">
                 <a:solidFill>
                   <a:srgbClr val="D4D4D4"/>
                 </a:solidFill>
@@ -5929,7 +5929,7 @@
               <a:t>  </a:t>
             </a:r>
             <a:r>
-              <a:rPr sz="2000" i="0" b="0">
+              <a:rPr sz="1900" i="0" b="0">
                 <a:solidFill>
                   <a:srgbClr val="D4D4D4"/>
                 </a:solidFill>
@@ -5938,7 +5938,7 @@
               <a:t>enfriamiento</a:t>
             </a:r>
             <a:r>
-              <a:rPr sz="2000" i="0" b="0">
+              <a:rPr sz="1900" i="0" b="0">
                 <a:solidFill>
                   <a:srgbClr val="D4D4D4"/>
                 </a:solidFill>
@@ -5947,7 +5947,7 @@
               <a:t>: </a:t>
             </a:r>
             <a:r>
-              <a:rPr sz="2000" i="0" b="0">
+              <a:rPr sz="1900" i="0" b="0">
                 <a:solidFill>
                   <a:srgbClr val="B5CEA8"/>
                 </a:solidFill>
@@ -5956,7 +5956,7 @@
               <a:t>5</a:t>
             </a:r>
             <a:r>
-              <a:rPr sz="2000" i="0" b="0">
+              <a:rPr sz="1900" i="0" b="0">
                 <a:solidFill>
                   <a:srgbClr val="D4D4D4"/>
                 </a:solidFill>
@@ -5965,7 +5965,7 @@
               <a:t> </a:t>
             </a:r>
             <a:r>
-              <a:rPr sz="2000" i="0" b="0">
+              <a:rPr sz="1900" i="0" b="0">
                 <a:solidFill>
                   <a:srgbClr val="D4D4D4"/>
                 </a:solidFill>
@@ -5974,7 +5974,7 @@
               <a:t>min</a:t>
             </a:r>
             <a:r>
-              <a:rPr sz="2000" i="0" b="0">
+              <a:rPr sz="1900" i="0" b="0">
                 <a:solidFill>
                   <a:srgbClr val="D4D4D4"/>
                 </a:solidFill>
@@ -5983,7 +5983,7 @@
               <a:t>             </a:t>
             </a:r>
             <a:r>
-              <a:rPr sz="2000" i="1" b="0">
+              <a:rPr sz="1900" i="1" b="0">
                 <a:solidFill>
                   <a:srgbClr val="6A9955"/>
                 </a:solidFill>
@@ -5995,11 +5995,11 @@
           <a:p>
             <a:pPr>
               <a:spcAft>
-                <a:spcPts val="428"/>
+                <a:spcPts val="407"/>
               </a:spcAft>
             </a:pPr>
             <a:r>
-              <a:rPr sz="2000" i="0" b="0">
+              <a:rPr sz="1900" i="0" b="0">
                 <a:solidFill>
                   <a:srgbClr val="D4D4D4"/>
                 </a:solidFill>
@@ -6011,11 +6011,11 @@
           <a:p>
             <a:pPr>
               <a:spcAft>
-                <a:spcPts val="428"/>
+                <a:spcPts val="407"/>
               </a:spcAft>
             </a:pPr>
             <a:r>
-              <a:rPr sz="2000" i="1" b="0">
+              <a:rPr sz="1900" i="1" b="0">
                 <a:solidFill>
                   <a:srgbClr val="6A9955"/>
                 </a:solidFill>
@@ -6027,11 +6027,11 @@
           <a:p>
             <a:pPr>
               <a:spcAft>
-                <a:spcPts val="428"/>
+                <a:spcPts val="407"/>
               </a:spcAft>
             </a:pPr>
             <a:r>
-              <a:rPr sz="2000" i="1" b="0">
+              <a:rPr sz="1900" i="1" b="0">
                 <a:solidFill>
                   <a:srgbClr val="6A9955"/>
                 </a:solidFill>
@@ -6232,7 +6232,7 @@
         <p:spPr>
           <a:xfrm>
             <a:off x="457200" y="1261872"/>
-            <a:ext cx="11277295" cy="4220725"/>
+            <a:ext cx="6991923" cy="5076537"/>
           </a:xfrm>
           <a:prstGeom prst="roundRect">
             <a:avLst>
@@ -6277,7 +6277,7 @@
         <p:spPr>
           <a:xfrm>
             <a:off x="457200" y="1261872"/>
-            <a:ext cx="11277295" cy="365760"/>
+            <a:ext cx="6991923" cy="365760"/>
           </a:xfrm>
           <a:prstGeom prst="rect">
             <a:avLst/>
@@ -6449,7 +6449,7 @@
         <p:spPr>
           <a:xfrm>
             <a:off x="1371600" y="1298448"/>
-            <a:ext cx="10180015" cy="292608"/>
+            <a:ext cx="5894643" cy="292608"/>
           </a:xfrm>
           <a:prstGeom prst="rect">
             <a:avLst/>
@@ -6482,7 +6482,7 @@
         <p:spPr>
           <a:xfrm>
             <a:off x="685800" y="1719072"/>
-            <a:ext cx="502920" cy="3626365"/>
+            <a:ext cx="502920" cy="4482177"/>
           </a:xfrm>
           <a:prstGeom prst="rect">
             <a:avLst/>
@@ -6497,11 +6497,11 @@
           <a:p>
             <a:pPr algn="r">
               <a:spcAft>
-                <a:spcPts val="428"/>
+                <a:spcPts val="300"/>
               </a:spcAft>
             </a:pPr>
             <a:r>
-              <a:rPr sz="2000" i="0" b="0">
+              <a:rPr sz="1400" i="0" b="0">
                 <a:solidFill>
                   <a:srgbClr val="858585"/>
                 </a:solidFill>
@@ -6513,11 +6513,11 @@
           <a:p>
             <a:pPr algn="r">
               <a:spcAft>
-                <a:spcPts val="428"/>
+                <a:spcPts val="300"/>
               </a:spcAft>
             </a:pPr>
             <a:r>
-              <a:rPr sz="2000" i="0" b="0">
+              <a:rPr sz="1400" i="0" b="0">
                 <a:solidFill>
                   <a:srgbClr val="858585"/>
                 </a:solidFill>
@@ -6529,11 +6529,11 @@
           <a:p>
             <a:pPr algn="r">
               <a:spcAft>
-                <a:spcPts val="428"/>
+                <a:spcPts val="300"/>
               </a:spcAft>
             </a:pPr>
             <a:r>
-              <a:rPr sz="2000" i="0" b="0">
+              <a:rPr sz="1400" i="0" b="0">
                 <a:solidFill>
                   <a:srgbClr val="858585"/>
                 </a:solidFill>
@@ -6545,11 +6545,11 @@
           <a:p>
             <a:pPr algn="r">
               <a:spcAft>
-                <a:spcPts val="428"/>
+                <a:spcPts val="300"/>
               </a:spcAft>
             </a:pPr>
             <a:r>
-              <a:rPr sz="2000" i="0" b="0">
+              <a:rPr sz="1400" i="0" b="0">
                 <a:solidFill>
                   <a:srgbClr val="858585"/>
                 </a:solidFill>
@@ -6561,11 +6561,11 @@
           <a:p>
             <a:pPr algn="r">
               <a:spcAft>
-                <a:spcPts val="428"/>
+                <a:spcPts val="300"/>
               </a:spcAft>
             </a:pPr>
             <a:r>
-              <a:rPr sz="2000" i="0" b="0">
+              <a:rPr sz="1400" i="0" b="0">
                 <a:solidFill>
                   <a:srgbClr val="858585"/>
                 </a:solidFill>
@@ -6577,11 +6577,11 @@
           <a:p>
             <a:pPr algn="r">
               <a:spcAft>
-                <a:spcPts val="428"/>
+                <a:spcPts val="300"/>
               </a:spcAft>
             </a:pPr>
             <a:r>
-              <a:rPr sz="2000" i="0" b="0">
+              <a:rPr sz="1400" i="0" b="0">
                 <a:solidFill>
                   <a:srgbClr val="858585"/>
                 </a:solidFill>
@@ -6593,11 +6593,11 @@
           <a:p>
             <a:pPr algn="r">
               <a:spcAft>
-                <a:spcPts val="428"/>
+                <a:spcPts val="300"/>
               </a:spcAft>
             </a:pPr>
             <a:r>
-              <a:rPr sz="2000" i="0" b="0">
+              <a:rPr sz="1400" i="0" b="0">
                 <a:solidFill>
                   <a:srgbClr val="858585"/>
                 </a:solidFill>
@@ -6609,11 +6609,11 @@
           <a:p>
             <a:pPr algn="r">
               <a:spcAft>
-                <a:spcPts val="428"/>
+                <a:spcPts val="300"/>
               </a:spcAft>
             </a:pPr>
             <a:r>
-              <a:rPr sz="2000" i="0" b="0">
+              <a:rPr sz="1400" i="0" b="0">
                 <a:solidFill>
                   <a:srgbClr val="858585"/>
                 </a:solidFill>
@@ -6625,11 +6625,11 @@
           <a:p>
             <a:pPr algn="r">
               <a:spcAft>
-                <a:spcPts val="428"/>
+                <a:spcPts val="300"/>
               </a:spcAft>
             </a:pPr>
             <a:r>
-              <a:rPr sz="2000" i="0" b="0">
+              <a:rPr sz="1400" i="0" b="0">
                 <a:solidFill>
                   <a:srgbClr val="858585"/>
                 </a:solidFill>
@@ -6641,17 +6641,129 @@
           <a:p>
             <a:pPr algn="r">
               <a:spcAft>
-                <a:spcPts val="428"/>
+                <a:spcPts val="300"/>
               </a:spcAft>
             </a:pPr>
             <a:r>
-              <a:rPr sz="2000" i="0" b="0">
+              <a:rPr sz="1400" i="0" b="0">
                 <a:solidFill>
                   <a:srgbClr val="858585"/>
                 </a:solidFill>
                 <a:latin typeface="Consolas"/>
               </a:rPr>
               <a:t>10</a:t>
+            </a:r>
+          </a:p>
+          <a:p>
+            <a:pPr algn="r">
+              <a:spcAft>
+                <a:spcPts val="300"/>
+              </a:spcAft>
+            </a:pPr>
+            <a:r>
+              <a:rPr sz="1400" i="0" b="0">
+                <a:solidFill>
+                  <a:srgbClr val="858585"/>
+                </a:solidFill>
+                <a:latin typeface="Consolas"/>
+              </a:rPr>
+              <a:t>11</a:t>
+            </a:r>
+          </a:p>
+          <a:p>
+            <a:pPr algn="r">
+              <a:spcAft>
+                <a:spcPts val="300"/>
+              </a:spcAft>
+            </a:pPr>
+            <a:r>
+              <a:rPr sz="1400" i="0" b="0">
+                <a:solidFill>
+                  <a:srgbClr val="858585"/>
+                </a:solidFill>
+                <a:latin typeface="Consolas"/>
+              </a:rPr>
+              <a:t>12</a:t>
+            </a:r>
+          </a:p>
+          <a:p>
+            <a:pPr algn="r">
+              <a:spcAft>
+                <a:spcPts val="300"/>
+              </a:spcAft>
+            </a:pPr>
+            <a:r>
+              <a:rPr sz="1400" i="0" b="0">
+                <a:solidFill>
+                  <a:srgbClr val="858585"/>
+                </a:solidFill>
+                <a:latin typeface="Consolas"/>
+              </a:rPr>
+              <a:t>13</a:t>
+            </a:r>
+          </a:p>
+          <a:p>
+            <a:pPr algn="r">
+              <a:spcAft>
+                <a:spcPts val="300"/>
+              </a:spcAft>
+            </a:pPr>
+            <a:r>
+              <a:rPr sz="1400" i="0" b="0">
+                <a:solidFill>
+                  <a:srgbClr val="858585"/>
+                </a:solidFill>
+                <a:latin typeface="Consolas"/>
+              </a:rPr>
+              <a:t>14</a:t>
+            </a:r>
+          </a:p>
+          <a:p>
+            <a:pPr algn="r">
+              <a:spcAft>
+                <a:spcPts val="300"/>
+              </a:spcAft>
+            </a:pPr>
+            <a:r>
+              <a:rPr sz="1400" i="0" b="0">
+                <a:solidFill>
+                  <a:srgbClr val="858585"/>
+                </a:solidFill>
+                <a:latin typeface="Consolas"/>
+              </a:rPr>
+              <a:t>15</a:t>
+            </a:r>
+          </a:p>
+          <a:p>
+            <a:pPr algn="r">
+              <a:spcAft>
+                <a:spcPts val="300"/>
+              </a:spcAft>
+            </a:pPr>
+            <a:r>
+              <a:rPr sz="1400" i="0" b="0">
+                <a:solidFill>
+                  <a:srgbClr val="858585"/>
+                </a:solidFill>
+                <a:latin typeface="Consolas"/>
+              </a:rPr>
+              <a:t>16</a:t>
+            </a:r>
+          </a:p>
+          <a:p>
+            <a:pPr algn="r">
+              <a:spcAft>
+                <a:spcPts val="300"/>
+              </a:spcAft>
+            </a:pPr>
+            <a:r>
+              <a:rPr sz="1400" i="0" b="0">
+                <a:solidFill>
+                  <a:srgbClr val="858585"/>
+                </a:solidFill>
+                <a:latin typeface="Consolas"/>
+              </a:rPr>
+              <a:t>17</a:t>
             </a:r>
           </a:p>
         </p:txBody>
@@ -6665,7 +6777,7 @@
         <p:spPr>
           <a:xfrm>
             <a:off x="1188720" y="1719072"/>
-            <a:ext cx="10271455" cy="3626365"/>
+            <a:ext cx="5986083" cy="4482177"/>
           </a:xfrm>
           <a:prstGeom prst="rect">
             <a:avLst/>
@@ -6680,11 +6792,11 @@
           <a:p>
             <a:pPr>
               <a:spcAft>
-                <a:spcPts val="428"/>
+                <a:spcPts val="300"/>
               </a:spcAft>
             </a:pPr>
             <a:r>
-              <a:rPr sz="2000" i="0" b="0">
+              <a:rPr sz="1400" i="0" b="0">
                 <a:solidFill>
                   <a:srgbClr val="D4D4D4"/>
                 </a:solidFill>
@@ -6693,7 +6805,7 @@
               <a:t>flowchart</a:t>
             </a:r>
             <a:r>
-              <a:rPr sz="2000" i="0" b="0">
+              <a:rPr sz="1400" i="0" b="0">
                 <a:solidFill>
                   <a:srgbClr val="D4D4D4"/>
                 </a:solidFill>
@@ -6702,7 +6814,7 @@
               <a:t> </a:t>
             </a:r>
             <a:r>
-              <a:rPr sz="2000" i="0" b="0">
+              <a:rPr sz="1400" i="0" b="0">
                 <a:solidFill>
                   <a:srgbClr val="D4D4D4"/>
                 </a:solidFill>
@@ -6714,11 +6826,11 @@
           <a:p>
             <a:pPr>
               <a:spcAft>
-                <a:spcPts val="428"/>
+                <a:spcPts val="300"/>
               </a:spcAft>
             </a:pPr>
             <a:r>
-              <a:rPr sz="2000" i="0" b="0">
+              <a:rPr sz="1400" i="0" b="0">
                 <a:solidFill>
                   <a:srgbClr val="D4D4D4"/>
                 </a:solidFill>
@@ -6727,7 +6839,7 @@
               <a:t>  </a:t>
             </a:r>
             <a:r>
-              <a:rPr sz="2000" i="0" b="0">
+              <a:rPr sz="1400" i="0" b="0">
                 <a:solidFill>
                   <a:srgbClr val="D4D4D4"/>
                 </a:solidFill>
@@ -6736,7 +6848,7 @@
               <a:t>obs</a:t>
             </a:r>
             <a:r>
-              <a:rPr sz="2000" i="0" b="0">
+              <a:rPr sz="1400" i="0" b="0">
                 <a:solidFill>
                   <a:srgbClr val="D4D4D4"/>
                 </a:solidFill>
@@ -6745,7 +6857,7 @@
               <a:t>[</a:t>
             </a:r>
             <a:r>
-              <a:rPr sz="2000" i="0" b="0">
+              <a:rPr sz="1400" i="0" b="0">
                 <a:solidFill>
                   <a:srgbClr val="CE9178"/>
                 </a:solidFill>
@@ -6754,59 +6866,23 @@
               <a:t>"Observar CPU cada 60 s"</a:t>
             </a:r>
             <a:r>
-              <a:rPr sz="2000" i="0" b="0">
-                <a:solidFill>
-                  <a:srgbClr val="D4D4D4"/>
-                </a:solidFill>
-                <a:latin typeface="Consolas"/>
-              </a:rPr>
-              <a:t>] --&gt; </a:t>
-            </a:r>
-            <a:r>
-              <a:rPr sz="2000" i="0" b="0">
-                <a:solidFill>
-                  <a:srgbClr val="D4D4D4"/>
-                </a:solidFill>
-                <a:latin typeface="Consolas"/>
-              </a:rPr>
-              <a:t>up</a:t>
-            </a:r>
-            <a:r>
-              <a:rPr sz="2000" i="0" b="0">
-                <a:solidFill>
-                  <a:srgbClr val="D4D4D4"/>
-                </a:solidFill>
-                <a:latin typeface="Consolas"/>
-              </a:rPr>
-              <a:t>{</a:t>
-            </a:r>
-            <a:r>
-              <a:rPr sz="2000" i="0" b="0">
-                <a:solidFill>
-                  <a:srgbClr val="CE9178"/>
-                </a:solidFill>
-                <a:latin typeface="Consolas"/>
-              </a:rPr>
-              <a:t>"CPU sobre 70 por ciento 5 min?"</a:t>
-            </a:r>
-            <a:r>
-              <a:rPr sz="2000" i="0" b="0">
-                <a:solidFill>
-                  <a:srgbClr val="D4D4D4"/>
-                </a:solidFill>
-                <a:latin typeface="Consolas"/>
-              </a:rPr>
-              <a:t>}</a:t>
+              <a:rPr sz="1400" i="0" b="0">
+                <a:solidFill>
+                  <a:srgbClr val="D4D4D4"/>
+                </a:solidFill>
+                <a:latin typeface="Consolas"/>
+              </a:rPr>
+              <a:t>]</a:t>
             </a:r>
           </a:p>
           <a:p>
             <a:pPr>
               <a:spcAft>
-                <a:spcPts val="428"/>
+                <a:spcPts val="300"/>
               </a:spcAft>
             </a:pPr>
             <a:r>
-              <a:rPr sz="2000" i="0" b="0">
+              <a:rPr sz="1400" i="0" b="0">
                 <a:solidFill>
                   <a:srgbClr val="D4D4D4"/>
                 </a:solidFill>
@@ -6815,7 +6891,7 @@
               <a:t>  </a:t>
             </a:r>
             <a:r>
-              <a:rPr sz="2000" i="0" b="0">
+              <a:rPr sz="1400" i="0" b="0">
                 <a:solidFill>
                   <a:srgbClr val="D4D4D4"/>
                 </a:solidFill>
@@ -6824,77 +6900,41 @@
               <a:t>up</a:t>
             </a:r>
             <a:r>
-              <a:rPr sz="2000" i="0" b="0">
-                <a:solidFill>
-                  <a:srgbClr val="D4D4D4"/>
-                </a:solidFill>
-                <a:latin typeface="Consolas"/>
-              </a:rPr>
-              <a:t> --&gt;|</a:t>
-            </a:r>
-            <a:r>
-              <a:rPr sz="2000" i="0" b="0">
+              <a:rPr sz="1400" i="0" b="0">
+                <a:solidFill>
+                  <a:srgbClr val="D4D4D4"/>
+                </a:solidFill>
+                <a:latin typeface="Consolas"/>
+              </a:rPr>
+              <a:t>{</a:t>
+            </a:r>
+            <a:r>
+              <a:rPr sz="1400" i="0" b="0">
                 <a:solidFill>
                   <a:srgbClr val="CE9178"/>
                 </a:solidFill>
                 <a:latin typeface="Consolas"/>
               </a:rPr>
-              <a:t>"Si"</a:t>
-            </a:r>
-            <a:r>
-              <a:rPr sz="2000" i="0" b="0">
-                <a:solidFill>
-                  <a:srgbClr val="D4D4D4"/>
-                </a:solidFill>
-                <a:latin typeface="Consolas"/>
-              </a:rPr>
-              <a:t>| </a:t>
-            </a:r>
-            <a:r>
-              <a:rPr sz="2000" i="0" b="0">
-                <a:solidFill>
-                  <a:srgbClr val="D4D4D4"/>
-                </a:solidFill>
-                <a:latin typeface="Consolas"/>
-              </a:rPr>
-              <a:t>out</a:t>
-            </a:r>
-            <a:r>
-              <a:rPr sz="2000" i="0" b="0">
-                <a:solidFill>
-                  <a:srgbClr val="D4D4D4"/>
-                </a:solidFill>
-                <a:latin typeface="Consolas"/>
-              </a:rPr>
-              <a:t>[</a:t>
-            </a:r>
-            <a:r>
-              <a:rPr sz="2000" i="0" b="0">
-                <a:solidFill>
-                  <a:srgbClr val="CE9178"/>
-                </a:solidFill>
-                <a:latin typeface="Consolas"/>
-              </a:rPr>
-              <a:t>"Scale out: +1, max 6"</a:t>
-            </a:r>
-            <a:r>
-              <a:rPr sz="2000" i="0" b="0">
-                <a:solidFill>
-                  <a:srgbClr val="D4D4D4"/>
-                </a:solidFill>
-                <a:latin typeface="Consolas"/>
-              </a:rPr>
-              <a:t>]</a:t>
+              <a:t>"CPU sobre 70 por ciento 5 min?"</a:t>
+            </a:r>
+            <a:r>
+              <a:rPr sz="1400" i="0" b="0">
+                <a:solidFill>
+                  <a:srgbClr val="D4D4D4"/>
+                </a:solidFill>
+                <a:latin typeface="Consolas"/>
+              </a:rPr>
+              <a:t>}</a:t>
             </a:r>
           </a:p>
           <a:p>
             <a:pPr>
               <a:spcAft>
-                <a:spcPts val="428"/>
+                <a:spcPts val="300"/>
               </a:spcAft>
             </a:pPr>
             <a:r>
-              <a:rPr sz="2000" i="0" b="0">
+              <a:rPr sz="1400" i="0" b="0">
                 <a:solidFill>
                   <a:srgbClr val="D4D4D4"/>
                 </a:solidFill>
@@ -6903,70 +6943,34 @@
               <a:t>  </a:t>
             </a:r>
             <a:r>
-              <a:rPr sz="2000" i="0" b="0">
-                <a:solidFill>
-                  <a:srgbClr val="D4D4D4"/>
-                </a:solidFill>
-                <a:latin typeface="Consolas"/>
-              </a:rPr>
-              <a:t>up</a:t>
-            </a:r>
-            <a:r>
-              <a:rPr sz="2000" i="0" b="0">
-                <a:solidFill>
-                  <a:srgbClr val="D4D4D4"/>
-                </a:solidFill>
-                <a:latin typeface="Consolas"/>
-              </a:rPr>
-              <a:t> --&gt;|</a:t>
-            </a:r>
-            <a:r>
-              <a:rPr sz="2000" i="0" b="0">
+              <a:rPr sz="1400" i="0" b="0">
+                <a:solidFill>
+                  <a:srgbClr val="D4D4D4"/>
+                </a:solidFill>
+                <a:latin typeface="Consolas"/>
+              </a:rPr>
+              <a:t>down</a:t>
+            </a:r>
+            <a:r>
+              <a:rPr sz="1400" i="0" b="0">
+                <a:solidFill>
+                  <a:srgbClr val="D4D4D4"/>
+                </a:solidFill>
+                <a:latin typeface="Consolas"/>
+              </a:rPr>
+              <a:t>{</a:t>
+            </a:r>
+            <a:r>
+              <a:rPr sz="1400" i="0" b="0">
                 <a:solidFill>
                   <a:srgbClr val="CE9178"/>
                 </a:solidFill>
                 <a:latin typeface="Consolas"/>
               </a:rPr>
-              <a:t>"No"</a:t>
-            </a:r>
-            <a:r>
-              <a:rPr sz="2000" i="0" b="0">
-                <a:solidFill>
-                  <a:srgbClr val="D4D4D4"/>
-                </a:solidFill>
-                <a:latin typeface="Consolas"/>
-              </a:rPr>
-              <a:t>| </a:t>
-            </a:r>
-            <a:r>
-              <a:rPr sz="2000" i="0" b="0">
-                <a:solidFill>
-                  <a:srgbClr val="D4D4D4"/>
-                </a:solidFill>
-                <a:latin typeface="Consolas"/>
-              </a:rPr>
-              <a:t>down</a:t>
-            </a:r>
-            <a:r>
-              <a:rPr sz="2000" i="0" b="0">
-                <a:solidFill>
-                  <a:srgbClr val="D4D4D4"/>
-                </a:solidFill>
-                <a:latin typeface="Consolas"/>
-              </a:rPr>
-              <a:t>{</a:t>
-            </a:r>
-            <a:r>
-              <a:rPr sz="2000" i="0" b="0">
-                <a:solidFill>
-                  <a:srgbClr val="CE9178"/>
-                </a:solidFill>
-                <a:latin typeface="Consolas"/>
-              </a:rPr>
               <a:t>"CPU bajo 30 por ciento 10 min?"</a:t>
             </a:r>
             <a:r>
-              <a:rPr sz="2000" i="0" b="0">
+              <a:rPr sz="1400" i="0" b="0">
                 <a:solidFill>
                   <a:srgbClr val="D4D4D4"/>
                 </a:solidFill>
@@ -6978,11 +6982,11 @@
           <a:p>
             <a:pPr>
               <a:spcAft>
-                <a:spcPts val="428"/>
+                <a:spcPts val="300"/>
               </a:spcAft>
             </a:pPr>
             <a:r>
-              <a:rPr sz="2000" i="0" b="0">
+              <a:rPr sz="1400" i="0" b="0">
                 <a:solidFill>
                   <a:srgbClr val="D4D4D4"/>
                 </a:solidFill>
@@ -6991,70 +6995,34 @@
               <a:t>  </a:t>
             </a:r>
             <a:r>
-              <a:rPr sz="2000" i="0" b="0">
-                <a:solidFill>
-                  <a:srgbClr val="D4D4D4"/>
-                </a:solidFill>
-                <a:latin typeface="Consolas"/>
-              </a:rPr>
-              <a:t>down</a:t>
-            </a:r>
-            <a:r>
-              <a:rPr sz="2000" i="0" b="0">
-                <a:solidFill>
-                  <a:srgbClr val="D4D4D4"/>
-                </a:solidFill>
-                <a:latin typeface="Consolas"/>
-              </a:rPr>
-              <a:t> --&gt;|</a:t>
-            </a:r>
-            <a:r>
-              <a:rPr sz="2000" i="0" b="0">
+              <a:rPr sz="1400" i="0" b="0">
+                <a:solidFill>
+                  <a:srgbClr val="D4D4D4"/>
+                </a:solidFill>
+                <a:latin typeface="Consolas"/>
+              </a:rPr>
+              <a:t>out</a:t>
+            </a:r>
+            <a:r>
+              <a:rPr sz="1400" i="0" b="0">
+                <a:solidFill>
+                  <a:srgbClr val="D4D4D4"/>
+                </a:solidFill>
+                <a:latin typeface="Consolas"/>
+              </a:rPr>
+              <a:t>[</a:t>
+            </a:r>
+            <a:r>
+              <a:rPr sz="1400" i="0" b="0">
                 <a:solidFill>
                   <a:srgbClr val="CE9178"/>
                 </a:solidFill>
                 <a:latin typeface="Consolas"/>
               </a:rPr>
-              <a:t>"Si"</a:t>
-            </a:r>
-            <a:r>
-              <a:rPr sz="2000" i="0" b="0">
-                <a:solidFill>
-                  <a:srgbClr val="D4D4D4"/>
-                </a:solidFill>
-                <a:latin typeface="Consolas"/>
-              </a:rPr>
-              <a:t>| </a:t>
-            </a:r>
-            <a:r>
-              <a:rPr sz="2000" i="0" b="0">
-                <a:solidFill>
-                  <a:srgbClr val="D4D4D4"/>
-                </a:solidFill>
-                <a:latin typeface="Consolas"/>
-              </a:rPr>
-              <a:t>inn</a:t>
-            </a:r>
-            <a:r>
-              <a:rPr sz="2000" i="0" b="0">
-                <a:solidFill>
-                  <a:srgbClr val="D4D4D4"/>
-                </a:solidFill>
-                <a:latin typeface="Consolas"/>
-              </a:rPr>
-              <a:t>[</a:t>
-            </a:r>
-            <a:r>
-              <a:rPr sz="2000" i="0" b="0">
-                <a:solidFill>
-                  <a:srgbClr val="CE9178"/>
-                </a:solidFill>
-                <a:latin typeface="Consolas"/>
-              </a:rPr>
-              <a:t>"Scale in: -1, min 2"</a:t>
-            </a:r>
-            <a:r>
-              <a:rPr sz="2000" i="0" b="0">
+              <a:t>"Scale out: +1, max 6"</a:t>
+            </a:r>
+            <a:r>
+              <a:rPr sz="1400" i="0" b="0">
                 <a:solidFill>
                   <a:srgbClr val="D4D4D4"/>
                 </a:solidFill>
@@ -7066,11 +7034,11 @@
           <a:p>
             <a:pPr>
               <a:spcAft>
-                <a:spcPts val="428"/>
+                <a:spcPts val="300"/>
               </a:spcAft>
             </a:pPr>
             <a:r>
-              <a:rPr sz="2000" i="0" b="0">
+              <a:rPr sz="1400" i="0" b="0">
                 <a:solidFill>
                   <a:srgbClr val="D4D4D4"/>
                 </a:solidFill>
@@ -7079,59 +7047,50 @@
               <a:t>  </a:t>
             </a:r>
             <a:r>
-              <a:rPr sz="2000" i="0" b="0">
-                <a:solidFill>
-                  <a:srgbClr val="D4D4D4"/>
-                </a:solidFill>
-                <a:latin typeface="Consolas"/>
-              </a:rPr>
-              <a:t>down</a:t>
-            </a:r>
-            <a:r>
-              <a:rPr sz="2000" i="0" b="0">
-                <a:solidFill>
-                  <a:srgbClr val="D4D4D4"/>
-                </a:solidFill>
-                <a:latin typeface="Consolas"/>
-              </a:rPr>
-              <a:t> --&gt;|</a:t>
-            </a:r>
-            <a:r>
-              <a:rPr sz="2000" i="0" b="0">
+              <a:rPr sz="1400" i="0" b="0">
+                <a:solidFill>
+                  <a:srgbClr val="D4D4D4"/>
+                </a:solidFill>
+                <a:latin typeface="Consolas"/>
+              </a:rPr>
+              <a:t>inn</a:t>
+            </a:r>
+            <a:r>
+              <a:rPr sz="1400" i="0" b="0">
+                <a:solidFill>
+                  <a:srgbClr val="D4D4D4"/>
+                </a:solidFill>
+                <a:latin typeface="Consolas"/>
+              </a:rPr>
+              <a:t>[</a:t>
+            </a:r>
+            <a:r>
+              <a:rPr sz="1400" i="0" b="0">
                 <a:solidFill>
                   <a:srgbClr val="CE9178"/>
                 </a:solidFill>
                 <a:latin typeface="Consolas"/>
               </a:rPr>
-              <a:t>"No"</a:t>
-            </a:r>
-            <a:r>
-              <a:rPr sz="2000" i="0" b="0">
-                <a:solidFill>
-                  <a:srgbClr val="D4D4D4"/>
-                </a:solidFill>
-                <a:latin typeface="Consolas"/>
-              </a:rPr>
-              <a:t>| </a:t>
-            </a:r>
-            <a:r>
-              <a:rPr sz="2000" i="0" b="0">
-                <a:solidFill>
-                  <a:srgbClr val="D4D4D4"/>
-                </a:solidFill>
-                <a:latin typeface="Consolas"/>
-              </a:rPr>
-              <a:t>obs</a:t>
+              <a:t>"Scale in: -1, min 2"</a:t>
+            </a:r>
+            <a:r>
+              <a:rPr sz="1400" i="0" b="0">
+                <a:solidFill>
+                  <a:srgbClr val="D4D4D4"/>
+                </a:solidFill>
+                <a:latin typeface="Consolas"/>
+              </a:rPr>
+              <a:t>]</a:t>
             </a:r>
           </a:p>
           <a:p>
             <a:pPr>
               <a:spcAft>
-                <a:spcPts val="428"/>
+                <a:spcPts val="300"/>
               </a:spcAft>
             </a:pPr>
             <a:r>
-              <a:rPr sz="2000" i="0" b="0">
+              <a:rPr sz="1400" i="0" b="0">
                 <a:solidFill>
                   <a:srgbClr val="D4D4D4"/>
                 </a:solidFill>
@@ -7140,25 +7099,7 @@
               <a:t>  </a:t>
             </a:r>
             <a:r>
-              <a:rPr sz="2000" i="0" b="0">
-                <a:solidFill>
-                  <a:srgbClr val="D4D4D4"/>
-                </a:solidFill>
-                <a:latin typeface="Consolas"/>
-              </a:rPr>
-              <a:t>out</a:t>
-            </a:r>
-            <a:r>
-              <a:rPr sz="2000" i="0" b="0">
-                <a:solidFill>
-                  <a:srgbClr val="D4D4D4"/>
-                </a:solidFill>
-                <a:latin typeface="Consolas"/>
-              </a:rPr>
-              <a:t> --&gt; </a:t>
-            </a:r>
-            <a:r>
-              <a:rPr sz="2000" i="0" b="0">
+              <a:rPr sz="1400" i="0" b="0">
                 <a:solidFill>
                   <a:srgbClr val="D4D4D4"/>
                 </a:solidFill>
@@ -7167,7 +7108,7 @@
               <a:t>cool</a:t>
             </a:r>
             <a:r>
-              <a:rPr sz="2000" i="0" b="0">
+              <a:rPr sz="1400" i="0" b="0">
                 <a:solidFill>
                   <a:srgbClr val="D4D4D4"/>
                 </a:solidFill>
@@ -7176,7 +7117,7 @@
               <a:t>[</a:t>
             </a:r>
             <a:r>
-              <a:rPr sz="2000" i="0" b="0">
+              <a:rPr sz="1400" i="0" b="0">
                 <a:solidFill>
                   <a:srgbClr val="CE9178"/>
                 </a:solidFill>
@@ -7185,7 +7126,7 @@
               <a:t>"Enfriamiento 5 min"</a:t>
             </a:r>
             <a:r>
-              <a:rPr sz="2000" i="0" b="0">
+              <a:rPr sz="1400" i="0" b="0">
                 <a:solidFill>
                   <a:srgbClr val="D4D4D4"/>
                 </a:solidFill>
@@ -7197,11 +7138,11 @@
           <a:p>
             <a:pPr>
               <a:spcAft>
-                <a:spcPts val="428"/>
+                <a:spcPts val="300"/>
               </a:spcAft>
             </a:pPr>
             <a:r>
-              <a:rPr sz="2000" i="0" b="0">
+              <a:rPr sz="1400" i="0" b="0">
                 <a:solidFill>
                   <a:srgbClr val="D4D4D4"/>
                 </a:solidFill>
@@ -7210,41 +7151,50 @@
               <a:t>  </a:t>
             </a:r>
             <a:r>
-              <a:rPr sz="2000" i="0" b="0">
-                <a:solidFill>
-                  <a:srgbClr val="D4D4D4"/>
-                </a:solidFill>
-                <a:latin typeface="Consolas"/>
-              </a:rPr>
-              <a:t>inn</a:t>
-            </a:r>
-            <a:r>
-              <a:rPr sz="2000" i="0" b="0">
-                <a:solidFill>
-                  <a:srgbClr val="D4D4D4"/>
-                </a:solidFill>
-                <a:latin typeface="Consolas"/>
-              </a:rPr>
-              <a:t> --&gt; </a:t>
-            </a:r>
-            <a:r>
-              <a:rPr sz="2000" i="0" b="0">
-                <a:solidFill>
-                  <a:srgbClr val="D4D4D4"/>
-                </a:solidFill>
-                <a:latin typeface="Consolas"/>
-              </a:rPr>
-              <a:t>cool</a:t>
+              <a:rPr sz="1400" i="0" b="0">
+                <a:solidFill>
+                  <a:srgbClr val="D4D4D4"/>
+                </a:solidFill>
+                <a:latin typeface="Consolas"/>
+              </a:rPr>
+              <a:t>bd</a:t>
+            </a:r>
+            <a:r>
+              <a:rPr sz="1400" i="0" b="0">
+                <a:solidFill>
+                  <a:srgbClr val="D4D4D4"/>
+                </a:solidFill>
+                <a:latin typeface="Consolas"/>
+              </a:rPr>
+              <a:t>[</a:t>
+            </a:r>
+            <a:r>
+              <a:rPr sz="1400" i="0" b="0">
+                <a:solidFill>
+                  <a:srgbClr val="CE9178"/>
+                </a:solidFill>
+                <a:latin typeface="Consolas"/>
+              </a:rPr>
+              <a:t>"No escala: base primaria"</a:t>
+            </a:r>
+            <a:r>
+              <a:rPr sz="1400" i="0" b="0">
+                <a:solidFill>
+                  <a:srgbClr val="D4D4D4"/>
+                </a:solidFill>
+                <a:latin typeface="Consolas"/>
+              </a:rPr>
+              <a:t>]</a:t>
             </a:r>
           </a:p>
           <a:p>
             <a:pPr>
               <a:spcAft>
-                <a:spcPts val="428"/>
+                <a:spcPts val="300"/>
               </a:spcAft>
             </a:pPr>
             <a:r>
-              <a:rPr sz="2000" i="0" b="0">
+              <a:rPr sz="1400" i="0" b="0">
                 <a:solidFill>
                   <a:srgbClr val="D4D4D4"/>
                 </a:solidFill>
@@ -7253,16 +7203,16 @@
               <a:t>  </a:t>
             </a:r>
             <a:r>
-              <a:rPr sz="2000" i="0" b="0">
-                <a:solidFill>
-                  <a:srgbClr val="D4D4D4"/>
-                </a:solidFill>
-                <a:latin typeface="Consolas"/>
-              </a:rPr>
-              <a:t>cool</a:t>
-            </a:r>
-            <a:r>
-              <a:rPr sz="2000" i="0" b="0">
+              <a:rPr sz="1400" i="0" b="0">
+                <a:solidFill>
+                  <a:srgbClr val="D4D4D4"/>
+                </a:solidFill>
+                <a:latin typeface="Consolas"/>
+              </a:rPr>
+              <a:t>obs</a:t>
+            </a:r>
+            <a:r>
+              <a:rPr sz="1400" i="0" b="0">
                 <a:solidFill>
                   <a:srgbClr val="D4D4D4"/>
                 </a:solidFill>
@@ -7271,23 +7221,23 @@
               <a:t> --&gt; </a:t>
             </a:r>
             <a:r>
-              <a:rPr sz="2000" i="0" b="0">
-                <a:solidFill>
-                  <a:srgbClr val="D4D4D4"/>
-                </a:solidFill>
-                <a:latin typeface="Consolas"/>
-              </a:rPr>
-              <a:t>obs</a:t>
+              <a:rPr sz="1400" i="0" b="0">
+                <a:solidFill>
+                  <a:srgbClr val="D4D4D4"/>
+                </a:solidFill>
+                <a:latin typeface="Consolas"/>
+              </a:rPr>
+              <a:t>up</a:t>
             </a:r>
           </a:p>
           <a:p>
             <a:pPr>
               <a:spcAft>
-                <a:spcPts val="428"/>
+                <a:spcPts val="300"/>
               </a:spcAft>
             </a:pPr>
             <a:r>
-              <a:rPr sz="2000" i="0" b="0">
+              <a:rPr sz="1400" i="0" b="0">
                 <a:solidFill>
                   <a:srgbClr val="D4D4D4"/>
                 </a:solidFill>
@@ -7296,7 +7246,380 @@
               <a:t>  </a:t>
             </a:r>
             <a:r>
-              <a:rPr sz="2000" i="0" b="0">
+              <a:rPr sz="1400" i="0" b="0">
+                <a:solidFill>
+                  <a:srgbClr val="D4D4D4"/>
+                </a:solidFill>
+                <a:latin typeface="Consolas"/>
+              </a:rPr>
+              <a:t>up</a:t>
+            </a:r>
+            <a:r>
+              <a:rPr sz="1400" i="0" b="0">
+                <a:solidFill>
+                  <a:srgbClr val="D4D4D4"/>
+                </a:solidFill>
+                <a:latin typeface="Consolas"/>
+              </a:rPr>
+              <a:t> --&gt;|</a:t>
+            </a:r>
+            <a:r>
+              <a:rPr sz="1400" i="0" b="0">
+                <a:solidFill>
+                  <a:srgbClr val="CE9178"/>
+                </a:solidFill>
+                <a:latin typeface="Consolas"/>
+              </a:rPr>
+              <a:t>"Si"</a:t>
+            </a:r>
+            <a:r>
+              <a:rPr sz="1400" i="0" b="0">
+                <a:solidFill>
+                  <a:srgbClr val="D4D4D4"/>
+                </a:solidFill>
+                <a:latin typeface="Consolas"/>
+              </a:rPr>
+              <a:t>| </a:t>
+            </a:r>
+            <a:r>
+              <a:rPr sz="1400" i="0" b="0">
+                <a:solidFill>
+                  <a:srgbClr val="D4D4D4"/>
+                </a:solidFill>
+                <a:latin typeface="Consolas"/>
+              </a:rPr>
+              <a:t>out</a:t>
+            </a:r>
+          </a:p>
+          <a:p>
+            <a:pPr>
+              <a:spcAft>
+                <a:spcPts val="300"/>
+              </a:spcAft>
+            </a:pPr>
+            <a:r>
+              <a:rPr sz="1400" i="0" b="0">
+                <a:solidFill>
+                  <a:srgbClr val="D4D4D4"/>
+                </a:solidFill>
+                <a:latin typeface="Consolas"/>
+              </a:rPr>
+              <a:t>  </a:t>
+            </a:r>
+            <a:r>
+              <a:rPr sz="1400" i="0" b="0">
+                <a:solidFill>
+                  <a:srgbClr val="D4D4D4"/>
+                </a:solidFill>
+                <a:latin typeface="Consolas"/>
+              </a:rPr>
+              <a:t>up</a:t>
+            </a:r>
+            <a:r>
+              <a:rPr sz="1400" i="0" b="0">
+                <a:solidFill>
+                  <a:srgbClr val="D4D4D4"/>
+                </a:solidFill>
+                <a:latin typeface="Consolas"/>
+              </a:rPr>
+              <a:t> --&gt;|</a:t>
+            </a:r>
+            <a:r>
+              <a:rPr sz="1400" i="0" b="0">
+                <a:solidFill>
+                  <a:srgbClr val="CE9178"/>
+                </a:solidFill>
+                <a:latin typeface="Consolas"/>
+              </a:rPr>
+              <a:t>"No"</a:t>
+            </a:r>
+            <a:r>
+              <a:rPr sz="1400" i="0" b="0">
+                <a:solidFill>
+                  <a:srgbClr val="D4D4D4"/>
+                </a:solidFill>
+                <a:latin typeface="Consolas"/>
+              </a:rPr>
+              <a:t>| </a:t>
+            </a:r>
+            <a:r>
+              <a:rPr sz="1400" i="0" b="0">
+                <a:solidFill>
+                  <a:srgbClr val="D4D4D4"/>
+                </a:solidFill>
+                <a:latin typeface="Consolas"/>
+              </a:rPr>
+              <a:t>down</a:t>
+            </a:r>
+          </a:p>
+          <a:p>
+            <a:pPr>
+              <a:spcAft>
+                <a:spcPts val="300"/>
+              </a:spcAft>
+            </a:pPr>
+            <a:r>
+              <a:rPr sz="1400" i="0" b="0">
+                <a:solidFill>
+                  <a:srgbClr val="D4D4D4"/>
+                </a:solidFill>
+                <a:latin typeface="Consolas"/>
+              </a:rPr>
+              <a:t>  </a:t>
+            </a:r>
+            <a:r>
+              <a:rPr sz="1400" i="0" b="0">
+                <a:solidFill>
+                  <a:srgbClr val="D4D4D4"/>
+                </a:solidFill>
+                <a:latin typeface="Consolas"/>
+              </a:rPr>
+              <a:t>down</a:t>
+            </a:r>
+            <a:r>
+              <a:rPr sz="1400" i="0" b="0">
+                <a:solidFill>
+                  <a:srgbClr val="D4D4D4"/>
+                </a:solidFill>
+                <a:latin typeface="Consolas"/>
+              </a:rPr>
+              <a:t> --&gt;|</a:t>
+            </a:r>
+            <a:r>
+              <a:rPr sz="1400" i="0" b="0">
+                <a:solidFill>
+                  <a:srgbClr val="CE9178"/>
+                </a:solidFill>
+                <a:latin typeface="Consolas"/>
+              </a:rPr>
+              <a:t>"Si"</a:t>
+            </a:r>
+            <a:r>
+              <a:rPr sz="1400" i="0" b="0">
+                <a:solidFill>
+                  <a:srgbClr val="D4D4D4"/>
+                </a:solidFill>
+                <a:latin typeface="Consolas"/>
+              </a:rPr>
+              <a:t>| </a:t>
+            </a:r>
+            <a:r>
+              <a:rPr sz="1400" i="0" b="0">
+                <a:solidFill>
+                  <a:srgbClr val="D4D4D4"/>
+                </a:solidFill>
+                <a:latin typeface="Consolas"/>
+              </a:rPr>
+              <a:t>inn</a:t>
+            </a:r>
+          </a:p>
+          <a:p>
+            <a:pPr>
+              <a:spcAft>
+                <a:spcPts val="300"/>
+              </a:spcAft>
+            </a:pPr>
+            <a:r>
+              <a:rPr sz="1400" i="0" b="0">
+                <a:solidFill>
+                  <a:srgbClr val="D4D4D4"/>
+                </a:solidFill>
+                <a:latin typeface="Consolas"/>
+              </a:rPr>
+              <a:t>  </a:t>
+            </a:r>
+            <a:r>
+              <a:rPr sz="1400" i="0" b="0">
+                <a:solidFill>
+                  <a:srgbClr val="D4D4D4"/>
+                </a:solidFill>
+                <a:latin typeface="Consolas"/>
+              </a:rPr>
+              <a:t>down</a:t>
+            </a:r>
+            <a:r>
+              <a:rPr sz="1400" i="0" b="0">
+                <a:solidFill>
+                  <a:srgbClr val="D4D4D4"/>
+                </a:solidFill>
+                <a:latin typeface="Consolas"/>
+              </a:rPr>
+              <a:t> --&gt;|</a:t>
+            </a:r>
+            <a:r>
+              <a:rPr sz="1400" i="0" b="0">
+                <a:solidFill>
+                  <a:srgbClr val="CE9178"/>
+                </a:solidFill>
+                <a:latin typeface="Consolas"/>
+              </a:rPr>
+              <a:t>"No"</a:t>
+            </a:r>
+            <a:r>
+              <a:rPr sz="1400" i="0" b="0">
+                <a:solidFill>
+                  <a:srgbClr val="D4D4D4"/>
+                </a:solidFill>
+                <a:latin typeface="Consolas"/>
+              </a:rPr>
+              <a:t>| </a:t>
+            </a:r>
+            <a:r>
+              <a:rPr sz="1400" i="0" b="0">
+                <a:solidFill>
+                  <a:srgbClr val="D4D4D4"/>
+                </a:solidFill>
+                <a:latin typeface="Consolas"/>
+              </a:rPr>
+              <a:t>obs</a:t>
+            </a:r>
+          </a:p>
+          <a:p>
+            <a:pPr>
+              <a:spcAft>
+                <a:spcPts val="300"/>
+              </a:spcAft>
+            </a:pPr>
+            <a:r>
+              <a:rPr sz="1400" i="0" b="0">
+                <a:solidFill>
+                  <a:srgbClr val="D4D4D4"/>
+                </a:solidFill>
+                <a:latin typeface="Consolas"/>
+              </a:rPr>
+              <a:t>  </a:t>
+            </a:r>
+            <a:r>
+              <a:rPr sz="1400" i="0" b="0">
+                <a:solidFill>
+                  <a:srgbClr val="D4D4D4"/>
+                </a:solidFill>
+                <a:latin typeface="Consolas"/>
+              </a:rPr>
+              <a:t>out</a:t>
+            </a:r>
+            <a:r>
+              <a:rPr sz="1400" i="0" b="0">
+                <a:solidFill>
+                  <a:srgbClr val="D4D4D4"/>
+                </a:solidFill>
+                <a:latin typeface="Consolas"/>
+              </a:rPr>
+              <a:t> --&gt; </a:t>
+            </a:r>
+            <a:r>
+              <a:rPr sz="1400" i="0" b="0">
+                <a:solidFill>
+                  <a:srgbClr val="D4D4D4"/>
+                </a:solidFill>
+                <a:latin typeface="Consolas"/>
+              </a:rPr>
+              <a:t>cool</a:t>
+            </a:r>
+          </a:p>
+          <a:p>
+            <a:pPr>
+              <a:spcAft>
+                <a:spcPts val="300"/>
+              </a:spcAft>
+            </a:pPr>
+            <a:r>
+              <a:rPr sz="1400" i="0" b="0">
+                <a:solidFill>
+                  <a:srgbClr val="D4D4D4"/>
+                </a:solidFill>
+                <a:latin typeface="Consolas"/>
+              </a:rPr>
+              <a:t>  </a:t>
+            </a:r>
+            <a:r>
+              <a:rPr sz="1400" i="0" b="0">
+                <a:solidFill>
+                  <a:srgbClr val="D4D4D4"/>
+                </a:solidFill>
+                <a:latin typeface="Consolas"/>
+              </a:rPr>
+              <a:t>inn</a:t>
+            </a:r>
+            <a:r>
+              <a:rPr sz="1400" i="0" b="0">
+                <a:solidFill>
+                  <a:srgbClr val="D4D4D4"/>
+                </a:solidFill>
+                <a:latin typeface="Consolas"/>
+              </a:rPr>
+              <a:t> --&gt; </a:t>
+            </a:r>
+            <a:r>
+              <a:rPr sz="1400" i="0" b="0">
+                <a:solidFill>
+                  <a:srgbClr val="D4D4D4"/>
+                </a:solidFill>
+                <a:latin typeface="Consolas"/>
+              </a:rPr>
+              <a:t>cool</a:t>
+            </a:r>
+          </a:p>
+          <a:p>
+            <a:pPr>
+              <a:spcAft>
+                <a:spcPts val="300"/>
+              </a:spcAft>
+            </a:pPr>
+            <a:r>
+              <a:rPr sz="1400" i="0" b="0">
+                <a:solidFill>
+                  <a:srgbClr val="D4D4D4"/>
+                </a:solidFill>
+                <a:latin typeface="Consolas"/>
+              </a:rPr>
+              <a:t>  </a:t>
+            </a:r>
+            <a:r>
+              <a:rPr sz="1400" i="0" b="0">
+                <a:solidFill>
+                  <a:srgbClr val="D4D4D4"/>
+                </a:solidFill>
+                <a:latin typeface="Consolas"/>
+              </a:rPr>
+              <a:t>cool</a:t>
+            </a:r>
+            <a:r>
+              <a:rPr sz="1400" i="0" b="0">
+                <a:solidFill>
+                  <a:srgbClr val="D4D4D4"/>
+                </a:solidFill>
+                <a:latin typeface="Consolas"/>
+              </a:rPr>
+              <a:t> --&gt; </a:t>
+            </a:r>
+            <a:r>
+              <a:rPr sz="1400" i="0" b="0">
+                <a:solidFill>
+                  <a:srgbClr val="D4D4D4"/>
+                </a:solidFill>
+                <a:latin typeface="Consolas"/>
+              </a:rPr>
+              <a:t>obs</a:t>
+            </a:r>
+          </a:p>
+          <a:p>
+            <a:pPr>
+              <a:spcAft>
+                <a:spcPts val="300"/>
+              </a:spcAft>
+            </a:pPr>
+            <a:r>
+              <a:rPr sz="1400" i="0" b="0">
+                <a:solidFill>
+                  <a:srgbClr val="D4D4D4"/>
+                </a:solidFill>
+                <a:latin typeface="Consolas"/>
+              </a:rPr>
+              <a:t>  </a:t>
+            </a:r>
+            <a:r>
+              <a:rPr sz="1400" i="0" b="0">
                 <a:solidFill>
                   <a:srgbClr val="D4D4D4"/>
                 </a:solidFill>
@@ -7305,43 +7628,25 @@
               <a:t>bd</a:t>
             </a:r>
             <a:r>
-              <a:rPr sz="2000" i="0" b="0">
-                <a:solidFill>
-                  <a:srgbClr val="D4D4D4"/>
-                </a:solidFill>
-                <a:latin typeface="Consolas"/>
-              </a:rPr>
-              <a:t>[</a:t>
-            </a:r>
-            <a:r>
-              <a:rPr sz="2000" i="0" b="0">
+              <a:rPr sz="1400" i="0" b="0">
+                <a:solidFill>
+                  <a:srgbClr val="D4D4D4"/>
+                </a:solidFill>
+                <a:latin typeface="Consolas"/>
+              </a:rPr>
+              <a:t> -.-&gt;|</a:t>
+            </a:r>
+            <a:r>
+              <a:rPr sz="1400" i="0" b="0">
                 <a:solidFill>
                   <a:srgbClr val="CE9178"/>
                 </a:solidFill>
                 <a:latin typeface="Consolas"/>
               </a:rPr>
-              <a:t>"No escala: base primaria"</a:t>
-            </a:r>
-            <a:r>
-              <a:rPr sz="2000" i="0" b="0">
-                <a:solidFill>
-                  <a:srgbClr val="D4D4D4"/>
-                </a:solidFill>
-                <a:latin typeface="Consolas"/>
-              </a:rPr>
-              <a:t>] -.-&gt;|</a:t>
-            </a:r>
-            <a:r>
-              <a:rPr sz="2000" i="0" b="0">
-                <a:solidFill>
-                  <a:srgbClr val="CE9178"/>
-                </a:solidFill>
-                <a:latin typeface="Consolas"/>
-              </a:rPr>
               <a:t>"limite del diseno"</a:t>
             </a:r>
             <a:r>
-              <a:rPr sz="2000" i="0" b="0">
+              <a:rPr sz="1400" i="0" b="0">
                 <a:solidFill>
                   <a:srgbClr val="D4D4D4"/>
                 </a:solidFill>
@@ -7350,7 +7655,7 @@
               <a:t>| </a:t>
             </a:r>
             <a:r>
-              <a:rPr sz="2000" i="0" b="0">
+              <a:rPr sz="1400" i="0" b="0">
                 <a:solidFill>
                   <a:srgbClr val="D4D4D4"/>
                 </a:solidFill>
@@ -7363,7 +7668,111 @@
       </p:sp>
       <p:sp>
         <p:nvSpPr>
-          <p:cNvPr id="13" name="TextBox 12"/>
+          <p:cNvPr id="13" name="Rounded Rectangle 12"/>
+          <p:cNvSpPr/>
+          <p:nvPr/>
+        </p:nvSpPr>
+        <p:spPr>
+          <a:xfrm>
+            <a:off x="7668579" y="1261872"/>
+            <a:ext cx="4120780" cy="3318569"/>
+          </a:xfrm>
+          <a:prstGeom prst="roundRect">
+            <a:avLst>
+              <a:gd name="adj" fmla="val 4000"/>
+            </a:avLst>
+          </a:prstGeom>
+          <a:solidFill>
+            <a:srgbClr val="E8EEF4"/>
+          </a:solidFill>
+          <a:ln>
+            <a:noFill/>
+          </a:ln>
+        </p:spPr>
+        <p:style>
+          <a:lnRef idx="1">
+            <a:schemeClr val="accent1"/>
+          </a:lnRef>
+          <a:fillRef idx="3">
+            <a:schemeClr val="accent1"/>
+          </a:fillRef>
+          <a:effectRef idx="2">
+            <a:schemeClr val="accent1"/>
+          </a:effectRef>
+          <a:fontRef idx="minor">
+            <a:schemeClr val="lt1"/>
+          </a:fontRef>
+        </p:style>
+        <p:txBody>
+          <a:bodyPr rtlCol="0" anchor="ctr"/>
+          <a:lstStyle/>
+          <a:p>
+            <a:pPr algn="ctr"/>
+          </a:p>
+        </p:txBody>
+      </p:sp>
+      <p:pic>
+        <p:nvPicPr>
+          <p:cNvPr id="14" name="Picture 13" descr="dg-autoescalado-paso1.png"/>
+          <p:cNvPicPr>
+            <a:picLocks noChangeAspect="1"/>
+          </p:cNvPicPr>
+          <p:nvPr/>
+        </p:nvPicPr>
+        <p:blipFill>
+          <a:blip r:embed="rId2"/>
+          <a:stretch>
+            <a:fillRect/>
+          </a:stretch>
+        </p:blipFill>
+        <p:spPr>
+          <a:xfrm>
+            <a:off x="7723443" y="1316736"/>
+            <a:ext cx="4011052" cy="3208841"/>
+          </a:xfrm>
+          <a:prstGeom prst="rect">
+            <a:avLst/>
+          </a:prstGeom>
+        </p:spPr>
+      </p:pic>
+      <p:sp>
+        <p:nvSpPr>
+          <p:cNvPr id="15" name="TextBox 14"/>
+          <p:cNvSpPr txBox="1"/>
+          <p:nvPr/>
+        </p:nvSpPr>
+        <p:spPr>
+          <a:xfrm>
+            <a:off x="7723443" y="4580441"/>
+            <a:ext cx="4011052" cy="320040"/>
+          </a:xfrm>
+          <a:prstGeom prst="rect">
+            <a:avLst/>
+          </a:prstGeom>
+          <a:noFill/>
+        </p:spPr>
+        <p:txBody>
+          <a:bodyPr wrap="square">
+            <a:spAutoFit/>
+          </a:bodyPr>
+          <a:lstStyle/>
+          <a:p>
+            <a:pPr algn="ctr"/>
+            <a:r>
+              <a:rPr sz="1200" b="0" i="1">
+                <a:solidFill>
+                  <a:srgbClr val="666666"/>
+                </a:solidFill>
+                <a:latin typeface="Calibri"/>
+              </a:rPr>
+              <a:t>Lo que dibuja este código</a:t>
+            </a:r>
+          </a:p>
+        </p:txBody>
+      </p:sp>
+      <p:sp>
+        <p:nvSpPr>
+          <p:cNvPr id="16" name="TextBox 15"/>
           <p:cNvSpPr txBox="1"/>
           <p:nvPr/>
         </p:nvSpPr>

--- a/Arquitectura de Sistemas Computacionales/Clases/Clase 13 - Escalabilidad automatica/Presentacion.pptx
+++ b/Arquitectura de Sistemas Computacionales/Clases/Clase 13 - Escalabilidad automatica/Presentacion.pptx
@@ -1180,7 +1180,7 @@
           <a:p/>
           <a:p>
             <a:r>
-              <a:t>(No se proyecta) Sume el periodo de evaluacion y el sistema reacciona entre 5 y 10 minutos despues de que empezo el problema, asi que un pico subito del tipo que la prueba de spike de la Clase 12 simula ocurre y termina antes de que llegue la ayuda.</a:t>
+              <a:t>(No se proyecta) Sume el periodo de evaluacion y el sistema reacciona entre 5 y 10 minutos despues de que empezo el problema, asi que un pico repentino del tipo que la prueba de spike de la Clase 12 simula ocurre y termina antes de que llegue la ayuda.</a:t>
             </a:r>
           </a:p>
           <a:p/>
